--- a/docs/manual-organizer.pptx
+++ b/docs/manual-organizer.pptx
@@ -2630,7 +2630,7 @@
                 <a:ea typeface="Calibri" pitchFamily="34" charset="-122"/>
                 <a:cs typeface="Calibri" pitchFamily="34" charset="-120"/>
               </a:rPr>
-              <a:t>A4縦で印刷できます。スクリーンショットの枠は、実際の画面を撮って貼り替えてください。</a:t>
+              <a:t>A4縦で印刷できます。画面例はテスト環境のもので、実際の表示とは名称や件数が異なる場合があります。</a:t>
             </a:r>
             <a:endParaRPr lang="en-US" sz="950" dirty="0"/>
           </a:p>
@@ -3284,43 +3284,40 @@
           </a:p>
         </p:txBody>
       </p:sp>
-      <p:sp>
-        <p:nvSpPr>
-          <p:cNvPr id="17" name="Shape 15"/>
-          <p:cNvSpPr/>
-          <p:nvPr/>
-        </p:nvSpPr>
-        <p:spPr>
-          <a:xfrm>
-            <a:off x="566928" y="3844544"/>
-            <a:ext cx="6428232" cy="2606040"/>
-          </a:xfrm>
-          <a:prstGeom prst="roundRect">
-            <a:avLst>
-              <a:gd name="adj" fmla="val 1754"/>
-            </a:avLst>
-          </a:prstGeom>
-          <a:solidFill>
-            <a:srgbClr val="F7F7F7"/>
-          </a:solidFill>
-          <a:ln w="12700">
-            <a:solidFill>
-              <a:srgbClr val="D8D8D8"/>
-            </a:solidFill>
-            <a:prstDash val="dash"/>
-          </a:ln>
-        </p:spPr>
-      </p:sp>
-      <p:sp>
-        <p:nvSpPr>
-          <p:cNvPr id="18" name="Text 16"/>
-          <p:cNvSpPr txBox="1"/>
-          <p:nvPr/>
-        </p:nvSpPr>
-        <p:spPr>
-          <a:xfrm>
-            <a:off x="749808" y="4228592"/>
-            <a:ext cx="6062472" cy="274320"/>
+      <p:pic>
+        <p:nvPicPr>
+          <p:cNvPr id="17" name="Image 0" descr="C:\Users\sato\Desktop\enque\docs\images\o-wallpapers.png">    </p:cNvPr>
+          <p:cNvPicPr>
+            <a:picLocks noChangeAspect="1"/>
+          </p:cNvPicPr>
+          <p:nvPr/>
+        </p:nvPicPr>
+        <p:blipFill>
+          <a:blip r:embed="rId1"/>
+          <a:stretch>
+            <a:fillRect/>
+          </a:stretch>
+        </p:blipFill>
+        <p:spPr>
+          <a:xfrm>
+            <a:off x="1151646" y="3844544"/>
+            <a:ext cx="5258795" cy="3474720"/>
+          </a:xfrm>
+          <a:prstGeom prst="rect">
+            <a:avLst/>
+          </a:prstGeom>
+        </p:spPr>
+      </p:pic>
+      <p:sp>
+        <p:nvSpPr>
+          <p:cNvPr id="18" name="Text 15"/>
+          <p:cNvSpPr txBox="1"/>
+          <p:nvPr/>
+        </p:nvSpPr>
+        <p:spPr>
+          <a:xfrm>
+            <a:off x="566928" y="7374128"/>
+            <a:ext cx="6428232" cy="274320"/>
           </a:xfrm>
           <a:prstGeom prst="rect">
             <a:avLst/>
@@ -3336,7 +3333,7 @@
               <a:buNone/>
             </a:pPr>
             <a:r>
-              <a:rPr lang="en-US" sz="1100" b="1" dirty="0">
+              <a:rPr lang="en-US" sz="950" dirty="0">
                 <a:solidFill>
                   <a:srgbClr val="6B6B6B"/>
                 </a:solidFill>
@@ -3344,57 +3341,15 @@
                 <a:ea typeface="Calibri" pitchFamily="34" charset="-122"/>
                 <a:cs typeface="Calibri" pitchFamily="34" charset="-120"/>
               </a:rPr>
-              <a:t>［ スクリーンショット ］ ここに貼り付けてください</a:t>
-            </a:r>
-            <a:endParaRPr lang="en-US" sz="1100" dirty="0"/>
-          </a:p>
-        </p:txBody>
-      </p:sp>
-      <p:sp>
-        <p:nvSpPr>
-          <p:cNvPr id="19" name="Text 17"/>
-          <p:cNvSpPr txBox="1"/>
-          <p:nvPr/>
-        </p:nvSpPr>
-        <p:spPr>
-          <a:xfrm>
-            <a:off x="841248" y="4594352"/>
-            <a:ext cx="5879592" cy="731520"/>
-          </a:xfrm>
-          <a:prstGeom prst="rect">
-            <a:avLst/>
-          </a:prstGeom>
-          <a:noFill/>
-          <a:ln/>
-        </p:spPr>
-        <p:txBody>
-          <a:bodyPr wrap="square" lIns="0" tIns="0" rIns="0" bIns="0" rtlCol="0" anchor="t"/>
-          <a:lstStyle/>
-          <a:p>
-            <a:pPr algn="ctr" indent="0" marL="0">
-              <a:lnSpc>
-                <a:spcPct val="120000"/>
-              </a:lnSpc>
-              <a:buNone/>
-            </a:pPr>
-            <a:r>
-              <a:rPr lang="en-US" sz="1050" dirty="0">
-                <a:solidFill>
-                  <a:srgbClr val="222222"/>
-                </a:solidFill>
-                <a:latin typeface="Calibri" pitchFamily="34" charset="0"/>
-                <a:ea typeface="Calibri" pitchFamily="34" charset="-122"/>
-                <a:cs typeface="Calibri" pitchFamily="34" charset="-120"/>
-              </a:rPr>
               <a:t>「スマホ壁紙の登録」画面。登録済みの壁紙が並んでいるところ。</a:t>
             </a:r>
-            <a:endParaRPr lang="en-US" sz="1050" dirty="0"/>
-          </a:p>
-        </p:txBody>
-      </p:sp>
-      <p:sp>
-        <p:nvSpPr>
-          <p:cNvPr id="20" name="Text 18"/>
+            <a:endParaRPr lang="en-US" sz="950" dirty="0"/>
+          </a:p>
+        </p:txBody>
+      </p:sp>
+      <p:sp>
+        <p:nvSpPr>
+          <p:cNvPr id="19" name="Text 16"/>
           <p:cNvSpPr txBox="1"/>
           <p:nvPr/>
         </p:nvSpPr>
@@ -4404,43 +4359,40 @@
           </a:p>
         </p:txBody>
       </p:sp>
-      <p:sp>
-        <p:nvSpPr>
-          <p:cNvPr id="27" name="Shape 25"/>
-          <p:cNvSpPr/>
-          <p:nvPr/>
-        </p:nvSpPr>
-        <p:spPr>
-          <a:xfrm>
-            <a:off x="566928" y="5656834"/>
-            <a:ext cx="6428232" cy="2606040"/>
-          </a:xfrm>
-          <a:prstGeom prst="roundRect">
-            <a:avLst>
-              <a:gd name="adj" fmla="val 1754"/>
-            </a:avLst>
-          </a:prstGeom>
-          <a:solidFill>
-            <a:srgbClr val="F7F7F7"/>
-          </a:solidFill>
-          <a:ln w="12700">
-            <a:solidFill>
-              <a:srgbClr val="D8D8D8"/>
-            </a:solidFill>
-            <a:prstDash val="dash"/>
-          </a:ln>
-        </p:spPr>
-      </p:sp>
-      <p:sp>
-        <p:nvSpPr>
-          <p:cNvPr id="28" name="Text 26"/>
-          <p:cNvSpPr txBox="1"/>
-          <p:nvPr/>
-        </p:nvSpPr>
-        <p:spPr>
-          <a:xfrm>
-            <a:off x="749808" y="6040882"/>
-            <a:ext cx="6062472" cy="274320"/>
+      <p:pic>
+        <p:nvPicPr>
+          <p:cNvPr id="27" name="Image 0" descr="C:\Users\sato\Desktop\enque\docs\images\o-event-setting.png">    </p:cNvPr>
+          <p:cNvPicPr>
+            <a:picLocks noChangeAspect="1"/>
+          </p:cNvPicPr>
+          <p:nvPr/>
+        </p:nvPicPr>
+        <p:blipFill>
+          <a:blip r:embed="rId1"/>
+          <a:stretch>
+            <a:fillRect/>
+          </a:stretch>
+        </p:blipFill>
+        <p:spPr>
+          <a:xfrm>
+            <a:off x="791874" y="5656834"/>
+            <a:ext cx="5978339" cy="3474720"/>
+          </a:xfrm>
+          <a:prstGeom prst="rect">
+            <a:avLst/>
+          </a:prstGeom>
+        </p:spPr>
+      </p:pic>
+      <p:sp>
+        <p:nvSpPr>
+          <p:cNvPr id="28" name="Text 25"/>
+          <p:cNvSpPr txBox="1"/>
+          <p:nvPr/>
+        </p:nvSpPr>
+        <p:spPr>
+          <a:xfrm>
+            <a:off x="566928" y="9186418"/>
+            <a:ext cx="6428232" cy="274320"/>
           </a:xfrm>
           <a:prstGeom prst="rect">
             <a:avLst/>
@@ -4456,7 +4408,7 @@
               <a:buNone/>
             </a:pPr>
             <a:r>
-              <a:rPr lang="en-US" sz="1100" b="1" dirty="0">
+              <a:rPr lang="en-US" sz="950" dirty="0">
                 <a:solidFill>
                   <a:srgbClr val="6B6B6B"/>
                 </a:solidFill>
@@ -4464,57 +4416,15 @@
                 <a:ea typeface="Calibri" pitchFamily="34" charset="-122"/>
                 <a:cs typeface="Calibri" pitchFamily="34" charset="-120"/>
               </a:rPr>
-              <a:t>［ スクリーンショット ］ ここに貼り付けてください</a:t>
-            </a:r>
-            <a:endParaRPr lang="en-US" sz="1100" dirty="0"/>
-          </a:p>
-        </p:txBody>
-      </p:sp>
-      <p:sp>
-        <p:nvSpPr>
-          <p:cNvPr id="29" name="Text 27"/>
-          <p:cNvSpPr txBox="1"/>
-          <p:nvPr/>
-        </p:nvSpPr>
-        <p:spPr>
-          <a:xfrm>
-            <a:off x="841248" y="6406642"/>
-            <a:ext cx="5879592" cy="731520"/>
-          </a:xfrm>
-          <a:prstGeom prst="rect">
-            <a:avLst/>
-          </a:prstGeom>
-          <a:noFill/>
-          <a:ln/>
-        </p:spPr>
-        <p:txBody>
-          <a:bodyPr wrap="square" lIns="0" tIns="0" rIns="0" bIns="0" rtlCol="0" anchor="t"/>
-          <a:lstStyle/>
-          <a:p>
-            <a:pPr algn="ctr" indent="0" marL="0">
-              <a:lnSpc>
-                <a:spcPct val="120000"/>
-              </a:lnSpc>
-              <a:buNone/>
-            </a:pPr>
-            <a:r>
-              <a:rPr lang="en-US" sz="1050" dirty="0">
-                <a:solidFill>
-                  <a:srgbClr val="222222"/>
-                </a:solidFill>
-                <a:latin typeface="Calibri" pitchFamily="34" charset="0"/>
-                <a:ea typeface="Calibri" pitchFamily="34" charset="-122"/>
-                <a:cs typeface="Calibri" pitchFamily="34" charset="-120"/>
-              </a:rPr>
               <a:t>ダッシュボードの「イベント設定」。状態が「開催中（回答受付）」になっているところ。</a:t>
             </a:r>
-            <a:endParaRPr lang="en-US" sz="1050" dirty="0"/>
-          </a:p>
-        </p:txBody>
-      </p:sp>
-      <p:sp>
-        <p:nvSpPr>
-          <p:cNvPr id="30" name="Text 28"/>
+            <a:endParaRPr lang="en-US" sz="950" dirty="0"/>
+          </a:p>
+        </p:txBody>
+      </p:sp>
+      <p:sp>
+        <p:nvSpPr>
+          <p:cNvPr id="29" name="Text 26"/>
           <p:cNvSpPr txBox="1"/>
           <p:nvPr/>
         </p:nvSpPr>
@@ -5281,43 +5191,40 @@
           </a:p>
         </p:txBody>
       </p:sp>
-      <p:sp>
-        <p:nvSpPr>
-          <p:cNvPr id="15" name="Shape 13"/>
-          <p:cNvSpPr/>
-          <p:nvPr/>
-        </p:nvSpPr>
+      <p:pic>
+        <p:nvPicPr>
+          <p:cNvPr id="15" name="Image 0" descr="C:\Users\sato\Desktop\enque\docs\images\o-dashboard-top.png">    </p:cNvPr>
+          <p:cNvPicPr>
+            <a:picLocks noChangeAspect="1"/>
+          </p:cNvPicPr>
+          <p:nvPr/>
+        </p:nvPicPr>
+        <p:blipFill>
+          <a:blip r:embed="rId1"/>
+          <a:stretch>
+            <a:fillRect/>
+          </a:stretch>
+        </p:blipFill>
         <p:spPr>
           <a:xfrm>
             <a:off x="566928" y="4227894"/>
-            <a:ext cx="6428232" cy="2606040"/>
-          </a:xfrm>
-          <a:prstGeom prst="roundRect">
-            <a:avLst>
-              <a:gd name="adj" fmla="val 1754"/>
-            </a:avLst>
-          </a:prstGeom>
-          <a:solidFill>
-            <a:srgbClr val="F7F7F7"/>
-          </a:solidFill>
-          <a:ln w="12700">
-            <a:solidFill>
-              <a:srgbClr val="D8D8D8"/>
-            </a:solidFill>
-            <a:prstDash val="dash"/>
-          </a:ln>
-        </p:spPr>
-      </p:sp>
-      <p:sp>
-        <p:nvSpPr>
-          <p:cNvPr id="16" name="Text 14"/>
-          <p:cNvSpPr txBox="1"/>
-          <p:nvPr/>
-        </p:nvSpPr>
-        <p:spPr>
-          <a:xfrm>
-            <a:off x="749808" y="4611942"/>
-            <a:ext cx="6062472" cy="274320"/>
+            <a:ext cx="6428232" cy="1582585"/>
+          </a:xfrm>
+          <a:prstGeom prst="rect">
+            <a:avLst/>
+          </a:prstGeom>
+        </p:spPr>
+      </p:pic>
+      <p:sp>
+        <p:nvSpPr>
+          <p:cNvPr id="16" name="Text 13"/>
+          <p:cNvSpPr txBox="1"/>
+          <p:nvPr/>
+        </p:nvSpPr>
+        <p:spPr>
+          <a:xfrm>
+            <a:off x="566928" y="5865343"/>
+            <a:ext cx="6428232" cy="274320"/>
           </a:xfrm>
           <a:prstGeom prst="rect">
             <a:avLst/>
@@ -5333,7 +5240,7 @@
               <a:buNone/>
             </a:pPr>
             <a:r>
-              <a:rPr lang="en-US" sz="1100" b="1" dirty="0">
+              <a:rPr lang="en-US" sz="950" dirty="0">
                 <a:solidFill>
                   <a:srgbClr val="6B6B6B"/>
                 </a:solidFill>
@@ -5341,57 +5248,15 @@
                 <a:ea typeface="Calibri" pitchFamily="34" charset="-122"/>
                 <a:cs typeface="Calibri" pitchFamily="34" charset="-120"/>
               </a:rPr>
-              <a:t>［ スクリーンショット ］ ここに貼り付けてください</a:t>
-            </a:r>
-            <a:endParaRPr lang="en-US" sz="1100" dirty="0"/>
-          </a:p>
-        </p:txBody>
-      </p:sp>
-      <p:sp>
-        <p:nvSpPr>
-          <p:cNvPr id="17" name="Text 15"/>
-          <p:cNvSpPr txBox="1"/>
-          <p:nvPr/>
-        </p:nvSpPr>
-        <p:spPr>
-          <a:xfrm>
-            <a:off x="841248" y="4977702"/>
-            <a:ext cx="5879592" cy="731520"/>
-          </a:xfrm>
-          <a:prstGeom prst="rect">
-            <a:avLst/>
-          </a:prstGeom>
-          <a:noFill/>
-          <a:ln/>
-        </p:spPr>
-        <p:txBody>
-          <a:bodyPr wrap="square" lIns="0" tIns="0" rIns="0" bIns="0" rtlCol="0" anchor="t"/>
-          <a:lstStyle/>
-          <a:p>
-            <a:pPr algn="ctr" indent="0" marL="0">
-              <a:lnSpc>
-                <a:spcPct val="120000"/>
-              </a:lnSpc>
-              <a:buNone/>
-            </a:pPr>
-            <a:r>
-              <a:rPr lang="en-US" sz="1050" dirty="0">
-                <a:solidFill>
-                  <a:srgbClr val="222222"/>
-                </a:solidFill>
-                <a:latin typeface="Calibri" pitchFamily="34" charset="0"/>
-                <a:ea typeface="Calibri" pitchFamily="34" charset="-122"/>
-                <a:cs typeface="Calibri" pitchFamily="34" charset="-120"/>
-              </a:rPr>
               <a:t>主催者ダッシュボードの上部。数字のタイルが並んでいるところ。</a:t>
             </a:r>
-            <a:endParaRPr lang="en-US" sz="1050" dirty="0"/>
-          </a:p>
-        </p:txBody>
-      </p:sp>
-      <p:sp>
-        <p:nvSpPr>
-          <p:cNvPr id="18" name="Text 16"/>
+            <a:endParaRPr lang="en-US" sz="950" dirty="0"/>
+          </a:p>
+        </p:txBody>
+      </p:sp>
+      <p:sp>
+        <p:nvSpPr>
+          <p:cNvPr id="17" name="Text 14"/>
           <p:cNvSpPr txBox="1"/>
           <p:nvPr/>
         </p:nvSpPr>
@@ -6065,43 +5930,40 @@
           </a:p>
         </p:txBody>
       </p:sp>
-      <p:sp>
-        <p:nvSpPr>
-          <p:cNvPr id="14" name="Shape 12"/>
-          <p:cNvSpPr/>
-          <p:nvPr/>
-        </p:nvSpPr>
-        <p:spPr>
-          <a:xfrm>
-            <a:off x="566928" y="4127246"/>
-            <a:ext cx="6428232" cy="2606040"/>
-          </a:xfrm>
-          <a:prstGeom prst="roundRect">
-            <a:avLst>
-              <a:gd name="adj" fmla="val 1754"/>
-            </a:avLst>
-          </a:prstGeom>
-          <a:solidFill>
-            <a:srgbClr val="F7F7F7"/>
-          </a:solidFill>
-          <a:ln w="12700">
-            <a:solidFill>
-              <a:srgbClr val="D8D8D8"/>
-            </a:solidFill>
-            <a:prstDash val="dash"/>
-          </a:ln>
-        </p:spPr>
-      </p:sp>
-      <p:sp>
-        <p:nvSpPr>
-          <p:cNvPr id="15" name="Text 13"/>
-          <p:cNvSpPr txBox="1"/>
-          <p:nvPr/>
-        </p:nvSpPr>
-        <p:spPr>
-          <a:xfrm>
-            <a:off x="749808" y="4511294"/>
-            <a:ext cx="6062472" cy="274320"/>
+      <p:pic>
+        <p:nvPicPr>
+          <p:cNvPr id="14" name="Image 0" descr="C:\Users\sato\Desktop\enque\docs\images\o-insights.png">    </p:cNvPr>
+          <p:cNvPicPr>
+            <a:picLocks noChangeAspect="1"/>
+          </p:cNvPicPr>
+          <p:nvPr/>
+        </p:nvPicPr>
+        <p:blipFill>
+          <a:blip r:embed="rId1"/>
+          <a:stretch>
+            <a:fillRect/>
+          </a:stretch>
+        </p:blipFill>
+        <p:spPr>
+          <a:xfrm>
+            <a:off x="884627" y="4127246"/>
+            <a:ext cx="5792834" cy="3474720"/>
+          </a:xfrm>
+          <a:prstGeom prst="rect">
+            <a:avLst/>
+          </a:prstGeom>
+        </p:spPr>
+      </p:pic>
+      <p:sp>
+        <p:nvSpPr>
+          <p:cNvPr id="15" name="Text 12"/>
+          <p:cNvSpPr txBox="1"/>
+          <p:nvPr/>
+        </p:nvSpPr>
+        <p:spPr>
+          <a:xfrm>
+            <a:off x="566928" y="7656830"/>
+            <a:ext cx="6428232" cy="274320"/>
           </a:xfrm>
           <a:prstGeom prst="rect">
             <a:avLst/>
@@ -6117,7 +5979,7 @@
               <a:buNone/>
             </a:pPr>
             <a:r>
-              <a:rPr lang="en-US" sz="1100" b="1" dirty="0">
+              <a:rPr lang="en-US" sz="950" dirty="0">
                 <a:solidFill>
                   <a:srgbClr val="6B6B6B"/>
                 </a:solidFill>
@@ -6125,57 +5987,15 @@
                 <a:ea typeface="Calibri" pitchFamily="34" charset="-122"/>
                 <a:cs typeface="Calibri" pitchFamily="34" charset="-120"/>
               </a:rPr>
-              <a:t>［ スクリーンショット ］ ここに貼り付けてください</a:t>
-            </a:r>
-            <a:endParaRPr lang="en-US" sz="1100" dirty="0"/>
-          </a:p>
-        </p:txBody>
-      </p:sp>
-      <p:sp>
-        <p:nvSpPr>
-          <p:cNvPr id="16" name="Text 14"/>
-          <p:cNvSpPr txBox="1"/>
-          <p:nvPr/>
-        </p:nvSpPr>
-        <p:spPr>
-          <a:xfrm>
-            <a:off x="841248" y="4877054"/>
-            <a:ext cx="5879592" cy="731520"/>
-          </a:xfrm>
-          <a:prstGeom prst="rect">
-            <a:avLst/>
-          </a:prstGeom>
-          <a:noFill/>
-          <a:ln/>
-        </p:spPr>
-        <p:txBody>
-          <a:bodyPr wrap="square" lIns="0" tIns="0" rIns="0" bIns="0" rtlCol="0" anchor="t"/>
-          <a:lstStyle/>
-          <a:p>
-            <a:pPr algn="ctr" indent="0" marL="0">
-              <a:lnSpc>
-                <a:spcPct val="120000"/>
-              </a:lnSpc>
-              <a:buNone/>
-            </a:pPr>
-            <a:r>
-              <a:rPr lang="en-US" sz="1050" dirty="0">
-                <a:solidFill>
-                  <a:srgbClr val="222222"/>
-                </a:solidFill>
-                <a:latin typeface="Calibri" pitchFamily="34" charset="0"/>
-                <a:ea typeface="Calibri" pitchFamily="34" charset="-122"/>
-                <a:cs typeface="Calibri" pitchFamily="34" charset="-120"/>
-              </a:rPr>
               <a:t>「回答者の傾向」画面。周回時間・周回企業数のグラフが見えるところ。</a:t>
             </a:r>
-            <a:endParaRPr lang="en-US" sz="1050" dirty="0"/>
-          </a:p>
-        </p:txBody>
-      </p:sp>
-      <p:sp>
-        <p:nvSpPr>
-          <p:cNvPr id="17" name="Text 15"/>
+            <a:endParaRPr lang="en-US" sz="950" dirty="0"/>
+          </a:p>
+        </p:txBody>
+      </p:sp>
+      <p:sp>
+        <p:nvSpPr>
+          <p:cNvPr id="16" name="Text 13"/>
           <p:cNvSpPr txBox="1"/>
           <p:nvPr/>
         </p:nvSpPr>
@@ -6943,43 +6763,40 @@
           </a:p>
         </p:txBody>
       </p:sp>
-      <p:sp>
-        <p:nvSpPr>
-          <p:cNvPr id="19" name="Shape 17"/>
-          <p:cNvSpPr/>
-          <p:nvPr/>
-        </p:nvSpPr>
-        <p:spPr>
-          <a:xfrm>
-            <a:off x="566928" y="4248150"/>
-            <a:ext cx="6428232" cy="2606040"/>
-          </a:xfrm>
-          <a:prstGeom prst="roundRect">
-            <a:avLst>
-              <a:gd name="adj" fmla="val 1754"/>
-            </a:avLst>
-          </a:prstGeom>
-          <a:solidFill>
-            <a:srgbClr val="F7F7F7"/>
-          </a:solidFill>
-          <a:ln w="12700">
-            <a:solidFill>
-              <a:srgbClr val="D8D8D8"/>
-            </a:solidFill>
-            <a:prstDash val="dash"/>
-          </a:ln>
-        </p:spPr>
-      </p:sp>
-      <p:sp>
-        <p:nvSpPr>
-          <p:cNvPr id="20" name="Text 18"/>
-          <p:cNvSpPr txBox="1"/>
-          <p:nvPr/>
-        </p:nvSpPr>
-        <p:spPr>
-          <a:xfrm>
-            <a:off x="749808" y="4632198"/>
-            <a:ext cx="6062472" cy="274320"/>
+      <p:pic>
+        <p:nvPicPr>
+          <p:cNvPr id="19" name="Image 0" descr="C:\Users\sato\Desktop\enque\docs\images\o-overall.png">    </p:cNvPr>
+          <p:cNvPicPr>
+            <a:picLocks noChangeAspect="1"/>
+          </p:cNvPicPr>
+          <p:nvPr/>
+        </p:nvPicPr>
+        <p:blipFill>
+          <a:blip r:embed="rId1"/>
+          <a:stretch>
+            <a:fillRect/>
+          </a:stretch>
+        </p:blipFill>
+        <p:spPr>
+          <a:xfrm>
+            <a:off x="1282796" y="4248150"/>
+            <a:ext cx="4996495" cy="3474720"/>
+          </a:xfrm>
+          <a:prstGeom prst="rect">
+            <a:avLst/>
+          </a:prstGeom>
+        </p:spPr>
+      </p:pic>
+      <p:sp>
+        <p:nvSpPr>
+          <p:cNvPr id="20" name="Text 17"/>
+          <p:cNvSpPr txBox="1"/>
+          <p:nvPr/>
+        </p:nvSpPr>
+        <p:spPr>
+          <a:xfrm>
+            <a:off x="566928" y="7777734"/>
+            <a:ext cx="6428232" cy="274320"/>
           </a:xfrm>
           <a:prstGeom prst="rect">
             <a:avLst/>
@@ -6995,7 +6812,7 @@
               <a:buNone/>
             </a:pPr>
             <a:r>
-              <a:rPr lang="en-US" sz="1100" b="1" dirty="0">
+              <a:rPr lang="en-US" sz="950" dirty="0">
                 <a:solidFill>
                   <a:srgbClr val="6B6B6B"/>
                 </a:solidFill>
@@ -7003,57 +6820,15 @@
                 <a:ea typeface="Calibri" pitchFamily="34" charset="-122"/>
                 <a:cs typeface="Calibri" pitchFamily="34" charset="-120"/>
               </a:rPr>
-              <a:t>［ スクリーンショット ］ ここに貼り付けてください</a:t>
-            </a:r>
-            <a:endParaRPr lang="en-US" sz="1100" dirty="0"/>
-          </a:p>
-        </p:txBody>
-      </p:sp>
-      <p:sp>
-        <p:nvSpPr>
-          <p:cNvPr id="21" name="Text 19"/>
-          <p:cNvSpPr txBox="1"/>
-          <p:nvPr/>
-        </p:nvSpPr>
-        <p:spPr>
-          <a:xfrm>
-            <a:off x="841248" y="4997958"/>
-            <a:ext cx="5879592" cy="731520"/>
-          </a:xfrm>
-          <a:prstGeom prst="rect">
-            <a:avLst/>
-          </a:prstGeom>
-          <a:noFill/>
-          <a:ln/>
-        </p:spPr>
-        <p:txBody>
-          <a:bodyPr wrap="square" lIns="0" tIns="0" rIns="0" bIns="0" rtlCol="0" anchor="t"/>
-          <a:lstStyle/>
-          <a:p>
-            <a:pPr algn="ctr" indent="0" marL="0">
-              <a:lnSpc>
-                <a:spcPct val="120000"/>
-              </a:lnSpc>
-              <a:buNone/>
-            </a:pPr>
-            <a:r>
-              <a:rPr lang="en-US" sz="1050" dirty="0">
-                <a:solidFill>
-                  <a:srgbClr val="222222"/>
-                </a:solidFill>
-                <a:latin typeface="Calibri" pitchFamily="34" charset="0"/>
-                <a:ea typeface="Calibri" pitchFamily="34" charset="-122"/>
-                <a:cs typeface="Calibri" pitchFamily="34" charset="-120"/>
-              </a:rPr>
               <a:t>「全体アンケートと案内メール」画面の上部。全体アンケートの状態が見えるところ。</a:t>
             </a:r>
-            <a:endParaRPr lang="en-US" sz="1050" dirty="0"/>
-          </a:p>
-        </p:txBody>
-      </p:sp>
-      <p:sp>
-        <p:nvSpPr>
-          <p:cNvPr id="22" name="Text 20"/>
+            <a:endParaRPr lang="en-US" sz="950" dirty="0"/>
+          </a:p>
+        </p:txBody>
+      </p:sp>
+      <p:sp>
+        <p:nvSpPr>
+          <p:cNvPr id="21" name="Text 18"/>
           <p:cNvSpPr txBox="1"/>
           <p:nvPr/>
         </p:nvSpPr>
@@ -7974,43 +7749,40 @@
           </a:p>
         </p:txBody>
       </p:sp>
-      <p:sp>
-        <p:nvSpPr>
-          <p:cNvPr id="24" name="Shape 22"/>
-          <p:cNvSpPr/>
-          <p:nvPr/>
-        </p:nvSpPr>
-        <p:spPr>
-          <a:xfrm>
-            <a:off x="566928" y="5063427"/>
-            <a:ext cx="6428232" cy="2606040"/>
-          </a:xfrm>
-          <a:prstGeom prst="roundRect">
-            <a:avLst>
-              <a:gd name="adj" fmla="val 1754"/>
-            </a:avLst>
-          </a:prstGeom>
-          <a:solidFill>
-            <a:srgbClr val="F7F7F7"/>
-          </a:solidFill>
-          <a:ln w="12700">
-            <a:solidFill>
-              <a:srgbClr val="D8D8D8"/>
-            </a:solidFill>
-            <a:prstDash val="dash"/>
-          </a:ln>
-        </p:spPr>
-      </p:sp>
-      <p:sp>
-        <p:nvSpPr>
-          <p:cNvPr id="25" name="Text 23"/>
-          <p:cNvSpPr txBox="1"/>
-          <p:nvPr/>
-        </p:nvSpPr>
-        <p:spPr>
-          <a:xfrm>
-            <a:off x="749808" y="5447475"/>
-            <a:ext cx="6062472" cy="274320"/>
+      <p:pic>
+        <p:nvPicPr>
+          <p:cNvPr id="24" name="Image 0" descr="C:\Users\sato\Desktop\enque\docs\images\o-invite-status.png">    </p:cNvPr>
+          <p:cNvPicPr>
+            <a:picLocks noChangeAspect="1"/>
+          </p:cNvPicPr>
+          <p:nvPr/>
+        </p:nvPicPr>
+        <p:blipFill>
+          <a:blip r:embed="rId1"/>
+          <a:stretch>
+            <a:fillRect/>
+          </a:stretch>
+        </p:blipFill>
+        <p:spPr>
+          <a:xfrm>
+            <a:off x="1504370" y="5063427"/>
+            <a:ext cx="4553347" cy="3474720"/>
+          </a:xfrm>
+          <a:prstGeom prst="rect">
+            <a:avLst/>
+          </a:prstGeom>
+        </p:spPr>
+      </p:pic>
+      <p:sp>
+        <p:nvSpPr>
+          <p:cNvPr id="25" name="Text 22"/>
+          <p:cNvSpPr txBox="1"/>
+          <p:nvPr/>
+        </p:nvSpPr>
+        <p:spPr>
+          <a:xfrm>
+            <a:off x="566928" y="8593011"/>
+            <a:ext cx="6428232" cy="274320"/>
           </a:xfrm>
           <a:prstGeom prst="rect">
             <a:avLst/>
@@ -8026,7 +7798,7 @@
               <a:buNone/>
             </a:pPr>
             <a:r>
-              <a:rPr lang="en-US" sz="1100" b="1" dirty="0">
+              <a:rPr lang="en-US" sz="950" dirty="0">
                 <a:solidFill>
                   <a:srgbClr val="6B6B6B"/>
                 </a:solidFill>
@@ -8034,57 +7806,15 @@
                 <a:ea typeface="Calibri" pitchFamily="34" charset="-122"/>
                 <a:cs typeface="Calibri" pitchFamily="34" charset="-120"/>
               </a:rPr>
-              <a:t>［ スクリーンショット ］ ここに貼り付けてください</a:t>
-            </a:r>
-            <a:endParaRPr lang="en-US" sz="1100" dirty="0"/>
-          </a:p>
-        </p:txBody>
-      </p:sp>
-      <p:sp>
-        <p:nvSpPr>
-          <p:cNvPr id="26" name="Text 24"/>
-          <p:cNvSpPr txBox="1"/>
-          <p:nvPr/>
-        </p:nvSpPr>
-        <p:spPr>
-          <a:xfrm>
-            <a:off x="841248" y="5813235"/>
-            <a:ext cx="5879592" cy="731520"/>
-          </a:xfrm>
-          <a:prstGeom prst="rect">
-            <a:avLst/>
-          </a:prstGeom>
-          <a:noFill/>
-          <a:ln/>
-        </p:spPr>
-        <p:txBody>
-          <a:bodyPr wrap="square" lIns="0" tIns="0" rIns="0" bIns="0" rtlCol="0" anchor="t"/>
-          <a:lstStyle/>
-          <a:p>
-            <a:pPr algn="ctr" indent="0" marL="0">
-              <a:lnSpc>
-                <a:spcPct val="120000"/>
-              </a:lnSpc>
-              <a:buNone/>
-            </a:pPr>
-            <a:r>
-              <a:rPr lang="en-US" sz="1050" dirty="0">
-                <a:solidFill>
-                  <a:srgbClr val="222222"/>
-                </a:solidFill>
-                <a:latin typeface="Calibri" pitchFamily="34" charset="0"/>
-                <a:ea typeface="Calibri" pitchFamily="34" charset="-122"/>
-                <a:cs typeface="Calibri" pitchFamily="34" charset="-120"/>
-              </a:rPr>
               <a:t>「全体アンケートと案内メール」画面の送信状況（未送信・送信済み・失敗・回答済みの数）。</a:t>
             </a:r>
-            <a:endParaRPr lang="en-US" sz="1050" dirty="0"/>
-          </a:p>
-        </p:txBody>
-      </p:sp>
-      <p:sp>
-        <p:nvSpPr>
-          <p:cNvPr id="27" name="Text 25"/>
+            <a:endParaRPr lang="en-US" sz="950" dirty="0"/>
+          </a:p>
+        </p:txBody>
+      </p:sp>
+      <p:sp>
+        <p:nvSpPr>
+          <p:cNvPr id="26" name="Text 23"/>
           <p:cNvSpPr txBox="1"/>
           <p:nvPr/>
         </p:nvSpPr>
@@ -8655,43 +8385,40 @@
           </a:p>
         </p:txBody>
       </p:sp>
-      <p:sp>
-        <p:nvSpPr>
-          <p:cNvPr id="13" name="Shape 11"/>
-          <p:cNvSpPr/>
-          <p:nvPr/>
-        </p:nvSpPr>
-        <p:spPr>
-          <a:xfrm>
-            <a:off x="566928" y="4402328"/>
-            <a:ext cx="6428232" cy="2606040"/>
-          </a:xfrm>
-          <a:prstGeom prst="roundRect">
-            <a:avLst>
-              <a:gd name="adj" fmla="val 1754"/>
-            </a:avLst>
-          </a:prstGeom>
-          <a:solidFill>
-            <a:srgbClr val="F7F7F7"/>
-          </a:solidFill>
-          <a:ln w="12700">
-            <a:solidFill>
-              <a:srgbClr val="D8D8D8"/>
-            </a:solidFill>
-            <a:prstDash val="dash"/>
-          </a:ln>
-        </p:spPr>
-      </p:sp>
-      <p:sp>
-        <p:nvSpPr>
-          <p:cNvPr id="14" name="Text 12"/>
-          <p:cNvSpPr txBox="1"/>
-          <p:nvPr/>
-        </p:nvSpPr>
-        <p:spPr>
-          <a:xfrm>
-            <a:off x="749808" y="4786376"/>
-            <a:ext cx="6062472" cy="274320"/>
+      <p:pic>
+        <p:nvPicPr>
+          <p:cNvPr id="13" name="Image 0" descr="C:\Users\sato\Desktop\enque\docs\images\o-stats.png">    </p:cNvPr>
+          <p:cNvPicPr>
+            <a:picLocks noChangeAspect="1"/>
+          </p:cNvPicPr>
+          <p:nvPr/>
+        </p:nvPicPr>
+        <p:blipFill>
+          <a:blip r:embed="rId1"/>
+          <a:stretch>
+            <a:fillRect/>
+          </a:stretch>
+        </p:blipFill>
+        <p:spPr>
+          <a:xfrm>
+            <a:off x="2140821" y="4402328"/>
+            <a:ext cx="3280447" cy="3474720"/>
+          </a:xfrm>
+          <a:prstGeom prst="rect">
+            <a:avLst/>
+          </a:prstGeom>
+        </p:spPr>
+      </p:pic>
+      <p:sp>
+        <p:nvSpPr>
+          <p:cNvPr id="14" name="Text 11"/>
+          <p:cNvSpPr txBox="1"/>
+          <p:nvPr/>
+        </p:nvSpPr>
+        <p:spPr>
+          <a:xfrm>
+            <a:off x="566928" y="7931912"/>
+            <a:ext cx="6428232" cy="274320"/>
           </a:xfrm>
           <a:prstGeom prst="rect">
             <a:avLst/>
@@ -8707,7 +8434,7 @@
               <a:buNone/>
             </a:pPr>
             <a:r>
-              <a:rPr lang="en-US" sz="1100" b="1" dirty="0">
+              <a:rPr lang="en-US" sz="950" dirty="0">
                 <a:solidFill>
                   <a:srgbClr val="6B6B6B"/>
                 </a:solidFill>
@@ -8715,57 +8442,15 @@
                 <a:ea typeface="Calibri" pitchFamily="34" charset="-122"/>
                 <a:cs typeface="Calibri" pitchFamily="34" charset="-120"/>
               </a:rPr>
-              <a:t>［ スクリーンショット ］ ここに貼り付けてください</a:t>
-            </a:r>
-            <a:endParaRPr lang="en-US" sz="1100" dirty="0"/>
-          </a:p>
-        </p:txBody>
-      </p:sp>
-      <p:sp>
-        <p:nvSpPr>
-          <p:cNvPr id="15" name="Text 13"/>
-          <p:cNvSpPr txBox="1"/>
-          <p:nvPr/>
-        </p:nvSpPr>
-        <p:spPr>
-          <a:xfrm>
-            <a:off x="841248" y="5152136"/>
-            <a:ext cx="5879592" cy="731520"/>
-          </a:xfrm>
-          <a:prstGeom prst="rect">
-            <a:avLst/>
-          </a:prstGeom>
-          <a:noFill/>
-          <a:ln/>
-        </p:spPr>
-        <p:txBody>
-          <a:bodyPr wrap="square" lIns="0" tIns="0" rIns="0" bIns="0" rtlCol="0" anchor="t"/>
-          <a:lstStyle/>
-          <a:p>
-            <a:pPr algn="ctr" indent="0" marL="0">
-              <a:lnSpc>
-                <a:spcPct val="120000"/>
-              </a:lnSpc>
-              <a:buNone/>
-            </a:pPr>
-            <a:r>
-              <a:rPr lang="en-US" sz="1050" dirty="0">
-                <a:solidFill>
-                  <a:srgbClr val="222222"/>
-                </a:solidFill>
-                <a:latin typeface="Calibri" pitchFamily="34" charset="0"/>
-                <a:ea typeface="Calibri" pitchFamily="34" charset="-122"/>
-                <a:cs typeface="Calibri" pitchFamily="34" charset="-120"/>
-              </a:rPr>
               <a:t>企業の集計画面。設問ごとのグラフが見えるところ。</a:t>
             </a:r>
-            <a:endParaRPr lang="en-US" sz="1050" dirty="0"/>
-          </a:p>
-        </p:txBody>
-      </p:sp>
-      <p:sp>
-        <p:nvSpPr>
-          <p:cNvPr id="16" name="Text 14"/>
+            <a:endParaRPr lang="en-US" sz="950" dirty="0"/>
+          </a:p>
+        </p:txBody>
+      </p:sp>
+      <p:sp>
+        <p:nvSpPr>
+          <p:cNvPr id="15" name="Text 12"/>
           <p:cNvSpPr txBox="1"/>
           <p:nvPr/>
         </p:nvSpPr>
@@ -9617,43 +9302,40 @@
           </a:p>
         </p:txBody>
       </p:sp>
-      <p:sp>
-        <p:nvSpPr>
-          <p:cNvPr id="21" name="Shape 19"/>
-          <p:cNvSpPr/>
-          <p:nvPr/>
-        </p:nvSpPr>
-        <p:spPr>
-          <a:xfrm>
-            <a:off x="566928" y="4836160"/>
-            <a:ext cx="6428232" cy="2606040"/>
-          </a:xfrm>
-          <a:prstGeom prst="roundRect">
-            <a:avLst>
-              <a:gd name="adj" fmla="val 1754"/>
-            </a:avLst>
-          </a:prstGeom>
-          <a:solidFill>
-            <a:srgbClr val="F7F7F7"/>
-          </a:solidFill>
-          <a:ln w="12700">
-            <a:solidFill>
-              <a:srgbClr val="D8D8D8"/>
-            </a:solidFill>
-            <a:prstDash val="dash"/>
-          </a:ln>
-        </p:spPr>
-      </p:sp>
-      <p:sp>
-        <p:nvSpPr>
-          <p:cNvPr id="22" name="Text 20"/>
-          <p:cNvSpPr txBox="1"/>
-          <p:nvPr/>
-        </p:nvSpPr>
-        <p:spPr>
-          <a:xfrm>
-            <a:off x="749808" y="5220208"/>
-            <a:ext cx="6062472" cy="274320"/>
+      <p:pic>
+        <p:nvPicPr>
+          <p:cNvPr id="21" name="Image 0" descr="C:\Users\sato\Desktop\enque\docs\images\o-purge.png">    </p:cNvPr>
+          <p:cNvPicPr>
+            <a:picLocks noChangeAspect="1"/>
+          </p:cNvPicPr>
+          <p:nvPr/>
+        </p:nvPicPr>
+        <p:blipFill>
+          <a:blip r:embed="rId1"/>
+          <a:stretch>
+            <a:fillRect/>
+          </a:stretch>
+        </p:blipFill>
+        <p:spPr>
+          <a:xfrm>
+            <a:off x="936779" y="4836160"/>
+            <a:ext cx="5688531" cy="3474720"/>
+          </a:xfrm>
+          <a:prstGeom prst="rect">
+            <a:avLst/>
+          </a:prstGeom>
+        </p:spPr>
+      </p:pic>
+      <p:sp>
+        <p:nvSpPr>
+          <p:cNvPr id="22" name="Text 19"/>
+          <p:cNvSpPr txBox="1"/>
+          <p:nvPr/>
+        </p:nvSpPr>
+        <p:spPr>
+          <a:xfrm>
+            <a:off x="566928" y="8365744"/>
+            <a:ext cx="6428232" cy="274320"/>
           </a:xfrm>
           <a:prstGeom prst="rect">
             <a:avLst/>
@@ -9669,7 +9351,7 @@
               <a:buNone/>
             </a:pPr>
             <a:r>
-              <a:rPr lang="en-US" sz="1100" b="1" dirty="0">
+              <a:rPr lang="en-US" sz="950" dirty="0">
                 <a:solidFill>
                   <a:srgbClr val="6B6B6B"/>
                 </a:solidFill>
@@ -9677,57 +9359,15 @@
                 <a:ea typeface="Calibri" pitchFamily="34" charset="-122"/>
                 <a:cs typeface="Calibri" pitchFamily="34" charset="-120"/>
               </a:rPr>
-              <a:t>［ スクリーンショット ］ ここに貼り付けてください</a:t>
-            </a:r>
-            <a:endParaRPr lang="en-US" sz="1100" dirty="0"/>
-          </a:p>
-        </p:txBody>
-      </p:sp>
-      <p:sp>
-        <p:nvSpPr>
-          <p:cNvPr id="23" name="Text 21"/>
-          <p:cNvSpPr txBox="1"/>
-          <p:nvPr/>
-        </p:nvSpPr>
-        <p:spPr>
-          <a:xfrm>
-            <a:off x="841248" y="5585968"/>
-            <a:ext cx="5879592" cy="731520"/>
-          </a:xfrm>
-          <a:prstGeom prst="rect">
-            <a:avLst/>
-          </a:prstGeom>
-          <a:noFill/>
-          <a:ln/>
-        </p:spPr>
-        <p:txBody>
-          <a:bodyPr wrap="square" lIns="0" tIns="0" rIns="0" bIns="0" rtlCol="0" anchor="t"/>
-          <a:lstStyle/>
-          <a:p>
-            <a:pPr algn="ctr" indent="0" marL="0">
-              <a:lnSpc>
-                <a:spcPct val="120000"/>
-              </a:lnSpc>
-              <a:buNone/>
-            </a:pPr>
-            <a:r>
-              <a:rPr lang="en-US" sz="1050" dirty="0">
-                <a:solidFill>
-                  <a:srgbClr val="222222"/>
-                </a:solidFill>
-                <a:latin typeface="Calibri" pitchFamily="34" charset="0"/>
-                <a:ea typeface="Calibri" pitchFamily="34" charset="-122"/>
-                <a:cs typeface="Calibri" pitchFamily="34" charset="-120"/>
-              </a:rPr>
               <a:t>「メールアドレスを削除する」ボタンの周辺（説明文が見えるもの）。</a:t>
             </a:r>
-            <a:endParaRPr lang="en-US" sz="1050" dirty="0"/>
-          </a:p>
-        </p:txBody>
-      </p:sp>
-      <p:sp>
-        <p:nvSpPr>
-          <p:cNvPr id="24" name="Text 22"/>
+            <a:endParaRPr lang="en-US" sz="950" dirty="0"/>
+          </a:p>
+        </p:txBody>
+      </p:sp>
+      <p:sp>
+        <p:nvSpPr>
+          <p:cNvPr id="23" name="Text 20"/>
           <p:cNvSpPr txBox="1"/>
           <p:nvPr/>
         </p:nvSpPr>
@@ -14438,43 +14078,40 @@
           </a:p>
         </p:txBody>
       </p:sp>
-      <p:sp>
-        <p:nvSpPr>
-          <p:cNvPr id="28" name="Shape 26"/>
-          <p:cNvSpPr/>
-          <p:nvPr/>
-        </p:nvSpPr>
-        <p:spPr>
-          <a:xfrm>
-            <a:off x="566928" y="6097524"/>
-            <a:ext cx="6428232" cy="2606040"/>
-          </a:xfrm>
-          <a:prstGeom prst="roundRect">
-            <a:avLst>
-              <a:gd name="adj" fmla="val 1754"/>
-            </a:avLst>
-          </a:prstGeom>
-          <a:solidFill>
-            <a:srgbClr val="F7F7F7"/>
-          </a:solidFill>
-          <a:ln w="12700">
-            <a:solidFill>
-              <a:srgbClr val="D8D8D8"/>
-            </a:solidFill>
-            <a:prstDash val="dash"/>
-          </a:ln>
-        </p:spPr>
-      </p:sp>
-      <p:sp>
-        <p:nvSpPr>
-          <p:cNvPr id="29" name="Text 27"/>
-          <p:cNvSpPr txBox="1"/>
-          <p:nvPr/>
-        </p:nvSpPr>
-        <p:spPr>
-          <a:xfrm>
-            <a:off x="749808" y="6481572"/>
-            <a:ext cx="6062472" cy="274320"/>
+      <p:pic>
+        <p:nvPicPr>
+          <p:cNvPr id="28" name="Image 0" descr="C:\Users\sato\Desktop\enque\docs\images\o-new-event.png">    </p:cNvPr>
+          <p:cNvPicPr>
+            <a:picLocks noChangeAspect="1"/>
+          </p:cNvPicPr>
+          <p:nvPr/>
+        </p:nvPicPr>
+        <p:blipFill>
+          <a:blip r:embed="rId1"/>
+          <a:stretch>
+            <a:fillRect/>
+          </a:stretch>
+        </p:blipFill>
+        <p:spPr>
+          <a:xfrm>
+            <a:off x="936779" y="6097524"/>
+            <a:ext cx="5688531" cy="3474720"/>
+          </a:xfrm>
+          <a:prstGeom prst="rect">
+            <a:avLst/>
+          </a:prstGeom>
+        </p:spPr>
+      </p:pic>
+      <p:sp>
+        <p:nvSpPr>
+          <p:cNvPr id="29" name="Text 26"/>
+          <p:cNvSpPr txBox="1"/>
+          <p:nvPr/>
+        </p:nvSpPr>
+        <p:spPr>
+          <a:xfrm>
+            <a:off x="566928" y="9627108"/>
+            <a:ext cx="6428232" cy="274320"/>
           </a:xfrm>
           <a:prstGeom prst="rect">
             <a:avLst/>
@@ -14490,7 +14127,7 @@
               <a:buNone/>
             </a:pPr>
             <a:r>
-              <a:rPr lang="en-US" sz="1100" b="1" dirty="0">
+              <a:rPr lang="en-US" sz="950" dirty="0">
                 <a:solidFill>
                   <a:srgbClr val="6B6B6B"/>
                 </a:solidFill>
@@ -14498,57 +14135,15 @@
                 <a:ea typeface="Calibri" pitchFamily="34" charset="-122"/>
                 <a:cs typeface="Calibri" pitchFamily="34" charset="-120"/>
               </a:rPr>
-              <a:t>［ スクリーンショット ］ ここに貼り付けてください</a:t>
-            </a:r>
-            <a:endParaRPr lang="en-US" sz="1100" dirty="0"/>
-          </a:p>
-        </p:txBody>
-      </p:sp>
-      <p:sp>
-        <p:nvSpPr>
-          <p:cNvPr id="30" name="Text 28"/>
-          <p:cNvSpPr txBox="1"/>
-          <p:nvPr/>
-        </p:nvSpPr>
-        <p:spPr>
-          <a:xfrm>
-            <a:off x="841248" y="6847332"/>
-            <a:ext cx="5879592" cy="731520"/>
-          </a:xfrm>
-          <a:prstGeom prst="rect">
-            <a:avLst/>
-          </a:prstGeom>
-          <a:noFill/>
-          <a:ln/>
-        </p:spPr>
-        <p:txBody>
-          <a:bodyPr wrap="square" lIns="0" tIns="0" rIns="0" bIns="0" rtlCol="0" anchor="t"/>
-          <a:lstStyle/>
-          <a:p>
-            <a:pPr algn="ctr" indent="0" marL="0">
-              <a:lnSpc>
-                <a:spcPct val="120000"/>
-              </a:lnSpc>
-              <a:buNone/>
-            </a:pPr>
-            <a:r>
-              <a:rPr lang="en-US" sz="1050" dirty="0">
-                <a:solidFill>
-                  <a:srgbClr val="222222"/>
-                </a:solidFill>
-                <a:latin typeface="Calibri" pitchFamily="34" charset="0"/>
-                <a:ea typeface="Calibri" pitchFamily="34" charset="-122"/>
-                <a:cs typeface="Calibri" pitchFamily="34" charset="-120"/>
-              </a:rPr>
               <a:t>ダッシュボードの「イベントを作成する」フォーム（イベント名・開催日の入力欄）。</a:t>
             </a:r>
-            <a:endParaRPr lang="en-US" sz="1050" dirty="0"/>
-          </a:p>
-        </p:txBody>
-      </p:sp>
-      <p:sp>
-        <p:nvSpPr>
-          <p:cNvPr id="31" name="Text 29"/>
+            <a:endParaRPr lang="en-US" sz="950" dirty="0"/>
+          </a:p>
+        </p:txBody>
+      </p:sp>
+      <p:sp>
+        <p:nvSpPr>
+          <p:cNvPr id="30" name="Text 27"/>
           <p:cNvSpPr txBox="1"/>
           <p:nvPr/>
         </p:nvSpPr>
@@ -15485,43 +15080,40 @@
           </a:p>
         </p:txBody>
       </p:sp>
-      <p:sp>
-        <p:nvSpPr>
-          <p:cNvPr id="21" name="Shape 19"/>
-          <p:cNvSpPr/>
-          <p:nvPr/>
-        </p:nvSpPr>
-        <p:spPr>
-          <a:xfrm>
-            <a:off x="566928" y="5038725"/>
-            <a:ext cx="6428232" cy="2606040"/>
-          </a:xfrm>
-          <a:prstGeom prst="roundRect">
-            <a:avLst>
-              <a:gd name="adj" fmla="val 1754"/>
-            </a:avLst>
-          </a:prstGeom>
-          <a:solidFill>
-            <a:srgbClr val="F7F7F7"/>
-          </a:solidFill>
-          <a:ln w="12700">
-            <a:solidFill>
-              <a:srgbClr val="D8D8D8"/>
-            </a:solidFill>
-            <a:prstDash val="dash"/>
-          </a:ln>
-        </p:spPr>
-      </p:sp>
-      <p:sp>
-        <p:nvSpPr>
-          <p:cNvPr id="22" name="Text 20"/>
-          <p:cNvSpPr txBox="1"/>
-          <p:nvPr/>
-        </p:nvSpPr>
-        <p:spPr>
-          <a:xfrm>
-            <a:off x="749808" y="5422773"/>
-            <a:ext cx="6062472" cy="274320"/>
+      <p:pic>
+        <p:nvPicPr>
+          <p:cNvPr id="21" name="Image 0" descr="C:\Users\sato\Desktop\enque\docs\images\o-companies.png">    </p:cNvPr>
+          <p:cNvPicPr>
+            <a:picLocks noChangeAspect="1"/>
+          </p:cNvPicPr>
+          <p:nvPr/>
+        </p:nvPicPr>
+        <p:blipFill>
+          <a:blip r:embed="rId1"/>
+          <a:stretch>
+            <a:fillRect/>
+          </a:stretch>
+        </p:blipFill>
+        <p:spPr>
+          <a:xfrm>
+            <a:off x="1151646" y="5038725"/>
+            <a:ext cx="5258795" cy="3474720"/>
+          </a:xfrm>
+          <a:prstGeom prst="rect">
+            <a:avLst/>
+          </a:prstGeom>
+        </p:spPr>
+      </p:pic>
+      <p:sp>
+        <p:nvSpPr>
+          <p:cNvPr id="22" name="Text 19"/>
+          <p:cNvSpPr txBox="1"/>
+          <p:nvPr/>
+        </p:nvSpPr>
+        <p:spPr>
+          <a:xfrm>
+            <a:off x="566928" y="8568309"/>
+            <a:ext cx="6428232" cy="274320"/>
           </a:xfrm>
           <a:prstGeom prst="rect">
             <a:avLst/>
@@ -15537,7 +15129,7 @@
               <a:buNone/>
             </a:pPr>
             <a:r>
-              <a:rPr lang="en-US" sz="1100" b="1" dirty="0">
+              <a:rPr lang="en-US" sz="950" dirty="0">
                 <a:solidFill>
                   <a:srgbClr val="6B6B6B"/>
                 </a:solidFill>
@@ -15545,57 +15137,15 @@
                 <a:ea typeface="Calibri" pitchFamily="34" charset="-122"/>
                 <a:cs typeface="Calibri" pitchFamily="34" charset="-120"/>
               </a:rPr>
-              <a:t>［ スクリーンショット ］ ここに貼り付けてください</a:t>
-            </a:r>
-            <a:endParaRPr lang="en-US" sz="1100" dirty="0"/>
-          </a:p>
-        </p:txBody>
-      </p:sp>
-      <p:sp>
-        <p:nvSpPr>
-          <p:cNvPr id="23" name="Text 21"/>
-          <p:cNvSpPr txBox="1"/>
-          <p:nvPr/>
-        </p:nvSpPr>
-        <p:spPr>
-          <a:xfrm>
-            <a:off x="841248" y="5788533"/>
-            <a:ext cx="5879592" cy="731520"/>
-          </a:xfrm>
-          <a:prstGeom prst="rect">
-            <a:avLst/>
-          </a:prstGeom>
-          <a:noFill/>
-          <a:ln/>
-        </p:spPr>
-        <p:txBody>
-          <a:bodyPr wrap="square" lIns="0" tIns="0" rIns="0" bIns="0" rtlCol="0" anchor="t"/>
-          <a:lstStyle/>
-          <a:p>
-            <a:pPr algn="ctr" indent="0" marL="0">
-              <a:lnSpc>
-                <a:spcPct val="120000"/>
-              </a:lnSpc>
-              <a:buNone/>
-            </a:pPr>
-            <a:r>
-              <a:rPr lang="en-US" sz="1050" dirty="0">
-                <a:solidFill>
-                  <a:srgbClr val="222222"/>
-                </a:solidFill>
-                <a:latin typeface="Calibri" pitchFamily="34" charset="0"/>
-                <a:ea typeface="Calibri" pitchFamily="34" charset="-122"/>
-                <a:cs typeface="Calibri" pitchFamily="34" charset="-120"/>
-              </a:rPr>
               <a:t>「企業・QRコードの管理」画面。登録済みの企業が並んでいるところ。</a:t>
             </a:r>
-            <a:endParaRPr lang="en-US" sz="1050" dirty="0"/>
-          </a:p>
-        </p:txBody>
-      </p:sp>
-      <p:sp>
-        <p:nvSpPr>
-          <p:cNvPr id="24" name="Text 22"/>
+            <a:endParaRPr lang="en-US" sz="950" dirty="0"/>
+          </a:p>
+        </p:txBody>
+      </p:sp>
+      <p:sp>
+        <p:nvSpPr>
+          <p:cNvPr id="23" name="Text 20"/>
           <p:cNvSpPr txBox="1"/>
           <p:nvPr/>
         </p:nvSpPr>
@@ -17433,43 +16983,40 @@
           </a:p>
         </p:txBody>
       </p:sp>
-      <p:sp>
-        <p:nvSpPr>
-          <p:cNvPr id="4" name="Shape 2"/>
-          <p:cNvSpPr/>
-          <p:nvPr/>
-        </p:nvSpPr>
-        <p:spPr>
-          <a:xfrm>
-            <a:off x="566928" y="1481328"/>
-            <a:ext cx="6428232" cy="2606040"/>
-          </a:xfrm>
-          <a:prstGeom prst="roundRect">
-            <a:avLst>
-              <a:gd name="adj" fmla="val 1754"/>
-            </a:avLst>
-          </a:prstGeom>
-          <a:solidFill>
-            <a:srgbClr val="F7F7F7"/>
-          </a:solidFill>
-          <a:ln w="12700">
-            <a:solidFill>
-              <a:srgbClr val="D8D8D8"/>
-            </a:solidFill>
-            <a:prstDash val="dash"/>
-          </a:ln>
-        </p:spPr>
-      </p:sp>
-      <p:sp>
-        <p:nvSpPr>
-          <p:cNvPr id="5" name="Text 3"/>
-          <p:cNvSpPr txBox="1"/>
-          <p:nvPr/>
-        </p:nvSpPr>
-        <p:spPr>
-          <a:xfrm>
-            <a:off x="749808" y="1865376"/>
-            <a:ext cx="6062472" cy="274320"/>
+      <p:pic>
+        <p:nvPicPr>
+          <p:cNvPr id="4" name="Image 0" descr="C:\Users\sato\Desktop\enque\docs\images\o-survey-edit.png">    </p:cNvPr>
+          <p:cNvPicPr>
+            <a:picLocks noChangeAspect="1"/>
+          </p:cNvPicPr>
+          <p:nvPr/>
+        </p:nvPicPr>
+        <p:blipFill>
+          <a:blip r:embed="rId1"/>
+          <a:stretch>
+            <a:fillRect/>
+          </a:stretch>
+        </p:blipFill>
+        <p:spPr>
+          <a:xfrm>
+            <a:off x="2140821" y="1481328"/>
+            <a:ext cx="3280447" cy="3474720"/>
+          </a:xfrm>
+          <a:prstGeom prst="rect">
+            <a:avLst/>
+          </a:prstGeom>
+        </p:spPr>
+      </p:pic>
+      <p:sp>
+        <p:nvSpPr>
+          <p:cNvPr id="5" name="Text 2"/>
+          <p:cNvSpPr txBox="1"/>
+          <p:nvPr/>
+        </p:nvSpPr>
+        <p:spPr>
+          <a:xfrm>
+            <a:off x="566928" y="5010912"/>
+            <a:ext cx="6428232" cy="274320"/>
           </a:xfrm>
           <a:prstGeom prst="rect">
             <a:avLst/>
@@ -17485,7 +17032,7 @@
               <a:buNone/>
             </a:pPr>
             <a:r>
-              <a:rPr lang="en-US" sz="1100" b="1" dirty="0">
+              <a:rPr lang="en-US" sz="950" dirty="0">
                 <a:solidFill>
                   <a:srgbClr val="6B6B6B"/>
                 </a:solidFill>
@@ -17493,57 +17040,15 @@
                 <a:ea typeface="Calibri" pitchFamily="34" charset="-122"/>
                 <a:cs typeface="Calibri" pitchFamily="34" charset="-120"/>
               </a:rPr>
-              <a:t>［ スクリーンショット ］ ここに貼り付けてください</a:t>
-            </a:r>
-            <a:endParaRPr lang="en-US" sz="1100" dirty="0"/>
-          </a:p>
-        </p:txBody>
-      </p:sp>
-      <p:sp>
-        <p:nvSpPr>
-          <p:cNvPr id="6" name="Text 4"/>
-          <p:cNvSpPr txBox="1"/>
-          <p:nvPr/>
-        </p:nvSpPr>
-        <p:spPr>
-          <a:xfrm>
-            <a:off x="841248" y="2231136"/>
-            <a:ext cx="5879592" cy="731520"/>
-          </a:xfrm>
-          <a:prstGeom prst="rect">
-            <a:avLst/>
-          </a:prstGeom>
-          <a:noFill/>
-          <a:ln/>
-        </p:spPr>
-        <p:txBody>
-          <a:bodyPr wrap="square" lIns="0" tIns="0" rIns="0" bIns="0" rtlCol="0" anchor="t"/>
-          <a:lstStyle/>
-          <a:p>
-            <a:pPr algn="ctr" indent="0" marL="0">
-              <a:lnSpc>
-                <a:spcPct val="120000"/>
-              </a:lnSpc>
-              <a:buNone/>
-            </a:pPr>
-            <a:r>
-              <a:rPr lang="en-US" sz="1050" dirty="0">
-                <a:solidFill>
-                  <a:srgbClr val="222222"/>
-                </a:solidFill>
-                <a:latin typeface="Calibri" pitchFamily="34" charset="0"/>
-                <a:ea typeface="Calibri" pitchFamily="34" charset="-122"/>
-                <a:cs typeface="Calibri" pitchFamily="34" charset="-120"/>
-              </a:rPr>
               <a:t>アンケート編集画面。設問の入力欄と「公開する」のチェックボックスが見えるもの。</a:t>
             </a:r>
-            <a:endParaRPr lang="en-US" sz="1050" dirty="0"/>
-          </a:p>
-        </p:txBody>
-      </p:sp>
-      <p:sp>
-        <p:nvSpPr>
-          <p:cNvPr id="7" name="Text 5"/>
+            <a:endParaRPr lang="en-US" sz="950" dirty="0"/>
+          </a:p>
+        </p:txBody>
+      </p:sp>
+      <p:sp>
+        <p:nvSpPr>
+          <p:cNvPr id="6" name="Text 3"/>
           <p:cNvSpPr txBox="1"/>
           <p:nvPr/>
         </p:nvSpPr>
@@ -18387,43 +17892,40 @@
           </a:p>
         </p:txBody>
       </p:sp>
-      <p:sp>
-        <p:nvSpPr>
-          <p:cNvPr id="20" name="Shape 18"/>
-          <p:cNvSpPr/>
-          <p:nvPr/>
-        </p:nvSpPr>
+      <p:pic>
+        <p:nvPicPr>
+          <p:cNvPr id="20" name="Image 0" descr="C:\Users\sato\Desktop\enque\docs\images\o-qr-print.png">    </p:cNvPr>
+          <p:cNvPicPr>
+            <a:picLocks noChangeAspect="1"/>
+          </p:cNvPicPr>
+          <p:nvPr/>
+        </p:nvPicPr>
+        <p:blipFill>
+          <a:blip r:embed="rId1"/>
+          <a:stretch>
+            <a:fillRect/>
+          </a:stretch>
+        </p:blipFill>
         <p:spPr>
           <a:xfrm>
             <a:off x="566928" y="4348798"/>
-            <a:ext cx="6428232" cy="2606040"/>
-          </a:xfrm>
-          <a:prstGeom prst="roundRect">
-            <a:avLst>
-              <a:gd name="adj" fmla="val 1754"/>
-            </a:avLst>
-          </a:prstGeom>
-          <a:solidFill>
-            <a:srgbClr val="F7F7F7"/>
-          </a:solidFill>
-          <a:ln w="12700">
-            <a:solidFill>
-              <a:srgbClr val="D8D8D8"/>
-            </a:solidFill>
-            <a:prstDash val="dash"/>
-          </a:ln>
-        </p:spPr>
-      </p:sp>
-      <p:sp>
-        <p:nvSpPr>
-          <p:cNvPr id="21" name="Text 19"/>
-          <p:cNvSpPr txBox="1"/>
-          <p:nvPr/>
-        </p:nvSpPr>
-        <p:spPr>
-          <a:xfrm>
-            <a:off x="749808" y="4732846"/>
-            <a:ext cx="6062472" cy="274320"/>
+            <a:ext cx="6428232" cy="3181485"/>
+          </a:xfrm>
+          <a:prstGeom prst="rect">
+            <a:avLst/>
+          </a:prstGeom>
+        </p:spPr>
+      </p:pic>
+      <p:sp>
+        <p:nvSpPr>
+          <p:cNvPr id="21" name="Text 18"/>
+          <p:cNvSpPr txBox="1"/>
+          <p:nvPr/>
+        </p:nvSpPr>
+        <p:spPr>
+          <a:xfrm>
+            <a:off x="566928" y="7585147"/>
+            <a:ext cx="6428232" cy="274320"/>
           </a:xfrm>
           <a:prstGeom prst="rect">
             <a:avLst/>
@@ -18439,7 +17941,7 @@
               <a:buNone/>
             </a:pPr>
             <a:r>
-              <a:rPr lang="en-US" sz="1100" b="1" dirty="0">
+              <a:rPr lang="en-US" sz="950" dirty="0">
                 <a:solidFill>
                   <a:srgbClr val="6B6B6B"/>
                 </a:solidFill>
@@ -18447,57 +17949,15 @@
                 <a:ea typeface="Calibri" pitchFamily="34" charset="-122"/>
                 <a:cs typeface="Calibri" pitchFamily="34" charset="-120"/>
               </a:rPr>
-              <a:t>［ スクリーンショット ］ ここに貼り付けてください</a:t>
-            </a:r>
-            <a:endParaRPr lang="en-US" sz="1100" dirty="0"/>
-          </a:p>
-        </p:txBody>
-      </p:sp>
-      <p:sp>
-        <p:nvSpPr>
-          <p:cNvPr id="22" name="Text 20"/>
-          <p:cNvSpPr txBox="1"/>
-          <p:nvPr/>
-        </p:nvSpPr>
-        <p:spPr>
-          <a:xfrm>
-            <a:off x="841248" y="5098606"/>
-            <a:ext cx="5879592" cy="731520"/>
-          </a:xfrm>
-          <a:prstGeom prst="rect">
-            <a:avLst/>
-          </a:prstGeom>
-          <a:noFill/>
-          <a:ln/>
-        </p:spPr>
-        <p:txBody>
-          <a:bodyPr wrap="square" lIns="0" tIns="0" rIns="0" bIns="0" rtlCol="0" anchor="t"/>
-          <a:lstStyle/>
-          <a:p>
-            <a:pPr algn="ctr" indent="0" marL="0">
-              <a:lnSpc>
-                <a:spcPct val="120000"/>
-              </a:lnSpc>
-              <a:buNone/>
-            </a:pPr>
-            <a:r>
-              <a:rPr lang="en-US" sz="1050" dirty="0">
-                <a:solidFill>
-                  <a:srgbClr val="222222"/>
-                </a:solidFill>
-                <a:latin typeface="Calibri" pitchFamily="34" charset="0"/>
-                <a:ea typeface="Calibri" pitchFamily="34" charset="-122"/>
-                <a:cs typeface="Calibri" pitchFamily="34" charset="-120"/>
-              </a:rPr>
               <a:t>QRコード印刷ページ。企業名とQRコードが並んでいるところ。</a:t>
             </a:r>
-            <a:endParaRPr lang="en-US" sz="1050" dirty="0"/>
-          </a:p>
-        </p:txBody>
-      </p:sp>
-      <p:sp>
-        <p:nvSpPr>
-          <p:cNvPr id="23" name="Text 21"/>
+            <a:endParaRPr lang="en-US" sz="950" dirty="0"/>
+          </a:p>
+        </p:txBody>
+      </p:sp>
+      <p:sp>
+        <p:nvSpPr>
+          <p:cNvPr id="22" name="Text 19"/>
           <p:cNvSpPr txBox="1"/>
           <p:nvPr/>
         </p:nvSpPr>
@@ -19425,43 +18885,40 @@
           </a:p>
         </p:txBody>
       </p:sp>
-      <p:sp>
-        <p:nvSpPr>
-          <p:cNvPr id="23" name="Shape 21"/>
-          <p:cNvSpPr/>
-          <p:nvPr/>
-        </p:nvSpPr>
-        <p:spPr>
-          <a:xfrm>
-            <a:off x="566928" y="4999355"/>
-            <a:ext cx="6428232" cy="2606040"/>
-          </a:xfrm>
-          <a:prstGeom prst="roundRect">
-            <a:avLst>
-              <a:gd name="adj" fmla="val 1754"/>
-            </a:avLst>
-          </a:prstGeom>
-          <a:solidFill>
-            <a:srgbClr val="F7F7F7"/>
-          </a:solidFill>
-          <a:ln w="12700">
-            <a:solidFill>
-              <a:srgbClr val="D8D8D8"/>
-            </a:solidFill>
-            <a:prstDash val="dash"/>
-          </a:ln>
-        </p:spPr>
-      </p:sp>
-      <p:sp>
-        <p:nvSpPr>
-          <p:cNvPr id="24" name="Text 22"/>
-          <p:cNvSpPr txBox="1"/>
-          <p:nvPr/>
-        </p:nvSpPr>
-        <p:spPr>
-          <a:xfrm>
-            <a:off x="749808" y="5383403"/>
-            <a:ext cx="6062472" cy="274320"/>
+      <p:pic>
+        <p:nvPicPr>
+          <p:cNvPr id="23" name="Image 0" descr="C:\Users\sato\Desktop\enque\docs\images\o-prizes.png">    </p:cNvPr>
+          <p:cNvPicPr>
+            <a:picLocks noChangeAspect="1"/>
+          </p:cNvPicPr>
+          <p:nvPr/>
+        </p:nvPicPr>
+        <p:blipFill>
+          <a:blip r:embed="rId1"/>
+          <a:stretch>
+            <a:fillRect/>
+          </a:stretch>
+        </p:blipFill>
+        <p:spPr>
+          <a:xfrm>
+            <a:off x="1181602" y="4999355"/>
+            <a:ext cx="5198885" cy="3474720"/>
+          </a:xfrm>
+          <a:prstGeom prst="rect">
+            <a:avLst/>
+          </a:prstGeom>
+        </p:spPr>
+      </p:pic>
+      <p:sp>
+        <p:nvSpPr>
+          <p:cNvPr id="24" name="Text 21"/>
+          <p:cNvSpPr txBox="1"/>
+          <p:nvPr/>
+        </p:nvSpPr>
+        <p:spPr>
+          <a:xfrm>
+            <a:off x="566928" y="8528939"/>
+            <a:ext cx="6428232" cy="274320"/>
           </a:xfrm>
           <a:prstGeom prst="rect">
             <a:avLst/>
@@ -19477,7 +18934,7 @@
               <a:buNone/>
             </a:pPr>
             <a:r>
-              <a:rPr lang="en-US" sz="1100" b="1" dirty="0">
+              <a:rPr lang="en-US" sz="950" dirty="0">
                 <a:solidFill>
                   <a:srgbClr val="6B6B6B"/>
                 </a:solidFill>
@@ -19485,57 +18942,15 @@
                 <a:ea typeface="Calibri" pitchFamily="34" charset="-122"/>
                 <a:cs typeface="Calibri" pitchFamily="34" charset="-120"/>
               </a:rPr>
-              <a:t>［ スクリーンショット ］ ここに貼り付けてください</a:t>
-            </a:r>
-            <a:endParaRPr lang="en-US" sz="1100" dirty="0"/>
-          </a:p>
-        </p:txBody>
-      </p:sp>
-      <p:sp>
-        <p:nvSpPr>
-          <p:cNvPr id="25" name="Text 23"/>
-          <p:cNvSpPr txBox="1"/>
-          <p:nvPr/>
-        </p:nvSpPr>
-        <p:spPr>
-          <a:xfrm>
-            <a:off x="841248" y="5749163"/>
-            <a:ext cx="5879592" cy="731520"/>
-          </a:xfrm>
-          <a:prstGeom prst="rect">
-            <a:avLst/>
-          </a:prstGeom>
-          <a:noFill/>
-          <a:ln/>
-        </p:spPr>
-        <p:txBody>
-          <a:bodyPr wrap="square" lIns="0" tIns="0" rIns="0" bIns="0" rtlCol="0" anchor="t"/>
-          <a:lstStyle/>
-          <a:p>
-            <a:pPr algn="ctr" indent="0" marL="0">
-              <a:lnSpc>
-                <a:spcPct val="120000"/>
-              </a:lnSpc>
-              <a:buNone/>
-            </a:pPr>
-            <a:r>
-              <a:rPr lang="en-US" sz="1050" dirty="0">
-                <a:solidFill>
-                  <a:srgbClr val="222222"/>
-                </a:solidFill>
-                <a:latin typeface="Calibri" pitchFamily="34" charset="0"/>
-                <a:ea typeface="Calibri" pitchFamily="34" charset="-122"/>
-                <a:cs typeface="Calibri" pitchFamily="34" charset="-120"/>
-              </a:rPr>
               <a:t>「景品の登録」画面。登録済みの景品と残数が見えるもの。</a:t>
             </a:r>
-            <a:endParaRPr lang="en-US" sz="1050" dirty="0"/>
-          </a:p>
-        </p:txBody>
-      </p:sp>
-      <p:sp>
-        <p:nvSpPr>
-          <p:cNvPr id="26" name="Text 24"/>
+            <a:endParaRPr lang="en-US" sz="950" dirty="0"/>
+          </a:p>
+        </p:txBody>
+      </p:sp>
+      <p:sp>
+        <p:nvSpPr>
+          <p:cNvPr id="25" name="Text 22"/>
           <p:cNvSpPr txBox="1"/>
           <p:nvPr/>
         </p:nvSpPr>
@@ -20642,43 +20057,40 @@
           </a:p>
         </p:txBody>
       </p:sp>
-      <p:sp>
-        <p:nvSpPr>
-          <p:cNvPr id="24" name="Shape 22"/>
-          <p:cNvSpPr/>
-          <p:nvPr/>
-        </p:nvSpPr>
-        <p:spPr>
-          <a:xfrm>
-            <a:off x="566928" y="5569585"/>
-            <a:ext cx="6428232" cy="2606040"/>
-          </a:xfrm>
-          <a:prstGeom prst="roundRect">
-            <a:avLst>
-              <a:gd name="adj" fmla="val 1754"/>
-            </a:avLst>
-          </a:prstGeom>
-          <a:solidFill>
-            <a:srgbClr val="F7F7F7"/>
-          </a:solidFill>
-          <a:ln w="12700">
-            <a:solidFill>
-              <a:srgbClr val="D8D8D8"/>
-            </a:solidFill>
-            <a:prstDash val="dash"/>
-          </a:ln>
-        </p:spPr>
-      </p:sp>
-      <p:sp>
-        <p:nvSpPr>
-          <p:cNvPr id="25" name="Text 23"/>
-          <p:cNvSpPr txBox="1"/>
-          <p:nvPr/>
-        </p:nvSpPr>
-        <p:spPr>
-          <a:xfrm>
-            <a:off x="749808" y="5953633"/>
-            <a:ext cx="6062472" cy="274320"/>
+      <p:pic>
+        <p:nvPicPr>
+          <p:cNvPr id="24" name="Image 0" descr="C:\Users\sato\Desktop\enque\docs\images\o-users.png">    </p:cNvPr>
+          <p:cNvPicPr>
+            <a:picLocks noChangeAspect="1"/>
+          </p:cNvPicPr>
+          <p:nvPr/>
+        </p:nvPicPr>
+        <p:blipFill>
+          <a:blip r:embed="rId1"/>
+          <a:stretch>
+            <a:fillRect/>
+          </a:stretch>
+        </p:blipFill>
+        <p:spPr>
+          <a:xfrm>
+            <a:off x="2018332" y="5569585"/>
+            <a:ext cx="3525424" cy="3474720"/>
+          </a:xfrm>
+          <a:prstGeom prst="rect">
+            <a:avLst/>
+          </a:prstGeom>
+        </p:spPr>
+      </p:pic>
+      <p:sp>
+        <p:nvSpPr>
+          <p:cNvPr id="25" name="Text 22"/>
+          <p:cNvSpPr txBox="1"/>
+          <p:nvPr/>
+        </p:nvSpPr>
+        <p:spPr>
+          <a:xfrm>
+            <a:off x="566928" y="9099169"/>
+            <a:ext cx="6428232" cy="274320"/>
           </a:xfrm>
           <a:prstGeom prst="rect">
             <a:avLst/>
@@ -20694,7 +20106,7 @@
               <a:buNone/>
             </a:pPr>
             <a:r>
-              <a:rPr lang="en-US" sz="1100" b="1" dirty="0">
+              <a:rPr lang="en-US" sz="950" dirty="0">
                 <a:solidFill>
                   <a:srgbClr val="6B6B6B"/>
                 </a:solidFill>
@@ -20702,57 +20114,15 @@
                 <a:ea typeface="Calibri" pitchFamily="34" charset="-122"/>
                 <a:cs typeface="Calibri" pitchFamily="34" charset="-120"/>
               </a:rPr>
-              <a:t>［ スクリーンショット ］ ここに貼り付けてください</a:t>
-            </a:r>
-            <a:endParaRPr lang="en-US" sz="1100" dirty="0"/>
-          </a:p>
-        </p:txBody>
-      </p:sp>
-      <p:sp>
-        <p:nvSpPr>
-          <p:cNvPr id="26" name="Text 24"/>
-          <p:cNvSpPr txBox="1"/>
-          <p:nvPr/>
-        </p:nvSpPr>
-        <p:spPr>
-          <a:xfrm>
-            <a:off x="841248" y="6319393"/>
-            <a:ext cx="5879592" cy="731520"/>
-          </a:xfrm>
-          <a:prstGeom prst="rect">
-            <a:avLst/>
-          </a:prstGeom>
-          <a:noFill/>
-          <a:ln/>
-        </p:spPr>
-        <p:txBody>
-          <a:bodyPr wrap="square" lIns="0" tIns="0" rIns="0" bIns="0" rtlCol="0" anchor="t"/>
-          <a:lstStyle/>
-          <a:p>
-            <a:pPr algn="ctr" indent="0" marL="0">
-              <a:lnSpc>
-                <a:spcPct val="120000"/>
-              </a:lnSpc>
-              <a:buNone/>
-            </a:pPr>
-            <a:r>
-              <a:rPr lang="en-US" sz="1050" dirty="0">
-                <a:solidFill>
-                  <a:srgbClr val="222222"/>
-                </a:solidFill>
-                <a:latin typeface="Calibri" pitchFamily="34" charset="0"/>
-                <a:ea typeface="Calibri" pitchFamily="34" charset="-122"/>
-                <a:cs typeface="Calibri" pitchFamily="34" charset="-120"/>
-              </a:rPr>
               <a:t>「管理ユーザー」の画面。登録済みのアカウント一覧。</a:t>
             </a:r>
-            <a:endParaRPr lang="en-US" sz="1050" dirty="0"/>
-          </a:p>
-        </p:txBody>
-      </p:sp>
-      <p:sp>
-        <p:nvSpPr>
-          <p:cNvPr id="27" name="Text 25"/>
+            <a:endParaRPr lang="en-US" sz="950" dirty="0"/>
+          </a:p>
+        </p:txBody>
+      </p:sp>
+      <p:sp>
+        <p:nvSpPr>
+          <p:cNvPr id="26" name="Text 23"/>
           <p:cNvSpPr txBox="1"/>
           <p:nvPr/>
         </p:nvSpPr>

--- a/docs/manual-organizer.pptx
+++ b/docs/manual-organizer.pptx
@@ -2591,7 +2591,7 @@
                 <a:ea typeface="Calibri" pitchFamily="34" charset="-122"/>
                 <a:cs typeface="Calibri" pitchFamily="34" charset="-120"/>
               </a:rPr>
-              <a:t>イベントの準備から、当日の運営、終了後の全体アンケート送付・集計・データ整理までの手順です。このシステムでできることは、この資料にすべて載っています。</a:t>
+              <a:t>イベントの準備から、当日の運営、終了後の総合アンケート送付・集計・データ整理までの手順です。このシステムでできることは、この資料にすべて載っています。</a:t>
             </a:r>
             <a:endParaRPr lang="en-US" sz="1200" dirty="0"/>
           </a:p>
@@ -2782,7 +2782,7 @@
                 <a:ea typeface="Calibri" pitchFamily="34" charset="-122"/>
                 <a:cs typeface="Calibri" pitchFamily="34" charset="-120"/>
               </a:rPr>
-              <a:t>全体アンケートに回答した方へのプレゼントです。</a:t>
+              <a:t>総合アンケートに回答した方へのプレゼントです。</a:t>
             </a:r>
             <a:endParaRPr lang="en-US" sz="1100" dirty="0"/>
           </a:p>
@@ -4907,7 +4907,7 @@
                 <a:ea typeface="Calibri" pitchFamily="34" charset="-122"/>
                 <a:cs typeface="Calibri" pitchFamily="34" charset="-120"/>
               </a:rPr>
-              <a:t>：全体アンケートの案内先の数</a:t>
+              <a:t>：総合アンケートの案内先の数</a:t>
             </a:r>
             <a:endParaRPr lang="en-US" sz="1100" dirty="0"/>
           </a:p>
@@ -6136,7 +6136,7 @@
                 <a:ea typeface="Calibri" pitchFamily="34" charset="-122"/>
                 <a:cs typeface="Calibri" pitchFamily="34" charset="-120"/>
               </a:rPr>
-              <a:t>終了後1：受付を締めて全体アンケートを用意する</a:t>
+              <a:t>終了後1：受付を締めて総合アンケートを用意する</a:t>
             </a:r>
             <a:endParaRPr lang="en-US" sz="2200" dirty="0"/>
           </a:p>
@@ -6254,7 +6254,7 @@
                 <a:ea typeface="Calibri" pitchFamily="34" charset="-122"/>
                 <a:cs typeface="Calibri" pitchFamily="34" charset="-120"/>
               </a:rPr>
-              <a:t>「終了（全体アンケート送付）」</a:t>
+              <a:t>「終了（総合アンケート送付）」</a:t>
             </a:r>
             <a:pPr indent="0" marL="0">
               <a:lnSpc>
@@ -6372,7 +6372,7 @@
                 <a:ea typeface="Calibri" pitchFamily="34" charset="-122"/>
                 <a:cs typeface="Calibri" pitchFamily="34" charset="-120"/>
               </a:rPr>
-              <a:t>「全体アンケート」の画面で</a:t>
+              <a:t>「総合アンケート」の画面で</a:t>
             </a:r>
             <a:pPr indent="0" marL="0">
               <a:lnSpc>
@@ -6389,7 +6389,7 @@
                 <a:ea typeface="Calibri" pitchFamily="34" charset="-122"/>
                 <a:cs typeface="Calibri" pitchFamily="34" charset="-120"/>
               </a:rPr>
-              <a:t>「全体アンケートを作成する」</a:t>
+              <a:t>「総合アンケートを作成する」</a:t>
             </a:r>
             <a:pPr indent="0" marL="0">
               <a:lnSpc>
@@ -6649,7 +6649,7 @@
                 <a:ea typeface="Calibri" pitchFamily="34" charset="-122"/>
                 <a:cs typeface="Calibri" pitchFamily="34" charset="-120"/>
               </a:rPr>
-              <a:t>全体アンケートに回答した方が、スマホ壁紙をダウンロードできます。設問は3問程度（満足度・来場のきっかけ・意見）がおすすめです。</a:t>
+              <a:t>総合アンケートに回答した方が、スマホ壁紙をダウンロードできます。設問は3問程度（満足度・来場のきっかけ・意見）がおすすめです。</a:t>
             </a:r>
             <a:endParaRPr lang="en-US" sz="1050" dirty="0"/>
           </a:p>
@@ -6820,7 +6820,7 @@
                 <a:ea typeface="Calibri" pitchFamily="34" charset="-122"/>
                 <a:cs typeface="Calibri" pitchFamily="34" charset="-120"/>
               </a:rPr>
-              <a:t>「全体アンケートと案内メール」画面の上部。全体アンケートの状態が見えるところ。</a:t>
+              <a:t>「総合アンケートと案内メール」画面の上部。総合アンケートの状態が見えるところ。</a:t>
             </a:r>
             <a:endParaRPr lang="en-US" sz="950" dirty="0"/>
           </a:p>
@@ -7806,7 +7806,7 @@
                 <a:ea typeface="Calibri" pitchFamily="34" charset="-122"/>
                 <a:cs typeface="Calibri" pitchFamily="34" charset="-120"/>
               </a:rPr>
-              <a:t>「全体アンケートと案内メール」画面の送信状況（未送信・送信済み・失敗・回答済みの数）。</a:t>
+              <a:t>「総合アンケートと案内メール」画面の送信状況（未送信・送信済み・失敗・回答済みの数）。</a:t>
             </a:r>
             <a:endParaRPr lang="en-US" sz="950" dirty="0"/>
           </a:p>
@@ -8734,7 +8734,7 @@
                 <a:ea typeface="Calibri" pitchFamily="34" charset="-122"/>
                 <a:cs typeface="Calibri" pitchFamily="34" charset="-120"/>
               </a:rPr>
-              <a:t>「全体アンケート」の画面を開く</a:t>
+              <a:t>「総合アンケート」の画面を開く</a:t>
             </a:r>
             <a:endParaRPr lang="en-US" sz="1150" dirty="0"/>
           </a:p>
@@ -12474,7 +12474,7 @@
                 <a:ea typeface="Calibri" pitchFamily="34" charset="-122"/>
                 <a:cs typeface="Calibri" pitchFamily="34" charset="-120"/>
               </a:rPr>
-              <a:t>全体アンケート</a:t>
+              <a:t>総合アンケート</a:t>
             </a:r>
             <a:pPr indent="0" marL="0">
               <a:lnSpc>
@@ -15426,7 +15426,7 @@
                 <a:ea typeface="Calibri" pitchFamily="34" charset="-122"/>
                 <a:cs typeface="Calibri" pitchFamily="34" charset="-120"/>
               </a:rPr>
-              <a:t>「全体アンケート」の画面で</a:t>
+              <a:t>「総合アンケート」の画面で</a:t>
             </a:r>
             <a:pPr indent="0" marL="0">
               <a:lnSpc>

--- a/docs/manual-organizer.pptx
+++ b/docs/manual-organizer.pptx
@@ -4727,7 +4727,7 @@
                 <a:ea typeface="Calibri" pitchFamily="34" charset="-122"/>
                 <a:cs typeface="Calibri" pitchFamily="34" charset="-120"/>
               </a:rPr>
-              <a:t>：実際に送信した人数</a:t>
+              <a:t>：実際に送信した人数（同じ方は何社回っても1人）</a:t>
             </a:r>
             <a:endParaRPr lang="en-US" sz="1100" dirty="0"/>
           </a:p>
@@ -4770,7 +4770,7 @@
                 <a:ea typeface="Calibri" pitchFamily="34" charset="-122"/>
                 <a:cs typeface="Calibri" pitchFamily="34" charset="-120"/>
               </a:rPr>
-              <a:t>総回答数</a:t>
+              <a:t>のべ来場者</a:t>
             </a:r>
             <a:pPr indent="0" marL="0">
               <a:lnSpc>
@@ -4787,7 +4787,7 @@
                 <a:ea typeface="Calibri" pitchFamily="34" charset="-122"/>
                 <a:cs typeface="Calibri" pitchFamily="34" charset="-120"/>
               </a:rPr>
-              <a:t>（重複を除いた件数）</a:t>
+              <a:t>：各企業の回答者数を足した数（1人が3社回れば3人）</a:t>
             </a:r>
             <a:endParaRPr lang="en-US" sz="1100" dirty="0"/>
           </a:p>
@@ -4830,7 +4830,7 @@
                 <a:ea typeface="Calibri" pitchFamily="34" charset="-122"/>
                 <a:cs typeface="Calibri" pitchFamily="34" charset="-120"/>
               </a:rPr>
-              <a:t>平均訪問企業数</a:t>
+              <a:t>総回答数</a:t>
             </a:r>
             <a:pPr indent="0" marL="0">
               <a:lnSpc>
@@ -4847,7 +4847,7 @@
                 <a:ea typeface="Calibri" pitchFamily="34" charset="-122"/>
                 <a:cs typeface="Calibri" pitchFamily="34" charset="-120"/>
               </a:rPr>
-              <a:t>：1人あたり何社まわったか</a:t>
+              <a:t>（重複を除いた件数）</a:t>
             </a:r>
             <a:endParaRPr lang="en-US" sz="1100" dirty="0"/>
           </a:p>
@@ -4890,7 +4890,7 @@
                 <a:ea typeface="Calibri" pitchFamily="34" charset="-122"/>
                 <a:cs typeface="Calibri" pitchFamily="34" charset="-120"/>
               </a:rPr>
-              <a:t>メール登録</a:t>
+              <a:t>平均訪問企業数</a:t>
             </a:r>
             <a:pPr indent="0" marL="0">
               <a:lnSpc>
@@ -4907,7 +4907,7 @@
                 <a:ea typeface="Calibri" pitchFamily="34" charset="-122"/>
                 <a:cs typeface="Calibri" pitchFamily="34" charset="-120"/>
               </a:rPr>
-              <a:t>：総合アンケートの案内先の数</a:t>
+              <a:t>：1人あたり何社まわったか</a:t>
             </a:r>
             <a:endParaRPr lang="en-US" sz="1100" dirty="0"/>
           </a:p>
@@ -4950,6 +4950,66 @@
                 <a:ea typeface="Calibri" pitchFamily="34" charset="-122"/>
                 <a:cs typeface="Calibri" pitchFamily="34" charset="-120"/>
               </a:rPr>
+              <a:t>メール登録</a:t>
+            </a:r>
+            <a:pPr indent="0" marL="0">
+              <a:lnSpc>
+                <a:spcPct val="125000"/>
+              </a:lnSpc>
+              <a:buNone/>
+            </a:pPr>
+            <a:r>
+              <a:rPr lang="en-US" sz="1100" dirty="0">
+                <a:solidFill>
+                  <a:srgbClr val="222222"/>
+                </a:solidFill>
+                <a:latin typeface="Calibri" pitchFamily="34" charset="0"/>
+                <a:ea typeface="Calibri" pitchFamily="34" charset="-122"/>
+                <a:cs typeface="Calibri" pitchFamily="34" charset="-120"/>
+              </a:rPr>
+              <a:t>：総合アンケートの案内先の数</a:t>
+            </a:r>
+            <a:endParaRPr lang="en-US" sz="1100" dirty="0"/>
+          </a:p>
+        </p:txBody>
+      </p:sp>
+      <p:sp>
+        <p:nvSpPr>
+          <p:cNvPr id="11" name="Text 9"/>
+          <p:cNvSpPr txBox="1"/>
+          <p:nvPr/>
+        </p:nvSpPr>
+        <p:spPr>
+          <a:xfrm>
+            <a:off x="713232" y="3429635"/>
+            <a:ext cx="6281928" cy="257429"/>
+          </a:xfrm>
+          <a:prstGeom prst="rect">
+            <a:avLst/>
+          </a:prstGeom>
+          <a:noFill/>
+          <a:ln/>
+        </p:spPr>
+        <p:txBody>
+          <a:bodyPr wrap="square" lIns="0" tIns="0" rIns="0" bIns="0" rtlCol="0" anchor="t"/>
+          <a:lstStyle/>
+          <a:p>
+            <a:pPr marL="342900" indent="-342900">
+              <a:lnSpc>
+                <a:spcPct val="125000"/>
+              </a:lnSpc>
+              <a:buSzPct val="100000"/>
+              <a:buChar char="●"/>
+            </a:pPr>
+            <a:r>
+              <a:rPr lang="en-US" sz="1100" b="1" dirty="0">
+                <a:solidFill>
+                  <a:srgbClr val="222222"/>
+                </a:solidFill>
+                <a:latin typeface="Calibri" pitchFamily="34" charset="0"/>
+                <a:ea typeface="Calibri" pitchFamily="34" charset="-122"/>
+                <a:cs typeface="Calibri" pitchFamily="34" charset="-120"/>
+              </a:rPr>
               <a:t>交換コード</a:t>
             </a:r>
             <a:pPr indent="0" marL="0">
@@ -4975,13 +5035,13 @@
       </p:sp>
       <p:sp>
         <p:nvSpPr>
-          <p:cNvPr id="11" name="Text 9"/>
-          <p:cNvSpPr txBox="1"/>
-          <p:nvPr/>
-        </p:nvSpPr>
-        <p:spPr>
-          <a:xfrm>
-            <a:off x="566928" y="3429635"/>
+          <p:cNvPr id="12" name="Text 10"/>
+          <p:cNvSpPr txBox="1"/>
+          <p:nvPr/>
+        </p:nvSpPr>
+        <p:spPr>
+          <a:xfrm>
+            <a:off x="566928" y="3705352"/>
             <a:ext cx="6428232" cy="257429"/>
           </a:xfrm>
           <a:prstGeom prst="rect">
@@ -5077,7 +5137,7 @@
                 <a:ea typeface="Calibri" pitchFamily="34" charset="-122"/>
                 <a:cs typeface="Calibri" pitchFamily="34" charset="-120"/>
               </a:rPr>
-              <a:t>の一覧が出ます。</a:t>
+              <a:t>の一覧が出ます。一覧の最下段に合計行があり、</a:t>
             </a:r>
             <a:endParaRPr lang="en-US" sz="1100" dirty="0"/>
           </a:p>
@@ -5085,13 +5145,89 @@
       </p:sp>
       <p:sp>
         <p:nvSpPr>
-          <p:cNvPr id="12" name="Shape 10"/>
+          <p:cNvPr id="13" name="Text 11"/>
+          <p:cNvSpPr txBox="1"/>
+          <p:nvPr/>
+        </p:nvSpPr>
+        <p:spPr>
+          <a:xfrm>
+            <a:off x="566928" y="3999357"/>
+            <a:ext cx="6428232" cy="257429"/>
+          </a:xfrm>
+          <a:prstGeom prst="rect">
+            <a:avLst/>
+          </a:prstGeom>
+          <a:noFill/>
+          <a:ln/>
+        </p:spPr>
+        <p:txBody>
+          <a:bodyPr wrap="square" lIns="0" tIns="0" rIns="0" bIns="0" rtlCol="0" anchor="t"/>
+          <a:lstStyle/>
+          <a:p>
+            <a:pPr indent="0" marL="0">
+              <a:lnSpc>
+                <a:spcPct val="125000"/>
+              </a:lnSpc>
+              <a:buNone/>
+            </a:pPr>
+            <a:r>
+              <a:rPr lang="en-US" sz="1100" dirty="0">
+                <a:solidFill>
+                  <a:srgbClr val="222222"/>
+                </a:solidFill>
+                <a:latin typeface="Calibri" pitchFamily="34" charset="0"/>
+                <a:ea typeface="Calibri" pitchFamily="34" charset="-122"/>
+                <a:cs typeface="Calibri" pitchFamily="34" charset="-120"/>
+              </a:rPr>
+              <a:t>「回答者数」の合計が</a:t>
+            </a:r>
+            <a:pPr indent="0" marL="0">
+              <a:lnSpc>
+                <a:spcPct val="125000"/>
+              </a:lnSpc>
+              <a:buNone/>
+            </a:pPr>
+            <a:r>
+              <a:rPr lang="en-US" sz="1100" b="1" dirty="0">
+                <a:solidFill>
+                  <a:srgbClr val="222222"/>
+                </a:solidFill>
+                <a:latin typeface="Calibri" pitchFamily="34" charset="0"/>
+                <a:ea typeface="Calibri" pitchFamily="34" charset="-122"/>
+                <a:cs typeface="Calibri" pitchFamily="34" charset="-120"/>
+              </a:rPr>
+              <a:t>のべ来場者</a:t>
+            </a:r>
+            <a:pPr indent="0" marL="0">
+              <a:lnSpc>
+                <a:spcPct val="125000"/>
+              </a:lnSpc>
+              <a:buNone/>
+            </a:pPr>
+            <a:r>
+              <a:rPr lang="en-US" sz="1100" dirty="0">
+                <a:solidFill>
+                  <a:srgbClr val="222222"/>
+                </a:solidFill>
+                <a:latin typeface="Calibri" pitchFamily="34" charset="0"/>
+                <a:ea typeface="Calibri" pitchFamily="34" charset="-122"/>
+                <a:cs typeface="Calibri" pitchFamily="34" charset="-120"/>
+              </a:rPr>
+              <a:t>と一致します。</a:t>
+            </a:r>
+            <a:endParaRPr lang="en-US" sz="1100" dirty="0"/>
+          </a:p>
+        </p:txBody>
+      </p:sp>
+      <p:sp>
+        <p:nvSpPr>
+          <p:cNvPr id="14" name="Shape 12"/>
           <p:cNvSpPr/>
           <p:nvPr/>
         </p:nvSpPr>
         <p:spPr>
           <a:xfrm>
-            <a:off x="566928" y="3723640"/>
+            <a:off x="566928" y="4293362"/>
             <a:ext cx="6428232" cy="431102"/>
           </a:xfrm>
           <a:prstGeom prst="roundRect">
@@ -5112,13 +5248,13 @@
       </p:sp>
       <p:sp>
         <p:nvSpPr>
-          <p:cNvPr id="13" name="Text 11"/>
-          <p:cNvSpPr txBox="1"/>
-          <p:nvPr/>
-        </p:nvSpPr>
-        <p:spPr>
-          <a:xfrm>
-            <a:off x="658368" y="3815080"/>
+          <p:cNvPr id="15" name="Text 13"/>
+          <p:cNvSpPr txBox="1"/>
+          <p:nvPr/>
+        </p:nvSpPr>
+        <p:spPr>
+          <a:xfrm>
+            <a:off x="658368" y="4384802"/>
             <a:ext cx="237744" cy="237744"/>
           </a:xfrm>
           <a:prstGeom prst="rect">
@@ -5151,13 +5287,13 @@
       </p:sp>
       <p:sp>
         <p:nvSpPr>
-          <p:cNvPr id="14" name="Text 12"/>
-          <p:cNvSpPr txBox="1"/>
-          <p:nvPr/>
-        </p:nvSpPr>
-        <p:spPr>
-          <a:xfrm>
-            <a:off x="950976" y="3833368"/>
+          <p:cNvPr id="16" name="Text 14"/>
+          <p:cNvSpPr txBox="1"/>
+          <p:nvPr/>
+        </p:nvSpPr>
+        <p:spPr>
+          <a:xfrm>
+            <a:off x="950976" y="4403090"/>
             <a:ext cx="5925312" cy="248221"/>
           </a:xfrm>
           <a:prstGeom prst="rect">
@@ -5186,6 +5322,290 @@
                 <a:cs typeface="Calibri" pitchFamily="34" charset="-120"/>
               </a:rPr>
               <a:t>企業別の一覧から、その企業の「集計」や「回答一覧」を開けます。</a:t>
+            </a:r>
+            <a:endParaRPr lang="en-US" sz="1050" dirty="0"/>
+          </a:p>
+        </p:txBody>
+      </p:sp>
+      <p:sp>
+        <p:nvSpPr>
+          <p:cNvPr id="17" name="Shape 15"/>
+          <p:cNvSpPr/>
+          <p:nvPr/>
+        </p:nvSpPr>
+        <p:spPr>
+          <a:xfrm>
+            <a:off x="566928" y="4797616"/>
+            <a:ext cx="6428232" cy="431102"/>
+          </a:xfrm>
+          <a:prstGeom prst="roundRect">
+            <a:avLst>
+              <a:gd name="adj" fmla="val 12726"/>
+            </a:avLst>
+          </a:prstGeom>
+          <a:solidFill>
+            <a:srgbClr val="E8ECF8"/>
+          </a:solidFill>
+          <a:ln w="9525">
+            <a:solidFill>
+              <a:srgbClr val="1E2761"/>
+            </a:solidFill>
+            <a:prstDash val="solid"/>
+          </a:ln>
+        </p:spPr>
+      </p:sp>
+      <p:sp>
+        <p:nvSpPr>
+          <p:cNvPr id="18" name="Text 16"/>
+          <p:cNvSpPr txBox="1"/>
+          <p:nvPr/>
+        </p:nvSpPr>
+        <p:spPr>
+          <a:xfrm>
+            <a:off x="658368" y="4889056"/>
+            <a:ext cx="237744" cy="237744"/>
+          </a:xfrm>
+          <a:prstGeom prst="rect">
+            <a:avLst/>
+          </a:prstGeom>
+          <a:noFill/>
+          <a:ln/>
+        </p:spPr>
+        <p:txBody>
+          <a:bodyPr wrap="square" lIns="0" tIns="0" rIns="0" bIns="0" rtlCol="0" anchor="ctr"/>
+          <a:lstStyle/>
+          <a:p>
+            <a:pPr algn="ctr" indent="0" marL="0">
+              <a:buNone/>
+            </a:pPr>
+            <a:r>
+              <a:rPr lang="en-US" sz="1200" b="1" dirty="0">
+                <a:solidFill>
+                  <a:srgbClr val="1E2761"/>
+                </a:solidFill>
+                <a:latin typeface="Calibri" pitchFamily="34" charset="0"/>
+                <a:ea typeface="Calibri" pitchFamily="34" charset="-122"/>
+                <a:cs typeface="Calibri" pitchFamily="34" charset="-120"/>
+              </a:rPr>
+              <a:t>i</a:t>
+            </a:r>
+            <a:endParaRPr lang="en-US" sz="1200" dirty="0"/>
+          </a:p>
+        </p:txBody>
+      </p:sp>
+      <p:sp>
+        <p:nvSpPr>
+          <p:cNvPr id="19" name="Text 17"/>
+          <p:cNvSpPr txBox="1"/>
+          <p:nvPr/>
+        </p:nvSpPr>
+        <p:spPr>
+          <a:xfrm>
+            <a:off x="950976" y="4907344"/>
+            <a:ext cx="5925312" cy="248221"/>
+          </a:xfrm>
+          <a:prstGeom prst="rect">
+            <a:avLst/>
+          </a:prstGeom>
+          <a:noFill/>
+          <a:ln/>
+        </p:spPr>
+        <p:txBody>
+          <a:bodyPr wrap="square" lIns="0" tIns="0" rIns="0" bIns="0" rtlCol="0" anchor="t"/>
+          <a:lstStyle/>
+          <a:p>
+            <a:pPr indent="0" marL="0">
+              <a:lnSpc>
+                <a:spcPct val="120000"/>
+              </a:lnSpc>
+              <a:buNone/>
+            </a:pPr>
+            <a:r>
+              <a:rPr lang="en-US" sz="1050" dirty="0">
+                <a:solidFill>
+                  <a:srgbClr val="222222"/>
+                </a:solidFill>
+                <a:latin typeface="Calibri" pitchFamily="34" charset="0"/>
+                <a:ea typeface="Calibri" pitchFamily="34" charset="-122"/>
+                <a:cs typeface="Calibri" pitchFamily="34" charset="-120"/>
+              </a:rPr>
+              <a:t>来場者数の見方：実人数を知りたいときは</a:t>
+            </a:r>
+            <a:pPr indent="0" marL="0">
+              <a:lnSpc>
+                <a:spcPct val="120000"/>
+              </a:lnSpc>
+              <a:buNone/>
+            </a:pPr>
+            <a:r>
+              <a:rPr lang="en-US" sz="1050" b="1" dirty="0">
+                <a:solidFill>
+                  <a:srgbClr val="222222"/>
+                </a:solidFill>
+                <a:latin typeface="Calibri" pitchFamily="34" charset="0"/>
+                <a:ea typeface="Calibri" pitchFamily="34" charset="-122"/>
+                <a:cs typeface="Calibri" pitchFamily="34" charset="-120"/>
+              </a:rPr>
+              <a:t>回答した来場者</a:t>
+            </a:r>
+            <a:pPr indent="0" marL="0">
+              <a:lnSpc>
+                <a:spcPct val="120000"/>
+              </a:lnSpc>
+              <a:buNone/>
+            </a:pPr>
+            <a:r>
+              <a:rPr lang="en-US" sz="1050" dirty="0">
+                <a:solidFill>
+                  <a:srgbClr val="222222"/>
+                </a:solidFill>
+                <a:latin typeface="Calibri" pitchFamily="34" charset="0"/>
+                <a:ea typeface="Calibri" pitchFamily="34" charset="-122"/>
+                <a:cs typeface="Calibri" pitchFamily="34" charset="-120"/>
+              </a:rPr>
+              <a:t>、各社の集客を足し合わせた延べ人数を</a:t>
+            </a:r>
+            <a:endParaRPr lang="en-US" sz="1050" dirty="0"/>
+          </a:p>
+        </p:txBody>
+      </p:sp>
+      <p:sp>
+        <p:nvSpPr>
+          <p:cNvPr id="20" name="Shape 18"/>
+          <p:cNvSpPr/>
+          <p:nvPr/>
+        </p:nvSpPr>
+        <p:spPr>
+          <a:xfrm>
+            <a:off x="566928" y="5301869"/>
+            <a:ext cx="6428232" cy="431102"/>
+          </a:xfrm>
+          <a:prstGeom prst="roundRect">
+            <a:avLst>
+              <a:gd name="adj" fmla="val 12726"/>
+            </a:avLst>
+          </a:prstGeom>
+          <a:solidFill>
+            <a:srgbClr val="E8ECF8"/>
+          </a:solidFill>
+          <a:ln w="9525">
+            <a:solidFill>
+              <a:srgbClr val="1E2761"/>
+            </a:solidFill>
+            <a:prstDash val="solid"/>
+          </a:ln>
+        </p:spPr>
+      </p:sp>
+      <p:sp>
+        <p:nvSpPr>
+          <p:cNvPr id="21" name="Text 19"/>
+          <p:cNvSpPr txBox="1"/>
+          <p:nvPr/>
+        </p:nvSpPr>
+        <p:spPr>
+          <a:xfrm>
+            <a:off x="658368" y="5393309"/>
+            <a:ext cx="237744" cy="237744"/>
+          </a:xfrm>
+          <a:prstGeom prst="rect">
+            <a:avLst/>
+          </a:prstGeom>
+          <a:noFill/>
+          <a:ln/>
+        </p:spPr>
+        <p:txBody>
+          <a:bodyPr wrap="square" lIns="0" tIns="0" rIns="0" bIns="0" rtlCol="0" anchor="ctr"/>
+          <a:lstStyle/>
+          <a:p>
+            <a:pPr algn="ctr" indent="0" marL="0">
+              <a:buNone/>
+            </a:pPr>
+            <a:r>
+              <a:rPr lang="en-US" sz="1200" b="1" dirty="0">
+                <a:solidFill>
+                  <a:srgbClr val="1E2761"/>
+                </a:solidFill>
+                <a:latin typeface="Calibri" pitchFamily="34" charset="0"/>
+                <a:ea typeface="Calibri" pitchFamily="34" charset="-122"/>
+                <a:cs typeface="Calibri" pitchFamily="34" charset="-120"/>
+              </a:rPr>
+              <a:t>i</a:t>
+            </a:r>
+            <a:endParaRPr lang="en-US" sz="1200" dirty="0"/>
+          </a:p>
+        </p:txBody>
+      </p:sp>
+      <p:sp>
+        <p:nvSpPr>
+          <p:cNvPr id="22" name="Text 20"/>
+          <p:cNvSpPr txBox="1"/>
+          <p:nvPr/>
+        </p:nvSpPr>
+        <p:spPr>
+          <a:xfrm>
+            <a:off x="950976" y="5411597"/>
+            <a:ext cx="5925312" cy="248221"/>
+          </a:xfrm>
+          <a:prstGeom prst="rect">
+            <a:avLst/>
+          </a:prstGeom>
+          <a:noFill/>
+          <a:ln/>
+        </p:spPr>
+        <p:txBody>
+          <a:bodyPr wrap="square" lIns="0" tIns="0" rIns="0" bIns="0" rtlCol="0" anchor="t"/>
+          <a:lstStyle/>
+          <a:p>
+            <a:pPr indent="0" marL="0">
+              <a:lnSpc>
+                <a:spcPct val="120000"/>
+              </a:lnSpc>
+              <a:buNone/>
+            </a:pPr>
+            <a:r>
+              <a:rPr lang="en-US" sz="1050" dirty="0">
+                <a:solidFill>
+                  <a:srgbClr val="222222"/>
+                </a:solidFill>
+                <a:latin typeface="Calibri" pitchFamily="34" charset="0"/>
+                <a:ea typeface="Calibri" pitchFamily="34" charset="-122"/>
+                <a:cs typeface="Calibri" pitchFamily="34" charset="-120"/>
+              </a:rPr>
+              <a:t>知りたいときは</a:t>
+            </a:r>
+            <a:pPr indent="0" marL="0">
+              <a:lnSpc>
+                <a:spcPct val="120000"/>
+              </a:lnSpc>
+              <a:buNone/>
+            </a:pPr>
+            <a:r>
+              <a:rPr lang="en-US" sz="1050" b="1" dirty="0">
+                <a:solidFill>
+                  <a:srgbClr val="222222"/>
+                </a:solidFill>
+                <a:latin typeface="Calibri" pitchFamily="34" charset="0"/>
+                <a:ea typeface="Calibri" pitchFamily="34" charset="-122"/>
+                <a:cs typeface="Calibri" pitchFamily="34" charset="-120"/>
+              </a:rPr>
+              <a:t>のべ来場者</a:t>
+            </a:r>
+            <a:pPr indent="0" marL="0">
+              <a:lnSpc>
+                <a:spcPct val="120000"/>
+              </a:lnSpc>
+              <a:buNone/>
+            </a:pPr>
+            <a:r>
+              <a:rPr lang="en-US" sz="1050" dirty="0">
+                <a:solidFill>
+                  <a:srgbClr val="222222"/>
+                </a:solidFill>
+                <a:latin typeface="Calibri" pitchFamily="34" charset="0"/>
+                <a:ea typeface="Calibri" pitchFamily="34" charset="-122"/>
+                <a:cs typeface="Calibri" pitchFamily="34" charset="-120"/>
+              </a:rPr>
+              <a:t>をご覧ください。</a:t>
             </a:r>
             <a:endParaRPr lang="en-US" sz="1050" dirty="0"/>
           </a:p>
@@ -5193,7 +5613,7 @@
       </p:sp>
       <p:pic>
         <p:nvPicPr>
-          <p:cNvPr id="15" name="Image 0" descr="C:\Users\sato\Desktop\enque\docs\images\o-dashboard-top.png">    </p:cNvPr>
+          <p:cNvPr id="23" name="Image 0" descr="C:\Users\sato\Desktop\enque\docs\images\o-dashboard-top.png">    </p:cNvPr>
           <p:cNvPicPr>
             <a:picLocks noChangeAspect="1"/>
           </p:cNvPicPr>
@@ -5207,8 +5627,8 @@
         </p:blipFill>
         <p:spPr>
           <a:xfrm>
-            <a:off x="566928" y="4227894"/>
-            <a:ext cx="6428232" cy="1582585"/>
+            <a:off x="566928" y="5806123"/>
+            <a:ext cx="6428232" cy="2202567"/>
           </a:xfrm>
           <a:prstGeom prst="rect">
             <a:avLst/>
@@ -5217,13 +5637,13 @@
       </p:pic>
       <p:sp>
         <p:nvSpPr>
-          <p:cNvPr id="16" name="Text 13"/>
-          <p:cNvSpPr txBox="1"/>
-          <p:nvPr/>
-        </p:nvSpPr>
-        <p:spPr>
-          <a:xfrm>
-            <a:off x="566928" y="5865343"/>
+          <p:cNvPr id="24" name="Text 21"/>
+          <p:cNvSpPr txBox="1"/>
+          <p:nvPr/>
+        </p:nvSpPr>
+        <p:spPr>
+          <a:xfrm>
+            <a:off x="566928" y="8063553"/>
             <a:ext cx="6428232" cy="274320"/>
           </a:xfrm>
           <a:prstGeom prst="rect">
@@ -5256,7 +5676,7 @@
       </p:sp>
       <p:sp>
         <p:nvSpPr>
-          <p:cNvPr id="17" name="Text 14"/>
+          <p:cNvPr id="25" name="Text 22"/>
           <p:cNvSpPr txBox="1"/>
           <p:nvPr/>
         </p:nvSpPr>

--- a/docs/manual-organizer.pptx
+++ b/docs/manual-organizer.pptx
@@ -24,9 +24,10 @@
     <p:sldId id="272" r:id="rId18"/>
     <p:sldId id="273" r:id="rId19"/>
     <p:sldId id="274" r:id="rId20"/>
+    <p:sldId id="275" r:id="rId21"/>
   </p:sldIdLst>
   <p:notesMasterIdLst>
-    <p:notesMasterId r:id="rId21"/>
+    <p:notesMasterId r:id="rId22"/>
   </p:notesMasterIdLst>
   <p:sldSz cx="7562088" cy="10689336"/>
   <p:notesSz cx="10689336" cy="7562088"/>
@@ -1512,6 +1513,94 @@
             <a:fld id="{F7021451-1387-4CA6-816F-3879F97B5CBC}" type="slidenum">
               <a:rPr lang="en-US"/>
               <a:t>2</a:t>
+            </a:fld>
+            <a:endParaRPr lang="en-US"/>
+          </a:p>
+        </p:txBody>
+      </p:sp>
+    </p:spTree>
+    <p:extLst>
+      <p:ext uri="{BB962C8B-B14F-4D97-AF65-F5344CB8AC3E}">
+        <p14:creationId xmlns:p14="http://schemas.microsoft.com/office/powerpoint/2010/main" val="1024086991"/>
+      </p:ext>
+    </p:extLst>
+  </p:cSld>
+  <p:clrMapOvr>
+    <a:masterClrMapping/>
+  </p:clrMapOvr>
+</p:notes>
+</file>
+
+<file path=ppt/notesSlides/notesSlide20.xml><?xml version="1.0" encoding="utf-8"?>
+<p:notes xmlns:a="http://schemas.openxmlformats.org/drawingml/2006/main" xmlns:r="http://schemas.openxmlformats.org/officeDocument/2006/relationships" xmlns:p="http://schemas.openxmlformats.org/presentationml/2006/main">
+  <p:cSld>
+    <p:spTree>
+      <p:nvGrpSpPr>
+        <p:cNvPr id="1" name=""/>
+        <p:cNvGrpSpPr/>
+        <p:nvPr/>
+      </p:nvGrpSpPr>
+      <p:grpSpPr>
+        <a:xfrm>
+          <a:off x="0" y="0"/>
+          <a:ext cx="0" cy="0"/>
+          <a:chOff x="0" y="0"/>
+          <a:chExt cx="0" cy="0"/>
+        </a:xfrm>
+      </p:grpSpPr>
+      <p:sp>
+        <p:nvSpPr>
+          <p:cNvPr id="2" name="Slide Image Placeholder 1"/>
+          <p:cNvSpPr>
+            <a:spLocks noGrp="1" noRot="1" noChangeAspect="1"/>
+          </p:cNvSpPr>
+          <p:nvPr>
+            <p:ph type="sldImg"/>
+          </p:nvPr>
+        </p:nvSpPr>
+        <p:spPr/>
+      </p:sp>
+      <p:sp>
+        <p:nvSpPr>
+          <p:cNvPr id="3" name="Notes Placeholder 2"/>
+          <p:cNvSpPr>
+            <a:spLocks noGrp="1"/>
+          </p:cNvSpPr>
+          <p:nvPr>
+            <p:ph type="body" idx="1"/>
+          </p:nvPr>
+        </p:nvSpPr>
+        <p:spPr/>
+        <p:txBody>
+          <a:bodyPr/>
+          <a:lstStyle/>
+          <a:p>
+            <a:r>
+              <a:rPr lang="en-US" dirty="0"/>
+              <a:t/>
+            </a:r>
+            <a:endParaRPr lang="en-US" dirty="0"/>
+          </a:p>
+        </p:txBody>
+      </p:sp>
+      <p:sp>
+        <p:nvSpPr>
+          <p:cNvPr id="4" name="Slide Number Placeholder 3"/>
+          <p:cNvSpPr>
+            <a:spLocks noGrp="1"/>
+          </p:cNvSpPr>
+          <p:nvPr>
+            <p:ph type="sldNum" sz="quarter" idx="10"/>
+          </p:nvPr>
+        </p:nvSpPr>
+        <p:spPr/>
+        <p:txBody>
+          <a:bodyPr/>
+          <a:lstStyle/>
+          <a:p>
+            <a:fld id="{F7021451-1387-4CA6-816F-3879F97B5CBC}" type="slidenum">
+              <a:rPr lang="en-US"/>
+              <a:t>20</a:t>
             </a:fld>
             <a:endParaRPr lang="en-US"/>
           </a:p>
@@ -4787,7 +4876,7 @@
                 <a:ea typeface="Calibri" pitchFamily="34" charset="-122"/>
                 <a:cs typeface="Calibri" pitchFamily="34" charset="-120"/>
               </a:rPr>
-              <a:t>：各企業の回答者数を足した数（1人が3社回れば3人）</a:t>
+              <a:t>：アンケートで聞いた来場人数の合計（1組3人が3社回れば9人）</a:t>
             </a:r>
             <a:endParaRPr lang="en-US" sz="1100" dirty="0"/>
           </a:p>
@@ -4830,7 +4919,7 @@
                 <a:ea typeface="Calibri" pitchFamily="34" charset="-122"/>
                 <a:cs typeface="Calibri" pitchFamily="34" charset="-120"/>
               </a:rPr>
-              <a:t>総回答数</a:t>
+              <a:t>実来場者（推計）</a:t>
             </a:r>
             <a:pPr indent="0" marL="0">
               <a:lnSpc>
@@ -4847,7 +4936,7 @@
                 <a:ea typeface="Calibri" pitchFamily="34" charset="-122"/>
                 <a:cs typeface="Calibri" pitchFamily="34" charset="-120"/>
               </a:rPr>
-              <a:t>（重複を除いた件数）</a:t>
+              <a:t>：同じ来場者を1回だけ数えた人数</a:t>
             </a:r>
             <a:endParaRPr lang="en-US" sz="1100" dirty="0"/>
           </a:p>
@@ -4890,7 +4979,7 @@
                 <a:ea typeface="Calibri" pitchFamily="34" charset="-122"/>
                 <a:cs typeface="Calibri" pitchFamily="34" charset="-120"/>
               </a:rPr>
-              <a:t>平均訪問企業数</a:t>
+              <a:t>総回答数</a:t>
             </a:r>
             <a:pPr indent="0" marL="0">
               <a:lnSpc>
@@ -4907,7 +4996,7 @@
                 <a:ea typeface="Calibri" pitchFamily="34" charset="-122"/>
                 <a:cs typeface="Calibri" pitchFamily="34" charset="-120"/>
               </a:rPr>
-              <a:t>：1人あたり何社まわったか</a:t>
+              <a:t>（重複を除いた件数）</a:t>
             </a:r>
             <a:endParaRPr lang="en-US" sz="1100" dirty="0"/>
           </a:p>
@@ -4950,7 +5039,7 @@
                 <a:ea typeface="Calibri" pitchFamily="34" charset="-122"/>
                 <a:cs typeface="Calibri" pitchFamily="34" charset="-120"/>
               </a:rPr>
-              <a:t>メール登録</a:t>
+              <a:t>平均訪問企業数</a:t>
             </a:r>
             <a:pPr indent="0" marL="0">
               <a:lnSpc>
@@ -4967,7 +5056,7 @@
                 <a:ea typeface="Calibri" pitchFamily="34" charset="-122"/>
                 <a:cs typeface="Calibri" pitchFamily="34" charset="-120"/>
               </a:rPr>
-              <a:t>：総合アンケートの案内先の数</a:t>
+              <a:t>：1人あたり何社まわったか</a:t>
             </a:r>
             <a:endParaRPr lang="en-US" sz="1100" dirty="0"/>
           </a:p>
@@ -5010,6 +5099,66 @@
                 <a:ea typeface="Calibri" pitchFamily="34" charset="-122"/>
                 <a:cs typeface="Calibri" pitchFamily="34" charset="-120"/>
               </a:rPr>
+              <a:t>メール登録</a:t>
+            </a:r>
+            <a:pPr indent="0" marL="0">
+              <a:lnSpc>
+                <a:spcPct val="125000"/>
+              </a:lnSpc>
+              <a:buNone/>
+            </a:pPr>
+            <a:r>
+              <a:rPr lang="en-US" sz="1100" dirty="0">
+                <a:solidFill>
+                  <a:srgbClr val="222222"/>
+                </a:solidFill>
+                <a:latin typeface="Calibri" pitchFamily="34" charset="0"/>
+                <a:ea typeface="Calibri" pitchFamily="34" charset="-122"/>
+                <a:cs typeface="Calibri" pitchFamily="34" charset="-120"/>
+              </a:rPr>
+              <a:t>：総合アンケートの案内先の数</a:t>
+            </a:r>
+            <a:endParaRPr lang="en-US" sz="1100" dirty="0"/>
+          </a:p>
+        </p:txBody>
+      </p:sp>
+      <p:sp>
+        <p:nvSpPr>
+          <p:cNvPr id="12" name="Text 10"/>
+          <p:cNvSpPr txBox="1"/>
+          <p:nvPr/>
+        </p:nvSpPr>
+        <p:spPr>
+          <a:xfrm>
+            <a:off x="713232" y="3705352"/>
+            <a:ext cx="6281928" cy="257429"/>
+          </a:xfrm>
+          <a:prstGeom prst="rect">
+            <a:avLst/>
+          </a:prstGeom>
+          <a:noFill/>
+          <a:ln/>
+        </p:spPr>
+        <p:txBody>
+          <a:bodyPr wrap="square" lIns="0" tIns="0" rIns="0" bIns="0" rtlCol="0" anchor="t"/>
+          <a:lstStyle/>
+          <a:p>
+            <a:pPr marL="342900" indent="-342900">
+              <a:lnSpc>
+                <a:spcPct val="125000"/>
+              </a:lnSpc>
+              <a:buSzPct val="100000"/>
+              <a:buChar char="●"/>
+            </a:pPr>
+            <a:r>
+              <a:rPr lang="en-US" sz="1100" b="1" dirty="0">
+                <a:solidFill>
+                  <a:srgbClr val="222222"/>
+                </a:solidFill>
+                <a:latin typeface="Calibri" pitchFamily="34" charset="0"/>
+                <a:ea typeface="Calibri" pitchFamily="34" charset="-122"/>
+                <a:cs typeface="Calibri" pitchFamily="34" charset="-120"/>
+              </a:rPr>
               <a:t>交換コード</a:t>
             </a:r>
             <a:pPr indent="0" marL="0">
@@ -5035,13 +5184,13 @@
       </p:sp>
       <p:sp>
         <p:nvSpPr>
-          <p:cNvPr id="12" name="Text 10"/>
-          <p:cNvSpPr txBox="1"/>
-          <p:nvPr/>
-        </p:nvSpPr>
-        <p:spPr>
-          <a:xfrm>
-            <a:off x="566928" y="3705352"/>
+          <p:cNvPr id="13" name="Text 11"/>
+          <p:cNvSpPr txBox="1"/>
+          <p:nvPr/>
+        </p:nvSpPr>
+        <p:spPr>
+          <a:xfrm>
+            <a:off x="566928" y="3981069"/>
             <a:ext cx="6428232" cy="257429"/>
           </a:xfrm>
           <a:prstGeom prst="rect">
@@ -5137,7 +5286,7 @@
                 <a:ea typeface="Calibri" pitchFamily="34" charset="-122"/>
                 <a:cs typeface="Calibri" pitchFamily="34" charset="-120"/>
               </a:rPr>
-              <a:t>の一覧が出ます。一覧の最下段に合計行があり、</a:t>
+              <a:t>の一覧が出ます。一覧の最下段の合計行にある</a:t>
             </a:r>
             <a:endParaRPr lang="en-US" sz="1100" dirty="0"/>
           </a:p>
@@ -5145,13 +5294,13 @@
       </p:sp>
       <p:sp>
         <p:nvSpPr>
-          <p:cNvPr id="13" name="Text 11"/>
-          <p:cNvSpPr txBox="1"/>
-          <p:nvPr/>
-        </p:nvSpPr>
-        <p:spPr>
-          <a:xfrm>
-            <a:off x="566928" y="3999357"/>
+          <p:cNvPr id="14" name="Text 12"/>
+          <p:cNvSpPr txBox="1"/>
+          <p:nvPr/>
+        </p:nvSpPr>
+        <p:spPr>
+          <a:xfrm>
+            <a:off x="566928" y="4275074"/>
             <a:ext cx="6428232" cy="257429"/>
           </a:xfrm>
           <a:prstGeom prst="rect">
@@ -5179,7 +5328,7 @@
                 <a:ea typeface="Calibri" pitchFamily="34" charset="-122"/>
                 <a:cs typeface="Calibri" pitchFamily="34" charset="-120"/>
               </a:rPr>
-              <a:t>「回答者数」の合計が</a:t>
+              <a:t>「回答者数」の合計は</a:t>
             </a:r>
             <a:pPr indent="0" marL="0">
               <a:lnSpc>
@@ -5196,7 +5345,7 @@
                 <a:ea typeface="Calibri" pitchFamily="34" charset="-122"/>
                 <a:cs typeface="Calibri" pitchFamily="34" charset="-120"/>
               </a:rPr>
-              <a:t>のべ来場者</a:t>
+              <a:t>のべ訪問数</a:t>
             </a:r>
             <a:pPr indent="0" marL="0">
               <a:lnSpc>
@@ -5213,7 +5362,7 @@
                 <a:ea typeface="Calibri" pitchFamily="34" charset="-122"/>
                 <a:cs typeface="Calibri" pitchFamily="34" charset="-120"/>
               </a:rPr>
-              <a:t>と一致します。</a:t>
+              <a:t>（何社ぶんの回答が集まったか）です。</a:t>
             </a:r>
             <a:endParaRPr lang="en-US" sz="1100" dirty="0"/>
           </a:p>
@@ -5221,13 +5370,13 @@
       </p:sp>
       <p:sp>
         <p:nvSpPr>
-          <p:cNvPr id="14" name="Shape 12"/>
+          <p:cNvPr id="15" name="Shape 13"/>
           <p:cNvSpPr/>
           <p:nvPr/>
         </p:nvSpPr>
         <p:spPr>
           <a:xfrm>
-            <a:off x="566928" y="4293362"/>
+            <a:off x="566928" y="4569079"/>
             <a:ext cx="6428232" cy="431102"/>
           </a:xfrm>
           <a:prstGeom prst="roundRect">
@@ -5248,13 +5397,13 @@
       </p:sp>
       <p:sp>
         <p:nvSpPr>
-          <p:cNvPr id="15" name="Text 13"/>
-          <p:cNvSpPr txBox="1"/>
-          <p:nvPr/>
-        </p:nvSpPr>
-        <p:spPr>
-          <a:xfrm>
-            <a:off x="658368" y="4384802"/>
+          <p:cNvPr id="16" name="Text 14"/>
+          <p:cNvSpPr txBox="1"/>
+          <p:nvPr/>
+        </p:nvSpPr>
+        <p:spPr>
+          <a:xfrm>
+            <a:off x="658368" y="4660519"/>
             <a:ext cx="237744" cy="237744"/>
           </a:xfrm>
           <a:prstGeom prst="rect">
@@ -5287,13 +5436,13 @@
       </p:sp>
       <p:sp>
         <p:nvSpPr>
-          <p:cNvPr id="16" name="Text 14"/>
-          <p:cNvSpPr txBox="1"/>
-          <p:nvPr/>
-        </p:nvSpPr>
-        <p:spPr>
-          <a:xfrm>
-            <a:off x="950976" y="4403090"/>
+          <p:cNvPr id="17" name="Text 15"/>
+          <p:cNvSpPr txBox="1"/>
+          <p:nvPr/>
+        </p:nvSpPr>
+        <p:spPr>
+          <a:xfrm>
+            <a:off x="950976" y="4678807"/>
             <a:ext cx="5925312" cy="248221"/>
           </a:xfrm>
           <a:prstGeom prst="rect">
@@ -5329,13 +5478,13 @@
       </p:sp>
       <p:sp>
         <p:nvSpPr>
-          <p:cNvPr id="17" name="Shape 15"/>
+          <p:cNvPr id="18" name="Shape 16"/>
           <p:cNvSpPr/>
           <p:nvPr/>
         </p:nvSpPr>
         <p:spPr>
           <a:xfrm>
-            <a:off x="566928" y="4797616"/>
+            <a:off x="566928" y="5073333"/>
             <a:ext cx="6428232" cy="431102"/>
           </a:xfrm>
           <a:prstGeom prst="roundRect">
@@ -5356,13 +5505,13 @@
       </p:sp>
       <p:sp>
         <p:nvSpPr>
-          <p:cNvPr id="18" name="Text 16"/>
-          <p:cNvSpPr txBox="1"/>
-          <p:nvPr/>
-        </p:nvSpPr>
-        <p:spPr>
-          <a:xfrm>
-            <a:off x="658368" y="4889056"/>
+          <p:cNvPr id="19" name="Text 17"/>
+          <p:cNvSpPr txBox="1"/>
+          <p:nvPr/>
+        </p:nvSpPr>
+        <p:spPr>
+          <a:xfrm>
+            <a:off x="658368" y="5164773"/>
             <a:ext cx="237744" cy="237744"/>
           </a:xfrm>
           <a:prstGeom prst="rect">
@@ -5395,13 +5544,13 @@
       </p:sp>
       <p:sp>
         <p:nvSpPr>
-          <p:cNvPr id="19" name="Text 17"/>
-          <p:cNvSpPr txBox="1"/>
-          <p:nvPr/>
-        </p:nvSpPr>
-        <p:spPr>
-          <a:xfrm>
-            <a:off x="950976" y="4907344"/>
+          <p:cNvPr id="20" name="Text 18"/>
+          <p:cNvSpPr txBox="1"/>
+          <p:nvPr/>
+        </p:nvSpPr>
+        <p:spPr>
+          <a:xfrm>
+            <a:off x="950976" y="5183061"/>
             <a:ext cx="5925312" cy="248221"/>
           </a:xfrm>
           <a:prstGeom prst="rect">
@@ -5429,41 +5578,7 @@
                 <a:ea typeface="Calibri" pitchFamily="34" charset="-122"/>
                 <a:cs typeface="Calibri" pitchFamily="34" charset="-120"/>
               </a:rPr>
-              <a:t>来場者数の見方：実人数を知りたいときは</a:t>
-            </a:r>
-            <a:pPr indent="0" marL="0">
-              <a:lnSpc>
-                <a:spcPct val="120000"/>
-              </a:lnSpc>
-              <a:buNone/>
-            </a:pPr>
-            <a:r>
-              <a:rPr lang="en-US" sz="1050" b="1" dirty="0">
-                <a:solidFill>
-                  <a:srgbClr val="222222"/>
-                </a:solidFill>
-                <a:latin typeface="Calibri" pitchFamily="34" charset="0"/>
-                <a:ea typeface="Calibri" pitchFamily="34" charset="-122"/>
-                <a:cs typeface="Calibri" pitchFamily="34" charset="-120"/>
-              </a:rPr>
-              <a:t>回答した来場者</a:t>
-            </a:r>
-            <a:pPr indent="0" marL="0">
-              <a:lnSpc>
-                <a:spcPct val="120000"/>
-              </a:lnSpc>
-              <a:buNone/>
-            </a:pPr>
-            <a:r>
-              <a:rPr lang="en-US" sz="1050" dirty="0">
-                <a:solidFill>
-                  <a:srgbClr val="222222"/>
-                </a:solidFill>
-                <a:latin typeface="Calibri" pitchFamily="34" charset="0"/>
-                <a:ea typeface="Calibri" pitchFamily="34" charset="-122"/>
-                <a:cs typeface="Calibri" pitchFamily="34" charset="-120"/>
-              </a:rPr>
-              <a:t>、各社の集客を足し合わせた延べ人数を</a:t>
+              <a:t>来場人数は任意回答です。未回答のぶんは、同じ来場者が別の企業で答えた人数、それも無ければ</a:t>
             </a:r>
             <a:endParaRPr lang="en-US" sz="1050" dirty="0"/>
           </a:p>
@@ -5471,13 +5586,13 @@
       </p:sp>
       <p:sp>
         <p:nvSpPr>
-          <p:cNvPr id="20" name="Shape 18"/>
+          <p:cNvPr id="21" name="Shape 19"/>
           <p:cNvSpPr/>
           <p:nvPr/>
         </p:nvSpPr>
         <p:spPr>
           <a:xfrm>
-            <a:off x="566928" y="5301869"/>
+            <a:off x="566928" y="5577586"/>
             <a:ext cx="6428232" cy="431102"/>
           </a:xfrm>
           <a:prstGeom prst="roundRect">
@@ -5498,13 +5613,13 @@
       </p:sp>
       <p:sp>
         <p:nvSpPr>
-          <p:cNvPr id="21" name="Text 19"/>
-          <p:cNvSpPr txBox="1"/>
-          <p:nvPr/>
-        </p:nvSpPr>
-        <p:spPr>
-          <a:xfrm>
-            <a:off x="658368" y="5393309"/>
+          <p:cNvPr id="22" name="Text 20"/>
+          <p:cNvSpPr txBox="1"/>
+          <p:nvPr/>
+        </p:nvSpPr>
+        <p:spPr>
+          <a:xfrm>
+            <a:off x="658368" y="5669026"/>
             <a:ext cx="237744" cy="237744"/>
           </a:xfrm>
           <a:prstGeom prst="rect">
@@ -5537,13 +5652,13 @@
       </p:sp>
       <p:sp>
         <p:nvSpPr>
-          <p:cNvPr id="22" name="Text 20"/>
-          <p:cNvSpPr txBox="1"/>
-          <p:nvPr/>
-        </p:nvSpPr>
-        <p:spPr>
-          <a:xfrm>
-            <a:off x="950976" y="5411597"/>
+          <p:cNvPr id="23" name="Text 21"/>
+          <p:cNvSpPr txBox="1"/>
+          <p:nvPr/>
+        </p:nvSpPr>
+        <p:spPr>
+          <a:xfrm>
+            <a:off x="950976" y="5687314"/>
             <a:ext cx="5925312" cy="248221"/>
           </a:xfrm>
           <a:prstGeom prst="rect">
@@ -5571,41 +5686,7 @@
                 <a:ea typeface="Calibri" pitchFamily="34" charset="-122"/>
                 <a:cs typeface="Calibri" pitchFamily="34" charset="-120"/>
               </a:rPr>
-              <a:t>知りたいときは</a:t>
-            </a:r>
-            <a:pPr indent="0" marL="0">
-              <a:lnSpc>
-                <a:spcPct val="120000"/>
-              </a:lnSpc>
-              <a:buNone/>
-            </a:pPr>
-            <a:r>
-              <a:rPr lang="en-US" sz="1050" b="1" dirty="0">
-                <a:solidFill>
-                  <a:srgbClr val="222222"/>
-                </a:solidFill>
-                <a:latin typeface="Calibri" pitchFamily="34" charset="0"/>
-                <a:ea typeface="Calibri" pitchFamily="34" charset="-122"/>
-                <a:cs typeface="Calibri" pitchFamily="34" charset="-120"/>
-              </a:rPr>
-              <a:t>のべ来場者</a:t>
-            </a:r>
-            <a:pPr indent="0" marL="0">
-              <a:lnSpc>
-                <a:spcPct val="120000"/>
-              </a:lnSpc>
-              <a:buNone/>
-            </a:pPr>
-            <a:r>
-              <a:rPr lang="en-US" sz="1050" dirty="0">
-                <a:solidFill>
-                  <a:srgbClr val="222222"/>
-                </a:solidFill>
-                <a:latin typeface="Calibri" pitchFamily="34" charset="0"/>
-                <a:ea typeface="Calibri" pitchFamily="34" charset="-122"/>
-                <a:cs typeface="Calibri" pitchFamily="34" charset="-120"/>
-              </a:rPr>
-              <a:t>をご覧ください。</a:t>
+              <a:t>回答があったぶんの平均を当てはめて計算しています（回答率も画面に出ます）。</a:t>
             </a:r>
             <a:endParaRPr lang="en-US" sz="1050" dirty="0"/>
           </a:p>
@@ -5613,7 +5694,7 @@
       </p:sp>
       <p:pic>
         <p:nvPicPr>
-          <p:cNvPr id="23" name="Image 0" descr="C:\Users\sato\Desktop\enque\docs\images\o-dashboard-top.png">    </p:cNvPr>
+          <p:cNvPr id="24" name="Image 0" descr="C:\Users\sato\Desktop\enque\docs\images\o-dashboard-top.png">    </p:cNvPr>
           <p:cNvPicPr>
             <a:picLocks noChangeAspect="1"/>
           </p:cNvPicPr>
@@ -5627,8 +5708,8 @@
         </p:blipFill>
         <p:spPr>
           <a:xfrm>
-            <a:off x="566928" y="5806123"/>
-            <a:ext cx="6428232" cy="2202567"/>
+            <a:off x="566928" y="6081840"/>
+            <a:ext cx="6428232" cy="2316774"/>
           </a:xfrm>
           <a:prstGeom prst="rect">
             <a:avLst/>
@@ -5637,13 +5718,13 @@
       </p:pic>
       <p:sp>
         <p:nvSpPr>
-          <p:cNvPr id="24" name="Text 21"/>
-          <p:cNvSpPr txBox="1"/>
-          <p:nvPr/>
-        </p:nvSpPr>
-        <p:spPr>
-          <a:xfrm>
-            <a:off x="566928" y="8063553"/>
+          <p:cNvPr id="25" name="Text 22"/>
+          <p:cNvSpPr txBox="1"/>
+          <p:nvPr/>
+        </p:nvSpPr>
+        <p:spPr>
+          <a:xfrm>
+            <a:off x="566928" y="8453477"/>
             <a:ext cx="6428232" cy="274320"/>
           </a:xfrm>
           <a:prstGeom prst="rect">
@@ -5676,7 +5757,7 @@
       </p:sp>
       <p:sp>
         <p:nvSpPr>
-          <p:cNvPr id="25" name="Text 22"/>
+          <p:cNvPr id="26" name="Text 23"/>
           <p:cNvSpPr txBox="1"/>
           <p:nvPr/>
         </p:nvSpPr>
@@ -6556,7 +6637,7 @@
                 <a:ea typeface="Calibri" pitchFamily="34" charset="-122"/>
                 <a:cs typeface="Calibri" pitchFamily="34" charset="-120"/>
               </a:rPr>
-              <a:t>終了後1：受付を締めて総合アンケートを用意する</a:t>
+              <a:t>当日：来場人数を集計する</a:t>
             </a:r>
             <a:endParaRPr lang="en-US" sz="2200" dirty="0"/>
           </a:p>
@@ -6564,423 +6645,401 @@
       </p:sp>
       <p:sp>
         <p:nvSpPr>
-          <p:cNvPr id="4" name="Shape 2"/>
+          <p:cNvPr id="4" name="Text 2"/>
+          <p:cNvSpPr txBox="1"/>
+          <p:nvPr/>
+        </p:nvSpPr>
+        <p:spPr>
+          <a:xfrm>
+            <a:off x="566928" y="1481328"/>
+            <a:ext cx="6428232" cy="257429"/>
+          </a:xfrm>
+          <a:prstGeom prst="rect">
+            <a:avLst/>
+          </a:prstGeom>
+          <a:noFill/>
+          <a:ln/>
+        </p:spPr>
+        <p:txBody>
+          <a:bodyPr wrap="square" lIns="0" tIns="0" rIns="0" bIns="0" rtlCol="0" anchor="t"/>
+          <a:lstStyle/>
+          <a:p>
+            <a:pPr indent="0" marL="0">
+              <a:lnSpc>
+                <a:spcPct val="125000"/>
+              </a:lnSpc>
+              <a:buNone/>
+            </a:pPr>
+            <a:r>
+              <a:rPr lang="en-US" sz="1100" dirty="0">
+                <a:solidFill>
+                  <a:srgbClr val="222222"/>
+                </a:solidFill>
+                <a:latin typeface="Calibri" pitchFamily="34" charset="0"/>
+                <a:ea typeface="Calibri" pitchFamily="34" charset="-122"/>
+                <a:cs typeface="Calibri" pitchFamily="34" charset="-120"/>
+              </a:rPr>
+              <a:t>アンケートに「</a:t>
+            </a:r>
+            <a:pPr indent="0" marL="0">
+              <a:lnSpc>
+                <a:spcPct val="125000"/>
+              </a:lnSpc>
+              <a:buNone/>
+            </a:pPr>
+            <a:r>
+              <a:rPr lang="en-US" sz="1100" b="1" dirty="0">
+                <a:solidFill>
+                  <a:srgbClr val="222222"/>
+                </a:solidFill>
+                <a:latin typeface="Calibri" pitchFamily="34" charset="0"/>
+                <a:ea typeface="Calibri" pitchFamily="34" charset="-122"/>
+                <a:cs typeface="Calibri" pitchFamily="34" charset="-120"/>
+              </a:rPr>
+              <a:t>何人で来られましたか</a:t>
+            </a:r>
+            <a:pPr indent="0" marL="0">
+              <a:lnSpc>
+                <a:spcPct val="125000"/>
+              </a:lnSpc>
+              <a:buNone/>
+            </a:pPr>
+            <a:r>
+              <a:rPr lang="en-US" sz="1100" dirty="0">
+                <a:solidFill>
+                  <a:srgbClr val="222222"/>
+                </a:solidFill>
+                <a:latin typeface="Calibri" pitchFamily="34" charset="0"/>
+                <a:ea typeface="Calibri" pitchFamily="34" charset="-122"/>
+                <a:cs typeface="Calibri" pitchFamily="34" charset="-120"/>
+              </a:rPr>
+              <a:t>」の設問（種類は</a:t>
+            </a:r>
+            <a:pPr indent="0" marL="0">
+              <a:lnSpc>
+                <a:spcPct val="125000"/>
+              </a:lnSpc>
+              <a:buNone/>
+            </a:pPr>
+            <a:r>
+              <a:rPr lang="en-US" sz="1100" b="1" dirty="0">
+                <a:solidFill>
+                  <a:srgbClr val="222222"/>
+                </a:solidFill>
+                <a:latin typeface="Calibri" pitchFamily="34" charset="0"/>
+                <a:ea typeface="Calibri" pitchFamily="34" charset="-122"/>
+                <a:cs typeface="Calibri" pitchFamily="34" charset="-120"/>
+              </a:rPr>
+              <a:t>数値入力</a:t>
+            </a:r>
+            <a:pPr indent="0" marL="0">
+              <a:lnSpc>
+                <a:spcPct val="125000"/>
+              </a:lnSpc>
+              <a:buNone/>
+            </a:pPr>
+            <a:r>
+              <a:rPr lang="en-US" sz="1100" dirty="0">
+                <a:solidFill>
+                  <a:srgbClr val="222222"/>
+                </a:solidFill>
+                <a:latin typeface="Calibri" pitchFamily="34" charset="0"/>
+                <a:ea typeface="Calibri" pitchFamily="34" charset="-122"/>
+                <a:cs typeface="Calibri" pitchFamily="34" charset="-120"/>
+              </a:rPr>
+              <a:t>）を入れて、設問編集画面で</a:t>
+            </a:r>
+            <a:endParaRPr lang="en-US" sz="1100" dirty="0"/>
+          </a:p>
+        </p:txBody>
+      </p:sp>
+      <p:sp>
+        <p:nvSpPr>
+          <p:cNvPr id="5" name="Text 3"/>
+          <p:cNvSpPr txBox="1"/>
+          <p:nvPr/>
+        </p:nvSpPr>
+        <p:spPr>
+          <a:xfrm>
+            <a:off x="566928" y="1775333"/>
+            <a:ext cx="6428232" cy="257429"/>
+          </a:xfrm>
+          <a:prstGeom prst="rect">
+            <a:avLst/>
+          </a:prstGeom>
+          <a:noFill/>
+          <a:ln/>
+        </p:spPr>
+        <p:txBody>
+          <a:bodyPr wrap="square" lIns="0" tIns="0" rIns="0" bIns="0" rtlCol="0" anchor="t"/>
+          <a:lstStyle/>
+          <a:p>
+            <a:pPr indent="0" marL="0">
+              <a:lnSpc>
+                <a:spcPct val="125000"/>
+              </a:lnSpc>
+              <a:buNone/>
+            </a:pPr>
+            <a:r>
+              <a:rPr lang="en-US" sz="1100" b="1" dirty="0">
+                <a:solidFill>
+                  <a:srgbClr val="222222"/>
+                </a:solidFill>
+                <a:latin typeface="Calibri" pitchFamily="34" charset="0"/>
+                <a:ea typeface="Calibri" pitchFamily="34" charset="-122"/>
+                <a:cs typeface="Calibri" pitchFamily="34" charset="-120"/>
+              </a:rPr>
+              <a:t>「この回答を来場人数として集計する」</a:t>
+            </a:r>
+            <a:pPr indent="0" marL="0">
+              <a:lnSpc>
+                <a:spcPct val="125000"/>
+              </a:lnSpc>
+              <a:buNone/>
+            </a:pPr>
+            <a:r>
+              <a:rPr lang="en-US" sz="1100" dirty="0">
+                <a:solidFill>
+                  <a:srgbClr val="222222"/>
+                </a:solidFill>
+                <a:latin typeface="Calibri" pitchFamily="34" charset="0"/>
+                <a:ea typeface="Calibri" pitchFamily="34" charset="-122"/>
+                <a:cs typeface="Calibri" pitchFamily="34" charset="-120"/>
+              </a:rPr>
+              <a:t>にチェックを入れると、人数が集計されます。</a:t>
+            </a:r>
+            <a:endParaRPr lang="en-US" sz="1100" dirty="0"/>
+          </a:p>
+        </p:txBody>
+      </p:sp>
+      <p:sp>
+        <p:nvSpPr>
+          <p:cNvPr id="6" name="Text 4"/>
+          <p:cNvSpPr txBox="1"/>
+          <p:nvPr/>
+        </p:nvSpPr>
+        <p:spPr>
+          <a:xfrm>
+            <a:off x="713232" y="2069338"/>
+            <a:ext cx="6281928" cy="257429"/>
+          </a:xfrm>
+          <a:prstGeom prst="rect">
+            <a:avLst/>
+          </a:prstGeom>
+          <a:noFill/>
+          <a:ln/>
+        </p:spPr>
+        <p:txBody>
+          <a:bodyPr wrap="square" lIns="0" tIns="0" rIns="0" bIns="0" rtlCol="0" anchor="t"/>
+          <a:lstStyle/>
+          <a:p>
+            <a:pPr marL="342900" indent="-342900">
+              <a:lnSpc>
+                <a:spcPct val="125000"/>
+              </a:lnSpc>
+              <a:buSzPct val="100000"/>
+              <a:buChar char="●"/>
+            </a:pPr>
+            <a:r>
+              <a:rPr lang="en-US" sz="1100" b="1" dirty="0">
+                <a:solidFill>
+                  <a:srgbClr val="222222"/>
+                </a:solidFill>
+                <a:latin typeface="Calibri" pitchFamily="34" charset="0"/>
+                <a:ea typeface="Calibri" pitchFamily="34" charset="-122"/>
+                <a:cs typeface="Calibri" pitchFamily="34" charset="-120"/>
+              </a:rPr>
+              <a:t>のべ来場者</a:t>
+            </a:r>
+            <a:pPr indent="0" marL="0">
+              <a:lnSpc>
+                <a:spcPct val="125000"/>
+              </a:lnSpc>
+              <a:buNone/>
+            </a:pPr>
+            <a:r>
+              <a:rPr lang="en-US" sz="1100" dirty="0">
+                <a:solidFill>
+                  <a:srgbClr val="222222"/>
+                </a:solidFill>
+                <a:latin typeface="Calibri" pitchFamily="34" charset="0"/>
+                <a:ea typeface="Calibri" pitchFamily="34" charset="-122"/>
+                <a:cs typeface="Calibri" pitchFamily="34" charset="-120"/>
+              </a:rPr>
+              <a:t>：回答ごとの人数を足した数（1組3人が3社回れば9人）。出展社への報告に使います</a:t>
+            </a:r>
+            <a:endParaRPr lang="en-US" sz="1100" dirty="0"/>
+          </a:p>
+        </p:txBody>
+      </p:sp>
+      <p:sp>
+        <p:nvSpPr>
+          <p:cNvPr id="7" name="Text 5"/>
+          <p:cNvSpPr txBox="1"/>
+          <p:nvPr/>
+        </p:nvSpPr>
+        <p:spPr>
+          <a:xfrm>
+            <a:off x="713232" y="2345055"/>
+            <a:ext cx="6281928" cy="257429"/>
+          </a:xfrm>
+          <a:prstGeom prst="rect">
+            <a:avLst/>
+          </a:prstGeom>
+          <a:noFill/>
+          <a:ln/>
+        </p:spPr>
+        <p:txBody>
+          <a:bodyPr wrap="square" lIns="0" tIns="0" rIns="0" bIns="0" rtlCol="0" anchor="t"/>
+          <a:lstStyle/>
+          <a:p>
+            <a:pPr marL="342900" indent="-342900">
+              <a:lnSpc>
+                <a:spcPct val="125000"/>
+              </a:lnSpc>
+              <a:buSzPct val="100000"/>
+              <a:buChar char="●"/>
+            </a:pPr>
+            <a:r>
+              <a:rPr lang="en-US" sz="1100" b="1" dirty="0">
+                <a:solidFill>
+                  <a:srgbClr val="222222"/>
+                </a:solidFill>
+                <a:latin typeface="Calibri" pitchFamily="34" charset="0"/>
+                <a:ea typeface="Calibri" pitchFamily="34" charset="-122"/>
+                <a:cs typeface="Calibri" pitchFamily="34" charset="-120"/>
+              </a:rPr>
+              <a:t>実来場者（推計）</a:t>
+            </a:r>
+            <a:pPr indent="0" marL="0">
+              <a:lnSpc>
+                <a:spcPct val="125000"/>
+              </a:lnSpc>
+              <a:buNone/>
+            </a:pPr>
+            <a:r>
+              <a:rPr lang="en-US" sz="1100" dirty="0">
+                <a:solidFill>
+                  <a:srgbClr val="222222"/>
+                </a:solidFill>
+                <a:latin typeface="Calibri" pitchFamily="34" charset="0"/>
+                <a:ea typeface="Calibri" pitchFamily="34" charset="-122"/>
+                <a:cs typeface="Calibri" pitchFamily="34" charset="-120"/>
+              </a:rPr>
+              <a:t>：同じ来場者を1回だけ数えた人数。会場に来た実人数の目安です</a:t>
+            </a:r>
+            <a:endParaRPr lang="en-US" sz="1100" dirty="0"/>
+          </a:p>
+        </p:txBody>
+      </p:sp>
+      <p:sp>
+        <p:nvSpPr>
+          <p:cNvPr id="8" name="Text 6"/>
+          <p:cNvSpPr txBox="1"/>
+          <p:nvPr/>
+        </p:nvSpPr>
+        <p:spPr>
+          <a:xfrm>
+            <a:off x="713232" y="2620772"/>
+            <a:ext cx="6281928" cy="257429"/>
+          </a:xfrm>
+          <a:prstGeom prst="rect">
+            <a:avLst/>
+          </a:prstGeom>
+          <a:noFill/>
+          <a:ln/>
+        </p:spPr>
+        <p:txBody>
+          <a:bodyPr wrap="square" lIns="0" tIns="0" rIns="0" bIns="0" rtlCol="0" anchor="t"/>
+          <a:lstStyle/>
+          <a:p>
+            <a:pPr marL="342900" indent="-342900">
+              <a:lnSpc>
+                <a:spcPct val="125000"/>
+              </a:lnSpc>
+              <a:buSzPct val="100000"/>
+              <a:buChar char="●"/>
+            </a:pPr>
+            <a:r>
+              <a:rPr lang="en-US" sz="1100" b="1" dirty="0">
+                <a:solidFill>
+                  <a:srgbClr val="222222"/>
+                </a:solidFill>
+                <a:latin typeface="Calibri" pitchFamily="34" charset="0"/>
+                <a:ea typeface="Calibri" pitchFamily="34" charset="-122"/>
+                <a:cs typeface="Calibri" pitchFamily="34" charset="-120"/>
+              </a:rPr>
+              <a:t>平均人数</a:t>
+            </a:r>
+            <a:pPr indent="0" marL="0">
+              <a:lnSpc>
+                <a:spcPct val="125000"/>
+              </a:lnSpc>
+              <a:buNone/>
+            </a:pPr>
+            <a:r>
+              <a:rPr lang="en-US" sz="1100" dirty="0">
+                <a:solidFill>
+                  <a:srgbClr val="222222"/>
+                </a:solidFill>
+                <a:latin typeface="Calibri" pitchFamily="34" charset="0"/>
+                <a:ea typeface="Calibri" pitchFamily="34" charset="-122"/>
+                <a:cs typeface="Calibri" pitchFamily="34" charset="-120"/>
+              </a:rPr>
+              <a:t>と</a:t>
+            </a:r>
+            <a:pPr indent="0" marL="0">
+              <a:lnSpc>
+                <a:spcPct val="125000"/>
+              </a:lnSpc>
+              <a:buNone/>
+            </a:pPr>
+            <a:r>
+              <a:rPr lang="en-US" sz="1100" b="1" dirty="0">
+                <a:solidFill>
+                  <a:srgbClr val="222222"/>
+                </a:solidFill>
+                <a:latin typeface="Calibri" pitchFamily="34" charset="0"/>
+                <a:ea typeface="Calibri" pitchFamily="34" charset="-122"/>
+                <a:cs typeface="Calibri" pitchFamily="34" charset="-120"/>
+              </a:rPr>
+              <a:t>回答率</a:t>
+            </a:r>
+            <a:pPr indent="0" marL="0">
+              <a:lnSpc>
+                <a:spcPct val="125000"/>
+              </a:lnSpc>
+              <a:buNone/>
+            </a:pPr>
+            <a:r>
+              <a:rPr lang="en-US" sz="1100" dirty="0">
+                <a:solidFill>
+                  <a:srgbClr val="222222"/>
+                </a:solidFill>
+                <a:latin typeface="Calibri" pitchFamily="34" charset="0"/>
+                <a:ea typeface="Calibri" pitchFamily="34" charset="-122"/>
+                <a:cs typeface="Calibri" pitchFamily="34" charset="-120"/>
+              </a:rPr>
+              <a:t>もあわせて表示されます</a:t>
+            </a:r>
+            <a:endParaRPr lang="en-US" sz="1100" dirty="0"/>
+          </a:p>
+        </p:txBody>
+      </p:sp>
+      <p:sp>
+        <p:nvSpPr>
+          <p:cNvPr id="9" name="Shape 7"/>
           <p:cNvSpPr/>
           <p:nvPr/>
         </p:nvSpPr>
         <p:spPr>
           <a:xfrm>
-            <a:off x="566928" y="1499616"/>
-            <a:ext cx="274320" cy="274320"/>
-          </a:xfrm>
-          <a:prstGeom prst="ellipse">
-            <a:avLst/>
-          </a:prstGeom>
-          <a:solidFill>
-            <a:srgbClr val="1E2761"/>
-          </a:solidFill>
-          <a:ln/>
-        </p:spPr>
-      </p:sp>
-      <p:sp>
-        <p:nvSpPr>
-          <p:cNvPr id="5" name="Text 3"/>
-          <p:cNvSpPr txBox="1"/>
-          <p:nvPr/>
-        </p:nvSpPr>
-        <p:spPr>
-          <a:xfrm>
-            <a:off x="566928" y="1499616"/>
-            <a:ext cx="274320" cy="274320"/>
-          </a:xfrm>
-          <a:prstGeom prst="rect">
-            <a:avLst/>
-          </a:prstGeom>
-          <a:noFill/>
-          <a:ln/>
-        </p:spPr>
-        <p:txBody>
-          <a:bodyPr wrap="square" lIns="0" tIns="0" rIns="0" bIns="0" rtlCol="0" anchor="ctr"/>
-          <a:lstStyle/>
-          <a:p>
-            <a:pPr algn="ctr" indent="0" marL="0">
-              <a:buNone/>
-            </a:pPr>
-            <a:r>
-              <a:rPr lang="en-US" sz="1100" b="1" dirty="0">
-                <a:solidFill>
-                  <a:srgbClr val="FFFFFF"/>
-                </a:solidFill>
-                <a:latin typeface="Calibri" pitchFamily="34" charset="0"/>
-                <a:ea typeface="Calibri" pitchFamily="34" charset="-122"/>
-                <a:cs typeface="Calibri" pitchFamily="34" charset="-120"/>
-              </a:rPr>
-              <a:t>1</a:t>
-            </a:r>
-            <a:endParaRPr lang="en-US" sz="1100" dirty="0"/>
-          </a:p>
-        </p:txBody>
-      </p:sp>
-      <p:sp>
-        <p:nvSpPr>
-          <p:cNvPr id="6" name="Text 4"/>
-          <p:cNvSpPr txBox="1"/>
-          <p:nvPr/>
-        </p:nvSpPr>
-        <p:spPr>
-          <a:xfrm>
-            <a:off x="969264" y="1481328"/>
-            <a:ext cx="6025896" cy="365760"/>
-          </a:xfrm>
-          <a:prstGeom prst="rect">
-            <a:avLst/>
-          </a:prstGeom>
-          <a:noFill/>
-          <a:ln/>
-        </p:spPr>
-        <p:txBody>
-          <a:bodyPr wrap="square" lIns="0" tIns="0" rIns="0" bIns="0" rtlCol="0" anchor="t"/>
-          <a:lstStyle/>
-          <a:p>
-            <a:pPr indent="0" marL="0">
-              <a:lnSpc>
-                <a:spcPct val="125000"/>
-              </a:lnSpc>
-              <a:buNone/>
-            </a:pPr>
-            <a:r>
-              <a:rPr lang="en-US" sz="1150" dirty="0">
-                <a:solidFill>
-                  <a:srgbClr val="222222"/>
-                </a:solidFill>
-                <a:latin typeface="Calibri" pitchFamily="34" charset="0"/>
-                <a:ea typeface="Calibri" pitchFamily="34" charset="-122"/>
-                <a:cs typeface="Calibri" pitchFamily="34" charset="-120"/>
-              </a:rPr>
-              <a:t>ダッシュボードの「イベント設定」で、状態を</a:t>
-            </a:r>
-            <a:pPr indent="0" marL="0">
-              <a:lnSpc>
-                <a:spcPct val="125000"/>
-              </a:lnSpc>
-              <a:buNone/>
-            </a:pPr>
-            <a:r>
-              <a:rPr lang="en-US" sz="1150" b="1" dirty="0">
-                <a:solidFill>
-                  <a:srgbClr val="222222"/>
-                </a:solidFill>
-                <a:latin typeface="Calibri" pitchFamily="34" charset="0"/>
-                <a:ea typeface="Calibri" pitchFamily="34" charset="-122"/>
-                <a:cs typeface="Calibri" pitchFamily="34" charset="-120"/>
-              </a:rPr>
-              <a:t>「終了（総合アンケート送付）」</a:t>
-            </a:r>
-            <a:pPr indent="0" marL="0">
-              <a:lnSpc>
-                <a:spcPct val="125000"/>
-              </a:lnSpc>
-              <a:buNone/>
-            </a:pPr>
-            <a:r>
-              <a:rPr lang="en-US" sz="1150" dirty="0">
-                <a:solidFill>
-                  <a:srgbClr val="222222"/>
-                </a:solidFill>
-                <a:latin typeface="Calibri" pitchFamily="34" charset="0"/>
-                <a:ea typeface="Calibri" pitchFamily="34" charset="-122"/>
-                <a:cs typeface="Calibri" pitchFamily="34" charset="-120"/>
-              </a:rPr>
-              <a:t>に変える</a:t>
-            </a:r>
-            <a:endParaRPr lang="en-US" sz="1150" dirty="0"/>
-          </a:p>
-        </p:txBody>
-      </p:sp>
-      <p:sp>
-        <p:nvSpPr>
-          <p:cNvPr id="7" name="Shape 5"/>
-          <p:cNvSpPr/>
-          <p:nvPr/>
-        </p:nvSpPr>
-        <p:spPr>
-          <a:xfrm>
-            <a:off x="566928" y="1956816"/>
-            <a:ext cx="274320" cy="274320"/>
-          </a:xfrm>
-          <a:prstGeom prst="ellipse">
-            <a:avLst/>
-          </a:prstGeom>
-          <a:solidFill>
-            <a:srgbClr val="1E2761"/>
-          </a:solidFill>
-          <a:ln/>
-        </p:spPr>
-      </p:sp>
-      <p:sp>
-        <p:nvSpPr>
-          <p:cNvPr id="8" name="Text 6"/>
-          <p:cNvSpPr txBox="1"/>
-          <p:nvPr/>
-        </p:nvSpPr>
-        <p:spPr>
-          <a:xfrm>
-            <a:off x="566928" y="1956816"/>
-            <a:ext cx="274320" cy="274320"/>
-          </a:xfrm>
-          <a:prstGeom prst="rect">
-            <a:avLst/>
-          </a:prstGeom>
-          <a:noFill/>
-          <a:ln/>
-        </p:spPr>
-        <p:txBody>
-          <a:bodyPr wrap="square" lIns="0" tIns="0" rIns="0" bIns="0" rtlCol="0" anchor="ctr"/>
-          <a:lstStyle/>
-          <a:p>
-            <a:pPr algn="ctr" indent="0" marL="0">
-              <a:buNone/>
-            </a:pPr>
-            <a:r>
-              <a:rPr lang="en-US" sz="1100" b="1" dirty="0">
-                <a:solidFill>
-                  <a:srgbClr val="FFFFFF"/>
-                </a:solidFill>
-                <a:latin typeface="Calibri" pitchFamily="34" charset="0"/>
-                <a:ea typeface="Calibri" pitchFamily="34" charset="-122"/>
-                <a:cs typeface="Calibri" pitchFamily="34" charset="-120"/>
-              </a:rPr>
-              <a:t>2</a:t>
-            </a:r>
-            <a:endParaRPr lang="en-US" sz="1100" dirty="0"/>
-          </a:p>
-        </p:txBody>
-      </p:sp>
-      <p:sp>
-        <p:nvSpPr>
-          <p:cNvPr id="9" name="Text 7"/>
-          <p:cNvSpPr txBox="1"/>
-          <p:nvPr/>
-        </p:nvSpPr>
-        <p:spPr>
-          <a:xfrm>
-            <a:off x="969264" y="1938528"/>
-            <a:ext cx="6025896" cy="365760"/>
-          </a:xfrm>
-          <a:prstGeom prst="rect">
-            <a:avLst/>
-          </a:prstGeom>
-          <a:noFill/>
-          <a:ln/>
-        </p:spPr>
-        <p:txBody>
-          <a:bodyPr wrap="square" lIns="0" tIns="0" rIns="0" bIns="0" rtlCol="0" anchor="t"/>
-          <a:lstStyle/>
-          <a:p>
-            <a:pPr indent="0" marL="0">
-              <a:lnSpc>
-                <a:spcPct val="125000"/>
-              </a:lnSpc>
-              <a:buNone/>
-            </a:pPr>
-            <a:r>
-              <a:rPr lang="en-US" sz="1150" dirty="0">
-                <a:solidFill>
-                  <a:srgbClr val="222222"/>
-                </a:solidFill>
-                <a:latin typeface="Calibri" pitchFamily="34" charset="0"/>
-                <a:ea typeface="Calibri" pitchFamily="34" charset="-122"/>
-                <a:cs typeface="Calibri" pitchFamily="34" charset="-120"/>
-              </a:rPr>
-              <a:t>「総合アンケート」の画面で</a:t>
-            </a:r>
-            <a:pPr indent="0" marL="0">
-              <a:lnSpc>
-                <a:spcPct val="125000"/>
-              </a:lnSpc>
-              <a:buNone/>
-            </a:pPr>
-            <a:r>
-              <a:rPr lang="en-US" sz="1150" b="1" dirty="0">
-                <a:solidFill>
-                  <a:srgbClr val="222222"/>
-                </a:solidFill>
-                <a:latin typeface="Calibri" pitchFamily="34" charset="0"/>
-                <a:ea typeface="Calibri" pitchFamily="34" charset="-122"/>
-                <a:cs typeface="Calibri" pitchFamily="34" charset="-120"/>
-              </a:rPr>
-              <a:t>「総合アンケートを作成する」</a:t>
-            </a:r>
-            <a:pPr indent="0" marL="0">
-              <a:lnSpc>
-                <a:spcPct val="125000"/>
-              </a:lnSpc>
-              <a:buNone/>
-            </a:pPr>
-            <a:r>
-              <a:rPr lang="en-US" sz="1150" dirty="0">
-                <a:solidFill>
-                  <a:srgbClr val="222222"/>
-                </a:solidFill>
-                <a:latin typeface="Calibri" pitchFamily="34" charset="0"/>
-                <a:ea typeface="Calibri" pitchFamily="34" charset="-122"/>
-                <a:cs typeface="Calibri" pitchFamily="34" charset="-120"/>
-              </a:rPr>
-              <a:t>を押す</a:t>
-            </a:r>
-            <a:endParaRPr lang="en-US" sz="1150" dirty="0"/>
-          </a:p>
-        </p:txBody>
-      </p:sp>
-      <p:sp>
-        <p:nvSpPr>
-          <p:cNvPr id="10" name="Shape 8"/>
-          <p:cNvSpPr/>
-          <p:nvPr/>
-        </p:nvSpPr>
-        <p:spPr>
-          <a:xfrm>
-            <a:off x="566928" y="2414016"/>
-            <a:ext cx="274320" cy="274320"/>
-          </a:xfrm>
-          <a:prstGeom prst="ellipse">
-            <a:avLst/>
-          </a:prstGeom>
-          <a:solidFill>
-            <a:srgbClr val="1E2761"/>
-          </a:solidFill>
-          <a:ln/>
-        </p:spPr>
-      </p:sp>
-      <p:sp>
-        <p:nvSpPr>
-          <p:cNvPr id="11" name="Text 9"/>
-          <p:cNvSpPr txBox="1"/>
-          <p:nvPr/>
-        </p:nvSpPr>
-        <p:spPr>
-          <a:xfrm>
-            <a:off x="566928" y="2414016"/>
-            <a:ext cx="274320" cy="274320"/>
-          </a:xfrm>
-          <a:prstGeom prst="rect">
-            <a:avLst/>
-          </a:prstGeom>
-          <a:noFill/>
-          <a:ln/>
-        </p:spPr>
-        <p:txBody>
-          <a:bodyPr wrap="square" lIns="0" tIns="0" rIns="0" bIns="0" rtlCol="0" anchor="ctr"/>
-          <a:lstStyle/>
-          <a:p>
-            <a:pPr algn="ctr" indent="0" marL="0">
-              <a:buNone/>
-            </a:pPr>
-            <a:r>
-              <a:rPr lang="en-US" sz="1100" b="1" dirty="0">
-                <a:solidFill>
-                  <a:srgbClr val="FFFFFF"/>
-                </a:solidFill>
-                <a:latin typeface="Calibri" pitchFamily="34" charset="0"/>
-                <a:ea typeface="Calibri" pitchFamily="34" charset="-122"/>
-                <a:cs typeface="Calibri" pitchFamily="34" charset="-120"/>
-              </a:rPr>
-              <a:t>3</a:t>
-            </a:r>
-            <a:endParaRPr lang="en-US" sz="1100" dirty="0"/>
-          </a:p>
-        </p:txBody>
-      </p:sp>
-      <p:sp>
-        <p:nvSpPr>
-          <p:cNvPr id="12" name="Text 10"/>
-          <p:cNvSpPr txBox="1"/>
-          <p:nvPr/>
-        </p:nvSpPr>
-        <p:spPr>
-          <a:xfrm>
-            <a:off x="969264" y="2395728"/>
-            <a:ext cx="6025896" cy="365760"/>
-          </a:xfrm>
-          <a:prstGeom prst="rect">
-            <a:avLst/>
-          </a:prstGeom>
-          <a:noFill/>
-          <a:ln/>
-        </p:spPr>
-        <p:txBody>
-          <a:bodyPr wrap="square" lIns="0" tIns="0" rIns="0" bIns="0" rtlCol="0" anchor="t"/>
-          <a:lstStyle/>
-          <a:p>
-            <a:pPr indent="0" marL="0">
-              <a:lnSpc>
-                <a:spcPct val="125000"/>
-              </a:lnSpc>
-              <a:buNone/>
-            </a:pPr>
-            <a:r>
-              <a:rPr lang="en-US" sz="1150" dirty="0">
-                <a:solidFill>
-                  <a:srgbClr val="222222"/>
-                </a:solidFill>
-                <a:latin typeface="Calibri" pitchFamily="34" charset="0"/>
-                <a:ea typeface="Calibri" pitchFamily="34" charset="-122"/>
-                <a:cs typeface="Calibri" pitchFamily="34" charset="-120"/>
-              </a:rPr>
-              <a:t>設問を登録し、</a:t>
-            </a:r>
-            <a:pPr indent="0" marL="0">
-              <a:lnSpc>
-                <a:spcPct val="125000"/>
-              </a:lnSpc>
-              <a:buNone/>
-            </a:pPr>
-            <a:r>
-              <a:rPr lang="en-US" sz="1150" b="1" dirty="0">
-                <a:solidFill>
-                  <a:srgbClr val="222222"/>
-                </a:solidFill>
-                <a:latin typeface="Calibri" pitchFamily="34" charset="0"/>
-                <a:ea typeface="Calibri" pitchFamily="34" charset="-122"/>
-                <a:cs typeface="Calibri" pitchFamily="34" charset="-120"/>
-              </a:rPr>
-              <a:t>「公開する」にチェックを入れて保存</a:t>
-            </a:r>
-            <a:pPr indent="0" marL="0">
-              <a:lnSpc>
-                <a:spcPct val="125000"/>
-              </a:lnSpc>
-              <a:buNone/>
-            </a:pPr>
-            <a:r>
-              <a:rPr lang="en-US" sz="1150" dirty="0">
-                <a:solidFill>
-                  <a:srgbClr val="222222"/>
-                </a:solidFill>
-                <a:latin typeface="Calibri" pitchFamily="34" charset="0"/>
-                <a:ea typeface="Calibri" pitchFamily="34" charset="-122"/>
-                <a:cs typeface="Calibri" pitchFamily="34" charset="-120"/>
-              </a:rPr>
-              <a:t>する</a:t>
-            </a:r>
-            <a:endParaRPr lang="en-US" sz="1150" dirty="0"/>
-          </a:p>
-        </p:txBody>
-      </p:sp>
-      <p:sp>
-        <p:nvSpPr>
-          <p:cNvPr id="13" name="Shape 11"/>
-          <p:cNvSpPr/>
-          <p:nvPr/>
-        </p:nvSpPr>
-        <p:spPr>
-          <a:xfrm>
-            <a:off x="566928" y="2852928"/>
-            <a:ext cx="6428232" cy="624459"/>
+            <a:off x="566928" y="2896489"/>
+            <a:ext cx="6428232" cy="431102"/>
           </a:xfrm>
           <a:prstGeom prst="roundRect">
             <a:avLst>
-              <a:gd name="adj" fmla="val 8786"/>
+              <a:gd name="adj" fmla="val 12726"/>
             </a:avLst>
           </a:prstGeom>
           <a:solidFill>
@@ -6996,13 +7055,13 @@
       </p:sp>
       <p:sp>
         <p:nvSpPr>
-          <p:cNvPr id="14" name="Text 12"/>
-          <p:cNvSpPr txBox="1"/>
-          <p:nvPr/>
-        </p:nvSpPr>
-        <p:spPr>
-          <a:xfrm>
-            <a:off x="658368" y="2944368"/>
+          <p:cNvPr id="10" name="Text 8"/>
+          <p:cNvSpPr txBox="1"/>
+          <p:nvPr/>
+        </p:nvSpPr>
+        <p:spPr>
+          <a:xfrm>
+            <a:off x="658368" y="2987929"/>
             <a:ext cx="237744" cy="237744"/>
           </a:xfrm>
           <a:prstGeom prst="rect">
@@ -7035,14 +7094,14 @@
       </p:sp>
       <p:sp>
         <p:nvSpPr>
-          <p:cNvPr id="15" name="Text 13"/>
-          <p:cNvSpPr txBox="1"/>
-          <p:nvPr/>
-        </p:nvSpPr>
-        <p:spPr>
-          <a:xfrm>
-            <a:off x="950976" y="2962656"/>
-            <a:ext cx="5925312" cy="441579"/>
+          <p:cNvPr id="11" name="Text 9"/>
+          <p:cNvSpPr txBox="1"/>
+          <p:nvPr/>
+        </p:nvSpPr>
+        <p:spPr>
+          <a:xfrm>
+            <a:off x="950976" y="3006217"/>
+            <a:ext cx="5925312" cy="248221"/>
           </a:xfrm>
           <a:prstGeom prst="rect">
             <a:avLst/>
@@ -7069,7 +7128,41 @@
                 <a:ea typeface="Calibri" pitchFamily="34" charset="-122"/>
                 <a:cs typeface="Calibri" pitchFamily="34" charset="-120"/>
               </a:rPr>
-              <a:t>総合アンケートに回答した方が、スマホ壁紙をダウンロードできます。設問は3問程度（満足度・来場のきっかけ・意見）がおすすめです。</a:t>
+              <a:t>人数は</a:t>
+            </a:r>
+            <a:pPr indent="0" marL="0">
+              <a:lnSpc>
+                <a:spcPct val="120000"/>
+              </a:lnSpc>
+              <a:buNone/>
+            </a:pPr>
+            <a:r>
+              <a:rPr lang="en-US" sz="1050" b="1" dirty="0">
+                <a:solidFill>
+                  <a:srgbClr val="222222"/>
+                </a:solidFill>
+                <a:latin typeface="Calibri" pitchFamily="34" charset="0"/>
+                <a:ea typeface="Calibri" pitchFamily="34" charset="-122"/>
+                <a:cs typeface="Calibri" pitchFamily="34" charset="-120"/>
+              </a:rPr>
+              <a:t>任意回答</a:t>
+            </a:r>
+            <a:pPr indent="0" marL="0">
+              <a:lnSpc>
+                <a:spcPct val="120000"/>
+              </a:lnSpc>
+              <a:buNone/>
+            </a:pPr>
+            <a:r>
+              <a:rPr lang="en-US" sz="1050" dirty="0">
+                <a:solidFill>
+                  <a:srgbClr val="222222"/>
+                </a:solidFill>
+                <a:latin typeface="Calibri" pitchFamily="34" charset="0"/>
+                <a:ea typeface="Calibri" pitchFamily="34" charset="-122"/>
+                <a:cs typeface="Calibri" pitchFamily="34" charset="-120"/>
+              </a:rPr>
+              <a:t>です。2社目以降は、前の企業で答えた人数が初期値として入るので、来場者は</a:t>
             </a:r>
             <a:endParaRPr lang="en-US" sz="1050" dirty="0"/>
           </a:p>
@@ -7077,18 +7170,234 @@
       </p:sp>
       <p:sp>
         <p:nvSpPr>
-          <p:cNvPr id="16" name="Shape 14"/>
+          <p:cNvPr id="12" name="Shape 10"/>
           <p:cNvSpPr/>
           <p:nvPr/>
         </p:nvSpPr>
         <p:spPr>
           <a:xfrm>
-            <a:off x="566928" y="3550539"/>
+            <a:off x="566928" y="3400743"/>
             <a:ext cx="6428232" cy="624459"/>
           </a:xfrm>
           <a:prstGeom prst="roundRect">
             <a:avLst>
               <a:gd name="adj" fmla="val 8786"/>
+            </a:avLst>
+          </a:prstGeom>
+          <a:solidFill>
+            <a:srgbClr val="E8ECF8"/>
+          </a:solidFill>
+          <a:ln w="9525">
+            <a:solidFill>
+              <a:srgbClr val="1E2761"/>
+            </a:solidFill>
+            <a:prstDash val="solid"/>
+          </a:ln>
+        </p:spPr>
+      </p:sp>
+      <p:sp>
+        <p:nvSpPr>
+          <p:cNvPr id="13" name="Text 11"/>
+          <p:cNvSpPr txBox="1"/>
+          <p:nvPr/>
+        </p:nvSpPr>
+        <p:spPr>
+          <a:xfrm>
+            <a:off x="658368" y="3492183"/>
+            <a:ext cx="237744" cy="237744"/>
+          </a:xfrm>
+          <a:prstGeom prst="rect">
+            <a:avLst/>
+          </a:prstGeom>
+          <a:noFill/>
+          <a:ln/>
+        </p:spPr>
+        <p:txBody>
+          <a:bodyPr wrap="square" lIns="0" tIns="0" rIns="0" bIns="0" rtlCol="0" anchor="ctr"/>
+          <a:lstStyle/>
+          <a:p>
+            <a:pPr algn="ctr" indent="0" marL="0">
+              <a:buNone/>
+            </a:pPr>
+            <a:r>
+              <a:rPr lang="en-US" sz="1200" b="1" dirty="0">
+                <a:solidFill>
+                  <a:srgbClr val="1E2761"/>
+                </a:solidFill>
+                <a:latin typeface="Calibri" pitchFamily="34" charset="0"/>
+                <a:ea typeface="Calibri" pitchFamily="34" charset="-122"/>
+                <a:cs typeface="Calibri" pitchFamily="34" charset="-120"/>
+              </a:rPr>
+              <a:t>i</a:t>
+            </a:r>
+            <a:endParaRPr lang="en-US" sz="1200" dirty="0"/>
+          </a:p>
+        </p:txBody>
+      </p:sp>
+      <p:sp>
+        <p:nvSpPr>
+          <p:cNvPr id="14" name="Text 12"/>
+          <p:cNvSpPr txBox="1"/>
+          <p:nvPr/>
+        </p:nvSpPr>
+        <p:spPr>
+          <a:xfrm>
+            <a:off x="950976" y="3510471"/>
+            <a:ext cx="5925312" cy="441579"/>
+          </a:xfrm>
+          <a:prstGeom prst="rect">
+            <a:avLst/>
+          </a:prstGeom>
+          <a:noFill/>
+          <a:ln/>
+        </p:spPr>
+        <p:txBody>
+          <a:bodyPr wrap="square" lIns="0" tIns="0" rIns="0" bIns="0" rtlCol="0" anchor="t"/>
+          <a:lstStyle/>
+          <a:p>
+            <a:pPr indent="0" marL="0">
+              <a:lnSpc>
+                <a:spcPct val="120000"/>
+              </a:lnSpc>
+              <a:buNone/>
+            </a:pPr>
+            <a:r>
+              <a:rPr lang="en-US" sz="1050" dirty="0">
+                <a:solidFill>
+                  <a:srgbClr val="222222"/>
+                </a:solidFill>
+                <a:latin typeface="Calibri" pitchFamily="34" charset="0"/>
+                <a:ea typeface="Calibri" pitchFamily="34" charset="-122"/>
+                <a:cs typeface="Calibri" pitchFamily="34" charset="-120"/>
+              </a:rPr>
+              <a:t>そのまま送信できます。未回答のぶんは「同じ来場者の別の回答 → それも無ければ全体の平均」の順で</a:t>
+            </a:r>
+            <a:endParaRPr lang="en-US" sz="1050" dirty="0"/>
+          </a:p>
+        </p:txBody>
+      </p:sp>
+      <p:sp>
+        <p:nvSpPr>
+          <p:cNvPr id="15" name="Shape 13"/>
+          <p:cNvSpPr/>
+          <p:nvPr/>
+        </p:nvSpPr>
+        <p:spPr>
+          <a:xfrm>
+            <a:off x="566928" y="4098354"/>
+            <a:ext cx="6428232" cy="431102"/>
+          </a:xfrm>
+          <a:prstGeom prst="roundRect">
+            <a:avLst>
+              <a:gd name="adj" fmla="val 12726"/>
+            </a:avLst>
+          </a:prstGeom>
+          <a:solidFill>
+            <a:srgbClr val="E8ECF8"/>
+          </a:solidFill>
+          <a:ln w="9525">
+            <a:solidFill>
+              <a:srgbClr val="1E2761"/>
+            </a:solidFill>
+            <a:prstDash val="solid"/>
+          </a:ln>
+        </p:spPr>
+      </p:sp>
+      <p:sp>
+        <p:nvSpPr>
+          <p:cNvPr id="16" name="Text 14"/>
+          <p:cNvSpPr txBox="1"/>
+          <p:nvPr/>
+        </p:nvSpPr>
+        <p:spPr>
+          <a:xfrm>
+            <a:off x="658368" y="4189793"/>
+            <a:ext cx="237744" cy="237744"/>
+          </a:xfrm>
+          <a:prstGeom prst="rect">
+            <a:avLst/>
+          </a:prstGeom>
+          <a:noFill/>
+          <a:ln/>
+        </p:spPr>
+        <p:txBody>
+          <a:bodyPr wrap="square" lIns="0" tIns="0" rIns="0" bIns="0" rtlCol="0" anchor="ctr"/>
+          <a:lstStyle/>
+          <a:p>
+            <a:pPr algn="ctr" indent="0" marL="0">
+              <a:buNone/>
+            </a:pPr>
+            <a:r>
+              <a:rPr lang="en-US" sz="1200" b="1" dirty="0">
+                <a:solidFill>
+                  <a:srgbClr val="1E2761"/>
+                </a:solidFill>
+                <a:latin typeface="Calibri" pitchFamily="34" charset="0"/>
+                <a:ea typeface="Calibri" pitchFamily="34" charset="-122"/>
+                <a:cs typeface="Calibri" pitchFamily="34" charset="-120"/>
+              </a:rPr>
+              <a:t>i</a:t>
+            </a:r>
+            <a:endParaRPr lang="en-US" sz="1200" dirty="0"/>
+          </a:p>
+        </p:txBody>
+      </p:sp>
+      <p:sp>
+        <p:nvSpPr>
+          <p:cNvPr id="17" name="Text 15"/>
+          <p:cNvSpPr txBox="1"/>
+          <p:nvPr/>
+        </p:nvSpPr>
+        <p:spPr>
+          <a:xfrm>
+            <a:off x="950976" y="4208082"/>
+            <a:ext cx="5925312" cy="248221"/>
+          </a:xfrm>
+          <a:prstGeom prst="rect">
+            <a:avLst/>
+          </a:prstGeom>
+          <a:noFill/>
+          <a:ln/>
+        </p:spPr>
+        <p:txBody>
+          <a:bodyPr wrap="square" lIns="0" tIns="0" rIns="0" bIns="0" rtlCol="0" anchor="t"/>
+          <a:lstStyle/>
+          <a:p>
+            <a:pPr indent="0" marL="0">
+              <a:lnSpc>
+                <a:spcPct val="120000"/>
+              </a:lnSpc>
+              <a:buNone/>
+            </a:pPr>
+            <a:r>
+              <a:rPr lang="en-US" sz="1050" dirty="0">
+                <a:solidFill>
+                  <a:srgbClr val="222222"/>
+                </a:solidFill>
+                <a:latin typeface="Calibri" pitchFamily="34" charset="0"/>
+                <a:ea typeface="Calibri" pitchFamily="34" charset="-122"/>
+                <a:cs typeface="Calibri" pitchFamily="34" charset="-120"/>
+              </a:rPr>
+              <a:t>当てはめて計算します。</a:t>
+            </a:r>
+            <a:endParaRPr lang="en-US" sz="1050" dirty="0"/>
+          </a:p>
+        </p:txBody>
+      </p:sp>
+      <p:sp>
+        <p:nvSpPr>
+          <p:cNvPr id="18" name="Shape 16"/>
+          <p:cNvSpPr/>
+          <p:nvPr/>
+        </p:nvSpPr>
+        <p:spPr>
+          <a:xfrm>
+            <a:off x="566928" y="4602607"/>
+            <a:ext cx="6428232" cy="431102"/>
+          </a:xfrm>
+          <a:prstGeom prst="roundRect">
+            <a:avLst>
+              <a:gd name="adj" fmla="val 12726"/>
             </a:avLst>
           </a:prstGeom>
           <a:solidFill>
@@ -7104,13 +7413,13 @@
       </p:sp>
       <p:sp>
         <p:nvSpPr>
-          <p:cNvPr id="17" name="Text 15"/>
-          <p:cNvSpPr txBox="1"/>
-          <p:nvPr/>
-        </p:nvSpPr>
-        <p:spPr>
-          <a:xfrm>
-            <a:off x="658368" y="3641979"/>
+          <p:cNvPr id="19" name="Text 17"/>
+          <p:cNvSpPr txBox="1"/>
+          <p:nvPr/>
+        </p:nvSpPr>
+        <p:spPr>
+          <a:xfrm>
+            <a:off x="658368" y="4694047"/>
             <a:ext cx="237744" cy="237744"/>
           </a:xfrm>
           <a:prstGeom prst="rect">
@@ -7143,14 +7452,14 @@
       </p:sp>
       <p:sp>
         <p:nvSpPr>
-          <p:cNvPr id="18" name="Text 16"/>
-          <p:cNvSpPr txBox="1"/>
-          <p:nvPr/>
-        </p:nvSpPr>
-        <p:spPr>
-          <a:xfrm>
-            <a:off x="950976" y="3660267"/>
-            <a:ext cx="5925312" cy="441579"/>
+          <p:cNvPr id="20" name="Text 18"/>
+          <p:cNvSpPr txBox="1"/>
+          <p:nvPr/>
+        </p:nvSpPr>
+        <p:spPr>
+          <a:xfrm>
+            <a:off x="950976" y="4712335"/>
+            <a:ext cx="5925312" cy="248221"/>
           </a:xfrm>
           <a:prstGeom prst="rect">
             <a:avLst/>
@@ -7177,7 +7486,41 @@
                 <a:ea typeface="Calibri" pitchFamily="34" charset="-122"/>
                 <a:cs typeface="Calibri" pitchFamily="34" charset="-120"/>
               </a:rPr>
-              <a:t>状態を「終了」にすると、ブースのアンケートは回答できなくなります。当日の受付時間が終わってから切り替えてください。</a:t>
+              <a:t>人数の設問は</a:t>
+            </a:r>
+            <a:pPr indent="0" marL="0">
+              <a:lnSpc>
+                <a:spcPct val="120000"/>
+              </a:lnSpc>
+              <a:buNone/>
+            </a:pPr>
+            <a:r>
+              <a:rPr lang="en-US" sz="1050" b="1" dirty="0">
+                <a:solidFill>
+                  <a:srgbClr val="222222"/>
+                </a:solidFill>
+                <a:latin typeface="Calibri" pitchFamily="34" charset="0"/>
+                <a:ea typeface="Calibri" pitchFamily="34" charset="-122"/>
+                <a:cs typeface="Calibri" pitchFamily="34" charset="-120"/>
+              </a:rPr>
+              <a:t>共通設問テンプレート</a:t>
+            </a:r>
+            <a:pPr indent="0" marL="0">
+              <a:lnSpc>
+                <a:spcPct val="120000"/>
+              </a:lnSpc>
+              <a:buNone/>
+            </a:pPr>
+            <a:r>
+              <a:rPr lang="en-US" sz="1050" dirty="0">
+                <a:solidFill>
+                  <a:srgbClr val="222222"/>
+                </a:solidFill>
+                <a:latin typeface="Calibri" pitchFamily="34" charset="0"/>
+                <a:ea typeface="Calibri" pitchFamily="34" charset="-122"/>
+                <a:cs typeface="Calibri" pitchFamily="34" charset="-120"/>
+              </a:rPr>
+              <a:t>に入れて全社に取り込むと、聞き方と集計が揃います。</a:t>
             </a:r>
             <a:endParaRPr lang="en-US" sz="1050" dirty="0"/>
           </a:p>
@@ -7185,7 +7528,7 @@
       </p:sp>
       <p:pic>
         <p:nvPicPr>
-          <p:cNvPr id="19" name="Image 0" descr="C:\Users\sato\Desktop\enque\docs\images\o-overall.png">    </p:cNvPr>
+          <p:cNvPr id="21" name="Image 0" descr="C:\Users\sato\Desktop\enque\docs\images\o-party.png">    </p:cNvPr>
           <p:cNvPicPr>
             <a:picLocks noChangeAspect="1"/>
           </p:cNvPicPr>
@@ -7199,8 +7542,8 @@
         </p:blipFill>
         <p:spPr>
           <a:xfrm>
-            <a:off x="1282796" y="4248150"/>
-            <a:ext cx="4996495" cy="3474720"/>
+            <a:off x="994667" y="5106861"/>
+            <a:ext cx="5572753" cy="3474720"/>
           </a:xfrm>
           <a:prstGeom prst="rect">
             <a:avLst/>
@@ -7209,13 +7552,13 @@
       </p:pic>
       <p:sp>
         <p:nvSpPr>
-          <p:cNvPr id="20" name="Text 17"/>
-          <p:cNvSpPr txBox="1"/>
-          <p:nvPr/>
-        </p:nvSpPr>
-        <p:spPr>
-          <a:xfrm>
-            <a:off x="566928" y="7777734"/>
+          <p:cNvPr id="22" name="Text 19"/>
+          <p:cNvSpPr txBox="1"/>
+          <p:nvPr/>
+        </p:nvSpPr>
+        <p:spPr>
+          <a:xfrm>
+            <a:off x="566928" y="8636445"/>
             <a:ext cx="6428232" cy="274320"/>
           </a:xfrm>
           <a:prstGeom prst="rect">
@@ -7240,7 +7583,7 @@
                 <a:ea typeface="Calibri" pitchFamily="34" charset="-122"/>
                 <a:cs typeface="Calibri" pitchFamily="34" charset="-120"/>
               </a:rPr>
-              <a:t>「総合アンケートと案内メール」画面の上部。総合アンケートの状態が見えるところ。</a:t>
+              <a:t>「回答者の傾向」画面の来場人数のところ（のべ来場者・実来場者・回答率と人数の分布）。</a:t>
             </a:r>
             <a:endParaRPr lang="en-US" sz="950" dirty="0"/>
           </a:p>
@@ -7248,7 +7591,7 @@
       </p:sp>
       <p:sp>
         <p:nvSpPr>
-          <p:cNvPr id="21" name="Text 18"/>
+          <p:cNvPr id="23" name="Text 20"/>
           <p:cNvSpPr txBox="1"/>
           <p:nvPr/>
         </p:nvSpPr>
@@ -7389,7 +7732,7 @@
                 <a:ea typeface="Calibri" pitchFamily="34" charset="-122"/>
                 <a:cs typeface="Calibri" pitchFamily="34" charset="-120"/>
               </a:rPr>
-              <a:t>終了後2：案内メールを送る</a:t>
+              <a:t>終了後1：受付を締めて総合アンケートを用意する</a:t>
             </a:r>
             <a:endParaRPr lang="en-US" sz="2200" dirty="0"/>
           </a:p>
@@ -7482,6 +7825,23 @@
               <a:buNone/>
             </a:pPr>
             <a:r>
+              <a:rPr lang="en-US" sz="1150" dirty="0">
+                <a:solidFill>
+                  <a:srgbClr val="222222"/>
+                </a:solidFill>
+                <a:latin typeface="Calibri" pitchFamily="34" charset="0"/>
+                <a:ea typeface="Calibri" pitchFamily="34" charset="-122"/>
+                <a:cs typeface="Calibri" pitchFamily="34" charset="-120"/>
+              </a:rPr>
+              <a:t>ダッシュボードの「イベント設定」で、状態を</a:t>
+            </a:r>
+            <a:pPr indent="0" marL="0">
+              <a:lnSpc>
+                <a:spcPct val="125000"/>
+              </a:lnSpc>
+              <a:buNone/>
+            </a:pPr>
+            <a:r>
               <a:rPr lang="en-US" sz="1150" b="1" dirty="0">
                 <a:solidFill>
                   <a:srgbClr val="222222"/>
@@ -7490,7 +7850,7 @@
                 <a:ea typeface="Calibri" pitchFamily="34" charset="-122"/>
                 <a:cs typeface="Calibri" pitchFamily="34" charset="-120"/>
               </a:rPr>
-              <a:t>テスト送信</a:t>
+              <a:t>「終了（総合アンケート送付）」</a:t>
             </a:r>
             <a:pPr indent="0" marL="0">
               <a:lnSpc>
@@ -7507,7 +7867,7 @@
                 <a:ea typeface="Calibri" pitchFamily="34" charset="-122"/>
                 <a:cs typeface="Calibri" pitchFamily="34" charset="-120"/>
               </a:rPr>
-              <a:t>：自分のアドレスを入れて送り、文面とリンクを確認する</a:t>
+              <a:t>に変える</a:t>
             </a:r>
             <a:endParaRPr lang="en-US" sz="1150" dirty="0"/>
           </a:p>
@@ -7600,6 +7960,23 @@
               <a:buNone/>
             </a:pPr>
             <a:r>
+              <a:rPr lang="en-US" sz="1150" dirty="0">
+                <a:solidFill>
+                  <a:srgbClr val="222222"/>
+                </a:solidFill>
+                <a:latin typeface="Calibri" pitchFamily="34" charset="0"/>
+                <a:ea typeface="Calibri" pitchFamily="34" charset="-122"/>
+                <a:cs typeface="Calibri" pitchFamily="34" charset="-120"/>
+              </a:rPr>
+              <a:t>「総合アンケート」の画面で</a:t>
+            </a:r>
+            <a:pPr indent="0" marL="0">
+              <a:lnSpc>
+                <a:spcPct val="125000"/>
+              </a:lnSpc>
+              <a:buNone/>
+            </a:pPr>
+            <a:r>
               <a:rPr lang="en-US" sz="1150" b="1" dirty="0">
                 <a:solidFill>
                   <a:srgbClr val="222222"/>
@@ -7608,7 +7985,7 @@
                 <a:ea typeface="Calibri" pitchFamily="34" charset="-122"/>
                 <a:cs typeface="Calibri" pitchFamily="34" charset="-120"/>
               </a:rPr>
-              <a:t>送信対象を作成・更新する</a:t>
+              <a:t>「総合アンケートを作成する」</a:t>
             </a:r>
             <a:pPr indent="0" marL="0">
               <a:lnSpc>
@@ -7625,7 +8002,7 @@
                 <a:ea typeface="Calibri" pitchFamily="34" charset="-122"/>
                 <a:cs typeface="Calibri" pitchFamily="34" charset="-120"/>
               </a:rPr>
-              <a:t>を押す（メールアドレスを登録した来場者が対象になります）</a:t>
+              <a:t>を押す</a:t>
             </a:r>
             <a:endParaRPr lang="en-US" sz="1150" dirty="0"/>
           </a:p>
@@ -7726,7 +8103,41 @@
                 <a:ea typeface="Calibri" pitchFamily="34" charset="-122"/>
                 <a:cs typeface="Calibri" pitchFamily="34" charset="-120"/>
               </a:rPr>
-              <a:t>送信する</a:t>
+              <a:t>設問を登録し、</a:t>
+            </a:r>
+            <a:pPr indent="0" marL="0">
+              <a:lnSpc>
+                <a:spcPct val="125000"/>
+              </a:lnSpc>
+              <a:buNone/>
+            </a:pPr>
+            <a:r>
+              <a:rPr lang="en-US" sz="1150" b="1" dirty="0">
+                <a:solidFill>
+                  <a:srgbClr val="222222"/>
+                </a:solidFill>
+                <a:latin typeface="Calibri" pitchFamily="34" charset="0"/>
+                <a:ea typeface="Calibri" pitchFamily="34" charset="-122"/>
+                <a:cs typeface="Calibri" pitchFamily="34" charset="-120"/>
+              </a:rPr>
+              <a:t>「公開する」にチェックを入れて保存</a:t>
+            </a:r>
+            <a:pPr indent="0" marL="0">
+              <a:lnSpc>
+                <a:spcPct val="125000"/>
+              </a:lnSpc>
+              <a:buNone/>
+            </a:pPr>
+            <a:r>
+              <a:rPr lang="en-US" sz="1150" dirty="0">
+                <a:solidFill>
+                  <a:srgbClr val="222222"/>
+                </a:solidFill>
+                <a:latin typeface="Calibri" pitchFamily="34" charset="0"/>
+                <a:ea typeface="Calibri" pitchFamily="34" charset="-122"/>
+                <a:cs typeface="Calibri" pitchFamily="34" charset="-120"/>
+              </a:rPr>
+              <a:t>する</a:t>
             </a:r>
             <a:endParaRPr lang="en-US" sz="1150" dirty="0"/>
           </a:p>
@@ -7734,200 +8145,13 @@
       </p:sp>
       <p:sp>
         <p:nvSpPr>
-          <p:cNvPr id="13" name="Text 11"/>
-          <p:cNvSpPr txBox="1"/>
-          <p:nvPr/>
-        </p:nvSpPr>
-        <p:spPr>
-          <a:xfrm>
-            <a:off x="713232" y="2852928"/>
-            <a:ext cx="6281928" cy="257429"/>
-          </a:xfrm>
-          <a:prstGeom prst="rect">
-            <a:avLst/>
-          </a:prstGeom>
-          <a:noFill/>
-          <a:ln/>
-        </p:spPr>
-        <p:txBody>
-          <a:bodyPr wrap="square" lIns="0" tIns="0" rIns="0" bIns="0" rtlCol="0" anchor="t"/>
-          <a:lstStyle/>
-          <a:p>
-            <a:pPr marL="342900" indent="-342900">
-              <a:lnSpc>
-                <a:spcPct val="125000"/>
-              </a:lnSpc>
-              <a:buSzPct val="100000"/>
-              <a:buChar char="●"/>
-            </a:pPr>
-            <a:r>
-              <a:rPr lang="en-US" sz="1100" dirty="0">
-                <a:solidFill>
-                  <a:srgbClr val="222222"/>
-                </a:solidFill>
-                <a:latin typeface="Calibri" pitchFamily="34" charset="0"/>
-                <a:ea typeface="Calibri" pitchFamily="34" charset="-122"/>
-                <a:cs typeface="Calibri" pitchFamily="34" charset="-120"/>
-              </a:rPr>
-              <a:t>少数なら「この画面から50件だけ送信する」</a:t>
-            </a:r>
-            <a:endParaRPr lang="en-US" sz="1100" dirty="0"/>
-          </a:p>
-        </p:txBody>
-      </p:sp>
-      <p:sp>
-        <p:nvSpPr>
-          <p:cNvPr id="14" name="Text 12"/>
-          <p:cNvSpPr txBox="1"/>
-          <p:nvPr/>
-        </p:nvSpPr>
-        <p:spPr>
-          <a:xfrm>
-            <a:off x="713232" y="3128645"/>
-            <a:ext cx="6281928" cy="257429"/>
-          </a:xfrm>
-          <a:prstGeom prst="rect">
-            <a:avLst/>
-          </a:prstGeom>
-          <a:noFill/>
-          <a:ln/>
-        </p:spPr>
-        <p:txBody>
-          <a:bodyPr wrap="square" lIns="0" tIns="0" rIns="0" bIns="0" rtlCol="0" anchor="t"/>
-          <a:lstStyle/>
-          <a:p>
-            <a:pPr marL="342900" indent="-342900">
-              <a:lnSpc>
-                <a:spcPct val="125000"/>
-              </a:lnSpc>
-              <a:buSzPct val="100000"/>
-              <a:buChar char="●"/>
-            </a:pPr>
-            <a:r>
-              <a:rPr lang="en-US" sz="1100" dirty="0">
-                <a:solidFill>
-                  <a:srgbClr val="222222"/>
-                </a:solidFill>
-                <a:latin typeface="Calibri" pitchFamily="34" charset="0"/>
-                <a:ea typeface="Calibri" pitchFamily="34" charset="-122"/>
-                <a:cs typeface="Calibri" pitchFamily="34" charset="-120"/>
-              </a:rPr>
-              <a:t>大量ならサーバーの自動送信（5分ごとに200件ずつ）に任せる</a:t>
-            </a:r>
-            <a:endParaRPr lang="en-US" sz="1100" dirty="0"/>
-          </a:p>
-        </p:txBody>
-      </p:sp>
-      <p:sp>
-        <p:nvSpPr>
-          <p:cNvPr id="15" name="Shape 13"/>
+          <p:cNvPr id="13" name="Shape 11"/>
           <p:cNvSpPr/>
           <p:nvPr/>
         </p:nvSpPr>
         <p:spPr>
           <a:xfrm>
-            <a:off x="566928" y="3422650"/>
-            <a:ext cx="274320" cy="274320"/>
-          </a:xfrm>
-          <a:prstGeom prst="ellipse">
-            <a:avLst/>
-          </a:prstGeom>
-          <a:solidFill>
-            <a:srgbClr val="1E2761"/>
-          </a:solidFill>
-          <a:ln/>
-        </p:spPr>
-      </p:sp>
-      <p:sp>
-        <p:nvSpPr>
-          <p:cNvPr id="16" name="Text 14"/>
-          <p:cNvSpPr txBox="1"/>
-          <p:nvPr/>
-        </p:nvSpPr>
-        <p:spPr>
-          <a:xfrm>
-            <a:off x="566928" y="3422650"/>
-            <a:ext cx="274320" cy="274320"/>
-          </a:xfrm>
-          <a:prstGeom prst="rect">
-            <a:avLst/>
-          </a:prstGeom>
-          <a:noFill/>
-          <a:ln/>
-        </p:spPr>
-        <p:txBody>
-          <a:bodyPr wrap="square" lIns="0" tIns="0" rIns="0" bIns="0" rtlCol="0" anchor="ctr"/>
-          <a:lstStyle/>
-          <a:p>
-            <a:pPr algn="ctr" indent="0" marL="0">
-              <a:buNone/>
-            </a:pPr>
-            <a:r>
-              <a:rPr lang="en-US" sz="1100" b="1" dirty="0">
-                <a:solidFill>
-                  <a:srgbClr val="FFFFFF"/>
-                </a:solidFill>
-                <a:latin typeface="Calibri" pitchFamily="34" charset="0"/>
-                <a:ea typeface="Calibri" pitchFamily="34" charset="-122"/>
-                <a:cs typeface="Calibri" pitchFamily="34" charset="-120"/>
-              </a:rPr>
-              <a:t>4</a:t>
-            </a:r>
-            <a:endParaRPr lang="en-US" sz="1100" dirty="0"/>
-          </a:p>
-        </p:txBody>
-      </p:sp>
-      <p:sp>
-        <p:nvSpPr>
-          <p:cNvPr id="17" name="Text 15"/>
-          <p:cNvSpPr txBox="1"/>
-          <p:nvPr/>
-        </p:nvSpPr>
-        <p:spPr>
-          <a:xfrm>
-            <a:off x="969264" y="3404362"/>
-            <a:ext cx="6025896" cy="365760"/>
-          </a:xfrm>
-          <a:prstGeom prst="rect">
-            <a:avLst/>
-          </a:prstGeom>
-          <a:noFill/>
-          <a:ln/>
-        </p:spPr>
-        <p:txBody>
-          <a:bodyPr wrap="square" lIns="0" tIns="0" rIns="0" bIns="0" rtlCol="0" anchor="t"/>
-          <a:lstStyle/>
-          <a:p>
-            <a:pPr indent="0" marL="0">
-              <a:lnSpc>
-                <a:spcPct val="125000"/>
-              </a:lnSpc>
-              <a:buNone/>
-            </a:pPr>
-            <a:r>
-              <a:rPr lang="en-US" sz="1150" dirty="0">
-                <a:solidFill>
-                  <a:srgbClr val="222222"/>
-                </a:solidFill>
-                <a:latin typeface="Calibri" pitchFamily="34" charset="0"/>
-                <a:ea typeface="Calibri" pitchFamily="34" charset="-122"/>
-                <a:cs typeface="Calibri" pitchFamily="34" charset="-120"/>
-              </a:rPr>
-              <a:t>送信状況（未送信・送信済み・失敗・回答済み）を画面で確認する</a:t>
-            </a:r>
-            <a:endParaRPr lang="en-US" sz="1150" dirty="0"/>
-          </a:p>
-        </p:txBody>
-      </p:sp>
-      <p:sp>
-        <p:nvSpPr>
-          <p:cNvPr id="18" name="Shape 16"/>
-          <p:cNvSpPr/>
-          <p:nvPr/>
-        </p:nvSpPr>
-        <p:spPr>
-          <a:xfrm>
-            <a:off x="566928" y="3861562"/>
+            <a:off x="566928" y="2852928"/>
             <a:ext cx="6428232" cy="624459"/>
           </a:xfrm>
           <a:prstGeom prst="roundRect">
@@ -7948,13 +8172,13 @@
       </p:sp>
       <p:sp>
         <p:nvSpPr>
-          <p:cNvPr id="19" name="Text 17"/>
-          <p:cNvSpPr txBox="1"/>
-          <p:nvPr/>
-        </p:nvSpPr>
-        <p:spPr>
-          <a:xfrm>
-            <a:off x="658368" y="3953002"/>
+          <p:cNvPr id="14" name="Text 12"/>
+          <p:cNvSpPr txBox="1"/>
+          <p:nvPr/>
+        </p:nvSpPr>
+        <p:spPr>
+          <a:xfrm>
+            <a:off x="658368" y="2944368"/>
             <a:ext cx="237744" cy="237744"/>
           </a:xfrm>
           <a:prstGeom prst="rect">
@@ -7987,13 +8211,13 @@
       </p:sp>
       <p:sp>
         <p:nvSpPr>
-          <p:cNvPr id="20" name="Text 18"/>
-          <p:cNvSpPr txBox="1"/>
-          <p:nvPr/>
-        </p:nvSpPr>
-        <p:spPr>
-          <a:xfrm>
-            <a:off x="950976" y="3971290"/>
+          <p:cNvPr id="15" name="Text 13"/>
+          <p:cNvSpPr txBox="1"/>
+          <p:nvPr/>
+        </p:nvSpPr>
+        <p:spPr>
+          <a:xfrm>
+            <a:off x="950976" y="2962656"/>
             <a:ext cx="5925312" cy="441579"/>
           </a:xfrm>
           <a:prstGeom prst="rect">
@@ -8021,41 +8245,7 @@
                 <a:ea typeface="Calibri" pitchFamily="34" charset="-122"/>
                 <a:cs typeface="Calibri" pitchFamily="34" charset="-120"/>
               </a:rPr>
-              <a:t>テスト送信のリンクは</a:t>
-            </a:r>
-            <a:pPr indent="0" marL="0">
-              <a:lnSpc>
-                <a:spcPct val="120000"/>
-              </a:lnSpc>
-              <a:buNone/>
-            </a:pPr>
-            <a:r>
-              <a:rPr lang="en-US" sz="1050" b="1" dirty="0">
-                <a:solidFill>
-                  <a:srgbClr val="222222"/>
-                </a:solidFill>
-                <a:latin typeface="Calibri" pitchFamily="34" charset="0"/>
-                <a:ea typeface="Calibri" pitchFamily="34" charset="-122"/>
-                <a:cs typeface="Calibri" pitchFamily="34" charset="-120"/>
-              </a:rPr>
-              <a:t>スタッフ確認用のプレビュー</a:t>
-            </a:r>
-            <a:pPr indent="0" marL="0">
-              <a:lnSpc>
-                <a:spcPct val="120000"/>
-              </a:lnSpc>
-              <a:buNone/>
-            </a:pPr>
-            <a:r>
-              <a:rPr lang="en-US" sz="1050" dirty="0">
-                <a:solidFill>
-                  <a:srgbClr val="222222"/>
-                </a:solidFill>
-                <a:latin typeface="Calibri" pitchFamily="34" charset="0"/>
-                <a:ea typeface="Calibri" pitchFamily="34" charset="-122"/>
-                <a:cs typeface="Calibri" pitchFamily="34" charset="-120"/>
-              </a:rPr>
-              <a:t>です。管理画面にログインした状態で開くと、来場者に見えるのと同じ画面を確認できます（プレビューからは回答できません）。</a:t>
+              <a:t>総合アンケートに回答した方が、スマホ壁紙をダウンロードできます。設問は3問程度（満足度・来場のきっかけ・意見）がおすすめです。</a:t>
             </a:r>
             <a:endParaRPr lang="en-US" sz="1050" dirty="0"/>
           </a:p>
@@ -8063,18 +8253,18 @@
       </p:sp>
       <p:sp>
         <p:nvSpPr>
-          <p:cNvPr id="21" name="Shape 19"/>
+          <p:cNvPr id="16" name="Shape 14"/>
           <p:cNvSpPr/>
           <p:nvPr/>
         </p:nvSpPr>
         <p:spPr>
           <a:xfrm>
-            <a:off x="566928" y="4559173"/>
-            <a:ext cx="6428232" cy="431102"/>
+            <a:off x="566928" y="3550539"/>
+            <a:ext cx="6428232" cy="624459"/>
           </a:xfrm>
           <a:prstGeom prst="roundRect">
             <a:avLst>
-              <a:gd name="adj" fmla="val 12726"/>
+              <a:gd name="adj" fmla="val 8786"/>
             </a:avLst>
           </a:prstGeom>
           <a:solidFill>
@@ -8090,13 +8280,13 @@
       </p:sp>
       <p:sp>
         <p:nvSpPr>
-          <p:cNvPr id="22" name="Text 20"/>
-          <p:cNvSpPr txBox="1"/>
-          <p:nvPr/>
-        </p:nvSpPr>
-        <p:spPr>
-          <a:xfrm>
-            <a:off x="658368" y="4650613"/>
+          <p:cNvPr id="17" name="Text 15"/>
+          <p:cNvSpPr txBox="1"/>
+          <p:nvPr/>
+        </p:nvSpPr>
+        <p:spPr>
+          <a:xfrm>
+            <a:off x="658368" y="3641979"/>
             <a:ext cx="237744" cy="237744"/>
           </a:xfrm>
           <a:prstGeom prst="rect">
@@ -8129,14 +8319,14 @@
       </p:sp>
       <p:sp>
         <p:nvSpPr>
-          <p:cNvPr id="23" name="Text 21"/>
-          <p:cNvSpPr txBox="1"/>
-          <p:nvPr/>
-        </p:nvSpPr>
-        <p:spPr>
-          <a:xfrm>
-            <a:off x="950976" y="4668901"/>
-            <a:ext cx="5925312" cy="248221"/>
+          <p:cNvPr id="18" name="Text 16"/>
+          <p:cNvSpPr txBox="1"/>
+          <p:nvPr/>
+        </p:nvSpPr>
+        <p:spPr>
+          <a:xfrm>
+            <a:off x="950976" y="3660267"/>
+            <a:ext cx="5925312" cy="441579"/>
           </a:xfrm>
           <a:prstGeom prst="rect">
             <a:avLst/>
@@ -8163,7 +8353,7 @@
                 <a:ea typeface="Calibri" pitchFamily="34" charset="-122"/>
                 <a:cs typeface="Calibri" pitchFamily="34" charset="-120"/>
               </a:rPr>
-              <a:t>送信済みの人には二重に送られません。失敗したものは自動で3回まで再送されます。</a:t>
+              <a:t>状態を「終了」にすると、ブースのアンケートは回答できなくなります。当日の受付時間が終わってから切り替えてください。</a:t>
             </a:r>
             <a:endParaRPr lang="en-US" sz="1050" dirty="0"/>
           </a:p>
@@ -8171,7 +8361,7 @@
       </p:sp>
       <p:pic>
         <p:nvPicPr>
-          <p:cNvPr id="24" name="Image 0" descr="C:\Users\sato\Desktop\enque\docs\images\o-invite-status.png">    </p:cNvPr>
+          <p:cNvPr id="19" name="Image 0" descr="C:\Users\sato\Desktop\enque\docs\images\o-overall.png">    </p:cNvPr>
           <p:cNvPicPr>
             <a:picLocks noChangeAspect="1"/>
           </p:cNvPicPr>
@@ -8185,8 +8375,8 @@
         </p:blipFill>
         <p:spPr>
           <a:xfrm>
-            <a:off x="1504370" y="5063427"/>
-            <a:ext cx="4553347" cy="3474720"/>
+            <a:off x="1282796" y="4248150"/>
+            <a:ext cx="4996495" cy="3474720"/>
           </a:xfrm>
           <a:prstGeom prst="rect">
             <a:avLst/>
@@ -8195,13 +8385,13 @@
       </p:pic>
       <p:sp>
         <p:nvSpPr>
-          <p:cNvPr id="25" name="Text 22"/>
-          <p:cNvSpPr txBox="1"/>
-          <p:nvPr/>
-        </p:nvSpPr>
-        <p:spPr>
-          <a:xfrm>
-            <a:off x="566928" y="8593011"/>
+          <p:cNvPr id="20" name="Text 17"/>
+          <p:cNvSpPr txBox="1"/>
+          <p:nvPr/>
+        </p:nvSpPr>
+        <p:spPr>
+          <a:xfrm>
+            <a:off x="566928" y="7777734"/>
             <a:ext cx="6428232" cy="274320"/>
           </a:xfrm>
           <a:prstGeom prst="rect">
@@ -8226,7 +8416,7 @@
                 <a:ea typeface="Calibri" pitchFamily="34" charset="-122"/>
                 <a:cs typeface="Calibri" pitchFamily="34" charset="-120"/>
               </a:rPr>
-              <a:t>「総合アンケートと案内メール」画面の送信状況（未送信・送信済み・失敗・回答済みの数）。</a:t>
+              <a:t>「総合アンケートと案内メール」画面の上部。総合アンケートの状態が見えるところ。</a:t>
             </a:r>
             <a:endParaRPr lang="en-US" sz="950" dirty="0"/>
           </a:p>
@@ -8234,7 +8424,7 @@
       </p:sp>
       <p:sp>
         <p:nvSpPr>
-          <p:cNvPr id="26" name="Text 23"/>
+          <p:cNvPr id="21" name="Text 18"/>
           <p:cNvSpPr txBox="1"/>
           <p:nvPr/>
         </p:nvSpPr>
@@ -8375,7 +8565,7 @@
                 <a:ea typeface="Calibri" pitchFamily="34" charset="-122"/>
                 <a:cs typeface="Calibri" pitchFamily="34" charset="-120"/>
               </a:rPr>
-              <a:t>終了後3：集計データを受け取る</a:t>
+              <a:t>終了後2：案内メールを送る</a:t>
             </a:r>
             <a:endParaRPr lang="en-US" sz="2200" dirty="0"/>
           </a:p>
@@ -8383,14 +8573,73 @@
       </p:sp>
       <p:sp>
         <p:nvSpPr>
-          <p:cNvPr id="4" name="Text 2"/>
-          <p:cNvSpPr txBox="1"/>
-          <p:nvPr/>
-        </p:nvSpPr>
-        <p:spPr>
-          <a:xfrm>
-            <a:off x="566928" y="1591056"/>
-            <a:ext cx="6428232" cy="257810"/>
+          <p:cNvPr id="4" name="Shape 2"/>
+          <p:cNvSpPr/>
+          <p:nvPr/>
+        </p:nvSpPr>
+        <p:spPr>
+          <a:xfrm>
+            <a:off x="566928" y="1499616"/>
+            <a:ext cx="274320" cy="274320"/>
+          </a:xfrm>
+          <a:prstGeom prst="ellipse">
+            <a:avLst/>
+          </a:prstGeom>
+          <a:solidFill>
+            <a:srgbClr val="1E2761"/>
+          </a:solidFill>
+          <a:ln/>
+        </p:spPr>
+      </p:sp>
+      <p:sp>
+        <p:nvSpPr>
+          <p:cNvPr id="5" name="Text 3"/>
+          <p:cNvSpPr txBox="1"/>
+          <p:nvPr/>
+        </p:nvSpPr>
+        <p:spPr>
+          <a:xfrm>
+            <a:off x="566928" y="1499616"/>
+            <a:ext cx="274320" cy="274320"/>
+          </a:xfrm>
+          <a:prstGeom prst="rect">
+            <a:avLst/>
+          </a:prstGeom>
+          <a:noFill/>
+          <a:ln/>
+        </p:spPr>
+        <p:txBody>
+          <a:bodyPr wrap="square" lIns="0" tIns="0" rIns="0" bIns="0" rtlCol="0" anchor="ctr"/>
+          <a:lstStyle/>
+          <a:p>
+            <a:pPr algn="ctr" indent="0" marL="0">
+              <a:buNone/>
+            </a:pPr>
+            <a:r>
+              <a:rPr lang="en-US" sz="1100" b="1" dirty="0">
+                <a:solidFill>
+                  <a:srgbClr val="FFFFFF"/>
+                </a:solidFill>
+                <a:latin typeface="Calibri" pitchFamily="34" charset="0"/>
+                <a:ea typeface="Calibri" pitchFamily="34" charset="-122"/>
+                <a:cs typeface="Calibri" pitchFamily="34" charset="-120"/>
+              </a:rPr>
+              <a:t>1</a:t>
+            </a:r>
+            <a:endParaRPr lang="en-US" sz="1100" dirty="0"/>
+          </a:p>
+        </p:txBody>
+      </p:sp>
+      <p:sp>
+        <p:nvSpPr>
+          <p:cNvPr id="6" name="Text 4"/>
+          <p:cNvSpPr txBox="1"/>
+          <p:nvPr/>
+        </p:nvSpPr>
+        <p:spPr>
+          <a:xfrm>
+            <a:off x="969264" y="1481328"/>
+            <a:ext cx="6025896" cy="365760"/>
           </a:xfrm>
           <a:prstGeom prst="rect">
             <a:avLst/>
@@ -8403,32 +8652,271 @@
           <a:lstStyle/>
           <a:p>
             <a:pPr indent="0" marL="0">
-              <a:buNone/>
-            </a:pPr>
-            <a:r>
-              <a:rPr lang="en-US" sz="1400" b="1" dirty="0">
-                <a:solidFill>
-                  <a:srgbClr val="1E2761"/>
-                </a:solidFill>
-                <a:latin typeface="Calibri" pitchFamily="34" charset="0"/>
-                <a:ea typeface="Calibri" pitchFamily="34" charset="-122"/>
-                <a:cs typeface="Calibri" pitchFamily="34" charset="-120"/>
-              </a:rPr>
-              <a:t>CSVをダウンロードする</a:t>
-            </a:r>
-            <a:endParaRPr lang="en-US" sz="1400" dirty="0"/>
-          </a:p>
-        </p:txBody>
-      </p:sp>
-      <p:sp>
-        <p:nvSpPr>
-          <p:cNvPr id="5" name="Text 3"/>
-          <p:cNvSpPr txBox="1"/>
-          <p:nvPr/>
-        </p:nvSpPr>
-        <p:spPr>
-          <a:xfrm>
-            <a:off x="713232" y="1922018"/>
+              <a:lnSpc>
+                <a:spcPct val="125000"/>
+              </a:lnSpc>
+              <a:buNone/>
+            </a:pPr>
+            <a:r>
+              <a:rPr lang="en-US" sz="1150" b="1" dirty="0">
+                <a:solidFill>
+                  <a:srgbClr val="222222"/>
+                </a:solidFill>
+                <a:latin typeface="Calibri" pitchFamily="34" charset="0"/>
+                <a:ea typeface="Calibri" pitchFamily="34" charset="-122"/>
+                <a:cs typeface="Calibri" pitchFamily="34" charset="-120"/>
+              </a:rPr>
+              <a:t>テスト送信</a:t>
+            </a:r>
+            <a:pPr indent="0" marL="0">
+              <a:lnSpc>
+                <a:spcPct val="125000"/>
+              </a:lnSpc>
+              <a:buNone/>
+            </a:pPr>
+            <a:r>
+              <a:rPr lang="en-US" sz="1150" dirty="0">
+                <a:solidFill>
+                  <a:srgbClr val="222222"/>
+                </a:solidFill>
+                <a:latin typeface="Calibri" pitchFamily="34" charset="0"/>
+                <a:ea typeface="Calibri" pitchFamily="34" charset="-122"/>
+                <a:cs typeface="Calibri" pitchFamily="34" charset="-120"/>
+              </a:rPr>
+              <a:t>：自分のアドレスを入れて送り、文面とリンクを確認する</a:t>
+            </a:r>
+            <a:endParaRPr lang="en-US" sz="1150" dirty="0"/>
+          </a:p>
+        </p:txBody>
+      </p:sp>
+      <p:sp>
+        <p:nvSpPr>
+          <p:cNvPr id="7" name="Shape 5"/>
+          <p:cNvSpPr/>
+          <p:nvPr/>
+        </p:nvSpPr>
+        <p:spPr>
+          <a:xfrm>
+            <a:off x="566928" y="1956816"/>
+            <a:ext cx="274320" cy="274320"/>
+          </a:xfrm>
+          <a:prstGeom prst="ellipse">
+            <a:avLst/>
+          </a:prstGeom>
+          <a:solidFill>
+            <a:srgbClr val="1E2761"/>
+          </a:solidFill>
+          <a:ln/>
+        </p:spPr>
+      </p:sp>
+      <p:sp>
+        <p:nvSpPr>
+          <p:cNvPr id="8" name="Text 6"/>
+          <p:cNvSpPr txBox="1"/>
+          <p:nvPr/>
+        </p:nvSpPr>
+        <p:spPr>
+          <a:xfrm>
+            <a:off x="566928" y="1956816"/>
+            <a:ext cx="274320" cy="274320"/>
+          </a:xfrm>
+          <a:prstGeom prst="rect">
+            <a:avLst/>
+          </a:prstGeom>
+          <a:noFill/>
+          <a:ln/>
+        </p:spPr>
+        <p:txBody>
+          <a:bodyPr wrap="square" lIns="0" tIns="0" rIns="0" bIns="0" rtlCol="0" anchor="ctr"/>
+          <a:lstStyle/>
+          <a:p>
+            <a:pPr algn="ctr" indent="0" marL="0">
+              <a:buNone/>
+            </a:pPr>
+            <a:r>
+              <a:rPr lang="en-US" sz="1100" b="1" dirty="0">
+                <a:solidFill>
+                  <a:srgbClr val="FFFFFF"/>
+                </a:solidFill>
+                <a:latin typeface="Calibri" pitchFamily="34" charset="0"/>
+                <a:ea typeface="Calibri" pitchFamily="34" charset="-122"/>
+                <a:cs typeface="Calibri" pitchFamily="34" charset="-120"/>
+              </a:rPr>
+              <a:t>2</a:t>
+            </a:r>
+            <a:endParaRPr lang="en-US" sz="1100" dirty="0"/>
+          </a:p>
+        </p:txBody>
+      </p:sp>
+      <p:sp>
+        <p:nvSpPr>
+          <p:cNvPr id="9" name="Text 7"/>
+          <p:cNvSpPr txBox="1"/>
+          <p:nvPr/>
+        </p:nvSpPr>
+        <p:spPr>
+          <a:xfrm>
+            <a:off x="969264" y="1938528"/>
+            <a:ext cx="6025896" cy="365760"/>
+          </a:xfrm>
+          <a:prstGeom prst="rect">
+            <a:avLst/>
+          </a:prstGeom>
+          <a:noFill/>
+          <a:ln/>
+        </p:spPr>
+        <p:txBody>
+          <a:bodyPr wrap="square" lIns="0" tIns="0" rIns="0" bIns="0" rtlCol="0" anchor="t"/>
+          <a:lstStyle/>
+          <a:p>
+            <a:pPr indent="0" marL="0">
+              <a:lnSpc>
+                <a:spcPct val="125000"/>
+              </a:lnSpc>
+              <a:buNone/>
+            </a:pPr>
+            <a:r>
+              <a:rPr lang="en-US" sz="1150" b="1" dirty="0">
+                <a:solidFill>
+                  <a:srgbClr val="222222"/>
+                </a:solidFill>
+                <a:latin typeface="Calibri" pitchFamily="34" charset="0"/>
+                <a:ea typeface="Calibri" pitchFamily="34" charset="-122"/>
+                <a:cs typeface="Calibri" pitchFamily="34" charset="-120"/>
+              </a:rPr>
+              <a:t>送信対象を作成・更新する</a:t>
+            </a:r>
+            <a:pPr indent="0" marL="0">
+              <a:lnSpc>
+                <a:spcPct val="125000"/>
+              </a:lnSpc>
+              <a:buNone/>
+            </a:pPr>
+            <a:r>
+              <a:rPr lang="en-US" sz="1150" dirty="0">
+                <a:solidFill>
+                  <a:srgbClr val="222222"/>
+                </a:solidFill>
+                <a:latin typeface="Calibri" pitchFamily="34" charset="0"/>
+                <a:ea typeface="Calibri" pitchFamily="34" charset="-122"/>
+                <a:cs typeface="Calibri" pitchFamily="34" charset="-120"/>
+              </a:rPr>
+              <a:t>を押す（メールアドレスを登録した来場者が対象になります）</a:t>
+            </a:r>
+            <a:endParaRPr lang="en-US" sz="1150" dirty="0"/>
+          </a:p>
+        </p:txBody>
+      </p:sp>
+      <p:sp>
+        <p:nvSpPr>
+          <p:cNvPr id="10" name="Shape 8"/>
+          <p:cNvSpPr/>
+          <p:nvPr/>
+        </p:nvSpPr>
+        <p:spPr>
+          <a:xfrm>
+            <a:off x="566928" y="2414016"/>
+            <a:ext cx="274320" cy="274320"/>
+          </a:xfrm>
+          <a:prstGeom prst="ellipse">
+            <a:avLst/>
+          </a:prstGeom>
+          <a:solidFill>
+            <a:srgbClr val="1E2761"/>
+          </a:solidFill>
+          <a:ln/>
+        </p:spPr>
+      </p:sp>
+      <p:sp>
+        <p:nvSpPr>
+          <p:cNvPr id="11" name="Text 9"/>
+          <p:cNvSpPr txBox="1"/>
+          <p:nvPr/>
+        </p:nvSpPr>
+        <p:spPr>
+          <a:xfrm>
+            <a:off x="566928" y="2414016"/>
+            <a:ext cx="274320" cy="274320"/>
+          </a:xfrm>
+          <a:prstGeom prst="rect">
+            <a:avLst/>
+          </a:prstGeom>
+          <a:noFill/>
+          <a:ln/>
+        </p:spPr>
+        <p:txBody>
+          <a:bodyPr wrap="square" lIns="0" tIns="0" rIns="0" bIns="0" rtlCol="0" anchor="ctr"/>
+          <a:lstStyle/>
+          <a:p>
+            <a:pPr algn="ctr" indent="0" marL="0">
+              <a:buNone/>
+            </a:pPr>
+            <a:r>
+              <a:rPr lang="en-US" sz="1100" b="1" dirty="0">
+                <a:solidFill>
+                  <a:srgbClr val="FFFFFF"/>
+                </a:solidFill>
+                <a:latin typeface="Calibri" pitchFamily="34" charset="0"/>
+                <a:ea typeface="Calibri" pitchFamily="34" charset="-122"/>
+                <a:cs typeface="Calibri" pitchFamily="34" charset="-120"/>
+              </a:rPr>
+              <a:t>3</a:t>
+            </a:r>
+            <a:endParaRPr lang="en-US" sz="1100" dirty="0"/>
+          </a:p>
+        </p:txBody>
+      </p:sp>
+      <p:sp>
+        <p:nvSpPr>
+          <p:cNvPr id="12" name="Text 10"/>
+          <p:cNvSpPr txBox="1"/>
+          <p:nvPr/>
+        </p:nvSpPr>
+        <p:spPr>
+          <a:xfrm>
+            <a:off x="969264" y="2395728"/>
+            <a:ext cx="6025896" cy="365760"/>
+          </a:xfrm>
+          <a:prstGeom prst="rect">
+            <a:avLst/>
+          </a:prstGeom>
+          <a:noFill/>
+          <a:ln/>
+        </p:spPr>
+        <p:txBody>
+          <a:bodyPr wrap="square" lIns="0" tIns="0" rIns="0" bIns="0" rtlCol="0" anchor="t"/>
+          <a:lstStyle/>
+          <a:p>
+            <a:pPr indent="0" marL="0">
+              <a:lnSpc>
+                <a:spcPct val="125000"/>
+              </a:lnSpc>
+              <a:buNone/>
+            </a:pPr>
+            <a:r>
+              <a:rPr lang="en-US" sz="1150" dirty="0">
+                <a:solidFill>
+                  <a:srgbClr val="222222"/>
+                </a:solidFill>
+                <a:latin typeface="Calibri" pitchFamily="34" charset="0"/>
+                <a:ea typeface="Calibri" pitchFamily="34" charset="-122"/>
+                <a:cs typeface="Calibri" pitchFamily="34" charset="-120"/>
+              </a:rPr>
+              <a:t>送信する</a:t>
+            </a:r>
+            <a:endParaRPr lang="en-US" sz="1150" dirty="0"/>
+          </a:p>
+        </p:txBody>
+      </p:sp>
+      <p:sp>
+        <p:nvSpPr>
+          <p:cNvPr id="13" name="Text 11"/>
+          <p:cNvSpPr txBox="1"/>
+          <p:nvPr/>
+        </p:nvSpPr>
+        <p:spPr>
+          <a:xfrm>
+            <a:off x="713232" y="2852928"/>
             <a:ext cx="6281928" cy="257429"/>
           </a:xfrm>
           <a:prstGeom prst="rect">
@@ -8449,23 +8937,6 @@
               <a:buChar char="●"/>
             </a:pPr>
             <a:r>
-              <a:rPr lang="en-US" sz="1100" b="1" dirty="0">
-                <a:solidFill>
-                  <a:srgbClr val="222222"/>
-                </a:solidFill>
-                <a:latin typeface="Calibri" pitchFamily="34" charset="0"/>
-                <a:ea typeface="Calibri" pitchFamily="34" charset="-122"/>
-                <a:cs typeface="Calibri" pitchFamily="34" charset="-120"/>
-              </a:rPr>
-              <a:t>企業別</a:t>
-            </a:r>
-            <a:pPr indent="0" marL="0">
-              <a:lnSpc>
-                <a:spcPct val="125000"/>
-              </a:lnSpc>
-              <a:buNone/>
-            </a:pPr>
-            <a:r>
               <a:rPr lang="en-US" sz="1100" dirty="0">
                 <a:solidFill>
                   <a:srgbClr val="222222"/>
@@ -8474,7 +8945,7 @@
                 <a:ea typeface="Calibri" pitchFamily="34" charset="-122"/>
                 <a:cs typeface="Calibri" pitchFamily="34" charset="-120"/>
               </a:rPr>
-              <a:t>：企業の「集計」画面、または「回答一覧」から</a:t>
+              <a:t>少数なら「この画面から50件だけ送信する」</a:t>
             </a:r>
             <a:endParaRPr lang="en-US" sz="1100" dirty="0"/>
           </a:p>
@@ -8482,13 +8953,13 @@
       </p:sp>
       <p:sp>
         <p:nvSpPr>
-          <p:cNvPr id="6" name="Text 4"/>
-          <p:cNvSpPr txBox="1"/>
-          <p:nvPr/>
-        </p:nvSpPr>
-        <p:spPr>
-          <a:xfrm>
-            <a:off x="713232" y="2197735"/>
+          <p:cNvPr id="14" name="Text 12"/>
+          <p:cNvSpPr txBox="1"/>
+          <p:nvPr/>
+        </p:nvSpPr>
+        <p:spPr>
+          <a:xfrm>
+            <a:off x="713232" y="3128645"/>
             <a:ext cx="6281928" cy="257429"/>
           </a:xfrm>
           <a:prstGeom prst="rect">
@@ -8509,32 +8980,74 @@
               <a:buChar char="●"/>
             </a:pPr>
             <a:r>
+              <a:rPr lang="en-US" sz="1100" dirty="0">
+                <a:solidFill>
+                  <a:srgbClr val="222222"/>
+                </a:solidFill>
+                <a:latin typeface="Calibri" pitchFamily="34" charset="0"/>
+                <a:ea typeface="Calibri" pitchFamily="34" charset="-122"/>
+                <a:cs typeface="Calibri" pitchFamily="34" charset="-120"/>
+              </a:rPr>
+              <a:t>大量ならサーバーの自動送信（5分ごとに200件ずつ）に任せる</a:t>
+            </a:r>
+            <a:endParaRPr lang="en-US" sz="1100" dirty="0"/>
+          </a:p>
+        </p:txBody>
+      </p:sp>
+      <p:sp>
+        <p:nvSpPr>
+          <p:cNvPr id="15" name="Shape 13"/>
+          <p:cNvSpPr/>
+          <p:nvPr/>
+        </p:nvSpPr>
+        <p:spPr>
+          <a:xfrm>
+            <a:off x="566928" y="3422650"/>
+            <a:ext cx="274320" cy="274320"/>
+          </a:xfrm>
+          <a:prstGeom prst="ellipse">
+            <a:avLst/>
+          </a:prstGeom>
+          <a:solidFill>
+            <a:srgbClr val="1E2761"/>
+          </a:solidFill>
+          <a:ln/>
+        </p:spPr>
+      </p:sp>
+      <p:sp>
+        <p:nvSpPr>
+          <p:cNvPr id="16" name="Text 14"/>
+          <p:cNvSpPr txBox="1"/>
+          <p:nvPr/>
+        </p:nvSpPr>
+        <p:spPr>
+          <a:xfrm>
+            <a:off x="566928" y="3422650"/>
+            <a:ext cx="274320" cy="274320"/>
+          </a:xfrm>
+          <a:prstGeom prst="rect">
+            <a:avLst/>
+          </a:prstGeom>
+          <a:noFill/>
+          <a:ln/>
+        </p:spPr>
+        <p:txBody>
+          <a:bodyPr wrap="square" lIns="0" tIns="0" rIns="0" bIns="0" rtlCol="0" anchor="ctr"/>
+          <a:lstStyle/>
+          <a:p>
+            <a:pPr algn="ctr" indent="0" marL="0">
+              <a:buNone/>
+            </a:pPr>
+            <a:r>
               <a:rPr lang="en-US" sz="1100" b="1" dirty="0">
                 <a:solidFill>
-                  <a:srgbClr val="222222"/>
-                </a:solidFill>
-                <a:latin typeface="Calibri" pitchFamily="34" charset="0"/>
-                <a:ea typeface="Calibri" pitchFamily="34" charset="-122"/>
-                <a:cs typeface="Calibri" pitchFamily="34" charset="-120"/>
-              </a:rPr>
-              <a:t>全社まとめて</a:t>
-            </a:r>
-            <a:pPr indent="0" marL="0">
-              <a:lnSpc>
-                <a:spcPct val="125000"/>
-              </a:lnSpc>
-              <a:buNone/>
-            </a:pPr>
-            <a:r>
-              <a:rPr lang="en-US" sz="1100" dirty="0">
-                <a:solidFill>
-                  <a:srgbClr val="222222"/>
-                </a:solidFill>
-                <a:latin typeface="Calibri" pitchFamily="34" charset="0"/>
-                <a:ea typeface="Calibri" pitchFamily="34" charset="-122"/>
-                <a:cs typeface="Calibri" pitchFamily="34" charset="-120"/>
-              </a:rPr>
-              <a:t>：ダッシュボードの「全企業分のCSV」から</a:t>
+                  <a:srgbClr val="FFFFFF"/>
+                </a:solidFill>
+                <a:latin typeface="Calibri" pitchFamily="34" charset="0"/>
+                <a:ea typeface="Calibri" pitchFamily="34" charset="-122"/>
+                <a:cs typeface="Calibri" pitchFamily="34" charset="-120"/>
+              </a:rPr>
+              <a:t>4</a:t>
             </a:r>
             <a:endParaRPr lang="en-US" sz="1100" dirty="0"/>
           </a:p>
@@ -8542,14 +9055,14 @@
       </p:sp>
       <p:sp>
         <p:nvSpPr>
-          <p:cNvPr id="7" name="Text 5"/>
-          <p:cNvSpPr txBox="1"/>
-          <p:nvPr/>
-        </p:nvSpPr>
-        <p:spPr>
-          <a:xfrm>
-            <a:off x="566928" y="2473452"/>
-            <a:ext cx="6428232" cy="257429"/>
+          <p:cNvPr id="17" name="Text 15"/>
+          <p:cNvSpPr txBox="1"/>
+          <p:nvPr/>
+        </p:nvSpPr>
+        <p:spPr>
+          <a:xfrm>
+            <a:off x="969264" y="3404362"/>
+            <a:ext cx="6025896" cy="365760"/>
           </a:xfrm>
           <a:prstGeom prst="rect">
             <a:avLst/>
@@ -8568,63 +9081,29 @@
               <a:buNone/>
             </a:pPr>
             <a:r>
-              <a:rPr lang="en-US" sz="1100" dirty="0">
-                <a:solidFill>
-                  <a:srgbClr val="222222"/>
-                </a:solidFill>
-                <a:latin typeface="Calibri" pitchFamily="34" charset="0"/>
-                <a:ea typeface="Calibri" pitchFamily="34" charset="-122"/>
-                <a:cs typeface="Calibri" pitchFamily="34" charset="-120"/>
-              </a:rPr>
-              <a:t>CSVは</a:t>
-            </a:r>
-            <a:pPr indent="0" marL="0">
-              <a:lnSpc>
-                <a:spcPct val="125000"/>
-              </a:lnSpc>
-              <a:buNone/>
-            </a:pPr>
-            <a:r>
-              <a:rPr lang="en-US" sz="1100" b="1" dirty="0">
-                <a:solidFill>
-                  <a:srgbClr val="222222"/>
-                </a:solidFill>
-                <a:latin typeface="Calibri" pitchFamily="34" charset="0"/>
-                <a:ea typeface="Calibri" pitchFamily="34" charset="-122"/>
-                <a:cs typeface="Calibri" pitchFamily="34" charset="-120"/>
-              </a:rPr>
-              <a:t>UTF-8（BOM付き）</a:t>
-            </a:r>
-            <a:pPr indent="0" marL="0">
-              <a:lnSpc>
-                <a:spcPct val="125000"/>
-              </a:lnSpc>
-              <a:buNone/>
-            </a:pPr>
-            <a:r>
-              <a:rPr lang="en-US" sz="1100" dirty="0">
-                <a:solidFill>
-                  <a:srgbClr val="222222"/>
-                </a:solidFill>
-                <a:latin typeface="Calibri" pitchFamily="34" charset="0"/>
-                <a:ea typeface="Calibri" pitchFamily="34" charset="-122"/>
-                <a:cs typeface="Calibri" pitchFamily="34" charset="-120"/>
-              </a:rPr>
-              <a:t>なので、Excelでそのまま開けます。</a:t>
-            </a:r>
-            <a:endParaRPr lang="en-US" sz="1100" dirty="0"/>
-          </a:p>
-        </p:txBody>
-      </p:sp>
-      <p:sp>
-        <p:nvSpPr>
-          <p:cNvPr id="8" name="Shape 6"/>
+              <a:rPr lang="en-US" sz="1150" dirty="0">
+                <a:solidFill>
+                  <a:srgbClr val="222222"/>
+                </a:solidFill>
+                <a:latin typeface="Calibri" pitchFamily="34" charset="0"/>
+                <a:ea typeface="Calibri" pitchFamily="34" charset="-122"/>
+                <a:cs typeface="Calibri" pitchFamily="34" charset="-120"/>
+              </a:rPr>
+              <a:t>送信状況（未送信・送信済み・失敗・回答済み）を画面で確認する</a:t>
+            </a:r>
+            <a:endParaRPr lang="en-US" sz="1150" dirty="0"/>
+          </a:p>
+        </p:txBody>
+      </p:sp>
+      <p:sp>
+        <p:nvSpPr>
+          <p:cNvPr id="18" name="Shape 16"/>
           <p:cNvSpPr/>
           <p:nvPr/>
         </p:nvSpPr>
         <p:spPr>
           <a:xfrm>
-            <a:off x="566928" y="2767457"/>
+            <a:off x="566928" y="3861562"/>
             <a:ext cx="6428232" cy="624459"/>
           </a:xfrm>
           <a:prstGeom prst="roundRect">
@@ -8645,13 +9124,13 @@
       </p:sp>
       <p:sp>
         <p:nvSpPr>
-          <p:cNvPr id="9" name="Text 7"/>
-          <p:cNvSpPr txBox="1"/>
-          <p:nvPr/>
-        </p:nvSpPr>
-        <p:spPr>
-          <a:xfrm>
-            <a:off x="658368" y="2858897"/>
+          <p:cNvPr id="19" name="Text 17"/>
+          <p:cNvSpPr txBox="1"/>
+          <p:nvPr/>
+        </p:nvSpPr>
+        <p:spPr>
+          <a:xfrm>
+            <a:off x="658368" y="3953002"/>
             <a:ext cx="237744" cy="237744"/>
           </a:xfrm>
           <a:prstGeom prst="rect">
@@ -8684,13 +9163,13 @@
       </p:sp>
       <p:sp>
         <p:nvSpPr>
-          <p:cNvPr id="10" name="Text 8"/>
-          <p:cNvSpPr txBox="1"/>
-          <p:nvPr/>
-        </p:nvSpPr>
-        <p:spPr>
-          <a:xfrm>
-            <a:off x="950976" y="2877185"/>
+          <p:cNvPr id="20" name="Text 18"/>
+          <p:cNvSpPr txBox="1"/>
+          <p:nvPr/>
+        </p:nvSpPr>
+        <p:spPr>
+          <a:xfrm>
+            <a:off x="950976" y="3971290"/>
             <a:ext cx="5925312" cy="441579"/>
           </a:xfrm>
           <a:prstGeom prst="rect">
@@ -8718,7 +9197,41 @@
                 <a:ea typeface="Calibri" pitchFamily="34" charset="-122"/>
                 <a:cs typeface="Calibri" pitchFamily="34" charset="-120"/>
               </a:rPr>
-              <a:t>メールアドレスは出力されません。来場者は匿名のID（来場者ID）だけが入るので、企業をまたいだ同じ方の回答を突き合わせられます。</a:t>
+              <a:t>テスト送信のリンクは</a:t>
+            </a:r>
+            <a:pPr indent="0" marL="0">
+              <a:lnSpc>
+                <a:spcPct val="120000"/>
+              </a:lnSpc>
+              <a:buNone/>
+            </a:pPr>
+            <a:r>
+              <a:rPr lang="en-US" sz="1050" b="1" dirty="0">
+                <a:solidFill>
+                  <a:srgbClr val="222222"/>
+                </a:solidFill>
+                <a:latin typeface="Calibri" pitchFamily="34" charset="0"/>
+                <a:ea typeface="Calibri" pitchFamily="34" charset="-122"/>
+                <a:cs typeface="Calibri" pitchFamily="34" charset="-120"/>
+              </a:rPr>
+              <a:t>スタッフ確認用のプレビュー</a:t>
+            </a:r>
+            <a:pPr indent="0" marL="0">
+              <a:lnSpc>
+                <a:spcPct val="120000"/>
+              </a:lnSpc>
+              <a:buNone/>
+            </a:pPr>
+            <a:r>
+              <a:rPr lang="en-US" sz="1050" dirty="0">
+                <a:solidFill>
+                  <a:srgbClr val="222222"/>
+                </a:solidFill>
+                <a:latin typeface="Calibri" pitchFamily="34" charset="0"/>
+                <a:ea typeface="Calibri" pitchFamily="34" charset="-122"/>
+                <a:cs typeface="Calibri" pitchFamily="34" charset="-120"/>
+              </a:rPr>
+              <a:t>です。管理画面にログインした状態で開くと、来場者に見えるのと同じ画面を確認できます（プレビューからは回答できません）。</a:t>
             </a:r>
             <a:endParaRPr lang="en-US" sz="1050" dirty="0"/>
           </a:p>
@@ -8726,14 +9239,80 @@
       </p:sp>
       <p:sp>
         <p:nvSpPr>
-          <p:cNvPr id="11" name="Text 9"/>
-          <p:cNvSpPr txBox="1"/>
-          <p:nvPr/>
-        </p:nvSpPr>
-        <p:spPr>
-          <a:xfrm>
-            <a:off x="566928" y="3574796"/>
-            <a:ext cx="6428232" cy="257810"/>
+          <p:cNvPr id="21" name="Shape 19"/>
+          <p:cNvSpPr/>
+          <p:nvPr/>
+        </p:nvSpPr>
+        <p:spPr>
+          <a:xfrm>
+            <a:off x="566928" y="4559173"/>
+            <a:ext cx="6428232" cy="431102"/>
+          </a:xfrm>
+          <a:prstGeom prst="roundRect">
+            <a:avLst>
+              <a:gd name="adj" fmla="val 12726"/>
+            </a:avLst>
+          </a:prstGeom>
+          <a:solidFill>
+            <a:srgbClr val="FDF0E6"/>
+          </a:solidFill>
+          <a:ln w="9525">
+            <a:solidFill>
+              <a:srgbClr val="E08A3C"/>
+            </a:solidFill>
+            <a:prstDash val="solid"/>
+          </a:ln>
+        </p:spPr>
+      </p:sp>
+      <p:sp>
+        <p:nvSpPr>
+          <p:cNvPr id="22" name="Text 20"/>
+          <p:cNvSpPr txBox="1"/>
+          <p:nvPr/>
+        </p:nvSpPr>
+        <p:spPr>
+          <a:xfrm>
+            <a:off x="658368" y="4650613"/>
+            <a:ext cx="237744" cy="237744"/>
+          </a:xfrm>
+          <a:prstGeom prst="rect">
+            <a:avLst/>
+          </a:prstGeom>
+          <a:noFill/>
+          <a:ln/>
+        </p:spPr>
+        <p:txBody>
+          <a:bodyPr wrap="square" lIns="0" tIns="0" rIns="0" bIns="0" rtlCol="0" anchor="ctr"/>
+          <a:lstStyle/>
+          <a:p>
+            <a:pPr algn="ctr" indent="0" marL="0">
+              <a:buNone/>
+            </a:pPr>
+            <a:r>
+              <a:rPr lang="en-US" sz="1200" b="1" dirty="0">
+                <a:solidFill>
+                  <a:srgbClr val="C25A17"/>
+                </a:solidFill>
+                <a:latin typeface="Calibri" pitchFamily="34" charset="0"/>
+                <a:ea typeface="Calibri" pitchFamily="34" charset="-122"/>
+                <a:cs typeface="Calibri" pitchFamily="34" charset="-120"/>
+              </a:rPr>
+              <a:t>！</a:t>
+            </a:r>
+            <a:endParaRPr lang="en-US" sz="1200" dirty="0"/>
+          </a:p>
+        </p:txBody>
+      </p:sp>
+      <p:sp>
+        <p:nvSpPr>
+          <p:cNvPr id="23" name="Text 21"/>
+          <p:cNvSpPr txBox="1"/>
+          <p:nvPr/>
+        </p:nvSpPr>
+        <p:spPr>
+          <a:xfrm>
+            <a:off x="950976" y="4668901"/>
+            <a:ext cx="5925312" cy="248221"/>
           </a:xfrm>
           <a:prstGeom prst="rect">
             <a:avLst/>
@@ -8746,68 +9325,29 @@
           <a:lstStyle/>
           <a:p>
             <a:pPr indent="0" marL="0">
-              <a:buNone/>
-            </a:pPr>
-            <a:r>
-              <a:rPr lang="en-US" sz="1400" b="1" dirty="0">
-                <a:solidFill>
-                  <a:srgbClr val="1E2761"/>
-                </a:solidFill>
-                <a:latin typeface="Calibri" pitchFamily="34" charset="0"/>
-                <a:ea typeface="Calibri" pitchFamily="34" charset="-122"/>
-                <a:cs typeface="Calibri" pitchFamily="34" charset="-120"/>
-              </a:rPr>
-              <a:t>集計画面で見る</a:t>
-            </a:r>
-            <a:endParaRPr lang="en-US" sz="1400" dirty="0"/>
-          </a:p>
-        </p:txBody>
-      </p:sp>
-      <p:sp>
-        <p:nvSpPr>
-          <p:cNvPr id="12" name="Text 10"/>
-          <p:cNvSpPr txBox="1"/>
-          <p:nvPr/>
-        </p:nvSpPr>
-        <p:spPr>
-          <a:xfrm>
-            <a:off x="566928" y="3905758"/>
-            <a:ext cx="6428232" cy="459994"/>
-          </a:xfrm>
-          <a:prstGeom prst="rect">
-            <a:avLst/>
-          </a:prstGeom>
-          <a:noFill/>
-          <a:ln/>
-        </p:spPr>
-        <p:txBody>
-          <a:bodyPr wrap="square" lIns="0" tIns="0" rIns="0" bIns="0" rtlCol="0" anchor="t"/>
-          <a:lstStyle/>
-          <a:p>
-            <a:pPr indent="0" marL="0">
-              <a:lnSpc>
-                <a:spcPct val="125000"/>
-              </a:lnSpc>
-              <a:buNone/>
-            </a:pPr>
-            <a:r>
-              <a:rPr lang="en-US" sz="1100" dirty="0">
-                <a:solidFill>
-                  <a:srgbClr val="222222"/>
-                </a:solidFill>
-                <a:latin typeface="Calibri" pitchFamily="34" charset="0"/>
-                <a:ea typeface="Calibri" pitchFamily="34" charset="-122"/>
-                <a:cs typeface="Calibri" pitchFamily="34" charset="-120"/>
-              </a:rPr>
-              <a:t>企業ごとの「集計」画面では、設問ごとのグラフ・星評価の平均・NPS・自由記述の一覧が見られます。</a:t>
-            </a:r>
-            <a:endParaRPr lang="en-US" sz="1100" dirty="0"/>
+              <a:lnSpc>
+                <a:spcPct val="120000"/>
+              </a:lnSpc>
+              <a:buNone/>
+            </a:pPr>
+            <a:r>
+              <a:rPr lang="en-US" sz="1050" dirty="0">
+                <a:solidFill>
+                  <a:srgbClr val="222222"/>
+                </a:solidFill>
+                <a:latin typeface="Calibri" pitchFamily="34" charset="0"/>
+                <a:ea typeface="Calibri" pitchFamily="34" charset="-122"/>
+                <a:cs typeface="Calibri" pitchFamily="34" charset="-120"/>
+              </a:rPr>
+              <a:t>送信済みの人には二重に送られません。失敗したものは自動で3回まで再送されます。</a:t>
+            </a:r>
+            <a:endParaRPr lang="en-US" sz="1050" dirty="0"/>
           </a:p>
         </p:txBody>
       </p:sp>
       <p:pic>
         <p:nvPicPr>
-          <p:cNvPr id="13" name="Image 0" descr="C:\Users\sato\Desktop\enque\docs\images\o-stats.png">    </p:cNvPr>
+          <p:cNvPr id="24" name="Image 0" descr="C:\Users\sato\Desktop\enque\docs\images\o-invite-status.png">    </p:cNvPr>
           <p:cNvPicPr>
             <a:picLocks noChangeAspect="1"/>
           </p:cNvPicPr>
@@ -8821,8 +9361,8 @@
         </p:blipFill>
         <p:spPr>
           <a:xfrm>
-            <a:off x="2140821" y="4402328"/>
-            <a:ext cx="3280447" cy="3474720"/>
+            <a:off x="1504370" y="5063427"/>
+            <a:ext cx="4553347" cy="3474720"/>
           </a:xfrm>
           <a:prstGeom prst="rect">
             <a:avLst/>
@@ -8831,13 +9371,13 @@
       </p:pic>
       <p:sp>
         <p:nvSpPr>
-          <p:cNvPr id="14" name="Text 11"/>
-          <p:cNvSpPr txBox="1"/>
-          <p:nvPr/>
-        </p:nvSpPr>
-        <p:spPr>
-          <a:xfrm>
-            <a:off x="566928" y="7931912"/>
+          <p:cNvPr id="25" name="Text 22"/>
+          <p:cNvSpPr txBox="1"/>
+          <p:nvPr/>
+        </p:nvSpPr>
+        <p:spPr>
+          <a:xfrm>
+            <a:off x="566928" y="8593011"/>
             <a:ext cx="6428232" cy="274320"/>
           </a:xfrm>
           <a:prstGeom prst="rect">
@@ -8862,7 +9402,7 @@
                 <a:ea typeface="Calibri" pitchFamily="34" charset="-122"/>
                 <a:cs typeface="Calibri" pitchFamily="34" charset="-120"/>
               </a:rPr>
-              <a:t>企業の集計画面。設問ごとのグラフが見えるところ。</a:t>
+              <a:t>「総合アンケートと案内メール」画面の送信状況（未送信・送信済み・失敗・回答済みの数）。</a:t>
             </a:r>
             <a:endParaRPr lang="en-US" sz="950" dirty="0"/>
           </a:p>
@@ -8870,7 +9410,7 @@
       </p:sp>
       <p:sp>
         <p:nvSpPr>
-          <p:cNvPr id="15" name="Text 12"/>
+          <p:cNvPr id="26" name="Text 23"/>
           <p:cNvSpPr txBox="1"/>
           <p:nvPr/>
         </p:nvSpPr>
@@ -9011,7 +9551,7 @@
                 <a:ea typeface="Calibri" pitchFamily="34" charset="-122"/>
                 <a:cs typeface="Calibri" pitchFamily="34" charset="-120"/>
               </a:rPr>
-              <a:t>終了後4：メールアドレスを削除する</a:t>
+              <a:t>終了後3：集計データを受け取る</a:t>
             </a:r>
             <a:endParaRPr lang="en-US" sz="2200" dirty="0"/>
           </a:p>
@@ -9025,7 +9565,166 @@
         </p:nvSpPr>
         <p:spPr>
           <a:xfrm>
-            <a:off x="566928" y="1481328"/>
+            <a:off x="566928" y="1591056"/>
+            <a:ext cx="6428232" cy="257810"/>
+          </a:xfrm>
+          <a:prstGeom prst="rect">
+            <a:avLst/>
+          </a:prstGeom>
+          <a:noFill/>
+          <a:ln/>
+        </p:spPr>
+        <p:txBody>
+          <a:bodyPr wrap="square" lIns="0" tIns="0" rIns="0" bIns="0" rtlCol="0" anchor="t"/>
+          <a:lstStyle/>
+          <a:p>
+            <a:pPr indent="0" marL="0">
+              <a:buNone/>
+            </a:pPr>
+            <a:r>
+              <a:rPr lang="en-US" sz="1400" b="1" dirty="0">
+                <a:solidFill>
+                  <a:srgbClr val="1E2761"/>
+                </a:solidFill>
+                <a:latin typeface="Calibri" pitchFamily="34" charset="0"/>
+                <a:ea typeface="Calibri" pitchFamily="34" charset="-122"/>
+                <a:cs typeface="Calibri" pitchFamily="34" charset="-120"/>
+              </a:rPr>
+              <a:t>CSVをダウンロードする</a:t>
+            </a:r>
+            <a:endParaRPr lang="en-US" sz="1400" dirty="0"/>
+          </a:p>
+        </p:txBody>
+      </p:sp>
+      <p:sp>
+        <p:nvSpPr>
+          <p:cNvPr id="5" name="Text 3"/>
+          <p:cNvSpPr txBox="1"/>
+          <p:nvPr/>
+        </p:nvSpPr>
+        <p:spPr>
+          <a:xfrm>
+            <a:off x="713232" y="1922018"/>
+            <a:ext cx="6281928" cy="257429"/>
+          </a:xfrm>
+          <a:prstGeom prst="rect">
+            <a:avLst/>
+          </a:prstGeom>
+          <a:noFill/>
+          <a:ln/>
+        </p:spPr>
+        <p:txBody>
+          <a:bodyPr wrap="square" lIns="0" tIns="0" rIns="0" bIns="0" rtlCol="0" anchor="t"/>
+          <a:lstStyle/>
+          <a:p>
+            <a:pPr marL="342900" indent="-342900">
+              <a:lnSpc>
+                <a:spcPct val="125000"/>
+              </a:lnSpc>
+              <a:buSzPct val="100000"/>
+              <a:buChar char="●"/>
+            </a:pPr>
+            <a:r>
+              <a:rPr lang="en-US" sz="1100" b="1" dirty="0">
+                <a:solidFill>
+                  <a:srgbClr val="222222"/>
+                </a:solidFill>
+                <a:latin typeface="Calibri" pitchFamily="34" charset="0"/>
+                <a:ea typeface="Calibri" pitchFamily="34" charset="-122"/>
+                <a:cs typeface="Calibri" pitchFamily="34" charset="-120"/>
+              </a:rPr>
+              <a:t>企業別</a:t>
+            </a:r>
+            <a:pPr indent="0" marL="0">
+              <a:lnSpc>
+                <a:spcPct val="125000"/>
+              </a:lnSpc>
+              <a:buNone/>
+            </a:pPr>
+            <a:r>
+              <a:rPr lang="en-US" sz="1100" dirty="0">
+                <a:solidFill>
+                  <a:srgbClr val="222222"/>
+                </a:solidFill>
+                <a:latin typeface="Calibri" pitchFamily="34" charset="0"/>
+                <a:ea typeface="Calibri" pitchFamily="34" charset="-122"/>
+                <a:cs typeface="Calibri" pitchFamily="34" charset="-120"/>
+              </a:rPr>
+              <a:t>：企業の「集計」画面、または「回答一覧」から</a:t>
+            </a:r>
+            <a:endParaRPr lang="en-US" sz="1100" dirty="0"/>
+          </a:p>
+        </p:txBody>
+      </p:sp>
+      <p:sp>
+        <p:nvSpPr>
+          <p:cNvPr id="6" name="Text 4"/>
+          <p:cNvSpPr txBox="1"/>
+          <p:nvPr/>
+        </p:nvSpPr>
+        <p:spPr>
+          <a:xfrm>
+            <a:off x="713232" y="2197735"/>
+            <a:ext cx="6281928" cy="257429"/>
+          </a:xfrm>
+          <a:prstGeom prst="rect">
+            <a:avLst/>
+          </a:prstGeom>
+          <a:noFill/>
+          <a:ln/>
+        </p:spPr>
+        <p:txBody>
+          <a:bodyPr wrap="square" lIns="0" tIns="0" rIns="0" bIns="0" rtlCol="0" anchor="t"/>
+          <a:lstStyle/>
+          <a:p>
+            <a:pPr marL="342900" indent="-342900">
+              <a:lnSpc>
+                <a:spcPct val="125000"/>
+              </a:lnSpc>
+              <a:buSzPct val="100000"/>
+              <a:buChar char="●"/>
+            </a:pPr>
+            <a:r>
+              <a:rPr lang="en-US" sz="1100" b="1" dirty="0">
+                <a:solidFill>
+                  <a:srgbClr val="222222"/>
+                </a:solidFill>
+                <a:latin typeface="Calibri" pitchFamily="34" charset="0"/>
+                <a:ea typeface="Calibri" pitchFamily="34" charset="-122"/>
+                <a:cs typeface="Calibri" pitchFamily="34" charset="-120"/>
+              </a:rPr>
+              <a:t>全社まとめて</a:t>
+            </a:r>
+            <a:pPr indent="0" marL="0">
+              <a:lnSpc>
+                <a:spcPct val="125000"/>
+              </a:lnSpc>
+              <a:buNone/>
+            </a:pPr>
+            <a:r>
+              <a:rPr lang="en-US" sz="1100" dirty="0">
+                <a:solidFill>
+                  <a:srgbClr val="222222"/>
+                </a:solidFill>
+                <a:latin typeface="Calibri" pitchFamily="34" charset="0"/>
+                <a:ea typeface="Calibri" pitchFamily="34" charset="-122"/>
+                <a:cs typeface="Calibri" pitchFamily="34" charset="-120"/>
+              </a:rPr>
+              <a:t>：ダッシュボードの「全企業分のCSV」から</a:t>
+            </a:r>
+            <a:endParaRPr lang="en-US" sz="1100" dirty="0"/>
+          </a:p>
+        </p:txBody>
+      </p:sp>
+      <p:sp>
+        <p:nvSpPr>
+          <p:cNvPr id="7" name="Text 5"/>
+          <p:cNvSpPr txBox="1"/>
+          <p:nvPr/>
+        </p:nvSpPr>
+        <p:spPr>
+          <a:xfrm>
+            <a:off x="566928" y="2473452"/>
             <a:ext cx="6428232" cy="257429"/>
           </a:xfrm>
           <a:prstGeom prst="rect">
@@ -9053,110 +9752,43 @@
                 <a:ea typeface="Calibri" pitchFamily="34" charset="-122"/>
                 <a:cs typeface="Calibri" pitchFamily="34" charset="-120"/>
               </a:rPr>
-              <a:t>案内の送付と集計が終わったら、預かったメールアドレスを削除します。</a:t>
+              <a:t>CSVは</a:t>
+            </a:r>
+            <a:pPr indent="0" marL="0">
+              <a:lnSpc>
+                <a:spcPct val="125000"/>
+              </a:lnSpc>
+              <a:buNone/>
+            </a:pPr>
+            <a:r>
+              <a:rPr lang="en-US" sz="1100" b="1" dirty="0">
+                <a:solidFill>
+                  <a:srgbClr val="222222"/>
+                </a:solidFill>
+                <a:latin typeface="Calibri" pitchFamily="34" charset="0"/>
+                <a:ea typeface="Calibri" pitchFamily="34" charset="-122"/>
+                <a:cs typeface="Calibri" pitchFamily="34" charset="-120"/>
+              </a:rPr>
+              <a:t>UTF-8（BOM付き）</a:t>
+            </a:r>
+            <a:pPr indent="0" marL="0">
+              <a:lnSpc>
+                <a:spcPct val="125000"/>
+              </a:lnSpc>
+              <a:buNone/>
+            </a:pPr>
+            <a:r>
+              <a:rPr lang="en-US" sz="1100" dirty="0">
+                <a:solidFill>
+                  <a:srgbClr val="222222"/>
+                </a:solidFill>
+                <a:latin typeface="Calibri" pitchFamily="34" charset="0"/>
+                <a:ea typeface="Calibri" pitchFamily="34" charset="-122"/>
+                <a:cs typeface="Calibri" pitchFamily="34" charset="-120"/>
+              </a:rPr>
+              <a:t>なので、Excelでそのまま開けます。</a:t>
             </a:r>
             <a:endParaRPr lang="en-US" sz="1100" dirty="0"/>
-          </a:p>
-        </p:txBody>
-      </p:sp>
-      <p:sp>
-        <p:nvSpPr>
-          <p:cNvPr id="5" name="Shape 3"/>
-          <p:cNvSpPr/>
-          <p:nvPr/>
-        </p:nvSpPr>
-        <p:spPr>
-          <a:xfrm>
-            <a:off x="566928" y="1793621"/>
-            <a:ext cx="274320" cy="274320"/>
-          </a:xfrm>
-          <a:prstGeom prst="ellipse">
-            <a:avLst/>
-          </a:prstGeom>
-          <a:solidFill>
-            <a:srgbClr val="1E2761"/>
-          </a:solidFill>
-          <a:ln/>
-        </p:spPr>
-      </p:sp>
-      <p:sp>
-        <p:nvSpPr>
-          <p:cNvPr id="6" name="Text 4"/>
-          <p:cNvSpPr txBox="1"/>
-          <p:nvPr/>
-        </p:nvSpPr>
-        <p:spPr>
-          <a:xfrm>
-            <a:off x="566928" y="1793621"/>
-            <a:ext cx="274320" cy="274320"/>
-          </a:xfrm>
-          <a:prstGeom prst="rect">
-            <a:avLst/>
-          </a:prstGeom>
-          <a:noFill/>
-          <a:ln/>
-        </p:spPr>
-        <p:txBody>
-          <a:bodyPr wrap="square" lIns="0" tIns="0" rIns="0" bIns="0" rtlCol="0" anchor="ctr"/>
-          <a:lstStyle/>
-          <a:p>
-            <a:pPr algn="ctr" indent="0" marL="0">
-              <a:buNone/>
-            </a:pPr>
-            <a:r>
-              <a:rPr lang="en-US" sz="1100" b="1" dirty="0">
-                <a:solidFill>
-                  <a:srgbClr val="FFFFFF"/>
-                </a:solidFill>
-                <a:latin typeface="Calibri" pitchFamily="34" charset="0"/>
-                <a:ea typeface="Calibri" pitchFamily="34" charset="-122"/>
-                <a:cs typeface="Calibri" pitchFamily="34" charset="-120"/>
-              </a:rPr>
-              <a:t>1</a:t>
-            </a:r>
-            <a:endParaRPr lang="en-US" sz="1100" dirty="0"/>
-          </a:p>
-        </p:txBody>
-      </p:sp>
-      <p:sp>
-        <p:nvSpPr>
-          <p:cNvPr id="7" name="Text 5"/>
-          <p:cNvSpPr txBox="1"/>
-          <p:nvPr/>
-        </p:nvSpPr>
-        <p:spPr>
-          <a:xfrm>
-            <a:off x="969264" y="1775333"/>
-            <a:ext cx="6025896" cy="365760"/>
-          </a:xfrm>
-          <a:prstGeom prst="rect">
-            <a:avLst/>
-          </a:prstGeom>
-          <a:noFill/>
-          <a:ln/>
-        </p:spPr>
-        <p:txBody>
-          <a:bodyPr wrap="square" lIns="0" tIns="0" rIns="0" bIns="0" rtlCol="0" anchor="t"/>
-          <a:lstStyle/>
-          <a:p>
-            <a:pPr indent="0" marL="0">
-              <a:lnSpc>
-                <a:spcPct val="125000"/>
-              </a:lnSpc>
-              <a:buNone/>
-            </a:pPr>
-            <a:r>
-              <a:rPr lang="en-US" sz="1150" dirty="0">
-                <a:solidFill>
-                  <a:srgbClr val="222222"/>
-                </a:solidFill>
-                <a:latin typeface="Calibri" pitchFamily="34" charset="0"/>
-                <a:ea typeface="Calibri" pitchFamily="34" charset="-122"/>
-                <a:cs typeface="Calibri" pitchFamily="34" charset="-120"/>
-              </a:rPr>
-              <a:t>「総合アンケート」の画面を開く</a:t>
-            </a:r>
-            <a:endParaRPr lang="en-US" sz="1150" dirty="0"/>
           </a:p>
         </p:txBody>
       </p:sp>
@@ -9168,461 +9800,7 @@
         </p:nvSpPr>
         <p:spPr>
           <a:xfrm>
-            <a:off x="566928" y="2250821"/>
-            <a:ext cx="274320" cy="274320"/>
-          </a:xfrm>
-          <a:prstGeom prst="ellipse">
-            <a:avLst/>
-          </a:prstGeom>
-          <a:solidFill>
-            <a:srgbClr val="1E2761"/>
-          </a:solidFill>
-          <a:ln/>
-        </p:spPr>
-      </p:sp>
-      <p:sp>
-        <p:nvSpPr>
-          <p:cNvPr id="9" name="Text 7"/>
-          <p:cNvSpPr txBox="1"/>
-          <p:nvPr/>
-        </p:nvSpPr>
-        <p:spPr>
-          <a:xfrm>
-            <a:off x="566928" y="2250821"/>
-            <a:ext cx="274320" cy="274320"/>
-          </a:xfrm>
-          <a:prstGeom prst="rect">
-            <a:avLst/>
-          </a:prstGeom>
-          <a:noFill/>
-          <a:ln/>
-        </p:spPr>
-        <p:txBody>
-          <a:bodyPr wrap="square" lIns="0" tIns="0" rIns="0" bIns="0" rtlCol="0" anchor="ctr"/>
-          <a:lstStyle/>
-          <a:p>
-            <a:pPr algn="ctr" indent="0" marL="0">
-              <a:buNone/>
-            </a:pPr>
-            <a:r>
-              <a:rPr lang="en-US" sz="1100" b="1" dirty="0">
-                <a:solidFill>
-                  <a:srgbClr val="FFFFFF"/>
-                </a:solidFill>
-                <a:latin typeface="Calibri" pitchFamily="34" charset="0"/>
-                <a:ea typeface="Calibri" pitchFamily="34" charset="-122"/>
-                <a:cs typeface="Calibri" pitchFamily="34" charset="-120"/>
-              </a:rPr>
-              <a:t>2</a:t>
-            </a:r>
-            <a:endParaRPr lang="en-US" sz="1100" dirty="0"/>
-          </a:p>
-        </p:txBody>
-      </p:sp>
-      <p:sp>
-        <p:nvSpPr>
-          <p:cNvPr id="10" name="Text 8"/>
-          <p:cNvSpPr txBox="1"/>
-          <p:nvPr/>
-        </p:nvSpPr>
-        <p:spPr>
-          <a:xfrm>
-            <a:off x="969264" y="2232533"/>
-            <a:ext cx="6025896" cy="365760"/>
-          </a:xfrm>
-          <a:prstGeom prst="rect">
-            <a:avLst/>
-          </a:prstGeom>
-          <a:noFill/>
-          <a:ln/>
-        </p:spPr>
-        <p:txBody>
-          <a:bodyPr wrap="square" lIns="0" tIns="0" rIns="0" bIns="0" rtlCol="0" anchor="t"/>
-          <a:lstStyle/>
-          <a:p>
-            <a:pPr indent="0" marL="0">
-              <a:lnSpc>
-                <a:spcPct val="125000"/>
-              </a:lnSpc>
-              <a:buNone/>
-            </a:pPr>
-            <a:r>
-              <a:rPr lang="en-US" sz="1150" dirty="0">
-                <a:solidFill>
-                  <a:srgbClr val="222222"/>
-                </a:solidFill>
-                <a:latin typeface="Calibri" pitchFamily="34" charset="0"/>
-                <a:ea typeface="Calibri" pitchFamily="34" charset="-122"/>
-                <a:cs typeface="Calibri" pitchFamily="34" charset="-120"/>
-              </a:rPr>
-              <a:t>一番下の</a:t>
-            </a:r>
-            <a:pPr indent="0" marL="0">
-              <a:lnSpc>
-                <a:spcPct val="125000"/>
-              </a:lnSpc>
-              <a:buNone/>
-            </a:pPr>
-            <a:r>
-              <a:rPr lang="en-US" sz="1150" b="1" dirty="0">
-                <a:solidFill>
-                  <a:srgbClr val="222222"/>
-                </a:solidFill>
-                <a:latin typeface="Calibri" pitchFamily="34" charset="0"/>
-                <a:ea typeface="Calibri" pitchFamily="34" charset="-122"/>
-                <a:cs typeface="Calibri" pitchFamily="34" charset="-120"/>
-              </a:rPr>
-              <a:t>「メールアドレスを削除する」</a:t>
-            </a:r>
-            <a:pPr indent="0" marL="0">
-              <a:lnSpc>
-                <a:spcPct val="125000"/>
-              </a:lnSpc>
-              <a:buNone/>
-            </a:pPr>
-            <a:r>
-              <a:rPr lang="en-US" sz="1150" dirty="0">
-                <a:solidFill>
-                  <a:srgbClr val="222222"/>
-                </a:solidFill>
-                <a:latin typeface="Calibri" pitchFamily="34" charset="0"/>
-                <a:ea typeface="Calibri" pitchFamily="34" charset="-122"/>
-                <a:cs typeface="Calibri" pitchFamily="34" charset="-120"/>
-              </a:rPr>
-              <a:t>を押す</a:t>
-            </a:r>
-            <a:endParaRPr lang="en-US" sz="1150" dirty="0"/>
-          </a:p>
-        </p:txBody>
-      </p:sp>
-      <p:sp>
-        <p:nvSpPr>
-          <p:cNvPr id="11" name="Shape 9"/>
-          <p:cNvSpPr/>
-          <p:nvPr/>
-        </p:nvSpPr>
-        <p:spPr>
-          <a:xfrm>
-            <a:off x="566928" y="2708021"/>
-            <a:ext cx="274320" cy="274320"/>
-          </a:xfrm>
-          <a:prstGeom prst="ellipse">
-            <a:avLst/>
-          </a:prstGeom>
-          <a:solidFill>
-            <a:srgbClr val="1E2761"/>
-          </a:solidFill>
-          <a:ln/>
-        </p:spPr>
-      </p:sp>
-      <p:sp>
-        <p:nvSpPr>
-          <p:cNvPr id="12" name="Text 10"/>
-          <p:cNvSpPr txBox="1"/>
-          <p:nvPr/>
-        </p:nvSpPr>
-        <p:spPr>
-          <a:xfrm>
-            <a:off x="566928" y="2708021"/>
-            <a:ext cx="274320" cy="274320"/>
-          </a:xfrm>
-          <a:prstGeom prst="rect">
-            <a:avLst/>
-          </a:prstGeom>
-          <a:noFill/>
-          <a:ln/>
-        </p:spPr>
-        <p:txBody>
-          <a:bodyPr wrap="square" lIns="0" tIns="0" rIns="0" bIns="0" rtlCol="0" anchor="ctr"/>
-          <a:lstStyle/>
-          <a:p>
-            <a:pPr algn="ctr" indent="0" marL="0">
-              <a:buNone/>
-            </a:pPr>
-            <a:r>
-              <a:rPr lang="en-US" sz="1100" b="1" dirty="0">
-                <a:solidFill>
-                  <a:srgbClr val="FFFFFF"/>
-                </a:solidFill>
-                <a:latin typeface="Calibri" pitchFamily="34" charset="0"/>
-                <a:ea typeface="Calibri" pitchFamily="34" charset="-122"/>
-                <a:cs typeface="Calibri" pitchFamily="34" charset="-120"/>
-              </a:rPr>
-              <a:t>3</a:t>
-            </a:r>
-            <a:endParaRPr lang="en-US" sz="1100" dirty="0"/>
-          </a:p>
-        </p:txBody>
-      </p:sp>
-      <p:sp>
-        <p:nvSpPr>
-          <p:cNvPr id="13" name="Text 11"/>
-          <p:cNvSpPr txBox="1"/>
-          <p:nvPr/>
-        </p:nvSpPr>
-        <p:spPr>
-          <a:xfrm>
-            <a:off x="969264" y="2689733"/>
-            <a:ext cx="6025896" cy="365760"/>
-          </a:xfrm>
-          <a:prstGeom prst="rect">
-            <a:avLst/>
-          </a:prstGeom>
-          <a:noFill/>
-          <a:ln/>
-        </p:spPr>
-        <p:txBody>
-          <a:bodyPr wrap="square" lIns="0" tIns="0" rIns="0" bIns="0" rtlCol="0" anchor="t"/>
-          <a:lstStyle/>
-          <a:p>
-            <a:pPr indent="0" marL="0">
-              <a:lnSpc>
-                <a:spcPct val="125000"/>
-              </a:lnSpc>
-              <a:buNone/>
-            </a:pPr>
-            <a:r>
-              <a:rPr lang="en-US" sz="1150" dirty="0">
-                <a:solidFill>
-                  <a:srgbClr val="222222"/>
-                </a:solidFill>
-                <a:latin typeface="Calibri" pitchFamily="34" charset="0"/>
-                <a:ea typeface="Calibri" pitchFamily="34" charset="-122"/>
-                <a:cs typeface="Calibri" pitchFamily="34" charset="-120"/>
-              </a:rPr>
-              <a:t>確認メッセージで「OK」を押す</a:t>
-            </a:r>
-            <a:endParaRPr lang="en-US" sz="1150" dirty="0"/>
-          </a:p>
-        </p:txBody>
-      </p:sp>
-      <p:sp>
-        <p:nvSpPr>
-          <p:cNvPr id="14" name="Text 12"/>
-          <p:cNvSpPr txBox="1"/>
-          <p:nvPr/>
-        </p:nvSpPr>
-        <p:spPr>
-          <a:xfrm>
-            <a:off x="566928" y="3146933"/>
-            <a:ext cx="6428232" cy="257429"/>
-          </a:xfrm>
-          <a:prstGeom prst="rect">
-            <a:avLst/>
-          </a:prstGeom>
-          <a:noFill/>
-          <a:ln/>
-        </p:spPr>
-        <p:txBody>
-          <a:bodyPr wrap="square" lIns="0" tIns="0" rIns="0" bIns="0" rtlCol="0" anchor="t"/>
-          <a:lstStyle/>
-          <a:p>
-            <a:pPr indent="0" marL="0">
-              <a:lnSpc>
-                <a:spcPct val="125000"/>
-              </a:lnSpc>
-              <a:buNone/>
-            </a:pPr>
-            <a:r>
-              <a:rPr lang="en-US" sz="1100" dirty="0">
-                <a:solidFill>
-                  <a:srgbClr val="222222"/>
-                </a:solidFill>
-                <a:latin typeface="Calibri" pitchFamily="34" charset="0"/>
-                <a:ea typeface="Calibri" pitchFamily="34" charset="-122"/>
-                <a:cs typeface="Calibri" pitchFamily="34" charset="-120"/>
-              </a:rPr>
-              <a:t>削除しても、</a:t>
-            </a:r>
-            <a:pPr indent="0" marL="0">
-              <a:lnSpc>
-                <a:spcPct val="125000"/>
-              </a:lnSpc>
-              <a:buNone/>
-            </a:pPr>
-            <a:r>
-              <a:rPr lang="en-US" sz="1100" b="1" dirty="0">
-                <a:solidFill>
-                  <a:srgbClr val="222222"/>
-                </a:solidFill>
-                <a:latin typeface="Calibri" pitchFamily="34" charset="0"/>
-                <a:ea typeface="Calibri" pitchFamily="34" charset="-122"/>
-                <a:cs typeface="Calibri" pitchFamily="34" charset="-120"/>
-              </a:rPr>
-              <a:t>回答データ（個人情報を含まないもの）は残ります</a:t>
-            </a:r>
-            <a:pPr indent="0" marL="0">
-              <a:lnSpc>
-                <a:spcPct val="125000"/>
-              </a:lnSpc>
-              <a:buNone/>
-            </a:pPr>
-            <a:r>
-              <a:rPr lang="en-US" sz="1100" dirty="0">
-                <a:solidFill>
-                  <a:srgbClr val="222222"/>
-                </a:solidFill>
-                <a:latin typeface="Calibri" pitchFamily="34" charset="0"/>
-                <a:ea typeface="Calibri" pitchFamily="34" charset="-122"/>
-                <a:cs typeface="Calibri" pitchFamily="34" charset="-120"/>
-              </a:rPr>
-              <a:t>。</a:t>
-            </a:r>
-            <a:endParaRPr lang="en-US" sz="1100" dirty="0"/>
-          </a:p>
-        </p:txBody>
-      </p:sp>
-      <p:sp>
-        <p:nvSpPr>
-          <p:cNvPr id="15" name="Shape 13"/>
-          <p:cNvSpPr/>
-          <p:nvPr/>
-        </p:nvSpPr>
-        <p:spPr>
-          <a:xfrm>
-            <a:off x="566928" y="3440938"/>
-            <a:ext cx="6428232" cy="624459"/>
-          </a:xfrm>
-          <a:prstGeom prst="roundRect">
-            <a:avLst>
-              <a:gd name="adj" fmla="val 8786"/>
-            </a:avLst>
-          </a:prstGeom>
-          <a:solidFill>
-            <a:srgbClr val="FDF0E6"/>
-          </a:solidFill>
-          <a:ln w="9525">
-            <a:solidFill>
-              <a:srgbClr val="E08A3C"/>
-            </a:solidFill>
-            <a:prstDash val="solid"/>
-          </a:ln>
-        </p:spPr>
-      </p:sp>
-      <p:sp>
-        <p:nvSpPr>
-          <p:cNvPr id="16" name="Text 14"/>
-          <p:cNvSpPr txBox="1"/>
-          <p:nvPr/>
-        </p:nvSpPr>
-        <p:spPr>
-          <a:xfrm>
-            <a:off x="658368" y="3532378"/>
-            <a:ext cx="237744" cy="237744"/>
-          </a:xfrm>
-          <a:prstGeom prst="rect">
-            <a:avLst/>
-          </a:prstGeom>
-          <a:noFill/>
-          <a:ln/>
-        </p:spPr>
-        <p:txBody>
-          <a:bodyPr wrap="square" lIns="0" tIns="0" rIns="0" bIns="0" rtlCol="0" anchor="ctr"/>
-          <a:lstStyle/>
-          <a:p>
-            <a:pPr algn="ctr" indent="0" marL="0">
-              <a:buNone/>
-            </a:pPr>
-            <a:r>
-              <a:rPr lang="en-US" sz="1200" b="1" dirty="0">
-                <a:solidFill>
-                  <a:srgbClr val="C25A17"/>
-                </a:solidFill>
-                <a:latin typeface="Calibri" pitchFamily="34" charset="0"/>
-                <a:ea typeface="Calibri" pitchFamily="34" charset="-122"/>
-                <a:cs typeface="Calibri" pitchFamily="34" charset="-120"/>
-              </a:rPr>
-              <a:t>！</a:t>
-            </a:r>
-            <a:endParaRPr lang="en-US" sz="1200" dirty="0"/>
-          </a:p>
-        </p:txBody>
-      </p:sp>
-      <p:sp>
-        <p:nvSpPr>
-          <p:cNvPr id="17" name="Text 15"/>
-          <p:cNvSpPr txBox="1"/>
-          <p:nvPr/>
-        </p:nvSpPr>
-        <p:spPr>
-          <a:xfrm>
-            <a:off x="950976" y="3550666"/>
-            <a:ext cx="5925312" cy="441579"/>
-          </a:xfrm>
-          <a:prstGeom prst="rect">
-            <a:avLst/>
-          </a:prstGeom>
-          <a:noFill/>
-          <a:ln/>
-        </p:spPr>
-        <p:txBody>
-          <a:bodyPr wrap="square" lIns="0" tIns="0" rIns="0" bIns="0" rtlCol="0" anchor="t"/>
-          <a:lstStyle/>
-          <a:p>
-            <a:pPr indent="0" marL="0">
-              <a:lnSpc>
-                <a:spcPct val="120000"/>
-              </a:lnSpc>
-              <a:buNone/>
-            </a:pPr>
-            <a:r>
-              <a:rPr lang="en-US" sz="1050" dirty="0">
-                <a:solidFill>
-                  <a:srgbClr val="222222"/>
-                </a:solidFill>
-                <a:latin typeface="Calibri" pitchFamily="34" charset="0"/>
-                <a:ea typeface="Calibri" pitchFamily="34" charset="-122"/>
-                <a:cs typeface="Calibri" pitchFamily="34" charset="-120"/>
-              </a:rPr>
-              <a:t>削除すると、未送信ぶんの案内メールは送れなくなります。</a:t>
-            </a:r>
-            <a:pPr indent="0" marL="0">
-              <a:lnSpc>
-                <a:spcPct val="120000"/>
-              </a:lnSpc>
-              <a:buNone/>
-            </a:pPr>
-            <a:r>
-              <a:rPr lang="en-US" sz="1050" b="1" dirty="0">
-                <a:solidFill>
-                  <a:srgbClr val="222222"/>
-                </a:solidFill>
-                <a:latin typeface="Calibri" pitchFamily="34" charset="0"/>
-                <a:ea typeface="Calibri" pitchFamily="34" charset="-122"/>
-                <a:cs typeface="Calibri" pitchFamily="34" charset="-120"/>
-              </a:rPr>
-              <a:t>送信と集計が完全に終わってから</a:t>
-            </a:r>
-            <a:pPr indent="0" marL="0">
-              <a:lnSpc>
-                <a:spcPct val="120000"/>
-              </a:lnSpc>
-              <a:buNone/>
-            </a:pPr>
-            <a:r>
-              <a:rPr lang="en-US" sz="1050" dirty="0">
-                <a:solidFill>
-                  <a:srgbClr val="222222"/>
-                </a:solidFill>
-                <a:latin typeface="Calibri" pitchFamily="34" charset="0"/>
-                <a:ea typeface="Calibri" pitchFamily="34" charset="-122"/>
-                <a:cs typeface="Calibri" pitchFamily="34" charset="-120"/>
-              </a:rPr>
-              <a:t>実行してください。</a:t>
-            </a:r>
-            <a:endParaRPr lang="en-US" sz="1050" dirty="0"/>
-          </a:p>
-        </p:txBody>
-      </p:sp>
-      <p:sp>
-        <p:nvSpPr>
-          <p:cNvPr id="18" name="Shape 16"/>
-          <p:cNvSpPr/>
-          <p:nvPr/>
-        </p:nvSpPr>
-        <p:spPr>
-          <a:xfrm>
-            <a:off x="566928" y="4138549"/>
+            <a:off x="566928" y="2767457"/>
             <a:ext cx="6428232" cy="624459"/>
           </a:xfrm>
           <a:prstGeom prst="roundRect">
@@ -9643,13 +9821,13 @@
       </p:sp>
       <p:sp>
         <p:nvSpPr>
-          <p:cNvPr id="19" name="Text 17"/>
-          <p:cNvSpPr txBox="1"/>
-          <p:nvPr/>
-        </p:nvSpPr>
-        <p:spPr>
-          <a:xfrm>
-            <a:off x="658368" y="4229989"/>
+          <p:cNvPr id="9" name="Text 7"/>
+          <p:cNvSpPr txBox="1"/>
+          <p:nvPr/>
+        </p:nvSpPr>
+        <p:spPr>
+          <a:xfrm>
+            <a:off x="658368" y="2858897"/>
             <a:ext cx="237744" cy="237744"/>
           </a:xfrm>
           <a:prstGeom prst="rect">
@@ -9682,13 +9860,13 @@
       </p:sp>
       <p:sp>
         <p:nvSpPr>
-          <p:cNvPr id="20" name="Text 18"/>
-          <p:cNvSpPr txBox="1"/>
-          <p:nvPr/>
-        </p:nvSpPr>
-        <p:spPr>
-          <a:xfrm>
-            <a:off x="950976" y="4248277"/>
+          <p:cNvPr id="10" name="Text 8"/>
+          <p:cNvSpPr txBox="1"/>
+          <p:nvPr/>
+        </p:nvSpPr>
+        <p:spPr>
+          <a:xfrm>
+            <a:off x="950976" y="2877185"/>
             <a:ext cx="5925312" cy="441579"/>
           </a:xfrm>
           <a:prstGeom prst="rect">
@@ -9716,15 +9894,96 @@
                 <a:ea typeface="Calibri" pitchFamily="34" charset="-122"/>
                 <a:cs typeface="Calibri" pitchFamily="34" charset="-120"/>
               </a:rPr>
-              <a:t>「氏名・住所は収集せず、メールアドレスも送付・集計後に削除する」という運用方針に沿った操作です。来場者にもその旨を案内しています。</a:t>
+              <a:t>メールアドレスは出力されません。来場者は匿名のID（来場者ID）だけが入るので、企業をまたいだ同じ方の回答を突き合わせられます。</a:t>
             </a:r>
             <a:endParaRPr lang="en-US" sz="1050" dirty="0"/>
+          </a:p>
+        </p:txBody>
+      </p:sp>
+      <p:sp>
+        <p:nvSpPr>
+          <p:cNvPr id="11" name="Text 9"/>
+          <p:cNvSpPr txBox="1"/>
+          <p:nvPr/>
+        </p:nvSpPr>
+        <p:spPr>
+          <a:xfrm>
+            <a:off x="566928" y="3574796"/>
+            <a:ext cx="6428232" cy="257810"/>
+          </a:xfrm>
+          <a:prstGeom prst="rect">
+            <a:avLst/>
+          </a:prstGeom>
+          <a:noFill/>
+          <a:ln/>
+        </p:spPr>
+        <p:txBody>
+          <a:bodyPr wrap="square" lIns="0" tIns="0" rIns="0" bIns="0" rtlCol="0" anchor="t"/>
+          <a:lstStyle/>
+          <a:p>
+            <a:pPr indent="0" marL="0">
+              <a:buNone/>
+            </a:pPr>
+            <a:r>
+              <a:rPr lang="en-US" sz="1400" b="1" dirty="0">
+                <a:solidFill>
+                  <a:srgbClr val="1E2761"/>
+                </a:solidFill>
+                <a:latin typeface="Calibri" pitchFamily="34" charset="0"/>
+                <a:ea typeface="Calibri" pitchFamily="34" charset="-122"/>
+                <a:cs typeface="Calibri" pitchFamily="34" charset="-120"/>
+              </a:rPr>
+              <a:t>集計画面で見る</a:t>
+            </a:r>
+            <a:endParaRPr lang="en-US" sz="1400" dirty="0"/>
+          </a:p>
+        </p:txBody>
+      </p:sp>
+      <p:sp>
+        <p:nvSpPr>
+          <p:cNvPr id="12" name="Text 10"/>
+          <p:cNvSpPr txBox="1"/>
+          <p:nvPr/>
+        </p:nvSpPr>
+        <p:spPr>
+          <a:xfrm>
+            <a:off x="566928" y="3905758"/>
+            <a:ext cx="6428232" cy="459994"/>
+          </a:xfrm>
+          <a:prstGeom prst="rect">
+            <a:avLst/>
+          </a:prstGeom>
+          <a:noFill/>
+          <a:ln/>
+        </p:spPr>
+        <p:txBody>
+          <a:bodyPr wrap="square" lIns="0" tIns="0" rIns="0" bIns="0" rtlCol="0" anchor="t"/>
+          <a:lstStyle/>
+          <a:p>
+            <a:pPr indent="0" marL="0">
+              <a:lnSpc>
+                <a:spcPct val="125000"/>
+              </a:lnSpc>
+              <a:buNone/>
+            </a:pPr>
+            <a:r>
+              <a:rPr lang="en-US" sz="1100" dirty="0">
+                <a:solidFill>
+                  <a:srgbClr val="222222"/>
+                </a:solidFill>
+                <a:latin typeface="Calibri" pitchFamily="34" charset="0"/>
+                <a:ea typeface="Calibri" pitchFamily="34" charset="-122"/>
+                <a:cs typeface="Calibri" pitchFamily="34" charset="-120"/>
+              </a:rPr>
+              <a:t>企業ごとの「集計」画面では、設問ごとのグラフ・星評価の平均・NPS・自由記述の一覧が見られます。</a:t>
+            </a:r>
+            <a:endParaRPr lang="en-US" sz="1100" dirty="0"/>
           </a:p>
         </p:txBody>
       </p:sp>
       <p:pic>
         <p:nvPicPr>
-          <p:cNvPr id="21" name="Image 0" descr="C:\Users\sato\Desktop\enque\docs\images\o-purge.png">    </p:cNvPr>
+          <p:cNvPr id="13" name="Image 0" descr="C:\Users\sato\Desktop\enque\docs\images\o-stats.png">    </p:cNvPr>
           <p:cNvPicPr>
             <a:picLocks noChangeAspect="1"/>
           </p:cNvPicPr>
@@ -9738,8 +9997,8 @@
         </p:blipFill>
         <p:spPr>
           <a:xfrm>
-            <a:off x="936779" y="4836160"/>
-            <a:ext cx="5688531" cy="3474720"/>
+            <a:off x="2140821" y="4402328"/>
+            <a:ext cx="3280447" cy="3474720"/>
           </a:xfrm>
           <a:prstGeom prst="rect">
             <a:avLst/>
@@ -9748,13 +10007,13 @@
       </p:pic>
       <p:sp>
         <p:nvSpPr>
-          <p:cNvPr id="22" name="Text 19"/>
-          <p:cNvSpPr txBox="1"/>
-          <p:nvPr/>
-        </p:nvSpPr>
-        <p:spPr>
-          <a:xfrm>
-            <a:off x="566928" y="8365744"/>
+          <p:cNvPr id="14" name="Text 11"/>
+          <p:cNvSpPr txBox="1"/>
+          <p:nvPr/>
+        </p:nvSpPr>
+        <p:spPr>
+          <a:xfrm>
+            <a:off x="566928" y="7931912"/>
             <a:ext cx="6428232" cy="274320"/>
           </a:xfrm>
           <a:prstGeom prst="rect">
@@ -9779,7 +10038,7 @@
                 <a:ea typeface="Calibri" pitchFamily="34" charset="-122"/>
                 <a:cs typeface="Calibri" pitchFamily="34" charset="-120"/>
               </a:rPr>
-              <a:t>「メールアドレスを削除する」ボタンの周辺（説明文が見えるもの）。</a:t>
+              <a:t>企業の集計画面。設問ごとのグラフが見えるところ。</a:t>
             </a:r>
             <a:endParaRPr lang="en-US" sz="950" dirty="0"/>
           </a:p>
@@ -9787,7 +10046,7 @@
       </p:sp>
       <p:sp>
         <p:nvSpPr>
-          <p:cNvPr id="23" name="Text 20"/>
+          <p:cNvPr id="15" name="Text 12"/>
           <p:cNvSpPr txBox="1"/>
           <p:nvPr/>
         </p:nvSpPr>
@@ -9928,7 +10187,7 @@
                 <a:ea typeface="Calibri" pitchFamily="34" charset="-122"/>
                 <a:cs typeface="Calibri" pitchFamily="34" charset="-120"/>
               </a:rPr>
-              <a:t>次のイベントに向けて（データの整理）</a:t>
+              <a:t>終了後4：メールアドレスを削除する</a:t>
             </a:r>
             <a:endParaRPr lang="en-US" sz="2200" dirty="0"/>
           </a:p>
@@ -9943,7 +10202,7 @@
         <p:spPr>
           <a:xfrm>
             <a:off x="566928" y="1481328"/>
-            <a:ext cx="6428232" cy="459994"/>
+            <a:ext cx="6428232" cy="257429"/>
           </a:xfrm>
           <a:prstGeom prst="rect">
             <a:avLst/>
@@ -9970,7 +10229,7 @@
                 <a:ea typeface="Calibri" pitchFamily="34" charset="-122"/>
                 <a:cs typeface="Calibri" pitchFamily="34" charset="-120"/>
               </a:rPr>
-              <a:t>サーバーで次のコマンドを実行します（事務局のPCではなく、システムが動いているサーバーでの作業です）。</a:t>
+              <a:t>案内の送付と集計が終わったら、預かったメールアドレスを削除します。</a:t>
             </a:r>
             <a:endParaRPr lang="en-US" sz="1100" dirty="0"/>
           </a:p>
@@ -9978,14 +10237,73 @@
       </p:sp>
       <p:sp>
         <p:nvSpPr>
-          <p:cNvPr id="5" name="Text 3"/>
-          <p:cNvSpPr txBox="1"/>
-          <p:nvPr/>
-        </p:nvSpPr>
-        <p:spPr>
-          <a:xfrm>
-            <a:off x="566928" y="2087626"/>
-            <a:ext cx="6428232" cy="257810"/>
+          <p:cNvPr id="5" name="Shape 3"/>
+          <p:cNvSpPr/>
+          <p:nvPr/>
+        </p:nvSpPr>
+        <p:spPr>
+          <a:xfrm>
+            <a:off x="566928" y="1793621"/>
+            <a:ext cx="274320" cy="274320"/>
+          </a:xfrm>
+          <a:prstGeom prst="ellipse">
+            <a:avLst/>
+          </a:prstGeom>
+          <a:solidFill>
+            <a:srgbClr val="1E2761"/>
+          </a:solidFill>
+          <a:ln/>
+        </p:spPr>
+      </p:sp>
+      <p:sp>
+        <p:nvSpPr>
+          <p:cNvPr id="6" name="Text 4"/>
+          <p:cNvSpPr txBox="1"/>
+          <p:nvPr/>
+        </p:nvSpPr>
+        <p:spPr>
+          <a:xfrm>
+            <a:off x="566928" y="1793621"/>
+            <a:ext cx="274320" cy="274320"/>
+          </a:xfrm>
+          <a:prstGeom prst="rect">
+            <a:avLst/>
+          </a:prstGeom>
+          <a:noFill/>
+          <a:ln/>
+        </p:spPr>
+        <p:txBody>
+          <a:bodyPr wrap="square" lIns="0" tIns="0" rIns="0" bIns="0" rtlCol="0" anchor="ctr"/>
+          <a:lstStyle/>
+          <a:p>
+            <a:pPr algn="ctr" indent="0" marL="0">
+              <a:buNone/>
+            </a:pPr>
+            <a:r>
+              <a:rPr lang="en-US" sz="1100" b="1" dirty="0">
+                <a:solidFill>
+                  <a:srgbClr val="FFFFFF"/>
+                </a:solidFill>
+                <a:latin typeface="Calibri" pitchFamily="34" charset="0"/>
+                <a:ea typeface="Calibri" pitchFamily="34" charset="-122"/>
+                <a:cs typeface="Calibri" pitchFamily="34" charset="-120"/>
+              </a:rPr>
+              <a:t>1</a:t>
+            </a:r>
+            <a:endParaRPr lang="en-US" sz="1100" dirty="0"/>
+          </a:p>
+        </p:txBody>
+      </p:sp>
+      <p:sp>
+        <p:nvSpPr>
+          <p:cNvPr id="7" name="Text 5"/>
+          <p:cNvSpPr txBox="1"/>
+          <p:nvPr/>
+        </p:nvSpPr>
+        <p:spPr>
+          <a:xfrm>
+            <a:off x="969264" y="1775333"/>
+            <a:ext cx="6025896" cy="365760"/>
           </a:xfrm>
           <a:prstGeom prst="rect">
             <a:avLst/>
@@ -9998,32 +10316,271 @@
           <a:lstStyle/>
           <a:p>
             <a:pPr indent="0" marL="0">
-              <a:buNone/>
-            </a:pPr>
-            <a:r>
-              <a:rPr lang="en-US" sz="1400" b="1" dirty="0">
-                <a:solidFill>
-                  <a:srgbClr val="1E2761"/>
-                </a:solidFill>
-                <a:latin typeface="Calibri" pitchFamily="34" charset="0"/>
-                <a:ea typeface="Calibri" pitchFamily="34" charset="-122"/>
-                <a:cs typeface="Calibri" pitchFamily="34" charset="-120"/>
-              </a:rPr>
-              <a:t>テストで入れた回答だけ消したいとき</a:t>
-            </a:r>
-            <a:endParaRPr lang="en-US" sz="1400" dirty="0"/>
-          </a:p>
-        </p:txBody>
-      </p:sp>
-      <p:sp>
-        <p:nvSpPr>
-          <p:cNvPr id="6" name="Text 4"/>
-          <p:cNvSpPr txBox="1"/>
-          <p:nvPr/>
-        </p:nvSpPr>
-        <p:spPr>
-          <a:xfrm>
-            <a:off x="566928" y="2418588"/>
+              <a:lnSpc>
+                <a:spcPct val="125000"/>
+              </a:lnSpc>
+              <a:buNone/>
+            </a:pPr>
+            <a:r>
+              <a:rPr lang="en-US" sz="1150" dirty="0">
+                <a:solidFill>
+                  <a:srgbClr val="222222"/>
+                </a:solidFill>
+                <a:latin typeface="Calibri" pitchFamily="34" charset="0"/>
+                <a:ea typeface="Calibri" pitchFamily="34" charset="-122"/>
+                <a:cs typeface="Calibri" pitchFamily="34" charset="-120"/>
+              </a:rPr>
+              <a:t>「総合アンケート」の画面を開く</a:t>
+            </a:r>
+            <a:endParaRPr lang="en-US" sz="1150" dirty="0"/>
+          </a:p>
+        </p:txBody>
+      </p:sp>
+      <p:sp>
+        <p:nvSpPr>
+          <p:cNvPr id="8" name="Shape 6"/>
+          <p:cNvSpPr/>
+          <p:nvPr/>
+        </p:nvSpPr>
+        <p:spPr>
+          <a:xfrm>
+            <a:off x="566928" y="2250821"/>
+            <a:ext cx="274320" cy="274320"/>
+          </a:xfrm>
+          <a:prstGeom prst="ellipse">
+            <a:avLst/>
+          </a:prstGeom>
+          <a:solidFill>
+            <a:srgbClr val="1E2761"/>
+          </a:solidFill>
+          <a:ln/>
+        </p:spPr>
+      </p:sp>
+      <p:sp>
+        <p:nvSpPr>
+          <p:cNvPr id="9" name="Text 7"/>
+          <p:cNvSpPr txBox="1"/>
+          <p:nvPr/>
+        </p:nvSpPr>
+        <p:spPr>
+          <a:xfrm>
+            <a:off x="566928" y="2250821"/>
+            <a:ext cx="274320" cy="274320"/>
+          </a:xfrm>
+          <a:prstGeom prst="rect">
+            <a:avLst/>
+          </a:prstGeom>
+          <a:noFill/>
+          <a:ln/>
+        </p:spPr>
+        <p:txBody>
+          <a:bodyPr wrap="square" lIns="0" tIns="0" rIns="0" bIns="0" rtlCol="0" anchor="ctr"/>
+          <a:lstStyle/>
+          <a:p>
+            <a:pPr algn="ctr" indent="0" marL="0">
+              <a:buNone/>
+            </a:pPr>
+            <a:r>
+              <a:rPr lang="en-US" sz="1100" b="1" dirty="0">
+                <a:solidFill>
+                  <a:srgbClr val="FFFFFF"/>
+                </a:solidFill>
+                <a:latin typeface="Calibri" pitchFamily="34" charset="0"/>
+                <a:ea typeface="Calibri" pitchFamily="34" charset="-122"/>
+                <a:cs typeface="Calibri" pitchFamily="34" charset="-120"/>
+              </a:rPr>
+              <a:t>2</a:t>
+            </a:r>
+            <a:endParaRPr lang="en-US" sz="1100" dirty="0"/>
+          </a:p>
+        </p:txBody>
+      </p:sp>
+      <p:sp>
+        <p:nvSpPr>
+          <p:cNvPr id="10" name="Text 8"/>
+          <p:cNvSpPr txBox="1"/>
+          <p:nvPr/>
+        </p:nvSpPr>
+        <p:spPr>
+          <a:xfrm>
+            <a:off x="969264" y="2232533"/>
+            <a:ext cx="6025896" cy="365760"/>
+          </a:xfrm>
+          <a:prstGeom prst="rect">
+            <a:avLst/>
+          </a:prstGeom>
+          <a:noFill/>
+          <a:ln/>
+        </p:spPr>
+        <p:txBody>
+          <a:bodyPr wrap="square" lIns="0" tIns="0" rIns="0" bIns="0" rtlCol="0" anchor="t"/>
+          <a:lstStyle/>
+          <a:p>
+            <a:pPr indent="0" marL="0">
+              <a:lnSpc>
+                <a:spcPct val="125000"/>
+              </a:lnSpc>
+              <a:buNone/>
+            </a:pPr>
+            <a:r>
+              <a:rPr lang="en-US" sz="1150" dirty="0">
+                <a:solidFill>
+                  <a:srgbClr val="222222"/>
+                </a:solidFill>
+                <a:latin typeface="Calibri" pitchFamily="34" charset="0"/>
+                <a:ea typeface="Calibri" pitchFamily="34" charset="-122"/>
+                <a:cs typeface="Calibri" pitchFamily="34" charset="-120"/>
+              </a:rPr>
+              <a:t>一番下の</a:t>
+            </a:r>
+            <a:pPr indent="0" marL="0">
+              <a:lnSpc>
+                <a:spcPct val="125000"/>
+              </a:lnSpc>
+              <a:buNone/>
+            </a:pPr>
+            <a:r>
+              <a:rPr lang="en-US" sz="1150" b="1" dirty="0">
+                <a:solidFill>
+                  <a:srgbClr val="222222"/>
+                </a:solidFill>
+                <a:latin typeface="Calibri" pitchFamily="34" charset="0"/>
+                <a:ea typeface="Calibri" pitchFamily="34" charset="-122"/>
+                <a:cs typeface="Calibri" pitchFamily="34" charset="-120"/>
+              </a:rPr>
+              <a:t>「メールアドレスを削除する」</a:t>
+            </a:r>
+            <a:pPr indent="0" marL="0">
+              <a:lnSpc>
+                <a:spcPct val="125000"/>
+              </a:lnSpc>
+              <a:buNone/>
+            </a:pPr>
+            <a:r>
+              <a:rPr lang="en-US" sz="1150" dirty="0">
+                <a:solidFill>
+                  <a:srgbClr val="222222"/>
+                </a:solidFill>
+                <a:latin typeface="Calibri" pitchFamily="34" charset="0"/>
+                <a:ea typeface="Calibri" pitchFamily="34" charset="-122"/>
+                <a:cs typeface="Calibri" pitchFamily="34" charset="-120"/>
+              </a:rPr>
+              <a:t>を押す</a:t>
+            </a:r>
+            <a:endParaRPr lang="en-US" sz="1150" dirty="0"/>
+          </a:p>
+        </p:txBody>
+      </p:sp>
+      <p:sp>
+        <p:nvSpPr>
+          <p:cNvPr id="11" name="Shape 9"/>
+          <p:cNvSpPr/>
+          <p:nvPr/>
+        </p:nvSpPr>
+        <p:spPr>
+          <a:xfrm>
+            <a:off x="566928" y="2708021"/>
+            <a:ext cx="274320" cy="274320"/>
+          </a:xfrm>
+          <a:prstGeom prst="ellipse">
+            <a:avLst/>
+          </a:prstGeom>
+          <a:solidFill>
+            <a:srgbClr val="1E2761"/>
+          </a:solidFill>
+          <a:ln/>
+        </p:spPr>
+      </p:sp>
+      <p:sp>
+        <p:nvSpPr>
+          <p:cNvPr id="12" name="Text 10"/>
+          <p:cNvSpPr txBox="1"/>
+          <p:nvPr/>
+        </p:nvSpPr>
+        <p:spPr>
+          <a:xfrm>
+            <a:off x="566928" y="2708021"/>
+            <a:ext cx="274320" cy="274320"/>
+          </a:xfrm>
+          <a:prstGeom prst="rect">
+            <a:avLst/>
+          </a:prstGeom>
+          <a:noFill/>
+          <a:ln/>
+        </p:spPr>
+        <p:txBody>
+          <a:bodyPr wrap="square" lIns="0" tIns="0" rIns="0" bIns="0" rtlCol="0" anchor="ctr"/>
+          <a:lstStyle/>
+          <a:p>
+            <a:pPr algn="ctr" indent="0" marL="0">
+              <a:buNone/>
+            </a:pPr>
+            <a:r>
+              <a:rPr lang="en-US" sz="1100" b="1" dirty="0">
+                <a:solidFill>
+                  <a:srgbClr val="FFFFFF"/>
+                </a:solidFill>
+                <a:latin typeface="Calibri" pitchFamily="34" charset="0"/>
+                <a:ea typeface="Calibri" pitchFamily="34" charset="-122"/>
+                <a:cs typeface="Calibri" pitchFamily="34" charset="-120"/>
+              </a:rPr>
+              <a:t>3</a:t>
+            </a:r>
+            <a:endParaRPr lang="en-US" sz="1100" dirty="0"/>
+          </a:p>
+        </p:txBody>
+      </p:sp>
+      <p:sp>
+        <p:nvSpPr>
+          <p:cNvPr id="13" name="Text 11"/>
+          <p:cNvSpPr txBox="1"/>
+          <p:nvPr/>
+        </p:nvSpPr>
+        <p:spPr>
+          <a:xfrm>
+            <a:off x="969264" y="2689733"/>
+            <a:ext cx="6025896" cy="365760"/>
+          </a:xfrm>
+          <a:prstGeom prst="rect">
+            <a:avLst/>
+          </a:prstGeom>
+          <a:noFill/>
+          <a:ln/>
+        </p:spPr>
+        <p:txBody>
+          <a:bodyPr wrap="square" lIns="0" tIns="0" rIns="0" bIns="0" rtlCol="0" anchor="t"/>
+          <a:lstStyle/>
+          <a:p>
+            <a:pPr indent="0" marL="0">
+              <a:lnSpc>
+                <a:spcPct val="125000"/>
+              </a:lnSpc>
+              <a:buNone/>
+            </a:pPr>
+            <a:r>
+              <a:rPr lang="en-US" sz="1150" dirty="0">
+                <a:solidFill>
+                  <a:srgbClr val="222222"/>
+                </a:solidFill>
+                <a:latin typeface="Calibri" pitchFamily="34" charset="0"/>
+                <a:ea typeface="Calibri" pitchFamily="34" charset="-122"/>
+                <a:cs typeface="Calibri" pitchFamily="34" charset="-120"/>
+              </a:rPr>
+              <a:t>確認メッセージで「OK」を押す</a:t>
+            </a:r>
+            <a:endParaRPr lang="en-US" sz="1150" dirty="0"/>
+          </a:p>
+        </p:txBody>
+      </p:sp>
+      <p:sp>
+        <p:nvSpPr>
+          <p:cNvPr id="14" name="Text 12"/>
+          <p:cNvSpPr txBox="1"/>
+          <p:nvPr/>
+        </p:nvSpPr>
+        <p:spPr>
+          <a:xfrm>
+            <a:off x="566928" y="3146933"/>
             <a:ext cx="6428232" cy="257429"/>
           </a:xfrm>
           <a:prstGeom prst="rect">
@@ -10051,7 +10608,41 @@
                 <a:ea typeface="Calibri" pitchFamily="34" charset="-122"/>
                 <a:cs typeface="Calibri" pitchFamily="34" charset="-120"/>
               </a:rPr>
-              <a:t>まず件数を確認し、問題なければ実行します。</a:t>
+              <a:t>削除しても、</a:t>
+            </a:r>
+            <a:pPr indent="0" marL="0">
+              <a:lnSpc>
+                <a:spcPct val="125000"/>
+              </a:lnSpc>
+              <a:buNone/>
+            </a:pPr>
+            <a:r>
+              <a:rPr lang="en-US" sz="1100" b="1" dirty="0">
+                <a:solidFill>
+                  <a:srgbClr val="222222"/>
+                </a:solidFill>
+                <a:latin typeface="Calibri" pitchFamily="34" charset="0"/>
+                <a:ea typeface="Calibri" pitchFamily="34" charset="-122"/>
+                <a:cs typeface="Calibri" pitchFamily="34" charset="-120"/>
+              </a:rPr>
+              <a:t>回答データ（個人情報を含まないもの）は残ります</a:t>
+            </a:r>
+            <a:pPr indent="0" marL="0">
+              <a:lnSpc>
+                <a:spcPct val="125000"/>
+              </a:lnSpc>
+              <a:buNone/>
+            </a:pPr>
+            <a:r>
+              <a:rPr lang="en-US" sz="1100" dirty="0">
+                <a:solidFill>
+                  <a:srgbClr val="222222"/>
+                </a:solidFill>
+                <a:latin typeface="Calibri" pitchFamily="34" charset="0"/>
+                <a:ea typeface="Calibri" pitchFamily="34" charset="-122"/>
+                <a:cs typeface="Calibri" pitchFamily="34" charset="-120"/>
+              </a:rPr>
+              <a:t>。</a:t>
             </a:r>
             <a:endParaRPr lang="en-US" sz="1100" dirty="0"/>
           </a:p>
@@ -10059,279 +10650,18 @@
       </p:sp>
       <p:sp>
         <p:nvSpPr>
-          <p:cNvPr id="7" name="Text 5"/>
-          <p:cNvSpPr txBox="1"/>
-          <p:nvPr/>
-        </p:nvSpPr>
-        <p:spPr>
-          <a:xfrm>
-            <a:off x="713232" y="2712593"/>
-            <a:ext cx="6281928" cy="257429"/>
-          </a:xfrm>
-          <a:prstGeom prst="rect">
-            <a:avLst/>
-          </a:prstGeom>
-          <a:noFill/>
-          <a:ln/>
-        </p:spPr>
-        <p:txBody>
-          <a:bodyPr wrap="square" lIns="0" tIns="0" rIns="0" bIns="0" rtlCol="0" anchor="t"/>
-          <a:lstStyle/>
-          <a:p>
-            <a:pPr marL="342900" indent="-342900">
-              <a:lnSpc>
-                <a:spcPct val="125000"/>
-              </a:lnSpc>
-              <a:buSzPct val="100000"/>
-              <a:buChar char="●"/>
-            </a:pPr>
-            <a:r>
-              <a:rPr lang="en-US" sz="1100" dirty="0">
-                <a:solidFill>
-                  <a:srgbClr val="222222"/>
-                </a:solidFill>
-                <a:latin typeface="Calibri" pitchFamily="34" charset="0"/>
-                <a:ea typeface="Calibri" pitchFamily="34" charset="-122"/>
-                <a:cs typeface="Calibri" pitchFamily="34" charset="-120"/>
-              </a:rPr>
-              <a:t>確認：</a:t>
-            </a:r>
-            <a:pPr indent="0" marL="0">
-              <a:lnSpc>
-                <a:spcPct val="125000"/>
-              </a:lnSpc>
-              <a:buNone/>
-            </a:pPr>
-            <a:r>
-              <a:rPr lang="en-US" sz="1045" dirty="0">
-                <a:solidFill>
-                  <a:srgbClr val="222222"/>
-                </a:solidFill>
-                <a:latin typeface="Courier New" pitchFamily="34" charset="0"/>
-                <a:ea typeface="Courier New" pitchFamily="34" charset="-122"/>
-                <a:cs typeface="Courier New" pitchFamily="34" charset="-120"/>
-              </a:rPr>
-              <a:t>bin/reset.sh --responses --dry-run</a:t>
-            </a:r>
-            <a:endParaRPr lang="en-US" sz="1100" dirty="0"/>
-          </a:p>
-        </p:txBody>
-      </p:sp>
-      <p:sp>
-        <p:nvSpPr>
-          <p:cNvPr id="8" name="Text 6"/>
-          <p:cNvSpPr txBox="1"/>
-          <p:nvPr/>
-        </p:nvSpPr>
-        <p:spPr>
-          <a:xfrm>
-            <a:off x="713232" y="2988310"/>
-            <a:ext cx="6281928" cy="257429"/>
-          </a:xfrm>
-          <a:prstGeom prst="rect">
-            <a:avLst/>
-          </a:prstGeom>
-          <a:noFill/>
-          <a:ln/>
-        </p:spPr>
-        <p:txBody>
-          <a:bodyPr wrap="square" lIns="0" tIns="0" rIns="0" bIns="0" rtlCol="0" anchor="t"/>
-          <a:lstStyle/>
-          <a:p>
-            <a:pPr marL="342900" indent="-342900">
-              <a:lnSpc>
-                <a:spcPct val="125000"/>
-              </a:lnSpc>
-              <a:buSzPct val="100000"/>
-              <a:buChar char="●"/>
-            </a:pPr>
-            <a:r>
-              <a:rPr lang="en-US" sz="1100" dirty="0">
-                <a:solidFill>
-                  <a:srgbClr val="222222"/>
-                </a:solidFill>
-                <a:latin typeface="Calibri" pitchFamily="34" charset="0"/>
-                <a:ea typeface="Calibri" pitchFamily="34" charset="-122"/>
-                <a:cs typeface="Calibri" pitchFamily="34" charset="-120"/>
-              </a:rPr>
-              <a:t>実行：</a:t>
-            </a:r>
-            <a:pPr indent="0" marL="0">
-              <a:lnSpc>
-                <a:spcPct val="125000"/>
-              </a:lnSpc>
-              <a:buNone/>
-            </a:pPr>
-            <a:r>
-              <a:rPr lang="en-US" sz="1045" dirty="0">
-                <a:solidFill>
-                  <a:srgbClr val="222222"/>
-                </a:solidFill>
-                <a:latin typeface="Courier New" pitchFamily="34" charset="0"/>
-                <a:ea typeface="Courier New" pitchFamily="34" charset="-122"/>
-                <a:cs typeface="Courier New" pitchFamily="34" charset="-120"/>
-              </a:rPr>
-              <a:t>bin/reset.sh --responses --force</a:t>
-            </a:r>
-            <a:endParaRPr lang="en-US" sz="1100" dirty="0"/>
-          </a:p>
-        </p:txBody>
-      </p:sp>
-      <p:sp>
-        <p:nvSpPr>
-          <p:cNvPr id="9" name="Text 7"/>
-          <p:cNvSpPr txBox="1"/>
-          <p:nvPr/>
-        </p:nvSpPr>
-        <p:spPr>
-          <a:xfrm>
-            <a:off x="566928" y="3264027"/>
-            <a:ext cx="6428232" cy="257429"/>
-          </a:xfrm>
-          <a:prstGeom prst="rect">
-            <a:avLst/>
-          </a:prstGeom>
-          <a:noFill/>
-          <a:ln/>
-        </p:spPr>
-        <p:txBody>
-          <a:bodyPr wrap="square" lIns="0" tIns="0" rIns="0" bIns="0" rtlCol="0" anchor="t"/>
-          <a:lstStyle/>
-          <a:p>
-            <a:pPr indent="0" marL="0">
-              <a:lnSpc>
-                <a:spcPct val="125000"/>
-              </a:lnSpc>
-              <a:buNone/>
-            </a:pPr>
-            <a:r>
-              <a:rPr lang="en-US" sz="1100" dirty="0">
-                <a:solidFill>
-                  <a:srgbClr val="222222"/>
-                </a:solidFill>
-                <a:latin typeface="Calibri" pitchFamily="34" charset="0"/>
-                <a:ea typeface="Calibri" pitchFamily="34" charset="-122"/>
-                <a:cs typeface="Calibri" pitchFamily="34" charset="-120"/>
-              </a:rPr>
-              <a:t>イベント・企業・設問・景品・壁紙・アカウントは残ります。</a:t>
-            </a:r>
-            <a:endParaRPr lang="en-US" sz="1100" dirty="0"/>
-          </a:p>
-        </p:txBody>
-      </p:sp>
-      <p:sp>
-        <p:nvSpPr>
-          <p:cNvPr id="10" name="Text 8"/>
-          <p:cNvSpPr txBox="1"/>
-          <p:nvPr/>
-        </p:nvSpPr>
-        <p:spPr>
-          <a:xfrm>
-            <a:off x="566928" y="3667760"/>
-            <a:ext cx="6428232" cy="257810"/>
-          </a:xfrm>
-          <a:prstGeom prst="rect">
-            <a:avLst/>
-          </a:prstGeom>
-          <a:noFill/>
-          <a:ln/>
-        </p:spPr>
-        <p:txBody>
-          <a:bodyPr wrap="square" lIns="0" tIns="0" rIns="0" bIns="0" rtlCol="0" anchor="t"/>
-          <a:lstStyle/>
-          <a:p>
-            <a:pPr indent="0" marL="0">
-              <a:buNone/>
-            </a:pPr>
-            <a:r>
-              <a:rPr lang="en-US" sz="1400" b="1" dirty="0">
-                <a:solidFill>
-                  <a:srgbClr val="1E2761"/>
-                </a:solidFill>
-                <a:latin typeface="Calibri" pitchFamily="34" charset="0"/>
-                <a:ea typeface="Calibri" pitchFamily="34" charset="-122"/>
-                <a:cs typeface="Calibri" pitchFamily="34" charset="-120"/>
-              </a:rPr>
-              <a:t>イベントごと作り直したいとき</a:t>
-            </a:r>
-            <a:endParaRPr lang="en-US" sz="1400" dirty="0"/>
-          </a:p>
-        </p:txBody>
-      </p:sp>
-      <p:sp>
-        <p:nvSpPr>
-          <p:cNvPr id="11" name="Text 9"/>
-          <p:cNvSpPr txBox="1"/>
-          <p:nvPr/>
-        </p:nvSpPr>
-        <p:spPr>
-          <a:xfrm>
-            <a:off x="713232" y="3998722"/>
-            <a:ext cx="6281928" cy="257429"/>
-          </a:xfrm>
-          <a:prstGeom prst="rect">
-            <a:avLst/>
-          </a:prstGeom>
-          <a:noFill/>
-          <a:ln/>
-        </p:spPr>
-        <p:txBody>
-          <a:bodyPr wrap="square" lIns="0" tIns="0" rIns="0" bIns="0" rtlCol="0" anchor="t"/>
-          <a:lstStyle/>
-          <a:p>
-            <a:pPr marL="342900" indent="-342900">
-              <a:lnSpc>
-                <a:spcPct val="125000"/>
-              </a:lnSpc>
-              <a:buSzPct val="100000"/>
-              <a:buChar char="●"/>
-            </a:pPr>
-            <a:r>
-              <a:rPr lang="en-US" sz="1100" dirty="0">
-                <a:solidFill>
-                  <a:srgbClr val="222222"/>
-                </a:solidFill>
-                <a:latin typeface="Calibri" pitchFamily="34" charset="0"/>
-                <a:ea typeface="Calibri" pitchFamily="34" charset="-122"/>
-                <a:cs typeface="Calibri" pitchFamily="34" charset="-120"/>
-              </a:rPr>
-              <a:t>実行：</a:t>
-            </a:r>
-            <a:pPr indent="0" marL="0">
-              <a:lnSpc>
-                <a:spcPct val="125000"/>
-              </a:lnSpc>
-              <a:buNone/>
-            </a:pPr>
-            <a:r>
-              <a:rPr lang="en-US" sz="1045" dirty="0">
-                <a:solidFill>
-                  <a:srgbClr val="222222"/>
-                </a:solidFill>
-                <a:latin typeface="Courier New" pitchFamily="34" charset="0"/>
-                <a:ea typeface="Courier New" pitchFamily="34" charset="-122"/>
-                <a:cs typeface="Courier New" pitchFamily="34" charset="-120"/>
-              </a:rPr>
-              <a:t>bin/reset.sh --all --force</a:t>
-            </a:r>
-            <a:endParaRPr lang="en-US" sz="1100" dirty="0"/>
-          </a:p>
-        </p:txBody>
-      </p:sp>
-      <p:sp>
-        <p:nvSpPr>
-          <p:cNvPr id="12" name="Shape 10"/>
+          <p:cNvPr id="15" name="Shape 13"/>
           <p:cNvSpPr/>
           <p:nvPr/>
         </p:nvSpPr>
         <p:spPr>
           <a:xfrm>
-            <a:off x="566928" y="4274439"/>
-            <a:ext cx="6428232" cy="817817"/>
+            <a:off x="566928" y="3440938"/>
+            <a:ext cx="6428232" cy="624459"/>
           </a:xfrm>
           <a:prstGeom prst="roundRect">
             <a:avLst>
-              <a:gd name="adj" fmla="val 6709"/>
+              <a:gd name="adj" fmla="val 8786"/>
             </a:avLst>
           </a:prstGeom>
           <a:solidFill>
@@ -10347,13 +10677,13 @@
       </p:sp>
       <p:sp>
         <p:nvSpPr>
-          <p:cNvPr id="13" name="Text 11"/>
-          <p:cNvSpPr txBox="1"/>
-          <p:nvPr/>
-        </p:nvSpPr>
-        <p:spPr>
-          <a:xfrm>
-            <a:off x="658368" y="4365879"/>
+          <p:cNvPr id="16" name="Text 14"/>
+          <p:cNvSpPr txBox="1"/>
+          <p:nvPr/>
+        </p:nvSpPr>
+        <p:spPr>
+          <a:xfrm>
+            <a:off x="658368" y="3532378"/>
             <a:ext cx="237744" cy="237744"/>
           </a:xfrm>
           <a:prstGeom prst="rect">
@@ -10386,14 +10716,14 @@
       </p:sp>
       <p:sp>
         <p:nvSpPr>
-          <p:cNvPr id="14" name="Text 12"/>
-          <p:cNvSpPr txBox="1"/>
-          <p:nvPr/>
-        </p:nvSpPr>
-        <p:spPr>
-          <a:xfrm>
-            <a:off x="950976" y="4384167"/>
-            <a:ext cx="5925312" cy="634937"/>
+          <p:cNvPr id="17" name="Text 15"/>
+          <p:cNvSpPr txBox="1"/>
+          <p:nvPr/>
+        </p:nvSpPr>
+        <p:spPr>
+          <a:xfrm>
+            <a:off x="950976" y="3550666"/>
+            <a:ext cx="5925312" cy="441579"/>
           </a:xfrm>
           <a:prstGeom prst="rect">
             <a:avLst/>
@@ -10420,7 +10750,7 @@
                 <a:ea typeface="Calibri" pitchFamily="34" charset="-122"/>
                 <a:cs typeface="Calibri" pitchFamily="34" charset="-120"/>
               </a:rPr>
-              <a:t>どちらも元に戻せません。実行前に自動でバックアップを取りますが、念のため大事なデータはCSVで書き出しておいてください。</a:t>
+              <a:t>削除すると、未送信ぶんの案内メールは送れなくなります。</a:t>
             </a:r>
             <a:pPr indent="0" marL="0">
               <a:lnSpc>
@@ -10437,7 +10767,7 @@
                 <a:ea typeface="Calibri" pitchFamily="34" charset="-122"/>
                 <a:cs typeface="Calibri" pitchFamily="34" charset="-120"/>
               </a:rPr>
-              <a:t>企業担当者のアカウントは企業と一緒に消えます</a:t>
+              <a:t>送信と集計が完全に終わってから</a:t>
             </a:r>
             <a:pPr indent="0" marL="0">
               <a:lnSpc>
@@ -10454,7 +10784,7 @@
                 <a:ea typeface="Calibri" pitchFamily="34" charset="-122"/>
                 <a:cs typeface="Calibri" pitchFamily="34" charset="-120"/>
               </a:rPr>
-              <a:t>（主催者・受付は残ります）。</a:t>
+              <a:t>実行してください。</a:t>
             </a:r>
             <a:endParaRPr lang="en-US" sz="1050" dirty="0"/>
           </a:p>
@@ -10462,18 +10792,18 @@
       </p:sp>
       <p:sp>
         <p:nvSpPr>
-          <p:cNvPr id="15" name="Shape 13"/>
+          <p:cNvPr id="18" name="Shape 16"/>
           <p:cNvSpPr/>
           <p:nvPr/>
         </p:nvSpPr>
         <p:spPr>
           <a:xfrm>
-            <a:off x="566928" y="5165408"/>
-            <a:ext cx="6428232" cy="431102"/>
+            <a:off x="566928" y="4138549"/>
+            <a:ext cx="6428232" cy="624459"/>
           </a:xfrm>
           <a:prstGeom prst="roundRect">
             <a:avLst>
-              <a:gd name="adj" fmla="val 12726"/>
+              <a:gd name="adj" fmla="val 8786"/>
             </a:avLst>
           </a:prstGeom>
           <a:solidFill>
@@ -10489,13 +10819,13 @@
       </p:sp>
       <p:sp>
         <p:nvSpPr>
-          <p:cNvPr id="16" name="Text 14"/>
-          <p:cNvSpPr txBox="1"/>
-          <p:nvPr/>
-        </p:nvSpPr>
-        <p:spPr>
-          <a:xfrm>
-            <a:off x="658368" y="5256848"/>
+          <p:cNvPr id="19" name="Text 17"/>
+          <p:cNvSpPr txBox="1"/>
+          <p:nvPr/>
+        </p:nvSpPr>
+        <p:spPr>
+          <a:xfrm>
+            <a:off x="658368" y="4229989"/>
             <a:ext cx="237744" cy="237744"/>
           </a:xfrm>
           <a:prstGeom prst="rect">
@@ -10528,14 +10858,14 @@
       </p:sp>
       <p:sp>
         <p:nvSpPr>
-          <p:cNvPr id="17" name="Text 15"/>
-          <p:cNvSpPr txBox="1"/>
-          <p:nvPr/>
-        </p:nvSpPr>
-        <p:spPr>
-          <a:xfrm>
-            <a:off x="950976" y="5275136"/>
-            <a:ext cx="5925312" cy="248221"/>
+          <p:cNvPr id="20" name="Text 18"/>
+          <p:cNvSpPr txBox="1"/>
+          <p:nvPr/>
+        </p:nvSpPr>
+        <p:spPr>
+          <a:xfrm>
+            <a:off x="950976" y="4248277"/>
+            <a:ext cx="5925312" cy="441579"/>
           </a:xfrm>
           <a:prstGeom prst="rect">
             <a:avLst/>
@@ -10562,15 +10892,78 @@
                 <a:ea typeface="Calibri" pitchFamily="34" charset="-122"/>
                 <a:cs typeface="Calibri" pitchFamily="34" charset="-120"/>
               </a:rPr>
-              <a:t>実行するとデータベース名の入力を求められます。画面の指示どおりに入力してください。</a:t>
+              <a:t>「氏名・住所は収集せず、メールアドレスも送付・集計後に削除する」という運用方針に沿った操作です。来場者にもその旨を案内しています。</a:t>
             </a:r>
             <a:endParaRPr lang="en-US" sz="1050" dirty="0"/>
           </a:p>
         </p:txBody>
       </p:sp>
-      <p:sp>
-        <p:nvSpPr>
-          <p:cNvPr id="18" name="Text 16"/>
+      <p:pic>
+        <p:nvPicPr>
+          <p:cNvPr id="21" name="Image 0" descr="C:\Users\sato\Desktop\enque\docs\images\o-purge.png">    </p:cNvPr>
+          <p:cNvPicPr>
+            <a:picLocks noChangeAspect="1"/>
+          </p:cNvPicPr>
+          <p:nvPr/>
+        </p:nvPicPr>
+        <p:blipFill>
+          <a:blip r:embed="rId1"/>
+          <a:stretch>
+            <a:fillRect/>
+          </a:stretch>
+        </p:blipFill>
+        <p:spPr>
+          <a:xfrm>
+            <a:off x="936779" y="4836160"/>
+            <a:ext cx="5688531" cy="3474720"/>
+          </a:xfrm>
+          <a:prstGeom prst="rect">
+            <a:avLst/>
+          </a:prstGeom>
+        </p:spPr>
+      </p:pic>
+      <p:sp>
+        <p:nvSpPr>
+          <p:cNvPr id="22" name="Text 19"/>
+          <p:cNvSpPr txBox="1"/>
+          <p:nvPr/>
+        </p:nvSpPr>
+        <p:spPr>
+          <a:xfrm>
+            <a:off x="566928" y="8365744"/>
+            <a:ext cx="6428232" cy="274320"/>
+          </a:xfrm>
+          <a:prstGeom prst="rect">
+            <a:avLst/>
+          </a:prstGeom>
+          <a:noFill/>
+          <a:ln/>
+        </p:spPr>
+        <p:txBody>
+          <a:bodyPr wrap="square" lIns="0" tIns="0" rIns="0" bIns="0" rtlCol="0" anchor="ctr"/>
+          <a:lstStyle/>
+          <a:p>
+            <a:pPr algn="ctr" indent="0" marL="0">
+              <a:buNone/>
+            </a:pPr>
+            <a:r>
+              <a:rPr lang="en-US" sz="950" dirty="0">
+                <a:solidFill>
+                  <a:srgbClr val="6B6B6B"/>
+                </a:solidFill>
+                <a:latin typeface="Calibri" pitchFamily="34" charset="0"/>
+                <a:ea typeface="Calibri" pitchFamily="34" charset="-122"/>
+                <a:cs typeface="Calibri" pitchFamily="34" charset="-120"/>
+              </a:rPr>
+              <a:t>「メールアドレスを削除する」ボタンの周辺（説明文が見えるもの）。</a:t>
+            </a:r>
+            <a:endParaRPr lang="en-US" sz="950" dirty="0"/>
+          </a:p>
+        </p:txBody>
+      </p:sp>
+      <p:sp>
+        <p:nvSpPr>
+          <p:cNvPr id="23" name="Text 20"/>
           <p:cNvSpPr txBox="1"/>
           <p:nvPr/>
         </p:nvSpPr>
@@ -10711,7 +11104,7 @@
                 <a:ea typeface="Calibri" pitchFamily="34" charset="-122"/>
                 <a:cs typeface="Calibri" pitchFamily="34" charset="-120"/>
               </a:rPr>
-              <a:t>困ったときは</a:t>
+              <a:t>次のイベントに向けて（データの整理）</a:t>
             </a:r>
             <a:endParaRPr lang="en-US" sz="2200" dirty="0"/>
           </a:p>
@@ -10725,7 +11118,49 @@
         </p:nvSpPr>
         <p:spPr>
           <a:xfrm>
-            <a:off x="566928" y="1591056"/>
+            <a:off x="566928" y="1481328"/>
+            <a:ext cx="6428232" cy="459994"/>
+          </a:xfrm>
+          <a:prstGeom prst="rect">
+            <a:avLst/>
+          </a:prstGeom>
+          <a:noFill/>
+          <a:ln/>
+        </p:spPr>
+        <p:txBody>
+          <a:bodyPr wrap="square" lIns="0" tIns="0" rIns="0" bIns="0" rtlCol="0" anchor="t"/>
+          <a:lstStyle/>
+          <a:p>
+            <a:pPr indent="0" marL="0">
+              <a:lnSpc>
+                <a:spcPct val="125000"/>
+              </a:lnSpc>
+              <a:buNone/>
+            </a:pPr>
+            <a:r>
+              <a:rPr lang="en-US" sz="1100" dirty="0">
+                <a:solidFill>
+                  <a:srgbClr val="222222"/>
+                </a:solidFill>
+                <a:latin typeface="Calibri" pitchFamily="34" charset="0"/>
+                <a:ea typeface="Calibri" pitchFamily="34" charset="-122"/>
+                <a:cs typeface="Calibri" pitchFamily="34" charset="-120"/>
+              </a:rPr>
+              <a:t>サーバーで次のコマンドを実行します（事務局のPCではなく、システムが動いているサーバーでの作業です）。</a:t>
+            </a:r>
+            <a:endParaRPr lang="en-US" sz="1100" dirty="0"/>
+          </a:p>
+        </p:txBody>
+      </p:sp>
+      <p:sp>
+        <p:nvSpPr>
+          <p:cNvPr id="5" name="Text 3"/>
+          <p:cNvSpPr txBox="1"/>
+          <p:nvPr/>
+        </p:nvSpPr>
+        <p:spPr>
+          <a:xfrm>
+            <a:off x="566928" y="2087626"/>
             <a:ext cx="6428232" cy="257810"/>
           </a:xfrm>
           <a:prstGeom prst="rect">
@@ -10750,7 +11185,7 @@
                 <a:ea typeface="Calibri" pitchFamily="34" charset="-122"/>
                 <a:cs typeface="Calibri" pitchFamily="34" charset="-120"/>
               </a:rPr>
-              <a:t>QRコードを読んでも「受付を終了しました」と出る</a:t>
+              <a:t>テストで入れた回答だけ消したいとき</a:t>
             </a:r>
             <a:endParaRPr lang="en-US" sz="1400" dirty="0"/>
           </a:p>
@@ -10758,14 +11193,14 @@
       </p:sp>
       <p:sp>
         <p:nvSpPr>
-          <p:cNvPr id="5" name="Text 3"/>
-          <p:cNvSpPr txBox="1"/>
-          <p:nvPr/>
-        </p:nvSpPr>
-        <p:spPr>
-          <a:xfrm>
-            <a:off x="566928" y="1922018"/>
-            <a:ext cx="6428232" cy="459994"/>
+          <p:cNvPr id="6" name="Text 4"/>
+          <p:cNvSpPr txBox="1"/>
+          <p:nvPr/>
+        </p:nvSpPr>
+        <p:spPr>
+          <a:xfrm>
+            <a:off x="566928" y="2418588"/>
+            <a:ext cx="6428232" cy="257429"/>
           </a:xfrm>
           <a:prstGeom prst="rect">
             <a:avLst/>
@@ -10792,7 +11227,7 @@
                 <a:ea typeface="Calibri" pitchFamily="34" charset="-122"/>
                 <a:cs typeface="Calibri" pitchFamily="34" charset="-120"/>
               </a:rPr>
-              <a:t>イベントの状態が「開催中」になっていない可能性があります。ダッシュボードの「イベント設定」をご確認ください。</a:t>
+              <a:t>まず件数を確認し、問題なければ実行します。</a:t>
             </a:r>
             <a:endParaRPr lang="en-US" sz="1100" dirty="0"/>
           </a:p>
@@ -10800,133 +11235,13 @@
       </p:sp>
       <p:sp>
         <p:nvSpPr>
-          <p:cNvPr id="6" name="Text 4"/>
-          <p:cNvSpPr txBox="1"/>
-          <p:nvPr/>
-        </p:nvSpPr>
-        <p:spPr>
-          <a:xfrm>
-            <a:off x="566928" y="2528316"/>
-            <a:ext cx="6428232" cy="257810"/>
-          </a:xfrm>
-          <a:prstGeom prst="rect">
-            <a:avLst/>
-          </a:prstGeom>
-          <a:noFill/>
-          <a:ln/>
-        </p:spPr>
-        <p:txBody>
-          <a:bodyPr wrap="square" lIns="0" tIns="0" rIns="0" bIns="0" rtlCol="0" anchor="t"/>
-          <a:lstStyle/>
-          <a:p>
-            <a:pPr indent="0" marL="0">
-              <a:buNone/>
-            </a:pPr>
-            <a:r>
-              <a:rPr lang="en-US" sz="1400" b="1" dirty="0">
-                <a:solidFill>
-                  <a:srgbClr val="1E2761"/>
-                </a:solidFill>
-                <a:latin typeface="Calibri" pitchFamily="34" charset="0"/>
-                <a:ea typeface="Calibri" pitchFamily="34" charset="-122"/>
-                <a:cs typeface="Calibri" pitchFamily="34" charset="-120"/>
-              </a:rPr>
-              <a:t>QRコードを読んでも「ページを表示できません」と出る</a:t>
-            </a:r>
-            <a:endParaRPr lang="en-US" sz="1400" dirty="0"/>
-          </a:p>
-        </p:txBody>
-      </p:sp>
-      <p:sp>
-        <p:nvSpPr>
           <p:cNvPr id="7" name="Text 5"/>
           <p:cNvSpPr txBox="1"/>
           <p:nvPr/>
         </p:nvSpPr>
         <p:spPr>
           <a:xfrm>
-            <a:off x="566928" y="2859278"/>
-            <a:ext cx="6428232" cy="459994"/>
-          </a:xfrm>
-          <a:prstGeom prst="rect">
-            <a:avLst/>
-          </a:prstGeom>
-          <a:noFill/>
-          <a:ln/>
-        </p:spPr>
-        <p:txBody>
-          <a:bodyPr wrap="square" lIns="0" tIns="0" rIns="0" bIns="0" rtlCol="0" anchor="t"/>
-          <a:lstStyle/>
-          <a:p>
-            <a:pPr indent="0" marL="0">
-              <a:lnSpc>
-                <a:spcPct val="125000"/>
-              </a:lnSpc>
-              <a:buNone/>
-            </a:pPr>
-            <a:r>
-              <a:rPr lang="en-US" sz="1100" dirty="0">
-                <a:solidFill>
-                  <a:srgbClr val="222222"/>
-                </a:solidFill>
-                <a:latin typeface="Calibri" pitchFamily="34" charset="0"/>
-                <a:ea typeface="Calibri" pitchFamily="34" charset="-122"/>
-                <a:cs typeface="Calibri" pitchFamily="34" charset="-120"/>
-              </a:rPr>
-              <a:t>URLが本番のものになっていない可能性があります。印刷し直す前に、事務局のシステム担当にご相談ください。</a:t>
-            </a:r>
-            <a:endParaRPr lang="en-US" sz="1100" dirty="0"/>
-          </a:p>
-        </p:txBody>
-      </p:sp>
-      <p:sp>
-        <p:nvSpPr>
-          <p:cNvPr id="8" name="Text 6"/>
-          <p:cNvSpPr txBox="1"/>
-          <p:nvPr/>
-        </p:nvSpPr>
-        <p:spPr>
-          <a:xfrm>
-            <a:off x="566928" y="3465576"/>
-            <a:ext cx="6428232" cy="257810"/>
-          </a:xfrm>
-          <a:prstGeom prst="rect">
-            <a:avLst/>
-          </a:prstGeom>
-          <a:noFill/>
-          <a:ln/>
-        </p:spPr>
-        <p:txBody>
-          <a:bodyPr wrap="square" lIns="0" tIns="0" rIns="0" bIns="0" rtlCol="0" anchor="t"/>
-          <a:lstStyle/>
-          <a:p>
-            <a:pPr indent="0" marL="0">
-              <a:buNone/>
-            </a:pPr>
-            <a:r>
-              <a:rPr lang="en-US" sz="1400" b="1" dirty="0">
-                <a:solidFill>
-                  <a:srgbClr val="1E2761"/>
-                </a:solidFill>
-                <a:latin typeface="Calibri" pitchFamily="34" charset="0"/>
-                <a:ea typeface="Calibri" pitchFamily="34" charset="-122"/>
-                <a:cs typeface="Calibri" pitchFamily="34" charset="-120"/>
-              </a:rPr>
-              <a:t>案内メールが届かない</a:t>
-            </a:r>
-            <a:endParaRPr lang="en-US" sz="1400" dirty="0"/>
-          </a:p>
-        </p:txBody>
-      </p:sp>
-      <p:sp>
-        <p:nvSpPr>
-          <p:cNvPr id="9" name="Text 7"/>
-          <p:cNvSpPr txBox="1"/>
-          <p:nvPr/>
-        </p:nvSpPr>
-        <p:spPr>
-          <a:xfrm>
-            <a:off x="713232" y="3796538"/>
+            <a:off x="713232" y="2712593"/>
             <a:ext cx="6281928" cy="257429"/>
           </a:xfrm>
           <a:prstGeom prst="rect">
@@ -10955,7 +11270,24 @@
                 <a:ea typeface="Calibri" pitchFamily="34" charset="-122"/>
                 <a:cs typeface="Calibri" pitchFamily="34" charset="-120"/>
               </a:rPr>
-              <a:t>「送信済み」になっているか、「失敗」が増えていないかを画面で確認してください</a:t>
+              <a:t>確認：</a:t>
+            </a:r>
+            <a:pPr indent="0" marL="0">
+              <a:lnSpc>
+                <a:spcPct val="125000"/>
+              </a:lnSpc>
+              <a:buNone/>
+            </a:pPr>
+            <a:r>
+              <a:rPr lang="en-US" sz="1045" dirty="0">
+                <a:solidFill>
+                  <a:srgbClr val="222222"/>
+                </a:solidFill>
+                <a:latin typeface="Courier New" pitchFamily="34" charset="0"/>
+                <a:ea typeface="Courier New" pitchFamily="34" charset="-122"/>
+                <a:cs typeface="Courier New" pitchFamily="34" charset="-120"/>
+              </a:rPr>
+              <a:t>bin/reset.sh --responses --dry-run</a:t>
             </a:r>
             <a:endParaRPr lang="en-US" sz="1100" dirty="0"/>
           </a:p>
@@ -10963,13 +11295,13 @@
       </p:sp>
       <p:sp>
         <p:nvSpPr>
-          <p:cNvPr id="10" name="Text 8"/>
-          <p:cNvSpPr txBox="1"/>
-          <p:nvPr/>
-        </p:nvSpPr>
-        <p:spPr>
-          <a:xfrm>
-            <a:off x="713232" y="4072255"/>
+          <p:cNvPr id="8" name="Text 6"/>
+          <p:cNvSpPr txBox="1"/>
+          <p:nvPr/>
+        </p:nvSpPr>
+        <p:spPr>
+          <a:xfrm>
+            <a:off x="713232" y="2988310"/>
             <a:ext cx="6281928" cy="257429"/>
           </a:xfrm>
           <a:prstGeom prst="rect">
@@ -10998,7 +11330,24 @@
                 <a:ea typeface="Calibri" pitchFamily="34" charset="-122"/>
                 <a:cs typeface="Calibri" pitchFamily="34" charset="-120"/>
               </a:rPr>
-              <a:t>受信側の迷惑メールフォルダもご確認ください</a:t>
+              <a:t>実行：</a:t>
+            </a:r>
+            <a:pPr indent="0" marL="0">
+              <a:lnSpc>
+                <a:spcPct val="125000"/>
+              </a:lnSpc>
+              <a:buNone/>
+            </a:pPr>
+            <a:r>
+              <a:rPr lang="en-US" sz="1045" dirty="0">
+                <a:solidFill>
+                  <a:srgbClr val="222222"/>
+                </a:solidFill>
+                <a:latin typeface="Courier New" pitchFamily="34" charset="0"/>
+                <a:ea typeface="Courier New" pitchFamily="34" charset="-122"/>
+                <a:cs typeface="Courier New" pitchFamily="34" charset="-120"/>
+              </a:rPr>
+              <a:t>bin/reset.sh --responses --force</a:t>
             </a:r>
             <a:endParaRPr lang="en-US" sz="1100" dirty="0"/>
           </a:p>
@@ -11006,13 +11355,94 @@
       </p:sp>
       <p:sp>
         <p:nvSpPr>
+          <p:cNvPr id="9" name="Text 7"/>
+          <p:cNvSpPr txBox="1"/>
+          <p:nvPr/>
+        </p:nvSpPr>
+        <p:spPr>
+          <a:xfrm>
+            <a:off x="566928" y="3264027"/>
+            <a:ext cx="6428232" cy="257429"/>
+          </a:xfrm>
+          <a:prstGeom prst="rect">
+            <a:avLst/>
+          </a:prstGeom>
+          <a:noFill/>
+          <a:ln/>
+        </p:spPr>
+        <p:txBody>
+          <a:bodyPr wrap="square" lIns="0" tIns="0" rIns="0" bIns="0" rtlCol="0" anchor="t"/>
+          <a:lstStyle/>
+          <a:p>
+            <a:pPr indent="0" marL="0">
+              <a:lnSpc>
+                <a:spcPct val="125000"/>
+              </a:lnSpc>
+              <a:buNone/>
+            </a:pPr>
+            <a:r>
+              <a:rPr lang="en-US" sz="1100" dirty="0">
+                <a:solidFill>
+                  <a:srgbClr val="222222"/>
+                </a:solidFill>
+                <a:latin typeface="Calibri" pitchFamily="34" charset="0"/>
+                <a:ea typeface="Calibri" pitchFamily="34" charset="-122"/>
+                <a:cs typeface="Calibri" pitchFamily="34" charset="-120"/>
+              </a:rPr>
+              <a:t>イベント・企業・設問・景品・壁紙・アカウントは残ります。</a:t>
+            </a:r>
+            <a:endParaRPr lang="en-US" sz="1100" dirty="0"/>
+          </a:p>
+        </p:txBody>
+      </p:sp>
+      <p:sp>
+        <p:nvSpPr>
+          <p:cNvPr id="10" name="Text 8"/>
+          <p:cNvSpPr txBox="1"/>
+          <p:nvPr/>
+        </p:nvSpPr>
+        <p:spPr>
+          <a:xfrm>
+            <a:off x="566928" y="3667760"/>
+            <a:ext cx="6428232" cy="257810"/>
+          </a:xfrm>
+          <a:prstGeom prst="rect">
+            <a:avLst/>
+          </a:prstGeom>
+          <a:noFill/>
+          <a:ln/>
+        </p:spPr>
+        <p:txBody>
+          <a:bodyPr wrap="square" lIns="0" tIns="0" rIns="0" bIns="0" rtlCol="0" anchor="t"/>
+          <a:lstStyle/>
+          <a:p>
+            <a:pPr indent="0" marL="0">
+              <a:buNone/>
+            </a:pPr>
+            <a:r>
+              <a:rPr lang="en-US" sz="1400" b="1" dirty="0">
+                <a:solidFill>
+                  <a:srgbClr val="1E2761"/>
+                </a:solidFill>
+                <a:latin typeface="Calibri" pitchFamily="34" charset="0"/>
+                <a:ea typeface="Calibri" pitchFamily="34" charset="-122"/>
+                <a:cs typeface="Calibri" pitchFamily="34" charset="-120"/>
+              </a:rPr>
+              <a:t>イベントごと作り直したいとき</a:t>
+            </a:r>
+            <a:endParaRPr lang="en-US" sz="1400" dirty="0"/>
+          </a:p>
+        </p:txBody>
+      </p:sp>
+      <p:sp>
+        <p:nvSpPr>
           <p:cNvPr id="11" name="Text 9"/>
           <p:cNvSpPr txBox="1"/>
           <p:nvPr/>
         </p:nvSpPr>
         <p:spPr>
           <a:xfrm>
-            <a:off x="713232" y="4347972"/>
+            <a:off x="713232" y="3998722"/>
             <a:ext cx="6281928" cy="257429"/>
           </a:xfrm>
           <a:prstGeom prst="rect">
@@ -11041,7 +11471,24 @@
                 <a:ea typeface="Calibri" pitchFamily="34" charset="-122"/>
                 <a:cs typeface="Calibri" pitchFamily="34" charset="-120"/>
               </a:rPr>
-              <a:t>「失敗」が多い場合は、システム担当にログの確認を依頼してください</a:t>
+              <a:t>実行：</a:t>
+            </a:r>
+            <a:pPr indent="0" marL="0">
+              <a:lnSpc>
+                <a:spcPct val="125000"/>
+              </a:lnSpc>
+              <a:buNone/>
+            </a:pPr>
+            <a:r>
+              <a:rPr lang="en-US" sz="1045" dirty="0">
+                <a:solidFill>
+                  <a:srgbClr val="222222"/>
+                </a:solidFill>
+                <a:latin typeface="Courier New" pitchFamily="34" charset="0"/>
+                <a:ea typeface="Courier New" pitchFamily="34" charset="-122"/>
+                <a:cs typeface="Courier New" pitchFamily="34" charset="-120"/>
+              </a:rPr>
+              <a:t>bin/reset.sh --all --force</a:t>
             </a:r>
             <a:endParaRPr lang="en-US" sz="1100" dirty="0"/>
           </a:p>
@@ -11049,14 +11496,80 @@
       </p:sp>
       <p:sp>
         <p:nvSpPr>
-          <p:cNvPr id="12" name="Text 10"/>
-          <p:cNvSpPr txBox="1"/>
-          <p:nvPr/>
-        </p:nvSpPr>
-        <p:spPr>
-          <a:xfrm>
-            <a:off x="566928" y="4733417"/>
-            <a:ext cx="6428232" cy="257810"/>
+          <p:cNvPr id="12" name="Shape 10"/>
+          <p:cNvSpPr/>
+          <p:nvPr/>
+        </p:nvSpPr>
+        <p:spPr>
+          <a:xfrm>
+            <a:off x="566928" y="4274439"/>
+            <a:ext cx="6428232" cy="817817"/>
+          </a:xfrm>
+          <a:prstGeom prst="roundRect">
+            <a:avLst>
+              <a:gd name="adj" fmla="val 6709"/>
+            </a:avLst>
+          </a:prstGeom>
+          <a:solidFill>
+            <a:srgbClr val="FDF0E6"/>
+          </a:solidFill>
+          <a:ln w="9525">
+            <a:solidFill>
+              <a:srgbClr val="E08A3C"/>
+            </a:solidFill>
+            <a:prstDash val="solid"/>
+          </a:ln>
+        </p:spPr>
+      </p:sp>
+      <p:sp>
+        <p:nvSpPr>
+          <p:cNvPr id="13" name="Text 11"/>
+          <p:cNvSpPr txBox="1"/>
+          <p:nvPr/>
+        </p:nvSpPr>
+        <p:spPr>
+          <a:xfrm>
+            <a:off x="658368" y="4365879"/>
+            <a:ext cx="237744" cy="237744"/>
+          </a:xfrm>
+          <a:prstGeom prst="rect">
+            <a:avLst/>
+          </a:prstGeom>
+          <a:noFill/>
+          <a:ln/>
+        </p:spPr>
+        <p:txBody>
+          <a:bodyPr wrap="square" lIns="0" tIns="0" rIns="0" bIns="0" rtlCol="0" anchor="ctr"/>
+          <a:lstStyle/>
+          <a:p>
+            <a:pPr algn="ctr" indent="0" marL="0">
+              <a:buNone/>
+            </a:pPr>
+            <a:r>
+              <a:rPr lang="en-US" sz="1200" b="1" dirty="0">
+                <a:solidFill>
+                  <a:srgbClr val="C25A17"/>
+                </a:solidFill>
+                <a:latin typeface="Calibri" pitchFamily="34" charset="0"/>
+                <a:ea typeface="Calibri" pitchFamily="34" charset="-122"/>
+                <a:cs typeface="Calibri" pitchFamily="34" charset="-120"/>
+              </a:rPr>
+              <a:t>！</a:t>
+            </a:r>
+            <a:endParaRPr lang="en-US" sz="1200" dirty="0"/>
+          </a:p>
+        </p:txBody>
+      </p:sp>
+      <p:sp>
+        <p:nvSpPr>
+          <p:cNvPr id="14" name="Text 12"/>
+          <p:cNvSpPr txBox="1"/>
+          <p:nvPr/>
+        </p:nvSpPr>
+        <p:spPr>
+          <a:xfrm>
+            <a:off x="950976" y="4384167"/>
+            <a:ext cx="5925312" cy="634937"/>
           </a:xfrm>
           <a:prstGeom prst="rect">
             <a:avLst/>
@@ -11069,10 +11582,113 @@
           <a:lstStyle/>
           <a:p>
             <a:pPr indent="0" marL="0">
-              <a:buNone/>
-            </a:pPr>
-            <a:r>
-              <a:rPr lang="en-US" sz="1400" b="1" dirty="0">
+              <a:lnSpc>
+                <a:spcPct val="120000"/>
+              </a:lnSpc>
+              <a:buNone/>
+            </a:pPr>
+            <a:r>
+              <a:rPr lang="en-US" sz="1050" dirty="0">
+                <a:solidFill>
+                  <a:srgbClr val="222222"/>
+                </a:solidFill>
+                <a:latin typeface="Calibri" pitchFamily="34" charset="0"/>
+                <a:ea typeface="Calibri" pitchFamily="34" charset="-122"/>
+                <a:cs typeface="Calibri" pitchFamily="34" charset="-120"/>
+              </a:rPr>
+              <a:t>どちらも元に戻せません。実行前に自動でバックアップを取りますが、念のため大事なデータはCSVで書き出しておいてください。</a:t>
+            </a:r>
+            <a:pPr indent="0" marL="0">
+              <a:lnSpc>
+                <a:spcPct val="120000"/>
+              </a:lnSpc>
+              <a:buNone/>
+            </a:pPr>
+            <a:r>
+              <a:rPr lang="en-US" sz="1050" b="1" dirty="0">
+                <a:solidFill>
+                  <a:srgbClr val="222222"/>
+                </a:solidFill>
+                <a:latin typeface="Calibri" pitchFamily="34" charset="0"/>
+                <a:ea typeface="Calibri" pitchFamily="34" charset="-122"/>
+                <a:cs typeface="Calibri" pitchFamily="34" charset="-120"/>
+              </a:rPr>
+              <a:t>企業担当者のアカウントは企業と一緒に消えます</a:t>
+            </a:r>
+            <a:pPr indent="0" marL="0">
+              <a:lnSpc>
+                <a:spcPct val="120000"/>
+              </a:lnSpc>
+              <a:buNone/>
+            </a:pPr>
+            <a:r>
+              <a:rPr lang="en-US" sz="1050" dirty="0">
+                <a:solidFill>
+                  <a:srgbClr val="222222"/>
+                </a:solidFill>
+                <a:latin typeface="Calibri" pitchFamily="34" charset="0"/>
+                <a:ea typeface="Calibri" pitchFamily="34" charset="-122"/>
+                <a:cs typeface="Calibri" pitchFamily="34" charset="-120"/>
+              </a:rPr>
+              <a:t>（主催者・受付は残ります）。</a:t>
+            </a:r>
+            <a:endParaRPr lang="en-US" sz="1050" dirty="0"/>
+          </a:p>
+        </p:txBody>
+      </p:sp>
+      <p:sp>
+        <p:nvSpPr>
+          <p:cNvPr id="15" name="Shape 13"/>
+          <p:cNvSpPr/>
+          <p:nvPr/>
+        </p:nvSpPr>
+        <p:spPr>
+          <a:xfrm>
+            <a:off x="566928" y="5165408"/>
+            <a:ext cx="6428232" cy="431102"/>
+          </a:xfrm>
+          <a:prstGeom prst="roundRect">
+            <a:avLst>
+              <a:gd name="adj" fmla="val 12726"/>
+            </a:avLst>
+          </a:prstGeom>
+          <a:solidFill>
+            <a:srgbClr val="E8ECF8"/>
+          </a:solidFill>
+          <a:ln w="9525">
+            <a:solidFill>
+              <a:srgbClr val="1E2761"/>
+            </a:solidFill>
+            <a:prstDash val="solid"/>
+          </a:ln>
+        </p:spPr>
+      </p:sp>
+      <p:sp>
+        <p:nvSpPr>
+          <p:cNvPr id="16" name="Text 14"/>
+          <p:cNvSpPr txBox="1"/>
+          <p:nvPr/>
+        </p:nvSpPr>
+        <p:spPr>
+          <a:xfrm>
+            <a:off x="658368" y="5256848"/>
+            <a:ext cx="237744" cy="237744"/>
+          </a:xfrm>
+          <a:prstGeom prst="rect">
+            <a:avLst/>
+          </a:prstGeom>
+          <a:noFill/>
+          <a:ln/>
+        </p:spPr>
+        <p:txBody>
+          <a:bodyPr wrap="square" lIns="0" tIns="0" rIns="0" bIns="0" rtlCol="0" anchor="ctr"/>
+          <a:lstStyle/>
+          <a:p>
+            <a:pPr algn="ctr" indent="0" marL="0">
+              <a:buNone/>
+            </a:pPr>
+            <a:r>
+              <a:rPr lang="en-US" sz="1200" b="1" dirty="0">
                 <a:solidFill>
                   <a:srgbClr val="1E2761"/>
                 </a:solidFill>
@@ -11080,22 +11696,22 @@
                 <a:ea typeface="Calibri" pitchFamily="34" charset="-122"/>
                 <a:cs typeface="Calibri" pitchFamily="34" charset="-120"/>
               </a:rPr>
-              <a:t>来場者が「交換コードが出ない」と言っている</a:t>
-            </a:r>
-            <a:endParaRPr lang="en-US" sz="1400" dirty="0"/>
-          </a:p>
-        </p:txBody>
-      </p:sp>
-      <p:sp>
-        <p:nvSpPr>
-          <p:cNvPr id="13" name="Text 11"/>
-          <p:cNvSpPr txBox="1"/>
-          <p:nvPr/>
-        </p:nvSpPr>
-        <p:spPr>
-          <a:xfrm>
-            <a:off x="566928" y="5064379"/>
-            <a:ext cx="6428232" cy="459994"/>
+              <a:t>i</a:t>
+            </a:r>
+            <a:endParaRPr lang="en-US" sz="1200" dirty="0"/>
+          </a:p>
+        </p:txBody>
+      </p:sp>
+      <p:sp>
+        <p:nvSpPr>
+          <p:cNvPr id="17" name="Text 15"/>
+          <p:cNvSpPr txBox="1"/>
+          <p:nvPr/>
+        </p:nvSpPr>
+        <p:spPr>
+          <a:xfrm>
+            <a:off x="950976" y="5275136"/>
+            <a:ext cx="5925312" cy="248221"/>
           </a:xfrm>
           <a:prstGeom prst="rect">
             <a:avLst/>
@@ -11109,143 +11725,28 @@
           <a:p>
             <a:pPr indent="0" marL="0">
               <a:lnSpc>
-                <a:spcPct val="125000"/>
-              </a:lnSpc>
-              <a:buNone/>
-            </a:pPr>
-            <a:r>
-              <a:rPr lang="en-US" sz="1100" dirty="0">
-                <a:solidFill>
-                  <a:srgbClr val="222222"/>
-                </a:solidFill>
-                <a:latin typeface="Calibri" pitchFamily="34" charset="0"/>
-                <a:ea typeface="Calibri" pitchFamily="34" charset="-122"/>
-                <a:cs typeface="Calibri" pitchFamily="34" charset="-120"/>
-              </a:rPr>
-              <a:t>まだどのブースのアンケートにも回答していない可能性があります。また、</a:t>
-            </a:r>
-            <a:pPr indent="0" marL="0">
-              <a:lnSpc>
-                <a:spcPct val="125000"/>
-              </a:lnSpc>
-              <a:buNone/>
-            </a:pPr>
-            <a:r>
-              <a:rPr lang="en-US" sz="1100" b="1" dirty="0">
-                <a:solidFill>
-                  <a:srgbClr val="222222"/>
-                </a:solidFill>
-                <a:latin typeface="Calibri" pitchFamily="34" charset="0"/>
-                <a:ea typeface="Calibri" pitchFamily="34" charset="-122"/>
-                <a:cs typeface="Calibri" pitchFamily="34" charset="-120"/>
-              </a:rPr>
-              <a:t>端末を変えると別の交換コードになります</a:t>
-            </a:r>
-            <a:pPr indent="0" marL="0">
-              <a:lnSpc>
-                <a:spcPct val="125000"/>
-              </a:lnSpc>
-              <a:buNone/>
-            </a:pPr>
-            <a:r>
-              <a:rPr lang="en-US" sz="1100" dirty="0">
-                <a:solidFill>
-                  <a:srgbClr val="222222"/>
-                </a:solidFill>
-                <a:latin typeface="Calibri" pitchFamily="34" charset="0"/>
-                <a:ea typeface="Calibri" pitchFamily="34" charset="-122"/>
-                <a:cs typeface="Calibri" pitchFamily="34" charset="-120"/>
-              </a:rPr>
-              <a:t>。</a:t>
-            </a:r>
-            <a:endParaRPr lang="en-US" sz="1100" dirty="0"/>
-          </a:p>
-        </p:txBody>
-      </p:sp>
-      <p:sp>
-        <p:nvSpPr>
-          <p:cNvPr id="14" name="Text 12"/>
-          <p:cNvSpPr txBox="1"/>
-          <p:nvPr/>
-        </p:nvSpPr>
-        <p:spPr>
-          <a:xfrm>
-            <a:off x="566928" y="5670677"/>
-            <a:ext cx="6428232" cy="257810"/>
-          </a:xfrm>
-          <a:prstGeom prst="rect">
-            <a:avLst/>
-          </a:prstGeom>
-          <a:noFill/>
-          <a:ln/>
-        </p:spPr>
-        <p:txBody>
-          <a:bodyPr wrap="square" lIns="0" tIns="0" rIns="0" bIns="0" rtlCol="0" anchor="t"/>
-          <a:lstStyle/>
-          <a:p>
-            <a:pPr indent="0" marL="0">
-              <a:buNone/>
-            </a:pPr>
-            <a:r>
-              <a:rPr lang="en-US" sz="1400" b="1" dirty="0">
-                <a:solidFill>
-                  <a:srgbClr val="1E2761"/>
-                </a:solidFill>
-                <a:latin typeface="Calibri" pitchFamily="34" charset="0"/>
-                <a:ea typeface="Calibri" pitchFamily="34" charset="-122"/>
-                <a:cs typeface="Calibri" pitchFamily="34" charset="-120"/>
-              </a:rPr>
-              <a:t>景品の交換で困ったとき</a:t>
-            </a:r>
-            <a:endParaRPr lang="en-US" sz="1400" dirty="0"/>
-          </a:p>
-        </p:txBody>
-      </p:sp>
-      <p:sp>
-        <p:nvSpPr>
-          <p:cNvPr id="15" name="Text 13"/>
-          <p:cNvSpPr txBox="1"/>
-          <p:nvPr/>
-        </p:nvSpPr>
-        <p:spPr>
-          <a:xfrm>
-            <a:off x="566928" y="6001639"/>
-            <a:ext cx="6428232" cy="459994"/>
-          </a:xfrm>
-          <a:prstGeom prst="rect">
-            <a:avLst/>
-          </a:prstGeom>
-          <a:noFill/>
-          <a:ln/>
-        </p:spPr>
-        <p:txBody>
-          <a:bodyPr wrap="square" lIns="0" tIns="0" rIns="0" bIns="0" rtlCol="0" anchor="t"/>
-          <a:lstStyle/>
-          <a:p>
-            <a:pPr indent="0" marL="0">
-              <a:lnSpc>
-                <a:spcPct val="125000"/>
-              </a:lnSpc>
-              <a:buNone/>
-            </a:pPr>
-            <a:r>
-              <a:rPr lang="en-US" sz="1100" dirty="0">
-                <a:solidFill>
-                  <a:srgbClr val="222222"/>
-                </a:solidFill>
-                <a:latin typeface="Calibri" pitchFamily="34" charset="0"/>
-                <a:ea typeface="Calibri" pitchFamily="34" charset="-122"/>
-                <a:cs typeface="Calibri" pitchFamily="34" charset="-120"/>
-              </a:rPr>
-              <a:t>受付画面で「交換済み」と出ても、お申し出があればお渡しして構いません（メモ欄に状況を残してください）。来場者の画面には交換済みかどうかを表示していません。</a:t>
-            </a:r>
-            <a:endParaRPr lang="en-US" sz="1100" dirty="0"/>
-          </a:p>
-        </p:txBody>
-      </p:sp>
-      <p:sp>
-        <p:nvSpPr>
-          <p:cNvPr id="16" name="Text 14"/>
+                <a:spcPct val="120000"/>
+              </a:lnSpc>
+              <a:buNone/>
+            </a:pPr>
+            <a:r>
+              <a:rPr lang="en-US" sz="1050" dirty="0">
+                <a:solidFill>
+                  <a:srgbClr val="222222"/>
+                </a:solidFill>
+                <a:latin typeface="Calibri" pitchFamily="34" charset="0"/>
+                <a:ea typeface="Calibri" pitchFamily="34" charset="-122"/>
+                <a:cs typeface="Calibri" pitchFamily="34" charset="-120"/>
+              </a:rPr>
+              <a:t>実行するとデータベース名の入力を求められます。画面の指示どおりに入力してください。</a:t>
+            </a:r>
+            <a:endParaRPr lang="en-US" sz="1050" dirty="0"/>
+          </a:p>
+        </p:txBody>
+      </p:sp>
+      <p:sp>
+        <p:nvSpPr>
+          <p:cNvPr id="18" name="Text 16"/>
           <p:cNvSpPr txBox="1"/>
           <p:nvPr/>
         </p:nvSpPr>
@@ -13426,6 +13927,681 @@
 </p:sld>
 </file>
 
+<file path=ppt/slides/slide20.xml><?xml version="1.0" encoding="utf-8"?>
+<p:sld xmlns:a="http://schemas.openxmlformats.org/drawingml/2006/main" xmlns:r="http://schemas.openxmlformats.org/officeDocument/2006/relationships" xmlns:p="http://schemas.openxmlformats.org/presentationml/2006/main">
+  <p:cSld name="Slide 20">
+    <p:bg>
+      <p:bgPr>
+        <a:solidFill>
+          <a:srgbClr val="FFFFFF"/>
+        </a:solidFill>
+      </p:bgPr>
+    </p:bg>
+    <p:spTree>
+      <p:nvGrpSpPr>
+        <p:cNvPr id="1" name=""/>
+        <p:cNvGrpSpPr/>
+        <p:nvPr/>
+      </p:nvGrpSpPr>
+      <p:grpSpPr>
+        <a:xfrm>
+          <a:off x="0" y="0"/>
+          <a:ext cx="0" cy="0"/>
+          <a:chOff x="0" y="0"/>
+          <a:chExt cx="0" cy="0"/>
+        </a:xfrm>
+      </p:grpSpPr>
+      <p:sp>
+        <p:nvSpPr>
+          <p:cNvPr id="2" name="Text 0"/>
+          <p:cNvSpPr txBox="1"/>
+          <p:nvPr/>
+        </p:nvSpPr>
+        <p:spPr>
+          <a:xfrm>
+            <a:off x="566928" y="457200"/>
+            <a:ext cx="6428232" cy="237744"/>
+          </a:xfrm>
+          <a:prstGeom prst="rect">
+            <a:avLst/>
+          </a:prstGeom>
+          <a:noFill/>
+          <a:ln/>
+        </p:spPr>
+        <p:txBody>
+          <a:bodyPr wrap="square" lIns="0" tIns="0" rIns="0" bIns="0" rtlCol="0" anchor="ctr"/>
+          <a:lstStyle/>
+          <a:p>
+            <a:pPr indent="0" marL="0">
+              <a:buNone/>
+            </a:pPr>
+            <a:r>
+              <a:rPr lang="en-US" sz="1000" b="1" dirty="0">
+                <a:solidFill>
+                  <a:srgbClr val="1E2761"/>
+                </a:solidFill>
+                <a:latin typeface="Calibri" pitchFamily="34" charset="0"/>
+                <a:ea typeface="Calibri" pitchFamily="34" charset="-122"/>
+                <a:cs typeface="Calibri" pitchFamily="34" charset="-120"/>
+              </a:rPr>
+              <a:t>主催者マニュアル</a:t>
+            </a:r>
+            <a:endParaRPr lang="en-US" sz="1000" dirty="0"/>
+          </a:p>
+        </p:txBody>
+      </p:sp>
+      <p:sp>
+        <p:nvSpPr>
+          <p:cNvPr id="3" name="Text 1"/>
+          <p:cNvSpPr txBox="1"/>
+          <p:nvPr/>
+        </p:nvSpPr>
+        <p:spPr>
+          <a:xfrm>
+            <a:off x="566928" y="713232"/>
+            <a:ext cx="6428232" cy="640080"/>
+          </a:xfrm>
+          <a:prstGeom prst="rect">
+            <a:avLst/>
+          </a:prstGeom>
+          <a:noFill/>
+          <a:ln/>
+        </p:spPr>
+        <p:txBody>
+          <a:bodyPr wrap="square" lIns="0" tIns="0" rIns="0" bIns="0" rtlCol="0" anchor="t"/>
+          <a:lstStyle/>
+          <a:p>
+            <a:pPr indent="0" marL="0">
+              <a:buNone/>
+            </a:pPr>
+            <a:r>
+              <a:rPr lang="en-US" sz="2200" b="1" dirty="0">
+                <a:solidFill>
+                  <a:srgbClr val="222222"/>
+                </a:solidFill>
+                <a:latin typeface="Calibri" pitchFamily="34" charset="0"/>
+                <a:ea typeface="Calibri" pitchFamily="34" charset="-122"/>
+                <a:cs typeface="Calibri" pitchFamily="34" charset="-120"/>
+              </a:rPr>
+              <a:t>困ったときは</a:t>
+            </a:r>
+            <a:endParaRPr lang="en-US" sz="2200" dirty="0"/>
+          </a:p>
+        </p:txBody>
+      </p:sp>
+      <p:sp>
+        <p:nvSpPr>
+          <p:cNvPr id="4" name="Text 2"/>
+          <p:cNvSpPr txBox="1"/>
+          <p:nvPr/>
+        </p:nvSpPr>
+        <p:spPr>
+          <a:xfrm>
+            <a:off x="566928" y="1591056"/>
+            <a:ext cx="6428232" cy="257810"/>
+          </a:xfrm>
+          <a:prstGeom prst="rect">
+            <a:avLst/>
+          </a:prstGeom>
+          <a:noFill/>
+          <a:ln/>
+        </p:spPr>
+        <p:txBody>
+          <a:bodyPr wrap="square" lIns="0" tIns="0" rIns="0" bIns="0" rtlCol="0" anchor="t"/>
+          <a:lstStyle/>
+          <a:p>
+            <a:pPr indent="0" marL="0">
+              <a:buNone/>
+            </a:pPr>
+            <a:r>
+              <a:rPr lang="en-US" sz="1400" b="1" dirty="0">
+                <a:solidFill>
+                  <a:srgbClr val="1E2761"/>
+                </a:solidFill>
+                <a:latin typeface="Calibri" pitchFamily="34" charset="0"/>
+                <a:ea typeface="Calibri" pitchFamily="34" charset="-122"/>
+                <a:cs typeface="Calibri" pitchFamily="34" charset="-120"/>
+              </a:rPr>
+              <a:t>QRコードを読んでも「受付を終了しました」と出る</a:t>
+            </a:r>
+            <a:endParaRPr lang="en-US" sz="1400" dirty="0"/>
+          </a:p>
+        </p:txBody>
+      </p:sp>
+      <p:sp>
+        <p:nvSpPr>
+          <p:cNvPr id="5" name="Text 3"/>
+          <p:cNvSpPr txBox="1"/>
+          <p:nvPr/>
+        </p:nvSpPr>
+        <p:spPr>
+          <a:xfrm>
+            <a:off x="566928" y="1922018"/>
+            <a:ext cx="6428232" cy="459994"/>
+          </a:xfrm>
+          <a:prstGeom prst="rect">
+            <a:avLst/>
+          </a:prstGeom>
+          <a:noFill/>
+          <a:ln/>
+        </p:spPr>
+        <p:txBody>
+          <a:bodyPr wrap="square" lIns="0" tIns="0" rIns="0" bIns="0" rtlCol="0" anchor="t"/>
+          <a:lstStyle/>
+          <a:p>
+            <a:pPr indent="0" marL="0">
+              <a:lnSpc>
+                <a:spcPct val="125000"/>
+              </a:lnSpc>
+              <a:buNone/>
+            </a:pPr>
+            <a:r>
+              <a:rPr lang="en-US" sz="1100" dirty="0">
+                <a:solidFill>
+                  <a:srgbClr val="222222"/>
+                </a:solidFill>
+                <a:latin typeface="Calibri" pitchFamily="34" charset="0"/>
+                <a:ea typeface="Calibri" pitchFamily="34" charset="-122"/>
+                <a:cs typeface="Calibri" pitchFamily="34" charset="-120"/>
+              </a:rPr>
+              <a:t>イベントの状態が「開催中」になっていない可能性があります。ダッシュボードの「イベント設定」をご確認ください。</a:t>
+            </a:r>
+            <a:endParaRPr lang="en-US" sz="1100" dirty="0"/>
+          </a:p>
+        </p:txBody>
+      </p:sp>
+      <p:sp>
+        <p:nvSpPr>
+          <p:cNvPr id="6" name="Text 4"/>
+          <p:cNvSpPr txBox="1"/>
+          <p:nvPr/>
+        </p:nvSpPr>
+        <p:spPr>
+          <a:xfrm>
+            <a:off x="566928" y="2528316"/>
+            <a:ext cx="6428232" cy="257810"/>
+          </a:xfrm>
+          <a:prstGeom prst="rect">
+            <a:avLst/>
+          </a:prstGeom>
+          <a:noFill/>
+          <a:ln/>
+        </p:spPr>
+        <p:txBody>
+          <a:bodyPr wrap="square" lIns="0" tIns="0" rIns="0" bIns="0" rtlCol="0" anchor="t"/>
+          <a:lstStyle/>
+          <a:p>
+            <a:pPr indent="0" marL="0">
+              <a:buNone/>
+            </a:pPr>
+            <a:r>
+              <a:rPr lang="en-US" sz="1400" b="1" dirty="0">
+                <a:solidFill>
+                  <a:srgbClr val="1E2761"/>
+                </a:solidFill>
+                <a:latin typeface="Calibri" pitchFamily="34" charset="0"/>
+                <a:ea typeface="Calibri" pitchFamily="34" charset="-122"/>
+                <a:cs typeface="Calibri" pitchFamily="34" charset="-120"/>
+              </a:rPr>
+              <a:t>QRコードを読んでも「ページを表示できません」と出る</a:t>
+            </a:r>
+            <a:endParaRPr lang="en-US" sz="1400" dirty="0"/>
+          </a:p>
+        </p:txBody>
+      </p:sp>
+      <p:sp>
+        <p:nvSpPr>
+          <p:cNvPr id="7" name="Text 5"/>
+          <p:cNvSpPr txBox="1"/>
+          <p:nvPr/>
+        </p:nvSpPr>
+        <p:spPr>
+          <a:xfrm>
+            <a:off x="566928" y="2859278"/>
+            <a:ext cx="6428232" cy="459994"/>
+          </a:xfrm>
+          <a:prstGeom prst="rect">
+            <a:avLst/>
+          </a:prstGeom>
+          <a:noFill/>
+          <a:ln/>
+        </p:spPr>
+        <p:txBody>
+          <a:bodyPr wrap="square" lIns="0" tIns="0" rIns="0" bIns="0" rtlCol="0" anchor="t"/>
+          <a:lstStyle/>
+          <a:p>
+            <a:pPr indent="0" marL="0">
+              <a:lnSpc>
+                <a:spcPct val="125000"/>
+              </a:lnSpc>
+              <a:buNone/>
+            </a:pPr>
+            <a:r>
+              <a:rPr lang="en-US" sz="1100" dirty="0">
+                <a:solidFill>
+                  <a:srgbClr val="222222"/>
+                </a:solidFill>
+                <a:latin typeface="Calibri" pitchFamily="34" charset="0"/>
+                <a:ea typeface="Calibri" pitchFamily="34" charset="-122"/>
+                <a:cs typeface="Calibri" pitchFamily="34" charset="-120"/>
+              </a:rPr>
+              <a:t>URLが本番のものになっていない可能性があります。印刷し直す前に、事務局のシステム担当にご相談ください。</a:t>
+            </a:r>
+            <a:endParaRPr lang="en-US" sz="1100" dirty="0"/>
+          </a:p>
+        </p:txBody>
+      </p:sp>
+      <p:sp>
+        <p:nvSpPr>
+          <p:cNvPr id="8" name="Text 6"/>
+          <p:cNvSpPr txBox="1"/>
+          <p:nvPr/>
+        </p:nvSpPr>
+        <p:spPr>
+          <a:xfrm>
+            <a:off x="566928" y="3465576"/>
+            <a:ext cx="6428232" cy="257810"/>
+          </a:xfrm>
+          <a:prstGeom prst="rect">
+            <a:avLst/>
+          </a:prstGeom>
+          <a:noFill/>
+          <a:ln/>
+        </p:spPr>
+        <p:txBody>
+          <a:bodyPr wrap="square" lIns="0" tIns="0" rIns="0" bIns="0" rtlCol="0" anchor="t"/>
+          <a:lstStyle/>
+          <a:p>
+            <a:pPr indent="0" marL="0">
+              <a:buNone/>
+            </a:pPr>
+            <a:r>
+              <a:rPr lang="en-US" sz="1400" b="1" dirty="0">
+                <a:solidFill>
+                  <a:srgbClr val="1E2761"/>
+                </a:solidFill>
+                <a:latin typeface="Calibri" pitchFamily="34" charset="0"/>
+                <a:ea typeface="Calibri" pitchFamily="34" charset="-122"/>
+                <a:cs typeface="Calibri" pitchFamily="34" charset="-120"/>
+              </a:rPr>
+              <a:t>案内メールが届かない</a:t>
+            </a:r>
+            <a:endParaRPr lang="en-US" sz="1400" dirty="0"/>
+          </a:p>
+        </p:txBody>
+      </p:sp>
+      <p:sp>
+        <p:nvSpPr>
+          <p:cNvPr id="9" name="Text 7"/>
+          <p:cNvSpPr txBox="1"/>
+          <p:nvPr/>
+        </p:nvSpPr>
+        <p:spPr>
+          <a:xfrm>
+            <a:off x="713232" y="3796538"/>
+            <a:ext cx="6281928" cy="257429"/>
+          </a:xfrm>
+          <a:prstGeom prst="rect">
+            <a:avLst/>
+          </a:prstGeom>
+          <a:noFill/>
+          <a:ln/>
+        </p:spPr>
+        <p:txBody>
+          <a:bodyPr wrap="square" lIns="0" tIns="0" rIns="0" bIns="0" rtlCol="0" anchor="t"/>
+          <a:lstStyle/>
+          <a:p>
+            <a:pPr marL="342900" indent="-342900">
+              <a:lnSpc>
+                <a:spcPct val="125000"/>
+              </a:lnSpc>
+              <a:buSzPct val="100000"/>
+              <a:buChar char="●"/>
+            </a:pPr>
+            <a:r>
+              <a:rPr lang="en-US" sz="1100" dirty="0">
+                <a:solidFill>
+                  <a:srgbClr val="222222"/>
+                </a:solidFill>
+                <a:latin typeface="Calibri" pitchFamily="34" charset="0"/>
+                <a:ea typeface="Calibri" pitchFamily="34" charset="-122"/>
+                <a:cs typeface="Calibri" pitchFamily="34" charset="-120"/>
+              </a:rPr>
+              <a:t>「送信済み」になっているか、「失敗」が増えていないかを画面で確認してください</a:t>
+            </a:r>
+            <a:endParaRPr lang="en-US" sz="1100" dirty="0"/>
+          </a:p>
+        </p:txBody>
+      </p:sp>
+      <p:sp>
+        <p:nvSpPr>
+          <p:cNvPr id="10" name="Text 8"/>
+          <p:cNvSpPr txBox="1"/>
+          <p:nvPr/>
+        </p:nvSpPr>
+        <p:spPr>
+          <a:xfrm>
+            <a:off x="713232" y="4072255"/>
+            <a:ext cx="6281928" cy="257429"/>
+          </a:xfrm>
+          <a:prstGeom prst="rect">
+            <a:avLst/>
+          </a:prstGeom>
+          <a:noFill/>
+          <a:ln/>
+        </p:spPr>
+        <p:txBody>
+          <a:bodyPr wrap="square" lIns="0" tIns="0" rIns="0" bIns="0" rtlCol="0" anchor="t"/>
+          <a:lstStyle/>
+          <a:p>
+            <a:pPr marL="342900" indent="-342900">
+              <a:lnSpc>
+                <a:spcPct val="125000"/>
+              </a:lnSpc>
+              <a:buSzPct val="100000"/>
+              <a:buChar char="●"/>
+            </a:pPr>
+            <a:r>
+              <a:rPr lang="en-US" sz="1100" dirty="0">
+                <a:solidFill>
+                  <a:srgbClr val="222222"/>
+                </a:solidFill>
+                <a:latin typeface="Calibri" pitchFamily="34" charset="0"/>
+                <a:ea typeface="Calibri" pitchFamily="34" charset="-122"/>
+                <a:cs typeface="Calibri" pitchFamily="34" charset="-120"/>
+              </a:rPr>
+              <a:t>受信側の迷惑メールフォルダもご確認ください</a:t>
+            </a:r>
+            <a:endParaRPr lang="en-US" sz="1100" dirty="0"/>
+          </a:p>
+        </p:txBody>
+      </p:sp>
+      <p:sp>
+        <p:nvSpPr>
+          <p:cNvPr id="11" name="Text 9"/>
+          <p:cNvSpPr txBox="1"/>
+          <p:nvPr/>
+        </p:nvSpPr>
+        <p:spPr>
+          <a:xfrm>
+            <a:off x="713232" y="4347972"/>
+            <a:ext cx="6281928" cy="257429"/>
+          </a:xfrm>
+          <a:prstGeom prst="rect">
+            <a:avLst/>
+          </a:prstGeom>
+          <a:noFill/>
+          <a:ln/>
+        </p:spPr>
+        <p:txBody>
+          <a:bodyPr wrap="square" lIns="0" tIns="0" rIns="0" bIns="0" rtlCol="0" anchor="t"/>
+          <a:lstStyle/>
+          <a:p>
+            <a:pPr marL="342900" indent="-342900">
+              <a:lnSpc>
+                <a:spcPct val="125000"/>
+              </a:lnSpc>
+              <a:buSzPct val="100000"/>
+              <a:buChar char="●"/>
+            </a:pPr>
+            <a:r>
+              <a:rPr lang="en-US" sz="1100" dirty="0">
+                <a:solidFill>
+                  <a:srgbClr val="222222"/>
+                </a:solidFill>
+                <a:latin typeface="Calibri" pitchFamily="34" charset="0"/>
+                <a:ea typeface="Calibri" pitchFamily="34" charset="-122"/>
+                <a:cs typeface="Calibri" pitchFamily="34" charset="-120"/>
+              </a:rPr>
+              <a:t>「失敗」が多い場合は、システム担当にログの確認を依頼してください</a:t>
+            </a:r>
+            <a:endParaRPr lang="en-US" sz="1100" dirty="0"/>
+          </a:p>
+        </p:txBody>
+      </p:sp>
+      <p:sp>
+        <p:nvSpPr>
+          <p:cNvPr id="12" name="Text 10"/>
+          <p:cNvSpPr txBox="1"/>
+          <p:nvPr/>
+        </p:nvSpPr>
+        <p:spPr>
+          <a:xfrm>
+            <a:off x="566928" y="4733417"/>
+            <a:ext cx="6428232" cy="257810"/>
+          </a:xfrm>
+          <a:prstGeom prst="rect">
+            <a:avLst/>
+          </a:prstGeom>
+          <a:noFill/>
+          <a:ln/>
+        </p:spPr>
+        <p:txBody>
+          <a:bodyPr wrap="square" lIns="0" tIns="0" rIns="0" bIns="0" rtlCol="0" anchor="t"/>
+          <a:lstStyle/>
+          <a:p>
+            <a:pPr indent="0" marL="0">
+              <a:buNone/>
+            </a:pPr>
+            <a:r>
+              <a:rPr lang="en-US" sz="1400" b="1" dirty="0">
+                <a:solidFill>
+                  <a:srgbClr val="1E2761"/>
+                </a:solidFill>
+                <a:latin typeface="Calibri" pitchFamily="34" charset="0"/>
+                <a:ea typeface="Calibri" pitchFamily="34" charset="-122"/>
+                <a:cs typeface="Calibri" pitchFamily="34" charset="-120"/>
+              </a:rPr>
+              <a:t>来場者が「交換コードが出ない」と言っている</a:t>
+            </a:r>
+            <a:endParaRPr lang="en-US" sz="1400" dirty="0"/>
+          </a:p>
+        </p:txBody>
+      </p:sp>
+      <p:sp>
+        <p:nvSpPr>
+          <p:cNvPr id="13" name="Text 11"/>
+          <p:cNvSpPr txBox="1"/>
+          <p:nvPr/>
+        </p:nvSpPr>
+        <p:spPr>
+          <a:xfrm>
+            <a:off x="566928" y="5064379"/>
+            <a:ext cx="6428232" cy="459994"/>
+          </a:xfrm>
+          <a:prstGeom prst="rect">
+            <a:avLst/>
+          </a:prstGeom>
+          <a:noFill/>
+          <a:ln/>
+        </p:spPr>
+        <p:txBody>
+          <a:bodyPr wrap="square" lIns="0" tIns="0" rIns="0" bIns="0" rtlCol="0" anchor="t"/>
+          <a:lstStyle/>
+          <a:p>
+            <a:pPr indent="0" marL="0">
+              <a:lnSpc>
+                <a:spcPct val="125000"/>
+              </a:lnSpc>
+              <a:buNone/>
+            </a:pPr>
+            <a:r>
+              <a:rPr lang="en-US" sz="1100" dirty="0">
+                <a:solidFill>
+                  <a:srgbClr val="222222"/>
+                </a:solidFill>
+                <a:latin typeface="Calibri" pitchFamily="34" charset="0"/>
+                <a:ea typeface="Calibri" pitchFamily="34" charset="-122"/>
+                <a:cs typeface="Calibri" pitchFamily="34" charset="-120"/>
+              </a:rPr>
+              <a:t>まだどのブースのアンケートにも回答していない可能性があります。また、</a:t>
+            </a:r>
+            <a:pPr indent="0" marL="0">
+              <a:lnSpc>
+                <a:spcPct val="125000"/>
+              </a:lnSpc>
+              <a:buNone/>
+            </a:pPr>
+            <a:r>
+              <a:rPr lang="en-US" sz="1100" b="1" dirty="0">
+                <a:solidFill>
+                  <a:srgbClr val="222222"/>
+                </a:solidFill>
+                <a:latin typeface="Calibri" pitchFamily="34" charset="0"/>
+                <a:ea typeface="Calibri" pitchFamily="34" charset="-122"/>
+                <a:cs typeface="Calibri" pitchFamily="34" charset="-120"/>
+              </a:rPr>
+              <a:t>端末を変えると別の交換コードになります</a:t>
+            </a:r>
+            <a:pPr indent="0" marL="0">
+              <a:lnSpc>
+                <a:spcPct val="125000"/>
+              </a:lnSpc>
+              <a:buNone/>
+            </a:pPr>
+            <a:r>
+              <a:rPr lang="en-US" sz="1100" dirty="0">
+                <a:solidFill>
+                  <a:srgbClr val="222222"/>
+                </a:solidFill>
+                <a:latin typeface="Calibri" pitchFamily="34" charset="0"/>
+                <a:ea typeface="Calibri" pitchFamily="34" charset="-122"/>
+                <a:cs typeface="Calibri" pitchFamily="34" charset="-120"/>
+              </a:rPr>
+              <a:t>。</a:t>
+            </a:r>
+            <a:endParaRPr lang="en-US" sz="1100" dirty="0"/>
+          </a:p>
+        </p:txBody>
+      </p:sp>
+      <p:sp>
+        <p:nvSpPr>
+          <p:cNvPr id="14" name="Text 12"/>
+          <p:cNvSpPr txBox="1"/>
+          <p:nvPr/>
+        </p:nvSpPr>
+        <p:spPr>
+          <a:xfrm>
+            <a:off x="566928" y="5670677"/>
+            <a:ext cx="6428232" cy="257810"/>
+          </a:xfrm>
+          <a:prstGeom prst="rect">
+            <a:avLst/>
+          </a:prstGeom>
+          <a:noFill/>
+          <a:ln/>
+        </p:spPr>
+        <p:txBody>
+          <a:bodyPr wrap="square" lIns="0" tIns="0" rIns="0" bIns="0" rtlCol="0" anchor="t"/>
+          <a:lstStyle/>
+          <a:p>
+            <a:pPr indent="0" marL="0">
+              <a:buNone/>
+            </a:pPr>
+            <a:r>
+              <a:rPr lang="en-US" sz="1400" b="1" dirty="0">
+                <a:solidFill>
+                  <a:srgbClr val="1E2761"/>
+                </a:solidFill>
+                <a:latin typeface="Calibri" pitchFamily="34" charset="0"/>
+                <a:ea typeface="Calibri" pitchFamily="34" charset="-122"/>
+                <a:cs typeface="Calibri" pitchFamily="34" charset="-120"/>
+              </a:rPr>
+              <a:t>景品の交換で困ったとき</a:t>
+            </a:r>
+            <a:endParaRPr lang="en-US" sz="1400" dirty="0"/>
+          </a:p>
+        </p:txBody>
+      </p:sp>
+      <p:sp>
+        <p:nvSpPr>
+          <p:cNvPr id="15" name="Text 13"/>
+          <p:cNvSpPr txBox="1"/>
+          <p:nvPr/>
+        </p:nvSpPr>
+        <p:spPr>
+          <a:xfrm>
+            <a:off x="566928" y="6001639"/>
+            <a:ext cx="6428232" cy="459994"/>
+          </a:xfrm>
+          <a:prstGeom prst="rect">
+            <a:avLst/>
+          </a:prstGeom>
+          <a:noFill/>
+          <a:ln/>
+        </p:spPr>
+        <p:txBody>
+          <a:bodyPr wrap="square" lIns="0" tIns="0" rIns="0" bIns="0" rtlCol="0" anchor="t"/>
+          <a:lstStyle/>
+          <a:p>
+            <a:pPr indent="0" marL="0">
+              <a:lnSpc>
+                <a:spcPct val="125000"/>
+              </a:lnSpc>
+              <a:buNone/>
+            </a:pPr>
+            <a:r>
+              <a:rPr lang="en-US" sz="1100" dirty="0">
+                <a:solidFill>
+                  <a:srgbClr val="222222"/>
+                </a:solidFill>
+                <a:latin typeface="Calibri" pitchFamily="34" charset="0"/>
+                <a:ea typeface="Calibri" pitchFamily="34" charset="-122"/>
+                <a:cs typeface="Calibri" pitchFamily="34" charset="-120"/>
+              </a:rPr>
+              <a:t>受付画面で「交換済み」と出ても、お申し出があればお渡しして構いません（メモ欄に状況を残してください）。来場者の画面には交換済みかどうかを表示していません。</a:t>
+            </a:r>
+            <a:endParaRPr lang="en-US" sz="1100" dirty="0"/>
+          </a:p>
+        </p:txBody>
+      </p:sp>
+      <p:sp>
+        <p:nvSpPr>
+          <p:cNvPr id="16" name="Text 14"/>
+          <p:cNvSpPr txBox="1"/>
+          <p:nvPr/>
+        </p:nvSpPr>
+        <p:spPr>
+          <a:xfrm>
+            <a:off x="566928" y="10186416"/>
+            <a:ext cx="6428232" cy="228600"/>
+          </a:xfrm>
+          <a:prstGeom prst="rect">
+            <a:avLst/>
+          </a:prstGeom>
+          <a:noFill/>
+          <a:ln/>
+        </p:spPr>
+        <p:txBody>
+          <a:bodyPr wrap="square" lIns="0" tIns="0" rIns="0" bIns="0" rtlCol="0" anchor="ctr"/>
+          <a:lstStyle/>
+          <a:p>
+            <a:pPr algn="r" indent="0" marL="0">
+              <a:buNone/>
+            </a:pPr>
+            <a:r>
+              <a:rPr lang="en-US" sz="900" dirty="0">
+                <a:solidFill>
+                  <a:srgbClr val="6B6B6B"/>
+                </a:solidFill>
+                <a:latin typeface="Calibri" pitchFamily="34" charset="0"/>
+                <a:ea typeface="Calibri" pitchFamily="34" charset="-122"/>
+                <a:cs typeface="Calibri" pitchFamily="34" charset="-120"/>
+              </a:rPr>
+              <a:t>主催者向け　20</a:t>
+            </a:r>
+            <a:endParaRPr lang="en-US" sz="900" dirty="0"/>
+          </a:p>
+        </p:txBody>
+      </p:sp>
+    </p:spTree>
+  </p:cSld>
+  <p:clrMapOvr>
+    <a:masterClrMapping/>
+  </p:clrMapOvr>
+</p:sld>
+</file>
+
 <file path=ppt/slides/slide3.xml><?xml version="1.0" encoding="utf-8"?>
 <p:sld xmlns:a="http://schemas.openxmlformats.org/drawingml/2006/main" xmlns:r="http://schemas.openxmlformats.org/officeDocument/2006/relationships" xmlns:p="http://schemas.openxmlformats.org/presentationml/2006/main">
   <p:cSld name="Slide 3">
@@ -16543,7 +17719,7 @@
                 <a:ea typeface="Calibri" pitchFamily="34" charset="-122"/>
                 <a:cs typeface="Calibri" pitchFamily="34" charset="-120"/>
               </a:rPr>
-              <a:t>（単一選択・複数選択・自由記述・星評価・NPS）を選ぶ</a:t>
+              <a:t>（単一選択・複数選択・自由記述・星評価・NPS・数値入力）を選ぶ</a:t>
             </a:r>
             <a:endParaRPr lang="en-US" sz="1150" dirty="0"/>
           </a:p>

--- a/docs/manual-organizer.pptx
+++ b/docs/manual-organizer.pptx
@@ -25,9 +25,10 @@
     <p:sldId id="273" r:id="rId19"/>
     <p:sldId id="274" r:id="rId20"/>
     <p:sldId id="275" r:id="rId21"/>
+    <p:sldId id="276" r:id="rId22"/>
   </p:sldIdLst>
   <p:notesMasterIdLst>
-    <p:notesMasterId r:id="rId22"/>
+    <p:notesMasterId r:id="rId23"/>
   </p:notesMasterIdLst>
   <p:sldSz cx="7562088" cy="10689336"/>
   <p:notesSz cx="10689336" cy="7562088"/>
@@ -1601,6 +1602,94 @@
             <a:fld id="{F7021451-1387-4CA6-816F-3879F97B5CBC}" type="slidenum">
               <a:rPr lang="en-US"/>
               <a:t>20</a:t>
+            </a:fld>
+            <a:endParaRPr lang="en-US"/>
+          </a:p>
+        </p:txBody>
+      </p:sp>
+    </p:spTree>
+    <p:extLst>
+      <p:ext uri="{BB962C8B-B14F-4D97-AF65-F5344CB8AC3E}">
+        <p14:creationId xmlns:p14="http://schemas.microsoft.com/office/powerpoint/2010/main" val="1024086991"/>
+      </p:ext>
+    </p:extLst>
+  </p:cSld>
+  <p:clrMapOvr>
+    <a:masterClrMapping/>
+  </p:clrMapOvr>
+</p:notes>
+</file>
+
+<file path=ppt/notesSlides/notesSlide21.xml><?xml version="1.0" encoding="utf-8"?>
+<p:notes xmlns:a="http://schemas.openxmlformats.org/drawingml/2006/main" xmlns:r="http://schemas.openxmlformats.org/officeDocument/2006/relationships" xmlns:p="http://schemas.openxmlformats.org/presentationml/2006/main">
+  <p:cSld>
+    <p:spTree>
+      <p:nvGrpSpPr>
+        <p:cNvPr id="1" name=""/>
+        <p:cNvGrpSpPr/>
+        <p:nvPr/>
+      </p:nvGrpSpPr>
+      <p:grpSpPr>
+        <a:xfrm>
+          <a:off x="0" y="0"/>
+          <a:ext cx="0" cy="0"/>
+          <a:chOff x="0" y="0"/>
+          <a:chExt cx="0" cy="0"/>
+        </a:xfrm>
+      </p:grpSpPr>
+      <p:sp>
+        <p:nvSpPr>
+          <p:cNvPr id="2" name="Slide Image Placeholder 1"/>
+          <p:cNvSpPr>
+            <a:spLocks noGrp="1" noRot="1" noChangeAspect="1"/>
+          </p:cNvSpPr>
+          <p:nvPr>
+            <p:ph type="sldImg"/>
+          </p:nvPr>
+        </p:nvSpPr>
+        <p:spPr/>
+      </p:sp>
+      <p:sp>
+        <p:nvSpPr>
+          <p:cNvPr id="3" name="Notes Placeholder 2"/>
+          <p:cNvSpPr>
+            <a:spLocks noGrp="1"/>
+          </p:cNvSpPr>
+          <p:nvPr>
+            <p:ph type="body" idx="1"/>
+          </p:nvPr>
+        </p:nvSpPr>
+        <p:spPr/>
+        <p:txBody>
+          <a:bodyPr/>
+          <a:lstStyle/>
+          <a:p>
+            <a:r>
+              <a:rPr lang="en-US" dirty="0"/>
+              <a:t/>
+            </a:r>
+            <a:endParaRPr lang="en-US" dirty="0"/>
+          </a:p>
+        </p:txBody>
+      </p:sp>
+      <p:sp>
+        <p:nvSpPr>
+          <p:cNvPr id="4" name="Slide Number Placeholder 3"/>
+          <p:cNvSpPr>
+            <a:spLocks noGrp="1"/>
+          </p:cNvSpPr>
+          <p:nvPr>
+            <p:ph type="sldNum" sz="quarter" idx="10"/>
+          </p:nvPr>
+        </p:nvSpPr>
+        <p:spPr/>
+        <p:txBody>
+          <a:bodyPr/>
+          <a:lstStyle/>
+          <a:p>
+            <a:fld id="{F7021451-1387-4CA6-816F-3879F97B5CBC}" type="slidenum">
+              <a:rPr lang="en-US"/>
+              <a:t>21</a:t>
             </a:fld>
             <a:endParaRPr lang="en-US"/>
           </a:p>
@@ -7028,13 +7117,338 @@
       </p:sp>
       <p:sp>
         <p:nvSpPr>
-          <p:cNvPr id="9" name="Shape 7"/>
+          <p:cNvPr id="9" name="Text 7"/>
+          <p:cNvSpPr txBox="1"/>
+          <p:nvPr/>
+        </p:nvSpPr>
+        <p:spPr>
+          <a:xfrm>
+            <a:off x="566928" y="2896489"/>
+            <a:ext cx="6428232" cy="257429"/>
+          </a:xfrm>
+          <a:prstGeom prst="rect">
+            <a:avLst/>
+          </a:prstGeom>
+          <a:noFill/>
+          <a:ln/>
+        </p:spPr>
+        <p:txBody>
+          <a:bodyPr wrap="square" lIns="0" tIns="0" rIns="0" bIns="0" rtlCol="0" anchor="t"/>
+          <a:lstStyle/>
+          <a:p>
+            <a:pPr indent="0" marL="0">
+              <a:lnSpc>
+                <a:spcPct val="125000"/>
+              </a:lnSpc>
+              <a:buNone/>
+            </a:pPr>
+            <a:r>
+              <a:rPr lang="en-US" sz="1100" dirty="0">
+                <a:solidFill>
+                  <a:srgbClr val="222222"/>
+                </a:solidFill>
+                <a:latin typeface="Calibri" pitchFamily="34" charset="0"/>
+                <a:ea typeface="Calibri" pitchFamily="34" charset="-122"/>
+                <a:cs typeface="Calibri" pitchFamily="34" charset="-120"/>
+              </a:rPr>
+              <a:t>来場者の画面では、人数は</a:t>
+            </a:r>
+            <a:pPr indent="0" marL="0">
+              <a:lnSpc>
+                <a:spcPct val="125000"/>
+              </a:lnSpc>
+              <a:buNone/>
+            </a:pPr>
+            <a:r>
+              <a:rPr lang="en-US" sz="1100" b="1" dirty="0">
+                <a:solidFill>
+                  <a:srgbClr val="222222"/>
+                </a:solidFill>
+                <a:latin typeface="Calibri" pitchFamily="34" charset="0"/>
+                <a:ea typeface="Calibri" pitchFamily="34" charset="-122"/>
+                <a:cs typeface="Calibri" pitchFamily="34" charset="-120"/>
+              </a:rPr>
+              <a:t>キーボードではなくプルダウンから選ぶ</a:t>
+            </a:r>
+            <a:pPr indent="0" marL="0">
+              <a:lnSpc>
+                <a:spcPct val="125000"/>
+              </a:lnSpc>
+              <a:buNone/>
+            </a:pPr>
+            <a:r>
+              <a:rPr lang="en-US" sz="1100" dirty="0">
+                <a:solidFill>
+                  <a:srgbClr val="222222"/>
+                </a:solidFill>
+                <a:latin typeface="Calibri" pitchFamily="34" charset="0"/>
+                <a:ea typeface="Calibri" pitchFamily="34" charset="-122"/>
+                <a:cs typeface="Calibri" pitchFamily="34" charset="-120"/>
+              </a:rPr>
+              <a:t>形になります。</a:t>
+            </a:r>
+            <a:endParaRPr lang="en-US" sz="1100" dirty="0"/>
+          </a:p>
+        </p:txBody>
+      </p:sp>
+      <p:sp>
+        <p:nvSpPr>
+          <p:cNvPr id="10" name="Text 8"/>
+          <p:cNvSpPr txBox="1"/>
+          <p:nvPr/>
+        </p:nvSpPr>
+        <p:spPr>
+          <a:xfrm>
+            <a:off x="566928" y="3190494"/>
+            <a:ext cx="6428232" cy="459994"/>
+          </a:xfrm>
+          <a:prstGeom prst="rect">
+            <a:avLst/>
+          </a:prstGeom>
+          <a:noFill/>
+          <a:ln/>
+        </p:spPr>
+        <p:txBody>
+          <a:bodyPr wrap="square" lIns="0" tIns="0" rIns="0" bIns="0" rtlCol="0" anchor="t"/>
+          <a:lstStyle/>
+          <a:p>
+            <a:pPr indent="0" marL="0">
+              <a:lnSpc>
+                <a:spcPct val="125000"/>
+              </a:lnSpc>
+              <a:buNone/>
+            </a:pPr>
+            <a:r>
+              <a:rPr lang="en-US" sz="1100" dirty="0">
+                <a:solidFill>
+                  <a:srgbClr val="222222"/>
+                </a:solidFill>
+                <a:latin typeface="Calibri" pitchFamily="34" charset="0"/>
+                <a:ea typeface="Calibri" pitchFamily="34" charset="-122"/>
+                <a:cs typeface="Calibri" pitchFamily="34" charset="-120"/>
+              </a:rPr>
+              <a:t>「1人」〜「9人」と「</a:t>
+            </a:r>
+            <a:pPr indent="0" marL="0">
+              <a:lnSpc>
+                <a:spcPct val="125000"/>
+              </a:lnSpc>
+              <a:buNone/>
+            </a:pPr>
+            <a:r>
+              <a:rPr lang="en-US" sz="1100" b="1" dirty="0">
+                <a:solidFill>
+                  <a:srgbClr val="222222"/>
+                </a:solidFill>
+                <a:latin typeface="Calibri" pitchFamily="34" charset="0"/>
+                <a:ea typeface="Calibri" pitchFamily="34" charset="-122"/>
+                <a:cs typeface="Calibri" pitchFamily="34" charset="-120"/>
+              </a:rPr>
+              <a:t>10人以上</a:t>
+            </a:r>
+            <a:pPr indent="0" marL="0">
+              <a:lnSpc>
+                <a:spcPct val="125000"/>
+              </a:lnSpc>
+              <a:buNone/>
+            </a:pPr>
+            <a:r>
+              <a:rPr lang="en-US" sz="1100" dirty="0">
+                <a:solidFill>
+                  <a:srgbClr val="222222"/>
+                </a:solidFill>
+                <a:latin typeface="Calibri" pitchFamily="34" charset="0"/>
+                <a:ea typeface="Calibri" pitchFamily="34" charset="-122"/>
+                <a:cs typeface="Calibri" pitchFamily="34" charset="-120"/>
+              </a:rPr>
+              <a:t>」が並び、「10人以上」は10人として集計します（多めには見積もりません）。</a:t>
+            </a:r>
+            <a:endParaRPr lang="en-US" sz="1100" dirty="0"/>
+          </a:p>
+        </p:txBody>
+      </p:sp>
+      <p:sp>
+        <p:nvSpPr>
+          <p:cNvPr id="11" name="Text 9"/>
+          <p:cNvSpPr txBox="1"/>
+          <p:nvPr/>
+        </p:nvSpPr>
+        <p:spPr>
+          <a:xfrm>
+            <a:off x="566928" y="3687064"/>
+            <a:ext cx="6428232" cy="257429"/>
+          </a:xfrm>
+          <a:prstGeom prst="rect">
+            <a:avLst/>
+          </a:prstGeom>
+          <a:noFill/>
+          <a:ln/>
+        </p:spPr>
+        <p:txBody>
+          <a:bodyPr wrap="square" lIns="0" tIns="0" rIns="0" bIns="0" rtlCol="0" anchor="t"/>
+          <a:lstStyle/>
+          <a:p>
+            <a:pPr indent="0" marL="0">
+              <a:lnSpc>
+                <a:spcPct val="125000"/>
+              </a:lnSpc>
+              <a:buNone/>
+            </a:pPr>
+            <a:r>
+              <a:rPr lang="en-US" sz="1100" dirty="0">
+                <a:solidFill>
+                  <a:srgbClr val="222222"/>
+                </a:solidFill>
+                <a:latin typeface="Calibri" pitchFamily="34" charset="0"/>
+                <a:ea typeface="Calibri" pitchFamily="34" charset="-122"/>
+                <a:cs typeface="Calibri" pitchFamily="34" charset="-120"/>
+              </a:rPr>
+              <a:t>上限の10は、サーバーの </a:t>
+            </a:r>
+            <a:pPr indent="0" marL="0">
+              <a:lnSpc>
+                <a:spcPct val="125000"/>
+              </a:lnSpc>
+              <a:buNone/>
+            </a:pPr>
+            <a:r>
+              <a:rPr lang="en-US" sz="1045" dirty="0">
+                <a:solidFill>
+                  <a:srgbClr val="222222"/>
+                </a:solidFill>
+                <a:latin typeface="Courier New" pitchFamily="34" charset="0"/>
+                <a:ea typeface="Courier New" pitchFamily="34" charset="-122"/>
+                <a:cs typeface="Courier New" pitchFamily="34" charset="-120"/>
+              </a:rPr>
+              <a:t>.env</a:t>
+            </a:r>
+            <a:pPr indent="0" marL="0">
+              <a:lnSpc>
+                <a:spcPct val="125000"/>
+              </a:lnSpc>
+              <a:buNone/>
+            </a:pPr>
+            <a:r>
+              <a:rPr lang="en-US" sz="1100" dirty="0">
+                <a:solidFill>
+                  <a:srgbClr val="222222"/>
+                </a:solidFill>
+                <a:latin typeface="Calibri" pitchFamily="34" charset="0"/>
+                <a:ea typeface="Calibri" pitchFamily="34" charset="-122"/>
+                <a:cs typeface="Calibri" pitchFamily="34" charset="-120"/>
+              </a:rPr>
+              <a:t> の </a:t>
+            </a:r>
+            <a:pPr indent="0" marL="0">
+              <a:lnSpc>
+                <a:spcPct val="125000"/>
+              </a:lnSpc>
+              <a:buNone/>
+            </a:pPr>
+            <a:r>
+              <a:rPr lang="en-US" sz="1045" dirty="0">
+                <a:solidFill>
+                  <a:srgbClr val="222222"/>
+                </a:solidFill>
+                <a:latin typeface="Courier New" pitchFamily="34" charset="0"/>
+                <a:ea typeface="Courier New" pitchFamily="34" charset="-122"/>
+                <a:cs typeface="Courier New" pitchFamily="34" charset="-120"/>
+              </a:rPr>
+              <a:t>PARTY_SIZE_MAX</a:t>
+            </a:r>
+            <a:pPr indent="0" marL="0">
+              <a:lnSpc>
+                <a:spcPct val="125000"/>
+              </a:lnSpc>
+              <a:buNone/>
+            </a:pPr>
+            <a:r>
+              <a:rPr lang="en-US" sz="1100" dirty="0">
+                <a:solidFill>
+                  <a:srgbClr val="222222"/>
+                </a:solidFill>
+                <a:latin typeface="Calibri" pitchFamily="34" charset="0"/>
+                <a:ea typeface="Calibri" pitchFamily="34" charset="-122"/>
+                <a:cs typeface="Calibri" pitchFamily="34" charset="-120"/>
+              </a:rPr>
+              <a:t> で変えられます。</a:t>
+            </a:r>
+            <a:endParaRPr lang="en-US" sz="1100" dirty="0"/>
+          </a:p>
+        </p:txBody>
+      </p:sp>
+      <p:pic>
+        <p:nvPicPr>
+          <p:cNvPr id="12" name="Image 0" descr="C:\Users\sato\Desktop\enque\docs\images\p-survey-number.png">    </p:cNvPr>
+          <p:cNvPicPr>
+            <a:picLocks noChangeAspect="1"/>
+          </p:cNvPicPr>
+          <p:nvPr/>
+        </p:nvPicPr>
+        <p:blipFill>
+          <a:blip r:embed="rId1"/>
+          <a:stretch>
+            <a:fillRect/>
+          </a:stretch>
+        </p:blipFill>
+        <p:spPr>
+          <a:xfrm>
+            <a:off x="2654866" y="3981069"/>
+            <a:ext cx="2252356" cy="3474720"/>
+          </a:xfrm>
+          <a:prstGeom prst="rect">
+            <a:avLst/>
+          </a:prstGeom>
+        </p:spPr>
+      </p:pic>
+      <p:sp>
+        <p:nvSpPr>
+          <p:cNvPr id="13" name="Text 10"/>
+          <p:cNvSpPr txBox="1"/>
+          <p:nvPr/>
+        </p:nvSpPr>
+        <p:spPr>
+          <a:xfrm>
+            <a:off x="566928" y="7510653"/>
+            <a:ext cx="6428232" cy="274320"/>
+          </a:xfrm>
+          <a:prstGeom prst="rect">
+            <a:avLst/>
+          </a:prstGeom>
+          <a:noFill/>
+          <a:ln/>
+        </p:spPr>
+        <p:txBody>
+          <a:bodyPr wrap="square" lIns="0" tIns="0" rIns="0" bIns="0" rtlCol="0" anchor="ctr"/>
+          <a:lstStyle/>
+          <a:p>
+            <a:pPr algn="ctr" indent="0" marL="0">
+              <a:buNone/>
+            </a:pPr>
+            <a:r>
+              <a:rPr lang="en-US" sz="950" dirty="0">
+                <a:solidFill>
+                  <a:srgbClr val="6B6B6B"/>
+                </a:solidFill>
+                <a:latin typeface="Calibri" pitchFamily="34" charset="0"/>
+                <a:ea typeface="Calibri" pitchFamily="34" charset="-122"/>
+                <a:cs typeface="Calibri" pitchFamily="34" charset="-120"/>
+              </a:rPr>
+              <a:t>来場者のアンケート画面の「何人で来られましたか」。人数のプルダウンを開いた状態。</a:t>
+            </a:r>
+            <a:endParaRPr lang="en-US" sz="950" dirty="0"/>
+          </a:p>
+        </p:txBody>
+      </p:sp>
+      <p:sp>
+        <p:nvSpPr>
+          <p:cNvPr id="14" name="Shape 11"/>
           <p:cNvSpPr/>
           <p:nvPr/>
         </p:nvSpPr>
         <p:spPr>
           <a:xfrm>
-            <a:off x="566928" y="2896489"/>
+            <a:off x="566928" y="7839837"/>
             <a:ext cx="6428232" cy="431102"/>
           </a:xfrm>
           <a:prstGeom prst="roundRect">
@@ -7055,13 +7469,13 @@
       </p:sp>
       <p:sp>
         <p:nvSpPr>
-          <p:cNvPr id="10" name="Text 8"/>
-          <p:cNvSpPr txBox="1"/>
-          <p:nvPr/>
-        </p:nvSpPr>
-        <p:spPr>
-          <a:xfrm>
-            <a:off x="658368" y="2987929"/>
+          <p:cNvPr id="15" name="Text 12"/>
+          <p:cNvSpPr txBox="1"/>
+          <p:nvPr/>
+        </p:nvSpPr>
+        <p:spPr>
+          <a:xfrm>
+            <a:off x="658368" y="7931277"/>
             <a:ext cx="237744" cy="237744"/>
           </a:xfrm>
           <a:prstGeom prst="rect">
@@ -7094,13 +7508,13 @@
       </p:sp>
       <p:sp>
         <p:nvSpPr>
-          <p:cNvPr id="11" name="Text 9"/>
-          <p:cNvSpPr txBox="1"/>
-          <p:nvPr/>
-        </p:nvSpPr>
-        <p:spPr>
-          <a:xfrm>
-            <a:off x="950976" y="3006217"/>
+          <p:cNvPr id="16" name="Text 13"/>
+          <p:cNvSpPr txBox="1"/>
+          <p:nvPr/>
+        </p:nvSpPr>
+        <p:spPr>
+          <a:xfrm>
+            <a:off x="950976" y="7949565"/>
             <a:ext cx="5925312" cy="248221"/>
           </a:xfrm>
           <a:prstGeom prst="rect">
@@ -7170,13 +7584,13 @@
       </p:sp>
       <p:sp>
         <p:nvSpPr>
-          <p:cNvPr id="12" name="Shape 10"/>
+          <p:cNvPr id="17" name="Shape 14"/>
           <p:cNvSpPr/>
           <p:nvPr/>
         </p:nvSpPr>
         <p:spPr>
           <a:xfrm>
-            <a:off x="566928" y="3400743"/>
+            <a:off x="566928" y="8344091"/>
             <a:ext cx="6428232" cy="624459"/>
           </a:xfrm>
           <a:prstGeom prst="roundRect">
@@ -7197,13 +7611,13 @@
       </p:sp>
       <p:sp>
         <p:nvSpPr>
-          <p:cNvPr id="13" name="Text 11"/>
-          <p:cNvSpPr txBox="1"/>
-          <p:nvPr/>
-        </p:nvSpPr>
-        <p:spPr>
-          <a:xfrm>
-            <a:off x="658368" y="3492183"/>
+          <p:cNvPr id="18" name="Text 15"/>
+          <p:cNvSpPr txBox="1"/>
+          <p:nvPr/>
+        </p:nvSpPr>
+        <p:spPr>
+          <a:xfrm>
+            <a:off x="658368" y="8435531"/>
             <a:ext cx="237744" cy="237744"/>
           </a:xfrm>
           <a:prstGeom prst="rect">
@@ -7236,13 +7650,13 @@
       </p:sp>
       <p:sp>
         <p:nvSpPr>
-          <p:cNvPr id="14" name="Text 12"/>
-          <p:cNvSpPr txBox="1"/>
-          <p:nvPr/>
-        </p:nvSpPr>
-        <p:spPr>
-          <a:xfrm>
-            <a:off x="950976" y="3510471"/>
+          <p:cNvPr id="19" name="Text 16"/>
+          <p:cNvSpPr txBox="1"/>
+          <p:nvPr/>
+        </p:nvSpPr>
+        <p:spPr>
+          <a:xfrm>
+            <a:off x="950976" y="8453819"/>
             <a:ext cx="5925312" cy="441579"/>
           </a:xfrm>
           <a:prstGeom prst="rect">
@@ -7278,13 +7692,13 @@
       </p:sp>
       <p:sp>
         <p:nvSpPr>
-          <p:cNvPr id="15" name="Shape 13"/>
+          <p:cNvPr id="20" name="Shape 17"/>
           <p:cNvSpPr/>
           <p:nvPr/>
         </p:nvSpPr>
         <p:spPr>
           <a:xfrm>
-            <a:off x="566928" y="4098354"/>
+            <a:off x="566928" y="9041702"/>
             <a:ext cx="6428232" cy="431102"/>
           </a:xfrm>
           <a:prstGeom prst="roundRect">
@@ -7305,13 +7719,13 @@
       </p:sp>
       <p:sp>
         <p:nvSpPr>
-          <p:cNvPr id="16" name="Text 14"/>
-          <p:cNvSpPr txBox="1"/>
-          <p:nvPr/>
-        </p:nvSpPr>
-        <p:spPr>
-          <a:xfrm>
-            <a:off x="658368" y="4189793"/>
+          <p:cNvPr id="21" name="Text 18"/>
+          <p:cNvSpPr txBox="1"/>
+          <p:nvPr/>
+        </p:nvSpPr>
+        <p:spPr>
+          <a:xfrm>
+            <a:off x="658368" y="9133142"/>
             <a:ext cx="237744" cy="237744"/>
           </a:xfrm>
           <a:prstGeom prst="rect">
@@ -7344,13 +7758,13 @@
       </p:sp>
       <p:sp>
         <p:nvSpPr>
-          <p:cNvPr id="17" name="Text 15"/>
-          <p:cNvSpPr txBox="1"/>
-          <p:nvPr/>
-        </p:nvSpPr>
-        <p:spPr>
-          <a:xfrm>
-            <a:off x="950976" y="4208082"/>
+          <p:cNvPr id="22" name="Text 19"/>
+          <p:cNvSpPr txBox="1"/>
+          <p:nvPr/>
+        </p:nvSpPr>
+        <p:spPr>
+          <a:xfrm>
+            <a:off x="950976" y="9151430"/>
             <a:ext cx="5925312" cy="248221"/>
           </a:xfrm>
           <a:prstGeom prst="rect">
@@ -7381,211 +7795,6 @@
               <a:t>当てはめて計算します。</a:t>
             </a:r>
             <a:endParaRPr lang="en-US" sz="1050" dirty="0"/>
-          </a:p>
-        </p:txBody>
-      </p:sp>
-      <p:sp>
-        <p:nvSpPr>
-          <p:cNvPr id="18" name="Shape 16"/>
-          <p:cNvSpPr/>
-          <p:nvPr/>
-        </p:nvSpPr>
-        <p:spPr>
-          <a:xfrm>
-            <a:off x="566928" y="4602607"/>
-            <a:ext cx="6428232" cy="431102"/>
-          </a:xfrm>
-          <a:prstGeom prst="roundRect">
-            <a:avLst>
-              <a:gd name="adj" fmla="val 12726"/>
-            </a:avLst>
-          </a:prstGeom>
-          <a:solidFill>
-            <a:srgbClr val="FDF0E6"/>
-          </a:solidFill>
-          <a:ln w="9525">
-            <a:solidFill>
-              <a:srgbClr val="E08A3C"/>
-            </a:solidFill>
-            <a:prstDash val="solid"/>
-          </a:ln>
-        </p:spPr>
-      </p:sp>
-      <p:sp>
-        <p:nvSpPr>
-          <p:cNvPr id="19" name="Text 17"/>
-          <p:cNvSpPr txBox="1"/>
-          <p:nvPr/>
-        </p:nvSpPr>
-        <p:spPr>
-          <a:xfrm>
-            <a:off x="658368" y="4694047"/>
-            <a:ext cx="237744" cy="237744"/>
-          </a:xfrm>
-          <a:prstGeom prst="rect">
-            <a:avLst/>
-          </a:prstGeom>
-          <a:noFill/>
-          <a:ln/>
-        </p:spPr>
-        <p:txBody>
-          <a:bodyPr wrap="square" lIns="0" tIns="0" rIns="0" bIns="0" rtlCol="0" anchor="ctr"/>
-          <a:lstStyle/>
-          <a:p>
-            <a:pPr algn="ctr" indent="0" marL="0">
-              <a:buNone/>
-            </a:pPr>
-            <a:r>
-              <a:rPr lang="en-US" sz="1200" b="1" dirty="0">
-                <a:solidFill>
-                  <a:srgbClr val="C25A17"/>
-                </a:solidFill>
-                <a:latin typeface="Calibri" pitchFamily="34" charset="0"/>
-                <a:ea typeface="Calibri" pitchFamily="34" charset="-122"/>
-                <a:cs typeface="Calibri" pitchFamily="34" charset="-120"/>
-              </a:rPr>
-              <a:t>！</a:t>
-            </a:r>
-            <a:endParaRPr lang="en-US" sz="1200" dirty="0"/>
-          </a:p>
-        </p:txBody>
-      </p:sp>
-      <p:sp>
-        <p:nvSpPr>
-          <p:cNvPr id="20" name="Text 18"/>
-          <p:cNvSpPr txBox="1"/>
-          <p:nvPr/>
-        </p:nvSpPr>
-        <p:spPr>
-          <a:xfrm>
-            <a:off x="950976" y="4712335"/>
-            <a:ext cx="5925312" cy="248221"/>
-          </a:xfrm>
-          <a:prstGeom prst="rect">
-            <a:avLst/>
-          </a:prstGeom>
-          <a:noFill/>
-          <a:ln/>
-        </p:spPr>
-        <p:txBody>
-          <a:bodyPr wrap="square" lIns="0" tIns="0" rIns="0" bIns="0" rtlCol="0" anchor="t"/>
-          <a:lstStyle/>
-          <a:p>
-            <a:pPr indent="0" marL="0">
-              <a:lnSpc>
-                <a:spcPct val="120000"/>
-              </a:lnSpc>
-              <a:buNone/>
-            </a:pPr>
-            <a:r>
-              <a:rPr lang="en-US" sz="1050" dirty="0">
-                <a:solidFill>
-                  <a:srgbClr val="222222"/>
-                </a:solidFill>
-                <a:latin typeface="Calibri" pitchFamily="34" charset="0"/>
-                <a:ea typeface="Calibri" pitchFamily="34" charset="-122"/>
-                <a:cs typeface="Calibri" pitchFamily="34" charset="-120"/>
-              </a:rPr>
-              <a:t>人数の設問は</a:t>
-            </a:r>
-            <a:pPr indent="0" marL="0">
-              <a:lnSpc>
-                <a:spcPct val="120000"/>
-              </a:lnSpc>
-              <a:buNone/>
-            </a:pPr>
-            <a:r>
-              <a:rPr lang="en-US" sz="1050" b="1" dirty="0">
-                <a:solidFill>
-                  <a:srgbClr val="222222"/>
-                </a:solidFill>
-                <a:latin typeface="Calibri" pitchFamily="34" charset="0"/>
-                <a:ea typeface="Calibri" pitchFamily="34" charset="-122"/>
-                <a:cs typeface="Calibri" pitchFamily="34" charset="-120"/>
-              </a:rPr>
-              <a:t>共通設問テンプレート</a:t>
-            </a:r>
-            <a:pPr indent="0" marL="0">
-              <a:lnSpc>
-                <a:spcPct val="120000"/>
-              </a:lnSpc>
-              <a:buNone/>
-            </a:pPr>
-            <a:r>
-              <a:rPr lang="en-US" sz="1050" dirty="0">
-                <a:solidFill>
-                  <a:srgbClr val="222222"/>
-                </a:solidFill>
-                <a:latin typeface="Calibri" pitchFamily="34" charset="0"/>
-                <a:ea typeface="Calibri" pitchFamily="34" charset="-122"/>
-                <a:cs typeface="Calibri" pitchFamily="34" charset="-120"/>
-              </a:rPr>
-              <a:t>に入れて全社に取り込むと、聞き方と集計が揃います。</a:t>
-            </a:r>
-            <a:endParaRPr lang="en-US" sz="1050" dirty="0"/>
-          </a:p>
-        </p:txBody>
-      </p:sp>
-      <p:pic>
-        <p:nvPicPr>
-          <p:cNvPr id="21" name="Image 0" descr="C:\Users\sato\Desktop\enque\docs\images\o-party.png">    </p:cNvPr>
-          <p:cNvPicPr>
-            <a:picLocks noChangeAspect="1"/>
-          </p:cNvPicPr>
-          <p:nvPr/>
-        </p:nvPicPr>
-        <p:blipFill>
-          <a:blip r:embed="rId1"/>
-          <a:stretch>
-            <a:fillRect/>
-          </a:stretch>
-        </p:blipFill>
-        <p:spPr>
-          <a:xfrm>
-            <a:off x="994667" y="5106861"/>
-            <a:ext cx="5572753" cy="3474720"/>
-          </a:xfrm>
-          <a:prstGeom prst="rect">
-            <a:avLst/>
-          </a:prstGeom>
-        </p:spPr>
-      </p:pic>
-      <p:sp>
-        <p:nvSpPr>
-          <p:cNvPr id="22" name="Text 19"/>
-          <p:cNvSpPr txBox="1"/>
-          <p:nvPr/>
-        </p:nvSpPr>
-        <p:spPr>
-          <a:xfrm>
-            <a:off x="566928" y="8636445"/>
-            <a:ext cx="6428232" cy="274320"/>
-          </a:xfrm>
-          <a:prstGeom prst="rect">
-            <a:avLst/>
-          </a:prstGeom>
-          <a:noFill/>
-          <a:ln/>
-        </p:spPr>
-        <p:txBody>
-          <a:bodyPr wrap="square" lIns="0" tIns="0" rIns="0" bIns="0" rtlCol="0" anchor="ctr"/>
-          <a:lstStyle/>
-          <a:p>
-            <a:pPr algn="ctr" indent="0" marL="0">
-              <a:buNone/>
-            </a:pPr>
-            <a:r>
-              <a:rPr lang="en-US" sz="950" dirty="0">
-                <a:solidFill>
-                  <a:srgbClr val="6B6B6B"/>
-                </a:solidFill>
-                <a:latin typeface="Calibri" pitchFamily="34" charset="0"/>
-                <a:ea typeface="Calibri" pitchFamily="34" charset="-122"/>
-                <a:cs typeface="Calibri" pitchFamily="34" charset="-120"/>
-              </a:rPr>
-              <a:t>「回答者の傾向」画面の来場人数のところ（のべ来場者・実来場者・回答率と人数の分布）。</a:t>
-            </a:r>
-            <a:endParaRPr lang="en-US" sz="950" dirty="0"/>
           </a:p>
         </p:txBody>
       </p:sp>
@@ -7732,7 +7941,7 @@
                 <a:ea typeface="Calibri" pitchFamily="34" charset="-122"/>
                 <a:cs typeface="Calibri" pitchFamily="34" charset="-120"/>
               </a:rPr>
-              <a:t>終了後1：受付を締めて総合アンケートを用意する</a:t>
+              <a:t>当日：来場人数を集計する（つづき）</a:t>
             </a:r>
             <a:endParaRPr lang="en-US" sz="2200" dirty="0"/>
           </a:p>
@@ -7746,525 +7955,12 @@
         </p:nvSpPr>
         <p:spPr>
           <a:xfrm>
-            <a:off x="566928" y="1499616"/>
-            <a:ext cx="274320" cy="274320"/>
-          </a:xfrm>
-          <a:prstGeom prst="ellipse">
-            <a:avLst/>
-          </a:prstGeom>
-          <a:solidFill>
-            <a:srgbClr val="1E2761"/>
-          </a:solidFill>
-          <a:ln/>
-        </p:spPr>
-      </p:sp>
-      <p:sp>
-        <p:nvSpPr>
-          <p:cNvPr id="5" name="Text 3"/>
-          <p:cNvSpPr txBox="1"/>
-          <p:nvPr/>
-        </p:nvSpPr>
-        <p:spPr>
-          <a:xfrm>
-            <a:off x="566928" y="1499616"/>
-            <a:ext cx="274320" cy="274320"/>
-          </a:xfrm>
-          <a:prstGeom prst="rect">
-            <a:avLst/>
-          </a:prstGeom>
-          <a:noFill/>
-          <a:ln/>
-        </p:spPr>
-        <p:txBody>
-          <a:bodyPr wrap="square" lIns="0" tIns="0" rIns="0" bIns="0" rtlCol="0" anchor="ctr"/>
-          <a:lstStyle/>
-          <a:p>
-            <a:pPr algn="ctr" indent="0" marL="0">
-              <a:buNone/>
-            </a:pPr>
-            <a:r>
-              <a:rPr lang="en-US" sz="1100" b="1" dirty="0">
-                <a:solidFill>
-                  <a:srgbClr val="FFFFFF"/>
-                </a:solidFill>
-                <a:latin typeface="Calibri" pitchFamily="34" charset="0"/>
-                <a:ea typeface="Calibri" pitchFamily="34" charset="-122"/>
-                <a:cs typeface="Calibri" pitchFamily="34" charset="-120"/>
-              </a:rPr>
-              <a:t>1</a:t>
-            </a:r>
-            <a:endParaRPr lang="en-US" sz="1100" dirty="0"/>
-          </a:p>
-        </p:txBody>
-      </p:sp>
-      <p:sp>
-        <p:nvSpPr>
-          <p:cNvPr id="6" name="Text 4"/>
-          <p:cNvSpPr txBox="1"/>
-          <p:nvPr/>
-        </p:nvSpPr>
-        <p:spPr>
-          <a:xfrm>
-            <a:off x="969264" y="1481328"/>
-            <a:ext cx="6025896" cy="365760"/>
-          </a:xfrm>
-          <a:prstGeom prst="rect">
-            <a:avLst/>
-          </a:prstGeom>
-          <a:noFill/>
-          <a:ln/>
-        </p:spPr>
-        <p:txBody>
-          <a:bodyPr wrap="square" lIns="0" tIns="0" rIns="0" bIns="0" rtlCol="0" anchor="t"/>
-          <a:lstStyle/>
-          <a:p>
-            <a:pPr indent="0" marL="0">
-              <a:lnSpc>
-                <a:spcPct val="125000"/>
-              </a:lnSpc>
-              <a:buNone/>
-            </a:pPr>
-            <a:r>
-              <a:rPr lang="en-US" sz="1150" dirty="0">
-                <a:solidFill>
-                  <a:srgbClr val="222222"/>
-                </a:solidFill>
-                <a:latin typeface="Calibri" pitchFamily="34" charset="0"/>
-                <a:ea typeface="Calibri" pitchFamily="34" charset="-122"/>
-                <a:cs typeface="Calibri" pitchFamily="34" charset="-120"/>
-              </a:rPr>
-              <a:t>ダッシュボードの「イベント設定」で、状態を</a:t>
-            </a:r>
-            <a:pPr indent="0" marL="0">
-              <a:lnSpc>
-                <a:spcPct val="125000"/>
-              </a:lnSpc>
-              <a:buNone/>
-            </a:pPr>
-            <a:r>
-              <a:rPr lang="en-US" sz="1150" b="1" dirty="0">
-                <a:solidFill>
-                  <a:srgbClr val="222222"/>
-                </a:solidFill>
-                <a:latin typeface="Calibri" pitchFamily="34" charset="0"/>
-                <a:ea typeface="Calibri" pitchFamily="34" charset="-122"/>
-                <a:cs typeface="Calibri" pitchFamily="34" charset="-120"/>
-              </a:rPr>
-              <a:t>「終了（総合アンケート送付）」</a:t>
-            </a:r>
-            <a:pPr indent="0" marL="0">
-              <a:lnSpc>
-                <a:spcPct val="125000"/>
-              </a:lnSpc>
-              <a:buNone/>
-            </a:pPr>
-            <a:r>
-              <a:rPr lang="en-US" sz="1150" dirty="0">
-                <a:solidFill>
-                  <a:srgbClr val="222222"/>
-                </a:solidFill>
-                <a:latin typeface="Calibri" pitchFamily="34" charset="0"/>
-                <a:ea typeface="Calibri" pitchFamily="34" charset="-122"/>
-                <a:cs typeface="Calibri" pitchFamily="34" charset="-120"/>
-              </a:rPr>
-              <a:t>に変える</a:t>
-            </a:r>
-            <a:endParaRPr lang="en-US" sz="1150" dirty="0"/>
-          </a:p>
-        </p:txBody>
-      </p:sp>
-      <p:sp>
-        <p:nvSpPr>
-          <p:cNvPr id="7" name="Shape 5"/>
-          <p:cNvSpPr/>
-          <p:nvPr/>
-        </p:nvSpPr>
-        <p:spPr>
-          <a:xfrm>
-            <a:off x="566928" y="1956816"/>
-            <a:ext cx="274320" cy="274320"/>
-          </a:xfrm>
-          <a:prstGeom prst="ellipse">
-            <a:avLst/>
-          </a:prstGeom>
-          <a:solidFill>
-            <a:srgbClr val="1E2761"/>
-          </a:solidFill>
-          <a:ln/>
-        </p:spPr>
-      </p:sp>
-      <p:sp>
-        <p:nvSpPr>
-          <p:cNvPr id="8" name="Text 6"/>
-          <p:cNvSpPr txBox="1"/>
-          <p:nvPr/>
-        </p:nvSpPr>
-        <p:spPr>
-          <a:xfrm>
-            <a:off x="566928" y="1956816"/>
-            <a:ext cx="274320" cy="274320"/>
-          </a:xfrm>
-          <a:prstGeom prst="rect">
-            <a:avLst/>
-          </a:prstGeom>
-          <a:noFill/>
-          <a:ln/>
-        </p:spPr>
-        <p:txBody>
-          <a:bodyPr wrap="square" lIns="0" tIns="0" rIns="0" bIns="0" rtlCol="0" anchor="ctr"/>
-          <a:lstStyle/>
-          <a:p>
-            <a:pPr algn="ctr" indent="0" marL="0">
-              <a:buNone/>
-            </a:pPr>
-            <a:r>
-              <a:rPr lang="en-US" sz="1100" b="1" dirty="0">
-                <a:solidFill>
-                  <a:srgbClr val="FFFFFF"/>
-                </a:solidFill>
-                <a:latin typeface="Calibri" pitchFamily="34" charset="0"/>
-                <a:ea typeface="Calibri" pitchFamily="34" charset="-122"/>
-                <a:cs typeface="Calibri" pitchFamily="34" charset="-120"/>
-              </a:rPr>
-              <a:t>2</a:t>
-            </a:r>
-            <a:endParaRPr lang="en-US" sz="1100" dirty="0"/>
-          </a:p>
-        </p:txBody>
-      </p:sp>
-      <p:sp>
-        <p:nvSpPr>
-          <p:cNvPr id="9" name="Text 7"/>
-          <p:cNvSpPr txBox="1"/>
-          <p:nvPr/>
-        </p:nvSpPr>
-        <p:spPr>
-          <a:xfrm>
-            <a:off x="969264" y="1938528"/>
-            <a:ext cx="6025896" cy="365760"/>
-          </a:xfrm>
-          <a:prstGeom prst="rect">
-            <a:avLst/>
-          </a:prstGeom>
-          <a:noFill/>
-          <a:ln/>
-        </p:spPr>
-        <p:txBody>
-          <a:bodyPr wrap="square" lIns="0" tIns="0" rIns="0" bIns="0" rtlCol="0" anchor="t"/>
-          <a:lstStyle/>
-          <a:p>
-            <a:pPr indent="0" marL="0">
-              <a:lnSpc>
-                <a:spcPct val="125000"/>
-              </a:lnSpc>
-              <a:buNone/>
-            </a:pPr>
-            <a:r>
-              <a:rPr lang="en-US" sz="1150" dirty="0">
-                <a:solidFill>
-                  <a:srgbClr val="222222"/>
-                </a:solidFill>
-                <a:latin typeface="Calibri" pitchFamily="34" charset="0"/>
-                <a:ea typeface="Calibri" pitchFamily="34" charset="-122"/>
-                <a:cs typeface="Calibri" pitchFamily="34" charset="-120"/>
-              </a:rPr>
-              <a:t>「総合アンケート」の画面で</a:t>
-            </a:r>
-            <a:pPr indent="0" marL="0">
-              <a:lnSpc>
-                <a:spcPct val="125000"/>
-              </a:lnSpc>
-              <a:buNone/>
-            </a:pPr>
-            <a:r>
-              <a:rPr lang="en-US" sz="1150" b="1" dirty="0">
-                <a:solidFill>
-                  <a:srgbClr val="222222"/>
-                </a:solidFill>
-                <a:latin typeface="Calibri" pitchFamily="34" charset="0"/>
-                <a:ea typeface="Calibri" pitchFamily="34" charset="-122"/>
-                <a:cs typeface="Calibri" pitchFamily="34" charset="-120"/>
-              </a:rPr>
-              <a:t>「総合アンケートを作成する」</a:t>
-            </a:r>
-            <a:pPr indent="0" marL="0">
-              <a:lnSpc>
-                <a:spcPct val="125000"/>
-              </a:lnSpc>
-              <a:buNone/>
-            </a:pPr>
-            <a:r>
-              <a:rPr lang="en-US" sz="1150" dirty="0">
-                <a:solidFill>
-                  <a:srgbClr val="222222"/>
-                </a:solidFill>
-                <a:latin typeface="Calibri" pitchFamily="34" charset="0"/>
-                <a:ea typeface="Calibri" pitchFamily="34" charset="-122"/>
-                <a:cs typeface="Calibri" pitchFamily="34" charset="-120"/>
-              </a:rPr>
-              <a:t>を押す</a:t>
-            </a:r>
-            <a:endParaRPr lang="en-US" sz="1150" dirty="0"/>
-          </a:p>
-        </p:txBody>
-      </p:sp>
-      <p:sp>
-        <p:nvSpPr>
-          <p:cNvPr id="10" name="Shape 8"/>
-          <p:cNvSpPr/>
-          <p:nvPr/>
-        </p:nvSpPr>
-        <p:spPr>
-          <a:xfrm>
-            <a:off x="566928" y="2414016"/>
-            <a:ext cx="274320" cy="274320"/>
-          </a:xfrm>
-          <a:prstGeom prst="ellipse">
-            <a:avLst/>
-          </a:prstGeom>
-          <a:solidFill>
-            <a:srgbClr val="1E2761"/>
-          </a:solidFill>
-          <a:ln/>
-        </p:spPr>
-      </p:sp>
-      <p:sp>
-        <p:nvSpPr>
-          <p:cNvPr id="11" name="Text 9"/>
-          <p:cNvSpPr txBox="1"/>
-          <p:nvPr/>
-        </p:nvSpPr>
-        <p:spPr>
-          <a:xfrm>
-            <a:off x="566928" y="2414016"/>
-            <a:ext cx="274320" cy="274320"/>
-          </a:xfrm>
-          <a:prstGeom prst="rect">
-            <a:avLst/>
-          </a:prstGeom>
-          <a:noFill/>
-          <a:ln/>
-        </p:spPr>
-        <p:txBody>
-          <a:bodyPr wrap="square" lIns="0" tIns="0" rIns="0" bIns="0" rtlCol="0" anchor="ctr"/>
-          <a:lstStyle/>
-          <a:p>
-            <a:pPr algn="ctr" indent="0" marL="0">
-              <a:buNone/>
-            </a:pPr>
-            <a:r>
-              <a:rPr lang="en-US" sz="1100" b="1" dirty="0">
-                <a:solidFill>
-                  <a:srgbClr val="FFFFFF"/>
-                </a:solidFill>
-                <a:latin typeface="Calibri" pitchFamily="34" charset="0"/>
-                <a:ea typeface="Calibri" pitchFamily="34" charset="-122"/>
-                <a:cs typeface="Calibri" pitchFamily="34" charset="-120"/>
-              </a:rPr>
-              <a:t>3</a:t>
-            </a:r>
-            <a:endParaRPr lang="en-US" sz="1100" dirty="0"/>
-          </a:p>
-        </p:txBody>
-      </p:sp>
-      <p:sp>
-        <p:nvSpPr>
-          <p:cNvPr id="12" name="Text 10"/>
-          <p:cNvSpPr txBox="1"/>
-          <p:nvPr/>
-        </p:nvSpPr>
-        <p:spPr>
-          <a:xfrm>
-            <a:off x="969264" y="2395728"/>
-            <a:ext cx="6025896" cy="365760"/>
-          </a:xfrm>
-          <a:prstGeom prst="rect">
-            <a:avLst/>
-          </a:prstGeom>
-          <a:noFill/>
-          <a:ln/>
-        </p:spPr>
-        <p:txBody>
-          <a:bodyPr wrap="square" lIns="0" tIns="0" rIns="0" bIns="0" rtlCol="0" anchor="t"/>
-          <a:lstStyle/>
-          <a:p>
-            <a:pPr indent="0" marL="0">
-              <a:lnSpc>
-                <a:spcPct val="125000"/>
-              </a:lnSpc>
-              <a:buNone/>
-            </a:pPr>
-            <a:r>
-              <a:rPr lang="en-US" sz="1150" dirty="0">
-                <a:solidFill>
-                  <a:srgbClr val="222222"/>
-                </a:solidFill>
-                <a:latin typeface="Calibri" pitchFamily="34" charset="0"/>
-                <a:ea typeface="Calibri" pitchFamily="34" charset="-122"/>
-                <a:cs typeface="Calibri" pitchFamily="34" charset="-120"/>
-              </a:rPr>
-              <a:t>設問を登録し、</a:t>
-            </a:r>
-            <a:pPr indent="0" marL="0">
-              <a:lnSpc>
-                <a:spcPct val="125000"/>
-              </a:lnSpc>
-              <a:buNone/>
-            </a:pPr>
-            <a:r>
-              <a:rPr lang="en-US" sz="1150" b="1" dirty="0">
-                <a:solidFill>
-                  <a:srgbClr val="222222"/>
-                </a:solidFill>
-                <a:latin typeface="Calibri" pitchFamily="34" charset="0"/>
-                <a:ea typeface="Calibri" pitchFamily="34" charset="-122"/>
-                <a:cs typeface="Calibri" pitchFamily="34" charset="-120"/>
-              </a:rPr>
-              <a:t>「公開する」にチェックを入れて保存</a:t>
-            </a:r>
-            <a:pPr indent="0" marL="0">
-              <a:lnSpc>
-                <a:spcPct val="125000"/>
-              </a:lnSpc>
-              <a:buNone/>
-            </a:pPr>
-            <a:r>
-              <a:rPr lang="en-US" sz="1150" dirty="0">
-                <a:solidFill>
-                  <a:srgbClr val="222222"/>
-                </a:solidFill>
-                <a:latin typeface="Calibri" pitchFamily="34" charset="0"/>
-                <a:ea typeface="Calibri" pitchFamily="34" charset="-122"/>
-                <a:cs typeface="Calibri" pitchFamily="34" charset="-120"/>
-              </a:rPr>
-              <a:t>する</a:t>
-            </a:r>
-            <a:endParaRPr lang="en-US" sz="1150" dirty="0"/>
-          </a:p>
-        </p:txBody>
-      </p:sp>
-      <p:sp>
-        <p:nvSpPr>
-          <p:cNvPr id="13" name="Shape 11"/>
-          <p:cNvSpPr/>
-          <p:nvPr/>
-        </p:nvSpPr>
-        <p:spPr>
-          <a:xfrm>
-            <a:off x="566928" y="2852928"/>
-            <a:ext cx="6428232" cy="624459"/>
+            <a:off x="566928" y="1481328"/>
+            <a:ext cx="6428232" cy="431102"/>
           </a:xfrm>
           <a:prstGeom prst="roundRect">
             <a:avLst>
-              <a:gd name="adj" fmla="val 8786"/>
-            </a:avLst>
-          </a:prstGeom>
-          <a:solidFill>
-            <a:srgbClr val="E8ECF8"/>
-          </a:solidFill>
-          <a:ln w="9525">
-            <a:solidFill>
-              <a:srgbClr val="1E2761"/>
-            </a:solidFill>
-            <a:prstDash val="solid"/>
-          </a:ln>
-        </p:spPr>
-      </p:sp>
-      <p:sp>
-        <p:nvSpPr>
-          <p:cNvPr id="14" name="Text 12"/>
-          <p:cNvSpPr txBox="1"/>
-          <p:nvPr/>
-        </p:nvSpPr>
-        <p:spPr>
-          <a:xfrm>
-            <a:off x="658368" y="2944368"/>
-            <a:ext cx="237744" cy="237744"/>
-          </a:xfrm>
-          <a:prstGeom prst="rect">
-            <a:avLst/>
-          </a:prstGeom>
-          <a:noFill/>
-          <a:ln/>
-        </p:spPr>
-        <p:txBody>
-          <a:bodyPr wrap="square" lIns="0" tIns="0" rIns="0" bIns="0" rtlCol="0" anchor="ctr"/>
-          <a:lstStyle/>
-          <a:p>
-            <a:pPr algn="ctr" indent="0" marL="0">
-              <a:buNone/>
-            </a:pPr>
-            <a:r>
-              <a:rPr lang="en-US" sz="1200" b="1" dirty="0">
-                <a:solidFill>
-                  <a:srgbClr val="1E2761"/>
-                </a:solidFill>
-                <a:latin typeface="Calibri" pitchFamily="34" charset="0"/>
-                <a:ea typeface="Calibri" pitchFamily="34" charset="-122"/>
-                <a:cs typeface="Calibri" pitchFamily="34" charset="-120"/>
-              </a:rPr>
-              <a:t>i</a:t>
-            </a:r>
-            <a:endParaRPr lang="en-US" sz="1200" dirty="0"/>
-          </a:p>
-        </p:txBody>
-      </p:sp>
-      <p:sp>
-        <p:nvSpPr>
-          <p:cNvPr id="15" name="Text 13"/>
-          <p:cNvSpPr txBox="1"/>
-          <p:nvPr/>
-        </p:nvSpPr>
-        <p:spPr>
-          <a:xfrm>
-            <a:off x="950976" y="2962656"/>
-            <a:ext cx="5925312" cy="441579"/>
-          </a:xfrm>
-          <a:prstGeom prst="rect">
-            <a:avLst/>
-          </a:prstGeom>
-          <a:noFill/>
-          <a:ln/>
-        </p:spPr>
-        <p:txBody>
-          <a:bodyPr wrap="square" lIns="0" tIns="0" rIns="0" bIns="0" rtlCol="0" anchor="t"/>
-          <a:lstStyle/>
-          <a:p>
-            <a:pPr indent="0" marL="0">
-              <a:lnSpc>
-                <a:spcPct val="120000"/>
-              </a:lnSpc>
-              <a:buNone/>
-            </a:pPr>
-            <a:r>
-              <a:rPr lang="en-US" sz="1050" dirty="0">
-                <a:solidFill>
-                  <a:srgbClr val="222222"/>
-                </a:solidFill>
-                <a:latin typeface="Calibri" pitchFamily="34" charset="0"/>
-                <a:ea typeface="Calibri" pitchFamily="34" charset="-122"/>
-                <a:cs typeface="Calibri" pitchFamily="34" charset="-120"/>
-              </a:rPr>
-              <a:t>総合アンケートに回答した方が、スマホ壁紙をダウンロードできます。設問は3問程度（満足度・来場のきっかけ・意見）がおすすめです。</a:t>
-            </a:r>
-            <a:endParaRPr lang="en-US" sz="1050" dirty="0"/>
-          </a:p>
-        </p:txBody>
-      </p:sp>
-      <p:sp>
-        <p:nvSpPr>
-          <p:cNvPr id="16" name="Shape 14"/>
-          <p:cNvSpPr/>
-          <p:nvPr/>
-        </p:nvSpPr>
-        <p:spPr>
-          <a:xfrm>
-            <a:off x="566928" y="3550539"/>
-            <a:ext cx="6428232" cy="624459"/>
-          </a:xfrm>
-          <a:prstGeom prst="roundRect">
-            <a:avLst>
-              <a:gd name="adj" fmla="val 8786"/>
+              <a:gd name="adj" fmla="val 12726"/>
             </a:avLst>
           </a:prstGeom>
           <a:solidFill>
@@ -8280,13 +7976,13 @@
       </p:sp>
       <p:sp>
         <p:nvSpPr>
-          <p:cNvPr id="17" name="Text 15"/>
-          <p:cNvSpPr txBox="1"/>
-          <p:nvPr/>
-        </p:nvSpPr>
-        <p:spPr>
-          <a:xfrm>
-            <a:off x="658368" y="3641979"/>
+          <p:cNvPr id="5" name="Text 3"/>
+          <p:cNvSpPr txBox="1"/>
+          <p:nvPr/>
+        </p:nvSpPr>
+        <p:spPr>
+          <a:xfrm>
+            <a:off x="658368" y="1572768"/>
             <a:ext cx="237744" cy="237744"/>
           </a:xfrm>
           <a:prstGeom prst="rect">
@@ -8319,14 +8015,14 @@
       </p:sp>
       <p:sp>
         <p:nvSpPr>
-          <p:cNvPr id="18" name="Text 16"/>
-          <p:cNvSpPr txBox="1"/>
-          <p:nvPr/>
-        </p:nvSpPr>
-        <p:spPr>
-          <a:xfrm>
-            <a:off x="950976" y="3660267"/>
-            <a:ext cx="5925312" cy="441579"/>
+          <p:cNvPr id="6" name="Text 4"/>
+          <p:cNvSpPr txBox="1"/>
+          <p:nvPr/>
+        </p:nvSpPr>
+        <p:spPr>
+          <a:xfrm>
+            <a:off x="950976" y="1591056"/>
+            <a:ext cx="5925312" cy="248221"/>
           </a:xfrm>
           <a:prstGeom prst="rect">
             <a:avLst/>
@@ -8353,7 +8049,41 @@
                 <a:ea typeface="Calibri" pitchFamily="34" charset="-122"/>
                 <a:cs typeface="Calibri" pitchFamily="34" charset="-120"/>
               </a:rPr>
-              <a:t>状態を「終了」にすると、ブースのアンケートは回答できなくなります。当日の受付時間が終わってから切り替えてください。</a:t>
+              <a:t>人数の設問は</a:t>
+            </a:r>
+            <a:pPr indent="0" marL="0">
+              <a:lnSpc>
+                <a:spcPct val="120000"/>
+              </a:lnSpc>
+              <a:buNone/>
+            </a:pPr>
+            <a:r>
+              <a:rPr lang="en-US" sz="1050" b="1" dirty="0">
+                <a:solidFill>
+                  <a:srgbClr val="222222"/>
+                </a:solidFill>
+                <a:latin typeface="Calibri" pitchFamily="34" charset="0"/>
+                <a:ea typeface="Calibri" pitchFamily="34" charset="-122"/>
+                <a:cs typeface="Calibri" pitchFamily="34" charset="-120"/>
+              </a:rPr>
+              <a:t>共通設問テンプレート</a:t>
+            </a:r>
+            <a:pPr indent="0" marL="0">
+              <a:lnSpc>
+                <a:spcPct val="120000"/>
+              </a:lnSpc>
+              <a:buNone/>
+            </a:pPr>
+            <a:r>
+              <a:rPr lang="en-US" sz="1050" dirty="0">
+                <a:solidFill>
+                  <a:srgbClr val="222222"/>
+                </a:solidFill>
+                <a:latin typeface="Calibri" pitchFamily="34" charset="0"/>
+                <a:ea typeface="Calibri" pitchFamily="34" charset="-122"/>
+                <a:cs typeface="Calibri" pitchFamily="34" charset="-120"/>
+              </a:rPr>
+              <a:t>に入れて全社に取り込むと、聞き方と集計が揃います。</a:t>
             </a:r>
             <a:endParaRPr lang="en-US" sz="1050" dirty="0"/>
           </a:p>
@@ -8361,7 +8091,7 @@
       </p:sp>
       <p:pic>
         <p:nvPicPr>
-          <p:cNvPr id="19" name="Image 0" descr="C:\Users\sato\Desktop\enque\docs\images\o-overall.png">    </p:cNvPr>
+          <p:cNvPr id="7" name="Image 0" descr="C:\Users\sato\Desktop\enque\docs\images\o-party.png">    </p:cNvPr>
           <p:cNvPicPr>
             <a:picLocks noChangeAspect="1"/>
           </p:cNvPicPr>
@@ -8375,8 +8105,8 @@
         </p:blipFill>
         <p:spPr>
           <a:xfrm>
-            <a:off x="1282796" y="4248150"/>
-            <a:ext cx="4996495" cy="3474720"/>
+            <a:off x="1082543" y="1985582"/>
+            <a:ext cx="5397003" cy="3474720"/>
           </a:xfrm>
           <a:prstGeom prst="rect">
             <a:avLst/>
@@ -8385,13 +8115,13 @@
       </p:pic>
       <p:sp>
         <p:nvSpPr>
-          <p:cNvPr id="20" name="Text 17"/>
-          <p:cNvSpPr txBox="1"/>
-          <p:nvPr/>
-        </p:nvSpPr>
-        <p:spPr>
-          <a:xfrm>
-            <a:off x="566928" y="7777734"/>
+          <p:cNvPr id="8" name="Text 5"/>
+          <p:cNvSpPr txBox="1"/>
+          <p:nvPr/>
+        </p:nvSpPr>
+        <p:spPr>
+          <a:xfrm>
+            <a:off x="566928" y="5515166"/>
             <a:ext cx="6428232" cy="274320"/>
           </a:xfrm>
           <a:prstGeom prst="rect">
@@ -8416,7 +8146,7 @@
                 <a:ea typeface="Calibri" pitchFamily="34" charset="-122"/>
                 <a:cs typeface="Calibri" pitchFamily="34" charset="-120"/>
               </a:rPr>
-              <a:t>「総合アンケートと案内メール」画面の上部。総合アンケートの状態が見えるところ。</a:t>
+              <a:t>「回答者の傾向」画面の来場人数のところ（のべ来場者・実来場者・回答率と人数の分布）。</a:t>
             </a:r>
             <a:endParaRPr lang="en-US" sz="950" dirty="0"/>
           </a:p>
@@ -8424,7 +8154,7 @@
       </p:sp>
       <p:sp>
         <p:nvSpPr>
-          <p:cNvPr id="21" name="Text 18"/>
+          <p:cNvPr id="9" name="Text 6"/>
           <p:cNvSpPr txBox="1"/>
           <p:nvPr/>
         </p:nvSpPr>
@@ -8565,7 +8295,7 @@
                 <a:ea typeface="Calibri" pitchFamily="34" charset="-122"/>
                 <a:cs typeface="Calibri" pitchFamily="34" charset="-120"/>
               </a:rPr>
-              <a:t>終了後2：案内メールを送る</a:t>
+              <a:t>終了後1：受付を締めて総合アンケートを用意する</a:t>
             </a:r>
             <a:endParaRPr lang="en-US" sz="2200" dirty="0"/>
           </a:p>
@@ -8658,6 +8388,23 @@
               <a:buNone/>
             </a:pPr>
             <a:r>
+              <a:rPr lang="en-US" sz="1150" dirty="0">
+                <a:solidFill>
+                  <a:srgbClr val="222222"/>
+                </a:solidFill>
+                <a:latin typeface="Calibri" pitchFamily="34" charset="0"/>
+                <a:ea typeface="Calibri" pitchFamily="34" charset="-122"/>
+                <a:cs typeface="Calibri" pitchFamily="34" charset="-120"/>
+              </a:rPr>
+              <a:t>ダッシュボードの「イベント設定」で、状態を</a:t>
+            </a:r>
+            <a:pPr indent="0" marL="0">
+              <a:lnSpc>
+                <a:spcPct val="125000"/>
+              </a:lnSpc>
+              <a:buNone/>
+            </a:pPr>
+            <a:r>
               <a:rPr lang="en-US" sz="1150" b="1" dirty="0">
                 <a:solidFill>
                   <a:srgbClr val="222222"/>
@@ -8666,7 +8413,7 @@
                 <a:ea typeface="Calibri" pitchFamily="34" charset="-122"/>
                 <a:cs typeface="Calibri" pitchFamily="34" charset="-120"/>
               </a:rPr>
-              <a:t>テスト送信</a:t>
+              <a:t>「終了（総合アンケート送付）」</a:t>
             </a:r>
             <a:pPr indent="0" marL="0">
               <a:lnSpc>
@@ -8683,7 +8430,7 @@
                 <a:ea typeface="Calibri" pitchFamily="34" charset="-122"/>
                 <a:cs typeface="Calibri" pitchFamily="34" charset="-120"/>
               </a:rPr>
-              <a:t>：自分のアドレスを入れて送り、文面とリンクを確認する</a:t>
+              <a:t>に変える</a:t>
             </a:r>
             <a:endParaRPr lang="en-US" sz="1150" dirty="0"/>
           </a:p>
@@ -8776,6 +8523,23 @@
               <a:buNone/>
             </a:pPr>
             <a:r>
+              <a:rPr lang="en-US" sz="1150" dirty="0">
+                <a:solidFill>
+                  <a:srgbClr val="222222"/>
+                </a:solidFill>
+                <a:latin typeface="Calibri" pitchFamily="34" charset="0"/>
+                <a:ea typeface="Calibri" pitchFamily="34" charset="-122"/>
+                <a:cs typeface="Calibri" pitchFamily="34" charset="-120"/>
+              </a:rPr>
+              <a:t>「総合アンケート」の画面で</a:t>
+            </a:r>
+            <a:pPr indent="0" marL="0">
+              <a:lnSpc>
+                <a:spcPct val="125000"/>
+              </a:lnSpc>
+              <a:buNone/>
+            </a:pPr>
+            <a:r>
               <a:rPr lang="en-US" sz="1150" b="1" dirty="0">
                 <a:solidFill>
                   <a:srgbClr val="222222"/>
@@ -8784,7 +8548,7 @@
                 <a:ea typeface="Calibri" pitchFamily="34" charset="-122"/>
                 <a:cs typeface="Calibri" pitchFamily="34" charset="-120"/>
               </a:rPr>
-              <a:t>送信対象を作成・更新する</a:t>
+              <a:t>「総合アンケートを作成する」</a:t>
             </a:r>
             <a:pPr indent="0" marL="0">
               <a:lnSpc>
@@ -8801,7 +8565,7 @@
                 <a:ea typeface="Calibri" pitchFamily="34" charset="-122"/>
                 <a:cs typeface="Calibri" pitchFamily="34" charset="-120"/>
               </a:rPr>
-              <a:t>を押す（メールアドレスを登録した来場者が対象になります）</a:t>
+              <a:t>を押す</a:t>
             </a:r>
             <a:endParaRPr lang="en-US" sz="1150" dirty="0"/>
           </a:p>
@@ -8902,7 +8666,41 @@
                 <a:ea typeface="Calibri" pitchFamily="34" charset="-122"/>
                 <a:cs typeface="Calibri" pitchFamily="34" charset="-120"/>
               </a:rPr>
-              <a:t>送信する</a:t>
+              <a:t>設問を登録し、</a:t>
+            </a:r>
+            <a:pPr indent="0" marL="0">
+              <a:lnSpc>
+                <a:spcPct val="125000"/>
+              </a:lnSpc>
+              <a:buNone/>
+            </a:pPr>
+            <a:r>
+              <a:rPr lang="en-US" sz="1150" b="1" dirty="0">
+                <a:solidFill>
+                  <a:srgbClr val="222222"/>
+                </a:solidFill>
+                <a:latin typeface="Calibri" pitchFamily="34" charset="0"/>
+                <a:ea typeface="Calibri" pitchFamily="34" charset="-122"/>
+                <a:cs typeface="Calibri" pitchFamily="34" charset="-120"/>
+              </a:rPr>
+              <a:t>「公開する」にチェックを入れて保存</a:t>
+            </a:r>
+            <a:pPr indent="0" marL="0">
+              <a:lnSpc>
+                <a:spcPct val="125000"/>
+              </a:lnSpc>
+              <a:buNone/>
+            </a:pPr>
+            <a:r>
+              <a:rPr lang="en-US" sz="1150" dirty="0">
+                <a:solidFill>
+                  <a:srgbClr val="222222"/>
+                </a:solidFill>
+                <a:latin typeface="Calibri" pitchFamily="34" charset="0"/>
+                <a:ea typeface="Calibri" pitchFamily="34" charset="-122"/>
+                <a:cs typeface="Calibri" pitchFamily="34" charset="-120"/>
+              </a:rPr>
+              <a:t>する</a:t>
             </a:r>
             <a:endParaRPr lang="en-US" sz="1150" dirty="0"/>
           </a:p>
@@ -8910,200 +8708,13 @@
       </p:sp>
       <p:sp>
         <p:nvSpPr>
-          <p:cNvPr id="13" name="Text 11"/>
-          <p:cNvSpPr txBox="1"/>
-          <p:nvPr/>
-        </p:nvSpPr>
-        <p:spPr>
-          <a:xfrm>
-            <a:off x="713232" y="2852928"/>
-            <a:ext cx="6281928" cy="257429"/>
-          </a:xfrm>
-          <a:prstGeom prst="rect">
-            <a:avLst/>
-          </a:prstGeom>
-          <a:noFill/>
-          <a:ln/>
-        </p:spPr>
-        <p:txBody>
-          <a:bodyPr wrap="square" lIns="0" tIns="0" rIns="0" bIns="0" rtlCol="0" anchor="t"/>
-          <a:lstStyle/>
-          <a:p>
-            <a:pPr marL="342900" indent="-342900">
-              <a:lnSpc>
-                <a:spcPct val="125000"/>
-              </a:lnSpc>
-              <a:buSzPct val="100000"/>
-              <a:buChar char="●"/>
-            </a:pPr>
-            <a:r>
-              <a:rPr lang="en-US" sz="1100" dirty="0">
-                <a:solidFill>
-                  <a:srgbClr val="222222"/>
-                </a:solidFill>
-                <a:latin typeface="Calibri" pitchFamily="34" charset="0"/>
-                <a:ea typeface="Calibri" pitchFamily="34" charset="-122"/>
-                <a:cs typeface="Calibri" pitchFamily="34" charset="-120"/>
-              </a:rPr>
-              <a:t>少数なら「この画面から50件だけ送信する」</a:t>
-            </a:r>
-            <a:endParaRPr lang="en-US" sz="1100" dirty="0"/>
-          </a:p>
-        </p:txBody>
-      </p:sp>
-      <p:sp>
-        <p:nvSpPr>
-          <p:cNvPr id="14" name="Text 12"/>
-          <p:cNvSpPr txBox="1"/>
-          <p:nvPr/>
-        </p:nvSpPr>
-        <p:spPr>
-          <a:xfrm>
-            <a:off x="713232" y="3128645"/>
-            <a:ext cx="6281928" cy="257429"/>
-          </a:xfrm>
-          <a:prstGeom prst="rect">
-            <a:avLst/>
-          </a:prstGeom>
-          <a:noFill/>
-          <a:ln/>
-        </p:spPr>
-        <p:txBody>
-          <a:bodyPr wrap="square" lIns="0" tIns="0" rIns="0" bIns="0" rtlCol="0" anchor="t"/>
-          <a:lstStyle/>
-          <a:p>
-            <a:pPr marL="342900" indent="-342900">
-              <a:lnSpc>
-                <a:spcPct val="125000"/>
-              </a:lnSpc>
-              <a:buSzPct val="100000"/>
-              <a:buChar char="●"/>
-            </a:pPr>
-            <a:r>
-              <a:rPr lang="en-US" sz="1100" dirty="0">
-                <a:solidFill>
-                  <a:srgbClr val="222222"/>
-                </a:solidFill>
-                <a:latin typeface="Calibri" pitchFamily="34" charset="0"/>
-                <a:ea typeface="Calibri" pitchFamily="34" charset="-122"/>
-                <a:cs typeface="Calibri" pitchFamily="34" charset="-120"/>
-              </a:rPr>
-              <a:t>大量ならサーバーの自動送信（5分ごとに200件ずつ）に任せる</a:t>
-            </a:r>
-            <a:endParaRPr lang="en-US" sz="1100" dirty="0"/>
-          </a:p>
-        </p:txBody>
-      </p:sp>
-      <p:sp>
-        <p:nvSpPr>
-          <p:cNvPr id="15" name="Shape 13"/>
+          <p:cNvPr id="13" name="Shape 11"/>
           <p:cNvSpPr/>
           <p:nvPr/>
         </p:nvSpPr>
         <p:spPr>
           <a:xfrm>
-            <a:off x="566928" y="3422650"/>
-            <a:ext cx="274320" cy="274320"/>
-          </a:xfrm>
-          <a:prstGeom prst="ellipse">
-            <a:avLst/>
-          </a:prstGeom>
-          <a:solidFill>
-            <a:srgbClr val="1E2761"/>
-          </a:solidFill>
-          <a:ln/>
-        </p:spPr>
-      </p:sp>
-      <p:sp>
-        <p:nvSpPr>
-          <p:cNvPr id="16" name="Text 14"/>
-          <p:cNvSpPr txBox="1"/>
-          <p:nvPr/>
-        </p:nvSpPr>
-        <p:spPr>
-          <a:xfrm>
-            <a:off x="566928" y="3422650"/>
-            <a:ext cx="274320" cy="274320"/>
-          </a:xfrm>
-          <a:prstGeom prst="rect">
-            <a:avLst/>
-          </a:prstGeom>
-          <a:noFill/>
-          <a:ln/>
-        </p:spPr>
-        <p:txBody>
-          <a:bodyPr wrap="square" lIns="0" tIns="0" rIns="0" bIns="0" rtlCol="0" anchor="ctr"/>
-          <a:lstStyle/>
-          <a:p>
-            <a:pPr algn="ctr" indent="0" marL="0">
-              <a:buNone/>
-            </a:pPr>
-            <a:r>
-              <a:rPr lang="en-US" sz="1100" b="1" dirty="0">
-                <a:solidFill>
-                  <a:srgbClr val="FFFFFF"/>
-                </a:solidFill>
-                <a:latin typeface="Calibri" pitchFamily="34" charset="0"/>
-                <a:ea typeface="Calibri" pitchFamily="34" charset="-122"/>
-                <a:cs typeface="Calibri" pitchFamily="34" charset="-120"/>
-              </a:rPr>
-              <a:t>4</a:t>
-            </a:r>
-            <a:endParaRPr lang="en-US" sz="1100" dirty="0"/>
-          </a:p>
-        </p:txBody>
-      </p:sp>
-      <p:sp>
-        <p:nvSpPr>
-          <p:cNvPr id="17" name="Text 15"/>
-          <p:cNvSpPr txBox="1"/>
-          <p:nvPr/>
-        </p:nvSpPr>
-        <p:spPr>
-          <a:xfrm>
-            <a:off x="969264" y="3404362"/>
-            <a:ext cx="6025896" cy="365760"/>
-          </a:xfrm>
-          <a:prstGeom prst="rect">
-            <a:avLst/>
-          </a:prstGeom>
-          <a:noFill/>
-          <a:ln/>
-        </p:spPr>
-        <p:txBody>
-          <a:bodyPr wrap="square" lIns="0" tIns="0" rIns="0" bIns="0" rtlCol="0" anchor="t"/>
-          <a:lstStyle/>
-          <a:p>
-            <a:pPr indent="0" marL="0">
-              <a:lnSpc>
-                <a:spcPct val="125000"/>
-              </a:lnSpc>
-              <a:buNone/>
-            </a:pPr>
-            <a:r>
-              <a:rPr lang="en-US" sz="1150" dirty="0">
-                <a:solidFill>
-                  <a:srgbClr val="222222"/>
-                </a:solidFill>
-                <a:latin typeface="Calibri" pitchFamily="34" charset="0"/>
-                <a:ea typeface="Calibri" pitchFamily="34" charset="-122"/>
-                <a:cs typeface="Calibri" pitchFamily="34" charset="-120"/>
-              </a:rPr>
-              <a:t>送信状況（未送信・送信済み・失敗・回答済み）を画面で確認する</a:t>
-            </a:r>
-            <a:endParaRPr lang="en-US" sz="1150" dirty="0"/>
-          </a:p>
-        </p:txBody>
-      </p:sp>
-      <p:sp>
-        <p:nvSpPr>
-          <p:cNvPr id="18" name="Shape 16"/>
-          <p:cNvSpPr/>
-          <p:nvPr/>
-        </p:nvSpPr>
-        <p:spPr>
-          <a:xfrm>
-            <a:off x="566928" y="3861562"/>
+            <a:off x="566928" y="2852928"/>
             <a:ext cx="6428232" cy="624459"/>
           </a:xfrm>
           <a:prstGeom prst="roundRect">
@@ -9124,13 +8735,13 @@
       </p:sp>
       <p:sp>
         <p:nvSpPr>
-          <p:cNvPr id="19" name="Text 17"/>
-          <p:cNvSpPr txBox="1"/>
-          <p:nvPr/>
-        </p:nvSpPr>
-        <p:spPr>
-          <a:xfrm>
-            <a:off x="658368" y="3953002"/>
+          <p:cNvPr id="14" name="Text 12"/>
+          <p:cNvSpPr txBox="1"/>
+          <p:nvPr/>
+        </p:nvSpPr>
+        <p:spPr>
+          <a:xfrm>
+            <a:off x="658368" y="2944368"/>
             <a:ext cx="237744" cy="237744"/>
           </a:xfrm>
           <a:prstGeom prst="rect">
@@ -9163,13 +8774,13 @@
       </p:sp>
       <p:sp>
         <p:nvSpPr>
-          <p:cNvPr id="20" name="Text 18"/>
-          <p:cNvSpPr txBox="1"/>
-          <p:nvPr/>
-        </p:nvSpPr>
-        <p:spPr>
-          <a:xfrm>
-            <a:off x="950976" y="3971290"/>
+          <p:cNvPr id="15" name="Text 13"/>
+          <p:cNvSpPr txBox="1"/>
+          <p:nvPr/>
+        </p:nvSpPr>
+        <p:spPr>
+          <a:xfrm>
+            <a:off x="950976" y="2962656"/>
             <a:ext cx="5925312" cy="441579"/>
           </a:xfrm>
           <a:prstGeom prst="rect">
@@ -9197,41 +8808,7 @@
                 <a:ea typeface="Calibri" pitchFamily="34" charset="-122"/>
                 <a:cs typeface="Calibri" pitchFamily="34" charset="-120"/>
               </a:rPr>
-              <a:t>テスト送信のリンクは</a:t>
-            </a:r>
-            <a:pPr indent="0" marL="0">
-              <a:lnSpc>
-                <a:spcPct val="120000"/>
-              </a:lnSpc>
-              <a:buNone/>
-            </a:pPr>
-            <a:r>
-              <a:rPr lang="en-US" sz="1050" b="1" dirty="0">
-                <a:solidFill>
-                  <a:srgbClr val="222222"/>
-                </a:solidFill>
-                <a:latin typeface="Calibri" pitchFamily="34" charset="0"/>
-                <a:ea typeface="Calibri" pitchFamily="34" charset="-122"/>
-                <a:cs typeface="Calibri" pitchFamily="34" charset="-120"/>
-              </a:rPr>
-              <a:t>スタッフ確認用のプレビュー</a:t>
-            </a:r>
-            <a:pPr indent="0" marL="0">
-              <a:lnSpc>
-                <a:spcPct val="120000"/>
-              </a:lnSpc>
-              <a:buNone/>
-            </a:pPr>
-            <a:r>
-              <a:rPr lang="en-US" sz="1050" dirty="0">
-                <a:solidFill>
-                  <a:srgbClr val="222222"/>
-                </a:solidFill>
-                <a:latin typeface="Calibri" pitchFamily="34" charset="0"/>
-                <a:ea typeface="Calibri" pitchFamily="34" charset="-122"/>
-                <a:cs typeface="Calibri" pitchFamily="34" charset="-120"/>
-              </a:rPr>
-              <a:t>です。管理画面にログインした状態で開くと、来場者に見えるのと同じ画面を確認できます（プレビューからは回答できません）。</a:t>
+              <a:t>総合アンケートに回答した方が、スマホ壁紙をダウンロードできます。設問は3問程度（満足度・来場のきっかけ・意見）がおすすめです。</a:t>
             </a:r>
             <a:endParaRPr lang="en-US" sz="1050" dirty="0"/>
           </a:p>
@@ -9239,18 +8816,18 @@
       </p:sp>
       <p:sp>
         <p:nvSpPr>
-          <p:cNvPr id="21" name="Shape 19"/>
+          <p:cNvPr id="16" name="Shape 14"/>
           <p:cNvSpPr/>
           <p:nvPr/>
         </p:nvSpPr>
         <p:spPr>
           <a:xfrm>
-            <a:off x="566928" y="4559173"/>
-            <a:ext cx="6428232" cy="431102"/>
+            <a:off x="566928" y="3550539"/>
+            <a:ext cx="6428232" cy="624459"/>
           </a:xfrm>
           <a:prstGeom prst="roundRect">
             <a:avLst>
-              <a:gd name="adj" fmla="val 12726"/>
+              <a:gd name="adj" fmla="val 8786"/>
             </a:avLst>
           </a:prstGeom>
           <a:solidFill>
@@ -9266,13 +8843,13 @@
       </p:sp>
       <p:sp>
         <p:nvSpPr>
-          <p:cNvPr id="22" name="Text 20"/>
-          <p:cNvSpPr txBox="1"/>
-          <p:nvPr/>
-        </p:nvSpPr>
-        <p:spPr>
-          <a:xfrm>
-            <a:off x="658368" y="4650613"/>
+          <p:cNvPr id="17" name="Text 15"/>
+          <p:cNvSpPr txBox="1"/>
+          <p:nvPr/>
+        </p:nvSpPr>
+        <p:spPr>
+          <a:xfrm>
+            <a:off x="658368" y="3641979"/>
             <a:ext cx="237744" cy="237744"/>
           </a:xfrm>
           <a:prstGeom prst="rect">
@@ -9305,14 +8882,14 @@
       </p:sp>
       <p:sp>
         <p:nvSpPr>
-          <p:cNvPr id="23" name="Text 21"/>
-          <p:cNvSpPr txBox="1"/>
-          <p:nvPr/>
-        </p:nvSpPr>
-        <p:spPr>
-          <a:xfrm>
-            <a:off x="950976" y="4668901"/>
-            <a:ext cx="5925312" cy="248221"/>
+          <p:cNvPr id="18" name="Text 16"/>
+          <p:cNvSpPr txBox="1"/>
+          <p:nvPr/>
+        </p:nvSpPr>
+        <p:spPr>
+          <a:xfrm>
+            <a:off x="950976" y="3660267"/>
+            <a:ext cx="5925312" cy="441579"/>
           </a:xfrm>
           <a:prstGeom prst="rect">
             <a:avLst/>
@@ -9339,7 +8916,7 @@
                 <a:ea typeface="Calibri" pitchFamily="34" charset="-122"/>
                 <a:cs typeface="Calibri" pitchFamily="34" charset="-120"/>
               </a:rPr>
-              <a:t>送信済みの人には二重に送られません。失敗したものは自動で3回まで再送されます。</a:t>
+              <a:t>状態を「終了」にすると、ブースのアンケートは回答できなくなります。当日の受付時間が終わってから切り替えてください。</a:t>
             </a:r>
             <a:endParaRPr lang="en-US" sz="1050" dirty="0"/>
           </a:p>
@@ -9347,7 +8924,7 @@
       </p:sp>
       <p:pic>
         <p:nvPicPr>
-          <p:cNvPr id="24" name="Image 0" descr="C:\Users\sato\Desktop\enque\docs\images\o-invite-status.png">    </p:cNvPr>
+          <p:cNvPr id="19" name="Image 0" descr="C:\Users\sato\Desktop\enque\docs\images\o-overall.png">    </p:cNvPr>
           <p:cNvPicPr>
             <a:picLocks noChangeAspect="1"/>
           </p:cNvPicPr>
@@ -9361,8 +8938,8 @@
         </p:blipFill>
         <p:spPr>
           <a:xfrm>
-            <a:off x="1504370" y="5063427"/>
-            <a:ext cx="4553347" cy="3474720"/>
+            <a:off x="1282796" y="4248150"/>
+            <a:ext cx="4996495" cy="3474720"/>
           </a:xfrm>
           <a:prstGeom prst="rect">
             <a:avLst/>
@@ -9371,13 +8948,13 @@
       </p:pic>
       <p:sp>
         <p:nvSpPr>
-          <p:cNvPr id="25" name="Text 22"/>
-          <p:cNvSpPr txBox="1"/>
-          <p:nvPr/>
-        </p:nvSpPr>
-        <p:spPr>
-          <a:xfrm>
-            <a:off x="566928" y="8593011"/>
+          <p:cNvPr id="20" name="Text 17"/>
+          <p:cNvSpPr txBox="1"/>
+          <p:nvPr/>
+        </p:nvSpPr>
+        <p:spPr>
+          <a:xfrm>
+            <a:off x="566928" y="7777734"/>
             <a:ext cx="6428232" cy="274320"/>
           </a:xfrm>
           <a:prstGeom prst="rect">
@@ -9402,7 +8979,7 @@
                 <a:ea typeface="Calibri" pitchFamily="34" charset="-122"/>
                 <a:cs typeface="Calibri" pitchFamily="34" charset="-120"/>
               </a:rPr>
-              <a:t>「総合アンケートと案内メール」画面の送信状況（未送信・送信済み・失敗・回答済みの数）。</a:t>
+              <a:t>「総合アンケートと案内メール」画面の上部。総合アンケートの状態が見えるところ。</a:t>
             </a:r>
             <a:endParaRPr lang="en-US" sz="950" dirty="0"/>
           </a:p>
@@ -9410,7 +8987,7 @@
       </p:sp>
       <p:sp>
         <p:nvSpPr>
-          <p:cNvPr id="26" name="Text 23"/>
+          <p:cNvPr id="21" name="Text 18"/>
           <p:cNvSpPr txBox="1"/>
           <p:nvPr/>
         </p:nvSpPr>
@@ -9551,7 +9128,7 @@
                 <a:ea typeface="Calibri" pitchFamily="34" charset="-122"/>
                 <a:cs typeface="Calibri" pitchFamily="34" charset="-120"/>
               </a:rPr>
-              <a:t>終了後3：集計データを受け取る</a:t>
+              <a:t>終了後2：案内メールを送る</a:t>
             </a:r>
             <a:endParaRPr lang="en-US" sz="2200" dirty="0"/>
           </a:p>
@@ -9559,14 +9136,73 @@
       </p:sp>
       <p:sp>
         <p:nvSpPr>
-          <p:cNvPr id="4" name="Text 2"/>
-          <p:cNvSpPr txBox="1"/>
-          <p:nvPr/>
-        </p:nvSpPr>
-        <p:spPr>
-          <a:xfrm>
-            <a:off x="566928" y="1591056"/>
-            <a:ext cx="6428232" cy="257810"/>
+          <p:cNvPr id="4" name="Shape 2"/>
+          <p:cNvSpPr/>
+          <p:nvPr/>
+        </p:nvSpPr>
+        <p:spPr>
+          <a:xfrm>
+            <a:off x="566928" y="1499616"/>
+            <a:ext cx="274320" cy="274320"/>
+          </a:xfrm>
+          <a:prstGeom prst="ellipse">
+            <a:avLst/>
+          </a:prstGeom>
+          <a:solidFill>
+            <a:srgbClr val="1E2761"/>
+          </a:solidFill>
+          <a:ln/>
+        </p:spPr>
+      </p:sp>
+      <p:sp>
+        <p:nvSpPr>
+          <p:cNvPr id="5" name="Text 3"/>
+          <p:cNvSpPr txBox="1"/>
+          <p:nvPr/>
+        </p:nvSpPr>
+        <p:spPr>
+          <a:xfrm>
+            <a:off x="566928" y="1499616"/>
+            <a:ext cx="274320" cy="274320"/>
+          </a:xfrm>
+          <a:prstGeom prst="rect">
+            <a:avLst/>
+          </a:prstGeom>
+          <a:noFill/>
+          <a:ln/>
+        </p:spPr>
+        <p:txBody>
+          <a:bodyPr wrap="square" lIns="0" tIns="0" rIns="0" bIns="0" rtlCol="0" anchor="ctr"/>
+          <a:lstStyle/>
+          <a:p>
+            <a:pPr algn="ctr" indent="0" marL="0">
+              <a:buNone/>
+            </a:pPr>
+            <a:r>
+              <a:rPr lang="en-US" sz="1100" b="1" dirty="0">
+                <a:solidFill>
+                  <a:srgbClr val="FFFFFF"/>
+                </a:solidFill>
+                <a:latin typeface="Calibri" pitchFamily="34" charset="0"/>
+                <a:ea typeface="Calibri" pitchFamily="34" charset="-122"/>
+                <a:cs typeface="Calibri" pitchFamily="34" charset="-120"/>
+              </a:rPr>
+              <a:t>1</a:t>
+            </a:r>
+            <a:endParaRPr lang="en-US" sz="1100" dirty="0"/>
+          </a:p>
+        </p:txBody>
+      </p:sp>
+      <p:sp>
+        <p:nvSpPr>
+          <p:cNvPr id="6" name="Text 4"/>
+          <p:cNvSpPr txBox="1"/>
+          <p:nvPr/>
+        </p:nvSpPr>
+        <p:spPr>
+          <a:xfrm>
+            <a:off x="969264" y="1481328"/>
+            <a:ext cx="6025896" cy="365760"/>
           </a:xfrm>
           <a:prstGeom prst="rect">
             <a:avLst/>
@@ -9579,32 +9215,271 @@
           <a:lstStyle/>
           <a:p>
             <a:pPr indent="0" marL="0">
-              <a:buNone/>
-            </a:pPr>
-            <a:r>
-              <a:rPr lang="en-US" sz="1400" b="1" dirty="0">
-                <a:solidFill>
-                  <a:srgbClr val="1E2761"/>
-                </a:solidFill>
-                <a:latin typeface="Calibri" pitchFamily="34" charset="0"/>
-                <a:ea typeface="Calibri" pitchFamily="34" charset="-122"/>
-                <a:cs typeface="Calibri" pitchFamily="34" charset="-120"/>
-              </a:rPr>
-              <a:t>CSVをダウンロードする</a:t>
-            </a:r>
-            <a:endParaRPr lang="en-US" sz="1400" dirty="0"/>
-          </a:p>
-        </p:txBody>
-      </p:sp>
-      <p:sp>
-        <p:nvSpPr>
-          <p:cNvPr id="5" name="Text 3"/>
-          <p:cNvSpPr txBox="1"/>
-          <p:nvPr/>
-        </p:nvSpPr>
-        <p:spPr>
-          <a:xfrm>
-            <a:off x="713232" y="1922018"/>
+              <a:lnSpc>
+                <a:spcPct val="125000"/>
+              </a:lnSpc>
+              <a:buNone/>
+            </a:pPr>
+            <a:r>
+              <a:rPr lang="en-US" sz="1150" b="1" dirty="0">
+                <a:solidFill>
+                  <a:srgbClr val="222222"/>
+                </a:solidFill>
+                <a:latin typeface="Calibri" pitchFamily="34" charset="0"/>
+                <a:ea typeface="Calibri" pitchFamily="34" charset="-122"/>
+                <a:cs typeface="Calibri" pitchFamily="34" charset="-120"/>
+              </a:rPr>
+              <a:t>テスト送信</a:t>
+            </a:r>
+            <a:pPr indent="0" marL="0">
+              <a:lnSpc>
+                <a:spcPct val="125000"/>
+              </a:lnSpc>
+              <a:buNone/>
+            </a:pPr>
+            <a:r>
+              <a:rPr lang="en-US" sz="1150" dirty="0">
+                <a:solidFill>
+                  <a:srgbClr val="222222"/>
+                </a:solidFill>
+                <a:latin typeface="Calibri" pitchFamily="34" charset="0"/>
+                <a:ea typeface="Calibri" pitchFamily="34" charset="-122"/>
+                <a:cs typeface="Calibri" pitchFamily="34" charset="-120"/>
+              </a:rPr>
+              <a:t>：自分のアドレスを入れて送り、文面とリンクを確認する</a:t>
+            </a:r>
+            <a:endParaRPr lang="en-US" sz="1150" dirty="0"/>
+          </a:p>
+        </p:txBody>
+      </p:sp>
+      <p:sp>
+        <p:nvSpPr>
+          <p:cNvPr id="7" name="Shape 5"/>
+          <p:cNvSpPr/>
+          <p:nvPr/>
+        </p:nvSpPr>
+        <p:spPr>
+          <a:xfrm>
+            <a:off x="566928" y="1956816"/>
+            <a:ext cx="274320" cy="274320"/>
+          </a:xfrm>
+          <a:prstGeom prst="ellipse">
+            <a:avLst/>
+          </a:prstGeom>
+          <a:solidFill>
+            <a:srgbClr val="1E2761"/>
+          </a:solidFill>
+          <a:ln/>
+        </p:spPr>
+      </p:sp>
+      <p:sp>
+        <p:nvSpPr>
+          <p:cNvPr id="8" name="Text 6"/>
+          <p:cNvSpPr txBox="1"/>
+          <p:nvPr/>
+        </p:nvSpPr>
+        <p:spPr>
+          <a:xfrm>
+            <a:off x="566928" y="1956816"/>
+            <a:ext cx="274320" cy="274320"/>
+          </a:xfrm>
+          <a:prstGeom prst="rect">
+            <a:avLst/>
+          </a:prstGeom>
+          <a:noFill/>
+          <a:ln/>
+        </p:spPr>
+        <p:txBody>
+          <a:bodyPr wrap="square" lIns="0" tIns="0" rIns="0" bIns="0" rtlCol="0" anchor="ctr"/>
+          <a:lstStyle/>
+          <a:p>
+            <a:pPr algn="ctr" indent="0" marL="0">
+              <a:buNone/>
+            </a:pPr>
+            <a:r>
+              <a:rPr lang="en-US" sz="1100" b="1" dirty="0">
+                <a:solidFill>
+                  <a:srgbClr val="FFFFFF"/>
+                </a:solidFill>
+                <a:latin typeface="Calibri" pitchFamily="34" charset="0"/>
+                <a:ea typeface="Calibri" pitchFamily="34" charset="-122"/>
+                <a:cs typeface="Calibri" pitchFamily="34" charset="-120"/>
+              </a:rPr>
+              <a:t>2</a:t>
+            </a:r>
+            <a:endParaRPr lang="en-US" sz="1100" dirty="0"/>
+          </a:p>
+        </p:txBody>
+      </p:sp>
+      <p:sp>
+        <p:nvSpPr>
+          <p:cNvPr id="9" name="Text 7"/>
+          <p:cNvSpPr txBox="1"/>
+          <p:nvPr/>
+        </p:nvSpPr>
+        <p:spPr>
+          <a:xfrm>
+            <a:off x="969264" y="1938528"/>
+            <a:ext cx="6025896" cy="365760"/>
+          </a:xfrm>
+          <a:prstGeom prst="rect">
+            <a:avLst/>
+          </a:prstGeom>
+          <a:noFill/>
+          <a:ln/>
+        </p:spPr>
+        <p:txBody>
+          <a:bodyPr wrap="square" lIns="0" tIns="0" rIns="0" bIns="0" rtlCol="0" anchor="t"/>
+          <a:lstStyle/>
+          <a:p>
+            <a:pPr indent="0" marL="0">
+              <a:lnSpc>
+                <a:spcPct val="125000"/>
+              </a:lnSpc>
+              <a:buNone/>
+            </a:pPr>
+            <a:r>
+              <a:rPr lang="en-US" sz="1150" b="1" dirty="0">
+                <a:solidFill>
+                  <a:srgbClr val="222222"/>
+                </a:solidFill>
+                <a:latin typeface="Calibri" pitchFamily="34" charset="0"/>
+                <a:ea typeface="Calibri" pitchFamily="34" charset="-122"/>
+                <a:cs typeface="Calibri" pitchFamily="34" charset="-120"/>
+              </a:rPr>
+              <a:t>送信対象を作成・更新する</a:t>
+            </a:r>
+            <a:pPr indent="0" marL="0">
+              <a:lnSpc>
+                <a:spcPct val="125000"/>
+              </a:lnSpc>
+              <a:buNone/>
+            </a:pPr>
+            <a:r>
+              <a:rPr lang="en-US" sz="1150" dirty="0">
+                <a:solidFill>
+                  <a:srgbClr val="222222"/>
+                </a:solidFill>
+                <a:latin typeface="Calibri" pitchFamily="34" charset="0"/>
+                <a:ea typeface="Calibri" pitchFamily="34" charset="-122"/>
+                <a:cs typeface="Calibri" pitchFamily="34" charset="-120"/>
+              </a:rPr>
+              <a:t>を押す（メールアドレスを登録した来場者が対象になります）</a:t>
+            </a:r>
+            <a:endParaRPr lang="en-US" sz="1150" dirty="0"/>
+          </a:p>
+        </p:txBody>
+      </p:sp>
+      <p:sp>
+        <p:nvSpPr>
+          <p:cNvPr id="10" name="Shape 8"/>
+          <p:cNvSpPr/>
+          <p:nvPr/>
+        </p:nvSpPr>
+        <p:spPr>
+          <a:xfrm>
+            <a:off x="566928" y="2414016"/>
+            <a:ext cx="274320" cy="274320"/>
+          </a:xfrm>
+          <a:prstGeom prst="ellipse">
+            <a:avLst/>
+          </a:prstGeom>
+          <a:solidFill>
+            <a:srgbClr val="1E2761"/>
+          </a:solidFill>
+          <a:ln/>
+        </p:spPr>
+      </p:sp>
+      <p:sp>
+        <p:nvSpPr>
+          <p:cNvPr id="11" name="Text 9"/>
+          <p:cNvSpPr txBox="1"/>
+          <p:nvPr/>
+        </p:nvSpPr>
+        <p:spPr>
+          <a:xfrm>
+            <a:off x="566928" y="2414016"/>
+            <a:ext cx="274320" cy="274320"/>
+          </a:xfrm>
+          <a:prstGeom prst="rect">
+            <a:avLst/>
+          </a:prstGeom>
+          <a:noFill/>
+          <a:ln/>
+        </p:spPr>
+        <p:txBody>
+          <a:bodyPr wrap="square" lIns="0" tIns="0" rIns="0" bIns="0" rtlCol="0" anchor="ctr"/>
+          <a:lstStyle/>
+          <a:p>
+            <a:pPr algn="ctr" indent="0" marL="0">
+              <a:buNone/>
+            </a:pPr>
+            <a:r>
+              <a:rPr lang="en-US" sz="1100" b="1" dirty="0">
+                <a:solidFill>
+                  <a:srgbClr val="FFFFFF"/>
+                </a:solidFill>
+                <a:latin typeface="Calibri" pitchFamily="34" charset="0"/>
+                <a:ea typeface="Calibri" pitchFamily="34" charset="-122"/>
+                <a:cs typeface="Calibri" pitchFamily="34" charset="-120"/>
+              </a:rPr>
+              <a:t>3</a:t>
+            </a:r>
+            <a:endParaRPr lang="en-US" sz="1100" dirty="0"/>
+          </a:p>
+        </p:txBody>
+      </p:sp>
+      <p:sp>
+        <p:nvSpPr>
+          <p:cNvPr id="12" name="Text 10"/>
+          <p:cNvSpPr txBox="1"/>
+          <p:nvPr/>
+        </p:nvSpPr>
+        <p:spPr>
+          <a:xfrm>
+            <a:off x="969264" y="2395728"/>
+            <a:ext cx="6025896" cy="365760"/>
+          </a:xfrm>
+          <a:prstGeom prst="rect">
+            <a:avLst/>
+          </a:prstGeom>
+          <a:noFill/>
+          <a:ln/>
+        </p:spPr>
+        <p:txBody>
+          <a:bodyPr wrap="square" lIns="0" tIns="0" rIns="0" bIns="0" rtlCol="0" anchor="t"/>
+          <a:lstStyle/>
+          <a:p>
+            <a:pPr indent="0" marL="0">
+              <a:lnSpc>
+                <a:spcPct val="125000"/>
+              </a:lnSpc>
+              <a:buNone/>
+            </a:pPr>
+            <a:r>
+              <a:rPr lang="en-US" sz="1150" dirty="0">
+                <a:solidFill>
+                  <a:srgbClr val="222222"/>
+                </a:solidFill>
+                <a:latin typeface="Calibri" pitchFamily="34" charset="0"/>
+                <a:ea typeface="Calibri" pitchFamily="34" charset="-122"/>
+                <a:cs typeface="Calibri" pitchFamily="34" charset="-120"/>
+              </a:rPr>
+              <a:t>送信する</a:t>
+            </a:r>
+            <a:endParaRPr lang="en-US" sz="1150" dirty="0"/>
+          </a:p>
+        </p:txBody>
+      </p:sp>
+      <p:sp>
+        <p:nvSpPr>
+          <p:cNvPr id="13" name="Text 11"/>
+          <p:cNvSpPr txBox="1"/>
+          <p:nvPr/>
+        </p:nvSpPr>
+        <p:spPr>
+          <a:xfrm>
+            <a:off x="713232" y="2852928"/>
             <a:ext cx="6281928" cy="257429"/>
           </a:xfrm>
           <a:prstGeom prst="rect">
@@ -9625,23 +9500,6 @@
               <a:buChar char="●"/>
             </a:pPr>
             <a:r>
-              <a:rPr lang="en-US" sz="1100" b="1" dirty="0">
-                <a:solidFill>
-                  <a:srgbClr val="222222"/>
-                </a:solidFill>
-                <a:latin typeface="Calibri" pitchFamily="34" charset="0"/>
-                <a:ea typeface="Calibri" pitchFamily="34" charset="-122"/>
-                <a:cs typeface="Calibri" pitchFamily="34" charset="-120"/>
-              </a:rPr>
-              <a:t>企業別</a:t>
-            </a:r>
-            <a:pPr indent="0" marL="0">
-              <a:lnSpc>
-                <a:spcPct val="125000"/>
-              </a:lnSpc>
-              <a:buNone/>
-            </a:pPr>
-            <a:r>
               <a:rPr lang="en-US" sz="1100" dirty="0">
                 <a:solidFill>
                   <a:srgbClr val="222222"/>
@@ -9650,7 +9508,7 @@
                 <a:ea typeface="Calibri" pitchFamily="34" charset="-122"/>
                 <a:cs typeface="Calibri" pitchFamily="34" charset="-120"/>
               </a:rPr>
-              <a:t>：企業の「集計」画面、または「回答一覧」から</a:t>
+              <a:t>少数なら「この画面から50件だけ送信する」</a:t>
             </a:r>
             <a:endParaRPr lang="en-US" sz="1100" dirty="0"/>
           </a:p>
@@ -9658,13 +9516,13 @@
       </p:sp>
       <p:sp>
         <p:nvSpPr>
-          <p:cNvPr id="6" name="Text 4"/>
-          <p:cNvSpPr txBox="1"/>
-          <p:nvPr/>
-        </p:nvSpPr>
-        <p:spPr>
-          <a:xfrm>
-            <a:off x="713232" y="2197735"/>
+          <p:cNvPr id="14" name="Text 12"/>
+          <p:cNvSpPr txBox="1"/>
+          <p:nvPr/>
+        </p:nvSpPr>
+        <p:spPr>
+          <a:xfrm>
+            <a:off x="713232" y="3128645"/>
             <a:ext cx="6281928" cy="257429"/>
           </a:xfrm>
           <a:prstGeom prst="rect">
@@ -9685,32 +9543,74 @@
               <a:buChar char="●"/>
             </a:pPr>
             <a:r>
+              <a:rPr lang="en-US" sz="1100" dirty="0">
+                <a:solidFill>
+                  <a:srgbClr val="222222"/>
+                </a:solidFill>
+                <a:latin typeface="Calibri" pitchFamily="34" charset="0"/>
+                <a:ea typeface="Calibri" pitchFamily="34" charset="-122"/>
+                <a:cs typeface="Calibri" pitchFamily="34" charset="-120"/>
+              </a:rPr>
+              <a:t>大量ならサーバーの自動送信（5分ごとに200件ずつ）に任せる</a:t>
+            </a:r>
+            <a:endParaRPr lang="en-US" sz="1100" dirty="0"/>
+          </a:p>
+        </p:txBody>
+      </p:sp>
+      <p:sp>
+        <p:nvSpPr>
+          <p:cNvPr id="15" name="Shape 13"/>
+          <p:cNvSpPr/>
+          <p:nvPr/>
+        </p:nvSpPr>
+        <p:spPr>
+          <a:xfrm>
+            <a:off x="566928" y="3422650"/>
+            <a:ext cx="274320" cy="274320"/>
+          </a:xfrm>
+          <a:prstGeom prst="ellipse">
+            <a:avLst/>
+          </a:prstGeom>
+          <a:solidFill>
+            <a:srgbClr val="1E2761"/>
+          </a:solidFill>
+          <a:ln/>
+        </p:spPr>
+      </p:sp>
+      <p:sp>
+        <p:nvSpPr>
+          <p:cNvPr id="16" name="Text 14"/>
+          <p:cNvSpPr txBox="1"/>
+          <p:nvPr/>
+        </p:nvSpPr>
+        <p:spPr>
+          <a:xfrm>
+            <a:off x="566928" y="3422650"/>
+            <a:ext cx="274320" cy="274320"/>
+          </a:xfrm>
+          <a:prstGeom prst="rect">
+            <a:avLst/>
+          </a:prstGeom>
+          <a:noFill/>
+          <a:ln/>
+        </p:spPr>
+        <p:txBody>
+          <a:bodyPr wrap="square" lIns="0" tIns="0" rIns="0" bIns="0" rtlCol="0" anchor="ctr"/>
+          <a:lstStyle/>
+          <a:p>
+            <a:pPr algn="ctr" indent="0" marL="0">
+              <a:buNone/>
+            </a:pPr>
+            <a:r>
               <a:rPr lang="en-US" sz="1100" b="1" dirty="0">
                 <a:solidFill>
-                  <a:srgbClr val="222222"/>
-                </a:solidFill>
-                <a:latin typeface="Calibri" pitchFamily="34" charset="0"/>
-                <a:ea typeface="Calibri" pitchFamily="34" charset="-122"/>
-                <a:cs typeface="Calibri" pitchFamily="34" charset="-120"/>
-              </a:rPr>
-              <a:t>全社まとめて</a:t>
-            </a:r>
-            <a:pPr indent="0" marL="0">
-              <a:lnSpc>
-                <a:spcPct val="125000"/>
-              </a:lnSpc>
-              <a:buNone/>
-            </a:pPr>
-            <a:r>
-              <a:rPr lang="en-US" sz="1100" dirty="0">
-                <a:solidFill>
-                  <a:srgbClr val="222222"/>
-                </a:solidFill>
-                <a:latin typeface="Calibri" pitchFamily="34" charset="0"/>
-                <a:ea typeface="Calibri" pitchFamily="34" charset="-122"/>
-                <a:cs typeface="Calibri" pitchFamily="34" charset="-120"/>
-              </a:rPr>
-              <a:t>：ダッシュボードの「全企業分のCSV」から</a:t>
+                  <a:srgbClr val="FFFFFF"/>
+                </a:solidFill>
+                <a:latin typeface="Calibri" pitchFamily="34" charset="0"/>
+                <a:ea typeface="Calibri" pitchFamily="34" charset="-122"/>
+                <a:cs typeface="Calibri" pitchFamily="34" charset="-120"/>
+              </a:rPr>
+              <a:t>4</a:t>
             </a:r>
             <a:endParaRPr lang="en-US" sz="1100" dirty="0"/>
           </a:p>
@@ -9718,14 +9618,14 @@
       </p:sp>
       <p:sp>
         <p:nvSpPr>
-          <p:cNvPr id="7" name="Text 5"/>
-          <p:cNvSpPr txBox="1"/>
-          <p:nvPr/>
-        </p:nvSpPr>
-        <p:spPr>
-          <a:xfrm>
-            <a:off x="566928" y="2473452"/>
-            <a:ext cx="6428232" cy="257429"/>
+          <p:cNvPr id="17" name="Text 15"/>
+          <p:cNvSpPr txBox="1"/>
+          <p:nvPr/>
+        </p:nvSpPr>
+        <p:spPr>
+          <a:xfrm>
+            <a:off x="969264" y="3404362"/>
+            <a:ext cx="6025896" cy="365760"/>
           </a:xfrm>
           <a:prstGeom prst="rect">
             <a:avLst/>
@@ -9744,63 +9644,29 @@
               <a:buNone/>
             </a:pPr>
             <a:r>
-              <a:rPr lang="en-US" sz="1100" dirty="0">
-                <a:solidFill>
-                  <a:srgbClr val="222222"/>
-                </a:solidFill>
-                <a:latin typeface="Calibri" pitchFamily="34" charset="0"/>
-                <a:ea typeface="Calibri" pitchFamily="34" charset="-122"/>
-                <a:cs typeface="Calibri" pitchFamily="34" charset="-120"/>
-              </a:rPr>
-              <a:t>CSVは</a:t>
-            </a:r>
-            <a:pPr indent="0" marL="0">
-              <a:lnSpc>
-                <a:spcPct val="125000"/>
-              </a:lnSpc>
-              <a:buNone/>
-            </a:pPr>
-            <a:r>
-              <a:rPr lang="en-US" sz="1100" b="1" dirty="0">
-                <a:solidFill>
-                  <a:srgbClr val="222222"/>
-                </a:solidFill>
-                <a:latin typeface="Calibri" pitchFamily="34" charset="0"/>
-                <a:ea typeface="Calibri" pitchFamily="34" charset="-122"/>
-                <a:cs typeface="Calibri" pitchFamily="34" charset="-120"/>
-              </a:rPr>
-              <a:t>UTF-8（BOM付き）</a:t>
-            </a:r>
-            <a:pPr indent="0" marL="0">
-              <a:lnSpc>
-                <a:spcPct val="125000"/>
-              </a:lnSpc>
-              <a:buNone/>
-            </a:pPr>
-            <a:r>
-              <a:rPr lang="en-US" sz="1100" dirty="0">
-                <a:solidFill>
-                  <a:srgbClr val="222222"/>
-                </a:solidFill>
-                <a:latin typeface="Calibri" pitchFamily="34" charset="0"/>
-                <a:ea typeface="Calibri" pitchFamily="34" charset="-122"/>
-                <a:cs typeface="Calibri" pitchFamily="34" charset="-120"/>
-              </a:rPr>
-              <a:t>なので、Excelでそのまま開けます。</a:t>
-            </a:r>
-            <a:endParaRPr lang="en-US" sz="1100" dirty="0"/>
-          </a:p>
-        </p:txBody>
-      </p:sp>
-      <p:sp>
-        <p:nvSpPr>
-          <p:cNvPr id="8" name="Shape 6"/>
+              <a:rPr lang="en-US" sz="1150" dirty="0">
+                <a:solidFill>
+                  <a:srgbClr val="222222"/>
+                </a:solidFill>
+                <a:latin typeface="Calibri" pitchFamily="34" charset="0"/>
+                <a:ea typeface="Calibri" pitchFamily="34" charset="-122"/>
+                <a:cs typeface="Calibri" pitchFamily="34" charset="-120"/>
+              </a:rPr>
+              <a:t>送信状況（未送信・送信済み・失敗・回答済み）を画面で確認する</a:t>
+            </a:r>
+            <a:endParaRPr lang="en-US" sz="1150" dirty="0"/>
+          </a:p>
+        </p:txBody>
+      </p:sp>
+      <p:sp>
+        <p:nvSpPr>
+          <p:cNvPr id="18" name="Shape 16"/>
           <p:cNvSpPr/>
           <p:nvPr/>
         </p:nvSpPr>
         <p:spPr>
           <a:xfrm>
-            <a:off x="566928" y="2767457"/>
+            <a:off x="566928" y="3861562"/>
             <a:ext cx="6428232" cy="624459"/>
           </a:xfrm>
           <a:prstGeom prst="roundRect">
@@ -9821,13 +9687,13 @@
       </p:sp>
       <p:sp>
         <p:nvSpPr>
-          <p:cNvPr id="9" name="Text 7"/>
-          <p:cNvSpPr txBox="1"/>
-          <p:nvPr/>
-        </p:nvSpPr>
-        <p:spPr>
-          <a:xfrm>
-            <a:off x="658368" y="2858897"/>
+          <p:cNvPr id="19" name="Text 17"/>
+          <p:cNvSpPr txBox="1"/>
+          <p:nvPr/>
+        </p:nvSpPr>
+        <p:spPr>
+          <a:xfrm>
+            <a:off x="658368" y="3953002"/>
             <a:ext cx="237744" cy="237744"/>
           </a:xfrm>
           <a:prstGeom prst="rect">
@@ -9860,13 +9726,13 @@
       </p:sp>
       <p:sp>
         <p:nvSpPr>
-          <p:cNvPr id="10" name="Text 8"/>
-          <p:cNvSpPr txBox="1"/>
-          <p:nvPr/>
-        </p:nvSpPr>
-        <p:spPr>
-          <a:xfrm>
-            <a:off x="950976" y="2877185"/>
+          <p:cNvPr id="20" name="Text 18"/>
+          <p:cNvSpPr txBox="1"/>
+          <p:nvPr/>
+        </p:nvSpPr>
+        <p:spPr>
+          <a:xfrm>
+            <a:off x="950976" y="3971290"/>
             <a:ext cx="5925312" cy="441579"/>
           </a:xfrm>
           <a:prstGeom prst="rect">
@@ -9894,7 +9760,41 @@
                 <a:ea typeface="Calibri" pitchFamily="34" charset="-122"/>
                 <a:cs typeface="Calibri" pitchFamily="34" charset="-120"/>
               </a:rPr>
-              <a:t>メールアドレスは出力されません。来場者は匿名のID（来場者ID）だけが入るので、企業をまたいだ同じ方の回答を突き合わせられます。</a:t>
+              <a:t>テスト送信のリンクは</a:t>
+            </a:r>
+            <a:pPr indent="0" marL="0">
+              <a:lnSpc>
+                <a:spcPct val="120000"/>
+              </a:lnSpc>
+              <a:buNone/>
+            </a:pPr>
+            <a:r>
+              <a:rPr lang="en-US" sz="1050" b="1" dirty="0">
+                <a:solidFill>
+                  <a:srgbClr val="222222"/>
+                </a:solidFill>
+                <a:latin typeface="Calibri" pitchFamily="34" charset="0"/>
+                <a:ea typeface="Calibri" pitchFamily="34" charset="-122"/>
+                <a:cs typeface="Calibri" pitchFamily="34" charset="-120"/>
+              </a:rPr>
+              <a:t>スタッフ確認用のプレビュー</a:t>
+            </a:r>
+            <a:pPr indent="0" marL="0">
+              <a:lnSpc>
+                <a:spcPct val="120000"/>
+              </a:lnSpc>
+              <a:buNone/>
+            </a:pPr>
+            <a:r>
+              <a:rPr lang="en-US" sz="1050" dirty="0">
+                <a:solidFill>
+                  <a:srgbClr val="222222"/>
+                </a:solidFill>
+                <a:latin typeface="Calibri" pitchFamily="34" charset="0"/>
+                <a:ea typeface="Calibri" pitchFamily="34" charset="-122"/>
+                <a:cs typeface="Calibri" pitchFamily="34" charset="-120"/>
+              </a:rPr>
+              <a:t>です。管理画面にログインした状態で開くと、来場者に見えるのと同じ画面を確認できます（プレビューからは回答できません）。</a:t>
             </a:r>
             <a:endParaRPr lang="en-US" sz="1050" dirty="0"/>
           </a:p>
@@ -9902,14 +9802,80 @@
       </p:sp>
       <p:sp>
         <p:nvSpPr>
-          <p:cNvPr id="11" name="Text 9"/>
-          <p:cNvSpPr txBox="1"/>
-          <p:nvPr/>
-        </p:nvSpPr>
-        <p:spPr>
-          <a:xfrm>
-            <a:off x="566928" y="3574796"/>
-            <a:ext cx="6428232" cy="257810"/>
+          <p:cNvPr id="21" name="Shape 19"/>
+          <p:cNvSpPr/>
+          <p:nvPr/>
+        </p:nvSpPr>
+        <p:spPr>
+          <a:xfrm>
+            <a:off x="566928" y="4559173"/>
+            <a:ext cx="6428232" cy="431102"/>
+          </a:xfrm>
+          <a:prstGeom prst="roundRect">
+            <a:avLst>
+              <a:gd name="adj" fmla="val 12726"/>
+            </a:avLst>
+          </a:prstGeom>
+          <a:solidFill>
+            <a:srgbClr val="FDF0E6"/>
+          </a:solidFill>
+          <a:ln w="9525">
+            <a:solidFill>
+              <a:srgbClr val="E08A3C"/>
+            </a:solidFill>
+            <a:prstDash val="solid"/>
+          </a:ln>
+        </p:spPr>
+      </p:sp>
+      <p:sp>
+        <p:nvSpPr>
+          <p:cNvPr id="22" name="Text 20"/>
+          <p:cNvSpPr txBox="1"/>
+          <p:nvPr/>
+        </p:nvSpPr>
+        <p:spPr>
+          <a:xfrm>
+            <a:off x="658368" y="4650613"/>
+            <a:ext cx="237744" cy="237744"/>
+          </a:xfrm>
+          <a:prstGeom prst="rect">
+            <a:avLst/>
+          </a:prstGeom>
+          <a:noFill/>
+          <a:ln/>
+        </p:spPr>
+        <p:txBody>
+          <a:bodyPr wrap="square" lIns="0" tIns="0" rIns="0" bIns="0" rtlCol="0" anchor="ctr"/>
+          <a:lstStyle/>
+          <a:p>
+            <a:pPr algn="ctr" indent="0" marL="0">
+              <a:buNone/>
+            </a:pPr>
+            <a:r>
+              <a:rPr lang="en-US" sz="1200" b="1" dirty="0">
+                <a:solidFill>
+                  <a:srgbClr val="C25A17"/>
+                </a:solidFill>
+                <a:latin typeface="Calibri" pitchFamily="34" charset="0"/>
+                <a:ea typeface="Calibri" pitchFamily="34" charset="-122"/>
+                <a:cs typeface="Calibri" pitchFamily="34" charset="-120"/>
+              </a:rPr>
+              <a:t>！</a:t>
+            </a:r>
+            <a:endParaRPr lang="en-US" sz="1200" dirty="0"/>
+          </a:p>
+        </p:txBody>
+      </p:sp>
+      <p:sp>
+        <p:nvSpPr>
+          <p:cNvPr id="23" name="Text 21"/>
+          <p:cNvSpPr txBox="1"/>
+          <p:nvPr/>
+        </p:nvSpPr>
+        <p:spPr>
+          <a:xfrm>
+            <a:off x="950976" y="4668901"/>
+            <a:ext cx="5925312" cy="248221"/>
           </a:xfrm>
           <a:prstGeom prst="rect">
             <a:avLst/>
@@ -9922,68 +9888,29 @@
           <a:lstStyle/>
           <a:p>
             <a:pPr indent="0" marL="0">
-              <a:buNone/>
-            </a:pPr>
-            <a:r>
-              <a:rPr lang="en-US" sz="1400" b="1" dirty="0">
-                <a:solidFill>
-                  <a:srgbClr val="1E2761"/>
-                </a:solidFill>
-                <a:latin typeface="Calibri" pitchFamily="34" charset="0"/>
-                <a:ea typeface="Calibri" pitchFamily="34" charset="-122"/>
-                <a:cs typeface="Calibri" pitchFamily="34" charset="-120"/>
-              </a:rPr>
-              <a:t>集計画面で見る</a:t>
-            </a:r>
-            <a:endParaRPr lang="en-US" sz="1400" dirty="0"/>
-          </a:p>
-        </p:txBody>
-      </p:sp>
-      <p:sp>
-        <p:nvSpPr>
-          <p:cNvPr id="12" name="Text 10"/>
-          <p:cNvSpPr txBox="1"/>
-          <p:nvPr/>
-        </p:nvSpPr>
-        <p:spPr>
-          <a:xfrm>
-            <a:off x="566928" y="3905758"/>
-            <a:ext cx="6428232" cy="459994"/>
-          </a:xfrm>
-          <a:prstGeom prst="rect">
-            <a:avLst/>
-          </a:prstGeom>
-          <a:noFill/>
-          <a:ln/>
-        </p:spPr>
-        <p:txBody>
-          <a:bodyPr wrap="square" lIns="0" tIns="0" rIns="0" bIns="0" rtlCol="0" anchor="t"/>
-          <a:lstStyle/>
-          <a:p>
-            <a:pPr indent="0" marL="0">
-              <a:lnSpc>
-                <a:spcPct val="125000"/>
-              </a:lnSpc>
-              <a:buNone/>
-            </a:pPr>
-            <a:r>
-              <a:rPr lang="en-US" sz="1100" dirty="0">
-                <a:solidFill>
-                  <a:srgbClr val="222222"/>
-                </a:solidFill>
-                <a:latin typeface="Calibri" pitchFamily="34" charset="0"/>
-                <a:ea typeface="Calibri" pitchFamily="34" charset="-122"/>
-                <a:cs typeface="Calibri" pitchFamily="34" charset="-120"/>
-              </a:rPr>
-              <a:t>企業ごとの「集計」画面では、設問ごとのグラフ・星評価の平均・NPS・自由記述の一覧が見られます。</a:t>
-            </a:r>
-            <a:endParaRPr lang="en-US" sz="1100" dirty="0"/>
+              <a:lnSpc>
+                <a:spcPct val="120000"/>
+              </a:lnSpc>
+              <a:buNone/>
+            </a:pPr>
+            <a:r>
+              <a:rPr lang="en-US" sz="1050" dirty="0">
+                <a:solidFill>
+                  <a:srgbClr val="222222"/>
+                </a:solidFill>
+                <a:latin typeface="Calibri" pitchFamily="34" charset="0"/>
+                <a:ea typeface="Calibri" pitchFamily="34" charset="-122"/>
+                <a:cs typeface="Calibri" pitchFamily="34" charset="-120"/>
+              </a:rPr>
+              <a:t>送信済みの人には二重に送られません。失敗したものは自動で3回まで再送されます。</a:t>
+            </a:r>
+            <a:endParaRPr lang="en-US" sz="1050" dirty="0"/>
           </a:p>
         </p:txBody>
       </p:sp>
       <p:pic>
         <p:nvPicPr>
-          <p:cNvPr id="13" name="Image 0" descr="C:\Users\sato\Desktop\enque\docs\images\o-stats.png">    </p:cNvPr>
+          <p:cNvPr id="24" name="Image 0" descr="C:\Users\sato\Desktop\enque\docs\images\o-invite-status.png">    </p:cNvPr>
           <p:cNvPicPr>
             <a:picLocks noChangeAspect="1"/>
           </p:cNvPicPr>
@@ -9997,8 +9924,8 @@
         </p:blipFill>
         <p:spPr>
           <a:xfrm>
-            <a:off x="2140821" y="4402328"/>
-            <a:ext cx="3280447" cy="3474720"/>
+            <a:off x="1504370" y="5063427"/>
+            <a:ext cx="4553347" cy="3474720"/>
           </a:xfrm>
           <a:prstGeom prst="rect">
             <a:avLst/>
@@ -10007,13 +9934,13 @@
       </p:pic>
       <p:sp>
         <p:nvSpPr>
-          <p:cNvPr id="14" name="Text 11"/>
-          <p:cNvSpPr txBox="1"/>
-          <p:nvPr/>
-        </p:nvSpPr>
-        <p:spPr>
-          <a:xfrm>
-            <a:off x="566928" y="7931912"/>
+          <p:cNvPr id="25" name="Text 22"/>
+          <p:cNvSpPr txBox="1"/>
+          <p:nvPr/>
+        </p:nvSpPr>
+        <p:spPr>
+          <a:xfrm>
+            <a:off x="566928" y="8593011"/>
             <a:ext cx="6428232" cy="274320"/>
           </a:xfrm>
           <a:prstGeom prst="rect">
@@ -10038,7 +9965,7 @@
                 <a:ea typeface="Calibri" pitchFamily="34" charset="-122"/>
                 <a:cs typeface="Calibri" pitchFamily="34" charset="-120"/>
               </a:rPr>
-              <a:t>企業の集計画面。設問ごとのグラフが見えるところ。</a:t>
+              <a:t>「総合アンケートと案内メール」画面の送信状況（未送信・送信済み・失敗・回答済みの数）。</a:t>
             </a:r>
             <a:endParaRPr lang="en-US" sz="950" dirty="0"/>
           </a:p>
@@ -10046,7 +9973,7 @@
       </p:sp>
       <p:sp>
         <p:nvSpPr>
-          <p:cNvPr id="15" name="Text 12"/>
+          <p:cNvPr id="26" name="Text 23"/>
           <p:cNvSpPr txBox="1"/>
           <p:nvPr/>
         </p:nvSpPr>
@@ -10187,7 +10114,7 @@
                 <a:ea typeface="Calibri" pitchFamily="34" charset="-122"/>
                 <a:cs typeface="Calibri" pitchFamily="34" charset="-120"/>
               </a:rPr>
-              <a:t>終了後4：メールアドレスを削除する</a:t>
+              <a:t>終了後3：集計データを受け取る</a:t>
             </a:r>
             <a:endParaRPr lang="en-US" sz="2200" dirty="0"/>
           </a:p>
@@ -10201,7 +10128,166 @@
         </p:nvSpPr>
         <p:spPr>
           <a:xfrm>
-            <a:off x="566928" y="1481328"/>
+            <a:off x="566928" y="1591056"/>
+            <a:ext cx="6428232" cy="257810"/>
+          </a:xfrm>
+          <a:prstGeom prst="rect">
+            <a:avLst/>
+          </a:prstGeom>
+          <a:noFill/>
+          <a:ln/>
+        </p:spPr>
+        <p:txBody>
+          <a:bodyPr wrap="square" lIns="0" tIns="0" rIns="0" bIns="0" rtlCol="0" anchor="t"/>
+          <a:lstStyle/>
+          <a:p>
+            <a:pPr indent="0" marL="0">
+              <a:buNone/>
+            </a:pPr>
+            <a:r>
+              <a:rPr lang="en-US" sz="1400" b="1" dirty="0">
+                <a:solidFill>
+                  <a:srgbClr val="1E2761"/>
+                </a:solidFill>
+                <a:latin typeface="Calibri" pitchFamily="34" charset="0"/>
+                <a:ea typeface="Calibri" pitchFamily="34" charset="-122"/>
+                <a:cs typeface="Calibri" pitchFamily="34" charset="-120"/>
+              </a:rPr>
+              <a:t>CSVをダウンロードする</a:t>
+            </a:r>
+            <a:endParaRPr lang="en-US" sz="1400" dirty="0"/>
+          </a:p>
+        </p:txBody>
+      </p:sp>
+      <p:sp>
+        <p:nvSpPr>
+          <p:cNvPr id="5" name="Text 3"/>
+          <p:cNvSpPr txBox="1"/>
+          <p:nvPr/>
+        </p:nvSpPr>
+        <p:spPr>
+          <a:xfrm>
+            <a:off x="713232" y="1922018"/>
+            <a:ext cx="6281928" cy="257429"/>
+          </a:xfrm>
+          <a:prstGeom prst="rect">
+            <a:avLst/>
+          </a:prstGeom>
+          <a:noFill/>
+          <a:ln/>
+        </p:spPr>
+        <p:txBody>
+          <a:bodyPr wrap="square" lIns="0" tIns="0" rIns="0" bIns="0" rtlCol="0" anchor="t"/>
+          <a:lstStyle/>
+          <a:p>
+            <a:pPr marL="342900" indent="-342900">
+              <a:lnSpc>
+                <a:spcPct val="125000"/>
+              </a:lnSpc>
+              <a:buSzPct val="100000"/>
+              <a:buChar char="●"/>
+            </a:pPr>
+            <a:r>
+              <a:rPr lang="en-US" sz="1100" b="1" dirty="0">
+                <a:solidFill>
+                  <a:srgbClr val="222222"/>
+                </a:solidFill>
+                <a:latin typeface="Calibri" pitchFamily="34" charset="0"/>
+                <a:ea typeface="Calibri" pitchFamily="34" charset="-122"/>
+                <a:cs typeface="Calibri" pitchFamily="34" charset="-120"/>
+              </a:rPr>
+              <a:t>企業別</a:t>
+            </a:r>
+            <a:pPr indent="0" marL="0">
+              <a:lnSpc>
+                <a:spcPct val="125000"/>
+              </a:lnSpc>
+              <a:buNone/>
+            </a:pPr>
+            <a:r>
+              <a:rPr lang="en-US" sz="1100" dirty="0">
+                <a:solidFill>
+                  <a:srgbClr val="222222"/>
+                </a:solidFill>
+                <a:latin typeface="Calibri" pitchFamily="34" charset="0"/>
+                <a:ea typeface="Calibri" pitchFamily="34" charset="-122"/>
+                <a:cs typeface="Calibri" pitchFamily="34" charset="-120"/>
+              </a:rPr>
+              <a:t>：企業の「集計」画面、または「回答一覧」から</a:t>
+            </a:r>
+            <a:endParaRPr lang="en-US" sz="1100" dirty="0"/>
+          </a:p>
+        </p:txBody>
+      </p:sp>
+      <p:sp>
+        <p:nvSpPr>
+          <p:cNvPr id="6" name="Text 4"/>
+          <p:cNvSpPr txBox="1"/>
+          <p:nvPr/>
+        </p:nvSpPr>
+        <p:spPr>
+          <a:xfrm>
+            <a:off x="713232" y="2197735"/>
+            <a:ext cx="6281928" cy="257429"/>
+          </a:xfrm>
+          <a:prstGeom prst="rect">
+            <a:avLst/>
+          </a:prstGeom>
+          <a:noFill/>
+          <a:ln/>
+        </p:spPr>
+        <p:txBody>
+          <a:bodyPr wrap="square" lIns="0" tIns="0" rIns="0" bIns="0" rtlCol="0" anchor="t"/>
+          <a:lstStyle/>
+          <a:p>
+            <a:pPr marL="342900" indent="-342900">
+              <a:lnSpc>
+                <a:spcPct val="125000"/>
+              </a:lnSpc>
+              <a:buSzPct val="100000"/>
+              <a:buChar char="●"/>
+            </a:pPr>
+            <a:r>
+              <a:rPr lang="en-US" sz="1100" b="1" dirty="0">
+                <a:solidFill>
+                  <a:srgbClr val="222222"/>
+                </a:solidFill>
+                <a:latin typeface="Calibri" pitchFamily="34" charset="0"/>
+                <a:ea typeface="Calibri" pitchFamily="34" charset="-122"/>
+                <a:cs typeface="Calibri" pitchFamily="34" charset="-120"/>
+              </a:rPr>
+              <a:t>全社まとめて</a:t>
+            </a:r>
+            <a:pPr indent="0" marL="0">
+              <a:lnSpc>
+                <a:spcPct val="125000"/>
+              </a:lnSpc>
+              <a:buNone/>
+            </a:pPr>
+            <a:r>
+              <a:rPr lang="en-US" sz="1100" dirty="0">
+                <a:solidFill>
+                  <a:srgbClr val="222222"/>
+                </a:solidFill>
+                <a:latin typeface="Calibri" pitchFamily="34" charset="0"/>
+                <a:ea typeface="Calibri" pitchFamily="34" charset="-122"/>
+                <a:cs typeface="Calibri" pitchFamily="34" charset="-120"/>
+              </a:rPr>
+              <a:t>：ダッシュボードの「全企業分のCSV」から</a:t>
+            </a:r>
+            <a:endParaRPr lang="en-US" sz="1100" dirty="0"/>
+          </a:p>
+        </p:txBody>
+      </p:sp>
+      <p:sp>
+        <p:nvSpPr>
+          <p:cNvPr id="7" name="Text 5"/>
+          <p:cNvSpPr txBox="1"/>
+          <p:nvPr/>
+        </p:nvSpPr>
+        <p:spPr>
+          <a:xfrm>
+            <a:off x="566928" y="2473452"/>
             <a:ext cx="6428232" cy="257429"/>
           </a:xfrm>
           <a:prstGeom prst="rect">
@@ -10229,110 +10315,43 @@
                 <a:ea typeface="Calibri" pitchFamily="34" charset="-122"/>
                 <a:cs typeface="Calibri" pitchFamily="34" charset="-120"/>
               </a:rPr>
-              <a:t>案内の送付と集計が終わったら、預かったメールアドレスを削除します。</a:t>
+              <a:t>CSVは</a:t>
+            </a:r>
+            <a:pPr indent="0" marL="0">
+              <a:lnSpc>
+                <a:spcPct val="125000"/>
+              </a:lnSpc>
+              <a:buNone/>
+            </a:pPr>
+            <a:r>
+              <a:rPr lang="en-US" sz="1100" b="1" dirty="0">
+                <a:solidFill>
+                  <a:srgbClr val="222222"/>
+                </a:solidFill>
+                <a:latin typeface="Calibri" pitchFamily="34" charset="0"/>
+                <a:ea typeface="Calibri" pitchFamily="34" charset="-122"/>
+                <a:cs typeface="Calibri" pitchFamily="34" charset="-120"/>
+              </a:rPr>
+              <a:t>UTF-8（BOM付き）</a:t>
+            </a:r>
+            <a:pPr indent="0" marL="0">
+              <a:lnSpc>
+                <a:spcPct val="125000"/>
+              </a:lnSpc>
+              <a:buNone/>
+            </a:pPr>
+            <a:r>
+              <a:rPr lang="en-US" sz="1100" dirty="0">
+                <a:solidFill>
+                  <a:srgbClr val="222222"/>
+                </a:solidFill>
+                <a:latin typeface="Calibri" pitchFamily="34" charset="0"/>
+                <a:ea typeface="Calibri" pitchFamily="34" charset="-122"/>
+                <a:cs typeface="Calibri" pitchFamily="34" charset="-120"/>
+              </a:rPr>
+              <a:t>なので、Excelでそのまま開けます。</a:t>
             </a:r>
             <a:endParaRPr lang="en-US" sz="1100" dirty="0"/>
-          </a:p>
-        </p:txBody>
-      </p:sp>
-      <p:sp>
-        <p:nvSpPr>
-          <p:cNvPr id="5" name="Shape 3"/>
-          <p:cNvSpPr/>
-          <p:nvPr/>
-        </p:nvSpPr>
-        <p:spPr>
-          <a:xfrm>
-            <a:off x="566928" y="1793621"/>
-            <a:ext cx="274320" cy="274320"/>
-          </a:xfrm>
-          <a:prstGeom prst="ellipse">
-            <a:avLst/>
-          </a:prstGeom>
-          <a:solidFill>
-            <a:srgbClr val="1E2761"/>
-          </a:solidFill>
-          <a:ln/>
-        </p:spPr>
-      </p:sp>
-      <p:sp>
-        <p:nvSpPr>
-          <p:cNvPr id="6" name="Text 4"/>
-          <p:cNvSpPr txBox="1"/>
-          <p:nvPr/>
-        </p:nvSpPr>
-        <p:spPr>
-          <a:xfrm>
-            <a:off x="566928" y="1793621"/>
-            <a:ext cx="274320" cy="274320"/>
-          </a:xfrm>
-          <a:prstGeom prst="rect">
-            <a:avLst/>
-          </a:prstGeom>
-          <a:noFill/>
-          <a:ln/>
-        </p:spPr>
-        <p:txBody>
-          <a:bodyPr wrap="square" lIns="0" tIns="0" rIns="0" bIns="0" rtlCol="0" anchor="ctr"/>
-          <a:lstStyle/>
-          <a:p>
-            <a:pPr algn="ctr" indent="0" marL="0">
-              <a:buNone/>
-            </a:pPr>
-            <a:r>
-              <a:rPr lang="en-US" sz="1100" b="1" dirty="0">
-                <a:solidFill>
-                  <a:srgbClr val="FFFFFF"/>
-                </a:solidFill>
-                <a:latin typeface="Calibri" pitchFamily="34" charset="0"/>
-                <a:ea typeface="Calibri" pitchFamily="34" charset="-122"/>
-                <a:cs typeface="Calibri" pitchFamily="34" charset="-120"/>
-              </a:rPr>
-              <a:t>1</a:t>
-            </a:r>
-            <a:endParaRPr lang="en-US" sz="1100" dirty="0"/>
-          </a:p>
-        </p:txBody>
-      </p:sp>
-      <p:sp>
-        <p:nvSpPr>
-          <p:cNvPr id="7" name="Text 5"/>
-          <p:cNvSpPr txBox="1"/>
-          <p:nvPr/>
-        </p:nvSpPr>
-        <p:spPr>
-          <a:xfrm>
-            <a:off x="969264" y="1775333"/>
-            <a:ext cx="6025896" cy="365760"/>
-          </a:xfrm>
-          <a:prstGeom prst="rect">
-            <a:avLst/>
-          </a:prstGeom>
-          <a:noFill/>
-          <a:ln/>
-        </p:spPr>
-        <p:txBody>
-          <a:bodyPr wrap="square" lIns="0" tIns="0" rIns="0" bIns="0" rtlCol="0" anchor="t"/>
-          <a:lstStyle/>
-          <a:p>
-            <a:pPr indent="0" marL="0">
-              <a:lnSpc>
-                <a:spcPct val="125000"/>
-              </a:lnSpc>
-              <a:buNone/>
-            </a:pPr>
-            <a:r>
-              <a:rPr lang="en-US" sz="1150" dirty="0">
-                <a:solidFill>
-                  <a:srgbClr val="222222"/>
-                </a:solidFill>
-                <a:latin typeface="Calibri" pitchFamily="34" charset="0"/>
-                <a:ea typeface="Calibri" pitchFamily="34" charset="-122"/>
-                <a:cs typeface="Calibri" pitchFamily="34" charset="-120"/>
-              </a:rPr>
-              <a:t>「総合アンケート」の画面を開く</a:t>
-            </a:r>
-            <a:endParaRPr lang="en-US" sz="1150" dirty="0"/>
           </a:p>
         </p:txBody>
       </p:sp>
@@ -10344,461 +10363,7 @@
         </p:nvSpPr>
         <p:spPr>
           <a:xfrm>
-            <a:off x="566928" y="2250821"/>
-            <a:ext cx="274320" cy="274320"/>
-          </a:xfrm>
-          <a:prstGeom prst="ellipse">
-            <a:avLst/>
-          </a:prstGeom>
-          <a:solidFill>
-            <a:srgbClr val="1E2761"/>
-          </a:solidFill>
-          <a:ln/>
-        </p:spPr>
-      </p:sp>
-      <p:sp>
-        <p:nvSpPr>
-          <p:cNvPr id="9" name="Text 7"/>
-          <p:cNvSpPr txBox="1"/>
-          <p:nvPr/>
-        </p:nvSpPr>
-        <p:spPr>
-          <a:xfrm>
-            <a:off x="566928" y="2250821"/>
-            <a:ext cx="274320" cy="274320"/>
-          </a:xfrm>
-          <a:prstGeom prst="rect">
-            <a:avLst/>
-          </a:prstGeom>
-          <a:noFill/>
-          <a:ln/>
-        </p:spPr>
-        <p:txBody>
-          <a:bodyPr wrap="square" lIns="0" tIns="0" rIns="0" bIns="0" rtlCol="0" anchor="ctr"/>
-          <a:lstStyle/>
-          <a:p>
-            <a:pPr algn="ctr" indent="0" marL="0">
-              <a:buNone/>
-            </a:pPr>
-            <a:r>
-              <a:rPr lang="en-US" sz="1100" b="1" dirty="0">
-                <a:solidFill>
-                  <a:srgbClr val="FFFFFF"/>
-                </a:solidFill>
-                <a:latin typeface="Calibri" pitchFamily="34" charset="0"/>
-                <a:ea typeface="Calibri" pitchFamily="34" charset="-122"/>
-                <a:cs typeface="Calibri" pitchFamily="34" charset="-120"/>
-              </a:rPr>
-              <a:t>2</a:t>
-            </a:r>
-            <a:endParaRPr lang="en-US" sz="1100" dirty="0"/>
-          </a:p>
-        </p:txBody>
-      </p:sp>
-      <p:sp>
-        <p:nvSpPr>
-          <p:cNvPr id="10" name="Text 8"/>
-          <p:cNvSpPr txBox="1"/>
-          <p:nvPr/>
-        </p:nvSpPr>
-        <p:spPr>
-          <a:xfrm>
-            <a:off x="969264" y="2232533"/>
-            <a:ext cx="6025896" cy="365760"/>
-          </a:xfrm>
-          <a:prstGeom prst="rect">
-            <a:avLst/>
-          </a:prstGeom>
-          <a:noFill/>
-          <a:ln/>
-        </p:spPr>
-        <p:txBody>
-          <a:bodyPr wrap="square" lIns="0" tIns="0" rIns="0" bIns="0" rtlCol="0" anchor="t"/>
-          <a:lstStyle/>
-          <a:p>
-            <a:pPr indent="0" marL="0">
-              <a:lnSpc>
-                <a:spcPct val="125000"/>
-              </a:lnSpc>
-              <a:buNone/>
-            </a:pPr>
-            <a:r>
-              <a:rPr lang="en-US" sz="1150" dirty="0">
-                <a:solidFill>
-                  <a:srgbClr val="222222"/>
-                </a:solidFill>
-                <a:latin typeface="Calibri" pitchFamily="34" charset="0"/>
-                <a:ea typeface="Calibri" pitchFamily="34" charset="-122"/>
-                <a:cs typeface="Calibri" pitchFamily="34" charset="-120"/>
-              </a:rPr>
-              <a:t>一番下の</a:t>
-            </a:r>
-            <a:pPr indent="0" marL="0">
-              <a:lnSpc>
-                <a:spcPct val="125000"/>
-              </a:lnSpc>
-              <a:buNone/>
-            </a:pPr>
-            <a:r>
-              <a:rPr lang="en-US" sz="1150" b="1" dirty="0">
-                <a:solidFill>
-                  <a:srgbClr val="222222"/>
-                </a:solidFill>
-                <a:latin typeface="Calibri" pitchFamily="34" charset="0"/>
-                <a:ea typeface="Calibri" pitchFamily="34" charset="-122"/>
-                <a:cs typeface="Calibri" pitchFamily="34" charset="-120"/>
-              </a:rPr>
-              <a:t>「メールアドレスを削除する」</a:t>
-            </a:r>
-            <a:pPr indent="0" marL="0">
-              <a:lnSpc>
-                <a:spcPct val="125000"/>
-              </a:lnSpc>
-              <a:buNone/>
-            </a:pPr>
-            <a:r>
-              <a:rPr lang="en-US" sz="1150" dirty="0">
-                <a:solidFill>
-                  <a:srgbClr val="222222"/>
-                </a:solidFill>
-                <a:latin typeface="Calibri" pitchFamily="34" charset="0"/>
-                <a:ea typeface="Calibri" pitchFamily="34" charset="-122"/>
-                <a:cs typeface="Calibri" pitchFamily="34" charset="-120"/>
-              </a:rPr>
-              <a:t>を押す</a:t>
-            </a:r>
-            <a:endParaRPr lang="en-US" sz="1150" dirty="0"/>
-          </a:p>
-        </p:txBody>
-      </p:sp>
-      <p:sp>
-        <p:nvSpPr>
-          <p:cNvPr id="11" name="Shape 9"/>
-          <p:cNvSpPr/>
-          <p:nvPr/>
-        </p:nvSpPr>
-        <p:spPr>
-          <a:xfrm>
-            <a:off x="566928" y="2708021"/>
-            <a:ext cx="274320" cy="274320"/>
-          </a:xfrm>
-          <a:prstGeom prst="ellipse">
-            <a:avLst/>
-          </a:prstGeom>
-          <a:solidFill>
-            <a:srgbClr val="1E2761"/>
-          </a:solidFill>
-          <a:ln/>
-        </p:spPr>
-      </p:sp>
-      <p:sp>
-        <p:nvSpPr>
-          <p:cNvPr id="12" name="Text 10"/>
-          <p:cNvSpPr txBox="1"/>
-          <p:nvPr/>
-        </p:nvSpPr>
-        <p:spPr>
-          <a:xfrm>
-            <a:off x="566928" y="2708021"/>
-            <a:ext cx="274320" cy="274320"/>
-          </a:xfrm>
-          <a:prstGeom prst="rect">
-            <a:avLst/>
-          </a:prstGeom>
-          <a:noFill/>
-          <a:ln/>
-        </p:spPr>
-        <p:txBody>
-          <a:bodyPr wrap="square" lIns="0" tIns="0" rIns="0" bIns="0" rtlCol="0" anchor="ctr"/>
-          <a:lstStyle/>
-          <a:p>
-            <a:pPr algn="ctr" indent="0" marL="0">
-              <a:buNone/>
-            </a:pPr>
-            <a:r>
-              <a:rPr lang="en-US" sz="1100" b="1" dirty="0">
-                <a:solidFill>
-                  <a:srgbClr val="FFFFFF"/>
-                </a:solidFill>
-                <a:latin typeface="Calibri" pitchFamily="34" charset="0"/>
-                <a:ea typeface="Calibri" pitchFamily="34" charset="-122"/>
-                <a:cs typeface="Calibri" pitchFamily="34" charset="-120"/>
-              </a:rPr>
-              <a:t>3</a:t>
-            </a:r>
-            <a:endParaRPr lang="en-US" sz="1100" dirty="0"/>
-          </a:p>
-        </p:txBody>
-      </p:sp>
-      <p:sp>
-        <p:nvSpPr>
-          <p:cNvPr id="13" name="Text 11"/>
-          <p:cNvSpPr txBox="1"/>
-          <p:nvPr/>
-        </p:nvSpPr>
-        <p:spPr>
-          <a:xfrm>
-            <a:off x="969264" y="2689733"/>
-            <a:ext cx="6025896" cy="365760"/>
-          </a:xfrm>
-          <a:prstGeom prst="rect">
-            <a:avLst/>
-          </a:prstGeom>
-          <a:noFill/>
-          <a:ln/>
-        </p:spPr>
-        <p:txBody>
-          <a:bodyPr wrap="square" lIns="0" tIns="0" rIns="0" bIns="0" rtlCol="0" anchor="t"/>
-          <a:lstStyle/>
-          <a:p>
-            <a:pPr indent="0" marL="0">
-              <a:lnSpc>
-                <a:spcPct val="125000"/>
-              </a:lnSpc>
-              <a:buNone/>
-            </a:pPr>
-            <a:r>
-              <a:rPr lang="en-US" sz="1150" dirty="0">
-                <a:solidFill>
-                  <a:srgbClr val="222222"/>
-                </a:solidFill>
-                <a:latin typeface="Calibri" pitchFamily="34" charset="0"/>
-                <a:ea typeface="Calibri" pitchFamily="34" charset="-122"/>
-                <a:cs typeface="Calibri" pitchFamily="34" charset="-120"/>
-              </a:rPr>
-              <a:t>確認メッセージで「OK」を押す</a:t>
-            </a:r>
-            <a:endParaRPr lang="en-US" sz="1150" dirty="0"/>
-          </a:p>
-        </p:txBody>
-      </p:sp>
-      <p:sp>
-        <p:nvSpPr>
-          <p:cNvPr id="14" name="Text 12"/>
-          <p:cNvSpPr txBox="1"/>
-          <p:nvPr/>
-        </p:nvSpPr>
-        <p:spPr>
-          <a:xfrm>
-            <a:off x="566928" y="3146933"/>
-            <a:ext cx="6428232" cy="257429"/>
-          </a:xfrm>
-          <a:prstGeom prst="rect">
-            <a:avLst/>
-          </a:prstGeom>
-          <a:noFill/>
-          <a:ln/>
-        </p:spPr>
-        <p:txBody>
-          <a:bodyPr wrap="square" lIns="0" tIns="0" rIns="0" bIns="0" rtlCol="0" anchor="t"/>
-          <a:lstStyle/>
-          <a:p>
-            <a:pPr indent="0" marL="0">
-              <a:lnSpc>
-                <a:spcPct val="125000"/>
-              </a:lnSpc>
-              <a:buNone/>
-            </a:pPr>
-            <a:r>
-              <a:rPr lang="en-US" sz="1100" dirty="0">
-                <a:solidFill>
-                  <a:srgbClr val="222222"/>
-                </a:solidFill>
-                <a:latin typeface="Calibri" pitchFamily="34" charset="0"/>
-                <a:ea typeface="Calibri" pitchFamily="34" charset="-122"/>
-                <a:cs typeface="Calibri" pitchFamily="34" charset="-120"/>
-              </a:rPr>
-              <a:t>削除しても、</a:t>
-            </a:r>
-            <a:pPr indent="0" marL="0">
-              <a:lnSpc>
-                <a:spcPct val="125000"/>
-              </a:lnSpc>
-              <a:buNone/>
-            </a:pPr>
-            <a:r>
-              <a:rPr lang="en-US" sz="1100" b="1" dirty="0">
-                <a:solidFill>
-                  <a:srgbClr val="222222"/>
-                </a:solidFill>
-                <a:latin typeface="Calibri" pitchFamily="34" charset="0"/>
-                <a:ea typeface="Calibri" pitchFamily="34" charset="-122"/>
-                <a:cs typeface="Calibri" pitchFamily="34" charset="-120"/>
-              </a:rPr>
-              <a:t>回答データ（個人情報を含まないもの）は残ります</a:t>
-            </a:r>
-            <a:pPr indent="0" marL="0">
-              <a:lnSpc>
-                <a:spcPct val="125000"/>
-              </a:lnSpc>
-              <a:buNone/>
-            </a:pPr>
-            <a:r>
-              <a:rPr lang="en-US" sz="1100" dirty="0">
-                <a:solidFill>
-                  <a:srgbClr val="222222"/>
-                </a:solidFill>
-                <a:latin typeface="Calibri" pitchFamily="34" charset="0"/>
-                <a:ea typeface="Calibri" pitchFamily="34" charset="-122"/>
-                <a:cs typeface="Calibri" pitchFamily="34" charset="-120"/>
-              </a:rPr>
-              <a:t>。</a:t>
-            </a:r>
-            <a:endParaRPr lang="en-US" sz="1100" dirty="0"/>
-          </a:p>
-        </p:txBody>
-      </p:sp>
-      <p:sp>
-        <p:nvSpPr>
-          <p:cNvPr id="15" name="Shape 13"/>
-          <p:cNvSpPr/>
-          <p:nvPr/>
-        </p:nvSpPr>
-        <p:spPr>
-          <a:xfrm>
-            <a:off x="566928" y="3440938"/>
-            <a:ext cx="6428232" cy="624459"/>
-          </a:xfrm>
-          <a:prstGeom prst="roundRect">
-            <a:avLst>
-              <a:gd name="adj" fmla="val 8786"/>
-            </a:avLst>
-          </a:prstGeom>
-          <a:solidFill>
-            <a:srgbClr val="FDF0E6"/>
-          </a:solidFill>
-          <a:ln w="9525">
-            <a:solidFill>
-              <a:srgbClr val="E08A3C"/>
-            </a:solidFill>
-            <a:prstDash val="solid"/>
-          </a:ln>
-        </p:spPr>
-      </p:sp>
-      <p:sp>
-        <p:nvSpPr>
-          <p:cNvPr id="16" name="Text 14"/>
-          <p:cNvSpPr txBox="1"/>
-          <p:nvPr/>
-        </p:nvSpPr>
-        <p:spPr>
-          <a:xfrm>
-            <a:off x="658368" y="3532378"/>
-            <a:ext cx="237744" cy="237744"/>
-          </a:xfrm>
-          <a:prstGeom prst="rect">
-            <a:avLst/>
-          </a:prstGeom>
-          <a:noFill/>
-          <a:ln/>
-        </p:spPr>
-        <p:txBody>
-          <a:bodyPr wrap="square" lIns="0" tIns="0" rIns="0" bIns="0" rtlCol="0" anchor="ctr"/>
-          <a:lstStyle/>
-          <a:p>
-            <a:pPr algn="ctr" indent="0" marL="0">
-              <a:buNone/>
-            </a:pPr>
-            <a:r>
-              <a:rPr lang="en-US" sz="1200" b="1" dirty="0">
-                <a:solidFill>
-                  <a:srgbClr val="C25A17"/>
-                </a:solidFill>
-                <a:latin typeface="Calibri" pitchFamily="34" charset="0"/>
-                <a:ea typeface="Calibri" pitchFamily="34" charset="-122"/>
-                <a:cs typeface="Calibri" pitchFamily="34" charset="-120"/>
-              </a:rPr>
-              <a:t>！</a:t>
-            </a:r>
-            <a:endParaRPr lang="en-US" sz="1200" dirty="0"/>
-          </a:p>
-        </p:txBody>
-      </p:sp>
-      <p:sp>
-        <p:nvSpPr>
-          <p:cNvPr id="17" name="Text 15"/>
-          <p:cNvSpPr txBox="1"/>
-          <p:nvPr/>
-        </p:nvSpPr>
-        <p:spPr>
-          <a:xfrm>
-            <a:off x="950976" y="3550666"/>
-            <a:ext cx="5925312" cy="441579"/>
-          </a:xfrm>
-          <a:prstGeom prst="rect">
-            <a:avLst/>
-          </a:prstGeom>
-          <a:noFill/>
-          <a:ln/>
-        </p:spPr>
-        <p:txBody>
-          <a:bodyPr wrap="square" lIns="0" tIns="0" rIns="0" bIns="0" rtlCol="0" anchor="t"/>
-          <a:lstStyle/>
-          <a:p>
-            <a:pPr indent="0" marL="0">
-              <a:lnSpc>
-                <a:spcPct val="120000"/>
-              </a:lnSpc>
-              <a:buNone/>
-            </a:pPr>
-            <a:r>
-              <a:rPr lang="en-US" sz="1050" dirty="0">
-                <a:solidFill>
-                  <a:srgbClr val="222222"/>
-                </a:solidFill>
-                <a:latin typeface="Calibri" pitchFamily="34" charset="0"/>
-                <a:ea typeface="Calibri" pitchFamily="34" charset="-122"/>
-                <a:cs typeface="Calibri" pitchFamily="34" charset="-120"/>
-              </a:rPr>
-              <a:t>削除すると、未送信ぶんの案内メールは送れなくなります。</a:t>
-            </a:r>
-            <a:pPr indent="0" marL="0">
-              <a:lnSpc>
-                <a:spcPct val="120000"/>
-              </a:lnSpc>
-              <a:buNone/>
-            </a:pPr>
-            <a:r>
-              <a:rPr lang="en-US" sz="1050" b="1" dirty="0">
-                <a:solidFill>
-                  <a:srgbClr val="222222"/>
-                </a:solidFill>
-                <a:latin typeface="Calibri" pitchFamily="34" charset="0"/>
-                <a:ea typeface="Calibri" pitchFamily="34" charset="-122"/>
-                <a:cs typeface="Calibri" pitchFamily="34" charset="-120"/>
-              </a:rPr>
-              <a:t>送信と集計が完全に終わってから</a:t>
-            </a:r>
-            <a:pPr indent="0" marL="0">
-              <a:lnSpc>
-                <a:spcPct val="120000"/>
-              </a:lnSpc>
-              <a:buNone/>
-            </a:pPr>
-            <a:r>
-              <a:rPr lang="en-US" sz="1050" dirty="0">
-                <a:solidFill>
-                  <a:srgbClr val="222222"/>
-                </a:solidFill>
-                <a:latin typeface="Calibri" pitchFamily="34" charset="0"/>
-                <a:ea typeface="Calibri" pitchFamily="34" charset="-122"/>
-                <a:cs typeface="Calibri" pitchFamily="34" charset="-120"/>
-              </a:rPr>
-              <a:t>実行してください。</a:t>
-            </a:r>
-            <a:endParaRPr lang="en-US" sz="1050" dirty="0"/>
-          </a:p>
-        </p:txBody>
-      </p:sp>
-      <p:sp>
-        <p:nvSpPr>
-          <p:cNvPr id="18" name="Shape 16"/>
-          <p:cNvSpPr/>
-          <p:nvPr/>
-        </p:nvSpPr>
-        <p:spPr>
-          <a:xfrm>
-            <a:off x="566928" y="4138549"/>
+            <a:off x="566928" y="2767457"/>
             <a:ext cx="6428232" cy="624459"/>
           </a:xfrm>
           <a:prstGeom prst="roundRect">
@@ -10819,13 +10384,13 @@
       </p:sp>
       <p:sp>
         <p:nvSpPr>
-          <p:cNvPr id="19" name="Text 17"/>
-          <p:cNvSpPr txBox="1"/>
-          <p:nvPr/>
-        </p:nvSpPr>
-        <p:spPr>
-          <a:xfrm>
-            <a:off x="658368" y="4229989"/>
+          <p:cNvPr id="9" name="Text 7"/>
+          <p:cNvSpPr txBox="1"/>
+          <p:nvPr/>
+        </p:nvSpPr>
+        <p:spPr>
+          <a:xfrm>
+            <a:off x="658368" y="2858897"/>
             <a:ext cx="237744" cy="237744"/>
           </a:xfrm>
           <a:prstGeom prst="rect">
@@ -10858,13 +10423,13 @@
       </p:sp>
       <p:sp>
         <p:nvSpPr>
-          <p:cNvPr id="20" name="Text 18"/>
-          <p:cNvSpPr txBox="1"/>
-          <p:nvPr/>
-        </p:nvSpPr>
-        <p:spPr>
-          <a:xfrm>
-            <a:off x="950976" y="4248277"/>
+          <p:cNvPr id="10" name="Text 8"/>
+          <p:cNvSpPr txBox="1"/>
+          <p:nvPr/>
+        </p:nvSpPr>
+        <p:spPr>
+          <a:xfrm>
+            <a:off x="950976" y="2877185"/>
             <a:ext cx="5925312" cy="441579"/>
           </a:xfrm>
           <a:prstGeom prst="rect">
@@ -10892,15 +10457,96 @@
                 <a:ea typeface="Calibri" pitchFamily="34" charset="-122"/>
                 <a:cs typeface="Calibri" pitchFamily="34" charset="-120"/>
               </a:rPr>
-              <a:t>「氏名・住所は収集せず、メールアドレスも送付・集計後に削除する」という運用方針に沿った操作です。来場者にもその旨を案内しています。</a:t>
+              <a:t>メールアドレスは出力されません。来場者は匿名のID（来場者ID）だけが入るので、企業をまたいだ同じ方の回答を突き合わせられます。</a:t>
             </a:r>
             <a:endParaRPr lang="en-US" sz="1050" dirty="0"/>
+          </a:p>
+        </p:txBody>
+      </p:sp>
+      <p:sp>
+        <p:nvSpPr>
+          <p:cNvPr id="11" name="Text 9"/>
+          <p:cNvSpPr txBox="1"/>
+          <p:nvPr/>
+        </p:nvSpPr>
+        <p:spPr>
+          <a:xfrm>
+            <a:off x="566928" y="3574796"/>
+            <a:ext cx="6428232" cy="257810"/>
+          </a:xfrm>
+          <a:prstGeom prst="rect">
+            <a:avLst/>
+          </a:prstGeom>
+          <a:noFill/>
+          <a:ln/>
+        </p:spPr>
+        <p:txBody>
+          <a:bodyPr wrap="square" lIns="0" tIns="0" rIns="0" bIns="0" rtlCol="0" anchor="t"/>
+          <a:lstStyle/>
+          <a:p>
+            <a:pPr indent="0" marL="0">
+              <a:buNone/>
+            </a:pPr>
+            <a:r>
+              <a:rPr lang="en-US" sz="1400" b="1" dirty="0">
+                <a:solidFill>
+                  <a:srgbClr val="1E2761"/>
+                </a:solidFill>
+                <a:latin typeface="Calibri" pitchFamily="34" charset="0"/>
+                <a:ea typeface="Calibri" pitchFamily="34" charset="-122"/>
+                <a:cs typeface="Calibri" pitchFamily="34" charset="-120"/>
+              </a:rPr>
+              <a:t>集計画面で見る</a:t>
+            </a:r>
+            <a:endParaRPr lang="en-US" sz="1400" dirty="0"/>
+          </a:p>
+        </p:txBody>
+      </p:sp>
+      <p:sp>
+        <p:nvSpPr>
+          <p:cNvPr id="12" name="Text 10"/>
+          <p:cNvSpPr txBox="1"/>
+          <p:nvPr/>
+        </p:nvSpPr>
+        <p:spPr>
+          <a:xfrm>
+            <a:off x="566928" y="3905758"/>
+            <a:ext cx="6428232" cy="459994"/>
+          </a:xfrm>
+          <a:prstGeom prst="rect">
+            <a:avLst/>
+          </a:prstGeom>
+          <a:noFill/>
+          <a:ln/>
+        </p:spPr>
+        <p:txBody>
+          <a:bodyPr wrap="square" lIns="0" tIns="0" rIns="0" bIns="0" rtlCol="0" anchor="t"/>
+          <a:lstStyle/>
+          <a:p>
+            <a:pPr indent="0" marL="0">
+              <a:lnSpc>
+                <a:spcPct val="125000"/>
+              </a:lnSpc>
+              <a:buNone/>
+            </a:pPr>
+            <a:r>
+              <a:rPr lang="en-US" sz="1100" dirty="0">
+                <a:solidFill>
+                  <a:srgbClr val="222222"/>
+                </a:solidFill>
+                <a:latin typeface="Calibri" pitchFamily="34" charset="0"/>
+                <a:ea typeface="Calibri" pitchFamily="34" charset="-122"/>
+                <a:cs typeface="Calibri" pitchFamily="34" charset="-120"/>
+              </a:rPr>
+              <a:t>企業ごとの「集計」画面では、設問ごとのグラフ・星評価の平均・NPS・自由記述の一覧が見られます。</a:t>
+            </a:r>
+            <a:endParaRPr lang="en-US" sz="1100" dirty="0"/>
           </a:p>
         </p:txBody>
       </p:sp>
       <p:pic>
         <p:nvPicPr>
-          <p:cNvPr id="21" name="Image 0" descr="C:\Users\sato\Desktop\enque\docs\images\o-purge.png">    </p:cNvPr>
+          <p:cNvPr id="13" name="Image 0" descr="C:\Users\sato\Desktop\enque\docs\images\o-stats.png">    </p:cNvPr>
           <p:cNvPicPr>
             <a:picLocks noChangeAspect="1"/>
           </p:cNvPicPr>
@@ -10914,8 +10560,8 @@
         </p:blipFill>
         <p:spPr>
           <a:xfrm>
-            <a:off x="936779" y="4836160"/>
-            <a:ext cx="5688531" cy="3474720"/>
+            <a:off x="2140821" y="4402328"/>
+            <a:ext cx="3280447" cy="3474720"/>
           </a:xfrm>
           <a:prstGeom prst="rect">
             <a:avLst/>
@@ -10924,13 +10570,13 @@
       </p:pic>
       <p:sp>
         <p:nvSpPr>
-          <p:cNvPr id="22" name="Text 19"/>
-          <p:cNvSpPr txBox="1"/>
-          <p:nvPr/>
-        </p:nvSpPr>
-        <p:spPr>
-          <a:xfrm>
-            <a:off x="566928" y="8365744"/>
+          <p:cNvPr id="14" name="Text 11"/>
+          <p:cNvSpPr txBox="1"/>
+          <p:nvPr/>
+        </p:nvSpPr>
+        <p:spPr>
+          <a:xfrm>
+            <a:off x="566928" y="7931912"/>
             <a:ext cx="6428232" cy="274320"/>
           </a:xfrm>
           <a:prstGeom prst="rect">
@@ -10955,7 +10601,7 @@
                 <a:ea typeface="Calibri" pitchFamily="34" charset="-122"/>
                 <a:cs typeface="Calibri" pitchFamily="34" charset="-120"/>
               </a:rPr>
-              <a:t>「メールアドレスを削除する」ボタンの周辺（説明文が見えるもの）。</a:t>
+              <a:t>企業の集計画面。設問ごとのグラフが見えるところ。</a:t>
             </a:r>
             <a:endParaRPr lang="en-US" sz="950" dirty="0"/>
           </a:p>
@@ -10963,7 +10609,7 @@
       </p:sp>
       <p:sp>
         <p:nvSpPr>
-          <p:cNvPr id="23" name="Text 20"/>
+          <p:cNvPr id="15" name="Text 12"/>
           <p:cNvSpPr txBox="1"/>
           <p:nvPr/>
         </p:nvSpPr>
@@ -11104,7 +10750,7 @@
                 <a:ea typeface="Calibri" pitchFamily="34" charset="-122"/>
                 <a:cs typeface="Calibri" pitchFamily="34" charset="-120"/>
               </a:rPr>
-              <a:t>次のイベントに向けて（データの整理）</a:t>
+              <a:t>終了後4：メールアドレスを削除する</a:t>
             </a:r>
             <a:endParaRPr lang="en-US" sz="2200" dirty="0"/>
           </a:p>
@@ -11119,7 +10765,7 @@
         <p:spPr>
           <a:xfrm>
             <a:off x="566928" y="1481328"/>
-            <a:ext cx="6428232" cy="459994"/>
+            <a:ext cx="6428232" cy="257429"/>
           </a:xfrm>
           <a:prstGeom prst="rect">
             <a:avLst/>
@@ -11146,7 +10792,7 @@
                 <a:ea typeface="Calibri" pitchFamily="34" charset="-122"/>
                 <a:cs typeface="Calibri" pitchFamily="34" charset="-120"/>
               </a:rPr>
-              <a:t>サーバーで次のコマンドを実行します（事務局のPCではなく、システムが動いているサーバーでの作業です）。</a:t>
+              <a:t>案内の送付と集計が終わったら、預かったメールアドレスを削除します。</a:t>
             </a:r>
             <a:endParaRPr lang="en-US" sz="1100" dirty="0"/>
           </a:p>
@@ -11154,14 +10800,73 @@
       </p:sp>
       <p:sp>
         <p:nvSpPr>
-          <p:cNvPr id="5" name="Text 3"/>
-          <p:cNvSpPr txBox="1"/>
-          <p:nvPr/>
-        </p:nvSpPr>
-        <p:spPr>
-          <a:xfrm>
-            <a:off x="566928" y="2087626"/>
-            <a:ext cx="6428232" cy="257810"/>
+          <p:cNvPr id="5" name="Shape 3"/>
+          <p:cNvSpPr/>
+          <p:nvPr/>
+        </p:nvSpPr>
+        <p:spPr>
+          <a:xfrm>
+            <a:off x="566928" y="1793621"/>
+            <a:ext cx="274320" cy="274320"/>
+          </a:xfrm>
+          <a:prstGeom prst="ellipse">
+            <a:avLst/>
+          </a:prstGeom>
+          <a:solidFill>
+            <a:srgbClr val="1E2761"/>
+          </a:solidFill>
+          <a:ln/>
+        </p:spPr>
+      </p:sp>
+      <p:sp>
+        <p:nvSpPr>
+          <p:cNvPr id="6" name="Text 4"/>
+          <p:cNvSpPr txBox="1"/>
+          <p:nvPr/>
+        </p:nvSpPr>
+        <p:spPr>
+          <a:xfrm>
+            <a:off x="566928" y="1793621"/>
+            <a:ext cx="274320" cy="274320"/>
+          </a:xfrm>
+          <a:prstGeom prst="rect">
+            <a:avLst/>
+          </a:prstGeom>
+          <a:noFill/>
+          <a:ln/>
+        </p:spPr>
+        <p:txBody>
+          <a:bodyPr wrap="square" lIns="0" tIns="0" rIns="0" bIns="0" rtlCol="0" anchor="ctr"/>
+          <a:lstStyle/>
+          <a:p>
+            <a:pPr algn="ctr" indent="0" marL="0">
+              <a:buNone/>
+            </a:pPr>
+            <a:r>
+              <a:rPr lang="en-US" sz="1100" b="1" dirty="0">
+                <a:solidFill>
+                  <a:srgbClr val="FFFFFF"/>
+                </a:solidFill>
+                <a:latin typeface="Calibri" pitchFamily="34" charset="0"/>
+                <a:ea typeface="Calibri" pitchFamily="34" charset="-122"/>
+                <a:cs typeface="Calibri" pitchFamily="34" charset="-120"/>
+              </a:rPr>
+              <a:t>1</a:t>
+            </a:r>
+            <a:endParaRPr lang="en-US" sz="1100" dirty="0"/>
+          </a:p>
+        </p:txBody>
+      </p:sp>
+      <p:sp>
+        <p:nvSpPr>
+          <p:cNvPr id="7" name="Text 5"/>
+          <p:cNvSpPr txBox="1"/>
+          <p:nvPr/>
+        </p:nvSpPr>
+        <p:spPr>
+          <a:xfrm>
+            <a:off x="969264" y="1775333"/>
+            <a:ext cx="6025896" cy="365760"/>
           </a:xfrm>
           <a:prstGeom prst="rect">
             <a:avLst/>
@@ -11174,32 +10879,271 @@
           <a:lstStyle/>
           <a:p>
             <a:pPr indent="0" marL="0">
-              <a:buNone/>
-            </a:pPr>
-            <a:r>
-              <a:rPr lang="en-US" sz="1400" b="1" dirty="0">
-                <a:solidFill>
-                  <a:srgbClr val="1E2761"/>
-                </a:solidFill>
-                <a:latin typeface="Calibri" pitchFamily="34" charset="0"/>
-                <a:ea typeface="Calibri" pitchFamily="34" charset="-122"/>
-                <a:cs typeface="Calibri" pitchFamily="34" charset="-120"/>
-              </a:rPr>
-              <a:t>テストで入れた回答だけ消したいとき</a:t>
-            </a:r>
-            <a:endParaRPr lang="en-US" sz="1400" dirty="0"/>
-          </a:p>
-        </p:txBody>
-      </p:sp>
-      <p:sp>
-        <p:nvSpPr>
-          <p:cNvPr id="6" name="Text 4"/>
-          <p:cNvSpPr txBox="1"/>
-          <p:nvPr/>
-        </p:nvSpPr>
-        <p:spPr>
-          <a:xfrm>
-            <a:off x="566928" y="2418588"/>
+              <a:lnSpc>
+                <a:spcPct val="125000"/>
+              </a:lnSpc>
+              <a:buNone/>
+            </a:pPr>
+            <a:r>
+              <a:rPr lang="en-US" sz="1150" dirty="0">
+                <a:solidFill>
+                  <a:srgbClr val="222222"/>
+                </a:solidFill>
+                <a:latin typeface="Calibri" pitchFamily="34" charset="0"/>
+                <a:ea typeface="Calibri" pitchFamily="34" charset="-122"/>
+                <a:cs typeface="Calibri" pitchFamily="34" charset="-120"/>
+              </a:rPr>
+              <a:t>「総合アンケート」の画面を開く</a:t>
+            </a:r>
+            <a:endParaRPr lang="en-US" sz="1150" dirty="0"/>
+          </a:p>
+        </p:txBody>
+      </p:sp>
+      <p:sp>
+        <p:nvSpPr>
+          <p:cNvPr id="8" name="Shape 6"/>
+          <p:cNvSpPr/>
+          <p:nvPr/>
+        </p:nvSpPr>
+        <p:spPr>
+          <a:xfrm>
+            <a:off x="566928" y="2250821"/>
+            <a:ext cx="274320" cy="274320"/>
+          </a:xfrm>
+          <a:prstGeom prst="ellipse">
+            <a:avLst/>
+          </a:prstGeom>
+          <a:solidFill>
+            <a:srgbClr val="1E2761"/>
+          </a:solidFill>
+          <a:ln/>
+        </p:spPr>
+      </p:sp>
+      <p:sp>
+        <p:nvSpPr>
+          <p:cNvPr id="9" name="Text 7"/>
+          <p:cNvSpPr txBox="1"/>
+          <p:nvPr/>
+        </p:nvSpPr>
+        <p:spPr>
+          <a:xfrm>
+            <a:off x="566928" y="2250821"/>
+            <a:ext cx="274320" cy="274320"/>
+          </a:xfrm>
+          <a:prstGeom prst="rect">
+            <a:avLst/>
+          </a:prstGeom>
+          <a:noFill/>
+          <a:ln/>
+        </p:spPr>
+        <p:txBody>
+          <a:bodyPr wrap="square" lIns="0" tIns="0" rIns="0" bIns="0" rtlCol="0" anchor="ctr"/>
+          <a:lstStyle/>
+          <a:p>
+            <a:pPr algn="ctr" indent="0" marL="0">
+              <a:buNone/>
+            </a:pPr>
+            <a:r>
+              <a:rPr lang="en-US" sz="1100" b="1" dirty="0">
+                <a:solidFill>
+                  <a:srgbClr val="FFFFFF"/>
+                </a:solidFill>
+                <a:latin typeface="Calibri" pitchFamily="34" charset="0"/>
+                <a:ea typeface="Calibri" pitchFamily="34" charset="-122"/>
+                <a:cs typeface="Calibri" pitchFamily="34" charset="-120"/>
+              </a:rPr>
+              <a:t>2</a:t>
+            </a:r>
+            <a:endParaRPr lang="en-US" sz="1100" dirty="0"/>
+          </a:p>
+        </p:txBody>
+      </p:sp>
+      <p:sp>
+        <p:nvSpPr>
+          <p:cNvPr id="10" name="Text 8"/>
+          <p:cNvSpPr txBox="1"/>
+          <p:nvPr/>
+        </p:nvSpPr>
+        <p:spPr>
+          <a:xfrm>
+            <a:off x="969264" y="2232533"/>
+            <a:ext cx="6025896" cy="365760"/>
+          </a:xfrm>
+          <a:prstGeom prst="rect">
+            <a:avLst/>
+          </a:prstGeom>
+          <a:noFill/>
+          <a:ln/>
+        </p:spPr>
+        <p:txBody>
+          <a:bodyPr wrap="square" lIns="0" tIns="0" rIns="0" bIns="0" rtlCol="0" anchor="t"/>
+          <a:lstStyle/>
+          <a:p>
+            <a:pPr indent="0" marL="0">
+              <a:lnSpc>
+                <a:spcPct val="125000"/>
+              </a:lnSpc>
+              <a:buNone/>
+            </a:pPr>
+            <a:r>
+              <a:rPr lang="en-US" sz="1150" dirty="0">
+                <a:solidFill>
+                  <a:srgbClr val="222222"/>
+                </a:solidFill>
+                <a:latin typeface="Calibri" pitchFamily="34" charset="0"/>
+                <a:ea typeface="Calibri" pitchFamily="34" charset="-122"/>
+                <a:cs typeface="Calibri" pitchFamily="34" charset="-120"/>
+              </a:rPr>
+              <a:t>一番下の</a:t>
+            </a:r>
+            <a:pPr indent="0" marL="0">
+              <a:lnSpc>
+                <a:spcPct val="125000"/>
+              </a:lnSpc>
+              <a:buNone/>
+            </a:pPr>
+            <a:r>
+              <a:rPr lang="en-US" sz="1150" b="1" dirty="0">
+                <a:solidFill>
+                  <a:srgbClr val="222222"/>
+                </a:solidFill>
+                <a:latin typeface="Calibri" pitchFamily="34" charset="0"/>
+                <a:ea typeface="Calibri" pitchFamily="34" charset="-122"/>
+                <a:cs typeface="Calibri" pitchFamily="34" charset="-120"/>
+              </a:rPr>
+              <a:t>「メールアドレスを削除する」</a:t>
+            </a:r>
+            <a:pPr indent="0" marL="0">
+              <a:lnSpc>
+                <a:spcPct val="125000"/>
+              </a:lnSpc>
+              <a:buNone/>
+            </a:pPr>
+            <a:r>
+              <a:rPr lang="en-US" sz="1150" dirty="0">
+                <a:solidFill>
+                  <a:srgbClr val="222222"/>
+                </a:solidFill>
+                <a:latin typeface="Calibri" pitchFamily="34" charset="0"/>
+                <a:ea typeface="Calibri" pitchFamily="34" charset="-122"/>
+                <a:cs typeface="Calibri" pitchFamily="34" charset="-120"/>
+              </a:rPr>
+              <a:t>を押す</a:t>
+            </a:r>
+            <a:endParaRPr lang="en-US" sz="1150" dirty="0"/>
+          </a:p>
+        </p:txBody>
+      </p:sp>
+      <p:sp>
+        <p:nvSpPr>
+          <p:cNvPr id="11" name="Shape 9"/>
+          <p:cNvSpPr/>
+          <p:nvPr/>
+        </p:nvSpPr>
+        <p:spPr>
+          <a:xfrm>
+            <a:off x="566928" y="2708021"/>
+            <a:ext cx="274320" cy="274320"/>
+          </a:xfrm>
+          <a:prstGeom prst="ellipse">
+            <a:avLst/>
+          </a:prstGeom>
+          <a:solidFill>
+            <a:srgbClr val="1E2761"/>
+          </a:solidFill>
+          <a:ln/>
+        </p:spPr>
+      </p:sp>
+      <p:sp>
+        <p:nvSpPr>
+          <p:cNvPr id="12" name="Text 10"/>
+          <p:cNvSpPr txBox="1"/>
+          <p:nvPr/>
+        </p:nvSpPr>
+        <p:spPr>
+          <a:xfrm>
+            <a:off x="566928" y="2708021"/>
+            <a:ext cx="274320" cy="274320"/>
+          </a:xfrm>
+          <a:prstGeom prst="rect">
+            <a:avLst/>
+          </a:prstGeom>
+          <a:noFill/>
+          <a:ln/>
+        </p:spPr>
+        <p:txBody>
+          <a:bodyPr wrap="square" lIns="0" tIns="0" rIns="0" bIns="0" rtlCol="0" anchor="ctr"/>
+          <a:lstStyle/>
+          <a:p>
+            <a:pPr algn="ctr" indent="0" marL="0">
+              <a:buNone/>
+            </a:pPr>
+            <a:r>
+              <a:rPr lang="en-US" sz="1100" b="1" dirty="0">
+                <a:solidFill>
+                  <a:srgbClr val="FFFFFF"/>
+                </a:solidFill>
+                <a:latin typeface="Calibri" pitchFamily="34" charset="0"/>
+                <a:ea typeface="Calibri" pitchFamily="34" charset="-122"/>
+                <a:cs typeface="Calibri" pitchFamily="34" charset="-120"/>
+              </a:rPr>
+              <a:t>3</a:t>
+            </a:r>
+            <a:endParaRPr lang="en-US" sz="1100" dirty="0"/>
+          </a:p>
+        </p:txBody>
+      </p:sp>
+      <p:sp>
+        <p:nvSpPr>
+          <p:cNvPr id="13" name="Text 11"/>
+          <p:cNvSpPr txBox="1"/>
+          <p:nvPr/>
+        </p:nvSpPr>
+        <p:spPr>
+          <a:xfrm>
+            <a:off x="969264" y="2689733"/>
+            <a:ext cx="6025896" cy="365760"/>
+          </a:xfrm>
+          <a:prstGeom prst="rect">
+            <a:avLst/>
+          </a:prstGeom>
+          <a:noFill/>
+          <a:ln/>
+        </p:spPr>
+        <p:txBody>
+          <a:bodyPr wrap="square" lIns="0" tIns="0" rIns="0" bIns="0" rtlCol="0" anchor="t"/>
+          <a:lstStyle/>
+          <a:p>
+            <a:pPr indent="0" marL="0">
+              <a:lnSpc>
+                <a:spcPct val="125000"/>
+              </a:lnSpc>
+              <a:buNone/>
+            </a:pPr>
+            <a:r>
+              <a:rPr lang="en-US" sz="1150" dirty="0">
+                <a:solidFill>
+                  <a:srgbClr val="222222"/>
+                </a:solidFill>
+                <a:latin typeface="Calibri" pitchFamily="34" charset="0"/>
+                <a:ea typeface="Calibri" pitchFamily="34" charset="-122"/>
+                <a:cs typeface="Calibri" pitchFamily="34" charset="-120"/>
+              </a:rPr>
+              <a:t>確認メッセージで「OK」を押す</a:t>
+            </a:r>
+            <a:endParaRPr lang="en-US" sz="1150" dirty="0"/>
+          </a:p>
+        </p:txBody>
+      </p:sp>
+      <p:sp>
+        <p:nvSpPr>
+          <p:cNvPr id="14" name="Text 12"/>
+          <p:cNvSpPr txBox="1"/>
+          <p:nvPr/>
+        </p:nvSpPr>
+        <p:spPr>
+          <a:xfrm>
+            <a:off x="566928" y="3146933"/>
             <a:ext cx="6428232" cy="257429"/>
           </a:xfrm>
           <a:prstGeom prst="rect">
@@ -11227,7 +11171,41 @@
                 <a:ea typeface="Calibri" pitchFamily="34" charset="-122"/>
                 <a:cs typeface="Calibri" pitchFamily="34" charset="-120"/>
               </a:rPr>
-              <a:t>まず件数を確認し、問題なければ実行します。</a:t>
+              <a:t>削除しても、</a:t>
+            </a:r>
+            <a:pPr indent="0" marL="0">
+              <a:lnSpc>
+                <a:spcPct val="125000"/>
+              </a:lnSpc>
+              <a:buNone/>
+            </a:pPr>
+            <a:r>
+              <a:rPr lang="en-US" sz="1100" b="1" dirty="0">
+                <a:solidFill>
+                  <a:srgbClr val="222222"/>
+                </a:solidFill>
+                <a:latin typeface="Calibri" pitchFamily="34" charset="0"/>
+                <a:ea typeface="Calibri" pitchFamily="34" charset="-122"/>
+                <a:cs typeface="Calibri" pitchFamily="34" charset="-120"/>
+              </a:rPr>
+              <a:t>回答データ（個人情報を含まないもの）は残ります</a:t>
+            </a:r>
+            <a:pPr indent="0" marL="0">
+              <a:lnSpc>
+                <a:spcPct val="125000"/>
+              </a:lnSpc>
+              <a:buNone/>
+            </a:pPr>
+            <a:r>
+              <a:rPr lang="en-US" sz="1100" dirty="0">
+                <a:solidFill>
+                  <a:srgbClr val="222222"/>
+                </a:solidFill>
+                <a:latin typeface="Calibri" pitchFamily="34" charset="0"/>
+                <a:ea typeface="Calibri" pitchFamily="34" charset="-122"/>
+                <a:cs typeface="Calibri" pitchFamily="34" charset="-120"/>
+              </a:rPr>
+              <a:t>。</a:t>
             </a:r>
             <a:endParaRPr lang="en-US" sz="1100" dirty="0"/>
           </a:p>
@@ -11235,279 +11213,18 @@
       </p:sp>
       <p:sp>
         <p:nvSpPr>
-          <p:cNvPr id="7" name="Text 5"/>
-          <p:cNvSpPr txBox="1"/>
-          <p:nvPr/>
-        </p:nvSpPr>
-        <p:spPr>
-          <a:xfrm>
-            <a:off x="713232" y="2712593"/>
-            <a:ext cx="6281928" cy="257429"/>
-          </a:xfrm>
-          <a:prstGeom prst="rect">
-            <a:avLst/>
-          </a:prstGeom>
-          <a:noFill/>
-          <a:ln/>
-        </p:spPr>
-        <p:txBody>
-          <a:bodyPr wrap="square" lIns="0" tIns="0" rIns="0" bIns="0" rtlCol="0" anchor="t"/>
-          <a:lstStyle/>
-          <a:p>
-            <a:pPr marL="342900" indent="-342900">
-              <a:lnSpc>
-                <a:spcPct val="125000"/>
-              </a:lnSpc>
-              <a:buSzPct val="100000"/>
-              <a:buChar char="●"/>
-            </a:pPr>
-            <a:r>
-              <a:rPr lang="en-US" sz="1100" dirty="0">
-                <a:solidFill>
-                  <a:srgbClr val="222222"/>
-                </a:solidFill>
-                <a:latin typeface="Calibri" pitchFamily="34" charset="0"/>
-                <a:ea typeface="Calibri" pitchFamily="34" charset="-122"/>
-                <a:cs typeface="Calibri" pitchFamily="34" charset="-120"/>
-              </a:rPr>
-              <a:t>確認：</a:t>
-            </a:r>
-            <a:pPr indent="0" marL="0">
-              <a:lnSpc>
-                <a:spcPct val="125000"/>
-              </a:lnSpc>
-              <a:buNone/>
-            </a:pPr>
-            <a:r>
-              <a:rPr lang="en-US" sz="1045" dirty="0">
-                <a:solidFill>
-                  <a:srgbClr val="222222"/>
-                </a:solidFill>
-                <a:latin typeface="Courier New" pitchFamily="34" charset="0"/>
-                <a:ea typeface="Courier New" pitchFamily="34" charset="-122"/>
-                <a:cs typeface="Courier New" pitchFamily="34" charset="-120"/>
-              </a:rPr>
-              <a:t>bin/reset.sh --responses --dry-run</a:t>
-            </a:r>
-            <a:endParaRPr lang="en-US" sz="1100" dirty="0"/>
-          </a:p>
-        </p:txBody>
-      </p:sp>
-      <p:sp>
-        <p:nvSpPr>
-          <p:cNvPr id="8" name="Text 6"/>
-          <p:cNvSpPr txBox="1"/>
-          <p:nvPr/>
-        </p:nvSpPr>
-        <p:spPr>
-          <a:xfrm>
-            <a:off x="713232" y="2988310"/>
-            <a:ext cx="6281928" cy="257429"/>
-          </a:xfrm>
-          <a:prstGeom prst="rect">
-            <a:avLst/>
-          </a:prstGeom>
-          <a:noFill/>
-          <a:ln/>
-        </p:spPr>
-        <p:txBody>
-          <a:bodyPr wrap="square" lIns="0" tIns="0" rIns="0" bIns="0" rtlCol="0" anchor="t"/>
-          <a:lstStyle/>
-          <a:p>
-            <a:pPr marL="342900" indent="-342900">
-              <a:lnSpc>
-                <a:spcPct val="125000"/>
-              </a:lnSpc>
-              <a:buSzPct val="100000"/>
-              <a:buChar char="●"/>
-            </a:pPr>
-            <a:r>
-              <a:rPr lang="en-US" sz="1100" dirty="0">
-                <a:solidFill>
-                  <a:srgbClr val="222222"/>
-                </a:solidFill>
-                <a:latin typeface="Calibri" pitchFamily="34" charset="0"/>
-                <a:ea typeface="Calibri" pitchFamily="34" charset="-122"/>
-                <a:cs typeface="Calibri" pitchFamily="34" charset="-120"/>
-              </a:rPr>
-              <a:t>実行：</a:t>
-            </a:r>
-            <a:pPr indent="0" marL="0">
-              <a:lnSpc>
-                <a:spcPct val="125000"/>
-              </a:lnSpc>
-              <a:buNone/>
-            </a:pPr>
-            <a:r>
-              <a:rPr lang="en-US" sz="1045" dirty="0">
-                <a:solidFill>
-                  <a:srgbClr val="222222"/>
-                </a:solidFill>
-                <a:latin typeface="Courier New" pitchFamily="34" charset="0"/>
-                <a:ea typeface="Courier New" pitchFamily="34" charset="-122"/>
-                <a:cs typeface="Courier New" pitchFamily="34" charset="-120"/>
-              </a:rPr>
-              <a:t>bin/reset.sh --responses --force</a:t>
-            </a:r>
-            <a:endParaRPr lang="en-US" sz="1100" dirty="0"/>
-          </a:p>
-        </p:txBody>
-      </p:sp>
-      <p:sp>
-        <p:nvSpPr>
-          <p:cNvPr id="9" name="Text 7"/>
-          <p:cNvSpPr txBox="1"/>
-          <p:nvPr/>
-        </p:nvSpPr>
-        <p:spPr>
-          <a:xfrm>
-            <a:off x="566928" y="3264027"/>
-            <a:ext cx="6428232" cy="257429"/>
-          </a:xfrm>
-          <a:prstGeom prst="rect">
-            <a:avLst/>
-          </a:prstGeom>
-          <a:noFill/>
-          <a:ln/>
-        </p:spPr>
-        <p:txBody>
-          <a:bodyPr wrap="square" lIns="0" tIns="0" rIns="0" bIns="0" rtlCol="0" anchor="t"/>
-          <a:lstStyle/>
-          <a:p>
-            <a:pPr indent="0" marL="0">
-              <a:lnSpc>
-                <a:spcPct val="125000"/>
-              </a:lnSpc>
-              <a:buNone/>
-            </a:pPr>
-            <a:r>
-              <a:rPr lang="en-US" sz="1100" dirty="0">
-                <a:solidFill>
-                  <a:srgbClr val="222222"/>
-                </a:solidFill>
-                <a:latin typeface="Calibri" pitchFamily="34" charset="0"/>
-                <a:ea typeface="Calibri" pitchFamily="34" charset="-122"/>
-                <a:cs typeface="Calibri" pitchFamily="34" charset="-120"/>
-              </a:rPr>
-              <a:t>イベント・企業・設問・景品・壁紙・アカウントは残ります。</a:t>
-            </a:r>
-            <a:endParaRPr lang="en-US" sz="1100" dirty="0"/>
-          </a:p>
-        </p:txBody>
-      </p:sp>
-      <p:sp>
-        <p:nvSpPr>
-          <p:cNvPr id="10" name="Text 8"/>
-          <p:cNvSpPr txBox="1"/>
-          <p:nvPr/>
-        </p:nvSpPr>
-        <p:spPr>
-          <a:xfrm>
-            <a:off x="566928" y="3667760"/>
-            <a:ext cx="6428232" cy="257810"/>
-          </a:xfrm>
-          <a:prstGeom prst="rect">
-            <a:avLst/>
-          </a:prstGeom>
-          <a:noFill/>
-          <a:ln/>
-        </p:spPr>
-        <p:txBody>
-          <a:bodyPr wrap="square" lIns="0" tIns="0" rIns="0" bIns="0" rtlCol="0" anchor="t"/>
-          <a:lstStyle/>
-          <a:p>
-            <a:pPr indent="0" marL="0">
-              <a:buNone/>
-            </a:pPr>
-            <a:r>
-              <a:rPr lang="en-US" sz="1400" b="1" dirty="0">
-                <a:solidFill>
-                  <a:srgbClr val="1E2761"/>
-                </a:solidFill>
-                <a:latin typeface="Calibri" pitchFamily="34" charset="0"/>
-                <a:ea typeface="Calibri" pitchFamily="34" charset="-122"/>
-                <a:cs typeface="Calibri" pitchFamily="34" charset="-120"/>
-              </a:rPr>
-              <a:t>イベントごと作り直したいとき</a:t>
-            </a:r>
-            <a:endParaRPr lang="en-US" sz="1400" dirty="0"/>
-          </a:p>
-        </p:txBody>
-      </p:sp>
-      <p:sp>
-        <p:nvSpPr>
-          <p:cNvPr id="11" name="Text 9"/>
-          <p:cNvSpPr txBox="1"/>
-          <p:nvPr/>
-        </p:nvSpPr>
-        <p:spPr>
-          <a:xfrm>
-            <a:off x="713232" y="3998722"/>
-            <a:ext cx="6281928" cy="257429"/>
-          </a:xfrm>
-          <a:prstGeom prst="rect">
-            <a:avLst/>
-          </a:prstGeom>
-          <a:noFill/>
-          <a:ln/>
-        </p:spPr>
-        <p:txBody>
-          <a:bodyPr wrap="square" lIns="0" tIns="0" rIns="0" bIns="0" rtlCol="0" anchor="t"/>
-          <a:lstStyle/>
-          <a:p>
-            <a:pPr marL="342900" indent="-342900">
-              <a:lnSpc>
-                <a:spcPct val="125000"/>
-              </a:lnSpc>
-              <a:buSzPct val="100000"/>
-              <a:buChar char="●"/>
-            </a:pPr>
-            <a:r>
-              <a:rPr lang="en-US" sz="1100" dirty="0">
-                <a:solidFill>
-                  <a:srgbClr val="222222"/>
-                </a:solidFill>
-                <a:latin typeface="Calibri" pitchFamily="34" charset="0"/>
-                <a:ea typeface="Calibri" pitchFamily="34" charset="-122"/>
-                <a:cs typeface="Calibri" pitchFamily="34" charset="-120"/>
-              </a:rPr>
-              <a:t>実行：</a:t>
-            </a:r>
-            <a:pPr indent="0" marL="0">
-              <a:lnSpc>
-                <a:spcPct val="125000"/>
-              </a:lnSpc>
-              <a:buNone/>
-            </a:pPr>
-            <a:r>
-              <a:rPr lang="en-US" sz="1045" dirty="0">
-                <a:solidFill>
-                  <a:srgbClr val="222222"/>
-                </a:solidFill>
-                <a:latin typeface="Courier New" pitchFamily="34" charset="0"/>
-                <a:ea typeface="Courier New" pitchFamily="34" charset="-122"/>
-                <a:cs typeface="Courier New" pitchFamily="34" charset="-120"/>
-              </a:rPr>
-              <a:t>bin/reset.sh --all --force</a:t>
-            </a:r>
-            <a:endParaRPr lang="en-US" sz="1100" dirty="0"/>
-          </a:p>
-        </p:txBody>
-      </p:sp>
-      <p:sp>
-        <p:nvSpPr>
-          <p:cNvPr id="12" name="Shape 10"/>
+          <p:cNvPr id="15" name="Shape 13"/>
           <p:cNvSpPr/>
           <p:nvPr/>
         </p:nvSpPr>
         <p:spPr>
           <a:xfrm>
-            <a:off x="566928" y="4274439"/>
-            <a:ext cx="6428232" cy="817817"/>
+            <a:off x="566928" y="3440938"/>
+            <a:ext cx="6428232" cy="624459"/>
           </a:xfrm>
           <a:prstGeom prst="roundRect">
             <a:avLst>
-              <a:gd name="adj" fmla="val 6709"/>
+              <a:gd name="adj" fmla="val 8786"/>
             </a:avLst>
           </a:prstGeom>
           <a:solidFill>
@@ -11523,13 +11240,13 @@
       </p:sp>
       <p:sp>
         <p:nvSpPr>
-          <p:cNvPr id="13" name="Text 11"/>
-          <p:cNvSpPr txBox="1"/>
-          <p:nvPr/>
-        </p:nvSpPr>
-        <p:spPr>
-          <a:xfrm>
-            <a:off x="658368" y="4365879"/>
+          <p:cNvPr id="16" name="Text 14"/>
+          <p:cNvSpPr txBox="1"/>
+          <p:nvPr/>
+        </p:nvSpPr>
+        <p:spPr>
+          <a:xfrm>
+            <a:off x="658368" y="3532378"/>
             <a:ext cx="237744" cy="237744"/>
           </a:xfrm>
           <a:prstGeom prst="rect">
@@ -11562,14 +11279,14 @@
       </p:sp>
       <p:sp>
         <p:nvSpPr>
-          <p:cNvPr id="14" name="Text 12"/>
-          <p:cNvSpPr txBox="1"/>
-          <p:nvPr/>
-        </p:nvSpPr>
-        <p:spPr>
-          <a:xfrm>
-            <a:off x="950976" y="4384167"/>
-            <a:ext cx="5925312" cy="634937"/>
+          <p:cNvPr id="17" name="Text 15"/>
+          <p:cNvSpPr txBox="1"/>
+          <p:nvPr/>
+        </p:nvSpPr>
+        <p:spPr>
+          <a:xfrm>
+            <a:off x="950976" y="3550666"/>
+            <a:ext cx="5925312" cy="441579"/>
           </a:xfrm>
           <a:prstGeom prst="rect">
             <a:avLst/>
@@ -11596,7 +11313,7 @@
                 <a:ea typeface="Calibri" pitchFamily="34" charset="-122"/>
                 <a:cs typeface="Calibri" pitchFamily="34" charset="-120"/>
               </a:rPr>
-              <a:t>どちらも元に戻せません。実行前に自動でバックアップを取りますが、念のため大事なデータはCSVで書き出しておいてください。</a:t>
+              <a:t>削除すると、未送信ぶんの案内メールは送れなくなります。</a:t>
             </a:r>
             <a:pPr indent="0" marL="0">
               <a:lnSpc>
@@ -11613,7 +11330,7 @@
                 <a:ea typeface="Calibri" pitchFamily="34" charset="-122"/>
                 <a:cs typeface="Calibri" pitchFamily="34" charset="-120"/>
               </a:rPr>
-              <a:t>企業担当者のアカウントは企業と一緒に消えます</a:t>
+              <a:t>送信と集計が完全に終わってから</a:t>
             </a:r>
             <a:pPr indent="0" marL="0">
               <a:lnSpc>
@@ -11630,7 +11347,7 @@
                 <a:ea typeface="Calibri" pitchFamily="34" charset="-122"/>
                 <a:cs typeface="Calibri" pitchFamily="34" charset="-120"/>
               </a:rPr>
-              <a:t>（主催者・受付は残ります）。</a:t>
+              <a:t>実行してください。</a:t>
             </a:r>
             <a:endParaRPr lang="en-US" sz="1050" dirty="0"/>
           </a:p>
@@ -11638,18 +11355,18 @@
       </p:sp>
       <p:sp>
         <p:nvSpPr>
-          <p:cNvPr id="15" name="Shape 13"/>
+          <p:cNvPr id="18" name="Shape 16"/>
           <p:cNvSpPr/>
           <p:nvPr/>
         </p:nvSpPr>
         <p:spPr>
           <a:xfrm>
-            <a:off x="566928" y="5165408"/>
-            <a:ext cx="6428232" cy="431102"/>
+            <a:off x="566928" y="4138549"/>
+            <a:ext cx="6428232" cy="624459"/>
           </a:xfrm>
           <a:prstGeom prst="roundRect">
             <a:avLst>
-              <a:gd name="adj" fmla="val 12726"/>
+              <a:gd name="adj" fmla="val 8786"/>
             </a:avLst>
           </a:prstGeom>
           <a:solidFill>
@@ -11665,13 +11382,13 @@
       </p:sp>
       <p:sp>
         <p:nvSpPr>
-          <p:cNvPr id="16" name="Text 14"/>
-          <p:cNvSpPr txBox="1"/>
-          <p:nvPr/>
-        </p:nvSpPr>
-        <p:spPr>
-          <a:xfrm>
-            <a:off x="658368" y="5256848"/>
+          <p:cNvPr id="19" name="Text 17"/>
+          <p:cNvSpPr txBox="1"/>
+          <p:nvPr/>
+        </p:nvSpPr>
+        <p:spPr>
+          <a:xfrm>
+            <a:off x="658368" y="4229989"/>
             <a:ext cx="237744" cy="237744"/>
           </a:xfrm>
           <a:prstGeom prst="rect">
@@ -11704,14 +11421,14 @@
       </p:sp>
       <p:sp>
         <p:nvSpPr>
-          <p:cNvPr id="17" name="Text 15"/>
-          <p:cNvSpPr txBox="1"/>
-          <p:nvPr/>
-        </p:nvSpPr>
-        <p:spPr>
-          <a:xfrm>
-            <a:off x="950976" y="5275136"/>
-            <a:ext cx="5925312" cy="248221"/>
+          <p:cNvPr id="20" name="Text 18"/>
+          <p:cNvSpPr txBox="1"/>
+          <p:nvPr/>
+        </p:nvSpPr>
+        <p:spPr>
+          <a:xfrm>
+            <a:off x="950976" y="4248277"/>
+            <a:ext cx="5925312" cy="441579"/>
           </a:xfrm>
           <a:prstGeom prst="rect">
             <a:avLst/>
@@ -11738,15 +11455,78 @@
                 <a:ea typeface="Calibri" pitchFamily="34" charset="-122"/>
                 <a:cs typeface="Calibri" pitchFamily="34" charset="-120"/>
               </a:rPr>
-              <a:t>実行するとデータベース名の入力を求められます。画面の指示どおりに入力してください。</a:t>
+              <a:t>「氏名・住所は収集せず、メールアドレスも送付・集計後に削除する」という運用方針に沿った操作です。来場者にもその旨を案内しています。</a:t>
             </a:r>
             <a:endParaRPr lang="en-US" sz="1050" dirty="0"/>
           </a:p>
         </p:txBody>
       </p:sp>
-      <p:sp>
-        <p:nvSpPr>
-          <p:cNvPr id="18" name="Text 16"/>
+      <p:pic>
+        <p:nvPicPr>
+          <p:cNvPr id="21" name="Image 0" descr="C:\Users\sato\Desktop\enque\docs\images\o-purge.png">    </p:cNvPr>
+          <p:cNvPicPr>
+            <a:picLocks noChangeAspect="1"/>
+          </p:cNvPicPr>
+          <p:nvPr/>
+        </p:nvPicPr>
+        <p:blipFill>
+          <a:blip r:embed="rId1"/>
+          <a:stretch>
+            <a:fillRect/>
+          </a:stretch>
+        </p:blipFill>
+        <p:spPr>
+          <a:xfrm>
+            <a:off x="936779" y="4836160"/>
+            <a:ext cx="5688531" cy="3474720"/>
+          </a:xfrm>
+          <a:prstGeom prst="rect">
+            <a:avLst/>
+          </a:prstGeom>
+        </p:spPr>
+      </p:pic>
+      <p:sp>
+        <p:nvSpPr>
+          <p:cNvPr id="22" name="Text 19"/>
+          <p:cNvSpPr txBox="1"/>
+          <p:nvPr/>
+        </p:nvSpPr>
+        <p:spPr>
+          <a:xfrm>
+            <a:off x="566928" y="8365744"/>
+            <a:ext cx="6428232" cy="274320"/>
+          </a:xfrm>
+          <a:prstGeom prst="rect">
+            <a:avLst/>
+          </a:prstGeom>
+          <a:noFill/>
+          <a:ln/>
+        </p:spPr>
+        <p:txBody>
+          <a:bodyPr wrap="square" lIns="0" tIns="0" rIns="0" bIns="0" rtlCol="0" anchor="ctr"/>
+          <a:lstStyle/>
+          <a:p>
+            <a:pPr algn="ctr" indent="0" marL="0">
+              <a:buNone/>
+            </a:pPr>
+            <a:r>
+              <a:rPr lang="en-US" sz="950" dirty="0">
+                <a:solidFill>
+                  <a:srgbClr val="6B6B6B"/>
+                </a:solidFill>
+                <a:latin typeface="Calibri" pitchFamily="34" charset="0"/>
+                <a:ea typeface="Calibri" pitchFamily="34" charset="-122"/>
+                <a:cs typeface="Calibri" pitchFamily="34" charset="-120"/>
+              </a:rPr>
+              <a:t>「メールアドレスを削除する」ボタンの周辺（説明文が見えるもの）。</a:t>
+            </a:r>
+            <a:endParaRPr lang="en-US" sz="950" dirty="0"/>
+          </a:p>
+        </p:txBody>
+      </p:sp>
+      <p:sp>
+        <p:nvSpPr>
+          <p:cNvPr id="23" name="Text 20"/>
           <p:cNvSpPr txBox="1"/>
           <p:nvPr/>
         </p:nvSpPr>
@@ -14023,6 +13803,789 @@
                 <a:ea typeface="Calibri" pitchFamily="34" charset="-122"/>
                 <a:cs typeface="Calibri" pitchFamily="34" charset="-120"/>
               </a:rPr>
+              <a:t>次のイベントに向けて（データの整理）</a:t>
+            </a:r>
+            <a:endParaRPr lang="en-US" sz="2200" dirty="0"/>
+          </a:p>
+        </p:txBody>
+      </p:sp>
+      <p:sp>
+        <p:nvSpPr>
+          <p:cNvPr id="4" name="Text 2"/>
+          <p:cNvSpPr txBox="1"/>
+          <p:nvPr/>
+        </p:nvSpPr>
+        <p:spPr>
+          <a:xfrm>
+            <a:off x="566928" y="1481328"/>
+            <a:ext cx="6428232" cy="459994"/>
+          </a:xfrm>
+          <a:prstGeom prst="rect">
+            <a:avLst/>
+          </a:prstGeom>
+          <a:noFill/>
+          <a:ln/>
+        </p:spPr>
+        <p:txBody>
+          <a:bodyPr wrap="square" lIns="0" tIns="0" rIns="0" bIns="0" rtlCol="0" anchor="t"/>
+          <a:lstStyle/>
+          <a:p>
+            <a:pPr indent="0" marL="0">
+              <a:lnSpc>
+                <a:spcPct val="125000"/>
+              </a:lnSpc>
+              <a:buNone/>
+            </a:pPr>
+            <a:r>
+              <a:rPr lang="en-US" sz="1100" dirty="0">
+                <a:solidFill>
+                  <a:srgbClr val="222222"/>
+                </a:solidFill>
+                <a:latin typeface="Calibri" pitchFamily="34" charset="0"/>
+                <a:ea typeface="Calibri" pitchFamily="34" charset="-122"/>
+                <a:cs typeface="Calibri" pitchFamily="34" charset="-120"/>
+              </a:rPr>
+              <a:t>サーバーで次のコマンドを実行します（事務局のPCではなく、システムが動いているサーバーでの作業です）。</a:t>
+            </a:r>
+            <a:endParaRPr lang="en-US" sz="1100" dirty="0"/>
+          </a:p>
+        </p:txBody>
+      </p:sp>
+      <p:sp>
+        <p:nvSpPr>
+          <p:cNvPr id="5" name="Text 3"/>
+          <p:cNvSpPr txBox="1"/>
+          <p:nvPr/>
+        </p:nvSpPr>
+        <p:spPr>
+          <a:xfrm>
+            <a:off x="566928" y="2087626"/>
+            <a:ext cx="6428232" cy="257810"/>
+          </a:xfrm>
+          <a:prstGeom prst="rect">
+            <a:avLst/>
+          </a:prstGeom>
+          <a:noFill/>
+          <a:ln/>
+        </p:spPr>
+        <p:txBody>
+          <a:bodyPr wrap="square" lIns="0" tIns="0" rIns="0" bIns="0" rtlCol="0" anchor="t"/>
+          <a:lstStyle/>
+          <a:p>
+            <a:pPr indent="0" marL="0">
+              <a:buNone/>
+            </a:pPr>
+            <a:r>
+              <a:rPr lang="en-US" sz="1400" b="1" dirty="0">
+                <a:solidFill>
+                  <a:srgbClr val="1E2761"/>
+                </a:solidFill>
+                <a:latin typeface="Calibri" pitchFamily="34" charset="0"/>
+                <a:ea typeface="Calibri" pitchFamily="34" charset="-122"/>
+                <a:cs typeface="Calibri" pitchFamily="34" charset="-120"/>
+              </a:rPr>
+              <a:t>テストで入れた回答だけ消したいとき</a:t>
+            </a:r>
+            <a:endParaRPr lang="en-US" sz="1400" dirty="0"/>
+          </a:p>
+        </p:txBody>
+      </p:sp>
+      <p:sp>
+        <p:nvSpPr>
+          <p:cNvPr id="6" name="Text 4"/>
+          <p:cNvSpPr txBox="1"/>
+          <p:nvPr/>
+        </p:nvSpPr>
+        <p:spPr>
+          <a:xfrm>
+            <a:off x="566928" y="2418588"/>
+            <a:ext cx="6428232" cy="257429"/>
+          </a:xfrm>
+          <a:prstGeom prst="rect">
+            <a:avLst/>
+          </a:prstGeom>
+          <a:noFill/>
+          <a:ln/>
+        </p:spPr>
+        <p:txBody>
+          <a:bodyPr wrap="square" lIns="0" tIns="0" rIns="0" bIns="0" rtlCol="0" anchor="t"/>
+          <a:lstStyle/>
+          <a:p>
+            <a:pPr indent="0" marL="0">
+              <a:lnSpc>
+                <a:spcPct val="125000"/>
+              </a:lnSpc>
+              <a:buNone/>
+            </a:pPr>
+            <a:r>
+              <a:rPr lang="en-US" sz="1100" dirty="0">
+                <a:solidFill>
+                  <a:srgbClr val="222222"/>
+                </a:solidFill>
+                <a:latin typeface="Calibri" pitchFamily="34" charset="0"/>
+                <a:ea typeface="Calibri" pitchFamily="34" charset="-122"/>
+                <a:cs typeface="Calibri" pitchFamily="34" charset="-120"/>
+              </a:rPr>
+              <a:t>まず件数を確認し、問題なければ実行します。</a:t>
+            </a:r>
+            <a:endParaRPr lang="en-US" sz="1100" dirty="0"/>
+          </a:p>
+        </p:txBody>
+      </p:sp>
+      <p:sp>
+        <p:nvSpPr>
+          <p:cNvPr id="7" name="Text 5"/>
+          <p:cNvSpPr txBox="1"/>
+          <p:nvPr/>
+        </p:nvSpPr>
+        <p:spPr>
+          <a:xfrm>
+            <a:off x="713232" y="2712593"/>
+            <a:ext cx="6281928" cy="257429"/>
+          </a:xfrm>
+          <a:prstGeom prst="rect">
+            <a:avLst/>
+          </a:prstGeom>
+          <a:noFill/>
+          <a:ln/>
+        </p:spPr>
+        <p:txBody>
+          <a:bodyPr wrap="square" lIns="0" tIns="0" rIns="0" bIns="0" rtlCol="0" anchor="t"/>
+          <a:lstStyle/>
+          <a:p>
+            <a:pPr marL="342900" indent="-342900">
+              <a:lnSpc>
+                <a:spcPct val="125000"/>
+              </a:lnSpc>
+              <a:buSzPct val="100000"/>
+              <a:buChar char="●"/>
+            </a:pPr>
+            <a:r>
+              <a:rPr lang="en-US" sz="1100" dirty="0">
+                <a:solidFill>
+                  <a:srgbClr val="222222"/>
+                </a:solidFill>
+                <a:latin typeface="Calibri" pitchFamily="34" charset="0"/>
+                <a:ea typeface="Calibri" pitchFamily="34" charset="-122"/>
+                <a:cs typeface="Calibri" pitchFamily="34" charset="-120"/>
+              </a:rPr>
+              <a:t>確認：</a:t>
+            </a:r>
+            <a:pPr indent="0" marL="0">
+              <a:lnSpc>
+                <a:spcPct val="125000"/>
+              </a:lnSpc>
+              <a:buNone/>
+            </a:pPr>
+            <a:r>
+              <a:rPr lang="en-US" sz="1045" dirty="0">
+                <a:solidFill>
+                  <a:srgbClr val="222222"/>
+                </a:solidFill>
+                <a:latin typeface="Courier New" pitchFamily="34" charset="0"/>
+                <a:ea typeface="Courier New" pitchFamily="34" charset="-122"/>
+                <a:cs typeface="Courier New" pitchFamily="34" charset="-120"/>
+              </a:rPr>
+              <a:t>bin/reset.sh --responses --dry-run</a:t>
+            </a:r>
+            <a:endParaRPr lang="en-US" sz="1100" dirty="0"/>
+          </a:p>
+        </p:txBody>
+      </p:sp>
+      <p:sp>
+        <p:nvSpPr>
+          <p:cNvPr id="8" name="Text 6"/>
+          <p:cNvSpPr txBox="1"/>
+          <p:nvPr/>
+        </p:nvSpPr>
+        <p:spPr>
+          <a:xfrm>
+            <a:off x="713232" y="2988310"/>
+            <a:ext cx="6281928" cy="257429"/>
+          </a:xfrm>
+          <a:prstGeom prst="rect">
+            <a:avLst/>
+          </a:prstGeom>
+          <a:noFill/>
+          <a:ln/>
+        </p:spPr>
+        <p:txBody>
+          <a:bodyPr wrap="square" lIns="0" tIns="0" rIns="0" bIns="0" rtlCol="0" anchor="t"/>
+          <a:lstStyle/>
+          <a:p>
+            <a:pPr marL="342900" indent="-342900">
+              <a:lnSpc>
+                <a:spcPct val="125000"/>
+              </a:lnSpc>
+              <a:buSzPct val="100000"/>
+              <a:buChar char="●"/>
+            </a:pPr>
+            <a:r>
+              <a:rPr lang="en-US" sz="1100" dirty="0">
+                <a:solidFill>
+                  <a:srgbClr val="222222"/>
+                </a:solidFill>
+                <a:latin typeface="Calibri" pitchFamily="34" charset="0"/>
+                <a:ea typeface="Calibri" pitchFamily="34" charset="-122"/>
+                <a:cs typeface="Calibri" pitchFamily="34" charset="-120"/>
+              </a:rPr>
+              <a:t>実行：</a:t>
+            </a:r>
+            <a:pPr indent="0" marL="0">
+              <a:lnSpc>
+                <a:spcPct val="125000"/>
+              </a:lnSpc>
+              <a:buNone/>
+            </a:pPr>
+            <a:r>
+              <a:rPr lang="en-US" sz="1045" dirty="0">
+                <a:solidFill>
+                  <a:srgbClr val="222222"/>
+                </a:solidFill>
+                <a:latin typeface="Courier New" pitchFamily="34" charset="0"/>
+                <a:ea typeface="Courier New" pitchFamily="34" charset="-122"/>
+                <a:cs typeface="Courier New" pitchFamily="34" charset="-120"/>
+              </a:rPr>
+              <a:t>bin/reset.sh --responses --force</a:t>
+            </a:r>
+            <a:endParaRPr lang="en-US" sz="1100" dirty="0"/>
+          </a:p>
+        </p:txBody>
+      </p:sp>
+      <p:sp>
+        <p:nvSpPr>
+          <p:cNvPr id="9" name="Text 7"/>
+          <p:cNvSpPr txBox="1"/>
+          <p:nvPr/>
+        </p:nvSpPr>
+        <p:spPr>
+          <a:xfrm>
+            <a:off x="566928" y="3264027"/>
+            <a:ext cx="6428232" cy="257429"/>
+          </a:xfrm>
+          <a:prstGeom prst="rect">
+            <a:avLst/>
+          </a:prstGeom>
+          <a:noFill/>
+          <a:ln/>
+        </p:spPr>
+        <p:txBody>
+          <a:bodyPr wrap="square" lIns="0" tIns="0" rIns="0" bIns="0" rtlCol="0" anchor="t"/>
+          <a:lstStyle/>
+          <a:p>
+            <a:pPr indent="0" marL="0">
+              <a:lnSpc>
+                <a:spcPct val="125000"/>
+              </a:lnSpc>
+              <a:buNone/>
+            </a:pPr>
+            <a:r>
+              <a:rPr lang="en-US" sz="1100" dirty="0">
+                <a:solidFill>
+                  <a:srgbClr val="222222"/>
+                </a:solidFill>
+                <a:latin typeface="Calibri" pitchFamily="34" charset="0"/>
+                <a:ea typeface="Calibri" pitchFamily="34" charset="-122"/>
+                <a:cs typeface="Calibri" pitchFamily="34" charset="-120"/>
+              </a:rPr>
+              <a:t>イベント・企業・設問・景品・壁紙・アカウントは残ります。</a:t>
+            </a:r>
+            <a:endParaRPr lang="en-US" sz="1100" dirty="0"/>
+          </a:p>
+        </p:txBody>
+      </p:sp>
+      <p:sp>
+        <p:nvSpPr>
+          <p:cNvPr id="10" name="Text 8"/>
+          <p:cNvSpPr txBox="1"/>
+          <p:nvPr/>
+        </p:nvSpPr>
+        <p:spPr>
+          <a:xfrm>
+            <a:off x="566928" y="3667760"/>
+            <a:ext cx="6428232" cy="257810"/>
+          </a:xfrm>
+          <a:prstGeom prst="rect">
+            <a:avLst/>
+          </a:prstGeom>
+          <a:noFill/>
+          <a:ln/>
+        </p:spPr>
+        <p:txBody>
+          <a:bodyPr wrap="square" lIns="0" tIns="0" rIns="0" bIns="0" rtlCol="0" anchor="t"/>
+          <a:lstStyle/>
+          <a:p>
+            <a:pPr indent="0" marL="0">
+              <a:buNone/>
+            </a:pPr>
+            <a:r>
+              <a:rPr lang="en-US" sz="1400" b="1" dirty="0">
+                <a:solidFill>
+                  <a:srgbClr val="1E2761"/>
+                </a:solidFill>
+                <a:latin typeface="Calibri" pitchFamily="34" charset="0"/>
+                <a:ea typeface="Calibri" pitchFamily="34" charset="-122"/>
+                <a:cs typeface="Calibri" pitchFamily="34" charset="-120"/>
+              </a:rPr>
+              <a:t>イベントごと作り直したいとき</a:t>
+            </a:r>
+            <a:endParaRPr lang="en-US" sz="1400" dirty="0"/>
+          </a:p>
+        </p:txBody>
+      </p:sp>
+      <p:sp>
+        <p:nvSpPr>
+          <p:cNvPr id="11" name="Text 9"/>
+          <p:cNvSpPr txBox="1"/>
+          <p:nvPr/>
+        </p:nvSpPr>
+        <p:spPr>
+          <a:xfrm>
+            <a:off x="713232" y="3998722"/>
+            <a:ext cx="6281928" cy="257429"/>
+          </a:xfrm>
+          <a:prstGeom prst="rect">
+            <a:avLst/>
+          </a:prstGeom>
+          <a:noFill/>
+          <a:ln/>
+        </p:spPr>
+        <p:txBody>
+          <a:bodyPr wrap="square" lIns="0" tIns="0" rIns="0" bIns="0" rtlCol="0" anchor="t"/>
+          <a:lstStyle/>
+          <a:p>
+            <a:pPr marL="342900" indent="-342900">
+              <a:lnSpc>
+                <a:spcPct val="125000"/>
+              </a:lnSpc>
+              <a:buSzPct val="100000"/>
+              <a:buChar char="●"/>
+            </a:pPr>
+            <a:r>
+              <a:rPr lang="en-US" sz="1100" dirty="0">
+                <a:solidFill>
+                  <a:srgbClr val="222222"/>
+                </a:solidFill>
+                <a:latin typeface="Calibri" pitchFamily="34" charset="0"/>
+                <a:ea typeface="Calibri" pitchFamily="34" charset="-122"/>
+                <a:cs typeface="Calibri" pitchFamily="34" charset="-120"/>
+              </a:rPr>
+              <a:t>実行：</a:t>
+            </a:r>
+            <a:pPr indent="0" marL="0">
+              <a:lnSpc>
+                <a:spcPct val="125000"/>
+              </a:lnSpc>
+              <a:buNone/>
+            </a:pPr>
+            <a:r>
+              <a:rPr lang="en-US" sz="1045" dirty="0">
+                <a:solidFill>
+                  <a:srgbClr val="222222"/>
+                </a:solidFill>
+                <a:latin typeface="Courier New" pitchFamily="34" charset="0"/>
+                <a:ea typeface="Courier New" pitchFamily="34" charset="-122"/>
+                <a:cs typeface="Courier New" pitchFamily="34" charset="-120"/>
+              </a:rPr>
+              <a:t>bin/reset.sh --all --force</a:t>
+            </a:r>
+            <a:endParaRPr lang="en-US" sz="1100" dirty="0"/>
+          </a:p>
+        </p:txBody>
+      </p:sp>
+      <p:sp>
+        <p:nvSpPr>
+          <p:cNvPr id="12" name="Shape 10"/>
+          <p:cNvSpPr/>
+          <p:nvPr/>
+        </p:nvSpPr>
+        <p:spPr>
+          <a:xfrm>
+            <a:off x="566928" y="4274439"/>
+            <a:ext cx="6428232" cy="817817"/>
+          </a:xfrm>
+          <a:prstGeom prst="roundRect">
+            <a:avLst>
+              <a:gd name="adj" fmla="val 6709"/>
+            </a:avLst>
+          </a:prstGeom>
+          <a:solidFill>
+            <a:srgbClr val="FDF0E6"/>
+          </a:solidFill>
+          <a:ln w="9525">
+            <a:solidFill>
+              <a:srgbClr val="E08A3C"/>
+            </a:solidFill>
+            <a:prstDash val="solid"/>
+          </a:ln>
+        </p:spPr>
+      </p:sp>
+      <p:sp>
+        <p:nvSpPr>
+          <p:cNvPr id="13" name="Text 11"/>
+          <p:cNvSpPr txBox="1"/>
+          <p:nvPr/>
+        </p:nvSpPr>
+        <p:spPr>
+          <a:xfrm>
+            <a:off x="658368" y="4365879"/>
+            <a:ext cx="237744" cy="237744"/>
+          </a:xfrm>
+          <a:prstGeom prst="rect">
+            <a:avLst/>
+          </a:prstGeom>
+          <a:noFill/>
+          <a:ln/>
+        </p:spPr>
+        <p:txBody>
+          <a:bodyPr wrap="square" lIns="0" tIns="0" rIns="0" bIns="0" rtlCol="0" anchor="ctr"/>
+          <a:lstStyle/>
+          <a:p>
+            <a:pPr algn="ctr" indent="0" marL="0">
+              <a:buNone/>
+            </a:pPr>
+            <a:r>
+              <a:rPr lang="en-US" sz="1200" b="1" dirty="0">
+                <a:solidFill>
+                  <a:srgbClr val="C25A17"/>
+                </a:solidFill>
+                <a:latin typeface="Calibri" pitchFamily="34" charset="0"/>
+                <a:ea typeface="Calibri" pitchFamily="34" charset="-122"/>
+                <a:cs typeface="Calibri" pitchFamily="34" charset="-120"/>
+              </a:rPr>
+              <a:t>！</a:t>
+            </a:r>
+            <a:endParaRPr lang="en-US" sz="1200" dirty="0"/>
+          </a:p>
+        </p:txBody>
+      </p:sp>
+      <p:sp>
+        <p:nvSpPr>
+          <p:cNvPr id="14" name="Text 12"/>
+          <p:cNvSpPr txBox="1"/>
+          <p:nvPr/>
+        </p:nvSpPr>
+        <p:spPr>
+          <a:xfrm>
+            <a:off x="950976" y="4384167"/>
+            <a:ext cx="5925312" cy="634937"/>
+          </a:xfrm>
+          <a:prstGeom prst="rect">
+            <a:avLst/>
+          </a:prstGeom>
+          <a:noFill/>
+          <a:ln/>
+        </p:spPr>
+        <p:txBody>
+          <a:bodyPr wrap="square" lIns="0" tIns="0" rIns="0" bIns="0" rtlCol="0" anchor="t"/>
+          <a:lstStyle/>
+          <a:p>
+            <a:pPr indent="0" marL="0">
+              <a:lnSpc>
+                <a:spcPct val="120000"/>
+              </a:lnSpc>
+              <a:buNone/>
+            </a:pPr>
+            <a:r>
+              <a:rPr lang="en-US" sz="1050" dirty="0">
+                <a:solidFill>
+                  <a:srgbClr val="222222"/>
+                </a:solidFill>
+                <a:latin typeface="Calibri" pitchFamily="34" charset="0"/>
+                <a:ea typeface="Calibri" pitchFamily="34" charset="-122"/>
+                <a:cs typeface="Calibri" pitchFamily="34" charset="-120"/>
+              </a:rPr>
+              <a:t>どちらも元に戻せません。実行前に自動でバックアップを取りますが、念のため大事なデータはCSVで書き出しておいてください。</a:t>
+            </a:r>
+            <a:pPr indent="0" marL="0">
+              <a:lnSpc>
+                <a:spcPct val="120000"/>
+              </a:lnSpc>
+              <a:buNone/>
+            </a:pPr>
+            <a:r>
+              <a:rPr lang="en-US" sz="1050" b="1" dirty="0">
+                <a:solidFill>
+                  <a:srgbClr val="222222"/>
+                </a:solidFill>
+                <a:latin typeface="Calibri" pitchFamily="34" charset="0"/>
+                <a:ea typeface="Calibri" pitchFamily="34" charset="-122"/>
+                <a:cs typeface="Calibri" pitchFamily="34" charset="-120"/>
+              </a:rPr>
+              <a:t>企業担当者のアカウントは企業と一緒に消えます</a:t>
+            </a:r>
+            <a:pPr indent="0" marL="0">
+              <a:lnSpc>
+                <a:spcPct val="120000"/>
+              </a:lnSpc>
+              <a:buNone/>
+            </a:pPr>
+            <a:r>
+              <a:rPr lang="en-US" sz="1050" dirty="0">
+                <a:solidFill>
+                  <a:srgbClr val="222222"/>
+                </a:solidFill>
+                <a:latin typeface="Calibri" pitchFamily="34" charset="0"/>
+                <a:ea typeface="Calibri" pitchFamily="34" charset="-122"/>
+                <a:cs typeface="Calibri" pitchFamily="34" charset="-120"/>
+              </a:rPr>
+              <a:t>（主催者・受付は残ります）。</a:t>
+            </a:r>
+            <a:endParaRPr lang="en-US" sz="1050" dirty="0"/>
+          </a:p>
+        </p:txBody>
+      </p:sp>
+      <p:sp>
+        <p:nvSpPr>
+          <p:cNvPr id="15" name="Shape 13"/>
+          <p:cNvSpPr/>
+          <p:nvPr/>
+        </p:nvSpPr>
+        <p:spPr>
+          <a:xfrm>
+            <a:off x="566928" y="5165408"/>
+            <a:ext cx="6428232" cy="431102"/>
+          </a:xfrm>
+          <a:prstGeom prst="roundRect">
+            <a:avLst>
+              <a:gd name="adj" fmla="val 12726"/>
+            </a:avLst>
+          </a:prstGeom>
+          <a:solidFill>
+            <a:srgbClr val="E8ECF8"/>
+          </a:solidFill>
+          <a:ln w="9525">
+            <a:solidFill>
+              <a:srgbClr val="1E2761"/>
+            </a:solidFill>
+            <a:prstDash val="solid"/>
+          </a:ln>
+        </p:spPr>
+      </p:sp>
+      <p:sp>
+        <p:nvSpPr>
+          <p:cNvPr id="16" name="Text 14"/>
+          <p:cNvSpPr txBox="1"/>
+          <p:nvPr/>
+        </p:nvSpPr>
+        <p:spPr>
+          <a:xfrm>
+            <a:off x="658368" y="5256848"/>
+            <a:ext cx="237744" cy="237744"/>
+          </a:xfrm>
+          <a:prstGeom prst="rect">
+            <a:avLst/>
+          </a:prstGeom>
+          <a:noFill/>
+          <a:ln/>
+        </p:spPr>
+        <p:txBody>
+          <a:bodyPr wrap="square" lIns="0" tIns="0" rIns="0" bIns="0" rtlCol="0" anchor="ctr"/>
+          <a:lstStyle/>
+          <a:p>
+            <a:pPr algn="ctr" indent="0" marL="0">
+              <a:buNone/>
+            </a:pPr>
+            <a:r>
+              <a:rPr lang="en-US" sz="1200" b="1" dirty="0">
+                <a:solidFill>
+                  <a:srgbClr val="1E2761"/>
+                </a:solidFill>
+                <a:latin typeface="Calibri" pitchFamily="34" charset="0"/>
+                <a:ea typeface="Calibri" pitchFamily="34" charset="-122"/>
+                <a:cs typeface="Calibri" pitchFamily="34" charset="-120"/>
+              </a:rPr>
+              <a:t>i</a:t>
+            </a:r>
+            <a:endParaRPr lang="en-US" sz="1200" dirty="0"/>
+          </a:p>
+        </p:txBody>
+      </p:sp>
+      <p:sp>
+        <p:nvSpPr>
+          <p:cNvPr id="17" name="Text 15"/>
+          <p:cNvSpPr txBox="1"/>
+          <p:nvPr/>
+        </p:nvSpPr>
+        <p:spPr>
+          <a:xfrm>
+            <a:off x="950976" y="5275136"/>
+            <a:ext cx="5925312" cy="248221"/>
+          </a:xfrm>
+          <a:prstGeom prst="rect">
+            <a:avLst/>
+          </a:prstGeom>
+          <a:noFill/>
+          <a:ln/>
+        </p:spPr>
+        <p:txBody>
+          <a:bodyPr wrap="square" lIns="0" tIns="0" rIns="0" bIns="0" rtlCol="0" anchor="t"/>
+          <a:lstStyle/>
+          <a:p>
+            <a:pPr indent="0" marL="0">
+              <a:lnSpc>
+                <a:spcPct val="120000"/>
+              </a:lnSpc>
+              <a:buNone/>
+            </a:pPr>
+            <a:r>
+              <a:rPr lang="en-US" sz="1050" dirty="0">
+                <a:solidFill>
+                  <a:srgbClr val="222222"/>
+                </a:solidFill>
+                <a:latin typeface="Calibri" pitchFamily="34" charset="0"/>
+                <a:ea typeface="Calibri" pitchFamily="34" charset="-122"/>
+                <a:cs typeface="Calibri" pitchFamily="34" charset="-120"/>
+              </a:rPr>
+              <a:t>実行するとデータベース名の入力を求められます。画面の指示どおりに入力してください。</a:t>
+            </a:r>
+            <a:endParaRPr lang="en-US" sz="1050" dirty="0"/>
+          </a:p>
+        </p:txBody>
+      </p:sp>
+      <p:sp>
+        <p:nvSpPr>
+          <p:cNvPr id="18" name="Text 16"/>
+          <p:cNvSpPr txBox="1"/>
+          <p:nvPr/>
+        </p:nvSpPr>
+        <p:spPr>
+          <a:xfrm>
+            <a:off x="566928" y="10186416"/>
+            <a:ext cx="6428232" cy="228600"/>
+          </a:xfrm>
+          <a:prstGeom prst="rect">
+            <a:avLst/>
+          </a:prstGeom>
+          <a:noFill/>
+          <a:ln/>
+        </p:spPr>
+        <p:txBody>
+          <a:bodyPr wrap="square" lIns="0" tIns="0" rIns="0" bIns="0" rtlCol="0" anchor="ctr"/>
+          <a:lstStyle/>
+          <a:p>
+            <a:pPr algn="r" indent="0" marL="0">
+              <a:buNone/>
+            </a:pPr>
+            <a:r>
+              <a:rPr lang="en-US" sz="900" dirty="0">
+                <a:solidFill>
+                  <a:srgbClr val="6B6B6B"/>
+                </a:solidFill>
+                <a:latin typeface="Calibri" pitchFamily="34" charset="0"/>
+                <a:ea typeface="Calibri" pitchFamily="34" charset="-122"/>
+                <a:cs typeface="Calibri" pitchFamily="34" charset="-120"/>
+              </a:rPr>
+              <a:t>主催者向け　20</a:t>
+            </a:r>
+            <a:endParaRPr lang="en-US" sz="900" dirty="0"/>
+          </a:p>
+        </p:txBody>
+      </p:sp>
+    </p:spTree>
+  </p:cSld>
+  <p:clrMapOvr>
+    <a:masterClrMapping/>
+  </p:clrMapOvr>
+</p:sld>
+</file>
+
+<file path=ppt/slides/slide21.xml><?xml version="1.0" encoding="utf-8"?>
+<p:sld xmlns:a="http://schemas.openxmlformats.org/drawingml/2006/main" xmlns:r="http://schemas.openxmlformats.org/officeDocument/2006/relationships" xmlns:p="http://schemas.openxmlformats.org/presentationml/2006/main">
+  <p:cSld name="Slide 21">
+    <p:bg>
+      <p:bgPr>
+        <a:solidFill>
+          <a:srgbClr val="FFFFFF"/>
+        </a:solidFill>
+      </p:bgPr>
+    </p:bg>
+    <p:spTree>
+      <p:nvGrpSpPr>
+        <p:cNvPr id="1" name=""/>
+        <p:cNvGrpSpPr/>
+        <p:nvPr/>
+      </p:nvGrpSpPr>
+      <p:grpSpPr>
+        <a:xfrm>
+          <a:off x="0" y="0"/>
+          <a:ext cx="0" cy="0"/>
+          <a:chOff x="0" y="0"/>
+          <a:chExt cx="0" cy="0"/>
+        </a:xfrm>
+      </p:grpSpPr>
+      <p:sp>
+        <p:nvSpPr>
+          <p:cNvPr id="2" name="Text 0"/>
+          <p:cNvSpPr txBox="1"/>
+          <p:nvPr/>
+        </p:nvSpPr>
+        <p:spPr>
+          <a:xfrm>
+            <a:off x="566928" y="457200"/>
+            <a:ext cx="6428232" cy="237744"/>
+          </a:xfrm>
+          <a:prstGeom prst="rect">
+            <a:avLst/>
+          </a:prstGeom>
+          <a:noFill/>
+          <a:ln/>
+        </p:spPr>
+        <p:txBody>
+          <a:bodyPr wrap="square" lIns="0" tIns="0" rIns="0" bIns="0" rtlCol="0" anchor="ctr"/>
+          <a:lstStyle/>
+          <a:p>
+            <a:pPr indent="0" marL="0">
+              <a:buNone/>
+            </a:pPr>
+            <a:r>
+              <a:rPr lang="en-US" sz="1000" b="1" dirty="0">
+                <a:solidFill>
+                  <a:srgbClr val="1E2761"/>
+                </a:solidFill>
+                <a:latin typeface="Calibri" pitchFamily="34" charset="0"/>
+                <a:ea typeface="Calibri" pitchFamily="34" charset="-122"/>
+                <a:cs typeface="Calibri" pitchFamily="34" charset="-120"/>
+              </a:rPr>
+              <a:t>主催者マニュアル</a:t>
+            </a:r>
+            <a:endParaRPr lang="en-US" sz="1000" dirty="0"/>
+          </a:p>
+        </p:txBody>
+      </p:sp>
+      <p:sp>
+        <p:nvSpPr>
+          <p:cNvPr id="3" name="Text 1"/>
+          <p:cNvSpPr txBox="1"/>
+          <p:nvPr/>
+        </p:nvSpPr>
+        <p:spPr>
+          <a:xfrm>
+            <a:off x="566928" y="713232"/>
+            <a:ext cx="6428232" cy="640080"/>
+          </a:xfrm>
+          <a:prstGeom prst="rect">
+            <a:avLst/>
+          </a:prstGeom>
+          <a:noFill/>
+          <a:ln/>
+        </p:spPr>
+        <p:txBody>
+          <a:bodyPr wrap="square" lIns="0" tIns="0" rIns="0" bIns="0" rtlCol="0" anchor="t"/>
+          <a:lstStyle/>
+          <a:p>
+            <a:pPr indent="0" marL="0">
+              <a:buNone/>
+            </a:pPr>
+            <a:r>
+              <a:rPr lang="en-US" sz="2200" b="1" dirty="0">
+                <a:solidFill>
+                  <a:srgbClr val="222222"/>
+                </a:solidFill>
+                <a:latin typeface="Calibri" pitchFamily="34" charset="0"/>
+                <a:ea typeface="Calibri" pitchFamily="34" charset="-122"/>
+                <a:cs typeface="Calibri" pitchFamily="34" charset="-120"/>
+              </a:rPr>
               <a:t>困ったときは</a:t>
             </a:r>
             <a:endParaRPr lang="en-US" sz="2200" dirty="0"/>
@@ -14588,7 +15151,7 @@
                 <a:ea typeface="Calibri" pitchFamily="34" charset="-122"/>
                 <a:cs typeface="Calibri" pitchFamily="34" charset="-120"/>
               </a:rPr>
-              <a:t>主催者向け　20</a:t>
+              <a:t>主催者向け　21</a:t>
             </a:r>
             <a:endParaRPr lang="en-US" sz="900" dirty="0"/>
           </a:p>

--- a/docs/manual-organizer.pptx
+++ b/docs/manual-organizer.pptx
@@ -5667,7 +5667,7 @@
                 <a:ea typeface="Calibri" pitchFamily="34" charset="-122"/>
                 <a:cs typeface="Calibri" pitchFamily="34" charset="-120"/>
               </a:rPr>
-              <a:t>来場人数は任意回答です。未回答のぶんは、同じ来場者が別の企業で答えた人数、それも無ければ</a:t>
+              <a:t>来場人数は任意回答です。未回答のぶんは、同じ来場者が別の企業で答えた人数などから補って</a:t>
             </a:r>
             <a:endParaRPr lang="en-US" sz="1050" dirty="0"/>
           </a:p>
@@ -5775,7 +5775,7 @@
                 <a:ea typeface="Calibri" pitchFamily="34" charset="-122"/>
                 <a:cs typeface="Calibri" pitchFamily="34" charset="-120"/>
               </a:rPr>
-              <a:t>回答があったぶんの平均を当てはめて計算しています（回答率も画面に出ます）。</a:t>
+              <a:t>計算しています（回答率も画面に出ます）。</a:t>
             </a:r>
             <a:endParaRPr lang="en-US" sz="1050" dirty="0"/>
           </a:p>
@@ -7591,11 +7591,11 @@
         <p:spPr>
           <a:xfrm>
             <a:off x="566928" y="8344091"/>
-            <a:ext cx="6428232" cy="624459"/>
+            <a:ext cx="6428232" cy="431102"/>
           </a:xfrm>
           <a:prstGeom prst="roundRect">
             <a:avLst>
-              <a:gd name="adj" fmla="val 8786"/>
+              <a:gd name="adj" fmla="val 12726"/>
             </a:avLst>
           </a:prstGeom>
           <a:solidFill>
@@ -7657,7 +7657,7 @@
         <p:spPr>
           <a:xfrm>
             <a:off x="950976" y="8453819"/>
-            <a:ext cx="5925312" cy="441579"/>
+            <a:ext cx="5925312" cy="248221"/>
           </a:xfrm>
           <a:prstGeom prst="rect">
             <a:avLst/>
@@ -7684,7 +7684,7 @@
                 <a:ea typeface="Calibri" pitchFamily="34" charset="-122"/>
                 <a:cs typeface="Calibri" pitchFamily="34" charset="-120"/>
               </a:rPr>
-              <a:t>そのまま送信できます。未回答のぶんは「同じ来場者の別の回答 → それも無ければ全体の平均」の順で</a:t>
+              <a:t>そのまま送信できます。未回答のぶんは、同じ来場者の別の回答などから補って計算します。</a:t>
             </a:r>
             <a:endParaRPr lang="en-US" sz="1050" dirty="0"/>
           </a:p>
@@ -7698,7 +7698,7 @@
         </p:nvSpPr>
         <p:spPr>
           <a:xfrm>
-            <a:off x="566928" y="9041702"/>
+            <a:off x="566928" y="8848344"/>
             <a:ext cx="6428232" cy="431102"/>
           </a:xfrm>
           <a:prstGeom prst="roundRect">
@@ -7707,11 +7707,11 @@
             </a:avLst>
           </a:prstGeom>
           <a:solidFill>
-            <a:srgbClr val="E8ECF8"/>
+            <a:srgbClr val="FDF0E6"/>
           </a:solidFill>
           <a:ln w="9525">
             <a:solidFill>
-              <a:srgbClr val="1E2761"/>
+              <a:srgbClr val="E08A3C"/>
             </a:solidFill>
             <a:prstDash val="solid"/>
           </a:ln>
@@ -7725,7 +7725,7 @@
         </p:nvSpPr>
         <p:spPr>
           <a:xfrm>
-            <a:off x="658368" y="9133142"/>
+            <a:off x="658368" y="8939784"/>
             <a:ext cx="237744" cy="237744"/>
           </a:xfrm>
           <a:prstGeom prst="rect">
@@ -7744,13 +7744,13 @@
             <a:r>
               <a:rPr lang="en-US" sz="1200" b="1" dirty="0">
                 <a:solidFill>
-                  <a:srgbClr val="1E2761"/>
-                </a:solidFill>
-                <a:latin typeface="Calibri" pitchFamily="34" charset="0"/>
-                <a:ea typeface="Calibri" pitchFamily="34" charset="-122"/>
-                <a:cs typeface="Calibri" pitchFamily="34" charset="-120"/>
-              </a:rPr>
-              <a:t>i</a:t>
+                  <a:srgbClr val="C25A17"/>
+                </a:solidFill>
+                <a:latin typeface="Calibri" pitchFamily="34" charset="0"/>
+                <a:ea typeface="Calibri" pitchFamily="34" charset="-122"/>
+                <a:cs typeface="Calibri" pitchFamily="34" charset="-120"/>
+              </a:rPr>
+              <a:t>！</a:t>
             </a:r>
             <a:endParaRPr lang="en-US" sz="1200" dirty="0"/>
           </a:p>
@@ -7764,7 +7764,7 @@
         </p:nvSpPr>
         <p:spPr>
           <a:xfrm>
-            <a:off x="950976" y="9151430"/>
+            <a:off x="950976" y="8958072"/>
             <a:ext cx="5925312" cy="248221"/>
           </a:xfrm>
           <a:prstGeom prst="rect">
@@ -7792,7 +7792,41 @@
                 <a:ea typeface="Calibri" pitchFamily="34" charset="-122"/>
                 <a:cs typeface="Calibri" pitchFamily="34" charset="-120"/>
               </a:rPr>
-              <a:t>当てはめて計算します。</a:t>
+              <a:t>人数の設問は</a:t>
+            </a:r>
+            <a:pPr indent="0" marL="0">
+              <a:lnSpc>
+                <a:spcPct val="120000"/>
+              </a:lnSpc>
+              <a:buNone/>
+            </a:pPr>
+            <a:r>
+              <a:rPr lang="en-US" sz="1050" b="1" dirty="0">
+                <a:solidFill>
+                  <a:srgbClr val="222222"/>
+                </a:solidFill>
+                <a:latin typeface="Calibri" pitchFamily="34" charset="0"/>
+                <a:ea typeface="Calibri" pitchFamily="34" charset="-122"/>
+                <a:cs typeface="Calibri" pitchFamily="34" charset="-120"/>
+              </a:rPr>
+              <a:t>共通設問テンプレート</a:t>
+            </a:r>
+            <a:pPr indent="0" marL="0">
+              <a:lnSpc>
+                <a:spcPct val="120000"/>
+              </a:lnSpc>
+              <a:buNone/>
+            </a:pPr>
+            <a:r>
+              <a:rPr lang="en-US" sz="1050" dirty="0">
+                <a:solidFill>
+                  <a:srgbClr val="222222"/>
+                </a:solidFill>
+                <a:latin typeface="Calibri" pitchFamily="34" charset="0"/>
+                <a:ea typeface="Calibri" pitchFamily="34" charset="-122"/>
+                <a:cs typeface="Calibri" pitchFamily="34" charset="-120"/>
+              </a:rPr>
+              <a:t>に入れて全社に取り込むと、聞き方と集計が揃います。</a:t>
             </a:r>
             <a:endParaRPr lang="en-US" sz="1050" dirty="0"/>
           </a:p>
@@ -7947,151 +7981,9 @@
           </a:p>
         </p:txBody>
       </p:sp>
-      <p:sp>
-        <p:nvSpPr>
-          <p:cNvPr id="4" name="Shape 2"/>
-          <p:cNvSpPr/>
-          <p:nvPr/>
-        </p:nvSpPr>
-        <p:spPr>
-          <a:xfrm>
-            <a:off x="566928" y="1481328"/>
-            <a:ext cx="6428232" cy="431102"/>
-          </a:xfrm>
-          <a:prstGeom prst="roundRect">
-            <a:avLst>
-              <a:gd name="adj" fmla="val 12726"/>
-            </a:avLst>
-          </a:prstGeom>
-          <a:solidFill>
-            <a:srgbClr val="FDF0E6"/>
-          </a:solidFill>
-          <a:ln w="9525">
-            <a:solidFill>
-              <a:srgbClr val="E08A3C"/>
-            </a:solidFill>
-            <a:prstDash val="solid"/>
-          </a:ln>
-        </p:spPr>
-      </p:sp>
-      <p:sp>
-        <p:nvSpPr>
-          <p:cNvPr id="5" name="Text 3"/>
-          <p:cNvSpPr txBox="1"/>
-          <p:nvPr/>
-        </p:nvSpPr>
-        <p:spPr>
-          <a:xfrm>
-            <a:off x="658368" y="1572768"/>
-            <a:ext cx="237744" cy="237744"/>
-          </a:xfrm>
-          <a:prstGeom prst="rect">
-            <a:avLst/>
-          </a:prstGeom>
-          <a:noFill/>
-          <a:ln/>
-        </p:spPr>
-        <p:txBody>
-          <a:bodyPr wrap="square" lIns="0" tIns="0" rIns="0" bIns="0" rtlCol="0" anchor="ctr"/>
-          <a:lstStyle/>
-          <a:p>
-            <a:pPr algn="ctr" indent="0" marL="0">
-              <a:buNone/>
-            </a:pPr>
-            <a:r>
-              <a:rPr lang="en-US" sz="1200" b="1" dirty="0">
-                <a:solidFill>
-                  <a:srgbClr val="C25A17"/>
-                </a:solidFill>
-                <a:latin typeface="Calibri" pitchFamily="34" charset="0"/>
-                <a:ea typeface="Calibri" pitchFamily="34" charset="-122"/>
-                <a:cs typeface="Calibri" pitchFamily="34" charset="-120"/>
-              </a:rPr>
-              <a:t>！</a:t>
-            </a:r>
-            <a:endParaRPr lang="en-US" sz="1200" dirty="0"/>
-          </a:p>
-        </p:txBody>
-      </p:sp>
-      <p:sp>
-        <p:nvSpPr>
-          <p:cNvPr id="6" name="Text 4"/>
-          <p:cNvSpPr txBox="1"/>
-          <p:nvPr/>
-        </p:nvSpPr>
-        <p:spPr>
-          <a:xfrm>
-            <a:off x="950976" y="1591056"/>
-            <a:ext cx="5925312" cy="248221"/>
-          </a:xfrm>
-          <a:prstGeom prst="rect">
-            <a:avLst/>
-          </a:prstGeom>
-          <a:noFill/>
-          <a:ln/>
-        </p:spPr>
-        <p:txBody>
-          <a:bodyPr wrap="square" lIns="0" tIns="0" rIns="0" bIns="0" rtlCol="0" anchor="t"/>
-          <a:lstStyle/>
-          <a:p>
-            <a:pPr indent="0" marL="0">
-              <a:lnSpc>
-                <a:spcPct val="120000"/>
-              </a:lnSpc>
-              <a:buNone/>
-            </a:pPr>
-            <a:r>
-              <a:rPr lang="en-US" sz="1050" dirty="0">
-                <a:solidFill>
-                  <a:srgbClr val="222222"/>
-                </a:solidFill>
-                <a:latin typeface="Calibri" pitchFamily="34" charset="0"/>
-                <a:ea typeface="Calibri" pitchFamily="34" charset="-122"/>
-                <a:cs typeface="Calibri" pitchFamily="34" charset="-120"/>
-              </a:rPr>
-              <a:t>人数の設問は</a:t>
-            </a:r>
-            <a:pPr indent="0" marL="0">
-              <a:lnSpc>
-                <a:spcPct val="120000"/>
-              </a:lnSpc>
-              <a:buNone/>
-            </a:pPr>
-            <a:r>
-              <a:rPr lang="en-US" sz="1050" b="1" dirty="0">
-                <a:solidFill>
-                  <a:srgbClr val="222222"/>
-                </a:solidFill>
-                <a:latin typeface="Calibri" pitchFamily="34" charset="0"/>
-                <a:ea typeface="Calibri" pitchFamily="34" charset="-122"/>
-                <a:cs typeface="Calibri" pitchFamily="34" charset="-120"/>
-              </a:rPr>
-              <a:t>共通設問テンプレート</a:t>
-            </a:r>
-            <a:pPr indent="0" marL="0">
-              <a:lnSpc>
-                <a:spcPct val="120000"/>
-              </a:lnSpc>
-              <a:buNone/>
-            </a:pPr>
-            <a:r>
-              <a:rPr lang="en-US" sz="1050" dirty="0">
-                <a:solidFill>
-                  <a:srgbClr val="222222"/>
-                </a:solidFill>
-                <a:latin typeface="Calibri" pitchFamily="34" charset="0"/>
-                <a:ea typeface="Calibri" pitchFamily="34" charset="-122"/>
-                <a:cs typeface="Calibri" pitchFamily="34" charset="-120"/>
-              </a:rPr>
-              <a:t>に入れて全社に取り込むと、聞き方と集計が揃います。</a:t>
-            </a:r>
-            <a:endParaRPr lang="en-US" sz="1050" dirty="0"/>
-          </a:p>
-        </p:txBody>
-      </p:sp>
       <p:pic>
         <p:nvPicPr>
-          <p:cNvPr id="7" name="Image 0" descr="C:\Users\sato\Desktop\enque\docs\images\o-party.png">    </p:cNvPr>
+          <p:cNvPr id="4" name="Image 0" descr="C:\Users\sato\Desktop\enque\docs\images\o-party.png">    </p:cNvPr>
           <p:cNvPicPr>
             <a:picLocks noChangeAspect="1"/>
           </p:cNvPicPr>
@@ -8105,7 +7997,7 @@
         </p:blipFill>
         <p:spPr>
           <a:xfrm>
-            <a:off x="1082543" y="1985582"/>
+            <a:off x="1082543" y="1481328"/>
             <a:ext cx="5397003" cy="3474720"/>
           </a:xfrm>
           <a:prstGeom prst="rect">
@@ -8115,13 +8007,13 @@
       </p:pic>
       <p:sp>
         <p:nvSpPr>
-          <p:cNvPr id="8" name="Text 5"/>
-          <p:cNvSpPr txBox="1"/>
-          <p:nvPr/>
-        </p:nvSpPr>
-        <p:spPr>
-          <a:xfrm>
-            <a:off x="566928" y="5515166"/>
+          <p:cNvPr id="5" name="Text 2"/>
+          <p:cNvSpPr txBox="1"/>
+          <p:nvPr/>
+        </p:nvSpPr>
+        <p:spPr>
+          <a:xfrm>
+            <a:off x="566928" y="5010912"/>
             <a:ext cx="6428232" cy="274320"/>
           </a:xfrm>
           <a:prstGeom prst="rect">
@@ -8154,7 +8046,7 @@
       </p:sp>
       <p:sp>
         <p:nvSpPr>
-          <p:cNvPr id="9" name="Text 6"/>
+          <p:cNvPr id="6" name="Text 3"/>
           <p:cNvSpPr txBox="1"/>
           <p:nvPr/>
         </p:nvSpPr>

--- a/docs/manual-organizer.pptx
+++ b/docs/manual-organizer.pptx
@@ -26,9 +26,10 @@
     <p:sldId id="274" r:id="rId20"/>
     <p:sldId id="275" r:id="rId21"/>
     <p:sldId id="276" r:id="rId22"/>
+    <p:sldId id="277" r:id="rId23"/>
   </p:sldIdLst>
   <p:notesMasterIdLst>
-    <p:notesMasterId r:id="rId23"/>
+    <p:notesMasterId r:id="rId24"/>
   </p:notesMasterIdLst>
   <p:sldSz cx="7562088" cy="10689336"/>
   <p:notesSz cx="10689336" cy="7562088"/>
@@ -1690,6 +1691,94 @@
             <a:fld id="{F7021451-1387-4CA6-816F-3879F97B5CBC}" type="slidenum">
               <a:rPr lang="en-US"/>
               <a:t>21</a:t>
+            </a:fld>
+            <a:endParaRPr lang="en-US"/>
+          </a:p>
+        </p:txBody>
+      </p:sp>
+    </p:spTree>
+    <p:extLst>
+      <p:ext uri="{BB962C8B-B14F-4D97-AF65-F5344CB8AC3E}">
+        <p14:creationId xmlns:p14="http://schemas.microsoft.com/office/powerpoint/2010/main" val="1024086991"/>
+      </p:ext>
+    </p:extLst>
+  </p:cSld>
+  <p:clrMapOvr>
+    <a:masterClrMapping/>
+  </p:clrMapOvr>
+</p:notes>
+</file>
+
+<file path=ppt/notesSlides/notesSlide22.xml><?xml version="1.0" encoding="utf-8"?>
+<p:notes xmlns:a="http://schemas.openxmlformats.org/drawingml/2006/main" xmlns:r="http://schemas.openxmlformats.org/officeDocument/2006/relationships" xmlns:p="http://schemas.openxmlformats.org/presentationml/2006/main">
+  <p:cSld>
+    <p:spTree>
+      <p:nvGrpSpPr>
+        <p:cNvPr id="1" name=""/>
+        <p:cNvGrpSpPr/>
+        <p:nvPr/>
+      </p:nvGrpSpPr>
+      <p:grpSpPr>
+        <a:xfrm>
+          <a:off x="0" y="0"/>
+          <a:ext cx="0" cy="0"/>
+          <a:chOff x="0" y="0"/>
+          <a:chExt cx="0" cy="0"/>
+        </a:xfrm>
+      </p:grpSpPr>
+      <p:sp>
+        <p:nvSpPr>
+          <p:cNvPr id="2" name="Slide Image Placeholder 1"/>
+          <p:cNvSpPr>
+            <a:spLocks noGrp="1" noRot="1" noChangeAspect="1"/>
+          </p:cNvSpPr>
+          <p:nvPr>
+            <p:ph type="sldImg"/>
+          </p:nvPr>
+        </p:nvSpPr>
+        <p:spPr/>
+      </p:sp>
+      <p:sp>
+        <p:nvSpPr>
+          <p:cNvPr id="3" name="Notes Placeholder 2"/>
+          <p:cNvSpPr>
+            <a:spLocks noGrp="1"/>
+          </p:cNvSpPr>
+          <p:nvPr>
+            <p:ph type="body" idx="1"/>
+          </p:nvPr>
+        </p:nvSpPr>
+        <p:spPr/>
+        <p:txBody>
+          <a:bodyPr/>
+          <a:lstStyle/>
+          <a:p>
+            <a:r>
+              <a:rPr lang="en-US" dirty="0"/>
+              <a:t/>
+            </a:r>
+            <a:endParaRPr lang="en-US" dirty="0"/>
+          </a:p>
+        </p:txBody>
+      </p:sp>
+      <p:sp>
+        <p:nvSpPr>
+          <p:cNvPr id="4" name="Slide Number Placeholder 3"/>
+          <p:cNvSpPr>
+            <a:spLocks noGrp="1"/>
+          </p:cNvSpPr>
+          <p:nvPr>
+            <p:ph type="sldNum" sz="quarter" idx="10"/>
+          </p:nvPr>
+        </p:nvSpPr>
+        <p:spPr/>
+        <p:txBody>
+          <a:bodyPr/>
+          <a:lstStyle/>
+          <a:p>
+            <a:fld id="{F7021451-1387-4CA6-816F-3879F97B5CBC}" type="slidenum">
+              <a:rPr lang="en-US"/>
+              <a:t>22</a:t>
             </a:fld>
             <a:endParaRPr lang="en-US"/>
           </a:p>
@@ -4537,40 +4626,43 @@
           </a:p>
         </p:txBody>
       </p:sp>
-      <p:pic>
-        <p:nvPicPr>
-          <p:cNvPr id="27" name="Image 0" descr="C:\Users\sato\Desktop\enque\docs\images\o-event-setting.png">    </p:cNvPr>
-          <p:cNvPicPr>
-            <a:picLocks noChangeAspect="1"/>
-          </p:cNvPicPr>
-          <p:nvPr/>
-        </p:nvPicPr>
-        <p:blipFill>
-          <a:blip r:embed="rId1"/>
-          <a:stretch>
-            <a:fillRect/>
-          </a:stretch>
-        </p:blipFill>
-        <p:spPr>
-          <a:xfrm>
-            <a:off x="791874" y="5656834"/>
-            <a:ext cx="5978339" cy="3474720"/>
-          </a:xfrm>
-          <a:prstGeom prst="rect">
-            <a:avLst/>
-          </a:prstGeom>
-        </p:spPr>
-      </p:pic>
-      <p:sp>
-        <p:nvSpPr>
-          <p:cNvPr id="28" name="Text 25"/>
-          <p:cNvSpPr txBox="1"/>
-          <p:nvPr/>
-        </p:nvSpPr>
-        <p:spPr>
-          <a:xfrm>
-            <a:off x="566928" y="9186418"/>
-            <a:ext cx="6428232" cy="274320"/>
+      <p:sp>
+        <p:nvSpPr>
+          <p:cNvPr id="27" name="Shape 25"/>
+          <p:cNvSpPr/>
+          <p:nvPr/>
+        </p:nvSpPr>
+        <p:spPr>
+          <a:xfrm>
+            <a:off x="566928" y="5656834"/>
+            <a:ext cx="6428232" cy="624459"/>
+          </a:xfrm>
+          <a:prstGeom prst="roundRect">
+            <a:avLst>
+              <a:gd name="adj" fmla="val 8786"/>
+            </a:avLst>
+          </a:prstGeom>
+          <a:solidFill>
+            <a:srgbClr val="E8ECF8"/>
+          </a:solidFill>
+          <a:ln w="9525">
+            <a:solidFill>
+              <a:srgbClr val="1E2761"/>
+            </a:solidFill>
+            <a:prstDash val="solid"/>
+          </a:ln>
+        </p:spPr>
+      </p:sp>
+      <p:sp>
+        <p:nvSpPr>
+          <p:cNvPr id="28" name="Text 26"/>
+          <p:cNvSpPr txBox="1"/>
+          <p:nvPr/>
+        </p:nvSpPr>
+        <p:spPr>
+          <a:xfrm>
+            <a:off x="658368" y="5748274"/>
+            <a:ext cx="237744" cy="237744"/>
           </a:xfrm>
           <a:prstGeom prst="rect">
             <a:avLst/>
@@ -4586,23 +4678,173 @@
               <a:buNone/>
             </a:pPr>
             <a:r>
-              <a:rPr lang="en-US" sz="950" dirty="0">
-                <a:solidFill>
-                  <a:srgbClr val="6B6B6B"/>
-                </a:solidFill>
-                <a:latin typeface="Calibri" pitchFamily="34" charset="0"/>
-                <a:ea typeface="Calibri" pitchFamily="34" charset="-122"/>
-                <a:cs typeface="Calibri" pitchFamily="34" charset="-120"/>
-              </a:rPr>
-              <a:t>ダッシュボードの「イベント設定」。状態が「開催中（回答受付）」になっているところ。</a:t>
-            </a:r>
-            <a:endParaRPr lang="en-US" sz="950" dirty="0"/>
-          </a:p>
-        </p:txBody>
-      </p:sp>
-      <p:sp>
-        <p:nvSpPr>
-          <p:cNvPr id="29" name="Text 26"/>
+              <a:rPr lang="en-US" sz="1200" b="1" dirty="0">
+                <a:solidFill>
+                  <a:srgbClr val="1E2761"/>
+                </a:solidFill>
+                <a:latin typeface="Calibri" pitchFamily="34" charset="0"/>
+                <a:ea typeface="Calibri" pitchFamily="34" charset="-122"/>
+                <a:cs typeface="Calibri" pitchFamily="34" charset="-120"/>
+              </a:rPr>
+              <a:t>i</a:t>
+            </a:r>
+            <a:endParaRPr lang="en-US" sz="1200" dirty="0"/>
+          </a:p>
+        </p:txBody>
+      </p:sp>
+      <p:sp>
+        <p:nvSpPr>
+          <p:cNvPr id="29" name="Text 27"/>
+          <p:cNvSpPr txBox="1"/>
+          <p:nvPr/>
+        </p:nvSpPr>
+        <p:spPr>
+          <a:xfrm>
+            <a:off x="950976" y="5766562"/>
+            <a:ext cx="5925312" cy="441579"/>
+          </a:xfrm>
+          <a:prstGeom prst="rect">
+            <a:avLst/>
+          </a:prstGeom>
+          <a:noFill/>
+          <a:ln/>
+        </p:spPr>
+        <p:txBody>
+          <a:bodyPr wrap="square" lIns="0" tIns="0" rIns="0" bIns="0" rtlCol="0" anchor="t"/>
+          <a:lstStyle/>
+          <a:p>
+            <a:pPr indent="0" marL="0">
+              <a:lnSpc>
+                <a:spcPct val="120000"/>
+              </a:lnSpc>
+              <a:buNone/>
+            </a:pPr>
+            <a:r>
+              <a:rPr lang="en-US" sz="1050" dirty="0">
+                <a:solidFill>
+                  <a:srgbClr val="222222"/>
+                </a:solidFill>
+                <a:latin typeface="Calibri" pitchFamily="34" charset="0"/>
+                <a:ea typeface="Calibri" pitchFamily="34" charset="-122"/>
+                <a:cs typeface="Calibri" pitchFamily="34" charset="-120"/>
+              </a:rPr>
+              <a:t>2社目以降のアンケートには、登録済みのアドレスが入った状態で欄が出ます（打ち間違いにその場で</a:t>
+            </a:r>
+            <a:endParaRPr lang="en-US" sz="1050" dirty="0"/>
+          </a:p>
+        </p:txBody>
+      </p:sp>
+      <p:sp>
+        <p:nvSpPr>
+          <p:cNvPr id="30" name="Shape 28"/>
+          <p:cNvSpPr/>
+          <p:nvPr/>
+        </p:nvSpPr>
+        <p:spPr>
+          <a:xfrm>
+            <a:off x="566928" y="6354445"/>
+            <a:ext cx="6428232" cy="431102"/>
+          </a:xfrm>
+          <a:prstGeom prst="roundRect">
+            <a:avLst>
+              <a:gd name="adj" fmla="val 12726"/>
+            </a:avLst>
+          </a:prstGeom>
+          <a:solidFill>
+            <a:srgbClr val="E8ECF8"/>
+          </a:solidFill>
+          <a:ln w="9525">
+            <a:solidFill>
+              <a:srgbClr val="1E2761"/>
+            </a:solidFill>
+            <a:prstDash val="solid"/>
+          </a:ln>
+        </p:spPr>
+      </p:sp>
+      <p:sp>
+        <p:nvSpPr>
+          <p:cNvPr id="31" name="Text 29"/>
+          <p:cNvSpPr txBox="1"/>
+          <p:nvPr/>
+        </p:nvSpPr>
+        <p:spPr>
+          <a:xfrm>
+            <a:off x="658368" y="6445885"/>
+            <a:ext cx="237744" cy="237744"/>
+          </a:xfrm>
+          <a:prstGeom prst="rect">
+            <a:avLst/>
+          </a:prstGeom>
+          <a:noFill/>
+          <a:ln/>
+        </p:spPr>
+        <p:txBody>
+          <a:bodyPr wrap="square" lIns="0" tIns="0" rIns="0" bIns="0" rtlCol="0" anchor="ctr"/>
+          <a:lstStyle/>
+          <a:p>
+            <a:pPr algn="ctr" indent="0" marL="0">
+              <a:buNone/>
+            </a:pPr>
+            <a:r>
+              <a:rPr lang="en-US" sz="1200" b="1" dirty="0">
+                <a:solidFill>
+                  <a:srgbClr val="1E2761"/>
+                </a:solidFill>
+                <a:latin typeface="Calibri" pitchFamily="34" charset="0"/>
+                <a:ea typeface="Calibri" pitchFamily="34" charset="-122"/>
+                <a:cs typeface="Calibri" pitchFamily="34" charset="-120"/>
+              </a:rPr>
+              <a:t>i</a:t>
+            </a:r>
+            <a:endParaRPr lang="en-US" sz="1200" dirty="0"/>
+          </a:p>
+        </p:txBody>
+      </p:sp>
+      <p:sp>
+        <p:nvSpPr>
+          <p:cNvPr id="32" name="Text 30"/>
+          <p:cNvSpPr txBox="1"/>
+          <p:nvPr/>
+        </p:nvSpPr>
+        <p:spPr>
+          <a:xfrm>
+            <a:off x="950976" y="6464173"/>
+            <a:ext cx="5925312" cy="248221"/>
+          </a:xfrm>
+          <a:prstGeom prst="rect">
+            <a:avLst/>
+          </a:prstGeom>
+          <a:noFill/>
+          <a:ln/>
+        </p:spPr>
+        <p:txBody>
+          <a:bodyPr wrap="square" lIns="0" tIns="0" rIns="0" bIns="0" rtlCol="0" anchor="t"/>
+          <a:lstStyle/>
+          <a:p>
+            <a:pPr indent="0" marL="0">
+              <a:lnSpc>
+                <a:spcPct val="120000"/>
+              </a:lnSpc>
+              <a:buNone/>
+            </a:pPr>
+            <a:r>
+              <a:rPr lang="en-US" sz="1050" dirty="0">
+                <a:solidFill>
+                  <a:srgbClr val="222222"/>
+                </a:solidFill>
+                <a:latin typeface="Calibri" pitchFamily="34" charset="0"/>
+                <a:ea typeface="Calibri" pitchFamily="34" charset="-122"/>
+                <a:cs typeface="Calibri" pitchFamily="34" charset="-120"/>
+              </a:rPr>
+              <a:t>気づけるようにするためです）。回答済み画面では伏せ字で表示し、そこから変更もできます。</a:t>
+            </a:r>
+            <a:endParaRPr lang="en-US" sz="1050" dirty="0"/>
+          </a:p>
+        </p:txBody>
+      </p:sp>
+      <p:sp>
+        <p:nvSpPr>
+          <p:cNvPr id="33" name="Text 31"/>
           <p:cNvSpPr txBox="1"/>
           <p:nvPr/>
         </p:nvSpPr>
@@ -4743,1047 +4985,15 @@
                 <a:ea typeface="Calibri" pitchFamily="34" charset="-122"/>
                 <a:cs typeface="Calibri" pitchFamily="34" charset="-120"/>
               </a:rPr>
-              <a:t>当日：回答状況を見る</a:t>
+              <a:t>当日：受付を開始する（つづき）</a:t>
             </a:r>
             <a:endParaRPr lang="en-US" sz="2200" dirty="0"/>
-          </a:p>
-        </p:txBody>
-      </p:sp>
-      <p:sp>
-        <p:nvSpPr>
-          <p:cNvPr id="4" name="Text 2"/>
-          <p:cNvSpPr txBox="1"/>
-          <p:nvPr/>
-        </p:nvSpPr>
-        <p:spPr>
-          <a:xfrm>
-            <a:off x="566928" y="1481328"/>
-            <a:ext cx="6428232" cy="257429"/>
-          </a:xfrm>
-          <a:prstGeom prst="rect">
-            <a:avLst/>
-          </a:prstGeom>
-          <a:noFill/>
-          <a:ln/>
-        </p:spPr>
-        <p:txBody>
-          <a:bodyPr wrap="square" lIns="0" tIns="0" rIns="0" bIns="0" rtlCol="0" anchor="t"/>
-          <a:lstStyle/>
-          <a:p>
-            <a:pPr indent="0" marL="0">
-              <a:lnSpc>
-                <a:spcPct val="125000"/>
-              </a:lnSpc>
-              <a:buNone/>
-            </a:pPr>
-            <a:r>
-              <a:rPr lang="en-US" sz="1100" dirty="0">
-                <a:solidFill>
-                  <a:srgbClr val="222222"/>
-                </a:solidFill>
-                <a:latin typeface="Calibri" pitchFamily="34" charset="0"/>
-                <a:ea typeface="Calibri" pitchFamily="34" charset="-122"/>
-                <a:cs typeface="Calibri" pitchFamily="34" charset="-120"/>
-              </a:rPr>
-              <a:t>ダッシュボードでは、次の数字がリアルタイムで確認できます。</a:t>
-            </a:r>
-            <a:endParaRPr lang="en-US" sz="1100" dirty="0"/>
-          </a:p>
-        </p:txBody>
-      </p:sp>
-      <p:sp>
-        <p:nvSpPr>
-          <p:cNvPr id="5" name="Text 3"/>
-          <p:cNvSpPr txBox="1"/>
-          <p:nvPr/>
-        </p:nvSpPr>
-        <p:spPr>
-          <a:xfrm>
-            <a:off x="713232" y="1775333"/>
-            <a:ext cx="6281928" cy="257429"/>
-          </a:xfrm>
-          <a:prstGeom prst="rect">
-            <a:avLst/>
-          </a:prstGeom>
-          <a:noFill/>
-          <a:ln/>
-        </p:spPr>
-        <p:txBody>
-          <a:bodyPr wrap="square" lIns="0" tIns="0" rIns="0" bIns="0" rtlCol="0" anchor="t"/>
-          <a:lstStyle/>
-          <a:p>
-            <a:pPr marL="342900" indent="-342900">
-              <a:lnSpc>
-                <a:spcPct val="125000"/>
-              </a:lnSpc>
-              <a:buSzPct val="100000"/>
-              <a:buChar char="●"/>
-            </a:pPr>
-            <a:r>
-              <a:rPr lang="en-US" sz="1100" b="1" dirty="0">
-                <a:solidFill>
-                  <a:srgbClr val="222222"/>
-                </a:solidFill>
-                <a:latin typeface="Calibri" pitchFamily="34" charset="0"/>
-                <a:ea typeface="Calibri" pitchFamily="34" charset="-122"/>
-                <a:cs typeface="Calibri" pitchFamily="34" charset="-120"/>
-              </a:rPr>
-              <a:t>ユニーク来場者</a:t>
-            </a:r>
-            <a:pPr indent="0" marL="0">
-              <a:lnSpc>
-                <a:spcPct val="125000"/>
-              </a:lnSpc>
-              <a:buNone/>
-            </a:pPr>
-            <a:r>
-              <a:rPr lang="en-US" sz="1100" dirty="0">
-                <a:solidFill>
-                  <a:srgbClr val="222222"/>
-                </a:solidFill>
-                <a:latin typeface="Calibri" pitchFamily="34" charset="0"/>
-                <a:ea typeface="Calibri" pitchFamily="34" charset="-122"/>
-                <a:cs typeface="Calibri" pitchFamily="34" charset="-120"/>
-              </a:rPr>
-              <a:t>：アンケート画面を開いた端末の数</a:t>
-            </a:r>
-            <a:endParaRPr lang="en-US" sz="1100" dirty="0"/>
-          </a:p>
-        </p:txBody>
-      </p:sp>
-      <p:sp>
-        <p:nvSpPr>
-          <p:cNvPr id="6" name="Text 4"/>
-          <p:cNvSpPr txBox="1"/>
-          <p:nvPr/>
-        </p:nvSpPr>
-        <p:spPr>
-          <a:xfrm>
-            <a:off x="713232" y="2051050"/>
-            <a:ext cx="6281928" cy="257429"/>
-          </a:xfrm>
-          <a:prstGeom prst="rect">
-            <a:avLst/>
-          </a:prstGeom>
-          <a:noFill/>
-          <a:ln/>
-        </p:spPr>
-        <p:txBody>
-          <a:bodyPr wrap="square" lIns="0" tIns="0" rIns="0" bIns="0" rtlCol="0" anchor="t"/>
-          <a:lstStyle/>
-          <a:p>
-            <a:pPr marL="342900" indent="-342900">
-              <a:lnSpc>
-                <a:spcPct val="125000"/>
-              </a:lnSpc>
-              <a:buSzPct val="100000"/>
-              <a:buChar char="●"/>
-            </a:pPr>
-            <a:r>
-              <a:rPr lang="en-US" sz="1100" b="1" dirty="0">
-                <a:solidFill>
-                  <a:srgbClr val="222222"/>
-                </a:solidFill>
-                <a:latin typeface="Calibri" pitchFamily="34" charset="0"/>
-                <a:ea typeface="Calibri" pitchFamily="34" charset="-122"/>
-                <a:cs typeface="Calibri" pitchFamily="34" charset="-120"/>
-              </a:rPr>
-              <a:t>回答した来場者</a:t>
-            </a:r>
-            <a:pPr indent="0" marL="0">
-              <a:lnSpc>
-                <a:spcPct val="125000"/>
-              </a:lnSpc>
-              <a:buNone/>
-            </a:pPr>
-            <a:r>
-              <a:rPr lang="en-US" sz="1100" dirty="0">
-                <a:solidFill>
-                  <a:srgbClr val="222222"/>
-                </a:solidFill>
-                <a:latin typeface="Calibri" pitchFamily="34" charset="0"/>
-                <a:ea typeface="Calibri" pitchFamily="34" charset="-122"/>
-                <a:cs typeface="Calibri" pitchFamily="34" charset="-120"/>
-              </a:rPr>
-              <a:t>：実際に送信した人数（同じ方は何社回っても1人）</a:t>
-            </a:r>
-            <a:endParaRPr lang="en-US" sz="1100" dirty="0"/>
-          </a:p>
-        </p:txBody>
-      </p:sp>
-      <p:sp>
-        <p:nvSpPr>
-          <p:cNvPr id="7" name="Text 5"/>
-          <p:cNvSpPr txBox="1"/>
-          <p:nvPr/>
-        </p:nvSpPr>
-        <p:spPr>
-          <a:xfrm>
-            <a:off x="713232" y="2326767"/>
-            <a:ext cx="6281928" cy="257429"/>
-          </a:xfrm>
-          <a:prstGeom prst="rect">
-            <a:avLst/>
-          </a:prstGeom>
-          <a:noFill/>
-          <a:ln/>
-        </p:spPr>
-        <p:txBody>
-          <a:bodyPr wrap="square" lIns="0" tIns="0" rIns="0" bIns="0" rtlCol="0" anchor="t"/>
-          <a:lstStyle/>
-          <a:p>
-            <a:pPr marL="342900" indent="-342900">
-              <a:lnSpc>
-                <a:spcPct val="125000"/>
-              </a:lnSpc>
-              <a:buSzPct val="100000"/>
-              <a:buChar char="●"/>
-            </a:pPr>
-            <a:r>
-              <a:rPr lang="en-US" sz="1100" b="1" dirty="0">
-                <a:solidFill>
-                  <a:srgbClr val="222222"/>
-                </a:solidFill>
-                <a:latin typeface="Calibri" pitchFamily="34" charset="0"/>
-                <a:ea typeface="Calibri" pitchFamily="34" charset="-122"/>
-                <a:cs typeface="Calibri" pitchFamily="34" charset="-120"/>
-              </a:rPr>
-              <a:t>のべ来場者</a:t>
-            </a:r>
-            <a:pPr indent="0" marL="0">
-              <a:lnSpc>
-                <a:spcPct val="125000"/>
-              </a:lnSpc>
-              <a:buNone/>
-            </a:pPr>
-            <a:r>
-              <a:rPr lang="en-US" sz="1100" dirty="0">
-                <a:solidFill>
-                  <a:srgbClr val="222222"/>
-                </a:solidFill>
-                <a:latin typeface="Calibri" pitchFamily="34" charset="0"/>
-                <a:ea typeface="Calibri" pitchFamily="34" charset="-122"/>
-                <a:cs typeface="Calibri" pitchFamily="34" charset="-120"/>
-              </a:rPr>
-              <a:t>：アンケートで聞いた来場人数の合計（1組3人が3社回れば9人）</a:t>
-            </a:r>
-            <a:endParaRPr lang="en-US" sz="1100" dirty="0"/>
-          </a:p>
-        </p:txBody>
-      </p:sp>
-      <p:sp>
-        <p:nvSpPr>
-          <p:cNvPr id="8" name="Text 6"/>
-          <p:cNvSpPr txBox="1"/>
-          <p:nvPr/>
-        </p:nvSpPr>
-        <p:spPr>
-          <a:xfrm>
-            <a:off x="713232" y="2602484"/>
-            <a:ext cx="6281928" cy="257429"/>
-          </a:xfrm>
-          <a:prstGeom prst="rect">
-            <a:avLst/>
-          </a:prstGeom>
-          <a:noFill/>
-          <a:ln/>
-        </p:spPr>
-        <p:txBody>
-          <a:bodyPr wrap="square" lIns="0" tIns="0" rIns="0" bIns="0" rtlCol="0" anchor="t"/>
-          <a:lstStyle/>
-          <a:p>
-            <a:pPr marL="342900" indent="-342900">
-              <a:lnSpc>
-                <a:spcPct val="125000"/>
-              </a:lnSpc>
-              <a:buSzPct val="100000"/>
-              <a:buChar char="●"/>
-            </a:pPr>
-            <a:r>
-              <a:rPr lang="en-US" sz="1100" b="1" dirty="0">
-                <a:solidFill>
-                  <a:srgbClr val="222222"/>
-                </a:solidFill>
-                <a:latin typeface="Calibri" pitchFamily="34" charset="0"/>
-                <a:ea typeface="Calibri" pitchFamily="34" charset="-122"/>
-                <a:cs typeface="Calibri" pitchFamily="34" charset="-120"/>
-              </a:rPr>
-              <a:t>実来場者（推計）</a:t>
-            </a:r>
-            <a:pPr indent="0" marL="0">
-              <a:lnSpc>
-                <a:spcPct val="125000"/>
-              </a:lnSpc>
-              <a:buNone/>
-            </a:pPr>
-            <a:r>
-              <a:rPr lang="en-US" sz="1100" dirty="0">
-                <a:solidFill>
-                  <a:srgbClr val="222222"/>
-                </a:solidFill>
-                <a:latin typeface="Calibri" pitchFamily="34" charset="0"/>
-                <a:ea typeface="Calibri" pitchFamily="34" charset="-122"/>
-                <a:cs typeface="Calibri" pitchFamily="34" charset="-120"/>
-              </a:rPr>
-              <a:t>：同じ来場者を1回だけ数えた人数</a:t>
-            </a:r>
-            <a:endParaRPr lang="en-US" sz="1100" dirty="0"/>
-          </a:p>
-        </p:txBody>
-      </p:sp>
-      <p:sp>
-        <p:nvSpPr>
-          <p:cNvPr id="9" name="Text 7"/>
-          <p:cNvSpPr txBox="1"/>
-          <p:nvPr/>
-        </p:nvSpPr>
-        <p:spPr>
-          <a:xfrm>
-            <a:off x="713232" y="2878201"/>
-            <a:ext cx="6281928" cy="257429"/>
-          </a:xfrm>
-          <a:prstGeom prst="rect">
-            <a:avLst/>
-          </a:prstGeom>
-          <a:noFill/>
-          <a:ln/>
-        </p:spPr>
-        <p:txBody>
-          <a:bodyPr wrap="square" lIns="0" tIns="0" rIns="0" bIns="0" rtlCol="0" anchor="t"/>
-          <a:lstStyle/>
-          <a:p>
-            <a:pPr marL="342900" indent="-342900">
-              <a:lnSpc>
-                <a:spcPct val="125000"/>
-              </a:lnSpc>
-              <a:buSzPct val="100000"/>
-              <a:buChar char="●"/>
-            </a:pPr>
-            <a:r>
-              <a:rPr lang="en-US" sz="1100" b="1" dirty="0">
-                <a:solidFill>
-                  <a:srgbClr val="222222"/>
-                </a:solidFill>
-                <a:latin typeface="Calibri" pitchFamily="34" charset="0"/>
-                <a:ea typeface="Calibri" pitchFamily="34" charset="-122"/>
-                <a:cs typeface="Calibri" pitchFamily="34" charset="-120"/>
-              </a:rPr>
-              <a:t>総回答数</a:t>
-            </a:r>
-            <a:pPr indent="0" marL="0">
-              <a:lnSpc>
-                <a:spcPct val="125000"/>
-              </a:lnSpc>
-              <a:buNone/>
-            </a:pPr>
-            <a:r>
-              <a:rPr lang="en-US" sz="1100" dirty="0">
-                <a:solidFill>
-                  <a:srgbClr val="222222"/>
-                </a:solidFill>
-                <a:latin typeface="Calibri" pitchFamily="34" charset="0"/>
-                <a:ea typeface="Calibri" pitchFamily="34" charset="-122"/>
-                <a:cs typeface="Calibri" pitchFamily="34" charset="-120"/>
-              </a:rPr>
-              <a:t>（重複を除いた件数）</a:t>
-            </a:r>
-            <a:endParaRPr lang="en-US" sz="1100" dirty="0"/>
-          </a:p>
-        </p:txBody>
-      </p:sp>
-      <p:sp>
-        <p:nvSpPr>
-          <p:cNvPr id="10" name="Text 8"/>
-          <p:cNvSpPr txBox="1"/>
-          <p:nvPr/>
-        </p:nvSpPr>
-        <p:spPr>
-          <a:xfrm>
-            <a:off x="713232" y="3153918"/>
-            <a:ext cx="6281928" cy="257429"/>
-          </a:xfrm>
-          <a:prstGeom prst="rect">
-            <a:avLst/>
-          </a:prstGeom>
-          <a:noFill/>
-          <a:ln/>
-        </p:spPr>
-        <p:txBody>
-          <a:bodyPr wrap="square" lIns="0" tIns="0" rIns="0" bIns="0" rtlCol="0" anchor="t"/>
-          <a:lstStyle/>
-          <a:p>
-            <a:pPr marL="342900" indent="-342900">
-              <a:lnSpc>
-                <a:spcPct val="125000"/>
-              </a:lnSpc>
-              <a:buSzPct val="100000"/>
-              <a:buChar char="●"/>
-            </a:pPr>
-            <a:r>
-              <a:rPr lang="en-US" sz="1100" b="1" dirty="0">
-                <a:solidFill>
-                  <a:srgbClr val="222222"/>
-                </a:solidFill>
-                <a:latin typeface="Calibri" pitchFamily="34" charset="0"/>
-                <a:ea typeface="Calibri" pitchFamily="34" charset="-122"/>
-                <a:cs typeface="Calibri" pitchFamily="34" charset="-120"/>
-              </a:rPr>
-              <a:t>平均訪問企業数</a:t>
-            </a:r>
-            <a:pPr indent="0" marL="0">
-              <a:lnSpc>
-                <a:spcPct val="125000"/>
-              </a:lnSpc>
-              <a:buNone/>
-            </a:pPr>
-            <a:r>
-              <a:rPr lang="en-US" sz="1100" dirty="0">
-                <a:solidFill>
-                  <a:srgbClr val="222222"/>
-                </a:solidFill>
-                <a:latin typeface="Calibri" pitchFamily="34" charset="0"/>
-                <a:ea typeface="Calibri" pitchFamily="34" charset="-122"/>
-                <a:cs typeface="Calibri" pitchFamily="34" charset="-120"/>
-              </a:rPr>
-              <a:t>：1人あたり何社まわったか</a:t>
-            </a:r>
-            <a:endParaRPr lang="en-US" sz="1100" dirty="0"/>
-          </a:p>
-        </p:txBody>
-      </p:sp>
-      <p:sp>
-        <p:nvSpPr>
-          <p:cNvPr id="11" name="Text 9"/>
-          <p:cNvSpPr txBox="1"/>
-          <p:nvPr/>
-        </p:nvSpPr>
-        <p:spPr>
-          <a:xfrm>
-            <a:off x="713232" y="3429635"/>
-            <a:ext cx="6281928" cy="257429"/>
-          </a:xfrm>
-          <a:prstGeom prst="rect">
-            <a:avLst/>
-          </a:prstGeom>
-          <a:noFill/>
-          <a:ln/>
-        </p:spPr>
-        <p:txBody>
-          <a:bodyPr wrap="square" lIns="0" tIns="0" rIns="0" bIns="0" rtlCol="0" anchor="t"/>
-          <a:lstStyle/>
-          <a:p>
-            <a:pPr marL="342900" indent="-342900">
-              <a:lnSpc>
-                <a:spcPct val="125000"/>
-              </a:lnSpc>
-              <a:buSzPct val="100000"/>
-              <a:buChar char="●"/>
-            </a:pPr>
-            <a:r>
-              <a:rPr lang="en-US" sz="1100" b="1" dirty="0">
-                <a:solidFill>
-                  <a:srgbClr val="222222"/>
-                </a:solidFill>
-                <a:latin typeface="Calibri" pitchFamily="34" charset="0"/>
-                <a:ea typeface="Calibri" pitchFamily="34" charset="-122"/>
-                <a:cs typeface="Calibri" pitchFamily="34" charset="-120"/>
-              </a:rPr>
-              <a:t>メール登録</a:t>
-            </a:r>
-            <a:pPr indent="0" marL="0">
-              <a:lnSpc>
-                <a:spcPct val="125000"/>
-              </a:lnSpc>
-              <a:buNone/>
-            </a:pPr>
-            <a:r>
-              <a:rPr lang="en-US" sz="1100" dirty="0">
-                <a:solidFill>
-                  <a:srgbClr val="222222"/>
-                </a:solidFill>
-                <a:latin typeface="Calibri" pitchFamily="34" charset="0"/>
-                <a:ea typeface="Calibri" pitchFamily="34" charset="-122"/>
-                <a:cs typeface="Calibri" pitchFamily="34" charset="-120"/>
-              </a:rPr>
-              <a:t>：総合アンケートの案内先の数</a:t>
-            </a:r>
-            <a:endParaRPr lang="en-US" sz="1100" dirty="0"/>
-          </a:p>
-        </p:txBody>
-      </p:sp>
-      <p:sp>
-        <p:nvSpPr>
-          <p:cNvPr id="12" name="Text 10"/>
-          <p:cNvSpPr txBox="1"/>
-          <p:nvPr/>
-        </p:nvSpPr>
-        <p:spPr>
-          <a:xfrm>
-            <a:off x="713232" y="3705352"/>
-            <a:ext cx="6281928" cy="257429"/>
-          </a:xfrm>
-          <a:prstGeom prst="rect">
-            <a:avLst/>
-          </a:prstGeom>
-          <a:noFill/>
-          <a:ln/>
-        </p:spPr>
-        <p:txBody>
-          <a:bodyPr wrap="square" lIns="0" tIns="0" rIns="0" bIns="0" rtlCol="0" anchor="t"/>
-          <a:lstStyle/>
-          <a:p>
-            <a:pPr marL="342900" indent="-342900">
-              <a:lnSpc>
-                <a:spcPct val="125000"/>
-              </a:lnSpc>
-              <a:buSzPct val="100000"/>
-              <a:buChar char="●"/>
-            </a:pPr>
-            <a:r>
-              <a:rPr lang="en-US" sz="1100" b="1" dirty="0">
-                <a:solidFill>
-                  <a:srgbClr val="222222"/>
-                </a:solidFill>
-                <a:latin typeface="Calibri" pitchFamily="34" charset="0"/>
-                <a:ea typeface="Calibri" pitchFamily="34" charset="-122"/>
-                <a:cs typeface="Calibri" pitchFamily="34" charset="-120"/>
-              </a:rPr>
-              <a:t>交換コード</a:t>
-            </a:r>
-            <a:pPr indent="0" marL="0">
-              <a:lnSpc>
-                <a:spcPct val="125000"/>
-              </a:lnSpc>
-              <a:buNone/>
-            </a:pPr>
-            <a:r>
-              <a:rPr lang="en-US" sz="1100" dirty="0">
-                <a:solidFill>
-                  <a:srgbClr val="222222"/>
-                </a:solidFill>
-                <a:latin typeface="Calibri" pitchFamily="34" charset="0"/>
-                <a:ea typeface="Calibri" pitchFamily="34" charset="-122"/>
-                <a:cs typeface="Calibri" pitchFamily="34" charset="-120"/>
-              </a:rPr>
-              <a:t>：発行数と交換済みの数</a:t>
-            </a:r>
-            <a:endParaRPr lang="en-US" sz="1100" dirty="0"/>
-          </a:p>
-        </p:txBody>
-      </p:sp>
-      <p:sp>
-        <p:nvSpPr>
-          <p:cNvPr id="13" name="Text 11"/>
-          <p:cNvSpPr txBox="1"/>
-          <p:nvPr/>
-        </p:nvSpPr>
-        <p:spPr>
-          <a:xfrm>
-            <a:off x="566928" y="3981069"/>
-            <a:ext cx="6428232" cy="257429"/>
-          </a:xfrm>
-          <a:prstGeom prst="rect">
-            <a:avLst/>
-          </a:prstGeom>
-          <a:noFill/>
-          <a:ln/>
-        </p:spPr>
-        <p:txBody>
-          <a:bodyPr wrap="square" lIns="0" tIns="0" rIns="0" bIns="0" rtlCol="0" anchor="t"/>
-          <a:lstStyle/>
-          <a:p>
-            <a:pPr indent="0" marL="0">
-              <a:lnSpc>
-                <a:spcPct val="125000"/>
-              </a:lnSpc>
-              <a:buNone/>
-            </a:pPr>
-            <a:r>
-              <a:rPr lang="en-US" sz="1100" dirty="0">
-                <a:solidFill>
-                  <a:srgbClr val="222222"/>
-                </a:solidFill>
-                <a:latin typeface="Calibri" pitchFamily="34" charset="0"/>
-                <a:ea typeface="Calibri" pitchFamily="34" charset="-122"/>
-                <a:cs typeface="Calibri" pitchFamily="34" charset="-120"/>
-              </a:rPr>
-              <a:t>下には</a:t>
-            </a:r>
-            <a:pPr indent="0" marL="0">
-              <a:lnSpc>
-                <a:spcPct val="125000"/>
-              </a:lnSpc>
-              <a:buNone/>
-            </a:pPr>
-            <a:r>
-              <a:rPr lang="en-US" sz="1100" b="1" dirty="0">
-                <a:solidFill>
-                  <a:srgbClr val="222222"/>
-                </a:solidFill>
-                <a:latin typeface="Calibri" pitchFamily="34" charset="0"/>
-                <a:ea typeface="Calibri" pitchFamily="34" charset="-122"/>
-                <a:cs typeface="Calibri" pitchFamily="34" charset="-120"/>
-              </a:rPr>
-              <a:t>時間帯別の回答数</a:t>
-            </a:r>
-            <a:pPr indent="0" marL="0">
-              <a:lnSpc>
-                <a:spcPct val="125000"/>
-              </a:lnSpc>
-              <a:buNone/>
-            </a:pPr>
-            <a:r>
-              <a:rPr lang="en-US" sz="1100" dirty="0">
-                <a:solidFill>
-                  <a:srgbClr val="222222"/>
-                </a:solidFill>
-                <a:latin typeface="Calibri" pitchFamily="34" charset="0"/>
-                <a:ea typeface="Calibri" pitchFamily="34" charset="-122"/>
-                <a:cs typeface="Calibri" pitchFamily="34" charset="-120"/>
-              </a:rPr>
-              <a:t>のグラフと、</a:t>
-            </a:r>
-            <a:pPr indent="0" marL="0">
-              <a:lnSpc>
-                <a:spcPct val="125000"/>
-              </a:lnSpc>
-              <a:buNone/>
-            </a:pPr>
-            <a:r>
-              <a:rPr lang="en-US" sz="1100" b="1" dirty="0">
-                <a:solidFill>
-                  <a:srgbClr val="222222"/>
-                </a:solidFill>
-                <a:latin typeface="Calibri" pitchFamily="34" charset="0"/>
-                <a:ea typeface="Calibri" pitchFamily="34" charset="-122"/>
-                <a:cs typeface="Calibri" pitchFamily="34" charset="-120"/>
-              </a:rPr>
-              <a:t>企業別の回答数</a:t>
-            </a:r>
-            <a:pPr indent="0" marL="0">
-              <a:lnSpc>
-                <a:spcPct val="125000"/>
-              </a:lnSpc>
-              <a:buNone/>
-            </a:pPr>
-            <a:r>
-              <a:rPr lang="en-US" sz="1100" dirty="0">
-                <a:solidFill>
-                  <a:srgbClr val="222222"/>
-                </a:solidFill>
-                <a:latin typeface="Calibri" pitchFamily="34" charset="0"/>
-                <a:ea typeface="Calibri" pitchFamily="34" charset="-122"/>
-                <a:cs typeface="Calibri" pitchFamily="34" charset="-120"/>
-              </a:rPr>
-              <a:t>の一覧が出ます。一覧の最下段の合計行にある</a:t>
-            </a:r>
-            <a:endParaRPr lang="en-US" sz="1100" dirty="0"/>
-          </a:p>
-        </p:txBody>
-      </p:sp>
-      <p:sp>
-        <p:nvSpPr>
-          <p:cNvPr id="14" name="Text 12"/>
-          <p:cNvSpPr txBox="1"/>
-          <p:nvPr/>
-        </p:nvSpPr>
-        <p:spPr>
-          <a:xfrm>
-            <a:off x="566928" y="4275074"/>
-            <a:ext cx="6428232" cy="257429"/>
-          </a:xfrm>
-          <a:prstGeom prst="rect">
-            <a:avLst/>
-          </a:prstGeom>
-          <a:noFill/>
-          <a:ln/>
-        </p:spPr>
-        <p:txBody>
-          <a:bodyPr wrap="square" lIns="0" tIns="0" rIns="0" bIns="0" rtlCol="0" anchor="t"/>
-          <a:lstStyle/>
-          <a:p>
-            <a:pPr indent="0" marL="0">
-              <a:lnSpc>
-                <a:spcPct val="125000"/>
-              </a:lnSpc>
-              <a:buNone/>
-            </a:pPr>
-            <a:r>
-              <a:rPr lang="en-US" sz="1100" dirty="0">
-                <a:solidFill>
-                  <a:srgbClr val="222222"/>
-                </a:solidFill>
-                <a:latin typeface="Calibri" pitchFamily="34" charset="0"/>
-                <a:ea typeface="Calibri" pitchFamily="34" charset="-122"/>
-                <a:cs typeface="Calibri" pitchFamily="34" charset="-120"/>
-              </a:rPr>
-              <a:t>「回答者数」の合計は</a:t>
-            </a:r>
-            <a:pPr indent="0" marL="0">
-              <a:lnSpc>
-                <a:spcPct val="125000"/>
-              </a:lnSpc>
-              <a:buNone/>
-            </a:pPr>
-            <a:r>
-              <a:rPr lang="en-US" sz="1100" b="1" dirty="0">
-                <a:solidFill>
-                  <a:srgbClr val="222222"/>
-                </a:solidFill>
-                <a:latin typeface="Calibri" pitchFamily="34" charset="0"/>
-                <a:ea typeface="Calibri" pitchFamily="34" charset="-122"/>
-                <a:cs typeface="Calibri" pitchFamily="34" charset="-120"/>
-              </a:rPr>
-              <a:t>のべ訪問数</a:t>
-            </a:r>
-            <a:pPr indent="0" marL="0">
-              <a:lnSpc>
-                <a:spcPct val="125000"/>
-              </a:lnSpc>
-              <a:buNone/>
-            </a:pPr>
-            <a:r>
-              <a:rPr lang="en-US" sz="1100" dirty="0">
-                <a:solidFill>
-                  <a:srgbClr val="222222"/>
-                </a:solidFill>
-                <a:latin typeface="Calibri" pitchFamily="34" charset="0"/>
-                <a:ea typeface="Calibri" pitchFamily="34" charset="-122"/>
-                <a:cs typeface="Calibri" pitchFamily="34" charset="-120"/>
-              </a:rPr>
-              <a:t>（何社ぶんの回答が集まったか）です。</a:t>
-            </a:r>
-            <a:endParaRPr lang="en-US" sz="1100" dirty="0"/>
-          </a:p>
-        </p:txBody>
-      </p:sp>
-      <p:sp>
-        <p:nvSpPr>
-          <p:cNvPr id="15" name="Shape 13"/>
-          <p:cNvSpPr/>
-          <p:nvPr/>
-        </p:nvSpPr>
-        <p:spPr>
-          <a:xfrm>
-            <a:off x="566928" y="4569079"/>
-            <a:ext cx="6428232" cy="431102"/>
-          </a:xfrm>
-          <a:prstGeom prst="roundRect">
-            <a:avLst>
-              <a:gd name="adj" fmla="val 12726"/>
-            </a:avLst>
-          </a:prstGeom>
-          <a:solidFill>
-            <a:srgbClr val="E8ECF8"/>
-          </a:solidFill>
-          <a:ln w="9525">
-            <a:solidFill>
-              <a:srgbClr val="1E2761"/>
-            </a:solidFill>
-            <a:prstDash val="solid"/>
-          </a:ln>
-        </p:spPr>
-      </p:sp>
-      <p:sp>
-        <p:nvSpPr>
-          <p:cNvPr id="16" name="Text 14"/>
-          <p:cNvSpPr txBox="1"/>
-          <p:nvPr/>
-        </p:nvSpPr>
-        <p:spPr>
-          <a:xfrm>
-            <a:off x="658368" y="4660519"/>
-            <a:ext cx="237744" cy="237744"/>
-          </a:xfrm>
-          <a:prstGeom prst="rect">
-            <a:avLst/>
-          </a:prstGeom>
-          <a:noFill/>
-          <a:ln/>
-        </p:spPr>
-        <p:txBody>
-          <a:bodyPr wrap="square" lIns="0" tIns="0" rIns="0" bIns="0" rtlCol="0" anchor="ctr"/>
-          <a:lstStyle/>
-          <a:p>
-            <a:pPr algn="ctr" indent="0" marL="0">
-              <a:buNone/>
-            </a:pPr>
-            <a:r>
-              <a:rPr lang="en-US" sz="1200" b="1" dirty="0">
-                <a:solidFill>
-                  <a:srgbClr val="1E2761"/>
-                </a:solidFill>
-                <a:latin typeface="Calibri" pitchFamily="34" charset="0"/>
-                <a:ea typeface="Calibri" pitchFamily="34" charset="-122"/>
-                <a:cs typeface="Calibri" pitchFamily="34" charset="-120"/>
-              </a:rPr>
-              <a:t>i</a:t>
-            </a:r>
-            <a:endParaRPr lang="en-US" sz="1200" dirty="0"/>
-          </a:p>
-        </p:txBody>
-      </p:sp>
-      <p:sp>
-        <p:nvSpPr>
-          <p:cNvPr id="17" name="Text 15"/>
-          <p:cNvSpPr txBox="1"/>
-          <p:nvPr/>
-        </p:nvSpPr>
-        <p:spPr>
-          <a:xfrm>
-            <a:off x="950976" y="4678807"/>
-            <a:ext cx="5925312" cy="248221"/>
-          </a:xfrm>
-          <a:prstGeom prst="rect">
-            <a:avLst/>
-          </a:prstGeom>
-          <a:noFill/>
-          <a:ln/>
-        </p:spPr>
-        <p:txBody>
-          <a:bodyPr wrap="square" lIns="0" tIns="0" rIns="0" bIns="0" rtlCol="0" anchor="t"/>
-          <a:lstStyle/>
-          <a:p>
-            <a:pPr indent="0" marL="0">
-              <a:lnSpc>
-                <a:spcPct val="120000"/>
-              </a:lnSpc>
-              <a:buNone/>
-            </a:pPr>
-            <a:r>
-              <a:rPr lang="en-US" sz="1050" dirty="0">
-                <a:solidFill>
-                  <a:srgbClr val="222222"/>
-                </a:solidFill>
-                <a:latin typeface="Calibri" pitchFamily="34" charset="0"/>
-                <a:ea typeface="Calibri" pitchFamily="34" charset="-122"/>
-                <a:cs typeface="Calibri" pitchFamily="34" charset="-120"/>
-              </a:rPr>
-              <a:t>企業別の一覧から、その企業の「集計」や「回答一覧」を開けます。</a:t>
-            </a:r>
-            <a:endParaRPr lang="en-US" sz="1050" dirty="0"/>
-          </a:p>
-        </p:txBody>
-      </p:sp>
-      <p:sp>
-        <p:nvSpPr>
-          <p:cNvPr id="18" name="Shape 16"/>
-          <p:cNvSpPr/>
-          <p:nvPr/>
-        </p:nvSpPr>
-        <p:spPr>
-          <a:xfrm>
-            <a:off x="566928" y="5073333"/>
-            <a:ext cx="6428232" cy="431102"/>
-          </a:xfrm>
-          <a:prstGeom prst="roundRect">
-            <a:avLst>
-              <a:gd name="adj" fmla="val 12726"/>
-            </a:avLst>
-          </a:prstGeom>
-          <a:solidFill>
-            <a:srgbClr val="E8ECF8"/>
-          </a:solidFill>
-          <a:ln w="9525">
-            <a:solidFill>
-              <a:srgbClr val="1E2761"/>
-            </a:solidFill>
-            <a:prstDash val="solid"/>
-          </a:ln>
-        </p:spPr>
-      </p:sp>
-      <p:sp>
-        <p:nvSpPr>
-          <p:cNvPr id="19" name="Text 17"/>
-          <p:cNvSpPr txBox="1"/>
-          <p:nvPr/>
-        </p:nvSpPr>
-        <p:spPr>
-          <a:xfrm>
-            <a:off x="658368" y="5164773"/>
-            <a:ext cx="237744" cy="237744"/>
-          </a:xfrm>
-          <a:prstGeom prst="rect">
-            <a:avLst/>
-          </a:prstGeom>
-          <a:noFill/>
-          <a:ln/>
-        </p:spPr>
-        <p:txBody>
-          <a:bodyPr wrap="square" lIns="0" tIns="0" rIns="0" bIns="0" rtlCol="0" anchor="ctr"/>
-          <a:lstStyle/>
-          <a:p>
-            <a:pPr algn="ctr" indent="0" marL="0">
-              <a:buNone/>
-            </a:pPr>
-            <a:r>
-              <a:rPr lang="en-US" sz="1200" b="1" dirty="0">
-                <a:solidFill>
-                  <a:srgbClr val="1E2761"/>
-                </a:solidFill>
-                <a:latin typeface="Calibri" pitchFamily="34" charset="0"/>
-                <a:ea typeface="Calibri" pitchFamily="34" charset="-122"/>
-                <a:cs typeface="Calibri" pitchFamily="34" charset="-120"/>
-              </a:rPr>
-              <a:t>i</a:t>
-            </a:r>
-            <a:endParaRPr lang="en-US" sz="1200" dirty="0"/>
-          </a:p>
-        </p:txBody>
-      </p:sp>
-      <p:sp>
-        <p:nvSpPr>
-          <p:cNvPr id="20" name="Text 18"/>
-          <p:cNvSpPr txBox="1"/>
-          <p:nvPr/>
-        </p:nvSpPr>
-        <p:spPr>
-          <a:xfrm>
-            <a:off x="950976" y="5183061"/>
-            <a:ext cx="5925312" cy="248221"/>
-          </a:xfrm>
-          <a:prstGeom prst="rect">
-            <a:avLst/>
-          </a:prstGeom>
-          <a:noFill/>
-          <a:ln/>
-        </p:spPr>
-        <p:txBody>
-          <a:bodyPr wrap="square" lIns="0" tIns="0" rIns="0" bIns="0" rtlCol="0" anchor="t"/>
-          <a:lstStyle/>
-          <a:p>
-            <a:pPr indent="0" marL="0">
-              <a:lnSpc>
-                <a:spcPct val="120000"/>
-              </a:lnSpc>
-              <a:buNone/>
-            </a:pPr>
-            <a:r>
-              <a:rPr lang="en-US" sz="1050" dirty="0">
-                <a:solidFill>
-                  <a:srgbClr val="222222"/>
-                </a:solidFill>
-                <a:latin typeface="Calibri" pitchFamily="34" charset="0"/>
-                <a:ea typeface="Calibri" pitchFamily="34" charset="-122"/>
-                <a:cs typeface="Calibri" pitchFamily="34" charset="-120"/>
-              </a:rPr>
-              <a:t>来場人数は任意回答です。未回答のぶんは、同じ来場者が別の企業で答えた人数などから補って</a:t>
-            </a:r>
-            <a:endParaRPr lang="en-US" sz="1050" dirty="0"/>
-          </a:p>
-        </p:txBody>
-      </p:sp>
-      <p:sp>
-        <p:nvSpPr>
-          <p:cNvPr id="21" name="Shape 19"/>
-          <p:cNvSpPr/>
-          <p:nvPr/>
-        </p:nvSpPr>
-        <p:spPr>
-          <a:xfrm>
-            <a:off x="566928" y="5577586"/>
-            <a:ext cx="6428232" cy="431102"/>
-          </a:xfrm>
-          <a:prstGeom prst="roundRect">
-            <a:avLst>
-              <a:gd name="adj" fmla="val 12726"/>
-            </a:avLst>
-          </a:prstGeom>
-          <a:solidFill>
-            <a:srgbClr val="E8ECF8"/>
-          </a:solidFill>
-          <a:ln w="9525">
-            <a:solidFill>
-              <a:srgbClr val="1E2761"/>
-            </a:solidFill>
-            <a:prstDash val="solid"/>
-          </a:ln>
-        </p:spPr>
-      </p:sp>
-      <p:sp>
-        <p:nvSpPr>
-          <p:cNvPr id="22" name="Text 20"/>
-          <p:cNvSpPr txBox="1"/>
-          <p:nvPr/>
-        </p:nvSpPr>
-        <p:spPr>
-          <a:xfrm>
-            <a:off x="658368" y="5669026"/>
-            <a:ext cx="237744" cy="237744"/>
-          </a:xfrm>
-          <a:prstGeom prst="rect">
-            <a:avLst/>
-          </a:prstGeom>
-          <a:noFill/>
-          <a:ln/>
-        </p:spPr>
-        <p:txBody>
-          <a:bodyPr wrap="square" lIns="0" tIns="0" rIns="0" bIns="0" rtlCol="0" anchor="ctr"/>
-          <a:lstStyle/>
-          <a:p>
-            <a:pPr algn="ctr" indent="0" marL="0">
-              <a:buNone/>
-            </a:pPr>
-            <a:r>
-              <a:rPr lang="en-US" sz="1200" b="1" dirty="0">
-                <a:solidFill>
-                  <a:srgbClr val="1E2761"/>
-                </a:solidFill>
-                <a:latin typeface="Calibri" pitchFamily="34" charset="0"/>
-                <a:ea typeface="Calibri" pitchFamily="34" charset="-122"/>
-                <a:cs typeface="Calibri" pitchFamily="34" charset="-120"/>
-              </a:rPr>
-              <a:t>i</a:t>
-            </a:r>
-            <a:endParaRPr lang="en-US" sz="1200" dirty="0"/>
-          </a:p>
-        </p:txBody>
-      </p:sp>
-      <p:sp>
-        <p:nvSpPr>
-          <p:cNvPr id="23" name="Text 21"/>
-          <p:cNvSpPr txBox="1"/>
-          <p:nvPr/>
-        </p:nvSpPr>
-        <p:spPr>
-          <a:xfrm>
-            <a:off x="950976" y="5687314"/>
-            <a:ext cx="5925312" cy="248221"/>
-          </a:xfrm>
-          <a:prstGeom prst="rect">
-            <a:avLst/>
-          </a:prstGeom>
-          <a:noFill/>
-          <a:ln/>
-        </p:spPr>
-        <p:txBody>
-          <a:bodyPr wrap="square" lIns="0" tIns="0" rIns="0" bIns="0" rtlCol="0" anchor="t"/>
-          <a:lstStyle/>
-          <a:p>
-            <a:pPr indent="0" marL="0">
-              <a:lnSpc>
-                <a:spcPct val="120000"/>
-              </a:lnSpc>
-              <a:buNone/>
-            </a:pPr>
-            <a:r>
-              <a:rPr lang="en-US" sz="1050" dirty="0">
-                <a:solidFill>
-                  <a:srgbClr val="222222"/>
-                </a:solidFill>
-                <a:latin typeface="Calibri" pitchFamily="34" charset="0"/>
-                <a:ea typeface="Calibri" pitchFamily="34" charset="-122"/>
-                <a:cs typeface="Calibri" pitchFamily="34" charset="-120"/>
-              </a:rPr>
-              <a:t>計算しています（回答率も画面に出ます）。</a:t>
-            </a:r>
-            <a:endParaRPr lang="en-US" sz="1050" dirty="0"/>
           </a:p>
         </p:txBody>
       </p:sp>
       <p:pic>
         <p:nvPicPr>
-          <p:cNvPr id="24" name="Image 0" descr="C:\Users\sato\Desktop\enque\docs\images\o-dashboard-top.png">    </p:cNvPr>
+          <p:cNvPr id="4" name="Image 0" descr="C:\Users\sato\Desktop\enque\docs\images\o-event-setting.png">    </p:cNvPr>
           <p:cNvPicPr>
             <a:picLocks noChangeAspect="1"/>
           </p:cNvPicPr>
@@ -5797,8 +5007,8 @@
         </p:blipFill>
         <p:spPr>
           <a:xfrm>
-            <a:off x="566928" y="6081840"/>
-            <a:ext cx="6428232" cy="2316774"/>
+            <a:off x="791874" y="1481328"/>
+            <a:ext cx="5978339" cy="3474720"/>
           </a:xfrm>
           <a:prstGeom prst="rect">
             <a:avLst/>
@@ -5807,13 +5017,13 @@
       </p:pic>
       <p:sp>
         <p:nvSpPr>
-          <p:cNvPr id="25" name="Text 22"/>
-          <p:cNvSpPr txBox="1"/>
-          <p:nvPr/>
-        </p:nvSpPr>
-        <p:spPr>
-          <a:xfrm>
-            <a:off x="566928" y="8453477"/>
+          <p:cNvPr id="5" name="Text 2"/>
+          <p:cNvSpPr txBox="1"/>
+          <p:nvPr/>
+        </p:nvSpPr>
+        <p:spPr>
+          <a:xfrm>
+            <a:off x="566928" y="5010912"/>
             <a:ext cx="6428232" cy="274320"/>
           </a:xfrm>
           <a:prstGeom prst="rect">
@@ -5838,7 +5048,7 @@
                 <a:ea typeface="Calibri" pitchFamily="34" charset="-122"/>
                 <a:cs typeface="Calibri" pitchFamily="34" charset="-120"/>
               </a:rPr>
-              <a:t>主催者ダッシュボードの上部。数字のタイルが並んでいるところ。</a:t>
+              <a:t>ダッシュボードの「イベント設定」。状態が「開催中（回答受付）」になっているところ。</a:t>
             </a:r>
             <a:endParaRPr lang="en-US" sz="950" dirty="0"/>
           </a:p>
@@ -5846,7 +5056,7 @@
       </p:sp>
       <p:sp>
         <p:nvSpPr>
-          <p:cNvPr id="26" name="Text 23"/>
+          <p:cNvPr id="6" name="Text 3"/>
           <p:cNvSpPr txBox="1"/>
           <p:nvPr/>
         </p:nvSpPr>
@@ -5987,7 +5197,7 @@
                 <a:ea typeface="Calibri" pitchFamily="34" charset="-122"/>
                 <a:cs typeface="Calibri" pitchFamily="34" charset="-120"/>
               </a:rPr>
-              <a:t>当日：回答者の傾向を見る</a:t>
+              <a:t>当日：回答状況を見る</a:t>
             </a:r>
             <a:endParaRPr lang="en-US" sz="2200" dirty="0"/>
           </a:p>
@@ -6029,7 +5239,7 @@
                 <a:ea typeface="Calibri" pitchFamily="34" charset="-122"/>
                 <a:cs typeface="Calibri" pitchFamily="34" charset="-120"/>
               </a:rPr>
-              <a:t>「回答者傾向」の画面では、来場者の動きが分かります。</a:t>
+              <a:t>ダッシュボードでは、次の数字がリアルタイムで確認できます。</a:t>
             </a:r>
             <a:endParaRPr lang="en-US" sz="1100" dirty="0"/>
           </a:p>
@@ -6072,7 +5282,7 @@
                 <a:ea typeface="Calibri" pitchFamily="34" charset="-122"/>
                 <a:cs typeface="Calibri" pitchFamily="34" charset="-120"/>
               </a:rPr>
-              <a:t>周回時間</a:t>
+              <a:t>ユニーク来場者</a:t>
             </a:r>
             <a:pPr indent="0" marL="0">
               <a:lnSpc>
@@ -6089,7 +5299,7 @@
                 <a:ea typeface="Calibri" pitchFamily="34" charset="-122"/>
                 <a:cs typeface="Calibri" pitchFamily="34" charset="-120"/>
               </a:rPr>
-              <a:t>：最初の回答から最後の回答までの平均・中央値・最長・最短</a:t>
+              <a:t>：アンケート画面を開いた端末の数</a:t>
             </a:r>
             <a:endParaRPr lang="en-US" sz="1100" dirty="0"/>
           </a:p>
@@ -6132,7 +5342,7 @@
                 <a:ea typeface="Calibri" pitchFamily="34" charset="-122"/>
                 <a:cs typeface="Calibri" pitchFamily="34" charset="-120"/>
               </a:rPr>
-              <a:t>周回企業数</a:t>
+              <a:t>回答した来場者</a:t>
             </a:r>
             <a:pPr indent="0" marL="0">
               <a:lnSpc>
@@ -6149,7 +5359,7 @@
                 <a:ea typeface="Calibri" pitchFamily="34" charset="-122"/>
                 <a:cs typeface="Calibri" pitchFamily="34" charset="-120"/>
               </a:rPr>
-              <a:t>：平均と、何社まわった人が何人いたかの分布</a:t>
+              <a:t>：実際に送信した人数（同じ方は何社回っても1人）</a:t>
             </a:r>
             <a:endParaRPr lang="en-US" sz="1100" dirty="0"/>
           </a:p>
@@ -6192,7 +5402,7 @@
                 <a:ea typeface="Calibri" pitchFamily="34" charset="-122"/>
                 <a:cs typeface="Calibri" pitchFamily="34" charset="-120"/>
               </a:rPr>
-              <a:t>企業をまわる順番</a:t>
+              <a:t>のべ来場者</a:t>
             </a:r>
             <a:pPr indent="0" marL="0">
               <a:lnSpc>
@@ -6209,7 +5419,7 @@
                 <a:ea typeface="Calibri" pitchFamily="34" charset="-122"/>
                 <a:cs typeface="Calibri" pitchFamily="34" charset="-120"/>
               </a:rPr>
-              <a:t>：企業ごとの「平均何番目に回られたか」「最初に回られた人数」</a:t>
+              <a:t>：アンケートで聞いた来場人数の合計（1組3人が3社回れば9人）</a:t>
             </a:r>
             <a:endParaRPr lang="en-US" sz="1100" dirty="0"/>
           </a:p>
@@ -6252,7 +5462,7 @@
                 <a:ea typeface="Calibri" pitchFamily="34" charset="-122"/>
                 <a:cs typeface="Calibri" pitchFamily="34" charset="-120"/>
               </a:rPr>
-              <a:t>よくある動線</a:t>
+              <a:t>実来場者（推計）</a:t>
             </a:r>
             <a:pPr indent="0" marL="0">
               <a:lnSpc>
@@ -6269,7 +5479,7 @@
                 <a:ea typeface="Calibri" pitchFamily="34" charset="-122"/>
                 <a:cs typeface="Calibri" pitchFamily="34" charset="-120"/>
               </a:rPr>
-              <a:t>：「A社の次にB社」の多い組み合わせ</a:t>
+              <a:t>：同じ来場者を1回だけ数えた人数</a:t>
             </a:r>
             <a:endParaRPr lang="en-US" sz="1100" dirty="0"/>
           </a:p>
@@ -6312,7 +5522,24 @@
                 <a:ea typeface="Calibri" pitchFamily="34" charset="-122"/>
                 <a:cs typeface="Calibri" pitchFamily="34" charset="-120"/>
               </a:rPr>
-              <a:t>時間帯別のユニーク来場者数</a:t>
+              <a:t>総回答数</a:t>
+            </a:r>
+            <a:pPr indent="0" marL="0">
+              <a:lnSpc>
+                <a:spcPct val="125000"/>
+              </a:lnSpc>
+              <a:buNone/>
+            </a:pPr>
+            <a:r>
+              <a:rPr lang="en-US" sz="1100" dirty="0">
+                <a:solidFill>
+                  <a:srgbClr val="222222"/>
+                </a:solidFill>
+                <a:latin typeface="Calibri" pitchFamily="34" charset="0"/>
+                <a:ea typeface="Calibri" pitchFamily="34" charset="-122"/>
+                <a:cs typeface="Calibri" pitchFamily="34" charset="-120"/>
+              </a:rPr>
+              <a:t>（重複を除いた件数）</a:t>
             </a:r>
             <a:endParaRPr lang="en-US" sz="1100" dirty="0"/>
           </a:p>
@@ -6355,7 +5582,7 @@
                 <a:ea typeface="Calibri" pitchFamily="34" charset="-122"/>
                 <a:cs typeface="Calibri" pitchFamily="34" charset="-120"/>
               </a:rPr>
-              <a:t>回答率・メール登録率・景品交換率</a:t>
+              <a:t>平均訪問企業数</a:t>
             </a:r>
             <a:pPr indent="0" marL="0">
               <a:lnSpc>
@@ -6372,7 +5599,7 @@
                 <a:ea typeface="Calibri" pitchFamily="34" charset="-122"/>
                 <a:cs typeface="Calibri" pitchFamily="34" charset="-120"/>
               </a:rPr>
-              <a:t>など</a:t>
+              <a:t>：1人あたり何社まわったか</a:t>
             </a:r>
             <a:endParaRPr lang="en-US" sz="1100" dirty="0"/>
           </a:p>
@@ -6380,18 +5607,324 @@
       </p:sp>
       <p:sp>
         <p:nvSpPr>
-          <p:cNvPr id="11" name="Shape 9"/>
+          <p:cNvPr id="11" name="Text 9"/>
+          <p:cNvSpPr txBox="1"/>
+          <p:nvPr/>
+        </p:nvSpPr>
+        <p:spPr>
+          <a:xfrm>
+            <a:off x="713232" y="3429635"/>
+            <a:ext cx="6281928" cy="257429"/>
+          </a:xfrm>
+          <a:prstGeom prst="rect">
+            <a:avLst/>
+          </a:prstGeom>
+          <a:noFill/>
+          <a:ln/>
+        </p:spPr>
+        <p:txBody>
+          <a:bodyPr wrap="square" lIns="0" tIns="0" rIns="0" bIns="0" rtlCol="0" anchor="t"/>
+          <a:lstStyle/>
+          <a:p>
+            <a:pPr marL="342900" indent="-342900">
+              <a:lnSpc>
+                <a:spcPct val="125000"/>
+              </a:lnSpc>
+              <a:buSzPct val="100000"/>
+              <a:buChar char="●"/>
+            </a:pPr>
+            <a:r>
+              <a:rPr lang="en-US" sz="1100" b="1" dirty="0">
+                <a:solidFill>
+                  <a:srgbClr val="222222"/>
+                </a:solidFill>
+                <a:latin typeface="Calibri" pitchFamily="34" charset="0"/>
+                <a:ea typeface="Calibri" pitchFamily="34" charset="-122"/>
+                <a:cs typeface="Calibri" pitchFamily="34" charset="-120"/>
+              </a:rPr>
+              <a:t>メール登録</a:t>
+            </a:r>
+            <a:pPr indent="0" marL="0">
+              <a:lnSpc>
+                <a:spcPct val="125000"/>
+              </a:lnSpc>
+              <a:buNone/>
+            </a:pPr>
+            <a:r>
+              <a:rPr lang="en-US" sz="1100" dirty="0">
+                <a:solidFill>
+                  <a:srgbClr val="222222"/>
+                </a:solidFill>
+                <a:latin typeface="Calibri" pitchFamily="34" charset="0"/>
+                <a:ea typeface="Calibri" pitchFamily="34" charset="-122"/>
+                <a:cs typeface="Calibri" pitchFamily="34" charset="-120"/>
+              </a:rPr>
+              <a:t>：総合アンケートの案内先の数</a:t>
+            </a:r>
+            <a:endParaRPr lang="en-US" sz="1100" dirty="0"/>
+          </a:p>
+        </p:txBody>
+      </p:sp>
+      <p:sp>
+        <p:nvSpPr>
+          <p:cNvPr id="12" name="Text 10"/>
+          <p:cNvSpPr txBox="1"/>
+          <p:nvPr/>
+        </p:nvSpPr>
+        <p:spPr>
+          <a:xfrm>
+            <a:off x="713232" y="3705352"/>
+            <a:ext cx="6281928" cy="257429"/>
+          </a:xfrm>
+          <a:prstGeom prst="rect">
+            <a:avLst/>
+          </a:prstGeom>
+          <a:noFill/>
+          <a:ln/>
+        </p:spPr>
+        <p:txBody>
+          <a:bodyPr wrap="square" lIns="0" tIns="0" rIns="0" bIns="0" rtlCol="0" anchor="t"/>
+          <a:lstStyle/>
+          <a:p>
+            <a:pPr marL="342900" indent="-342900">
+              <a:lnSpc>
+                <a:spcPct val="125000"/>
+              </a:lnSpc>
+              <a:buSzPct val="100000"/>
+              <a:buChar char="●"/>
+            </a:pPr>
+            <a:r>
+              <a:rPr lang="en-US" sz="1100" b="1" dirty="0">
+                <a:solidFill>
+                  <a:srgbClr val="222222"/>
+                </a:solidFill>
+                <a:latin typeface="Calibri" pitchFamily="34" charset="0"/>
+                <a:ea typeface="Calibri" pitchFamily="34" charset="-122"/>
+                <a:cs typeface="Calibri" pitchFamily="34" charset="-120"/>
+              </a:rPr>
+              <a:t>交換コード</a:t>
+            </a:r>
+            <a:pPr indent="0" marL="0">
+              <a:lnSpc>
+                <a:spcPct val="125000"/>
+              </a:lnSpc>
+              <a:buNone/>
+            </a:pPr>
+            <a:r>
+              <a:rPr lang="en-US" sz="1100" dirty="0">
+                <a:solidFill>
+                  <a:srgbClr val="222222"/>
+                </a:solidFill>
+                <a:latin typeface="Calibri" pitchFamily="34" charset="0"/>
+                <a:ea typeface="Calibri" pitchFamily="34" charset="-122"/>
+                <a:cs typeface="Calibri" pitchFamily="34" charset="-120"/>
+              </a:rPr>
+              <a:t>：発行数と交換済みの数</a:t>
+            </a:r>
+            <a:endParaRPr lang="en-US" sz="1100" dirty="0"/>
+          </a:p>
+        </p:txBody>
+      </p:sp>
+      <p:sp>
+        <p:nvSpPr>
+          <p:cNvPr id="13" name="Text 11"/>
+          <p:cNvSpPr txBox="1"/>
+          <p:nvPr/>
+        </p:nvSpPr>
+        <p:spPr>
+          <a:xfrm>
+            <a:off x="566928" y="3981069"/>
+            <a:ext cx="6428232" cy="257429"/>
+          </a:xfrm>
+          <a:prstGeom prst="rect">
+            <a:avLst/>
+          </a:prstGeom>
+          <a:noFill/>
+          <a:ln/>
+        </p:spPr>
+        <p:txBody>
+          <a:bodyPr wrap="square" lIns="0" tIns="0" rIns="0" bIns="0" rtlCol="0" anchor="t"/>
+          <a:lstStyle/>
+          <a:p>
+            <a:pPr indent="0" marL="0">
+              <a:lnSpc>
+                <a:spcPct val="125000"/>
+              </a:lnSpc>
+              <a:buNone/>
+            </a:pPr>
+            <a:r>
+              <a:rPr lang="en-US" sz="1100" dirty="0">
+                <a:solidFill>
+                  <a:srgbClr val="222222"/>
+                </a:solidFill>
+                <a:latin typeface="Calibri" pitchFamily="34" charset="0"/>
+                <a:ea typeface="Calibri" pitchFamily="34" charset="-122"/>
+                <a:cs typeface="Calibri" pitchFamily="34" charset="-120"/>
+              </a:rPr>
+              <a:t>下には</a:t>
+            </a:r>
+            <a:pPr indent="0" marL="0">
+              <a:lnSpc>
+                <a:spcPct val="125000"/>
+              </a:lnSpc>
+              <a:buNone/>
+            </a:pPr>
+            <a:r>
+              <a:rPr lang="en-US" sz="1100" b="1" dirty="0">
+                <a:solidFill>
+                  <a:srgbClr val="222222"/>
+                </a:solidFill>
+                <a:latin typeface="Calibri" pitchFamily="34" charset="0"/>
+                <a:ea typeface="Calibri" pitchFamily="34" charset="-122"/>
+                <a:cs typeface="Calibri" pitchFamily="34" charset="-120"/>
+              </a:rPr>
+              <a:t>時間帯別の回答数</a:t>
+            </a:r>
+            <a:pPr indent="0" marL="0">
+              <a:lnSpc>
+                <a:spcPct val="125000"/>
+              </a:lnSpc>
+              <a:buNone/>
+            </a:pPr>
+            <a:r>
+              <a:rPr lang="en-US" sz="1100" dirty="0">
+                <a:solidFill>
+                  <a:srgbClr val="222222"/>
+                </a:solidFill>
+                <a:latin typeface="Calibri" pitchFamily="34" charset="0"/>
+                <a:ea typeface="Calibri" pitchFamily="34" charset="-122"/>
+                <a:cs typeface="Calibri" pitchFamily="34" charset="-120"/>
+              </a:rPr>
+              <a:t>のグラフと、</a:t>
+            </a:r>
+            <a:pPr indent="0" marL="0">
+              <a:lnSpc>
+                <a:spcPct val="125000"/>
+              </a:lnSpc>
+              <a:buNone/>
+            </a:pPr>
+            <a:r>
+              <a:rPr lang="en-US" sz="1100" b="1" dirty="0">
+                <a:solidFill>
+                  <a:srgbClr val="222222"/>
+                </a:solidFill>
+                <a:latin typeface="Calibri" pitchFamily="34" charset="0"/>
+                <a:ea typeface="Calibri" pitchFamily="34" charset="-122"/>
+                <a:cs typeface="Calibri" pitchFamily="34" charset="-120"/>
+              </a:rPr>
+              <a:t>企業別の回答数</a:t>
+            </a:r>
+            <a:pPr indent="0" marL="0">
+              <a:lnSpc>
+                <a:spcPct val="125000"/>
+              </a:lnSpc>
+              <a:buNone/>
+            </a:pPr>
+            <a:r>
+              <a:rPr lang="en-US" sz="1100" dirty="0">
+                <a:solidFill>
+                  <a:srgbClr val="222222"/>
+                </a:solidFill>
+                <a:latin typeface="Calibri" pitchFamily="34" charset="0"/>
+                <a:ea typeface="Calibri" pitchFamily="34" charset="-122"/>
+                <a:cs typeface="Calibri" pitchFamily="34" charset="-120"/>
+              </a:rPr>
+              <a:t>の一覧が出ます。一覧の最下段の合計行にある</a:t>
+            </a:r>
+            <a:endParaRPr lang="en-US" sz="1100" dirty="0"/>
+          </a:p>
+        </p:txBody>
+      </p:sp>
+      <p:sp>
+        <p:nvSpPr>
+          <p:cNvPr id="14" name="Text 12"/>
+          <p:cNvSpPr txBox="1"/>
+          <p:nvPr/>
+        </p:nvSpPr>
+        <p:spPr>
+          <a:xfrm>
+            <a:off x="566928" y="4275074"/>
+            <a:ext cx="6428232" cy="257429"/>
+          </a:xfrm>
+          <a:prstGeom prst="rect">
+            <a:avLst/>
+          </a:prstGeom>
+          <a:noFill/>
+          <a:ln/>
+        </p:spPr>
+        <p:txBody>
+          <a:bodyPr wrap="square" lIns="0" tIns="0" rIns="0" bIns="0" rtlCol="0" anchor="t"/>
+          <a:lstStyle/>
+          <a:p>
+            <a:pPr indent="0" marL="0">
+              <a:lnSpc>
+                <a:spcPct val="125000"/>
+              </a:lnSpc>
+              <a:buNone/>
+            </a:pPr>
+            <a:r>
+              <a:rPr lang="en-US" sz="1100" dirty="0">
+                <a:solidFill>
+                  <a:srgbClr val="222222"/>
+                </a:solidFill>
+                <a:latin typeface="Calibri" pitchFamily="34" charset="0"/>
+                <a:ea typeface="Calibri" pitchFamily="34" charset="-122"/>
+                <a:cs typeface="Calibri" pitchFamily="34" charset="-120"/>
+              </a:rPr>
+              <a:t>「回答者数」の合計は</a:t>
+            </a:r>
+            <a:pPr indent="0" marL="0">
+              <a:lnSpc>
+                <a:spcPct val="125000"/>
+              </a:lnSpc>
+              <a:buNone/>
+            </a:pPr>
+            <a:r>
+              <a:rPr lang="en-US" sz="1100" b="1" dirty="0">
+                <a:solidFill>
+                  <a:srgbClr val="222222"/>
+                </a:solidFill>
+                <a:latin typeface="Calibri" pitchFamily="34" charset="0"/>
+                <a:ea typeface="Calibri" pitchFamily="34" charset="-122"/>
+                <a:cs typeface="Calibri" pitchFamily="34" charset="-120"/>
+              </a:rPr>
+              <a:t>のべ訪問数</a:t>
+            </a:r>
+            <a:pPr indent="0" marL="0">
+              <a:lnSpc>
+                <a:spcPct val="125000"/>
+              </a:lnSpc>
+              <a:buNone/>
+            </a:pPr>
+            <a:r>
+              <a:rPr lang="en-US" sz="1100" dirty="0">
+                <a:solidFill>
+                  <a:srgbClr val="222222"/>
+                </a:solidFill>
+                <a:latin typeface="Calibri" pitchFamily="34" charset="0"/>
+                <a:ea typeface="Calibri" pitchFamily="34" charset="-122"/>
+                <a:cs typeface="Calibri" pitchFamily="34" charset="-120"/>
+              </a:rPr>
+              <a:t>（何社ぶんの回答が集まったか）です。</a:t>
+            </a:r>
+            <a:endParaRPr lang="en-US" sz="1100" dirty="0"/>
+          </a:p>
+        </p:txBody>
+      </p:sp>
+      <p:sp>
+        <p:nvSpPr>
+          <p:cNvPr id="15" name="Shape 13"/>
           <p:cNvSpPr/>
           <p:nvPr/>
         </p:nvSpPr>
         <p:spPr>
           <a:xfrm>
-            <a:off x="566928" y="3429635"/>
-            <a:ext cx="6428232" cy="624459"/>
+            <a:off x="566928" y="4569079"/>
+            <a:ext cx="6428232" cy="431102"/>
           </a:xfrm>
           <a:prstGeom prst="roundRect">
             <a:avLst>
-              <a:gd name="adj" fmla="val 8786"/>
+              <a:gd name="adj" fmla="val 12726"/>
             </a:avLst>
           </a:prstGeom>
           <a:solidFill>
@@ -6407,13 +5940,13 @@
       </p:sp>
       <p:sp>
         <p:nvSpPr>
-          <p:cNvPr id="12" name="Text 10"/>
-          <p:cNvSpPr txBox="1"/>
-          <p:nvPr/>
-        </p:nvSpPr>
-        <p:spPr>
-          <a:xfrm>
-            <a:off x="658368" y="3521075"/>
+          <p:cNvPr id="16" name="Text 14"/>
+          <p:cNvSpPr txBox="1"/>
+          <p:nvPr/>
+        </p:nvSpPr>
+        <p:spPr>
+          <a:xfrm>
+            <a:off x="658368" y="4660519"/>
             <a:ext cx="237744" cy="237744"/>
           </a:xfrm>
           <a:prstGeom prst="rect">
@@ -6446,14 +5979,14 @@
       </p:sp>
       <p:sp>
         <p:nvSpPr>
-          <p:cNvPr id="13" name="Text 11"/>
-          <p:cNvSpPr txBox="1"/>
-          <p:nvPr/>
-        </p:nvSpPr>
-        <p:spPr>
-          <a:xfrm>
-            <a:off x="950976" y="3539363"/>
-            <a:ext cx="5925312" cy="441579"/>
+          <p:cNvPr id="17" name="Text 15"/>
+          <p:cNvSpPr txBox="1"/>
+          <p:nvPr/>
+        </p:nvSpPr>
+        <p:spPr>
+          <a:xfrm>
+            <a:off x="950976" y="4678807"/>
+            <a:ext cx="5925312" cy="248221"/>
           </a:xfrm>
           <a:prstGeom prst="rect">
             <a:avLst/>
@@ -6480,8 +6013,99 @@
                 <a:ea typeface="Calibri" pitchFamily="34" charset="-122"/>
                 <a:cs typeface="Calibri" pitchFamily="34" charset="-120"/>
               </a:rPr>
-              <a:t>「周回時間」は最初と最後の回答の間隔で、</a:t>
-            </a:r>
+              <a:t>企業別の一覧から、その企業の「集計」や「回答一覧」を開けます。</a:t>
+            </a:r>
+            <a:endParaRPr lang="en-US" sz="1050" dirty="0"/>
+          </a:p>
+        </p:txBody>
+      </p:sp>
+      <p:sp>
+        <p:nvSpPr>
+          <p:cNvPr id="18" name="Shape 16"/>
+          <p:cNvSpPr/>
+          <p:nvPr/>
+        </p:nvSpPr>
+        <p:spPr>
+          <a:xfrm>
+            <a:off x="566928" y="5073333"/>
+            <a:ext cx="6428232" cy="431102"/>
+          </a:xfrm>
+          <a:prstGeom prst="roundRect">
+            <a:avLst>
+              <a:gd name="adj" fmla="val 12726"/>
+            </a:avLst>
+          </a:prstGeom>
+          <a:solidFill>
+            <a:srgbClr val="E8ECF8"/>
+          </a:solidFill>
+          <a:ln w="9525">
+            <a:solidFill>
+              <a:srgbClr val="1E2761"/>
+            </a:solidFill>
+            <a:prstDash val="solid"/>
+          </a:ln>
+        </p:spPr>
+      </p:sp>
+      <p:sp>
+        <p:nvSpPr>
+          <p:cNvPr id="19" name="Text 17"/>
+          <p:cNvSpPr txBox="1"/>
+          <p:nvPr/>
+        </p:nvSpPr>
+        <p:spPr>
+          <a:xfrm>
+            <a:off x="658368" y="5164773"/>
+            <a:ext cx="237744" cy="237744"/>
+          </a:xfrm>
+          <a:prstGeom prst="rect">
+            <a:avLst/>
+          </a:prstGeom>
+          <a:noFill/>
+          <a:ln/>
+        </p:spPr>
+        <p:txBody>
+          <a:bodyPr wrap="square" lIns="0" tIns="0" rIns="0" bIns="0" rtlCol="0" anchor="ctr"/>
+          <a:lstStyle/>
+          <a:p>
+            <a:pPr algn="ctr" indent="0" marL="0">
+              <a:buNone/>
+            </a:pPr>
+            <a:r>
+              <a:rPr lang="en-US" sz="1200" b="1" dirty="0">
+                <a:solidFill>
+                  <a:srgbClr val="1E2761"/>
+                </a:solidFill>
+                <a:latin typeface="Calibri" pitchFamily="34" charset="0"/>
+                <a:ea typeface="Calibri" pitchFamily="34" charset="-122"/>
+                <a:cs typeface="Calibri" pitchFamily="34" charset="-120"/>
+              </a:rPr>
+              <a:t>i</a:t>
+            </a:r>
+            <a:endParaRPr lang="en-US" sz="1200" dirty="0"/>
+          </a:p>
+        </p:txBody>
+      </p:sp>
+      <p:sp>
+        <p:nvSpPr>
+          <p:cNvPr id="20" name="Text 18"/>
+          <p:cNvSpPr txBox="1"/>
+          <p:nvPr/>
+        </p:nvSpPr>
+        <p:spPr>
+          <a:xfrm>
+            <a:off x="950976" y="5183061"/>
+            <a:ext cx="5925312" cy="248221"/>
+          </a:xfrm>
+          <a:prstGeom prst="rect">
+            <a:avLst/>
+          </a:prstGeom>
+          <a:noFill/>
+          <a:ln/>
+        </p:spPr>
+        <p:txBody>
+          <a:bodyPr wrap="square" lIns="0" tIns="0" rIns="0" bIns="0" rtlCol="0" anchor="t"/>
+          <a:lstStyle/>
+          <a:p>
             <a:pPr indent="0" marL="0">
               <a:lnSpc>
                 <a:spcPct val="120000"/>
@@ -6489,16 +6113,107 @@
               <a:buNone/>
             </a:pPr>
             <a:r>
-              <a:rPr lang="en-US" sz="1050" b="1" dirty="0">
-                <a:solidFill>
-                  <a:srgbClr val="222222"/>
-                </a:solidFill>
-                <a:latin typeface="Calibri" pitchFamily="34" charset="0"/>
-                <a:ea typeface="Calibri" pitchFamily="34" charset="-122"/>
-                <a:cs typeface="Calibri" pitchFamily="34" charset="-120"/>
-              </a:rPr>
-              <a:t>滞在時間ではありません</a:t>
-            </a:r>
+              <a:rPr lang="en-US" sz="1050" dirty="0">
+                <a:solidFill>
+                  <a:srgbClr val="222222"/>
+                </a:solidFill>
+                <a:latin typeface="Calibri" pitchFamily="34" charset="0"/>
+                <a:ea typeface="Calibri" pitchFamily="34" charset="-122"/>
+                <a:cs typeface="Calibri" pitchFamily="34" charset="-120"/>
+              </a:rPr>
+              <a:t>来場人数は任意回答です。未回答のぶんは、同じ来場者が別の企業で答えた人数などから補って</a:t>
+            </a:r>
+            <a:endParaRPr lang="en-US" sz="1050" dirty="0"/>
+          </a:p>
+        </p:txBody>
+      </p:sp>
+      <p:sp>
+        <p:nvSpPr>
+          <p:cNvPr id="21" name="Shape 19"/>
+          <p:cNvSpPr/>
+          <p:nvPr/>
+        </p:nvSpPr>
+        <p:spPr>
+          <a:xfrm>
+            <a:off x="566928" y="5577586"/>
+            <a:ext cx="6428232" cy="431102"/>
+          </a:xfrm>
+          <a:prstGeom prst="roundRect">
+            <a:avLst>
+              <a:gd name="adj" fmla="val 12726"/>
+            </a:avLst>
+          </a:prstGeom>
+          <a:solidFill>
+            <a:srgbClr val="E8ECF8"/>
+          </a:solidFill>
+          <a:ln w="9525">
+            <a:solidFill>
+              <a:srgbClr val="1E2761"/>
+            </a:solidFill>
+            <a:prstDash val="solid"/>
+          </a:ln>
+        </p:spPr>
+      </p:sp>
+      <p:sp>
+        <p:nvSpPr>
+          <p:cNvPr id="22" name="Text 20"/>
+          <p:cNvSpPr txBox="1"/>
+          <p:nvPr/>
+        </p:nvSpPr>
+        <p:spPr>
+          <a:xfrm>
+            <a:off x="658368" y="5669026"/>
+            <a:ext cx="237744" cy="237744"/>
+          </a:xfrm>
+          <a:prstGeom prst="rect">
+            <a:avLst/>
+          </a:prstGeom>
+          <a:noFill/>
+          <a:ln/>
+        </p:spPr>
+        <p:txBody>
+          <a:bodyPr wrap="square" lIns="0" tIns="0" rIns="0" bIns="0" rtlCol="0" anchor="ctr"/>
+          <a:lstStyle/>
+          <a:p>
+            <a:pPr algn="ctr" indent="0" marL="0">
+              <a:buNone/>
+            </a:pPr>
+            <a:r>
+              <a:rPr lang="en-US" sz="1200" b="1" dirty="0">
+                <a:solidFill>
+                  <a:srgbClr val="1E2761"/>
+                </a:solidFill>
+                <a:latin typeface="Calibri" pitchFamily="34" charset="0"/>
+                <a:ea typeface="Calibri" pitchFamily="34" charset="-122"/>
+                <a:cs typeface="Calibri" pitchFamily="34" charset="-120"/>
+              </a:rPr>
+              <a:t>i</a:t>
+            </a:r>
+            <a:endParaRPr lang="en-US" sz="1200" dirty="0"/>
+          </a:p>
+        </p:txBody>
+      </p:sp>
+      <p:sp>
+        <p:nvSpPr>
+          <p:cNvPr id="23" name="Text 21"/>
+          <p:cNvSpPr txBox="1"/>
+          <p:nvPr/>
+        </p:nvSpPr>
+        <p:spPr>
+          <a:xfrm>
+            <a:off x="950976" y="5687314"/>
+            <a:ext cx="5925312" cy="248221"/>
+          </a:xfrm>
+          <a:prstGeom prst="rect">
+            <a:avLst/>
+          </a:prstGeom>
+          <a:noFill/>
+          <a:ln/>
+        </p:spPr>
+        <p:txBody>
+          <a:bodyPr wrap="square" lIns="0" tIns="0" rIns="0" bIns="0" rtlCol="0" anchor="t"/>
+          <a:lstStyle/>
+          <a:p>
             <a:pPr indent="0" marL="0">
               <a:lnSpc>
                 <a:spcPct val="120000"/>
@@ -6514,7 +6229,7 @@
                 <a:ea typeface="Calibri" pitchFamily="34" charset="-122"/>
                 <a:cs typeface="Calibri" pitchFamily="34" charset="-120"/>
               </a:rPr>
-              <a:t>。また、来場者は端末ごとに数えるため、端末を変えた方は別の方として数えられます。</a:t>
+              <a:t>計算しています（回答率も画面に出ます）。</a:t>
             </a:r>
             <a:endParaRPr lang="en-US" sz="1050" dirty="0"/>
           </a:p>
@@ -6522,7 +6237,7 @@
       </p:sp>
       <p:pic>
         <p:nvPicPr>
-          <p:cNvPr id="14" name="Image 0" descr="C:\Users\sato\Desktop\enque\docs\images\o-insights.png">    </p:cNvPr>
+          <p:cNvPr id="24" name="Image 0" descr="C:\Users\sato\Desktop\enque\docs\images\o-dashboard-top.png">    </p:cNvPr>
           <p:cNvPicPr>
             <a:picLocks noChangeAspect="1"/>
           </p:cNvPicPr>
@@ -6536,8 +6251,8 @@
         </p:blipFill>
         <p:spPr>
           <a:xfrm>
-            <a:off x="884627" y="4127246"/>
-            <a:ext cx="5792834" cy="3474720"/>
+            <a:off x="566928" y="6081840"/>
+            <a:ext cx="6428232" cy="2316774"/>
           </a:xfrm>
           <a:prstGeom prst="rect">
             <a:avLst/>
@@ -6546,13 +6261,13 @@
       </p:pic>
       <p:sp>
         <p:nvSpPr>
-          <p:cNvPr id="15" name="Text 12"/>
-          <p:cNvSpPr txBox="1"/>
-          <p:nvPr/>
-        </p:nvSpPr>
-        <p:spPr>
-          <a:xfrm>
-            <a:off x="566928" y="7656830"/>
+          <p:cNvPr id="25" name="Text 22"/>
+          <p:cNvSpPr txBox="1"/>
+          <p:nvPr/>
+        </p:nvSpPr>
+        <p:spPr>
+          <a:xfrm>
+            <a:off x="566928" y="8453477"/>
             <a:ext cx="6428232" cy="274320"/>
           </a:xfrm>
           <a:prstGeom prst="rect">
@@ -6577,7 +6292,7 @@
                 <a:ea typeface="Calibri" pitchFamily="34" charset="-122"/>
                 <a:cs typeface="Calibri" pitchFamily="34" charset="-120"/>
               </a:rPr>
-              <a:t>「回答者の傾向」画面。周回時間・周回企業数のグラフが見えるところ。</a:t>
+              <a:t>主催者ダッシュボードの上部。数字のタイルが並んでいるところ。</a:t>
             </a:r>
             <a:endParaRPr lang="en-US" sz="950" dirty="0"/>
           </a:p>
@@ -6585,7 +6300,7 @@
       </p:sp>
       <p:sp>
         <p:nvSpPr>
-          <p:cNvPr id="16" name="Text 13"/>
+          <p:cNvPr id="26" name="Text 23"/>
           <p:cNvSpPr txBox="1"/>
           <p:nvPr/>
         </p:nvSpPr>
@@ -6726,7 +6441,7 @@
                 <a:ea typeface="Calibri" pitchFamily="34" charset="-122"/>
                 <a:cs typeface="Calibri" pitchFamily="34" charset="-120"/>
               </a:rPr>
-              <a:t>当日：来場人数を集計する</a:t>
+              <a:t>当日：回答者の傾向を見る</a:t>
             </a:r>
             <a:endParaRPr lang="en-US" sz="2200" dirty="0"/>
           </a:p>
@@ -6768,75 +6483,7 @@
                 <a:ea typeface="Calibri" pitchFamily="34" charset="-122"/>
                 <a:cs typeface="Calibri" pitchFamily="34" charset="-120"/>
               </a:rPr>
-              <a:t>アンケートに「</a:t>
-            </a:r>
-            <a:pPr indent="0" marL="0">
-              <a:lnSpc>
-                <a:spcPct val="125000"/>
-              </a:lnSpc>
-              <a:buNone/>
-            </a:pPr>
-            <a:r>
-              <a:rPr lang="en-US" sz="1100" b="1" dirty="0">
-                <a:solidFill>
-                  <a:srgbClr val="222222"/>
-                </a:solidFill>
-                <a:latin typeface="Calibri" pitchFamily="34" charset="0"/>
-                <a:ea typeface="Calibri" pitchFamily="34" charset="-122"/>
-                <a:cs typeface="Calibri" pitchFamily="34" charset="-120"/>
-              </a:rPr>
-              <a:t>何人で来られましたか</a:t>
-            </a:r>
-            <a:pPr indent="0" marL="0">
-              <a:lnSpc>
-                <a:spcPct val="125000"/>
-              </a:lnSpc>
-              <a:buNone/>
-            </a:pPr>
-            <a:r>
-              <a:rPr lang="en-US" sz="1100" dirty="0">
-                <a:solidFill>
-                  <a:srgbClr val="222222"/>
-                </a:solidFill>
-                <a:latin typeface="Calibri" pitchFamily="34" charset="0"/>
-                <a:ea typeface="Calibri" pitchFamily="34" charset="-122"/>
-                <a:cs typeface="Calibri" pitchFamily="34" charset="-120"/>
-              </a:rPr>
-              <a:t>」の設問（種類は</a:t>
-            </a:r>
-            <a:pPr indent="0" marL="0">
-              <a:lnSpc>
-                <a:spcPct val="125000"/>
-              </a:lnSpc>
-              <a:buNone/>
-            </a:pPr>
-            <a:r>
-              <a:rPr lang="en-US" sz="1100" b="1" dirty="0">
-                <a:solidFill>
-                  <a:srgbClr val="222222"/>
-                </a:solidFill>
-                <a:latin typeface="Calibri" pitchFamily="34" charset="0"/>
-                <a:ea typeface="Calibri" pitchFamily="34" charset="-122"/>
-                <a:cs typeface="Calibri" pitchFamily="34" charset="-120"/>
-              </a:rPr>
-              <a:t>数値入力</a:t>
-            </a:r>
-            <a:pPr indent="0" marL="0">
-              <a:lnSpc>
-                <a:spcPct val="125000"/>
-              </a:lnSpc>
-              <a:buNone/>
-            </a:pPr>
-            <a:r>
-              <a:rPr lang="en-US" sz="1100" dirty="0">
-                <a:solidFill>
-                  <a:srgbClr val="222222"/>
-                </a:solidFill>
-                <a:latin typeface="Calibri" pitchFamily="34" charset="0"/>
-                <a:ea typeface="Calibri" pitchFamily="34" charset="-122"/>
-                <a:cs typeface="Calibri" pitchFamily="34" charset="-120"/>
-              </a:rPr>
-              <a:t>）を入れて、設問編集画面で</a:t>
+              <a:t>「回答者傾向」の画面では、来場者の動きが分かります。</a:t>
             </a:r>
             <a:endParaRPr lang="en-US" sz="1100" dirty="0"/>
           </a:p>
@@ -6850,66 +6497,7 @@
         </p:nvSpPr>
         <p:spPr>
           <a:xfrm>
-            <a:off x="566928" y="1775333"/>
-            <a:ext cx="6428232" cy="257429"/>
-          </a:xfrm>
-          <a:prstGeom prst="rect">
-            <a:avLst/>
-          </a:prstGeom>
-          <a:noFill/>
-          <a:ln/>
-        </p:spPr>
-        <p:txBody>
-          <a:bodyPr wrap="square" lIns="0" tIns="0" rIns="0" bIns="0" rtlCol="0" anchor="t"/>
-          <a:lstStyle/>
-          <a:p>
-            <a:pPr indent="0" marL="0">
-              <a:lnSpc>
-                <a:spcPct val="125000"/>
-              </a:lnSpc>
-              <a:buNone/>
-            </a:pPr>
-            <a:r>
-              <a:rPr lang="en-US" sz="1100" b="1" dirty="0">
-                <a:solidFill>
-                  <a:srgbClr val="222222"/>
-                </a:solidFill>
-                <a:latin typeface="Calibri" pitchFamily="34" charset="0"/>
-                <a:ea typeface="Calibri" pitchFamily="34" charset="-122"/>
-                <a:cs typeface="Calibri" pitchFamily="34" charset="-120"/>
-              </a:rPr>
-              <a:t>「この回答を来場人数として集計する」</a:t>
-            </a:r>
-            <a:pPr indent="0" marL="0">
-              <a:lnSpc>
-                <a:spcPct val="125000"/>
-              </a:lnSpc>
-              <a:buNone/>
-            </a:pPr>
-            <a:r>
-              <a:rPr lang="en-US" sz="1100" dirty="0">
-                <a:solidFill>
-                  <a:srgbClr val="222222"/>
-                </a:solidFill>
-                <a:latin typeface="Calibri" pitchFamily="34" charset="0"/>
-                <a:ea typeface="Calibri" pitchFamily="34" charset="-122"/>
-                <a:cs typeface="Calibri" pitchFamily="34" charset="-120"/>
-              </a:rPr>
-              <a:t>にチェックを入れると、人数が集計されます。</a:t>
-            </a:r>
-            <a:endParaRPr lang="en-US" sz="1100" dirty="0"/>
-          </a:p>
-        </p:txBody>
-      </p:sp>
-      <p:sp>
-        <p:nvSpPr>
-          <p:cNvPr id="6" name="Text 4"/>
-          <p:cNvSpPr txBox="1"/>
-          <p:nvPr/>
-        </p:nvSpPr>
-        <p:spPr>
-          <a:xfrm>
-            <a:off x="713232" y="2069338"/>
+            <a:off x="713232" y="1775333"/>
             <a:ext cx="6281928" cy="257429"/>
           </a:xfrm>
           <a:prstGeom prst="rect">
@@ -6938,7 +6526,7 @@
                 <a:ea typeface="Calibri" pitchFamily="34" charset="-122"/>
                 <a:cs typeface="Calibri" pitchFamily="34" charset="-120"/>
               </a:rPr>
-              <a:t>のべ来場者</a:t>
+              <a:t>周回時間</a:t>
             </a:r>
             <a:pPr indent="0" marL="0">
               <a:lnSpc>
@@ -6955,7 +6543,7 @@
                 <a:ea typeface="Calibri" pitchFamily="34" charset="-122"/>
                 <a:cs typeface="Calibri" pitchFamily="34" charset="-120"/>
               </a:rPr>
-              <a:t>：回答ごとの人数を足した数（1組3人が3社回れば9人）。出展社への報告に使います</a:t>
+              <a:t>：最初の回答から最後の回答までの平均・中央値・最長・最短</a:t>
             </a:r>
             <a:endParaRPr lang="en-US" sz="1100" dirty="0"/>
           </a:p>
@@ -6963,13 +6551,13 @@
       </p:sp>
       <p:sp>
         <p:nvSpPr>
-          <p:cNvPr id="7" name="Text 5"/>
-          <p:cNvSpPr txBox="1"/>
-          <p:nvPr/>
-        </p:nvSpPr>
-        <p:spPr>
-          <a:xfrm>
-            <a:off x="713232" y="2345055"/>
+          <p:cNvPr id="6" name="Text 4"/>
+          <p:cNvSpPr txBox="1"/>
+          <p:nvPr/>
+        </p:nvSpPr>
+        <p:spPr>
+          <a:xfrm>
+            <a:off x="713232" y="2051050"/>
             <a:ext cx="6281928" cy="257429"/>
           </a:xfrm>
           <a:prstGeom prst="rect">
@@ -6998,7 +6586,7 @@
                 <a:ea typeface="Calibri" pitchFamily="34" charset="-122"/>
                 <a:cs typeface="Calibri" pitchFamily="34" charset="-120"/>
               </a:rPr>
-              <a:t>実来場者（推計）</a:t>
+              <a:t>周回企業数</a:t>
             </a:r>
             <a:pPr indent="0" marL="0">
               <a:lnSpc>
@@ -7015,7 +6603,7 @@
                 <a:ea typeface="Calibri" pitchFamily="34" charset="-122"/>
                 <a:cs typeface="Calibri" pitchFamily="34" charset="-120"/>
               </a:rPr>
-              <a:t>：同じ来場者を1回だけ数えた人数。会場に来た実人数の目安です</a:t>
+              <a:t>：平均と、何社まわった人が何人いたかの分布</a:t>
             </a:r>
             <a:endParaRPr lang="en-US" sz="1100" dirty="0"/>
           </a:p>
@@ -7023,13 +6611,13 @@
       </p:sp>
       <p:sp>
         <p:nvSpPr>
-          <p:cNvPr id="8" name="Text 6"/>
-          <p:cNvSpPr txBox="1"/>
-          <p:nvPr/>
-        </p:nvSpPr>
-        <p:spPr>
-          <a:xfrm>
-            <a:off x="713232" y="2620772"/>
+          <p:cNvPr id="7" name="Text 5"/>
+          <p:cNvSpPr txBox="1"/>
+          <p:nvPr/>
+        </p:nvSpPr>
+        <p:spPr>
+          <a:xfrm>
+            <a:off x="713232" y="2326767"/>
             <a:ext cx="6281928" cy="257429"/>
           </a:xfrm>
           <a:prstGeom prst="rect">
@@ -7058,7 +6646,7 @@
                 <a:ea typeface="Calibri" pitchFamily="34" charset="-122"/>
                 <a:cs typeface="Calibri" pitchFamily="34" charset="-120"/>
               </a:rPr>
-              <a:t>平均人数</a:t>
+              <a:t>企業をまわる順番</a:t>
             </a:r>
             <a:pPr indent="0" marL="0">
               <a:lnSpc>
@@ -7075,13 +6663,39 @@
                 <a:ea typeface="Calibri" pitchFamily="34" charset="-122"/>
                 <a:cs typeface="Calibri" pitchFamily="34" charset="-120"/>
               </a:rPr>
-              <a:t>と</a:t>
-            </a:r>
-            <a:pPr indent="0" marL="0">
-              <a:lnSpc>
-                <a:spcPct val="125000"/>
-              </a:lnSpc>
-              <a:buNone/>
+              <a:t>：企業ごとの「平均何番目に回られたか」「最初に回られた人数」</a:t>
+            </a:r>
+            <a:endParaRPr lang="en-US" sz="1100" dirty="0"/>
+          </a:p>
+        </p:txBody>
+      </p:sp>
+      <p:sp>
+        <p:nvSpPr>
+          <p:cNvPr id="8" name="Text 6"/>
+          <p:cNvSpPr txBox="1"/>
+          <p:nvPr/>
+        </p:nvSpPr>
+        <p:spPr>
+          <a:xfrm>
+            <a:off x="713232" y="2602484"/>
+            <a:ext cx="6281928" cy="257429"/>
+          </a:xfrm>
+          <a:prstGeom prst="rect">
+            <a:avLst/>
+          </a:prstGeom>
+          <a:noFill/>
+          <a:ln/>
+        </p:spPr>
+        <p:txBody>
+          <a:bodyPr wrap="square" lIns="0" tIns="0" rIns="0" bIns="0" rtlCol="0" anchor="t"/>
+          <a:lstStyle/>
+          <a:p>
+            <a:pPr marL="342900" indent="-342900">
+              <a:lnSpc>
+                <a:spcPct val="125000"/>
+              </a:lnSpc>
+              <a:buSzPct val="100000"/>
+              <a:buChar char="●"/>
             </a:pPr>
             <a:r>
               <a:rPr lang="en-US" sz="1100" b="1" dirty="0">
@@ -7092,7 +6706,7 @@
                 <a:ea typeface="Calibri" pitchFamily="34" charset="-122"/>
                 <a:cs typeface="Calibri" pitchFamily="34" charset="-120"/>
               </a:rPr>
-              <a:t>回答率</a:t>
+              <a:t>よくある動線</a:t>
             </a:r>
             <a:pPr indent="0" marL="0">
               <a:lnSpc>
@@ -7109,7 +6723,7 @@
                 <a:ea typeface="Calibri" pitchFamily="34" charset="-122"/>
                 <a:cs typeface="Calibri" pitchFamily="34" charset="-120"/>
               </a:rPr>
-              <a:t>もあわせて表示されます</a:t>
+              <a:t>：「A社の次にB社」の多い組み合わせ</a:t>
             </a:r>
             <a:endParaRPr lang="en-US" sz="1100" dirty="0"/>
           </a:p>
@@ -7123,8 +6737,8 @@
         </p:nvSpPr>
         <p:spPr>
           <a:xfrm>
-            <a:off x="566928" y="2896489"/>
-            <a:ext cx="6428232" cy="257429"/>
+            <a:off x="713232" y="2878201"/>
+            <a:ext cx="6281928" cy="257429"/>
           </a:xfrm>
           <a:prstGeom prst="rect">
             <a:avLst/>
@@ -7136,6 +6750,67 @@
           <a:bodyPr wrap="square" lIns="0" tIns="0" rIns="0" bIns="0" rtlCol="0" anchor="t"/>
           <a:lstStyle/>
           <a:p>
+            <a:pPr marL="342900" indent="-342900">
+              <a:lnSpc>
+                <a:spcPct val="125000"/>
+              </a:lnSpc>
+              <a:buSzPct val="100000"/>
+              <a:buChar char="●"/>
+            </a:pPr>
+            <a:r>
+              <a:rPr lang="en-US" sz="1100" b="1" dirty="0">
+                <a:solidFill>
+                  <a:srgbClr val="222222"/>
+                </a:solidFill>
+                <a:latin typeface="Calibri" pitchFamily="34" charset="0"/>
+                <a:ea typeface="Calibri" pitchFamily="34" charset="-122"/>
+                <a:cs typeface="Calibri" pitchFamily="34" charset="-120"/>
+              </a:rPr>
+              <a:t>時間帯別のユニーク来場者数</a:t>
+            </a:r>
+            <a:endParaRPr lang="en-US" sz="1100" dirty="0"/>
+          </a:p>
+        </p:txBody>
+      </p:sp>
+      <p:sp>
+        <p:nvSpPr>
+          <p:cNvPr id="10" name="Text 8"/>
+          <p:cNvSpPr txBox="1"/>
+          <p:nvPr/>
+        </p:nvSpPr>
+        <p:spPr>
+          <a:xfrm>
+            <a:off x="713232" y="3153918"/>
+            <a:ext cx="6281928" cy="257429"/>
+          </a:xfrm>
+          <a:prstGeom prst="rect">
+            <a:avLst/>
+          </a:prstGeom>
+          <a:noFill/>
+          <a:ln/>
+        </p:spPr>
+        <p:txBody>
+          <a:bodyPr wrap="square" lIns="0" tIns="0" rIns="0" bIns="0" rtlCol="0" anchor="t"/>
+          <a:lstStyle/>
+          <a:p>
+            <a:pPr marL="342900" indent="-342900">
+              <a:lnSpc>
+                <a:spcPct val="125000"/>
+              </a:lnSpc>
+              <a:buSzPct val="100000"/>
+              <a:buChar char="●"/>
+            </a:pPr>
+            <a:r>
+              <a:rPr lang="en-US" sz="1100" b="1" dirty="0">
+                <a:solidFill>
+                  <a:srgbClr val="222222"/>
+                </a:solidFill>
+                <a:latin typeface="Calibri" pitchFamily="34" charset="0"/>
+                <a:ea typeface="Calibri" pitchFamily="34" charset="-122"/>
+                <a:cs typeface="Calibri" pitchFamily="34" charset="-120"/>
+              </a:rPr>
+              <a:t>回答率・メール登録率・景品交換率</a:t>
+            </a:r>
             <a:pPr indent="0" marL="0">
               <a:lnSpc>
                 <a:spcPct val="125000"/>
@@ -7151,41 +6826,7 @@
                 <a:ea typeface="Calibri" pitchFamily="34" charset="-122"/>
                 <a:cs typeface="Calibri" pitchFamily="34" charset="-120"/>
               </a:rPr>
-              <a:t>来場者の画面では、人数は</a:t>
-            </a:r>
-            <a:pPr indent="0" marL="0">
-              <a:lnSpc>
-                <a:spcPct val="125000"/>
-              </a:lnSpc>
-              <a:buNone/>
-            </a:pPr>
-            <a:r>
-              <a:rPr lang="en-US" sz="1100" b="1" dirty="0">
-                <a:solidFill>
-                  <a:srgbClr val="222222"/>
-                </a:solidFill>
-                <a:latin typeface="Calibri" pitchFamily="34" charset="0"/>
-                <a:ea typeface="Calibri" pitchFamily="34" charset="-122"/>
-                <a:cs typeface="Calibri" pitchFamily="34" charset="-120"/>
-              </a:rPr>
-              <a:t>キーボードではなくプルダウンから選ぶ</a:t>
-            </a:r>
-            <a:pPr indent="0" marL="0">
-              <a:lnSpc>
-                <a:spcPct val="125000"/>
-              </a:lnSpc>
-              <a:buNone/>
-            </a:pPr>
-            <a:r>
-              <a:rPr lang="en-US" sz="1100" dirty="0">
-                <a:solidFill>
-                  <a:srgbClr val="222222"/>
-                </a:solidFill>
-                <a:latin typeface="Calibri" pitchFamily="34" charset="0"/>
-                <a:ea typeface="Calibri" pitchFamily="34" charset="-122"/>
-                <a:cs typeface="Calibri" pitchFamily="34" charset="-120"/>
-              </a:rPr>
-              <a:t>形になります。</a:t>
+              <a:t>など</a:t>
             </a:r>
             <a:endParaRPr lang="en-US" sz="1100" dirty="0"/>
           </a:p>
@@ -7193,267 +6834,18 @@
       </p:sp>
       <p:sp>
         <p:nvSpPr>
-          <p:cNvPr id="10" name="Text 8"/>
-          <p:cNvSpPr txBox="1"/>
-          <p:nvPr/>
-        </p:nvSpPr>
-        <p:spPr>
-          <a:xfrm>
-            <a:off x="566928" y="3190494"/>
-            <a:ext cx="6428232" cy="459994"/>
-          </a:xfrm>
-          <a:prstGeom prst="rect">
-            <a:avLst/>
-          </a:prstGeom>
-          <a:noFill/>
-          <a:ln/>
-        </p:spPr>
-        <p:txBody>
-          <a:bodyPr wrap="square" lIns="0" tIns="0" rIns="0" bIns="0" rtlCol="0" anchor="t"/>
-          <a:lstStyle/>
-          <a:p>
-            <a:pPr indent="0" marL="0">
-              <a:lnSpc>
-                <a:spcPct val="125000"/>
-              </a:lnSpc>
-              <a:buNone/>
-            </a:pPr>
-            <a:r>
-              <a:rPr lang="en-US" sz="1100" dirty="0">
-                <a:solidFill>
-                  <a:srgbClr val="222222"/>
-                </a:solidFill>
-                <a:latin typeface="Calibri" pitchFamily="34" charset="0"/>
-                <a:ea typeface="Calibri" pitchFamily="34" charset="-122"/>
-                <a:cs typeface="Calibri" pitchFamily="34" charset="-120"/>
-              </a:rPr>
-              <a:t>「1人」〜「9人」と「</a:t>
-            </a:r>
-            <a:pPr indent="0" marL="0">
-              <a:lnSpc>
-                <a:spcPct val="125000"/>
-              </a:lnSpc>
-              <a:buNone/>
-            </a:pPr>
-            <a:r>
-              <a:rPr lang="en-US" sz="1100" b="1" dirty="0">
-                <a:solidFill>
-                  <a:srgbClr val="222222"/>
-                </a:solidFill>
-                <a:latin typeface="Calibri" pitchFamily="34" charset="0"/>
-                <a:ea typeface="Calibri" pitchFamily="34" charset="-122"/>
-                <a:cs typeface="Calibri" pitchFamily="34" charset="-120"/>
-              </a:rPr>
-              <a:t>10人以上</a:t>
-            </a:r>
-            <a:pPr indent="0" marL="0">
-              <a:lnSpc>
-                <a:spcPct val="125000"/>
-              </a:lnSpc>
-              <a:buNone/>
-            </a:pPr>
-            <a:r>
-              <a:rPr lang="en-US" sz="1100" dirty="0">
-                <a:solidFill>
-                  <a:srgbClr val="222222"/>
-                </a:solidFill>
-                <a:latin typeface="Calibri" pitchFamily="34" charset="0"/>
-                <a:ea typeface="Calibri" pitchFamily="34" charset="-122"/>
-                <a:cs typeface="Calibri" pitchFamily="34" charset="-120"/>
-              </a:rPr>
-              <a:t>」が並び、「10人以上」は10人として集計します（多めには見積もりません）。</a:t>
-            </a:r>
-            <a:endParaRPr lang="en-US" sz="1100" dirty="0"/>
-          </a:p>
-        </p:txBody>
-      </p:sp>
-      <p:sp>
-        <p:nvSpPr>
-          <p:cNvPr id="11" name="Text 9"/>
-          <p:cNvSpPr txBox="1"/>
-          <p:nvPr/>
-        </p:nvSpPr>
-        <p:spPr>
-          <a:xfrm>
-            <a:off x="566928" y="3687064"/>
-            <a:ext cx="6428232" cy="257429"/>
-          </a:xfrm>
-          <a:prstGeom prst="rect">
-            <a:avLst/>
-          </a:prstGeom>
-          <a:noFill/>
-          <a:ln/>
-        </p:spPr>
-        <p:txBody>
-          <a:bodyPr wrap="square" lIns="0" tIns="0" rIns="0" bIns="0" rtlCol="0" anchor="t"/>
-          <a:lstStyle/>
-          <a:p>
-            <a:pPr indent="0" marL="0">
-              <a:lnSpc>
-                <a:spcPct val="125000"/>
-              </a:lnSpc>
-              <a:buNone/>
-            </a:pPr>
-            <a:r>
-              <a:rPr lang="en-US" sz="1100" dirty="0">
-                <a:solidFill>
-                  <a:srgbClr val="222222"/>
-                </a:solidFill>
-                <a:latin typeface="Calibri" pitchFamily="34" charset="0"/>
-                <a:ea typeface="Calibri" pitchFamily="34" charset="-122"/>
-                <a:cs typeface="Calibri" pitchFamily="34" charset="-120"/>
-              </a:rPr>
-              <a:t>上限の10は、サーバーの </a:t>
-            </a:r>
-            <a:pPr indent="0" marL="0">
-              <a:lnSpc>
-                <a:spcPct val="125000"/>
-              </a:lnSpc>
-              <a:buNone/>
-            </a:pPr>
-            <a:r>
-              <a:rPr lang="en-US" sz="1045" dirty="0">
-                <a:solidFill>
-                  <a:srgbClr val="222222"/>
-                </a:solidFill>
-                <a:latin typeface="Courier New" pitchFamily="34" charset="0"/>
-                <a:ea typeface="Courier New" pitchFamily="34" charset="-122"/>
-                <a:cs typeface="Courier New" pitchFamily="34" charset="-120"/>
-              </a:rPr>
-              <a:t>.env</a:t>
-            </a:r>
-            <a:pPr indent="0" marL="0">
-              <a:lnSpc>
-                <a:spcPct val="125000"/>
-              </a:lnSpc>
-              <a:buNone/>
-            </a:pPr>
-            <a:r>
-              <a:rPr lang="en-US" sz="1100" dirty="0">
-                <a:solidFill>
-                  <a:srgbClr val="222222"/>
-                </a:solidFill>
-                <a:latin typeface="Calibri" pitchFamily="34" charset="0"/>
-                <a:ea typeface="Calibri" pitchFamily="34" charset="-122"/>
-                <a:cs typeface="Calibri" pitchFamily="34" charset="-120"/>
-              </a:rPr>
-              <a:t> の </a:t>
-            </a:r>
-            <a:pPr indent="0" marL="0">
-              <a:lnSpc>
-                <a:spcPct val="125000"/>
-              </a:lnSpc>
-              <a:buNone/>
-            </a:pPr>
-            <a:r>
-              <a:rPr lang="en-US" sz="1045" dirty="0">
-                <a:solidFill>
-                  <a:srgbClr val="222222"/>
-                </a:solidFill>
-                <a:latin typeface="Courier New" pitchFamily="34" charset="0"/>
-                <a:ea typeface="Courier New" pitchFamily="34" charset="-122"/>
-                <a:cs typeface="Courier New" pitchFamily="34" charset="-120"/>
-              </a:rPr>
-              <a:t>PARTY_SIZE_MAX</a:t>
-            </a:r>
-            <a:pPr indent="0" marL="0">
-              <a:lnSpc>
-                <a:spcPct val="125000"/>
-              </a:lnSpc>
-              <a:buNone/>
-            </a:pPr>
-            <a:r>
-              <a:rPr lang="en-US" sz="1100" dirty="0">
-                <a:solidFill>
-                  <a:srgbClr val="222222"/>
-                </a:solidFill>
-                <a:latin typeface="Calibri" pitchFamily="34" charset="0"/>
-                <a:ea typeface="Calibri" pitchFamily="34" charset="-122"/>
-                <a:cs typeface="Calibri" pitchFamily="34" charset="-120"/>
-              </a:rPr>
-              <a:t> で変えられます。</a:t>
-            </a:r>
-            <a:endParaRPr lang="en-US" sz="1100" dirty="0"/>
-          </a:p>
-        </p:txBody>
-      </p:sp>
-      <p:pic>
-        <p:nvPicPr>
-          <p:cNvPr id="12" name="Image 0" descr="C:\Users\sato\Desktop\enque\docs\images\p-survey-number.png">    </p:cNvPr>
-          <p:cNvPicPr>
-            <a:picLocks noChangeAspect="1"/>
-          </p:cNvPicPr>
-          <p:nvPr/>
-        </p:nvPicPr>
-        <p:blipFill>
-          <a:blip r:embed="rId1"/>
-          <a:stretch>
-            <a:fillRect/>
-          </a:stretch>
-        </p:blipFill>
-        <p:spPr>
-          <a:xfrm>
-            <a:off x="2654866" y="3981069"/>
-            <a:ext cx="2252356" cy="3474720"/>
-          </a:xfrm>
-          <a:prstGeom prst="rect">
-            <a:avLst/>
-          </a:prstGeom>
-        </p:spPr>
-      </p:pic>
-      <p:sp>
-        <p:nvSpPr>
-          <p:cNvPr id="13" name="Text 10"/>
-          <p:cNvSpPr txBox="1"/>
-          <p:nvPr/>
-        </p:nvSpPr>
-        <p:spPr>
-          <a:xfrm>
-            <a:off x="566928" y="7510653"/>
-            <a:ext cx="6428232" cy="274320"/>
-          </a:xfrm>
-          <a:prstGeom prst="rect">
-            <a:avLst/>
-          </a:prstGeom>
-          <a:noFill/>
-          <a:ln/>
-        </p:spPr>
-        <p:txBody>
-          <a:bodyPr wrap="square" lIns="0" tIns="0" rIns="0" bIns="0" rtlCol="0" anchor="ctr"/>
-          <a:lstStyle/>
-          <a:p>
-            <a:pPr algn="ctr" indent="0" marL="0">
-              <a:buNone/>
-            </a:pPr>
-            <a:r>
-              <a:rPr lang="en-US" sz="950" dirty="0">
-                <a:solidFill>
-                  <a:srgbClr val="6B6B6B"/>
-                </a:solidFill>
-                <a:latin typeface="Calibri" pitchFamily="34" charset="0"/>
-                <a:ea typeface="Calibri" pitchFamily="34" charset="-122"/>
-                <a:cs typeface="Calibri" pitchFamily="34" charset="-120"/>
-              </a:rPr>
-              <a:t>来場者のアンケート画面の「何人で来られましたか」。人数のプルダウンを開いた状態。</a:t>
-            </a:r>
-            <a:endParaRPr lang="en-US" sz="950" dirty="0"/>
-          </a:p>
-        </p:txBody>
-      </p:sp>
-      <p:sp>
-        <p:nvSpPr>
-          <p:cNvPr id="14" name="Shape 11"/>
+          <p:cNvPr id="11" name="Shape 9"/>
           <p:cNvSpPr/>
           <p:nvPr/>
         </p:nvSpPr>
         <p:spPr>
           <a:xfrm>
-            <a:off x="566928" y="7839837"/>
-            <a:ext cx="6428232" cy="431102"/>
+            <a:off x="566928" y="3429635"/>
+            <a:ext cx="6428232" cy="624459"/>
           </a:xfrm>
           <a:prstGeom prst="roundRect">
             <a:avLst>
-              <a:gd name="adj" fmla="val 12726"/>
+              <a:gd name="adj" fmla="val 8786"/>
             </a:avLst>
           </a:prstGeom>
           <a:solidFill>
@@ -7469,14 +6861,153 @@
       </p:sp>
       <p:sp>
         <p:nvSpPr>
+          <p:cNvPr id="12" name="Text 10"/>
+          <p:cNvSpPr txBox="1"/>
+          <p:nvPr/>
+        </p:nvSpPr>
+        <p:spPr>
+          <a:xfrm>
+            <a:off x="658368" y="3521075"/>
+            <a:ext cx="237744" cy="237744"/>
+          </a:xfrm>
+          <a:prstGeom prst="rect">
+            <a:avLst/>
+          </a:prstGeom>
+          <a:noFill/>
+          <a:ln/>
+        </p:spPr>
+        <p:txBody>
+          <a:bodyPr wrap="square" lIns="0" tIns="0" rIns="0" bIns="0" rtlCol="0" anchor="ctr"/>
+          <a:lstStyle/>
+          <a:p>
+            <a:pPr algn="ctr" indent="0" marL="0">
+              <a:buNone/>
+            </a:pPr>
+            <a:r>
+              <a:rPr lang="en-US" sz="1200" b="1" dirty="0">
+                <a:solidFill>
+                  <a:srgbClr val="1E2761"/>
+                </a:solidFill>
+                <a:latin typeface="Calibri" pitchFamily="34" charset="0"/>
+                <a:ea typeface="Calibri" pitchFamily="34" charset="-122"/>
+                <a:cs typeface="Calibri" pitchFamily="34" charset="-120"/>
+              </a:rPr>
+              <a:t>i</a:t>
+            </a:r>
+            <a:endParaRPr lang="en-US" sz="1200" dirty="0"/>
+          </a:p>
+        </p:txBody>
+      </p:sp>
+      <p:sp>
+        <p:nvSpPr>
+          <p:cNvPr id="13" name="Text 11"/>
+          <p:cNvSpPr txBox="1"/>
+          <p:nvPr/>
+        </p:nvSpPr>
+        <p:spPr>
+          <a:xfrm>
+            <a:off x="950976" y="3539363"/>
+            <a:ext cx="5925312" cy="441579"/>
+          </a:xfrm>
+          <a:prstGeom prst="rect">
+            <a:avLst/>
+          </a:prstGeom>
+          <a:noFill/>
+          <a:ln/>
+        </p:spPr>
+        <p:txBody>
+          <a:bodyPr wrap="square" lIns="0" tIns="0" rIns="0" bIns="0" rtlCol="0" anchor="t"/>
+          <a:lstStyle/>
+          <a:p>
+            <a:pPr indent="0" marL="0">
+              <a:lnSpc>
+                <a:spcPct val="120000"/>
+              </a:lnSpc>
+              <a:buNone/>
+            </a:pPr>
+            <a:r>
+              <a:rPr lang="en-US" sz="1050" dirty="0">
+                <a:solidFill>
+                  <a:srgbClr val="222222"/>
+                </a:solidFill>
+                <a:latin typeface="Calibri" pitchFamily="34" charset="0"/>
+                <a:ea typeface="Calibri" pitchFamily="34" charset="-122"/>
+                <a:cs typeface="Calibri" pitchFamily="34" charset="-120"/>
+              </a:rPr>
+              <a:t>「周回時間」は最初と最後の回答の間隔で、</a:t>
+            </a:r>
+            <a:pPr indent="0" marL="0">
+              <a:lnSpc>
+                <a:spcPct val="120000"/>
+              </a:lnSpc>
+              <a:buNone/>
+            </a:pPr>
+            <a:r>
+              <a:rPr lang="en-US" sz="1050" b="1" dirty="0">
+                <a:solidFill>
+                  <a:srgbClr val="222222"/>
+                </a:solidFill>
+                <a:latin typeface="Calibri" pitchFamily="34" charset="0"/>
+                <a:ea typeface="Calibri" pitchFamily="34" charset="-122"/>
+                <a:cs typeface="Calibri" pitchFamily="34" charset="-120"/>
+              </a:rPr>
+              <a:t>滞在時間ではありません</a:t>
+            </a:r>
+            <a:pPr indent="0" marL="0">
+              <a:lnSpc>
+                <a:spcPct val="120000"/>
+              </a:lnSpc>
+              <a:buNone/>
+            </a:pPr>
+            <a:r>
+              <a:rPr lang="en-US" sz="1050" dirty="0">
+                <a:solidFill>
+                  <a:srgbClr val="222222"/>
+                </a:solidFill>
+                <a:latin typeface="Calibri" pitchFamily="34" charset="0"/>
+                <a:ea typeface="Calibri" pitchFamily="34" charset="-122"/>
+                <a:cs typeface="Calibri" pitchFamily="34" charset="-120"/>
+              </a:rPr>
+              <a:t>。また、来場者は端末ごとに数えるため、端末を変えた方は別の方として数えられます。</a:t>
+            </a:r>
+            <a:endParaRPr lang="en-US" sz="1050" dirty="0"/>
+          </a:p>
+        </p:txBody>
+      </p:sp>
+      <p:pic>
+        <p:nvPicPr>
+          <p:cNvPr id="14" name="Image 0" descr="C:\Users\sato\Desktop\enque\docs\images\o-insights.png">    </p:cNvPr>
+          <p:cNvPicPr>
+            <a:picLocks noChangeAspect="1"/>
+          </p:cNvPicPr>
+          <p:nvPr/>
+        </p:nvPicPr>
+        <p:blipFill>
+          <a:blip r:embed="rId1"/>
+          <a:stretch>
+            <a:fillRect/>
+          </a:stretch>
+        </p:blipFill>
+        <p:spPr>
+          <a:xfrm>
+            <a:off x="884627" y="4127246"/>
+            <a:ext cx="5792834" cy="3474720"/>
+          </a:xfrm>
+          <a:prstGeom prst="rect">
+            <a:avLst/>
+          </a:prstGeom>
+        </p:spPr>
+      </p:pic>
+      <p:sp>
+        <p:nvSpPr>
           <p:cNvPr id="15" name="Text 12"/>
           <p:cNvSpPr txBox="1"/>
           <p:nvPr/>
         </p:nvSpPr>
         <p:spPr>
           <a:xfrm>
-            <a:off x="658368" y="7931277"/>
-            <a:ext cx="237744" cy="237744"/>
+            <a:off x="566928" y="7656830"/>
+            <a:ext cx="6428232" cy="274320"/>
           </a:xfrm>
           <a:prstGeom prst="rect">
             <a:avLst/>
@@ -7492,349 +7023,23 @@
               <a:buNone/>
             </a:pPr>
             <a:r>
-              <a:rPr lang="en-US" sz="1200" b="1" dirty="0">
-                <a:solidFill>
-                  <a:srgbClr val="1E2761"/>
-                </a:solidFill>
-                <a:latin typeface="Calibri" pitchFamily="34" charset="0"/>
-                <a:ea typeface="Calibri" pitchFamily="34" charset="-122"/>
-                <a:cs typeface="Calibri" pitchFamily="34" charset="-120"/>
-              </a:rPr>
-              <a:t>i</a:t>
-            </a:r>
-            <a:endParaRPr lang="en-US" sz="1200" dirty="0"/>
+              <a:rPr lang="en-US" sz="950" dirty="0">
+                <a:solidFill>
+                  <a:srgbClr val="6B6B6B"/>
+                </a:solidFill>
+                <a:latin typeface="Calibri" pitchFamily="34" charset="0"/>
+                <a:ea typeface="Calibri" pitchFamily="34" charset="-122"/>
+                <a:cs typeface="Calibri" pitchFamily="34" charset="-120"/>
+              </a:rPr>
+              <a:t>「回答者の傾向」画面。周回時間・周回企業数のグラフが見えるところ。</a:t>
+            </a:r>
+            <a:endParaRPr lang="en-US" sz="950" dirty="0"/>
           </a:p>
         </p:txBody>
       </p:sp>
       <p:sp>
         <p:nvSpPr>
           <p:cNvPr id="16" name="Text 13"/>
-          <p:cNvSpPr txBox="1"/>
-          <p:nvPr/>
-        </p:nvSpPr>
-        <p:spPr>
-          <a:xfrm>
-            <a:off x="950976" y="7949565"/>
-            <a:ext cx="5925312" cy="248221"/>
-          </a:xfrm>
-          <a:prstGeom prst="rect">
-            <a:avLst/>
-          </a:prstGeom>
-          <a:noFill/>
-          <a:ln/>
-        </p:spPr>
-        <p:txBody>
-          <a:bodyPr wrap="square" lIns="0" tIns="0" rIns="0" bIns="0" rtlCol="0" anchor="t"/>
-          <a:lstStyle/>
-          <a:p>
-            <a:pPr indent="0" marL="0">
-              <a:lnSpc>
-                <a:spcPct val="120000"/>
-              </a:lnSpc>
-              <a:buNone/>
-            </a:pPr>
-            <a:r>
-              <a:rPr lang="en-US" sz="1050" dirty="0">
-                <a:solidFill>
-                  <a:srgbClr val="222222"/>
-                </a:solidFill>
-                <a:latin typeface="Calibri" pitchFamily="34" charset="0"/>
-                <a:ea typeface="Calibri" pitchFamily="34" charset="-122"/>
-                <a:cs typeface="Calibri" pitchFamily="34" charset="-120"/>
-              </a:rPr>
-              <a:t>人数は</a:t>
-            </a:r>
-            <a:pPr indent="0" marL="0">
-              <a:lnSpc>
-                <a:spcPct val="120000"/>
-              </a:lnSpc>
-              <a:buNone/>
-            </a:pPr>
-            <a:r>
-              <a:rPr lang="en-US" sz="1050" b="1" dirty="0">
-                <a:solidFill>
-                  <a:srgbClr val="222222"/>
-                </a:solidFill>
-                <a:latin typeface="Calibri" pitchFamily="34" charset="0"/>
-                <a:ea typeface="Calibri" pitchFamily="34" charset="-122"/>
-                <a:cs typeface="Calibri" pitchFamily="34" charset="-120"/>
-              </a:rPr>
-              <a:t>任意回答</a:t>
-            </a:r>
-            <a:pPr indent="0" marL="0">
-              <a:lnSpc>
-                <a:spcPct val="120000"/>
-              </a:lnSpc>
-              <a:buNone/>
-            </a:pPr>
-            <a:r>
-              <a:rPr lang="en-US" sz="1050" dirty="0">
-                <a:solidFill>
-                  <a:srgbClr val="222222"/>
-                </a:solidFill>
-                <a:latin typeface="Calibri" pitchFamily="34" charset="0"/>
-                <a:ea typeface="Calibri" pitchFamily="34" charset="-122"/>
-                <a:cs typeface="Calibri" pitchFamily="34" charset="-120"/>
-              </a:rPr>
-              <a:t>です。2社目以降は、前の企業で答えた人数が初期値として入るので、来場者は</a:t>
-            </a:r>
-            <a:endParaRPr lang="en-US" sz="1050" dirty="0"/>
-          </a:p>
-        </p:txBody>
-      </p:sp>
-      <p:sp>
-        <p:nvSpPr>
-          <p:cNvPr id="17" name="Shape 14"/>
-          <p:cNvSpPr/>
-          <p:nvPr/>
-        </p:nvSpPr>
-        <p:spPr>
-          <a:xfrm>
-            <a:off x="566928" y="8344091"/>
-            <a:ext cx="6428232" cy="431102"/>
-          </a:xfrm>
-          <a:prstGeom prst="roundRect">
-            <a:avLst>
-              <a:gd name="adj" fmla="val 12726"/>
-            </a:avLst>
-          </a:prstGeom>
-          <a:solidFill>
-            <a:srgbClr val="E8ECF8"/>
-          </a:solidFill>
-          <a:ln w="9525">
-            <a:solidFill>
-              <a:srgbClr val="1E2761"/>
-            </a:solidFill>
-            <a:prstDash val="solid"/>
-          </a:ln>
-        </p:spPr>
-      </p:sp>
-      <p:sp>
-        <p:nvSpPr>
-          <p:cNvPr id="18" name="Text 15"/>
-          <p:cNvSpPr txBox="1"/>
-          <p:nvPr/>
-        </p:nvSpPr>
-        <p:spPr>
-          <a:xfrm>
-            <a:off x="658368" y="8435531"/>
-            <a:ext cx="237744" cy="237744"/>
-          </a:xfrm>
-          <a:prstGeom prst="rect">
-            <a:avLst/>
-          </a:prstGeom>
-          <a:noFill/>
-          <a:ln/>
-        </p:spPr>
-        <p:txBody>
-          <a:bodyPr wrap="square" lIns="0" tIns="0" rIns="0" bIns="0" rtlCol="0" anchor="ctr"/>
-          <a:lstStyle/>
-          <a:p>
-            <a:pPr algn="ctr" indent="0" marL="0">
-              <a:buNone/>
-            </a:pPr>
-            <a:r>
-              <a:rPr lang="en-US" sz="1200" b="1" dirty="0">
-                <a:solidFill>
-                  <a:srgbClr val="1E2761"/>
-                </a:solidFill>
-                <a:latin typeface="Calibri" pitchFamily="34" charset="0"/>
-                <a:ea typeface="Calibri" pitchFamily="34" charset="-122"/>
-                <a:cs typeface="Calibri" pitchFamily="34" charset="-120"/>
-              </a:rPr>
-              <a:t>i</a:t>
-            </a:r>
-            <a:endParaRPr lang="en-US" sz="1200" dirty="0"/>
-          </a:p>
-        </p:txBody>
-      </p:sp>
-      <p:sp>
-        <p:nvSpPr>
-          <p:cNvPr id="19" name="Text 16"/>
-          <p:cNvSpPr txBox="1"/>
-          <p:nvPr/>
-        </p:nvSpPr>
-        <p:spPr>
-          <a:xfrm>
-            <a:off x="950976" y="8453819"/>
-            <a:ext cx="5925312" cy="248221"/>
-          </a:xfrm>
-          <a:prstGeom prst="rect">
-            <a:avLst/>
-          </a:prstGeom>
-          <a:noFill/>
-          <a:ln/>
-        </p:spPr>
-        <p:txBody>
-          <a:bodyPr wrap="square" lIns="0" tIns="0" rIns="0" bIns="0" rtlCol="0" anchor="t"/>
-          <a:lstStyle/>
-          <a:p>
-            <a:pPr indent="0" marL="0">
-              <a:lnSpc>
-                <a:spcPct val="120000"/>
-              </a:lnSpc>
-              <a:buNone/>
-            </a:pPr>
-            <a:r>
-              <a:rPr lang="en-US" sz="1050" dirty="0">
-                <a:solidFill>
-                  <a:srgbClr val="222222"/>
-                </a:solidFill>
-                <a:latin typeface="Calibri" pitchFamily="34" charset="0"/>
-                <a:ea typeface="Calibri" pitchFamily="34" charset="-122"/>
-                <a:cs typeface="Calibri" pitchFamily="34" charset="-120"/>
-              </a:rPr>
-              <a:t>そのまま送信できます。未回答のぶんは、同じ来場者の別の回答などから補って計算します。</a:t>
-            </a:r>
-            <a:endParaRPr lang="en-US" sz="1050" dirty="0"/>
-          </a:p>
-        </p:txBody>
-      </p:sp>
-      <p:sp>
-        <p:nvSpPr>
-          <p:cNvPr id="20" name="Shape 17"/>
-          <p:cNvSpPr/>
-          <p:nvPr/>
-        </p:nvSpPr>
-        <p:spPr>
-          <a:xfrm>
-            <a:off x="566928" y="8848344"/>
-            <a:ext cx="6428232" cy="431102"/>
-          </a:xfrm>
-          <a:prstGeom prst="roundRect">
-            <a:avLst>
-              <a:gd name="adj" fmla="val 12726"/>
-            </a:avLst>
-          </a:prstGeom>
-          <a:solidFill>
-            <a:srgbClr val="FDF0E6"/>
-          </a:solidFill>
-          <a:ln w="9525">
-            <a:solidFill>
-              <a:srgbClr val="E08A3C"/>
-            </a:solidFill>
-            <a:prstDash val="solid"/>
-          </a:ln>
-        </p:spPr>
-      </p:sp>
-      <p:sp>
-        <p:nvSpPr>
-          <p:cNvPr id="21" name="Text 18"/>
-          <p:cNvSpPr txBox="1"/>
-          <p:nvPr/>
-        </p:nvSpPr>
-        <p:spPr>
-          <a:xfrm>
-            <a:off x="658368" y="8939784"/>
-            <a:ext cx="237744" cy="237744"/>
-          </a:xfrm>
-          <a:prstGeom prst="rect">
-            <a:avLst/>
-          </a:prstGeom>
-          <a:noFill/>
-          <a:ln/>
-        </p:spPr>
-        <p:txBody>
-          <a:bodyPr wrap="square" lIns="0" tIns="0" rIns="0" bIns="0" rtlCol="0" anchor="ctr"/>
-          <a:lstStyle/>
-          <a:p>
-            <a:pPr algn="ctr" indent="0" marL="0">
-              <a:buNone/>
-            </a:pPr>
-            <a:r>
-              <a:rPr lang="en-US" sz="1200" b="1" dirty="0">
-                <a:solidFill>
-                  <a:srgbClr val="C25A17"/>
-                </a:solidFill>
-                <a:latin typeface="Calibri" pitchFamily="34" charset="0"/>
-                <a:ea typeface="Calibri" pitchFamily="34" charset="-122"/>
-                <a:cs typeface="Calibri" pitchFamily="34" charset="-120"/>
-              </a:rPr>
-              <a:t>！</a:t>
-            </a:r>
-            <a:endParaRPr lang="en-US" sz="1200" dirty="0"/>
-          </a:p>
-        </p:txBody>
-      </p:sp>
-      <p:sp>
-        <p:nvSpPr>
-          <p:cNvPr id="22" name="Text 19"/>
-          <p:cNvSpPr txBox="1"/>
-          <p:nvPr/>
-        </p:nvSpPr>
-        <p:spPr>
-          <a:xfrm>
-            <a:off x="950976" y="8958072"/>
-            <a:ext cx="5925312" cy="248221"/>
-          </a:xfrm>
-          <a:prstGeom prst="rect">
-            <a:avLst/>
-          </a:prstGeom>
-          <a:noFill/>
-          <a:ln/>
-        </p:spPr>
-        <p:txBody>
-          <a:bodyPr wrap="square" lIns="0" tIns="0" rIns="0" bIns="0" rtlCol="0" anchor="t"/>
-          <a:lstStyle/>
-          <a:p>
-            <a:pPr indent="0" marL="0">
-              <a:lnSpc>
-                <a:spcPct val="120000"/>
-              </a:lnSpc>
-              <a:buNone/>
-            </a:pPr>
-            <a:r>
-              <a:rPr lang="en-US" sz="1050" dirty="0">
-                <a:solidFill>
-                  <a:srgbClr val="222222"/>
-                </a:solidFill>
-                <a:latin typeface="Calibri" pitchFamily="34" charset="0"/>
-                <a:ea typeface="Calibri" pitchFamily="34" charset="-122"/>
-                <a:cs typeface="Calibri" pitchFamily="34" charset="-120"/>
-              </a:rPr>
-              <a:t>人数の設問は</a:t>
-            </a:r>
-            <a:pPr indent="0" marL="0">
-              <a:lnSpc>
-                <a:spcPct val="120000"/>
-              </a:lnSpc>
-              <a:buNone/>
-            </a:pPr>
-            <a:r>
-              <a:rPr lang="en-US" sz="1050" b="1" dirty="0">
-                <a:solidFill>
-                  <a:srgbClr val="222222"/>
-                </a:solidFill>
-                <a:latin typeface="Calibri" pitchFamily="34" charset="0"/>
-                <a:ea typeface="Calibri" pitchFamily="34" charset="-122"/>
-                <a:cs typeface="Calibri" pitchFamily="34" charset="-120"/>
-              </a:rPr>
-              <a:t>共通設問テンプレート</a:t>
-            </a:r>
-            <a:pPr indent="0" marL="0">
-              <a:lnSpc>
-                <a:spcPct val="120000"/>
-              </a:lnSpc>
-              <a:buNone/>
-            </a:pPr>
-            <a:r>
-              <a:rPr lang="en-US" sz="1050" dirty="0">
-                <a:solidFill>
-                  <a:srgbClr val="222222"/>
-                </a:solidFill>
-                <a:latin typeface="Calibri" pitchFamily="34" charset="0"/>
-                <a:ea typeface="Calibri" pitchFamily="34" charset="-122"/>
-                <a:cs typeface="Calibri" pitchFamily="34" charset="-120"/>
-              </a:rPr>
-              <a:t>に入れて全社に取り込むと、聞き方と集計が揃います。</a:t>
-            </a:r>
-            <a:endParaRPr lang="en-US" sz="1050" dirty="0"/>
-          </a:p>
-        </p:txBody>
-      </p:sp>
-      <p:sp>
-        <p:nvSpPr>
-          <p:cNvPr id="23" name="Text 20"/>
           <p:cNvSpPr txBox="1"/>
           <p:nvPr/>
         </p:nvSpPr>
@@ -7975,15 +7180,660 @@
                 <a:ea typeface="Calibri" pitchFamily="34" charset="-122"/>
                 <a:cs typeface="Calibri" pitchFamily="34" charset="-120"/>
               </a:rPr>
-              <a:t>当日：来場人数を集計する（つづき）</a:t>
+              <a:t>当日：来場人数を集計する</a:t>
             </a:r>
             <a:endParaRPr lang="en-US" sz="2200" dirty="0"/>
+          </a:p>
+        </p:txBody>
+      </p:sp>
+      <p:sp>
+        <p:nvSpPr>
+          <p:cNvPr id="4" name="Text 2"/>
+          <p:cNvSpPr txBox="1"/>
+          <p:nvPr/>
+        </p:nvSpPr>
+        <p:spPr>
+          <a:xfrm>
+            <a:off x="566928" y="1481328"/>
+            <a:ext cx="6428232" cy="257429"/>
+          </a:xfrm>
+          <a:prstGeom prst="rect">
+            <a:avLst/>
+          </a:prstGeom>
+          <a:noFill/>
+          <a:ln/>
+        </p:spPr>
+        <p:txBody>
+          <a:bodyPr wrap="square" lIns="0" tIns="0" rIns="0" bIns="0" rtlCol="0" anchor="t"/>
+          <a:lstStyle/>
+          <a:p>
+            <a:pPr indent="0" marL="0">
+              <a:lnSpc>
+                <a:spcPct val="125000"/>
+              </a:lnSpc>
+              <a:buNone/>
+            </a:pPr>
+            <a:r>
+              <a:rPr lang="en-US" sz="1100" dirty="0">
+                <a:solidFill>
+                  <a:srgbClr val="222222"/>
+                </a:solidFill>
+                <a:latin typeface="Calibri" pitchFamily="34" charset="0"/>
+                <a:ea typeface="Calibri" pitchFamily="34" charset="-122"/>
+                <a:cs typeface="Calibri" pitchFamily="34" charset="-120"/>
+              </a:rPr>
+              <a:t>アンケートに「</a:t>
+            </a:r>
+            <a:pPr indent="0" marL="0">
+              <a:lnSpc>
+                <a:spcPct val="125000"/>
+              </a:lnSpc>
+              <a:buNone/>
+            </a:pPr>
+            <a:r>
+              <a:rPr lang="en-US" sz="1100" b="1" dirty="0">
+                <a:solidFill>
+                  <a:srgbClr val="222222"/>
+                </a:solidFill>
+                <a:latin typeface="Calibri" pitchFamily="34" charset="0"/>
+                <a:ea typeface="Calibri" pitchFamily="34" charset="-122"/>
+                <a:cs typeface="Calibri" pitchFamily="34" charset="-120"/>
+              </a:rPr>
+              <a:t>何人で来られましたか</a:t>
+            </a:r>
+            <a:pPr indent="0" marL="0">
+              <a:lnSpc>
+                <a:spcPct val="125000"/>
+              </a:lnSpc>
+              <a:buNone/>
+            </a:pPr>
+            <a:r>
+              <a:rPr lang="en-US" sz="1100" dirty="0">
+                <a:solidFill>
+                  <a:srgbClr val="222222"/>
+                </a:solidFill>
+                <a:latin typeface="Calibri" pitchFamily="34" charset="0"/>
+                <a:ea typeface="Calibri" pitchFamily="34" charset="-122"/>
+                <a:cs typeface="Calibri" pitchFamily="34" charset="-120"/>
+              </a:rPr>
+              <a:t>」の設問（種類は</a:t>
+            </a:r>
+            <a:pPr indent="0" marL="0">
+              <a:lnSpc>
+                <a:spcPct val="125000"/>
+              </a:lnSpc>
+              <a:buNone/>
+            </a:pPr>
+            <a:r>
+              <a:rPr lang="en-US" sz="1100" b="1" dirty="0">
+                <a:solidFill>
+                  <a:srgbClr val="222222"/>
+                </a:solidFill>
+                <a:latin typeface="Calibri" pitchFamily="34" charset="0"/>
+                <a:ea typeface="Calibri" pitchFamily="34" charset="-122"/>
+                <a:cs typeface="Calibri" pitchFamily="34" charset="-120"/>
+              </a:rPr>
+              <a:t>数値入力</a:t>
+            </a:r>
+            <a:pPr indent="0" marL="0">
+              <a:lnSpc>
+                <a:spcPct val="125000"/>
+              </a:lnSpc>
+              <a:buNone/>
+            </a:pPr>
+            <a:r>
+              <a:rPr lang="en-US" sz="1100" dirty="0">
+                <a:solidFill>
+                  <a:srgbClr val="222222"/>
+                </a:solidFill>
+                <a:latin typeface="Calibri" pitchFamily="34" charset="0"/>
+                <a:ea typeface="Calibri" pitchFamily="34" charset="-122"/>
+                <a:cs typeface="Calibri" pitchFamily="34" charset="-120"/>
+              </a:rPr>
+              <a:t>）を入れて、設問編集画面で</a:t>
+            </a:r>
+            <a:endParaRPr lang="en-US" sz="1100" dirty="0"/>
+          </a:p>
+        </p:txBody>
+      </p:sp>
+      <p:sp>
+        <p:nvSpPr>
+          <p:cNvPr id="5" name="Text 3"/>
+          <p:cNvSpPr txBox="1"/>
+          <p:nvPr/>
+        </p:nvSpPr>
+        <p:spPr>
+          <a:xfrm>
+            <a:off x="566928" y="1775333"/>
+            <a:ext cx="6428232" cy="257429"/>
+          </a:xfrm>
+          <a:prstGeom prst="rect">
+            <a:avLst/>
+          </a:prstGeom>
+          <a:noFill/>
+          <a:ln/>
+        </p:spPr>
+        <p:txBody>
+          <a:bodyPr wrap="square" lIns="0" tIns="0" rIns="0" bIns="0" rtlCol="0" anchor="t"/>
+          <a:lstStyle/>
+          <a:p>
+            <a:pPr indent="0" marL="0">
+              <a:lnSpc>
+                <a:spcPct val="125000"/>
+              </a:lnSpc>
+              <a:buNone/>
+            </a:pPr>
+            <a:r>
+              <a:rPr lang="en-US" sz="1100" b="1" dirty="0">
+                <a:solidFill>
+                  <a:srgbClr val="222222"/>
+                </a:solidFill>
+                <a:latin typeface="Calibri" pitchFamily="34" charset="0"/>
+                <a:ea typeface="Calibri" pitchFamily="34" charset="-122"/>
+                <a:cs typeface="Calibri" pitchFamily="34" charset="-120"/>
+              </a:rPr>
+              <a:t>「この回答を来場人数として集計する」</a:t>
+            </a:r>
+            <a:pPr indent="0" marL="0">
+              <a:lnSpc>
+                <a:spcPct val="125000"/>
+              </a:lnSpc>
+              <a:buNone/>
+            </a:pPr>
+            <a:r>
+              <a:rPr lang="en-US" sz="1100" dirty="0">
+                <a:solidFill>
+                  <a:srgbClr val="222222"/>
+                </a:solidFill>
+                <a:latin typeface="Calibri" pitchFamily="34" charset="0"/>
+                <a:ea typeface="Calibri" pitchFamily="34" charset="-122"/>
+                <a:cs typeface="Calibri" pitchFamily="34" charset="-120"/>
+              </a:rPr>
+              <a:t>にチェックを入れると、人数が集計されます。</a:t>
+            </a:r>
+            <a:endParaRPr lang="en-US" sz="1100" dirty="0"/>
+          </a:p>
+        </p:txBody>
+      </p:sp>
+      <p:sp>
+        <p:nvSpPr>
+          <p:cNvPr id="6" name="Text 4"/>
+          <p:cNvSpPr txBox="1"/>
+          <p:nvPr/>
+        </p:nvSpPr>
+        <p:spPr>
+          <a:xfrm>
+            <a:off x="713232" y="2069338"/>
+            <a:ext cx="6281928" cy="257429"/>
+          </a:xfrm>
+          <a:prstGeom prst="rect">
+            <a:avLst/>
+          </a:prstGeom>
+          <a:noFill/>
+          <a:ln/>
+        </p:spPr>
+        <p:txBody>
+          <a:bodyPr wrap="square" lIns="0" tIns="0" rIns="0" bIns="0" rtlCol="0" anchor="t"/>
+          <a:lstStyle/>
+          <a:p>
+            <a:pPr marL="342900" indent="-342900">
+              <a:lnSpc>
+                <a:spcPct val="125000"/>
+              </a:lnSpc>
+              <a:buSzPct val="100000"/>
+              <a:buChar char="●"/>
+            </a:pPr>
+            <a:r>
+              <a:rPr lang="en-US" sz="1100" b="1" dirty="0">
+                <a:solidFill>
+                  <a:srgbClr val="222222"/>
+                </a:solidFill>
+                <a:latin typeface="Calibri" pitchFamily="34" charset="0"/>
+                <a:ea typeface="Calibri" pitchFamily="34" charset="-122"/>
+                <a:cs typeface="Calibri" pitchFamily="34" charset="-120"/>
+              </a:rPr>
+              <a:t>のべ来場者</a:t>
+            </a:r>
+            <a:pPr indent="0" marL="0">
+              <a:lnSpc>
+                <a:spcPct val="125000"/>
+              </a:lnSpc>
+              <a:buNone/>
+            </a:pPr>
+            <a:r>
+              <a:rPr lang="en-US" sz="1100" dirty="0">
+                <a:solidFill>
+                  <a:srgbClr val="222222"/>
+                </a:solidFill>
+                <a:latin typeface="Calibri" pitchFamily="34" charset="0"/>
+                <a:ea typeface="Calibri" pitchFamily="34" charset="-122"/>
+                <a:cs typeface="Calibri" pitchFamily="34" charset="-120"/>
+              </a:rPr>
+              <a:t>：回答ごとの人数を足した数（1組3人が3社回れば9人）。出展社への報告に使います</a:t>
+            </a:r>
+            <a:endParaRPr lang="en-US" sz="1100" dirty="0"/>
+          </a:p>
+        </p:txBody>
+      </p:sp>
+      <p:sp>
+        <p:nvSpPr>
+          <p:cNvPr id="7" name="Text 5"/>
+          <p:cNvSpPr txBox="1"/>
+          <p:nvPr/>
+        </p:nvSpPr>
+        <p:spPr>
+          <a:xfrm>
+            <a:off x="713232" y="2345055"/>
+            <a:ext cx="6281928" cy="257429"/>
+          </a:xfrm>
+          <a:prstGeom prst="rect">
+            <a:avLst/>
+          </a:prstGeom>
+          <a:noFill/>
+          <a:ln/>
+        </p:spPr>
+        <p:txBody>
+          <a:bodyPr wrap="square" lIns="0" tIns="0" rIns="0" bIns="0" rtlCol="0" anchor="t"/>
+          <a:lstStyle/>
+          <a:p>
+            <a:pPr marL="342900" indent="-342900">
+              <a:lnSpc>
+                <a:spcPct val="125000"/>
+              </a:lnSpc>
+              <a:buSzPct val="100000"/>
+              <a:buChar char="●"/>
+            </a:pPr>
+            <a:r>
+              <a:rPr lang="en-US" sz="1100" b="1" dirty="0">
+                <a:solidFill>
+                  <a:srgbClr val="222222"/>
+                </a:solidFill>
+                <a:latin typeface="Calibri" pitchFamily="34" charset="0"/>
+                <a:ea typeface="Calibri" pitchFamily="34" charset="-122"/>
+                <a:cs typeface="Calibri" pitchFamily="34" charset="-120"/>
+              </a:rPr>
+              <a:t>実来場者（推計）</a:t>
+            </a:r>
+            <a:pPr indent="0" marL="0">
+              <a:lnSpc>
+                <a:spcPct val="125000"/>
+              </a:lnSpc>
+              <a:buNone/>
+            </a:pPr>
+            <a:r>
+              <a:rPr lang="en-US" sz="1100" dirty="0">
+                <a:solidFill>
+                  <a:srgbClr val="222222"/>
+                </a:solidFill>
+                <a:latin typeface="Calibri" pitchFamily="34" charset="0"/>
+                <a:ea typeface="Calibri" pitchFamily="34" charset="-122"/>
+                <a:cs typeface="Calibri" pitchFamily="34" charset="-120"/>
+              </a:rPr>
+              <a:t>：同じ来場者を1回だけ数えた人数。会場に来た実人数の目安です</a:t>
+            </a:r>
+            <a:endParaRPr lang="en-US" sz="1100" dirty="0"/>
+          </a:p>
+        </p:txBody>
+      </p:sp>
+      <p:sp>
+        <p:nvSpPr>
+          <p:cNvPr id="8" name="Text 6"/>
+          <p:cNvSpPr txBox="1"/>
+          <p:nvPr/>
+        </p:nvSpPr>
+        <p:spPr>
+          <a:xfrm>
+            <a:off x="713232" y="2620772"/>
+            <a:ext cx="6281928" cy="257429"/>
+          </a:xfrm>
+          <a:prstGeom prst="rect">
+            <a:avLst/>
+          </a:prstGeom>
+          <a:noFill/>
+          <a:ln/>
+        </p:spPr>
+        <p:txBody>
+          <a:bodyPr wrap="square" lIns="0" tIns="0" rIns="0" bIns="0" rtlCol="0" anchor="t"/>
+          <a:lstStyle/>
+          <a:p>
+            <a:pPr marL="342900" indent="-342900">
+              <a:lnSpc>
+                <a:spcPct val="125000"/>
+              </a:lnSpc>
+              <a:buSzPct val="100000"/>
+              <a:buChar char="●"/>
+            </a:pPr>
+            <a:r>
+              <a:rPr lang="en-US" sz="1100" b="1" dirty="0">
+                <a:solidFill>
+                  <a:srgbClr val="222222"/>
+                </a:solidFill>
+                <a:latin typeface="Calibri" pitchFamily="34" charset="0"/>
+                <a:ea typeface="Calibri" pitchFamily="34" charset="-122"/>
+                <a:cs typeface="Calibri" pitchFamily="34" charset="-120"/>
+              </a:rPr>
+              <a:t>平均人数</a:t>
+            </a:r>
+            <a:pPr indent="0" marL="0">
+              <a:lnSpc>
+                <a:spcPct val="125000"/>
+              </a:lnSpc>
+              <a:buNone/>
+            </a:pPr>
+            <a:r>
+              <a:rPr lang="en-US" sz="1100" dirty="0">
+                <a:solidFill>
+                  <a:srgbClr val="222222"/>
+                </a:solidFill>
+                <a:latin typeface="Calibri" pitchFamily="34" charset="0"/>
+                <a:ea typeface="Calibri" pitchFamily="34" charset="-122"/>
+                <a:cs typeface="Calibri" pitchFamily="34" charset="-120"/>
+              </a:rPr>
+              <a:t>と</a:t>
+            </a:r>
+            <a:pPr indent="0" marL="0">
+              <a:lnSpc>
+                <a:spcPct val="125000"/>
+              </a:lnSpc>
+              <a:buNone/>
+            </a:pPr>
+            <a:r>
+              <a:rPr lang="en-US" sz="1100" b="1" dirty="0">
+                <a:solidFill>
+                  <a:srgbClr val="222222"/>
+                </a:solidFill>
+                <a:latin typeface="Calibri" pitchFamily="34" charset="0"/>
+                <a:ea typeface="Calibri" pitchFamily="34" charset="-122"/>
+                <a:cs typeface="Calibri" pitchFamily="34" charset="-120"/>
+              </a:rPr>
+              <a:t>回答率</a:t>
+            </a:r>
+            <a:pPr indent="0" marL="0">
+              <a:lnSpc>
+                <a:spcPct val="125000"/>
+              </a:lnSpc>
+              <a:buNone/>
+            </a:pPr>
+            <a:r>
+              <a:rPr lang="en-US" sz="1100" dirty="0">
+                <a:solidFill>
+                  <a:srgbClr val="222222"/>
+                </a:solidFill>
+                <a:latin typeface="Calibri" pitchFamily="34" charset="0"/>
+                <a:ea typeface="Calibri" pitchFamily="34" charset="-122"/>
+                <a:cs typeface="Calibri" pitchFamily="34" charset="-120"/>
+              </a:rPr>
+              <a:t>もあわせて表示されます</a:t>
+            </a:r>
+            <a:endParaRPr lang="en-US" sz="1100" dirty="0"/>
+          </a:p>
+        </p:txBody>
+      </p:sp>
+      <p:sp>
+        <p:nvSpPr>
+          <p:cNvPr id="9" name="Text 7"/>
+          <p:cNvSpPr txBox="1"/>
+          <p:nvPr/>
+        </p:nvSpPr>
+        <p:spPr>
+          <a:xfrm>
+            <a:off x="566928" y="2896489"/>
+            <a:ext cx="6428232" cy="257429"/>
+          </a:xfrm>
+          <a:prstGeom prst="rect">
+            <a:avLst/>
+          </a:prstGeom>
+          <a:noFill/>
+          <a:ln/>
+        </p:spPr>
+        <p:txBody>
+          <a:bodyPr wrap="square" lIns="0" tIns="0" rIns="0" bIns="0" rtlCol="0" anchor="t"/>
+          <a:lstStyle/>
+          <a:p>
+            <a:pPr indent="0" marL="0">
+              <a:lnSpc>
+                <a:spcPct val="125000"/>
+              </a:lnSpc>
+              <a:buNone/>
+            </a:pPr>
+            <a:r>
+              <a:rPr lang="en-US" sz="1100" dirty="0">
+                <a:solidFill>
+                  <a:srgbClr val="222222"/>
+                </a:solidFill>
+                <a:latin typeface="Calibri" pitchFamily="34" charset="0"/>
+                <a:ea typeface="Calibri" pitchFamily="34" charset="-122"/>
+                <a:cs typeface="Calibri" pitchFamily="34" charset="-120"/>
+              </a:rPr>
+              <a:t>来場者の画面では、人数は</a:t>
+            </a:r>
+            <a:pPr indent="0" marL="0">
+              <a:lnSpc>
+                <a:spcPct val="125000"/>
+              </a:lnSpc>
+              <a:buNone/>
+            </a:pPr>
+            <a:r>
+              <a:rPr lang="en-US" sz="1100" b="1" dirty="0">
+                <a:solidFill>
+                  <a:srgbClr val="222222"/>
+                </a:solidFill>
+                <a:latin typeface="Calibri" pitchFamily="34" charset="0"/>
+                <a:ea typeface="Calibri" pitchFamily="34" charset="-122"/>
+                <a:cs typeface="Calibri" pitchFamily="34" charset="-120"/>
+              </a:rPr>
+              <a:t>キーボードではなくプルダウンから選ぶ</a:t>
+            </a:r>
+            <a:pPr indent="0" marL="0">
+              <a:lnSpc>
+                <a:spcPct val="125000"/>
+              </a:lnSpc>
+              <a:buNone/>
+            </a:pPr>
+            <a:r>
+              <a:rPr lang="en-US" sz="1100" dirty="0">
+                <a:solidFill>
+                  <a:srgbClr val="222222"/>
+                </a:solidFill>
+                <a:latin typeface="Calibri" pitchFamily="34" charset="0"/>
+                <a:ea typeface="Calibri" pitchFamily="34" charset="-122"/>
+                <a:cs typeface="Calibri" pitchFamily="34" charset="-120"/>
+              </a:rPr>
+              <a:t>形になります。</a:t>
+            </a:r>
+            <a:endParaRPr lang="en-US" sz="1100" dirty="0"/>
+          </a:p>
+        </p:txBody>
+      </p:sp>
+      <p:sp>
+        <p:nvSpPr>
+          <p:cNvPr id="10" name="Text 8"/>
+          <p:cNvSpPr txBox="1"/>
+          <p:nvPr/>
+        </p:nvSpPr>
+        <p:spPr>
+          <a:xfrm>
+            <a:off x="566928" y="3190494"/>
+            <a:ext cx="6428232" cy="459994"/>
+          </a:xfrm>
+          <a:prstGeom prst="rect">
+            <a:avLst/>
+          </a:prstGeom>
+          <a:noFill/>
+          <a:ln/>
+        </p:spPr>
+        <p:txBody>
+          <a:bodyPr wrap="square" lIns="0" tIns="0" rIns="0" bIns="0" rtlCol="0" anchor="t"/>
+          <a:lstStyle/>
+          <a:p>
+            <a:pPr indent="0" marL="0">
+              <a:lnSpc>
+                <a:spcPct val="125000"/>
+              </a:lnSpc>
+              <a:buNone/>
+            </a:pPr>
+            <a:r>
+              <a:rPr lang="en-US" sz="1100" dirty="0">
+                <a:solidFill>
+                  <a:srgbClr val="222222"/>
+                </a:solidFill>
+                <a:latin typeface="Calibri" pitchFamily="34" charset="0"/>
+                <a:ea typeface="Calibri" pitchFamily="34" charset="-122"/>
+                <a:cs typeface="Calibri" pitchFamily="34" charset="-120"/>
+              </a:rPr>
+              <a:t>「1人」〜「9人」と「</a:t>
+            </a:r>
+            <a:pPr indent="0" marL="0">
+              <a:lnSpc>
+                <a:spcPct val="125000"/>
+              </a:lnSpc>
+              <a:buNone/>
+            </a:pPr>
+            <a:r>
+              <a:rPr lang="en-US" sz="1100" b="1" dirty="0">
+                <a:solidFill>
+                  <a:srgbClr val="222222"/>
+                </a:solidFill>
+                <a:latin typeface="Calibri" pitchFamily="34" charset="0"/>
+                <a:ea typeface="Calibri" pitchFamily="34" charset="-122"/>
+                <a:cs typeface="Calibri" pitchFamily="34" charset="-120"/>
+              </a:rPr>
+              <a:t>10人以上</a:t>
+            </a:r>
+            <a:pPr indent="0" marL="0">
+              <a:lnSpc>
+                <a:spcPct val="125000"/>
+              </a:lnSpc>
+              <a:buNone/>
+            </a:pPr>
+            <a:r>
+              <a:rPr lang="en-US" sz="1100" dirty="0">
+                <a:solidFill>
+                  <a:srgbClr val="222222"/>
+                </a:solidFill>
+                <a:latin typeface="Calibri" pitchFamily="34" charset="0"/>
+                <a:ea typeface="Calibri" pitchFamily="34" charset="-122"/>
+                <a:cs typeface="Calibri" pitchFamily="34" charset="-120"/>
+              </a:rPr>
+              <a:t>」が並び、「10人以上」は10人として集計します（多めには見積もりません）。</a:t>
+            </a:r>
+            <a:endParaRPr lang="en-US" sz="1100" dirty="0"/>
+          </a:p>
+        </p:txBody>
+      </p:sp>
+      <p:sp>
+        <p:nvSpPr>
+          <p:cNvPr id="11" name="Text 9"/>
+          <p:cNvSpPr txBox="1"/>
+          <p:nvPr/>
+        </p:nvSpPr>
+        <p:spPr>
+          <a:xfrm>
+            <a:off x="566928" y="3687064"/>
+            <a:ext cx="6428232" cy="257429"/>
+          </a:xfrm>
+          <a:prstGeom prst="rect">
+            <a:avLst/>
+          </a:prstGeom>
+          <a:noFill/>
+          <a:ln/>
+        </p:spPr>
+        <p:txBody>
+          <a:bodyPr wrap="square" lIns="0" tIns="0" rIns="0" bIns="0" rtlCol="0" anchor="t"/>
+          <a:lstStyle/>
+          <a:p>
+            <a:pPr indent="0" marL="0">
+              <a:lnSpc>
+                <a:spcPct val="125000"/>
+              </a:lnSpc>
+              <a:buNone/>
+            </a:pPr>
+            <a:r>
+              <a:rPr lang="en-US" sz="1100" dirty="0">
+                <a:solidFill>
+                  <a:srgbClr val="222222"/>
+                </a:solidFill>
+                <a:latin typeface="Calibri" pitchFamily="34" charset="0"/>
+                <a:ea typeface="Calibri" pitchFamily="34" charset="-122"/>
+                <a:cs typeface="Calibri" pitchFamily="34" charset="-120"/>
+              </a:rPr>
+              <a:t>上限の10は、サーバーの </a:t>
+            </a:r>
+            <a:pPr indent="0" marL="0">
+              <a:lnSpc>
+                <a:spcPct val="125000"/>
+              </a:lnSpc>
+              <a:buNone/>
+            </a:pPr>
+            <a:r>
+              <a:rPr lang="en-US" sz="1045" dirty="0">
+                <a:solidFill>
+                  <a:srgbClr val="222222"/>
+                </a:solidFill>
+                <a:latin typeface="Courier New" pitchFamily="34" charset="0"/>
+                <a:ea typeface="Courier New" pitchFamily="34" charset="-122"/>
+                <a:cs typeface="Courier New" pitchFamily="34" charset="-120"/>
+              </a:rPr>
+              <a:t>.env</a:t>
+            </a:r>
+            <a:pPr indent="0" marL="0">
+              <a:lnSpc>
+                <a:spcPct val="125000"/>
+              </a:lnSpc>
+              <a:buNone/>
+            </a:pPr>
+            <a:r>
+              <a:rPr lang="en-US" sz="1100" dirty="0">
+                <a:solidFill>
+                  <a:srgbClr val="222222"/>
+                </a:solidFill>
+                <a:latin typeface="Calibri" pitchFamily="34" charset="0"/>
+                <a:ea typeface="Calibri" pitchFamily="34" charset="-122"/>
+                <a:cs typeface="Calibri" pitchFamily="34" charset="-120"/>
+              </a:rPr>
+              <a:t> の </a:t>
+            </a:r>
+            <a:pPr indent="0" marL="0">
+              <a:lnSpc>
+                <a:spcPct val="125000"/>
+              </a:lnSpc>
+              <a:buNone/>
+            </a:pPr>
+            <a:r>
+              <a:rPr lang="en-US" sz="1045" dirty="0">
+                <a:solidFill>
+                  <a:srgbClr val="222222"/>
+                </a:solidFill>
+                <a:latin typeface="Courier New" pitchFamily="34" charset="0"/>
+                <a:ea typeface="Courier New" pitchFamily="34" charset="-122"/>
+                <a:cs typeface="Courier New" pitchFamily="34" charset="-120"/>
+              </a:rPr>
+              <a:t>PARTY_SIZE_MAX</a:t>
+            </a:r>
+            <a:pPr indent="0" marL="0">
+              <a:lnSpc>
+                <a:spcPct val="125000"/>
+              </a:lnSpc>
+              <a:buNone/>
+            </a:pPr>
+            <a:r>
+              <a:rPr lang="en-US" sz="1100" dirty="0">
+                <a:solidFill>
+                  <a:srgbClr val="222222"/>
+                </a:solidFill>
+                <a:latin typeface="Calibri" pitchFamily="34" charset="0"/>
+                <a:ea typeface="Calibri" pitchFamily="34" charset="-122"/>
+                <a:cs typeface="Calibri" pitchFamily="34" charset="-120"/>
+              </a:rPr>
+              <a:t> で変えられます。</a:t>
+            </a:r>
+            <a:endParaRPr lang="en-US" sz="1100" dirty="0"/>
           </a:p>
         </p:txBody>
       </p:sp>
       <p:pic>
         <p:nvPicPr>
-          <p:cNvPr id="4" name="Image 0" descr="C:\Users\sato\Desktop\enque\docs\images\o-party.png">    </p:cNvPr>
+          <p:cNvPr id="12" name="Image 0" descr="C:\Users\sato\Desktop\enque\docs\images\p-survey-number.png">    </p:cNvPr>
           <p:cNvPicPr>
             <a:picLocks noChangeAspect="1"/>
           </p:cNvPicPr>
@@ -7997,8 +7847,8 @@
         </p:blipFill>
         <p:spPr>
           <a:xfrm>
-            <a:off x="1082543" y="1481328"/>
-            <a:ext cx="5397003" cy="3474720"/>
+            <a:off x="2654866" y="3981069"/>
+            <a:ext cx="2252356" cy="3474720"/>
           </a:xfrm>
           <a:prstGeom prst="rect">
             <a:avLst/>
@@ -8007,13 +7857,13 @@
       </p:pic>
       <p:sp>
         <p:nvSpPr>
-          <p:cNvPr id="5" name="Text 2"/>
-          <p:cNvSpPr txBox="1"/>
-          <p:nvPr/>
-        </p:nvSpPr>
-        <p:spPr>
-          <a:xfrm>
-            <a:off x="566928" y="5010912"/>
+          <p:cNvPr id="13" name="Text 10"/>
+          <p:cNvSpPr txBox="1"/>
+          <p:nvPr/>
+        </p:nvSpPr>
+        <p:spPr>
+          <a:xfrm>
+            <a:off x="566928" y="7510653"/>
             <a:ext cx="6428232" cy="274320"/>
           </a:xfrm>
           <a:prstGeom prst="rect">
@@ -8038,7 +7888,7 @@
                 <a:ea typeface="Calibri" pitchFamily="34" charset="-122"/>
                 <a:cs typeface="Calibri" pitchFamily="34" charset="-120"/>
               </a:rPr>
-              <a:t>「回答者の傾向」画面の来場人数のところ（のべ来場者・実来場者・回答率と人数の分布）。</a:t>
+              <a:t>来場者のアンケート画面の「何人で来られましたか」。人数のプルダウンを開いた状態。</a:t>
             </a:r>
             <a:endParaRPr lang="en-US" sz="950" dirty="0"/>
           </a:p>
@@ -8046,7 +7896,399 @@
       </p:sp>
       <p:sp>
         <p:nvSpPr>
-          <p:cNvPr id="6" name="Text 3"/>
+          <p:cNvPr id="14" name="Shape 11"/>
+          <p:cNvSpPr/>
+          <p:nvPr/>
+        </p:nvSpPr>
+        <p:spPr>
+          <a:xfrm>
+            <a:off x="566928" y="7839837"/>
+            <a:ext cx="6428232" cy="431102"/>
+          </a:xfrm>
+          <a:prstGeom prst="roundRect">
+            <a:avLst>
+              <a:gd name="adj" fmla="val 12726"/>
+            </a:avLst>
+          </a:prstGeom>
+          <a:solidFill>
+            <a:srgbClr val="E8ECF8"/>
+          </a:solidFill>
+          <a:ln w="9525">
+            <a:solidFill>
+              <a:srgbClr val="1E2761"/>
+            </a:solidFill>
+            <a:prstDash val="solid"/>
+          </a:ln>
+        </p:spPr>
+      </p:sp>
+      <p:sp>
+        <p:nvSpPr>
+          <p:cNvPr id="15" name="Text 12"/>
+          <p:cNvSpPr txBox="1"/>
+          <p:nvPr/>
+        </p:nvSpPr>
+        <p:spPr>
+          <a:xfrm>
+            <a:off x="658368" y="7931277"/>
+            <a:ext cx="237744" cy="237744"/>
+          </a:xfrm>
+          <a:prstGeom prst="rect">
+            <a:avLst/>
+          </a:prstGeom>
+          <a:noFill/>
+          <a:ln/>
+        </p:spPr>
+        <p:txBody>
+          <a:bodyPr wrap="square" lIns="0" tIns="0" rIns="0" bIns="0" rtlCol="0" anchor="ctr"/>
+          <a:lstStyle/>
+          <a:p>
+            <a:pPr algn="ctr" indent="0" marL="0">
+              <a:buNone/>
+            </a:pPr>
+            <a:r>
+              <a:rPr lang="en-US" sz="1200" b="1" dirty="0">
+                <a:solidFill>
+                  <a:srgbClr val="1E2761"/>
+                </a:solidFill>
+                <a:latin typeface="Calibri" pitchFamily="34" charset="0"/>
+                <a:ea typeface="Calibri" pitchFamily="34" charset="-122"/>
+                <a:cs typeface="Calibri" pitchFamily="34" charset="-120"/>
+              </a:rPr>
+              <a:t>i</a:t>
+            </a:r>
+            <a:endParaRPr lang="en-US" sz="1200" dirty="0"/>
+          </a:p>
+        </p:txBody>
+      </p:sp>
+      <p:sp>
+        <p:nvSpPr>
+          <p:cNvPr id="16" name="Text 13"/>
+          <p:cNvSpPr txBox="1"/>
+          <p:nvPr/>
+        </p:nvSpPr>
+        <p:spPr>
+          <a:xfrm>
+            <a:off x="950976" y="7949565"/>
+            <a:ext cx="5925312" cy="248221"/>
+          </a:xfrm>
+          <a:prstGeom prst="rect">
+            <a:avLst/>
+          </a:prstGeom>
+          <a:noFill/>
+          <a:ln/>
+        </p:spPr>
+        <p:txBody>
+          <a:bodyPr wrap="square" lIns="0" tIns="0" rIns="0" bIns="0" rtlCol="0" anchor="t"/>
+          <a:lstStyle/>
+          <a:p>
+            <a:pPr indent="0" marL="0">
+              <a:lnSpc>
+                <a:spcPct val="120000"/>
+              </a:lnSpc>
+              <a:buNone/>
+            </a:pPr>
+            <a:r>
+              <a:rPr lang="en-US" sz="1050" dirty="0">
+                <a:solidFill>
+                  <a:srgbClr val="222222"/>
+                </a:solidFill>
+                <a:latin typeface="Calibri" pitchFamily="34" charset="0"/>
+                <a:ea typeface="Calibri" pitchFamily="34" charset="-122"/>
+                <a:cs typeface="Calibri" pitchFamily="34" charset="-120"/>
+              </a:rPr>
+              <a:t>人数は</a:t>
+            </a:r>
+            <a:pPr indent="0" marL="0">
+              <a:lnSpc>
+                <a:spcPct val="120000"/>
+              </a:lnSpc>
+              <a:buNone/>
+            </a:pPr>
+            <a:r>
+              <a:rPr lang="en-US" sz="1050" b="1" dirty="0">
+                <a:solidFill>
+                  <a:srgbClr val="222222"/>
+                </a:solidFill>
+                <a:latin typeface="Calibri" pitchFamily="34" charset="0"/>
+                <a:ea typeface="Calibri" pitchFamily="34" charset="-122"/>
+                <a:cs typeface="Calibri" pitchFamily="34" charset="-120"/>
+              </a:rPr>
+              <a:t>任意回答</a:t>
+            </a:r>
+            <a:pPr indent="0" marL="0">
+              <a:lnSpc>
+                <a:spcPct val="120000"/>
+              </a:lnSpc>
+              <a:buNone/>
+            </a:pPr>
+            <a:r>
+              <a:rPr lang="en-US" sz="1050" dirty="0">
+                <a:solidFill>
+                  <a:srgbClr val="222222"/>
+                </a:solidFill>
+                <a:latin typeface="Calibri" pitchFamily="34" charset="0"/>
+                <a:ea typeface="Calibri" pitchFamily="34" charset="-122"/>
+                <a:cs typeface="Calibri" pitchFamily="34" charset="-120"/>
+              </a:rPr>
+              <a:t>です。2社目以降は、前の企業で答えた人数が初期値として入るので、来場者は</a:t>
+            </a:r>
+            <a:endParaRPr lang="en-US" sz="1050" dirty="0"/>
+          </a:p>
+        </p:txBody>
+      </p:sp>
+      <p:sp>
+        <p:nvSpPr>
+          <p:cNvPr id="17" name="Shape 14"/>
+          <p:cNvSpPr/>
+          <p:nvPr/>
+        </p:nvSpPr>
+        <p:spPr>
+          <a:xfrm>
+            <a:off x="566928" y="8344091"/>
+            <a:ext cx="6428232" cy="431102"/>
+          </a:xfrm>
+          <a:prstGeom prst="roundRect">
+            <a:avLst>
+              <a:gd name="adj" fmla="val 12726"/>
+            </a:avLst>
+          </a:prstGeom>
+          <a:solidFill>
+            <a:srgbClr val="E8ECF8"/>
+          </a:solidFill>
+          <a:ln w="9525">
+            <a:solidFill>
+              <a:srgbClr val="1E2761"/>
+            </a:solidFill>
+            <a:prstDash val="solid"/>
+          </a:ln>
+        </p:spPr>
+      </p:sp>
+      <p:sp>
+        <p:nvSpPr>
+          <p:cNvPr id="18" name="Text 15"/>
+          <p:cNvSpPr txBox="1"/>
+          <p:nvPr/>
+        </p:nvSpPr>
+        <p:spPr>
+          <a:xfrm>
+            <a:off x="658368" y="8435531"/>
+            <a:ext cx="237744" cy="237744"/>
+          </a:xfrm>
+          <a:prstGeom prst="rect">
+            <a:avLst/>
+          </a:prstGeom>
+          <a:noFill/>
+          <a:ln/>
+        </p:spPr>
+        <p:txBody>
+          <a:bodyPr wrap="square" lIns="0" tIns="0" rIns="0" bIns="0" rtlCol="0" anchor="ctr"/>
+          <a:lstStyle/>
+          <a:p>
+            <a:pPr algn="ctr" indent="0" marL="0">
+              <a:buNone/>
+            </a:pPr>
+            <a:r>
+              <a:rPr lang="en-US" sz="1200" b="1" dirty="0">
+                <a:solidFill>
+                  <a:srgbClr val="1E2761"/>
+                </a:solidFill>
+                <a:latin typeface="Calibri" pitchFamily="34" charset="0"/>
+                <a:ea typeface="Calibri" pitchFamily="34" charset="-122"/>
+                <a:cs typeface="Calibri" pitchFamily="34" charset="-120"/>
+              </a:rPr>
+              <a:t>i</a:t>
+            </a:r>
+            <a:endParaRPr lang="en-US" sz="1200" dirty="0"/>
+          </a:p>
+        </p:txBody>
+      </p:sp>
+      <p:sp>
+        <p:nvSpPr>
+          <p:cNvPr id="19" name="Text 16"/>
+          <p:cNvSpPr txBox="1"/>
+          <p:nvPr/>
+        </p:nvSpPr>
+        <p:spPr>
+          <a:xfrm>
+            <a:off x="950976" y="8453819"/>
+            <a:ext cx="5925312" cy="248221"/>
+          </a:xfrm>
+          <a:prstGeom prst="rect">
+            <a:avLst/>
+          </a:prstGeom>
+          <a:noFill/>
+          <a:ln/>
+        </p:spPr>
+        <p:txBody>
+          <a:bodyPr wrap="square" lIns="0" tIns="0" rIns="0" bIns="0" rtlCol="0" anchor="t"/>
+          <a:lstStyle/>
+          <a:p>
+            <a:pPr indent="0" marL="0">
+              <a:lnSpc>
+                <a:spcPct val="120000"/>
+              </a:lnSpc>
+              <a:buNone/>
+            </a:pPr>
+            <a:r>
+              <a:rPr lang="en-US" sz="1050" dirty="0">
+                <a:solidFill>
+                  <a:srgbClr val="222222"/>
+                </a:solidFill>
+                <a:latin typeface="Calibri" pitchFamily="34" charset="0"/>
+                <a:ea typeface="Calibri" pitchFamily="34" charset="-122"/>
+                <a:cs typeface="Calibri" pitchFamily="34" charset="-120"/>
+              </a:rPr>
+              <a:t>そのまま送信できます。未回答のぶんは、同じ来場者の別の回答などから補って計算します。</a:t>
+            </a:r>
+            <a:endParaRPr lang="en-US" sz="1050" dirty="0"/>
+          </a:p>
+        </p:txBody>
+      </p:sp>
+      <p:sp>
+        <p:nvSpPr>
+          <p:cNvPr id="20" name="Shape 17"/>
+          <p:cNvSpPr/>
+          <p:nvPr/>
+        </p:nvSpPr>
+        <p:spPr>
+          <a:xfrm>
+            <a:off x="566928" y="8848344"/>
+            <a:ext cx="6428232" cy="431102"/>
+          </a:xfrm>
+          <a:prstGeom prst="roundRect">
+            <a:avLst>
+              <a:gd name="adj" fmla="val 12726"/>
+            </a:avLst>
+          </a:prstGeom>
+          <a:solidFill>
+            <a:srgbClr val="FDF0E6"/>
+          </a:solidFill>
+          <a:ln w="9525">
+            <a:solidFill>
+              <a:srgbClr val="E08A3C"/>
+            </a:solidFill>
+            <a:prstDash val="solid"/>
+          </a:ln>
+        </p:spPr>
+      </p:sp>
+      <p:sp>
+        <p:nvSpPr>
+          <p:cNvPr id="21" name="Text 18"/>
+          <p:cNvSpPr txBox="1"/>
+          <p:nvPr/>
+        </p:nvSpPr>
+        <p:spPr>
+          <a:xfrm>
+            <a:off x="658368" y="8939784"/>
+            <a:ext cx="237744" cy="237744"/>
+          </a:xfrm>
+          <a:prstGeom prst="rect">
+            <a:avLst/>
+          </a:prstGeom>
+          <a:noFill/>
+          <a:ln/>
+        </p:spPr>
+        <p:txBody>
+          <a:bodyPr wrap="square" lIns="0" tIns="0" rIns="0" bIns="0" rtlCol="0" anchor="ctr"/>
+          <a:lstStyle/>
+          <a:p>
+            <a:pPr algn="ctr" indent="0" marL="0">
+              <a:buNone/>
+            </a:pPr>
+            <a:r>
+              <a:rPr lang="en-US" sz="1200" b="1" dirty="0">
+                <a:solidFill>
+                  <a:srgbClr val="C25A17"/>
+                </a:solidFill>
+                <a:latin typeface="Calibri" pitchFamily="34" charset="0"/>
+                <a:ea typeface="Calibri" pitchFamily="34" charset="-122"/>
+                <a:cs typeface="Calibri" pitchFamily="34" charset="-120"/>
+              </a:rPr>
+              <a:t>！</a:t>
+            </a:r>
+            <a:endParaRPr lang="en-US" sz="1200" dirty="0"/>
+          </a:p>
+        </p:txBody>
+      </p:sp>
+      <p:sp>
+        <p:nvSpPr>
+          <p:cNvPr id="22" name="Text 19"/>
+          <p:cNvSpPr txBox="1"/>
+          <p:nvPr/>
+        </p:nvSpPr>
+        <p:spPr>
+          <a:xfrm>
+            <a:off x="950976" y="8958072"/>
+            <a:ext cx="5925312" cy="248221"/>
+          </a:xfrm>
+          <a:prstGeom prst="rect">
+            <a:avLst/>
+          </a:prstGeom>
+          <a:noFill/>
+          <a:ln/>
+        </p:spPr>
+        <p:txBody>
+          <a:bodyPr wrap="square" lIns="0" tIns="0" rIns="0" bIns="0" rtlCol="0" anchor="t"/>
+          <a:lstStyle/>
+          <a:p>
+            <a:pPr indent="0" marL="0">
+              <a:lnSpc>
+                <a:spcPct val="120000"/>
+              </a:lnSpc>
+              <a:buNone/>
+            </a:pPr>
+            <a:r>
+              <a:rPr lang="en-US" sz="1050" dirty="0">
+                <a:solidFill>
+                  <a:srgbClr val="222222"/>
+                </a:solidFill>
+                <a:latin typeface="Calibri" pitchFamily="34" charset="0"/>
+                <a:ea typeface="Calibri" pitchFamily="34" charset="-122"/>
+                <a:cs typeface="Calibri" pitchFamily="34" charset="-120"/>
+              </a:rPr>
+              <a:t>人数の設問は</a:t>
+            </a:r>
+            <a:pPr indent="0" marL="0">
+              <a:lnSpc>
+                <a:spcPct val="120000"/>
+              </a:lnSpc>
+              <a:buNone/>
+            </a:pPr>
+            <a:r>
+              <a:rPr lang="en-US" sz="1050" b="1" dirty="0">
+                <a:solidFill>
+                  <a:srgbClr val="222222"/>
+                </a:solidFill>
+                <a:latin typeface="Calibri" pitchFamily="34" charset="0"/>
+                <a:ea typeface="Calibri" pitchFamily="34" charset="-122"/>
+                <a:cs typeface="Calibri" pitchFamily="34" charset="-120"/>
+              </a:rPr>
+              <a:t>共通設問テンプレート</a:t>
+            </a:r>
+            <a:pPr indent="0" marL="0">
+              <a:lnSpc>
+                <a:spcPct val="120000"/>
+              </a:lnSpc>
+              <a:buNone/>
+            </a:pPr>
+            <a:r>
+              <a:rPr lang="en-US" sz="1050" dirty="0">
+                <a:solidFill>
+                  <a:srgbClr val="222222"/>
+                </a:solidFill>
+                <a:latin typeface="Calibri" pitchFamily="34" charset="0"/>
+                <a:ea typeface="Calibri" pitchFamily="34" charset="-122"/>
+                <a:cs typeface="Calibri" pitchFamily="34" charset="-120"/>
+              </a:rPr>
+              <a:t>に入れて全社に取り込むと、聞き方と集計が揃います。</a:t>
+            </a:r>
+            <a:endParaRPr lang="en-US" sz="1050" dirty="0"/>
+          </a:p>
+        </p:txBody>
+      </p:sp>
+      <p:sp>
+        <p:nvSpPr>
+          <p:cNvPr id="23" name="Text 20"/>
           <p:cNvSpPr txBox="1"/>
           <p:nvPr/>
         </p:nvSpPr>
@@ -8187,636 +8429,15 @@
                 <a:ea typeface="Calibri" pitchFamily="34" charset="-122"/>
                 <a:cs typeface="Calibri" pitchFamily="34" charset="-120"/>
               </a:rPr>
-              <a:t>終了後1：受付を締めて総合アンケートを用意する</a:t>
+              <a:t>当日：来場人数を集計する（つづき）</a:t>
             </a:r>
             <a:endParaRPr lang="en-US" sz="2200" dirty="0"/>
-          </a:p>
-        </p:txBody>
-      </p:sp>
-      <p:sp>
-        <p:nvSpPr>
-          <p:cNvPr id="4" name="Shape 2"/>
-          <p:cNvSpPr/>
-          <p:nvPr/>
-        </p:nvSpPr>
-        <p:spPr>
-          <a:xfrm>
-            <a:off x="566928" y="1499616"/>
-            <a:ext cx="274320" cy="274320"/>
-          </a:xfrm>
-          <a:prstGeom prst="ellipse">
-            <a:avLst/>
-          </a:prstGeom>
-          <a:solidFill>
-            <a:srgbClr val="1E2761"/>
-          </a:solidFill>
-          <a:ln/>
-        </p:spPr>
-      </p:sp>
-      <p:sp>
-        <p:nvSpPr>
-          <p:cNvPr id="5" name="Text 3"/>
-          <p:cNvSpPr txBox="1"/>
-          <p:nvPr/>
-        </p:nvSpPr>
-        <p:spPr>
-          <a:xfrm>
-            <a:off x="566928" y="1499616"/>
-            <a:ext cx="274320" cy="274320"/>
-          </a:xfrm>
-          <a:prstGeom prst="rect">
-            <a:avLst/>
-          </a:prstGeom>
-          <a:noFill/>
-          <a:ln/>
-        </p:spPr>
-        <p:txBody>
-          <a:bodyPr wrap="square" lIns="0" tIns="0" rIns="0" bIns="0" rtlCol="0" anchor="ctr"/>
-          <a:lstStyle/>
-          <a:p>
-            <a:pPr algn="ctr" indent="0" marL="0">
-              <a:buNone/>
-            </a:pPr>
-            <a:r>
-              <a:rPr lang="en-US" sz="1100" b="1" dirty="0">
-                <a:solidFill>
-                  <a:srgbClr val="FFFFFF"/>
-                </a:solidFill>
-                <a:latin typeface="Calibri" pitchFamily="34" charset="0"/>
-                <a:ea typeface="Calibri" pitchFamily="34" charset="-122"/>
-                <a:cs typeface="Calibri" pitchFamily="34" charset="-120"/>
-              </a:rPr>
-              <a:t>1</a:t>
-            </a:r>
-            <a:endParaRPr lang="en-US" sz="1100" dirty="0"/>
-          </a:p>
-        </p:txBody>
-      </p:sp>
-      <p:sp>
-        <p:nvSpPr>
-          <p:cNvPr id="6" name="Text 4"/>
-          <p:cNvSpPr txBox="1"/>
-          <p:nvPr/>
-        </p:nvSpPr>
-        <p:spPr>
-          <a:xfrm>
-            <a:off x="969264" y="1481328"/>
-            <a:ext cx="6025896" cy="365760"/>
-          </a:xfrm>
-          <a:prstGeom prst="rect">
-            <a:avLst/>
-          </a:prstGeom>
-          <a:noFill/>
-          <a:ln/>
-        </p:spPr>
-        <p:txBody>
-          <a:bodyPr wrap="square" lIns="0" tIns="0" rIns="0" bIns="0" rtlCol="0" anchor="t"/>
-          <a:lstStyle/>
-          <a:p>
-            <a:pPr indent="0" marL="0">
-              <a:lnSpc>
-                <a:spcPct val="125000"/>
-              </a:lnSpc>
-              <a:buNone/>
-            </a:pPr>
-            <a:r>
-              <a:rPr lang="en-US" sz="1150" dirty="0">
-                <a:solidFill>
-                  <a:srgbClr val="222222"/>
-                </a:solidFill>
-                <a:latin typeface="Calibri" pitchFamily="34" charset="0"/>
-                <a:ea typeface="Calibri" pitchFamily="34" charset="-122"/>
-                <a:cs typeface="Calibri" pitchFamily="34" charset="-120"/>
-              </a:rPr>
-              <a:t>ダッシュボードの「イベント設定」で、状態を</a:t>
-            </a:r>
-            <a:pPr indent="0" marL="0">
-              <a:lnSpc>
-                <a:spcPct val="125000"/>
-              </a:lnSpc>
-              <a:buNone/>
-            </a:pPr>
-            <a:r>
-              <a:rPr lang="en-US" sz="1150" b="1" dirty="0">
-                <a:solidFill>
-                  <a:srgbClr val="222222"/>
-                </a:solidFill>
-                <a:latin typeface="Calibri" pitchFamily="34" charset="0"/>
-                <a:ea typeface="Calibri" pitchFamily="34" charset="-122"/>
-                <a:cs typeface="Calibri" pitchFamily="34" charset="-120"/>
-              </a:rPr>
-              <a:t>「終了（総合アンケート送付）」</a:t>
-            </a:r>
-            <a:pPr indent="0" marL="0">
-              <a:lnSpc>
-                <a:spcPct val="125000"/>
-              </a:lnSpc>
-              <a:buNone/>
-            </a:pPr>
-            <a:r>
-              <a:rPr lang="en-US" sz="1150" dirty="0">
-                <a:solidFill>
-                  <a:srgbClr val="222222"/>
-                </a:solidFill>
-                <a:latin typeface="Calibri" pitchFamily="34" charset="0"/>
-                <a:ea typeface="Calibri" pitchFamily="34" charset="-122"/>
-                <a:cs typeface="Calibri" pitchFamily="34" charset="-120"/>
-              </a:rPr>
-              <a:t>に変える</a:t>
-            </a:r>
-            <a:endParaRPr lang="en-US" sz="1150" dirty="0"/>
-          </a:p>
-        </p:txBody>
-      </p:sp>
-      <p:sp>
-        <p:nvSpPr>
-          <p:cNvPr id="7" name="Shape 5"/>
-          <p:cNvSpPr/>
-          <p:nvPr/>
-        </p:nvSpPr>
-        <p:spPr>
-          <a:xfrm>
-            <a:off x="566928" y="1956816"/>
-            <a:ext cx="274320" cy="274320"/>
-          </a:xfrm>
-          <a:prstGeom prst="ellipse">
-            <a:avLst/>
-          </a:prstGeom>
-          <a:solidFill>
-            <a:srgbClr val="1E2761"/>
-          </a:solidFill>
-          <a:ln/>
-        </p:spPr>
-      </p:sp>
-      <p:sp>
-        <p:nvSpPr>
-          <p:cNvPr id="8" name="Text 6"/>
-          <p:cNvSpPr txBox="1"/>
-          <p:nvPr/>
-        </p:nvSpPr>
-        <p:spPr>
-          <a:xfrm>
-            <a:off x="566928" y="1956816"/>
-            <a:ext cx="274320" cy="274320"/>
-          </a:xfrm>
-          <a:prstGeom prst="rect">
-            <a:avLst/>
-          </a:prstGeom>
-          <a:noFill/>
-          <a:ln/>
-        </p:spPr>
-        <p:txBody>
-          <a:bodyPr wrap="square" lIns="0" tIns="0" rIns="0" bIns="0" rtlCol="0" anchor="ctr"/>
-          <a:lstStyle/>
-          <a:p>
-            <a:pPr algn="ctr" indent="0" marL="0">
-              <a:buNone/>
-            </a:pPr>
-            <a:r>
-              <a:rPr lang="en-US" sz="1100" b="1" dirty="0">
-                <a:solidFill>
-                  <a:srgbClr val="FFFFFF"/>
-                </a:solidFill>
-                <a:latin typeface="Calibri" pitchFamily="34" charset="0"/>
-                <a:ea typeface="Calibri" pitchFamily="34" charset="-122"/>
-                <a:cs typeface="Calibri" pitchFamily="34" charset="-120"/>
-              </a:rPr>
-              <a:t>2</a:t>
-            </a:r>
-            <a:endParaRPr lang="en-US" sz="1100" dirty="0"/>
-          </a:p>
-        </p:txBody>
-      </p:sp>
-      <p:sp>
-        <p:nvSpPr>
-          <p:cNvPr id="9" name="Text 7"/>
-          <p:cNvSpPr txBox="1"/>
-          <p:nvPr/>
-        </p:nvSpPr>
-        <p:spPr>
-          <a:xfrm>
-            <a:off x="969264" y="1938528"/>
-            <a:ext cx="6025896" cy="365760"/>
-          </a:xfrm>
-          <a:prstGeom prst="rect">
-            <a:avLst/>
-          </a:prstGeom>
-          <a:noFill/>
-          <a:ln/>
-        </p:spPr>
-        <p:txBody>
-          <a:bodyPr wrap="square" lIns="0" tIns="0" rIns="0" bIns="0" rtlCol="0" anchor="t"/>
-          <a:lstStyle/>
-          <a:p>
-            <a:pPr indent="0" marL="0">
-              <a:lnSpc>
-                <a:spcPct val="125000"/>
-              </a:lnSpc>
-              <a:buNone/>
-            </a:pPr>
-            <a:r>
-              <a:rPr lang="en-US" sz="1150" dirty="0">
-                <a:solidFill>
-                  <a:srgbClr val="222222"/>
-                </a:solidFill>
-                <a:latin typeface="Calibri" pitchFamily="34" charset="0"/>
-                <a:ea typeface="Calibri" pitchFamily="34" charset="-122"/>
-                <a:cs typeface="Calibri" pitchFamily="34" charset="-120"/>
-              </a:rPr>
-              <a:t>「総合アンケート」の画面で</a:t>
-            </a:r>
-            <a:pPr indent="0" marL="0">
-              <a:lnSpc>
-                <a:spcPct val="125000"/>
-              </a:lnSpc>
-              <a:buNone/>
-            </a:pPr>
-            <a:r>
-              <a:rPr lang="en-US" sz="1150" b="1" dirty="0">
-                <a:solidFill>
-                  <a:srgbClr val="222222"/>
-                </a:solidFill>
-                <a:latin typeface="Calibri" pitchFamily="34" charset="0"/>
-                <a:ea typeface="Calibri" pitchFamily="34" charset="-122"/>
-                <a:cs typeface="Calibri" pitchFamily="34" charset="-120"/>
-              </a:rPr>
-              <a:t>「総合アンケートを作成する」</a:t>
-            </a:r>
-            <a:pPr indent="0" marL="0">
-              <a:lnSpc>
-                <a:spcPct val="125000"/>
-              </a:lnSpc>
-              <a:buNone/>
-            </a:pPr>
-            <a:r>
-              <a:rPr lang="en-US" sz="1150" dirty="0">
-                <a:solidFill>
-                  <a:srgbClr val="222222"/>
-                </a:solidFill>
-                <a:latin typeface="Calibri" pitchFamily="34" charset="0"/>
-                <a:ea typeface="Calibri" pitchFamily="34" charset="-122"/>
-                <a:cs typeface="Calibri" pitchFamily="34" charset="-120"/>
-              </a:rPr>
-              <a:t>を押す</a:t>
-            </a:r>
-            <a:endParaRPr lang="en-US" sz="1150" dirty="0"/>
-          </a:p>
-        </p:txBody>
-      </p:sp>
-      <p:sp>
-        <p:nvSpPr>
-          <p:cNvPr id="10" name="Shape 8"/>
-          <p:cNvSpPr/>
-          <p:nvPr/>
-        </p:nvSpPr>
-        <p:spPr>
-          <a:xfrm>
-            <a:off x="566928" y="2414016"/>
-            <a:ext cx="274320" cy="274320"/>
-          </a:xfrm>
-          <a:prstGeom prst="ellipse">
-            <a:avLst/>
-          </a:prstGeom>
-          <a:solidFill>
-            <a:srgbClr val="1E2761"/>
-          </a:solidFill>
-          <a:ln/>
-        </p:spPr>
-      </p:sp>
-      <p:sp>
-        <p:nvSpPr>
-          <p:cNvPr id="11" name="Text 9"/>
-          <p:cNvSpPr txBox="1"/>
-          <p:nvPr/>
-        </p:nvSpPr>
-        <p:spPr>
-          <a:xfrm>
-            <a:off x="566928" y="2414016"/>
-            <a:ext cx="274320" cy="274320"/>
-          </a:xfrm>
-          <a:prstGeom prst="rect">
-            <a:avLst/>
-          </a:prstGeom>
-          <a:noFill/>
-          <a:ln/>
-        </p:spPr>
-        <p:txBody>
-          <a:bodyPr wrap="square" lIns="0" tIns="0" rIns="0" bIns="0" rtlCol="0" anchor="ctr"/>
-          <a:lstStyle/>
-          <a:p>
-            <a:pPr algn="ctr" indent="0" marL="0">
-              <a:buNone/>
-            </a:pPr>
-            <a:r>
-              <a:rPr lang="en-US" sz="1100" b="1" dirty="0">
-                <a:solidFill>
-                  <a:srgbClr val="FFFFFF"/>
-                </a:solidFill>
-                <a:latin typeface="Calibri" pitchFamily="34" charset="0"/>
-                <a:ea typeface="Calibri" pitchFamily="34" charset="-122"/>
-                <a:cs typeface="Calibri" pitchFamily="34" charset="-120"/>
-              </a:rPr>
-              <a:t>3</a:t>
-            </a:r>
-            <a:endParaRPr lang="en-US" sz="1100" dirty="0"/>
-          </a:p>
-        </p:txBody>
-      </p:sp>
-      <p:sp>
-        <p:nvSpPr>
-          <p:cNvPr id="12" name="Text 10"/>
-          <p:cNvSpPr txBox="1"/>
-          <p:nvPr/>
-        </p:nvSpPr>
-        <p:spPr>
-          <a:xfrm>
-            <a:off x="969264" y="2395728"/>
-            <a:ext cx="6025896" cy="365760"/>
-          </a:xfrm>
-          <a:prstGeom prst="rect">
-            <a:avLst/>
-          </a:prstGeom>
-          <a:noFill/>
-          <a:ln/>
-        </p:spPr>
-        <p:txBody>
-          <a:bodyPr wrap="square" lIns="0" tIns="0" rIns="0" bIns="0" rtlCol="0" anchor="t"/>
-          <a:lstStyle/>
-          <a:p>
-            <a:pPr indent="0" marL="0">
-              <a:lnSpc>
-                <a:spcPct val="125000"/>
-              </a:lnSpc>
-              <a:buNone/>
-            </a:pPr>
-            <a:r>
-              <a:rPr lang="en-US" sz="1150" dirty="0">
-                <a:solidFill>
-                  <a:srgbClr val="222222"/>
-                </a:solidFill>
-                <a:latin typeface="Calibri" pitchFamily="34" charset="0"/>
-                <a:ea typeface="Calibri" pitchFamily="34" charset="-122"/>
-                <a:cs typeface="Calibri" pitchFamily="34" charset="-120"/>
-              </a:rPr>
-              <a:t>設問を登録し、</a:t>
-            </a:r>
-            <a:pPr indent="0" marL="0">
-              <a:lnSpc>
-                <a:spcPct val="125000"/>
-              </a:lnSpc>
-              <a:buNone/>
-            </a:pPr>
-            <a:r>
-              <a:rPr lang="en-US" sz="1150" b="1" dirty="0">
-                <a:solidFill>
-                  <a:srgbClr val="222222"/>
-                </a:solidFill>
-                <a:latin typeface="Calibri" pitchFamily="34" charset="0"/>
-                <a:ea typeface="Calibri" pitchFamily="34" charset="-122"/>
-                <a:cs typeface="Calibri" pitchFamily="34" charset="-120"/>
-              </a:rPr>
-              <a:t>「公開する」にチェックを入れて保存</a:t>
-            </a:r>
-            <a:pPr indent="0" marL="0">
-              <a:lnSpc>
-                <a:spcPct val="125000"/>
-              </a:lnSpc>
-              <a:buNone/>
-            </a:pPr>
-            <a:r>
-              <a:rPr lang="en-US" sz="1150" dirty="0">
-                <a:solidFill>
-                  <a:srgbClr val="222222"/>
-                </a:solidFill>
-                <a:latin typeface="Calibri" pitchFamily="34" charset="0"/>
-                <a:ea typeface="Calibri" pitchFamily="34" charset="-122"/>
-                <a:cs typeface="Calibri" pitchFamily="34" charset="-120"/>
-              </a:rPr>
-              <a:t>する</a:t>
-            </a:r>
-            <a:endParaRPr lang="en-US" sz="1150" dirty="0"/>
-          </a:p>
-        </p:txBody>
-      </p:sp>
-      <p:sp>
-        <p:nvSpPr>
-          <p:cNvPr id="13" name="Shape 11"/>
-          <p:cNvSpPr/>
-          <p:nvPr/>
-        </p:nvSpPr>
-        <p:spPr>
-          <a:xfrm>
-            <a:off x="566928" y="2852928"/>
-            <a:ext cx="6428232" cy="624459"/>
-          </a:xfrm>
-          <a:prstGeom prst="roundRect">
-            <a:avLst>
-              <a:gd name="adj" fmla="val 8786"/>
-            </a:avLst>
-          </a:prstGeom>
-          <a:solidFill>
-            <a:srgbClr val="E8ECF8"/>
-          </a:solidFill>
-          <a:ln w="9525">
-            <a:solidFill>
-              <a:srgbClr val="1E2761"/>
-            </a:solidFill>
-            <a:prstDash val="solid"/>
-          </a:ln>
-        </p:spPr>
-      </p:sp>
-      <p:sp>
-        <p:nvSpPr>
-          <p:cNvPr id="14" name="Text 12"/>
-          <p:cNvSpPr txBox="1"/>
-          <p:nvPr/>
-        </p:nvSpPr>
-        <p:spPr>
-          <a:xfrm>
-            <a:off x="658368" y="2944368"/>
-            <a:ext cx="237744" cy="237744"/>
-          </a:xfrm>
-          <a:prstGeom prst="rect">
-            <a:avLst/>
-          </a:prstGeom>
-          <a:noFill/>
-          <a:ln/>
-        </p:spPr>
-        <p:txBody>
-          <a:bodyPr wrap="square" lIns="0" tIns="0" rIns="0" bIns="0" rtlCol="0" anchor="ctr"/>
-          <a:lstStyle/>
-          <a:p>
-            <a:pPr algn="ctr" indent="0" marL="0">
-              <a:buNone/>
-            </a:pPr>
-            <a:r>
-              <a:rPr lang="en-US" sz="1200" b="1" dirty="0">
-                <a:solidFill>
-                  <a:srgbClr val="1E2761"/>
-                </a:solidFill>
-                <a:latin typeface="Calibri" pitchFamily="34" charset="0"/>
-                <a:ea typeface="Calibri" pitchFamily="34" charset="-122"/>
-                <a:cs typeface="Calibri" pitchFamily="34" charset="-120"/>
-              </a:rPr>
-              <a:t>i</a:t>
-            </a:r>
-            <a:endParaRPr lang="en-US" sz="1200" dirty="0"/>
-          </a:p>
-        </p:txBody>
-      </p:sp>
-      <p:sp>
-        <p:nvSpPr>
-          <p:cNvPr id="15" name="Text 13"/>
-          <p:cNvSpPr txBox="1"/>
-          <p:nvPr/>
-        </p:nvSpPr>
-        <p:spPr>
-          <a:xfrm>
-            <a:off x="950976" y="2962656"/>
-            <a:ext cx="5925312" cy="441579"/>
-          </a:xfrm>
-          <a:prstGeom prst="rect">
-            <a:avLst/>
-          </a:prstGeom>
-          <a:noFill/>
-          <a:ln/>
-        </p:spPr>
-        <p:txBody>
-          <a:bodyPr wrap="square" lIns="0" tIns="0" rIns="0" bIns="0" rtlCol="0" anchor="t"/>
-          <a:lstStyle/>
-          <a:p>
-            <a:pPr indent="0" marL="0">
-              <a:lnSpc>
-                <a:spcPct val="120000"/>
-              </a:lnSpc>
-              <a:buNone/>
-            </a:pPr>
-            <a:r>
-              <a:rPr lang="en-US" sz="1050" dirty="0">
-                <a:solidFill>
-                  <a:srgbClr val="222222"/>
-                </a:solidFill>
-                <a:latin typeface="Calibri" pitchFamily="34" charset="0"/>
-                <a:ea typeface="Calibri" pitchFamily="34" charset="-122"/>
-                <a:cs typeface="Calibri" pitchFamily="34" charset="-120"/>
-              </a:rPr>
-              <a:t>総合アンケートに回答した方が、スマホ壁紙をダウンロードできます。設問は3問程度（満足度・来場のきっかけ・意見）がおすすめです。</a:t>
-            </a:r>
-            <a:endParaRPr lang="en-US" sz="1050" dirty="0"/>
-          </a:p>
-        </p:txBody>
-      </p:sp>
-      <p:sp>
-        <p:nvSpPr>
-          <p:cNvPr id="16" name="Shape 14"/>
-          <p:cNvSpPr/>
-          <p:nvPr/>
-        </p:nvSpPr>
-        <p:spPr>
-          <a:xfrm>
-            <a:off x="566928" y="3550539"/>
-            <a:ext cx="6428232" cy="624459"/>
-          </a:xfrm>
-          <a:prstGeom prst="roundRect">
-            <a:avLst>
-              <a:gd name="adj" fmla="val 8786"/>
-            </a:avLst>
-          </a:prstGeom>
-          <a:solidFill>
-            <a:srgbClr val="FDF0E6"/>
-          </a:solidFill>
-          <a:ln w="9525">
-            <a:solidFill>
-              <a:srgbClr val="E08A3C"/>
-            </a:solidFill>
-            <a:prstDash val="solid"/>
-          </a:ln>
-        </p:spPr>
-      </p:sp>
-      <p:sp>
-        <p:nvSpPr>
-          <p:cNvPr id="17" name="Text 15"/>
-          <p:cNvSpPr txBox="1"/>
-          <p:nvPr/>
-        </p:nvSpPr>
-        <p:spPr>
-          <a:xfrm>
-            <a:off x="658368" y="3641979"/>
-            <a:ext cx="237744" cy="237744"/>
-          </a:xfrm>
-          <a:prstGeom prst="rect">
-            <a:avLst/>
-          </a:prstGeom>
-          <a:noFill/>
-          <a:ln/>
-        </p:spPr>
-        <p:txBody>
-          <a:bodyPr wrap="square" lIns="0" tIns="0" rIns="0" bIns="0" rtlCol="0" anchor="ctr"/>
-          <a:lstStyle/>
-          <a:p>
-            <a:pPr algn="ctr" indent="0" marL="0">
-              <a:buNone/>
-            </a:pPr>
-            <a:r>
-              <a:rPr lang="en-US" sz="1200" b="1" dirty="0">
-                <a:solidFill>
-                  <a:srgbClr val="C25A17"/>
-                </a:solidFill>
-                <a:latin typeface="Calibri" pitchFamily="34" charset="0"/>
-                <a:ea typeface="Calibri" pitchFamily="34" charset="-122"/>
-                <a:cs typeface="Calibri" pitchFamily="34" charset="-120"/>
-              </a:rPr>
-              <a:t>！</a:t>
-            </a:r>
-            <a:endParaRPr lang="en-US" sz="1200" dirty="0"/>
-          </a:p>
-        </p:txBody>
-      </p:sp>
-      <p:sp>
-        <p:nvSpPr>
-          <p:cNvPr id="18" name="Text 16"/>
-          <p:cNvSpPr txBox="1"/>
-          <p:nvPr/>
-        </p:nvSpPr>
-        <p:spPr>
-          <a:xfrm>
-            <a:off x="950976" y="3660267"/>
-            <a:ext cx="5925312" cy="441579"/>
-          </a:xfrm>
-          <a:prstGeom prst="rect">
-            <a:avLst/>
-          </a:prstGeom>
-          <a:noFill/>
-          <a:ln/>
-        </p:spPr>
-        <p:txBody>
-          <a:bodyPr wrap="square" lIns="0" tIns="0" rIns="0" bIns="0" rtlCol="0" anchor="t"/>
-          <a:lstStyle/>
-          <a:p>
-            <a:pPr indent="0" marL="0">
-              <a:lnSpc>
-                <a:spcPct val="120000"/>
-              </a:lnSpc>
-              <a:buNone/>
-            </a:pPr>
-            <a:r>
-              <a:rPr lang="en-US" sz="1050" dirty="0">
-                <a:solidFill>
-                  <a:srgbClr val="222222"/>
-                </a:solidFill>
-                <a:latin typeface="Calibri" pitchFamily="34" charset="0"/>
-                <a:ea typeface="Calibri" pitchFamily="34" charset="-122"/>
-                <a:cs typeface="Calibri" pitchFamily="34" charset="-120"/>
-              </a:rPr>
-              <a:t>状態を「終了」にすると、ブースのアンケートは回答できなくなります。当日の受付時間が終わってから切り替えてください。</a:t>
-            </a:r>
-            <a:endParaRPr lang="en-US" sz="1050" dirty="0"/>
           </a:p>
         </p:txBody>
       </p:sp>
       <p:pic>
         <p:nvPicPr>
-          <p:cNvPr id="19" name="Image 0" descr="C:\Users\sato\Desktop\enque\docs\images\o-overall.png">    </p:cNvPr>
+          <p:cNvPr id="4" name="Image 0" descr="C:\Users\sato\Desktop\enque\docs\images\o-party.png">    </p:cNvPr>
           <p:cNvPicPr>
             <a:picLocks noChangeAspect="1"/>
           </p:cNvPicPr>
@@ -8830,8 +8451,8 @@
         </p:blipFill>
         <p:spPr>
           <a:xfrm>
-            <a:off x="1282796" y="4248150"/>
-            <a:ext cx="4996495" cy="3474720"/>
+            <a:off x="1082543" y="1481328"/>
+            <a:ext cx="5397003" cy="3474720"/>
           </a:xfrm>
           <a:prstGeom prst="rect">
             <a:avLst/>
@@ -8840,13 +8461,13 @@
       </p:pic>
       <p:sp>
         <p:nvSpPr>
-          <p:cNvPr id="20" name="Text 17"/>
-          <p:cNvSpPr txBox="1"/>
-          <p:nvPr/>
-        </p:nvSpPr>
-        <p:spPr>
-          <a:xfrm>
-            <a:off x="566928" y="7777734"/>
+          <p:cNvPr id="5" name="Text 2"/>
+          <p:cNvSpPr txBox="1"/>
+          <p:nvPr/>
+        </p:nvSpPr>
+        <p:spPr>
+          <a:xfrm>
+            <a:off x="566928" y="5010912"/>
             <a:ext cx="6428232" cy="274320"/>
           </a:xfrm>
           <a:prstGeom prst="rect">
@@ -8871,7 +8492,7 @@
                 <a:ea typeface="Calibri" pitchFamily="34" charset="-122"/>
                 <a:cs typeface="Calibri" pitchFamily="34" charset="-120"/>
               </a:rPr>
-              <a:t>「総合アンケートと案内メール」画面の上部。総合アンケートの状態が見えるところ。</a:t>
+              <a:t>「回答者の傾向」画面の来場人数のところ（のべ来場者・実来場者・回答率と人数の分布）。</a:t>
             </a:r>
             <a:endParaRPr lang="en-US" sz="950" dirty="0"/>
           </a:p>
@@ -8879,7 +8500,7 @@
       </p:sp>
       <p:sp>
         <p:nvSpPr>
-          <p:cNvPr id="21" name="Text 18"/>
+          <p:cNvPr id="6" name="Text 3"/>
           <p:cNvSpPr txBox="1"/>
           <p:nvPr/>
         </p:nvSpPr>
@@ -9020,7 +8641,7 @@
                 <a:ea typeface="Calibri" pitchFamily="34" charset="-122"/>
                 <a:cs typeface="Calibri" pitchFamily="34" charset="-120"/>
               </a:rPr>
-              <a:t>終了後2：案内メールを送る</a:t>
+              <a:t>終了後1：受付を締めて総合アンケートを用意する</a:t>
             </a:r>
             <a:endParaRPr lang="en-US" sz="2200" dirty="0"/>
           </a:p>
@@ -9113,6 +8734,23 @@
               <a:buNone/>
             </a:pPr>
             <a:r>
+              <a:rPr lang="en-US" sz="1150" dirty="0">
+                <a:solidFill>
+                  <a:srgbClr val="222222"/>
+                </a:solidFill>
+                <a:latin typeface="Calibri" pitchFamily="34" charset="0"/>
+                <a:ea typeface="Calibri" pitchFamily="34" charset="-122"/>
+                <a:cs typeface="Calibri" pitchFamily="34" charset="-120"/>
+              </a:rPr>
+              <a:t>ダッシュボードの「イベント設定」で、状態を</a:t>
+            </a:r>
+            <a:pPr indent="0" marL="0">
+              <a:lnSpc>
+                <a:spcPct val="125000"/>
+              </a:lnSpc>
+              <a:buNone/>
+            </a:pPr>
+            <a:r>
               <a:rPr lang="en-US" sz="1150" b="1" dirty="0">
                 <a:solidFill>
                   <a:srgbClr val="222222"/>
@@ -9121,7 +8759,7 @@
                 <a:ea typeface="Calibri" pitchFamily="34" charset="-122"/>
                 <a:cs typeface="Calibri" pitchFamily="34" charset="-120"/>
               </a:rPr>
-              <a:t>テスト送信</a:t>
+              <a:t>「終了（総合アンケート送付）」</a:t>
             </a:r>
             <a:pPr indent="0" marL="0">
               <a:lnSpc>
@@ -9138,7 +8776,7 @@
                 <a:ea typeface="Calibri" pitchFamily="34" charset="-122"/>
                 <a:cs typeface="Calibri" pitchFamily="34" charset="-120"/>
               </a:rPr>
-              <a:t>：自分のアドレスを入れて送り、文面とリンクを確認する</a:t>
+              <a:t>に変える</a:t>
             </a:r>
             <a:endParaRPr lang="en-US" sz="1150" dirty="0"/>
           </a:p>
@@ -9231,6 +8869,23 @@
               <a:buNone/>
             </a:pPr>
             <a:r>
+              <a:rPr lang="en-US" sz="1150" dirty="0">
+                <a:solidFill>
+                  <a:srgbClr val="222222"/>
+                </a:solidFill>
+                <a:latin typeface="Calibri" pitchFamily="34" charset="0"/>
+                <a:ea typeface="Calibri" pitchFamily="34" charset="-122"/>
+                <a:cs typeface="Calibri" pitchFamily="34" charset="-120"/>
+              </a:rPr>
+              <a:t>「総合アンケート」の画面で</a:t>
+            </a:r>
+            <a:pPr indent="0" marL="0">
+              <a:lnSpc>
+                <a:spcPct val="125000"/>
+              </a:lnSpc>
+              <a:buNone/>
+            </a:pPr>
+            <a:r>
               <a:rPr lang="en-US" sz="1150" b="1" dirty="0">
                 <a:solidFill>
                   <a:srgbClr val="222222"/>
@@ -9239,7 +8894,7 @@
                 <a:ea typeface="Calibri" pitchFamily="34" charset="-122"/>
                 <a:cs typeface="Calibri" pitchFamily="34" charset="-120"/>
               </a:rPr>
-              <a:t>送信対象を作成・更新する</a:t>
+              <a:t>「総合アンケートを作成する」</a:t>
             </a:r>
             <a:pPr indent="0" marL="0">
               <a:lnSpc>
@@ -9256,7 +8911,7 @@
                 <a:ea typeface="Calibri" pitchFamily="34" charset="-122"/>
                 <a:cs typeface="Calibri" pitchFamily="34" charset="-120"/>
               </a:rPr>
-              <a:t>を押す（メールアドレスを登録した来場者が対象になります）</a:t>
+              <a:t>を押す</a:t>
             </a:r>
             <a:endParaRPr lang="en-US" sz="1150" dirty="0"/>
           </a:p>
@@ -9357,7 +9012,41 @@
                 <a:ea typeface="Calibri" pitchFamily="34" charset="-122"/>
                 <a:cs typeface="Calibri" pitchFamily="34" charset="-120"/>
               </a:rPr>
-              <a:t>送信する</a:t>
+              <a:t>設問を登録し、</a:t>
+            </a:r>
+            <a:pPr indent="0" marL="0">
+              <a:lnSpc>
+                <a:spcPct val="125000"/>
+              </a:lnSpc>
+              <a:buNone/>
+            </a:pPr>
+            <a:r>
+              <a:rPr lang="en-US" sz="1150" b="1" dirty="0">
+                <a:solidFill>
+                  <a:srgbClr val="222222"/>
+                </a:solidFill>
+                <a:latin typeface="Calibri" pitchFamily="34" charset="0"/>
+                <a:ea typeface="Calibri" pitchFamily="34" charset="-122"/>
+                <a:cs typeface="Calibri" pitchFamily="34" charset="-120"/>
+              </a:rPr>
+              <a:t>「公開する」にチェックを入れて保存</a:t>
+            </a:r>
+            <a:pPr indent="0" marL="0">
+              <a:lnSpc>
+                <a:spcPct val="125000"/>
+              </a:lnSpc>
+              <a:buNone/>
+            </a:pPr>
+            <a:r>
+              <a:rPr lang="en-US" sz="1150" dirty="0">
+                <a:solidFill>
+                  <a:srgbClr val="222222"/>
+                </a:solidFill>
+                <a:latin typeface="Calibri" pitchFamily="34" charset="0"/>
+                <a:ea typeface="Calibri" pitchFamily="34" charset="-122"/>
+                <a:cs typeface="Calibri" pitchFamily="34" charset="-120"/>
+              </a:rPr>
+              <a:t>する</a:t>
             </a:r>
             <a:endParaRPr lang="en-US" sz="1150" dirty="0"/>
           </a:p>
@@ -9365,200 +9054,13 @@
       </p:sp>
       <p:sp>
         <p:nvSpPr>
-          <p:cNvPr id="13" name="Text 11"/>
-          <p:cNvSpPr txBox="1"/>
-          <p:nvPr/>
-        </p:nvSpPr>
-        <p:spPr>
-          <a:xfrm>
-            <a:off x="713232" y="2852928"/>
-            <a:ext cx="6281928" cy="257429"/>
-          </a:xfrm>
-          <a:prstGeom prst="rect">
-            <a:avLst/>
-          </a:prstGeom>
-          <a:noFill/>
-          <a:ln/>
-        </p:spPr>
-        <p:txBody>
-          <a:bodyPr wrap="square" lIns="0" tIns="0" rIns="0" bIns="0" rtlCol="0" anchor="t"/>
-          <a:lstStyle/>
-          <a:p>
-            <a:pPr marL="342900" indent="-342900">
-              <a:lnSpc>
-                <a:spcPct val="125000"/>
-              </a:lnSpc>
-              <a:buSzPct val="100000"/>
-              <a:buChar char="●"/>
-            </a:pPr>
-            <a:r>
-              <a:rPr lang="en-US" sz="1100" dirty="0">
-                <a:solidFill>
-                  <a:srgbClr val="222222"/>
-                </a:solidFill>
-                <a:latin typeface="Calibri" pitchFamily="34" charset="0"/>
-                <a:ea typeface="Calibri" pitchFamily="34" charset="-122"/>
-                <a:cs typeface="Calibri" pitchFamily="34" charset="-120"/>
-              </a:rPr>
-              <a:t>少数なら「この画面から50件だけ送信する」</a:t>
-            </a:r>
-            <a:endParaRPr lang="en-US" sz="1100" dirty="0"/>
-          </a:p>
-        </p:txBody>
-      </p:sp>
-      <p:sp>
-        <p:nvSpPr>
-          <p:cNvPr id="14" name="Text 12"/>
-          <p:cNvSpPr txBox="1"/>
-          <p:nvPr/>
-        </p:nvSpPr>
-        <p:spPr>
-          <a:xfrm>
-            <a:off x="713232" y="3128645"/>
-            <a:ext cx="6281928" cy="257429"/>
-          </a:xfrm>
-          <a:prstGeom prst="rect">
-            <a:avLst/>
-          </a:prstGeom>
-          <a:noFill/>
-          <a:ln/>
-        </p:spPr>
-        <p:txBody>
-          <a:bodyPr wrap="square" lIns="0" tIns="0" rIns="0" bIns="0" rtlCol="0" anchor="t"/>
-          <a:lstStyle/>
-          <a:p>
-            <a:pPr marL="342900" indent="-342900">
-              <a:lnSpc>
-                <a:spcPct val="125000"/>
-              </a:lnSpc>
-              <a:buSzPct val="100000"/>
-              <a:buChar char="●"/>
-            </a:pPr>
-            <a:r>
-              <a:rPr lang="en-US" sz="1100" dirty="0">
-                <a:solidFill>
-                  <a:srgbClr val="222222"/>
-                </a:solidFill>
-                <a:latin typeface="Calibri" pitchFamily="34" charset="0"/>
-                <a:ea typeface="Calibri" pitchFamily="34" charset="-122"/>
-                <a:cs typeface="Calibri" pitchFamily="34" charset="-120"/>
-              </a:rPr>
-              <a:t>大量ならサーバーの自動送信（5分ごとに200件ずつ）に任せる</a:t>
-            </a:r>
-            <a:endParaRPr lang="en-US" sz="1100" dirty="0"/>
-          </a:p>
-        </p:txBody>
-      </p:sp>
-      <p:sp>
-        <p:nvSpPr>
-          <p:cNvPr id="15" name="Shape 13"/>
+          <p:cNvPr id="13" name="Shape 11"/>
           <p:cNvSpPr/>
           <p:nvPr/>
         </p:nvSpPr>
         <p:spPr>
           <a:xfrm>
-            <a:off x="566928" y="3422650"/>
-            <a:ext cx="274320" cy="274320"/>
-          </a:xfrm>
-          <a:prstGeom prst="ellipse">
-            <a:avLst/>
-          </a:prstGeom>
-          <a:solidFill>
-            <a:srgbClr val="1E2761"/>
-          </a:solidFill>
-          <a:ln/>
-        </p:spPr>
-      </p:sp>
-      <p:sp>
-        <p:nvSpPr>
-          <p:cNvPr id="16" name="Text 14"/>
-          <p:cNvSpPr txBox="1"/>
-          <p:nvPr/>
-        </p:nvSpPr>
-        <p:spPr>
-          <a:xfrm>
-            <a:off x="566928" y="3422650"/>
-            <a:ext cx="274320" cy="274320"/>
-          </a:xfrm>
-          <a:prstGeom prst="rect">
-            <a:avLst/>
-          </a:prstGeom>
-          <a:noFill/>
-          <a:ln/>
-        </p:spPr>
-        <p:txBody>
-          <a:bodyPr wrap="square" lIns="0" tIns="0" rIns="0" bIns="0" rtlCol="0" anchor="ctr"/>
-          <a:lstStyle/>
-          <a:p>
-            <a:pPr algn="ctr" indent="0" marL="0">
-              <a:buNone/>
-            </a:pPr>
-            <a:r>
-              <a:rPr lang="en-US" sz="1100" b="1" dirty="0">
-                <a:solidFill>
-                  <a:srgbClr val="FFFFFF"/>
-                </a:solidFill>
-                <a:latin typeface="Calibri" pitchFamily="34" charset="0"/>
-                <a:ea typeface="Calibri" pitchFamily="34" charset="-122"/>
-                <a:cs typeface="Calibri" pitchFamily="34" charset="-120"/>
-              </a:rPr>
-              <a:t>4</a:t>
-            </a:r>
-            <a:endParaRPr lang="en-US" sz="1100" dirty="0"/>
-          </a:p>
-        </p:txBody>
-      </p:sp>
-      <p:sp>
-        <p:nvSpPr>
-          <p:cNvPr id="17" name="Text 15"/>
-          <p:cNvSpPr txBox="1"/>
-          <p:nvPr/>
-        </p:nvSpPr>
-        <p:spPr>
-          <a:xfrm>
-            <a:off x="969264" y="3404362"/>
-            <a:ext cx="6025896" cy="365760"/>
-          </a:xfrm>
-          <a:prstGeom prst="rect">
-            <a:avLst/>
-          </a:prstGeom>
-          <a:noFill/>
-          <a:ln/>
-        </p:spPr>
-        <p:txBody>
-          <a:bodyPr wrap="square" lIns="0" tIns="0" rIns="0" bIns="0" rtlCol="0" anchor="t"/>
-          <a:lstStyle/>
-          <a:p>
-            <a:pPr indent="0" marL="0">
-              <a:lnSpc>
-                <a:spcPct val="125000"/>
-              </a:lnSpc>
-              <a:buNone/>
-            </a:pPr>
-            <a:r>
-              <a:rPr lang="en-US" sz="1150" dirty="0">
-                <a:solidFill>
-                  <a:srgbClr val="222222"/>
-                </a:solidFill>
-                <a:latin typeface="Calibri" pitchFamily="34" charset="0"/>
-                <a:ea typeface="Calibri" pitchFamily="34" charset="-122"/>
-                <a:cs typeface="Calibri" pitchFamily="34" charset="-120"/>
-              </a:rPr>
-              <a:t>送信状況（未送信・送信済み・失敗・回答済み）を画面で確認する</a:t>
-            </a:r>
-            <a:endParaRPr lang="en-US" sz="1150" dirty="0"/>
-          </a:p>
-        </p:txBody>
-      </p:sp>
-      <p:sp>
-        <p:nvSpPr>
-          <p:cNvPr id="18" name="Shape 16"/>
-          <p:cNvSpPr/>
-          <p:nvPr/>
-        </p:nvSpPr>
-        <p:spPr>
-          <a:xfrm>
-            <a:off x="566928" y="3861562"/>
+            <a:off x="566928" y="2852928"/>
             <a:ext cx="6428232" cy="624459"/>
           </a:xfrm>
           <a:prstGeom prst="roundRect">
@@ -9579,13 +9081,13 @@
       </p:sp>
       <p:sp>
         <p:nvSpPr>
-          <p:cNvPr id="19" name="Text 17"/>
-          <p:cNvSpPr txBox="1"/>
-          <p:nvPr/>
-        </p:nvSpPr>
-        <p:spPr>
-          <a:xfrm>
-            <a:off x="658368" y="3953002"/>
+          <p:cNvPr id="14" name="Text 12"/>
+          <p:cNvSpPr txBox="1"/>
+          <p:nvPr/>
+        </p:nvSpPr>
+        <p:spPr>
+          <a:xfrm>
+            <a:off x="658368" y="2944368"/>
             <a:ext cx="237744" cy="237744"/>
           </a:xfrm>
           <a:prstGeom prst="rect">
@@ -9618,13 +9120,13 @@
       </p:sp>
       <p:sp>
         <p:nvSpPr>
-          <p:cNvPr id="20" name="Text 18"/>
-          <p:cNvSpPr txBox="1"/>
-          <p:nvPr/>
-        </p:nvSpPr>
-        <p:spPr>
-          <a:xfrm>
-            <a:off x="950976" y="3971290"/>
+          <p:cNvPr id="15" name="Text 13"/>
+          <p:cNvSpPr txBox="1"/>
+          <p:nvPr/>
+        </p:nvSpPr>
+        <p:spPr>
+          <a:xfrm>
+            <a:off x="950976" y="2962656"/>
             <a:ext cx="5925312" cy="441579"/>
           </a:xfrm>
           <a:prstGeom prst="rect">
@@ -9652,41 +9154,7 @@
                 <a:ea typeface="Calibri" pitchFamily="34" charset="-122"/>
                 <a:cs typeface="Calibri" pitchFamily="34" charset="-120"/>
               </a:rPr>
-              <a:t>テスト送信のリンクは</a:t>
-            </a:r>
-            <a:pPr indent="0" marL="0">
-              <a:lnSpc>
-                <a:spcPct val="120000"/>
-              </a:lnSpc>
-              <a:buNone/>
-            </a:pPr>
-            <a:r>
-              <a:rPr lang="en-US" sz="1050" b="1" dirty="0">
-                <a:solidFill>
-                  <a:srgbClr val="222222"/>
-                </a:solidFill>
-                <a:latin typeface="Calibri" pitchFamily="34" charset="0"/>
-                <a:ea typeface="Calibri" pitchFamily="34" charset="-122"/>
-                <a:cs typeface="Calibri" pitchFamily="34" charset="-120"/>
-              </a:rPr>
-              <a:t>スタッフ確認用のプレビュー</a:t>
-            </a:r>
-            <a:pPr indent="0" marL="0">
-              <a:lnSpc>
-                <a:spcPct val="120000"/>
-              </a:lnSpc>
-              <a:buNone/>
-            </a:pPr>
-            <a:r>
-              <a:rPr lang="en-US" sz="1050" dirty="0">
-                <a:solidFill>
-                  <a:srgbClr val="222222"/>
-                </a:solidFill>
-                <a:latin typeface="Calibri" pitchFamily="34" charset="0"/>
-                <a:ea typeface="Calibri" pitchFamily="34" charset="-122"/>
-                <a:cs typeface="Calibri" pitchFamily="34" charset="-120"/>
-              </a:rPr>
-              <a:t>です。管理画面にログインした状態で開くと、来場者に見えるのと同じ画面を確認できます（プレビューからは回答できません）。</a:t>
+              <a:t>総合アンケートに回答した方が、スマホ壁紙をダウンロードできます。設問は3問程度（満足度・来場のきっかけ・意見）がおすすめです。</a:t>
             </a:r>
             <a:endParaRPr lang="en-US" sz="1050" dirty="0"/>
           </a:p>
@@ -9694,18 +9162,18 @@
       </p:sp>
       <p:sp>
         <p:nvSpPr>
-          <p:cNvPr id="21" name="Shape 19"/>
+          <p:cNvPr id="16" name="Shape 14"/>
           <p:cNvSpPr/>
           <p:nvPr/>
         </p:nvSpPr>
         <p:spPr>
           <a:xfrm>
-            <a:off x="566928" y="4559173"/>
-            <a:ext cx="6428232" cy="431102"/>
+            <a:off x="566928" y="3550539"/>
+            <a:ext cx="6428232" cy="624459"/>
           </a:xfrm>
           <a:prstGeom prst="roundRect">
             <a:avLst>
-              <a:gd name="adj" fmla="val 12726"/>
+              <a:gd name="adj" fmla="val 8786"/>
             </a:avLst>
           </a:prstGeom>
           <a:solidFill>
@@ -9721,13 +9189,13 @@
       </p:sp>
       <p:sp>
         <p:nvSpPr>
-          <p:cNvPr id="22" name="Text 20"/>
-          <p:cNvSpPr txBox="1"/>
-          <p:nvPr/>
-        </p:nvSpPr>
-        <p:spPr>
-          <a:xfrm>
-            <a:off x="658368" y="4650613"/>
+          <p:cNvPr id="17" name="Text 15"/>
+          <p:cNvSpPr txBox="1"/>
+          <p:nvPr/>
+        </p:nvSpPr>
+        <p:spPr>
+          <a:xfrm>
+            <a:off x="658368" y="3641979"/>
             <a:ext cx="237744" cy="237744"/>
           </a:xfrm>
           <a:prstGeom prst="rect">
@@ -9760,14 +9228,14 @@
       </p:sp>
       <p:sp>
         <p:nvSpPr>
-          <p:cNvPr id="23" name="Text 21"/>
-          <p:cNvSpPr txBox="1"/>
-          <p:nvPr/>
-        </p:nvSpPr>
-        <p:spPr>
-          <a:xfrm>
-            <a:off x="950976" y="4668901"/>
-            <a:ext cx="5925312" cy="248221"/>
+          <p:cNvPr id="18" name="Text 16"/>
+          <p:cNvSpPr txBox="1"/>
+          <p:nvPr/>
+        </p:nvSpPr>
+        <p:spPr>
+          <a:xfrm>
+            <a:off x="950976" y="3660267"/>
+            <a:ext cx="5925312" cy="441579"/>
           </a:xfrm>
           <a:prstGeom prst="rect">
             <a:avLst/>
@@ -9794,7 +9262,7 @@
                 <a:ea typeface="Calibri" pitchFamily="34" charset="-122"/>
                 <a:cs typeface="Calibri" pitchFamily="34" charset="-120"/>
               </a:rPr>
-              <a:t>送信済みの人には二重に送られません。失敗したものは自動で3回まで再送されます。</a:t>
+              <a:t>状態を「終了」にすると、ブースのアンケートは回答できなくなります。当日の受付時間が終わってから切り替えてください。</a:t>
             </a:r>
             <a:endParaRPr lang="en-US" sz="1050" dirty="0"/>
           </a:p>
@@ -9802,7 +9270,7 @@
       </p:sp>
       <p:pic>
         <p:nvPicPr>
-          <p:cNvPr id="24" name="Image 0" descr="C:\Users\sato\Desktop\enque\docs\images\o-invite-status.png">    </p:cNvPr>
+          <p:cNvPr id="19" name="Image 0" descr="C:\Users\sato\Desktop\enque\docs\images\o-overall.png">    </p:cNvPr>
           <p:cNvPicPr>
             <a:picLocks noChangeAspect="1"/>
           </p:cNvPicPr>
@@ -9816,8 +9284,8 @@
         </p:blipFill>
         <p:spPr>
           <a:xfrm>
-            <a:off x="1504370" y="5063427"/>
-            <a:ext cx="4553347" cy="3474720"/>
+            <a:off x="1282796" y="4248150"/>
+            <a:ext cx="4996495" cy="3474720"/>
           </a:xfrm>
           <a:prstGeom prst="rect">
             <a:avLst/>
@@ -9826,13 +9294,13 @@
       </p:pic>
       <p:sp>
         <p:nvSpPr>
-          <p:cNvPr id="25" name="Text 22"/>
-          <p:cNvSpPr txBox="1"/>
-          <p:nvPr/>
-        </p:nvSpPr>
-        <p:spPr>
-          <a:xfrm>
-            <a:off x="566928" y="8593011"/>
+          <p:cNvPr id="20" name="Text 17"/>
+          <p:cNvSpPr txBox="1"/>
+          <p:nvPr/>
+        </p:nvSpPr>
+        <p:spPr>
+          <a:xfrm>
+            <a:off x="566928" y="7777734"/>
             <a:ext cx="6428232" cy="274320"/>
           </a:xfrm>
           <a:prstGeom prst="rect">
@@ -9857,7 +9325,7 @@
                 <a:ea typeface="Calibri" pitchFamily="34" charset="-122"/>
                 <a:cs typeface="Calibri" pitchFamily="34" charset="-120"/>
               </a:rPr>
-              <a:t>「総合アンケートと案内メール」画面の送信状況（未送信・送信済み・失敗・回答済みの数）。</a:t>
+              <a:t>「総合アンケートと案内メール」画面の上部。総合アンケートの状態が見えるところ。</a:t>
             </a:r>
             <a:endParaRPr lang="en-US" sz="950" dirty="0"/>
           </a:p>
@@ -9865,7 +9333,7 @@
       </p:sp>
       <p:sp>
         <p:nvSpPr>
-          <p:cNvPr id="26" name="Text 23"/>
+          <p:cNvPr id="21" name="Text 18"/>
           <p:cNvSpPr txBox="1"/>
           <p:nvPr/>
         </p:nvSpPr>
@@ -10006,7 +9474,7 @@
                 <a:ea typeface="Calibri" pitchFamily="34" charset="-122"/>
                 <a:cs typeface="Calibri" pitchFamily="34" charset="-120"/>
               </a:rPr>
-              <a:t>終了後3：集計データを受け取る</a:t>
+              <a:t>終了後2：案内メールを送る</a:t>
             </a:r>
             <a:endParaRPr lang="en-US" sz="2200" dirty="0"/>
           </a:p>
@@ -10014,14 +9482,73 @@
       </p:sp>
       <p:sp>
         <p:nvSpPr>
-          <p:cNvPr id="4" name="Text 2"/>
-          <p:cNvSpPr txBox="1"/>
-          <p:nvPr/>
-        </p:nvSpPr>
-        <p:spPr>
-          <a:xfrm>
-            <a:off x="566928" y="1591056"/>
-            <a:ext cx="6428232" cy="257810"/>
+          <p:cNvPr id="4" name="Shape 2"/>
+          <p:cNvSpPr/>
+          <p:nvPr/>
+        </p:nvSpPr>
+        <p:spPr>
+          <a:xfrm>
+            <a:off x="566928" y="1499616"/>
+            <a:ext cx="274320" cy="274320"/>
+          </a:xfrm>
+          <a:prstGeom prst="ellipse">
+            <a:avLst/>
+          </a:prstGeom>
+          <a:solidFill>
+            <a:srgbClr val="1E2761"/>
+          </a:solidFill>
+          <a:ln/>
+        </p:spPr>
+      </p:sp>
+      <p:sp>
+        <p:nvSpPr>
+          <p:cNvPr id="5" name="Text 3"/>
+          <p:cNvSpPr txBox="1"/>
+          <p:nvPr/>
+        </p:nvSpPr>
+        <p:spPr>
+          <a:xfrm>
+            <a:off x="566928" y="1499616"/>
+            <a:ext cx="274320" cy="274320"/>
+          </a:xfrm>
+          <a:prstGeom prst="rect">
+            <a:avLst/>
+          </a:prstGeom>
+          <a:noFill/>
+          <a:ln/>
+        </p:spPr>
+        <p:txBody>
+          <a:bodyPr wrap="square" lIns="0" tIns="0" rIns="0" bIns="0" rtlCol="0" anchor="ctr"/>
+          <a:lstStyle/>
+          <a:p>
+            <a:pPr algn="ctr" indent="0" marL="0">
+              <a:buNone/>
+            </a:pPr>
+            <a:r>
+              <a:rPr lang="en-US" sz="1100" b="1" dirty="0">
+                <a:solidFill>
+                  <a:srgbClr val="FFFFFF"/>
+                </a:solidFill>
+                <a:latin typeface="Calibri" pitchFamily="34" charset="0"/>
+                <a:ea typeface="Calibri" pitchFamily="34" charset="-122"/>
+                <a:cs typeface="Calibri" pitchFamily="34" charset="-120"/>
+              </a:rPr>
+              <a:t>1</a:t>
+            </a:r>
+            <a:endParaRPr lang="en-US" sz="1100" dirty="0"/>
+          </a:p>
+        </p:txBody>
+      </p:sp>
+      <p:sp>
+        <p:nvSpPr>
+          <p:cNvPr id="6" name="Text 4"/>
+          <p:cNvSpPr txBox="1"/>
+          <p:nvPr/>
+        </p:nvSpPr>
+        <p:spPr>
+          <a:xfrm>
+            <a:off x="969264" y="1481328"/>
+            <a:ext cx="6025896" cy="365760"/>
           </a:xfrm>
           <a:prstGeom prst="rect">
             <a:avLst/>
@@ -10034,32 +9561,271 @@
           <a:lstStyle/>
           <a:p>
             <a:pPr indent="0" marL="0">
-              <a:buNone/>
-            </a:pPr>
-            <a:r>
-              <a:rPr lang="en-US" sz="1400" b="1" dirty="0">
-                <a:solidFill>
-                  <a:srgbClr val="1E2761"/>
-                </a:solidFill>
-                <a:latin typeface="Calibri" pitchFamily="34" charset="0"/>
-                <a:ea typeface="Calibri" pitchFamily="34" charset="-122"/>
-                <a:cs typeface="Calibri" pitchFamily="34" charset="-120"/>
-              </a:rPr>
-              <a:t>CSVをダウンロードする</a:t>
-            </a:r>
-            <a:endParaRPr lang="en-US" sz="1400" dirty="0"/>
-          </a:p>
-        </p:txBody>
-      </p:sp>
-      <p:sp>
-        <p:nvSpPr>
-          <p:cNvPr id="5" name="Text 3"/>
-          <p:cNvSpPr txBox="1"/>
-          <p:nvPr/>
-        </p:nvSpPr>
-        <p:spPr>
-          <a:xfrm>
-            <a:off x="713232" y="1922018"/>
+              <a:lnSpc>
+                <a:spcPct val="125000"/>
+              </a:lnSpc>
+              <a:buNone/>
+            </a:pPr>
+            <a:r>
+              <a:rPr lang="en-US" sz="1150" b="1" dirty="0">
+                <a:solidFill>
+                  <a:srgbClr val="222222"/>
+                </a:solidFill>
+                <a:latin typeface="Calibri" pitchFamily="34" charset="0"/>
+                <a:ea typeface="Calibri" pitchFamily="34" charset="-122"/>
+                <a:cs typeface="Calibri" pitchFamily="34" charset="-120"/>
+              </a:rPr>
+              <a:t>テスト送信</a:t>
+            </a:r>
+            <a:pPr indent="0" marL="0">
+              <a:lnSpc>
+                <a:spcPct val="125000"/>
+              </a:lnSpc>
+              <a:buNone/>
+            </a:pPr>
+            <a:r>
+              <a:rPr lang="en-US" sz="1150" dirty="0">
+                <a:solidFill>
+                  <a:srgbClr val="222222"/>
+                </a:solidFill>
+                <a:latin typeface="Calibri" pitchFamily="34" charset="0"/>
+                <a:ea typeface="Calibri" pitchFamily="34" charset="-122"/>
+                <a:cs typeface="Calibri" pitchFamily="34" charset="-120"/>
+              </a:rPr>
+              <a:t>：自分のアドレスを入れて送り、文面とリンクを確認する</a:t>
+            </a:r>
+            <a:endParaRPr lang="en-US" sz="1150" dirty="0"/>
+          </a:p>
+        </p:txBody>
+      </p:sp>
+      <p:sp>
+        <p:nvSpPr>
+          <p:cNvPr id="7" name="Shape 5"/>
+          <p:cNvSpPr/>
+          <p:nvPr/>
+        </p:nvSpPr>
+        <p:spPr>
+          <a:xfrm>
+            <a:off x="566928" y="1956816"/>
+            <a:ext cx="274320" cy="274320"/>
+          </a:xfrm>
+          <a:prstGeom prst="ellipse">
+            <a:avLst/>
+          </a:prstGeom>
+          <a:solidFill>
+            <a:srgbClr val="1E2761"/>
+          </a:solidFill>
+          <a:ln/>
+        </p:spPr>
+      </p:sp>
+      <p:sp>
+        <p:nvSpPr>
+          <p:cNvPr id="8" name="Text 6"/>
+          <p:cNvSpPr txBox="1"/>
+          <p:nvPr/>
+        </p:nvSpPr>
+        <p:spPr>
+          <a:xfrm>
+            <a:off x="566928" y="1956816"/>
+            <a:ext cx="274320" cy="274320"/>
+          </a:xfrm>
+          <a:prstGeom prst="rect">
+            <a:avLst/>
+          </a:prstGeom>
+          <a:noFill/>
+          <a:ln/>
+        </p:spPr>
+        <p:txBody>
+          <a:bodyPr wrap="square" lIns="0" tIns="0" rIns="0" bIns="0" rtlCol="0" anchor="ctr"/>
+          <a:lstStyle/>
+          <a:p>
+            <a:pPr algn="ctr" indent="0" marL="0">
+              <a:buNone/>
+            </a:pPr>
+            <a:r>
+              <a:rPr lang="en-US" sz="1100" b="1" dirty="0">
+                <a:solidFill>
+                  <a:srgbClr val="FFFFFF"/>
+                </a:solidFill>
+                <a:latin typeface="Calibri" pitchFamily="34" charset="0"/>
+                <a:ea typeface="Calibri" pitchFamily="34" charset="-122"/>
+                <a:cs typeface="Calibri" pitchFamily="34" charset="-120"/>
+              </a:rPr>
+              <a:t>2</a:t>
+            </a:r>
+            <a:endParaRPr lang="en-US" sz="1100" dirty="0"/>
+          </a:p>
+        </p:txBody>
+      </p:sp>
+      <p:sp>
+        <p:nvSpPr>
+          <p:cNvPr id="9" name="Text 7"/>
+          <p:cNvSpPr txBox="1"/>
+          <p:nvPr/>
+        </p:nvSpPr>
+        <p:spPr>
+          <a:xfrm>
+            <a:off x="969264" y="1938528"/>
+            <a:ext cx="6025896" cy="365760"/>
+          </a:xfrm>
+          <a:prstGeom prst="rect">
+            <a:avLst/>
+          </a:prstGeom>
+          <a:noFill/>
+          <a:ln/>
+        </p:spPr>
+        <p:txBody>
+          <a:bodyPr wrap="square" lIns="0" tIns="0" rIns="0" bIns="0" rtlCol="0" anchor="t"/>
+          <a:lstStyle/>
+          <a:p>
+            <a:pPr indent="0" marL="0">
+              <a:lnSpc>
+                <a:spcPct val="125000"/>
+              </a:lnSpc>
+              <a:buNone/>
+            </a:pPr>
+            <a:r>
+              <a:rPr lang="en-US" sz="1150" b="1" dirty="0">
+                <a:solidFill>
+                  <a:srgbClr val="222222"/>
+                </a:solidFill>
+                <a:latin typeface="Calibri" pitchFamily="34" charset="0"/>
+                <a:ea typeface="Calibri" pitchFamily="34" charset="-122"/>
+                <a:cs typeface="Calibri" pitchFamily="34" charset="-120"/>
+              </a:rPr>
+              <a:t>送信対象を作成・更新する</a:t>
+            </a:r>
+            <a:pPr indent="0" marL="0">
+              <a:lnSpc>
+                <a:spcPct val="125000"/>
+              </a:lnSpc>
+              <a:buNone/>
+            </a:pPr>
+            <a:r>
+              <a:rPr lang="en-US" sz="1150" dirty="0">
+                <a:solidFill>
+                  <a:srgbClr val="222222"/>
+                </a:solidFill>
+                <a:latin typeface="Calibri" pitchFamily="34" charset="0"/>
+                <a:ea typeface="Calibri" pitchFamily="34" charset="-122"/>
+                <a:cs typeface="Calibri" pitchFamily="34" charset="-120"/>
+              </a:rPr>
+              <a:t>を押す（メールアドレスを登録した来場者が対象になります）</a:t>
+            </a:r>
+            <a:endParaRPr lang="en-US" sz="1150" dirty="0"/>
+          </a:p>
+        </p:txBody>
+      </p:sp>
+      <p:sp>
+        <p:nvSpPr>
+          <p:cNvPr id="10" name="Shape 8"/>
+          <p:cNvSpPr/>
+          <p:nvPr/>
+        </p:nvSpPr>
+        <p:spPr>
+          <a:xfrm>
+            <a:off x="566928" y="2414016"/>
+            <a:ext cx="274320" cy="274320"/>
+          </a:xfrm>
+          <a:prstGeom prst="ellipse">
+            <a:avLst/>
+          </a:prstGeom>
+          <a:solidFill>
+            <a:srgbClr val="1E2761"/>
+          </a:solidFill>
+          <a:ln/>
+        </p:spPr>
+      </p:sp>
+      <p:sp>
+        <p:nvSpPr>
+          <p:cNvPr id="11" name="Text 9"/>
+          <p:cNvSpPr txBox="1"/>
+          <p:nvPr/>
+        </p:nvSpPr>
+        <p:spPr>
+          <a:xfrm>
+            <a:off x="566928" y="2414016"/>
+            <a:ext cx="274320" cy="274320"/>
+          </a:xfrm>
+          <a:prstGeom prst="rect">
+            <a:avLst/>
+          </a:prstGeom>
+          <a:noFill/>
+          <a:ln/>
+        </p:spPr>
+        <p:txBody>
+          <a:bodyPr wrap="square" lIns="0" tIns="0" rIns="0" bIns="0" rtlCol="0" anchor="ctr"/>
+          <a:lstStyle/>
+          <a:p>
+            <a:pPr algn="ctr" indent="0" marL="0">
+              <a:buNone/>
+            </a:pPr>
+            <a:r>
+              <a:rPr lang="en-US" sz="1100" b="1" dirty="0">
+                <a:solidFill>
+                  <a:srgbClr val="FFFFFF"/>
+                </a:solidFill>
+                <a:latin typeface="Calibri" pitchFamily="34" charset="0"/>
+                <a:ea typeface="Calibri" pitchFamily="34" charset="-122"/>
+                <a:cs typeface="Calibri" pitchFamily="34" charset="-120"/>
+              </a:rPr>
+              <a:t>3</a:t>
+            </a:r>
+            <a:endParaRPr lang="en-US" sz="1100" dirty="0"/>
+          </a:p>
+        </p:txBody>
+      </p:sp>
+      <p:sp>
+        <p:nvSpPr>
+          <p:cNvPr id="12" name="Text 10"/>
+          <p:cNvSpPr txBox="1"/>
+          <p:nvPr/>
+        </p:nvSpPr>
+        <p:spPr>
+          <a:xfrm>
+            <a:off x="969264" y="2395728"/>
+            <a:ext cx="6025896" cy="365760"/>
+          </a:xfrm>
+          <a:prstGeom prst="rect">
+            <a:avLst/>
+          </a:prstGeom>
+          <a:noFill/>
+          <a:ln/>
+        </p:spPr>
+        <p:txBody>
+          <a:bodyPr wrap="square" lIns="0" tIns="0" rIns="0" bIns="0" rtlCol="0" anchor="t"/>
+          <a:lstStyle/>
+          <a:p>
+            <a:pPr indent="0" marL="0">
+              <a:lnSpc>
+                <a:spcPct val="125000"/>
+              </a:lnSpc>
+              <a:buNone/>
+            </a:pPr>
+            <a:r>
+              <a:rPr lang="en-US" sz="1150" dirty="0">
+                <a:solidFill>
+                  <a:srgbClr val="222222"/>
+                </a:solidFill>
+                <a:latin typeface="Calibri" pitchFamily="34" charset="0"/>
+                <a:ea typeface="Calibri" pitchFamily="34" charset="-122"/>
+                <a:cs typeface="Calibri" pitchFamily="34" charset="-120"/>
+              </a:rPr>
+              <a:t>送信する</a:t>
+            </a:r>
+            <a:endParaRPr lang="en-US" sz="1150" dirty="0"/>
+          </a:p>
+        </p:txBody>
+      </p:sp>
+      <p:sp>
+        <p:nvSpPr>
+          <p:cNvPr id="13" name="Text 11"/>
+          <p:cNvSpPr txBox="1"/>
+          <p:nvPr/>
+        </p:nvSpPr>
+        <p:spPr>
+          <a:xfrm>
+            <a:off x="713232" y="2852928"/>
             <a:ext cx="6281928" cy="257429"/>
           </a:xfrm>
           <a:prstGeom prst="rect">
@@ -10080,23 +9846,6 @@
               <a:buChar char="●"/>
             </a:pPr>
             <a:r>
-              <a:rPr lang="en-US" sz="1100" b="1" dirty="0">
-                <a:solidFill>
-                  <a:srgbClr val="222222"/>
-                </a:solidFill>
-                <a:latin typeface="Calibri" pitchFamily="34" charset="0"/>
-                <a:ea typeface="Calibri" pitchFamily="34" charset="-122"/>
-                <a:cs typeface="Calibri" pitchFamily="34" charset="-120"/>
-              </a:rPr>
-              <a:t>企業別</a:t>
-            </a:r>
-            <a:pPr indent="0" marL="0">
-              <a:lnSpc>
-                <a:spcPct val="125000"/>
-              </a:lnSpc>
-              <a:buNone/>
-            </a:pPr>
-            <a:r>
               <a:rPr lang="en-US" sz="1100" dirty="0">
                 <a:solidFill>
                   <a:srgbClr val="222222"/>
@@ -10105,7 +9854,7 @@
                 <a:ea typeface="Calibri" pitchFamily="34" charset="-122"/>
                 <a:cs typeface="Calibri" pitchFamily="34" charset="-120"/>
               </a:rPr>
-              <a:t>：企業の「集計」画面、または「回答一覧」から</a:t>
+              <a:t>少数なら「この画面から50件だけ送信する」</a:t>
             </a:r>
             <a:endParaRPr lang="en-US" sz="1100" dirty="0"/>
           </a:p>
@@ -10113,13 +9862,13 @@
       </p:sp>
       <p:sp>
         <p:nvSpPr>
-          <p:cNvPr id="6" name="Text 4"/>
-          <p:cNvSpPr txBox="1"/>
-          <p:nvPr/>
-        </p:nvSpPr>
-        <p:spPr>
-          <a:xfrm>
-            <a:off x="713232" y="2197735"/>
+          <p:cNvPr id="14" name="Text 12"/>
+          <p:cNvSpPr txBox="1"/>
+          <p:nvPr/>
+        </p:nvSpPr>
+        <p:spPr>
+          <a:xfrm>
+            <a:off x="713232" y="3128645"/>
             <a:ext cx="6281928" cy="257429"/>
           </a:xfrm>
           <a:prstGeom prst="rect">
@@ -10140,32 +9889,74 @@
               <a:buChar char="●"/>
             </a:pPr>
             <a:r>
+              <a:rPr lang="en-US" sz="1100" dirty="0">
+                <a:solidFill>
+                  <a:srgbClr val="222222"/>
+                </a:solidFill>
+                <a:latin typeface="Calibri" pitchFamily="34" charset="0"/>
+                <a:ea typeface="Calibri" pitchFamily="34" charset="-122"/>
+                <a:cs typeface="Calibri" pitchFamily="34" charset="-120"/>
+              </a:rPr>
+              <a:t>大量ならサーバーの自動送信（5分ごとに200件ずつ）に任せる</a:t>
+            </a:r>
+            <a:endParaRPr lang="en-US" sz="1100" dirty="0"/>
+          </a:p>
+        </p:txBody>
+      </p:sp>
+      <p:sp>
+        <p:nvSpPr>
+          <p:cNvPr id="15" name="Shape 13"/>
+          <p:cNvSpPr/>
+          <p:nvPr/>
+        </p:nvSpPr>
+        <p:spPr>
+          <a:xfrm>
+            <a:off x="566928" y="3422650"/>
+            <a:ext cx="274320" cy="274320"/>
+          </a:xfrm>
+          <a:prstGeom prst="ellipse">
+            <a:avLst/>
+          </a:prstGeom>
+          <a:solidFill>
+            <a:srgbClr val="1E2761"/>
+          </a:solidFill>
+          <a:ln/>
+        </p:spPr>
+      </p:sp>
+      <p:sp>
+        <p:nvSpPr>
+          <p:cNvPr id="16" name="Text 14"/>
+          <p:cNvSpPr txBox="1"/>
+          <p:nvPr/>
+        </p:nvSpPr>
+        <p:spPr>
+          <a:xfrm>
+            <a:off x="566928" y="3422650"/>
+            <a:ext cx="274320" cy="274320"/>
+          </a:xfrm>
+          <a:prstGeom prst="rect">
+            <a:avLst/>
+          </a:prstGeom>
+          <a:noFill/>
+          <a:ln/>
+        </p:spPr>
+        <p:txBody>
+          <a:bodyPr wrap="square" lIns="0" tIns="0" rIns="0" bIns="0" rtlCol="0" anchor="ctr"/>
+          <a:lstStyle/>
+          <a:p>
+            <a:pPr algn="ctr" indent="0" marL="0">
+              <a:buNone/>
+            </a:pPr>
+            <a:r>
               <a:rPr lang="en-US" sz="1100" b="1" dirty="0">
                 <a:solidFill>
-                  <a:srgbClr val="222222"/>
-                </a:solidFill>
-                <a:latin typeface="Calibri" pitchFamily="34" charset="0"/>
-                <a:ea typeface="Calibri" pitchFamily="34" charset="-122"/>
-                <a:cs typeface="Calibri" pitchFamily="34" charset="-120"/>
-              </a:rPr>
-              <a:t>全社まとめて</a:t>
-            </a:r>
-            <a:pPr indent="0" marL="0">
-              <a:lnSpc>
-                <a:spcPct val="125000"/>
-              </a:lnSpc>
-              <a:buNone/>
-            </a:pPr>
-            <a:r>
-              <a:rPr lang="en-US" sz="1100" dirty="0">
-                <a:solidFill>
-                  <a:srgbClr val="222222"/>
-                </a:solidFill>
-                <a:latin typeface="Calibri" pitchFamily="34" charset="0"/>
-                <a:ea typeface="Calibri" pitchFamily="34" charset="-122"/>
-                <a:cs typeface="Calibri" pitchFamily="34" charset="-120"/>
-              </a:rPr>
-              <a:t>：ダッシュボードの「全企業分のCSV」から</a:t>
+                  <a:srgbClr val="FFFFFF"/>
+                </a:solidFill>
+                <a:latin typeface="Calibri" pitchFamily="34" charset="0"/>
+                <a:ea typeface="Calibri" pitchFamily="34" charset="-122"/>
+                <a:cs typeface="Calibri" pitchFamily="34" charset="-120"/>
+              </a:rPr>
+              <a:t>4</a:t>
             </a:r>
             <a:endParaRPr lang="en-US" sz="1100" dirty="0"/>
           </a:p>
@@ -10173,14 +9964,14 @@
       </p:sp>
       <p:sp>
         <p:nvSpPr>
-          <p:cNvPr id="7" name="Text 5"/>
-          <p:cNvSpPr txBox="1"/>
-          <p:nvPr/>
-        </p:nvSpPr>
-        <p:spPr>
-          <a:xfrm>
-            <a:off x="566928" y="2473452"/>
-            <a:ext cx="6428232" cy="257429"/>
+          <p:cNvPr id="17" name="Text 15"/>
+          <p:cNvSpPr txBox="1"/>
+          <p:nvPr/>
+        </p:nvSpPr>
+        <p:spPr>
+          <a:xfrm>
+            <a:off x="969264" y="3404362"/>
+            <a:ext cx="6025896" cy="365760"/>
           </a:xfrm>
           <a:prstGeom prst="rect">
             <a:avLst/>
@@ -10199,63 +9990,29 @@
               <a:buNone/>
             </a:pPr>
             <a:r>
-              <a:rPr lang="en-US" sz="1100" dirty="0">
-                <a:solidFill>
-                  <a:srgbClr val="222222"/>
-                </a:solidFill>
-                <a:latin typeface="Calibri" pitchFamily="34" charset="0"/>
-                <a:ea typeface="Calibri" pitchFamily="34" charset="-122"/>
-                <a:cs typeface="Calibri" pitchFamily="34" charset="-120"/>
-              </a:rPr>
-              <a:t>CSVは</a:t>
-            </a:r>
-            <a:pPr indent="0" marL="0">
-              <a:lnSpc>
-                <a:spcPct val="125000"/>
-              </a:lnSpc>
-              <a:buNone/>
-            </a:pPr>
-            <a:r>
-              <a:rPr lang="en-US" sz="1100" b="1" dirty="0">
-                <a:solidFill>
-                  <a:srgbClr val="222222"/>
-                </a:solidFill>
-                <a:latin typeface="Calibri" pitchFamily="34" charset="0"/>
-                <a:ea typeface="Calibri" pitchFamily="34" charset="-122"/>
-                <a:cs typeface="Calibri" pitchFamily="34" charset="-120"/>
-              </a:rPr>
-              <a:t>UTF-8（BOM付き）</a:t>
-            </a:r>
-            <a:pPr indent="0" marL="0">
-              <a:lnSpc>
-                <a:spcPct val="125000"/>
-              </a:lnSpc>
-              <a:buNone/>
-            </a:pPr>
-            <a:r>
-              <a:rPr lang="en-US" sz="1100" dirty="0">
-                <a:solidFill>
-                  <a:srgbClr val="222222"/>
-                </a:solidFill>
-                <a:latin typeface="Calibri" pitchFamily="34" charset="0"/>
-                <a:ea typeface="Calibri" pitchFamily="34" charset="-122"/>
-                <a:cs typeface="Calibri" pitchFamily="34" charset="-120"/>
-              </a:rPr>
-              <a:t>なので、Excelでそのまま開けます。</a:t>
-            </a:r>
-            <a:endParaRPr lang="en-US" sz="1100" dirty="0"/>
-          </a:p>
-        </p:txBody>
-      </p:sp>
-      <p:sp>
-        <p:nvSpPr>
-          <p:cNvPr id="8" name="Shape 6"/>
+              <a:rPr lang="en-US" sz="1150" dirty="0">
+                <a:solidFill>
+                  <a:srgbClr val="222222"/>
+                </a:solidFill>
+                <a:latin typeface="Calibri" pitchFamily="34" charset="0"/>
+                <a:ea typeface="Calibri" pitchFamily="34" charset="-122"/>
+                <a:cs typeface="Calibri" pitchFamily="34" charset="-120"/>
+              </a:rPr>
+              <a:t>送信状況（未送信・送信済み・失敗・回答済み）を画面で確認する</a:t>
+            </a:r>
+            <a:endParaRPr lang="en-US" sz="1150" dirty="0"/>
+          </a:p>
+        </p:txBody>
+      </p:sp>
+      <p:sp>
+        <p:nvSpPr>
+          <p:cNvPr id="18" name="Shape 16"/>
           <p:cNvSpPr/>
           <p:nvPr/>
         </p:nvSpPr>
         <p:spPr>
           <a:xfrm>
-            <a:off x="566928" y="2767457"/>
+            <a:off x="566928" y="3861562"/>
             <a:ext cx="6428232" cy="624459"/>
           </a:xfrm>
           <a:prstGeom prst="roundRect">
@@ -10276,13 +10033,13 @@
       </p:sp>
       <p:sp>
         <p:nvSpPr>
-          <p:cNvPr id="9" name="Text 7"/>
-          <p:cNvSpPr txBox="1"/>
-          <p:nvPr/>
-        </p:nvSpPr>
-        <p:spPr>
-          <a:xfrm>
-            <a:off x="658368" y="2858897"/>
+          <p:cNvPr id="19" name="Text 17"/>
+          <p:cNvSpPr txBox="1"/>
+          <p:nvPr/>
+        </p:nvSpPr>
+        <p:spPr>
+          <a:xfrm>
+            <a:off x="658368" y="3953002"/>
             <a:ext cx="237744" cy="237744"/>
           </a:xfrm>
           <a:prstGeom prst="rect">
@@ -10315,13 +10072,13 @@
       </p:sp>
       <p:sp>
         <p:nvSpPr>
-          <p:cNvPr id="10" name="Text 8"/>
-          <p:cNvSpPr txBox="1"/>
-          <p:nvPr/>
-        </p:nvSpPr>
-        <p:spPr>
-          <a:xfrm>
-            <a:off x="950976" y="2877185"/>
+          <p:cNvPr id="20" name="Text 18"/>
+          <p:cNvSpPr txBox="1"/>
+          <p:nvPr/>
+        </p:nvSpPr>
+        <p:spPr>
+          <a:xfrm>
+            <a:off x="950976" y="3971290"/>
             <a:ext cx="5925312" cy="441579"/>
           </a:xfrm>
           <a:prstGeom prst="rect">
@@ -10349,7 +10106,41 @@
                 <a:ea typeface="Calibri" pitchFamily="34" charset="-122"/>
                 <a:cs typeface="Calibri" pitchFamily="34" charset="-120"/>
               </a:rPr>
-              <a:t>メールアドレスは出力されません。来場者は匿名のID（来場者ID）だけが入るので、企業をまたいだ同じ方の回答を突き合わせられます。</a:t>
+              <a:t>テスト送信のリンクは</a:t>
+            </a:r>
+            <a:pPr indent="0" marL="0">
+              <a:lnSpc>
+                <a:spcPct val="120000"/>
+              </a:lnSpc>
+              <a:buNone/>
+            </a:pPr>
+            <a:r>
+              <a:rPr lang="en-US" sz="1050" b="1" dirty="0">
+                <a:solidFill>
+                  <a:srgbClr val="222222"/>
+                </a:solidFill>
+                <a:latin typeface="Calibri" pitchFamily="34" charset="0"/>
+                <a:ea typeface="Calibri" pitchFamily="34" charset="-122"/>
+                <a:cs typeface="Calibri" pitchFamily="34" charset="-120"/>
+              </a:rPr>
+              <a:t>スタッフ確認用のプレビュー</a:t>
+            </a:r>
+            <a:pPr indent="0" marL="0">
+              <a:lnSpc>
+                <a:spcPct val="120000"/>
+              </a:lnSpc>
+              <a:buNone/>
+            </a:pPr>
+            <a:r>
+              <a:rPr lang="en-US" sz="1050" dirty="0">
+                <a:solidFill>
+                  <a:srgbClr val="222222"/>
+                </a:solidFill>
+                <a:latin typeface="Calibri" pitchFamily="34" charset="0"/>
+                <a:ea typeface="Calibri" pitchFamily="34" charset="-122"/>
+                <a:cs typeface="Calibri" pitchFamily="34" charset="-120"/>
+              </a:rPr>
+              <a:t>です。管理画面にログインした状態で開くと、来場者に見えるのと同じ画面を確認できます（プレビューからは回答できません）。</a:t>
             </a:r>
             <a:endParaRPr lang="en-US" sz="1050" dirty="0"/>
           </a:p>
@@ -10357,14 +10148,80 @@
       </p:sp>
       <p:sp>
         <p:nvSpPr>
-          <p:cNvPr id="11" name="Text 9"/>
-          <p:cNvSpPr txBox="1"/>
-          <p:nvPr/>
-        </p:nvSpPr>
-        <p:spPr>
-          <a:xfrm>
-            <a:off x="566928" y="3574796"/>
-            <a:ext cx="6428232" cy="257810"/>
+          <p:cNvPr id="21" name="Shape 19"/>
+          <p:cNvSpPr/>
+          <p:nvPr/>
+        </p:nvSpPr>
+        <p:spPr>
+          <a:xfrm>
+            <a:off x="566928" y="4559173"/>
+            <a:ext cx="6428232" cy="431102"/>
+          </a:xfrm>
+          <a:prstGeom prst="roundRect">
+            <a:avLst>
+              <a:gd name="adj" fmla="val 12726"/>
+            </a:avLst>
+          </a:prstGeom>
+          <a:solidFill>
+            <a:srgbClr val="FDF0E6"/>
+          </a:solidFill>
+          <a:ln w="9525">
+            <a:solidFill>
+              <a:srgbClr val="E08A3C"/>
+            </a:solidFill>
+            <a:prstDash val="solid"/>
+          </a:ln>
+        </p:spPr>
+      </p:sp>
+      <p:sp>
+        <p:nvSpPr>
+          <p:cNvPr id="22" name="Text 20"/>
+          <p:cNvSpPr txBox="1"/>
+          <p:nvPr/>
+        </p:nvSpPr>
+        <p:spPr>
+          <a:xfrm>
+            <a:off x="658368" y="4650613"/>
+            <a:ext cx="237744" cy="237744"/>
+          </a:xfrm>
+          <a:prstGeom prst="rect">
+            <a:avLst/>
+          </a:prstGeom>
+          <a:noFill/>
+          <a:ln/>
+        </p:spPr>
+        <p:txBody>
+          <a:bodyPr wrap="square" lIns="0" tIns="0" rIns="0" bIns="0" rtlCol="0" anchor="ctr"/>
+          <a:lstStyle/>
+          <a:p>
+            <a:pPr algn="ctr" indent="0" marL="0">
+              <a:buNone/>
+            </a:pPr>
+            <a:r>
+              <a:rPr lang="en-US" sz="1200" b="1" dirty="0">
+                <a:solidFill>
+                  <a:srgbClr val="C25A17"/>
+                </a:solidFill>
+                <a:latin typeface="Calibri" pitchFamily="34" charset="0"/>
+                <a:ea typeface="Calibri" pitchFamily="34" charset="-122"/>
+                <a:cs typeface="Calibri" pitchFamily="34" charset="-120"/>
+              </a:rPr>
+              <a:t>！</a:t>
+            </a:r>
+            <a:endParaRPr lang="en-US" sz="1200" dirty="0"/>
+          </a:p>
+        </p:txBody>
+      </p:sp>
+      <p:sp>
+        <p:nvSpPr>
+          <p:cNvPr id="23" name="Text 21"/>
+          <p:cNvSpPr txBox="1"/>
+          <p:nvPr/>
+        </p:nvSpPr>
+        <p:spPr>
+          <a:xfrm>
+            <a:off x="950976" y="4668901"/>
+            <a:ext cx="5925312" cy="248221"/>
           </a:xfrm>
           <a:prstGeom prst="rect">
             <a:avLst/>
@@ -10377,68 +10234,29 @@
           <a:lstStyle/>
           <a:p>
             <a:pPr indent="0" marL="0">
-              <a:buNone/>
-            </a:pPr>
-            <a:r>
-              <a:rPr lang="en-US" sz="1400" b="1" dirty="0">
-                <a:solidFill>
-                  <a:srgbClr val="1E2761"/>
-                </a:solidFill>
-                <a:latin typeface="Calibri" pitchFamily="34" charset="0"/>
-                <a:ea typeface="Calibri" pitchFamily="34" charset="-122"/>
-                <a:cs typeface="Calibri" pitchFamily="34" charset="-120"/>
-              </a:rPr>
-              <a:t>集計画面で見る</a:t>
-            </a:r>
-            <a:endParaRPr lang="en-US" sz="1400" dirty="0"/>
-          </a:p>
-        </p:txBody>
-      </p:sp>
-      <p:sp>
-        <p:nvSpPr>
-          <p:cNvPr id="12" name="Text 10"/>
-          <p:cNvSpPr txBox="1"/>
-          <p:nvPr/>
-        </p:nvSpPr>
-        <p:spPr>
-          <a:xfrm>
-            <a:off x="566928" y="3905758"/>
-            <a:ext cx="6428232" cy="459994"/>
-          </a:xfrm>
-          <a:prstGeom prst="rect">
-            <a:avLst/>
-          </a:prstGeom>
-          <a:noFill/>
-          <a:ln/>
-        </p:spPr>
-        <p:txBody>
-          <a:bodyPr wrap="square" lIns="0" tIns="0" rIns="0" bIns="0" rtlCol="0" anchor="t"/>
-          <a:lstStyle/>
-          <a:p>
-            <a:pPr indent="0" marL="0">
-              <a:lnSpc>
-                <a:spcPct val="125000"/>
-              </a:lnSpc>
-              <a:buNone/>
-            </a:pPr>
-            <a:r>
-              <a:rPr lang="en-US" sz="1100" dirty="0">
-                <a:solidFill>
-                  <a:srgbClr val="222222"/>
-                </a:solidFill>
-                <a:latin typeface="Calibri" pitchFamily="34" charset="0"/>
-                <a:ea typeface="Calibri" pitchFamily="34" charset="-122"/>
-                <a:cs typeface="Calibri" pitchFamily="34" charset="-120"/>
-              </a:rPr>
-              <a:t>企業ごとの「集計」画面では、設問ごとのグラフ・星評価の平均・NPS・自由記述の一覧が見られます。</a:t>
-            </a:r>
-            <a:endParaRPr lang="en-US" sz="1100" dirty="0"/>
+              <a:lnSpc>
+                <a:spcPct val="120000"/>
+              </a:lnSpc>
+              <a:buNone/>
+            </a:pPr>
+            <a:r>
+              <a:rPr lang="en-US" sz="1050" dirty="0">
+                <a:solidFill>
+                  <a:srgbClr val="222222"/>
+                </a:solidFill>
+                <a:latin typeface="Calibri" pitchFamily="34" charset="0"/>
+                <a:ea typeface="Calibri" pitchFamily="34" charset="-122"/>
+                <a:cs typeface="Calibri" pitchFamily="34" charset="-120"/>
+              </a:rPr>
+              <a:t>送信済みの人には二重に送られません。失敗したものは自動で3回まで再送されます。</a:t>
+            </a:r>
+            <a:endParaRPr lang="en-US" sz="1050" dirty="0"/>
           </a:p>
         </p:txBody>
       </p:sp>
       <p:pic>
         <p:nvPicPr>
-          <p:cNvPr id="13" name="Image 0" descr="C:\Users\sato\Desktop\enque\docs\images\o-stats.png">    </p:cNvPr>
+          <p:cNvPr id="24" name="Image 0" descr="C:\Users\sato\Desktop\enque\docs\images\o-invite-status.png">    </p:cNvPr>
           <p:cNvPicPr>
             <a:picLocks noChangeAspect="1"/>
           </p:cNvPicPr>
@@ -10452,8 +10270,8 @@
         </p:blipFill>
         <p:spPr>
           <a:xfrm>
-            <a:off x="2140821" y="4402328"/>
-            <a:ext cx="3280447" cy="3474720"/>
+            <a:off x="1504370" y="5063427"/>
+            <a:ext cx="4553347" cy="3474720"/>
           </a:xfrm>
           <a:prstGeom prst="rect">
             <a:avLst/>
@@ -10462,13 +10280,13 @@
       </p:pic>
       <p:sp>
         <p:nvSpPr>
-          <p:cNvPr id="14" name="Text 11"/>
-          <p:cNvSpPr txBox="1"/>
-          <p:nvPr/>
-        </p:nvSpPr>
-        <p:spPr>
-          <a:xfrm>
-            <a:off x="566928" y="7931912"/>
+          <p:cNvPr id="25" name="Text 22"/>
+          <p:cNvSpPr txBox="1"/>
+          <p:nvPr/>
+        </p:nvSpPr>
+        <p:spPr>
+          <a:xfrm>
+            <a:off x="566928" y="8593011"/>
             <a:ext cx="6428232" cy="274320"/>
           </a:xfrm>
           <a:prstGeom prst="rect">
@@ -10493,7 +10311,7 @@
                 <a:ea typeface="Calibri" pitchFamily="34" charset="-122"/>
                 <a:cs typeface="Calibri" pitchFamily="34" charset="-120"/>
               </a:rPr>
-              <a:t>企業の集計画面。設問ごとのグラフが見えるところ。</a:t>
+              <a:t>「総合アンケートと案内メール」画面の送信状況（未送信・送信済み・失敗・回答済みの数）。</a:t>
             </a:r>
             <a:endParaRPr lang="en-US" sz="950" dirty="0"/>
           </a:p>
@@ -10501,7 +10319,7 @@
       </p:sp>
       <p:sp>
         <p:nvSpPr>
-          <p:cNvPr id="15" name="Text 12"/>
+          <p:cNvPr id="26" name="Text 23"/>
           <p:cNvSpPr txBox="1"/>
           <p:nvPr/>
         </p:nvSpPr>
@@ -10642,7 +10460,7 @@
                 <a:ea typeface="Calibri" pitchFamily="34" charset="-122"/>
                 <a:cs typeface="Calibri" pitchFamily="34" charset="-120"/>
               </a:rPr>
-              <a:t>終了後4：メールアドレスを削除する</a:t>
+              <a:t>終了後3：集計データを受け取る</a:t>
             </a:r>
             <a:endParaRPr lang="en-US" sz="2200" dirty="0"/>
           </a:p>
@@ -10656,7 +10474,166 @@
         </p:nvSpPr>
         <p:spPr>
           <a:xfrm>
-            <a:off x="566928" y="1481328"/>
+            <a:off x="566928" y="1591056"/>
+            <a:ext cx="6428232" cy="257810"/>
+          </a:xfrm>
+          <a:prstGeom prst="rect">
+            <a:avLst/>
+          </a:prstGeom>
+          <a:noFill/>
+          <a:ln/>
+        </p:spPr>
+        <p:txBody>
+          <a:bodyPr wrap="square" lIns="0" tIns="0" rIns="0" bIns="0" rtlCol="0" anchor="t"/>
+          <a:lstStyle/>
+          <a:p>
+            <a:pPr indent="0" marL="0">
+              <a:buNone/>
+            </a:pPr>
+            <a:r>
+              <a:rPr lang="en-US" sz="1400" b="1" dirty="0">
+                <a:solidFill>
+                  <a:srgbClr val="1E2761"/>
+                </a:solidFill>
+                <a:latin typeface="Calibri" pitchFamily="34" charset="0"/>
+                <a:ea typeface="Calibri" pitchFamily="34" charset="-122"/>
+                <a:cs typeface="Calibri" pitchFamily="34" charset="-120"/>
+              </a:rPr>
+              <a:t>CSVをダウンロードする</a:t>
+            </a:r>
+            <a:endParaRPr lang="en-US" sz="1400" dirty="0"/>
+          </a:p>
+        </p:txBody>
+      </p:sp>
+      <p:sp>
+        <p:nvSpPr>
+          <p:cNvPr id="5" name="Text 3"/>
+          <p:cNvSpPr txBox="1"/>
+          <p:nvPr/>
+        </p:nvSpPr>
+        <p:spPr>
+          <a:xfrm>
+            <a:off x="713232" y="1922018"/>
+            <a:ext cx="6281928" cy="257429"/>
+          </a:xfrm>
+          <a:prstGeom prst="rect">
+            <a:avLst/>
+          </a:prstGeom>
+          <a:noFill/>
+          <a:ln/>
+        </p:spPr>
+        <p:txBody>
+          <a:bodyPr wrap="square" lIns="0" tIns="0" rIns="0" bIns="0" rtlCol="0" anchor="t"/>
+          <a:lstStyle/>
+          <a:p>
+            <a:pPr marL="342900" indent="-342900">
+              <a:lnSpc>
+                <a:spcPct val="125000"/>
+              </a:lnSpc>
+              <a:buSzPct val="100000"/>
+              <a:buChar char="●"/>
+            </a:pPr>
+            <a:r>
+              <a:rPr lang="en-US" sz="1100" b="1" dirty="0">
+                <a:solidFill>
+                  <a:srgbClr val="222222"/>
+                </a:solidFill>
+                <a:latin typeface="Calibri" pitchFamily="34" charset="0"/>
+                <a:ea typeface="Calibri" pitchFamily="34" charset="-122"/>
+                <a:cs typeface="Calibri" pitchFamily="34" charset="-120"/>
+              </a:rPr>
+              <a:t>企業別</a:t>
+            </a:r>
+            <a:pPr indent="0" marL="0">
+              <a:lnSpc>
+                <a:spcPct val="125000"/>
+              </a:lnSpc>
+              <a:buNone/>
+            </a:pPr>
+            <a:r>
+              <a:rPr lang="en-US" sz="1100" dirty="0">
+                <a:solidFill>
+                  <a:srgbClr val="222222"/>
+                </a:solidFill>
+                <a:latin typeface="Calibri" pitchFamily="34" charset="0"/>
+                <a:ea typeface="Calibri" pitchFamily="34" charset="-122"/>
+                <a:cs typeface="Calibri" pitchFamily="34" charset="-120"/>
+              </a:rPr>
+              <a:t>：企業の「集計」画面、または「回答一覧」から</a:t>
+            </a:r>
+            <a:endParaRPr lang="en-US" sz="1100" dirty="0"/>
+          </a:p>
+        </p:txBody>
+      </p:sp>
+      <p:sp>
+        <p:nvSpPr>
+          <p:cNvPr id="6" name="Text 4"/>
+          <p:cNvSpPr txBox="1"/>
+          <p:nvPr/>
+        </p:nvSpPr>
+        <p:spPr>
+          <a:xfrm>
+            <a:off x="713232" y="2197735"/>
+            <a:ext cx="6281928" cy="257429"/>
+          </a:xfrm>
+          <a:prstGeom prst="rect">
+            <a:avLst/>
+          </a:prstGeom>
+          <a:noFill/>
+          <a:ln/>
+        </p:spPr>
+        <p:txBody>
+          <a:bodyPr wrap="square" lIns="0" tIns="0" rIns="0" bIns="0" rtlCol="0" anchor="t"/>
+          <a:lstStyle/>
+          <a:p>
+            <a:pPr marL="342900" indent="-342900">
+              <a:lnSpc>
+                <a:spcPct val="125000"/>
+              </a:lnSpc>
+              <a:buSzPct val="100000"/>
+              <a:buChar char="●"/>
+            </a:pPr>
+            <a:r>
+              <a:rPr lang="en-US" sz="1100" b="1" dirty="0">
+                <a:solidFill>
+                  <a:srgbClr val="222222"/>
+                </a:solidFill>
+                <a:latin typeface="Calibri" pitchFamily="34" charset="0"/>
+                <a:ea typeface="Calibri" pitchFamily="34" charset="-122"/>
+                <a:cs typeface="Calibri" pitchFamily="34" charset="-120"/>
+              </a:rPr>
+              <a:t>全社まとめて</a:t>
+            </a:r>
+            <a:pPr indent="0" marL="0">
+              <a:lnSpc>
+                <a:spcPct val="125000"/>
+              </a:lnSpc>
+              <a:buNone/>
+            </a:pPr>
+            <a:r>
+              <a:rPr lang="en-US" sz="1100" dirty="0">
+                <a:solidFill>
+                  <a:srgbClr val="222222"/>
+                </a:solidFill>
+                <a:latin typeface="Calibri" pitchFamily="34" charset="0"/>
+                <a:ea typeface="Calibri" pitchFamily="34" charset="-122"/>
+                <a:cs typeface="Calibri" pitchFamily="34" charset="-120"/>
+              </a:rPr>
+              <a:t>：ダッシュボードの「全企業分のCSV」から</a:t>
+            </a:r>
+            <a:endParaRPr lang="en-US" sz="1100" dirty="0"/>
+          </a:p>
+        </p:txBody>
+      </p:sp>
+      <p:sp>
+        <p:nvSpPr>
+          <p:cNvPr id="7" name="Text 5"/>
+          <p:cNvSpPr txBox="1"/>
+          <p:nvPr/>
+        </p:nvSpPr>
+        <p:spPr>
+          <a:xfrm>
+            <a:off x="566928" y="2473452"/>
             <a:ext cx="6428232" cy="257429"/>
           </a:xfrm>
           <a:prstGeom prst="rect">
@@ -10684,110 +10661,43 @@
                 <a:ea typeface="Calibri" pitchFamily="34" charset="-122"/>
                 <a:cs typeface="Calibri" pitchFamily="34" charset="-120"/>
               </a:rPr>
-              <a:t>案内の送付と集計が終わったら、預かったメールアドレスを削除します。</a:t>
+              <a:t>CSVは</a:t>
+            </a:r>
+            <a:pPr indent="0" marL="0">
+              <a:lnSpc>
+                <a:spcPct val="125000"/>
+              </a:lnSpc>
+              <a:buNone/>
+            </a:pPr>
+            <a:r>
+              <a:rPr lang="en-US" sz="1100" b="1" dirty="0">
+                <a:solidFill>
+                  <a:srgbClr val="222222"/>
+                </a:solidFill>
+                <a:latin typeface="Calibri" pitchFamily="34" charset="0"/>
+                <a:ea typeface="Calibri" pitchFamily="34" charset="-122"/>
+                <a:cs typeface="Calibri" pitchFamily="34" charset="-120"/>
+              </a:rPr>
+              <a:t>UTF-8（BOM付き）</a:t>
+            </a:r>
+            <a:pPr indent="0" marL="0">
+              <a:lnSpc>
+                <a:spcPct val="125000"/>
+              </a:lnSpc>
+              <a:buNone/>
+            </a:pPr>
+            <a:r>
+              <a:rPr lang="en-US" sz="1100" dirty="0">
+                <a:solidFill>
+                  <a:srgbClr val="222222"/>
+                </a:solidFill>
+                <a:latin typeface="Calibri" pitchFamily="34" charset="0"/>
+                <a:ea typeface="Calibri" pitchFamily="34" charset="-122"/>
+                <a:cs typeface="Calibri" pitchFamily="34" charset="-120"/>
+              </a:rPr>
+              <a:t>なので、Excelでそのまま開けます。</a:t>
             </a:r>
             <a:endParaRPr lang="en-US" sz="1100" dirty="0"/>
-          </a:p>
-        </p:txBody>
-      </p:sp>
-      <p:sp>
-        <p:nvSpPr>
-          <p:cNvPr id="5" name="Shape 3"/>
-          <p:cNvSpPr/>
-          <p:nvPr/>
-        </p:nvSpPr>
-        <p:spPr>
-          <a:xfrm>
-            <a:off x="566928" y="1793621"/>
-            <a:ext cx="274320" cy="274320"/>
-          </a:xfrm>
-          <a:prstGeom prst="ellipse">
-            <a:avLst/>
-          </a:prstGeom>
-          <a:solidFill>
-            <a:srgbClr val="1E2761"/>
-          </a:solidFill>
-          <a:ln/>
-        </p:spPr>
-      </p:sp>
-      <p:sp>
-        <p:nvSpPr>
-          <p:cNvPr id="6" name="Text 4"/>
-          <p:cNvSpPr txBox="1"/>
-          <p:nvPr/>
-        </p:nvSpPr>
-        <p:spPr>
-          <a:xfrm>
-            <a:off x="566928" y="1793621"/>
-            <a:ext cx="274320" cy="274320"/>
-          </a:xfrm>
-          <a:prstGeom prst="rect">
-            <a:avLst/>
-          </a:prstGeom>
-          <a:noFill/>
-          <a:ln/>
-        </p:spPr>
-        <p:txBody>
-          <a:bodyPr wrap="square" lIns="0" tIns="0" rIns="0" bIns="0" rtlCol="0" anchor="ctr"/>
-          <a:lstStyle/>
-          <a:p>
-            <a:pPr algn="ctr" indent="0" marL="0">
-              <a:buNone/>
-            </a:pPr>
-            <a:r>
-              <a:rPr lang="en-US" sz="1100" b="1" dirty="0">
-                <a:solidFill>
-                  <a:srgbClr val="FFFFFF"/>
-                </a:solidFill>
-                <a:latin typeface="Calibri" pitchFamily="34" charset="0"/>
-                <a:ea typeface="Calibri" pitchFamily="34" charset="-122"/>
-                <a:cs typeface="Calibri" pitchFamily="34" charset="-120"/>
-              </a:rPr>
-              <a:t>1</a:t>
-            </a:r>
-            <a:endParaRPr lang="en-US" sz="1100" dirty="0"/>
-          </a:p>
-        </p:txBody>
-      </p:sp>
-      <p:sp>
-        <p:nvSpPr>
-          <p:cNvPr id="7" name="Text 5"/>
-          <p:cNvSpPr txBox="1"/>
-          <p:nvPr/>
-        </p:nvSpPr>
-        <p:spPr>
-          <a:xfrm>
-            <a:off x="969264" y="1775333"/>
-            <a:ext cx="6025896" cy="365760"/>
-          </a:xfrm>
-          <a:prstGeom prst="rect">
-            <a:avLst/>
-          </a:prstGeom>
-          <a:noFill/>
-          <a:ln/>
-        </p:spPr>
-        <p:txBody>
-          <a:bodyPr wrap="square" lIns="0" tIns="0" rIns="0" bIns="0" rtlCol="0" anchor="t"/>
-          <a:lstStyle/>
-          <a:p>
-            <a:pPr indent="0" marL="0">
-              <a:lnSpc>
-                <a:spcPct val="125000"/>
-              </a:lnSpc>
-              <a:buNone/>
-            </a:pPr>
-            <a:r>
-              <a:rPr lang="en-US" sz="1150" dirty="0">
-                <a:solidFill>
-                  <a:srgbClr val="222222"/>
-                </a:solidFill>
-                <a:latin typeface="Calibri" pitchFamily="34" charset="0"/>
-                <a:ea typeface="Calibri" pitchFamily="34" charset="-122"/>
-                <a:cs typeface="Calibri" pitchFamily="34" charset="-120"/>
-              </a:rPr>
-              <a:t>「総合アンケート」の画面を開く</a:t>
-            </a:r>
-            <a:endParaRPr lang="en-US" sz="1150" dirty="0"/>
           </a:p>
         </p:txBody>
       </p:sp>
@@ -10799,461 +10709,7 @@
         </p:nvSpPr>
         <p:spPr>
           <a:xfrm>
-            <a:off x="566928" y="2250821"/>
-            <a:ext cx="274320" cy="274320"/>
-          </a:xfrm>
-          <a:prstGeom prst="ellipse">
-            <a:avLst/>
-          </a:prstGeom>
-          <a:solidFill>
-            <a:srgbClr val="1E2761"/>
-          </a:solidFill>
-          <a:ln/>
-        </p:spPr>
-      </p:sp>
-      <p:sp>
-        <p:nvSpPr>
-          <p:cNvPr id="9" name="Text 7"/>
-          <p:cNvSpPr txBox="1"/>
-          <p:nvPr/>
-        </p:nvSpPr>
-        <p:spPr>
-          <a:xfrm>
-            <a:off x="566928" y="2250821"/>
-            <a:ext cx="274320" cy="274320"/>
-          </a:xfrm>
-          <a:prstGeom prst="rect">
-            <a:avLst/>
-          </a:prstGeom>
-          <a:noFill/>
-          <a:ln/>
-        </p:spPr>
-        <p:txBody>
-          <a:bodyPr wrap="square" lIns="0" tIns="0" rIns="0" bIns="0" rtlCol="0" anchor="ctr"/>
-          <a:lstStyle/>
-          <a:p>
-            <a:pPr algn="ctr" indent="0" marL="0">
-              <a:buNone/>
-            </a:pPr>
-            <a:r>
-              <a:rPr lang="en-US" sz="1100" b="1" dirty="0">
-                <a:solidFill>
-                  <a:srgbClr val="FFFFFF"/>
-                </a:solidFill>
-                <a:latin typeface="Calibri" pitchFamily="34" charset="0"/>
-                <a:ea typeface="Calibri" pitchFamily="34" charset="-122"/>
-                <a:cs typeface="Calibri" pitchFamily="34" charset="-120"/>
-              </a:rPr>
-              <a:t>2</a:t>
-            </a:r>
-            <a:endParaRPr lang="en-US" sz="1100" dirty="0"/>
-          </a:p>
-        </p:txBody>
-      </p:sp>
-      <p:sp>
-        <p:nvSpPr>
-          <p:cNvPr id="10" name="Text 8"/>
-          <p:cNvSpPr txBox="1"/>
-          <p:nvPr/>
-        </p:nvSpPr>
-        <p:spPr>
-          <a:xfrm>
-            <a:off x="969264" y="2232533"/>
-            <a:ext cx="6025896" cy="365760"/>
-          </a:xfrm>
-          <a:prstGeom prst="rect">
-            <a:avLst/>
-          </a:prstGeom>
-          <a:noFill/>
-          <a:ln/>
-        </p:spPr>
-        <p:txBody>
-          <a:bodyPr wrap="square" lIns="0" tIns="0" rIns="0" bIns="0" rtlCol="0" anchor="t"/>
-          <a:lstStyle/>
-          <a:p>
-            <a:pPr indent="0" marL="0">
-              <a:lnSpc>
-                <a:spcPct val="125000"/>
-              </a:lnSpc>
-              <a:buNone/>
-            </a:pPr>
-            <a:r>
-              <a:rPr lang="en-US" sz="1150" dirty="0">
-                <a:solidFill>
-                  <a:srgbClr val="222222"/>
-                </a:solidFill>
-                <a:latin typeface="Calibri" pitchFamily="34" charset="0"/>
-                <a:ea typeface="Calibri" pitchFamily="34" charset="-122"/>
-                <a:cs typeface="Calibri" pitchFamily="34" charset="-120"/>
-              </a:rPr>
-              <a:t>一番下の</a:t>
-            </a:r>
-            <a:pPr indent="0" marL="0">
-              <a:lnSpc>
-                <a:spcPct val="125000"/>
-              </a:lnSpc>
-              <a:buNone/>
-            </a:pPr>
-            <a:r>
-              <a:rPr lang="en-US" sz="1150" b="1" dirty="0">
-                <a:solidFill>
-                  <a:srgbClr val="222222"/>
-                </a:solidFill>
-                <a:latin typeface="Calibri" pitchFamily="34" charset="0"/>
-                <a:ea typeface="Calibri" pitchFamily="34" charset="-122"/>
-                <a:cs typeface="Calibri" pitchFamily="34" charset="-120"/>
-              </a:rPr>
-              <a:t>「メールアドレスを削除する」</a:t>
-            </a:r>
-            <a:pPr indent="0" marL="0">
-              <a:lnSpc>
-                <a:spcPct val="125000"/>
-              </a:lnSpc>
-              <a:buNone/>
-            </a:pPr>
-            <a:r>
-              <a:rPr lang="en-US" sz="1150" dirty="0">
-                <a:solidFill>
-                  <a:srgbClr val="222222"/>
-                </a:solidFill>
-                <a:latin typeface="Calibri" pitchFamily="34" charset="0"/>
-                <a:ea typeface="Calibri" pitchFamily="34" charset="-122"/>
-                <a:cs typeface="Calibri" pitchFamily="34" charset="-120"/>
-              </a:rPr>
-              <a:t>を押す</a:t>
-            </a:r>
-            <a:endParaRPr lang="en-US" sz="1150" dirty="0"/>
-          </a:p>
-        </p:txBody>
-      </p:sp>
-      <p:sp>
-        <p:nvSpPr>
-          <p:cNvPr id="11" name="Shape 9"/>
-          <p:cNvSpPr/>
-          <p:nvPr/>
-        </p:nvSpPr>
-        <p:spPr>
-          <a:xfrm>
-            <a:off x="566928" y="2708021"/>
-            <a:ext cx="274320" cy="274320"/>
-          </a:xfrm>
-          <a:prstGeom prst="ellipse">
-            <a:avLst/>
-          </a:prstGeom>
-          <a:solidFill>
-            <a:srgbClr val="1E2761"/>
-          </a:solidFill>
-          <a:ln/>
-        </p:spPr>
-      </p:sp>
-      <p:sp>
-        <p:nvSpPr>
-          <p:cNvPr id="12" name="Text 10"/>
-          <p:cNvSpPr txBox="1"/>
-          <p:nvPr/>
-        </p:nvSpPr>
-        <p:spPr>
-          <a:xfrm>
-            <a:off x="566928" y="2708021"/>
-            <a:ext cx="274320" cy="274320"/>
-          </a:xfrm>
-          <a:prstGeom prst="rect">
-            <a:avLst/>
-          </a:prstGeom>
-          <a:noFill/>
-          <a:ln/>
-        </p:spPr>
-        <p:txBody>
-          <a:bodyPr wrap="square" lIns="0" tIns="0" rIns="0" bIns="0" rtlCol="0" anchor="ctr"/>
-          <a:lstStyle/>
-          <a:p>
-            <a:pPr algn="ctr" indent="0" marL="0">
-              <a:buNone/>
-            </a:pPr>
-            <a:r>
-              <a:rPr lang="en-US" sz="1100" b="1" dirty="0">
-                <a:solidFill>
-                  <a:srgbClr val="FFFFFF"/>
-                </a:solidFill>
-                <a:latin typeface="Calibri" pitchFamily="34" charset="0"/>
-                <a:ea typeface="Calibri" pitchFamily="34" charset="-122"/>
-                <a:cs typeface="Calibri" pitchFamily="34" charset="-120"/>
-              </a:rPr>
-              <a:t>3</a:t>
-            </a:r>
-            <a:endParaRPr lang="en-US" sz="1100" dirty="0"/>
-          </a:p>
-        </p:txBody>
-      </p:sp>
-      <p:sp>
-        <p:nvSpPr>
-          <p:cNvPr id="13" name="Text 11"/>
-          <p:cNvSpPr txBox="1"/>
-          <p:nvPr/>
-        </p:nvSpPr>
-        <p:spPr>
-          <a:xfrm>
-            <a:off x="969264" y="2689733"/>
-            <a:ext cx="6025896" cy="365760"/>
-          </a:xfrm>
-          <a:prstGeom prst="rect">
-            <a:avLst/>
-          </a:prstGeom>
-          <a:noFill/>
-          <a:ln/>
-        </p:spPr>
-        <p:txBody>
-          <a:bodyPr wrap="square" lIns="0" tIns="0" rIns="0" bIns="0" rtlCol="0" anchor="t"/>
-          <a:lstStyle/>
-          <a:p>
-            <a:pPr indent="0" marL="0">
-              <a:lnSpc>
-                <a:spcPct val="125000"/>
-              </a:lnSpc>
-              <a:buNone/>
-            </a:pPr>
-            <a:r>
-              <a:rPr lang="en-US" sz="1150" dirty="0">
-                <a:solidFill>
-                  <a:srgbClr val="222222"/>
-                </a:solidFill>
-                <a:latin typeface="Calibri" pitchFamily="34" charset="0"/>
-                <a:ea typeface="Calibri" pitchFamily="34" charset="-122"/>
-                <a:cs typeface="Calibri" pitchFamily="34" charset="-120"/>
-              </a:rPr>
-              <a:t>確認メッセージで「OK」を押す</a:t>
-            </a:r>
-            <a:endParaRPr lang="en-US" sz="1150" dirty="0"/>
-          </a:p>
-        </p:txBody>
-      </p:sp>
-      <p:sp>
-        <p:nvSpPr>
-          <p:cNvPr id="14" name="Text 12"/>
-          <p:cNvSpPr txBox="1"/>
-          <p:nvPr/>
-        </p:nvSpPr>
-        <p:spPr>
-          <a:xfrm>
-            <a:off x="566928" y="3146933"/>
-            <a:ext cx="6428232" cy="257429"/>
-          </a:xfrm>
-          <a:prstGeom prst="rect">
-            <a:avLst/>
-          </a:prstGeom>
-          <a:noFill/>
-          <a:ln/>
-        </p:spPr>
-        <p:txBody>
-          <a:bodyPr wrap="square" lIns="0" tIns="0" rIns="0" bIns="0" rtlCol="0" anchor="t"/>
-          <a:lstStyle/>
-          <a:p>
-            <a:pPr indent="0" marL="0">
-              <a:lnSpc>
-                <a:spcPct val="125000"/>
-              </a:lnSpc>
-              <a:buNone/>
-            </a:pPr>
-            <a:r>
-              <a:rPr lang="en-US" sz="1100" dirty="0">
-                <a:solidFill>
-                  <a:srgbClr val="222222"/>
-                </a:solidFill>
-                <a:latin typeface="Calibri" pitchFamily="34" charset="0"/>
-                <a:ea typeface="Calibri" pitchFamily="34" charset="-122"/>
-                <a:cs typeface="Calibri" pitchFamily="34" charset="-120"/>
-              </a:rPr>
-              <a:t>削除しても、</a:t>
-            </a:r>
-            <a:pPr indent="0" marL="0">
-              <a:lnSpc>
-                <a:spcPct val="125000"/>
-              </a:lnSpc>
-              <a:buNone/>
-            </a:pPr>
-            <a:r>
-              <a:rPr lang="en-US" sz="1100" b="1" dirty="0">
-                <a:solidFill>
-                  <a:srgbClr val="222222"/>
-                </a:solidFill>
-                <a:latin typeface="Calibri" pitchFamily="34" charset="0"/>
-                <a:ea typeface="Calibri" pitchFamily="34" charset="-122"/>
-                <a:cs typeface="Calibri" pitchFamily="34" charset="-120"/>
-              </a:rPr>
-              <a:t>回答データ（個人情報を含まないもの）は残ります</a:t>
-            </a:r>
-            <a:pPr indent="0" marL="0">
-              <a:lnSpc>
-                <a:spcPct val="125000"/>
-              </a:lnSpc>
-              <a:buNone/>
-            </a:pPr>
-            <a:r>
-              <a:rPr lang="en-US" sz="1100" dirty="0">
-                <a:solidFill>
-                  <a:srgbClr val="222222"/>
-                </a:solidFill>
-                <a:latin typeface="Calibri" pitchFamily="34" charset="0"/>
-                <a:ea typeface="Calibri" pitchFamily="34" charset="-122"/>
-                <a:cs typeface="Calibri" pitchFamily="34" charset="-120"/>
-              </a:rPr>
-              <a:t>。</a:t>
-            </a:r>
-            <a:endParaRPr lang="en-US" sz="1100" dirty="0"/>
-          </a:p>
-        </p:txBody>
-      </p:sp>
-      <p:sp>
-        <p:nvSpPr>
-          <p:cNvPr id="15" name="Shape 13"/>
-          <p:cNvSpPr/>
-          <p:nvPr/>
-        </p:nvSpPr>
-        <p:spPr>
-          <a:xfrm>
-            <a:off x="566928" y="3440938"/>
-            <a:ext cx="6428232" cy="624459"/>
-          </a:xfrm>
-          <a:prstGeom prst="roundRect">
-            <a:avLst>
-              <a:gd name="adj" fmla="val 8786"/>
-            </a:avLst>
-          </a:prstGeom>
-          <a:solidFill>
-            <a:srgbClr val="FDF0E6"/>
-          </a:solidFill>
-          <a:ln w="9525">
-            <a:solidFill>
-              <a:srgbClr val="E08A3C"/>
-            </a:solidFill>
-            <a:prstDash val="solid"/>
-          </a:ln>
-        </p:spPr>
-      </p:sp>
-      <p:sp>
-        <p:nvSpPr>
-          <p:cNvPr id="16" name="Text 14"/>
-          <p:cNvSpPr txBox="1"/>
-          <p:nvPr/>
-        </p:nvSpPr>
-        <p:spPr>
-          <a:xfrm>
-            <a:off x="658368" y="3532378"/>
-            <a:ext cx="237744" cy="237744"/>
-          </a:xfrm>
-          <a:prstGeom prst="rect">
-            <a:avLst/>
-          </a:prstGeom>
-          <a:noFill/>
-          <a:ln/>
-        </p:spPr>
-        <p:txBody>
-          <a:bodyPr wrap="square" lIns="0" tIns="0" rIns="0" bIns="0" rtlCol="0" anchor="ctr"/>
-          <a:lstStyle/>
-          <a:p>
-            <a:pPr algn="ctr" indent="0" marL="0">
-              <a:buNone/>
-            </a:pPr>
-            <a:r>
-              <a:rPr lang="en-US" sz="1200" b="1" dirty="0">
-                <a:solidFill>
-                  <a:srgbClr val="C25A17"/>
-                </a:solidFill>
-                <a:latin typeface="Calibri" pitchFamily="34" charset="0"/>
-                <a:ea typeface="Calibri" pitchFamily="34" charset="-122"/>
-                <a:cs typeface="Calibri" pitchFamily="34" charset="-120"/>
-              </a:rPr>
-              <a:t>！</a:t>
-            </a:r>
-            <a:endParaRPr lang="en-US" sz="1200" dirty="0"/>
-          </a:p>
-        </p:txBody>
-      </p:sp>
-      <p:sp>
-        <p:nvSpPr>
-          <p:cNvPr id="17" name="Text 15"/>
-          <p:cNvSpPr txBox="1"/>
-          <p:nvPr/>
-        </p:nvSpPr>
-        <p:spPr>
-          <a:xfrm>
-            <a:off x="950976" y="3550666"/>
-            <a:ext cx="5925312" cy="441579"/>
-          </a:xfrm>
-          <a:prstGeom prst="rect">
-            <a:avLst/>
-          </a:prstGeom>
-          <a:noFill/>
-          <a:ln/>
-        </p:spPr>
-        <p:txBody>
-          <a:bodyPr wrap="square" lIns="0" tIns="0" rIns="0" bIns="0" rtlCol="0" anchor="t"/>
-          <a:lstStyle/>
-          <a:p>
-            <a:pPr indent="0" marL="0">
-              <a:lnSpc>
-                <a:spcPct val="120000"/>
-              </a:lnSpc>
-              <a:buNone/>
-            </a:pPr>
-            <a:r>
-              <a:rPr lang="en-US" sz="1050" dirty="0">
-                <a:solidFill>
-                  <a:srgbClr val="222222"/>
-                </a:solidFill>
-                <a:latin typeface="Calibri" pitchFamily="34" charset="0"/>
-                <a:ea typeface="Calibri" pitchFamily="34" charset="-122"/>
-                <a:cs typeface="Calibri" pitchFamily="34" charset="-120"/>
-              </a:rPr>
-              <a:t>削除すると、未送信ぶんの案内メールは送れなくなります。</a:t>
-            </a:r>
-            <a:pPr indent="0" marL="0">
-              <a:lnSpc>
-                <a:spcPct val="120000"/>
-              </a:lnSpc>
-              <a:buNone/>
-            </a:pPr>
-            <a:r>
-              <a:rPr lang="en-US" sz="1050" b="1" dirty="0">
-                <a:solidFill>
-                  <a:srgbClr val="222222"/>
-                </a:solidFill>
-                <a:latin typeface="Calibri" pitchFamily="34" charset="0"/>
-                <a:ea typeface="Calibri" pitchFamily="34" charset="-122"/>
-                <a:cs typeface="Calibri" pitchFamily="34" charset="-120"/>
-              </a:rPr>
-              <a:t>送信と集計が完全に終わってから</a:t>
-            </a:r>
-            <a:pPr indent="0" marL="0">
-              <a:lnSpc>
-                <a:spcPct val="120000"/>
-              </a:lnSpc>
-              <a:buNone/>
-            </a:pPr>
-            <a:r>
-              <a:rPr lang="en-US" sz="1050" dirty="0">
-                <a:solidFill>
-                  <a:srgbClr val="222222"/>
-                </a:solidFill>
-                <a:latin typeface="Calibri" pitchFamily="34" charset="0"/>
-                <a:ea typeface="Calibri" pitchFamily="34" charset="-122"/>
-                <a:cs typeface="Calibri" pitchFamily="34" charset="-120"/>
-              </a:rPr>
-              <a:t>実行してください。</a:t>
-            </a:r>
-            <a:endParaRPr lang="en-US" sz="1050" dirty="0"/>
-          </a:p>
-        </p:txBody>
-      </p:sp>
-      <p:sp>
-        <p:nvSpPr>
-          <p:cNvPr id="18" name="Shape 16"/>
-          <p:cNvSpPr/>
-          <p:nvPr/>
-        </p:nvSpPr>
-        <p:spPr>
-          <a:xfrm>
-            <a:off x="566928" y="4138549"/>
+            <a:off x="566928" y="2767457"/>
             <a:ext cx="6428232" cy="624459"/>
           </a:xfrm>
           <a:prstGeom prst="roundRect">
@@ -11274,13 +10730,13 @@
       </p:sp>
       <p:sp>
         <p:nvSpPr>
-          <p:cNvPr id="19" name="Text 17"/>
-          <p:cNvSpPr txBox="1"/>
-          <p:nvPr/>
-        </p:nvSpPr>
-        <p:spPr>
-          <a:xfrm>
-            <a:off x="658368" y="4229989"/>
+          <p:cNvPr id="9" name="Text 7"/>
+          <p:cNvSpPr txBox="1"/>
+          <p:nvPr/>
+        </p:nvSpPr>
+        <p:spPr>
+          <a:xfrm>
+            <a:off x="658368" y="2858897"/>
             <a:ext cx="237744" cy="237744"/>
           </a:xfrm>
           <a:prstGeom prst="rect">
@@ -11313,13 +10769,13 @@
       </p:sp>
       <p:sp>
         <p:nvSpPr>
-          <p:cNvPr id="20" name="Text 18"/>
-          <p:cNvSpPr txBox="1"/>
-          <p:nvPr/>
-        </p:nvSpPr>
-        <p:spPr>
-          <a:xfrm>
-            <a:off x="950976" y="4248277"/>
+          <p:cNvPr id="10" name="Text 8"/>
+          <p:cNvSpPr txBox="1"/>
+          <p:nvPr/>
+        </p:nvSpPr>
+        <p:spPr>
+          <a:xfrm>
+            <a:off x="950976" y="2877185"/>
             <a:ext cx="5925312" cy="441579"/>
           </a:xfrm>
           <a:prstGeom prst="rect">
@@ -11347,15 +10803,96 @@
                 <a:ea typeface="Calibri" pitchFamily="34" charset="-122"/>
                 <a:cs typeface="Calibri" pitchFamily="34" charset="-120"/>
               </a:rPr>
-              <a:t>「氏名・住所は収集せず、メールアドレスも送付・集計後に削除する」という運用方針に沿った操作です。来場者にもその旨を案内しています。</a:t>
+              <a:t>メールアドレスは出力されません。来場者は匿名のID（来場者ID）だけが入るので、企業をまたいだ同じ方の回答を突き合わせられます。</a:t>
             </a:r>
             <a:endParaRPr lang="en-US" sz="1050" dirty="0"/>
+          </a:p>
+        </p:txBody>
+      </p:sp>
+      <p:sp>
+        <p:nvSpPr>
+          <p:cNvPr id="11" name="Text 9"/>
+          <p:cNvSpPr txBox="1"/>
+          <p:nvPr/>
+        </p:nvSpPr>
+        <p:spPr>
+          <a:xfrm>
+            <a:off x="566928" y="3574796"/>
+            <a:ext cx="6428232" cy="257810"/>
+          </a:xfrm>
+          <a:prstGeom prst="rect">
+            <a:avLst/>
+          </a:prstGeom>
+          <a:noFill/>
+          <a:ln/>
+        </p:spPr>
+        <p:txBody>
+          <a:bodyPr wrap="square" lIns="0" tIns="0" rIns="0" bIns="0" rtlCol="0" anchor="t"/>
+          <a:lstStyle/>
+          <a:p>
+            <a:pPr indent="0" marL="0">
+              <a:buNone/>
+            </a:pPr>
+            <a:r>
+              <a:rPr lang="en-US" sz="1400" b="1" dirty="0">
+                <a:solidFill>
+                  <a:srgbClr val="1E2761"/>
+                </a:solidFill>
+                <a:latin typeface="Calibri" pitchFamily="34" charset="0"/>
+                <a:ea typeface="Calibri" pitchFamily="34" charset="-122"/>
+                <a:cs typeface="Calibri" pitchFamily="34" charset="-120"/>
+              </a:rPr>
+              <a:t>集計画面で見る</a:t>
+            </a:r>
+            <a:endParaRPr lang="en-US" sz="1400" dirty="0"/>
+          </a:p>
+        </p:txBody>
+      </p:sp>
+      <p:sp>
+        <p:nvSpPr>
+          <p:cNvPr id="12" name="Text 10"/>
+          <p:cNvSpPr txBox="1"/>
+          <p:nvPr/>
+        </p:nvSpPr>
+        <p:spPr>
+          <a:xfrm>
+            <a:off x="566928" y="3905758"/>
+            <a:ext cx="6428232" cy="459994"/>
+          </a:xfrm>
+          <a:prstGeom prst="rect">
+            <a:avLst/>
+          </a:prstGeom>
+          <a:noFill/>
+          <a:ln/>
+        </p:spPr>
+        <p:txBody>
+          <a:bodyPr wrap="square" lIns="0" tIns="0" rIns="0" bIns="0" rtlCol="0" anchor="t"/>
+          <a:lstStyle/>
+          <a:p>
+            <a:pPr indent="0" marL="0">
+              <a:lnSpc>
+                <a:spcPct val="125000"/>
+              </a:lnSpc>
+              <a:buNone/>
+            </a:pPr>
+            <a:r>
+              <a:rPr lang="en-US" sz="1100" dirty="0">
+                <a:solidFill>
+                  <a:srgbClr val="222222"/>
+                </a:solidFill>
+                <a:latin typeface="Calibri" pitchFamily="34" charset="0"/>
+                <a:ea typeface="Calibri" pitchFamily="34" charset="-122"/>
+                <a:cs typeface="Calibri" pitchFamily="34" charset="-120"/>
+              </a:rPr>
+              <a:t>企業ごとの「集計」画面では、設問ごとのグラフ・星評価の平均・NPS・自由記述の一覧が見られます。</a:t>
+            </a:r>
+            <a:endParaRPr lang="en-US" sz="1100" dirty="0"/>
           </a:p>
         </p:txBody>
       </p:sp>
       <p:pic>
         <p:nvPicPr>
-          <p:cNvPr id="21" name="Image 0" descr="C:\Users\sato\Desktop\enque\docs\images\o-purge.png">    </p:cNvPr>
+          <p:cNvPr id="13" name="Image 0" descr="C:\Users\sato\Desktop\enque\docs\images\o-stats.png">    </p:cNvPr>
           <p:cNvPicPr>
             <a:picLocks noChangeAspect="1"/>
           </p:cNvPicPr>
@@ -11369,8 +10906,8 @@
         </p:blipFill>
         <p:spPr>
           <a:xfrm>
-            <a:off x="936779" y="4836160"/>
-            <a:ext cx="5688531" cy="3474720"/>
+            <a:off x="2140821" y="4402328"/>
+            <a:ext cx="3280447" cy="3474720"/>
           </a:xfrm>
           <a:prstGeom prst="rect">
             <a:avLst/>
@@ -11379,13 +10916,13 @@
       </p:pic>
       <p:sp>
         <p:nvSpPr>
-          <p:cNvPr id="22" name="Text 19"/>
-          <p:cNvSpPr txBox="1"/>
-          <p:nvPr/>
-        </p:nvSpPr>
-        <p:spPr>
-          <a:xfrm>
-            <a:off x="566928" y="8365744"/>
+          <p:cNvPr id="14" name="Text 11"/>
+          <p:cNvSpPr txBox="1"/>
+          <p:nvPr/>
+        </p:nvSpPr>
+        <p:spPr>
+          <a:xfrm>
+            <a:off x="566928" y="7931912"/>
             <a:ext cx="6428232" cy="274320"/>
           </a:xfrm>
           <a:prstGeom prst="rect">
@@ -11410,7 +10947,7 @@
                 <a:ea typeface="Calibri" pitchFamily="34" charset="-122"/>
                 <a:cs typeface="Calibri" pitchFamily="34" charset="-120"/>
               </a:rPr>
-              <a:t>「メールアドレスを削除する」ボタンの周辺（説明文が見えるもの）。</a:t>
+              <a:t>企業の集計画面。設問ごとのグラフが見えるところ。</a:t>
             </a:r>
             <a:endParaRPr lang="en-US" sz="950" dirty="0"/>
           </a:p>
@@ -11418,7 +10955,7 @@
       </p:sp>
       <p:sp>
         <p:nvSpPr>
-          <p:cNvPr id="23" name="Text 20"/>
+          <p:cNvPr id="15" name="Text 12"/>
           <p:cNvSpPr txBox="1"/>
           <p:nvPr/>
         </p:nvSpPr>
@@ -13695,7 +13232,7 @@
                 <a:ea typeface="Calibri" pitchFamily="34" charset="-122"/>
                 <a:cs typeface="Calibri" pitchFamily="34" charset="-120"/>
               </a:rPr>
-              <a:t>次のイベントに向けて（データの整理）</a:t>
+              <a:t>終了後4：メールアドレスを削除する</a:t>
             </a:r>
             <a:endParaRPr lang="en-US" sz="2200" dirty="0"/>
           </a:p>
@@ -13710,7 +13247,7 @@
         <p:spPr>
           <a:xfrm>
             <a:off x="566928" y="1481328"/>
-            <a:ext cx="6428232" cy="459994"/>
+            <a:ext cx="6428232" cy="257429"/>
           </a:xfrm>
           <a:prstGeom prst="rect">
             <a:avLst/>
@@ -13737,7 +13274,7 @@
                 <a:ea typeface="Calibri" pitchFamily="34" charset="-122"/>
                 <a:cs typeface="Calibri" pitchFamily="34" charset="-120"/>
               </a:rPr>
-              <a:t>サーバーで次のコマンドを実行します（事務局のPCではなく、システムが動いているサーバーでの作業です）。</a:t>
+              <a:t>案内の送付と集計が終わったら、預かったメールアドレスを削除します。</a:t>
             </a:r>
             <a:endParaRPr lang="en-US" sz="1100" dirty="0"/>
           </a:p>
@@ -13745,14 +13282,73 @@
       </p:sp>
       <p:sp>
         <p:nvSpPr>
-          <p:cNvPr id="5" name="Text 3"/>
-          <p:cNvSpPr txBox="1"/>
-          <p:nvPr/>
-        </p:nvSpPr>
-        <p:spPr>
-          <a:xfrm>
-            <a:off x="566928" y="2087626"/>
-            <a:ext cx="6428232" cy="257810"/>
+          <p:cNvPr id="5" name="Shape 3"/>
+          <p:cNvSpPr/>
+          <p:nvPr/>
+        </p:nvSpPr>
+        <p:spPr>
+          <a:xfrm>
+            <a:off x="566928" y="1793621"/>
+            <a:ext cx="274320" cy="274320"/>
+          </a:xfrm>
+          <a:prstGeom prst="ellipse">
+            <a:avLst/>
+          </a:prstGeom>
+          <a:solidFill>
+            <a:srgbClr val="1E2761"/>
+          </a:solidFill>
+          <a:ln/>
+        </p:spPr>
+      </p:sp>
+      <p:sp>
+        <p:nvSpPr>
+          <p:cNvPr id="6" name="Text 4"/>
+          <p:cNvSpPr txBox="1"/>
+          <p:nvPr/>
+        </p:nvSpPr>
+        <p:spPr>
+          <a:xfrm>
+            <a:off x="566928" y="1793621"/>
+            <a:ext cx="274320" cy="274320"/>
+          </a:xfrm>
+          <a:prstGeom prst="rect">
+            <a:avLst/>
+          </a:prstGeom>
+          <a:noFill/>
+          <a:ln/>
+        </p:spPr>
+        <p:txBody>
+          <a:bodyPr wrap="square" lIns="0" tIns="0" rIns="0" bIns="0" rtlCol="0" anchor="ctr"/>
+          <a:lstStyle/>
+          <a:p>
+            <a:pPr algn="ctr" indent="0" marL="0">
+              <a:buNone/>
+            </a:pPr>
+            <a:r>
+              <a:rPr lang="en-US" sz="1100" b="1" dirty="0">
+                <a:solidFill>
+                  <a:srgbClr val="FFFFFF"/>
+                </a:solidFill>
+                <a:latin typeface="Calibri" pitchFamily="34" charset="0"/>
+                <a:ea typeface="Calibri" pitchFamily="34" charset="-122"/>
+                <a:cs typeface="Calibri" pitchFamily="34" charset="-120"/>
+              </a:rPr>
+              <a:t>1</a:t>
+            </a:r>
+            <a:endParaRPr lang="en-US" sz="1100" dirty="0"/>
+          </a:p>
+        </p:txBody>
+      </p:sp>
+      <p:sp>
+        <p:nvSpPr>
+          <p:cNvPr id="7" name="Text 5"/>
+          <p:cNvSpPr txBox="1"/>
+          <p:nvPr/>
+        </p:nvSpPr>
+        <p:spPr>
+          <a:xfrm>
+            <a:off x="969264" y="1775333"/>
+            <a:ext cx="6025896" cy="365760"/>
           </a:xfrm>
           <a:prstGeom prst="rect">
             <a:avLst/>
@@ -13765,32 +13361,271 @@
           <a:lstStyle/>
           <a:p>
             <a:pPr indent="0" marL="0">
-              <a:buNone/>
-            </a:pPr>
-            <a:r>
-              <a:rPr lang="en-US" sz="1400" b="1" dirty="0">
-                <a:solidFill>
-                  <a:srgbClr val="1E2761"/>
-                </a:solidFill>
-                <a:latin typeface="Calibri" pitchFamily="34" charset="0"/>
-                <a:ea typeface="Calibri" pitchFamily="34" charset="-122"/>
-                <a:cs typeface="Calibri" pitchFamily="34" charset="-120"/>
-              </a:rPr>
-              <a:t>テストで入れた回答だけ消したいとき</a:t>
-            </a:r>
-            <a:endParaRPr lang="en-US" sz="1400" dirty="0"/>
-          </a:p>
-        </p:txBody>
-      </p:sp>
-      <p:sp>
-        <p:nvSpPr>
-          <p:cNvPr id="6" name="Text 4"/>
-          <p:cNvSpPr txBox="1"/>
-          <p:nvPr/>
-        </p:nvSpPr>
-        <p:spPr>
-          <a:xfrm>
-            <a:off x="566928" y="2418588"/>
+              <a:lnSpc>
+                <a:spcPct val="125000"/>
+              </a:lnSpc>
+              <a:buNone/>
+            </a:pPr>
+            <a:r>
+              <a:rPr lang="en-US" sz="1150" dirty="0">
+                <a:solidFill>
+                  <a:srgbClr val="222222"/>
+                </a:solidFill>
+                <a:latin typeface="Calibri" pitchFamily="34" charset="0"/>
+                <a:ea typeface="Calibri" pitchFamily="34" charset="-122"/>
+                <a:cs typeface="Calibri" pitchFamily="34" charset="-120"/>
+              </a:rPr>
+              <a:t>「総合アンケート」の画面を開く</a:t>
+            </a:r>
+            <a:endParaRPr lang="en-US" sz="1150" dirty="0"/>
+          </a:p>
+        </p:txBody>
+      </p:sp>
+      <p:sp>
+        <p:nvSpPr>
+          <p:cNvPr id="8" name="Shape 6"/>
+          <p:cNvSpPr/>
+          <p:nvPr/>
+        </p:nvSpPr>
+        <p:spPr>
+          <a:xfrm>
+            <a:off x="566928" y="2250821"/>
+            <a:ext cx="274320" cy="274320"/>
+          </a:xfrm>
+          <a:prstGeom prst="ellipse">
+            <a:avLst/>
+          </a:prstGeom>
+          <a:solidFill>
+            <a:srgbClr val="1E2761"/>
+          </a:solidFill>
+          <a:ln/>
+        </p:spPr>
+      </p:sp>
+      <p:sp>
+        <p:nvSpPr>
+          <p:cNvPr id="9" name="Text 7"/>
+          <p:cNvSpPr txBox="1"/>
+          <p:nvPr/>
+        </p:nvSpPr>
+        <p:spPr>
+          <a:xfrm>
+            <a:off x="566928" y="2250821"/>
+            <a:ext cx="274320" cy="274320"/>
+          </a:xfrm>
+          <a:prstGeom prst="rect">
+            <a:avLst/>
+          </a:prstGeom>
+          <a:noFill/>
+          <a:ln/>
+        </p:spPr>
+        <p:txBody>
+          <a:bodyPr wrap="square" lIns="0" tIns="0" rIns="0" bIns="0" rtlCol="0" anchor="ctr"/>
+          <a:lstStyle/>
+          <a:p>
+            <a:pPr algn="ctr" indent="0" marL="0">
+              <a:buNone/>
+            </a:pPr>
+            <a:r>
+              <a:rPr lang="en-US" sz="1100" b="1" dirty="0">
+                <a:solidFill>
+                  <a:srgbClr val="FFFFFF"/>
+                </a:solidFill>
+                <a:latin typeface="Calibri" pitchFamily="34" charset="0"/>
+                <a:ea typeface="Calibri" pitchFamily="34" charset="-122"/>
+                <a:cs typeface="Calibri" pitchFamily="34" charset="-120"/>
+              </a:rPr>
+              <a:t>2</a:t>
+            </a:r>
+            <a:endParaRPr lang="en-US" sz="1100" dirty="0"/>
+          </a:p>
+        </p:txBody>
+      </p:sp>
+      <p:sp>
+        <p:nvSpPr>
+          <p:cNvPr id="10" name="Text 8"/>
+          <p:cNvSpPr txBox="1"/>
+          <p:nvPr/>
+        </p:nvSpPr>
+        <p:spPr>
+          <a:xfrm>
+            <a:off x="969264" y="2232533"/>
+            <a:ext cx="6025896" cy="365760"/>
+          </a:xfrm>
+          <a:prstGeom prst="rect">
+            <a:avLst/>
+          </a:prstGeom>
+          <a:noFill/>
+          <a:ln/>
+        </p:spPr>
+        <p:txBody>
+          <a:bodyPr wrap="square" lIns="0" tIns="0" rIns="0" bIns="0" rtlCol="0" anchor="t"/>
+          <a:lstStyle/>
+          <a:p>
+            <a:pPr indent="0" marL="0">
+              <a:lnSpc>
+                <a:spcPct val="125000"/>
+              </a:lnSpc>
+              <a:buNone/>
+            </a:pPr>
+            <a:r>
+              <a:rPr lang="en-US" sz="1150" dirty="0">
+                <a:solidFill>
+                  <a:srgbClr val="222222"/>
+                </a:solidFill>
+                <a:latin typeface="Calibri" pitchFamily="34" charset="0"/>
+                <a:ea typeface="Calibri" pitchFamily="34" charset="-122"/>
+                <a:cs typeface="Calibri" pitchFamily="34" charset="-120"/>
+              </a:rPr>
+              <a:t>一番下の</a:t>
+            </a:r>
+            <a:pPr indent="0" marL="0">
+              <a:lnSpc>
+                <a:spcPct val="125000"/>
+              </a:lnSpc>
+              <a:buNone/>
+            </a:pPr>
+            <a:r>
+              <a:rPr lang="en-US" sz="1150" b="1" dirty="0">
+                <a:solidFill>
+                  <a:srgbClr val="222222"/>
+                </a:solidFill>
+                <a:latin typeface="Calibri" pitchFamily="34" charset="0"/>
+                <a:ea typeface="Calibri" pitchFamily="34" charset="-122"/>
+                <a:cs typeface="Calibri" pitchFamily="34" charset="-120"/>
+              </a:rPr>
+              <a:t>「メールアドレスを削除する」</a:t>
+            </a:r>
+            <a:pPr indent="0" marL="0">
+              <a:lnSpc>
+                <a:spcPct val="125000"/>
+              </a:lnSpc>
+              <a:buNone/>
+            </a:pPr>
+            <a:r>
+              <a:rPr lang="en-US" sz="1150" dirty="0">
+                <a:solidFill>
+                  <a:srgbClr val="222222"/>
+                </a:solidFill>
+                <a:latin typeface="Calibri" pitchFamily="34" charset="0"/>
+                <a:ea typeface="Calibri" pitchFamily="34" charset="-122"/>
+                <a:cs typeface="Calibri" pitchFamily="34" charset="-120"/>
+              </a:rPr>
+              <a:t>を押す</a:t>
+            </a:r>
+            <a:endParaRPr lang="en-US" sz="1150" dirty="0"/>
+          </a:p>
+        </p:txBody>
+      </p:sp>
+      <p:sp>
+        <p:nvSpPr>
+          <p:cNvPr id="11" name="Shape 9"/>
+          <p:cNvSpPr/>
+          <p:nvPr/>
+        </p:nvSpPr>
+        <p:spPr>
+          <a:xfrm>
+            <a:off x="566928" y="2708021"/>
+            <a:ext cx="274320" cy="274320"/>
+          </a:xfrm>
+          <a:prstGeom prst="ellipse">
+            <a:avLst/>
+          </a:prstGeom>
+          <a:solidFill>
+            <a:srgbClr val="1E2761"/>
+          </a:solidFill>
+          <a:ln/>
+        </p:spPr>
+      </p:sp>
+      <p:sp>
+        <p:nvSpPr>
+          <p:cNvPr id="12" name="Text 10"/>
+          <p:cNvSpPr txBox="1"/>
+          <p:nvPr/>
+        </p:nvSpPr>
+        <p:spPr>
+          <a:xfrm>
+            <a:off x="566928" y="2708021"/>
+            <a:ext cx="274320" cy="274320"/>
+          </a:xfrm>
+          <a:prstGeom prst="rect">
+            <a:avLst/>
+          </a:prstGeom>
+          <a:noFill/>
+          <a:ln/>
+        </p:spPr>
+        <p:txBody>
+          <a:bodyPr wrap="square" lIns="0" tIns="0" rIns="0" bIns="0" rtlCol="0" anchor="ctr"/>
+          <a:lstStyle/>
+          <a:p>
+            <a:pPr algn="ctr" indent="0" marL="0">
+              <a:buNone/>
+            </a:pPr>
+            <a:r>
+              <a:rPr lang="en-US" sz="1100" b="1" dirty="0">
+                <a:solidFill>
+                  <a:srgbClr val="FFFFFF"/>
+                </a:solidFill>
+                <a:latin typeface="Calibri" pitchFamily="34" charset="0"/>
+                <a:ea typeface="Calibri" pitchFamily="34" charset="-122"/>
+                <a:cs typeface="Calibri" pitchFamily="34" charset="-120"/>
+              </a:rPr>
+              <a:t>3</a:t>
+            </a:r>
+            <a:endParaRPr lang="en-US" sz="1100" dirty="0"/>
+          </a:p>
+        </p:txBody>
+      </p:sp>
+      <p:sp>
+        <p:nvSpPr>
+          <p:cNvPr id="13" name="Text 11"/>
+          <p:cNvSpPr txBox="1"/>
+          <p:nvPr/>
+        </p:nvSpPr>
+        <p:spPr>
+          <a:xfrm>
+            <a:off x="969264" y="2689733"/>
+            <a:ext cx="6025896" cy="365760"/>
+          </a:xfrm>
+          <a:prstGeom prst="rect">
+            <a:avLst/>
+          </a:prstGeom>
+          <a:noFill/>
+          <a:ln/>
+        </p:spPr>
+        <p:txBody>
+          <a:bodyPr wrap="square" lIns="0" tIns="0" rIns="0" bIns="0" rtlCol="0" anchor="t"/>
+          <a:lstStyle/>
+          <a:p>
+            <a:pPr indent="0" marL="0">
+              <a:lnSpc>
+                <a:spcPct val="125000"/>
+              </a:lnSpc>
+              <a:buNone/>
+            </a:pPr>
+            <a:r>
+              <a:rPr lang="en-US" sz="1150" dirty="0">
+                <a:solidFill>
+                  <a:srgbClr val="222222"/>
+                </a:solidFill>
+                <a:latin typeface="Calibri" pitchFamily="34" charset="0"/>
+                <a:ea typeface="Calibri" pitchFamily="34" charset="-122"/>
+                <a:cs typeface="Calibri" pitchFamily="34" charset="-120"/>
+              </a:rPr>
+              <a:t>確認メッセージで「OK」を押す</a:t>
+            </a:r>
+            <a:endParaRPr lang="en-US" sz="1150" dirty="0"/>
+          </a:p>
+        </p:txBody>
+      </p:sp>
+      <p:sp>
+        <p:nvSpPr>
+          <p:cNvPr id="14" name="Text 12"/>
+          <p:cNvSpPr txBox="1"/>
+          <p:nvPr/>
+        </p:nvSpPr>
+        <p:spPr>
+          <a:xfrm>
+            <a:off x="566928" y="3146933"/>
             <a:ext cx="6428232" cy="257429"/>
           </a:xfrm>
           <a:prstGeom prst="rect">
@@ -13818,7 +13653,41 @@
                 <a:ea typeface="Calibri" pitchFamily="34" charset="-122"/>
                 <a:cs typeface="Calibri" pitchFamily="34" charset="-120"/>
               </a:rPr>
-              <a:t>まず件数を確認し、問題なければ実行します。</a:t>
+              <a:t>削除しても、</a:t>
+            </a:r>
+            <a:pPr indent="0" marL="0">
+              <a:lnSpc>
+                <a:spcPct val="125000"/>
+              </a:lnSpc>
+              <a:buNone/>
+            </a:pPr>
+            <a:r>
+              <a:rPr lang="en-US" sz="1100" b="1" dirty="0">
+                <a:solidFill>
+                  <a:srgbClr val="222222"/>
+                </a:solidFill>
+                <a:latin typeface="Calibri" pitchFamily="34" charset="0"/>
+                <a:ea typeface="Calibri" pitchFamily="34" charset="-122"/>
+                <a:cs typeface="Calibri" pitchFamily="34" charset="-120"/>
+              </a:rPr>
+              <a:t>回答データ（個人情報を含まないもの）は残ります</a:t>
+            </a:r>
+            <a:pPr indent="0" marL="0">
+              <a:lnSpc>
+                <a:spcPct val="125000"/>
+              </a:lnSpc>
+              <a:buNone/>
+            </a:pPr>
+            <a:r>
+              <a:rPr lang="en-US" sz="1100" dirty="0">
+                <a:solidFill>
+                  <a:srgbClr val="222222"/>
+                </a:solidFill>
+                <a:latin typeface="Calibri" pitchFamily="34" charset="0"/>
+                <a:ea typeface="Calibri" pitchFamily="34" charset="-122"/>
+                <a:cs typeface="Calibri" pitchFamily="34" charset="-120"/>
+              </a:rPr>
+              <a:t>。</a:t>
             </a:r>
             <a:endParaRPr lang="en-US" sz="1100" dirty="0"/>
           </a:p>
@@ -13826,279 +13695,18 @@
       </p:sp>
       <p:sp>
         <p:nvSpPr>
-          <p:cNvPr id="7" name="Text 5"/>
-          <p:cNvSpPr txBox="1"/>
-          <p:nvPr/>
-        </p:nvSpPr>
-        <p:spPr>
-          <a:xfrm>
-            <a:off x="713232" y="2712593"/>
-            <a:ext cx="6281928" cy="257429"/>
-          </a:xfrm>
-          <a:prstGeom prst="rect">
-            <a:avLst/>
-          </a:prstGeom>
-          <a:noFill/>
-          <a:ln/>
-        </p:spPr>
-        <p:txBody>
-          <a:bodyPr wrap="square" lIns="0" tIns="0" rIns="0" bIns="0" rtlCol="0" anchor="t"/>
-          <a:lstStyle/>
-          <a:p>
-            <a:pPr marL="342900" indent="-342900">
-              <a:lnSpc>
-                <a:spcPct val="125000"/>
-              </a:lnSpc>
-              <a:buSzPct val="100000"/>
-              <a:buChar char="●"/>
-            </a:pPr>
-            <a:r>
-              <a:rPr lang="en-US" sz="1100" dirty="0">
-                <a:solidFill>
-                  <a:srgbClr val="222222"/>
-                </a:solidFill>
-                <a:latin typeface="Calibri" pitchFamily="34" charset="0"/>
-                <a:ea typeface="Calibri" pitchFamily="34" charset="-122"/>
-                <a:cs typeface="Calibri" pitchFamily="34" charset="-120"/>
-              </a:rPr>
-              <a:t>確認：</a:t>
-            </a:r>
-            <a:pPr indent="0" marL="0">
-              <a:lnSpc>
-                <a:spcPct val="125000"/>
-              </a:lnSpc>
-              <a:buNone/>
-            </a:pPr>
-            <a:r>
-              <a:rPr lang="en-US" sz="1045" dirty="0">
-                <a:solidFill>
-                  <a:srgbClr val="222222"/>
-                </a:solidFill>
-                <a:latin typeface="Courier New" pitchFamily="34" charset="0"/>
-                <a:ea typeface="Courier New" pitchFamily="34" charset="-122"/>
-                <a:cs typeface="Courier New" pitchFamily="34" charset="-120"/>
-              </a:rPr>
-              <a:t>bin/reset.sh --responses --dry-run</a:t>
-            </a:r>
-            <a:endParaRPr lang="en-US" sz="1100" dirty="0"/>
-          </a:p>
-        </p:txBody>
-      </p:sp>
-      <p:sp>
-        <p:nvSpPr>
-          <p:cNvPr id="8" name="Text 6"/>
-          <p:cNvSpPr txBox="1"/>
-          <p:nvPr/>
-        </p:nvSpPr>
-        <p:spPr>
-          <a:xfrm>
-            <a:off x="713232" y="2988310"/>
-            <a:ext cx="6281928" cy="257429"/>
-          </a:xfrm>
-          <a:prstGeom prst="rect">
-            <a:avLst/>
-          </a:prstGeom>
-          <a:noFill/>
-          <a:ln/>
-        </p:spPr>
-        <p:txBody>
-          <a:bodyPr wrap="square" lIns="0" tIns="0" rIns="0" bIns="0" rtlCol="0" anchor="t"/>
-          <a:lstStyle/>
-          <a:p>
-            <a:pPr marL="342900" indent="-342900">
-              <a:lnSpc>
-                <a:spcPct val="125000"/>
-              </a:lnSpc>
-              <a:buSzPct val="100000"/>
-              <a:buChar char="●"/>
-            </a:pPr>
-            <a:r>
-              <a:rPr lang="en-US" sz="1100" dirty="0">
-                <a:solidFill>
-                  <a:srgbClr val="222222"/>
-                </a:solidFill>
-                <a:latin typeface="Calibri" pitchFamily="34" charset="0"/>
-                <a:ea typeface="Calibri" pitchFamily="34" charset="-122"/>
-                <a:cs typeface="Calibri" pitchFamily="34" charset="-120"/>
-              </a:rPr>
-              <a:t>実行：</a:t>
-            </a:r>
-            <a:pPr indent="0" marL="0">
-              <a:lnSpc>
-                <a:spcPct val="125000"/>
-              </a:lnSpc>
-              <a:buNone/>
-            </a:pPr>
-            <a:r>
-              <a:rPr lang="en-US" sz="1045" dirty="0">
-                <a:solidFill>
-                  <a:srgbClr val="222222"/>
-                </a:solidFill>
-                <a:latin typeface="Courier New" pitchFamily="34" charset="0"/>
-                <a:ea typeface="Courier New" pitchFamily="34" charset="-122"/>
-                <a:cs typeface="Courier New" pitchFamily="34" charset="-120"/>
-              </a:rPr>
-              <a:t>bin/reset.sh --responses --force</a:t>
-            </a:r>
-            <a:endParaRPr lang="en-US" sz="1100" dirty="0"/>
-          </a:p>
-        </p:txBody>
-      </p:sp>
-      <p:sp>
-        <p:nvSpPr>
-          <p:cNvPr id="9" name="Text 7"/>
-          <p:cNvSpPr txBox="1"/>
-          <p:nvPr/>
-        </p:nvSpPr>
-        <p:spPr>
-          <a:xfrm>
-            <a:off x="566928" y="3264027"/>
-            <a:ext cx="6428232" cy="257429"/>
-          </a:xfrm>
-          <a:prstGeom prst="rect">
-            <a:avLst/>
-          </a:prstGeom>
-          <a:noFill/>
-          <a:ln/>
-        </p:spPr>
-        <p:txBody>
-          <a:bodyPr wrap="square" lIns="0" tIns="0" rIns="0" bIns="0" rtlCol="0" anchor="t"/>
-          <a:lstStyle/>
-          <a:p>
-            <a:pPr indent="0" marL="0">
-              <a:lnSpc>
-                <a:spcPct val="125000"/>
-              </a:lnSpc>
-              <a:buNone/>
-            </a:pPr>
-            <a:r>
-              <a:rPr lang="en-US" sz="1100" dirty="0">
-                <a:solidFill>
-                  <a:srgbClr val="222222"/>
-                </a:solidFill>
-                <a:latin typeface="Calibri" pitchFamily="34" charset="0"/>
-                <a:ea typeface="Calibri" pitchFamily="34" charset="-122"/>
-                <a:cs typeface="Calibri" pitchFamily="34" charset="-120"/>
-              </a:rPr>
-              <a:t>イベント・企業・設問・景品・壁紙・アカウントは残ります。</a:t>
-            </a:r>
-            <a:endParaRPr lang="en-US" sz="1100" dirty="0"/>
-          </a:p>
-        </p:txBody>
-      </p:sp>
-      <p:sp>
-        <p:nvSpPr>
-          <p:cNvPr id="10" name="Text 8"/>
-          <p:cNvSpPr txBox="1"/>
-          <p:nvPr/>
-        </p:nvSpPr>
-        <p:spPr>
-          <a:xfrm>
-            <a:off x="566928" y="3667760"/>
-            <a:ext cx="6428232" cy="257810"/>
-          </a:xfrm>
-          <a:prstGeom prst="rect">
-            <a:avLst/>
-          </a:prstGeom>
-          <a:noFill/>
-          <a:ln/>
-        </p:spPr>
-        <p:txBody>
-          <a:bodyPr wrap="square" lIns="0" tIns="0" rIns="0" bIns="0" rtlCol="0" anchor="t"/>
-          <a:lstStyle/>
-          <a:p>
-            <a:pPr indent="0" marL="0">
-              <a:buNone/>
-            </a:pPr>
-            <a:r>
-              <a:rPr lang="en-US" sz="1400" b="1" dirty="0">
-                <a:solidFill>
-                  <a:srgbClr val="1E2761"/>
-                </a:solidFill>
-                <a:latin typeface="Calibri" pitchFamily="34" charset="0"/>
-                <a:ea typeface="Calibri" pitchFamily="34" charset="-122"/>
-                <a:cs typeface="Calibri" pitchFamily="34" charset="-120"/>
-              </a:rPr>
-              <a:t>イベントごと作り直したいとき</a:t>
-            </a:r>
-            <a:endParaRPr lang="en-US" sz="1400" dirty="0"/>
-          </a:p>
-        </p:txBody>
-      </p:sp>
-      <p:sp>
-        <p:nvSpPr>
-          <p:cNvPr id="11" name="Text 9"/>
-          <p:cNvSpPr txBox="1"/>
-          <p:nvPr/>
-        </p:nvSpPr>
-        <p:spPr>
-          <a:xfrm>
-            <a:off x="713232" y="3998722"/>
-            <a:ext cx="6281928" cy="257429"/>
-          </a:xfrm>
-          <a:prstGeom prst="rect">
-            <a:avLst/>
-          </a:prstGeom>
-          <a:noFill/>
-          <a:ln/>
-        </p:spPr>
-        <p:txBody>
-          <a:bodyPr wrap="square" lIns="0" tIns="0" rIns="0" bIns="0" rtlCol="0" anchor="t"/>
-          <a:lstStyle/>
-          <a:p>
-            <a:pPr marL="342900" indent="-342900">
-              <a:lnSpc>
-                <a:spcPct val="125000"/>
-              </a:lnSpc>
-              <a:buSzPct val="100000"/>
-              <a:buChar char="●"/>
-            </a:pPr>
-            <a:r>
-              <a:rPr lang="en-US" sz="1100" dirty="0">
-                <a:solidFill>
-                  <a:srgbClr val="222222"/>
-                </a:solidFill>
-                <a:latin typeface="Calibri" pitchFamily="34" charset="0"/>
-                <a:ea typeface="Calibri" pitchFamily="34" charset="-122"/>
-                <a:cs typeface="Calibri" pitchFamily="34" charset="-120"/>
-              </a:rPr>
-              <a:t>実行：</a:t>
-            </a:r>
-            <a:pPr indent="0" marL="0">
-              <a:lnSpc>
-                <a:spcPct val="125000"/>
-              </a:lnSpc>
-              <a:buNone/>
-            </a:pPr>
-            <a:r>
-              <a:rPr lang="en-US" sz="1045" dirty="0">
-                <a:solidFill>
-                  <a:srgbClr val="222222"/>
-                </a:solidFill>
-                <a:latin typeface="Courier New" pitchFamily="34" charset="0"/>
-                <a:ea typeface="Courier New" pitchFamily="34" charset="-122"/>
-                <a:cs typeface="Courier New" pitchFamily="34" charset="-120"/>
-              </a:rPr>
-              <a:t>bin/reset.sh --all --force</a:t>
-            </a:r>
-            <a:endParaRPr lang="en-US" sz="1100" dirty="0"/>
-          </a:p>
-        </p:txBody>
-      </p:sp>
-      <p:sp>
-        <p:nvSpPr>
-          <p:cNvPr id="12" name="Shape 10"/>
+          <p:cNvPr id="15" name="Shape 13"/>
           <p:cNvSpPr/>
           <p:nvPr/>
         </p:nvSpPr>
         <p:spPr>
           <a:xfrm>
-            <a:off x="566928" y="4274439"/>
-            <a:ext cx="6428232" cy="817817"/>
+            <a:off x="566928" y="3440938"/>
+            <a:ext cx="6428232" cy="624459"/>
           </a:xfrm>
           <a:prstGeom prst="roundRect">
             <a:avLst>
-              <a:gd name="adj" fmla="val 6709"/>
+              <a:gd name="adj" fmla="val 8786"/>
             </a:avLst>
           </a:prstGeom>
           <a:solidFill>
@@ -14114,13 +13722,13 @@
       </p:sp>
       <p:sp>
         <p:nvSpPr>
-          <p:cNvPr id="13" name="Text 11"/>
-          <p:cNvSpPr txBox="1"/>
-          <p:nvPr/>
-        </p:nvSpPr>
-        <p:spPr>
-          <a:xfrm>
-            <a:off x="658368" y="4365879"/>
+          <p:cNvPr id="16" name="Text 14"/>
+          <p:cNvSpPr txBox="1"/>
+          <p:nvPr/>
+        </p:nvSpPr>
+        <p:spPr>
+          <a:xfrm>
+            <a:off x="658368" y="3532378"/>
             <a:ext cx="237744" cy="237744"/>
           </a:xfrm>
           <a:prstGeom prst="rect">
@@ -14153,14 +13761,14 @@
       </p:sp>
       <p:sp>
         <p:nvSpPr>
-          <p:cNvPr id="14" name="Text 12"/>
-          <p:cNvSpPr txBox="1"/>
-          <p:nvPr/>
-        </p:nvSpPr>
-        <p:spPr>
-          <a:xfrm>
-            <a:off x="950976" y="4384167"/>
-            <a:ext cx="5925312" cy="634937"/>
+          <p:cNvPr id="17" name="Text 15"/>
+          <p:cNvSpPr txBox="1"/>
+          <p:nvPr/>
+        </p:nvSpPr>
+        <p:spPr>
+          <a:xfrm>
+            <a:off x="950976" y="3550666"/>
+            <a:ext cx="5925312" cy="441579"/>
           </a:xfrm>
           <a:prstGeom prst="rect">
             <a:avLst/>
@@ -14187,7 +13795,7 @@
                 <a:ea typeface="Calibri" pitchFamily="34" charset="-122"/>
                 <a:cs typeface="Calibri" pitchFamily="34" charset="-120"/>
               </a:rPr>
-              <a:t>どちらも元に戻せません。実行前に自動でバックアップを取りますが、念のため大事なデータはCSVで書き出しておいてください。</a:t>
+              <a:t>削除すると、未送信ぶんの案内メールは送れなくなります。</a:t>
             </a:r>
             <a:pPr indent="0" marL="0">
               <a:lnSpc>
@@ -14204,7 +13812,7 @@
                 <a:ea typeface="Calibri" pitchFamily="34" charset="-122"/>
                 <a:cs typeface="Calibri" pitchFamily="34" charset="-120"/>
               </a:rPr>
-              <a:t>企業担当者のアカウントは企業と一緒に消えます</a:t>
+              <a:t>送信と集計が完全に終わってから</a:t>
             </a:r>
             <a:pPr indent="0" marL="0">
               <a:lnSpc>
@@ -14221,7 +13829,7 @@
                 <a:ea typeface="Calibri" pitchFamily="34" charset="-122"/>
                 <a:cs typeface="Calibri" pitchFamily="34" charset="-120"/>
               </a:rPr>
-              <a:t>（主催者・受付は残ります）。</a:t>
+              <a:t>実行してください。</a:t>
             </a:r>
             <a:endParaRPr lang="en-US" sz="1050" dirty="0"/>
           </a:p>
@@ -14229,18 +13837,18 @@
       </p:sp>
       <p:sp>
         <p:nvSpPr>
-          <p:cNvPr id="15" name="Shape 13"/>
+          <p:cNvPr id="18" name="Shape 16"/>
           <p:cNvSpPr/>
           <p:nvPr/>
         </p:nvSpPr>
         <p:spPr>
           <a:xfrm>
-            <a:off x="566928" y="5165408"/>
-            <a:ext cx="6428232" cy="431102"/>
+            <a:off x="566928" y="4138549"/>
+            <a:ext cx="6428232" cy="624459"/>
           </a:xfrm>
           <a:prstGeom prst="roundRect">
             <a:avLst>
-              <a:gd name="adj" fmla="val 12726"/>
+              <a:gd name="adj" fmla="val 8786"/>
             </a:avLst>
           </a:prstGeom>
           <a:solidFill>
@@ -14256,13 +13864,13 @@
       </p:sp>
       <p:sp>
         <p:nvSpPr>
-          <p:cNvPr id="16" name="Text 14"/>
-          <p:cNvSpPr txBox="1"/>
-          <p:nvPr/>
-        </p:nvSpPr>
-        <p:spPr>
-          <a:xfrm>
-            <a:off x="658368" y="5256848"/>
+          <p:cNvPr id="19" name="Text 17"/>
+          <p:cNvSpPr txBox="1"/>
+          <p:nvPr/>
+        </p:nvSpPr>
+        <p:spPr>
+          <a:xfrm>
+            <a:off x="658368" y="4229989"/>
             <a:ext cx="237744" cy="237744"/>
           </a:xfrm>
           <a:prstGeom prst="rect">
@@ -14295,14 +13903,14 @@
       </p:sp>
       <p:sp>
         <p:nvSpPr>
-          <p:cNvPr id="17" name="Text 15"/>
-          <p:cNvSpPr txBox="1"/>
-          <p:nvPr/>
-        </p:nvSpPr>
-        <p:spPr>
-          <a:xfrm>
-            <a:off x="950976" y="5275136"/>
-            <a:ext cx="5925312" cy="248221"/>
+          <p:cNvPr id="20" name="Text 18"/>
+          <p:cNvSpPr txBox="1"/>
+          <p:nvPr/>
+        </p:nvSpPr>
+        <p:spPr>
+          <a:xfrm>
+            <a:off x="950976" y="4248277"/>
+            <a:ext cx="5925312" cy="441579"/>
           </a:xfrm>
           <a:prstGeom prst="rect">
             <a:avLst/>
@@ -14329,15 +13937,78 @@
                 <a:ea typeface="Calibri" pitchFamily="34" charset="-122"/>
                 <a:cs typeface="Calibri" pitchFamily="34" charset="-120"/>
               </a:rPr>
-              <a:t>実行するとデータベース名の入力を求められます。画面の指示どおりに入力してください。</a:t>
+              <a:t>「氏名・住所は収集せず、メールアドレスも送付・集計後に削除する」という運用方針に沿った操作です。来場者にもその旨を案内しています。</a:t>
             </a:r>
             <a:endParaRPr lang="en-US" sz="1050" dirty="0"/>
           </a:p>
         </p:txBody>
       </p:sp>
-      <p:sp>
-        <p:nvSpPr>
-          <p:cNvPr id="18" name="Text 16"/>
+      <p:pic>
+        <p:nvPicPr>
+          <p:cNvPr id="21" name="Image 0" descr="C:\Users\sato\Desktop\enque\docs\images\o-purge.png">    </p:cNvPr>
+          <p:cNvPicPr>
+            <a:picLocks noChangeAspect="1"/>
+          </p:cNvPicPr>
+          <p:nvPr/>
+        </p:nvPicPr>
+        <p:blipFill>
+          <a:blip r:embed="rId1"/>
+          <a:stretch>
+            <a:fillRect/>
+          </a:stretch>
+        </p:blipFill>
+        <p:spPr>
+          <a:xfrm>
+            <a:off x="936779" y="4836160"/>
+            <a:ext cx="5688531" cy="3474720"/>
+          </a:xfrm>
+          <a:prstGeom prst="rect">
+            <a:avLst/>
+          </a:prstGeom>
+        </p:spPr>
+      </p:pic>
+      <p:sp>
+        <p:nvSpPr>
+          <p:cNvPr id="22" name="Text 19"/>
+          <p:cNvSpPr txBox="1"/>
+          <p:nvPr/>
+        </p:nvSpPr>
+        <p:spPr>
+          <a:xfrm>
+            <a:off x="566928" y="8365744"/>
+            <a:ext cx="6428232" cy="274320"/>
+          </a:xfrm>
+          <a:prstGeom prst="rect">
+            <a:avLst/>
+          </a:prstGeom>
+          <a:noFill/>
+          <a:ln/>
+        </p:spPr>
+        <p:txBody>
+          <a:bodyPr wrap="square" lIns="0" tIns="0" rIns="0" bIns="0" rtlCol="0" anchor="ctr"/>
+          <a:lstStyle/>
+          <a:p>
+            <a:pPr algn="ctr" indent="0" marL="0">
+              <a:buNone/>
+            </a:pPr>
+            <a:r>
+              <a:rPr lang="en-US" sz="950" dirty="0">
+                <a:solidFill>
+                  <a:srgbClr val="6B6B6B"/>
+                </a:solidFill>
+                <a:latin typeface="Calibri" pitchFamily="34" charset="0"/>
+                <a:ea typeface="Calibri" pitchFamily="34" charset="-122"/>
+                <a:cs typeface="Calibri" pitchFamily="34" charset="-120"/>
+              </a:rPr>
+              <a:t>「メールアドレスを削除する」ボタンの周辺（説明文が見えるもの）。</a:t>
+            </a:r>
+            <a:endParaRPr lang="en-US" sz="950" dirty="0"/>
+          </a:p>
+        </p:txBody>
+      </p:sp>
+      <p:sp>
+        <p:nvSpPr>
+          <p:cNvPr id="23" name="Text 20"/>
           <p:cNvSpPr txBox="1"/>
           <p:nvPr/>
         </p:nvSpPr>
@@ -14478,6 +14149,789 @@
                 <a:ea typeface="Calibri" pitchFamily="34" charset="-122"/>
                 <a:cs typeface="Calibri" pitchFamily="34" charset="-120"/>
               </a:rPr>
+              <a:t>次のイベントに向けて（データの整理）</a:t>
+            </a:r>
+            <a:endParaRPr lang="en-US" sz="2200" dirty="0"/>
+          </a:p>
+        </p:txBody>
+      </p:sp>
+      <p:sp>
+        <p:nvSpPr>
+          <p:cNvPr id="4" name="Text 2"/>
+          <p:cNvSpPr txBox="1"/>
+          <p:nvPr/>
+        </p:nvSpPr>
+        <p:spPr>
+          <a:xfrm>
+            <a:off x="566928" y="1481328"/>
+            <a:ext cx="6428232" cy="459994"/>
+          </a:xfrm>
+          <a:prstGeom prst="rect">
+            <a:avLst/>
+          </a:prstGeom>
+          <a:noFill/>
+          <a:ln/>
+        </p:spPr>
+        <p:txBody>
+          <a:bodyPr wrap="square" lIns="0" tIns="0" rIns="0" bIns="0" rtlCol="0" anchor="t"/>
+          <a:lstStyle/>
+          <a:p>
+            <a:pPr indent="0" marL="0">
+              <a:lnSpc>
+                <a:spcPct val="125000"/>
+              </a:lnSpc>
+              <a:buNone/>
+            </a:pPr>
+            <a:r>
+              <a:rPr lang="en-US" sz="1100" dirty="0">
+                <a:solidFill>
+                  <a:srgbClr val="222222"/>
+                </a:solidFill>
+                <a:latin typeface="Calibri" pitchFamily="34" charset="0"/>
+                <a:ea typeface="Calibri" pitchFamily="34" charset="-122"/>
+                <a:cs typeface="Calibri" pitchFamily="34" charset="-120"/>
+              </a:rPr>
+              <a:t>サーバーで次のコマンドを実行します（事務局のPCではなく、システムが動いているサーバーでの作業です）。</a:t>
+            </a:r>
+            <a:endParaRPr lang="en-US" sz="1100" dirty="0"/>
+          </a:p>
+        </p:txBody>
+      </p:sp>
+      <p:sp>
+        <p:nvSpPr>
+          <p:cNvPr id="5" name="Text 3"/>
+          <p:cNvSpPr txBox="1"/>
+          <p:nvPr/>
+        </p:nvSpPr>
+        <p:spPr>
+          <a:xfrm>
+            <a:off x="566928" y="2087626"/>
+            <a:ext cx="6428232" cy="257810"/>
+          </a:xfrm>
+          <a:prstGeom prst="rect">
+            <a:avLst/>
+          </a:prstGeom>
+          <a:noFill/>
+          <a:ln/>
+        </p:spPr>
+        <p:txBody>
+          <a:bodyPr wrap="square" lIns="0" tIns="0" rIns="0" bIns="0" rtlCol="0" anchor="t"/>
+          <a:lstStyle/>
+          <a:p>
+            <a:pPr indent="0" marL="0">
+              <a:buNone/>
+            </a:pPr>
+            <a:r>
+              <a:rPr lang="en-US" sz="1400" b="1" dirty="0">
+                <a:solidFill>
+                  <a:srgbClr val="1E2761"/>
+                </a:solidFill>
+                <a:latin typeface="Calibri" pitchFamily="34" charset="0"/>
+                <a:ea typeface="Calibri" pitchFamily="34" charset="-122"/>
+                <a:cs typeface="Calibri" pitchFamily="34" charset="-120"/>
+              </a:rPr>
+              <a:t>テストで入れた回答だけ消したいとき</a:t>
+            </a:r>
+            <a:endParaRPr lang="en-US" sz="1400" dirty="0"/>
+          </a:p>
+        </p:txBody>
+      </p:sp>
+      <p:sp>
+        <p:nvSpPr>
+          <p:cNvPr id="6" name="Text 4"/>
+          <p:cNvSpPr txBox="1"/>
+          <p:nvPr/>
+        </p:nvSpPr>
+        <p:spPr>
+          <a:xfrm>
+            <a:off x="566928" y="2418588"/>
+            <a:ext cx="6428232" cy="257429"/>
+          </a:xfrm>
+          <a:prstGeom prst="rect">
+            <a:avLst/>
+          </a:prstGeom>
+          <a:noFill/>
+          <a:ln/>
+        </p:spPr>
+        <p:txBody>
+          <a:bodyPr wrap="square" lIns="0" tIns="0" rIns="0" bIns="0" rtlCol="0" anchor="t"/>
+          <a:lstStyle/>
+          <a:p>
+            <a:pPr indent="0" marL="0">
+              <a:lnSpc>
+                <a:spcPct val="125000"/>
+              </a:lnSpc>
+              <a:buNone/>
+            </a:pPr>
+            <a:r>
+              <a:rPr lang="en-US" sz="1100" dirty="0">
+                <a:solidFill>
+                  <a:srgbClr val="222222"/>
+                </a:solidFill>
+                <a:latin typeface="Calibri" pitchFamily="34" charset="0"/>
+                <a:ea typeface="Calibri" pitchFamily="34" charset="-122"/>
+                <a:cs typeface="Calibri" pitchFamily="34" charset="-120"/>
+              </a:rPr>
+              <a:t>まず件数を確認し、問題なければ実行します。</a:t>
+            </a:r>
+            <a:endParaRPr lang="en-US" sz="1100" dirty="0"/>
+          </a:p>
+        </p:txBody>
+      </p:sp>
+      <p:sp>
+        <p:nvSpPr>
+          <p:cNvPr id="7" name="Text 5"/>
+          <p:cNvSpPr txBox="1"/>
+          <p:nvPr/>
+        </p:nvSpPr>
+        <p:spPr>
+          <a:xfrm>
+            <a:off x="713232" y="2712593"/>
+            <a:ext cx="6281928" cy="257429"/>
+          </a:xfrm>
+          <a:prstGeom prst="rect">
+            <a:avLst/>
+          </a:prstGeom>
+          <a:noFill/>
+          <a:ln/>
+        </p:spPr>
+        <p:txBody>
+          <a:bodyPr wrap="square" lIns="0" tIns="0" rIns="0" bIns="0" rtlCol="0" anchor="t"/>
+          <a:lstStyle/>
+          <a:p>
+            <a:pPr marL="342900" indent="-342900">
+              <a:lnSpc>
+                <a:spcPct val="125000"/>
+              </a:lnSpc>
+              <a:buSzPct val="100000"/>
+              <a:buChar char="●"/>
+            </a:pPr>
+            <a:r>
+              <a:rPr lang="en-US" sz="1100" dirty="0">
+                <a:solidFill>
+                  <a:srgbClr val="222222"/>
+                </a:solidFill>
+                <a:latin typeface="Calibri" pitchFamily="34" charset="0"/>
+                <a:ea typeface="Calibri" pitchFamily="34" charset="-122"/>
+                <a:cs typeface="Calibri" pitchFamily="34" charset="-120"/>
+              </a:rPr>
+              <a:t>確認：</a:t>
+            </a:r>
+            <a:pPr indent="0" marL="0">
+              <a:lnSpc>
+                <a:spcPct val="125000"/>
+              </a:lnSpc>
+              <a:buNone/>
+            </a:pPr>
+            <a:r>
+              <a:rPr lang="en-US" sz="1045" dirty="0">
+                <a:solidFill>
+                  <a:srgbClr val="222222"/>
+                </a:solidFill>
+                <a:latin typeface="Courier New" pitchFamily="34" charset="0"/>
+                <a:ea typeface="Courier New" pitchFamily="34" charset="-122"/>
+                <a:cs typeface="Courier New" pitchFamily="34" charset="-120"/>
+              </a:rPr>
+              <a:t>bin/reset.sh --responses --dry-run</a:t>
+            </a:r>
+            <a:endParaRPr lang="en-US" sz="1100" dirty="0"/>
+          </a:p>
+        </p:txBody>
+      </p:sp>
+      <p:sp>
+        <p:nvSpPr>
+          <p:cNvPr id="8" name="Text 6"/>
+          <p:cNvSpPr txBox="1"/>
+          <p:nvPr/>
+        </p:nvSpPr>
+        <p:spPr>
+          <a:xfrm>
+            <a:off x="713232" y="2988310"/>
+            <a:ext cx="6281928" cy="257429"/>
+          </a:xfrm>
+          <a:prstGeom prst="rect">
+            <a:avLst/>
+          </a:prstGeom>
+          <a:noFill/>
+          <a:ln/>
+        </p:spPr>
+        <p:txBody>
+          <a:bodyPr wrap="square" lIns="0" tIns="0" rIns="0" bIns="0" rtlCol="0" anchor="t"/>
+          <a:lstStyle/>
+          <a:p>
+            <a:pPr marL="342900" indent="-342900">
+              <a:lnSpc>
+                <a:spcPct val="125000"/>
+              </a:lnSpc>
+              <a:buSzPct val="100000"/>
+              <a:buChar char="●"/>
+            </a:pPr>
+            <a:r>
+              <a:rPr lang="en-US" sz="1100" dirty="0">
+                <a:solidFill>
+                  <a:srgbClr val="222222"/>
+                </a:solidFill>
+                <a:latin typeface="Calibri" pitchFamily="34" charset="0"/>
+                <a:ea typeface="Calibri" pitchFamily="34" charset="-122"/>
+                <a:cs typeface="Calibri" pitchFamily="34" charset="-120"/>
+              </a:rPr>
+              <a:t>実行：</a:t>
+            </a:r>
+            <a:pPr indent="0" marL="0">
+              <a:lnSpc>
+                <a:spcPct val="125000"/>
+              </a:lnSpc>
+              <a:buNone/>
+            </a:pPr>
+            <a:r>
+              <a:rPr lang="en-US" sz="1045" dirty="0">
+                <a:solidFill>
+                  <a:srgbClr val="222222"/>
+                </a:solidFill>
+                <a:latin typeface="Courier New" pitchFamily="34" charset="0"/>
+                <a:ea typeface="Courier New" pitchFamily="34" charset="-122"/>
+                <a:cs typeface="Courier New" pitchFamily="34" charset="-120"/>
+              </a:rPr>
+              <a:t>bin/reset.sh --responses --force</a:t>
+            </a:r>
+            <a:endParaRPr lang="en-US" sz="1100" dirty="0"/>
+          </a:p>
+        </p:txBody>
+      </p:sp>
+      <p:sp>
+        <p:nvSpPr>
+          <p:cNvPr id="9" name="Text 7"/>
+          <p:cNvSpPr txBox="1"/>
+          <p:nvPr/>
+        </p:nvSpPr>
+        <p:spPr>
+          <a:xfrm>
+            <a:off x="566928" y="3264027"/>
+            <a:ext cx="6428232" cy="257429"/>
+          </a:xfrm>
+          <a:prstGeom prst="rect">
+            <a:avLst/>
+          </a:prstGeom>
+          <a:noFill/>
+          <a:ln/>
+        </p:spPr>
+        <p:txBody>
+          <a:bodyPr wrap="square" lIns="0" tIns="0" rIns="0" bIns="0" rtlCol="0" anchor="t"/>
+          <a:lstStyle/>
+          <a:p>
+            <a:pPr indent="0" marL="0">
+              <a:lnSpc>
+                <a:spcPct val="125000"/>
+              </a:lnSpc>
+              <a:buNone/>
+            </a:pPr>
+            <a:r>
+              <a:rPr lang="en-US" sz="1100" dirty="0">
+                <a:solidFill>
+                  <a:srgbClr val="222222"/>
+                </a:solidFill>
+                <a:latin typeface="Calibri" pitchFamily="34" charset="0"/>
+                <a:ea typeface="Calibri" pitchFamily="34" charset="-122"/>
+                <a:cs typeface="Calibri" pitchFamily="34" charset="-120"/>
+              </a:rPr>
+              <a:t>イベント・企業・設問・景品・壁紙・アカウントは残ります。</a:t>
+            </a:r>
+            <a:endParaRPr lang="en-US" sz="1100" dirty="0"/>
+          </a:p>
+        </p:txBody>
+      </p:sp>
+      <p:sp>
+        <p:nvSpPr>
+          <p:cNvPr id="10" name="Text 8"/>
+          <p:cNvSpPr txBox="1"/>
+          <p:nvPr/>
+        </p:nvSpPr>
+        <p:spPr>
+          <a:xfrm>
+            <a:off x="566928" y="3667760"/>
+            <a:ext cx="6428232" cy="257810"/>
+          </a:xfrm>
+          <a:prstGeom prst="rect">
+            <a:avLst/>
+          </a:prstGeom>
+          <a:noFill/>
+          <a:ln/>
+        </p:spPr>
+        <p:txBody>
+          <a:bodyPr wrap="square" lIns="0" tIns="0" rIns="0" bIns="0" rtlCol="0" anchor="t"/>
+          <a:lstStyle/>
+          <a:p>
+            <a:pPr indent="0" marL="0">
+              <a:buNone/>
+            </a:pPr>
+            <a:r>
+              <a:rPr lang="en-US" sz="1400" b="1" dirty="0">
+                <a:solidFill>
+                  <a:srgbClr val="1E2761"/>
+                </a:solidFill>
+                <a:latin typeface="Calibri" pitchFamily="34" charset="0"/>
+                <a:ea typeface="Calibri" pitchFamily="34" charset="-122"/>
+                <a:cs typeface="Calibri" pitchFamily="34" charset="-120"/>
+              </a:rPr>
+              <a:t>イベントごと作り直したいとき</a:t>
+            </a:r>
+            <a:endParaRPr lang="en-US" sz="1400" dirty="0"/>
+          </a:p>
+        </p:txBody>
+      </p:sp>
+      <p:sp>
+        <p:nvSpPr>
+          <p:cNvPr id="11" name="Text 9"/>
+          <p:cNvSpPr txBox="1"/>
+          <p:nvPr/>
+        </p:nvSpPr>
+        <p:spPr>
+          <a:xfrm>
+            <a:off x="713232" y="3998722"/>
+            <a:ext cx="6281928" cy="257429"/>
+          </a:xfrm>
+          <a:prstGeom prst="rect">
+            <a:avLst/>
+          </a:prstGeom>
+          <a:noFill/>
+          <a:ln/>
+        </p:spPr>
+        <p:txBody>
+          <a:bodyPr wrap="square" lIns="0" tIns="0" rIns="0" bIns="0" rtlCol="0" anchor="t"/>
+          <a:lstStyle/>
+          <a:p>
+            <a:pPr marL="342900" indent="-342900">
+              <a:lnSpc>
+                <a:spcPct val="125000"/>
+              </a:lnSpc>
+              <a:buSzPct val="100000"/>
+              <a:buChar char="●"/>
+            </a:pPr>
+            <a:r>
+              <a:rPr lang="en-US" sz="1100" dirty="0">
+                <a:solidFill>
+                  <a:srgbClr val="222222"/>
+                </a:solidFill>
+                <a:latin typeface="Calibri" pitchFamily="34" charset="0"/>
+                <a:ea typeface="Calibri" pitchFamily="34" charset="-122"/>
+                <a:cs typeface="Calibri" pitchFamily="34" charset="-120"/>
+              </a:rPr>
+              <a:t>実行：</a:t>
+            </a:r>
+            <a:pPr indent="0" marL="0">
+              <a:lnSpc>
+                <a:spcPct val="125000"/>
+              </a:lnSpc>
+              <a:buNone/>
+            </a:pPr>
+            <a:r>
+              <a:rPr lang="en-US" sz="1045" dirty="0">
+                <a:solidFill>
+                  <a:srgbClr val="222222"/>
+                </a:solidFill>
+                <a:latin typeface="Courier New" pitchFamily="34" charset="0"/>
+                <a:ea typeface="Courier New" pitchFamily="34" charset="-122"/>
+                <a:cs typeface="Courier New" pitchFamily="34" charset="-120"/>
+              </a:rPr>
+              <a:t>bin/reset.sh --all --force</a:t>
+            </a:r>
+            <a:endParaRPr lang="en-US" sz="1100" dirty="0"/>
+          </a:p>
+        </p:txBody>
+      </p:sp>
+      <p:sp>
+        <p:nvSpPr>
+          <p:cNvPr id="12" name="Shape 10"/>
+          <p:cNvSpPr/>
+          <p:nvPr/>
+        </p:nvSpPr>
+        <p:spPr>
+          <a:xfrm>
+            <a:off x="566928" y="4274439"/>
+            <a:ext cx="6428232" cy="817817"/>
+          </a:xfrm>
+          <a:prstGeom prst="roundRect">
+            <a:avLst>
+              <a:gd name="adj" fmla="val 6709"/>
+            </a:avLst>
+          </a:prstGeom>
+          <a:solidFill>
+            <a:srgbClr val="FDF0E6"/>
+          </a:solidFill>
+          <a:ln w="9525">
+            <a:solidFill>
+              <a:srgbClr val="E08A3C"/>
+            </a:solidFill>
+            <a:prstDash val="solid"/>
+          </a:ln>
+        </p:spPr>
+      </p:sp>
+      <p:sp>
+        <p:nvSpPr>
+          <p:cNvPr id="13" name="Text 11"/>
+          <p:cNvSpPr txBox="1"/>
+          <p:nvPr/>
+        </p:nvSpPr>
+        <p:spPr>
+          <a:xfrm>
+            <a:off x="658368" y="4365879"/>
+            <a:ext cx="237744" cy="237744"/>
+          </a:xfrm>
+          <a:prstGeom prst="rect">
+            <a:avLst/>
+          </a:prstGeom>
+          <a:noFill/>
+          <a:ln/>
+        </p:spPr>
+        <p:txBody>
+          <a:bodyPr wrap="square" lIns="0" tIns="0" rIns="0" bIns="0" rtlCol="0" anchor="ctr"/>
+          <a:lstStyle/>
+          <a:p>
+            <a:pPr algn="ctr" indent="0" marL="0">
+              <a:buNone/>
+            </a:pPr>
+            <a:r>
+              <a:rPr lang="en-US" sz="1200" b="1" dirty="0">
+                <a:solidFill>
+                  <a:srgbClr val="C25A17"/>
+                </a:solidFill>
+                <a:latin typeface="Calibri" pitchFamily="34" charset="0"/>
+                <a:ea typeface="Calibri" pitchFamily="34" charset="-122"/>
+                <a:cs typeface="Calibri" pitchFamily="34" charset="-120"/>
+              </a:rPr>
+              <a:t>！</a:t>
+            </a:r>
+            <a:endParaRPr lang="en-US" sz="1200" dirty="0"/>
+          </a:p>
+        </p:txBody>
+      </p:sp>
+      <p:sp>
+        <p:nvSpPr>
+          <p:cNvPr id="14" name="Text 12"/>
+          <p:cNvSpPr txBox="1"/>
+          <p:nvPr/>
+        </p:nvSpPr>
+        <p:spPr>
+          <a:xfrm>
+            <a:off x="950976" y="4384167"/>
+            <a:ext cx="5925312" cy="634937"/>
+          </a:xfrm>
+          <a:prstGeom prst="rect">
+            <a:avLst/>
+          </a:prstGeom>
+          <a:noFill/>
+          <a:ln/>
+        </p:spPr>
+        <p:txBody>
+          <a:bodyPr wrap="square" lIns="0" tIns="0" rIns="0" bIns="0" rtlCol="0" anchor="t"/>
+          <a:lstStyle/>
+          <a:p>
+            <a:pPr indent="0" marL="0">
+              <a:lnSpc>
+                <a:spcPct val="120000"/>
+              </a:lnSpc>
+              <a:buNone/>
+            </a:pPr>
+            <a:r>
+              <a:rPr lang="en-US" sz="1050" dirty="0">
+                <a:solidFill>
+                  <a:srgbClr val="222222"/>
+                </a:solidFill>
+                <a:latin typeface="Calibri" pitchFamily="34" charset="0"/>
+                <a:ea typeface="Calibri" pitchFamily="34" charset="-122"/>
+                <a:cs typeface="Calibri" pitchFamily="34" charset="-120"/>
+              </a:rPr>
+              <a:t>どちらも元に戻せません。実行前に自動でバックアップを取りますが、念のため大事なデータはCSVで書き出しておいてください。</a:t>
+            </a:r>
+            <a:pPr indent="0" marL="0">
+              <a:lnSpc>
+                <a:spcPct val="120000"/>
+              </a:lnSpc>
+              <a:buNone/>
+            </a:pPr>
+            <a:r>
+              <a:rPr lang="en-US" sz="1050" b="1" dirty="0">
+                <a:solidFill>
+                  <a:srgbClr val="222222"/>
+                </a:solidFill>
+                <a:latin typeface="Calibri" pitchFamily="34" charset="0"/>
+                <a:ea typeface="Calibri" pitchFamily="34" charset="-122"/>
+                <a:cs typeface="Calibri" pitchFamily="34" charset="-120"/>
+              </a:rPr>
+              <a:t>企業担当者のアカウントは企業と一緒に消えます</a:t>
+            </a:r>
+            <a:pPr indent="0" marL="0">
+              <a:lnSpc>
+                <a:spcPct val="120000"/>
+              </a:lnSpc>
+              <a:buNone/>
+            </a:pPr>
+            <a:r>
+              <a:rPr lang="en-US" sz="1050" dirty="0">
+                <a:solidFill>
+                  <a:srgbClr val="222222"/>
+                </a:solidFill>
+                <a:latin typeface="Calibri" pitchFamily="34" charset="0"/>
+                <a:ea typeface="Calibri" pitchFamily="34" charset="-122"/>
+                <a:cs typeface="Calibri" pitchFamily="34" charset="-120"/>
+              </a:rPr>
+              <a:t>（主催者・受付は残ります）。</a:t>
+            </a:r>
+            <a:endParaRPr lang="en-US" sz="1050" dirty="0"/>
+          </a:p>
+        </p:txBody>
+      </p:sp>
+      <p:sp>
+        <p:nvSpPr>
+          <p:cNvPr id="15" name="Shape 13"/>
+          <p:cNvSpPr/>
+          <p:nvPr/>
+        </p:nvSpPr>
+        <p:spPr>
+          <a:xfrm>
+            <a:off x="566928" y="5165408"/>
+            <a:ext cx="6428232" cy="431102"/>
+          </a:xfrm>
+          <a:prstGeom prst="roundRect">
+            <a:avLst>
+              <a:gd name="adj" fmla="val 12726"/>
+            </a:avLst>
+          </a:prstGeom>
+          <a:solidFill>
+            <a:srgbClr val="E8ECF8"/>
+          </a:solidFill>
+          <a:ln w="9525">
+            <a:solidFill>
+              <a:srgbClr val="1E2761"/>
+            </a:solidFill>
+            <a:prstDash val="solid"/>
+          </a:ln>
+        </p:spPr>
+      </p:sp>
+      <p:sp>
+        <p:nvSpPr>
+          <p:cNvPr id="16" name="Text 14"/>
+          <p:cNvSpPr txBox="1"/>
+          <p:nvPr/>
+        </p:nvSpPr>
+        <p:spPr>
+          <a:xfrm>
+            <a:off x="658368" y="5256848"/>
+            <a:ext cx="237744" cy="237744"/>
+          </a:xfrm>
+          <a:prstGeom prst="rect">
+            <a:avLst/>
+          </a:prstGeom>
+          <a:noFill/>
+          <a:ln/>
+        </p:spPr>
+        <p:txBody>
+          <a:bodyPr wrap="square" lIns="0" tIns="0" rIns="0" bIns="0" rtlCol="0" anchor="ctr"/>
+          <a:lstStyle/>
+          <a:p>
+            <a:pPr algn="ctr" indent="0" marL="0">
+              <a:buNone/>
+            </a:pPr>
+            <a:r>
+              <a:rPr lang="en-US" sz="1200" b="1" dirty="0">
+                <a:solidFill>
+                  <a:srgbClr val="1E2761"/>
+                </a:solidFill>
+                <a:latin typeface="Calibri" pitchFamily="34" charset="0"/>
+                <a:ea typeface="Calibri" pitchFamily="34" charset="-122"/>
+                <a:cs typeface="Calibri" pitchFamily="34" charset="-120"/>
+              </a:rPr>
+              <a:t>i</a:t>
+            </a:r>
+            <a:endParaRPr lang="en-US" sz="1200" dirty="0"/>
+          </a:p>
+        </p:txBody>
+      </p:sp>
+      <p:sp>
+        <p:nvSpPr>
+          <p:cNvPr id="17" name="Text 15"/>
+          <p:cNvSpPr txBox="1"/>
+          <p:nvPr/>
+        </p:nvSpPr>
+        <p:spPr>
+          <a:xfrm>
+            <a:off x="950976" y="5275136"/>
+            <a:ext cx="5925312" cy="248221"/>
+          </a:xfrm>
+          <a:prstGeom prst="rect">
+            <a:avLst/>
+          </a:prstGeom>
+          <a:noFill/>
+          <a:ln/>
+        </p:spPr>
+        <p:txBody>
+          <a:bodyPr wrap="square" lIns="0" tIns="0" rIns="0" bIns="0" rtlCol="0" anchor="t"/>
+          <a:lstStyle/>
+          <a:p>
+            <a:pPr indent="0" marL="0">
+              <a:lnSpc>
+                <a:spcPct val="120000"/>
+              </a:lnSpc>
+              <a:buNone/>
+            </a:pPr>
+            <a:r>
+              <a:rPr lang="en-US" sz="1050" dirty="0">
+                <a:solidFill>
+                  <a:srgbClr val="222222"/>
+                </a:solidFill>
+                <a:latin typeface="Calibri" pitchFamily="34" charset="0"/>
+                <a:ea typeface="Calibri" pitchFamily="34" charset="-122"/>
+                <a:cs typeface="Calibri" pitchFamily="34" charset="-120"/>
+              </a:rPr>
+              <a:t>実行するとデータベース名の入力を求められます。画面の指示どおりに入力してください。</a:t>
+            </a:r>
+            <a:endParaRPr lang="en-US" sz="1050" dirty="0"/>
+          </a:p>
+        </p:txBody>
+      </p:sp>
+      <p:sp>
+        <p:nvSpPr>
+          <p:cNvPr id="18" name="Text 16"/>
+          <p:cNvSpPr txBox="1"/>
+          <p:nvPr/>
+        </p:nvSpPr>
+        <p:spPr>
+          <a:xfrm>
+            <a:off x="566928" y="10186416"/>
+            <a:ext cx="6428232" cy="228600"/>
+          </a:xfrm>
+          <a:prstGeom prst="rect">
+            <a:avLst/>
+          </a:prstGeom>
+          <a:noFill/>
+          <a:ln/>
+        </p:spPr>
+        <p:txBody>
+          <a:bodyPr wrap="square" lIns="0" tIns="0" rIns="0" bIns="0" rtlCol="0" anchor="ctr"/>
+          <a:lstStyle/>
+          <a:p>
+            <a:pPr algn="r" indent="0" marL="0">
+              <a:buNone/>
+            </a:pPr>
+            <a:r>
+              <a:rPr lang="en-US" sz="900" dirty="0">
+                <a:solidFill>
+                  <a:srgbClr val="6B6B6B"/>
+                </a:solidFill>
+                <a:latin typeface="Calibri" pitchFamily="34" charset="0"/>
+                <a:ea typeface="Calibri" pitchFamily="34" charset="-122"/>
+                <a:cs typeface="Calibri" pitchFamily="34" charset="-120"/>
+              </a:rPr>
+              <a:t>主催者向け　21</a:t>
+            </a:r>
+            <a:endParaRPr lang="en-US" sz="900" dirty="0"/>
+          </a:p>
+        </p:txBody>
+      </p:sp>
+    </p:spTree>
+  </p:cSld>
+  <p:clrMapOvr>
+    <a:masterClrMapping/>
+  </p:clrMapOvr>
+</p:sld>
+</file>
+
+<file path=ppt/slides/slide22.xml><?xml version="1.0" encoding="utf-8"?>
+<p:sld xmlns:a="http://schemas.openxmlformats.org/drawingml/2006/main" xmlns:r="http://schemas.openxmlformats.org/officeDocument/2006/relationships" xmlns:p="http://schemas.openxmlformats.org/presentationml/2006/main">
+  <p:cSld name="Slide 22">
+    <p:bg>
+      <p:bgPr>
+        <a:solidFill>
+          <a:srgbClr val="FFFFFF"/>
+        </a:solidFill>
+      </p:bgPr>
+    </p:bg>
+    <p:spTree>
+      <p:nvGrpSpPr>
+        <p:cNvPr id="1" name=""/>
+        <p:cNvGrpSpPr/>
+        <p:nvPr/>
+      </p:nvGrpSpPr>
+      <p:grpSpPr>
+        <a:xfrm>
+          <a:off x="0" y="0"/>
+          <a:ext cx="0" cy="0"/>
+          <a:chOff x="0" y="0"/>
+          <a:chExt cx="0" cy="0"/>
+        </a:xfrm>
+      </p:grpSpPr>
+      <p:sp>
+        <p:nvSpPr>
+          <p:cNvPr id="2" name="Text 0"/>
+          <p:cNvSpPr txBox="1"/>
+          <p:nvPr/>
+        </p:nvSpPr>
+        <p:spPr>
+          <a:xfrm>
+            <a:off x="566928" y="457200"/>
+            <a:ext cx="6428232" cy="237744"/>
+          </a:xfrm>
+          <a:prstGeom prst="rect">
+            <a:avLst/>
+          </a:prstGeom>
+          <a:noFill/>
+          <a:ln/>
+        </p:spPr>
+        <p:txBody>
+          <a:bodyPr wrap="square" lIns="0" tIns="0" rIns="0" bIns="0" rtlCol="0" anchor="ctr"/>
+          <a:lstStyle/>
+          <a:p>
+            <a:pPr indent="0" marL="0">
+              <a:buNone/>
+            </a:pPr>
+            <a:r>
+              <a:rPr lang="en-US" sz="1000" b="1" dirty="0">
+                <a:solidFill>
+                  <a:srgbClr val="1E2761"/>
+                </a:solidFill>
+                <a:latin typeface="Calibri" pitchFamily="34" charset="0"/>
+                <a:ea typeface="Calibri" pitchFamily="34" charset="-122"/>
+                <a:cs typeface="Calibri" pitchFamily="34" charset="-120"/>
+              </a:rPr>
+              <a:t>主催者マニュアル</a:t>
+            </a:r>
+            <a:endParaRPr lang="en-US" sz="1000" dirty="0"/>
+          </a:p>
+        </p:txBody>
+      </p:sp>
+      <p:sp>
+        <p:nvSpPr>
+          <p:cNvPr id="3" name="Text 1"/>
+          <p:cNvSpPr txBox="1"/>
+          <p:nvPr/>
+        </p:nvSpPr>
+        <p:spPr>
+          <a:xfrm>
+            <a:off x="566928" y="713232"/>
+            <a:ext cx="6428232" cy="640080"/>
+          </a:xfrm>
+          <a:prstGeom prst="rect">
+            <a:avLst/>
+          </a:prstGeom>
+          <a:noFill/>
+          <a:ln/>
+        </p:spPr>
+        <p:txBody>
+          <a:bodyPr wrap="square" lIns="0" tIns="0" rIns="0" bIns="0" rtlCol="0" anchor="t"/>
+          <a:lstStyle/>
+          <a:p>
+            <a:pPr indent="0" marL="0">
+              <a:buNone/>
+            </a:pPr>
+            <a:r>
+              <a:rPr lang="en-US" sz="2200" b="1" dirty="0">
+                <a:solidFill>
+                  <a:srgbClr val="222222"/>
+                </a:solidFill>
+                <a:latin typeface="Calibri" pitchFamily="34" charset="0"/>
+                <a:ea typeface="Calibri" pitchFamily="34" charset="-122"/>
+                <a:cs typeface="Calibri" pitchFamily="34" charset="-120"/>
+              </a:rPr>
               <a:t>困ったときは</a:t>
             </a:r>
             <a:endParaRPr lang="en-US" sz="2200" dirty="0"/>
@@ -15043,7 +15497,7 @@
                 <a:ea typeface="Calibri" pitchFamily="34" charset="-122"/>
                 <a:cs typeface="Calibri" pitchFamily="34" charset="-120"/>
               </a:rPr>
-              <a:t>主催者向け　21</a:t>
+              <a:t>主催者向け　22</a:t>
             </a:r>
             <a:endParaRPr lang="en-US" sz="900" dirty="0"/>
           </a:p>

--- a/docs/manual-organizer.pptx
+++ b/docs/manual-organizer.pptx
@@ -8668,7 +8668,217 @@
       </p:sp>
       <p:sp>
         <p:nvSpPr>
-          <p:cNvPr id="36" name="Text 34"/>
+          <p:cNvPr id="36" name="Shape 34"/>
+          <p:cNvSpPr/>
+          <p:nvPr/>
+        </p:nvSpPr>
+        <p:spPr>
+          <a:xfrm>
+            <a:off x="566928" y="7538276"/>
+            <a:ext cx="6428232" cy="624459"/>
+          </a:xfrm>
+          <a:prstGeom prst="roundRect">
+            <a:avLst>
+              <a:gd name="adj" fmla="val 8786"/>
+            </a:avLst>
+          </a:prstGeom>
+          <a:solidFill>
+            <a:srgbClr val="E8ECF8"/>
+          </a:solidFill>
+          <a:ln w="9525">
+            <a:solidFill>
+              <a:srgbClr val="1E2761"/>
+            </a:solidFill>
+            <a:prstDash val="solid"/>
+          </a:ln>
+        </p:spPr>
+      </p:sp>
+      <p:sp>
+        <p:nvSpPr>
+          <p:cNvPr id="37" name="Text 35"/>
+          <p:cNvSpPr txBox="1"/>
+          <p:nvPr/>
+        </p:nvSpPr>
+        <p:spPr>
+          <a:xfrm>
+            <a:off x="658368" y="7629716"/>
+            <a:ext cx="237744" cy="237744"/>
+          </a:xfrm>
+          <a:prstGeom prst="rect">
+            <a:avLst/>
+          </a:prstGeom>
+          <a:noFill/>
+          <a:ln/>
+        </p:spPr>
+        <p:txBody>
+          <a:bodyPr wrap="square" lIns="0" tIns="0" rIns="0" bIns="0" rtlCol="0" anchor="ctr"/>
+          <a:lstStyle/>
+          <a:p>
+            <a:pPr algn="ctr" indent="0" marL="0">
+              <a:buNone/>
+            </a:pPr>
+            <a:r>
+              <a:rPr lang="en-US" sz="1200" b="1" dirty="0">
+                <a:solidFill>
+                  <a:srgbClr val="1E2761"/>
+                </a:solidFill>
+                <a:latin typeface="Calibri" pitchFamily="34" charset="0"/>
+                <a:ea typeface="Calibri" pitchFamily="34" charset="-122"/>
+                <a:cs typeface="Calibri" pitchFamily="34" charset="-120"/>
+              </a:rPr>
+              <a:t>i</a:t>
+            </a:r>
+            <a:endParaRPr lang="en-US" sz="1200" dirty="0"/>
+          </a:p>
+        </p:txBody>
+      </p:sp>
+      <p:sp>
+        <p:nvSpPr>
+          <p:cNvPr id="38" name="Text 36"/>
+          <p:cNvSpPr txBox="1"/>
+          <p:nvPr/>
+        </p:nvSpPr>
+        <p:spPr>
+          <a:xfrm>
+            <a:off x="950976" y="7648003"/>
+            <a:ext cx="5925312" cy="441579"/>
+          </a:xfrm>
+          <a:prstGeom prst="rect">
+            <a:avLst/>
+          </a:prstGeom>
+          <a:noFill/>
+          <a:ln/>
+        </p:spPr>
+        <p:txBody>
+          <a:bodyPr wrap="square" lIns="0" tIns="0" rIns="0" bIns="0" rtlCol="0" anchor="t"/>
+          <a:lstStyle/>
+          <a:p>
+            <a:pPr indent="0" marL="0">
+              <a:lnSpc>
+                <a:spcPct val="120000"/>
+              </a:lnSpc>
+              <a:buNone/>
+            </a:pPr>
+            <a:r>
+              <a:rPr lang="en-US" sz="1050" dirty="0">
+                <a:solidFill>
+                  <a:srgbClr val="222222"/>
+                </a:solidFill>
+                <a:latin typeface="Calibri" pitchFamily="34" charset="0"/>
+                <a:ea typeface="Calibri" pitchFamily="34" charset="-122"/>
+                <a:cs typeface="Calibri" pitchFamily="34" charset="-120"/>
+              </a:rPr>
+              <a:t>来場者の画面での呼び方（「ブース」か「企業」か）は、サーバーの </a:t>
+            </a:r>
+            <a:pPr indent="0" marL="0">
+              <a:lnSpc>
+                <a:spcPct val="120000"/>
+              </a:lnSpc>
+              <a:buNone/>
+            </a:pPr>
+            <a:r>
+              <a:rPr lang="en-US" sz="998" dirty="0">
+                <a:solidFill>
+                  <a:srgbClr val="222222"/>
+                </a:solidFill>
+                <a:latin typeface="Courier New" pitchFamily="34" charset="0"/>
+                <a:ea typeface="Courier New" pitchFamily="34" charset="-122"/>
+                <a:cs typeface="Courier New" pitchFamily="34" charset="-120"/>
+              </a:rPr>
+              <a:t>.env</a:t>
+            </a:r>
+            <a:pPr indent="0" marL="0">
+              <a:lnSpc>
+                <a:spcPct val="120000"/>
+              </a:lnSpc>
+              <a:buNone/>
+            </a:pPr>
+            <a:r>
+              <a:rPr lang="en-US" sz="1050" dirty="0">
+                <a:solidFill>
+                  <a:srgbClr val="222222"/>
+                </a:solidFill>
+                <a:latin typeface="Calibri" pitchFamily="34" charset="0"/>
+                <a:ea typeface="Calibri" pitchFamily="34" charset="-122"/>
+                <a:cs typeface="Calibri" pitchFamily="34" charset="-120"/>
+              </a:rPr>
+              <a:t> の </a:t>
+            </a:r>
+            <a:pPr indent="0" marL="0">
+              <a:lnSpc>
+                <a:spcPct val="120000"/>
+              </a:lnSpc>
+              <a:buNone/>
+            </a:pPr>
+            <a:r>
+              <a:rPr lang="en-US" sz="998" dirty="0">
+                <a:solidFill>
+                  <a:srgbClr val="222222"/>
+                </a:solidFill>
+                <a:latin typeface="Courier New" pitchFamily="34" charset="0"/>
+                <a:ea typeface="Courier New" pitchFamily="34" charset="-122"/>
+                <a:cs typeface="Courier New" pitchFamily="34" charset="-120"/>
+              </a:rPr>
+              <a:t>BOOTH_LABEL</a:t>
+            </a:r>
+            <a:pPr indent="0" marL="0">
+              <a:lnSpc>
+                <a:spcPct val="120000"/>
+              </a:lnSpc>
+              <a:buNone/>
+            </a:pPr>
+            <a:r>
+              <a:rPr lang="en-US" sz="1050" dirty="0">
+                <a:solidFill>
+                  <a:srgbClr val="222222"/>
+                </a:solidFill>
+                <a:latin typeface="Calibri" pitchFamily="34" charset="0"/>
+                <a:ea typeface="Calibri" pitchFamily="34" charset="-122"/>
+                <a:cs typeface="Calibri" pitchFamily="34" charset="-120"/>
+              </a:rPr>
+              <a:t> で変えられます。合同説明会のように「企業」と呼ぶイベントでは </a:t>
+            </a:r>
+            <a:pPr indent="0" marL="0">
+              <a:lnSpc>
+                <a:spcPct val="120000"/>
+              </a:lnSpc>
+              <a:buNone/>
+            </a:pPr>
+            <a:r>
+              <a:rPr lang="en-US" sz="998" dirty="0">
+                <a:solidFill>
+                  <a:srgbClr val="222222"/>
+                </a:solidFill>
+                <a:latin typeface="Courier New" pitchFamily="34" charset="0"/>
+                <a:ea typeface="Courier New" pitchFamily="34" charset="-122"/>
+                <a:cs typeface="Courier New" pitchFamily="34" charset="-120"/>
+              </a:rPr>
+              <a:t>BOOTH_LABEL=企業</a:t>
+            </a:r>
+            <a:pPr indent="0" marL="0">
+              <a:lnSpc>
+                <a:spcPct val="120000"/>
+              </a:lnSpc>
+              <a:buNone/>
+            </a:pPr>
+            <a:r>
+              <a:rPr lang="en-US" sz="1050" dirty="0">
+                <a:solidFill>
+                  <a:srgbClr val="222222"/>
+                </a:solidFill>
+                <a:latin typeface="Calibri" pitchFamily="34" charset="0"/>
+                <a:ea typeface="Calibri" pitchFamily="34" charset="-122"/>
+                <a:cs typeface="Calibri" pitchFamily="34" charset="-120"/>
+              </a:rPr>
+              <a:t> にします。</a:t>
+            </a:r>
+            <a:endParaRPr lang="en-US" sz="1050" dirty="0"/>
+          </a:p>
+        </p:txBody>
+      </p:sp>
+      <p:sp>
+        <p:nvSpPr>
+          <p:cNvPr id="39" name="Text 37"/>
           <p:cNvSpPr txBox="1"/>
           <p:nvPr/>
         </p:nvSpPr>
@@ -8831,8 +9041,8 @@
         </p:blipFill>
         <p:spPr>
           <a:xfrm>
-            <a:off x="1520867" y="1481328"/>
-            <a:ext cx="4520353" cy="3474720"/>
+            <a:off x="1639824" y="1481328"/>
+            <a:ext cx="4282440" cy="3474720"/>
           </a:xfrm>
           <a:prstGeom prst="rect">
             <a:avLst/>

--- a/docs/manual-organizer.pptx
+++ b/docs/manual-organizer.pptx
@@ -8813,8 +8813,8 @@
         </p:blipFill>
         <p:spPr>
           <a:xfrm>
-            <a:off x="2866815" y="1481328"/>
-            <a:ext cx="1828458" cy="3474720"/>
+            <a:off x="2889358" y="1481328"/>
+            <a:ext cx="1783372" cy="3474720"/>
           </a:xfrm>
           <a:prstGeom prst="rect">
             <a:avLst/>

--- a/docs/manual-organizer.pptx
+++ b/docs/manual-organizer.pptx
@@ -16914,7 +16914,7 @@
         <p:spPr>
           <a:xfrm>
             <a:off x="969264" y="1481328"/>
-            <a:ext cx="6025896" cy="365760"/>
+            <a:ext cx="6025896" cy="478409"/>
           </a:xfrm>
           <a:prstGeom prst="rect">
             <a:avLst/>
@@ -16975,7 +16975,7 @@
                 <a:ea typeface="Calibri" pitchFamily="34" charset="-122"/>
                 <a:cs typeface="Calibri" pitchFamily="34" charset="-120"/>
               </a:rPr>
-              <a:t>に変える</a:t>
+              <a:t>に変える（表示は「終了（案内メール送付）」です）</a:t>
             </a:r>
             <a:endParaRPr lang="en-US" sz="1150" dirty="0"/>
           </a:p>
@@ -16989,7 +16989,7 @@
         </p:nvSpPr>
         <p:spPr>
           <a:xfrm>
-            <a:off x="566928" y="1938528"/>
+            <a:off x="566928" y="2014601"/>
             <a:ext cx="6428232" cy="257429"/>
           </a:xfrm>
           <a:prstGeom prst="rect">
@@ -17031,7 +17031,7 @@
         </p:nvSpPr>
         <p:spPr>
           <a:xfrm>
-            <a:off x="566928" y="2232533"/>
+            <a:off x="566928" y="2308606"/>
             <a:ext cx="6428232" cy="624459"/>
           </a:xfrm>
           <a:prstGeom prst="roundRect">
@@ -17058,7 +17058,7 @@
         </p:nvSpPr>
         <p:spPr>
           <a:xfrm>
-            <a:off x="658368" y="2323973"/>
+            <a:off x="658368" y="2400046"/>
             <a:ext cx="237744" cy="237744"/>
           </a:xfrm>
           <a:prstGeom prst="rect">
@@ -17097,7 +17097,7 @@
         </p:nvSpPr>
         <p:spPr>
           <a:xfrm>
-            <a:off x="950976" y="2342261"/>
+            <a:off x="950976" y="2418334"/>
             <a:ext cx="5925312" cy="441579"/>
           </a:xfrm>
           <a:prstGeom prst="rect">
@@ -17147,7 +17147,7 @@
         </p:blipFill>
         <p:spPr>
           <a:xfrm>
-            <a:off x="1504370" y="2930144"/>
+            <a:off x="1504370" y="3006217"/>
             <a:ext cx="4553347" cy="3474720"/>
           </a:xfrm>
           <a:prstGeom prst="rect">
@@ -17163,7 +17163,7 @@
         </p:nvSpPr>
         <p:spPr>
           <a:xfrm>
-            <a:off x="566928" y="6459728"/>
+            <a:off x="566928" y="6535801"/>
             <a:ext cx="6428232" cy="274320"/>
           </a:xfrm>
           <a:prstGeom prst="rect">
@@ -26714,7 +26714,132 @@
       </p:sp>
       <p:sp>
         <p:nvSpPr>
-          <p:cNvPr id="43" name="Text 41"/>
+          <p:cNvPr id="43" name="Shape 41"/>
+          <p:cNvSpPr/>
+          <p:nvPr/>
+        </p:nvSpPr>
+        <p:spPr>
+          <a:xfrm>
+            <a:off x="566928" y="8902573"/>
+            <a:ext cx="6428232" cy="817817"/>
+          </a:xfrm>
+          <a:prstGeom prst="roundRect">
+            <a:avLst>
+              <a:gd name="adj" fmla="val 6709"/>
+            </a:avLst>
+          </a:prstGeom>
+          <a:solidFill>
+            <a:srgbClr val="FDF0E6"/>
+          </a:solidFill>
+          <a:ln w="9525">
+            <a:solidFill>
+              <a:srgbClr val="E08A3C"/>
+            </a:solidFill>
+            <a:prstDash val="solid"/>
+          </a:ln>
+        </p:spPr>
+      </p:sp>
+      <p:sp>
+        <p:nvSpPr>
+          <p:cNvPr id="44" name="Text 42"/>
+          <p:cNvSpPr txBox="1"/>
+          <p:nvPr/>
+        </p:nvSpPr>
+        <p:spPr>
+          <a:xfrm>
+            <a:off x="658368" y="8994013"/>
+            <a:ext cx="237744" cy="237744"/>
+          </a:xfrm>
+          <a:prstGeom prst="rect">
+            <a:avLst/>
+          </a:prstGeom>
+          <a:noFill/>
+          <a:ln/>
+        </p:spPr>
+        <p:txBody>
+          <a:bodyPr wrap="square" lIns="0" tIns="0" rIns="0" bIns="0" rtlCol="0" anchor="ctr"/>
+          <a:lstStyle/>
+          <a:p>
+            <a:pPr algn="ctr" indent="0" marL="0">
+              <a:buNone/>
+            </a:pPr>
+            <a:r>
+              <a:rPr lang="en-US" sz="1200" b="1" dirty="0">
+                <a:solidFill>
+                  <a:srgbClr val="C25A17"/>
+                </a:solidFill>
+                <a:latin typeface="Calibri" pitchFamily="34" charset="0"/>
+                <a:ea typeface="Calibri" pitchFamily="34" charset="-122"/>
+                <a:cs typeface="Calibri" pitchFamily="34" charset="-120"/>
+              </a:rPr>
+              <a:t>！</a:t>
+            </a:r>
+            <a:endParaRPr lang="en-US" sz="1200" dirty="0"/>
+          </a:p>
+        </p:txBody>
+      </p:sp>
+      <p:sp>
+        <p:nvSpPr>
+          <p:cNvPr id="45" name="Text 43"/>
+          <p:cNvSpPr txBox="1"/>
+          <p:nvPr/>
+        </p:nvSpPr>
+        <p:spPr>
+          <a:xfrm>
+            <a:off x="950976" y="9012301"/>
+            <a:ext cx="5925312" cy="634937"/>
+          </a:xfrm>
+          <a:prstGeom prst="rect">
+            <a:avLst/>
+          </a:prstGeom>
+          <a:noFill/>
+          <a:ln/>
+        </p:spPr>
+        <p:txBody>
+          <a:bodyPr wrap="square" lIns="0" tIns="0" rIns="0" bIns="0" rtlCol="0" anchor="t"/>
+          <a:lstStyle/>
+          <a:p>
+            <a:pPr indent="0" marL="0">
+              <a:lnSpc>
+                <a:spcPct val="120000"/>
+              </a:lnSpc>
+              <a:buNone/>
+            </a:pPr>
+            <a:r>
+              <a:rPr lang="en-US" sz="1050" b="1" dirty="0">
+                <a:solidFill>
+                  <a:srgbClr val="222222"/>
+                </a:solidFill>
+                <a:latin typeface="Calibri" pitchFamily="34" charset="0"/>
+                <a:ea typeface="Calibri" pitchFamily="34" charset="-122"/>
+                <a:cs typeface="Calibri" pitchFamily="34" charset="-120"/>
+              </a:rPr>
+              <a:t>説明文に「メールで総合アンケートをお送りします」といった案内を書いていないか確認してください。</a:t>
+            </a:r>
+            <a:pPr indent="0" marL="0">
+              <a:lnSpc>
+                <a:spcPct val="120000"/>
+              </a:lnSpc>
+              <a:buNone/>
+            </a:pPr>
+            <a:r>
+              <a:rPr lang="en-US" sz="1050" dirty="0">
+                <a:solidFill>
+                  <a:srgbClr val="222222"/>
+                </a:solidFill>
+                <a:latin typeface="Calibri" pitchFamily="34" charset="0"/>
+                <a:ea typeface="Calibri" pitchFamily="34" charset="-122"/>
+                <a:cs typeface="Calibri" pitchFamily="34" charset="-120"/>
+              </a:rPr>
+              <a:t> 総合アンケートは会期中にこの画面で答えてもらう形になったため、古い案内が残っていると来場者が混乱します（説明文は画面の文言ではなく、事務局が入力した内容です）。</a:t>
+            </a:r>
+            <a:endParaRPr lang="en-US" sz="1050" dirty="0"/>
+          </a:p>
+        </p:txBody>
+      </p:sp>
+      <p:sp>
+        <p:nvSpPr>
+          <p:cNvPr id="46" name="Text 44"/>
           <p:cNvSpPr txBox="1"/>
           <p:nvPr/>
         </p:nvSpPr>

--- a/docs/manual-organizer.pptx
+++ b/docs/manual-organizer.pptx
@@ -7961,6 +7961,148 @@
             </a:avLst>
           </a:prstGeom>
           <a:solidFill>
+            <a:srgbClr val="E8ECF8"/>
+          </a:solidFill>
+          <a:ln w="9525">
+            <a:solidFill>
+              <a:srgbClr val="1E2761"/>
+            </a:solidFill>
+            <a:prstDash val="solid"/>
+          </a:ln>
+        </p:spPr>
+      </p:sp>
+      <p:sp>
+        <p:nvSpPr>
+          <p:cNvPr id="24" name="Text 22"/>
+          <p:cNvSpPr txBox="1"/>
+          <p:nvPr/>
+        </p:nvSpPr>
+        <p:spPr>
+          <a:xfrm>
+            <a:off x="658368" y="5718175"/>
+            <a:ext cx="237744" cy="237744"/>
+          </a:xfrm>
+          <a:prstGeom prst="rect">
+            <a:avLst/>
+          </a:prstGeom>
+          <a:noFill/>
+          <a:ln/>
+        </p:spPr>
+        <p:txBody>
+          <a:bodyPr wrap="square" lIns="0" tIns="0" rIns="0" bIns="0" rtlCol="0" anchor="ctr"/>
+          <a:lstStyle/>
+          <a:p>
+            <a:pPr algn="ctr" indent="0" marL="0">
+              <a:buNone/>
+            </a:pPr>
+            <a:r>
+              <a:rPr lang="en-US" sz="1200" b="1" dirty="0">
+                <a:solidFill>
+                  <a:srgbClr val="1E2761"/>
+                </a:solidFill>
+                <a:latin typeface="Calibri" pitchFamily="34" charset="0"/>
+                <a:ea typeface="Calibri" pitchFamily="34" charset="-122"/>
+                <a:cs typeface="Calibri" pitchFamily="34" charset="-120"/>
+              </a:rPr>
+              <a:t>i</a:t>
+            </a:r>
+            <a:endParaRPr lang="en-US" sz="1200" dirty="0"/>
+          </a:p>
+        </p:txBody>
+      </p:sp>
+      <p:sp>
+        <p:nvSpPr>
+          <p:cNvPr id="25" name="Text 23"/>
+          <p:cNvSpPr txBox="1"/>
+          <p:nvPr/>
+        </p:nvSpPr>
+        <p:spPr>
+          <a:xfrm>
+            <a:off x="950976" y="5736463"/>
+            <a:ext cx="5925312" cy="634937"/>
+          </a:xfrm>
+          <a:prstGeom prst="rect">
+            <a:avLst/>
+          </a:prstGeom>
+          <a:noFill/>
+          <a:ln/>
+        </p:spPr>
+        <p:txBody>
+          <a:bodyPr wrap="square" lIns="0" tIns="0" rIns="0" bIns="0" rtlCol="0" anchor="t"/>
+          <a:lstStyle/>
+          <a:p>
+            <a:pPr indent="0" marL="0">
+              <a:lnSpc>
+                <a:spcPct val="120000"/>
+              </a:lnSpc>
+              <a:buNone/>
+            </a:pPr>
+            <a:r>
+              <a:rPr lang="en-US" sz="1050" dirty="0">
+                <a:solidFill>
+                  <a:srgbClr val="222222"/>
+                </a:solidFill>
+                <a:latin typeface="Calibri" pitchFamily="34" charset="0"/>
+                <a:ea typeface="Calibri" pitchFamily="34" charset="-122"/>
+                <a:cs typeface="Calibri" pitchFamily="34" charset="-120"/>
+              </a:rPr>
+              <a:t>総合アンケートの設問は</a:t>
+            </a:r>
+            <a:pPr indent="0" marL="0">
+              <a:lnSpc>
+                <a:spcPct val="120000"/>
+              </a:lnSpc>
+              <a:buNone/>
+            </a:pPr>
+            <a:r>
+              <a:rPr lang="en-US" sz="1050" b="1" dirty="0">
+                <a:solidFill>
+                  <a:srgbClr val="222222"/>
+                </a:solidFill>
+                <a:latin typeface="Calibri" pitchFamily="34" charset="0"/>
+                <a:ea typeface="Calibri" pitchFamily="34" charset="-122"/>
+                <a:cs typeface="Calibri" pitchFamily="34" charset="-120"/>
+              </a:rPr>
+              <a:t>すべて任意回答</a:t>
+            </a:r>
+            <a:pPr indent="0" marL="0">
+              <a:lnSpc>
+                <a:spcPct val="120000"/>
+              </a:lnSpc>
+              <a:buNone/>
+            </a:pPr>
+            <a:r>
+              <a:rPr lang="en-US" sz="1050" dirty="0">
+                <a:solidFill>
+                  <a:srgbClr val="222222"/>
+                </a:solidFill>
+                <a:latin typeface="Calibri" pitchFamily="34" charset="0"/>
+                <a:ea typeface="Calibri" pitchFamily="34" charset="-122"/>
+                <a:cs typeface="Calibri" pitchFamily="34" charset="-120"/>
+              </a:rPr>
+              <a:t>です（設問編集画面に「必須にする」は出ません）。お帰りの前に書いてもらう案内をしているため、途中で足止めしない作りにしています。ただし、1問も書かずに送ることはできません。</a:t>
+            </a:r>
+            <a:endParaRPr lang="en-US" sz="1050" dirty="0"/>
+          </a:p>
+        </p:txBody>
+      </p:sp>
+      <p:sp>
+        <p:nvSpPr>
+          <p:cNvPr id="26" name="Shape 24"/>
+          <p:cNvSpPr/>
+          <p:nvPr/>
+        </p:nvSpPr>
+        <p:spPr>
+          <a:xfrm>
+            <a:off x="566928" y="6517704"/>
+            <a:ext cx="6428232" cy="624459"/>
+          </a:xfrm>
+          <a:prstGeom prst="roundRect">
+            <a:avLst>
+              <a:gd name="adj" fmla="val 8786"/>
+            </a:avLst>
+          </a:prstGeom>
+          <a:solidFill>
             <a:srgbClr val="FDF0E6"/>
           </a:solidFill>
           <a:ln w="9525">
@@ -7973,13 +8115,13 @@
       </p:sp>
       <p:sp>
         <p:nvSpPr>
-          <p:cNvPr id="24" name="Text 22"/>
-          <p:cNvSpPr txBox="1"/>
-          <p:nvPr/>
-        </p:nvSpPr>
-        <p:spPr>
-          <a:xfrm>
-            <a:off x="658368" y="5718175"/>
+          <p:cNvPr id="27" name="Text 25"/>
+          <p:cNvSpPr txBox="1"/>
+          <p:nvPr/>
+        </p:nvSpPr>
+        <p:spPr>
+          <a:xfrm>
+            <a:off x="658368" y="6609143"/>
             <a:ext cx="237744" cy="237744"/>
           </a:xfrm>
           <a:prstGeom prst="rect">
@@ -8012,14 +8154,14 @@
       </p:sp>
       <p:sp>
         <p:nvSpPr>
-          <p:cNvPr id="25" name="Text 23"/>
-          <p:cNvSpPr txBox="1"/>
-          <p:nvPr/>
-        </p:nvSpPr>
-        <p:spPr>
-          <a:xfrm>
-            <a:off x="950976" y="5736463"/>
-            <a:ext cx="5925312" cy="634937"/>
+          <p:cNvPr id="28" name="Text 26"/>
+          <p:cNvSpPr txBox="1"/>
+          <p:nvPr/>
+        </p:nvSpPr>
+        <p:spPr>
+          <a:xfrm>
+            <a:off x="950976" y="6627432"/>
+            <a:ext cx="5925312" cy="441579"/>
           </a:xfrm>
           <a:prstGeom prst="rect">
             <a:avLst/>
@@ -8046,7 +8188,7 @@
                 <a:ea typeface="Calibri" pitchFamily="34" charset="-122"/>
                 <a:cs typeface="Calibri" pitchFamily="34" charset="-120"/>
               </a:rPr>
-              <a:t>ブースの画面では、</a:t>
+              <a:t>総合アンケートは</a:t>
             </a:r>
             <a:pPr indent="0" marL="0">
               <a:lnSpc>
@@ -8063,7 +8205,7 @@
                 <a:ea typeface="Calibri" pitchFamily="34" charset="-122"/>
                 <a:cs typeface="Calibri" pitchFamily="34" charset="-120"/>
               </a:rPr>
-              <a:t>設問を「必須」にしていても任意として表示します</a:t>
+              <a:t>どの画面でも任意回答</a:t>
             </a:r>
             <a:pPr indent="0" marL="0">
               <a:lnSpc>
@@ -8080,7 +8222,7 @@
                 <a:ea typeface="Calibri" pitchFamily="34" charset="-122"/>
                 <a:cs typeface="Calibri" pitchFamily="34" charset="-120"/>
               </a:rPr>
-              <a:t>。帰り際に書いていただく案内をしている以上、途中のブースで足止めしないためです（必須の指定は、メールから回答する画面でだけ効きます）。</a:t>
+              <a:t>です（ブースの画面でも、回答済み画面からの編集でも、メールからの回答でも同じ）。画面によって必須・任意が入れ替わらないように揃えています。</a:t>
             </a:r>
             <a:endParaRPr lang="en-US" sz="1050" dirty="0"/>
           </a:p>
@@ -8088,13 +8230,13 @@
       </p:sp>
       <p:sp>
         <p:nvSpPr>
-          <p:cNvPr id="26" name="Text 24"/>
-          <p:cNvSpPr txBox="1"/>
-          <p:nvPr/>
-        </p:nvSpPr>
-        <p:spPr>
-          <a:xfrm>
-            <a:off x="566928" y="6627432"/>
+          <p:cNvPr id="29" name="Text 27"/>
+          <p:cNvSpPr txBox="1"/>
+          <p:nvPr/>
+        </p:nvSpPr>
+        <p:spPr>
+          <a:xfrm>
+            <a:off x="566928" y="7325043"/>
             <a:ext cx="6428232" cy="257810"/>
           </a:xfrm>
           <a:prstGeom prst="rect">
@@ -8127,13 +8269,13 @@
       </p:sp>
       <p:sp>
         <p:nvSpPr>
-          <p:cNvPr id="27" name="Text 25"/>
-          <p:cNvSpPr txBox="1"/>
-          <p:nvPr/>
-        </p:nvSpPr>
-        <p:spPr>
-          <a:xfrm>
-            <a:off x="566928" y="6958394"/>
+          <p:cNvPr id="30" name="Text 28"/>
+          <p:cNvSpPr txBox="1"/>
+          <p:nvPr/>
+        </p:nvSpPr>
+        <p:spPr>
+          <a:xfrm>
+            <a:off x="566928" y="7656005"/>
             <a:ext cx="6428232" cy="662559"/>
           </a:xfrm>
           <a:prstGeom prst="rect">
@@ -8237,7 +8379,7 @@
       </p:sp>
       <p:sp>
         <p:nvSpPr>
-          <p:cNvPr id="28" name="Text 26"/>
+          <p:cNvPr id="31" name="Text 29"/>
           <p:cNvSpPr txBox="1"/>
           <p:nvPr/>
         </p:nvSpPr>
@@ -8480,6 +8622,231 @@
                 <a:ea typeface="Calibri" pitchFamily="34" charset="-122"/>
                 <a:cs typeface="Calibri" pitchFamily="34" charset="-120"/>
               </a:rPr>
+              <a:t>メールアドレスを集めない運用にする</a:t>
+            </a:r>
+            <a:endParaRPr lang="en-US" sz="1400" dirty="0"/>
+          </a:p>
+        </p:txBody>
+      </p:sp>
+      <p:sp>
+        <p:nvSpPr>
+          <p:cNvPr id="7" name="Text 4"/>
+          <p:cNvSpPr txBox="1"/>
+          <p:nvPr/>
+        </p:nvSpPr>
+        <p:spPr>
+          <a:xfrm>
+            <a:off x="566928" y="5780786"/>
+            <a:ext cx="6428232" cy="459994"/>
+          </a:xfrm>
+          <a:prstGeom prst="rect">
+            <a:avLst/>
+          </a:prstGeom>
+          <a:noFill/>
+          <a:ln/>
+        </p:spPr>
+        <p:txBody>
+          <a:bodyPr wrap="square" lIns="0" tIns="0" rIns="0" bIns="0" rtlCol="0" anchor="t"/>
+          <a:lstStyle/>
+          <a:p>
+            <a:pPr indent="0" marL="0">
+              <a:lnSpc>
+                <a:spcPct val="125000"/>
+              </a:lnSpc>
+              <a:buNone/>
+            </a:pPr>
+            <a:r>
+              <a:rPr lang="en-US" sz="1100" dirty="0">
+                <a:solidFill>
+                  <a:srgbClr val="222222"/>
+                </a:solidFill>
+                <a:latin typeface="Calibri" pitchFamily="34" charset="0"/>
+                <a:ea typeface="Calibri" pitchFamily="34" charset="-122"/>
+                <a:cs typeface="Calibri" pitchFamily="34" charset="-120"/>
+              </a:rPr>
+              <a:t>サーバーの </a:t>
+            </a:r>
+            <a:pPr indent="0" marL="0">
+              <a:lnSpc>
+                <a:spcPct val="125000"/>
+              </a:lnSpc>
+              <a:buNone/>
+            </a:pPr>
+            <a:r>
+              <a:rPr lang="en-US" sz="1045" dirty="0">
+                <a:solidFill>
+                  <a:srgbClr val="222222"/>
+                </a:solidFill>
+                <a:latin typeface="Courier New" pitchFamily="34" charset="0"/>
+                <a:ea typeface="Courier New" pitchFamily="34" charset="-122"/>
+                <a:cs typeface="Courier New" pitchFamily="34" charset="-120"/>
+              </a:rPr>
+              <a:t>.env</a:t>
+            </a:r>
+            <a:pPr indent="0" marL="0">
+              <a:lnSpc>
+                <a:spcPct val="125000"/>
+              </a:lnSpc>
+              <a:buNone/>
+            </a:pPr>
+            <a:r>
+              <a:rPr lang="en-US" sz="1100" dirty="0">
+                <a:solidFill>
+                  <a:srgbClr val="222222"/>
+                </a:solidFill>
+                <a:latin typeface="Calibri" pitchFamily="34" charset="0"/>
+                <a:ea typeface="Calibri" pitchFamily="34" charset="-122"/>
+                <a:cs typeface="Calibri" pitchFamily="34" charset="-120"/>
+              </a:rPr>
+              <a:t> で </a:t>
+            </a:r>
+            <a:pPr indent="0" marL="0">
+              <a:lnSpc>
+                <a:spcPct val="125000"/>
+              </a:lnSpc>
+              <a:buNone/>
+            </a:pPr>
+            <a:r>
+              <a:rPr lang="en-US" sz="1045" dirty="0">
+                <a:solidFill>
+                  <a:srgbClr val="222222"/>
+                </a:solidFill>
+                <a:latin typeface="Courier New" pitchFamily="34" charset="0"/>
+                <a:ea typeface="Courier New" pitchFamily="34" charset="-122"/>
+                <a:cs typeface="Courier New" pitchFamily="34" charset="-120"/>
+              </a:rPr>
+              <a:t>COLLECT_EMAIL=0</a:t>
+            </a:r>
+            <a:pPr indent="0" marL="0">
+              <a:lnSpc>
+                <a:spcPct val="125000"/>
+              </a:lnSpc>
+              <a:buNone/>
+            </a:pPr>
+            <a:r>
+              <a:rPr lang="en-US" sz="1100" dirty="0">
+                <a:solidFill>
+                  <a:srgbClr val="222222"/>
+                </a:solidFill>
+                <a:latin typeface="Calibri" pitchFamily="34" charset="0"/>
+                <a:ea typeface="Calibri" pitchFamily="34" charset="-122"/>
+                <a:cs typeface="Calibri" pitchFamily="34" charset="-120"/>
+              </a:rPr>
+              <a:t> にすると、</a:t>
+            </a:r>
+            <a:pPr indent="0" marL="0">
+              <a:lnSpc>
+                <a:spcPct val="125000"/>
+              </a:lnSpc>
+              <a:buNone/>
+            </a:pPr>
+            <a:r>
+              <a:rPr lang="en-US" sz="1100" b="1" dirty="0">
+                <a:solidFill>
+                  <a:srgbClr val="222222"/>
+                </a:solidFill>
+                <a:latin typeface="Calibri" pitchFamily="34" charset="0"/>
+                <a:ea typeface="Calibri" pitchFamily="34" charset="-122"/>
+                <a:cs typeface="Calibri" pitchFamily="34" charset="-120"/>
+              </a:rPr>
+              <a:t>来場者の画面からメールアドレスの入力欄と案内が消えます</a:t>
+            </a:r>
+            <a:pPr indent="0" marL="0">
+              <a:lnSpc>
+                <a:spcPct val="125000"/>
+              </a:lnSpc>
+              <a:buNone/>
+            </a:pPr>
+            <a:r>
+              <a:rPr lang="en-US" sz="1100" dirty="0">
+                <a:solidFill>
+                  <a:srgbClr val="222222"/>
+                </a:solidFill>
+                <a:latin typeface="Calibri" pitchFamily="34" charset="0"/>
+                <a:ea typeface="Calibri" pitchFamily="34" charset="-122"/>
+                <a:cs typeface="Calibri" pitchFamily="34" charset="-120"/>
+              </a:rPr>
+              <a:t>。</a:t>
+            </a:r>
+            <a:endParaRPr lang="en-US" sz="1100" dirty="0"/>
+          </a:p>
+        </p:txBody>
+      </p:sp>
+      <p:sp>
+        <p:nvSpPr>
+          <p:cNvPr id="8" name="Text 5"/>
+          <p:cNvSpPr txBox="1"/>
+          <p:nvPr/>
+        </p:nvSpPr>
+        <p:spPr>
+          <a:xfrm>
+            <a:off x="566928" y="6277356"/>
+            <a:ext cx="6428232" cy="459994"/>
+          </a:xfrm>
+          <a:prstGeom prst="rect">
+            <a:avLst/>
+          </a:prstGeom>
+          <a:noFill/>
+          <a:ln/>
+        </p:spPr>
+        <p:txBody>
+          <a:bodyPr wrap="square" lIns="0" tIns="0" rIns="0" bIns="0" rtlCol="0" anchor="t"/>
+          <a:lstStyle/>
+          <a:p>
+            <a:pPr indent="0" marL="0">
+              <a:lnSpc>
+                <a:spcPct val="125000"/>
+              </a:lnSpc>
+              <a:buNone/>
+            </a:pPr>
+            <a:r>
+              <a:rPr lang="en-US" sz="1100" dirty="0">
+                <a:solidFill>
+                  <a:srgbClr val="222222"/>
+                </a:solidFill>
+                <a:latin typeface="Calibri" pitchFamily="34" charset="0"/>
+                <a:ea typeface="Calibri" pitchFamily="34" charset="-122"/>
+                <a:cs typeface="Calibri" pitchFamily="34" charset="-120"/>
+              </a:rPr>
+              <a:t>壁紙は案内メールのリンクから配るため、この設定では配布できません（管理画面にも警告が出ます）。</a:t>
+            </a:r>
+            <a:endParaRPr lang="en-US" sz="1100" dirty="0"/>
+          </a:p>
+        </p:txBody>
+      </p:sp>
+      <p:sp>
+        <p:nvSpPr>
+          <p:cNvPr id="9" name="Text 6"/>
+          <p:cNvSpPr txBox="1"/>
+          <p:nvPr/>
+        </p:nvSpPr>
+        <p:spPr>
+          <a:xfrm>
+            <a:off x="566928" y="6883654"/>
+            <a:ext cx="6428232" cy="257810"/>
+          </a:xfrm>
+          <a:prstGeom prst="rect">
+            <a:avLst/>
+          </a:prstGeom>
+          <a:noFill/>
+          <a:ln/>
+        </p:spPr>
+        <p:txBody>
+          <a:bodyPr wrap="square" lIns="0" tIns="0" rIns="0" bIns="0" rtlCol="0" anchor="t"/>
+          <a:lstStyle/>
+          <a:p>
+            <a:pPr indent="0" marL="0">
+              <a:buNone/>
+            </a:pPr>
+            <a:r>
+              <a:rPr lang="en-US" sz="1400" b="1" dirty="0">
+                <a:solidFill>
+                  <a:srgbClr val="1E2761"/>
+                </a:solidFill>
+                <a:latin typeface="Calibri" pitchFamily="34" charset="0"/>
+                <a:ea typeface="Calibri" pitchFamily="34" charset="-122"/>
+                <a:cs typeface="Calibri" pitchFamily="34" charset="-120"/>
+              </a:rPr>
               <a:t>何社目のブースから出すか</a:t>
             </a:r>
             <a:endParaRPr lang="en-US" sz="1400" dirty="0"/>
@@ -8488,13 +8855,13 @@
       </p:sp>
       <p:sp>
         <p:nvSpPr>
-          <p:cNvPr id="7" name="Text 4"/>
-          <p:cNvSpPr txBox="1"/>
-          <p:nvPr/>
-        </p:nvSpPr>
-        <p:spPr>
-          <a:xfrm>
-            <a:off x="566928" y="5780786"/>
+          <p:cNvPr id="10" name="Text 7"/>
+          <p:cNvSpPr txBox="1"/>
+          <p:nvPr/>
+        </p:nvSpPr>
+        <p:spPr>
+          <a:xfrm>
+            <a:off x="566928" y="7214616"/>
             <a:ext cx="6428232" cy="257429"/>
           </a:xfrm>
           <a:prstGeom prst="rect">
@@ -8530,13 +8897,13 @@
       </p:sp>
       <p:sp>
         <p:nvSpPr>
-          <p:cNvPr id="8" name="Text 5"/>
-          <p:cNvSpPr txBox="1"/>
-          <p:nvPr/>
-        </p:nvSpPr>
-        <p:spPr>
-          <a:xfrm>
-            <a:off x="713232" y="6074791"/>
+          <p:cNvPr id="11" name="Text 8"/>
+          <p:cNvSpPr txBox="1"/>
+          <p:nvPr/>
+        </p:nvSpPr>
+        <p:spPr>
+          <a:xfrm>
+            <a:off x="713232" y="7508621"/>
             <a:ext cx="6281928" cy="257429"/>
           </a:xfrm>
           <a:prstGeom prst="rect">
@@ -8590,13 +8957,13 @@
       </p:sp>
       <p:sp>
         <p:nvSpPr>
-          <p:cNvPr id="9" name="Text 6"/>
-          <p:cNvSpPr txBox="1"/>
-          <p:nvPr/>
-        </p:nvSpPr>
-        <p:spPr>
-          <a:xfrm>
-            <a:off x="713232" y="6350508"/>
+          <p:cNvPr id="12" name="Text 9"/>
+          <p:cNvSpPr txBox="1"/>
+          <p:nvPr/>
+        </p:nvSpPr>
+        <p:spPr>
+          <a:xfrm>
+            <a:off x="713232" y="7784338"/>
             <a:ext cx="6281928" cy="459994"/>
           </a:xfrm>
           <a:prstGeom prst="rect">
@@ -8650,7 +9017,7 @@
       </p:sp>
       <p:sp>
         <p:nvSpPr>
-          <p:cNvPr id="10" name="Text 7"/>
+          <p:cNvPr id="13" name="Text 10"/>
           <p:cNvSpPr txBox="1"/>
           <p:nvPr/>
         </p:nvSpPr>
@@ -8813,8 +9180,8 @@
         </p:blipFill>
         <p:spPr>
           <a:xfrm>
-            <a:off x="2889358" y="1481328"/>
-            <a:ext cx="1783372" cy="3474720"/>
+            <a:off x="2895022" y="1481328"/>
+            <a:ext cx="1772044" cy="3474720"/>
           </a:xfrm>
           <a:prstGeom prst="rect">
             <a:avLst/>

--- a/docs/manual-organizer.pptx
+++ b/docs/manual-organizer.pptx
@@ -7953,11 +7953,11 @@
         <p:spPr>
           <a:xfrm>
             <a:off x="566928" y="5626735"/>
-            <a:ext cx="6428232" cy="817817"/>
+            <a:ext cx="6428232" cy="1011174"/>
           </a:xfrm>
           <a:prstGeom prst="roundRect">
             <a:avLst>
-              <a:gd name="adj" fmla="val 6709"/>
+              <a:gd name="adj" fmla="val 5426"/>
             </a:avLst>
           </a:prstGeom>
           <a:solidFill>
@@ -8019,7 +8019,7 @@
         <p:spPr>
           <a:xfrm>
             <a:off x="950976" y="5736463"/>
-            <a:ext cx="5925312" cy="634937"/>
+            <a:ext cx="5925312" cy="828294"/>
           </a:xfrm>
           <a:prstGeom prst="rect">
             <a:avLst/>
@@ -8046,7 +8046,7 @@
                 <a:ea typeface="Calibri" pitchFamily="34" charset="-122"/>
                 <a:cs typeface="Calibri" pitchFamily="34" charset="-120"/>
               </a:rPr>
-              <a:t>総合アンケートの設問は</a:t>
+              <a:t>必ず答えてほしい設問は、設問編集画面で</a:t>
             </a:r>
             <a:pPr indent="0" marL="0">
               <a:lnSpc>
@@ -8063,7 +8063,7 @@
                 <a:ea typeface="Calibri" pitchFamily="34" charset="-122"/>
                 <a:cs typeface="Calibri" pitchFamily="34" charset="-120"/>
               </a:rPr>
-              <a:t>すべて任意回答</a:t>
+              <a:t>「要回答にする」</a:t>
             </a:r>
             <a:pPr indent="0" marL="0">
               <a:lnSpc>
@@ -8080,7 +8080,75 @@
                 <a:ea typeface="Calibri" pitchFamily="34" charset="-122"/>
                 <a:cs typeface="Calibri" pitchFamily="34" charset="-120"/>
               </a:rPr>
-              <a:t>です（設問編集画面に「必須にする」は出ません）。お帰りの前に書いてもらう案内をしているため、途中で足止めしない作りにしています。ただし、1問も書かずに送ることはできません。</a:t>
+              <a:t>にチェックを入れてください。画面にオレンジの</a:t>
+            </a:r>
+            <a:pPr indent="0" marL="0">
+              <a:lnSpc>
+                <a:spcPct val="120000"/>
+              </a:lnSpc>
+              <a:buNone/>
+            </a:pPr>
+            <a:r>
+              <a:rPr lang="en-US" sz="1050" b="1" dirty="0">
+                <a:solidFill>
+                  <a:srgbClr val="222222"/>
+                </a:solidFill>
+                <a:latin typeface="Calibri" pitchFamily="34" charset="0"/>
+                <a:ea typeface="Calibri" pitchFamily="34" charset="-122"/>
+                <a:cs typeface="Calibri" pitchFamily="34" charset="-120"/>
+              </a:rPr>
+              <a:t>「要回答」</a:t>
+            </a:r>
+            <a:pPr indent="0" marL="0">
+              <a:lnSpc>
+                <a:spcPct val="120000"/>
+              </a:lnSpc>
+              <a:buNone/>
+            </a:pPr>
+            <a:r>
+              <a:rPr lang="en-US" sz="1050" dirty="0">
+                <a:solidFill>
+                  <a:srgbClr val="222222"/>
+                </a:solidFill>
+                <a:latin typeface="Calibri" pitchFamily="34" charset="0"/>
+                <a:ea typeface="Calibri" pitchFamily="34" charset="-122"/>
+                <a:cs typeface="Calibri" pitchFamily="34" charset="-120"/>
+              </a:rPr>
+              <a:t>の印が出ます。</a:t>
+            </a:r>
+            <a:pPr indent="0" marL="0">
+              <a:lnSpc>
+                <a:spcPct val="120000"/>
+              </a:lnSpc>
+              <a:buNone/>
+            </a:pPr>
+            <a:r>
+              <a:rPr lang="en-US" sz="1050" b="1" dirty="0">
+                <a:solidFill>
+                  <a:srgbClr val="222222"/>
+                </a:solidFill>
+                <a:latin typeface="Calibri" pitchFamily="34" charset="0"/>
+                <a:ea typeface="Calibri" pitchFamily="34" charset="-122"/>
+                <a:cs typeface="Calibri" pitchFamily="34" charset="-120"/>
+              </a:rPr>
+              <a:t>送信は止めません</a:t>
+            </a:r>
+            <a:pPr indent="0" marL="0">
+              <a:lnSpc>
+                <a:spcPct val="120000"/>
+              </a:lnSpc>
+              <a:buNone/>
+            </a:pPr>
+            <a:r>
+              <a:rPr lang="en-US" sz="1050" dirty="0">
+                <a:solidFill>
+                  <a:srgbClr val="222222"/>
+                </a:solidFill>
+                <a:latin typeface="Calibri" pitchFamily="34" charset="0"/>
+                <a:ea typeface="Calibri" pitchFamily="34" charset="-122"/>
+                <a:cs typeface="Calibri" pitchFamily="34" charset="-120"/>
+              </a:rPr>
+              <a:t>（お帰りの前に書いてもらう案内をしているため）が、未回答のまま残っている方には回答済み画面で「要回答の設問が◯問残っています」と伝え、「回答を仕上げる」ボタンを出します。</a:t>
             </a:r>
             <a:endParaRPr lang="en-US" sz="1050" dirty="0"/>
           </a:p>
@@ -8094,7 +8162,7 @@
         </p:nvSpPr>
         <p:spPr>
           <a:xfrm>
-            <a:off x="566928" y="6517704"/>
+            <a:off x="566928" y="6711061"/>
             <a:ext cx="6428232" cy="624459"/>
           </a:xfrm>
           <a:prstGeom prst="roundRect">
@@ -8121,7 +8189,7 @@
         </p:nvSpPr>
         <p:spPr>
           <a:xfrm>
-            <a:off x="658368" y="6609143"/>
+            <a:off x="658368" y="6802501"/>
             <a:ext cx="237744" cy="237744"/>
           </a:xfrm>
           <a:prstGeom prst="rect">
@@ -8160,7 +8228,7 @@
         </p:nvSpPr>
         <p:spPr>
           <a:xfrm>
-            <a:off x="950976" y="6627432"/>
+            <a:off x="950976" y="6820789"/>
             <a:ext cx="5925312" cy="441579"/>
           </a:xfrm>
           <a:prstGeom prst="rect">
@@ -8188,7 +8256,7 @@
                 <a:ea typeface="Calibri" pitchFamily="34" charset="-122"/>
                 <a:cs typeface="Calibri" pitchFamily="34" charset="-120"/>
               </a:rPr>
-              <a:t>総合アンケートは</a:t>
+              <a:t>「要回答」の印は</a:t>
             </a:r>
             <a:pPr indent="0" marL="0">
               <a:lnSpc>
@@ -8205,7 +8273,7 @@
                 <a:ea typeface="Calibri" pitchFamily="34" charset="-122"/>
                 <a:cs typeface="Calibri" pitchFamily="34" charset="-120"/>
               </a:rPr>
-              <a:t>どの画面でも任意回答</a:t>
+              <a:t>どの画面でも同じ</a:t>
             </a:r>
             <a:pPr indent="0" marL="0">
               <a:lnSpc>
@@ -8222,7 +8290,7 @@
                 <a:ea typeface="Calibri" pitchFamily="34" charset="-122"/>
                 <a:cs typeface="Calibri" pitchFamily="34" charset="-120"/>
               </a:rPr>
-              <a:t>です（ブースの画面でも、回答済み画面からの編集でも、メールからの回答でも同じ）。画面によって必須・任意が入れ替わらないように揃えています。</a:t>
+              <a:t>です（ブースの画面でも、回答済み画面からの編集でも、メールからの回答でも）。画面によって必須・任意が入れ替わらないように揃えています。</a:t>
             </a:r>
             <a:endParaRPr lang="en-US" sz="1050" dirty="0"/>
           </a:p>
@@ -8236,7 +8304,7 @@
         </p:nvSpPr>
         <p:spPr>
           <a:xfrm>
-            <a:off x="566928" y="7325043"/>
+            <a:off x="566928" y="7518400"/>
             <a:ext cx="6428232" cy="257810"/>
           </a:xfrm>
           <a:prstGeom prst="rect">
@@ -8275,7 +8343,7 @@
         </p:nvSpPr>
         <p:spPr>
           <a:xfrm>
-            <a:off x="566928" y="7656005"/>
+            <a:off x="566928" y="7849362"/>
             <a:ext cx="6428232" cy="662559"/>
           </a:xfrm>
           <a:prstGeom prst="rect">

--- a/docs/manual-organizer.pptx
+++ b/docs/manual-organizer.pptx
@@ -9880,7 +9880,7 @@
                 <a:ea typeface="Calibri" pitchFamily="34" charset="-122"/>
                 <a:cs typeface="Calibri" pitchFamily="34" charset="-120"/>
               </a:rPr>
-              <a:t>来場者の流れ</a:t>
+              <a:t>同じ企業に2回答えたとき</a:t>
             </a:r>
             <a:endParaRPr lang="en-US" sz="1400" dirty="0"/>
           </a:p>
@@ -9888,692 +9888,162 @@
       </p:sp>
       <p:sp>
         <p:nvSpPr>
-          <p:cNvPr id="15" name="Shape 13"/>
+          <p:cNvPr id="15" name="Text 13"/>
+          <p:cNvSpPr txBox="1"/>
+          <p:nvPr/>
+        </p:nvSpPr>
+        <p:spPr>
+          <a:xfrm>
+            <a:off x="566928" y="3828034"/>
+            <a:ext cx="6428232" cy="459994"/>
+          </a:xfrm>
+          <a:prstGeom prst="rect">
+            <a:avLst/>
+          </a:prstGeom>
+          <a:noFill/>
+          <a:ln/>
+        </p:spPr>
+        <p:txBody>
+          <a:bodyPr wrap="square" lIns="0" tIns="0" rIns="0" bIns="0" rtlCol="0" anchor="t"/>
+          <a:lstStyle/>
+          <a:p>
+            <a:pPr indent="0" marL="0">
+              <a:lnSpc>
+                <a:spcPct val="125000"/>
+              </a:lnSpc>
+              <a:buNone/>
+            </a:pPr>
+            <a:r>
+              <a:rPr lang="en-US" sz="1100" dirty="0">
+                <a:solidFill>
+                  <a:srgbClr val="222222"/>
+                </a:solidFill>
+                <a:latin typeface="Calibri" pitchFamily="34" charset="0"/>
+                <a:ea typeface="Calibri" pitchFamily="34" charset="-122"/>
+                <a:cs typeface="Calibri" pitchFamily="34" charset="-120"/>
+              </a:rPr>
+              <a:t>来場者が同じ企業のQRをもう一度読み取ると、</a:t>
+            </a:r>
+            <a:pPr indent="0" marL="0">
+              <a:lnSpc>
+                <a:spcPct val="125000"/>
+              </a:lnSpc>
+              <a:buNone/>
+            </a:pPr>
+            <a:r>
+              <a:rPr lang="en-US" sz="1100" b="1" dirty="0">
+                <a:solidFill>
+                  <a:srgbClr val="222222"/>
+                </a:solidFill>
+                <a:latin typeface="Calibri" pitchFamily="34" charset="0"/>
+                <a:ea typeface="Calibri" pitchFamily="34" charset="-122"/>
+                <a:cs typeface="Calibri" pitchFamily="34" charset="-120"/>
+              </a:rPr>
+              <a:t>「この企業にはご回答済みです」</a:t>
+            </a:r>
+            <a:pPr indent="0" marL="0">
+              <a:lnSpc>
+                <a:spcPct val="125000"/>
+              </a:lnSpc>
+              <a:buNone/>
+            </a:pPr>
+            <a:r>
+              <a:rPr lang="en-US" sz="1100" dirty="0">
+                <a:solidFill>
+                  <a:srgbClr val="222222"/>
+                </a:solidFill>
+                <a:latin typeface="Calibri" pitchFamily="34" charset="0"/>
+                <a:ea typeface="Calibri" pitchFamily="34" charset="-122"/>
+                <a:cs typeface="Calibri" pitchFamily="34" charset="-120"/>
+              </a:rPr>
+              <a:t>と表示され、</a:t>
+            </a:r>
+            <a:pPr indent="0" marL="0">
+              <a:lnSpc>
+                <a:spcPct val="125000"/>
+              </a:lnSpc>
+              <a:buNone/>
+            </a:pPr>
+            <a:r>
+              <a:rPr lang="en-US" sz="1100" b="1" dirty="0">
+                <a:solidFill>
+                  <a:srgbClr val="222222"/>
+                </a:solidFill>
+                <a:latin typeface="Calibri" pitchFamily="34" charset="0"/>
+                <a:ea typeface="Calibri" pitchFamily="34" charset="-122"/>
+                <a:cs typeface="Calibri" pitchFamily="34" charset="-120"/>
+              </a:rPr>
+              <a:t>前回の回答が入った状態</a:t>
+            </a:r>
+            <a:pPr indent="0" marL="0">
+              <a:lnSpc>
+                <a:spcPct val="125000"/>
+              </a:lnSpc>
+              <a:buNone/>
+            </a:pPr>
+            <a:r>
+              <a:rPr lang="en-US" sz="1100" dirty="0">
+                <a:solidFill>
+                  <a:srgbClr val="222222"/>
+                </a:solidFill>
+                <a:latin typeface="Calibri" pitchFamily="34" charset="0"/>
+                <a:ea typeface="Calibri" pitchFamily="34" charset="-122"/>
+                <a:cs typeface="Calibri" pitchFamily="34" charset="-120"/>
+              </a:rPr>
+              <a:t>で開きます。書き換えて送信すると</a:t>
+            </a:r>
+            <a:pPr indent="0" marL="0">
+              <a:lnSpc>
+                <a:spcPct val="125000"/>
+              </a:lnSpc>
+              <a:buNone/>
+            </a:pPr>
+            <a:r>
+              <a:rPr lang="en-US" sz="1100" b="1" dirty="0">
+                <a:solidFill>
+                  <a:srgbClr val="222222"/>
+                </a:solidFill>
+                <a:latin typeface="Calibri" pitchFamily="34" charset="0"/>
+                <a:ea typeface="Calibri" pitchFamily="34" charset="-122"/>
+                <a:cs typeface="Calibri" pitchFamily="34" charset="-120"/>
+              </a:rPr>
+              <a:t>前の回答が置き換わり</a:t>
+            </a:r>
+            <a:pPr indent="0" marL="0">
+              <a:lnSpc>
+                <a:spcPct val="125000"/>
+              </a:lnSpc>
+              <a:buNone/>
+            </a:pPr>
+            <a:r>
+              <a:rPr lang="en-US" sz="1100" dirty="0">
+                <a:solidFill>
+                  <a:srgbClr val="222222"/>
+                </a:solidFill>
+                <a:latin typeface="Calibri" pitchFamily="34" charset="0"/>
+                <a:ea typeface="Calibri" pitchFamily="34" charset="-122"/>
+                <a:cs typeface="Calibri" pitchFamily="34" charset="-120"/>
+              </a:rPr>
+              <a:t>、回答数は増えません。</a:t>
+            </a:r>
+            <a:endParaRPr lang="en-US" sz="1100" dirty="0"/>
+          </a:p>
+        </p:txBody>
+      </p:sp>
+      <p:sp>
+        <p:nvSpPr>
+          <p:cNvPr id="16" name="Shape 14"/>
           <p:cNvSpPr/>
           <p:nvPr/>
         </p:nvSpPr>
         <p:spPr>
           <a:xfrm>
-            <a:off x="566928" y="3846322"/>
-            <a:ext cx="274320" cy="274320"/>
-          </a:xfrm>
-          <a:prstGeom prst="ellipse">
-            <a:avLst/>
-          </a:prstGeom>
-          <a:solidFill>
-            <a:srgbClr val="1E2761"/>
-          </a:solidFill>
-          <a:ln/>
-        </p:spPr>
-      </p:sp>
-      <p:sp>
-        <p:nvSpPr>
-          <p:cNvPr id="16" name="Text 14"/>
-          <p:cNvSpPr txBox="1"/>
-          <p:nvPr/>
-        </p:nvSpPr>
-        <p:spPr>
-          <a:xfrm>
-            <a:off x="566928" y="3846322"/>
-            <a:ext cx="274320" cy="274320"/>
-          </a:xfrm>
-          <a:prstGeom prst="rect">
-            <a:avLst/>
-          </a:prstGeom>
-          <a:noFill/>
-          <a:ln/>
-        </p:spPr>
-        <p:txBody>
-          <a:bodyPr wrap="square" lIns="0" tIns="0" rIns="0" bIns="0" rtlCol="0" anchor="ctr"/>
-          <a:lstStyle/>
-          <a:p>
-            <a:pPr algn="ctr" indent="0" marL="0">
-              <a:buNone/>
-            </a:pPr>
-            <a:r>
-              <a:rPr lang="en-US" sz="1100" b="1" dirty="0">
-                <a:solidFill>
-                  <a:srgbClr val="FFFFFF"/>
-                </a:solidFill>
-                <a:latin typeface="Calibri" pitchFamily="34" charset="0"/>
-                <a:ea typeface="Calibri" pitchFamily="34" charset="-122"/>
-                <a:cs typeface="Calibri" pitchFamily="34" charset="-120"/>
-              </a:rPr>
-              <a:t>1</a:t>
-            </a:r>
-            <a:endParaRPr lang="en-US" sz="1100" dirty="0"/>
-          </a:p>
-        </p:txBody>
-      </p:sp>
-      <p:sp>
-        <p:nvSpPr>
-          <p:cNvPr id="17" name="Text 15"/>
-          <p:cNvSpPr txBox="1"/>
-          <p:nvPr/>
-        </p:nvSpPr>
-        <p:spPr>
-          <a:xfrm>
-            <a:off x="969264" y="3828034"/>
-            <a:ext cx="6025896" cy="365760"/>
-          </a:xfrm>
-          <a:prstGeom prst="rect">
-            <a:avLst/>
-          </a:prstGeom>
-          <a:noFill/>
-          <a:ln/>
-        </p:spPr>
-        <p:txBody>
-          <a:bodyPr wrap="square" lIns="0" tIns="0" rIns="0" bIns="0" rtlCol="0" anchor="t"/>
-          <a:lstStyle/>
-          <a:p>
-            <a:pPr indent="0" marL="0">
-              <a:lnSpc>
-                <a:spcPct val="125000"/>
-              </a:lnSpc>
-              <a:buNone/>
-            </a:pPr>
-            <a:r>
-              <a:rPr lang="en-US" sz="1150" dirty="0">
-                <a:solidFill>
-                  <a:srgbClr val="222222"/>
-                </a:solidFill>
-                <a:latin typeface="Calibri" pitchFamily="34" charset="0"/>
-                <a:ea typeface="Calibri" pitchFamily="34" charset="-122"/>
-                <a:cs typeface="Calibri" pitchFamily="34" charset="-120"/>
-              </a:rPr>
-              <a:t>ブースのQRコードを読み取る</a:t>
-            </a:r>
-            <a:endParaRPr lang="en-US" sz="1150" dirty="0"/>
-          </a:p>
-        </p:txBody>
-      </p:sp>
-      <p:sp>
-        <p:nvSpPr>
-          <p:cNvPr id="18" name="Shape 16"/>
-          <p:cNvSpPr/>
-          <p:nvPr/>
-        </p:nvSpPr>
-        <p:spPr>
-          <a:xfrm>
-            <a:off x="566928" y="4303522"/>
-            <a:ext cx="274320" cy="274320"/>
-          </a:xfrm>
-          <a:prstGeom prst="ellipse">
-            <a:avLst/>
-          </a:prstGeom>
-          <a:solidFill>
-            <a:srgbClr val="1E2761"/>
-          </a:solidFill>
-          <a:ln/>
-        </p:spPr>
-      </p:sp>
-      <p:sp>
-        <p:nvSpPr>
-          <p:cNvPr id="19" name="Text 17"/>
-          <p:cNvSpPr txBox="1"/>
-          <p:nvPr/>
-        </p:nvSpPr>
-        <p:spPr>
-          <a:xfrm>
-            <a:off x="566928" y="4303522"/>
-            <a:ext cx="274320" cy="274320"/>
-          </a:xfrm>
-          <a:prstGeom prst="rect">
-            <a:avLst/>
-          </a:prstGeom>
-          <a:noFill/>
-          <a:ln/>
-        </p:spPr>
-        <p:txBody>
-          <a:bodyPr wrap="square" lIns="0" tIns="0" rIns="0" bIns="0" rtlCol="0" anchor="ctr"/>
-          <a:lstStyle/>
-          <a:p>
-            <a:pPr algn="ctr" indent="0" marL="0">
-              <a:buNone/>
-            </a:pPr>
-            <a:r>
-              <a:rPr lang="en-US" sz="1100" b="1" dirty="0">
-                <a:solidFill>
-                  <a:srgbClr val="FFFFFF"/>
-                </a:solidFill>
-                <a:latin typeface="Calibri" pitchFamily="34" charset="0"/>
-                <a:ea typeface="Calibri" pitchFamily="34" charset="-122"/>
-                <a:cs typeface="Calibri" pitchFamily="34" charset="-120"/>
-              </a:rPr>
-              <a:t>2</a:t>
-            </a:r>
-            <a:endParaRPr lang="en-US" sz="1100" dirty="0"/>
-          </a:p>
-        </p:txBody>
-      </p:sp>
-      <p:sp>
-        <p:nvSpPr>
-          <p:cNvPr id="20" name="Text 18"/>
-          <p:cNvSpPr txBox="1"/>
-          <p:nvPr/>
-        </p:nvSpPr>
-        <p:spPr>
-          <a:xfrm>
-            <a:off x="969264" y="4285234"/>
-            <a:ext cx="6025896" cy="365760"/>
-          </a:xfrm>
-          <a:prstGeom prst="rect">
-            <a:avLst/>
-          </a:prstGeom>
-          <a:noFill/>
-          <a:ln/>
-        </p:spPr>
-        <p:txBody>
-          <a:bodyPr wrap="square" lIns="0" tIns="0" rIns="0" bIns="0" rtlCol="0" anchor="t"/>
-          <a:lstStyle/>
-          <a:p>
-            <a:pPr indent="0" marL="0">
-              <a:lnSpc>
-                <a:spcPct val="125000"/>
-              </a:lnSpc>
-              <a:buNone/>
-            </a:pPr>
-            <a:r>
-              <a:rPr lang="en-US" sz="1150" dirty="0">
-                <a:solidFill>
-                  <a:srgbClr val="222222"/>
-                </a:solidFill>
-                <a:latin typeface="Calibri" pitchFamily="34" charset="0"/>
-                <a:ea typeface="Calibri" pitchFamily="34" charset="-122"/>
-                <a:cs typeface="Calibri" pitchFamily="34" charset="-120"/>
-              </a:rPr>
-              <a:t>アンケートに回答して送信する</a:t>
-            </a:r>
-            <a:endParaRPr lang="en-US" sz="1150" dirty="0"/>
-          </a:p>
-        </p:txBody>
-      </p:sp>
-      <p:sp>
-        <p:nvSpPr>
-          <p:cNvPr id="21" name="Shape 19"/>
-          <p:cNvSpPr/>
-          <p:nvPr/>
-        </p:nvSpPr>
-        <p:spPr>
-          <a:xfrm>
-            <a:off x="566928" y="4760722"/>
-            <a:ext cx="274320" cy="274320"/>
-          </a:xfrm>
-          <a:prstGeom prst="ellipse">
-            <a:avLst/>
-          </a:prstGeom>
-          <a:solidFill>
-            <a:srgbClr val="1E2761"/>
-          </a:solidFill>
-          <a:ln/>
-        </p:spPr>
-      </p:sp>
-      <p:sp>
-        <p:nvSpPr>
-          <p:cNvPr id="22" name="Text 20"/>
-          <p:cNvSpPr txBox="1"/>
-          <p:nvPr/>
-        </p:nvSpPr>
-        <p:spPr>
-          <a:xfrm>
-            <a:off x="566928" y="4760722"/>
-            <a:ext cx="274320" cy="274320"/>
-          </a:xfrm>
-          <a:prstGeom prst="rect">
-            <a:avLst/>
-          </a:prstGeom>
-          <a:noFill/>
-          <a:ln/>
-        </p:spPr>
-        <p:txBody>
-          <a:bodyPr wrap="square" lIns="0" tIns="0" rIns="0" bIns="0" rtlCol="0" anchor="ctr"/>
-          <a:lstStyle/>
-          <a:p>
-            <a:pPr algn="ctr" indent="0" marL="0">
-              <a:buNone/>
-            </a:pPr>
-            <a:r>
-              <a:rPr lang="en-US" sz="1100" b="1" dirty="0">
-                <a:solidFill>
-                  <a:srgbClr val="FFFFFF"/>
-                </a:solidFill>
-                <a:latin typeface="Calibri" pitchFamily="34" charset="0"/>
-                <a:ea typeface="Calibri" pitchFamily="34" charset="-122"/>
-                <a:cs typeface="Calibri" pitchFamily="34" charset="-120"/>
-              </a:rPr>
-              <a:t>3</a:t>
-            </a:r>
-            <a:endParaRPr lang="en-US" sz="1100" dirty="0"/>
-          </a:p>
-        </p:txBody>
-      </p:sp>
-      <p:sp>
-        <p:nvSpPr>
-          <p:cNvPr id="23" name="Text 21"/>
-          <p:cNvSpPr txBox="1"/>
-          <p:nvPr/>
-        </p:nvSpPr>
-        <p:spPr>
-          <a:xfrm>
-            <a:off x="969264" y="4742434"/>
-            <a:ext cx="6025896" cy="365760"/>
-          </a:xfrm>
-          <a:prstGeom prst="rect">
-            <a:avLst/>
-          </a:prstGeom>
-          <a:noFill/>
-          <a:ln/>
-        </p:spPr>
-        <p:txBody>
-          <a:bodyPr wrap="square" lIns="0" tIns="0" rIns="0" bIns="0" rtlCol="0" anchor="t"/>
-          <a:lstStyle/>
-          <a:p>
-            <a:pPr indent="0" marL="0">
-              <a:lnSpc>
-                <a:spcPct val="125000"/>
-              </a:lnSpc>
-              <a:buNone/>
-            </a:pPr>
-            <a:r>
-              <a:rPr lang="en-US" sz="1150" b="1" dirty="0">
-                <a:solidFill>
-                  <a:srgbClr val="222222"/>
-                </a:solidFill>
-                <a:latin typeface="Calibri" pitchFamily="34" charset="0"/>
-                <a:ea typeface="Calibri" pitchFamily="34" charset="-122"/>
-                <a:cs typeface="Calibri" pitchFamily="34" charset="-120"/>
-              </a:rPr>
-              <a:t>交換コード</a:t>
-            </a:r>
-            <a:pPr indent="0" marL="0">
-              <a:lnSpc>
-                <a:spcPct val="125000"/>
-              </a:lnSpc>
-              <a:buNone/>
-            </a:pPr>
-            <a:r>
-              <a:rPr lang="en-US" sz="1150" dirty="0">
-                <a:solidFill>
-                  <a:srgbClr val="222222"/>
-                </a:solidFill>
-                <a:latin typeface="Calibri" pitchFamily="34" charset="0"/>
-                <a:ea typeface="Calibri" pitchFamily="34" charset="-122"/>
-                <a:cs typeface="Calibri" pitchFamily="34" charset="-120"/>
-              </a:rPr>
-              <a:t>が表示される（総合受付で提示すると景品と交換できます）</a:t>
-            </a:r>
-            <a:endParaRPr lang="en-US" sz="1150" dirty="0"/>
-          </a:p>
-        </p:txBody>
-      </p:sp>
-      <p:sp>
-        <p:nvSpPr>
-          <p:cNvPr id="24" name="Shape 22"/>
-          <p:cNvSpPr/>
-          <p:nvPr/>
-        </p:nvSpPr>
-        <p:spPr>
-          <a:xfrm>
-            <a:off x="566928" y="5217922"/>
-            <a:ext cx="274320" cy="274320"/>
-          </a:xfrm>
-          <a:prstGeom prst="ellipse">
-            <a:avLst/>
-          </a:prstGeom>
-          <a:solidFill>
-            <a:srgbClr val="1E2761"/>
-          </a:solidFill>
-          <a:ln/>
-        </p:spPr>
-      </p:sp>
-      <p:sp>
-        <p:nvSpPr>
-          <p:cNvPr id="25" name="Text 23"/>
-          <p:cNvSpPr txBox="1"/>
-          <p:nvPr/>
-        </p:nvSpPr>
-        <p:spPr>
-          <a:xfrm>
-            <a:off x="566928" y="5217922"/>
-            <a:ext cx="274320" cy="274320"/>
-          </a:xfrm>
-          <a:prstGeom prst="rect">
-            <a:avLst/>
-          </a:prstGeom>
-          <a:noFill/>
-          <a:ln/>
-        </p:spPr>
-        <p:txBody>
-          <a:bodyPr wrap="square" lIns="0" tIns="0" rIns="0" bIns="0" rtlCol="0" anchor="ctr"/>
-          <a:lstStyle/>
-          <a:p>
-            <a:pPr algn="ctr" indent="0" marL="0">
-              <a:buNone/>
-            </a:pPr>
-            <a:r>
-              <a:rPr lang="en-US" sz="1100" b="1" dirty="0">
-                <a:solidFill>
-                  <a:srgbClr val="FFFFFF"/>
-                </a:solidFill>
-                <a:latin typeface="Calibri" pitchFamily="34" charset="0"/>
-                <a:ea typeface="Calibri" pitchFamily="34" charset="-122"/>
-                <a:cs typeface="Calibri" pitchFamily="34" charset="-120"/>
-              </a:rPr>
-              <a:t>4</a:t>
-            </a:r>
-            <a:endParaRPr lang="en-US" sz="1100" dirty="0"/>
-          </a:p>
-        </p:txBody>
-      </p:sp>
-      <p:sp>
-        <p:nvSpPr>
-          <p:cNvPr id="26" name="Text 24"/>
-          <p:cNvSpPr txBox="1"/>
-          <p:nvPr/>
-        </p:nvSpPr>
-        <p:spPr>
-          <a:xfrm>
-            <a:off x="969264" y="5199634"/>
-            <a:ext cx="6025896" cy="478409"/>
-          </a:xfrm>
-          <a:prstGeom prst="rect">
-            <a:avLst/>
-          </a:prstGeom>
-          <a:noFill/>
-          <a:ln/>
-        </p:spPr>
-        <p:txBody>
-          <a:bodyPr wrap="square" lIns="0" tIns="0" rIns="0" bIns="0" rtlCol="0" anchor="t"/>
-          <a:lstStyle/>
-          <a:p>
-            <a:pPr indent="0" marL="0">
-              <a:lnSpc>
-                <a:spcPct val="125000"/>
-              </a:lnSpc>
-              <a:buNone/>
-            </a:pPr>
-            <a:r>
-              <a:rPr lang="en-US" sz="1150" dirty="0">
-                <a:solidFill>
-                  <a:srgbClr val="222222"/>
-                </a:solidFill>
-                <a:latin typeface="Calibri" pitchFamily="34" charset="0"/>
-                <a:ea typeface="Calibri" pitchFamily="34" charset="-122"/>
-                <a:cs typeface="Calibri" pitchFamily="34" charset="-120"/>
-              </a:rPr>
-              <a:t>回答済み画面の</a:t>
-            </a:r>
-            <a:pPr indent="0" marL="0">
-              <a:lnSpc>
-                <a:spcPct val="125000"/>
-              </a:lnSpc>
-              <a:buNone/>
-            </a:pPr>
-            <a:r>
-              <a:rPr lang="en-US" sz="1150" b="1" dirty="0">
-                <a:solidFill>
-                  <a:srgbClr val="222222"/>
-                </a:solidFill>
-                <a:latin typeface="Calibri" pitchFamily="34" charset="0"/>
-                <a:ea typeface="Calibri" pitchFamily="34" charset="-122"/>
-                <a:cs typeface="Calibri" pitchFamily="34" charset="-120"/>
-              </a:rPr>
-              <a:t>「次のブースのQRコードを読み取る」</a:t>
-            </a:r>
-            <a:pPr indent="0" marL="0">
-              <a:lnSpc>
-                <a:spcPct val="125000"/>
-              </a:lnSpc>
-              <a:buNone/>
-            </a:pPr>
-            <a:r>
-              <a:rPr lang="en-US" sz="1150" dirty="0">
-                <a:solidFill>
-                  <a:srgbClr val="222222"/>
-                </a:solidFill>
-                <a:latin typeface="Calibri" pitchFamily="34" charset="0"/>
-                <a:ea typeface="Calibri" pitchFamily="34" charset="-122"/>
-                <a:cs typeface="Calibri" pitchFamily="34" charset="-120"/>
-              </a:rPr>
-              <a:t>から、ブラウザを閉じずに次のブースへ進む</a:t>
-            </a:r>
-            <a:endParaRPr lang="en-US" sz="1150" dirty="0"/>
-          </a:p>
-        </p:txBody>
-      </p:sp>
-      <p:sp>
-        <p:nvSpPr>
-          <p:cNvPr id="27" name="Shape 25"/>
-          <p:cNvSpPr/>
-          <p:nvPr/>
-        </p:nvSpPr>
-        <p:spPr>
-          <a:xfrm>
-            <a:off x="566928" y="5751195"/>
-            <a:ext cx="274320" cy="274320"/>
-          </a:xfrm>
-          <a:prstGeom prst="ellipse">
-            <a:avLst/>
-          </a:prstGeom>
-          <a:solidFill>
-            <a:srgbClr val="1E2761"/>
-          </a:solidFill>
-          <a:ln/>
-        </p:spPr>
-      </p:sp>
-      <p:sp>
-        <p:nvSpPr>
-          <p:cNvPr id="28" name="Text 26"/>
-          <p:cNvSpPr txBox="1"/>
-          <p:nvPr/>
-        </p:nvSpPr>
-        <p:spPr>
-          <a:xfrm>
-            <a:off x="566928" y="5751195"/>
-            <a:ext cx="274320" cy="274320"/>
-          </a:xfrm>
-          <a:prstGeom prst="rect">
-            <a:avLst/>
-          </a:prstGeom>
-          <a:noFill/>
-          <a:ln/>
-        </p:spPr>
-        <p:txBody>
-          <a:bodyPr wrap="square" lIns="0" tIns="0" rIns="0" bIns="0" rtlCol="0" anchor="ctr"/>
-          <a:lstStyle/>
-          <a:p>
-            <a:pPr algn="ctr" indent="0" marL="0">
-              <a:buNone/>
-            </a:pPr>
-            <a:r>
-              <a:rPr lang="en-US" sz="1100" b="1" dirty="0">
-                <a:solidFill>
-                  <a:srgbClr val="FFFFFF"/>
-                </a:solidFill>
-                <a:latin typeface="Calibri" pitchFamily="34" charset="0"/>
-                <a:ea typeface="Calibri" pitchFamily="34" charset="-122"/>
-                <a:cs typeface="Calibri" pitchFamily="34" charset="-120"/>
-              </a:rPr>
-              <a:t>5</a:t>
-            </a:r>
-            <a:endParaRPr lang="en-US" sz="1100" dirty="0"/>
-          </a:p>
-        </p:txBody>
-      </p:sp>
-      <p:sp>
-        <p:nvSpPr>
-          <p:cNvPr id="29" name="Text 27"/>
-          <p:cNvSpPr txBox="1"/>
-          <p:nvPr/>
-        </p:nvSpPr>
-        <p:spPr>
-          <a:xfrm>
-            <a:off x="969264" y="5732907"/>
-            <a:ext cx="6025896" cy="365760"/>
-          </a:xfrm>
-          <a:prstGeom prst="rect">
-            <a:avLst/>
-          </a:prstGeom>
-          <a:noFill/>
-          <a:ln/>
-        </p:spPr>
-        <p:txBody>
-          <a:bodyPr wrap="square" lIns="0" tIns="0" rIns="0" bIns="0" rtlCol="0" anchor="t"/>
-          <a:lstStyle/>
-          <a:p>
-            <a:pPr indent="0" marL="0">
-              <a:lnSpc>
-                <a:spcPct val="125000"/>
-              </a:lnSpc>
-              <a:buNone/>
-            </a:pPr>
-            <a:r>
-              <a:rPr lang="en-US" sz="1150" b="1" dirty="0">
-                <a:solidFill>
-                  <a:srgbClr val="222222"/>
-                </a:solidFill>
-                <a:latin typeface="Calibri" pitchFamily="34" charset="0"/>
-                <a:ea typeface="Calibri" pitchFamily="34" charset="-122"/>
-                <a:cs typeface="Calibri" pitchFamily="34" charset="-120"/>
-              </a:rPr>
-              <a:t>総合アンケート</a:t>
-            </a:r>
-            <a:pPr indent="0" marL="0">
-              <a:lnSpc>
-                <a:spcPct val="125000"/>
-              </a:lnSpc>
-              <a:buNone/>
-            </a:pPr>
-            <a:r>
-              <a:rPr lang="en-US" sz="1150" dirty="0">
-                <a:solidFill>
-                  <a:srgbClr val="222222"/>
-                </a:solidFill>
-                <a:latin typeface="Calibri" pitchFamily="34" charset="0"/>
-                <a:ea typeface="Calibri" pitchFamily="34" charset="-122"/>
-                <a:cs typeface="Calibri" pitchFamily="34" charset="-120"/>
-              </a:rPr>
-              <a:t>（まだ答えていない場合）にも、同じ画面で続けて答える</a:t>
-            </a:r>
-            <a:endParaRPr lang="en-US" sz="1150" dirty="0"/>
-          </a:p>
-        </p:txBody>
-      </p:sp>
-      <p:sp>
-        <p:nvSpPr>
-          <p:cNvPr id="30" name="Shape 28"/>
-          <p:cNvSpPr/>
-          <p:nvPr/>
-        </p:nvSpPr>
-        <p:spPr>
-          <a:xfrm>
-            <a:off x="566928" y="6208395"/>
-            <a:ext cx="274320" cy="274320"/>
-          </a:xfrm>
-          <a:prstGeom prst="ellipse">
-            <a:avLst/>
-          </a:prstGeom>
-          <a:solidFill>
-            <a:srgbClr val="1E2761"/>
-          </a:solidFill>
-          <a:ln/>
-        </p:spPr>
-      </p:sp>
-      <p:sp>
-        <p:nvSpPr>
-          <p:cNvPr id="31" name="Text 29"/>
-          <p:cNvSpPr txBox="1"/>
-          <p:nvPr/>
-        </p:nvSpPr>
-        <p:spPr>
-          <a:xfrm>
-            <a:off x="566928" y="6208395"/>
-            <a:ext cx="274320" cy="274320"/>
-          </a:xfrm>
-          <a:prstGeom prst="rect">
-            <a:avLst/>
-          </a:prstGeom>
-          <a:noFill/>
-          <a:ln/>
-        </p:spPr>
-        <p:txBody>
-          <a:bodyPr wrap="square" lIns="0" tIns="0" rIns="0" bIns="0" rtlCol="0" anchor="ctr"/>
-          <a:lstStyle/>
-          <a:p>
-            <a:pPr algn="ctr" indent="0" marL="0">
-              <a:buNone/>
-            </a:pPr>
-            <a:r>
-              <a:rPr lang="en-US" sz="1100" b="1" dirty="0">
-                <a:solidFill>
-                  <a:srgbClr val="FFFFFF"/>
-                </a:solidFill>
-                <a:latin typeface="Calibri" pitchFamily="34" charset="0"/>
-                <a:ea typeface="Calibri" pitchFamily="34" charset="-122"/>
-                <a:cs typeface="Calibri" pitchFamily="34" charset="-120"/>
-              </a:rPr>
-              <a:t>6</a:t>
-            </a:r>
-            <a:endParaRPr lang="en-US" sz="1100" dirty="0"/>
-          </a:p>
-        </p:txBody>
-      </p:sp>
-      <p:sp>
-        <p:nvSpPr>
-          <p:cNvPr id="32" name="Text 30"/>
-          <p:cNvSpPr txBox="1"/>
-          <p:nvPr/>
-        </p:nvSpPr>
-        <p:spPr>
-          <a:xfrm>
-            <a:off x="969264" y="6190107"/>
-            <a:ext cx="6025896" cy="365760"/>
-          </a:xfrm>
-          <a:prstGeom prst="rect">
-            <a:avLst/>
-          </a:prstGeom>
-          <a:noFill/>
-          <a:ln/>
-        </p:spPr>
-        <p:txBody>
-          <a:bodyPr wrap="square" lIns="0" tIns="0" rIns="0" bIns="0" rtlCol="0" anchor="t"/>
-          <a:lstStyle/>
-          <a:p>
-            <a:pPr indent="0" marL="0">
-              <a:lnSpc>
-                <a:spcPct val="125000"/>
-              </a:lnSpc>
-              <a:buNone/>
-            </a:pPr>
-            <a:r>
-              <a:rPr lang="en-US" sz="1150" dirty="0">
-                <a:solidFill>
-                  <a:srgbClr val="222222"/>
-                </a:solidFill>
-                <a:latin typeface="Calibri" pitchFamily="34" charset="0"/>
-                <a:ea typeface="Calibri" pitchFamily="34" charset="-122"/>
-                <a:cs typeface="Calibri" pitchFamily="34" charset="-120"/>
-              </a:rPr>
-              <a:t>任意でメールアドレスを登録すると、後日スマホ壁紙のご案内が届きます</a:t>
-            </a:r>
-            <a:endParaRPr lang="en-US" sz="1150" dirty="0"/>
-          </a:p>
-        </p:txBody>
-      </p:sp>
-      <p:sp>
-        <p:nvSpPr>
-          <p:cNvPr id="33" name="Shape 31"/>
-          <p:cNvSpPr/>
-          <p:nvPr/>
-        </p:nvSpPr>
-        <p:spPr>
-          <a:xfrm>
-            <a:off x="566928" y="6647307"/>
-            <a:ext cx="6428232" cy="817817"/>
+            <a:off x="566928" y="4324604"/>
+            <a:ext cx="6428232" cy="624459"/>
           </a:xfrm>
           <a:prstGeom prst="roundRect">
             <a:avLst>
-              <a:gd name="adj" fmla="val 6709"/>
+              <a:gd name="adj" fmla="val 8786"/>
             </a:avLst>
           </a:prstGeom>
           <a:solidFill>
@@ -10589,13 +10059,13 @@
       </p:sp>
       <p:sp>
         <p:nvSpPr>
-          <p:cNvPr id="34" name="Text 32"/>
-          <p:cNvSpPr txBox="1"/>
-          <p:nvPr/>
-        </p:nvSpPr>
-        <p:spPr>
-          <a:xfrm>
-            <a:off x="658368" y="6738747"/>
+          <p:cNvPr id="17" name="Text 15"/>
+          <p:cNvSpPr txBox="1"/>
+          <p:nvPr/>
+        </p:nvSpPr>
+        <p:spPr>
+          <a:xfrm>
+            <a:off x="658368" y="4416044"/>
             <a:ext cx="237744" cy="237744"/>
           </a:xfrm>
           <a:prstGeom prst="rect">
@@ -10628,14 +10098,14 @@
       </p:sp>
       <p:sp>
         <p:nvSpPr>
-          <p:cNvPr id="35" name="Text 33"/>
-          <p:cNvSpPr txBox="1"/>
-          <p:nvPr/>
-        </p:nvSpPr>
-        <p:spPr>
-          <a:xfrm>
-            <a:off x="950976" y="6757035"/>
-            <a:ext cx="5925312" cy="634937"/>
+          <p:cNvPr id="18" name="Text 16"/>
+          <p:cNvSpPr txBox="1"/>
+          <p:nvPr/>
+        </p:nvSpPr>
+        <p:spPr>
+          <a:xfrm>
+            <a:off x="950976" y="4434332"/>
+            <a:ext cx="5925312" cy="441579"/>
           </a:xfrm>
           <a:prstGeom prst="rect">
             <a:avLst/>
@@ -10662,41 +10132,7 @@
                 <a:ea typeface="Calibri" pitchFamily="34" charset="-122"/>
                 <a:cs typeface="Calibri" pitchFamily="34" charset="-120"/>
               </a:rPr>
-              <a:t>回答済み画面からそのままカメラでQRコードを読み取れるので、</a:t>
-            </a:r>
-            <a:pPr indent="0" marL="0">
-              <a:lnSpc>
-                <a:spcPct val="120000"/>
-              </a:lnSpc>
-              <a:buNone/>
-            </a:pPr>
-            <a:r>
-              <a:rPr lang="en-US" sz="1050" b="1" dirty="0">
-                <a:solidFill>
-                  <a:srgbClr val="222222"/>
-                </a:solidFill>
-                <a:latin typeface="Calibri" pitchFamily="34" charset="0"/>
-                <a:ea typeface="Calibri" pitchFamily="34" charset="-122"/>
-                <a:cs typeface="Calibri" pitchFamily="34" charset="-120"/>
-              </a:rPr>
-              <a:t>カメラアプリに切り替える必要がなく、ブラウザのタブも増えません</a:t>
-            </a:r>
-            <a:pPr indent="0" marL="0">
-              <a:lnSpc>
-                <a:spcPct val="120000"/>
-              </a:lnSpc>
-              <a:buNone/>
-            </a:pPr>
-            <a:r>
-              <a:rPr lang="en-US" sz="1050" dirty="0">
-                <a:solidFill>
-                  <a:srgbClr val="222222"/>
-                </a:solidFill>
-                <a:latin typeface="Calibri" pitchFamily="34" charset="0"/>
-                <a:ea typeface="Calibri" pitchFamily="34" charset="-122"/>
-                <a:cs typeface="Calibri" pitchFamily="34" charset="-120"/>
-              </a:rPr>
-              <a:t>（カメラが使えない端末では、これまでどおりカメラアプリで読み取る案内が出ます）。</a:t>
+              <a:t>集計は書き換え後の内容になります。企業の集計をリアルタイムで見ている場合、数字があとから変わることがあります（ダッシュボードの「修正された回答」で件数を確認できます）。</a:t>
             </a:r>
             <a:endParaRPr lang="en-US" sz="1050" dirty="0"/>
           </a:p>
@@ -10704,13 +10140,13 @@
       </p:sp>
       <p:sp>
         <p:nvSpPr>
-          <p:cNvPr id="36" name="Shape 34"/>
+          <p:cNvPr id="19" name="Shape 17"/>
           <p:cNvSpPr/>
           <p:nvPr/>
         </p:nvSpPr>
         <p:spPr>
           <a:xfrm>
-            <a:off x="566928" y="7538276"/>
+            <a:off x="566928" y="5022215"/>
             <a:ext cx="6428232" cy="624459"/>
           </a:xfrm>
           <a:prstGeom prst="roundRect">
@@ -10719,11 +10155,11 @@
             </a:avLst>
           </a:prstGeom>
           <a:solidFill>
-            <a:srgbClr val="E8ECF8"/>
+            <a:srgbClr val="FDF0E6"/>
           </a:solidFill>
           <a:ln w="9525">
             <a:solidFill>
-              <a:srgbClr val="1E2761"/>
+              <a:srgbClr val="E08A3C"/>
             </a:solidFill>
             <a:prstDash val="solid"/>
           </a:ln>
@@ -10731,13 +10167,13 @@
       </p:sp>
       <p:sp>
         <p:nvSpPr>
-          <p:cNvPr id="37" name="Text 35"/>
-          <p:cNvSpPr txBox="1"/>
-          <p:nvPr/>
-        </p:nvSpPr>
-        <p:spPr>
-          <a:xfrm>
-            <a:off x="658368" y="7629716"/>
+          <p:cNvPr id="20" name="Text 18"/>
+          <p:cNvSpPr txBox="1"/>
+          <p:nvPr/>
+        </p:nvSpPr>
+        <p:spPr>
+          <a:xfrm>
+            <a:off x="658368" y="5113655"/>
             <a:ext cx="237744" cy="237744"/>
           </a:xfrm>
           <a:prstGeom prst="rect">
@@ -10756,165 +10192,199 @@
             <a:r>
               <a:rPr lang="en-US" sz="1200" b="1" dirty="0">
                 <a:solidFill>
+                  <a:srgbClr val="C25A17"/>
+                </a:solidFill>
+                <a:latin typeface="Calibri" pitchFamily="34" charset="0"/>
+                <a:ea typeface="Calibri" pitchFamily="34" charset="-122"/>
+                <a:cs typeface="Calibri" pitchFamily="34" charset="-120"/>
+              </a:rPr>
+              <a:t>！</a:t>
+            </a:r>
+            <a:endParaRPr lang="en-US" sz="1200" dirty="0"/>
+          </a:p>
+        </p:txBody>
+      </p:sp>
+      <p:sp>
+        <p:nvSpPr>
+          <p:cNvPr id="21" name="Text 19"/>
+          <p:cNvSpPr txBox="1"/>
+          <p:nvPr/>
+        </p:nvSpPr>
+        <p:spPr>
+          <a:xfrm>
+            <a:off x="950976" y="5131943"/>
+            <a:ext cx="5925312" cy="441579"/>
+          </a:xfrm>
+          <a:prstGeom prst="rect">
+            <a:avLst/>
+          </a:prstGeom>
+          <a:noFill/>
+          <a:ln/>
+        </p:spPr>
+        <p:txBody>
+          <a:bodyPr wrap="square" lIns="0" tIns="0" rIns="0" bIns="0" rtlCol="0" anchor="t"/>
+          <a:lstStyle/>
+          <a:p>
+            <a:pPr indent="0" marL="0">
+              <a:lnSpc>
+                <a:spcPct val="120000"/>
+              </a:lnSpc>
+              <a:buNone/>
+            </a:pPr>
+            <a:r>
+              <a:rPr lang="en-US" sz="1050" dirty="0">
+                <a:solidFill>
+                  <a:srgbClr val="222222"/>
+                </a:solidFill>
+                <a:latin typeface="Calibri" pitchFamily="34" charset="0"/>
+                <a:ea typeface="Calibri" pitchFamily="34" charset="-122"/>
+                <a:cs typeface="Calibri" pitchFamily="34" charset="-120"/>
+              </a:rPr>
+              <a:t>1台のスマートフォンを複数の方で使うと、2人目には1人目の回答が表示され、</a:t>
+            </a:r>
+            <a:pPr indent="0" marL="0">
+              <a:lnSpc>
+                <a:spcPct val="120000"/>
+              </a:lnSpc>
+              <a:buNone/>
+            </a:pPr>
+            <a:r>
+              <a:rPr lang="en-US" sz="1050" b="1" dirty="0">
+                <a:solidFill>
+                  <a:srgbClr val="222222"/>
+                </a:solidFill>
+                <a:latin typeface="Calibri" pitchFamily="34" charset="0"/>
+                <a:ea typeface="Calibri" pitchFamily="34" charset="-122"/>
+                <a:cs typeface="Calibri" pitchFamily="34" charset="-120"/>
+              </a:rPr>
+              <a:t>上書きになります</a:t>
+            </a:r>
+            <a:pPr indent="0" marL="0">
+              <a:lnSpc>
+                <a:spcPct val="120000"/>
+              </a:lnSpc>
+              <a:buNone/>
+            </a:pPr>
+            <a:r>
+              <a:rPr lang="en-US" sz="1050" dirty="0">
+                <a:solidFill>
+                  <a:srgbClr val="222222"/>
+                </a:solidFill>
+                <a:latin typeface="Calibri" pitchFamily="34" charset="0"/>
+                <a:ea typeface="Calibri" pitchFamily="34" charset="-122"/>
+                <a:cs typeface="Calibri" pitchFamily="34" charset="-120"/>
+              </a:rPr>
+              <a:t>。人数は「何人で来られましたか」の設問で把握してください。</a:t>
+            </a:r>
+            <a:endParaRPr lang="en-US" sz="1050" dirty="0"/>
+          </a:p>
+        </p:txBody>
+      </p:sp>
+      <p:pic>
+        <p:nvPicPr>
+          <p:cNvPr id="22" name="Image 0" descr="C:\Users\sato\Desktop\enque\docs\images\p-answered-again.png">    </p:cNvPr>
+          <p:cNvPicPr>
+            <a:picLocks noChangeAspect="1"/>
+          </p:cNvPicPr>
+          <p:nvPr/>
+        </p:nvPicPr>
+        <p:blipFill>
+          <a:blip r:embed="rId1"/>
+          <a:stretch>
+            <a:fillRect/>
+          </a:stretch>
+        </p:blipFill>
+        <p:spPr>
+          <a:xfrm>
+            <a:off x="776748" y="5719826"/>
+            <a:ext cx="6008593" cy="3474720"/>
+          </a:xfrm>
+          <a:prstGeom prst="rect">
+            <a:avLst/>
+          </a:prstGeom>
+        </p:spPr>
+      </p:pic>
+      <p:sp>
+        <p:nvSpPr>
+          <p:cNvPr id="23" name="Text 20"/>
+          <p:cNvSpPr txBox="1"/>
+          <p:nvPr/>
+        </p:nvSpPr>
+        <p:spPr>
+          <a:xfrm>
+            <a:off x="566928" y="9249410"/>
+            <a:ext cx="6428232" cy="274320"/>
+          </a:xfrm>
+          <a:prstGeom prst="rect">
+            <a:avLst/>
+          </a:prstGeom>
+          <a:noFill/>
+          <a:ln/>
+        </p:spPr>
+        <p:txBody>
+          <a:bodyPr wrap="square" lIns="0" tIns="0" rIns="0" bIns="0" rtlCol="0" anchor="ctr"/>
+          <a:lstStyle/>
+          <a:p>
+            <a:pPr algn="ctr" indent="0" marL="0">
+              <a:buNone/>
+            </a:pPr>
+            <a:r>
+              <a:rPr lang="en-US" sz="950" dirty="0">
+                <a:solidFill>
+                  <a:srgbClr val="6B6B6B"/>
+                </a:solidFill>
+                <a:latin typeface="Calibri" pitchFamily="34" charset="0"/>
+                <a:ea typeface="Calibri" pitchFamily="34" charset="-122"/>
+                <a:cs typeface="Calibri" pitchFamily="34" charset="-120"/>
+              </a:rPr>
+              <a:t>回答済みの来場者が同じQRを読み直したときの画面（「ご回答済みです」の案内が見えるもの）。</a:t>
+            </a:r>
+            <a:endParaRPr lang="en-US" sz="950" dirty="0"/>
+          </a:p>
+        </p:txBody>
+      </p:sp>
+      <p:sp>
+        <p:nvSpPr>
+          <p:cNvPr id="24" name="Text 21"/>
+          <p:cNvSpPr txBox="1"/>
+          <p:nvPr/>
+        </p:nvSpPr>
+        <p:spPr>
+          <a:xfrm>
+            <a:off x="566928" y="9688322"/>
+            <a:ext cx="6428232" cy="257810"/>
+          </a:xfrm>
+          <a:prstGeom prst="rect">
+            <a:avLst/>
+          </a:prstGeom>
+          <a:noFill/>
+          <a:ln/>
+        </p:spPr>
+        <p:txBody>
+          <a:bodyPr wrap="square" lIns="0" tIns="0" rIns="0" bIns="0" rtlCol="0" anchor="t"/>
+          <a:lstStyle/>
+          <a:p>
+            <a:pPr indent="0" marL="0">
+              <a:buNone/>
+            </a:pPr>
+            <a:r>
+              <a:rPr lang="en-US" sz="1400" b="1" dirty="0">
+                <a:solidFill>
                   <a:srgbClr val="1E2761"/>
                 </a:solidFill>
                 <a:latin typeface="Calibri" pitchFamily="34" charset="0"/>
                 <a:ea typeface="Calibri" pitchFamily="34" charset="-122"/>
                 <a:cs typeface="Calibri" pitchFamily="34" charset="-120"/>
               </a:rPr>
-              <a:t>i</a:t>
-            </a:r>
-            <a:endParaRPr lang="en-US" sz="1200" dirty="0"/>
-          </a:p>
-        </p:txBody>
-      </p:sp>
-      <p:sp>
-        <p:nvSpPr>
-          <p:cNvPr id="38" name="Text 36"/>
-          <p:cNvSpPr txBox="1"/>
-          <p:nvPr/>
-        </p:nvSpPr>
-        <p:spPr>
-          <a:xfrm>
-            <a:off x="950976" y="7648003"/>
-            <a:ext cx="5925312" cy="441579"/>
-          </a:xfrm>
-          <a:prstGeom prst="rect">
-            <a:avLst/>
-          </a:prstGeom>
-          <a:noFill/>
-          <a:ln/>
-        </p:spPr>
-        <p:txBody>
-          <a:bodyPr wrap="square" lIns="0" tIns="0" rIns="0" bIns="0" rtlCol="0" anchor="t"/>
-          <a:lstStyle/>
-          <a:p>
-            <a:pPr indent="0" marL="0">
-              <a:lnSpc>
-                <a:spcPct val="120000"/>
-              </a:lnSpc>
-              <a:buNone/>
-            </a:pPr>
-            <a:r>
-              <a:rPr lang="en-US" sz="1050" dirty="0">
-                <a:solidFill>
-                  <a:srgbClr val="222222"/>
-                </a:solidFill>
-                <a:latin typeface="Calibri" pitchFamily="34" charset="0"/>
-                <a:ea typeface="Calibri" pitchFamily="34" charset="-122"/>
-                <a:cs typeface="Calibri" pitchFamily="34" charset="-120"/>
-              </a:rPr>
-              <a:t>来場者の画面での呼び方（「ブース」か「企業」か）は、サーバーの </a:t>
-            </a:r>
-            <a:pPr indent="0" marL="0">
-              <a:lnSpc>
-                <a:spcPct val="120000"/>
-              </a:lnSpc>
-              <a:buNone/>
-            </a:pPr>
-            <a:r>
-              <a:rPr lang="en-US" sz="998" dirty="0">
-                <a:solidFill>
-                  <a:srgbClr val="222222"/>
-                </a:solidFill>
-                <a:latin typeface="Courier New" pitchFamily="34" charset="0"/>
-                <a:ea typeface="Courier New" pitchFamily="34" charset="-122"/>
-                <a:cs typeface="Courier New" pitchFamily="34" charset="-120"/>
-              </a:rPr>
-              <a:t>.env</a:t>
-            </a:r>
-            <a:pPr indent="0" marL="0">
-              <a:lnSpc>
-                <a:spcPct val="120000"/>
-              </a:lnSpc>
-              <a:buNone/>
-            </a:pPr>
-            <a:r>
-              <a:rPr lang="en-US" sz="1050" dirty="0">
-                <a:solidFill>
-                  <a:srgbClr val="222222"/>
-                </a:solidFill>
-                <a:latin typeface="Calibri" pitchFamily="34" charset="0"/>
-                <a:ea typeface="Calibri" pitchFamily="34" charset="-122"/>
-                <a:cs typeface="Calibri" pitchFamily="34" charset="-120"/>
-              </a:rPr>
-              <a:t> の </a:t>
-            </a:r>
-            <a:pPr indent="0" marL="0">
-              <a:lnSpc>
-                <a:spcPct val="120000"/>
-              </a:lnSpc>
-              <a:buNone/>
-            </a:pPr>
-            <a:r>
-              <a:rPr lang="en-US" sz="998" dirty="0">
-                <a:solidFill>
-                  <a:srgbClr val="222222"/>
-                </a:solidFill>
-                <a:latin typeface="Courier New" pitchFamily="34" charset="0"/>
-                <a:ea typeface="Courier New" pitchFamily="34" charset="-122"/>
-                <a:cs typeface="Courier New" pitchFamily="34" charset="-120"/>
-              </a:rPr>
-              <a:t>BOOTH_LABEL</a:t>
-            </a:r>
-            <a:pPr indent="0" marL="0">
-              <a:lnSpc>
-                <a:spcPct val="120000"/>
-              </a:lnSpc>
-              <a:buNone/>
-            </a:pPr>
-            <a:r>
-              <a:rPr lang="en-US" sz="1050" dirty="0">
-                <a:solidFill>
-                  <a:srgbClr val="222222"/>
-                </a:solidFill>
-                <a:latin typeface="Calibri" pitchFamily="34" charset="0"/>
-                <a:ea typeface="Calibri" pitchFamily="34" charset="-122"/>
-                <a:cs typeface="Calibri" pitchFamily="34" charset="-120"/>
-              </a:rPr>
-              <a:t> で変えられます。合同説明会のように「企業」と呼ぶイベントでは </a:t>
-            </a:r>
-            <a:pPr indent="0" marL="0">
-              <a:lnSpc>
-                <a:spcPct val="120000"/>
-              </a:lnSpc>
-              <a:buNone/>
-            </a:pPr>
-            <a:r>
-              <a:rPr lang="en-US" sz="998" dirty="0">
-                <a:solidFill>
-                  <a:srgbClr val="222222"/>
-                </a:solidFill>
-                <a:latin typeface="Courier New" pitchFamily="34" charset="0"/>
-                <a:ea typeface="Courier New" pitchFamily="34" charset="-122"/>
-                <a:cs typeface="Courier New" pitchFamily="34" charset="-120"/>
-              </a:rPr>
-              <a:t>BOOTH_LABEL=企業</a:t>
-            </a:r>
-            <a:pPr indent="0" marL="0">
-              <a:lnSpc>
-                <a:spcPct val="120000"/>
-              </a:lnSpc>
-              <a:buNone/>
-            </a:pPr>
-            <a:r>
-              <a:rPr lang="en-US" sz="1050" dirty="0">
-                <a:solidFill>
-                  <a:srgbClr val="222222"/>
-                </a:solidFill>
-                <a:latin typeface="Calibri" pitchFamily="34" charset="0"/>
-                <a:ea typeface="Calibri" pitchFamily="34" charset="-122"/>
-                <a:cs typeface="Calibri" pitchFamily="34" charset="-120"/>
-              </a:rPr>
-              <a:t> にします。</a:t>
-            </a:r>
-            <a:endParaRPr lang="en-US" sz="1050" dirty="0"/>
-          </a:p>
-        </p:txBody>
-      </p:sp>
-      <p:sp>
-        <p:nvSpPr>
-          <p:cNvPr id="39" name="Text 37"/>
+              <a:t>来場者の流れ</a:t>
+            </a:r>
+            <a:endParaRPr lang="en-US" sz="1400" dirty="0"/>
+          </a:p>
+        </p:txBody>
+      </p:sp>
+      <p:sp>
+        <p:nvSpPr>
+          <p:cNvPr id="25" name="Text 22"/>
           <p:cNvSpPr txBox="1"/>
           <p:nvPr/>
         </p:nvSpPr>
@@ -11061,40 +10531,36 @@
           </a:p>
         </p:txBody>
       </p:sp>
-      <p:pic>
-        <p:nvPicPr>
-          <p:cNvPr id="4" name="Image 0" descr="C:\Users\sato\Desktop\enque\docs\images\p-next-booth.png">    </p:cNvPr>
-          <p:cNvPicPr>
-            <a:picLocks noChangeAspect="1"/>
-          </p:cNvPicPr>
-          <p:nvPr/>
-        </p:nvPicPr>
-        <p:blipFill>
-          <a:blip r:embed="rId1"/>
-          <a:stretch>
-            <a:fillRect/>
-          </a:stretch>
-        </p:blipFill>
-        <p:spPr>
-          <a:xfrm>
-            <a:off x="1639824" y="1481328"/>
-            <a:ext cx="4282440" cy="3474720"/>
-          </a:xfrm>
-          <a:prstGeom prst="rect">
-            <a:avLst/>
-          </a:prstGeom>
-        </p:spPr>
-      </p:pic>
-      <p:sp>
-        <p:nvSpPr>
-          <p:cNvPr id="5" name="Text 2"/>
-          <p:cNvSpPr txBox="1"/>
-          <p:nvPr/>
-        </p:nvSpPr>
-        <p:spPr>
-          <a:xfrm>
-            <a:off x="566928" y="5010912"/>
-            <a:ext cx="6428232" cy="274320"/>
+      <p:sp>
+        <p:nvSpPr>
+          <p:cNvPr id="4" name="Shape 2"/>
+          <p:cNvSpPr/>
+          <p:nvPr/>
+        </p:nvSpPr>
+        <p:spPr>
+          <a:xfrm>
+            <a:off x="566928" y="1499616"/>
+            <a:ext cx="274320" cy="274320"/>
+          </a:xfrm>
+          <a:prstGeom prst="ellipse">
+            <a:avLst/>
+          </a:prstGeom>
+          <a:solidFill>
+            <a:srgbClr val="1E2761"/>
+          </a:solidFill>
+          <a:ln/>
+        </p:spPr>
+      </p:sp>
+      <p:sp>
+        <p:nvSpPr>
+          <p:cNvPr id="5" name="Text 3"/>
+          <p:cNvSpPr txBox="1"/>
+          <p:nvPr/>
+        </p:nvSpPr>
+        <p:spPr>
+          <a:xfrm>
+            <a:off x="566928" y="1499616"/>
+            <a:ext cx="274320" cy="274320"/>
           </a:xfrm>
           <a:prstGeom prst="rect">
             <a:avLst/>
@@ -11110,34 +10576,649 @@
               <a:buNone/>
             </a:pPr>
             <a:r>
-              <a:rPr lang="en-US" sz="950" dirty="0">
-                <a:solidFill>
-                  <a:srgbClr val="6B6B6B"/>
-                </a:solidFill>
-                <a:latin typeface="Calibri" pitchFamily="34" charset="0"/>
-                <a:ea typeface="Calibri" pitchFamily="34" charset="-122"/>
-                <a:cs typeface="Calibri" pitchFamily="34" charset="-120"/>
-              </a:rPr>
-              <a:t>来場者の回答済み画面の「ほかのブースもまわる」（「次のブースのQRコードを読み取る」ボタンが見えるもの）。</a:t>
-            </a:r>
-            <a:endParaRPr lang="en-US" sz="950" dirty="0"/>
-          </a:p>
-        </p:txBody>
-      </p:sp>
-      <p:sp>
-        <p:nvSpPr>
-          <p:cNvPr id="6" name="Shape 3"/>
+              <a:rPr lang="en-US" sz="1100" b="1" dirty="0">
+                <a:solidFill>
+                  <a:srgbClr val="FFFFFF"/>
+                </a:solidFill>
+                <a:latin typeface="Calibri" pitchFamily="34" charset="0"/>
+                <a:ea typeface="Calibri" pitchFamily="34" charset="-122"/>
+                <a:cs typeface="Calibri" pitchFamily="34" charset="-120"/>
+              </a:rPr>
+              <a:t>1</a:t>
+            </a:r>
+            <a:endParaRPr lang="en-US" sz="1100" dirty="0"/>
+          </a:p>
+        </p:txBody>
+      </p:sp>
+      <p:sp>
+        <p:nvSpPr>
+          <p:cNvPr id="6" name="Text 4"/>
+          <p:cNvSpPr txBox="1"/>
+          <p:nvPr/>
+        </p:nvSpPr>
+        <p:spPr>
+          <a:xfrm>
+            <a:off x="969264" y="1481328"/>
+            <a:ext cx="6025896" cy="365760"/>
+          </a:xfrm>
+          <a:prstGeom prst="rect">
+            <a:avLst/>
+          </a:prstGeom>
+          <a:noFill/>
+          <a:ln/>
+        </p:spPr>
+        <p:txBody>
+          <a:bodyPr wrap="square" lIns="0" tIns="0" rIns="0" bIns="0" rtlCol="0" anchor="t"/>
+          <a:lstStyle/>
+          <a:p>
+            <a:pPr indent="0" marL="0">
+              <a:lnSpc>
+                <a:spcPct val="125000"/>
+              </a:lnSpc>
+              <a:buNone/>
+            </a:pPr>
+            <a:r>
+              <a:rPr lang="en-US" sz="1150" dirty="0">
+                <a:solidFill>
+                  <a:srgbClr val="222222"/>
+                </a:solidFill>
+                <a:latin typeface="Calibri" pitchFamily="34" charset="0"/>
+                <a:ea typeface="Calibri" pitchFamily="34" charset="-122"/>
+                <a:cs typeface="Calibri" pitchFamily="34" charset="-120"/>
+              </a:rPr>
+              <a:t>ブースのQRコードを読み取る</a:t>
+            </a:r>
+            <a:endParaRPr lang="en-US" sz="1150" dirty="0"/>
+          </a:p>
+        </p:txBody>
+      </p:sp>
+      <p:sp>
+        <p:nvSpPr>
+          <p:cNvPr id="7" name="Shape 5"/>
           <p:cNvSpPr/>
           <p:nvPr/>
         </p:nvSpPr>
         <p:spPr>
           <a:xfrm>
-            <a:off x="566928" y="5340096"/>
-            <a:ext cx="6428232" cy="624459"/>
+            <a:off x="566928" y="1956816"/>
+            <a:ext cx="274320" cy="274320"/>
+          </a:xfrm>
+          <a:prstGeom prst="ellipse">
+            <a:avLst/>
+          </a:prstGeom>
+          <a:solidFill>
+            <a:srgbClr val="1E2761"/>
+          </a:solidFill>
+          <a:ln/>
+        </p:spPr>
+      </p:sp>
+      <p:sp>
+        <p:nvSpPr>
+          <p:cNvPr id="8" name="Text 6"/>
+          <p:cNvSpPr txBox="1"/>
+          <p:nvPr/>
+        </p:nvSpPr>
+        <p:spPr>
+          <a:xfrm>
+            <a:off x="566928" y="1956816"/>
+            <a:ext cx="274320" cy="274320"/>
+          </a:xfrm>
+          <a:prstGeom prst="rect">
+            <a:avLst/>
+          </a:prstGeom>
+          <a:noFill/>
+          <a:ln/>
+        </p:spPr>
+        <p:txBody>
+          <a:bodyPr wrap="square" lIns="0" tIns="0" rIns="0" bIns="0" rtlCol="0" anchor="ctr"/>
+          <a:lstStyle/>
+          <a:p>
+            <a:pPr algn="ctr" indent="0" marL="0">
+              <a:buNone/>
+            </a:pPr>
+            <a:r>
+              <a:rPr lang="en-US" sz="1100" b="1" dirty="0">
+                <a:solidFill>
+                  <a:srgbClr val="FFFFFF"/>
+                </a:solidFill>
+                <a:latin typeface="Calibri" pitchFamily="34" charset="0"/>
+                <a:ea typeface="Calibri" pitchFamily="34" charset="-122"/>
+                <a:cs typeface="Calibri" pitchFamily="34" charset="-120"/>
+              </a:rPr>
+              <a:t>2</a:t>
+            </a:r>
+            <a:endParaRPr lang="en-US" sz="1100" dirty="0"/>
+          </a:p>
+        </p:txBody>
+      </p:sp>
+      <p:sp>
+        <p:nvSpPr>
+          <p:cNvPr id="9" name="Text 7"/>
+          <p:cNvSpPr txBox="1"/>
+          <p:nvPr/>
+        </p:nvSpPr>
+        <p:spPr>
+          <a:xfrm>
+            <a:off x="969264" y="1938528"/>
+            <a:ext cx="6025896" cy="365760"/>
+          </a:xfrm>
+          <a:prstGeom prst="rect">
+            <a:avLst/>
+          </a:prstGeom>
+          <a:noFill/>
+          <a:ln/>
+        </p:spPr>
+        <p:txBody>
+          <a:bodyPr wrap="square" lIns="0" tIns="0" rIns="0" bIns="0" rtlCol="0" anchor="t"/>
+          <a:lstStyle/>
+          <a:p>
+            <a:pPr indent="0" marL="0">
+              <a:lnSpc>
+                <a:spcPct val="125000"/>
+              </a:lnSpc>
+              <a:buNone/>
+            </a:pPr>
+            <a:r>
+              <a:rPr lang="en-US" sz="1150" dirty="0">
+                <a:solidFill>
+                  <a:srgbClr val="222222"/>
+                </a:solidFill>
+                <a:latin typeface="Calibri" pitchFamily="34" charset="0"/>
+                <a:ea typeface="Calibri" pitchFamily="34" charset="-122"/>
+                <a:cs typeface="Calibri" pitchFamily="34" charset="-120"/>
+              </a:rPr>
+              <a:t>アンケートに回答して送信する</a:t>
+            </a:r>
+            <a:endParaRPr lang="en-US" sz="1150" dirty="0"/>
+          </a:p>
+        </p:txBody>
+      </p:sp>
+      <p:sp>
+        <p:nvSpPr>
+          <p:cNvPr id="10" name="Shape 8"/>
+          <p:cNvSpPr/>
+          <p:nvPr/>
+        </p:nvSpPr>
+        <p:spPr>
+          <a:xfrm>
+            <a:off x="566928" y="2414016"/>
+            <a:ext cx="274320" cy="274320"/>
+          </a:xfrm>
+          <a:prstGeom prst="ellipse">
+            <a:avLst/>
+          </a:prstGeom>
+          <a:solidFill>
+            <a:srgbClr val="1E2761"/>
+          </a:solidFill>
+          <a:ln/>
+        </p:spPr>
+      </p:sp>
+      <p:sp>
+        <p:nvSpPr>
+          <p:cNvPr id="11" name="Text 9"/>
+          <p:cNvSpPr txBox="1"/>
+          <p:nvPr/>
+        </p:nvSpPr>
+        <p:spPr>
+          <a:xfrm>
+            <a:off x="566928" y="2414016"/>
+            <a:ext cx="274320" cy="274320"/>
+          </a:xfrm>
+          <a:prstGeom prst="rect">
+            <a:avLst/>
+          </a:prstGeom>
+          <a:noFill/>
+          <a:ln/>
+        </p:spPr>
+        <p:txBody>
+          <a:bodyPr wrap="square" lIns="0" tIns="0" rIns="0" bIns="0" rtlCol="0" anchor="ctr"/>
+          <a:lstStyle/>
+          <a:p>
+            <a:pPr algn="ctr" indent="0" marL="0">
+              <a:buNone/>
+            </a:pPr>
+            <a:r>
+              <a:rPr lang="en-US" sz="1100" b="1" dirty="0">
+                <a:solidFill>
+                  <a:srgbClr val="FFFFFF"/>
+                </a:solidFill>
+                <a:latin typeface="Calibri" pitchFamily="34" charset="0"/>
+                <a:ea typeface="Calibri" pitchFamily="34" charset="-122"/>
+                <a:cs typeface="Calibri" pitchFamily="34" charset="-120"/>
+              </a:rPr>
+              <a:t>3</a:t>
+            </a:r>
+            <a:endParaRPr lang="en-US" sz="1100" dirty="0"/>
+          </a:p>
+        </p:txBody>
+      </p:sp>
+      <p:sp>
+        <p:nvSpPr>
+          <p:cNvPr id="12" name="Text 10"/>
+          <p:cNvSpPr txBox="1"/>
+          <p:nvPr/>
+        </p:nvSpPr>
+        <p:spPr>
+          <a:xfrm>
+            <a:off x="969264" y="2395728"/>
+            <a:ext cx="6025896" cy="365760"/>
+          </a:xfrm>
+          <a:prstGeom prst="rect">
+            <a:avLst/>
+          </a:prstGeom>
+          <a:noFill/>
+          <a:ln/>
+        </p:spPr>
+        <p:txBody>
+          <a:bodyPr wrap="square" lIns="0" tIns="0" rIns="0" bIns="0" rtlCol="0" anchor="t"/>
+          <a:lstStyle/>
+          <a:p>
+            <a:pPr indent="0" marL="0">
+              <a:lnSpc>
+                <a:spcPct val="125000"/>
+              </a:lnSpc>
+              <a:buNone/>
+            </a:pPr>
+            <a:r>
+              <a:rPr lang="en-US" sz="1150" b="1" dirty="0">
+                <a:solidFill>
+                  <a:srgbClr val="222222"/>
+                </a:solidFill>
+                <a:latin typeface="Calibri" pitchFamily="34" charset="0"/>
+                <a:ea typeface="Calibri" pitchFamily="34" charset="-122"/>
+                <a:cs typeface="Calibri" pitchFamily="34" charset="-120"/>
+              </a:rPr>
+              <a:t>交換コード</a:t>
+            </a:r>
+            <a:pPr indent="0" marL="0">
+              <a:lnSpc>
+                <a:spcPct val="125000"/>
+              </a:lnSpc>
+              <a:buNone/>
+            </a:pPr>
+            <a:r>
+              <a:rPr lang="en-US" sz="1150" dirty="0">
+                <a:solidFill>
+                  <a:srgbClr val="222222"/>
+                </a:solidFill>
+                <a:latin typeface="Calibri" pitchFamily="34" charset="0"/>
+                <a:ea typeface="Calibri" pitchFamily="34" charset="-122"/>
+                <a:cs typeface="Calibri" pitchFamily="34" charset="-120"/>
+              </a:rPr>
+              <a:t>が表示される（総合受付で提示すると景品と交換できます）</a:t>
+            </a:r>
+            <a:endParaRPr lang="en-US" sz="1150" dirty="0"/>
+          </a:p>
+        </p:txBody>
+      </p:sp>
+      <p:sp>
+        <p:nvSpPr>
+          <p:cNvPr id="13" name="Shape 11"/>
+          <p:cNvSpPr/>
+          <p:nvPr/>
+        </p:nvSpPr>
+        <p:spPr>
+          <a:xfrm>
+            <a:off x="566928" y="2871216"/>
+            <a:ext cx="274320" cy="274320"/>
+          </a:xfrm>
+          <a:prstGeom prst="ellipse">
+            <a:avLst/>
+          </a:prstGeom>
+          <a:solidFill>
+            <a:srgbClr val="1E2761"/>
+          </a:solidFill>
+          <a:ln/>
+        </p:spPr>
+      </p:sp>
+      <p:sp>
+        <p:nvSpPr>
+          <p:cNvPr id="14" name="Text 12"/>
+          <p:cNvSpPr txBox="1"/>
+          <p:nvPr/>
+        </p:nvSpPr>
+        <p:spPr>
+          <a:xfrm>
+            <a:off x="566928" y="2871216"/>
+            <a:ext cx="274320" cy="274320"/>
+          </a:xfrm>
+          <a:prstGeom prst="rect">
+            <a:avLst/>
+          </a:prstGeom>
+          <a:noFill/>
+          <a:ln/>
+        </p:spPr>
+        <p:txBody>
+          <a:bodyPr wrap="square" lIns="0" tIns="0" rIns="0" bIns="0" rtlCol="0" anchor="ctr"/>
+          <a:lstStyle/>
+          <a:p>
+            <a:pPr algn="ctr" indent="0" marL="0">
+              <a:buNone/>
+            </a:pPr>
+            <a:r>
+              <a:rPr lang="en-US" sz="1100" b="1" dirty="0">
+                <a:solidFill>
+                  <a:srgbClr val="FFFFFF"/>
+                </a:solidFill>
+                <a:latin typeface="Calibri" pitchFamily="34" charset="0"/>
+                <a:ea typeface="Calibri" pitchFamily="34" charset="-122"/>
+                <a:cs typeface="Calibri" pitchFamily="34" charset="-120"/>
+              </a:rPr>
+              <a:t>4</a:t>
+            </a:r>
+            <a:endParaRPr lang="en-US" sz="1100" dirty="0"/>
+          </a:p>
+        </p:txBody>
+      </p:sp>
+      <p:sp>
+        <p:nvSpPr>
+          <p:cNvPr id="15" name="Text 13"/>
+          <p:cNvSpPr txBox="1"/>
+          <p:nvPr/>
+        </p:nvSpPr>
+        <p:spPr>
+          <a:xfrm>
+            <a:off x="969264" y="2852928"/>
+            <a:ext cx="6025896" cy="478409"/>
+          </a:xfrm>
+          <a:prstGeom prst="rect">
+            <a:avLst/>
+          </a:prstGeom>
+          <a:noFill/>
+          <a:ln/>
+        </p:spPr>
+        <p:txBody>
+          <a:bodyPr wrap="square" lIns="0" tIns="0" rIns="0" bIns="0" rtlCol="0" anchor="t"/>
+          <a:lstStyle/>
+          <a:p>
+            <a:pPr indent="0" marL="0">
+              <a:lnSpc>
+                <a:spcPct val="125000"/>
+              </a:lnSpc>
+              <a:buNone/>
+            </a:pPr>
+            <a:r>
+              <a:rPr lang="en-US" sz="1150" dirty="0">
+                <a:solidFill>
+                  <a:srgbClr val="222222"/>
+                </a:solidFill>
+                <a:latin typeface="Calibri" pitchFamily="34" charset="0"/>
+                <a:ea typeface="Calibri" pitchFamily="34" charset="-122"/>
+                <a:cs typeface="Calibri" pitchFamily="34" charset="-120"/>
+              </a:rPr>
+              <a:t>回答済み画面の</a:t>
+            </a:r>
+            <a:pPr indent="0" marL="0">
+              <a:lnSpc>
+                <a:spcPct val="125000"/>
+              </a:lnSpc>
+              <a:buNone/>
+            </a:pPr>
+            <a:r>
+              <a:rPr lang="en-US" sz="1150" b="1" dirty="0">
+                <a:solidFill>
+                  <a:srgbClr val="222222"/>
+                </a:solidFill>
+                <a:latin typeface="Calibri" pitchFamily="34" charset="0"/>
+                <a:ea typeface="Calibri" pitchFamily="34" charset="-122"/>
+                <a:cs typeface="Calibri" pitchFamily="34" charset="-120"/>
+              </a:rPr>
+              <a:t>「次のブースのQRコードを読み取る」</a:t>
+            </a:r>
+            <a:pPr indent="0" marL="0">
+              <a:lnSpc>
+                <a:spcPct val="125000"/>
+              </a:lnSpc>
+              <a:buNone/>
+            </a:pPr>
+            <a:r>
+              <a:rPr lang="en-US" sz="1150" dirty="0">
+                <a:solidFill>
+                  <a:srgbClr val="222222"/>
+                </a:solidFill>
+                <a:latin typeface="Calibri" pitchFamily="34" charset="0"/>
+                <a:ea typeface="Calibri" pitchFamily="34" charset="-122"/>
+                <a:cs typeface="Calibri" pitchFamily="34" charset="-120"/>
+              </a:rPr>
+              <a:t>から、ブラウザを閉じずに次のブースへ進む</a:t>
+            </a:r>
+            <a:endParaRPr lang="en-US" sz="1150" dirty="0"/>
+          </a:p>
+        </p:txBody>
+      </p:sp>
+      <p:sp>
+        <p:nvSpPr>
+          <p:cNvPr id="16" name="Shape 14"/>
+          <p:cNvSpPr/>
+          <p:nvPr/>
+        </p:nvSpPr>
+        <p:spPr>
+          <a:xfrm>
+            <a:off x="566928" y="3404489"/>
+            <a:ext cx="274320" cy="274320"/>
+          </a:xfrm>
+          <a:prstGeom prst="ellipse">
+            <a:avLst/>
+          </a:prstGeom>
+          <a:solidFill>
+            <a:srgbClr val="1E2761"/>
+          </a:solidFill>
+          <a:ln/>
+        </p:spPr>
+      </p:sp>
+      <p:sp>
+        <p:nvSpPr>
+          <p:cNvPr id="17" name="Text 15"/>
+          <p:cNvSpPr txBox="1"/>
+          <p:nvPr/>
+        </p:nvSpPr>
+        <p:spPr>
+          <a:xfrm>
+            <a:off x="566928" y="3404489"/>
+            <a:ext cx="274320" cy="274320"/>
+          </a:xfrm>
+          <a:prstGeom prst="rect">
+            <a:avLst/>
+          </a:prstGeom>
+          <a:noFill/>
+          <a:ln/>
+        </p:spPr>
+        <p:txBody>
+          <a:bodyPr wrap="square" lIns="0" tIns="0" rIns="0" bIns="0" rtlCol="0" anchor="ctr"/>
+          <a:lstStyle/>
+          <a:p>
+            <a:pPr algn="ctr" indent="0" marL="0">
+              <a:buNone/>
+            </a:pPr>
+            <a:r>
+              <a:rPr lang="en-US" sz="1100" b="1" dirty="0">
+                <a:solidFill>
+                  <a:srgbClr val="FFFFFF"/>
+                </a:solidFill>
+                <a:latin typeface="Calibri" pitchFamily="34" charset="0"/>
+                <a:ea typeface="Calibri" pitchFamily="34" charset="-122"/>
+                <a:cs typeface="Calibri" pitchFamily="34" charset="-120"/>
+              </a:rPr>
+              <a:t>5</a:t>
+            </a:r>
+            <a:endParaRPr lang="en-US" sz="1100" dirty="0"/>
+          </a:p>
+        </p:txBody>
+      </p:sp>
+      <p:sp>
+        <p:nvSpPr>
+          <p:cNvPr id="18" name="Text 16"/>
+          <p:cNvSpPr txBox="1"/>
+          <p:nvPr/>
+        </p:nvSpPr>
+        <p:spPr>
+          <a:xfrm>
+            <a:off x="969264" y="3386201"/>
+            <a:ext cx="6025896" cy="365760"/>
+          </a:xfrm>
+          <a:prstGeom prst="rect">
+            <a:avLst/>
+          </a:prstGeom>
+          <a:noFill/>
+          <a:ln/>
+        </p:spPr>
+        <p:txBody>
+          <a:bodyPr wrap="square" lIns="0" tIns="0" rIns="0" bIns="0" rtlCol="0" anchor="t"/>
+          <a:lstStyle/>
+          <a:p>
+            <a:pPr indent="0" marL="0">
+              <a:lnSpc>
+                <a:spcPct val="125000"/>
+              </a:lnSpc>
+              <a:buNone/>
+            </a:pPr>
+            <a:r>
+              <a:rPr lang="en-US" sz="1150" b="1" dirty="0">
+                <a:solidFill>
+                  <a:srgbClr val="222222"/>
+                </a:solidFill>
+                <a:latin typeface="Calibri" pitchFamily="34" charset="0"/>
+                <a:ea typeface="Calibri" pitchFamily="34" charset="-122"/>
+                <a:cs typeface="Calibri" pitchFamily="34" charset="-120"/>
+              </a:rPr>
+              <a:t>総合アンケート</a:t>
+            </a:r>
+            <a:pPr indent="0" marL="0">
+              <a:lnSpc>
+                <a:spcPct val="125000"/>
+              </a:lnSpc>
+              <a:buNone/>
+            </a:pPr>
+            <a:r>
+              <a:rPr lang="en-US" sz="1150" dirty="0">
+                <a:solidFill>
+                  <a:srgbClr val="222222"/>
+                </a:solidFill>
+                <a:latin typeface="Calibri" pitchFamily="34" charset="0"/>
+                <a:ea typeface="Calibri" pitchFamily="34" charset="-122"/>
+                <a:cs typeface="Calibri" pitchFamily="34" charset="-120"/>
+              </a:rPr>
+              <a:t>（まだ答えていない場合）にも、同じ画面で続けて答える</a:t>
+            </a:r>
+            <a:endParaRPr lang="en-US" sz="1150" dirty="0"/>
+          </a:p>
+        </p:txBody>
+      </p:sp>
+      <p:sp>
+        <p:nvSpPr>
+          <p:cNvPr id="19" name="Shape 17"/>
+          <p:cNvSpPr/>
+          <p:nvPr/>
+        </p:nvSpPr>
+        <p:spPr>
+          <a:xfrm>
+            <a:off x="566928" y="3861689"/>
+            <a:ext cx="274320" cy="274320"/>
+          </a:xfrm>
+          <a:prstGeom prst="ellipse">
+            <a:avLst/>
+          </a:prstGeom>
+          <a:solidFill>
+            <a:srgbClr val="1E2761"/>
+          </a:solidFill>
+          <a:ln/>
+        </p:spPr>
+      </p:sp>
+      <p:sp>
+        <p:nvSpPr>
+          <p:cNvPr id="20" name="Text 18"/>
+          <p:cNvSpPr txBox="1"/>
+          <p:nvPr/>
+        </p:nvSpPr>
+        <p:spPr>
+          <a:xfrm>
+            <a:off x="566928" y="3861689"/>
+            <a:ext cx="274320" cy="274320"/>
+          </a:xfrm>
+          <a:prstGeom prst="rect">
+            <a:avLst/>
+          </a:prstGeom>
+          <a:noFill/>
+          <a:ln/>
+        </p:spPr>
+        <p:txBody>
+          <a:bodyPr wrap="square" lIns="0" tIns="0" rIns="0" bIns="0" rtlCol="0" anchor="ctr"/>
+          <a:lstStyle/>
+          <a:p>
+            <a:pPr algn="ctr" indent="0" marL="0">
+              <a:buNone/>
+            </a:pPr>
+            <a:r>
+              <a:rPr lang="en-US" sz="1100" b="1" dirty="0">
+                <a:solidFill>
+                  <a:srgbClr val="FFFFFF"/>
+                </a:solidFill>
+                <a:latin typeface="Calibri" pitchFamily="34" charset="0"/>
+                <a:ea typeface="Calibri" pitchFamily="34" charset="-122"/>
+                <a:cs typeface="Calibri" pitchFamily="34" charset="-120"/>
+              </a:rPr>
+              <a:t>6</a:t>
+            </a:r>
+            <a:endParaRPr lang="en-US" sz="1100" dirty="0"/>
+          </a:p>
+        </p:txBody>
+      </p:sp>
+      <p:sp>
+        <p:nvSpPr>
+          <p:cNvPr id="21" name="Text 19"/>
+          <p:cNvSpPr txBox="1"/>
+          <p:nvPr/>
+        </p:nvSpPr>
+        <p:spPr>
+          <a:xfrm>
+            <a:off x="969264" y="3843401"/>
+            <a:ext cx="6025896" cy="365760"/>
+          </a:xfrm>
+          <a:prstGeom prst="rect">
+            <a:avLst/>
+          </a:prstGeom>
+          <a:noFill/>
+          <a:ln/>
+        </p:spPr>
+        <p:txBody>
+          <a:bodyPr wrap="square" lIns="0" tIns="0" rIns="0" bIns="0" rtlCol="0" anchor="t"/>
+          <a:lstStyle/>
+          <a:p>
+            <a:pPr indent="0" marL="0">
+              <a:lnSpc>
+                <a:spcPct val="125000"/>
+              </a:lnSpc>
+              <a:buNone/>
+            </a:pPr>
+            <a:r>
+              <a:rPr lang="en-US" sz="1150" dirty="0">
+                <a:solidFill>
+                  <a:srgbClr val="222222"/>
+                </a:solidFill>
+                <a:latin typeface="Calibri" pitchFamily="34" charset="0"/>
+                <a:ea typeface="Calibri" pitchFamily="34" charset="-122"/>
+                <a:cs typeface="Calibri" pitchFamily="34" charset="-120"/>
+              </a:rPr>
+              <a:t>任意でメールアドレスを登録すると、後日スマホ壁紙のご案内が届きます</a:t>
+            </a:r>
+            <a:endParaRPr lang="en-US" sz="1150" dirty="0"/>
+          </a:p>
+        </p:txBody>
+      </p:sp>
+      <p:sp>
+        <p:nvSpPr>
+          <p:cNvPr id="22" name="Shape 20"/>
+          <p:cNvSpPr/>
+          <p:nvPr/>
+        </p:nvSpPr>
+        <p:spPr>
+          <a:xfrm>
+            <a:off x="566928" y="4300601"/>
+            <a:ext cx="6428232" cy="817817"/>
           </a:xfrm>
           <a:prstGeom prst="roundRect">
             <a:avLst>
-              <a:gd name="adj" fmla="val 8786"/>
+              <a:gd name="adj" fmla="val 6709"/>
             </a:avLst>
           </a:prstGeom>
           <a:solidFill>
@@ -11153,13 +11234,13 @@
       </p:sp>
       <p:sp>
         <p:nvSpPr>
-          <p:cNvPr id="7" name="Text 4"/>
-          <p:cNvSpPr txBox="1"/>
-          <p:nvPr/>
-        </p:nvSpPr>
-        <p:spPr>
-          <a:xfrm>
-            <a:off x="658368" y="5431536"/>
+          <p:cNvPr id="23" name="Text 21"/>
+          <p:cNvSpPr txBox="1"/>
+          <p:nvPr/>
+        </p:nvSpPr>
+        <p:spPr>
+          <a:xfrm>
+            <a:off x="658368" y="4392041"/>
             <a:ext cx="237744" cy="237744"/>
           </a:xfrm>
           <a:prstGeom prst="rect">
@@ -11192,14 +11273,14 @@
       </p:sp>
       <p:sp>
         <p:nvSpPr>
-          <p:cNvPr id="8" name="Text 5"/>
-          <p:cNvSpPr txBox="1"/>
-          <p:nvPr/>
-        </p:nvSpPr>
-        <p:spPr>
-          <a:xfrm>
-            <a:off x="950976" y="5449824"/>
-            <a:ext cx="5925312" cy="441579"/>
+          <p:cNvPr id="24" name="Text 22"/>
+          <p:cNvSpPr txBox="1"/>
+          <p:nvPr/>
+        </p:nvSpPr>
+        <p:spPr>
+          <a:xfrm>
+            <a:off x="950976" y="4410329"/>
+            <a:ext cx="5925312" cy="634937"/>
           </a:xfrm>
           <a:prstGeom prst="rect">
             <a:avLst/>
@@ -11226,7 +11307,41 @@
                 <a:ea typeface="Calibri" pitchFamily="34" charset="-122"/>
                 <a:cs typeface="Calibri" pitchFamily="34" charset="-120"/>
               </a:rPr>
-              <a:t>2社目以降のアンケートには、登録済みのアドレスが入った状態で欄が出ます（打ち間違いにその場で</a:t>
+              <a:t>回答済み画面からそのままカメラでQRコードを読み取れるので、</a:t>
+            </a:r>
+            <a:pPr indent="0" marL="0">
+              <a:lnSpc>
+                <a:spcPct val="120000"/>
+              </a:lnSpc>
+              <a:buNone/>
+            </a:pPr>
+            <a:r>
+              <a:rPr lang="en-US" sz="1050" b="1" dirty="0">
+                <a:solidFill>
+                  <a:srgbClr val="222222"/>
+                </a:solidFill>
+                <a:latin typeface="Calibri" pitchFamily="34" charset="0"/>
+                <a:ea typeface="Calibri" pitchFamily="34" charset="-122"/>
+                <a:cs typeface="Calibri" pitchFamily="34" charset="-120"/>
+              </a:rPr>
+              <a:t>カメラアプリに切り替える必要がなく、ブラウザのタブも増えません</a:t>
+            </a:r>
+            <a:pPr indent="0" marL="0">
+              <a:lnSpc>
+                <a:spcPct val="120000"/>
+              </a:lnSpc>
+              <a:buNone/>
+            </a:pPr>
+            <a:r>
+              <a:rPr lang="en-US" sz="1050" dirty="0">
+                <a:solidFill>
+                  <a:srgbClr val="222222"/>
+                </a:solidFill>
+                <a:latin typeface="Calibri" pitchFamily="34" charset="0"/>
+                <a:ea typeface="Calibri" pitchFamily="34" charset="-122"/>
+                <a:cs typeface="Calibri" pitchFamily="34" charset="-120"/>
+              </a:rPr>
+              <a:t>（カメラが使えない端末では、これまでどおりカメラアプリで読み取る案内が出ます）。</a:t>
             </a:r>
             <a:endParaRPr lang="en-US" sz="1050" dirty="0"/>
           </a:p>
@@ -11234,18 +11349,18 @@
       </p:sp>
       <p:sp>
         <p:nvSpPr>
-          <p:cNvPr id="9" name="Shape 6"/>
+          <p:cNvPr id="25" name="Shape 23"/>
           <p:cNvSpPr/>
           <p:nvPr/>
         </p:nvSpPr>
         <p:spPr>
           <a:xfrm>
-            <a:off x="566928" y="6037707"/>
-            <a:ext cx="6428232" cy="431102"/>
+            <a:off x="566928" y="5191570"/>
+            <a:ext cx="6428232" cy="624459"/>
           </a:xfrm>
           <a:prstGeom prst="roundRect">
             <a:avLst>
-              <a:gd name="adj" fmla="val 12726"/>
+              <a:gd name="adj" fmla="val 8786"/>
             </a:avLst>
           </a:prstGeom>
           <a:solidFill>
@@ -11261,13 +11376,13 @@
       </p:sp>
       <p:sp>
         <p:nvSpPr>
-          <p:cNvPr id="10" name="Text 7"/>
-          <p:cNvSpPr txBox="1"/>
-          <p:nvPr/>
-        </p:nvSpPr>
-        <p:spPr>
-          <a:xfrm>
-            <a:off x="658368" y="6129147"/>
+          <p:cNvPr id="26" name="Text 24"/>
+          <p:cNvSpPr txBox="1"/>
+          <p:nvPr/>
+        </p:nvSpPr>
+        <p:spPr>
+          <a:xfrm>
+            <a:off x="658368" y="5283010"/>
             <a:ext cx="237744" cy="237744"/>
           </a:xfrm>
           <a:prstGeom prst="rect">
@@ -11300,14 +11415,14 @@
       </p:sp>
       <p:sp>
         <p:nvSpPr>
-          <p:cNvPr id="11" name="Text 8"/>
-          <p:cNvSpPr txBox="1"/>
-          <p:nvPr/>
-        </p:nvSpPr>
-        <p:spPr>
-          <a:xfrm>
-            <a:off x="950976" y="6147435"/>
-            <a:ext cx="5925312" cy="248221"/>
+          <p:cNvPr id="27" name="Text 25"/>
+          <p:cNvSpPr txBox="1"/>
+          <p:nvPr/>
+        </p:nvSpPr>
+        <p:spPr>
+          <a:xfrm>
+            <a:off x="950976" y="5301298"/>
+            <a:ext cx="5925312" cy="441579"/>
           </a:xfrm>
           <a:prstGeom prst="rect">
             <a:avLst/>
@@ -11334,15 +11449,180 @@
                 <a:ea typeface="Calibri" pitchFamily="34" charset="-122"/>
                 <a:cs typeface="Calibri" pitchFamily="34" charset="-120"/>
               </a:rPr>
-              <a:t>気づけるようにするためです）。回答済み画面では伏せ字で表示し、そこから変更もできます。</a:t>
+              <a:t>来場者の画面での呼び方（「ブース」か「企業」か）は、サーバーの </a:t>
+            </a:r>
+            <a:pPr indent="0" marL="0">
+              <a:lnSpc>
+                <a:spcPct val="120000"/>
+              </a:lnSpc>
+              <a:buNone/>
+            </a:pPr>
+            <a:r>
+              <a:rPr lang="en-US" sz="998" dirty="0">
+                <a:solidFill>
+                  <a:srgbClr val="222222"/>
+                </a:solidFill>
+                <a:latin typeface="Courier New" pitchFamily="34" charset="0"/>
+                <a:ea typeface="Courier New" pitchFamily="34" charset="-122"/>
+                <a:cs typeface="Courier New" pitchFamily="34" charset="-120"/>
+              </a:rPr>
+              <a:t>.env</a:t>
+            </a:r>
+            <a:pPr indent="0" marL="0">
+              <a:lnSpc>
+                <a:spcPct val="120000"/>
+              </a:lnSpc>
+              <a:buNone/>
+            </a:pPr>
+            <a:r>
+              <a:rPr lang="en-US" sz="1050" dirty="0">
+                <a:solidFill>
+                  <a:srgbClr val="222222"/>
+                </a:solidFill>
+                <a:latin typeface="Calibri" pitchFamily="34" charset="0"/>
+                <a:ea typeface="Calibri" pitchFamily="34" charset="-122"/>
+                <a:cs typeface="Calibri" pitchFamily="34" charset="-120"/>
+              </a:rPr>
+              <a:t> の </a:t>
+            </a:r>
+            <a:pPr indent="0" marL="0">
+              <a:lnSpc>
+                <a:spcPct val="120000"/>
+              </a:lnSpc>
+              <a:buNone/>
+            </a:pPr>
+            <a:r>
+              <a:rPr lang="en-US" sz="998" dirty="0">
+                <a:solidFill>
+                  <a:srgbClr val="222222"/>
+                </a:solidFill>
+                <a:latin typeface="Courier New" pitchFamily="34" charset="0"/>
+                <a:ea typeface="Courier New" pitchFamily="34" charset="-122"/>
+                <a:cs typeface="Courier New" pitchFamily="34" charset="-120"/>
+              </a:rPr>
+              <a:t>BOOTH_LABEL</a:t>
+            </a:r>
+            <a:pPr indent="0" marL="0">
+              <a:lnSpc>
+                <a:spcPct val="120000"/>
+              </a:lnSpc>
+              <a:buNone/>
+            </a:pPr>
+            <a:r>
+              <a:rPr lang="en-US" sz="1050" dirty="0">
+                <a:solidFill>
+                  <a:srgbClr val="222222"/>
+                </a:solidFill>
+                <a:latin typeface="Calibri" pitchFamily="34" charset="0"/>
+                <a:ea typeface="Calibri" pitchFamily="34" charset="-122"/>
+                <a:cs typeface="Calibri" pitchFamily="34" charset="-120"/>
+              </a:rPr>
+              <a:t> で変えられます。合同説明会のように「企業」と呼ぶイベントでは </a:t>
+            </a:r>
+            <a:pPr indent="0" marL="0">
+              <a:lnSpc>
+                <a:spcPct val="120000"/>
+              </a:lnSpc>
+              <a:buNone/>
+            </a:pPr>
+            <a:r>
+              <a:rPr lang="en-US" sz="998" dirty="0">
+                <a:solidFill>
+                  <a:srgbClr val="222222"/>
+                </a:solidFill>
+                <a:latin typeface="Courier New" pitchFamily="34" charset="0"/>
+                <a:ea typeface="Courier New" pitchFamily="34" charset="-122"/>
+                <a:cs typeface="Courier New" pitchFamily="34" charset="-120"/>
+              </a:rPr>
+              <a:t>BOOTH_LABEL=企業</a:t>
+            </a:r>
+            <a:pPr indent="0" marL="0">
+              <a:lnSpc>
+                <a:spcPct val="120000"/>
+              </a:lnSpc>
+              <a:buNone/>
+            </a:pPr>
+            <a:r>
+              <a:rPr lang="en-US" sz="1050" dirty="0">
+                <a:solidFill>
+                  <a:srgbClr val="222222"/>
+                </a:solidFill>
+                <a:latin typeface="Calibri" pitchFamily="34" charset="0"/>
+                <a:ea typeface="Calibri" pitchFamily="34" charset="-122"/>
+                <a:cs typeface="Calibri" pitchFamily="34" charset="-120"/>
+              </a:rPr>
+              <a:t> にします。</a:t>
             </a:r>
             <a:endParaRPr lang="en-US" sz="1050" dirty="0"/>
           </a:p>
         </p:txBody>
       </p:sp>
-      <p:sp>
-        <p:nvSpPr>
-          <p:cNvPr id="12" name="Text 9"/>
+      <p:pic>
+        <p:nvPicPr>
+          <p:cNvPr id="28" name="Image 0" descr="C:\Users\sato\Desktop\enque\docs\images\p-next-booth.png">    </p:cNvPr>
+          <p:cNvPicPr>
+            <a:picLocks noChangeAspect="1"/>
+          </p:cNvPicPr>
+          <p:nvPr/>
+        </p:nvPicPr>
+        <p:blipFill>
+          <a:blip r:embed="rId1"/>
+          <a:stretch>
+            <a:fillRect/>
+          </a:stretch>
+        </p:blipFill>
+        <p:spPr>
+          <a:xfrm>
+            <a:off x="1639824" y="5889181"/>
+            <a:ext cx="4282440" cy="3474720"/>
+          </a:xfrm>
+          <a:prstGeom prst="rect">
+            <a:avLst/>
+          </a:prstGeom>
+        </p:spPr>
+      </p:pic>
+      <p:sp>
+        <p:nvSpPr>
+          <p:cNvPr id="29" name="Text 26"/>
+          <p:cNvSpPr txBox="1"/>
+          <p:nvPr/>
+        </p:nvSpPr>
+        <p:spPr>
+          <a:xfrm>
+            <a:off x="566928" y="9418765"/>
+            <a:ext cx="6428232" cy="274320"/>
+          </a:xfrm>
+          <a:prstGeom prst="rect">
+            <a:avLst/>
+          </a:prstGeom>
+          <a:noFill/>
+          <a:ln/>
+        </p:spPr>
+        <p:txBody>
+          <a:bodyPr wrap="square" lIns="0" tIns="0" rIns="0" bIns="0" rtlCol="0" anchor="ctr"/>
+          <a:lstStyle/>
+          <a:p>
+            <a:pPr algn="ctr" indent="0" marL="0">
+              <a:buNone/>
+            </a:pPr>
+            <a:r>
+              <a:rPr lang="en-US" sz="950" dirty="0">
+                <a:solidFill>
+                  <a:srgbClr val="6B6B6B"/>
+                </a:solidFill>
+                <a:latin typeface="Calibri" pitchFamily="34" charset="0"/>
+                <a:ea typeface="Calibri" pitchFamily="34" charset="-122"/>
+                <a:cs typeface="Calibri" pitchFamily="34" charset="-120"/>
+              </a:rPr>
+              <a:t>来場者の回答済み画面の「ほかのブースもまわる」（「次のブースのQRコードを読み取る」ボタンが見えるもの）。</a:t>
+            </a:r>
+            <a:endParaRPr lang="en-US" sz="950" dirty="0"/>
+          </a:p>
+        </p:txBody>
+      </p:sp>
+      <p:sp>
+        <p:nvSpPr>
+          <p:cNvPr id="30" name="Text 27"/>
           <p:cNvSpPr txBox="1"/>
           <p:nvPr/>
         </p:nvSpPr>
@@ -11489,9 +11769,225 @@
           </a:p>
         </p:txBody>
       </p:sp>
+      <p:sp>
+        <p:nvSpPr>
+          <p:cNvPr id="4" name="Shape 2"/>
+          <p:cNvSpPr/>
+          <p:nvPr/>
+        </p:nvSpPr>
+        <p:spPr>
+          <a:xfrm>
+            <a:off x="566928" y="1481328"/>
+            <a:ext cx="6428232" cy="624459"/>
+          </a:xfrm>
+          <a:prstGeom prst="roundRect">
+            <a:avLst>
+              <a:gd name="adj" fmla="val 8786"/>
+            </a:avLst>
+          </a:prstGeom>
+          <a:solidFill>
+            <a:srgbClr val="E8ECF8"/>
+          </a:solidFill>
+          <a:ln w="9525">
+            <a:solidFill>
+              <a:srgbClr val="1E2761"/>
+            </a:solidFill>
+            <a:prstDash val="solid"/>
+          </a:ln>
+        </p:spPr>
+      </p:sp>
+      <p:sp>
+        <p:nvSpPr>
+          <p:cNvPr id="5" name="Text 3"/>
+          <p:cNvSpPr txBox="1"/>
+          <p:nvPr/>
+        </p:nvSpPr>
+        <p:spPr>
+          <a:xfrm>
+            <a:off x="658368" y="1572768"/>
+            <a:ext cx="237744" cy="237744"/>
+          </a:xfrm>
+          <a:prstGeom prst="rect">
+            <a:avLst/>
+          </a:prstGeom>
+          <a:noFill/>
+          <a:ln/>
+        </p:spPr>
+        <p:txBody>
+          <a:bodyPr wrap="square" lIns="0" tIns="0" rIns="0" bIns="0" rtlCol="0" anchor="ctr"/>
+          <a:lstStyle/>
+          <a:p>
+            <a:pPr algn="ctr" indent="0" marL="0">
+              <a:buNone/>
+            </a:pPr>
+            <a:r>
+              <a:rPr lang="en-US" sz="1200" b="1" dirty="0">
+                <a:solidFill>
+                  <a:srgbClr val="1E2761"/>
+                </a:solidFill>
+                <a:latin typeface="Calibri" pitchFamily="34" charset="0"/>
+                <a:ea typeface="Calibri" pitchFamily="34" charset="-122"/>
+                <a:cs typeface="Calibri" pitchFamily="34" charset="-120"/>
+              </a:rPr>
+              <a:t>i</a:t>
+            </a:r>
+            <a:endParaRPr lang="en-US" sz="1200" dirty="0"/>
+          </a:p>
+        </p:txBody>
+      </p:sp>
+      <p:sp>
+        <p:nvSpPr>
+          <p:cNvPr id="6" name="Text 4"/>
+          <p:cNvSpPr txBox="1"/>
+          <p:nvPr/>
+        </p:nvSpPr>
+        <p:spPr>
+          <a:xfrm>
+            <a:off x="950976" y="1591056"/>
+            <a:ext cx="5925312" cy="441579"/>
+          </a:xfrm>
+          <a:prstGeom prst="rect">
+            <a:avLst/>
+          </a:prstGeom>
+          <a:noFill/>
+          <a:ln/>
+        </p:spPr>
+        <p:txBody>
+          <a:bodyPr wrap="square" lIns="0" tIns="0" rIns="0" bIns="0" rtlCol="0" anchor="t"/>
+          <a:lstStyle/>
+          <a:p>
+            <a:pPr indent="0" marL="0">
+              <a:lnSpc>
+                <a:spcPct val="120000"/>
+              </a:lnSpc>
+              <a:buNone/>
+            </a:pPr>
+            <a:r>
+              <a:rPr lang="en-US" sz="1050" dirty="0">
+                <a:solidFill>
+                  <a:srgbClr val="222222"/>
+                </a:solidFill>
+                <a:latin typeface="Calibri" pitchFamily="34" charset="0"/>
+                <a:ea typeface="Calibri" pitchFamily="34" charset="-122"/>
+                <a:cs typeface="Calibri" pitchFamily="34" charset="-120"/>
+              </a:rPr>
+              <a:t>2社目以降のアンケートには、登録済みのアドレスが入った状態で欄が出ます（打ち間違いにその場で</a:t>
+            </a:r>
+            <a:endParaRPr lang="en-US" sz="1050" dirty="0"/>
+          </a:p>
+        </p:txBody>
+      </p:sp>
+      <p:sp>
+        <p:nvSpPr>
+          <p:cNvPr id="7" name="Shape 5"/>
+          <p:cNvSpPr/>
+          <p:nvPr/>
+        </p:nvSpPr>
+        <p:spPr>
+          <a:xfrm>
+            <a:off x="566928" y="2178939"/>
+            <a:ext cx="6428232" cy="431102"/>
+          </a:xfrm>
+          <a:prstGeom prst="roundRect">
+            <a:avLst>
+              <a:gd name="adj" fmla="val 12726"/>
+            </a:avLst>
+          </a:prstGeom>
+          <a:solidFill>
+            <a:srgbClr val="E8ECF8"/>
+          </a:solidFill>
+          <a:ln w="9525">
+            <a:solidFill>
+              <a:srgbClr val="1E2761"/>
+            </a:solidFill>
+            <a:prstDash val="solid"/>
+          </a:ln>
+        </p:spPr>
+      </p:sp>
+      <p:sp>
+        <p:nvSpPr>
+          <p:cNvPr id="8" name="Text 6"/>
+          <p:cNvSpPr txBox="1"/>
+          <p:nvPr/>
+        </p:nvSpPr>
+        <p:spPr>
+          <a:xfrm>
+            <a:off x="658368" y="2270379"/>
+            <a:ext cx="237744" cy="237744"/>
+          </a:xfrm>
+          <a:prstGeom prst="rect">
+            <a:avLst/>
+          </a:prstGeom>
+          <a:noFill/>
+          <a:ln/>
+        </p:spPr>
+        <p:txBody>
+          <a:bodyPr wrap="square" lIns="0" tIns="0" rIns="0" bIns="0" rtlCol="0" anchor="ctr"/>
+          <a:lstStyle/>
+          <a:p>
+            <a:pPr algn="ctr" indent="0" marL="0">
+              <a:buNone/>
+            </a:pPr>
+            <a:r>
+              <a:rPr lang="en-US" sz="1200" b="1" dirty="0">
+                <a:solidFill>
+                  <a:srgbClr val="1E2761"/>
+                </a:solidFill>
+                <a:latin typeface="Calibri" pitchFamily="34" charset="0"/>
+                <a:ea typeface="Calibri" pitchFamily="34" charset="-122"/>
+                <a:cs typeface="Calibri" pitchFamily="34" charset="-120"/>
+              </a:rPr>
+              <a:t>i</a:t>
+            </a:r>
+            <a:endParaRPr lang="en-US" sz="1200" dirty="0"/>
+          </a:p>
+        </p:txBody>
+      </p:sp>
+      <p:sp>
+        <p:nvSpPr>
+          <p:cNvPr id="9" name="Text 7"/>
+          <p:cNvSpPr txBox="1"/>
+          <p:nvPr/>
+        </p:nvSpPr>
+        <p:spPr>
+          <a:xfrm>
+            <a:off x="950976" y="2288667"/>
+            <a:ext cx="5925312" cy="248221"/>
+          </a:xfrm>
+          <a:prstGeom prst="rect">
+            <a:avLst/>
+          </a:prstGeom>
+          <a:noFill/>
+          <a:ln/>
+        </p:spPr>
+        <p:txBody>
+          <a:bodyPr wrap="square" lIns="0" tIns="0" rIns="0" bIns="0" rtlCol="0" anchor="t"/>
+          <a:lstStyle/>
+          <a:p>
+            <a:pPr indent="0" marL="0">
+              <a:lnSpc>
+                <a:spcPct val="120000"/>
+              </a:lnSpc>
+              <a:buNone/>
+            </a:pPr>
+            <a:r>
+              <a:rPr lang="en-US" sz="1050" dirty="0">
+                <a:solidFill>
+                  <a:srgbClr val="222222"/>
+                </a:solidFill>
+                <a:latin typeface="Calibri" pitchFamily="34" charset="0"/>
+                <a:ea typeface="Calibri" pitchFamily="34" charset="-122"/>
+                <a:cs typeface="Calibri" pitchFamily="34" charset="-120"/>
+              </a:rPr>
+              <a:t>気づけるようにするためです）。回答済み画面では伏せ字で表示し、そこから変更もできます。</a:t>
+            </a:r>
+            <a:endParaRPr lang="en-US" sz="1050" dirty="0"/>
+          </a:p>
+        </p:txBody>
+      </p:sp>
       <p:pic>
         <p:nvPicPr>
-          <p:cNvPr id="4" name="Image 0" descr="C:\Users\sato\Desktop\enque\docs\images\o-event-setting.png">    </p:cNvPr>
+          <p:cNvPr id="10" name="Image 0" descr="C:\Users\sato\Desktop\enque\docs\images\o-event-setting.png">    </p:cNvPr>
           <p:cNvPicPr>
             <a:picLocks noChangeAspect="1"/>
           </p:cNvPicPr>
@@ -11505,7 +12001,7 @@
         </p:blipFill>
         <p:spPr>
           <a:xfrm>
-            <a:off x="1312823" y="1481328"/>
+            <a:off x="1312823" y="2683193"/>
             <a:ext cx="4936441" cy="3474720"/>
           </a:xfrm>
           <a:prstGeom prst="rect">
@@ -11515,13 +12011,13 @@
       </p:pic>
       <p:sp>
         <p:nvSpPr>
-          <p:cNvPr id="5" name="Text 2"/>
-          <p:cNvSpPr txBox="1"/>
-          <p:nvPr/>
-        </p:nvSpPr>
-        <p:spPr>
-          <a:xfrm>
-            <a:off x="566928" y="5010912"/>
+          <p:cNvPr id="11" name="Text 8"/>
+          <p:cNvSpPr txBox="1"/>
+          <p:nvPr/>
+        </p:nvSpPr>
+        <p:spPr>
+          <a:xfrm>
+            <a:off x="566928" y="6212777"/>
             <a:ext cx="6428232" cy="274320"/>
           </a:xfrm>
           <a:prstGeom prst="rect">
@@ -11554,7 +12050,7 @@
       </p:sp>
       <p:sp>
         <p:nvSpPr>
-          <p:cNvPr id="6" name="Text 3"/>
+          <p:cNvPr id="12" name="Text 9"/>
           <p:cNvSpPr txBox="1"/>
           <p:nvPr/>
         </p:nvSpPr>
@@ -14276,7 +14772,7 @@
                 <a:ea typeface="Calibri" pitchFamily="34" charset="-122"/>
                 <a:cs typeface="Calibri" pitchFamily="34" charset="-120"/>
               </a:rPr>
-              <a:t>メール登録</a:t>
+              <a:t>修正された回答</a:t>
             </a:r>
             <a:pPr indent="0" marL="0">
               <a:lnSpc>
@@ -14293,7 +14789,7 @@
                 <a:ea typeface="Calibri" pitchFamily="34" charset="-122"/>
                 <a:cs typeface="Calibri" pitchFamily="34" charset="-120"/>
               </a:rPr>
-              <a:t>：壁紙のご案内先の数</a:t>
+              <a:t>：来場者があとから書き直したぶん（同じQRを読み直して直せます）</a:t>
             </a:r>
             <a:endParaRPr lang="en-US" sz="1100" dirty="0"/>
           </a:p>
@@ -14336,6 +14832,66 @@
                 <a:ea typeface="Calibri" pitchFamily="34" charset="-122"/>
                 <a:cs typeface="Calibri" pitchFamily="34" charset="-120"/>
               </a:rPr>
+              <a:t>メール登録</a:t>
+            </a:r>
+            <a:pPr indent="0" marL="0">
+              <a:lnSpc>
+                <a:spcPct val="125000"/>
+              </a:lnSpc>
+              <a:buNone/>
+            </a:pPr>
+            <a:r>
+              <a:rPr lang="en-US" sz="1100" dirty="0">
+                <a:solidFill>
+                  <a:srgbClr val="222222"/>
+                </a:solidFill>
+                <a:latin typeface="Calibri" pitchFamily="34" charset="0"/>
+                <a:ea typeface="Calibri" pitchFamily="34" charset="-122"/>
+                <a:cs typeface="Calibri" pitchFamily="34" charset="-120"/>
+              </a:rPr>
+              <a:t>：壁紙のご案内先の数</a:t>
+            </a:r>
+            <a:endParaRPr lang="en-US" sz="1100" dirty="0"/>
+          </a:p>
+        </p:txBody>
+      </p:sp>
+      <p:sp>
+        <p:nvSpPr>
+          <p:cNvPr id="13" name="Text 11"/>
+          <p:cNvSpPr txBox="1"/>
+          <p:nvPr/>
+        </p:nvSpPr>
+        <p:spPr>
+          <a:xfrm>
+            <a:off x="713232" y="3981069"/>
+            <a:ext cx="6281928" cy="257429"/>
+          </a:xfrm>
+          <a:prstGeom prst="rect">
+            <a:avLst/>
+          </a:prstGeom>
+          <a:noFill/>
+          <a:ln/>
+        </p:spPr>
+        <p:txBody>
+          <a:bodyPr wrap="square" lIns="0" tIns="0" rIns="0" bIns="0" rtlCol="0" anchor="t"/>
+          <a:lstStyle/>
+          <a:p>
+            <a:pPr marL="342900" indent="-342900">
+              <a:lnSpc>
+                <a:spcPct val="125000"/>
+              </a:lnSpc>
+              <a:buSzPct val="100000"/>
+              <a:buChar char="●"/>
+            </a:pPr>
+            <a:r>
+              <a:rPr lang="en-US" sz="1100" b="1" dirty="0">
+                <a:solidFill>
+                  <a:srgbClr val="222222"/>
+                </a:solidFill>
+                <a:latin typeface="Calibri" pitchFamily="34" charset="0"/>
+                <a:ea typeface="Calibri" pitchFamily="34" charset="-122"/>
+                <a:cs typeface="Calibri" pitchFamily="34" charset="-120"/>
+              </a:rPr>
               <a:t>交換コード</a:t>
             </a:r>
             <a:pPr indent="0" marL="0">
@@ -14361,13 +14917,13 @@
       </p:sp>
       <p:sp>
         <p:nvSpPr>
-          <p:cNvPr id="13" name="Text 11"/>
-          <p:cNvSpPr txBox="1"/>
-          <p:nvPr/>
-        </p:nvSpPr>
-        <p:spPr>
-          <a:xfrm>
-            <a:off x="566928" y="3981069"/>
+          <p:cNvPr id="14" name="Text 12"/>
+          <p:cNvSpPr txBox="1"/>
+          <p:nvPr/>
+        </p:nvSpPr>
+        <p:spPr>
+          <a:xfrm>
+            <a:off x="566928" y="4256786"/>
             <a:ext cx="6428232" cy="257429"/>
           </a:xfrm>
           <a:prstGeom prst="rect">
@@ -14471,13 +15027,13 @@
       </p:sp>
       <p:sp>
         <p:nvSpPr>
-          <p:cNvPr id="14" name="Text 12"/>
-          <p:cNvSpPr txBox="1"/>
-          <p:nvPr/>
-        </p:nvSpPr>
-        <p:spPr>
-          <a:xfrm>
-            <a:off x="566928" y="4275074"/>
+          <p:cNvPr id="15" name="Text 13"/>
+          <p:cNvSpPr txBox="1"/>
+          <p:nvPr/>
+        </p:nvSpPr>
+        <p:spPr>
+          <a:xfrm>
+            <a:off x="566928" y="4550791"/>
             <a:ext cx="6428232" cy="257429"/>
           </a:xfrm>
           <a:prstGeom prst="rect">
@@ -14547,13 +15103,13 @@
       </p:sp>
       <p:sp>
         <p:nvSpPr>
-          <p:cNvPr id="15" name="Shape 13"/>
+          <p:cNvPr id="16" name="Shape 14"/>
           <p:cNvSpPr/>
           <p:nvPr/>
         </p:nvSpPr>
         <p:spPr>
           <a:xfrm>
-            <a:off x="566928" y="4569079"/>
+            <a:off x="566928" y="4844796"/>
             <a:ext cx="6428232" cy="431102"/>
           </a:xfrm>
           <a:prstGeom prst="roundRect">
@@ -14574,13 +15130,13 @@
       </p:sp>
       <p:sp>
         <p:nvSpPr>
-          <p:cNvPr id="16" name="Text 14"/>
-          <p:cNvSpPr txBox="1"/>
-          <p:nvPr/>
-        </p:nvSpPr>
-        <p:spPr>
-          <a:xfrm>
-            <a:off x="658368" y="4660519"/>
+          <p:cNvPr id="17" name="Text 15"/>
+          <p:cNvSpPr txBox="1"/>
+          <p:nvPr/>
+        </p:nvSpPr>
+        <p:spPr>
+          <a:xfrm>
+            <a:off x="658368" y="4936236"/>
             <a:ext cx="237744" cy="237744"/>
           </a:xfrm>
           <a:prstGeom prst="rect">
@@ -14613,13 +15169,13 @@
       </p:sp>
       <p:sp>
         <p:nvSpPr>
-          <p:cNvPr id="17" name="Text 15"/>
-          <p:cNvSpPr txBox="1"/>
-          <p:nvPr/>
-        </p:nvSpPr>
-        <p:spPr>
-          <a:xfrm>
-            <a:off x="950976" y="4678807"/>
+          <p:cNvPr id="18" name="Text 16"/>
+          <p:cNvSpPr txBox="1"/>
+          <p:nvPr/>
+        </p:nvSpPr>
+        <p:spPr>
+          <a:xfrm>
+            <a:off x="950976" y="4954524"/>
             <a:ext cx="5925312" cy="248221"/>
           </a:xfrm>
           <a:prstGeom prst="rect">
@@ -14655,13 +15211,13 @@
       </p:sp>
       <p:sp>
         <p:nvSpPr>
-          <p:cNvPr id="18" name="Shape 16"/>
+          <p:cNvPr id="19" name="Shape 17"/>
           <p:cNvSpPr/>
           <p:nvPr/>
         </p:nvSpPr>
         <p:spPr>
           <a:xfrm>
-            <a:off x="566928" y="5073333"/>
+            <a:off x="566928" y="5349050"/>
             <a:ext cx="6428232" cy="431102"/>
           </a:xfrm>
           <a:prstGeom prst="roundRect">
@@ -14682,13 +15238,13 @@
       </p:sp>
       <p:sp>
         <p:nvSpPr>
-          <p:cNvPr id="19" name="Text 17"/>
-          <p:cNvSpPr txBox="1"/>
-          <p:nvPr/>
-        </p:nvSpPr>
-        <p:spPr>
-          <a:xfrm>
-            <a:off x="658368" y="5164773"/>
+          <p:cNvPr id="20" name="Text 18"/>
+          <p:cNvSpPr txBox="1"/>
+          <p:nvPr/>
+        </p:nvSpPr>
+        <p:spPr>
+          <a:xfrm>
+            <a:off x="658368" y="5440489"/>
             <a:ext cx="237744" cy="237744"/>
           </a:xfrm>
           <a:prstGeom prst="rect">
@@ -14721,13 +15277,13 @@
       </p:sp>
       <p:sp>
         <p:nvSpPr>
-          <p:cNvPr id="20" name="Text 18"/>
-          <p:cNvSpPr txBox="1"/>
-          <p:nvPr/>
-        </p:nvSpPr>
-        <p:spPr>
-          <a:xfrm>
-            <a:off x="950976" y="5183061"/>
+          <p:cNvPr id="21" name="Text 19"/>
+          <p:cNvSpPr txBox="1"/>
+          <p:nvPr/>
+        </p:nvSpPr>
+        <p:spPr>
+          <a:xfrm>
+            <a:off x="950976" y="5458778"/>
             <a:ext cx="5925312" cy="248221"/>
           </a:xfrm>
           <a:prstGeom prst="rect">
@@ -14763,13 +15319,13 @@
       </p:sp>
       <p:sp>
         <p:nvSpPr>
-          <p:cNvPr id="21" name="Shape 19"/>
+          <p:cNvPr id="22" name="Shape 20"/>
           <p:cNvSpPr/>
           <p:nvPr/>
         </p:nvSpPr>
         <p:spPr>
           <a:xfrm>
-            <a:off x="566928" y="5577586"/>
+            <a:off x="566928" y="5853303"/>
             <a:ext cx="6428232" cy="431102"/>
           </a:xfrm>
           <a:prstGeom prst="roundRect">
@@ -14790,13 +15346,13 @@
       </p:sp>
       <p:sp>
         <p:nvSpPr>
-          <p:cNvPr id="22" name="Text 20"/>
-          <p:cNvSpPr txBox="1"/>
-          <p:nvPr/>
-        </p:nvSpPr>
-        <p:spPr>
-          <a:xfrm>
-            <a:off x="658368" y="5669026"/>
+          <p:cNvPr id="23" name="Text 21"/>
+          <p:cNvSpPr txBox="1"/>
+          <p:nvPr/>
+        </p:nvSpPr>
+        <p:spPr>
+          <a:xfrm>
+            <a:off x="658368" y="5944743"/>
             <a:ext cx="237744" cy="237744"/>
           </a:xfrm>
           <a:prstGeom prst="rect">
@@ -14829,13 +15385,13 @@
       </p:sp>
       <p:sp>
         <p:nvSpPr>
-          <p:cNvPr id="23" name="Text 21"/>
-          <p:cNvSpPr txBox="1"/>
-          <p:nvPr/>
-        </p:nvSpPr>
-        <p:spPr>
-          <a:xfrm>
-            <a:off x="950976" y="5687314"/>
+          <p:cNvPr id="24" name="Text 22"/>
+          <p:cNvSpPr txBox="1"/>
+          <p:nvPr/>
+        </p:nvSpPr>
+        <p:spPr>
+          <a:xfrm>
+            <a:off x="950976" y="5963031"/>
             <a:ext cx="5925312" cy="248221"/>
           </a:xfrm>
           <a:prstGeom prst="rect">
@@ -14871,7 +15427,7 @@
       </p:sp>
       <p:pic>
         <p:nvPicPr>
-          <p:cNvPr id="24" name="Image 0" descr="C:\Users\sato\Desktop\enque\docs\images\o-dashboard-top.png">    </p:cNvPr>
+          <p:cNvPr id="25" name="Image 0" descr="C:\Users\sato\Desktop\enque\docs\images\o-dashboard-top.png">    </p:cNvPr>
           <p:cNvPicPr>
             <a:picLocks noChangeAspect="1"/>
           </p:cNvPicPr>
@@ -14885,7 +15441,7 @@
         </p:blipFill>
         <p:spPr>
           <a:xfrm>
-            <a:off x="566928" y="6081840"/>
+            <a:off x="566928" y="6357557"/>
             <a:ext cx="6428232" cy="2316774"/>
           </a:xfrm>
           <a:prstGeom prst="rect">
@@ -14895,13 +15451,13 @@
       </p:pic>
       <p:sp>
         <p:nvSpPr>
-          <p:cNvPr id="25" name="Text 22"/>
-          <p:cNvSpPr txBox="1"/>
-          <p:nvPr/>
-        </p:nvSpPr>
-        <p:spPr>
-          <a:xfrm>
-            <a:off x="566928" y="8453477"/>
+          <p:cNvPr id="26" name="Text 23"/>
+          <p:cNvSpPr txBox="1"/>
+          <p:nvPr/>
+        </p:nvSpPr>
+        <p:spPr>
+          <a:xfrm>
+            <a:off x="566928" y="8729194"/>
             <a:ext cx="6428232" cy="274320"/>
           </a:xfrm>
           <a:prstGeom prst="rect">
@@ -14934,7 +15490,7 @@
       </p:sp>
       <p:sp>
         <p:nvSpPr>
-          <p:cNvPr id="26" name="Text 23"/>
+          <p:cNvPr id="27" name="Text 24"/>
           <p:cNvSpPr txBox="1"/>
           <p:nvPr/>
         </p:nvSpPr>

--- a/docs/manual-organizer.pptx
+++ b/docs/manual-organizer.pptx
@@ -8876,7 +8876,41 @@
                 <a:ea typeface="Calibri" pitchFamily="34" charset="-122"/>
                 <a:cs typeface="Calibri" pitchFamily="34" charset="-120"/>
               </a:rPr>
-              <a:t>壁紙は案内メールのリンクから配るため、この設定では配布できません（管理画面にも警告が出ます）。</a:t>
+              <a:t>このとき</a:t>
+            </a:r>
+            <a:pPr indent="0" marL="0">
+              <a:lnSpc>
+                <a:spcPct val="125000"/>
+              </a:lnSpc>
+              <a:buNone/>
+            </a:pPr>
+            <a:r>
+              <a:rPr lang="en-US" sz="1100" b="1" dirty="0">
+                <a:solidFill>
+                  <a:srgbClr val="222222"/>
+                </a:solidFill>
+                <a:latin typeface="Calibri" pitchFamily="34" charset="0"/>
+                <a:ea typeface="Calibri" pitchFamily="34" charset="-122"/>
+                <a:cs typeface="Calibri" pitchFamily="34" charset="-120"/>
+              </a:rPr>
+              <a:t>案内メールも送信されません</a:t>
+            </a:r>
+            <a:pPr indent="0" marL="0">
+              <a:lnSpc>
+                <a:spcPct val="125000"/>
+              </a:lnSpc>
+              <a:buNone/>
+            </a:pPr>
+            <a:r>
+              <a:rPr lang="en-US" sz="1100" dirty="0">
+                <a:solidFill>
+                  <a:srgbClr val="222222"/>
+                </a:solidFill>
+                <a:latin typeface="Calibri" pitchFamily="34" charset="0"/>
+                <a:ea typeface="Calibri" pitchFamily="34" charset="-122"/>
+                <a:cs typeface="Calibri" pitchFamily="34" charset="-120"/>
+              </a:rPr>
+              <a:t>（以前に預かったアドレスが残っていても、状態を「終了」にして自動送信されることはありません）。</a:t>
             </a:r>
             <a:endParaRPr lang="en-US" sz="1100" dirty="0"/>
           </a:p>
@@ -8890,7 +8924,49 @@
         </p:nvSpPr>
         <p:spPr>
           <a:xfrm>
-            <a:off x="566928" y="6883654"/>
+            <a:off x="566928" y="6773926"/>
+            <a:ext cx="6428232" cy="459994"/>
+          </a:xfrm>
+          <a:prstGeom prst="rect">
+            <a:avLst/>
+          </a:prstGeom>
+          <a:noFill/>
+          <a:ln/>
+        </p:spPr>
+        <p:txBody>
+          <a:bodyPr wrap="square" lIns="0" tIns="0" rIns="0" bIns="0" rtlCol="0" anchor="t"/>
+          <a:lstStyle/>
+          <a:p>
+            <a:pPr indent="0" marL="0">
+              <a:lnSpc>
+                <a:spcPct val="125000"/>
+              </a:lnSpc>
+              <a:buNone/>
+            </a:pPr>
+            <a:r>
+              <a:rPr lang="en-US" sz="1100" dirty="0">
+                <a:solidFill>
+                  <a:srgbClr val="222222"/>
+                </a:solidFill>
+                <a:latin typeface="Calibri" pitchFamily="34" charset="0"/>
+                <a:ea typeface="Calibri" pitchFamily="34" charset="-122"/>
+                <a:cs typeface="Calibri" pitchFamily="34" charset="-120"/>
+              </a:rPr>
+              <a:t>状態の表記も「終了（回答締切）」に変わります。壁紙は案内メールのリンクから配るため、この設定では配布できません（管理画面にも警告が出ます）。</a:t>
+            </a:r>
+            <a:endParaRPr lang="en-US" sz="1100" dirty="0"/>
+          </a:p>
+        </p:txBody>
+      </p:sp>
+      <p:sp>
+        <p:nvSpPr>
+          <p:cNvPr id="10" name="Text 7"/>
+          <p:cNvSpPr txBox="1"/>
+          <p:nvPr/>
+        </p:nvSpPr>
+        <p:spPr>
+          <a:xfrm>
+            <a:off x="566928" y="7380224"/>
             <a:ext cx="6428232" cy="257810"/>
           </a:xfrm>
           <a:prstGeom prst="rect">
@@ -8923,13 +8999,13 @@
       </p:sp>
       <p:sp>
         <p:nvSpPr>
-          <p:cNvPr id="10" name="Text 7"/>
-          <p:cNvSpPr txBox="1"/>
-          <p:nvPr/>
-        </p:nvSpPr>
-        <p:spPr>
-          <a:xfrm>
-            <a:off x="566928" y="7214616"/>
+          <p:cNvPr id="11" name="Text 8"/>
+          <p:cNvSpPr txBox="1"/>
+          <p:nvPr/>
+        </p:nvSpPr>
+        <p:spPr>
+          <a:xfrm>
+            <a:off x="566928" y="7711186"/>
             <a:ext cx="6428232" cy="257429"/>
           </a:xfrm>
           <a:prstGeom prst="rect">
@@ -8965,13 +9041,13 @@
       </p:sp>
       <p:sp>
         <p:nvSpPr>
-          <p:cNvPr id="11" name="Text 8"/>
-          <p:cNvSpPr txBox="1"/>
-          <p:nvPr/>
-        </p:nvSpPr>
-        <p:spPr>
-          <a:xfrm>
-            <a:off x="713232" y="7508621"/>
+          <p:cNvPr id="12" name="Text 9"/>
+          <p:cNvSpPr txBox="1"/>
+          <p:nvPr/>
+        </p:nvSpPr>
+        <p:spPr>
+          <a:xfrm>
+            <a:off x="713232" y="8005191"/>
             <a:ext cx="6281928" cy="257429"/>
           </a:xfrm>
           <a:prstGeom prst="rect">
@@ -9025,13 +9101,13 @@
       </p:sp>
       <p:sp>
         <p:nvSpPr>
-          <p:cNvPr id="12" name="Text 9"/>
-          <p:cNvSpPr txBox="1"/>
-          <p:nvPr/>
-        </p:nvSpPr>
-        <p:spPr>
-          <a:xfrm>
-            <a:off x="713232" y="7784338"/>
+          <p:cNvPr id="13" name="Text 10"/>
+          <p:cNvSpPr txBox="1"/>
+          <p:nvPr/>
+        </p:nvSpPr>
+        <p:spPr>
+          <a:xfrm>
+            <a:off x="713232" y="8280908"/>
             <a:ext cx="6281928" cy="459994"/>
           </a:xfrm>
           <a:prstGeom prst="rect">
@@ -9085,7 +9161,7 @@
       </p:sp>
       <p:sp>
         <p:nvSpPr>
-          <p:cNvPr id="13" name="Text 10"/>
+          <p:cNvPr id="14" name="Text 11"/>
           <p:cNvSpPr txBox="1"/>
           <p:nvPr/>
         </p:nvSpPr>

--- a/docs/manual-organizer.pptx
+++ b/docs/manual-organizer.pptx
@@ -36,9 +36,11 @@
     <p:sldId id="284" r:id="rId30"/>
     <p:sldId id="285" r:id="rId31"/>
     <p:sldId id="286" r:id="rId32"/>
+    <p:sldId id="287" r:id="rId33"/>
+    <p:sldId id="288" r:id="rId34"/>
   </p:sldIdLst>
   <p:notesMasterIdLst>
-    <p:notesMasterId r:id="rId33"/>
+    <p:notesMasterId r:id="rId35"/>
   </p:notesMasterIdLst>
   <p:sldSz cx="7562088" cy="10689336"/>
   <p:notesSz cx="10689336" cy="7562088"/>
@@ -2668,6 +2670,182 @@
             <a:fld id="{F7021451-1387-4CA6-816F-3879F97B5CBC}" type="slidenum">
               <a:rPr lang="en-US"/>
               <a:t>31</a:t>
+            </a:fld>
+            <a:endParaRPr lang="en-US"/>
+          </a:p>
+        </p:txBody>
+      </p:sp>
+    </p:spTree>
+    <p:extLst>
+      <p:ext uri="{BB962C8B-B14F-4D97-AF65-F5344CB8AC3E}">
+        <p14:creationId xmlns:p14="http://schemas.microsoft.com/office/powerpoint/2010/main" val="1024086991"/>
+      </p:ext>
+    </p:extLst>
+  </p:cSld>
+  <p:clrMapOvr>
+    <a:masterClrMapping/>
+  </p:clrMapOvr>
+</p:notes>
+</file>
+
+<file path=ppt/notesSlides/notesSlide32.xml><?xml version="1.0" encoding="utf-8"?>
+<p:notes xmlns:a="http://schemas.openxmlformats.org/drawingml/2006/main" xmlns:r="http://schemas.openxmlformats.org/officeDocument/2006/relationships" xmlns:p="http://schemas.openxmlformats.org/presentationml/2006/main">
+  <p:cSld>
+    <p:spTree>
+      <p:nvGrpSpPr>
+        <p:cNvPr id="1" name=""/>
+        <p:cNvGrpSpPr/>
+        <p:nvPr/>
+      </p:nvGrpSpPr>
+      <p:grpSpPr>
+        <a:xfrm>
+          <a:off x="0" y="0"/>
+          <a:ext cx="0" cy="0"/>
+          <a:chOff x="0" y="0"/>
+          <a:chExt cx="0" cy="0"/>
+        </a:xfrm>
+      </p:grpSpPr>
+      <p:sp>
+        <p:nvSpPr>
+          <p:cNvPr id="2" name="Slide Image Placeholder 1"/>
+          <p:cNvSpPr>
+            <a:spLocks noGrp="1" noRot="1" noChangeAspect="1"/>
+          </p:cNvSpPr>
+          <p:nvPr>
+            <p:ph type="sldImg"/>
+          </p:nvPr>
+        </p:nvSpPr>
+        <p:spPr/>
+      </p:sp>
+      <p:sp>
+        <p:nvSpPr>
+          <p:cNvPr id="3" name="Notes Placeholder 2"/>
+          <p:cNvSpPr>
+            <a:spLocks noGrp="1"/>
+          </p:cNvSpPr>
+          <p:nvPr>
+            <p:ph type="body" idx="1"/>
+          </p:nvPr>
+        </p:nvSpPr>
+        <p:spPr/>
+        <p:txBody>
+          <a:bodyPr/>
+          <a:lstStyle/>
+          <a:p>
+            <a:r>
+              <a:rPr lang="en-US" dirty="0"/>
+              <a:t/>
+            </a:r>
+            <a:endParaRPr lang="en-US" dirty="0"/>
+          </a:p>
+        </p:txBody>
+      </p:sp>
+      <p:sp>
+        <p:nvSpPr>
+          <p:cNvPr id="4" name="Slide Number Placeholder 3"/>
+          <p:cNvSpPr>
+            <a:spLocks noGrp="1"/>
+          </p:cNvSpPr>
+          <p:nvPr>
+            <p:ph type="sldNum" sz="quarter" idx="10"/>
+          </p:nvPr>
+        </p:nvSpPr>
+        <p:spPr/>
+        <p:txBody>
+          <a:bodyPr/>
+          <a:lstStyle/>
+          <a:p>
+            <a:fld id="{F7021451-1387-4CA6-816F-3879F97B5CBC}" type="slidenum">
+              <a:rPr lang="en-US"/>
+              <a:t>32</a:t>
+            </a:fld>
+            <a:endParaRPr lang="en-US"/>
+          </a:p>
+        </p:txBody>
+      </p:sp>
+    </p:spTree>
+    <p:extLst>
+      <p:ext uri="{BB962C8B-B14F-4D97-AF65-F5344CB8AC3E}">
+        <p14:creationId xmlns:p14="http://schemas.microsoft.com/office/powerpoint/2010/main" val="1024086991"/>
+      </p:ext>
+    </p:extLst>
+  </p:cSld>
+  <p:clrMapOvr>
+    <a:masterClrMapping/>
+  </p:clrMapOvr>
+</p:notes>
+</file>
+
+<file path=ppt/notesSlides/notesSlide33.xml><?xml version="1.0" encoding="utf-8"?>
+<p:notes xmlns:a="http://schemas.openxmlformats.org/drawingml/2006/main" xmlns:r="http://schemas.openxmlformats.org/officeDocument/2006/relationships" xmlns:p="http://schemas.openxmlformats.org/presentationml/2006/main">
+  <p:cSld>
+    <p:spTree>
+      <p:nvGrpSpPr>
+        <p:cNvPr id="1" name=""/>
+        <p:cNvGrpSpPr/>
+        <p:nvPr/>
+      </p:nvGrpSpPr>
+      <p:grpSpPr>
+        <a:xfrm>
+          <a:off x="0" y="0"/>
+          <a:ext cx="0" cy="0"/>
+          <a:chOff x="0" y="0"/>
+          <a:chExt cx="0" cy="0"/>
+        </a:xfrm>
+      </p:grpSpPr>
+      <p:sp>
+        <p:nvSpPr>
+          <p:cNvPr id="2" name="Slide Image Placeholder 1"/>
+          <p:cNvSpPr>
+            <a:spLocks noGrp="1" noRot="1" noChangeAspect="1"/>
+          </p:cNvSpPr>
+          <p:nvPr>
+            <p:ph type="sldImg"/>
+          </p:nvPr>
+        </p:nvSpPr>
+        <p:spPr/>
+      </p:sp>
+      <p:sp>
+        <p:nvSpPr>
+          <p:cNvPr id="3" name="Notes Placeholder 2"/>
+          <p:cNvSpPr>
+            <a:spLocks noGrp="1"/>
+          </p:cNvSpPr>
+          <p:nvPr>
+            <p:ph type="body" idx="1"/>
+          </p:nvPr>
+        </p:nvSpPr>
+        <p:spPr/>
+        <p:txBody>
+          <a:bodyPr/>
+          <a:lstStyle/>
+          <a:p>
+            <a:r>
+              <a:rPr lang="en-US" dirty="0"/>
+              <a:t/>
+            </a:r>
+            <a:endParaRPr lang="en-US" dirty="0"/>
+          </a:p>
+        </p:txBody>
+      </p:sp>
+      <p:sp>
+        <p:nvSpPr>
+          <p:cNvPr id="4" name="Slide Number Placeholder 3"/>
+          <p:cNvSpPr>
+            <a:spLocks noGrp="1"/>
+          </p:cNvSpPr>
+          <p:nvPr>
+            <p:ph type="sldNum" sz="quarter" idx="10"/>
+          </p:nvPr>
+        </p:nvSpPr>
+        <p:spPr/>
+        <p:txBody>
+          <a:bodyPr/>
+          <a:lstStyle/>
+          <a:p>
+            <a:fld id="{F7021451-1387-4CA6-816F-3879F97B5CBC}" type="slidenum">
+              <a:rPr lang="en-US"/>
+              <a:t>33</a:t>
             </a:fld>
             <a:endParaRPr lang="en-US"/>
           </a:p>
@@ -20758,40 +20936,393 @@
           </a:p>
         </p:txBody>
       </p:sp>
-      <p:pic>
-        <p:nvPicPr>
-          <p:cNvPr id="13" name="Image 0" descr="C:\Users\sato\Desktop\enque\docs\images\o-stats.png">    </p:cNvPr>
-          <p:cNvPicPr>
-            <a:picLocks noChangeAspect="1"/>
-          </p:cNvPicPr>
-          <p:nvPr/>
-        </p:nvPicPr>
-        <p:blipFill>
-          <a:blip r:embed="rId1"/>
-          <a:stretch>
-            <a:fillRect/>
-          </a:stretch>
-        </p:blipFill>
-        <p:spPr>
-          <a:xfrm>
-            <a:off x="2140821" y="4402328"/>
-            <a:ext cx="3280447" cy="3474720"/>
-          </a:xfrm>
-          <a:prstGeom prst="rect">
-            <a:avLst/>
-          </a:prstGeom>
-        </p:spPr>
-      </p:pic>
-      <p:sp>
-        <p:nvSpPr>
-          <p:cNvPr id="14" name="Text 11"/>
-          <p:cNvSpPr txBox="1"/>
-          <p:nvPr/>
-        </p:nvSpPr>
-        <p:spPr>
-          <a:xfrm>
-            <a:off x="566928" y="7931912"/>
-            <a:ext cx="6428232" cy="274320"/>
+      <p:sp>
+        <p:nvSpPr>
+          <p:cNvPr id="13" name="Text 11"/>
+          <p:cNvSpPr txBox="1"/>
+          <p:nvPr/>
+        </p:nvSpPr>
+        <p:spPr>
+          <a:xfrm>
+            <a:off x="566928" y="4402328"/>
+            <a:ext cx="6428232" cy="459994"/>
+          </a:xfrm>
+          <a:prstGeom prst="rect">
+            <a:avLst/>
+          </a:prstGeom>
+          <a:noFill/>
+          <a:ln/>
+        </p:spPr>
+        <p:txBody>
+          <a:bodyPr wrap="square" lIns="0" tIns="0" rIns="0" bIns="0" rtlCol="0" anchor="t"/>
+          <a:lstStyle/>
+          <a:p>
+            <a:pPr indent="0" marL="0">
+              <a:lnSpc>
+                <a:spcPct val="125000"/>
+              </a:lnSpc>
+              <a:buNone/>
+            </a:pPr>
+            <a:r>
+              <a:rPr lang="en-US" sz="1100" b="1" dirty="0">
+                <a:solidFill>
+                  <a:srgbClr val="222222"/>
+                </a:solidFill>
+                <a:latin typeface="Calibri" pitchFamily="34" charset="0"/>
+                <a:ea typeface="Calibri" pitchFamily="34" charset="-122"/>
+                <a:cs typeface="Calibri" pitchFamily="34" charset="-120"/>
+              </a:rPr>
+              <a:t>総合アンケートの集計</a:t>
+            </a:r>
+            <a:pPr indent="0" marL="0">
+              <a:lnSpc>
+                <a:spcPct val="125000"/>
+              </a:lnSpc>
+              <a:buNone/>
+            </a:pPr>
+            <a:r>
+              <a:rPr lang="en-US" sz="1100" dirty="0">
+                <a:solidFill>
+                  <a:srgbClr val="222222"/>
+                </a:solidFill>
+                <a:latin typeface="Calibri" pitchFamily="34" charset="0"/>
+                <a:ea typeface="Calibri" pitchFamily="34" charset="-122"/>
+                <a:cs typeface="Calibri" pitchFamily="34" charset="-120"/>
+              </a:rPr>
+              <a:t>は、ダッシュボードの「総合アンケートの集計」、または「総合アンケートと案内メール」画面の</a:t>
+            </a:r>
+            <a:pPr indent="0" marL="0">
+              <a:lnSpc>
+                <a:spcPct val="125000"/>
+              </a:lnSpc>
+              <a:buNone/>
+            </a:pPr>
+            <a:r>
+              <a:rPr lang="en-US" sz="1100" b="1" dirty="0">
+                <a:solidFill>
+                  <a:srgbClr val="222222"/>
+                </a:solidFill>
+                <a:latin typeface="Calibri" pitchFamily="34" charset="0"/>
+                <a:ea typeface="Calibri" pitchFamily="34" charset="-122"/>
+                <a:cs typeface="Calibri" pitchFamily="34" charset="-120"/>
+              </a:rPr>
+              <a:t>「集計を見る」</a:t>
+            </a:r>
+            <a:pPr indent="0" marL="0">
+              <a:lnSpc>
+                <a:spcPct val="125000"/>
+              </a:lnSpc>
+              <a:buNone/>
+            </a:pPr>
+            <a:r>
+              <a:rPr lang="en-US" sz="1100" dirty="0">
+                <a:solidFill>
+                  <a:srgbClr val="222222"/>
+                </a:solidFill>
+                <a:latin typeface="Calibri" pitchFamily="34" charset="0"/>
+                <a:ea typeface="Calibri" pitchFamily="34" charset="-122"/>
+                <a:cs typeface="Calibri" pitchFamily="34" charset="-120"/>
+              </a:rPr>
+              <a:t>から開きます。</a:t>
+            </a:r>
+            <a:endParaRPr lang="en-US" sz="1100" dirty="0"/>
+          </a:p>
+        </p:txBody>
+      </p:sp>
+      <p:sp>
+        <p:nvSpPr>
+          <p:cNvPr id="14" name="Text 12"/>
+          <p:cNvSpPr txBox="1"/>
+          <p:nvPr/>
+        </p:nvSpPr>
+        <p:spPr>
+          <a:xfrm>
+            <a:off x="713232" y="4898898"/>
+            <a:ext cx="6281928" cy="257429"/>
+          </a:xfrm>
+          <a:prstGeom prst="rect">
+            <a:avLst/>
+          </a:prstGeom>
+          <a:noFill/>
+          <a:ln/>
+        </p:spPr>
+        <p:txBody>
+          <a:bodyPr wrap="square" lIns="0" tIns="0" rIns="0" bIns="0" rtlCol="0" anchor="t"/>
+          <a:lstStyle/>
+          <a:p>
+            <a:pPr marL="342900" indent="-342900">
+              <a:lnSpc>
+                <a:spcPct val="125000"/>
+              </a:lnSpc>
+              <a:buSzPct val="100000"/>
+              <a:buChar char="●"/>
+            </a:pPr>
+            <a:r>
+              <a:rPr lang="en-US" sz="1100" b="1" dirty="0">
+                <a:solidFill>
+                  <a:srgbClr val="222222"/>
+                </a:solidFill>
+                <a:latin typeface="Calibri" pitchFamily="34" charset="0"/>
+                <a:ea typeface="Calibri" pitchFamily="34" charset="-122"/>
+                <a:cs typeface="Calibri" pitchFamily="34" charset="-120"/>
+              </a:rPr>
+              <a:t>回答数と回答率</a:t>
+            </a:r>
+            <a:pPr indent="0" marL="0">
+              <a:lnSpc>
+                <a:spcPct val="125000"/>
+              </a:lnSpc>
+              <a:buNone/>
+            </a:pPr>
+            <a:r>
+              <a:rPr lang="en-US" sz="1100" dirty="0">
+                <a:solidFill>
+                  <a:srgbClr val="222222"/>
+                </a:solidFill>
+                <a:latin typeface="Calibri" pitchFamily="34" charset="0"/>
+                <a:ea typeface="Calibri" pitchFamily="34" charset="-122"/>
+                <a:cs typeface="Calibri" pitchFamily="34" charset="-120"/>
+              </a:rPr>
+              <a:t>（回答した来場者のうち何%が答えたか）</a:t>
+            </a:r>
+            <a:endParaRPr lang="en-US" sz="1100" dirty="0"/>
+          </a:p>
+        </p:txBody>
+      </p:sp>
+      <p:sp>
+        <p:nvSpPr>
+          <p:cNvPr id="15" name="Text 13"/>
+          <p:cNvSpPr txBox="1"/>
+          <p:nvPr/>
+        </p:nvSpPr>
+        <p:spPr>
+          <a:xfrm>
+            <a:off x="713232" y="5174615"/>
+            <a:ext cx="6281928" cy="257429"/>
+          </a:xfrm>
+          <a:prstGeom prst="rect">
+            <a:avLst/>
+          </a:prstGeom>
+          <a:noFill/>
+          <a:ln/>
+        </p:spPr>
+        <p:txBody>
+          <a:bodyPr wrap="square" lIns="0" tIns="0" rIns="0" bIns="0" rtlCol="0" anchor="t"/>
+          <a:lstStyle/>
+          <a:p>
+            <a:pPr marL="342900" indent="-342900">
+              <a:lnSpc>
+                <a:spcPct val="125000"/>
+              </a:lnSpc>
+              <a:buSzPct val="100000"/>
+              <a:buChar char="●"/>
+            </a:pPr>
+            <a:r>
+              <a:rPr lang="en-US" sz="1100" b="1" dirty="0">
+                <a:solidFill>
+                  <a:srgbClr val="222222"/>
+                </a:solidFill>
+                <a:latin typeface="Calibri" pitchFamily="34" charset="0"/>
+                <a:ea typeface="Calibri" pitchFamily="34" charset="-122"/>
+                <a:cs typeface="Calibri" pitchFamily="34" charset="-120"/>
+              </a:rPr>
+              <a:t>設問ごとのグラフ</a:t>
+            </a:r>
+            <a:pPr indent="0" marL="0">
+              <a:lnSpc>
+                <a:spcPct val="125000"/>
+              </a:lnSpc>
+              <a:buNone/>
+            </a:pPr>
+            <a:r>
+              <a:rPr lang="en-US" sz="1100" dirty="0">
+                <a:solidFill>
+                  <a:srgbClr val="222222"/>
+                </a:solidFill>
+                <a:latin typeface="Calibri" pitchFamily="34" charset="0"/>
+                <a:ea typeface="Calibri" pitchFamily="34" charset="-122"/>
+                <a:cs typeface="Calibri" pitchFamily="34" charset="-120"/>
+              </a:rPr>
+              <a:t>（企業の集計と同じ見た目）と</a:t>
+            </a:r>
+            <a:pPr indent="0" marL="0">
+              <a:lnSpc>
+                <a:spcPct val="125000"/>
+              </a:lnSpc>
+              <a:buNone/>
+            </a:pPr>
+            <a:r>
+              <a:rPr lang="en-US" sz="1100" b="1" dirty="0">
+                <a:solidFill>
+                  <a:srgbClr val="222222"/>
+                </a:solidFill>
+                <a:latin typeface="Calibri" pitchFamily="34" charset="0"/>
+                <a:ea typeface="Calibri" pitchFamily="34" charset="-122"/>
+                <a:cs typeface="Calibri" pitchFamily="34" charset="-120"/>
+              </a:rPr>
+              <a:t>自由記述の一覧</a:t>
+            </a:r>
+            <a:endParaRPr lang="en-US" sz="1100" dirty="0"/>
+          </a:p>
+        </p:txBody>
+      </p:sp>
+      <p:sp>
+        <p:nvSpPr>
+          <p:cNvPr id="16" name="Text 14"/>
+          <p:cNvSpPr txBox="1"/>
+          <p:nvPr/>
+        </p:nvSpPr>
+        <p:spPr>
+          <a:xfrm>
+            <a:off x="713232" y="5450332"/>
+            <a:ext cx="6281928" cy="257429"/>
+          </a:xfrm>
+          <a:prstGeom prst="rect">
+            <a:avLst/>
+          </a:prstGeom>
+          <a:noFill/>
+          <a:ln/>
+        </p:spPr>
+        <p:txBody>
+          <a:bodyPr wrap="square" lIns="0" tIns="0" rIns="0" bIns="0" rtlCol="0" anchor="t"/>
+          <a:lstStyle/>
+          <a:p>
+            <a:pPr marL="342900" indent="-342900">
+              <a:lnSpc>
+                <a:spcPct val="125000"/>
+              </a:lnSpc>
+              <a:buSzPct val="100000"/>
+              <a:buChar char="●"/>
+            </a:pPr>
+            <a:r>
+              <a:rPr lang="en-US" sz="1100" b="1" dirty="0">
+                <a:solidFill>
+                  <a:srgbClr val="222222"/>
+                </a:solidFill>
+                <a:latin typeface="Calibri" pitchFamily="34" charset="0"/>
+                <a:ea typeface="Calibri" pitchFamily="34" charset="-122"/>
+                <a:cs typeface="Calibri" pitchFamily="34" charset="-120"/>
+              </a:rPr>
+              <a:t>周回企業数との関係</a:t>
+            </a:r>
+            <a:pPr indent="0" marL="0">
+              <a:lnSpc>
+                <a:spcPct val="125000"/>
+              </a:lnSpc>
+              <a:buNone/>
+            </a:pPr>
+            <a:r>
+              <a:rPr lang="en-US" sz="1100" dirty="0">
+                <a:solidFill>
+                  <a:srgbClr val="222222"/>
+                </a:solidFill>
+                <a:latin typeface="Calibri" pitchFamily="34" charset="0"/>
+                <a:ea typeface="Calibri" pitchFamily="34" charset="-122"/>
+                <a:cs typeface="Calibri" pitchFamily="34" charset="-120"/>
+              </a:rPr>
+              <a:t>：たくさん回った方ほど評価が高いか</a:t>
+            </a:r>
+            <a:endParaRPr lang="en-US" sz="1100" dirty="0"/>
+          </a:p>
+        </p:txBody>
+      </p:sp>
+      <p:sp>
+        <p:nvSpPr>
+          <p:cNvPr id="17" name="Text 15"/>
+          <p:cNvSpPr txBox="1"/>
+          <p:nvPr/>
+        </p:nvSpPr>
+        <p:spPr>
+          <a:xfrm>
+            <a:off x="713232" y="5726049"/>
+            <a:ext cx="6281928" cy="257429"/>
+          </a:xfrm>
+          <a:prstGeom prst="rect">
+            <a:avLst/>
+          </a:prstGeom>
+          <a:noFill/>
+          <a:ln/>
+        </p:spPr>
+        <p:txBody>
+          <a:bodyPr wrap="square" lIns="0" tIns="0" rIns="0" bIns="0" rtlCol="0" anchor="t"/>
+          <a:lstStyle/>
+          <a:p>
+            <a:pPr marL="342900" indent="-342900">
+              <a:lnSpc>
+                <a:spcPct val="125000"/>
+              </a:lnSpc>
+              <a:buSzPct val="100000"/>
+              <a:buChar char="●"/>
+            </a:pPr>
+            <a:r>
+              <a:rPr lang="en-US" sz="1100" b="1" dirty="0">
+                <a:solidFill>
+                  <a:srgbClr val="222222"/>
+                </a:solidFill>
+                <a:latin typeface="Calibri" pitchFamily="34" charset="0"/>
+                <a:ea typeface="Calibri" pitchFamily="34" charset="-122"/>
+                <a:cs typeface="Calibri" pitchFamily="34" charset="-120"/>
+              </a:rPr>
+              <a:t>来場人数との関係</a:t>
+            </a:r>
+            <a:pPr indent="0" marL="0">
+              <a:lnSpc>
+                <a:spcPct val="125000"/>
+              </a:lnSpc>
+              <a:buNone/>
+            </a:pPr>
+            <a:r>
+              <a:rPr lang="en-US" sz="1100" dirty="0">
+                <a:solidFill>
+                  <a:srgbClr val="222222"/>
+                </a:solidFill>
+                <a:latin typeface="Calibri" pitchFamily="34" charset="0"/>
+                <a:ea typeface="Calibri" pitchFamily="34" charset="-122"/>
+                <a:cs typeface="Calibri" pitchFamily="34" charset="-120"/>
+              </a:rPr>
+              <a:t>：1人で来た方とグループで来た方の違い</a:t>
+            </a:r>
+            <a:endParaRPr lang="en-US" sz="1100" dirty="0"/>
+          </a:p>
+        </p:txBody>
+      </p:sp>
+      <p:sp>
+        <p:nvSpPr>
+          <p:cNvPr id="18" name="Shape 16"/>
+          <p:cNvSpPr/>
+          <p:nvPr/>
+        </p:nvSpPr>
+        <p:spPr>
+          <a:xfrm>
+            <a:off x="566928" y="6001766"/>
+            <a:ext cx="6428232" cy="624459"/>
+          </a:xfrm>
+          <a:prstGeom prst="roundRect">
+            <a:avLst>
+              <a:gd name="adj" fmla="val 8786"/>
+            </a:avLst>
+          </a:prstGeom>
+          <a:solidFill>
+            <a:srgbClr val="E8ECF8"/>
+          </a:solidFill>
+          <a:ln w="9525">
+            <a:solidFill>
+              <a:srgbClr val="1E2761"/>
+            </a:solidFill>
+            <a:prstDash val="solid"/>
+          </a:ln>
+        </p:spPr>
+      </p:sp>
+      <p:sp>
+        <p:nvSpPr>
+          <p:cNvPr id="19" name="Text 17"/>
+          <p:cNvSpPr txBox="1"/>
+          <p:nvPr/>
+        </p:nvSpPr>
+        <p:spPr>
+          <a:xfrm>
+            <a:off x="658368" y="6093206"/>
+            <a:ext cx="237744" cy="237744"/>
           </a:xfrm>
           <a:prstGeom prst="rect">
             <a:avLst/>
@@ -20807,23 +21338,99 @@
               <a:buNone/>
             </a:pPr>
             <a:r>
-              <a:rPr lang="en-US" sz="950" dirty="0">
-                <a:solidFill>
-                  <a:srgbClr val="6B6B6B"/>
-                </a:solidFill>
-                <a:latin typeface="Calibri" pitchFamily="34" charset="0"/>
-                <a:ea typeface="Calibri" pitchFamily="34" charset="-122"/>
-                <a:cs typeface="Calibri" pitchFamily="34" charset="-120"/>
-              </a:rPr>
-              <a:t>企業の集計画面。設問ごとのグラフが見えるところ。</a:t>
-            </a:r>
-            <a:endParaRPr lang="en-US" sz="950" dirty="0"/>
-          </a:p>
-        </p:txBody>
-      </p:sp>
-      <p:sp>
-        <p:nvSpPr>
-          <p:cNvPr id="15" name="Text 12"/>
+              <a:rPr lang="en-US" sz="1200" b="1" dirty="0">
+                <a:solidFill>
+                  <a:srgbClr val="1E2761"/>
+                </a:solidFill>
+                <a:latin typeface="Calibri" pitchFamily="34" charset="0"/>
+                <a:ea typeface="Calibri" pitchFamily="34" charset="-122"/>
+                <a:cs typeface="Calibri" pitchFamily="34" charset="-120"/>
+              </a:rPr>
+              <a:t>i</a:t>
+            </a:r>
+            <a:endParaRPr lang="en-US" sz="1200" dirty="0"/>
+          </a:p>
+        </p:txBody>
+      </p:sp>
+      <p:sp>
+        <p:nvSpPr>
+          <p:cNvPr id="20" name="Text 18"/>
+          <p:cNvSpPr txBox="1"/>
+          <p:nvPr/>
+        </p:nvSpPr>
+        <p:spPr>
+          <a:xfrm>
+            <a:off x="950976" y="6111494"/>
+            <a:ext cx="5925312" cy="441579"/>
+          </a:xfrm>
+          <a:prstGeom prst="rect">
+            <a:avLst/>
+          </a:prstGeom>
+          <a:noFill/>
+          <a:ln/>
+        </p:spPr>
+        <p:txBody>
+          <a:bodyPr wrap="square" lIns="0" tIns="0" rIns="0" bIns="0" rtlCol="0" anchor="t"/>
+          <a:lstStyle/>
+          <a:p>
+            <a:pPr indent="0" marL="0">
+              <a:lnSpc>
+                <a:spcPct val="120000"/>
+              </a:lnSpc>
+              <a:buNone/>
+            </a:pPr>
+            <a:r>
+              <a:rPr lang="en-US" sz="1050" dirty="0">
+                <a:solidFill>
+                  <a:srgbClr val="222222"/>
+                </a:solidFill>
+                <a:latin typeface="Calibri" pitchFamily="34" charset="0"/>
+                <a:ea typeface="Calibri" pitchFamily="34" charset="-122"/>
+                <a:cs typeface="Calibri" pitchFamily="34" charset="-120"/>
+              </a:rPr>
+              <a:t>関係の表は</a:t>
+            </a:r>
+            <a:pPr indent="0" marL="0">
+              <a:lnSpc>
+                <a:spcPct val="120000"/>
+              </a:lnSpc>
+              <a:buNone/>
+            </a:pPr>
+            <a:r>
+              <a:rPr lang="en-US" sz="1050" b="1" dirty="0">
+                <a:solidFill>
+                  <a:srgbClr val="222222"/>
+                </a:solidFill>
+                <a:latin typeface="Calibri" pitchFamily="34" charset="0"/>
+                <a:ea typeface="Calibri" pitchFamily="34" charset="-122"/>
+                <a:cs typeface="Calibri" pitchFamily="34" charset="-120"/>
+              </a:rPr>
+              <a:t>相関であって因果ではありません</a:t>
+            </a:r>
+            <a:pPr indent="0" marL="0">
+              <a:lnSpc>
+                <a:spcPct val="120000"/>
+              </a:lnSpc>
+              <a:buNone/>
+            </a:pPr>
+            <a:r>
+              <a:rPr lang="en-US" sz="1050" dirty="0">
+                <a:solidFill>
+                  <a:srgbClr val="222222"/>
+                </a:solidFill>
+                <a:latin typeface="Calibri" pitchFamily="34" charset="0"/>
+                <a:ea typeface="Calibri" pitchFamily="34" charset="-122"/>
+                <a:cs typeface="Calibri" pitchFamily="34" charset="-120"/>
+              </a:rPr>
+              <a:t>（もともと関心の高い方がたくさん回っている、とも読めます）。回答が少ないうちは数字が揺れるので、件数も一緒に見てください。</a:t>
+            </a:r>
+            <a:endParaRPr lang="en-US" sz="1050" dirty="0"/>
+          </a:p>
+        </p:txBody>
+      </p:sp>
+      <p:sp>
+        <p:nvSpPr>
+          <p:cNvPr id="21" name="Text 19"/>
           <p:cNvSpPr txBox="1"/>
           <p:nvPr/>
         </p:nvSpPr>
@@ -20964,720 +21571,15 @@
                 <a:ea typeface="Calibri" pitchFamily="34" charset="-122"/>
                 <a:cs typeface="Calibri" pitchFamily="34" charset="-120"/>
               </a:rPr>
-              <a:t>終了後4：メールアドレスを削除する</a:t>
+              <a:t>終了後3：集計データを受け取る（つづき）</a:t>
             </a:r>
             <a:endParaRPr lang="en-US" sz="2200" dirty="0"/>
-          </a:p>
-        </p:txBody>
-      </p:sp>
-      <p:sp>
-        <p:nvSpPr>
-          <p:cNvPr id="4" name="Text 2"/>
-          <p:cNvSpPr txBox="1"/>
-          <p:nvPr/>
-        </p:nvSpPr>
-        <p:spPr>
-          <a:xfrm>
-            <a:off x="566928" y="1481328"/>
-            <a:ext cx="6428232" cy="257429"/>
-          </a:xfrm>
-          <a:prstGeom prst="rect">
-            <a:avLst/>
-          </a:prstGeom>
-          <a:noFill/>
-          <a:ln/>
-        </p:spPr>
-        <p:txBody>
-          <a:bodyPr wrap="square" lIns="0" tIns="0" rIns="0" bIns="0" rtlCol="0" anchor="t"/>
-          <a:lstStyle/>
-          <a:p>
-            <a:pPr indent="0" marL="0">
-              <a:lnSpc>
-                <a:spcPct val="125000"/>
-              </a:lnSpc>
-              <a:buNone/>
-            </a:pPr>
-            <a:r>
-              <a:rPr lang="en-US" sz="1100" dirty="0">
-                <a:solidFill>
-                  <a:srgbClr val="222222"/>
-                </a:solidFill>
-                <a:latin typeface="Calibri" pitchFamily="34" charset="0"/>
-                <a:ea typeface="Calibri" pitchFamily="34" charset="-122"/>
-                <a:cs typeface="Calibri" pitchFamily="34" charset="-120"/>
-              </a:rPr>
-              <a:t>案内の送付と集計が終わったら、預かったメールアドレスを削除します。</a:t>
-            </a:r>
-            <a:endParaRPr lang="en-US" sz="1100" dirty="0"/>
-          </a:p>
-        </p:txBody>
-      </p:sp>
-      <p:sp>
-        <p:nvSpPr>
-          <p:cNvPr id="5" name="Shape 3"/>
-          <p:cNvSpPr/>
-          <p:nvPr/>
-        </p:nvSpPr>
-        <p:spPr>
-          <a:xfrm>
-            <a:off x="566928" y="1793621"/>
-            <a:ext cx="274320" cy="274320"/>
-          </a:xfrm>
-          <a:prstGeom prst="ellipse">
-            <a:avLst/>
-          </a:prstGeom>
-          <a:solidFill>
-            <a:srgbClr val="1E2761"/>
-          </a:solidFill>
-          <a:ln/>
-        </p:spPr>
-      </p:sp>
-      <p:sp>
-        <p:nvSpPr>
-          <p:cNvPr id="6" name="Text 4"/>
-          <p:cNvSpPr txBox="1"/>
-          <p:nvPr/>
-        </p:nvSpPr>
-        <p:spPr>
-          <a:xfrm>
-            <a:off x="566928" y="1793621"/>
-            <a:ext cx="274320" cy="274320"/>
-          </a:xfrm>
-          <a:prstGeom prst="rect">
-            <a:avLst/>
-          </a:prstGeom>
-          <a:noFill/>
-          <a:ln/>
-        </p:spPr>
-        <p:txBody>
-          <a:bodyPr wrap="square" lIns="0" tIns="0" rIns="0" bIns="0" rtlCol="0" anchor="ctr"/>
-          <a:lstStyle/>
-          <a:p>
-            <a:pPr algn="ctr" indent="0" marL="0">
-              <a:buNone/>
-            </a:pPr>
-            <a:r>
-              <a:rPr lang="en-US" sz="1100" b="1" dirty="0">
-                <a:solidFill>
-                  <a:srgbClr val="FFFFFF"/>
-                </a:solidFill>
-                <a:latin typeface="Calibri" pitchFamily="34" charset="0"/>
-                <a:ea typeface="Calibri" pitchFamily="34" charset="-122"/>
-                <a:cs typeface="Calibri" pitchFamily="34" charset="-120"/>
-              </a:rPr>
-              <a:t>1</a:t>
-            </a:r>
-            <a:endParaRPr lang="en-US" sz="1100" dirty="0"/>
-          </a:p>
-        </p:txBody>
-      </p:sp>
-      <p:sp>
-        <p:nvSpPr>
-          <p:cNvPr id="7" name="Text 5"/>
-          <p:cNvSpPr txBox="1"/>
-          <p:nvPr/>
-        </p:nvSpPr>
-        <p:spPr>
-          <a:xfrm>
-            <a:off x="969264" y="1775333"/>
-            <a:ext cx="6025896" cy="365760"/>
-          </a:xfrm>
-          <a:prstGeom prst="rect">
-            <a:avLst/>
-          </a:prstGeom>
-          <a:noFill/>
-          <a:ln/>
-        </p:spPr>
-        <p:txBody>
-          <a:bodyPr wrap="square" lIns="0" tIns="0" rIns="0" bIns="0" rtlCol="0" anchor="t"/>
-          <a:lstStyle/>
-          <a:p>
-            <a:pPr indent="0" marL="0">
-              <a:lnSpc>
-                <a:spcPct val="125000"/>
-              </a:lnSpc>
-              <a:buNone/>
-            </a:pPr>
-            <a:r>
-              <a:rPr lang="en-US" sz="1150" dirty="0">
-                <a:solidFill>
-                  <a:srgbClr val="222222"/>
-                </a:solidFill>
-                <a:latin typeface="Calibri" pitchFamily="34" charset="0"/>
-                <a:ea typeface="Calibri" pitchFamily="34" charset="-122"/>
-                <a:cs typeface="Calibri" pitchFamily="34" charset="-120"/>
-              </a:rPr>
-              <a:t>「総合アンケート」の画面を開く</a:t>
-            </a:r>
-            <a:endParaRPr lang="en-US" sz="1150" dirty="0"/>
-          </a:p>
-        </p:txBody>
-      </p:sp>
-      <p:sp>
-        <p:nvSpPr>
-          <p:cNvPr id="8" name="Shape 6"/>
-          <p:cNvSpPr/>
-          <p:nvPr/>
-        </p:nvSpPr>
-        <p:spPr>
-          <a:xfrm>
-            <a:off x="566928" y="2250821"/>
-            <a:ext cx="274320" cy="274320"/>
-          </a:xfrm>
-          <a:prstGeom prst="ellipse">
-            <a:avLst/>
-          </a:prstGeom>
-          <a:solidFill>
-            <a:srgbClr val="1E2761"/>
-          </a:solidFill>
-          <a:ln/>
-        </p:spPr>
-      </p:sp>
-      <p:sp>
-        <p:nvSpPr>
-          <p:cNvPr id="9" name="Text 7"/>
-          <p:cNvSpPr txBox="1"/>
-          <p:nvPr/>
-        </p:nvSpPr>
-        <p:spPr>
-          <a:xfrm>
-            <a:off x="566928" y="2250821"/>
-            <a:ext cx="274320" cy="274320"/>
-          </a:xfrm>
-          <a:prstGeom prst="rect">
-            <a:avLst/>
-          </a:prstGeom>
-          <a:noFill/>
-          <a:ln/>
-        </p:spPr>
-        <p:txBody>
-          <a:bodyPr wrap="square" lIns="0" tIns="0" rIns="0" bIns="0" rtlCol="0" anchor="ctr"/>
-          <a:lstStyle/>
-          <a:p>
-            <a:pPr algn="ctr" indent="0" marL="0">
-              <a:buNone/>
-            </a:pPr>
-            <a:r>
-              <a:rPr lang="en-US" sz="1100" b="1" dirty="0">
-                <a:solidFill>
-                  <a:srgbClr val="FFFFFF"/>
-                </a:solidFill>
-                <a:latin typeface="Calibri" pitchFamily="34" charset="0"/>
-                <a:ea typeface="Calibri" pitchFamily="34" charset="-122"/>
-                <a:cs typeface="Calibri" pitchFamily="34" charset="-120"/>
-              </a:rPr>
-              <a:t>2</a:t>
-            </a:r>
-            <a:endParaRPr lang="en-US" sz="1100" dirty="0"/>
-          </a:p>
-        </p:txBody>
-      </p:sp>
-      <p:sp>
-        <p:nvSpPr>
-          <p:cNvPr id="10" name="Text 8"/>
-          <p:cNvSpPr txBox="1"/>
-          <p:nvPr/>
-        </p:nvSpPr>
-        <p:spPr>
-          <a:xfrm>
-            <a:off x="969264" y="2232533"/>
-            <a:ext cx="6025896" cy="365760"/>
-          </a:xfrm>
-          <a:prstGeom prst="rect">
-            <a:avLst/>
-          </a:prstGeom>
-          <a:noFill/>
-          <a:ln/>
-        </p:spPr>
-        <p:txBody>
-          <a:bodyPr wrap="square" lIns="0" tIns="0" rIns="0" bIns="0" rtlCol="0" anchor="t"/>
-          <a:lstStyle/>
-          <a:p>
-            <a:pPr indent="0" marL="0">
-              <a:lnSpc>
-                <a:spcPct val="125000"/>
-              </a:lnSpc>
-              <a:buNone/>
-            </a:pPr>
-            <a:r>
-              <a:rPr lang="en-US" sz="1150" dirty="0">
-                <a:solidFill>
-                  <a:srgbClr val="222222"/>
-                </a:solidFill>
-                <a:latin typeface="Calibri" pitchFamily="34" charset="0"/>
-                <a:ea typeface="Calibri" pitchFamily="34" charset="-122"/>
-                <a:cs typeface="Calibri" pitchFamily="34" charset="-120"/>
-              </a:rPr>
-              <a:t>一番下の</a:t>
-            </a:r>
-            <a:pPr indent="0" marL="0">
-              <a:lnSpc>
-                <a:spcPct val="125000"/>
-              </a:lnSpc>
-              <a:buNone/>
-            </a:pPr>
-            <a:r>
-              <a:rPr lang="en-US" sz="1150" b="1" dirty="0">
-                <a:solidFill>
-                  <a:srgbClr val="222222"/>
-                </a:solidFill>
-                <a:latin typeface="Calibri" pitchFamily="34" charset="0"/>
-                <a:ea typeface="Calibri" pitchFamily="34" charset="-122"/>
-                <a:cs typeface="Calibri" pitchFamily="34" charset="-120"/>
-              </a:rPr>
-              <a:t>「メールアドレスを削除する」</a:t>
-            </a:r>
-            <a:pPr indent="0" marL="0">
-              <a:lnSpc>
-                <a:spcPct val="125000"/>
-              </a:lnSpc>
-              <a:buNone/>
-            </a:pPr>
-            <a:r>
-              <a:rPr lang="en-US" sz="1150" dirty="0">
-                <a:solidFill>
-                  <a:srgbClr val="222222"/>
-                </a:solidFill>
-                <a:latin typeface="Calibri" pitchFamily="34" charset="0"/>
-                <a:ea typeface="Calibri" pitchFamily="34" charset="-122"/>
-                <a:cs typeface="Calibri" pitchFamily="34" charset="-120"/>
-              </a:rPr>
-              <a:t>を押す</a:t>
-            </a:r>
-            <a:endParaRPr lang="en-US" sz="1150" dirty="0"/>
-          </a:p>
-        </p:txBody>
-      </p:sp>
-      <p:sp>
-        <p:nvSpPr>
-          <p:cNvPr id="11" name="Shape 9"/>
-          <p:cNvSpPr/>
-          <p:nvPr/>
-        </p:nvSpPr>
-        <p:spPr>
-          <a:xfrm>
-            <a:off x="566928" y="2708021"/>
-            <a:ext cx="274320" cy="274320"/>
-          </a:xfrm>
-          <a:prstGeom prst="ellipse">
-            <a:avLst/>
-          </a:prstGeom>
-          <a:solidFill>
-            <a:srgbClr val="1E2761"/>
-          </a:solidFill>
-          <a:ln/>
-        </p:spPr>
-      </p:sp>
-      <p:sp>
-        <p:nvSpPr>
-          <p:cNvPr id="12" name="Text 10"/>
-          <p:cNvSpPr txBox="1"/>
-          <p:nvPr/>
-        </p:nvSpPr>
-        <p:spPr>
-          <a:xfrm>
-            <a:off x="566928" y="2708021"/>
-            <a:ext cx="274320" cy="274320"/>
-          </a:xfrm>
-          <a:prstGeom prst="rect">
-            <a:avLst/>
-          </a:prstGeom>
-          <a:noFill/>
-          <a:ln/>
-        </p:spPr>
-        <p:txBody>
-          <a:bodyPr wrap="square" lIns="0" tIns="0" rIns="0" bIns="0" rtlCol="0" anchor="ctr"/>
-          <a:lstStyle/>
-          <a:p>
-            <a:pPr algn="ctr" indent="0" marL="0">
-              <a:buNone/>
-            </a:pPr>
-            <a:r>
-              <a:rPr lang="en-US" sz="1100" b="1" dirty="0">
-                <a:solidFill>
-                  <a:srgbClr val="FFFFFF"/>
-                </a:solidFill>
-                <a:latin typeface="Calibri" pitchFamily="34" charset="0"/>
-                <a:ea typeface="Calibri" pitchFamily="34" charset="-122"/>
-                <a:cs typeface="Calibri" pitchFamily="34" charset="-120"/>
-              </a:rPr>
-              <a:t>3</a:t>
-            </a:r>
-            <a:endParaRPr lang="en-US" sz="1100" dirty="0"/>
-          </a:p>
-        </p:txBody>
-      </p:sp>
-      <p:sp>
-        <p:nvSpPr>
-          <p:cNvPr id="13" name="Text 11"/>
-          <p:cNvSpPr txBox="1"/>
-          <p:nvPr/>
-        </p:nvSpPr>
-        <p:spPr>
-          <a:xfrm>
-            <a:off x="969264" y="2689733"/>
-            <a:ext cx="6025896" cy="365760"/>
-          </a:xfrm>
-          <a:prstGeom prst="rect">
-            <a:avLst/>
-          </a:prstGeom>
-          <a:noFill/>
-          <a:ln/>
-        </p:spPr>
-        <p:txBody>
-          <a:bodyPr wrap="square" lIns="0" tIns="0" rIns="0" bIns="0" rtlCol="0" anchor="t"/>
-          <a:lstStyle/>
-          <a:p>
-            <a:pPr indent="0" marL="0">
-              <a:lnSpc>
-                <a:spcPct val="125000"/>
-              </a:lnSpc>
-              <a:buNone/>
-            </a:pPr>
-            <a:r>
-              <a:rPr lang="en-US" sz="1150" dirty="0">
-                <a:solidFill>
-                  <a:srgbClr val="222222"/>
-                </a:solidFill>
-                <a:latin typeface="Calibri" pitchFamily="34" charset="0"/>
-                <a:ea typeface="Calibri" pitchFamily="34" charset="-122"/>
-                <a:cs typeface="Calibri" pitchFamily="34" charset="-120"/>
-              </a:rPr>
-              <a:t>確認メッセージで「OK」を押す</a:t>
-            </a:r>
-            <a:endParaRPr lang="en-US" sz="1150" dirty="0"/>
-          </a:p>
-        </p:txBody>
-      </p:sp>
-      <p:sp>
-        <p:nvSpPr>
-          <p:cNvPr id="14" name="Text 12"/>
-          <p:cNvSpPr txBox="1"/>
-          <p:nvPr/>
-        </p:nvSpPr>
-        <p:spPr>
-          <a:xfrm>
-            <a:off x="566928" y="3146933"/>
-            <a:ext cx="6428232" cy="257429"/>
-          </a:xfrm>
-          <a:prstGeom prst="rect">
-            <a:avLst/>
-          </a:prstGeom>
-          <a:noFill/>
-          <a:ln/>
-        </p:spPr>
-        <p:txBody>
-          <a:bodyPr wrap="square" lIns="0" tIns="0" rIns="0" bIns="0" rtlCol="0" anchor="t"/>
-          <a:lstStyle/>
-          <a:p>
-            <a:pPr indent="0" marL="0">
-              <a:lnSpc>
-                <a:spcPct val="125000"/>
-              </a:lnSpc>
-              <a:buNone/>
-            </a:pPr>
-            <a:r>
-              <a:rPr lang="en-US" sz="1100" dirty="0">
-                <a:solidFill>
-                  <a:srgbClr val="222222"/>
-                </a:solidFill>
-                <a:latin typeface="Calibri" pitchFamily="34" charset="0"/>
-                <a:ea typeface="Calibri" pitchFamily="34" charset="-122"/>
-                <a:cs typeface="Calibri" pitchFamily="34" charset="-120"/>
-              </a:rPr>
-              <a:t>削除しても、</a:t>
-            </a:r>
-            <a:pPr indent="0" marL="0">
-              <a:lnSpc>
-                <a:spcPct val="125000"/>
-              </a:lnSpc>
-              <a:buNone/>
-            </a:pPr>
-            <a:r>
-              <a:rPr lang="en-US" sz="1100" b="1" dirty="0">
-                <a:solidFill>
-                  <a:srgbClr val="222222"/>
-                </a:solidFill>
-                <a:latin typeface="Calibri" pitchFamily="34" charset="0"/>
-                <a:ea typeface="Calibri" pitchFamily="34" charset="-122"/>
-                <a:cs typeface="Calibri" pitchFamily="34" charset="-120"/>
-              </a:rPr>
-              <a:t>回答データ（個人情報を含まないもの）は残ります</a:t>
-            </a:r>
-            <a:pPr indent="0" marL="0">
-              <a:lnSpc>
-                <a:spcPct val="125000"/>
-              </a:lnSpc>
-              <a:buNone/>
-            </a:pPr>
-            <a:r>
-              <a:rPr lang="en-US" sz="1100" dirty="0">
-                <a:solidFill>
-                  <a:srgbClr val="222222"/>
-                </a:solidFill>
-                <a:latin typeface="Calibri" pitchFamily="34" charset="0"/>
-                <a:ea typeface="Calibri" pitchFamily="34" charset="-122"/>
-                <a:cs typeface="Calibri" pitchFamily="34" charset="-120"/>
-              </a:rPr>
-              <a:t>。</a:t>
-            </a:r>
-            <a:endParaRPr lang="en-US" sz="1100" dirty="0"/>
-          </a:p>
-        </p:txBody>
-      </p:sp>
-      <p:sp>
-        <p:nvSpPr>
-          <p:cNvPr id="15" name="Shape 13"/>
-          <p:cNvSpPr/>
-          <p:nvPr/>
-        </p:nvSpPr>
-        <p:spPr>
-          <a:xfrm>
-            <a:off x="566928" y="3440938"/>
-            <a:ext cx="6428232" cy="624459"/>
-          </a:xfrm>
-          <a:prstGeom prst="roundRect">
-            <a:avLst>
-              <a:gd name="adj" fmla="val 8786"/>
-            </a:avLst>
-          </a:prstGeom>
-          <a:solidFill>
-            <a:srgbClr val="FDF0E6"/>
-          </a:solidFill>
-          <a:ln w="9525">
-            <a:solidFill>
-              <a:srgbClr val="E08A3C"/>
-            </a:solidFill>
-            <a:prstDash val="solid"/>
-          </a:ln>
-        </p:spPr>
-      </p:sp>
-      <p:sp>
-        <p:nvSpPr>
-          <p:cNvPr id="16" name="Text 14"/>
-          <p:cNvSpPr txBox="1"/>
-          <p:nvPr/>
-        </p:nvSpPr>
-        <p:spPr>
-          <a:xfrm>
-            <a:off x="658368" y="3532378"/>
-            <a:ext cx="237744" cy="237744"/>
-          </a:xfrm>
-          <a:prstGeom prst="rect">
-            <a:avLst/>
-          </a:prstGeom>
-          <a:noFill/>
-          <a:ln/>
-        </p:spPr>
-        <p:txBody>
-          <a:bodyPr wrap="square" lIns="0" tIns="0" rIns="0" bIns="0" rtlCol="0" anchor="ctr"/>
-          <a:lstStyle/>
-          <a:p>
-            <a:pPr algn="ctr" indent="0" marL="0">
-              <a:buNone/>
-            </a:pPr>
-            <a:r>
-              <a:rPr lang="en-US" sz="1200" b="1" dirty="0">
-                <a:solidFill>
-                  <a:srgbClr val="C25A17"/>
-                </a:solidFill>
-                <a:latin typeface="Calibri" pitchFamily="34" charset="0"/>
-                <a:ea typeface="Calibri" pitchFamily="34" charset="-122"/>
-                <a:cs typeface="Calibri" pitchFamily="34" charset="-120"/>
-              </a:rPr>
-              <a:t>！</a:t>
-            </a:r>
-            <a:endParaRPr lang="en-US" sz="1200" dirty="0"/>
-          </a:p>
-        </p:txBody>
-      </p:sp>
-      <p:sp>
-        <p:nvSpPr>
-          <p:cNvPr id="17" name="Text 15"/>
-          <p:cNvSpPr txBox="1"/>
-          <p:nvPr/>
-        </p:nvSpPr>
-        <p:spPr>
-          <a:xfrm>
-            <a:off x="950976" y="3550666"/>
-            <a:ext cx="5925312" cy="441579"/>
-          </a:xfrm>
-          <a:prstGeom prst="rect">
-            <a:avLst/>
-          </a:prstGeom>
-          <a:noFill/>
-          <a:ln/>
-        </p:spPr>
-        <p:txBody>
-          <a:bodyPr wrap="square" lIns="0" tIns="0" rIns="0" bIns="0" rtlCol="0" anchor="t"/>
-          <a:lstStyle/>
-          <a:p>
-            <a:pPr indent="0" marL="0">
-              <a:lnSpc>
-                <a:spcPct val="120000"/>
-              </a:lnSpc>
-              <a:buNone/>
-            </a:pPr>
-            <a:r>
-              <a:rPr lang="en-US" sz="1050" dirty="0">
-                <a:solidFill>
-                  <a:srgbClr val="222222"/>
-                </a:solidFill>
-                <a:latin typeface="Calibri" pitchFamily="34" charset="0"/>
-                <a:ea typeface="Calibri" pitchFamily="34" charset="-122"/>
-                <a:cs typeface="Calibri" pitchFamily="34" charset="-120"/>
-              </a:rPr>
-              <a:t>削除すると、未送信ぶんの案内メールは送れなくなります。</a:t>
-            </a:r>
-            <a:pPr indent="0" marL="0">
-              <a:lnSpc>
-                <a:spcPct val="120000"/>
-              </a:lnSpc>
-              <a:buNone/>
-            </a:pPr>
-            <a:r>
-              <a:rPr lang="en-US" sz="1050" b="1" dirty="0">
-                <a:solidFill>
-                  <a:srgbClr val="222222"/>
-                </a:solidFill>
-                <a:latin typeface="Calibri" pitchFamily="34" charset="0"/>
-                <a:ea typeface="Calibri" pitchFamily="34" charset="-122"/>
-                <a:cs typeface="Calibri" pitchFamily="34" charset="-120"/>
-              </a:rPr>
-              <a:t>送信と集計が完全に終わってから</a:t>
-            </a:r>
-            <a:pPr indent="0" marL="0">
-              <a:lnSpc>
-                <a:spcPct val="120000"/>
-              </a:lnSpc>
-              <a:buNone/>
-            </a:pPr>
-            <a:r>
-              <a:rPr lang="en-US" sz="1050" dirty="0">
-                <a:solidFill>
-                  <a:srgbClr val="222222"/>
-                </a:solidFill>
-                <a:latin typeface="Calibri" pitchFamily="34" charset="0"/>
-                <a:ea typeface="Calibri" pitchFamily="34" charset="-122"/>
-                <a:cs typeface="Calibri" pitchFamily="34" charset="-120"/>
-              </a:rPr>
-              <a:t>実行してください。</a:t>
-            </a:r>
-            <a:endParaRPr lang="en-US" sz="1050" dirty="0"/>
-          </a:p>
-        </p:txBody>
-      </p:sp>
-      <p:sp>
-        <p:nvSpPr>
-          <p:cNvPr id="18" name="Shape 16"/>
-          <p:cNvSpPr/>
-          <p:nvPr/>
-        </p:nvSpPr>
-        <p:spPr>
-          <a:xfrm>
-            <a:off x="566928" y="4138549"/>
-            <a:ext cx="6428232" cy="624459"/>
-          </a:xfrm>
-          <a:prstGeom prst="roundRect">
-            <a:avLst>
-              <a:gd name="adj" fmla="val 8786"/>
-            </a:avLst>
-          </a:prstGeom>
-          <a:solidFill>
-            <a:srgbClr val="E8ECF8"/>
-          </a:solidFill>
-          <a:ln w="9525">
-            <a:solidFill>
-              <a:srgbClr val="1E2761"/>
-            </a:solidFill>
-            <a:prstDash val="solid"/>
-          </a:ln>
-        </p:spPr>
-      </p:sp>
-      <p:sp>
-        <p:nvSpPr>
-          <p:cNvPr id="19" name="Text 17"/>
-          <p:cNvSpPr txBox="1"/>
-          <p:nvPr/>
-        </p:nvSpPr>
-        <p:spPr>
-          <a:xfrm>
-            <a:off x="658368" y="4229989"/>
-            <a:ext cx="237744" cy="237744"/>
-          </a:xfrm>
-          <a:prstGeom prst="rect">
-            <a:avLst/>
-          </a:prstGeom>
-          <a:noFill/>
-          <a:ln/>
-        </p:spPr>
-        <p:txBody>
-          <a:bodyPr wrap="square" lIns="0" tIns="0" rIns="0" bIns="0" rtlCol="0" anchor="ctr"/>
-          <a:lstStyle/>
-          <a:p>
-            <a:pPr algn="ctr" indent="0" marL="0">
-              <a:buNone/>
-            </a:pPr>
-            <a:r>
-              <a:rPr lang="en-US" sz="1200" b="1" dirty="0">
-                <a:solidFill>
-                  <a:srgbClr val="1E2761"/>
-                </a:solidFill>
-                <a:latin typeface="Calibri" pitchFamily="34" charset="0"/>
-                <a:ea typeface="Calibri" pitchFamily="34" charset="-122"/>
-                <a:cs typeface="Calibri" pitchFamily="34" charset="-120"/>
-              </a:rPr>
-              <a:t>i</a:t>
-            </a:r>
-            <a:endParaRPr lang="en-US" sz="1200" dirty="0"/>
-          </a:p>
-        </p:txBody>
-      </p:sp>
-      <p:sp>
-        <p:nvSpPr>
-          <p:cNvPr id="20" name="Text 18"/>
-          <p:cNvSpPr txBox="1"/>
-          <p:nvPr/>
-        </p:nvSpPr>
-        <p:spPr>
-          <a:xfrm>
-            <a:off x="950976" y="4248277"/>
-            <a:ext cx="5925312" cy="441579"/>
-          </a:xfrm>
-          <a:prstGeom prst="rect">
-            <a:avLst/>
-          </a:prstGeom>
-          <a:noFill/>
-          <a:ln/>
-        </p:spPr>
-        <p:txBody>
-          <a:bodyPr wrap="square" lIns="0" tIns="0" rIns="0" bIns="0" rtlCol="0" anchor="t"/>
-          <a:lstStyle/>
-          <a:p>
-            <a:pPr indent="0" marL="0">
-              <a:lnSpc>
-                <a:spcPct val="120000"/>
-              </a:lnSpc>
-              <a:buNone/>
-            </a:pPr>
-            <a:r>
-              <a:rPr lang="en-US" sz="1050" dirty="0">
-                <a:solidFill>
-                  <a:srgbClr val="222222"/>
-                </a:solidFill>
-                <a:latin typeface="Calibri" pitchFamily="34" charset="0"/>
-                <a:ea typeface="Calibri" pitchFamily="34" charset="-122"/>
-                <a:cs typeface="Calibri" pitchFamily="34" charset="-120"/>
-              </a:rPr>
-              <a:t>「氏名・住所は収集せず、メールアドレスも送付・集計後に削除する」という運用方針に沿った操作です。来場者にもその旨を案内しています。</a:t>
-            </a:r>
-            <a:endParaRPr lang="en-US" sz="1050" dirty="0"/>
           </a:p>
         </p:txBody>
       </p:sp>
       <p:pic>
         <p:nvPicPr>
-          <p:cNvPr id="21" name="Image 0" descr="C:\Users\sato\Desktop\enque\docs\images\o-purge.png">    </p:cNvPr>
+          <p:cNvPr id="4" name="Image 0" descr="C:\Users\sato\Desktop\enque\docs\images\o-overall-stats.png">    </p:cNvPr>
           <p:cNvPicPr>
             <a:picLocks noChangeAspect="1"/>
           </p:cNvPicPr>
@@ -21691,8 +21593,8 @@
         </p:blipFill>
         <p:spPr>
           <a:xfrm>
-            <a:off x="936779" y="4836160"/>
-            <a:ext cx="5688531" cy="3474720"/>
+            <a:off x="1248911" y="1481328"/>
+            <a:ext cx="5064265" cy="3474720"/>
           </a:xfrm>
           <a:prstGeom prst="rect">
             <a:avLst/>
@@ -21701,13 +21603,13 @@
       </p:pic>
       <p:sp>
         <p:nvSpPr>
-          <p:cNvPr id="22" name="Text 19"/>
-          <p:cNvSpPr txBox="1"/>
-          <p:nvPr/>
-        </p:nvSpPr>
-        <p:spPr>
-          <a:xfrm>
-            <a:off x="566928" y="8365744"/>
+          <p:cNvPr id="5" name="Text 2"/>
+          <p:cNvSpPr txBox="1"/>
+          <p:nvPr/>
+        </p:nvSpPr>
+        <p:spPr>
+          <a:xfrm>
+            <a:off x="566928" y="5010912"/>
             <a:ext cx="6428232" cy="274320"/>
           </a:xfrm>
           <a:prstGeom prst="rect">
@@ -21732,15 +21634,78 @@
                 <a:ea typeface="Calibri" pitchFamily="34" charset="-122"/>
                 <a:cs typeface="Calibri" pitchFamily="34" charset="-120"/>
               </a:rPr>
-              <a:t>「メールアドレスを削除する」ボタンの周辺（説明文が見えるもの）。</a:t>
+              <a:t>「総合アンケートの集計」画面の上部（回答数・回答率のタイルが見えるもの）。</a:t>
             </a:r>
             <a:endParaRPr lang="en-US" sz="950" dirty="0"/>
           </a:p>
         </p:txBody>
       </p:sp>
-      <p:sp>
-        <p:nvSpPr>
-          <p:cNvPr id="23" name="Text 20"/>
+      <p:pic>
+        <p:nvPicPr>
+          <p:cNvPr id="6" name="Image 1" descr="C:\Users\sato\Desktop\enque\docs\images\o-overall-cross.png">    </p:cNvPr>
+          <p:cNvPicPr>
+            <a:picLocks noChangeAspect="1"/>
+          </p:cNvPicPr>
+          <p:nvPr/>
+        </p:nvPicPr>
+        <p:blipFill>
+          <a:blip r:embed="rId2"/>
+          <a:stretch>
+            <a:fillRect/>
+          </a:stretch>
+        </p:blipFill>
+        <p:spPr>
+          <a:xfrm>
+            <a:off x="1075432" y="5340096"/>
+            <a:ext cx="5411224" cy="3474720"/>
+          </a:xfrm>
+          <a:prstGeom prst="rect">
+            <a:avLst/>
+          </a:prstGeom>
+        </p:spPr>
+      </p:pic>
+      <p:sp>
+        <p:nvSpPr>
+          <p:cNvPr id="7" name="Text 3"/>
+          <p:cNvSpPr txBox="1"/>
+          <p:nvPr/>
+        </p:nvSpPr>
+        <p:spPr>
+          <a:xfrm>
+            <a:off x="566928" y="8869680"/>
+            <a:ext cx="6428232" cy="274320"/>
+          </a:xfrm>
+          <a:prstGeom prst="rect">
+            <a:avLst/>
+          </a:prstGeom>
+          <a:noFill/>
+          <a:ln/>
+        </p:spPr>
+        <p:txBody>
+          <a:bodyPr wrap="square" lIns="0" tIns="0" rIns="0" bIns="0" rtlCol="0" anchor="ctr"/>
+          <a:lstStyle/>
+          <a:p>
+            <a:pPr algn="ctr" indent="0" marL="0">
+              <a:buNone/>
+            </a:pPr>
+            <a:r>
+              <a:rPr lang="en-US" sz="950" dirty="0">
+                <a:solidFill>
+                  <a:srgbClr val="6B6B6B"/>
+                </a:solidFill>
+                <a:latin typeface="Calibri" pitchFamily="34" charset="0"/>
+                <a:ea typeface="Calibri" pitchFamily="34" charset="-122"/>
+                <a:cs typeface="Calibri" pitchFamily="34" charset="-120"/>
+              </a:rPr>
+              <a:t>「総合アンケートの集計」画面の「周回企業数との関係」「来場人数との関係」の表。</a:t>
+            </a:r>
+            <a:endParaRPr lang="en-US" sz="950" dirty="0"/>
+          </a:p>
+        </p:txBody>
+      </p:sp>
+      <p:sp>
+        <p:nvSpPr>
+          <p:cNvPr id="8" name="Text 4"/>
           <p:cNvSpPr txBox="1"/>
           <p:nvPr/>
         </p:nvSpPr>
@@ -23063,433 +23028,46 @@
                 <a:ea typeface="Calibri" pitchFamily="34" charset="-122"/>
                 <a:cs typeface="Calibri" pitchFamily="34" charset="-120"/>
               </a:rPr>
-              <a:t>次のイベントに向けて（データの整理）</a:t>
+              <a:t>終了後3：集計データを受け取る（つづき）</a:t>
             </a:r>
             <a:endParaRPr lang="en-US" sz="2200" dirty="0"/>
           </a:p>
         </p:txBody>
       </p:sp>
-      <p:sp>
-        <p:nvSpPr>
-          <p:cNvPr id="4" name="Text 2"/>
-          <p:cNvSpPr txBox="1"/>
-          <p:nvPr/>
-        </p:nvSpPr>
-        <p:spPr>
-          <a:xfrm>
-            <a:off x="566928" y="1481328"/>
-            <a:ext cx="6428232" cy="459994"/>
-          </a:xfrm>
-          <a:prstGeom prst="rect">
-            <a:avLst/>
-          </a:prstGeom>
-          <a:noFill/>
-          <a:ln/>
-        </p:spPr>
-        <p:txBody>
-          <a:bodyPr wrap="square" lIns="0" tIns="0" rIns="0" bIns="0" rtlCol="0" anchor="t"/>
-          <a:lstStyle/>
-          <a:p>
-            <a:pPr indent="0" marL="0">
-              <a:lnSpc>
-                <a:spcPct val="125000"/>
-              </a:lnSpc>
-              <a:buNone/>
-            </a:pPr>
-            <a:r>
-              <a:rPr lang="en-US" sz="1100" dirty="0">
-                <a:solidFill>
-                  <a:srgbClr val="222222"/>
-                </a:solidFill>
-                <a:latin typeface="Calibri" pitchFamily="34" charset="0"/>
-                <a:ea typeface="Calibri" pitchFamily="34" charset="-122"/>
-                <a:cs typeface="Calibri" pitchFamily="34" charset="-120"/>
-              </a:rPr>
-              <a:t>サーバーで次のコマンドを実行します（事務局のPCではなく、システムが動いているサーバーでの作業です）。</a:t>
-            </a:r>
-            <a:endParaRPr lang="en-US" sz="1100" dirty="0"/>
-          </a:p>
-        </p:txBody>
-      </p:sp>
-      <p:sp>
-        <p:nvSpPr>
-          <p:cNvPr id="5" name="Text 3"/>
-          <p:cNvSpPr txBox="1"/>
-          <p:nvPr/>
-        </p:nvSpPr>
-        <p:spPr>
-          <a:xfrm>
-            <a:off x="566928" y="2087626"/>
-            <a:ext cx="6428232" cy="257810"/>
-          </a:xfrm>
-          <a:prstGeom prst="rect">
-            <a:avLst/>
-          </a:prstGeom>
-          <a:noFill/>
-          <a:ln/>
-        </p:spPr>
-        <p:txBody>
-          <a:bodyPr wrap="square" lIns="0" tIns="0" rIns="0" bIns="0" rtlCol="0" anchor="t"/>
-          <a:lstStyle/>
-          <a:p>
-            <a:pPr indent="0" marL="0">
-              <a:buNone/>
-            </a:pPr>
-            <a:r>
-              <a:rPr lang="en-US" sz="1400" b="1" dirty="0">
-                <a:solidFill>
-                  <a:srgbClr val="1E2761"/>
-                </a:solidFill>
-                <a:latin typeface="Calibri" pitchFamily="34" charset="0"/>
-                <a:ea typeface="Calibri" pitchFamily="34" charset="-122"/>
-                <a:cs typeface="Calibri" pitchFamily="34" charset="-120"/>
-              </a:rPr>
-              <a:t>テストで入れた回答だけ消したいとき</a:t>
-            </a:r>
-            <a:endParaRPr lang="en-US" sz="1400" dirty="0"/>
-          </a:p>
-        </p:txBody>
-      </p:sp>
-      <p:sp>
-        <p:nvSpPr>
-          <p:cNvPr id="6" name="Text 4"/>
-          <p:cNvSpPr txBox="1"/>
-          <p:nvPr/>
-        </p:nvSpPr>
-        <p:spPr>
-          <a:xfrm>
-            <a:off x="566928" y="2418588"/>
-            <a:ext cx="6428232" cy="257429"/>
-          </a:xfrm>
-          <a:prstGeom prst="rect">
-            <a:avLst/>
-          </a:prstGeom>
-          <a:noFill/>
-          <a:ln/>
-        </p:spPr>
-        <p:txBody>
-          <a:bodyPr wrap="square" lIns="0" tIns="0" rIns="0" bIns="0" rtlCol="0" anchor="t"/>
-          <a:lstStyle/>
-          <a:p>
-            <a:pPr indent="0" marL="0">
-              <a:lnSpc>
-                <a:spcPct val="125000"/>
-              </a:lnSpc>
-              <a:buNone/>
-            </a:pPr>
-            <a:r>
-              <a:rPr lang="en-US" sz="1100" dirty="0">
-                <a:solidFill>
-                  <a:srgbClr val="222222"/>
-                </a:solidFill>
-                <a:latin typeface="Calibri" pitchFamily="34" charset="0"/>
-                <a:ea typeface="Calibri" pitchFamily="34" charset="-122"/>
-                <a:cs typeface="Calibri" pitchFamily="34" charset="-120"/>
-              </a:rPr>
-              <a:t>まず件数を確認し、問題なければ実行します。</a:t>
-            </a:r>
-            <a:endParaRPr lang="en-US" sz="1100" dirty="0"/>
-          </a:p>
-        </p:txBody>
-      </p:sp>
-      <p:sp>
-        <p:nvSpPr>
-          <p:cNvPr id="7" name="Text 5"/>
-          <p:cNvSpPr txBox="1"/>
-          <p:nvPr/>
-        </p:nvSpPr>
-        <p:spPr>
-          <a:xfrm>
-            <a:off x="713232" y="2712593"/>
-            <a:ext cx="6281928" cy="257429"/>
-          </a:xfrm>
-          <a:prstGeom prst="rect">
-            <a:avLst/>
-          </a:prstGeom>
-          <a:noFill/>
-          <a:ln/>
-        </p:spPr>
-        <p:txBody>
-          <a:bodyPr wrap="square" lIns="0" tIns="0" rIns="0" bIns="0" rtlCol="0" anchor="t"/>
-          <a:lstStyle/>
-          <a:p>
-            <a:pPr marL="342900" indent="-342900">
-              <a:lnSpc>
-                <a:spcPct val="125000"/>
-              </a:lnSpc>
-              <a:buSzPct val="100000"/>
-              <a:buChar char="●"/>
-            </a:pPr>
-            <a:r>
-              <a:rPr lang="en-US" sz="1100" dirty="0">
-                <a:solidFill>
-                  <a:srgbClr val="222222"/>
-                </a:solidFill>
-                <a:latin typeface="Calibri" pitchFamily="34" charset="0"/>
-                <a:ea typeface="Calibri" pitchFamily="34" charset="-122"/>
-                <a:cs typeface="Calibri" pitchFamily="34" charset="-120"/>
-              </a:rPr>
-              <a:t>確認：</a:t>
-            </a:r>
-            <a:pPr indent="0" marL="0">
-              <a:lnSpc>
-                <a:spcPct val="125000"/>
-              </a:lnSpc>
-              <a:buNone/>
-            </a:pPr>
-            <a:r>
-              <a:rPr lang="en-US" sz="1045" dirty="0">
-                <a:solidFill>
-                  <a:srgbClr val="222222"/>
-                </a:solidFill>
-                <a:latin typeface="Courier New" pitchFamily="34" charset="0"/>
-                <a:ea typeface="Courier New" pitchFamily="34" charset="-122"/>
-                <a:cs typeface="Courier New" pitchFamily="34" charset="-120"/>
-              </a:rPr>
-              <a:t>bin/reset.sh --responses --dry-run</a:t>
-            </a:r>
-            <a:endParaRPr lang="en-US" sz="1100" dirty="0"/>
-          </a:p>
-        </p:txBody>
-      </p:sp>
-      <p:sp>
-        <p:nvSpPr>
-          <p:cNvPr id="8" name="Text 6"/>
-          <p:cNvSpPr txBox="1"/>
-          <p:nvPr/>
-        </p:nvSpPr>
-        <p:spPr>
-          <a:xfrm>
-            <a:off x="713232" y="2988310"/>
-            <a:ext cx="6281928" cy="257429"/>
-          </a:xfrm>
-          <a:prstGeom prst="rect">
-            <a:avLst/>
-          </a:prstGeom>
-          <a:noFill/>
-          <a:ln/>
-        </p:spPr>
-        <p:txBody>
-          <a:bodyPr wrap="square" lIns="0" tIns="0" rIns="0" bIns="0" rtlCol="0" anchor="t"/>
-          <a:lstStyle/>
-          <a:p>
-            <a:pPr marL="342900" indent="-342900">
-              <a:lnSpc>
-                <a:spcPct val="125000"/>
-              </a:lnSpc>
-              <a:buSzPct val="100000"/>
-              <a:buChar char="●"/>
-            </a:pPr>
-            <a:r>
-              <a:rPr lang="en-US" sz="1100" dirty="0">
-                <a:solidFill>
-                  <a:srgbClr val="222222"/>
-                </a:solidFill>
-                <a:latin typeface="Calibri" pitchFamily="34" charset="0"/>
-                <a:ea typeface="Calibri" pitchFamily="34" charset="-122"/>
-                <a:cs typeface="Calibri" pitchFamily="34" charset="-120"/>
-              </a:rPr>
-              <a:t>実行：</a:t>
-            </a:r>
-            <a:pPr indent="0" marL="0">
-              <a:lnSpc>
-                <a:spcPct val="125000"/>
-              </a:lnSpc>
-              <a:buNone/>
-            </a:pPr>
-            <a:r>
-              <a:rPr lang="en-US" sz="1045" dirty="0">
-                <a:solidFill>
-                  <a:srgbClr val="222222"/>
-                </a:solidFill>
-                <a:latin typeface="Courier New" pitchFamily="34" charset="0"/>
-                <a:ea typeface="Courier New" pitchFamily="34" charset="-122"/>
-                <a:cs typeface="Courier New" pitchFamily="34" charset="-120"/>
-              </a:rPr>
-              <a:t>bin/reset.sh --responses --force</a:t>
-            </a:r>
-            <a:endParaRPr lang="en-US" sz="1100" dirty="0"/>
-          </a:p>
-        </p:txBody>
-      </p:sp>
-      <p:sp>
-        <p:nvSpPr>
-          <p:cNvPr id="9" name="Text 7"/>
-          <p:cNvSpPr txBox="1"/>
-          <p:nvPr/>
-        </p:nvSpPr>
-        <p:spPr>
-          <a:xfrm>
-            <a:off x="566928" y="3264027"/>
-            <a:ext cx="6428232" cy="257429"/>
-          </a:xfrm>
-          <a:prstGeom prst="rect">
-            <a:avLst/>
-          </a:prstGeom>
-          <a:noFill/>
-          <a:ln/>
-        </p:spPr>
-        <p:txBody>
-          <a:bodyPr wrap="square" lIns="0" tIns="0" rIns="0" bIns="0" rtlCol="0" anchor="t"/>
-          <a:lstStyle/>
-          <a:p>
-            <a:pPr indent="0" marL="0">
-              <a:lnSpc>
-                <a:spcPct val="125000"/>
-              </a:lnSpc>
-              <a:buNone/>
-            </a:pPr>
-            <a:r>
-              <a:rPr lang="en-US" sz="1100" dirty="0">
-                <a:solidFill>
-                  <a:srgbClr val="222222"/>
-                </a:solidFill>
-                <a:latin typeface="Calibri" pitchFamily="34" charset="0"/>
-                <a:ea typeface="Calibri" pitchFamily="34" charset="-122"/>
-                <a:cs typeface="Calibri" pitchFamily="34" charset="-120"/>
-              </a:rPr>
-              <a:t>イベント・企業・設問・景品・壁紙・アカウントは残ります。</a:t>
-            </a:r>
-            <a:endParaRPr lang="en-US" sz="1100" dirty="0"/>
-          </a:p>
-        </p:txBody>
-      </p:sp>
-      <p:sp>
-        <p:nvSpPr>
-          <p:cNvPr id="10" name="Text 8"/>
-          <p:cNvSpPr txBox="1"/>
-          <p:nvPr/>
-        </p:nvSpPr>
-        <p:spPr>
-          <a:xfrm>
-            <a:off x="566928" y="3667760"/>
-            <a:ext cx="6428232" cy="257810"/>
-          </a:xfrm>
-          <a:prstGeom prst="rect">
-            <a:avLst/>
-          </a:prstGeom>
-          <a:noFill/>
-          <a:ln/>
-        </p:spPr>
-        <p:txBody>
-          <a:bodyPr wrap="square" lIns="0" tIns="0" rIns="0" bIns="0" rtlCol="0" anchor="t"/>
-          <a:lstStyle/>
-          <a:p>
-            <a:pPr indent="0" marL="0">
-              <a:buNone/>
-            </a:pPr>
-            <a:r>
-              <a:rPr lang="en-US" sz="1400" b="1" dirty="0">
-                <a:solidFill>
-                  <a:srgbClr val="1E2761"/>
-                </a:solidFill>
-                <a:latin typeface="Calibri" pitchFamily="34" charset="0"/>
-                <a:ea typeface="Calibri" pitchFamily="34" charset="-122"/>
-                <a:cs typeface="Calibri" pitchFamily="34" charset="-120"/>
-              </a:rPr>
-              <a:t>イベントごと作り直したいとき</a:t>
-            </a:r>
-            <a:endParaRPr lang="en-US" sz="1400" dirty="0"/>
-          </a:p>
-        </p:txBody>
-      </p:sp>
-      <p:sp>
-        <p:nvSpPr>
-          <p:cNvPr id="11" name="Text 9"/>
-          <p:cNvSpPr txBox="1"/>
-          <p:nvPr/>
-        </p:nvSpPr>
-        <p:spPr>
-          <a:xfrm>
-            <a:off x="713232" y="3998722"/>
-            <a:ext cx="6281928" cy="257429"/>
-          </a:xfrm>
-          <a:prstGeom prst="rect">
-            <a:avLst/>
-          </a:prstGeom>
-          <a:noFill/>
-          <a:ln/>
-        </p:spPr>
-        <p:txBody>
-          <a:bodyPr wrap="square" lIns="0" tIns="0" rIns="0" bIns="0" rtlCol="0" anchor="t"/>
-          <a:lstStyle/>
-          <a:p>
-            <a:pPr marL="342900" indent="-342900">
-              <a:lnSpc>
-                <a:spcPct val="125000"/>
-              </a:lnSpc>
-              <a:buSzPct val="100000"/>
-              <a:buChar char="●"/>
-            </a:pPr>
-            <a:r>
-              <a:rPr lang="en-US" sz="1100" dirty="0">
-                <a:solidFill>
-                  <a:srgbClr val="222222"/>
-                </a:solidFill>
-                <a:latin typeface="Calibri" pitchFamily="34" charset="0"/>
-                <a:ea typeface="Calibri" pitchFamily="34" charset="-122"/>
-                <a:cs typeface="Calibri" pitchFamily="34" charset="-120"/>
-              </a:rPr>
-              <a:t>実行：</a:t>
-            </a:r>
-            <a:pPr indent="0" marL="0">
-              <a:lnSpc>
-                <a:spcPct val="125000"/>
-              </a:lnSpc>
-              <a:buNone/>
-            </a:pPr>
-            <a:r>
-              <a:rPr lang="en-US" sz="1045" dirty="0">
-                <a:solidFill>
-                  <a:srgbClr val="222222"/>
-                </a:solidFill>
-                <a:latin typeface="Courier New" pitchFamily="34" charset="0"/>
-                <a:ea typeface="Courier New" pitchFamily="34" charset="-122"/>
-                <a:cs typeface="Courier New" pitchFamily="34" charset="-120"/>
-              </a:rPr>
-              <a:t>bin/reset.sh --all --force</a:t>
-            </a:r>
-            <a:endParaRPr lang="en-US" sz="1100" dirty="0"/>
-          </a:p>
-        </p:txBody>
-      </p:sp>
-      <p:sp>
-        <p:nvSpPr>
-          <p:cNvPr id="12" name="Shape 10"/>
-          <p:cNvSpPr/>
-          <p:nvPr/>
-        </p:nvSpPr>
-        <p:spPr>
-          <a:xfrm>
-            <a:off x="566928" y="4274439"/>
-            <a:ext cx="6428232" cy="817817"/>
-          </a:xfrm>
-          <a:prstGeom prst="roundRect">
-            <a:avLst>
-              <a:gd name="adj" fmla="val 6709"/>
-            </a:avLst>
-          </a:prstGeom>
-          <a:solidFill>
-            <a:srgbClr val="FDF0E6"/>
-          </a:solidFill>
-          <a:ln w="9525">
-            <a:solidFill>
-              <a:srgbClr val="E08A3C"/>
-            </a:solidFill>
-            <a:prstDash val="solid"/>
-          </a:ln>
-        </p:spPr>
-      </p:sp>
-      <p:sp>
-        <p:nvSpPr>
-          <p:cNvPr id="13" name="Text 11"/>
-          <p:cNvSpPr txBox="1"/>
-          <p:nvPr/>
-        </p:nvSpPr>
-        <p:spPr>
-          <a:xfrm>
-            <a:off x="658368" y="4365879"/>
-            <a:ext cx="237744" cy="237744"/>
+      <p:pic>
+        <p:nvPicPr>
+          <p:cNvPr id="4" name="Image 0" descr="C:\Users\sato\Desktop\enque\docs\images\o-stats.png">    </p:cNvPr>
+          <p:cNvPicPr>
+            <a:picLocks noChangeAspect="1"/>
+          </p:cNvPicPr>
+          <p:nvPr/>
+        </p:nvPicPr>
+        <p:blipFill>
+          <a:blip r:embed="rId1"/>
+          <a:stretch>
+            <a:fillRect/>
+          </a:stretch>
+        </p:blipFill>
+        <p:spPr>
+          <a:xfrm>
+            <a:off x="2140821" y="1481328"/>
+            <a:ext cx="3280447" cy="3474720"/>
+          </a:xfrm>
+          <a:prstGeom prst="rect">
+            <a:avLst/>
+          </a:prstGeom>
+        </p:spPr>
+      </p:pic>
+      <p:sp>
+        <p:nvSpPr>
+          <p:cNvPr id="5" name="Text 2"/>
+          <p:cNvSpPr txBox="1"/>
+          <p:nvPr/>
+        </p:nvSpPr>
+        <p:spPr>
+          <a:xfrm>
+            <a:off x="566928" y="5010912"/>
+            <a:ext cx="6428232" cy="274320"/>
           </a:xfrm>
           <a:prstGeom prst="rect">
             <a:avLst/>
@@ -23505,207 +23083,23 @@
               <a:buNone/>
             </a:pPr>
             <a:r>
-              <a:rPr lang="en-US" sz="1200" b="1" dirty="0">
-                <a:solidFill>
-                  <a:srgbClr val="C25A17"/>
-                </a:solidFill>
-                <a:latin typeface="Calibri" pitchFamily="34" charset="0"/>
-                <a:ea typeface="Calibri" pitchFamily="34" charset="-122"/>
-                <a:cs typeface="Calibri" pitchFamily="34" charset="-120"/>
-              </a:rPr>
-              <a:t>！</a:t>
-            </a:r>
-            <a:endParaRPr lang="en-US" sz="1200" dirty="0"/>
-          </a:p>
-        </p:txBody>
-      </p:sp>
-      <p:sp>
-        <p:nvSpPr>
-          <p:cNvPr id="14" name="Text 12"/>
-          <p:cNvSpPr txBox="1"/>
-          <p:nvPr/>
-        </p:nvSpPr>
-        <p:spPr>
-          <a:xfrm>
-            <a:off x="950976" y="4384167"/>
-            <a:ext cx="5925312" cy="634937"/>
-          </a:xfrm>
-          <a:prstGeom prst="rect">
-            <a:avLst/>
-          </a:prstGeom>
-          <a:noFill/>
-          <a:ln/>
-        </p:spPr>
-        <p:txBody>
-          <a:bodyPr wrap="square" lIns="0" tIns="0" rIns="0" bIns="0" rtlCol="0" anchor="t"/>
-          <a:lstStyle/>
-          <a:p>
-            <a:pPr indent="0" marL="0">
-              <a:lnSpc>
-                <a:spcPct val="120000"/>
-              </a:lnSpc>
-              <a:buNone/>
-            </a:pPr>
-            <a:r>
-              <a:rPr lang="en-US" sz="1050" dirty="0">
-                <a:solidFill>
-                  <a:srgbClr val="222222"/>
-                </a:solidFill>
-                <a:latin typeface="Calibri" pitchFamily="34" charset="0"/>
-                <a:ea typeface="Calibri" pitchFamily="34" charset="-122"/>
-                <a:cs typeface="Calibri" pitchFamily="34" charset="-120"/>
-              </a:rPr>
-              <a:t>どちらも元に戻せません。実行前に自動でバックアップを取りますが、念のため大事なデータはCSVで書き出しておいてください。</a:t>
-            </a:r>
-            <a:pPr indent="0" marL="0">
-              <a:lnSpc>
-                <a:spcPct val="120000"/>
-              </a:lnSpc>
-              <a:buNone/>
-            </a:pPr>
-            <a:r>
-              <a:rPr lang="en-US" sz="1050" b="1" dirty="0">
-                <a:solidFill>
-                  <a:srgbClr val="222222"/>
-                </a:solidFill>
-                <a:latin typeface="Calibri" pitchFamily="34" charset="0"/>
-                <a:ea typeface="Calibri" pitchFamily="34" charset="-122"/>
-                <a:cs typeface="Calibri" pitchFamily="34" charset="-120"/>
-              </a:rPr>
-              <a:t>企業担当者のアカウントは企業と一緒に消えます</a:t>
-            </a:r>
-            <a:pPr indent="0" marL="0">
-              <a:lnSpc>
-                <a:spcPct val="120000"/>
-              </a:lnSpc>
-              <a:buNone/>
-            </a:pPr>
-            <a:r>
-              <a:rPr lang="en-US" sz="1050" dirty="0">
-                <a:solidFill>
-                  <a:srgbClr val="222222"/>
-                </a:solidFill>
-                <a:latin typeface="Calibri" pitchFamily="34" charset="0"/>
-                <a:ea typeface="Calibri" pitchFamily="34" charset="-122"/>
-                <a:cs typeface="Calibri" pitchFamily="34" charset="-120"/>
-              </a:rPr>
-              <a:t>（主催者・受付は残ります）。</a:t>
-            </a:r>
-            <a:endParaRPr lang="en-US" sz="1050" dirty="0"/>
-          </a:p>
-        </p:txBody>
-      </p:sp>
-      <p:sp>
-        <p:nvSpPr>
-          <p:cNvPr id="15" name="Shape 13"/>
-          <p:cNvSpPr/>
-          <p:nvPr/>
-        </p:nvSpPr>
-        <p:spPr>
-          <a:xfrm>
-            <a:off x="566928" y="5165408"/>
-            <a:ext cx="6428232" cy="431102"/>
-          </a:xfrm>
-          <a:prstGeom prst="roundRect">
-            <a:avLst>
-              <a:gd name="adj" fmla="val 12726"/>
-            </a:avLst>
-          </a:prstGeom>
-          <a:solidFill>
-            <a:srgbClr val="E8ECF8"/>
-          </a:solidFill>
-          <a:ln w="9525">
-            <a:solidFill>
-              <a:srgbClr val="1E2761"/>
-            </a:solidFill>
-            <a:prstDash val="solid"/>
-          </a:ln>
-        </p:spPr>
-      </p:sp>
-      <p:sp>
-        <p:nvSpPr>
-          <p:cNvPr id="16" name="Text 14"/>
-          <p:cNvSpPr txBox="1"/>
-          <p:nvPr/>
-        </p:nvSpPr>
-        <p:spPr>
-          <a:xfrm>
-            <a:off x="658368" y="5256848"/>
-            <a:ext cx="237744" cy="237744"/>
-          </a:xfrm>
-          <a:prstGeom prst="rect">
-            <a:avLst/>
-          </a:prstGeom>
-          <a:noFill/>
-          <a:ln/>
-        </p:spPr>
-        <p:txBody>
-          <a:bodyPr wrap="square" lIns="0" tIns="0" rIns="0" bIns="0" rtlCol="0" anchor="ctr"/>
-          <a:lstStyle/>
-          <a:p>
-            <a:pPr algn="ctr" indent="0" marL="0">
-              <a:buNone/>
-            </a:pPr>
-            <a:r>
-              <a:rPr lang="en-US" sz="1200" b="1" dirty="0">
-                <a:solidFill>
-                  <a:srgbClr val="1E2761"/>
-                </a:solidFill>
-                <a:latin typeface="Calibri" pitchFamily="34" charset="0"/>
-                <a:ea typeface="Calibri" pitchFamily="34" charset="-122"/>
-                <a:cs typeface="Calibri" pitchFamily="34" charset="-120"/>
-              </a:rPr>
-              <a:t>i</a:t>
-            </a:r>
-            <a:endParaRPr lang="en-US" sz="1200" dirty="0"/>
-          </a:p>
-        </p:txBody>
-      </p:sp>
-      <p:sp>
-        <p:nvSpPr>
-          <p:cNvPr id="17" name="Text 15"/>
-          <p:cNvSpPr txBox="1"/>
-          <p:nvPr/>
-        </p:nvSpPr>
-        <p:spPr>
-          <a:xfrm>
-            <a:off x="950976" y="5275136"/>
-            <a:ext cx="5925312" cy="248221"/>
-          </a:xfrm>
-          <a:prstGeom prst="rect">
-            <a:avLst/>
-          </a:prstGeom>
-          <a:noFill/>
-          <a:ln/>
-        </p:spPr>
-        <p:txBody>
-          <a:bodyPr wrap="square" lIns="0" tIns="0" rIns="0" bIns="0" rtlCol="0" anchor="t"/>
-          <a:lstStyle/>
-          <a:p>
-            <a:pPr indent="0" marL="0">
-              <a:lnSpc>
-                <a:spcPct val="120000"/>
-              </a:lnSpc>
-              <a:buNone/>
-            </a:pPr>
-            <a:r>
-              <a:rPr lang="en-US" sz="1050" dirty="0">
-                <a:solidFill>
-                  <a:srgbClr val="222222"/>
-                </a:solidFill>
-                <a:latin typeface="Calibri" pitchFamily="34" charset="0"/>
-                <a:ea typeface="Calibri" pitchFamily="34" charset="-122"/>
-                <a:cs typeface="Calibri" pitchFamily="34" charset="-120"/>
-              </a:rPr>
-              <a:t>実行するとデータベース名の入力を求められます。画面の指示どおりに入力してください。</a:t>
-            </a:r>
-            <a:endParaRPr lang="en-US" sz="1050" dirty="0"/>
-          </a:p>
-        </p:txBody>
-      </p:sp>
-      <p:sp>
-        <p:nvSpPr>
-          <p:cNvPr id="18" name="Text 16"/>
+              <a:rPr lang="en-US" sz="950" dirty="0">
+                <a:solidFill>
+                  <a:srgbClr val="6B6B6B"/>
+                </a:solidFill>
+                <a:latin typeface="Calibri" pitchFamily="34" charset="0"/>
+                <a:ea typeface="Calibri" pitchFamily="34" charset="-122"/>
+                <a:cs typeface="Calibri" pitchFamily="34" charset="-120"/>
+              </a:rPr>
+              <a:t>企業の集計画面。設問ごとのグラフが見えるところ。</a:t>
+            </a:r>
+            <a:endParaRPr lang="en-US" sz="950" dirty="0"/>
+          </a:p>
+        </p:txBody>
+      </p:sp>
+      <p:sp>
+        <p:nvSpPr>
+          <p:cNvPr id="6" name="Text 3"/>
           <p:cNvSpPr txBox="1"/>
           <p:nvPr/>
         </p:nvSpPr>
@@ -23846,6 +23240,1706 @@
                 <a:ea typeface="Calibri" pitchFamily="34" charset="-122"/>
                 <a:cs typeface="Calibri" pitchFamily="34" charset="-120"/>
               </a:rPr>
+              <a:t>終了後4：メールアドレスを削除する</a:t>
+            </a:r>
+            <a:endParaRPr lang="en-US" sz="2200" dirty="0"/>
+          </a:p>
+        </p:txBody>
+      </p:sp>
+      <p:sp>
+        <p:nvSpPr>
+          <p:cNvPr id="4" name="Text 2"/>
+          <p:cNvSpPr txBox="1"/>
+          <p:nvPr/>
+        </p:nvSpPr>
+        <p:spPr>
+          <a:xfrm>
+            <a:off x="566928" y="1481328"/>
+            <a:ext cx="6428232" cy="257429"/>
+          </a:xfrm>
+          <a:prstGeom prst="rect">
+            <a:avLst/>
+          </a:prstGeom>
+          <a:noFill/>
+          <a:ln/>
+        </p:spPr>
+        <p:txBody>
+          <a:bodyPr wrap="square" lIns="0" tIns="0" rIns="0" bIns="0" rtlCol="0" anchor="t"/>
+          <a:lstStyle/>
+          <a:p>
+            <a:pPr indent="0" marL="0">
+              <a:lnSpc>
+                <a:spcPct val="125000"/>
+              </a:lnSpc>
+              <a:buNone/>
+            </a:pPr>
+            <a:r>
+              <a:rPr lang="en-US" sz="1100" dirty="0">
+                <a:solidFill>
+                  <a:srgbClr val="222222"/>
+                </a:solidFill>
+                <a:latin typeface="Calibri" pitchFamily="34" charset="0"/>
+                <a:ea typeface="Calibri" pitchFamily="34" charset="-122"/>
+                <a:cs typeface="Calibri" pitchFamily="34" charset="-120"/>
+              </a:rPr>
+              <a:t>案内の送付と集計が終わったら、預かったメールアドレスを削除します。</a:t>
+            </a:r>
+            <a:endParaRPr lang="en-US" sz="1100" dirty="0"/>
+          </a:p>
+        </p:txBody>
+      </p:sp>
+      <p:sp>
+        <p:nvSpPr>
+          <p:cNvPr id="5" name="Shape 3"/>
+          <p:cNvSpPr/>
+          <p:nvPr/>
+        </p:nvSpPr>
+        <p:spPr>
+          <a:xfrm>
+            <a:off x="566928" y="1793621"/>
+            <a:ext cx="274320" cy="274320"/>
+          </a:xfrm>
+          <a:prstGeom prst="ellipse">
+            <a:avLst/>
+          </a:prstGeom>
+          <a:solidFill>
+            <a:srgbClr val="1E2761"/>
+          </a:solidFill>
+          <a:ln/>
+        </p:spPr>
+      </p:sp>
+      <p:sp>
+        <p:nvSpPr>
+          <p:cNvPr id="6" name="Text 4"/>
+          <p:cNvSpPr txBox="1"/>
+          <p:nvPr/>
+        </p:nvSpPr>
+        <p:spPr>
+          <a:xfrm>
+            <a:off x="566928" y="1793621"/>
+            <a:ext cx="274320" cy="274320"/>
+          </a:xfrm>
+          <a:prstGeom prst="rect">
+            <a:avLst/>
+          </a:prstGeom>
+          <a:noFill/>
+          <a:ln/>
+        </p:spPr>
+        <p:txBody>
+          <a:bodyPr wrap="square" lIns="0" tIns="0" rIns="0" bIns="0" rtlCol="0" anchor="ctr"/>
+          <a:lstStyle/>
+          <a:p>
+            <a:pPr algn="ctr" indent="0" marL="0">
+              <a:buNone/>
+            </a:pPr>
+            <a:r>
+              <a:rPr lang="en-US" sz="1100" b="1" dirty="0">
+                <a:solidFill>
+                  <a:srgbClr val="FFFFFF"/>
+                </a:solidFill>
+                <a:latin typeface="Calibri" pitchFamily="34" charset="0"/>
+                <a:ea typeface="Calibri" pitchFamily="34" charset="-122"/>
+                <a:cs typeface="Calibri" pitchFamily="34" charset="-120"/>
+              </a:rPr>
+              <a:t>1</a:t>
+            </a:r>
+            <a:endParaRPr lang="en-US" sz="1100" dirty="0"/>
+          </a:p>
+        </p:txBody>
+      </p:sp>
+      <p:sp>
+        <p:nvSpPr>
+          <p:cNvPr id="7" name="Text 5"/>
+          <p:cNvSpPr txBox="1"/>
+          <p:nvPr/>
+        </p:nvSpPr>
+        <p:spPr>
+          <a:xfrm>
+            <a:off x="969264" y="1775333"/>
+            <a:ext cx="6025896" cy="365760"/>
+          </a:xfrm>
+          <a:prstGeom prst="rect">
+            <a:avLst/>
+          </a:prstGeom>
+          <a:noFill/>
+          <a:ln/>
+        </p:spPr>
+        <p:txBody>
+          <a:bodyPr wrap="square" lIns="0" tIns="0" rIns="0" bIns="0" rtlCol="0" anchor="t"/>
+          <a:lstStyle/>
+          <a:p>
+            <a:pPr indent="0" marL="0">
+              <a:lnSpc>
+                <a:spcPct val="125000"/>
+              </a:lnSpc>
+              <a:buNone/>
+            </a:pPr>
+            <a:r>
+              <a:rPr lang="en-US" sz="1150" dirty="0">
+                <a:solidFill>
+                  <a:srgbClr val="222222"/>
+                </a:solidFill>
+                <a:latin typeface="Calibri" pitchFamily="34" charset="0"/>
+                <a:ea typeface="Calibri" pitchFamily="34" charset="-122"/>
+                <a:cs typeface="Calibri" pitchFamily="34" charset="-120"/>
+              </a:rPr>
+              <a:t>「総合アンケート」の画面を開く</a:t>
+            </a:r>
+            <a:endParaRPr lang="en-US" sz="1150" dirty="0"/>
+          </a:p>
+        </p:txBody>
+      </p:sp>
+      <p:sp>
+        <p:nvSpPr>
+          <p:cNvPr id="8" name="Shape 6"/>
+          <p:cNvSpPr/>
+          <p:nvPr/>
+        </p:nvSpPr>
+        <p:spPr>
+          <a:xfrm>
+            <a:off x="566928" y="2250821"/>
+            <a:ext cx="274320" cy="274320"/>
+          </a:xfrm>
+          <a:prstGeom prst="ellipse">
+            <a:avLst/>
+          </a:prstGeom>
+          <a:solidFill>
+            <a:srgbClr val="1E2761"/>
+          </a:solidFill>
+          <a:ln/>
+        </p:spPr>
+      </p:sp>
+      <p:sp>
+        <p:nvSpPr>
+          <p:cNvPr id="9" name="Text 7"/>
+          <p:cNvSpPr txBox="1"/>
+          <p:nvPr/>
+        </p:nvSpPr>
+        <p:spPr>
+          <a:xfrm>
+            <a:off x="566928" y="2250821"/>
+            <a:ext cx="274320" cy="274320"/>
+          </a:xfrm>
+          <a:prstGeom prst="rect">
+            <a:avLst/>
+          </a:prstGeom>
+          <a:noFill/>
+          <a:ln/>
+        </p:spPr>
+        <p:txBody>
+          <a:bodyPr wrap="square" lIns="0" tIns="0" rIns="0" bIns="0" rtlCol="0" anchor="ctr"/>
+          <a:lstStyle/>
+          <a:p>
+            <a:pPr algn="ctr" indent="0" marL="0">
+              <a:buNone/>
+            </a:pPr>
+            <a:r>
+              <a:rPr lang="en-US" sz="1100" b="1" dirty="0">
+                <a:solidFill>
+                  <a:srgbClr val="FFFFFF"/>
+                </a:solidFill>
+                <a:latin typeface="Calibri" pitchFamily="34" charset="0"/>
+                <a:ea typeface="Calibri" pitchFamily="34" charset="-122"/>
+                <a:cs typeface="Calibri" pitchFamily="34" charset="-120"/>
+              </a:rPr>
+              <a:t>2</a:t>
+            </a:r>
+            <a:endParaRPr lang="en-US" sz="1100" dirty="0"/>
+          </a:p>
+        </p:txBody>
+      </p:sp>
+      <p:sp>
+        <p:nvSpPr>
+          <p:cNvPr id="10" name="Text 8"/>
+          <p:cNvSpPr txBox="1"/>
+          <p:nvPr/>
+        </p:nvSpPr>
+        <p:spPr>
+          <a:xfrm>
+            <a:off x="969264" y="2232533"/>
+            <a:ext cx="6025896" cy="365760"/>
+          </a:xfrm>
+          <a:prstGeom prst="rect">
+            <a:avLst/>
+          </a:prstGeom>
+          <a:noFill/>
+          <a:ln/>
+        </p:spPr>
+        <p:txBody>
+          <a:bodyPr wrap="square" lIns="0" tIns="0" rIns="0" bIns="0" rtlCol="0" anchor="t"/>
+          <a:lstStyle/>
+          <a:p>
+            <a:pPr indent="0" marL="0">
+              <a:lnSpc>
+                <a:spcPct val="125000"/>
+              </a:lnSpc>
+              <a:buNone/>
+            </a:pPr>
+            <a:r>
+              <a:rPr lang="en-US" sz="1150" dirty="0">
+                <a:solidFill>
+                  <a:srgbClr val="222222"/>
+                </a:solidFill>
+                <a:latin typeface="Calibri" pitchFamily="34" charset="0"/>
+                <a:ea typeface="Calibri" pitchFamily="34" charset="-122"/>
+                <a:cs typeface="Calibri" pitchFamily="34" charset="-120"/>
+              </a:rPr>
+              <a:t>一番下の</a:t>
+            </a:r>
+            <a:pPr indent="0" marL="0">
+              <a:lnSpc>
+                <a:spcPct val="125000"/>
+              </a:lnSpc>
+              <a:buNone/>
+            </a:pPr>
+            <a:r>
+              <a:rPr lang="en-US" sz="1150" b="1" dirty="0">
+                <a:solidFill>
+                  <a:srgbClr val="222222"/>
+                </a:solidFill>
+                <a:latin typeface="Calibri" pitchFamily="34" charset="0"/>
+                <a:ea typeface="Calibri" pitchFamily="34" charset="-122"/>
+                <a:cs typeface="Calibri" pitchFamily="34" charset="-120"/>
+              </a:rPr>
+              <a:t>「メールアドレスを削除する」</a:t>
+            </a:r>
+            <a:pPr indent="0" marL="0">
+              <a:lnSpc>
+                <a:spcPct val="125000"/>
+              </a:lnSpc>
+              <a:buNone/>
+            </a:pPr>
+            <a:r>
+              <a:rPr lang="en-US" sz="1150" dirty="0">
+                <a:solidFill>
+                  <a:srgbClr val="222222"/>
+                </a:solidFill>
+                <a:latin typeface="Calibri" pitchFamily="34" charset="0"/>
+                <a:ea typeface="Calibri" pitchFamily="34" charset="-122"/>
+                <a:cs typeface="Calibri" pitchFamily="34" charset="-120"/>
+              </a:rPr>
+              <a:t>を押す</a:t>
+            </a:r>
+            <a:endParaRPr lang="en-US" sz="1150" dirty="0"/>
+          </a:p>
+        </p:txBody>
+      </p:sp>
+      <p:sp>
+        <p:nvSpPr>
+          <p:cNvPr id="11" name="Shape 9"/>
+          <p:cNvSpPr/>
+          <p:nvPr/>
+        </p:nvSpPr>
+        <p:spPr>
+          <a:xfrm>
+            <a:off x="566928" y="2708021"/>
+            <a:ext cx="274320" cy="274320"/>
+          </a:xfrm>
+          <a:prstGeom prst="ellipse">
+            <a:avLst/>
+          </a:prstGeom>
+          <a:solidFill>
+            <a:srgbClr val="1E2761"/>
+          </a:solidFill>
+          <a:ln/>
+        </p:spPr>
+      </p:sp>
+      <p:sp>
+        <p:nvSpPr>
+          <p:cNvPr id="12" name="Text 10"/>
+          <p:cNvSpPr txBox="1"/>
+          <p:nvPr/>
+        </p:nvSpPr>
+        <p:spPr>
+          <a:xfrm>
+            <a:off x="566928" y="2708021"/>
+            <a:ext cx="274320" cy="274320"/>
+          </a:xfrm>
+          <a:prstGeom prst="rect">
+            <a:avLst/>
+          </a:prstGeom>
+          <a:noFill/>
+          <a:ln/>
+        </p:spPr>
+        <p:txBody>
+          <a:bodyPr wrap="square" lIns="0" tIns="0" rIns="0" bIns="0" rtlCol="0" anchor="ctr"/>
+          <a:lstStyle/>
+          <a:p>
+            <a:pPr algn="ctr" indent="0" marL="0">
+              <a:buNone/>
+            </a:pPr>
+            <a:r>
+              <a:rPr lang="en-US" sz="1100" b="1" dirty="0">
+                <a:solidFill>
+                  <a:srgbClr val="FFFFFF"/>
+                </a:solidFill>
+                <a:latin typeface="Calibri" pitchFamily="34" charset="0"/>
+                <a:ea typeface="Calibri" pitchFamily="34" charset="-122"/>
+                <a:cs typeface="Calibri" pitchFamily="34" charset="-120"/>
+              </a:rPr>
+              <a:t>3</a:t>
+            </a:r>
+            <a:endParaRPr lang="en-US" sz="1100" dirty="0"/>
+          </a:p>
+        </p:txBody>
+      </p:sp>
+      <p:sp>
+        <p:nvSpPr>
+          <p:cNvPr id="13" name="Text 11"/>
+          <p:cNvSpPr txBox="1"/>
+          <p:nvPr/>
+        </p:nvSpPr>
+        <p:spPr>
+          <a:xfrm>
+            <a:off x="969264" y="2689733"/>
+            <a:ext cx="6025896" cy="365760"/>
+          </a:xfrm>
+          <a:prstGeom prst="rect">
+            <a:avLst/>
+          </a:prstGeom>
+          <a:noFill/>
+          <a:ln/>
+        </p:spPr>
+        <p:txBody>
+          <a:bodyPr wrap="square" lIns="0" tIns="0" rIns="0" bIns="0" rtlCol="0" anchor="t"/>
+          <a:lstStyle/>
+          <a:p>
+            <a:pPr indent="0" marL="0">
+              <a:lnSpc>
+                <a:spcPct val="125000"/>
+              </a:lnSpc>
+              <a:buNone/>
+            </a:pPr>
+            <a:r>
+              <a:rPr lang="en-US" sz="1150" dirty="0">
+                <a:solidFill>
+                  <a:srgbClr val="222222"/>
+                </a:solidFill>
+                <a:latin typeface="Calibri" pitchFamily="34" charset="0"/>
+                <a:ea typeface="Calibri" pitchFamily="34" charset="-122"/>
+                <a:cs typeface="Calibri" pitchFamily="34" charset="-120"/>
+              </a:rPr>
+              <a:t>確認メッセージで「OK」を押す</a:t>
+            </a:r>
+            <a:endParaRPr lang="en-US" sz="1150" dirty="0"/>
+          </a:p>
+        </p:txBody>
+      </p:sp>
+      <p:sp>
+        <p:nvSpPr>
+          <p:cNvPr id="14" name="Text 12"/>
+          <p:cNvSpPr txBox="1"/>
+          <p:nvPr/>
+        </p:nvSpPr>
+        <p:spPr>
+          <a:xfrm>
+            <a:off x="566928" y="3146933"/>
+            <a:ext cx="6428232" cy="257429"/>
+          </a:xfrm>
+          <a:prstGeom prst="rect">
+            <a:avLst/>
+          </a:prstGeom>
+          <a:noFill/>
+          <a:ln/>
+        </p:spPr>
+        <p:txBody>
+          <a:bodyPr wrap="square" lIns="0" tIns="0" rIns="0" bIns="0" rtlCol="0" anchor="t"/>
+          <a:lstStyle/>
+          <a:p>
+            <a:pPr indent="0" marL="0">
+              <a:lnSpc>
+                <a:spcPct val="125000"/>
+              </a:lnSpc>
+              <a:buNone/>
+            </a:pPr>
+            <a:r>
+              <a:rPr lang="en-US" sz="1100" dirty="0">
+                <a:solidFill>
+                  <a:srgbClr val="222222"/>
+                </a:solidFill>
+                <a:latin typeface="Calibri" pitchFamily="34" charset="0"/>
+                <a:ea typeface="Calibri" pitchFamily="34" charset="-122"/>
+                <a:cs typeface="Calibri" pitchFamily="34" charset="-120"/>
+              </a:rPr>
+              <a:t>削除しても、</a:t>
+            </a:r>
+            <a:pPr indent="0" marL="0">
+              <a:lnSpc>
+                <a:spcPct val="125000"/>
+              </a:lnSpc>
+              <a:buNone/>
+            </a:pPr>
+            <a:r>
+              <a:rPr lang="en-US" sz="1100" b="1" dirty="0">
+                <a:solidFill>
+                  <a:srgbClr val="222222"/>
+                </a:solidFill>
+                <a:latin typeface="Calibri" pitchFamily="34" charset="0"/>
+                <a:ea typeface="Calibri" pitchFamily="34" charset="-122"/>
+                <a:cs typeface="Calibri" pitchFamily="34" charset="-120"/>
+              </a:rPr>
+              <a:t>回答データ（個人情報を含まないもの）は残ります</a:t>
+            </a:r>
+            <a:pPr indent="0" marL="0">
+              <a:lnSpc>
+                <a:spcPct val="125000"/>
+              </a:lnSpc>
+              <a:buNone/>
+            </a:pPr>
+            <a:r>
+              <a:rPr lang="en-US" sz="1100" dirty="0">
+                <a:solidFill>
+                  <a:srgbClr val="222222"/>
+                </a:solidFill>
+                <a:latin typeface="Calibri" pitchFamily="34" charset="0"/>
+                <a:ea typeface="Calibri" pitchFamily="34" charset="-122"/>
+                <a:cs typeface="Calibri" pitchFamily="34" charset="-120"/>
+              </a:rPr>
+              <a:t>。</a:t>
+            </a:r>
+            <a:endParaRPr lang="en-US" sz="1100" dirty="0"/>
+          </a:p>
+        </p:txBody>
+      </p:sp>
+      <p:sp>
+        <p:nvSpPr>
+          <p:cNvPr id="15" name="Shape 13"/>
+          <p:cNvSpPr/>
+          <p:nvPr/>
+        </p:nvSpPr>
+        <p:spPr>
+          <a:xfrm>
+            <a:off x="566928" y="3440938"/>
+            <a:ext cx="6428232" cy="624459"/>
+          </a:xfrm>
+          <a:prstGeom prst="roundRect">
+            <a:avLst>
+              <a:gd name="adj" fmla="val 8786"/>
+            </a:avLst>
+          </a:prstGeom>
+          <a:solidFill>
+            <a:srgbClr val="FDF0E6"/>
+          </a:solidFill>
+          <a:ln w="9525">
+            <a:solidFill>
+              <a:srgbClr val="E08A3C"/>
+            </a:solidFill>
+            <a:prstDash val="solid"/>
+          </a:ln>
+        </p:spPr>
+      </p:sp>
+      <p:sp>
+        <p:nvSpPr>
+          <p:cNvPr id="16" name="Text 14"/>
+          <p:cNvSpPr txBox="1"/>
+          <p:nvPr/>
+        </p:nvSpPr>
+        <p:spPr>
+          <a:xfrm>
+            <a:off x="658368" y="3532378"/>
+            <a:ext cx="237744" cy="237744"/>
+          </a:xfrm>
+          <a:prstGeom prst="rect">
+            <a:avLst/>
+          </a:prstGeom>
+          <a:noFill/>
+          <a:ln/>
+        </p:spPr>
+        <p:txBody>
+          <a:bodyPr wrap="square" lIns="0" tIns="0" rIns="0" bIns="0" rtlCol="0" anchor="ctr"/>
+          <a:lstStyle/>
+          <a:p>
+            <a:pPr algn="ctr" indent="0" marL="0">
+              <a:buNone/>
+            </a:pPr>
+            <a:r>
+              <a:rPr lang="en-US" sz="1200" b="1" dirty="0">
+                <a:solidFill>
+                  <a:srgbClr val="C25A17"/>
+                </a:solidFill>
+                <a:latin typeface="Calibri" pitchFamily="34" charset="0"/>
+                <a:ea typeface="Calibri" pitchFamily="34" charset="-122"/>
+                <a:cs typeface="Calibri" pitchFamily="34" charset="-120"/>
+              </a:rPr>
+              <a:t>！</a:t>
+            </a:r>
+            <a:endParaRPr lang="en-US" sz="1200" dirty="0"/>
+          </a:p>
+        </p:txBody>
+      </p:sp>
+      <p:sp>
+        <p:nvSpPr>
+          <p:cNvPr id="17" name="Text 15"/>
+          <p:cNvSpPr txBox="1"/>
+          <p:nvPr/>
+        </p:nvSpPr>
+        <p:spPr>
+          <a:xfrm>
+            <a:off x="950976" y="3550666"/>
+            <a:ext cx="5925312" cy="441579"/>
+          </a:xfrm>
+          <a:prstGeom prst="rect">
+            <a:avLst/>
+          </a:prstGeom>
+          <a:noFill/>
+          <a:ln/>
+        </p:spPr>
+        <p:txBody>
+          <a:bodyPr wrap="square" lIns="0" tIns="0" rIns="0" bIns="0" rtlCol="0" anchor="t"/>
+          <a:lstStyle/>
+          <a:p>
+            <a:pPr indent="0" marL="0">
+              <a:lnSpc>
+                <a:spcPct val="120000"/>
+              </a:lnSpc>
+              <a:buNone/>
+            </a:pPr>
+            <a:r>
+              <a:rPr lang="en-US" sz="1050" dirty="0">
+                <a:solidFill>
+                  <a:srgbClr val="222222"/>
+                </a:solidFill>
+                <a:latin typeface="Calibri" pitchFamily="34" charset="0"/>
+                <a:ea typeface="Calibri" pitchFamily="34" charset="-122"/>
+                <a:cs typeface="Calibri" pitchFamily="34" charset="-120"/>
+              </a:rPr>
+              <a:t>削除すると、未送信ぶんの案内メールは送れなくなります。</a:t>
+            </a:r>
+            <a:pPr indent="0" marL="0">
+              <a:lnSpc>
+                <a:spcPct val="120000"/>
+              </a:lnSpc>
+              <a:buNone/>
+            </a:pPr>
+            <a:r>
+              <a:rPr lang="en-US" sz="1050" b="1" dirty="0">
+                <a:solidFill>
+                  <a:srgbClr val="222222"/>
+                </a:solidFill>
+                <a:latin typeface="Calibri" pitchFamily="34" charset="0"/>
+                <a:ea typeface="Calibri" pitchFamily="34" charset="-122"/>
+                <a:cs typeface="Calibri" pitchFamily="34" charset="-120"/>
+              </a:rPr>
+              <a:t>送信と集計が完全に終わってから</a:t>
+            </a:r>
+            <a:pPr indent="0" marL="0">
+              <a:lnSpc>
+                <a:spcPct val="120000"/>
+              </a:lnSpc>
+              <a:buNone/>
+            </a:pPr>
+            <a:r>
+              <a:rPr lang="en-US" sz="1050" dirty="0">
+                <a:solidFill>
+                  <a:srgbClr val="222222"/>
+                </a:solidFill>
+                <a:latin typeface="Calibri" pitchFamily="34" charset="0"/>
+                <a:ea typeface="Calibri" pitchFamily="34" charset="-122"/>
+                <a:cs typeface="Calibri" pitchFamily="34" charset="-120"/>
+              </a:rPr>
+              <a:t>実行してください。</a:t>
+            </a:r>
+            <a:endParaRPr lang="en-US" sz="1050" dirty="0"/>
+          </a:p>
+        </p:txBody>
+      </p:sp>
+      <p:sp>
+        <p:nvSpPr>
+          <p:cNvPr id="18" name="Shape 16"/>
+          <p:cNvSpPr/>
+          <p:nvPr/>
+        </p:nvSpPr>
+        <p:spPr>
+          <a:xfrm>
+            <a:off x="566928" y="4138549"/>
+            <a:ext cx="6428232" cy="624459"/>
+          </a:xfrm>
+          <a:prstGeom prst="roundRect">
+            <a:avLst>
+              <a:gd name="adj" fmla="val 8786"/>
+            </a:avLst>
+          </a:prstGeom>
+          <a:solidFill>
+            <a:srgbClr val="E8ECF8"/>
+          </a:solidFill>
+          <a:ln w="9525">
+            <a:solidFill>
+              <a:srgbClr val="1E2761"/>
+            </a:solidFill>
+            <a:prstDash val="solid"/>
+          </a:ln>
+        </p:spPr>
+      </p:sp>
+      <p:sp>
+        <p:nvSpPr>
+          <p:cNvPr id="19" name="Text 17"/>
+          <p:cNvSpPr txBox="1"/>
+          <p:nvPr/>
+        </p:nvSpPr>
+        <p:spPr>
+          <a:xfrm>
+            <a:off x="658368" y="4229989"/>
+            <a:ext cx="237744" cy="237744"/>
+          </a:xfrm>
+          <a:prstGeom prst="rect">
+            <a:avLst/>
+          </a:prstGeom>
+          <a:noFill/>
+          <a:ln/>
+        </p:spPr>
+        <p:txBody>
+          <a:bodyPr wrap="square" lIns="0" tIns="0" rIns="0" bIns="0" rtlCol="0" anchor="ctr"/>
+          <a:lstStyle/>
+          <a:p>
+            <a:pPr algn="ctr" indent="0" marL="0">
+              <a:buNone/>
+            </a:pPr>
+            <a:r>
+              <a:rPr lang="en-US" sz="1200" b="1" dirty="0">
+                <a:solidFill>
+                  <a:srgbClr val="1E2761"/>
+                </a:solidFill>
+                <a:latin typeface="Calibri" pitchFamily="34" charset="0"/>
+                <a:ea typeface="Calibri" pitchFamily="34" charset="-122"/>
+                <a:cs typeface="Calibri" pitchFamily="34" charset="-120"/>
+              </a:rPr>
+              <a:t>i</a:t>
+            </a:r>
+            <a:endParaRPr lang="en-US" sz="1200" dirty="0"/>
+          </a:p>
+        </p:txBody>
+      </p:sp>
+      <p:sp>
+        <p:nvSpPr>
+          <p:cNvPr id="20" name="Text 18"/>
+          <p:cNvSpPr txBox="1"/>
+          <p:nvPr/>
+        </p:nvSpPr>
+        <p:spPr>
+          <a:xfrm>
+            <a:off x="950976" y="4248277"/>
+            <a:ext cx="5925312" cy="441579"/>
+          </a:xfrm>
+          <a:prstGeom prst="rect">
+            <a:avLst/>
+          </a:prstGeom>
+          <a:noFill/>
+          <a:ln/>
+        </p:spPr>
+        <p:txBody>
+          <a:bodyPr wrap="square" lIns="0" tIns="0" rIns="0" bIns="0" rtlCol="0" anchor="t"/>
+          <a:lstStyle/>
+          <a:p>
+            <a:pPr indent="0" marL="0">
+              <a:lnSpc>
+                <a:spcPct val="120000"/>
+              </a:lnSpc>
+              <a:buNone/>
+            </a:pPr>
+            <a:r>
+              <a:rPr lang="en-US" sz="1050" dirty="0">
+                <a:solidFill>
+                  <a:srgbClr val="222222"/>
+                </a:solidFill>
+                <a:latin typeface="Calibri" pitchFamily="34" charset="0"/>
+                <a:ea typeface="Calibri" pitchFamily="34" charset="-122"/>
+                <a:cs typeface="Calibri" pitchFamily="34" charset="-120"/>
+              </a:rPr>
+              <a:t>「氏名・住所は収集せず、メールアドレスも送付・集計後に削除する」という運用方針に沿った操作です。来場者にもその旨を案内しています。</a:t>
+            </a:r>
+            <a:endParaRPr lang="en-US" sz="1050" dirty="0"/>
+          </a:p>
+        </p:txBody>
+      </p:sp>
+      <p:pic>
+        <p:nvPicPr>
+          <p:cNvPr id="21" name="Image 0" descr="C:\Users\sato\Desktop\enque\docs\images\o-purge.png">    </p:cNvPr>
+          <p:cNvPicPr>
+            <a:picLocks noChangeAspect="1"/>
+          </p:cNvPicPr>
+          <p:nvPr/>
+        </p:nvPicPr>
+        <p:blipFill>
+          <a:blip r:embed="rId1"/>
+          <a:stretch>
+            <a:fillRect/>
+          </a:stretch>
+        </p:blipFill>
+        <p:spPr>
+          <a:xfrm>
+            <a:off x="936779" y="4836160"/>
+            <a:ext cx="5688531" cy="3474720"/>
+          </a:xfrm>
+          <a:prstGeom prst="rect">
+            <a:avLst/>
+          </a:prstGeom>
+        </p:spPr>
+      </p:pic>
+      <p:sp>
+        <p:nvSpPr>
+          <p:cNvPr id="22" name="Text 19"/>
+          <p:cNvSpPr txBox="1"/>
+          <p:nvPr/>
+        </p:nvSpPr>
+        <p:spPr>
+          <a:xfrm>
+            <a:off x="566928" y="8365744"/>
+            <a:ext cx="6428232" cy="274320"/>
+          </a:xfrm>
+          <a:prstGeom prst="rect">
+            <a:avLst/>
+          </a:prstGeom>
+          <a:noFill/>
+          <a:ln/>
+        </p:spPr>
+        <p:txBody>
+          <a:bodyPr wrap="square" lIns="0" tIns="0" rIns="0" bIns="0" rtlCol="0" anchor="ctr"/>
+          <a:lstStyle/>
+          <a:p>
+            <a:pPr algn="ctr" indent="0" marL="0">
+              <a:buNone/>
+            </a:pPr>
+            <a:r>
+              <a:rPr lang="en-US" sz="950" dirty="0">
+                <a:solidFill>
+                  <a:srgbClr val="6B6B6B"/>
+                </a:solidFill>
+                <a:latin typeface="Calibri" pitchFamily="34" charset="0"/>
+                <a:ea typeface="Calibri" pitchFamily="34" charset="-122"/>
+                <a:cs typeface="Calibri" pitchFamily="34" charset="-120"/>
+              </a:rPr>
+              <a:t>「メールアドレスを削除する」ボタンの周辺（説明文が見えるもの）。</a:t>
+            </a:r>
+            <a:endParaRPr lang="en-US" sz="950" dirty="0"/>
+          </a:p>
+        </p:txBody>
+      </p:sp>
+      <p:sp>
+        <p:nvSpPr>
+          <p:cNvPr id="23" name="Text 20"/>
+          <p:cNvSpPr txBox="1"/>
+          <p:nvPr/>
+        </p:nvSpPr>
+        <p:spPr>
+          <a:xfrm>
+            <a:off x="566928" y="10186416"/>
+            <a:ext cx="6428232" cy="228600"/>
+          </a:xfrm>
+          <a:prstGeom prst="rect">
+            <a:avLst/>
+          </a:prstGeom>
+          <a:noFill/>
+          <a:ln/>
+        </p:spPr>
+        <p:txBody>
+          <a:bodyPr wrap="square" lIns="0" tIns="0" rIns="0" bIns="0" rtlCol="0" anchor="ctr"/>
+          <a:lstStyle/>
+          <a:p>
+            <a:pPr algn="r" indent="0" marL="0">
+              <a:buNone/>
+            </a:pPr>
+            <a:r>
+              <a:rPr lang="en-US" sz="900" dirty="0">
+                <a:solidFill>
+                  <a:srgbClr val="6B6B6B"/>
+                </a:solidFill>
+                <a:latin typeface="Calibri" pitchFamily="34" charset="0"/>
+                <a:ea typeface="Calibri" pitchFamily="34" charset="-122"/>
+                <a:cs typeface="Calibri" pitchFamily="34" charset="-120"/>
+              </a:rPr>
+              <a:t>主催者向け　31</a:t>
+            </a:r>
+            <a:endParaRPr lang="en-US" sz="900" dirty="0"/>
+          </a:p>
+        </p:txBody>
+      </p:sp>
+    </p:spTree>
+  </p:cSld>
+  <p:clrMapOvr>
+    <a:masterClrMapping/>
+  </p:clrMapOvr>
+</p:sld>
+</file>
+
+<file path=ppt/slides/slide32.xml><?xml version="1.0" encoding="utf-8"?>
+<p:sld xmlns:a="http://schemas.openxmlformats.org/drawingml/2006/main" xmlns:r="http://schemas.openxmlformats.org/officeDocument/2006/relationships" xmlns:p="http://schemas.openxmlformats.org/presentationml/2006/main">
+  <p:cSld name="Slide 32">
+    <p:bg>
+      <p:bgPr>
+        <a:solidFill>
+          <a:srgbClr val="FFFFFF"/>
+        </a:solidFill>
+      </p:bgPr>
+    </p:bg>
+    <p:spTree>
+      <p:nvGrpSpPr>
+        <p:cNvPr id="1" name=""/>
+        <p:cNvGrpSpPr/>
+        <p:nvPr/>
+      </p:nvGrpSpPr>
+      <p:grpSpPr>
+        <a:xfrm>
+          <a:off x="0" y="0"/>
+          <a:ext cx="0" cy="0"/>
+          <a:chOff x="0" y="0"/>
+          <a:chExt cx="0" cy="0"/>
+        </a:xfrm>
+      </p:grpSpPr>
+      <p:sp>
+        <p:nvSpPr>
+          <p:cNvPr id="2" name="Text 0"/>
+          <p:cNvSpPr txBox="1"/>
+          <p:nvPr/>
+        </p:nvSpPr>
+        <p:spPr>
+          <a:xfrm>
+            <a:off x="566928" y="457200"/>
+            <a:ext cx="6428232" cy="237744"/>
+          </a:xfrm>
+          <a:prstGeom prst="rect">
+            <a:avLst/>
+          </a:prstGeom>
+          <a:noFill/>
+          <a:ln/>
+        </p:spPr>
+        <p:txBody>
+          <a:bodyPr wrap="square" lIns="0" tIns="0" rIns="0" bIns="0" rtlCol="0" anchor="ctr"/>
+          <a:lstStyle/>
+          <a:p>
+            <a:pPr indent="0" marL="0">
+              <a:buNone/>
+            </a:pPr>
+            <a:r>
+              <a:rPr lang="en-US" sz="1000" b="1" dirty="0">
+                <a:solidFill>
+                  <a:srgbClr val="1E2761"/>
+                </a:solidFill>
+                <a:latin typeface="Calibri" pitchFamily="34" charset="0"/>
+                <a:ea typeface="Calibri" pitchFamily="34" charset="-122"/>
+                <a:cs typeface="Calibri" pitchFamily="34" charset="-120"/>
+              </a:rPr>
+              <a:t>主催者マニュアル</a:t>
+            </a:r>
+            <a:endParaRPr lang="en-US" sz="1000" dirty="0"/>
+          </a:p>
+        </p:txBody>
+      </p:sp>
+      <p:sp>
+        <p:nvSpPr>
+          <p:cNvPr id="3" name="Text 1"/>
+          <p:cNvSpPr txBox="1"/>
+          <p:nvPr/>
+        </p:nvSpPr>
+        <p:spPr>
+          <a:xfrm>
+            <a:off x="566928" y="713232"/>
+            <a:ext cx="6428232" cy="640080"/>
+          </a:xfrm>
+          <a:prstGeom prst="rect">
+            <a:avLst/>
+          </a:prstGeom>
+          <a:noFill/>
+          <a:ln/>
+        </p:spPr>
+        <p:txBody>
+          <a:bodyPr wrap="square" lIns="0" tIns="0" rIns="0" bIns="0" rtlCol="0" anchor="t"/>
+          <a:lstStyle/>
+          <a:p>
+            <a:pPr indent="0" marL="0">
+              <a:buNone/>
+            </a:pPr>
+            <a:r>
+              <a:rPr lang="en-US" sz="2200" b="1" dirty="0">
+                <a:solidFill>
+                  <a:srgbClr val="222222"/>
+                </a:solidFill>
+                <a:latin typeface="Calibri" pitchFamily="34" charset="0"/>
+                <a:ea typeface="Calibri" pitchFamily="34" charset="-122"/>
+                <a:cs typeface="Calibri" pitchFamily="34" charset="-120"/>
+              </a:rPr>
+              <a:t>次のイベントに向けて（データの整理）</a:t>
+            </a:r>
+            <a:endParaRPr lang="en-US" sz="2200" dirty="0"/>
+          </a:p>
+        </p:txBody>
+      </p:sp>
+      <p:sp>
+        <p:nvSpPr>
+          <p:cNvPr id="4" name="Text 2"/>
+          <p:cNvSpPr txBox="1"/>
+          <p:nvPr/>
+        </p:nvSpPr>
+        <p:spPr>
+          <a:xfrm>
+            <a:off x="566928" y="1481328"/>
+            <a:ext cx="6428232" cy="459994"/>
+          </a:xfrm>
+          <a:prstGeom prst="rect">
+            <a:avLst/>
+          </a:prstGeom>
+          <a:noFill/>
+          <a:ln/>
+        </p:spPr>
+        <p:txBody>
+          <a:bodyPr wrap="square" lIns="0" tIns="0" rIns="0" bIns="0" rtlCol="0" anchor="t"/>
+          <a:lstStyle/>
+          <a:p>
+            <a:pPr indent="0" marL="0">
+              <a:lnSpc>
+                <a:spcPct val="125000"/>
+              </a:lnSpc>
+              <a:buNone/>
+            </a:pPr>
+            <a:r>
+              <a:rPr lang="en-US" sz="1100" dirty="0">
+                <a:solidFill>
+                  <a:srgbClr val="222222"/>
+                </a:solidFill>
+                <a:latin typeface="Calibri" pitchFamily="34" charset="0"/>
+                <a:ea typeface="Calibri" pitchFamily="34" charset="-122"/>
+                <a:cs typeface="Calibri" pitchFamily="34" charset="-120"/>
+              </a:rPr>
+              <a:t>サーバーで次のコマンドを実行します（事務局のPCではなく、システムが動いているサーバーでの作業です）。</a:t>
+            </a:r>
+            <a:endParaRPr lang="en-US" sz="1100" dirty="0"/>
+          </a:p>
+        </p:txBody>
+      </p:sp>
+      <p:sp>
+        <p:nvSpPr>
+          <p:cNvPr id="5" name="Text 3"/>
+          <p:cNvSpPr txBox="1"/>
+          <p:nvPr/>
+        </p:nvSpPr>
+        <p:spPr>
+          <a:xfrm>
+            <a:off x="566928" y="2087626"/>
+            <a:ext cx="6428232" cy="257810"/>
+          </a:xfrm>
+          <a:prstGeom prst="rect">
+            <a:avLst/>
+          </a:prstGeom>
+          <a:noFill/>
+          <a:ln/>
+        </p:spPr>
+        <p:txBody>
+          <a:bodyPr wrap="square" lIns="0" tIns="0" rIns="0" bIns="0" rtlCol="0" anchor="t"/>
+          <a:lstStyle/>
+          <a:p>
+            <a:pPr indent="0" marL="0">
+              <a:buNone/>
+            </a:pPr>
+            <a:r>
+              <a:rPr lang="en-US" sz="1400" b="1" dirty="0">
+                <a:solidFill>
+                  <a:srgbClr val="1E2761"/>
+                </a:solidFill>
+                <a:latin typeface="Calibri" pitchFamily="34" charset="0"/>
+                <a:ea typeface="Calibri" pitchFamily="34" charset="-122"/>
+                <a:cs typeface="Calibri" pitchFamily="34" charset="-120"/>
+              </a:rPr>
+              <a:t>テストで入れた回答だけ消したいとき</a:t>
+            </a:r>
+            <a:endParaRPr lang="en-US" sz="1400" dirty="0"/>
+          </a:p>
+        </p:txBody>
+      </p:sp>
+      <p:sp>
+        <p:nvSpPr>
+          <p:cNvPr id="6" name="Text 4"/>
+          <p:cNvSpPr txBox="1"/>
+          <p:nvPr/>
+        </p:nvSpPr>
+        <p:spPr>
+          <a:xfrm>
+            <a:off x="566928" y="2418588"/>
+            <a:ext cx="6428232" cy="257429"/>
+          </a:xfrm>
+          <a:prstGeom prst="rect">
+            <a:avLst/>
+          </a:prstGeom>
+          <a:noFill/>
+          <a:ln/>
+        </p:spPr>
+        <p:txBody>
+          <a:bodyPr wrap="square" lIns="0" tIns="0" rIns="0" bIns="0" rtlCol="0" anchor="t"/>
+          <a:lstStyle/>
+          <a:p>
+            <a:pPr indent="0" marL="0">
+              <a:lnSpc>
+                <a:spcPct val="125000"/>
+              </a:lnSpc>
+              <a:buNone/>
+            </a:pPr>
+            <a:r>
+              <a:rPr lang="en-US" sz="1100" dirty="0">
+                <a:solidFill>
+                  <a:srgbClr val="222222"/>
+                </a:solidFill>
+                <a:latin typeface="Calibri" pitchFamily="34" charset="0"/>
+                <a:ea typeface="Calibri" pitchFamily="34" charset="-122"/>
+                <a:cs typeface="Calibri" pitchFamily="34" charset="-120"/>
+              </a:rPr>
+              <a:t>まず件数を確認し、問題なければ実行します。</a:t>
+            </a:r>
+            <a:endParaRPr lang="en-US" sz="1100" dirty="0"/>
+          </a:p>
+        </p:txBody>
+      </p:sp>
+      <p:sp>
+        <p:nvSpPr>
+          <p:cNvPr id="7" name="Text 5"/>
+          <p:cNvSpPr txBox="1"/>
+          <p:nvPr/>
+        </p:nvSpPr>
+        <p:spPr>
+          <a:xfrm>
+            <a:off x="713232" y="2712593"/>
+            <a:ext cx="6281928" cy="257429"/>
+          </a:xfrm>
+          <a:prstGeom prst="rect">
+            <a:avLst/>
+          </a:prstGeom>
+          <a:noFill/>
+          <a:ln/>
+        </p:spPr>
+        <p:txBody>
+          <a:bodyPr wrap="square" lIns="0" tIns="0" rIns="0" bIns="0" rtlCol="0" anchor="t"/>
+          <a:lstStyle/>
+          <a:p>
+            <a:pPr marL="342900" indent="-342900">
+              <a:lnSpc>
+                <a:spcPct val="125000"/>
+              </a:lnSpc>
+              <a:buSzPct val="100000"/>
+              <a:buChar char="●"/>
+            </a:pPr>
+            <a:r>
+              <a:rPr lang="en-US" sz="1100" dirty="0">
+                <a:solidFill>
+                  <a:srgbClr val="222222"/>
+                </a:solidFill>
+                <a:latin typeface="Calibri" pitchFamily="34" charset="0"/>
+                <a:ea typeface="Calibri" pitchFamily="34" charset="-122"/>
+                <a:cs typeface="Calibri" pitchFamily="34" charset="-120"/>
+              </a:rPr>
+              <a:t>確認：</a:t>
+            </a:r>
+            <a:pPr indent="0" marL="0">
+              <a:lnSpc>
+                <a:spcPct val="125000"/>
+              </a:lnSpc>
+              <a:buNone/>
+            </a:pPr>
+            <a:r>
+              <a:rPr lang="en-US" sz="1045" dirty="0">
+                <a:solidFill>
+                  <a:srgbClr val="222222"/>
+                </a:solidFill>
+                <a:latin typeface="Courier New" pitchFamily="34" charset="0"/>
+                <a:ea typeface="Courier New" pitchFamily="34" charset="-122"/>
+                <a:cs typeface="Courier New" pitchFamily="34" charset="-120"/>
+              </a:rPr>
+              <a:t>bin/reset.sh --responses --dry-run</a:t>
+            </a:r>
+            <a:endParaRPr lang="en-US" sz="1100" dirty="0"/>
+          </a:p>
+        </p:txBody>
+      </p:sp>
+      <p:sp>
+        <p:nvSpPr>
+          <p:cNvPr id="8" name="Text 6"/>
+          <p:cNvSpPr txBox="1"/>
+          <p:nvPr/>
+        </p:nvSpPr>
+        <p:spPr>
+          <a:xfrm>
+            <a:off x="713232" y="2988310"/>
+            <a:ext cx="6281928" cy="257429"/>
+          </a:xfrm>
+          <a:prstGeom prst="rect">
+            <a:avLst/>
+          </a:prstGeom>
+          <a:noFill/>
+          <a:ln/>
+        </p:spPr>
+        <p:txBody>
+          <a:bodyPr wrap="square" lIns="0" tIns="0" rIns="0" bIns="0" rtlCol="0" anchor="t"/>
+          <a:lstStyle/>
+          <a:p>
+            <a:pPr marL="342900" indent="-342900">
+              <a:lnSpc>
+                <a:spcPct val="125000"/>
+              </a:lnSpc>
+              <a:buSzPct val="100000"/>
+              <a:buChar char="●"/>
+            </a:pPr>
+            <a:r>
+              <a:rPr lang="en-US" sz="1100" dirty="0">
+                <a:solidFill>
+                  <a:srgbClr val="222222"/>
+                </a:solidFill>
+                <a:latin typeface="Calibri" pitchFamily="34" charset="0"/>
+                <a:ea typeface="Calibri" pitchFamily="34" charset="-122"/>
+                <a:cs typeface="Calibri" pitchFamily="34" charset="-120"/>
+              </a:rPr>
+              <a:t>実行：</a:t>
+            </a:r>
+            <a:pPr indent="0" marL="0">
+              <a:lnSpc>
+                <a:spcPct val="125000"/>
+              </a:lnSpc>
+              <a:buNone/>
+            </a:pPr>
+            <a:r>
+              <a:rPr lang="en-US" sz="1045" dirty="0">
+                <a:solidFill>
+                  <a:srgbClr val="222222"/>
+                </a:solidFill>
+                <a:latin typeface="Courier New" pitchFamily="34" charset="0"/>
+                <a:ea typeface="Courier New" pitchFamily="34" charset="-122"/>
+                <a:cs typeface="Courier New" pitchFamily="34" charset="-120"/>
+              </a:rPr>
+              <a:t>bin/reset.sh --responses --force</a:t>
+            </a:r>
+            <a:endParaRPr lang="en-US" sz="1100" dirty="0"/>
+          </a:p>
+        </p:txBody>
+      </p:sp>
+      <p:sp>
+        <p:nvSpPr>
+          <p:cNvPr id="9" name="Text 7"/>
+          <p:cNvSpPr txBox="1"/>
+          <p:nvPr/>
+        </p:nvSpPr>
+        <p:spPr>
+          <a:xfrm>
+            <a:off x="566928" y="3264027"/>
+            <a:ext cx="6428232" cy="257429"/>
+          </a:xfrm>
+          <a:prstGeom prst="rect">
+            <a:avLst/>
+          </a:prstGeom>
+          <a:noFill/>
+          <a:ln/>
+        </p:spPr>
+        <p:txBody>
+          <a:bodyPr wrap="square" lIns="0" tIns="0" rIns="0" bIns="0" rtlCol="0" anchor="t"/>
+          <a:lstStyle/>
+          <a:p>
+            <a:pPr indent="0" marL="0">
+              <a:lnSpc>
+                <a:spcPct val="125000"/>
+              </a:lnSpc>
+              <a:buNone/>
+            </a:pPr>
+            <a:r>
+              <a:rPr lang="en-US" sz="1100" dirty="0">
+                <a:solidFill>
+                  <a:srgbClr val="222222"/>
+                </a:solidFill>
+                <a:latin typeface="Calibri" pitchFamily="34" charset="0"/>
+                <a:ea typeface="Calibri" pitchFamily="34" charset="-122"/>
+                <a:cs typeface="Calibri" pitchFamily="34" charset="-120"/>
+              </a:rPr>
+              <a:t>イベント・企業・設問・景品・壁紙・アカウントは残ります。</a:t>
+            </a:r>
+            <a:endParaRPr lang="en-US" sz="1100" dirty="0"/>
+          </a:p>
+        </p:txBody>
+      </p:sp>
+      <p:sp>
+        <p:nvSpPr>
+          <p:cNvPr id="10" name="Text 8"/>
+          <p:cNvSpPr txBox="1"/>
+          <p:nvPr/>
+        </p:nvSpPr>
+        <p:spPr>
+          <a:xfrm>
+            <a:off x="566928" y="3667760"/>
+            <a:ext cx="6428232" cy="257810"/>
+          </a:xfrm>
+          <a:prstGeom prst="rect">
+            <a:avLst/>
+          </a:prstGeom>
+          <a:noFill/>
+          <a:ln/>
+        </p:spPr>
+        <p:txBody>
+          <a:bodyPr wrap="square" lIns="0" tIns="0" rIns="0" bIns="0" rtlCol="0" anchor="t"/>
+          <a:lstStyle/>
+          <a:p>
+            <a:pPr indent="0" marL="0">
+              <a:buNone/>
+            </a:pPr>
+            <a:r>
+              <a:rPr lang="en-US" sz="1400" b="1" dirty="0">
+                <a:solidFill>
+                  <a:srgbClr val="1E2761"/>
+                </a:solidFill>
+                <a:latin typeface="Calibri" pitchFamily="34" charset="0"/>
+                <a:ea typeface="Calibri" pitchFamily="34" charset="-122"/>
+                <a:cs typeface="Calibri" pitchFamily="34" charset="-120"/>
+              </a:rPr>
+              <a:t>イベントごと作り直したいとき</a:t>
+            </a:r>
+            <a:endParaRPr lang="en-US" sz="1400" dirty="0"/>
+          </a:p>
+        </p:txBody>
+      </p:sp>
+      <p:sp>
+        <p:nvSpPr>
+          <p:cNvPr id="11" name="Text 9"/>
+          <p:cNvSpPr txBox="1"/>
+          <p:nvPr/>
+        </p:nvSpPr>
+        <p:spPr>
+          <a:xfrm>
+            <a:off x="713232" y="3998722"/>
+            <a:ext cx="6281928" cy="257429"/>
+          </a:xfrm>
+          <a:prstGeom prst="rect">
+            <a:avLst/>
+          </a:prstGeom>
+          <a:noFill/>
+          <a:ln/>
+        </p:spPr>
+        <p:txBody>
+          <a:bodyPr wrap="square" lIns="0" tIns="0" rIns="0" bIns="0" rtlCol="0" anchor="t"/>
+          <a:lstStyle/>
+          <a:p>
+            <a:pPr marL="342900" indent="-342900">
+              <a:lnSpc>
+                <a:spcPct val="125000"/>
+              </a:lnSpc>
+              <a:buSzPct val="100000"/>
+              <a:buChar char="●"/>
+            </a:pPr>
+            <a:r>
+              <a:rPr lang="en-US" sz="1100" dirty="0">
+                <a:solidFill>
+                  <a:srgbClr val="222222"/>
+                </a:solidFill>
+                <a:latin typeface="Calibri" pitchFamily="34" charset="0"/>
+                <a:ea typeface="Calibri" pitchFamily="34" charset="-122"/>
+                <a:cs typeface="Calibri" pitchFamily="34" charset="-120"/>
+              </a:rPr>
+              <a:t>実行：</a:t>
+            </a:r>
+            <a:pPr indent="0" marL="0">
+              <a:lnSpc>
+                <a:spcPct val="125000"/>
+              </a:lnSpc>
+              <a:buNone/>
+            </a:pPr>
+            <a:r>
+              <a:rPr lang="en-US" sz="1045" dirty="0">
+                <a:solidFill>
+                  <a:srgbClr val="222222"/>
+                </a:solidFill>
+                <a:latin typeface="Courier New" pitchFamily="34" charset="0"/>
+                <a:ea typeface="Courier New" pitchFamily="34" charset="-122"/>
+                <a:cs typeface="Courier New" pitchFamily="34" charset="-120"/>
+              </a:rPr>
+              <a:t>bin/reset.sh --all --force</a:t>
+            </a:r>
+            <a:endParaRPr lang="en-US" sz="1100" dirty="0"/>
+          </a:p>
+        </p:txBody>
+      </p:sp>
+      <p:sp>
+        <p:nvSpPr>
+          <p:cNvPr id="12" name="Shape 10"/>
+          <p:cNvSpPr/>
+          <p:nvPr/>
+        </p:nvSpPr>
+        <p:spPr>
+          <a:xfrm>
+            <a:off x="566928" y="4274439"/>
+            <a:ext cx="6428232" cy="817817"/>
+          </a:xfrm>
+          <a:prstGeom prst="roundRect">
+            <a:avLst>
+              <a:gd name="adj" fmla="val 6709"/>
+            </a:avLst>
+          </a:prstGeom>
+          <a:solidFill>
+            <a:srgbClr val="FDF0E6"/>
+          </a:solidFill>
+          <a:ln w="9525">
+            <a:solidFill>
+              <a:srgbClr val="E08A3C"/>
+            </a:solidFill>
+            <a:prstDash val="solid"/>
+          </a:ln>
+        </p:spPr>
+      </p:sp>
+      <p:sp>
+        <p:nvSpPr>
+          <p:cNvPr id="13" name="Text 11"/>
+          <p:cNvSpPr txBox="1"/>
+          <p:nvPr/>
+        </p:nvSpPr>
+        <p:spPr>
+          <a:xfrm>
+            <a:off x="658368" y="4365879"/>
+            <a:ext cx="237744" cy="237744"/>
+          </a:xfrm>
+          <a:prstGeom prst="rect">
+            <a:avLst/>
+          </a:prstGeom>
+          <a:noFill/>
+          <a:ln/>
+        </p:spPr>
+        <p:txBody>
+          <a:bodyPr wrap="square" lIns="0" tIns="0" rIns="0" bIns="0" rtlCol="0" anchor="ctr"/>
+          <a:lstStyle/>
+          <a:p>
+            <a:pPr algn="ctr" indent="0" marL="0">
+              <a:buNone/>
+            </a:pPr>
+            <a:r>
+              <a:rPr lang="en-US" sz="1200" b="1" dirty="0">
+                <a:solidFill>
+                  <a:srgbClr val="C25A17"/>
+                </a:solidFill>
+                <a:latin typeface="Calibri" pitchFamily="34" charset="0"/>
+                <a:ea typeface="Calibri" pitchFamily="34" charset="-122"/>
+                <a:cs typeface="Calibri" pitchFamily="34" charset="-120"/>
+              </a:rPr>
+              <a:t>！</a:t>
+            </a:r>
+            <a:endParaRPr lang="en-US" sz="1200" dirty="0"/>
+          </a:p>
+        </p:txBody>
+      </p:sp>
+      <p:sp>
+        <p:nvSpPr>
+          <p:cNvPr id="14" name="Text 12"/>
+          <p:cNvSpPr txBox="1"/>
+          <p:nvPr/>
+        </p:nvSpPr>
+        <p:spPr>
+          <a:xfrm>
+            <a:off x="950976" y="4384167"/>
+            <a:ext cx="5925312" cy="634937"/>
+          </a:xfrm>
+          <a:prstGeom prst="rect">
+            <a:avLst/>
+          </a:prstGeom>
+          <a:noFill/>
+          <a:ln/>
+        </p:spPr>
+        <p:txBody>
+          <a:bodyPr wrap="square" lIns="0" tIns="0" rIns="0" bIns="0" rtlCol="0" anchor="t"/>
+          <a:lstStyle/>
+          <a:p>
+            <a:pPr indent="0" marL="0">
+              <a:lnSpc>
+                <a:spcPct val="120000"/>
+              </a:lnSpc>
+              <a:buNone/>
+            </a:pPr>
+            <a:r>
+              <a:rPr lang="en-US" sz="1050" dirty="0">
+                <a:solidFill>
+                  <a:srgbClr val="222222"/>
+                </a:solidFill>
+                <a:latin typeface="Calibri" pitchFamily="34" charset="0"/>
+                <a:ea typeface="Calibri" pitchFamily="34" charset="-122"/>
+                <a:cs typeface="Calibri" pitchFamily="34" charset="-120"/>
+              </a:rPr>
+              <a:t>どちらも元に戻せません。実行前に自動でバックアップを取りますが、念のため大事なデータはCSVで書き出しておいてください。</a:t>
+            </a:r>
+            <a:pPr indent="0" marL="0">
+              <a:lnSpc>
+                <a:spcPct val="120000"/>
+              </a:lnSpc>
+              <a:buNone/>
+            </a:pPr>
+            <a:r>
+              <a:rPr lang="en-US" sz="1050" b="1" dirty="0">
+                <a:solidFill>
+                  <a:srgbClr val="222222"/>
+                </a:solidFill>
+                <a:latin typeface="Calibri" pitchFamily="34" charset="0"/>
+                <a:ea typeface="Calibri" pitchFamily="34" charset="-122"/>
+                <a:cs typeface="Calibri" pitchFamily="34" charset="-120"/>
+              </a:rPr>
+              <a:t>企業担当者のアカウントは企業と一緒に消えます</a:t>
+            </a:r>
+            <a:pPr indent="0" marL="0">
+              <a:lnSpc>
+                <a:spcPct val="120000"/>
+              </a:lnSpc>
+              <a:buNone/>
+            </a:pPr>
+            <a:r>
+              <a:rPr lang="en-US" sz="1050" dirty="0">
+                <a:solidFill>
+                  <a:srgbClr val="222222"/>
+                </a:solidFill>
+                <a:latin typeface="Calibri" pitchFamily="34" charset="0"/>
+                <a:ea typeface="Calibri" pitchFamily="34" charset="-122"/>
+                <a:cs typeface="Calibri" pitchFamily="34" charset="-120"/>
+              </a:rPr>
+              <a:t>（主催者・受付は残ります）。</a:t>
+            </a:r>
+            <a:endParaRPr lang="en-US" sz="1050" dirty="0"/>
+          </a:p>
+        </p:txBody>
+      </p:sp>
+      <p:sp>
+        <p:nvSpPr>
+          <p:cNvPr id="15" name="Shape 13"/>
+          <p:cNvSpPr/>
+          <p:nvPr/>
+        </p:nvSpPr>
+        <p:spPr>
+          <a:xfrm>
+            <a:off x="566928" y="5165408"/>
+            <a:ext cx="6428232" cy="431102"/>
+          </a:xfrm>
+          <a:prstGeom prst="roundRect">
+            <a:avLst>
+              <a:gd name="adj" fmla="val 12726"/>
+            </a:avLst>
+          </a:prstGeom>
+          <a:solidFill>
+            <a:srgbClr val="E8ECF8"/>
+          </a:solidFill>
+          <a:ln w="9525">
+            <a:solidFill>
+              <a:srgbClr val="1E2761"/>
+            </a:solidFill>
+            <a:prstDash val="solid"/>
+          </a:ln>
+        </p:spPr>
+      </p:sp>
+      <p:sp>
+        <p:nvSpPr>
+          <p:cNvPr id="16" name="Text 14"/>
+          <p:cNvSpPr txBox="1"/>
+          <p:nvPr/>
+        </p:nvSpPr>
+        <p:spPr>
+          <a:xfrm>
+            <a:off x="658368" y="5256848"/>
+            <a:ext cx="237744" cy="237744"/>
+          </a:xfrm>
+          <a:prstGeom prst="rect">
+            <a:avLst/>
+          </a:prstGeom>
+          <a:noFill/>
+          <a:ln/>
+        </p:spPr>
+        <p:txBody>
+          <a:bodyPr wrap="square" lIns="0" tIns="0" rIns="0" bIns="0" rtlCol="0" anchor="ctr"/>
+          <a:lstStyle/>
+          <a:p>
+            <a:pPr algn="ctr" indent="0" marL="0">
+              <a:buNone/>
+            </a:pPr>
+            <a:r>
+              <a:rPr lang="en-US" sz="1200" b="1" dirty="0">
+                <a:solidFill>
+                  <a:srgbClr val="1E2761"/>
+                </a:solidFill>
+                <a:latin typeface="Calibri" pitchFamily="34" charset="0"/>
+                <a:ea typeface="Calibri" pitchFamily="34" charset="-122"/>
+                <a:cs typeface="Calibri" pitchFamily="34" charset="-120"/>
+              </a:rPr>
+              <a:t>i</a:t>
+            </a:r>
+            <a:endParaRPr lang="en-US" sz="1200" dirty="0"/>
+          </a:p>
+        </p:txBody>
+      </p:sp>
+      <p:sp>
+        <p:nvSpPr>
+          <p:cNvPr id="17" name="Text 15"/>
+          <p:cNvSpPr txBox="1"/>
+          <p:nvPr/>
+        </p:nvSpPr>
+        <p:spPr>
+          <a:xfrm>
+            <a:off x="950976" y="5275136"/>
+            <a:ext cx="5925312" cy="248221"/>
+          </a:xfrm>
+          <a:prstGeom prst="rect">
+            <a:avLst/>
+          </a:prstGeom>
+          <a:noFill/>
+          <a:ln/>
+        </p:spPr>
+        <p:txBody>
+          <a:bodyPr wrap="square" lIns="0" tIns="0" rIns="0" bIns="0" rtlCol="0" anchor="t"/>
+          <a:lstStyle/>
+          <a:p>
+            <a:pPr indent="0" marL="0">
+              <a:lnSpc>
+                <a:spcPct val="120000"/>
+              </a:lnSpc>
+              <a:buNone/>
+            </a:pPr>
+            <a:r>
+              <a:rPr lang="en-US" sz="1050" dirty="0">
+                <a:solidFill>
+                  <a:srgbClr val="222222"/>
+                </a:solidFill>
+                <a:latin typeface="Calibri" pitchFamily="34" charset="0"/>
+                <a:ea typeface="Calibri" pitchFamily="34" charset="-122"/>
+                <a:cs typeface="Calibri" pitchFamily="34" charset="-120"/>
+              </a:rPr>
+              <a:t>実行するとデータベース名の入力を求められます。画面の指示どおりに入力してください。</a:t>
+            </a:r>
+            <a:endParaRPr lang="en-US" sz="1050" dirty="0"/>
+          </a:p>
+        </p:txBody>
+      </p:sp>
+      <p:sp>
+        <p:nvSpPr>
+          <p:cNvPr id="18" name="Text 16"/>
+          <p:cNvSpPr txBox="1"/>
+          <p:nvPr/>
+        </p:nvSpPr>
+        <p:spPr>
+          <a:xfrm>
+            <a:off x="566928" y="10186416"/>
+            <a:ext cx="6428232" cy="228600"/>
+          </a:xfrm>
+          <a:prstGeom prst="rect">
+            <a:avLst/>
+          </a:prstGeom>
+          <a:noFill/>
+          <a:ln/>
+        </p:spPr>
+        <p:txBody>
+          <a:bodyPr wrap="square" lIns="0" tIns="0" rIns="0" bIns="0" rtlCol="0" anchor="ctr"/>
+          <a:lstStyle/>
+          <a:p>
+            <a:pPr algn="r" indent="0" marL="0">
+              <a:buNone/>
+            </a:pPr>
+            <a:r>
+              <a:rPr lang="en-US" sz="900" dirty="0">
+                <a:solidFill>
+                  <a:srgbClr val="6B6B6B"/>
+                </a:solidFill>
+                <a:latin typeface="Calibri" pitchFamily="34" charset="0"/>
+                <a:ea typeface="Calibri" pitchFamily="34" charset="-122"/>
+                <a:cs typeface="Calibri" pitchFamily="34" charset="-120"/>
+              </a:rPr>
+              <a:t>主催者向け　32</a:t>
+            </a:r>
+            <a:endParaRPr lang="en-US" sz="900" dirty="0"/>
+          </a:p>
+        </p:txBody>
+      </p:sp>
+    </p:spTree>
+  </p:cSld>
+  <p:clrMapOvr>
+    <a:masterClrMapping/>
+  </p:clrMapOvr>
+</p:sld>
+</file>
+
+<file path=ppt/slides/slide33.xml><?xml version="1.0" encoding="utf-8"?>
+<p:sld xmlns:a="http://schemas.openxmlformats.org/drawingml/2006/main" xmlns:r="http://schemas.openxmlformats.org/officeDocument/2006/relationships" xmlns:p="http://schemas.openxmlformats.org/presentationml/2006/main">
+  <p:cSld name="Slide 33">
+    <p:bg>
+      <p:bgPr>
+        <a:solidFill>
+          <a:srgbClr val="FFFFFF"/>
+        </a:solidFill>
+      </p:bgPr>
+    </p:bg>
+    <p:spTree>
+      <p:nvGrpSpPr>
+        <p:cNvPr id="1" name=""/>
+        <p:cNvGrpSpPr/>
+        <p:nvPr/>
+      </p:nvGrpSpPr>
+      <p:grpSpPr>
+        <a:xfrm>
+          <a:off x="0" y="0"/>
+          <a:ext cx="0" cy="0"/>
+          <a:chOff x="0" y="0"/>
+          <a:chExt cx="0" cy="0"/>
+        </a:xfrm>
+      </p:grpSpPr>
+      <p:sp>
+        <p:nvSpPr>
+          <p:cNvPr id="2" name="Text 0"/>
+          <p:cNvSpPr txBox="1"/>
+          <p:nvPr/>
+        </p:nvSpPr>
+        <p:spPr>
+          <a:xfrm>
+            <a:off x="566928" y="457200"/>
+            <a:ext cx="6428232" cy="237744"/>
+          </a:xfrm>
+          <a:prstGeom prst="rect">
+            <a:avLst/>
+          </a:prstGeom>
+          <a:noFill/>
+          <a:ln/>
+        </p:spPr>
+        <p:txBody>
+          <a:bodyPr wrap="square" lIns="0" tIns="0" rIns="0" bIns="0" rtlCol="0" anchor="ctr"/>
+          <a:lstStyle/>
+          <a:p>
+            <a:pPr indent="0" marL="0">
+              <a:buNone/>
+            </a:pPr>
+            <a:r>
+              <a:rPr lang="en-US" sz="1000" b="1" dirty="0">
+                <a:solidFill>
+                  <a:srgbClr val="1E2761"/>
+                </a:solidFill>
+                <a:latin typeface="Calibri" pitchFamily="34" charset="0"/>
+                <a:ea typeface="Calibri" pitchFamily="34" charset="-122"/>
+                <a:cs typeface="Calibri" pitchFamily="34" charset="-120"/>
+              </a:rPr>
+              <a:t>主催者マニュアル</a:t>
+            </a:r>
+            <a:endParaRPr lang="en-US" sz="1000" dirty="0"/>
+          </a:p>
+        </p:txBody>
+      </p:sp>
+      <p:sp>
+        <p:nvSpPr>
+          <p:cNvPr id="3" name="Text 1"/>
+          <p:cNvSpPr txBox="1"/>
+          <p:nvPr/>
+        </p:nvSpPr>
+        <p:spPr>
+          <a:xfrm>
+            <a:off x="566928" y="713232"/>
+            <a:ext cx="6428232" cy="640080"/>
+          </a:xfrm>
+          <a:prstGeom prst="rect">
+            <a:avLst/>
+          </a:prstGeom>
+          <a:noFill/>
+          <a:ln/>
+        </p:spPr>
+        <p:txBody>
+          <a:bodyPr wrap="square" lIns="0" tIns="0" rIns="0" bIns="0" rtlCol="0" anchor="t"/>
+          <a:lstStyle/>
+          <a:p>
+            <a:pPr indent="0" marL="0">
+              <a:buNone/>
+            </a:pPr>
+            <a:r>
+              <a:rPr lang="en-US" sz="2200" b="1" dirty="0">
+                <a:solidFill>
+                  <a:srgbClr val="222222"/>
+                </a:solidFill>
+                <a:latin typeface="Calibri" pitchFamily="34" charset="0"/>
+                <a:ea typeface="Calibri" pitchFamily="34" charset="-122"/>
+                <a:cs typeface="Calibri" pitchFamily="34" charset="-120"/>
+              </a:rPr>
               <a:t>困ったときは</a:t>
             </a:r>
             <a:endParaRPr lang="en-US" sz="2200" dirty="0"/>
@@ -24411,7 +25505,7 @@
                 <a:ea typeface="Calibri" pitchFamily="34" charset="-122"/>
                 <a:cs typeface="Calibri" pitchFamily="34" charset="-120"/>
               </a:rPr>
-              <a:t>主催者向け　31</a:t>
+              <a:t>主催者向け　33</a:t>
             </a:r>
             <a:endParaRPr lang="en-US" sz="900" dirty="0"/>
           </a:p>

--- a/docs/manual-organizer.pptx
+++ b/docs/manual-organizer.pptx
@@ -20749,13 +20749,182 @@
       </p:sp>
       <p:sp>
         <p:nvSpPr>
-          <p:cNvPr id="8" name="Shape 6"/>
+          <p:cNvPr id="8" name="Text 6"/>
+          <p:cNvSpPr txBox="1"/>
+          <p:nvPr/>
+        </p:nvSpPr>
+        <p:spPr>
+          <a:xfrm>
+            <a:off x="566928" y="2767457"/>
+            <a:ext cx="6428232" cy="459994"/>
+          </a:xfrm>
+          <a:prstGeom prst="rect">
+            <a:avLst/>
+          </a:prstGeom>
+          <a:noFill/>
+          <a:ln/>
+        </p:spPr>
+        <p:txBody>
+          <a:bodyPr wrap="square" lIns="0" tIns="0" rIns="0" bIns="0" rtlCol="0" anchor="t"/>
+          <a:lstStyle/>
+          <a:p>
+            <a:pPr indent="0" marL="0">
+              <a:lnSpc>
+                <a:spcPct val="125000"/>
+              </a:lnSpc>
+              <a:buNone/>
+            </a:pPr>
+            <a:r>
+              <a:rPr lang="en-US" sz="1100" dirty="0">
+                <a:solidFill>
+                  <a:srgbClr val="222222"/>
+                </a:solidFill>
+                <a:latin typeface="Calibri" pitchFamily="34" charset="0"/>
+                <a:ea typeface="Calibri" pitchFamily="34" charset="-122"/>
+                <a:cs typeface="Calibri" pitchFamily="34" charset="-120"/>
+              </a:rPr>
+              <a:t>列は </a:t>
+            </a:r>
+            <a:pPr indent="0" marL="0">
+              <a:lnSpc>
+                <a:spcPct val="125000"/>
+              </a:lnSpc>
+              <a:buNone/>
+            </a:pPr>
+            <a:r>
+              <a:rPr lang="en-US" sz="1045" dirty="0">
+                <a:solidFill>
+                  <a:srgbClr val="222222"/>
+                </a:solidFill>
+                <a:latin typeface="Courier New" pitchFamily="34" charset="0"/>
+                <a:ea typeface="Courier New" pitchFamily="34" charset="-122"/>
+                <a:cs typeface="Courier New" pitchFamily="34" charset="-120"/>
+              </a:rPr>
+              <a:t>回答ID / 来場者ID / 送信日時 / 重複 / 来場人数 / 回答企業数 /（設問ごとの回答）</a:t>
+            </a:r>
+            <a:pPr indent="0" marL="0">
+              <a:lnSpc>
+                <a:spcPct val="125000"/>
+              </a:lnSpc>
+              <a:buNone/>
+            </a:pPr>
+            <a:r>
+              <a:rPr lang="en-US" sz="1100" dirty="0">
+                <a:solidFill>
+                  <a:srgbClr val="222222"/>
+                </a:solidFill>
+                <a:latin typeface="Calibri" pitchFamily="34" charset="0"/>
+                <a:ea typeface="Calibri" pitchFamily="34" charset="-122"/>
+                <a:cs typeface="Calibri" pitchFamily="34" charset="-120"/>
+              </a:rPr>
+              <a:t> です。</a:t>
+            </a:r>
+            <a:endParaRPr lang="en-US" sz="1100" dirty="0"/>
+          </a:p>
+        </p:txBody>
+      </p:sp>
+      <p:sp>
+        <p:nvSpPr>
+          <p:cNvPr id="9" name="Text 7"/>
+          <p:cNvSpPr txBox="1"/>
+          <p:nvPr/>
+        </p:nvSpPr>
+        <p:spPr>
+          <a:xfrm>
+            <a:off x="566928" y="3264027"/>
+            <a:ext cx="6428232" cy="459994"/>
+          </a:xfrm>
+          <a:prstGeom prst="rect">
+            <a:avLst/>
+          </a:prstGeom>
+          <a:noFill/>
+          <a:ln/>
+        </p:spPr>
+        <p:txBody>
+          <a:bodyPr wrap="square" lIns="0" tIns="0" rIns="0" bIns="0" rtlCol="0" anchor="t"/>
+          <a:lstStyle/>
+          <a:p>
+            <a:pPr indent="0" marL="0">
+              <a:lnSpc>
+                <a:spcPct val="125000"/>
+              </a:lnSpc>
+              <a:buNone/>
+            </a:pPr>
+            <a:r>
+              <a:rPr lang="en-US" sz="1100" b="1" dirty="0">
+                <a:solidFill>
+                  <a:srgbClr val="222222"/>
+                </a:solidFill>
+                <a:latin typeface="Calibri" pitchFamily="34" charset="0"/>
+                <a:ea typeface="Calibri" pitchFamily="34" charset="-122"/>
+                <a:cs typeface="Calibri" pitchFamily="34" charset="-120"/>
+              </a:rPr>
+              <a:t>来場人数</a:t>
+            </a:r>
+            <a:pPr indent="0" marL="0">
+              <a:lnSpc>
+                <a:spcPct val="125000"/>
+              </a:lnSpc>
+              <a:buNone/>
+            </a:pPr>
+            <a:r>
+              <a:rPr lang="en-US" sz="1100" dirty="0">
+                <a:solidFill>
+                  <a:srgbClr val="222222"/>
+                </a:solidFill>
+                <a:latin typeface="Calibri" pitchFamily="34" charset="0"/>
+                <a:ea typeface="Calibri" pitchFamily="34" charset="-122"/>
+                <a:cs typeface="Calibri" pitchFamily="34" charset="-120"/>
+              </a:rPr>
+              <a:t>はその方が「何人で来られましたか」で答えた人数、</a:t>
+            </a:r>
+            <a:pPr indent="0" marL="0">
+              <a:lnSpc>
+                <a:spcPct val="125000"/>
+              </a:lnSpc>
+              <a:buNone/>
+            </a:pPr>
+            <a:r>
+              <a:rPr lang="en-US" sz="1100" b="1" dirty="0">
+                <a:solidFill>
+                  <a:srgbClr val="222222"/>
+                </a:solidFill>
+                <a:latin typeface="Calibri" pitchFamily="34" charset="0"/>
+                <a:ea typeface="Calibri" pitchFamily="34" charset="-122"/>
+                <a:cs typeface="Calibri" pitchFamily="34" charset="-120"/>
+              </a:rPr>
+              <a:t>回答企業数</a:t>
+            </a:r>
+            <a:pPr indent="0" marL="0">
+              <a:lnSpc>
+                <a:spcPct val="125000"/>
+              </a:lnSpc>
+              <a:buNone/>
+            </a:pPr>
+            <a:r>
+              <a:rPr lang="en-US" sz="1100" dirty="0">
+                <a:solidFill>
+                  <a:srgbClr val="222222"/>
+                </a:solidFill>
+                <a:latin typeface="Calibri" pitchFamily="34" charset="0"/>
+                <a:ea typeface="Calibri" pitchFamily="34" charset="-122"/>
+                <a:cs typeface="Calibri" pitchFamily="34" charset="-120"/>
+              </a:rPr>
+              <a:t>はその方が回った企業数です。</a:t>
+            </a:r>
+            <a:endParaRPr lang="en-US" sz="1100" dirty="0"/>
+          </a:p>
+        </p:txBody>
+      </p:sp>
+      <p:sp>
+        <p:nvSpPr>
+          <p:cNvPr id="10" name="Shape 8"/>
           <p:cNvSpPr/>
           <p:nvPr/>
         </p:nvSpPr>
         <p:spPr>
           <a:xfrm>
-            <a:off x="566928" y="2767457"/>
+            <a:off x="566928" y="3760597"/>
             <a:ext cx="6428232" cy="624459"/>
           </a:xfrm>
           <a:prstGeom prst="roundRect">
@@ -20776,13 +20945,13 @@
       </p:sp>
       <p:sp>
         <p:nvSpPr>
-          <p:cNvPr id="9" name="Text 7"/>
-          <p:cNvSpPr txBox="1"/>
-          <p:nvPr/>
-        </p:nvSpPr>
-        <p:spPr>
-          <a:xfrm>
-            <a:off x="658368" y="2858897"/>
+          <p:cNvPr id="11" name="Text 9"/>
+          <p:cNvSpPr txBox="1"/>
+          <p:nvPr/>
+        </p:nvSpPr>
+        <p:spPr>
+          <a:xfrm>
+            <a:off x="658368" y="3852037"/>
             <a:ext cx="237744" cy="237744"/>
           </a:xfrm>
           <a:prstGeom prst="rect">
@@ -20815,13 +20984,13 @@
       </p:sp>
       <p:sp>
         <p:nvSpPr>
-          <p:cNvPr id="10" name="Text 8"/>
-          <p:cNvSpPr txBox="1"/>
-          <p:nvPr/>
-        </p:nvSpPr>
-        <p:spPr>
-          <a:xfrm>
-            <a:off x="950976" y="2877185"/>
+          <p:cNvPr id="12" name="Text 10"/>
+          <p:cNvSpPr txBox="1"/>
+          <p:nvPr/>
+        </p:nvSpPr>
+        <p:spPr>
+          <a:xfrm>
+            <a:off x="950976" y="3870325"/>
             <a:ext cx="5925312" cy="441579"/>
           </a:xfrm>
           <a:prstGeom prst="rect">
@@ -20849,7 +21018,41 @@
                 <a:ea typeface="Calibri" pitchFamily="34" charset="-122"/>
                 <a:cs typeface="Calibri" pitchFamily="34" charset="-120"/>
               </a:rPr>
-              <a:t>メールアドレスは出力されません。来場者は匿名のID（来場者ID）だけが入るので、企業をまたいだ同じ方の回答を突き合わせられます。</a:t>
+              <a:t>総合アンケートのCSVは、</a:t>
+            </a:r>
+            <a:pPr indent="0" marL="0">
+              <a:lnSpc>
+                <a:spcPct val="120000"/>
+              </a:lnSpc>
+              <a:buNone/>
+            </a:pPr>
+            <a:r>
+              <a:rPr lang="en-US" sz="1050" b="1" dirty="0">
+                <a:solidFill>
+                  <a:srgbClr val="222222"/>
+                </a:solidFill>
+                <a:latin typeface="Calibri" pitchFamily="34" charset="0"/>
+                <a:ea typeface="Calibri" pitchFamily="34" charset="-122"/>
+                <a:cs typeface="Calibri" pitchFamily="34" charset="-120"/>
+              </a:rPr>
+              <a:t>1行＝1グループ</a:t>
+            </a:r>
+            <a:pPr indent="0" marL="0">
+              <a:lnSpc>
+                <a:spcPct val="120000"/>
+              </a:lnSpc>
+              <a:buNone/>
+            </a:pPr>
+            <a:r>
+              <a:rPr lang="en-US" sz="1050" dirty="0">
+                <a:solidFill>
+                  <a:srgbClr val="222222"/>
+                </a:solidFill>
+                <a:latin typeface="Calibri" pitchFamily="34" charset="0"/>
+                <a:ea typeface="Calibri" pitchFamily="34" charset="-122"/>
+                <a:cs typeface="Calibri" pitchFamily="34" charset="-120"/>
+              </a:rPr>
+              <a:t>になります。世代や区分ごとの人数を聞いている場合は、</a:t>
             </a:r>
             <a:endParaRPr lang="en-US" sz="1050" dirty="0"/>
           </a:p>
@@ -20857,449 +21060,18 @@
       </p:sp>
       <p:sp>
         <p:nvSpPr>
-          <p:cNvPr id="11" name="Text 9"/>
-          <p:cNvSpPr txBox="1"/>
-          <p:nvPr/>
-        </p:nvSpPr>
-        <p:spPr>
-          <a:xfrm>
-            <a:off x="566928" y="3574796"/>
-            <a:ext cx="6428232" cy="257810"/>
-          </a:xfrm>
-          <a:prstGeom prst="rect">
-            <a:avLst/>
-          </a:prstGeom>
-          <a:noFill/>
-          <a:ln/>
-        </p:spPr>
-        <p:txBody>
-          <a:bodyPr wrap="square" lIns="0" tIns="0" rIns="0" bIns="0" rtlCol="0" anchor="t"/>
-          <a:lstStyle/>
-          <a:p>
-            <a:pPr indent="0" marL="0">
-              <a:buNone/>
-            </a:pPr>
-            <a:r>
-              <a:rPr lang="en-US" sz="1400" b="1" dirty="0">
-                <a:solidFill>
-                  <a:srgbClr val="1E2761"/>
-                </a:solidFill>
-                <a:latin typeface="Calibri" pitchFamily="34" charset="0"/>
-                <a:ea typeface="Calibri" pitchFamily="34" charset="-122"/>
-                <a:cs typeface="Calibri" pitchFamily="34" charset="-120"/>
-              </a:rPr>
-              <a:t>集計画面で見る</a:t>
-            </a:r>
-            <a:endParaRPr lang="en-US" sz="1400" dirty="0"/>
-          </a:p>
-        </p:txBody>
-      </p:sp>
-      <p:sp>
-        <p:nvSpPr>
-          <p:cNvPr id="12" name="Text 10"/>
-          <p:cNvSpPr txBox="1"/>
-          <p:nvPr/>
-        </p:nvSpPr>
-        <p:spPr>
-          <a:xfrm>
-            <a:off x="566928" y="3905758"/>
-            <a:ext cx="6428232" cy="459994"/>
-          </a:xfrm>
-          <a:prstGeom prst="rect">
-            <a:avLst/>
-          </a:prstGeom>
-          <a:noFill/>
-          <a:ln/>
-        </p:spPr>
-        <p:txBody>
-          <a:bodyPr wrap="square" lIns="0" tIns="0" rIns="0" bIns="0" rtlCol="0" anchor="t"/>
-          <a:lstStyle/>
-          <a:p>
-            <a:pPr indent="0" marL="0">
-              <a:lnSpc>
-                <a:spcPct val="125000"/>
-              </a:lnSpc>
-              <a:buNone/>
-            </a:pPr>
-            <a:r>
-              <a:rPr lang="en-US" sz="1100" dirty="0">
-                <a:solidFill>
-                  <a:srgbClr val="222222"/>
-                </a:solidFill>
-                <a:latin typeface="Calibri" pitchFamily="34" charset="0"/>
-                <a:ea typeface="Calibri" pitchFamily="34" charset="-122"/>
-                <a:cs typeface="Calibri" pitchFamily="34" charset="-120"/>
-              </a:rPr>
-              <a:t>企業ごとの「集計」画面では、設問ごとのグラフ・星評価の平均・NPS・自由記述の一覧が見られます。</a:t>
-            </a:r>
-            <a:endParaRPr lang="en-US" sz="1100" dirty="0"/>
-          </a:p>
-        </p:txBody>
-      </p:sp>
-      <p:sp>
-        <p:nvSpPr>
-          <p:cNvPr id="13" name="Text 11"/>
-          <p:cNvSpPr txBox="1"/>
-          <p:nvPr/>
-        </p:nvSpPr>
-        <p:spPr>
-          <a:xfrm>
-            <a:off x="566928" y="4402328"/>
-            <a:ext cx="6428232" cy="459994"/>
-          </a:xfrm>
-          <a:prstGeom prst="rect">
-            <a:avLst/>
-          </a:prstGeom>
-          <a:noFill/>
-          <a:ln/>
-        </p:spPr>
-        <p:txBody>
-          <a:bodyPr wrap="square" lIns="0" tIns="0" rIns="0" bIns="0" rtlCol="0" anchor="t"/>
-          <a:lstStyle/>
-          <a:p>
-            <a:pPr indent="0" marL="0">
-              <a:lnSpc>
-                <a:spcPct val="125000"/>
-              </a:lnSpc>
-              <a:buNone/>
-            </a:pPr>
-            <a:r>
-              <a:rPr lang="en-US" sz="1100" b="1" dirty="0">
-                <a:solidFill>
-                  <a:srgbClr val="222222"/>
-                </a:solidFill>
-                <a:latin typeface="Calibri" pitchFamily="34" charset="0"/>
-                <a:ea typeface="Calibri" pitchFamily="34" charset="-122"/>
-                <a:cs typeface="Calibri" pitchFamily="34" charset="-120"/>
-              </a:rPr>
-              <a:t>総合アンケートの集計</a:t>
-            </a:r>
-            <a:pPr indent="0" marL="0">
-              <a:lnSpc>
-                <a:spcPct val="125000"/>
-              </a:lnSpc>
-              <a:buNone/>
-            </a:pPr>
-            <a:r>
-              <a:rPr lang="en-US" sz="1100" dirty="0">
-                <a:solidFill>
-                  <a:srgbClr val="222222"/>
-                </a:solidFill>
-                <a:latin typeface="Calibri" pitchFamily="34" charset="0"/>
-                <a:ea typeface="Calibri" pitchFamily="34" charset="-122"/>
-                <a:cs typeface="Calibri" pitchFamily="34" charset="-120"/>
-              </a:rPr>
-              <a:t>は、ダッシュボードの「総合アンケートの集計」、または「総合アンケートと案内メール」画面の</a:t>
-            </a:r>
-            <a:pPr indent="0" marL="0">
-              <a:lnSpc>
-                <a:spcPct val="125000"/>
-              </a:lnSpc>
-              <a:buNone/>
-            </a:pPr>
-            <a:r>
-              <a:rPr lang="en-US" sz="1100" b="1" dirty="0">
-                <a:solidFill>
-                  <a:srgbClr val="222222"/>
-                </a:solidFill>
-                <a:latin typeface="Calibri" pitchFamily="34" charset="0"/>
-                <a:ea typeface="Calibri" pitchFamily="34" charset="-122"/>
-                <a:cs typeface="Calibri" pitchFamily="34" charset="-120"/>
-              </a:rPr>
-              <a:t>「集計を見る」</a:t>
-            </a:r>
-            <a:pPr indent="0" marL="0">
-              <a:lnSpc>
-                <a:spcPct val="125000"/>
-              </a:lnSpc>
-              <a:buNone/>
-            </a:pPr>
-            <a:r>
-              <a:rPr lang="en-US" sz="1100" dirty="0">
-                <a:solidFill>
-                  <a:srgbClr val="222222"/>
-                </a:solidFill>
-                <a:latin typeface="Calibri" pitchFamily="34" charset="0"/>
-                <a:ea typeface="Calibri" pitchFamily="34" charset="-122"/>
-                <a:cs typeface="Calibri" pitchFamily="34" charset="-120"/>
-              </a:rPr>
-              <a:t>から開きます。</a:t>
-            </a:r>
-            <a:endParaRPr lang="en-US" sz="1100" dirty="0"/>
-          </a:p>
-        </p:txBody>
-      </p:sp>
-      <p:sp>
-        <p:nvSpPr>
-          <p:cNvPr id="14" name="Text 12"/>
-          <p:cNvSpPr txBox="1"/>
-          <p:nvPr/>
-        </p:nvSpPr>
-        <p:spPr>
-          <a:xfrm>
-            <a:off x="713232" y="4898898"/>
-            <a:ext cx="6281928" cy="257429"/>
-          </a:xfrm>
-          <a:prstGeom prst="rect">
-            <a:avLst/>
-          </a:prstGeom>
-          <a:noFill/>
-          <a:ln/>
-        </p:spPr>
-        <p:txBody>
-          <a:bodyPr wrap="square" lIns="0" tIns="0" rIns="0" bIns="0" rtlCol="0" anchor="t"/>
-          <a:lstStyle/>
-          <a:p>
-            <a:pPr marL="342900" indent="-342900">
-              <a:lnSpc>
-                <a:spcPct val="125000"/>
-              </a:lnSpc>
-              <a:buSzPct val="100000"/>
-              <a:buChar char="●"/>
-            </a:pPr>
-            <a:r>
-              <a:rPr lang="en-US" sz="1100" b="1" dirty="0">
-                <a:solidFill>
-                  <a:srgbClr val="222222"/>
-                </a:solidFill>
-                <a:latin typeface="Calibri" pitchFamily="34" charset="0"/>
-                <a:ea typeface="Calibri" pitchFamily="34" charset="-122"/>
-                <a:cs typeface="Calibri" pitchFamily="34" charset="-120"/>
-              </a:rPr>
-              <a:t>回答数と回答率</a:t>
-            </a:r>
-            <a:pPr indent="0" marL="0">
-              <a:lnSpc>
-                <a:spcPct val="125000"/>
-              </a:lnSpc>
-              <a:buNone/>
-            </a:pPr>
-            <a:r>
-              <a:rPr lang="en-US" sz="1100" dirty="0">
-                <a:solidFill>
-                  <a:srgbClr val="222222"/>
-                </a:solidFill>
-                <a:latin typeface="Calibri" pitchFamily="34" charset="0"/>
-                <a:ea typeface="Calibri" pitchFamily="34" charset="-122"/>
-                <a:cs typeface="Calibri" pitchFamily="34" charset="-120"/>
-              </a:rPr>
-              <a:t>（回答した来場者のうち何%が答えたか）</a:t>
-            </a:r>
-            <a:endParaRPr lang="en-US" sz="1100" dirty="0"/>
-          </a:p>
-        </p:txBody>
-      </p:sp>
-      <p:sp>
-        <p:nvSpPr>
-          <p:cNvPr id="15" name="Text 13"/>
-          <p:cNvSpPr txBox="1"/>
-          <p:nvPr/>
-        </p:nvSpPr>
-        <p:spPr>
-          <a:xfrm>
-            <a:off x="713232" y="5174615"/>
-            <a:ext cx="6281928" cy="257429"/>
-          </a:xfrm>
-          <a:prstGeom prst="rect">
-            <a:avLst/>
-          </a:prstGeom>
-          <a:noFill/>
-          <a:ln/>
-        </p:spPr>
-        <p:txBody>
-          <a:bodyPr wrap="square" lIns="0" tIns="0" rIns="0" bIns="0" rtlCol="0" anchor="t"/>
-          <a:lstStyle/>
-          <a:p>
-            <a:pPr marL="342900" indent="-342900">
-              <a:lnSpc>
-                <a:spcPct val="125000"/>
-              </a:lnSpc>
-              <a:buSzPct val="100000"/>
-              <a:buChar char="●"/>
-            </a:pPr>
-            <a:r>
-              <a:rPr lang="en-US" sz="1100" b="1" dirty="0">
-                <a:solidFill>
-                  <a:srgbClr val="222222"/>
-                </a:solidFill>
-                <a:latin typeface="Calibri" pitchFamily="34" charset="0"/>
-                <a:ea typeface="Calibri" pitchFamily="34" charset="-122"/>
-                <a:cs typeface="Calibri" pitchFamily="34" charset="-120"/>
-              </a:rPr>
-              <a:t>設問ごとのグラフ</a:t>
-            </a:r>
-            <a:pPr indent="0" marL="0">
-              <a:lnSpc>
-                <a:spcPct val="125000"/>
-              </a:lnSpc>
-              <a:buNone/>
-            </a:pPr>
-            <a:r>
-              <a:rPr lang="en-US" sz="1100" dirty="0">
-                <a:solidFill>
-                  <a:srgbClr val="222222"/>
-                </a:solidFill>
-                <a:latin typeface="Calibri" pitchFamily="34" charset="0"/>
-                <a:ea typeface="Calibri" pitchFamily="34" charset="-122"/>
-                <a:cs typeface="Calibri" pitchFamily="34" charset="-120"/>
-              </a:rPr>
-              <a:t>（企業の集計と同じ見た目）と</a:t>
-            </a:r>
-            <a:pPr indent="0" marL="0">
-              <a:lnSpc>
-                <a:spcPct val="125000"/>
-              </a:lnSpc>
-              <a:buNone/>
-            </a:pPr>
-            <a:r>
-              <a:rPr lang="en-US" sz="1100" b="1" dirty="0">
-                <a:solidFill>
-                  <a:srgbClr val="222222"/>
-                </a:solidFill>
-                <a:latin typeface="Calibri" pitchFamily="34" charset="0"/>
-                <a:ea typeface="Calibri" pitchFamily="34" charset="-122"/>
-                <a:cs typeface="Calibri" pitchFamily="34" charset="-120"/>
-              </a:rPr>
-              <a:t>自由記述の一覧</a:t>
-            </a:r>
-            <a:endParaRPr lang="en-US" sz="1100" dirty="0"/>
-          </a:p>
-        </p:txBody>
-      </p:sp>
-      <p:sp>
-        <p:nvSpPr>
-          <p:cNvPr id="16" name="Text 14"/>
-          <p:cNvSpPr txBox="1"/>
-          <p:nvPr/>
-        </p:nvSpPr>
-        <p:spPr>
-          <a:xfrm>
-            <a:off x="713232" y="5450332"/>
-            <a:ext cx="6281928" cy="257429"/>
-          </a:xfrm>
-          <a:prstGeom prst="rect">
-            <a:avLst/>
-          </a:prstGeom>
-          <a:noFill/>
-          <a:ln/>
-        </p:spPr>
-        <p:txBody>
-          <a:bodyPr wrap="square" lIns="0" tIns="0" rIns="0" bIns="0" rtlCol="0" anchor="t"/>
-          <a:lstStyle/>
-          <a:p>
-            <a:pPr marL="342900" indent="-342900">
-              <a:lnSpc>
-                <a:spcPct val="125000"/>
-              </a:lnSpc>
-              <a:buSzPct val="100000"/>
-              <a:buChar char="●"/>
-            </a:pPr>
-            <a:r>
-              <a:rPr lang="en-US" sz="1100" b="1" dirty="0">
-                <a:solidFill>
-                  <a:srgbClr val="222222"/>
-                </a:solidFill>
-                <a:latin typeface="Calibri" pitchFamily="34" charset="0"/>
-                <a:ea typeface="Calibri" pitchFamily="34" charset="-122"/>
-                <a:cs typeface="Calibri" pitchFamily="34" charset="-120"/>
-              </a:rPr>
-              <a:t>周回企業数との関係</a:t>
-            </a:r>
-            <a:pPr indent="0" marL="0">
-              <a:lnSpc>
-                <a:spcPct val="125000"/>
-              </a:lnSpc>
-              <a:buNone/>
-            </a:pPr>
-            <a:r>
-              <a:rPr lang="en-US" sz="1100" dirty="0">
-                <a:solidFill>
-                  <a:srgbClr val="222222"/>
-                </a:solidFill>
-                <a:latin typeface="Calibri" pitchFamily="34" charset="0"/>
-                <a:ea typeface="Calibri" pitchFamily="34" charset="-122"/>
-                <a:cs typeface="Calibri" pitchFamily="34" charset="-120"/>
-              </a:rPr>
-              <a:t>：たくさん回った方ほど評価が高いか</a:t>
-            </a:r>
-            <a:endParaRPr lang="en-US" sz="1100" dirty="0"/>
-          </a:p>
-        </p:txBody>
-      </p:sp>
-      <p:sp>
-        <p:nvSpPr>
-          <p:cNvPr id="17" name="Text 15"/>
-          <p:cNvSpPr txBox="1"/>
-          <p:nvPr/>
-        </p:nvSpPr>
-        <p:spPr>
-          <a:xfrm>
-            <a:off x="713232" y="5726049"/>
-            <a:ext cx="6281928" cy="257429"/>
-          </a:xfrm>
-          <a:prstGeom prst="rect">
-            <a:avLst/>
-          </a:prstGeom>
-          <a:noFill/>
-          <a:ln/>
-        </p:spPr>
-        <p:txBody>
-          <a:bodyPr wrap="square" lIns="0" tIns="0" rIns="0" bIns="0" rtlCol="0" anchor="t"/>
-          <a:lstStyle/>
-          <a:p>
-            <a:pPr marL="342900" indent="-342900">
-              <a:lnSpc>
-                <a:spcPct val="125000"/>
-              </a:lnSpc>
-              <a:buSzPct val="100000"/>
-              <a:buChar char="●"/>
-            </a:pPr>
-            <a:r>
-              <a:rPr lang="en-US" sz="1100" b="1" dirty="0">
-                <a:solidFill>
-                  <a:srgbClr val="222222"/>
-                </a:solidFill>
-                <a:latin typeface="Calibri" pitchFamily="34" charset="0"/>
-                <a:ea typeface="Calibri" pitchFamily="34" charset="-122"/>
-                <a:cs typeface="Calibri" pitchFamily="34" charset="-120"/>
-              </a:rPr>
-              <a:t>来場人数との関係</a:t>
-            </a:r>
-            <a:pPr indent="0" marL="0">
-              <a:lnSpc>
-                <a:spcPct val="125000"/>
-              </a:lnSpc>
-              <a:buNone/>
-            </a:pPr>
-            <a:r>
-              <a:rPr lang="en-US" sz="1100" dirty="0">
-                <a:solidFill>
-                  <a:srgbClr val="222222"/>
-                </a:solidFill>
-                <a:latin typeface="Calibri" pitchFamily="34" charset="0"/>
-                <a:ea typeface="Calibri" pitchFamily="34" charset="-122"/>
-                <a:cs typeface="Calibri" pitchFamily="34" charset="-120"/>
-              </a:rPr>
-              <a:t>：1人で来た方とグループで来た方の違い</a:t>
-            </a:r>
-            <a:endParaRPr lang="en-US" sz="1100" dirty="0"/>
-          </a:p>
-        </p:txBody>
-      </p:sp>
-      <p:sp>
-        <p:nvSpPr>
-          <p:cNvPr id="18" name="Shape 16"/>
+          <p:cNvPr id="13" name="Shape 11"/>
           <p:cNvSpPr/>
           <p:nvPr/>
         </p:nvSpPr>
         <p:spPr>
           <a:xfrm>
-            <a:off x="566928" y="6001766"/>
-            <a:ext cx="6428232" cy="624459"/>
+            <a:off x="566928" y="4458208"/>
+            <a:ext cx="6428232" cy="431102"/>
           </a:xfrm>
           <a:prstGeom prst="roundRect">
             <a:avLst>
-              <a:gd name="adj" fmla="val 8786"/>
+              <a:gd name="adj" fmla="val 12726"/>
             </a:avLst>
           </a:prstGeom>
           <a:solidFill>
@@ -21315,13 +21087,660 @@
       </p:sp>
       <p:sp>
         <p:nvSpPr>
+          <p:cNvPr id="14" name="Text 12"/>
+          <p:cNvSpPr txBox="1"/>
+          <p:nvPr/>
+        </p:nvSpPr>
+        <p:spPr>
+          <a:xfrm>
+            <a:off x="658368" y="4549648"/>
+            <a:ext cx="237744" cy="237744"/>
+          </a:xfrm>
+          <a:prstGeom prst="rect">
+            <a:avLst/>
+          </a:prstGeom>
+          <a:noFill/>
+          <a:ln/>
+        </p:spPr>
+        <p:txBody>
+          <a:bodyPr wrap="square" lIns="0" tIns="0" rIns="0" bIns="0" rtlCol="0" anchor="ctr"/>
+          <a:lstStyle/>
+          <a:p>
+            <a:pPr algn="ctr" indent="0" marL="0">
+              <a:buNone/>
+            </a:pPr>
+            <a:r>
+              <a:rPr lang="en-US" sz="1200" b="1" dirty="0">
+                <a:solidFill>
+                  <a:srgbClr val="1E2761"/>
+                </a:solidFill>
+                <a:latin typeface="Calibri" pitchFamily="34" charset="0"/>
+                <a:ea typeface="Calibri" pitchFamily="34" charset="-122"/>
+                <a:cs typeface="Calibri" pitchFamily="34" charset="-120"/>
+              </a:rPr>
+              <a:t>i</a:t>
+            </a:r>
+            <a:endParaRPr lang="en-US" sz="1200" dirty="0"/>
+          </a:p>
+        </p:txBody>
+      </p:sp>
+      <p:sp>
+        <p:nvSpPr>
+          <p:cNvPr id="15" name="Text 13"/>
+          <p:cNvSpPr txBox="1"/>
+          <p:nvPr/>
+        </p:nvSpPr>
+        <p:spPr>
+          <a:xfrm>
+            <a:off x="950976" y="4567936"/>
+            <a:ext cx="5925312" cy="248221"/>
+          </a:xfrm>
+          <a:prstGeom prst="rect">
+            <a:avLst/>
+          </a:prstGeom>
+          <a:noFill/>
+          <a:ln/>
+        </p:spPr>
+        <p:txBody>
+          <a:bodyPr wrap="square" lIns="0" tIns="0" rIns="0" bIns="0" rtlCol="0" anchor="t"/>
+          <a:lstStyle/>
+          <a:p>
+            <a:pPr indent="0" marL="0">
+              <a:lnSpc>
+                <a:spcPct val="120000"/>
+              </a:lnSpc>
+              <a:buNone/>
+            </a:pPr>
+            <a:r>
+              <a:rPr lang="en-US" sz="1050" dirty="0">
+                <a:solidFill>
+                  <a:srgbClr val="222222"/>
+                </a:solidFill>
+                <a:latin typeface="Calibri" pitchFamily="34" charset="0"/>
+                <a:ea typeface="Calibri" pitchFamily="34" charset="-122"/>
+                <a:cs typeface="Calibri" pitchFamily="34" charset="-120"/>
+              </a:rPr>
+              <a:t>「来場人数」と並べてExcelのピボットテーブルにかけると、グループの構成を集計できます。</a:t>
+            </a:r>
+            <a:endParaRPr lang="en-US" sz="1050" dirty="0"/>
+          </a:p>
+        </p:txBody>
+      </p:sp>
+      <p:sp>
+        <p:nvSpPr>
+          <p:cNvPr id="16" name="Shape 14"/>
+          <p:cNvSpPr/>
+          <p:nvPr/>
+        </p:nvSpPr>
+        <p:spPr>
+          <a:xfrm>
+            <a:off x="566928" y="4962462"/>
+            <a:ext cx="6428232" cy="624459"/>
+          </a:xfrm>
+          <a:prstGeom prst="roundRect">
+            <a:avLst>
+              <a:gd name="adj" fmla="val 8786"/>
+            </a:avLst>
+          </a:prstGeom>
+          <a:solidFill>
+            <a:srgbClr val="E8ECF8"/>
+          </a:solidFill>
+          <a:ln w="9525">
+            <a:solidFill>
+              <a:srgbClr val="1E2761"/>
+            </a:solidFill>
+            <a:prstDash val="solid"/>
+          </a:ln>
+        </p:spPr>
+      </p:sp>
+      <p:sp>
+        <p:nvSpPr>
+          <p:cNvPr id="17" name="Text 15"/>
+          <p:cNvSpPr txBox="1"/>
+          <p:nvPr/>
+        </p:nvSpPr>
+        <p:spPr>
+          <a:xfrm>
+            <a:off x="658368" y="5053902"/>
+            <a:ext cx="237744" cy="237744"/>
+          </a:xfrm>
+          <a:prstGeom prst="rect">
+            <a:avLst/>
+          </a:prstGeom>
+          <a:noFill/>
+          <a:ln/>
+        </p:spPr>
+        <p:txBody>
+          <a:bodyPr wrap="square" lIns="0" tIns="0" rIns="0" bIns="0" rtlCol="0" anchor="ctr"/>
+          <a:lstStyle/>
+          <a:p>
+            <a:pPr algn="ctr" indent="0" marL="0">
+              <a:buNone/>
+            </a:pPr>
+            <a:r>
+              <a:rPr lang="en-US" sz="1200" b="1" dirty="0">
+                <a:solidFill>
+                  <a:srgbClr val="1E2761"/>
+                </a:solidFill>
+                <a:latin typeface="Calibri" pitchFamily="34" charset="0"/>
+                <a:ea typeface="Calibri" pitchFamily="34" charset="-122"/>
+                <a:cs typeface="Calibri" pitchFamily="34" charset="-120"/>
+              </a:rPr>
+              <a:t>i</a:t>
+            </a:r>
+            <a:endParaRPr lang="en-US" sz="1200" dirty="0"/>
+          </a:p>
+        </p:txBody>
+      </p:sp>
+      <p:sp>
+        <p:nvSpPr>
+          <p:cNvPr id="18" name="Text 16"/>
+          <p:cNvSpPr txBox="1"/>
+          <p:nvPr/>
+        </p:nvSpPr>
+        <p:spPr>
+          <a:xfrm>
+            <a:off x="950976" y="5072190"/>
+            <a:ext cx="5925312" cy="441579"/>
+          </a:xfrm>
+          <a:prstGeom prst="rect">
+            <a:avLst/>
+          </a:prstGeom>
+          <a:noFill/>
+          <a:ln/>
+        </p:spPr>
+        <p:txBody>
+          <a:bodyPr wrap="square" lIns="0" tIns="0" rIns="0" bIns="0" rtlCol="0" anchor="t"/>
+          <a:lstStyle/>
+          <a:p>
+            <a:pPr indent="0" marL="0">
+              <a:lnSpc>
+                <a:spcPct val="120000"/>
+              </a:lnSpc>
+              <a:buNone/>
+            </a:pPr>
+            <a:r>
+              <a:rPr lang="en-US" sz="1050" dirty="0">
+                <a:solidFill>
+                  <a:srgbClr val="222222"/>
+                </a:solidFill>
+                <a:latin typeface="Calibri" pitchFamily="34" charset="0"/>
+                <a:ea typeface="Calibri" pitchFamily="34" charset="-122"/>
+                <a:cs typeface="Calibri" pitchFamily="34" charset="-120"/>
+              </a:rPr>
+              <a:t>メールアドレスは出力されません。来場者は匿名のID（来場者ID）だけが入るので、企業をまたいだ同じ方の回答を突き合わせられます。</a:t>
+            </a:r>
+            <a:endParaRPr lang="en-US" sz="1050" dirty="0"/>
+          </a:p>
+        </p:txBody>
+      </p:sp>
+      <p:sp>
+        <p:nvSpPr>
           <p:cNvPr id="19" name="Text 17"/>
           <p:cNvSpPr txBox="1"/>
           <p:nvPr/>
         </p:nvSpPr>
         <p:spPr>
           <a:xfrm>
-            <a:off x="658368" y="6093206"/>
+            <a:off x="566928" y="5769801"/>
+            <a:ext cx="6428232" cy="257810"/>
+          </a:xfrm>
+          <a:prstGeom prst="rect">
+            <a:avLst/>
+          </a:prstGeom>
+          <a:noFill/>
+          <a:ln/>
+        </p:spPr>
+        <p:txBody>
+          <a:bodyPr wrap="square" lIns="0" tIns="0" rIns="0" bIns="0" rtlCol="0" anchor="t"/>
+          <a:lstStyle/>
+          <a:p>
+            <a:pPr indent="0" marL="0">
+              <a:buNone/>
+            </a:pPr>
+            <a:r>
+              <a:rPr lang="en-US" sz="1400" b="1" dirty="0">
+                <a:solidFill>
+                  <a:srgbClr val="1E2761"/>
+                </a:solidFill>
+                <a:latin typeface="Calibri" pitchFamily="34" charset="0"/>
+                <a:ea typeface="Calibri" pitchFamily="34" charset="-122"/>
+                <a:cs typeface="Calibri" pitchFamily="34" charset="-120"/>
+              </a:rPr>
+              <a:t>集計画面で見る</a:t>
+            </a:r>
+            <a:endParaRPr lang="en-US" sz="1400" dirty="0"/>
+          </a:p>
+        </p:txBody>
+      </p:sp>
+      <p:sp>
+        <p:nvSpPr>
+          <p:cNvPr id="20" name="Text 18"/>
+          <p:cNvSpPr txBox="1"/>
+          <p:nvPr/>
+        </p:nvSpPr>
+        <p:spPr>
+          <a:xfrm>
+            <a:off x="566928" y="6100763"/>
+            <a:ext cx="6428232" cy="459994"/>
+          </a:xfrm>
+          <a:prstGeom prst="rect">
+            <a:avLst/>
+          </a:prstGeom>
+          <a:noFill/>
+          <a:ln/>
+        </p:spPr>
+        <p:txBody>
+          <a:bodyPr wrap="square" lIns="0" tIns="0" rIns="0" bIns="0" rtlCol="0" anchor="t"/>
+          <a:lstStyle/>
+          <a:p>
+            <a:pPr indent="0" marL="0">
+              <a:lnSpc>
+                <a:spcPct val="125000"/>
+              </a:lnSpc>
+              <a:buNone/>
+            </a:pPr>
+            <a:r>
+              <a:rPr lang="en-US" sz="1100" dirty="0">
+                <a:solidFill>
+                  <a:srgbClr val="222222"/>
+                </a:solidFill>
+                <a:latin typeface="Calibri" pitchFamily="34" charset="0"/>
+                <a:ea typeface="Calibri" pitchFamily="34" charset="-122"/>
+                <a:cs typeface="Calibri" pitchFamily="34" charset="-120"/>
+              </a:rPr>
+              <a:t>企業ごとの「集計」画面では、設問ごとのグラフ・星評価の平均・NPS・自由記述の一覧が見られます。</a:t>
+            </a:r>
+            <a:endParaRPr lang="en-US" sz="1100" dirty="0"/>
+          </a:p>
+        </p:txBody>
+      </p:sp>
+      <p:sp>
+        <p:nvSpPr>
+          <p:cNvPr id="21" name="Text 19"/>
+          <p:cNvSpPr txBox="1"/>
+          <p:nvPr/>
+        </p:nvSpPr>
+        <p:spPr>
+          <a:xfrm>
+            <a:off x="566928" y="6597333"/>
+            <a:ext cx="6428232" cy="459994"/>
+          </a:xfrm>
+          <a:prstGeom prst="rect">
+            <a:avLst/>
+          </a:prstGeom>
+          <a:noFill/>
+          <a:ln/>
+        </p:spPr>
+        <p:txBody>
+          <a:bodyPr wrap="square" lIns="0" tIns="0" rIns="0" bIns="0" rtlCol="0" anchor="t"/>
+          <a:lstStyle/>
+          <a:p>
+            <a:pPr indent="0" marL="0">
+              <a:lnSpc>
+                <a:spcPct val="125000"/>
+              </a:lnSpc>
+              <a:buNone/>
+            </a:pPr>
+            <a:r>
+              <a:rPr lang="en-US" sz="1100" b="1" dirty="0">
+                <a:solidFill>
+                  <a:srgbClr val="222222"/>
+                </a:solidFill>
+                <a:latin typeface="Calibri" pitchFamily="34" charset="0"/>
+                <a:ea typeface="Calibri" pitchFamily="34" charset="-122"/>
+                <a:cs typeface="Calibri" pitchFamily="34" charset="-120"/>
+              </a:rPr>
+              <a:t>総合アンケートの集計</a:t>
+            </a:r>
+            <a:pPr indent="0" marL="0">
+              <a:lnSpc>
+                <a:spcPct val="125000"/>
+              </a:lnSpc>
+              <a:buNone/>
+            </a:pPr>
+            <a:r>
+              <a:rPr lang="en-US" sz="1100" dirty="0">
+                <a:solidFill>
+                  <a:srgbClr val="222222"/>
+                </a:solidFill>
+                <a:latin typeface="Calibri" pitchFamily="34" charset="0"/>
+                <a:ea typeface="Calibri" pitchFamily="34" charset="-122"/>
+                <a:cs typeface="Calibri" pitchFamily="34" charset="-120"/>
+              </a:rPr>
+              <a:t>は、ダッシュボードの「総合アンケートの集計」、または「総合アンケートと案内メール」画面の</a:t>
+            </a:r>
+            <a:pPr indent="0" marL="0">
+              <a:lnSpc>
+                <a:spcPct val="125000"/>
+              </a:lnSpc>
+              <a:buNone/>
+            </a:pPr>
+            <a:r>
+              <a:rPr lang="en-US" sz="1100" b="1" dirty="0">
+                <a:solidFill>
+                  <a:srgbClr val="222222"/>
+                </a:solidFill>
+                <a:latin typeface="Calibri" pitchFamily="34" charset="0"/>
+                <a:ea typeface="Calibri" pitchFamily="34" charset="-122"/>
+                <a:cs typeface="Calibri" pitchFamily="34" charset="-120"/>
+              </a:rPr>
+              <a:t>「集計を見る」</a:t>
+            </a:r>
+            <a:pPr indent="0" marL="0">
+              <a:lnSpc>
+                <a:spcPct val="125000"/>
+              </a:lnSpc>
+              <a:buNone/>
+            </a:pPr>
+            <a:r>
+              <a:rPr lang="en-US" sz="1100" dirty="0">
+                <a:solidFill>
+                  <a:srgbClr val="222222"/>
+                </a:solidFill>
+                <a:latin typeface="Calibri" pitchFamily="34" charset="0"/>
+                <a:ea typeface="Calibri" pitchFamily="34" charset="-122"/>
+                <a:cs typeface="Calibri" pitchFamily="34" charset="-120"/>
+              </a:rPr>
+              <a:t>から開きます。</a:t>
+            </a:r>
+            <a:endParaRPr lang="en-US" sz="1100" dirty="0"/>
+          </a:p>
+        </p:txBody>
+      </p:sp>
+      <p:sp>
+        <p:nvSpPr>
+          <p:cNvPr id="22" name="Text 20"/>
+          <p:cNvSpPr txBox="1"/>
+          <p:nvPr/>
+        </p:nvSpPr>
+        <p:spPr>
+          <a:xfrm>
+            <a:off x="713232" y="7093903"/>
+            <a:ext cx="6281928" cy="257429"/>
+          </a:xfrm>
+          <a:prstGeom prst="rect">
+            <a:avLst/>
+          </a:prstGeom>
+          <a:noFill/>
+          <a:ln/>
+        </p:spPr>
+        <p:txBody>
+          <a:bodyPr wrap="square" lIns="0" tIns="0" rIns="0" bIns="0" rtlCol="0" anchor="t"/>
+          <a:lstStyle/>
+          <a:p>
+            <a:pPr marL="342900" indent="-342900">
+              <a:lnSpc>
+                <a:spcPct val="125000"/>
+              </a:lnSpc>
+              <a:buSzPct val="100000"/>
+              <a:buChar char="●"/>
+            </a:pPr>
+            <a:r>
+              <a:rPr lang="en-US" sz="1100" b="1" dirty="0">
+                <a:solidFill>
+                  <a:srgbClr val="222222"/>
+                </a:solidFill>
+                <a:latin typeface="Calibri" pitchFamily="34" charset="0"/>
+                <a:ea typeface="Calibri" pitchFamily="34" charset="-122"/>
+                <a:cs typeface="Calibri" pitchFamily="34" charset="-120"/>
+              </a:rPr>
+              <a:t>回答数と回答率</a:t>
+            </a:r>
+            <a:pPr indent="0" marL="0">
+              <a:lnSpc>
+                <a:spcPct val="125000"/>
+              </a:lnSpc>
+              <a:buNone/>
+            </a:pPr>
+            <a:r>
+              <a:rPr lang="en-US" sz="1100" dirty="0">
+                <a:solidFill>
+                  <a:srgbClr val="222222"/>
+                </a:solidFill>
+                <a:latin typeface="Calibri" pitchFamily="34" charset="0"/>
+                <a:ea typeface="Calibri" pitchFamily="34" charset="-122"/>
+                <a:cs typeface="Calibri" pitchFamily="34" charset="-120"/>
+              </a:rPr>
+              <a:t>（回答した来場者のうち何%が答えたか）</a:t>
+            </a:r>
+            <a:endParaRPr lang="en-US" sz="1100" dirty="0"/>
+          </a:p>
+        </p:txBody>
+      </p:sp>
+      <p:sp>
+        <p:nvSpPr>
+          <p:cNvPr id="23" name="Text 21"/>
+          <p:cNvSpPr txBox="1"/>
+          <p:nvPr/>
+        </p:nvSpPr>
+        <p:spPr>
+          <a:xfrm>
+            <a:off x="713232" y="7369620"/>
+            <a:ext cx="6281928" cy="257429"/>
+          </a:xfrm>
+          <a:prstGeom prst="rect">
+            <a:avLst/>
+          </a:prstGeom>
+          <a:noFill/>
+          <a:ln/>
+        </p:spPr>
+        <p:txBody>
+          <a:bodyPr wrap="square" lIns="0" tIns="0" rIns="0" bIns="0" rtlCol="0" anchor="t"/>
+          <a:lstStyle/>
+          <a:p>
+            <a:pPr marL="342900" indent="-342900">
+              <a:lnSpc>
+                <a:spcPct val="125000"/>
+              </a:lnSpc>
+              <a:buSzPct val="100000"/>
+              <a:buChar char="●"/>
+            </a:pPr>
+            <a:r>
+              <a:rPr lang="en-US" sz="1100" b="1" dirty="0">
+                <a:solidFill>
+                  <a:srgbClr val="222222"/>
+                </a:solidFill>
+                <a:latin typeface="Calibri" pitchFamily="34" charset="0"/>
+                <a:ea typeface="Calibri" pitchFamily="34" charset="-122"/>
+                <a:cs typeface="Calibri" pitchFamily="34" charset="-120"/>
+              </a:rPr>
+              <a:t>設問ごとのグラフ</a:t>
+            </a:r>
+            <a:pPr indent="0" marL="0">
+              <a:lnSpc>
+                <a:spcPct val="125000"/>
+              </a:lnSpc>
+              <a:buNone/>
+            </a:pPr>
+            <a:r>
+              <a:rPr lang="en-US" sz="1100" dirty="0">
+                <a:solidFill>
+                  <a:srgbClr val="222222"/>
+                </a:solidFill>
+                <a:latin typeface="Calibri" pitchFamily="34" charset="0"/>
+                <a:ea typeface="Calibri" pitchFamily="34" charset="-122"/>
+                <a:cs typeface="Calibri" pitchFamily="34" charset="-120"/>
+              </a:rPr>
+              <a:t>（企業の集計と同じ見た目）と</a:t>
+            </a:r>
+            <a:pPr indent="0" marL="0">
+              <a:lnSpc>
+                <a:spcPct val="125000"/>
+              </a:lnSpc>
+              <a:buNone/>
+            </a:pPr>
+            <a:r>
+              <a:rPr lang="en-US" sz="1100" b="1" dirty="0">
+                <a:solidFill>
+                  <a:srgbClr val="222222"/>
+                </a:solidFill>
+                <a:latin typeface="Calibri" pitchFamily="34" charset="0"/>
+                <a:ea typeface="Calibri" pitchFamily="34" charset="-122"/>
+                <a:cs typeface="Calibri" pitchFamily="34" charset="-120"/>
+              </a:rPr>
+              <a:t>自由記述の一覧</a:t>
+            </a:r>
+            <a:endParaRPr lang="en-US" sz="1100" dirty="0"/>
+          </a:p>
+        </p:txBody>
+      </p:sp>
+      <p:sp>
+        <p:nvSpPr>
+          <p:cNvPr id="24" name="Text 22"/>
+          <p:cNvSpPr txBox="1"/>
+          <p:nvPr/>
+        </p:nvSpPr>
+        <p:spPr>
+          <a:xfrm>
+            <a:off x="713232" y="7645337"/>
+            <a:ext cx="6281928" cy="257429"/>
+          </a:xfrm>
+          <a:prstGeom prst="rect">
+            <a:avLst/>
+          </a:prstGeom>
+          <a:noFill/>
+          <a:ln/>
+        </p:spPr>
+        <p:txBody>
+          <a:bodyPr wrap="square" lIns="0" tIns="0" rIns="0" bIns="0" rtlCol="0" anchor="t"/>
+          <a:lstStyle/>
+          <a:p>
+            <a:pPr marL="342900" indent="-342900">
+              <a:lnSpc>
+                <a:spcPct val="125000"/>
+              </a:lnSpc>
+              <a:buSzPct val="100000"/>
+              <a:buChar char="●"/>
+            </a:pPr>
+            <a:r>
+              <a:rPr lang="en-US" sz="1100" b="1" dirty="0">
+                <a:solidFill>
+                  <a:srgbClr val="222222"/>
+                </a:solidFill>
+                <a:latin typeface="Calibri" pitchFamily="34" charset="0"/>
+                <a:ea typeface="Calibri" pitchFamily="34" charset="-122"/>
+                <a:cs typeface="Calibri" pitchFamily="34" charset="-120"/>
+              </a:rPr>
+              <a:t>周回企業数との関係</a:t>
+            </a:r>
+            <a:pPr indent="0" marL="0">
+              <a:lnSpc>
+                <a:spcPct val="125000"/>
+              </a:lnSpc>
+              <a:buNone/>
+            </a:pPr>
+            <a:r>
+              <a:rPr lang="en-US" sz="1100" dirty="0">
+                <a:solidFill>
+                  <a:srgbClr val="222222"/>
+                </a:solidFill>
+                <a:latin typeface="Calibri" pitchFamily="34" charset="0"/>
+                <a:ea typeface="Calibri" pitchFamily="34" charset="-122"/>
+                <a:cs typeface="Calibri" pitchFamily="34" charset="-120"/>
+              </a:rPr>
+              <a:t>：たくさん回った方ほど評価が高いか</a:t>
+            </a:r>
+            <a:endParaRPr lang="en-US" sz="1100" dirty="0"/>
+          </a:p>
+        </p:txBody>
+      </p:sp>
+      <p:sp>
+        <p:nvSpPr>
+          <p:cNvPr id="25" name="Text 23"/>
+          <p:cNvSpPr txBox="1"/>
+          <p:nvPr/>
+        </p:nvSpPr>
+        <p:spPr>
+          <a:xfrm>
+            <a:off x="713232" y="7921054"/>
+            <a:ext cx="6281928" cy="257429"/>
+          </a:xfrm>
+          <a:prstGeom prst="rect">
+            <a:avLst/>
+          </a:prstGeom>
+          <a:noFill/>
+          <a:ln/>
+        </p:spPr>
+        <p:txBody>
+          <a:bodyPr wrap="square" lIns="0" tIns="0" rIns="0" bIns="0" rtlCol="0" anchor="t"/>
+          <a:lstStyle/>
+          <a:p>
+            <a:pPr marL="342900" indent="-342900">
+              <a:lnSpc>
+                <a:spcPct val="125000"/>
+              </a:lnSpc>
+              <a:buSzPct val="100000"/>
+              <a:buChar char="●"/>
+            </a:pPr>
+            <a:r>
+              <a:rPr lang="en-US" sz="1100" b="1" dirty="0">
+                <a:solidFill>
+                  <a:srgbClr val="222222"/>
+                </a:solidFill>
+                <a:latin typeface="Calibri" pitchFamily="34" charset="0"/>
+                <a:ea typeface="Calibri" pitchFamily="34" charset="-122"/>
+                <a:cs typeface="Calibri" pitchFamily="34" charset="-120"/>
+              </a:rPr>
+              <a:t>来場人数との関係</a:t>
+            </a:r>
+            <a:pPr indent="0" marL="0">
+              <a:lnSpc>
+                <a:spcPct val="125000"/>
+              </a:lnSpc>
+              <a:buNone/>
+            </a:pPr>
+            <a:r>
+              <a:rPr lang="en-US" sz="1100" dirty="0">
+                <a:solidFill>
+                  <a:srgbClr val="222222"/>
+                </a:solidFill>
+                <a:latin typeface="Calibri" pitchFamily="34" charset="0"/>
+                <a:ea typeface="Calibri" pitchFamily="34" charset="-122"/>
+                <a:cs typeface="Calibri" pitchFamily="34" charset="-120"/>
+              </a:rPr>
+              <a:t>：1人で来た方とグループで来た方の違い</a:t>
+            </a:r>
+            <a:endParaRPr lang="en-US" sz="1100" dirty="0"/>
+          </a:p>
+        </p:txBody>
+      </p:sp>
+      <p:sp>
+        <p:nvSpPr>
+          <p:cNvPr id="26" name="Shape 24"/>
+          <p:cNvSpPr/>
+          <p:nvPr/>
+        </p:nvSpPr>
+        <p:spPr>
+          <a:xfrm>
+            <a:off x="566928" y="8196771"/>
+            <a:ext cx="6428232" cy="624459"/>
+          </a:xfrm>
+          <a:prstGeom prst="roundRect">
+            <a:avLst>
+              <a:gd name="adj" fmla="val 8786"/>
+            </a:avLst>
+          </a:prstGeom>
+          <a:solidFill>
+            <a:srgbClr val="E8ECF8"/>
+          </a:solidFill>
+          <a:ln w="9525">
+            <a:solidFill>
+              <a:srgbClr val="1E2761"/>
+            </a:solidFill>
+            <a:prstDash val="solid"/>
+          </a:ln>
+        </p:spPr>
+      </p:sp>
+      <p:sp>
+        <p:nvSpPr>
+          <p:cNvPr id="27" name="Text 25"/>
+          <p:cNvSpPr txBox="1"/>
+          <p:nvPr/>
+        </p:nvSpPr>
+        <p:spPr>
+          <a:xfrm>
+            <a:off x="658368" y="8288211"/>
             <a:ext cx="237744" cy="237744"/>
           </a:xfrm>
           <a:prstGeom prst="rect">
@@ -21354,13 +21773,13 @@
       </p:sp>
       <p:sp>
         <p:nvSpPr>
-          <p:cNvPr id="20" name="Text 18"/>
-          <p:cNvSpPr txBox="1"/>
-          <p:nvPr/>
-        </p:nvSpPr>
-        <p:spPr>
-          <a:xfrm>
-            <a:off x="950976" y="6111494"/>
+          <p:cNvPr id="28" name="Text 26"/>
+          <p:cNvSpPr txBox="1"/>
+          <p:nvPr/>
+        </p:nvSpPr>
+        <p:spPr>
+          <a:xfrm>
+            <a:off x="950976" y="8306499"/>
             <a:ext cx="5925312" cy="441579"/>
           </a:xfrm>
           <a:prstGeom prst="rect">
@@ -21430,7 +21849,7 @@
       </p:sp>
       <p:sp>
         <p:nvSpPr>
-          <p:cNvPr id="21" name="Text 19"/>
+          <p:cNvPr id="29" name="Text 27"/>
           <p:cNvSpPr txBox="1"/>
           <p:nvPr/>
         </p:nvSpPr>

--- a/docs/manual-organizer.pptx
+++ b/docs/manual-organizer.pptx
@@ -38,9 +38,11 @@
     <p:sldId id="286" r:id="rId32"/>
     <p:sldId id="287" r:id="rId33"/>
     <p:sldId id="288" r:id="rId34"/>
+    <p:sldId id="289" r:id="rId35"/>
+    <p:sldId id="290" r:id="rId36"/>
   </p:sldIdLst>
   <p:notesMasterIdLst>
-    <p:notesMasterId r:id="rId35"/>
+    <p:notesMasterId r:id="rId37"/>
   </p:notesMasterIdLst>
   <p:sldSz cx="7562088" cy="10689336"/>
   <p:notesSz cx="10689336" cy="7562088"/>
@@ -2846,6 +2848,182 @@
             <a:fld id="{F7021451-1387-4CA6-816F-3879F97B5CBC}" type="slidenum">
               <a:rPr lang="en-US"/>
               <a:t>33</a:t>
+            </a:fld>
+            <a:endParaRPr lang="en-US"/>
+          </a:p>
+        </p:txBody>
+      </p:sp>
+    </p:spTree>
+    <p:extLst>
+      <p:ext uri="{BB962C8B-B14F-4D97-AF65-F5344CB8AC3E}">
+        <p14:creationId xmlns:p14="http://schemas.microsoft.com/office/powerpoint/2010/main" val="1024086991"/>
+      </p:ext>
+    </p:extLst>
+  </p:cSld>
+  <p:clrMapOvr>
+    <a:masterClrMapping/>
+  </p:clrMapOvr>
+</p:notes>
+</file>
+
+<file path=ppt/notesSlides/notesSlide34.xml><?xml version="1.0" encoding="utf-8"?>
+<p:notes xmlns:a="http://schemas.openxmlformats.org/drawingml/2006/main" xmlns:r="http://schemas.openxmlformats.org/officeDocument/2006/relationships" xmlns:p="http://schemas.openxmlformats.org/presentationml/2006/main">
+  <p:cSld>
+    <p:spTree>
+      <p:nvGrpSpPr>
+        <p:cNvPr id="1" name=""/>
+        <p:cNvGrpSpPr/>
+        <p:nvPr/>
+      </p:nvGrpSpPr>
+      <p:grpSpPr>
+        <a:xfrm>
+          <a:off x="0" y="0"/>
+          <a:ext cx="0" cy="0"/>
+          <a:chOff x="0" y="0"/>
+          <a:chExt cx="0" cy="0"/>
+        </a:xfrm>
+      </p:grpSpPr>
+      <p:sp>
+        <p:nvSpPr>
+          <p:cNvPr id="2" name="Slide Image Placeholder 1"/>
+          <p:cNvSpPr>
+            <a:spLocks noGrp="1" noRot="1" noChangeAspect="1"/>
+          </p:cNvSpPr>
+          <p:nvPr>
+            <p:ph type="sldImg"/>
+          </p:nvPr>
+        </p:nvSpPr>
+        <p:spPr/>
+      </p:sp>
+      <p:sp>
+        <p:nvSpPr>
+          <p:cNvPr id="3" name="Notes Placeholder 2"/>
+          <p:cNvSpPr>
+            <a:spLocks noGrp="1"/>
+          </p:cNvSpPr>
+          <p:nvPr>
+            <p:ph type="body" idx="1"/>
+          </p:nvPr>
+        </p:nvSpPr>
+        <p:spPr/>
+        <p:txBody>
+          <a:bodyPr/>
+          <a:lstStyle/>
+          <a:p>
+            <a:r>
+              <a:rPr lang="en-US" dirty="0"/>
+              <a:t/>
+            </a:r>
+            <a:endParaRPr lang="en-US" dirty="0"/>
+          </a:p>
+        </p:txBody>
+      </p:sp>
+      <p:sp>
+        <p:nvSpPr>
+          <p:cNvPr id="4" name="Slide Number Placeholder 3"/>
+          <p:cNvSpPr>
+            <a:spLocks noGrp="1"/>
+          </p:cNvSpPr>
+          <p:nvPr>
+            <p:ph type="sldNum" sz="quarter" idx="10"/>
+          </p:nvPr>
+        </p:nvSpPr>
+        <p:spPr/>
+        <p:txBody>
+          <a:bodyPr/>
+          <a:lstStyle/>
+          <a:p>
+            <a:fld id="{F7021451-1387-4CA6-816F-3879F97B5CBC}" type="slidenum">
+              <a:rPr lang="en-US"/>
+              <a:t>34</a:t>
+            </a:fld>
+            <a:endParaRPr lang="en-US"/>
+          </a:p>
+        </p:txBody>
+      </p:sp>
+    </p:spTree>
+    <p:extLst>
+      <p:ext uri="{BB962C8B-B14F-4D97-AF65-F5344CB8AC3E}">
+        <p14:creationId xmlns:p14="http://schemas.microsoft.com/office/powerpoint/2010/main" val="1024086991"/>
+      </p:ext>
+    </p:extLst>
+  </p:cSld>
+  <p:clrMapOvr>
+    <a:masterClrMapping/>
+  </p:clrMapOvr>
+</p:notes>
+</file>
+
+<file path=ppt/notesSlides/notesSlide35.xml><?xml version="1.0" encoding="utf-8"?>
+<p:notes xmlns:a="http://schemas.openxmlformats.org/drawingml/2006/main" xmlns:r="http://schemas.openxmlformats.org/officeDocument/2006/relationships" xmlns:p="http://schemas.openxmlformats.org/presentationml/2006/main">
+  <p:cSld>
+    <p:spTree>
+      <p:nvGrpSpPr>
+        <p:cNvPr id="1" name=""/>
+        <p:cNvGrpSpPr/>
+        <p:nvPr/>
+      </p:nvGrpSpPr>
+      <p:grpSpPr>
+        <a:xfrm>
+          <a:off x="0" y="0"/>
+          <a:ext cx="0" cy="0"/>
+          <a:chOff x="0" y="0"/>
+          <a:chExt cx="0" cy="0"/>
+        </a:xfrm>
+      </p:grpSpPr>
+      <p:sp>
+        <p:nvSpPr>
+          <p:cNvPr id="2" name="Slide Image Placeholder 1"/>
+          <p:cNvSpPr>
+            <a:spLocks noGrp="1" noRot="1" noChangeAspect="1"/>
+          </p:cNvSpPr>
+          <p:nvPr>
+            <p:ph type="sldImg"/>
+          </p:nvPr>
+        </p:nvSpPr>
+        <p:spPr/>
+      </p:sp>
+      <p:sp>
+        <p:nvSpPr>
+          <p:cNvPr id="3" name="Notes Placeholder 2"/>
+          <p:cNvSpPr>
+            <a:spLocks noGrp="1"/>
+          </p:cNvSpPr>
+          <p:nvPr>
+            <p:ph type="body" idx="1"/>
+          </p:nvPr>
+        </p:nvSpPr>
+        <p:spPr/>
+        <p:txBody>
+          <a:bodyPr/>
+          <a:lstStyle/>
+          <a:p>
+            <a:r>
+              <a:rPr lang="en-US" dirty="0"/>
+              <a:t/>
+            </a:r>
+            <a:endParaRPr lang="en-US" dirty="0"/>
+          </a:p>
+        </p:txBody>
+      </p:sp>
+      <p:sp>
+        <p:nvSpPr>
+          <p:cNvPr id="4" name="Slide Number Placeholder 3"/>
+          <p:cNvSpPr>
+            <a:spLocks noGrp="1"/>
+          </p:cNvSpPr>
+          <p:nvPr>
+            <p:ph type="sldNum" sz="quarter" idx="10"/>
+          </p:nvPr>
+        </p:nvSpPr>
+        <p:spPr/>
+        <p:txBody>
+          <a:bodyPr/>
+          <a:lstStyle/>
+          <a:p>
+            <a:fld id="{F7021451-1387-4CA6-816F-3879F97B5CBC}" type="slidenum">
+              <a:rPr lang="en-US"/>
+              <a:t>35</a:t>
             </a:fld>
             <a:endParaRPr lang="en-US"/>
           </a:p>
@@ -17239,7 +17417,7 @@
                 <a:ea typeface="Calibri" pitchFamily="34" charset="-122"/>
                 <a:cs typeface="Calibri" pitchFamily="34" charset="-120"/>
               </a:rPr>
-              <a:t>）を入れて、設問編集画面で</a:t>
+              <a:t>）を入れて、設問編集画面の</a:t>
             </a:r>
             <a:endParaRPr lang="en-US" sz="1100" dirty="0"/>
           </a:p>
@@ -17281,7 +17459,7 @@
                 <a:ea typeface="Calibri" pitchFamily="34" charset="-122"/>
                 <a:cs typeface="Calibri" pitchFamily="34" charset="-120"/>
               </a:rPr>
-              <a:t>「この回答を来場人数として集計する」</a:t>
+              <a:t>「集計での扱い」</a:t>
             </a:r>
             <a:pPr indent="0" marL="0">
               <a:lnSpc>
@@ -17298,7 +17476,41 @@
                 <a:ea typeface="Calibri" pitchFamily="34" charset="-122"/>
                 <a:cs typeface="Calibri" pitchFamily="34" charset="-120"/>
               </a:rPr>
-              <a:t>にチェックを入れると、人数が集計されます。</a:t>
+              <a:t>で</a:t>
+            </a:r>
+            <a:pPr indent="0" marL="0">
+              <a:lnSpc>
+                <a:spcPct val="125000"/>
+              </a:lnSpc>
+              <a:buNone/>
+            </a:pPr>
+            <a:r>
+              <a:rPr lang="en-US" sz="1100" b="1" dirty="0">
+                <a:solidFill>
+                  <a:srgbClr val="222222"/>
+                </a:solidFill>
+                <a:latin typeface="Calibri" pitchFamily="34" charset="0"/>
+                <a:ea typeface="Calibri" pitchFamily="34" charset="-122"/>
+                <a:cs typeface="Calibri" pitchFamily="34" charset="-120"/>
+              </a:rPr>
+              <a:t>「来場人数として集計する」</a:t>
+            </a:r>
+            <a:pPr indent="0" marL="0">
+              <a:lnSpc>
+                <a:spcPct val="125000"/>
+              </a:lnSpc>
+              <a:buNone/>
+            </a:pPr>
+            <a:r>
+              <a:rPr lang="en-US" sz="1100" dirty="0">
+                <a:solidFill>
+                  <a:srgbClr val="222222"/>
+                </a:solidFill>
+                <a:latin typeface="Calibri" pitchFamily="34" charset="0"/>
+                <a:ea typeface="Calibri" pitchFamily="34" charset="-122"/>
+                <a:cs typeface="Calibri" pitchFamily="34" charset="-120"/>
+              </a:rPr>
+              <a:t>を選ぶと、人数が集計されます。</a:t>
             </a:r>
             <a:endParaRPr lang="en-US" sz="1100" dirty="0"/>
           </a:p>
@@ -17306,13 +17518,155 @@
       </p:sp>
       <p:sp>
         <p:nvSpPr>
-          <p:cNvPr id="6" name="Text 4"/>
-          <p:cNvSpPr txBox="1"/>
-          <p:nvPr/>
-        </p:nvSpPr>
-        <p:spPr>
-          <a:xfrm>
-            <a:off x="713232" y="2069338"/>
+          <p:cNvPr id="6" name="Shape 4"/>
+          <p:cNvSpPr/>
+          <p:nvPr/>
+        </p:nvSpPr>
+        <p:spPr>
+          <a:xfrm>
+            <a:off x="566928" y="2069338"/>
+            <a:ext cx="6428232" cy="431102"/>
+          </a:xfrm>
+          <a:prstGeom prst="roundRect">
+            <a:avLst>
+              <a:gd name="adj" fmla="val 12726"/>
+            </a:avLst>
+          </a:prstGeom>
+          <a:solidFill>
+            <a:srgbClr val="FDF0E6"/>
+          </a:solidFill>
+          <a:ln w="9525">
+            <a:solidFill>
+              <a:srgbClr val="E08A3C"/>
+            </a:solidFill>
+            <a:prstDash val="solid"/>
+          </a:ln>
+        </p:spPr>
+      </p:sp>
+      <p:sp>
+        <p:nvSpPr>
+          <p:cNvPr id="7" name="Text 5"/>
+          <p:cNvSpPr txBox="1"/>
+          <p:nvPr/>
+        </p:nvSpPr>
+        <p:spPr>
+          <a:xfrm>
+            <a:off x="658368" y="2160778"/>
+            <a:ext cx="237744" cy="237744"/>
+          </a:xfrm>
+          <a:prstGeom prst="rect">
+            <a:avLst/>
+          </a:prstGeom>
+          <a:noFill/>
+          <a:ln/>
+        </p:spPr>
+        <p:txBody>
+          <a:bodyPr wrap="square" lIns="0" tIns="0" rIns="0" bIns="0" rtlCol="0" anchor="ctr"/>
+          <a:lstStyle/>
+          <a:p>
+            <a:pPr algn="ctr" indent="0" marL="0">
+              <a:buNone/>
+            </a:pPr>
+            <a:r>
+              <a:rPr lang="en-US" sz="1200" b="1" dirty="0">
+                <a:solidFill>
+                  <a:srgbClr val="C25A17"/>
+                </a:solidFill>
+                <a:latin typeface="Calibri" pitchFamily="34" charset="0"/>
+                <a:ea typeface="Calibri" pitchFamily="34" charset="-122"/>
+                <a:cs typeface="Calibri" pitchFamily="34" charset="-120"/>
+              </a:rPr>
+              <a:t>！</a:t>
+            </a:r>
+            <a:endParaRPr lang="en-US" sz="1200" dirty="0"/>
+          </a:p>
+        </p:txBody>
+      </p:sp>
+      <p:sp>
+        <p:nvSpPr>
+          <p:cNvPr id="8" name="Text 6"/>
+          <p:cNvSpPr txBox="1"/>
+          <p:nvPr/>
+        </p:nvSpPr>
+        <p:spPr>
+          <a:xfrm>
+            <a:off x="950976" y="2179066"/>
+            <a:ext cx="5925312" cy="248221"/>
+          </a:xfrm>
+          <a:prstGeom prst="rect">
+            <a:avLst/>
+          </a:prstGeom>
+          <a:noFill/>
+          <a:ln/>
+        </p:spPr>
+        <p:txBody>
+          <a:bodyPr wrap="square" lIns="0" tIns="0" rIns="0" bIns="0" rtlCol="0" anchor="t"/>
+          <a:lstStyle/>
+          <a:p>
+            <a:pPr indent="0" marL="0">
+              <a:lnSpc>
+                <a:spcPct val="120000"/>
+              </a:lnSpc>
+              <a:buNone/>
+            </a:pPr>
+            <a:r>
+              <a:rPr lang="en-US" sz="1050" dirty="0">
+                <a:solidFill>
+                  <a:srgbClr val="222222"/>
+                </a:solidFill>
+                <a:latin typeface="Calibri" pitchFamily="34" charset="0"/>
+                <a:ea typeface="Calibri" pitchFamily="34" charset="-122"/>
+                <a:cs typeface="Calibri" pitchFamily="34" charset="-120"/>
+              </a:rPr>
+              <a:t>「集計での扱い」は</a:t>
+            </a:r>
+            <a:pPr indent="0" marL="0">
+              <a:lnSpc>
+                <a:spcPct val="120000"/>
+              </a:lnSpc>
+              <a:buNone/>
+            </a:pPr>
+            <a:r>
+              <a:rPr lang="en-US" sz="1050" b="1" dirty="0">
+                <a:solidFill>
+                  <a:srgbClr val="222222"/>
+                </a:solidFill>
+                <a:latin typeface="Calibri" pitchFamily="34" charset="0"/>
+                <a:ea typeface="Calibri" pitchFamily="34" charset="-122"/>
+                <a:cs typeface="Calibri" pitchFamily="34" charset="-120"/>
+              </a:rPr>
+              <a:t>数値入力の設問にだけ</a:t>
+            </a:r>
+            <a:pPr indent="0" marL="0">
+              <a:lnSpc>
+                <a:spcPct val="120000"/>
+              </a:lnSpc>
+              <a:buNone/>
+            </a:pPr>
+            <a:r>
+              <a:rPr lang="en-US" sz="1050" dirty="0">
+                <a:solidFill>
+                  <a:srgbClr val="222222"/>
+                </a:solidFill>
+                <a:latin typeface="Calibri" pitchFamily="34" charset="0"/>
+                <a:ea typeface="Calibri" pitchFamily="34" charset="-122"/>
+                <a:cs typeface="Calibri" pitchFamily="34" charset="-120"/>
+              </a:rPr>
+              <a:t>出ます。種類を数値入力に変えると現れます。</a:t>
+            </a:r>
+            <a:endParaRPr lang="en-US" sz="1050" dirty="0"/>
+          </a:p>
+        </p:txBody>
+      </p:sp>
+      <p:sp>
+        <p:nvSpPr>
+          <p:cNvPr id="9" name="Text 7"/>
+          <p:cNvSpPr txBox="1"/>
+          <p:nvPr/>
+        </p:nvSpPr>
+        <p:spPr>
+          <a:xfrm>
+            <a:off x="713232" y="2573592"/>
             <a:ext cx="6281928" cy="257429"/>
           </a:xfrm>
           <a:prstGeom prst="rect">
@@ -17366,13 +17720,13 @@
       </p:sp>
       <p:sp>
         <p:nvSpPr>
-          <p:cNvPr id="7" name="Text 5"/>
-          <p:cNvSpPr txBox="1"/>
-          <p:nvPr/>
-        </p:nvSpPr>
-        <p:spPr>
-          <a:xfrm>
-            <a:off x="713232" y="2345055"/>
+          <p:cNvPr id="10" name="Text 8"/>
+          <p:cNvSpPr txBox="1"/>
+          <p:nvPr/>
+        </p:nvSpPr>
+        <p:spPr>
+          <a:xfrm>
+            <a:off x="713232" y="2849309"/>
             <a:ext cx="6281928" cy="257429"/>
           </a:xfrm>
           <a:prstGeom prst="rect">
@@ -17426,13 +17780,13 @@
       </p:sp>
       <p:sp>
         <p:nvSpPr>
-          <p:cNvPr id="8" name="Text 6"/>
-          <p:cNvSpPr txBox="1"/>
-          <p:nvPr/>
-        </p:nvSpPr>
-        <p:spPr>
-          <a:xfrm>
-            <a:off x="713232" y="2620772"/>
+          <p:cNvPr id="11" name="Text 9"/>
+          <p:cNvSpPr txBox="1"/>
+          <p:nvPr/>
+        </p:nvSpPr>
+        <p:spPr>
+          <a:xfrm>
+            <a:off x="713232" y="3125026"/>
             <a:ext cx="6281928" cy="257429"/>
           </a:xfrm>
           <a:prstGeom prst="rect">
@@ -17520,13 +17874,13 @@
       </p:sp>
       <p:sp>
         <p:nvSpPr>
-          <p:cNvPr id="9" name="Text 7"/>
-          <p:cNvSpPr txBox="1"/>
-          <p:nvPr/>
-        </p:nvSpPr>
-        <p:spPr>
-          <a:xfrm>
-            <a:off x="566928" y="2896489"/>
+          <p:cNvPr id="12" name="Text 10"/>
+          <p:cNvSpPr txBox="1"/>
+          <p:nvPr/>
+        </p:nvSpPr>
+        <p:spPr>
+          <a:xfrm>
+            <a:off x="566928" y="3400743"/>
             <a:ext cx="6428232" cy="257429"/>
           </a:xfrm>
           <a:prstGeom prst="rect">
@@ -17596,13 +17950,13 @@
       </p:sp>
       <p:sp>
         <p:nvSpPr>
-          <p:cNvPr id="10" name="Text 8"/>
-          <p:cNvSpPr txBox="1"/>
-          <p:nvPr/>
-        </p:nvSpPr>
-        <p:spPr>
-          <a:xfrm>
-            <a:off x="566928" y="3190494"/>
+          <p:cNvPr id="13" name="Text 11"/>
+          <p:cNvSpPr txBox="1"/>
+          <p:nvPr/>
+        </p:nvSpPr>
+        <p:spPr>
+          <a:xfrm>
+            <a:off x="566928" y="3694748"/>
             <a:ext cx="6428232" cy="459994"/>
           </a:xfrm>
           <a:prstGeom prst="rect">
@@ -17672,13 +18026,13 @@
       </p:sp>
       <p:sp>
         <p:nvSpPr>
-          <p:cNvPr id="11" name="Text 9"/>
-          <p:cNvSpPr txBox="1"/>
-          <p:nvPr/>
-        </p:nvSpPr>
-        <p:spPr>
-          <a:xfrm>
-            <a:off x="566928" y="3687064"/>
+          <p:cNvPr id="14" name="Text 12"/>
+          <p:cNvSpPr txBox="1"/>
+          <p:nvPr/>
+        </p:nvSpPr>
+        <p:spPr>
+          <a:xfrm>
+            <a:off x="566928" y="4191318"/>
             <a:ext cx="6428232" cy="257429"/>
           </a:xfrm>
           <a:prstGeom prst="rect">
@@ -17782,7 +18136,7 @@
       </p:sp>
       <p:pic>
         <p:nvPicPr>
-          <p:cNvPr id="12" name="Image 0" descr="C:\Users\sato\Desktop\enque\docs\images\p-survey-number.png">    </p:cNvPr>
+          <p:cNvPr id="15" name="Image 0" descr="C:\Users\sato\Desktop\enque\docs\images\p-survey-number.png">    </p:cNvPr>
           <p:cNvPicPr>
             <a:picLocks noChangeAspect="1"/>
           </p:cNvPicPr>
@@ -17796,7 +18150,7 @@
         </p:blipFill>
         <p:spPr>
           <a:xfrm>
-            <a:off x="2654866" y="3981069"/>
+            <a:off x="2654866" y="4485323"/>
             <a:ext cx="2252356" cy="3474720"/>
           </a:xfrm>
           <a:prstGeom prst="rect">
@@ -17806,13 +18160,13 @@
       </p:pic>
       <p:sp>
         <p:nvSpPr>
-          <p:cNvPr id="13" name="Text 10"/>
-          <p:cNvSpPr txBox="1"/>
-          <p:nvPr/>
-        </p:nvSpPr>
-        <p:spPr>
-          <a:xfrm>
-            <a:off x="566928" y="7510653"/>
+          <p:cNvPr id="16" name="Text 13"/>
+          <p:cNvSpPr txBox="1"/>
+          <p:nvPr/>
+        </p:nvSpPr>
+        <p:spPr>
+          <a:xfrm>
+            <a:off x="566928" y="8014907"/>
             <a:ext cx="6428232" cy="274320"/>
           </a:xfrm>
           <a:prstGeom prst="rect">
@@ -17845,13 +18199,13 @@
       </p:sp>
       <p:sp>
         <p:nvSpPr>
-          <p:cNvPr id="14" name="Shape 11"/>
+          <p:cNvPr id="17" name="Shape 14"/>
           <p:cNvSpPr/>
           <p:nvPr/>
         </p:nvSpPr>
         <p:spPr>
           <a:xfrm>
-            <a:off x="566928" y="7839837"/>
+            <a:off x="566928" y="8344091"/>
             <a:ext cx="6428232" cy="431102"/>
           </a:xfrm>
           <a:prstGeom prst="roundRect">
@@ -17872,13 +18226,13 @@
       </p:sp>
       <p:sp>
         <p:nvSpPr>
-          <p:cNvPr id="15" name="Text 12"/>
-          <p:cNvSpPr txBox="1"/>
-          <p:nvPr/>
-        </p:nvSpPr>
-        <p:spPr>
-          <a:xfrm>
-            <a:off x="658368" y="7931277"/>
+          <p:cNvPr id="18" name="Text 15"/>
+          <p:cNvSpPr txBox="1"/>
+          <p:nvPr/>
+        </p:nvSpPr>
+        <p:spPr>
+          <a:xfrm>
+            <a:off x="658368" y="8435531"/>
             <a:ext cx="237744" cy="237744"/>
           </a:xfrm>
           <a:prstGeom prst="rect">
@@ -17911,13 +18265,13 @@
       </p:sp>
       <p:sp>
         <p:nvSpPr>
-          <p:cNvPr id="16" name="Text 13"/>
-          <p:cNvSpPr txBox="1"/>
-          <p:nvPr/>
-        </p:nvSpPr>
-        <p:spPr>
-          <a:xfrm>
-            <a:off x="950976" y="7949565"/>
+          <p:cNvPr id="19" name="Text 16"/>
+          <p:cNvSpPr txBox="1"/>
+          <p:nvPr/>
+        </p:nvSpPr>
+        <p:spPr>
+          <a:xfrm>
+            <a:off x="950976" y="8453819"/>
             <a:ext cx="5925312" cy="248221"/>
           </a:xfrm>
           <a:prstGeom prst="rect">
@@ -17987,13 +18341,13 @@
       </p:sp>
       <p:sp>
         <p:nvSpPr>
-          <p:cNvPr id="17" name="Shape 14"/>
+          <p:cNvPr id="20" name="Shape 17"/>
           <p:cNvSpPr/>
           <p:nvPr/>
         </p:nvSpPr>
         <p:spPr>
           <a:xfrm>
-            <a:off x="566928" y="8344091"/>
+            <a:off x="566928" y="8848344"/>
             <a:ext cx="6428232" cy="431102"/>
           </a:xfrm>
           <a:prstGeom prst="roundRect">
@@ -18014,13 +18368,13 @@
       </p:sp>
       <p:sp>
         <p:nvSpPr>
-          <p:cNvPr id="18" name="Text 15"/>
-          <p:cNvSpPr txBox="1"/>
-          <p:nvPr/>
-        </p:nvSpPr>
-        <p:spPr>
-          <a:xfrm>
-            <a:off x="658368" y="8435531"/>
+          <p:cNvPr id="21" name="Text 18"/>
+          <p:cNvSpPr txBox="1"/>
+          <p:nvPr/>
+        </p:nvSpPr>
+        <p:spPr>
+          <a:xfrm>
+            <a:off x="658368" y="8939784"/>
             <a:ext cx="237744" cy="237744"/>
           </a:xfrm>
           <a:prstGeom prst="rect">
@@ -18053,13 +18407,13 @@
       </p:sp>
       <p:sp>
         <p:nvSpPr>
-          <p:cNvPr id="19" name="Text 16"/>
-          <p:cNvSpPr txBox="1"/>
-          <p:nvPr/>
-        </p:nvSpPr>
-        <p:spPr>
-          <a:xfrm>
-            <a:off x="950976" y="8453819"/>
+          <p:cNvPr id="22" name="Text 19"/>
+          <p:cNvSpPr txBox="1"/>
+          <p:nvPr/>
+        </p:nvSpPr>
+        <p:spPr>
+          <a:xfrm>
+            <a:off x="950976" y="8958072"/>
             <a:ext cx="5925312" cy="248221"/>
           </a:xfrm>
           <a:prstGeom prst="rect">
@@ -18095,13 +18449,13 @@
       </p:sp>
       <p:sp>
         <p:nvSpPr>
-          <p:cNvPr id="20" name="Shape 17"/>
+          <p:cNvPr id="23" name="Shape 20"/>
           <p:cNvSpPr/>
           <p:nvPr/>
         </p:nvSpPr>
         <p:spPr>
           <a:xfrm>
-            <a:off x="566928" y="8848344"/>
+            <a:off x="566928" y="9352597"/>
             <a:ext cx="6428232" cy="431102"/>
           </a:xfrm>
           <a:prstGeom prst="roundRect">
@@ -18122,13 +18476,13 @@
       </p:sp>
       <p:sp>
         <p:nvSpPr>
-          <p:cNvPr id="21" name="Text 18"/>
-          <p:cNvSpPr txBox="1"/>
-          <p:nvPr/>
-        </p:nvSpPr>
-        <p:spPr>
-          <a:xfrm>
-            <a:off x="658368" y="8939784"/>
+          <p:cNvPr id="24" name="Text 21"/>
+          <p:cNvSpPr txBox="1"/>
+          <p:nvPr/>
+        </p:nvSpPr>
+        <p:spPr>
+          <a:xfrm>
+            <a:off x="658368" y="9444037"/>
             <a:ext cx="237744" cy="237744"/>
           </a:xfrm>
           <a:prstGeom prst="rect">
@@ -18161,13 +18515,13 @@
       </p:sp>
       <p:sp>
         <p:nvSpPr>
-          <p:cNvPr id="22" name="Text 19"/>
-          <p:cNvSpPr txBox="1"/>
-          <p:nvPr/>
-        </p:nvSpPr>
-        <p:spPr>
-          <a:xfrm>
-            <a:off x="950976" y="8958072"/>
+          <p:cNvPr id="25" name="Text 22"/>
+          <p:cNvSpPr txBox="1"/>
+          <p:nvPr/>
+        </p:nvSpPr>
+        <p:spPr>
+          <a:xfrm>
+            <a:off x="950976" y="9462325"/>
             <a:ext cx="5925312" cy="248221"/>
           </a:xfrm>
           <a:prstGeom prst="rect">
@@ -18237,7 +18591,7 @@
       </p:sp>
       <p:sp>
         <p:nvSpPr>
-          <p:cNvPr id="23" name="Text 20"/>
+          <p:cNvPr id="26" name="Text 23"/>
           <p:cNvSpPr txBox="1"/>
           <p:nvPr/>
         </p:nvSpPr>
@@ -18590,7 +18944,7 @@
                 <a:ea typeface="Calibri" pitchFamily="34" charset="-122"/>
                 <a:cs typeface="Calibri" pitchFamily="34" charset="-120"/>
               </a:rPr>
-              <a:t>終了後1：受付を締める</a:t>
+              <a:t>当日：グループの構成を集計する</a:t>
             </a:r>
             <a:endParaRPr lang="en-US" sz="2200" dirty="0"/>
           </a:p>
@@ -18598,13 +18952,89 @@
       </p:sp>
       <p:sp>
         <p:nvSpPr>
-          <p:cNvPr id="4" name="Shape 2"/>
+          <p:cNvPr id="4" name="Text 2"/>
+          <p:cNvSpPr txBox="1"/>
+          <p:nvPr/>
+        </p:nvSpPr>
+        <p:spPr>
+          <a:xfrm>
+            <a:off x="566928" y="1481328"/>
+            <a:ext cx="6428232" cy="459994"/>
+          </a:xfrm>
+          <a:prstGeom prst="rect">
+            <a:avLst/>
+          </a:prstGeom>
+          <a:noFill/>
+          <a:ln/>
+        </p:spPr>
+        <p:txBody>
+          <a:bodyPr wrap="square" lIns="0" tIns="0" rIns="0" bIns="0" rtlCol="0" anchor="t"/>
+          <a:lstStyle/>
+          <a:p>
+            <a:pPr indent="0" marL="0">
+              <a:lnSpc>
+                <a:spcPct val="125000"/>
+              </a:lnSpc>
+              <a:buNone/>
+            </a:pPr>
+            <a:r>
+              <a:rPr lang="en-US" sz="1100" dirty="0">
+                <a:solidFill>
+                  <a:srgbClr val="222222"/>
+                </a:solidFill>
+                <a:latin typeface="Calibri" pitchFamily="34" charset="0"/>
+                <a:ea typeface="Calibri" pitchFamily="34" charset="-122"/>
+                <a:cs typeface="Calibri" pitchFamily="34" charset="-120"/>
+              </a:rPr>
+              <a:t>「大人 ◯人」「小学生 ◯人」のように</a:t>
+            </a:r>
+            <a:pPr indent="0" marL="0">
+              <a:lnSpc>
+                <a:spcPct val="125000"/>
+              </a:lnSpc>
+              <a:buNone/>
+            </a:pPr>
+            <a:r>
+              <a:rPr lang="en-US" sz="1100" b="1" dirty="0">
+                <a:solidFill>
+                  <a:srgbClr val="222222"/>
+                </a:solidFill>
+                <a:latin typeface="Calibri" pitchFamily="34" charset="0"/>
+                <a:ea typeface="Calibri" pitchFamily="34" charset="-122"/>
+                <a:cs typeface="Calibri" pitchFamily="34" charset="-120"/>
+              </a:rPr>
+              <a:t>区分ごとの人数</a:t>
+            </a:r>
+            <a:pPr indent="0" marL="0">
+              <a:lnSpc>
+                <a:spcPct val="125000"/>
+              </a:lnSpc>
+              <a:buNone/>
+            </a:pPr>
+            <a:r>
+              <a:rPr lang="en-US" sz="1100" dirty="0">
+                <a:solidFill>
+                  <a:srgbClr val="222222"/>
+                </a:solidFill>
+                <a:latin typeface="Calibri" pitchFamily="34" charset="0"/>
+                <a:ea typeface="Calibri" pitchFamily="34" charset="-122"/>
+                <a:cs typeface="Calibri" pitchFamily="34" charset="-120"/>
+              </a:rPr>
+              <a:t>を聞くと、来場したグループの構成が集計できます。</a:t>
+            </a:r>
+            <a:endParaRPr lang="en-US" sz="1100" dirty="0"/>
+          </a:p>
+        </p:txBody>
+      </p:sp>
+      <p:sp>
+        <p:nvSpPr>
+          <p:cNvPr id="5" name="Shape 3"/>
           <p:cNvSpPr/>
           <p:nvPr/>
         </p:nvSpPr>
         <p:spPr>
           <a:xfrm>
-            <a:off x="566928" y="1499616"/>
+            <a:off x="566928" y="1996186"/>
             <a:ext cx="274320" cy="274320"/>
           </a:xfrm>
           <a:prstGeom prst="ellipse">
@@ -18618,13 +19048,13 @@
       </p:sp>
       <p:sp>
         <p:nvSpPr>
-          <p:cNvPr id="5" name="Text 3"/>
-          <p:cNvSpPr txBox="1"/>
-          <p:nvPr/>
-        </p:nvSpPr>
-        <p:spPr>
-          <a:xfrm>
-            <a:off x="566928" y="1499616"/>
+          <p:cNvPr id="6" name="Text 4"/>
+          <p:cNvSpPr txBox="1"/>
+          <p:nvPr/>
+        </p:nvSpPr>
+        <p:spPr>
+          <a:xfrm>
+            <a:off x="566928" y="1996186"/>
             <a:ext cx="274320" cy="274320"/>
           </a:xfrm>
           <a:prstGeom prst="rect">
@@ -18657,13 +19087,13 @@
       </p:sp>
       <p:sp>
         <p:nvSpPr>
-          <p:cNvPr id="6" name="Text 4"/>
-          <p:cNvSpPr txBox="1"/>
-          <p:nvPr/>
-        </p:nvSpPr>
-        <p:spPr>
-          <a:xfrm>
-            <a:off x="969264" y="1481328"/>
+          <p:cNvPr id="7" name="Text 5"/>
+          <p:cNvSpPr txBox="1"/>
+          <p:nvPr/>
+        </p:nvSpPr>
+        <p:spPr>
+          <a:xfrm>
+            <a:off x="969264" y="1977898"/>
             <a:ext cx="6025896" cy="478409"/>
           </a:xfrm>
           <a:prstGeom prst="rect">
@@ -18691,7 +19121,7 @@
                 <a:ea typeface="Calibri" pitchFamily="34" charset="-122"/>
                 <a:cs typeface="Calibri" pitchFamily="34" charset="-120"/>
               </a:rPr>
-              <a:t>ダッシュボードの「イベント設定」で、状態を</a:t>
+              <a:t>設問を</a:t>
             </a:r>
             <a:pPr indent="0" marL="0">
               <a:lnSpc>
@@ -18708,7 +19138,7 @@
                 <a:ea typeface="Calibri" pitchFamily="34" charset="-122"/>
                 <a:cs typeface="Calibri" pitchFamily="34" charset="-120"/>
               </a:rPr>
-              <a:t>「終了」</a:t>
+              <a:t>区分ごとに1問ずつ</a:t>
             </a:r>
             <a:pPr indent="0" marL="0">
               <a:lnSpc>
@@ -18725,51 +19155,43 @@
                 <a:ea typeface="Calibri" pitchFamily="34" charset="-122"/>
                 <a:cs typeface="Calibri" pitchFamily="34" charset="-120"/>
               </a:rPr>
-              <a:t>に変える（表示は「終了（案内メール送付）」です）</a:t>
+              <a:t>作る（種類は</a:t>
+            </a:r>
+            <a:pPr indent="0" marL="0">
+              <a:lnSpc>
+                <a:spcPct val="125000"/>
+              </a:lnSpc>
+              <a:buNone/>
+            </a:pPr>
+            <a:r>
+              <a:rPr lang="en-US" sz="1150" b="1" dirty="0">
+                <a:solidFill>
+                  <a:srgbClr val="222222"/>
+                </a:solidFill>
+                <a:latin typeface="Calibri" pitchFamily="34" charset="0"/>
+                <a:ea typeface="Calibri" pitchFamily="34" charset="-122"/>
+                <a:cs typeface="Calibri" pitchFamily="34" charset="-120"/>
+              </a:rPr>
+              <a:t>数値入力</a:t>
+            </a:r>
+            <a:pPr indent="0" marL="0">
+              <a:lnSpc>
+                <a:spcPct val="125000"/>
+              </a:lnSpc>
+              <a:buNone/>
+            </a:pPr>
+            <a:r>
+              <a:rPr lang="en-US" sz="1150" dirty="0">
+                <a:solidFill>
+                  <a:srgbClr val="222222"/>
+                </a:solidFill>
+                <a:latin typeface="Calibri" pitchFamily="34" charset="0"/>
+                <a:ea typeface="Calibri" pitchFamily="34" charset="-122"/>
+                <a:cs typeface="Calibri" pitchFamily="34" charset="-120"/>
+              </a:rPr>
+              <a:t>、設問文は「大人」「小学生」「未就学児」など）</a:t>
             </a:r>
             <a:endParaRPr lang="en-US" sz="1150" dirty="0"/>
-          </a:p>
-        </p:txBody>
-      </p:sp>
-      <p:sp>
-        <p:nvSpPr>
-          <p:cNvPr id="7" name="Text 5"/>
-          <p:cNvSpPr txBox="1"/>
-          <p:nvPr/>
-        </p:nvSpPr>
-        <p:spPr>
-          <a:xfrm>
-            <a:off x="566928" y="2014601"/>
-            <a:ext cx="6428232" cy="257429"/>
-          </a:xfrm>
-          <a:prstGeom prst="rect">
-            <a:avLst/>
-          </a:prstGeom>
-          <a:noFill/>
-          <a:ln/>
-        </p:spPr>
-        <p:txBody>
-          <a:bodyPr wrap="square" lIns="0" tIns="0" rIns="0" bIns="0" rtlCol="0" anchor="t"/>
-          <a:lstStyle/>
-          <a:p>
-            <a:pPr indent="0" marL="0">
-              <a:lnSpc>
-                <a:spcPct val="125000"/>
-              </a:lnSpc>
-              <a:buNone/>
-            </a:pPr>
-            <a:r>
-              <a:rPr lang="en-US" sz="1100" dirty="0">
-                <a:solidFill>
-                  <a:srgbClr val="222222"/>
-                </a:solidFill>
-                <a:latin typeface="Calibri" pitchFamily="34" charset="0"/>
-                <a:ea typeface="Calibri" pitchFamily="34" charset="-122"/>
-                <a:cs typeface="Calibri" pitchFamily="34" charset="-120"/>
-              </a:rPr>
-              <a:t>これで、ブースのアンケートと総合アンケートの受付が終わり、案内メールを送れるようになります。</a:t>
-            </a:r>
-            <a:endParaRPr lang="en-US" sz="1100" dirty="0"/>
           </a:p>
         </p:txBody>
       </p:sp>
@@ -18781,12 +19203,244 @@
         </p:nvSpPr>
         <p:spPr>
           <a:xfrm>
-            <a:off x="566928" y="2308606"/>
-            <a:ext cx="6428232" cy="624459"/>
+            <a:off x="566928" y="2529459"/>
+            <a:ext cx="274320" cy="274320"/>
+          </a:xfrm>
+          <a:prstGeom prst="ellipse">
+            <a:avLst/>
+          </a:prstGeom>
+          <a:solidFill>
+            <a:srgbClr val="1E2761"/>
+          </a:solidFill>
+          <a:ln/>
+        </p:spPr>
+      </p:sp>
+      <p:sp>
+        <p:nvSpPr>
+          <p:cNvPr id="9" name="Text 7"/>
+          <p:cNvSpPr txBox="1"/>
+          <p:nvPr/>
+        </p:nvSpPr>
+        <p:spPr>
+          <a:xfrm>
+            <a:off x="566928" y="2529459"/>
+            <a:ext cx="274320" cy="274320"/>
+          </a:xfrm>
+          <a:prstGeom prst="rect">
+            <a:avLst/>
+          </a:prstGeom>
+          <a:noFill/>
+          <a:ln/>
+        </p:spPr>
+        <p:txBody>
+          <a:bodyPr wrap="square" lIns="0" tIns="0" rIns="0" bIns="0" rtlCol="0" anchor="ctr"/>
+          <a:lstStyle/>
+          <a:p>
+            <a:pPr algn="ctr" indent="0" marL="0">
+              <a:buNone/>
+            </a:pPr>
+            <a:r>
+              <a:rPr lang="en-US" sz="1100" b="1" dirty="0">
+                <a:solidFill>
+                  <a:srgbClr val="FFFFFF"/>
+                </a:solidFill>
+                <a:latin typeface="Calibri" pitchFamily="34" charset="0"/>
+                <a:ea typeface="Calibri" pitchFamily="34" charset="-122"/>
+                <a:cs typeface="Calibri" pitchFamily="34" charset="-120"/>
+              </a:rPr>
+              <a:t>2</a:t>
+            </a:r>
+            <a:endParaRPr lang="en-US" sz="1100" dirty="0"/>
+          </a:p>
+        </p:txBody>
+      </p:sp>
+      <p:sp>
+        <p:nvSpPr>
+          <p:cNvPr id="10" name="Text 8"/>
+          <p:cNvSpPr txBox="1"/>
+          <p:nvPr/>
+        </p:nvSpPr>
+        <p:spPr>
+          <a:xfrm>
+            <a:off x="969264" y="2511171"/>
+            <a:ext cx="6025896" cy="365760"/>
+          </a:xfrm>
+          <a:prstGeom prst="rect">
+            <a:avLst/>
+          </a:prstGeom>
+          <a:noFill/>
+          <a:ln/>
+        </p:spPr>
+        <p:txBody>
+          <a:bodyPr wrap="square" lIns="0" tIns="0" rIns="0" bIns="0" rtlCol="0" anchor="t"/>
+          <a:lstStyle/>
+          <a:p>
+            <a:pPr indent="0" marL="0">
+              <a:lnSpc>
+                <a:spcPct val="125000"/>
+              </a:lnSpc>
+              <a:buNone/>
+            </a:pPr>
+            <a:r>
+              <a:rPr lang="en-US" sz="1150" dirty="0">
+                <a:solidFill>
+                  <a:srgbClr val="222222"/>
+                </a:solidFill>
+                <a:latin typeface="Calibri" pitchFamily="34" charset="0"/>
+                <a:ea typeface="Calibri" pitchFamily="34" charset="-122"/>
+                <a:cs typeface="Calibri" pitchFamily="34" charset="-120"/>
+              </a:rPr>
+              <a:t>それぞれの</a:t>
+            </a:r>
+            <a:pPr indent="0" marL="0">
+              <a:lnSpc>
+                <a:spcPct val="125000"/>
+              </a:lnSpc>
+              <a:buNone/>
+            </a:pPr>
+            <a:r>
+              <a:rPr lang="en-US" sz="1150" b="1" dirty="0">
+                <a:solidFill>
+                  <a:srgbClr val="222222"/>
+                </a:solidFill>
+                <a:latin typeface="Calibri" pitchFamily="34" charset="0"/>
+                <a:ea typeface="Calibri" pitchFamily="34" charset="-122"/>
+                <a:cs typeface="Calibri" pitchFamily="34" charset="-120"/>
+              </a:rPr>
+              <a:t>「集計での扱い」</a:t>
+            </a:r>
+            <a:pPr indent="0" marL="0">
+              <a:lnSpc>
+                <a:spcPct val="125000"/>
+              </a:lnSpc>
+              <a:buNone/>
+            </a:pPr>
+            <a:r>
+              <a:rPr lang="en-US" sz="1150" dirty="0">
+                <a:solidFill>
+                  <a:srgbClr val="222222"/>
+                </a:solidFill>
+                <a:latin typeface="Calibri" pitchFamily="34" charset="0"/>
+                <a:ea typeface="Calibri" pitchFamily="34" charset="-122"/>
+                <a:cs typeface="Calibri" pitchFamily="34" charset="-120"/>
+              </a:rPr>
+              <a:t>で</a:t>
+            </a:r>
+            <a:pPr indent="0" marL="0">
+              <a:lnSpc>
+                <a:spcPct val="125000"/>
+              </a:lnSpc>
+              <a:buNone/>
+            </a:pPr>
+            <a:r>
+              <a:rPr lang="en-US" sz="1150" b="1" dirty="0">
+                <a:solidFill>
+                  <a:srgbClr val="222222"/>
+                </a:solidFill>
+                <a:latin typeface="Calibri" pitchFamily="34" charset="0"/>
+                <a:ea typeface="Calibri" pitchFamily="34" charset="-122"/>
+                <a:cs typeface="Calibri" pitchFamily="34" charset="-120"/>
+              </a:rPr>
+              <a:t>「グループの内訳として集計する」</a:t>
+            </a:r>
+            <a:pPr indent="0" marL="0">
+              <a:lnSpc>
+                <a:spcPct val="125000"/>
+              </a:lnSpc>
+              <a:buNone/>
+            </a:pPr>
+            <a:r>
+              <a:rPr lang="en-US" sz="1150" dirty="0">
+                <a:solidFill>
+                  <a:srgbClr val="222222"/>
+                </a:solidFill>
+                <a:latin typeface="Calibri" pitchFamily="34" charset="0"/>
+                <a:ea typeface="Calibri" pitchFamily="34" charset="-122"/>
+                <a:cs typeface="Calibri" pitchFamily="34" charset="-120"/>
+              </a:rPr>
+              <a:t>を選ぶ</a:t>
+            </a:r>
+            <a:endParaRPr lang="en-US" sz="1150" dirty="0"/>
+          </a:p>
+        </p:txBody>
+      </p:sp>
+      <p:pic>
+        <p:nvPicPr>
+          <p:cNvPr id="11" name="Image 0" descr="C:\Users\sato\Desktop\enque\docs\images\o-metric.png">    </p:cNvPr>
+          <p:cNvPicPr>
+            <a:picLocks noChangeAspect="1"/>
+          </p:cNvPicPr>
+          <p:nvPr/>
+        </p:nvPicPr>
+        <p:blipFill>
+          <a:blip r:embed="rId1"/>
+          <a:stretch>
+            <a:fillRect/>
+          </a:stretch>
+        </p:blipFill>
+        <p:spPr>
+          <a:xfrm>
+            <a:off x="1339237" y="2968371"/>
+            <a:ext cx="4883614" cy="3474720"/>
+          </a:xfrm>
+          <a:prstGeom prst="rect">
+            <a:avLst/>
+          </a:prstGeom>
+        </p:spPr>
+      </p:pic>
+      <p:sp>
+        <p:nvSpPr>
+          <p:cNvPr id="12" name="Text 9"/>
+          <p:cNvSpPr txBox="1"/>
+          <p:nvPr/>
+        </p:nvSpPr>
+        <p:spPr>
+          <a:xfrm>
+            <a:off x="566928" y="6497955"/>
+            <a:ext cx="6428232" cy="274320"/>
+          </a:xfrm>
+          <a:prstGeom prst="rect">
+            <a:avLst/>
+          </a:prstGeom>
+          <a:noFill/>
+          <a:ln/>
+        </p:spPr>
+        <p:txBody>
+          <a:bodyPr wrap="square" lIns="0" tIns="0" rIns="0" bIns="0" rtlCol="0" anchor="ctr"/>
+          <a:lstStyle/>
+          <a:p>
+            <a:pPr algn="ctr" indent="0" marL="0">
+              <a:buNone/>
+            </a:pPr>
+            <a:r>
+              <a:rPr lang="en-US" sz="950" dirty="0">
+                <a:solidFill>
+                  <a:srgbClr val="6B6B6B"/>
+                </a:solidFill>
+                <a:latin typeface="Calibri" pitchFamily="34" charset="0"/>
+                <a:ea typeface="Calibri" pitchFamily="34" charset="-122"/>
+                <a:cs typeface="Calibri" pitchFamily="34" charset="-120"/>
+              </a:rPr>
+              <a:t>設問編集画面の「集計での扱い」（「グループの内訳として集計する」を選んだ状態）。</a:t>
+            </a:r>
+            <a:endParaRPr lang="en-US" sz="950" dirty="0"/>
+          </a:p>
+        </p:txBody>
+      </p:sp>
+      <p:sp>
+        <p:nvSpPr>
+          <p:cNvPr id="13" name="Shape 10"/>
+          <p:cNvSpPr/>
+          <p:nvPr/>
+        </p:nvSpPr>
+        <p:spPr>
+          <a:xfrm>
+            <a:off x="566928" y="6827139"/>
+            <a:ext cx="6428232" cy="431102"/>
           </a:xfrm>
           <a:prstGeom prst="roundRect">
             <a:avLst>
-              <a:gd name="adj" fmla="val 8786"/>
+              <a:gd name="adj" fmla="val 12726"/>
             </a:avLst>
           </a:prstGeom>
           <a:solidFill>
@@ -18802,13 +19456,13 @@
       </p:sp>
       <p:sp>
         <p:nvSpPr>
-          <p:cNvPr id="9" name="Text 7"/>
-          <p:cNvSpPr txBox="1"/>
-          <p:nvPr/>
-        </p:nvSpPr>
-        <p:spPr>
-          <a:xfrm>
-            <a:off x="658368" y="2400046"/>
+          <p:cNvPr id="14" name="Text 11"/>
+          <p:cNvSpPr txBox="1"/>
+          <p:nvPr/>
+        </p:nvSpPr>
+        <p:spPr>
+          <a:xfrm>
+            <a:off x="658368" y="6918579"/>
             <a:ext cx="237744" cy="237744"/>
           </a:xfrm>
           <a:prstGeom prst="rect">
@@ -18841,14 +19495,14 @@
       </p:sp>
       <p:sp>
         <p:nvSpPr>
-          <p:cNvPr id="10" name="Text 8"/>
-          <p:cNvSpPr txBox="1"/>
-          <p:nvPr/>
-        </p:nvSpPr>
-        <p:spPr>
-          <a:xfrm>
-            <a:off x="950976" y="2418334"/>
-            <a:ext cx="5925312" cy="441579"/>
+          <p:cNvPr id="15" name="Text 12"/>
+          <p:cNvSpPr txBox="1"/>
+          <p:nvPr/>
+        </p:nvSpPr>
+        <p:spPr>
+          <a:xfrm>
+            <a:off x="950976" y="6936867"/>
+            <a:ext cx="5925312" cy="248221"/>
           </a:xfrm>
           <a:prstGeom prst="rect">
             <a:avLst/>
@@ -18875,78 +19529,593 @@
                 <a:ea typeface="Calibri" pitchFamily="34" charset="-122"/>
                 <a:cs typeface="Calibri" pitchFamily="34" charset="-120"/>
               </a:rPr>
-              <a:t>状態を「終了」にすると、ブースのアンケートは回答できなくなります。当日の受付時間が終わってから切り替えてください。</a:t>
+              <a:t>「来場人数」と「グループの内訳」は</a:t>
+            </a:r>
+            <a:pPr indent="0" marL="0">
+              <a:lnSpc>
+                <a:spcPct val="120000"/>
+              </a:lnSpc>
+              <a:buNone/>
+            </a:pPr>
+            <a:r>
+              <a:rPr lang="en-US" sz="1050" b="1" dirty="0">
+                <a:solidFill>
+                  <a:srgbClr val="222222"/>
+                </a:solidFill>
+                <a:latin typeface="Calibri" pitchFamily="34" charset="0"/>
+                <a:ea typeface="Calibri" pitchFamily="34" charset="-122"/>
+                <a:cs typeface="Calibri" pitchFamily="34" charset="-120"/>
+              </a:rPr>
+              <a:t>別もの</a:t>
+            </a:r>
+            <a:pPr indent="0" marL="0">
+              <a:lnSpc>
+                <a:spcPct val="120000"/>
+              </a:lnSpc>
+              <a:buNone/>
+            </a:pPr>
+            <a:r>
+              <a:rPr lang="en-US" sz="1050" dirty="0">
+                <a:solidFill>
+                  <a:srgbClr val="222222"/>
+                </a:solidFill>
+                <a:latin typeface="Calibri" pitchFamily="34" charset="0"/>
+                <a:ea typeface="Calibri" pitchFamily="34" charset="-122"/>
+                <a:cs typeface="Calibri" pitchFamily="34" charset="-120"/>
+              </a:rPr>
+              <a:t>です。内訳は</a:t>
+            </a:r>
+            <a:pPr indent="0" marL="0">
+              <a:lnSpc>
+                <a:spcPct val="120000"/>
+              </a:lnSpc>
+              <a:buNone/>
+            </a:pPr>
+            <a:r>
+              <a:rPr lang="en-US" sz="1050" b="1" dirty="0">
+                <a:solidFill>
+                  <a:srgbClr val="222222"/>
+                </a:solidFill>
+                <a:latin typeface="Calibri" pitchFamily="34" charset="0"/>
+                <a:ea typeface="Calibri" pitchFamily="34" charset="-122"/>
+                <a:cs typeface="Calibri" pitchFamily="34" charset="-120"/>
+              </a:rPr>
+              <a:t>のべ来場者には足しません</a:t>
+            </a:r>
+            <a:pPr indent="0" marL="0">
+              <a:lnSpc>
+                <a:spcPct val="120000"/>
+              </a:lnSpc>
+              <a:buNone/>
+            </a:pPr>
+            <a:r>
+              <a:rPr lang="en-US" sz="1050" dirty="0">
+                <a:solidFill>
+                  <a:srgbClr val="222222"/>
+                </a:solidFill>
+                <a:latin typeface="Calibri" pitchFamily="34" charset="0"/>
+                <a:ea typeface="Calibri" pitchFamily="34" charset="-122"/>
+                <a:cs typeface="Calibri" pitchFamily="34" charset="-120"/>
+              </a:rPr>
+              <a:t>（同じ人数を</a:t>
             </a:r>
             <a:endParaRPr lang="en-US" sz="1050" dirty="0"/>
           </a:p>
         </p:txBody>
       </p:sp>
-      <p:pic>
-        <p:nvPicPr>
-          <p:cNvPr id="11" name="Image 0" descr="C:\Users\sato\Desktop\enque\docs\images\o-overall.png">    </p:cNvPr>
-          <p:cNvPicPr>
-            <a:picLocks noChangeAspect="1"/>
-          </p:cNvPicPr>
-          <p:nvPr/>
-        </p:nvPicPr>
-        <p:blipFill>
-          <a:blip r:embed="rId1"/>
-          <a:stretch>
-            <a:fillRect/>
-          </a:stretch>
-        </p:blipFill>
-        <p:spPr>
-          <a:xfrm>
-            <a:off x="1504370" y="3006217"/>
-            <a:ext cx="4553347" cy="3474720"/>
-          </a:xfrm>
-          <a:prstGeom prst="rect">
-            <a:avLst/>
-          </a:prstGeom>
-        </p:spPr>
-      </p:pic>
-      <p:sp>
-        <p:nvSpPr>
-          <p:cNvPr id="12" name="Text 9"/>
-          <p:cNvSpPr txBox="1"/>
-          <p:nvPr/>
-        </p:nvSpPr>
-        <p:spPr>
-          <a:xfrm>
-            <a:off x="566928" y="6535801"/>
-            <a:ext cx="6428232" cy="274320"/>
-          </a:xfrm>
-          <a:prstGeom prst="rect">
-            <a:avLst/>
-          </a:prstGeom>
-          <a:noFill/>
-          <a:ln/>
-        </p:spPr>
-        <p:txBody>
-          <a:bodyPr wrap="square" lIns="0" tIns="0" rIns="0" bIns="0" rtlCol="0" anchor="ctr"/>
-          <a:lstStyle/>
-          <a:p>
-            <a:pPr algn="ctr" indent="0" marL="0">
-              <a:buNone/>
-            </a:pPr>
-            <a:r>
-              <a:rPr lang="en-US" sz="950" dirty="0">
-                <a:solidFill>
-                  <a:srgbClr val="6B6B6B"/>
-                </a:solidFill>
-                <a:latin typeface="Calibri" pitchFamily="34" charset="0"/>
-                <a:ea typeface="Calibri" pitchFamily="34" charset="-122"/>
-                <a:cs typeface="Calibri" pitchFamily="34" charset="-120"/>
-              </a:rPr>
-              <a:t>「総合アンケートと案内メール」画面の1番上（総合アンケートの状態と回答数が見えるところ）。</a:t>
-            </a:r>
-            <a:endParaRPr lang="en-US" sz="950" dirty="0"/>
-          </a:p>
-        </p:txBody>
-      </p:sp>
-      <p:sp>
-        <p:nvSpPr>
-          <p:cNvPr id="13" name="Text 10"/>
+      <p:sp>
+        <p:nvSpPr>
+          <p:cNvPr id="16" name="Text 13"/>
+          <p:cNvSpPr txBox="1"/>
+          <p:nvPr/>
+        </p:nvSpPr>
+        <p:spPr>
+          <a:xfrm>
+            <a:off x="566928" y="7331393"/>
+            <a:ext cx="6428232" cy="257429"/>
+          </a:xfrm>
+          <a:prstGeom prst="rect">
+            <a:avLst/>
+          </a:prstGeom>
+          <a:noFill/>
+          <a:ln/>
+        </p:spPr>
+        <p:txBody>
+          <a:bodyPr wrap="square" lIns="0" tIns="0" rIns="0" bIns="0" rtlCol="0" anchor="t"/>
+          <a:lstStyle/>
+          <a:p>
+            <a:pPr indent="0" marL="0">
+              <a:lnSpc>
+                <a:spcPct val="125000"/>
+              </a:lnSpc>
+              <a:buNone/>
+            </a:pPr>
+            <a:r>
+              <a:rPr lang="en-US" sz="1100" dirty="0">
+                <a:solidFill>
+                  <a:srgbClr val="222222"/>
+                </a:solidFill>
+                <a:latin typeface="Calibri" pitchFamily="34" charset="0"/>
+                <a:ea typeface="Calibri" pitchFamily="34" charset="-122"/>
+                <a:cs typeface="Calibri" pitchFamily="34" charset="-120"/>
+              </a:rPr>
+              <a:t>二重に数えてしまうため）。人数の報告は「来場人数」のほうを使ってください。</a:t>
+            </a:r>
+            <a:endParaRPr lang="en-US" sz="1100" dirty="0"/>
+          </a:p>
+        </p:txBody>
+      </p:sp>
+      <p:sp>
+        <p:nvSpPr>
+          <p:cNvPr id="17" name="Text 14"/>
+          <p:cNvSpPr txBox="1"/>
+          <p:nvPr/>
+        </p:nvSpPr>
+        <p:spPr>
+          <a:xfrm>
+            <a:off x="566928" y="7625398"/>
+            <a:ext cx="6428232" cy="257429"/>
+          </a:xfrm>
+          <a:prstGeom prst="rect">
+            <a:avLst/>
+          </a:prstGeom>
+          <a:noFill/>
+          <a:ln/>
+        </p:spPr>
+        <p:txBody>
+          <a:bodyPr wrap="square" lIns="0" tIns="0" rIns="0" bIns="0" rtlCol="0" anchor="t"/>
+          <a:lstStyle/>
+          <a:p>
+            <a:pPr indent="0" marL="0">
+              <a:lnSpc>
+                <a:spcPct val="125000"/>
+              </a:lnSpc>
+              <a:buNone/>
+            </a:pPr>
+            <a:r>
+              <a:rPr lang="en-US" sz="1100" dirty="0">
+                <a:solidFill>
+                  <a:srgbClr val="222222"/>
+                </a:solidFill>
+                <a:latin typeface="Calibri" pitchFamily="34" charset="0"/>
+                <a:ea typeface="Calibri" pitchFamily="34" charset="-122"/>
+                <a:cs typeface="Calibri" pitchFamily="34" charset="-120"/>
+              </a:rPr>
+              <a:t>区分の設問は</a:t>
+            </a:r>
+            <a:pPr indent="0" marL="0">
+              <a:lnSpc>
+                <a:spcPct val="125000"/>
+              </a:lnSpc>
+              <a:buNone/>
+            </a:pPr>
+            <a:r>
+              <a:rPr lang="en-US" sz="1100" b="1" dirty="0">
+                <a:solidFill>
+                  <a:srgbClr val="222222"/>
+                </a:solidFill>
+                <a:latin typeface="Calibri" pitchFamily="34" charset="0"/>
+                <a:ea typeface="Calibri" pitchFamily="34" charset="-122"/>
+                <a:cs typeface="Calibri" pitchFamily="34" charset="-120"/>
+              </a:rPr>
+              <a:t>0人</a:t>
+            </a:r>
+            <a:pPr indent="0" marL="0">
+              <a:lnSpc>
+                <a:spcPct val="125000"/>
+              </a:lnSpc>
+              <a:buNone/>
+            </a:pPr>
+            <a:r>
+              <a:rPr lang="en-US" sz="1100" dirty="0">
+                <a:solidFill>
+                  <a:srgbClr val="222222"/>
+                </a:solidFill>
+                <a:latin typeface="Calibri" pitchFamily="34" charset="0"/>
+                <a:ea typeface="Calibri" pitchFamily="34" charset="-122"/>
+                <a:cs typeface="Calibri" pitchFamily="34" charset="-120"/>
+              </a:rPr>
+              <a:t>も入れられます（「小学生は0人」のような回答を受け付けます）。</a:t>
+            </a:r>
+            <a:endParaRPr lang="en-US" sz="1100" dirty="0"/>
+          </a:p>
+        </p:txBody>
+      </p:sp>
+      <p:sp>
+        <p:nvSpPr>
+          <p:cNvPr id="18" name="Text 15"/>
+          <p:cNvSpPr txBox="1"/>
+          <p:nvPr/>
+        </p:nvSpPr>
+        <p:spPr>
+          <a:xfrm>
+            <a:off x="566928" y="7919403"/>
+            <a:ext cx="6428232" cy="459994"/>
+          </a:xfrm>
+          <a:prstGeom prst="rect">
+            <a:avLst/>
+          </a:prstGeom>
+          <a:noFill/>
+          <a:ln/>
+        </p:spPr>
+        <p:txBody>
+          <a:bodyPr wrap="square" lIns="0" tIns="0" rIns="0" bIns="0" rtlCol="0" anchor="t"/>
+          <a:lstStyle/>
+          <a:p>
+            <a:pPr indent="0" marL="0">
+              <a:lnSpc>
+                <a:spcPct val="125000"/>
+              </a:lnSpc>
+              <a:buNone/>
+            </a:pPr>
+            <a:r>
+              <a:rPr lang="en-US" sz="1100" dirty="0">
+                <a:solidFill>
+                  <a:srgbClr val="222222"/>
+                </a:solidFill>
+                <a:latin typeface="Calibri" pitchFamily="34" charset="0"/>
+                <a:ea typeface="Calibri" pitchFamily="34" charset="-122"/>
+                <a:cs typeface="Calibri" pitchFamily="34" charset="-120"/>
+              </a:rPr>
+              <a:t>総合アンケートに置くと1組につき1回だけ答えてもらえるので、聞くのは総合アンケートがおすすめです。</a:t>
+            </a:r>
+            <a:endParaRPr lang="en-US" sz="1100" dirty="0"/>
+          </a:p>
+        </p:txBody>
+      </p:sp>
+      <p:sp>
+        <p:nvSpPr>
+          <p:cNvPr id="19" name="Text 16"/>
+          <p:cNvSpPr txBox="1"/>
+          <p:nvPr/>
+        </p:nvSpPr>
+        <p:spPr>
+          <a:xfrm>
+            <a:off x="566928" y="8415973"/>
+            <a:ext cx="6428232" cy="257429"/>
+          </a:xfrm>
+          <a:prstGeom prst="rect">
+            <a:avLst/>
+          </a:prstGeom>
+          <a:noFill/>
+          <a:ln/>
+        </p:spPr>
+        <p:txBody>
+          <a:bodyPr wrap="square" lIns="0" tIns="0" rIns="0" bIns="0" rtlCol="0" anchor="t"/>
+          <a:lstStyle/>
+          <a:p>
+            <a:pPr indent="0" marL="0">
+              <a:lnSpc>
+                <a:spcPct val="125000"/>
+              </a:lnSpc>
+              <a:buNone/>
+            </a:pPr>
+            <a:r>
+              <a:rPr lang="en-US" sz="1100" dirty="0">
+                <a:solidFill>
+                  <a:srgbClr val="222222"/>
+                </a:solidFill>
+                <a:latin typeface="Calibri" pitchFamily="34" charset="0"/>
+                <a:ea typeface="Calibri" pitchFamily="34" charset="-122"/>
+                <a:cs typeface="Calibri" pitchFamily="34" charset="-120"/>
+              </a:rPr>
+              <a:t>集計は、その</a:t>
+            </a:r>
+            <a:pPr indent="0" marL="0">
+              <a:lnSpc>
+                <a:spcPct val="125000"/>
+              </a:lnSpc>
+              <a:buNone/>
+            </a:pPr>
+            <a:r>
+              <a:rPr lang="en-US" sz="1100" b="1" dirty="0">
+                <a:solidFill>
+                  <a:srgbClr val="222222"/>
+                </a:solidFill>
+                <a:latin typeface="Calibri" pitchFamily="34" charset="0"/>
+                <a:ea typeface="Calibri" pitchFamily="34" charset="-122"/>
+                <a:cs typeface="Calibri" pitchFamily="34" charset="-120"/>
+              </a:rPr>
+              <a:t>アンケートの「集計」画面</a:t>
+            </a:r>
+            <a:pPr indent="0" marL="0">
+              <a:lnSpc>
+                <a:spcPct val="125000"/>
+              </a:lnSpc>
+              <a:buNone/>
+            </a:pPr>
+            <a:r>
+              <a:rPr lang="en-US" sz="1100" dirty="0">
+                <a:solidFill>
+                  <a:srgbClr val="222222"/>
+                </a:solidFill>
+                <a:latin typeface="Calibri" pitchFamily="34" charset="0"/>
+                <a:ea typeface="Calibri" pitchFamily="34" charset="-122"/>
+                <a:cs typeface="Calibri" pitchFamily="34" charset="-120"/>
+              </a:rPr>
+              <a:t>に「</a:t>
+            </a:r>
+            <a:pPr indent="0" marL="0">
+              <a:lnSpc>
+                <a:spcPct val="125000"/>
+              </a:lnSpc>
+              <a:buNone/>
+            </a:pPr>
+            <a:r>
+              <a:rPr lang="en-US" sz="1100" b="1" dirty="0">
+                <a:solidFill>
+                  <a:srgbClr val="222222"/>
+                </a:solidFill>
+                <a:latin typeface="Calibri" pitchFamily="34" charset="0"/>
+                <a:ea typeface="Calibri" pitchFamily="34" charset="-122"/>
+                <a:cs typeface="Calibri" pitchFamily="34" charset="-120"/>
+              </a:rPr>
+              <a:t>グループの構成</a:t>
+            </a:r>
+            <a:pPr indent="0" marL="0">
+              <a:lnSpc>
+                <a:spcPct val="125000"/>
+              </a:lnSpc>
+              <a:buNone/>
+            </a:pPr>
+            <a:r>
+              <a:rPr lang="en-US" sz="1100" dirty="0">
+                <a:solidFill>
+                  <a:srgbClr val="222222"/>
+                </a:solidFill>
+                <a:latin typeface="Calibri" pitchFamily="34" charset="0"/>
+                <a:ea typeface="Calibri" pitchFamily="34" charset="-122"/>
+                <a:cs typeface="Calibri" pitchFamily="34" charset="-120"/>
+              </a:rPr>
+              <a:t>」として出ます。</a:t>
+            </a:r>
+            <a:endParaRPr lang="en-US" sz="1100" dirty="0"/>
+          </a:p>
+        </p:txBody>
+      </p:sp>
+      <p:sp>
+        <p:nvSpPr>
+          <p:cNvPr id="20" name="Text 17"/>
+          <p:cNvSpPr txBox="1"/>
+          <p:nvPr/>
+        </p:nvSpPr>
+        <p:spPr>
+          <a:xfrm>
+            <a:off x="713232" y="8709978"/>
+            <a:ext cx="6281928" cy="257429"/>
+          </a:xfrm>
+          <a:prstGeom prst="rect">
+            <a:avLst/>
+          </a:prstGeom>
+          <a:noFill/>
+          <a:ln/>
+        </p:spPr>
+        <p:txBody>
+          <a:bodyPr wrap="square" lIns="0" tIns="0" rIns="0" bIns="0" rtlCol="0" anchor="t"/>
+          <a:lstStyle/>
+          <a:p>
+            <a:pPr marL="342900" indent="-342900">
+              <a:lnSpc>
+                <a:spcPct val="125000"/>
+              </a:lnSpc>
+              <a:buSzPct val="100000"/>
+              <a:buChar char="●"/>
+            </a:pPr>
+            <a:r>
+              <a:rPr lang="en-US" sz="1100" b="1" dirty="0">
+                <a:solidFill>
+                  <a:srgbClr val="222222"/>
+                </a:solidFill>
+                <a:latin typeface="Calibri" pitchFamily="34" charset="0"/>
+                <a:ea typeface="Calibri" pitchFamily="34" charset="-122"/>
+                <a:cs typeface="Calibri" pitchFamily="34" charset="-120"/>
+              </a:rPr>
+              <a:t>区分別の人数</a:t>
+            </a:r>
+            <a:pPr indent="0" marL="0">
+              <a:lnSpc>
+                <a:spcPct val="125000"/>
+              </a:lnSpc>
+              <a:buNone/>
+            </a:pPr>
+            <a:r>
+              <a:rPr lang="en-US" sz="1100" dirty="0">
+                <a:solidFill>
+                  <a:srgbClr val="222222"/>
+                </a:solidFill>
+                <a:latin typeface="Calibri" pitchFamily="34" charset="0"/>
+                <a:ea typeface="Calibri" pitchFamily="34" charset="-122"/>
+                <a:cs typeface="Calibri" pitchFamily="34" charset="-120"/>
+              </a:rPr>
+              <a:t>：区分ごとの合計人数・構成比・その区分がいた組の数</a:t>
+            </a:r>
+            <a:endParaRPr lang="en-US" sz="1100" dirty="0"/>
+          </a:p>
+        </p:txBody>
+      </p:sp>
+      <p:sp>
+        <p:nvSpPr>
+          <p:cNvPr id="21" name="Text 18"/>
+          <p:cNvSpPr txBox="1"/>
+          <p:nvPr/>
+        </p:nvSpPr>
+        <p:spPr>
+          <a:xfrm>
+            <a:off x="713232" y="8985695"/>
+            <a:ext cx="6281928" cy="459994"/>
+          </a:xfrm>
+          <a:prstGeom prst="rect">
+            <a:avLst/>
+          </a:prstGeom>
+          <a:noFill/>
+          <a:ln/>
+        </p:spPr>
+        <p:txBody>
+          <a:bodyPr wrap="square" lIns="0" tIns="0" rIns="0" bIns="0" rtlCol="0" anchor="t"/>
+          <a:lstStyle/>
+          <a:p>
+            <a:pPr marL="342900" indent="-342900">
+              <a:lnSpc>
+                <a:spcPct val="125000"/>
+              </a:lnSpc>
+              <a:buSzPct val="100000"/>
+              <a:buChar char="●"/>
+            </a:pPr>
+            <a:r>
+              <a:rPr lang="en-US" sz="1100" b="1" dirty="0">
+                <a:solidFill>
+                  <a:srgbClr val="222222"/>
+                </a:solidFill>
+                <a:latin typeface="Calibri" pitchFamily="34" charset="0"/>
+                <a:ea typeface="Calibri" pitchFamily="34" charset="-122"/>
+                <a:cs typeface="Calibri" pitchFamily="34" charset="-120"/>
+              </a:rPr>
+              <a:t>よくあるグループの型</a:t>
+            </a:r>
+            <a:pPr indent="0" marL="0">
+              <a:lnSpc>
+                <a:spcPct val="125000"/>
+              </a:lnSpc>
+              <a:buNone/>
+            </a:pPr>
+            <a:r>
+              <a:rPr lang="en-US" sz="1100" dirty="0">
+                <a:solidFill>
+                  <a:srgbClr val="222222"/>
+                </a:solidFill>
+                <a:latin typeface="Calibri" pitchFamily="34" charset="0"/>
+                <a:ea typeface="Calibri" pitchFamily="34" charset="-122"/>
+                <a:cs typeface="Calibri" pitchFamily="34" charset="-120"/>
+              </a:rPr>
+              <a:t>：「大人2・小学生1」のような組み合わせの多い順（0人の区分は書きません）</a:t>
+            </a:r>
+            <a:endParaRPr lang="en-US" sz="1100" dirty="0"/>
+          </a:p>
+        </p:txBody>
+      </p:sp>
+      <p:sp>
+        <p:nvSpPr>
+          <p:cNvPr id="22" name="Text 19"/>
+          <p:cNvSpPr txBox="1"/>
+          <p:nvPr/>
+        </p:nvSpPr>
+        <p:spPr>
+          <a:xfrm>
+            <a:off x="713232" y="9463977"/>
+            <a:ext cx="6281928" cy="257429"/>
+          </a:xfrm>
+          <a:prstGeom prst="rect">
+            <a:avLst/>
+          </a:prstGeom>
+          <a:noFill/>
+          <a:ln/>
+        </p:spPr>
+        <p:txBody>
+          <a:bodyPr wrap="square" lIns="0" tIns="0" rIns="0" bIns="0" rtlCol="0" anchor="t"/>
+          <a:lstStyle/>
+          <a:p>
+            <a:pPr marL="342900" indent="-342900">
+              <a:lnSpc>
+                <a:spcPct val="125000"/>
+              </a:lnSpc>
+              <a:buSzPct val="100000"/>
+              <a:buChar char="●"/>
+            </a:pPr>
+            <a:r>
+              <a:rPr lang="en-US" sz="1100" b="1" dirty="0">
+                <a:solidFill>
+                  <a:srgbClr val="222222"/>
+                </a:solidFill>
+                <a:latin typeface="Calibri" pitchFamily="34" charset="0"/>
+                <a:ea typeface="Calibri" pitchFamily="34" charset="-122"/>
+                <a:cs typeface="Calibri" pitchFamily="34" charset="-120"/>
+              </a:rPr>
+              <a:t>区分ごとの傾向</a:t>
+            </a:r>
+            <a:pPr indent="0" marL="0">
+              <a:lnSpc>
+                <a:spcPct val="125000"/>
+              </a:lnSpc>
+              <a:buNone/>
+            </a:pPr>
+            <a:r>
+              <a:rPr lang="en-US" sz="1100" dirty="0">
+                <a:solidFill>
+                  <a:srgbClr val="222222"/>
+                </a:solidFill>
+                <a:latin typeface="Calibri" pitchFamily="34" charset="0"/>
+                <a:ea typeface="Calibri" pitchFamily="34" charset="-122"/>
+                <a:cs typeface="Calibri" pitchFamily="34" charset="-120"/>
+              </a:rPr>
+              <a:t>：その区分がいた組の平均周回企業数・平均評価</a:t>
+            </a:r>
+            <a:endParaRPr lang="en-US" sz="1100" dirty="0"/>
+          </a:p>
+        </p:txBody>
+      </p:sp>
+      <p:sp>
+        <p:nvSpPr>
+          <p:cNvPr id="23" name="Text 20"/>
+          <p:cNvSpPr txBox="1"/>
+          <p:nvPr/>
+        </p:nvSpPr>
+        <p:spPr>
+          <a:xfrm>
+            <a:off x="713232" y="9739694"/>
+            <a:ext cx="6281928" cy="257429"/>
+          </a:xfrm>
+          <a:prstGeom prst="rect">
+            <a:avLst/>
+          </a:prstGeom>
+          <a:noFill/>
+          <a:ln/>
+        </p:spPr>
+        <p:txBody>
+          <a:bodyPr wrap="square" lIns="0" tIns="0" rIns="0" bIns="0" rtlCol="0" anchor="t"/>
+          <a:lstStyle/>
+          <a:p>
+            <a:pPr marL="342900" indent="-342900">
+              <a:lnSpc>
+                <a:spcPct val="125000"/>
+              </a:lnSpc>
+              <a:buSzPct val="100000"/>
+              <a:buChar char="●"/>
+            </a:pPr>
+            <a:r>
+              <a:rPr lang="en-US" sz="1100" b="1" dirty="0">
+                <a:solidFill>
+                  <a:srgbClr val="222222"/>
+                </a:solidFill>
+                <a:latin typeface="Calibri" pitchFamily="34" charset="0"/>
+                <a:ea typeface="Calibri" pitchFamily="34" charset="-122"/>
+                <a:cs typeface="Calibri" pitchFamily="34" charset="-120"/>
+              </a:rPr>
+              <a:t>来場人数との照合</a:t>
+            </a:r>
+            <a:pPr indent="0" marL="0">
+              <a:lnSpc>
+                <a:spcPct val="125000"/>
+              </a:lnSpc>
+              <a:buNone/>
+            </a:pPr>
+            <a:r>
+              <a:rPr lang="en-US" sz="1100" dirty="0">
+                <a:solidFill>
+                  <a:srgbClr val="222222"/>
+                </a:solidFill>
+                <a:latin typeface="Calibri" pitchFamily="34" charset="0"/>
+                <a:ea typeface="Calibri" pitchFamily="34" charset="-122"/>
+                <a:cs typeface="Calibri" pitchFamily="34" charset="-120"/>
+              </a:rPr>
+              <a:t>：「何人で来られましたか」の人数と内訳の合計が合っているか（差の分布）</a:t>
+            </a:r>
+            <a:endParaRPr lang="en-US" sz="1100" dirty="0"/>
+          </a:p>
+        </p:txBody>
+      </p:sp>
+      <p:sp>
+        <p:nvSpPr>
+          <p:cNvPr id="24" name="Text 21"/>
           <p:cNvSpPr txBox="1"/>
           <p:nvPr/>
         </p:nvSpPr>
@@ -19087,550 +20256,89 @@
                 <a:ea typeface="Calibri" pitchFamily="34" charset="-122"/>
                 <a:cs typeface="Calibri" pitchFamily="34" charset="-120"/>
               </a:rPr>
-              <a:t>終了後2：案内メールを送る</a:t>
+              <a:t>当日：グループの構成を集計する（つづき）</a:t>
             </a:r>
             <a:endParaRPr lang="en-US" sz="2200" dirty="0"/>
           </a:p>
         </p:txBody>
       </p:sp>
-      <p:sp>
-        <p:nvSpPr>
-          <p:cNvPr id="4" name="Shape 2"/>
+      <p:pic>
+        <p:nvPicPr>
+          <p:cNvPr id="4" name="Image 0" descr="C:\Users\sato\Desktop\enque\docs\images\o-group.png">    </p:cNvPr>
+          <p:cNvPicPr>
+            <a:picLocks noChangeAspect="1"/>
+          </p:cNvPicPr>
+          <p:nvPr/>
+        </p:nvPicPr>
+        <p:blipFill>
+          <a:blip r:embed="rId1"/>
+          <a:stretch>
+            <a:fillRect/>
+          </a:stretch>
+        </p:blipFill>
+        <p:spPr>
+          <a:xfrm>
+            <a:off x="1917560" y="1481328"/>
+            <a:ext cx="3726968" cy="3474720"/>
+          </a:xfrm>
+          <a:prstGeom prst="rect">
+            <a:avLst/>
+          </a:prstGeom>
+        </p:spPr>
+      </p:pic>
+      <p:sp>
+        <p:nvSpPr>
+          <p:cNvPr id="5" name="Text 2"/>
+          <p:cNvSpPr txBox="1"/>
+          <p:nvPr/>
+        </p:nvSpPr>
+        <p:spPr>
+          <a:xfrm>
+            <a:off x="566928" y="5010912"/>
+            <a:ext cx="6428232" cy="274320"/>
+          </a:xfrm>
+          <a:prstGeom prst="rect">
+            <a:avLst/>
+          </a:prstGeom>
+          <a:noFill/>
+          <a:ln/>
+        </p:spPr>
+        <p:txBody>
+          <a:bodyPr wrap="square" lIns="0" tIns="0" rIns="0" bIns="0" rtlCol="0" anchor="ctr"/>
+          <a:lstStyle/>
+          <a:p>
+            <a:pPr algn="ctr" indent="0" marL="0">
+              <a:buNone/>
+            </a:pPr>
+            <a:r>
+              <a:rPr lang="en-US" sz="950" dirty="0">
+                <a:solidFill>
+                  <a:srgbClr val="6B6B6B"/>
+                </a:solidFill>
+                <a:latin typeface="Calibri" pitchFamily="34" charset="0"/>
+                <a:ea typeface="Calibri" pitchFamily="34" charset="-122"/>
+                <a:cs typeface="Calibri" pitchFamily="34" charset="-120"/>
+              </a:rPr>
+              <a:t>「総合アンケートの集計」画面の「グループの構成」（区分別の人数とよくあるグループの型の表）。</a:t>
+            </a:r>
+            <a:endParaRPr lang="en-US" sz="950" dirty="0"/>
+          </a:p>
+        </p:txBody>
+      </p:sp>
+      <p:sp>
+        <p:nvSpPr>
+          <p:cNvPr id="6" name="Shape 3"/>
           <p:cNvSpPr/>
           <p:nvPr/>
         </p:nvSpPr>
         <p:spPr>
           <a:xfrm>
-            <a:off x="566928" y="1499616"/>
-            <a:ext cx="274320" cy="274320"/>
-          </a:xfrm>
-          <a:prstGeom prst="ellipse">
-            <a:avLst/>
-          </a:prstGeom>
-          <a:solidFill>
-            <a:srgbClr val="1E2761"/>
-          </a:solidFill>
-          <a:ln/>
-        </p:spPr>
-      </p:sp>
-      <p:sp>
-        <p:nvSpPr>
-          <p:cNvPr id="5" name="Text 3"/>
-          <p:cNvSpPr txBox="1"/>
-          <p:nvPr/>
-        </p:nvSpPr>
-        <p:spPr>
-          <a:xfrm>
-            <a:off x="566928" y="1499616"/>
-            <a:ext cx="274320" cy="274320"/>
-          </a:xfrm>
-          <a:prstGeom prst="rect">
-            <a:avLst/>
-          </a:prstGeom>
-          <a:noFill/>
-          <a:ln/>
-        </p:spPr>
-        <p:txBody>
-          <a:bodyPr wrap="square" lIns="0" tIns="0" rIns="0" bIns="0" rtlCol="0" anchor="ctr"/>
-          <a:lstStyle/>
-          <a:p>
-            <a:pPr algn="ctr" indent="0" marL="0">
-              <a:buNone/>
-            </a:pPr>
-            <a:r>
-              <a:rPr lang="en-US" sz="1100" b="1" dirty="0">
-                <a:solidFill>
-                  <a:srgbClr val="FFFFFF"/>
-                </a:solidFill>
-                <a:latin typeface="Calibri" pitchFamily="34" charset="0"/>
-                <a:ea typeface="Calibri" pitchFamily="34" charset="-122"/>
-                <a:cs typeface="Calibri" pitchFamily="34" charset="-120"/>
-              </a:rPr>
-              <a:t>1</a:t>
-            </a:r>
-            <a:endParaRPr lang="en-US" sz="1100" dirty="0"/>
-          </a:p>
-        </p:txBody>
-      </p:sp>
-      <p:sp>
-        <p:nvSpPr>
-          <p:cNvPr id="6" name="Text 4"/>
-          <p:cNvSpPr txBox="1"/>
-          <p:nvPr/>
-        </p:nvSpPr>
-        <p:spPr>
-          <a:xfrm>
-            <a:off x="969264" y="1481328"/>
-            <a:ext cx="6025896" cy="365760"/>
-          </a:xfrm>
-          <a:prstGeom prst="rect">
-            <a:avLst/>
-          </a:prstGeom>
-          <a:noFill/>
-          <a:ln/>
-        </p:spPr>
-        <p:txBody>
-          <a:bodyPr wrap="square" lIns="0" tIns="0" rIns="0" bIns="0" rtlCol="0" anchor="t"/>
-          <a:lstStyle/>
-          <a:p>
-            <a:pPr indent="0" marL="0">
-              <a:lnSpc>
-                <a:spcPct val="125000"/>
-              </a:lnSpc>
-              <a:buNone/>
-            </a:pPr>
-            <a:r>
-              <a:rPr lang="en-US" sz="1150" b="1" dirty="0">
-                <a:solidFill>
-                  <a:srgbClr val="222222"/>
-                </a:solidFill>
-                <a:latin typeface="Calibri" pitchFamily="34" charset="0"/>
-                <a:ea typeface="Calibri" pitchFamily="34" charset="-122"/>
-                <a:cs typeface="Calibri" pitchFamily="34" charset="-120"/>
-              </a:rPr>
-              <a:t>テスト送信</a:t>
-            </a:r>
-            <a:pPr indent="0" marL="0">
-              <a:lnSpc>
-                <a:spcPct val="125000"/>
-              </a:lnSpc>
-              <a:buNone/>
-            </a:pPr>
-            <a:r>
-              <a:rPr lang="en-US" sz="1150" dirty="0">
-                <a:solidFill>
-                  <a:srgbClr val="222222"/>
-                </a:solidFill>
-                <a:latin typeface="Calibri" pitchFamily="34" charset="0"/>
-                <a:ea typeface="Calibri" pitchFamily="34" charset="-122"/>
-                <a:cs typeface="Calibri" pitchFamily="34" charset="-120"/>
-              </a:rPr>
-              <a:t>：自分のアドレスを入れて送り、文面とリンクを確認する</a:t>
-            </a:r>
-            <a:endParaRPr lang="en-US" sz="1150" dirty="0"/>
-          </a:p>
-        </p:txBody>
-      </p:sp>
-      <p:sp>
-        <p:nvSpPr>
-          <p:cNvPr id="7" name="Shape 5"/>
-          <p:cNvSpPr/>
-          <p:nvPr/>
-        </p:nvSpPr>
-        <p:spPr>
-          <a:xfrm>
-            <a:off x="566928" y="1956816"/>
-            <a:ext cx="274320" cy="274320"/>
-          </a:xfrm>
-          <a:prstGeom prst="ellipse">
-            <a:avLst/>
-          </a:prstGeom>
-          <a:solidFill>
-            <a:srgbClr val="1E2761"/>
-          </a:solidFill>
-          <a:ln/>
-        </p:spPr>
-      </p:sp>
-      <p:sp>
-        <p:nvSpPr>
-          <p:cNvPr id="8" name="Text 6"/>
-          <p:cNvSpPr txBox="1"/>
-          <p:nvPr/>
-        </p:nvSpPr>
-        <p:spPr>
-          <a:xfrm>
-            <a:off x="566928" y="1956816"/>
-            <a:ext cx="274320" cy="274320"/>
-          </a:xfrm>
-          <a:prstGeom prst="rect">
-            <a:avLst/>
-          </a:prstGeom>
-          <a:noFill/>
-          <a:ln/>
-        </p:spPr>
-        <p:txBody>
-          <a:bodyPr wrap="square" lIns="0" tIns="0" rIns="0" bIns="0" rtlCol="0" anchor="ctr"/>
-          <a:lstStyle/>
-          <a:p>
-            <a:pPr algn="ctr" indent="0" marL="0">
-              <a:buNone/>
-            </a:pPr>
-            <a:r>
-              <a:rPr lang="en-US" sz="1100" b="1" dirty="0">
-                <a:solidFill>
-                  <a:srgbClr val="FFFFFF"/>
-                </a:solidFill>
-                <a:latin typeface="Calibri" pitchFamily="34" charset="0"/>
-                <a:ea typeface="Calibri" pitchFamily="34" charset="-122"/>
-                <a:cs typeface="Calibri" pitchFamily="34" charset="-120"/>
-              </a:rPr>
-              <a:t>2</a:t>
-            </a:r>
-            <a:endParaRPr lang="en-US" sz="1100" dirty="0"/>
-          </a:p>
-        </p:txBody>
-      </p:sp>
-      <p:sp>
-        <p:nvSpPr>
-          <p:cNvPr id="9" name="Text 7"/>
-          <p:cNvSpPr txBox="1"/>
-          <p:nvPr/>
-        </p:nvSpPr>
-        <p:spPr>
-          <a:xfrm>
-            <a:off x="969264" y="1938528"/>
-            <a:ext cx="6025896" cy="365760"/>
-          </a:xfrm>
-          <a:prstGeom prst="rect">
-            <a:avLst/>
-          </a:prstGeom>
-          <a:noFill/>
-          <a:ln/>
-        </p:spPr>
-        <p:txBody>
-          <a:bodyPr wrap="square" lIns="0" tIns="0" rIns="0" bIns="0" rtlCol="0" anchor="t"/>
-          <a:lstStyle/>
-          <a:p>
-            <a:pPr indent="0" marL="0">
-              <a:lnSpc>
-                <a:spcPct val="125000"/>
-              </a:lnSpc>
-              <a:buNone/>
-            </a:pPr>
-            <a:r>
-              <a:rPr lang="en-US" sz="1150" b="1" dirty="0">
-                <a:solidFill>
-                  <a:srgbClr val="222222"/>
-                </a:solidFill>
-                <a:latin typeface="Calibri" pitchFamily="34" charset="0"/>
-                <a:ea typeface="Calibri" pitchFamily="34" charset="-122"/>
-                <a:cs typeface="Calibri" pitchFamily="34" charset="-120"/>
-              </a:rPr>
-              <a:t>送信対象を作成・更新する</a:t>
-            </a:r>
-            <a:pPr indent="0" marL="0">
-              <a:lnSpc>
-                <a:spcPct val="125000"/>
-              </a:lnSpc>
-              <a:buNone/>
-            </a:pPr>
-            <a:r>
-              <a:rPr lang="en-US" sz="1150" dirty="0">
-                <a:solidFill>
-                  <a:srgbClr val="222222"/>
-                </a:solidFill>
-                <a:latin typeface="Calibri" pitchFamily="34" charset="0"/>
-                <a:ea typeface="Calibri" pitchFamily="34" charset="-122"/>
-                <a:cs typeface="Calibri" pitchFamily="34" charset="-120"/>
-              </a:rPr>
-              <a:t>を押す（メールアドレスを登録した来場者が対象になります）</a:t>
-            </a:r>
-            <a:endParaRPr lang="en-US" sz="1150" dirty="0"/>
-          </a:p>
-        </p:txBody>
-      </p:sp>
-      <p:sp>
-        <p:nvSpPr>
-          <p:cNvPr id="10" name="Shape 8"/>
-          <p:cNvSpPr/>
-          <p:nvPr/>
-        </p:nvSpPr>
-        <p:spPr>
-          <a:xfrm>
-            <a:off x="566928" y="2414016"/>
-            <a:ext cx="274320" cy="274320"/>
-          </a:xfrm>
-          <a:prstGeom prst="ellipse">
-            <a:avLst/>
-          </a:prstGeom>
-          <a:solidFill>
-            <a:srgbClr val="1E2761"/>
-          </a:solidFill>
-          <a:ln/>
-        </p:spPr>
-      </p:sp>
-      <p:sp>
-        <p:nvSpPr>
-          <p:cNvPr id="11" name="Text 9"/>
-          <p:cNvSpPr txBox="1"/>
-          <p:nvPr/>
-        </p:nvSpPr>
-        <p:spPr>
-          <a:xfrm>
-            <a:off x="566928" y="2414016"/>
-            <a:ext cx="274320" cy="274320"/>
-          </a:xfrm>
-          <a:prstGeom prst="rect">
-            <a:avLst/>
-          </a:prstGeom>
-          <a:noFill/>
-          <a:ln/>
-        </p:spPr>
-        <p:txBody>
-          <a:bodyPr wrap="square" lIns="0" tIns="0" rIns="0" bIns="0" rtlCol="0" anchor="ctr"/>
-          <a:lstStyle/>
-          <a:p>
-            <a:pPr algn="ctr" indent="0" marL="0">
-              <a:buNone/>
-            </a:pPr>
-            <a:r>
-              <a:rPr lang="en-US" sz="1100" b="1" dirty="0">
-                <a:solidFill>
-                  <a:srgbClr val="FFFFFF"/>
-                </a:solidFill>
-                <a:latin typeface="Calibri" pitchFamily="34" charset="0"/>
-                <a:ea typeface="Calibri" pitchFamily="34" charset="-122"/>
-                <a:cs typeface="Calibri" pitchFamily="34" charset="-120"/>
-              </a:rPr>
-              <a:t>3</a:t>
-            </a:r>
-            <a:endParaRPr lang="en-US" sz="1100" dirty="0"/>
-          </a:p>
-        </p:txBody>
-      </p:sp>
-      <p:sp>
-        <p:nvSpPr>
-          <p:cNvPr id="12" name="Text 10"/>
-          <p:cNvSpPr txBox="1"/>
-          <p:nvPr/>
-        </p:nvSpPr>
-        <p:spPr>
-          <a:xfrm>
-            <a:off x="969264" y="2395728"/>
-            <a:ext cx="6025896" cy="365760"/>
-          </a:xfrm>
-          <a:prstGeom prst="rect">
-            <a:avLst/>
-          </a:prstGeom>
-          <a:noFill/>
-          <a:ln/>
-        </p:spPr>
-        <p:txBody>
-          <a:bodyPr wrap="square" lIns="0" tIns="0" rIns="0" bIns="0" rtlCol="0" anchor="t"/>
-          <a:lstStyle/>
-          <a:p>
-            <a:pPr indent="0" marL="0">
-              <a:lnSpc>
-                <a:spcPct val="125000"/>
-              </a:lnSpc>
-              <a:buNone/>
-            </a:pPr>
-            <a:r>
-              <a:rPr lang="en-US" sz="1150" dirty="0">
-                <a:solidFill>
-                  <a:srgbClr val="222222"/>
-                </a:solidFill>
-                <a:latin typeface="Calibri" pitchFamily="34" charset="0"/>
-                <a:ea typeface="Calibri" pitchFamily="34" charset="-122"/>
-                <a:cs typeface="Calibri" pitchFamily="34" charset="-120"/>
-              </a:rPr>
-              <a:t>送信する</a:t>
-            </a:r>
-            <a:endParaRPr lang="en-US" sz="1150" dirty="0"/>
-          </a:p>
-        </p:txBody>
-      </p:sp>
-      <p:sp>
-        <p:nvSpPr>
-          <p:cNvPr id="13" name="Text 11"/>
-          <p:cNvSpPr txBox="1"/>
-          <p:nvPr/>
-        </p:nvSpPr>
-        <p:spPr>
-          <a:xfrm>
-            <a:off x="713232" y="2852928"/>
-            <a:ext cx="6281928" cy="257429"/>
-          </a:xfrm>
-          <a:prstGeom prst="rect">
-            <a:avLst/>
-          </a:prstGeom>
-          <a:noFill/>
-          <a:ln/>
-        </p:spPr>
-        <p:txBody>
-          <a:bodyPr wrap="square" lIns="0" tIns="0" rIns="0" bIns="0" rtlCol="0" anchor="t"/>
-          <a:lstStyle/>
-          <a:p>
-            <a:pPr marL="342900" indent="-342900">
-              <a:lnSpc>
-                <a:spcPct val="125000"/>
-              </a:lnSpc>
-              <a:buSzPct val="100000"/>
-              <a:buChar char="●"/>
-            </a:pPr>
-            <a:r>
-              <a:rPr lang="en-US" sz="1100" dirty="0">
-                <a:solidFill>
-                  <a:srgbClr val="222222"/>
-                </a:solidFill>
-                <a:latin typeface="Calibri" pitchFamily="34" charset="0"/>
-                <a:ea typeface="Calibri" pitchFamily="34" charset="-122"/>
-                <a:cs typeface="Calibri" pitchFamily="34" charset="-120"/>
-              </a:rPr>
-              <a:t>少数なら「この画面から50件だけ送信する」</a:t>
-            </a:r>
-            <a:endParaRPr lang="en-US" sz="1100" dirty="0"/>
-          </a:p>
-        </p:txBody>
-      </p:sp>
-      <p:sp>
-        <p:nvSpPr>
-          <p:cNvPr id="14" name="Text 12"/>
-          <p:cNvSpPr txBox="1"/>
-          <p:nvPr/>
-        </p:nvSpPr>
-        <p:spPr>
-          <a:xfrm>
-            <a:off x="713232" y="3128645"/>
-            <a:ext cx="6281928" cy="257429"/>
-          </a:xfrm>
-          <a:prstGeom prst="rect">
-            <a:avLst/>
-          </a:prstGeom>
-          <a:noFill/>
-          <a:ln/>
-        </p:spPr>
-        <p:txBody>
-          <a:bodyPr wrap="square" lIns="0" tIns="0" rIns="0" bIns="0" rtlCol="0" anchor="t"/>
-          <a:lstStyle/>
-          <a:p>
-            <a:pPr marL="342900" indent="-342900">
-              <a:lnSpc>
-                <a:spcPct val="125000"/>
-              </a:lnSpc>
-              <a:buSzPct val="100000"/>
-              <a:buChar char="●"/>
-            </a:pPr>
-            <a:r>
-              <a:rPr lang="en-US" sz="1100" dirty="0">
-                <a:solidFill>
-                  <a:srgbClr val="222222"/>
-                </a:solidFill>
-                <a:latin typeface="Calibri" pitchFamily="34" charset="0"/>
-                <a:ea typeface="Calibri" pitchFamily="34" charset="-122"/>
-                <a:cs typeface="Calibri" pitchFamily="34" charset="-120"/>
-              </a:rPr>
-              <a:t>大量ならサーバーの自動送信（5分ごとに200件ずつ）に任せる</a:t>
-            </a:r>
-            <a:endParaRPr lang="en-US" sz="1100" dirty="0"/>
-          </a:p>
-        </p:txBody>
-      </p:sp>
-      <p:sp>
-        <p:nvSpPr>
-          <p:cNvPr id="15" name="Shape 13"/>
-          <p:cNvSpPr/>
-          <p:nvPr/>
-        </p:nvSpPr>
-        <p:spPr>
-          <a:xfrm>
-            <a:off x="566928" y="3422650"/>
-            <a:ext cx="274320" cy="274320"/>
-          </a:xfrm>
-          <a:prstGeom prst="ellipse">
-            <a:avLst/>
-          </a:prstGeom>
-          <a:solidFill>
-            <a:srgbClr val="1E2761"/>
-          </a:solidFill>
-          <a:ln/>
-        </p:spPr>
-      </p:sp>
-      <p:sp>
-        <p:nvSpPr>
-          <p:cNvPr id="16" name="Text 14"/>
-          <p:cNvSpPr txBox="1"/>
-          <p:nvPr/>
-        </p:nvSpPr>
-        <p:spPr>
-          <a:xfrm>
-            <a:off x="566928" y="3422650"/>
-            <a:ext cx="274320" cy="274320"/>
-          </a:xfrm>
-          <a:prstGeom prst="rect">
-            <a:avLst/>
-          </a:prstGeom>
-          <a:noFill/>
-          <a:ln/>
-        </p:spPr>
-        <p:txBody>
-          <a:bodyPr wrap="square" lIns="0" tIns="0" rIns="0" bIns="0" rtlCol="0" anchor="ctr"/>
-          <a:lstStyle/>
-          <a:p>
-            <a:pPr algn="ctr" indent="0" marL="0">
-              <a:buNone/>
-            </a:pPr>
-            <a:r>
-              <a:rPr lang="en-US" sz="1100" b="1" dirty="0">
-                <a:solidFill>
-                  <a:srgbClr val="FFFFFF"/>
-                </a:solidFill>
-                <a:latin typeface="Calibri" pitchFamily="34" charset="0"/>
-                <a:ea typeface="Calibri" pitchFamily="34" charset="-122"/>
-                <a:cs typeface="Calibri" pitchFamily="34" charset="-120"/>
-              </a:rPr>
-              <a:t>4</a:t>
-            </a:r>
-            <a:endParaRPr lang="en-US" sz="1100" dirty="0"/>
-          </a:p>
-        </p:txBody>
-      </p:sp>
-      <p:sp>
-        <p:nvSpPr>
-          <p:cNvPr id="17" name="Text 15"/>
-          <p:cNvSpPr txBox="1"/>
-          <p:nvPr/>
-        </p:nvSpPr>
-        <p:spPr>
-          <a:xfrm>
-            <a:off x="969264" y="3404362"/>
-            <a:ext cx="6025896" cy="365760"/>
-          </a:xfrm>
-          <a:prstGeom prst="rect">
-            <a:avLst/>
-          </a:prstGeom>
-          <a:noFill/>
-          <a:ln/>
-        </p:spPr>
-        <p:txBody>
-          <a:bodyPr wrap="square" lIns="0" tIns="0" rIns="0" bIns="0" rtlCol="0" anchor="t"/>
-          <a:lstStyle/>
-          <a:p>
-            <a:pPr indent="0" marL="0">
-              <a:lnSpc>
-                <a:spcPct val="125000"/>
-              </a:lnSpc>
-              <a:buNone/>
-            </a:pPr>
-            <a:r>
-              <a:rPr lang="en-US" sz="1150" dirty="0">
-                <a:solidFill>
-                  <a:srgbClr val="222222"/>
-                </a:solidFill>
-                <a:latin typeface="Calibri" pitchFamily="34" charset="0"/>
-                <a:ea typeface="Calibri" pitchFamily="34" charset="-122"/>
-                <a:cs typeface="Calibri" pitchFamily="34" charset="-120"/>
-              </a:rPr>
-              <a:t>送信状況（未送信・送信済み・失敗）を画面で確認する</a:t>
-            </a:r>
-            <a:endParaRPr lang="en-US" sz="1150" dirty="0"/>
-          </a:p>
-        </p:txBody>
-      </p:sp>
-      <p:sp>
-        <p:nvSpPr>
-          <p:cNvPr id="18" name="Shape 16"/>
-          <p:cNvSpPr/>
-          <p:nvPr/>
-        </p:nvSpPr>
-        <p:spPr>
-          <a:xfrm>
-            <a:off x="566928" y="3861562"/>
-            <a:ext cx="6428232" cy="624459"/>
+            <a:off x="566928" y="5340096"/>
+            <a:ext cx="6428232" cy="431102"/>
           </a:xfrm>
           <a:prstGeom prst="roundRect">
             <a:avLst>
-              <a:gd name="adj" fmla="val 8786"/>
+              <a:gd name="adj" fmla="val 12726"/>
             </a:avLst>
           </a:prstGeom>
           <a:solidFill>
@@ -19646,13 +20354,13 @@
       </p:sp>
       <p:sp>
         <p:nvSpPr>
-          <p:cNvPr id="19" name="Text 17"/>
-          <p:cNvSpPr txBox="1"/>
-          <p:nvPr/>
-        </p:nvSpPr>
-        <p:spPr>
-          <a:xfrm>
-            <a:off x="658368" y="3953002"/>
+          <p:cNvPr id="7" name="Text 4"/>
+          <p:cNvSpPr txBox="1"/>
+          <p:nvPr/>
+        </p:nvSpPr>
+        <p:spPr>
+          <a:xfrm>
+            <a:off x="658368" y="5431536"/>
             <a:ext cx="237744" cy="237744"/>
           </a:xfrm>
           <a:prstGeom prst="rect">
@@ -19685,14 +20393,14 @@
       </p:sp>
       <p:sp>
         <p:nvSpPr>
-          <p:cNvPr id="20" name="Text 18"/>
-          <p:cNvSpPr txBox="1"/>
-          <p:nvPr/>
-        </p:nvSpPr>
-        <p:spPr>
-          <a:xfrm>
-            <a:off x="950976" y="3971290"/>
-            <a:ext cx="5925312" cy="441579"/>
+          <p:cNvPr id="8" name="Text 5"/>
+          <p:cNvSpPr txBox="1"/>
+          <p:nvPr/>
+        </p:nvSpPr>
+        <p:spPr>
+          <a:xfrm>
+            <a:off x="950976" y="5449824"/>
+            <a:ext cx="5925312" cy="248221"/>
           </a:xfrm>
           <a:prstGeom prst="rect">
             <a:avLst/>
@@ -19719,7 +20427,7 @@
                 <a:ea typeface="Calibri" pitchFamily="34" charset="-122"/>
                 <a:cs typeface="Calibri" pitchFamily="34" charset="-120"/>
               </a:rPr>
-              <a:t>メールの文面は相手によって変わります。会期中に総合アンケートへ答えた方には</a:t>
+              <a:t>母数は</a:t>
             </a:r>
             <a:pPr indent="0" marL="0">
               <a:lnSpc>
@@ -19736,7 +20444,7 @@
                 <a:ea typeface="Calibri" pitchFamily="34" charset="-122"/>
                 <a:cs typeface="Calibri" pitchFamily="34" charset="-120"/>
               </a:rPr>
-              <a:t>壁紙のご案内だけ</a:t>
+              <a:t>その設問に答えた組だけ</a:t>
             </a:r>
             <a:pPr indent="0" marL="0">
               <a:lnSpc>
@@ -19753,7 +20461,7 @@
                 <a:ea typeface="Calibri" pitchFamily="34" charset="-122"/>
                 <a:cs typeface="Calibri" pitchFamily="34" charset="-120"/>
               </a:rPr>
-              <a:t>、</a:t>
+              <a:t>で、会場全体ではありません。来場人数と内訳の合計の食い違いは</a:t>
             </a:r>
             <a:endParaRPr lang="en-US" sz="1050" dirty="0"/>
           </a:p>
@@ -19761,18 +20469,18 @@
       </p:sp>
       <p:sp>
         <p:nvSpPr>
-          <p:cNvPr id="21" name="Shape 19"/>
+          <p:cNvPr id="9" name="Shape 6"/>
           <p:cNvSpPr/>
           <p:nvPr/>
         </p:nvSpPr>
         <p:spPr>
           <a:xfrm>
-            <a:off x="566928" y="4559173"/>
-            <a:ext cx="6428232" cy="431102"/>
+            <a:off x="566928" y="5844350"/>
+            <a:ext cx="6428232" cy="624459"/>
           </a:xfrm>
           <a:prstGeom prst="roundRect">
             <a:avLst>
-              <a:gd name="adj" fmla="val 12726"/>
+              <a:gd name="adj" fmla="val 8786"/>
             </a:avLst>
           </a:prstGeom>
           <a:solidFill>
@@ -19788,13 +20496,13 @@
       </p:sp>
       <p:sp>
         <p:nvSpPr>
-          <p:cNvPr id="22" name="Text 20"/>
-          <p:cNvSpPr txBox="1"/>
-          <p:nvPr/>
-        </p:nvSpPr>
-        <p:spPr>
-          <a:xfrm>
-            <a:off x="658368" y="4650613"/>
+          <p:cNvPr id="10" name="Text 7"/>
+          <p:cNvSpPr txBox="1"/>
+          <p:nvPr/>
+        </p:nvSpPr>
+        <p:spPr>
+          <a:xfrm>
+            <a:off x="658368" y="5935790"/>
             <a:ext cx="237744" cy="237744"/>
           </a:xfrm>
           <a:prstGeom prst="rect">
@@ -19827,14 +20535,14 @@
       </p:sp>
       <p:sp>
         <p:nvSpPr>
-          <p:cNvPr id="23" name="Text 21"/>
-          <p:cNvSpPr txBox="1"/>
-          <p:nvPr/>
-        </p:nvSpPr>
-        <p:spPr>
-          <a:xfrm>
-            <a:off x="950976" y="4668901"/>
-            <a:ext cx="5925312" cy="248221"/>
+          <p:cNvPr id="11" name="Text 8"/>
+          <p:cNvSpPr txBox="1"/>
+          <p:nvPr/>
+        </p:nvSpPr>
+        <p:spPr>
+          <a:xfrm>
+            <a:off x="950976" y="5954078"/>
+            <a:ext cx="5925312" cy="441579"/>
           </a:xfrm>
           <a:prstGeom prst="rect">
             <a:avLst/>
@@ -19861,41 +20569,7 @@
                 <a:ea typeface="Calibri" pitchFamily="34" charset="-122"/>
                 <a:cs typeface="Calibri" pitchFamily="34" charset="-120"/>
               </a:rPr>
-              <a:t>まだ答えていない方には</a:t>
-            </a:r>
-            <a:pPr indent="0" marL="0">
-              <a:lnSpc>
-                <a:spcPct val="120000"/>
-              </a:lnSpc>
-              <a:buNone/>
-            </a:pPr>
-            <a:r>
-              <a:rPr lang="en-US" sz="1050" b="1" dirty="0">
-                <a:solidFill>
-                  <a:srgbClr val="222222"/>
-                </a:solidFill>
-                <a:latin typeface="Calibri" pitchFamily="34" charset="0"/>
-                <a:ea typeface="Calibri" pitchFamily="34" charset="-122"/>
-                <a:cs typeface="Calibri" pitchFamily="34" charset="-120"/>
-              </a:rPr>
-              <a:t>回答のお願い</a:t>
-            </a:r>
-            <a:pPr indent="0" marL="0">
-              <a:lnSpc>
-                <a:spcPct val="120000"/>
-              </a:lnSpc>
-              <a:buNone/>
-            </a:pPr>
-            <a:r>
-              <a:rPr lang="en-US" sz="1050" dirty="0">
-                <a:solidFill>
-                  <a:srgbClr val="222222"/>
-                </a:solidFill>
-                <a:latin typeface="Calibri" pitchFamily="34" charset="0"/>
-                <a:ea typeface="Calibri" pitchFamily="34" charset="-122"/>
-                <a:cs typeface="Calibri" pitchFamily="34" charset="-120"/>
-              </a:rPr>
-              <a:t>（回答後に壁紙）が届きます。</a:t>
+              <a:t>珍しくありません（本人を数えたかどうか、あとから合流した方がいるなど）。差が大きいときは、</a:t>
             </a:r>
             <a:endParaRPr lang="en-US" sz="1050" dirty="0"/>
           </a:p>
@@ -19903,18 +20577,18 @@
       </p:sp>
       <p:sp>
         <p:nvSpPr>
-          <p:cNvPr id="24" name="Shape 22"/>
+          <p:cNvPr id="12" name="Shape 9"/>
           <p:cNvSpPr/>
           <p:nvPr/>
         </p:nvSpPr>
         <p:spPr>
           <a:xfrm>
-            <a:off x="566928" y="5063427"/>
-            <a:ext cx="6428232" cy="624459"/>
+            <a:off x="566928" y="6541961"/>
+            <a:ext cx="6428232" cy="431102"/>
           </a:xfrm>
           <a:prstGeom prst="roundRect">
             <a:avLst>
-              <a:gd name="adj" fmla="val 8786"/>
+              <a:gd name="adj" fmla="val 12726"/>
             </a:avLst>
           </a:prstGeom>
           <a:solidFill>
@@ -19930,13 +20604,13 @@
       </p:sp>
       <p:sp>
         <p:nvSpPr>
-          <p:cNvPr id="25" name="Text 23"/>
-          <p:cNvSpPr txBox="1"/>
-          <p:nvPr/>
-        </p:nvSpPr>
-        <p:spPr>
-          <a:xfrm>
-            <a:off x="658368" y="5154867"/>
+          <p:cNvPr id="13" name="Text 10"/>
+          <p:cNvSpPr txBox="1"/>
+          <p:nvPr/>
+        </p:nvSpPr>
+        <p:spPr>
+          <a:xfrm>
+            <a:off x="658368" y="6633401"/>
             <a:ext cx="237744" cy="237744"/>
           </a:xfrm>
           <a:prstGeom prst="rect">
@@ -19969,14 +20643,14 @@
       </p:sp>
       <p:sp>
         <p:nvSpPr>
-          <p:cNvPr id="26" name="Text 24"/>
-          <p:cNvSpPr txBox="1"/>
-          <p:nvPr/>
-        </p:nvSpPr>
-        <p:spPr>
-          <a:xfrm>
-            <a:off x="950976" y="5173155"/>
-            <a:ext cx="5925312" cy="441579"/>
+          <p:cNvPr id="14" name="Text 11"/>
+          <p:cNvSpPr txBox="1"/>
+          <p:nvPr/>
+        </p:nvSpPr>
+        <p:spPr>
+          <a:xfrm>
+            <a:off x="950976" y="6651689"/>
+            <a:ext cx="5925312" cy="248221"/>
           </a:xfrm>
           <a:prstGeom prst="rect">
             <a:avLst/>
@@ -20003,7 +20677,7 @@
                 <a:ea typeface="Calibri" pitchFamily="34" charset="-122"/>
                 <a:cs typeface="Calibri" pitchFamily="34" charset="-120"/>
               </a:rPr>
-              <a:t>テスト送信のリンクは</a:t>
+              <a:t>次回に向けて</a:t>
             </a:r>
             <a:pPr indent="0" marL="0">
               <a:lnSpc>
@@ -20020,7 +20694,7 @@
                 <a:ea typeface="Calibri" pitchFamily="34" charset="-122"/>
                 <a:cs typeface="Calibri" pitchFamily="34" charset="-120"/>
               </a:rPr>
-              <a:t>スタッフ確認用のプレビュー</a:t>
+              <a:t>聞き方</a:t>
             </a:r>
             <a:pPr indent="0" marL="0">
               <a:lnSpc>
@@ -20037,49 +20711,46 @@
                 <a:ea typeface="Calibri" pitchFamily="34" charset="-122"/>
                 <a:cs typeface="Calibri" pitchFamily="34" charset="-120"/>
               </a:rPr>
-              <a:t>です。管理画面にログインした状態で開くと、来場者に見えるのと同じ画面を確認できます（プレビューからは回答できません）。</a:t>
+              <a:t>（「あなたを含めて何人ですか」など）を見直す材料にしてください。</a:t>
             </a:r>
             <a:endParaRPr lang="en-US" sz="1050" dirty="0"/>
           </a:p>
         </p:txBody>
       </p:sp>
-      <p:sp>
-        <p:nvSpPr>
-          <p:cNvPr id="27" name="Shape 25"/>
-          <p:cNvSpPr/>
-          <p:nvPr/>
-        </p:nvSpPr>
-        <p:spPr>
-          <a:xfrm>
-            <a:off x="566928" y="5761038"/>
-            <a:ext cx="6428232" cy="431102"/>
-          </a:xfrm>
-          <a:prstGeom prst="roundRect">
-            <a:avLst>
-              <a:gd name="adj" fmla="val 12726"/>
-            </a:avLst>
-          </a:prstGeom>
-          <a:solidFill>
-            <a:srgbClr val="FDF0E6"/>
-          </a:solidFill>
-          <a:ln w="9525">
-            <a:solidFill>
-              <a:srgbClr val="E08A3C"/>
-            </a:solidFill>
-            <a:prstDash val="solid"/>
-          </a:ln>
-        </p:spPr>
-      </p:sp>
-      <p:sp>
-        <p:nvSpPr>
-          <p:cNvPr id="28" name="Text 26"/>
-          <p:cNvSpPr txBox="1"/>
-          <p:nvPr/>
-        </p:nvSpPr>
-        <p:spPr>
-          <a:xfrm>
-            <a:off x="658368" y="5852478"/>
-            <a:ext cx="237744" cy="237744"/>
+      <p:pic>
+        <p:nvPicPr>
+          <p:cNvPr id="15" name="Image 1" descr="C:\Users\sato\Desktop\enque\docs\images\o-group-check.png">    </p:cNvPr>
+          <p:cNvPicPr>
+            <a:picLocks noChangeAspect="1"/>
+          </p:cNvPicPr>
+          <p:nvPr/>
+        </p:nvPicPr>
+        <p:blipFill>
+          <a:blip r:embed="rId2"/>
+          <a:stretch>
+            <a:fillRect/>
+          </a:stretch>
+        </p:blipFill>
+        <p:spPr>
+          <a:xfrm>
+            <a:off x="566928" y="7046214"/>
+            <a:ext cx="6428232" cy="2485366"/>
+          </a:xfrm>
+          <a:prstGeom prst="rect">
+            <a:avLst/>
+          </a:prstGeom>
+        </p:spPr>
+      </p:pic>
+      <p:sp>
+        <p:nvSpPr>
+          <p:cNvPr id="16" name="Text 12"/>
+          <p:cNvSpPr txBox="1"/>
+          <p:nvPr/>
+        </p:nvSpPr>
+        <p:spPr>
+          <a:xfrm>
+            <a:off x="566928" y="9586444"/>
+            <a:ext cx="6428232" cy="274320"/>
           </a:xfrm>
           <a:prstGeom prst="rect">
             <a:avLst/>
@@ -20095,65 +20766,23 @@
               <a:buNone/>
             </a:pPr>
             <a:r>
-              <a:rPr lang="en-US" sz="1200" b="1" dirty="0">
-                <a:solidFill>
-                  <a:srgbClr val="C25A17"/>
-                </a:solidFill>
-                <a:latin typeface="Calibri" pitchFamily="34" charset="0"/>
-                <a:ea typeface="Calibri" pitchFamily="34" charset="-122"/>
-                <a:cs typeface="Calibri" pitchFamily="34" charset="-120"/>
-              </a:rPr>
-              <a:t>！</a:t>
-            </a:r>
-            <a:endParaRPr lang="en-US" sz="1200" dirty="0"/>
-          </a:p>
-        </p:txBody>
-      </p:sp>
-      <p:sp>
-        <p:nvSpPr>
-          <p:cNvPr id="29" name="Text 27"/>
-          <p:cNvSpPr txBox="1"/>
-          <p:nvPr/>
-        </p:nvSpPr>
-        <p:spPr>
-          <a:xfrm>
-            <a:off x="950976" y="5870766"/>
-            <a:ext cx="5925312" cy="248221"/>
-          </a:xfrm>
-          <a:prstGeom prst="rect">
-            <a:avLst/>
-          </a:prstGeom>
-          <a:noFill/>
-          <a:ln/>
-        </p:spPr>
-        <p:txBody>
-          <a:bodyPr wrap="square" lIns="0" tIns="0" rIns="0" bIns="0" rtlCol="0" anchor="t"/>
-          <a:lstStyle/>
-          <a:p>
-            <a:pPr indent="0" marL="0">
-              <a:lnSpc>
-                <a:spcPct val="120000"/>
-              </a:lnSpc>
-              <a:buNone/>
-            </a:pPr>
-            <a:r>
-              <a:rPr lang="en-US" sz="1050" dirty="0">
-                <a:solidFill>
-                  <a:srgbClr val="222222"/>
-                </a:solidFill>
-                <a:latin typeface="Calibri" pitchFamily="34" charset="0"/>
-                <a:ea typeface="Calibri" pitchFamily="34" charset="-122"/>
-                <a:cs typeface="Calibri" pitchFamily="34" charset="-120"/>
-              </a:rPr>
-              <a:t>送信済みの人には二重に送られません。失敗したものは自動で3回まで再送されます。</a:t>
-            </a:r>
-            <a:endParaRPr lang="en-US" sz="1050" dirty="0"/>
-          </a:p>
-        </p:txBody>
-      </p:sp>
-      <p:sp>
-        <p:nvSpPr>
-          <p:cNvPr id="30" name="Text 28"/>
+              <a:rPr lang="en-US" sz="950" dirty="0">
+                <a:solidFill>
+                  <a:srgbClr val="6B6B6B"/>
+                </a:solidFill>
+                <a:latin typeface="Calibri" pitchFamily="34" charset="0"/>
+                <a:ea typeface="Calibri" pitchFamily="34" charset="-122"/>
+                <a:cs typeface="Calibri" pitchFamily="34" charset="-120"/>
+              </a:rPr>
+              <a:t>「グループの構成」の「来場人数との照合」の表（差の分布が見えるもの）。</a:t>
+            </a:r>
+            <a:endParaRPr lang="en-US" sz="950" dirty="0"/>
+          </a:p>
+        </p:txBody>
+      </p:sp>
+      <p:sp>
+        <p:nvSpPr>
+          <p:cNvPr id="17" name="Text 13"/>
           <p:cNvSpPr txBox="1"/>
           <p:nvPr/>
         </p:nvSpPr>
@@ -20294,15 +20923,300 @@
                 <a:ea typeface="Calibri" pitchFamily="34" charset="-122"/>
                 <a:cs typeface="Calibri" pitchFamily="34" charset="-120"/>
               </a:rPr>
-              <a:t>終了後2：案内メールを送る（つづき）</a:t>
+              <a:t>終了後1：受付を締める</a:t>
             </a:r>
             <a:endParaRPr lang="en-US" sz="2200" dirty="0"/>
+          </a:p>
+        </p:txBody>
+      </p:sp>
+      <p:sp>
+        <p:nvSpPr>
+          <p:cNvPr id="4" name="Shape 2"/>
+          <p:cNvSpPr/>
+          <p:nvPr/>
+        </p:nvSpPr>
+        <p:spPr>
+          <a:xfrm>
+            <a:off x="566928" y="1499616"/>
+            <a:ext cx="274320" cy="274320"/>
+          </a:xfrm>
+          <a:prstGeom prst="ellipse">
+            <a:avLst/>
+          </a:prstGeom>
+          <a:solidFill>
+            <a:srgbClr val="1E2761"/>
+          </a:solidFill>
+          <a:ln/>
+        </p:spPr>
+      </p:sp>
+      <p:sp>
+        <p:nvSpPr>
+          <p:cNvPr id="5" name="Text 3"/>
+          <p:cNvSpPr txBox="1"/>
+          <p:nvPr/>
+        </p:nvSpPr>
+        <p:spPr>
+          <a:xfrm>
+            <a:off x="566928" y="1499616"/>
+            <a:ext cx="274320" cy="274320"/>
+          </a:xfrm>
+          <a:prstGeom prst="rect">
+            <a:avLst/>
+          </a:prstGeom>
+          <a:noFill/>
+          <a:ln/>
+        </p:spPr>
+        <p:txBody>
+          <a:bodyPr wrap="square" lIns="0" tIns="0" rIns="0" bIns="0" rtlCol="0" anchor="ctr"/>
+          <a:lstStyle/>
+          <a:p>
+            <a:pPr algn="ctr" indent="0" marL="0">
+              <a:buNone/>
+            </a:pPr>
+            <a:r>
+              <a:rPr lang="en-US" sz="1100" b="1" dirty="0">
+                <a:solidFill>
+                  <a:srgbClr val="FFFFFF"/>
+                </a:solidFill>
+                <a:latin typeface="Calibri" pitchFamily="34" charset="0"/>
+                <a:ea typeface="Calibri" pitchFamily="34" charset="-122"/>
+                <a:cs typeface="Calibri" pitchFamily="34" charset="-120"/>
+              </a:rPr>
+              <a:t>1</a:t>
+            </a:r>
+            <a:endParaRPr lang="en-US" sz="1100" dirty="0"/>
+          </a:p>
+        </p:txBody>
+      </p:sp>
+      <p:sp>
+        <p:nvSpPr>
+          <p:cNvPr id="6" name="Text 4"/>
+          <p:cNvSpPr txBox="1"/>
+          <p:nvPr/>
+        </p:nvSpPr>
+        <p:spPr>
+          <a:xfrm>
+            <a:off x="969264" y="1481328"/>
+            <a:ext cx="6025896" cy="478409"/>
+          </a:xfrm>
+          <a:prstGeom prst="rect">
+            <a:avLst/>
+          </a:prstGeom>
+          <a:noFill/>
+          <a:ln/>
+        </p:spPr>
+        <p:txBody>
+          <a:bodyPr wrap="square" lIns="0" tIns="0" rIns="0" bIns="0" rtlCol="0" anchor="t"/>
+          <a:lstStyle/>
+          <a:p>
+            <a:pPr indent="0" marL="0">
+              <a:lnSpc>
+                <a:spcPct val="125000"/>
+              </a:lnSpc>
+              <a:buNone/>
+            </a:pPr>
+            <a:r>
+              <a:rPr lang="en-US" sz="1150" dirty="0">
+                <a:solidFill>
+                  <a:srgbClr val="222222"/>
+                </a:solidFill>
+                <a:latin typeface="Calibri" pitchFamily="34" charset="0"/>
+                <a:ea typeface="Calibri" pitchFamily="34" charset="-122"/>
+                <a:cs typeface="Calibri" pitchFamily="34" charset="-120"/>
+              </a:rPr>
+              <a:t>ダッシュボードの「イベント設定」で、状態を</a:t>
+            </a:r>
+            <a:pPr indent="0" marL="0">
+              <a:lnSpc>
+                <a:spcPct val="125000"/>
+              </a:lnSpc>
+              <a:buNone/>
+            </a:pPr>
+            <a:r>
+              <a:rPr lang="en-US" sz="1150" b="1" dirty="0">
+                <a:solidFill>
+                  <a:srgbClr val="222222"/>
+                </a:solidFill>
+                <a:latin typeface="Calibri" pitchFamily="34" charset="0"/>
+                <a:ea typeface="Calibri" pitchFamily="34" charset="-122"/>
+                <a:cs typeface="Calibri" pitchFamily="34" charset="-120"/>
+              </a:rPr>
+              <a:t>「終了」</a:t>
+            </a:r>
+            <a:pPr indent="0" marL="0">
+              <a:lnSpc>
+                <a:spcPct val="125000"/>
+              </a:lnSpc>
+              <a:buNone/>
+            </a:pPr>
+            <a:r>
+              <a:rPr lang="en-US" sz="1150" dirty="0">
+                <a:solidFill>
+                  <a:srgbClr val="222222"/>
+                </a:solidFill>
+                <a:latin typeface="Calibri" pitchFamily="34" charset="0"/>
+                <a:ea typeface="Calibri" pitchFamily="34" charset="-122"/>
+                <a:cs typeface="Calibri" pitchFamily="34" charset="-120"/>
+              </a:rPr>
+              <a:t>に変える（表示は「終了（案内メール送付）」です）</a:t>
+            </a:r>
+            <a:endParaRPr lang="en-US" sz="1150" dirty="0"/>
+          </a:p>
+        </p:txBody>
+      </p:sp>
+      <p:sp>
+        <p:nvSpPr>
+          <p:cNvPr id="7" name="Text 5"/>
+          <p:cNvSpPr txBox="1"/>
+          <p:nvPr/>
+        </p:nvSpPr>
+        <p:spPr>
+          <a:xfrm>
+            <a:off x="566928" y="2014601"/>
+            <a:ext cx="6428232" cy="257429"/>
+          </a:xfrm>
+          <a:prstGeom prst="rect">
+            <a:avLst/>
+          </a:prstGeom>
+          <a:noFill/>
+          <a:ln/>
+        </p:spPr>
+        <p:txBody>
+          <a:bodyPr wrap="square" lIns="0" tIns="0" rIns="0" bIns="0" rtlCol="0" anchor="t"/>
+          <a:lstStyle/>
+          <a:p>
+            <a:pPr indent="0" marL="0">
+              <a:lnSpc>
+                <a:spcPct val="125000"/>
+              </a:lnSpc>
+              <a:buNone/>
+            </a:pPr>
+            <a:r>
+              <a:rPr lang="en-US" sz="1100" dirty="0">
+                <a:solidFill>
+                  <a:srgbClr val="222222"/>
+                </a:solidFill>
+                <a:latin typeface="Calibri" pitchFamily="34" charset="0"/>
+                <a:ea typeface="Calibri" pitchFamily="34" charset="-122"/>
+                <a:cs typeface="Calibri" pitchFamily="34" charset="-120"/>
+              </a:rPr>
+              <a:t>これで、ブースのアンケートと総合アンケートの受付が終わり、案内メールを送れるようになります。</a:t>
+            </a:r>
+            <a:endParaRPr lang="en-US" sz="1100" dirty="0"/>
+          </a:p>
+        </p:txBody>
+      </p:sp>
+      <p:sp>
+        <p:nvSpPr>
+          <p:cNvPr id="8" name="Shape 6"/>
+          <p:cNvSpPr/>
+          <p:nvPr/>
+        </p:nvSpPr>
+        <p:spPr>
+          <a:xfrm>
+            <a:off x="566928" y="2308606"/>
+            <a:ext cx="6428232" cy="624459"/>
+          </a:xfrm>
+          <a:prstGeom prst="roundRect">
+            <a:avLst>
+              <a:gd name="adj" fmla="val 8786"/>
+            </a:avLst>
+          </a:prstGeom>
+          <a:solidFill>
+            <a:srgbClr val="FDF0E6"/>
+          </a:solidFill>
+          <a:ln w="9525">
+            <a:solidFill>
+              <a:srgbClr val="E08A3C"/>
+            </a:solidFill>
+            <a:prstDash val="solid"/>
+          </a:ln>
+        </p:spPr>
+      </p:sp>
+      <p:sp>
+        <p:nvSpPr>
+          <p:cNvPr id="9" name="Text 7"/>
+          <p:cNvSpPr txBox="1"/>
+          <p:nvPr/>
+        </p:nvSpPr>
+        <p:spPr>
+          <a:xfrm>
+            <a:off x="658368" y="2400046"/>
+            <a:ext cx="237744" cy="237744"/>
+          </a:xfrm>
+          <a:prstGeom prst="rect">
+            <a:avLst/>
+          </a:prstGeom>
+          <a:noFill/>
+          <a:ln/>
+        </p:spPr>
+        <p:txBody>
+          <a:bodyPr wrap="square" lIns="0" tIns="0" rIns="0" bIns="0" rtlCol="0" anchor="ctr"/>
+          <a:lstStyle/>
+          <a:p>
+            <a:pPr algn="ctr" indent="0" marL="0">
+              <a:buNone/>
+            </a:pPr>
+            <a:r>
+              <a:rPr lang="en-US" sz="1200" b="1" dirty="0">
+                <a:solidFill>
+                  <a:srgbClr val="C25A17"/>
+                </a:solidFill>
+                <a:latin typeface="Calibri" pitchFamily="34" charset="0"/>
+                <a:ea typeface="Calibri" pitchFamily="34" charset="-122"/>
+                <a:cs typeface="Calibri" pitchFamily="34" charset="-120"/>
+              </a:rPr>
+              <a:t>！</a:t>
+            </a:r>
+            <a:endParaRPr lang="en-US" sz="1200" dirty="0"/>
+          </a:p>
+        </p:txBody>
+      </p:sp>
+      <p:sp>
+        <p:nvSpPr>
+          <p:cNvPr id="10" name="Text 8"/>
+          <p:cNvSpPr txBox="1"/>
+          <p:nvPr/>
+        </p:nvSpPr>
+        <p:spPr>
+          <a:xfrm>
+            <a:off x="950976" y="2418334"/>
+            <a:ext cx="5925312" cy="441579"/>
+          </a:xfrm>
+          <a:prstGeom prst="rect">
+            <a:avLst/>
+          </a:prstGeom>
+          <a:noFill/>
+          <a:ln/>
+        </p:spPr>
+        <p:txBody>
+          <a:bodyPr wrap="square" lIns="0" tIns="0" rIns="0" bIns="0" rtlCol="0" anchor="t"/>
+          <a:lstStyle/>
+          <a:p>
+            <a:pPr indent="0" marL="0">
+              <a:lnSpc>
+                <a:spcPct val="120000"/>
+              </a:lnSpc>
+              <a:buNone/>
+            </a:pPr>
+            <a:r>
+              <a:rPr lang="en-US" sz="1050" dirty="0">
+                <a:solidFill>
+                  <a:srgbClr val="222222"/>
+                </a:solidFill>
+                <a:latin typeface="Calibri" pitchFamily="34" charset="0"/>
+                <a:ea typeface="Calibri" pitchFamily="34" charset="-122"/>
+                <a:cs typeface="Calibri" pitchFamily="34" charset="-120"/>
+              </a:rPr>
+              <a:t>状態を「終了」にすると、ブースのアンケートは回答できなくなります。当日の受付時間が終わってから切り替えてください。</a:t>
+            </a:r>
+            <a:endParaRPr lang="en-US" sz="1050" dirty="0"/>
           </a:p>
         </p:txBody>
       </p:sp>
       <p:pic>
         <p:nvPicPr>
-          <p:cNvPr id="4" name="Image 0" descr="C:\Users\sato\Desktop\enque\docs\images\o-invite-status.png">    </p:cNvPr>
+          <p:cNvPr id="11" name="Image 0" descr="C:\Users\sato\Desktop\enque\docs\images\o-overall.png">    </p:cNvPr>
           <p:cNvPicPr>
             <a:picLocks noChangeAspect="1"/>
           </p:cNvPicPr>
@@ -20316,7 +21230,7 @@
         </p:blipFill>
         <p:spPr>
           <a:xfrm>
-            <a:off x="1504370" y="1481328"/>
+            <a:off x="1504370" y="3006217"/>
             <a:ext cx="4553347" cy="3474720"/>
           </a:xfrm>
           <a:prstGeom prst="rect">
@@ -20326,13 +21240,13 @@
       </p:pic>
       <p:sp>
         <p:nvSpPr>
-          <p:cNvPr id="5" name="Text 2"/>
-          <p:cNvSpPr txBox="1"/>
-          <p:nvPr/>
-        </p:nvSpPr>
-        <p:spPr>
-          <a:xfrm>
-            <a:off x="566928" y="5010912"/>
+          <p:cNvPr id="12" name="Text 9"/>
+          <p:cNvSpPr txBox="1"/>
+          <p:nvPr/>
+        </p:nvSpPr>
+        <p:spPr>
+          <a:xfrm>
+            <a:off x="566928" y="6535801"/>
             <a:ext cx="6428232" cy="274320"/>
           </a:xfrm>
           <a:prstGeom prst="rect">
@@ -20357,7 +21271,7 @@
                 <a:ea typeface="Calibri" pitchFamily="34" charset="-122"/>
                 <a:cs typeface="Calibri" pitchFamily="34" charset="-120"/>
               </a:rPr>
-              <a:t>「総合アンケートと案内メール」画面の送信状況（未送信・送信済み・失敗・回答済みの数）。</a:t>
+              <a:t>「総合アンケートと案内メール」画面の1番上（総合アンケートの状態と回答数が見えるところ）。</a:t>
             </a:r>
             <a:endParaRPr lang="en-US" sz="950" dirty="0"/>
           </a:p>
@@ -20365,7 +21279,7 @@
       </p:sp>
       <p:sp>
         <p:nvSpPr>
-          <p:cNvPr id="6" name="Text 3"/>
+          <p:cNvPr id="13" name="Text 10"/>
           <p:cNvSpPr txBox="1"/>
           <p:nvPr/>
         </p:nvSpPr>
@@ -20506,7 +21420,7 @@
                 <a:ea typeface="Calibri" pitchFamily="34" charset="-122"/>
                 <a:cs typeface="Calibri" pitchFamily="34" charset="-120"/>
               </a:rPr>
-              <a:t>終了後3：集計データを受け取る</a:t>
+              <a:t>終了後2：案内メールを送る</a:t>
             </a:r>
             <a:endParaRPr lang="en-US" sz="2200" dirty="0"/>
           </a:p>
@@ -20514,14 +21428,73 @@
       </p:sp>
       <p:sp>
         <p:nvSpPr>
-          <p:cNvPr id="4" name="Text 2"/>
-          <p:cNvSpPr txBox="1"/>
-          <p:nvPr/>
-        </p:nvSpPr>
-        <p:spPr>
-          <a:xfrm>
-            <a:off x="566928" y="1591056"/>
-            <a:ext cx="6428232" cy="257810"/>
+          <p:cNvPr id="4" name="Shape 2"/>
+          <p:cNvSpPr/>
+          <p:nvPr/>
+        </p:nvSpPr>
+        <p:spPr>
+          <a:xfrm>
+            <a:off x="566928" y="1499616"/>
+            <a:ext cx="274320" cy="274320"/>
+          </a:xfrm>
+          <a:prstGeom prst="ellipse">
+            <a:avLst/>
+          </a:prstGeom>
+          <a:solidFill>
+            <a:srgbClr val="1E2761"/>
+          </a:solidFill>
+          <a:ln/>
+        </p:spPr>
+      </p:sp>
+      <p:sp>
+        <p:nvSpPr>
+          <p:cNvPr id="5" name="Text 3"/>
+          <p:cNvSpPr txBox="1"/>
+          <p:nvPr/>
+        </p:nvSpPr>
+        <p:spPr>
+          <a:xfrm>
+            <a:off x="566928" y="1499616"/>
+            <a:ext cx="274320" cy="274320"/>
+          </a:xfrm>
+          <a:prstGeom prst="rect">
+            <a:avLst/>
+          </a:prstGeom>
+          <a:noFill/>
+          <a:ln/>
+        </p:spPr>
+        <p:txBody>
+          <a:bodyPr wrap="square" lIns="0" tIns="0" rIns="0" bIns="0" rtlCol="0" anchor="ctr"/>
+          <a:lstStyle/>
+          <a:p>
+            <a:pPr algn="ctr" indent="0" marL="0">
+              <a:buNone/>
+            </a:pPr>
+            <a:r>
+              <a:rPr lang="en-US" sz="1100" b="1" dirty="0">
+                <a:solidFill>
+                  <a:srgbClr val="FFFFFF"/>
+                </a:solidFill>
+                <a:latin typeface="Calibri" pitchFamily="34" charset="0"/>
+                <a:ea typeface="Calibri" pitchFamily="34" charset="-122"/>
+                <a:cs typeface="Calibri" pitchFamily="34" charset="-120"/>
+              </a:rPr>
+              <a:t>1</a:t>
+            </a:r>
+            <a:endParaRPr lang="en-US" sz="1100" dirty="0"/>
+          </a:p>
+        </p:txBody>
+      </p:sp>
+      <p:sp>
+        <p:nvSpPr>
+          <p:cNvPr id="6" name="Text 4"/>
+          <p:cNvSpPr txBox="1"/>
+          <p:nvPr/>
+        </p:nvSpPr>
+        <p:spPr>
+          <a:xfrm>
+            <a:off x="969264" y="1481328"/>
+            <a:ext cx="6025896" cy="365760"/>
           </a:xfrm>
           <a:prstGeom prst="rect">
             <a:avLst/>
@@ -20534,32 +21507,271 @@
           <a:lstStyle/>
           <a:p>
             <a:pPr indent="0" marL="0">
-              <a:buNone/>
-            </a:pPr>
-            <a:r>
-              <a:rPr lang="en-US" sz="1400" b="1" dirty="0">
-                <a:solidFill>
-                  <a:srgbClr val="1E2761"/>
-                </a:solidFill>
-                <a:latin typeface="Calibri" pitchFamily="34" charset="0"/>
-                <a:ea typeface="Calibri" pitchFamily="34" charset="-122"/>
-                <a:cs typeface="Calibri" pitchFamily="34" charset="-120"/>
-              </a:rPr>
-              <a:t>CSVをダウンロードする</a:t>
-            </a:r>
-            <a:endParaRPr lang="en-US" sz="1400" dirty="0"/>
-          </a:p>
-        </p:txBody>
-      </p:sp>
-      <p:sp>
-        <p:nvSpPr>
-          <p:cNvPr id="5" name="Text 3"/>
-          <p:cNvSpPr txBox="1"/>
-          <p:nvPr/>
-        </p:nvSpPr>
-        <p:spPr>
-          <a:xfrm>
-            <a:off x="713232" y="1922018"/>
+              <a:lnSpc>
+                <a:spcPct val="125000"/>
+              </a:lnSpc>
+              <a:buNone/>
+            </a:pPr>
+            <a:r>
+              <a:rPr lang="en-US" sz="1150" b="1" dirty="0">
+                <a:solidFill>
+                  <a:srgbClr val="222222"/>
+                </a:solidFill>
+                <a:latin typeface="Calibri" pitchFamily="34" charset="0"/>
+                <a:ea typeface="Calibri" pitchFamily="34" charset="-122"/>
+                <a:cs typeface="Calibri" pitchFamily="34" charset="-120"/>
+              </a:rPr>
+              <a:t>テスト送信</a:t>
+            </a:r>
+            <a:pPr indent="0" marL="0">
+              <a:lnSpc>
+                <a:spcPct val="125000"/>
+              </a:lnSpc>
+              <a:buNone/>
+            </a:pPr>
+            <a:r>
+              <a:rPr lang="en-US" sz="1150" dirty="0">
+                <a:solidFill>
+                  <a:srgbClr val="222222"/>
+                </a:solidFill>
+                <a:latin typeface="Calibri" pitchFamily="34" charset="0"/>
+                <a:ea typeface="Calibri" pitchFamily="34" charset="-122"/>
+                <a:cs typeface="Calibri" pitchFamily="34" charset="-120"/>
+              </a:rPr>
+              <a:t>：自分のアドレスを入れて送り、文面とリンクを確認する</a:t>
+            </a:r>
+            <a:endParaRPr lang="en-US" sz="1150" dirty="0"/>
+          </a:p>
+        </p:txBody>
+      </p:sp>
+      <p:sp>
+        <p:nvSpPr>
+          <p:cNvPr id="7" name="Shape 5"/>
+          <p:cNvSpPr/>
+          <p:nvPr/>
+        </p:nvSpPr>
+        <p:spPr>
+          <a:xfrm>
+            <a:off x="566928" y="1956816"/>
+            <a:ext cx="274320" cy="274320"/>
+          </a:xfrm>
+          <a:prstGeom prst="ellipse">
+            <a:avLst/>
+          </a:prstGeom>
+          <a:solidFill>
+            <a:srgbClr val="1E2761"/>
+          </a:solidFill>
+          <a:ln/>
+        </p:spPr>
+      </p:sp>
+      <p:sp>
+        <p:nvSpPr>
+          <p:cNvPr id="8" name="Text 6"/>
+          <p:cNvSpPr txBox="1"/>
+          <p:nvPr/>
+        </p:nvSpPr>
+        <p:spPr>
+          <a:xfrm>
+            <a:off x="566928" y="1956816"/>
+            <a:ext cx="274320" cy="274320"/>
+          </a:xfrm>
+          <a:prstGeom prst="rect">
+            <a:avLst/>
+          </a:prstGeom>
+          <a:noFill/>
+          <a:ln/>
+        </p:spPr>
+        <p:txBody>
+          <a:bodyPr wrap="square" lIns="0" tIns="0" rIns="0" bIns="0" rtlCol="0" anchor="ctr"/>
+          <a:lstStyle/>
+          <a:p>
+            <a:pPr algn="ctr" indent="0" marL="0">
+              <a:buNone/>
+            </a:pPr>
+            <a:r>
+              <a:rPr lang="en-US" sz="1100" b="1" dirty="0">
+                <a:solidFill>
+                  <a:srgbClr val="FFFFFF"/>
+                </a:solidFill>
+                <a:latin typeface="Calibri" pitchFamily="34" charset="0"/>
+                <a:ea typeface="Calibri" pitchFamily="34" charset="-122"/>
+                <a:cs typeface="Calibri" pitchFamily="34" charset="-120"/>
+              </a:rPr>
+              <a:t>2</a:t>
+            </a:r>
+            <a:endParaRPr lang="en-US" sz="1100" dirty="0"/>
+          </a:p>
+        </p:txBody>
+      </p:sp>
+      <p:sp>
+        <p:nvSpPr>
+          <p:cNvPr id="9" name="Text 7"/>
+          <p:cNvSpPr txBox="1"/>
+          <p:nvPr/>
+        </p:nvSpPr>
+        <p:spPr>
+          <a:xfrm>
+            <a:off x="969264" y="1938528"/>
+            <a:ext cx="6025896" cy="365760"/>
+          </a:xfrm>
+          <a:prstGeom prst="rect">
+            <a:avLst/>
+          </a:prstGeom>
+          <a:noFill/>
+          <a:ln/>
+        </p:spPr>
+        <p:txBody>
+          <a:bodyPr wrap="square" lIns="0" tIns="0" rIns="0" bIns="0" rtlCol="0" anchor="t"/>
+          <a:lstStyle/>
+          <a:p>
+            <a:pPr indent="0" marL="0">
+              <a:lnSpc>
+                <a:spcPct val="125000"/>
+              </a:lnSpc>
+              <a:buNone/>
+            </a:pPr>
+            <a:r>
+              <a:rPr lang="en-US" sz="1150" b="1" dirty="0">
+                <a:solidFill>
+                  <a:srgbClr val="222222"/>
+                </a:solidFill>
+                <a:latin typeface="Calibri" pitchFamily="34" charset="0"/>
+                <a:ea typeface="Calibri" pitchFamily="34" charset="-122"/>
+                <a:cs typeface="Calibri" pitchFamily="34" charset="-120"/>
+              </a:rPr>
+              <a:t>送信対象を作成・更新する</a:t>
+            </a:r>
+            <a:pPr indent="0" marL="0">
+              <a:lnSpc>
+                <a:spcPct val="125000"/>
+              </a:lnSpc>
+              <a:buNone/>
+            </a:pPr>
+            <a:r>
+              <a:rPr lang="en-US" sz="1150" dirty="0">
+                <a:solidFill>
+                  <a:srgbClr val="222222"/>
+                </a:solidFill>
+                <a:latin typeface="Calibri" pitchFamily="34" charset="0"/>
+                <a:ea typeface="Calibri" pitchFamily="34" charset="-122"/>
+                <a:cs typeface="Calibri" pitchFamily="34" charset="-120"/>
+              </a:rPr>
+              <a:t>を押す（メールアドレスを登録した来場者が対象になります）</a:t>
+            </a:r>
+            <a:endParaRPr lang="en-US" sz="1150" dirty="0"/>
+          </a:p>
+        </p:txBody>
+      </p:sp>
+      <p:sp>
+        <p:nvSpPr>
+          <p:cNvPr id="10" name="Shape 8"/>
+          <p:cNvSpPr/>
+          <p:nvPr/>
+        </p:nvSpPr>
+        <p:spPr>
+          <a:xfrm>
+            <a:off x="566928" y="2414016"/>
+            <a:ext cx="274320" cy="274320"/>
+          </a:xfrm>
+          <a:prstGeom prst="ellipse">
+            <a:avLst/>
+          </a:prstGeom>
+          <a:solidFill>
+            <a:srgbClr val="1E2761"/>
+          </a:solidFill>
+          <a:ln/>
+        </p:spPr>
+      </p:sp>
+      <p:sp>
+        <p:nvSpPr>
+          <p:cNvPr id="11" name="Text 9"/>
+          <p:cNvSpPr txBox="1"/>
+          <p:nvPr/>
+        </p:nvSpPr>
+        <p:spPr>
+          <a:xfrm>
+            <a:off x="566928" y="2414016"/>
+            <a:ext cx="274320" cy="274320"/>
+          </a:xfrm>
+          <a:prstGeom prst="rect">
+            <a:avLst/>
+          </a:prstGeom>
+          <a:noFill/>
+          <a:ln/>
+        </p:spPr>
+        <p:txBody>
+          <a:bodyPr wrap="square" lIns="0" tIns="0" rIns="0" bIns="0" rtlCol="0" anchor="ctr"/>
+          <a:lstStyle/>
+          <a:p>
+            <a:pPr algn="ctr" indent="0" marL="0">
+              <a:buNone/>
+            </a:pPr>
+            <a:r>
+              <a:rPr lang="en-US" sz="1100" b="1" dirty="0">
+                <a:solidFill>
+                  <a:srgbClr val="FFFFFF"/>
+                </a:solidFill>
+                <a:latin typeface="Calibri" pitchFamily="34" charset="0"/>
+                <a:ea typeface="Calibri" pitchFamily="34" charset="-122"/>
+                <a:cs typeface="Calibri" pitchFamily="34" charset="-120"/>
+              </a:rPr>
+              <a:t>3</a:t>
+            </a:r>
+            <a:endParaRPr lang="en-US" sz="1100" dirty="0"/>
+          </a:p>
+        </p:txBody>
+      </p:sp>
+      <p:sp>
+        <p:nvSpPr>
+          <p:cNvPr id="12" name="Text 10"/>
+          <p:cNvSpPr txBox="1"/>
+          <p:nvPr/>
+        </p:nvSpPr>
+        <p:spPr>
+          <a:xfrm>
+            <a:off x="969264" y="2395728"/>
+            <a:ext cx="6025896" cy="365760"/>
+          </a:xfrm>
+          <a:prstGeom prst="rect">
+            <a:avLst/>
+          </a:prstGeom>
+          <a:noFill/>
+          <a:ln/>
+        </p:spPr>
+        <p:txBody>
+          <a:bodyPr wrap="square" lIns="0" tIns="0" rIns="0" bIns="0" rtlCol="0" anchor="t"/>
+          <a:lstStyle/>
+          <a:p>
+            <a:pPr indent="0" marL="0">
+              <a:lnSpc>
+                <a:spcPct val="125000"/>
+              </a:lnSpc>
+              <a:buNone/>
+            </a:pPr>
+            <a:r>
+              <a:rPr lang="en-US" sz="1150" dirty="0">
+                <a:solidFill>
+                  <a:srgbClr val="222222"/>
+                </a:solidFill>
+                <a:latin typeface="Calibri" pitchFamily="34" charset="0"/>
+                <a:ea typeface="Calibri" pitchFamily="34" charset="-122"/>
+                <a:cs typeface="Calibri" pitchFamily="34" charset="-120"/>
+              </a:rPr>
+              <a:t>送信する</a:t>
+            </a:r>
+            <a:endParaRPr lang="en-US" sz="1150" dirty="0"/>
+          </a:p>
+        </p:txBody>
+      </p:sp>
+      <p:sp>
+        <p:nvSpPr>
+          <p:cNvPr id="13" name="Text 11"/>
+          <p:cNvSpPr txBox="1"/>
+          <p:nvPr/>
+        </p:nvSpPr>
+        <p:spPr>
+          <a:xfrm>
+            <a:off x="713232" y="2852928"/>
             <a:ext cx="6281928" cy="257429"/>
           </a:xfrm>
           <a:prstGeom prst="rect">
@@ -20580,23 +21792,6 @@
               <a:buChar char="●"/>
             </a:pPr>
             <a:r>
-              <a:rPr lang="en-US" sz="1100" b="1" dirty="0">
-                <a:solidFill>
-                  <a:srgbClr val="222222"/>
-                </a:solidFill>
-                <a:latin typeface="Calibri" pitchFamily="34" charset="0"/>
-                <a:ea typeface="Calibri" pitchFamily="34" charset="-122"/>
-                <a:cs typeface="Calibri" pitchFamily="34" charset="-120"/>
-              </a:rPr>
-              <a:t>企業別</a:t>
-            </a:r>
-            <a:pPr indent="0" marL="0">
-              <a:lnSpc>
-                <a:spcPct val="125000"/>
-              </a:lnSpc>
-              <a:buNone/>
-            </a:pPr>
-            <a:r>
               <a:rPr lang="en-US" sz="1100" dirty="0">
                 <a:solidFill>
                   <a:srgbClr val="222222"/>
@@ -20605,7 +21800,7 @@
                 <a:ea typeface="Calibri" pitchFamily="34" charset="-122"/>
                 <a:cs typeface="Calibri" pitchFamily="34" charset="-120"/>
               </a:rPr>
-              <a:t>：企業の「集計」画面、または「回答一覧」から</a:t>
+              <a:t>少数なら「この画面から50件だけ送信する」</a:t>
             </a:r>
             <a:endParaRPr lang="en-US" sz="1100" dirty="0"/>
           </a:p>
@@ -20613,13 +21808,13 @@
       </p:sp>
       <p:sp>
         <p:nvSpPr>
-          <p:cNvPr id="6" name="Text 4"/>
-          <p:cNvSpPr txBox="1"/>
-          <p:nvPr/>
-        </p:nvSpPr>
-        <p:spPr>
-          <a:xfrm>
-            <a:off x="713232" y="2197735"/>
+          <p:cNvPr id="14" name="Text 12"/>
+          <p:cNvSpPr txBox="1"/>
+          <p:nvPr/>
+        </p:nvSpPr>
+        <p:spPr>
+          <a:xfrm>
+            <a:off x="713232" y="3128645"/>
             <a:ext cx="6281928" cy="257429"/>
           </a:xfrm>
           <a:prstGeom prst="rect">
@@ -20640,32 +21835,74 @@
               <a:buChar char="●"/>
             </a:pPr>
             <a:r>
+              <a:rPr lang="en-US" sz="1100" dirty="0">
+                <a:solidFill>
+                  <a:srgbClr val="222222"/>
+                </a:solidFill>
+                <a:latin typeface="Calibri" pitchFamily="34" charset="0"/>
+                <a:ea typeface="Calibri" pitchFamily="34" charset="-122"/>
+                <a:cs typeface="Calibri" pitchFamily="34" charset="-120"/>
+              </a:rPr>
+              <a:t>大量ならサーバーの自動送信（5分ごとに200件ずつ）に任せる</a:t>
+            </a:r>
+            <a:endParaRPr lang="en-US" sz="1100" dirty="0"/>
+          </a:p>
+        </p:txBody>
+      </p:sp>
+      <p:sp>
+        <p:nvSpPr>
+          <p:cNvPr id="15" name="Shape 13"/>
+          <p:cNvSpPr/>
+          <p:nvPr/>
+        </p:nvSpPr>
+        <p:spPr>
+          <a:xfrm>
+            <a:off x="566928" y="3422650"/>
+            <a:ext cx="274320" cy="274320"/>
+          </a:xfrm>
+          <a:prstGeom prst="ellipse">
+            <a:avLst/>
+          </a:prstGeom>
+          <a:solidFill>
+            <a:srgbClr val="1E2761"/>
+          </a:solidFill>
+          <a:ln/>
+        </p:spPr>
+      </p:sp>
+      <p:sp>
+        <p:nvSpPr>
+          <p:cNvPr id="16" name="Text 14"/>
+          <p:cNvSpPr txBox="1"/>
+          <p:nvPr/>
+        </p:nvSpPr>
+        <p:spPr>
+          <a:xfrm>
+            <a:off x="566928" y="3422650"/>
+            <a:ext cx="274320" cy="274320"/>
+          </a:xfrm>
+          <a:prstGeom prst="rect">
+            <a:avLst/>
+          </a:prstGeom>
+          <a:noFill/>
+          <a:ln/>
+        </p:spPr>
+        <p:txBody>
+          <a:bodyPr wrap="square" lIns="0" tIns="0" rIns="0" bIns="0" rtlCol="0" anchor="ctr"/>
+          <a:lstStyle/>
+          <a:p>
+            <a:pPr algn="ctr" indent="0" marL="0">
+              <a:buNone/>
+            </a:pPr>
+            <a:r>
               <a:rPr lang="en-US" sz="1100" b="1" dirty="0">
                 <a:solidFill>
-                  <a:srgbClr val="222222"/>
-                </a:solidFill>
-                <a:latin typeface="Calibri" pitchFamily="34" charset="0"/>
-                <a:ea typeface="Calibri" pitchFamily="34" charset="-122"/>
-                <a:cs typeface="Calibri" pitchFamily="34" charset="-120"/>
-              </a:rPr>
-              <a:t>全社まとめて</a:t>
-            </a:r>
-            <a:pPr indent="0" marL="0">
-              <a:lnSpc>
-                <a:spcPct val="125000"/>
-              </a:lnSpc>
-              <a:buNone/>
-            </a:pPr>
-            <a:r>
-              <a:rPr lang="en-US" sz="1100" dirty="0">
-                <a:solidFill>
-                  <a:srgbClr val="222222"/>
-                </a:solidFill>
-                <a:latin typeface="Calibri" pitchFamily="34" charset="0"/>
-                <a:ea typeface="Calibri" pitchFamily="34" charset="-122"/>
-                <a:cs typeface="Calibri" pitchFamily="34" charset="-120"/>
-              </a:rPr>
-              <a:t>：ダッシュボードの「全企業分のCSV」から</a:t>
+                  <a:srgbClr val="FFFFFF"/>
+                </a:solidFill>
+                <a:latin typeface="Calibri" pitchFamily="34" charset="0"/>
+                <a:ea typeface="Calibri" pitchFamily="34" charset="-122"/>
+                <a:cs typeface="Calibri" pitchFamily="34" charset="-120"/>
+              </a:rPr>
+              <a:t>4</a:t>
             </a:r>
             <a:endParaRPr lang="en-US" sz="1100" dirty="0"/>
           </a:p>
@@ -20673,14 +21910,14 @@
       </p:sp>
       <p:sp>
         <p:nvSpPr>
-          <p:cNvPr id="7" name="Text 5"/>
-          <p:cNvSpPr txBox="1"/>
-          <p:nvPr/>
-        </p:nvSpPr>
-        <p:spPr>
-          <a:xfrm>
-            <a:off x="566928" y="2473452"/>
-            <a:ext cx="6428232" cy="257429"/>
+          <p:cNvPr id="17" name="Text 15"/>
+          <p:cNvSpPr txBox="1"/>
+          <p:nvPr/>
+        </p:nvSpPr>
+        <p:spPr>
+          <a:xfrm>
+            <a:off x="969264" y="3404362"/>
+            <a:ext cx="6025896" cy="365760"/>
           </a:xfrm>
           <a:prstGeom prst="rect">
             <a:avLst/>
@@ -20699,232 +21936,29 @@
               <a:buNone/>
             </a:pPr>
             <a:r>
-              <a:rPr lang="en-US" sz="1100" dirty="0">
-                <a:solidFill>
-                  <a:srgbClr val="222222"/>
-                </a:solidFill>
-                <a:latin typeface="Calibri" pitchFamily="34" charset="0"/>
-                <a:ea typeface="Calibri" pitchFamily="34" charset="-122"/>
-                <a:cs typeface="Calibri" pitchFamily="34" charset="-120"/>
-              </a:rPr>
-              <a:t>CSVは</a:t>
-            </a:r>
-            <a:pPr indent="0" marL="0">
-              <a:lnSpc>
-                <a:spcPct val="125000"/>
-              </a:lnSpc>
-              <a:buNone/>
-            </a:pPr>
-            <a:r>
-              <a:rPr lang="en-US" sz="1100" b="1" dirty="0">
-                <a:solidFill>
-                  <a:srgbClr val="222222"/>
-                </a:solidFill>
-                <a:latin typeface="Calibri" pitchFamily="34" charset="0"/>
-                <a:ea typeface="Calibri" pitchFamily="34" charset="-122"/>
-                <a:cs typeface="Calibri" pitchFamily="34" charset="-120"/>
-              </a:rPr>
-              <a:t>UTF-8（BOM付き）</a:t>
-            </a:r>
-            <a:pPr indent="0" marL="0">
-              <a:lnSpc>
-                <a:spcPct val="125000"/>
-              </a:lnSpc>
-              <a:buNone/>
-            </a:pPr>
-            <a:r>
-              <a:rPr lang="en-US" sz="1100" dirty="0">
-                <a:solidFill>
-                  <a:srgbClr val="222222"/>
-                </a:solidFill>
-                <a:latin typeface="Calibri" pitchFamily="34" charset="0"/>
-                <a:ea typeface="Calibri" pitchFamily="34" charset="-122"/>
-                <a:cs typeface="Calibri" pitchFamily="34" charset="-120"/>
-              </a:rPr>
-              <a:t>なので、Excelでそのまま開けます。</a:t>
-            </a:r>
-            <a:endParaRPr lang="en-US" sz="1100" dirty="0"/>
-          </a:p>
-        </p:txBody>
-      </p:sp>
-      <p:sp>
-        <p:nvSpPr>
-          <p:cNvPr id="8" name="Text 6"/>
-          <p:cNvSpPr txBox="1"/>
-          <p:nvPr/>
-        </p:nvSpPr>
-        <p:spPr>
-          <a:xfrm>
-            <a:off x="566928" y="2767457"/>
-            <a:ext cx="6428232" cy="459994"/>
-          </a:xfrm>
-          <a:prstGeom prst="rect">
-            <a:avLst/>
-          </a:prstGeom>
-          <a:noFill/>
-          <a:ln/>
-        </p:spPr>
-        <p:txBody>
-          <a:bodyPr wrap="square" lIns="0" tIns="0" rIns="0" bIns="0" rtlCol="0" anchor="t"/>
-          <a:lstStyle/>
-          <a:p>
-            <a:pPr indent="0" marL="0">
-              <a:lnSpc>
-                <a:spcPct val="125000"/>
-              </a:lnSpc>
-              <a:buNone/>
-            </a:pPr>
-            <a:r>
-              <a:rPr lang="en-US" sz="1100" dirty="0">
-                <a:solidFill>
-                  <a:srgbClr val="222222"/>
-                </a:solidFill>
-                <a:latin typeface="Calibri" pitchFamily="34" charset="0"/>
-                <a:ea typeface="Calibri" pitchFamily="34" charset="-122"/>
-                <a:cs typeface="Calibri" pitchFamily="34" charset="-120"/>
-              </a:rPr>
-              <a:t>列は </a:t>
-            </a:r>
-            <a:pPr indent="0" marL="0">
-              <a:lnSpc>
-                <a:spcPct val="125000"/>
-              </a:lnSpc>
-              <a:buNone/>
-            </a:pPr>
-            <a:r>
-              <a:rPr lang="en-US" sz="1045" dirty="0">
-                <a:solidFill>
-                  <a:srgbClr val="222222"/>
-                </a:solidFill>
-                <a:latin typeface="Courier New" pitchFamily="34" charset="0"/>
-                <a:ea typeface="Courier New" pitchFamily="34" charset="-122"/>
-                <a:cs typeface="Courier New" pitchFamily="34" charset="-120"/>
-              </a:rPr>
-              <a:t>回答ID / 来場者ID / 送信日時 / 重複 / 来場人数 / 回答企業数 /（設問ごとの回答）</a:t>
-            </a:r>
-            <a:pPr indent="0" marL="0">
-              <a:lnSpc>
-                <a:spcPct val="125000"/>
-              </a:lnSpc>
-              <a:buNone/>
-            </a:pPr>
-            <a:r>
-              <a:rPr lang="en-US" sz="1100" dirty="0">
-                <a:solidFill>
-                  <a:srgbClr val="222222"/>
-                </a:solidFill>
-                <a:latin typeface="Calibri" pitchFamily="34" charset="0"/>
-                <a:ea typeface="Calibri" pitchFamily="34" charset="-122"/>
-                <a:cs typeface="Calibri" pitchFamily="34" charset="-120"/>
-              </a:rPr>
-              <a:t> です。</a:t>
-            </a:r>
-            <a:endParaRPr lang="en-US" sz="1100" dirty="0"/>
-          </a:p>
-        </p:txBody>
-      </p:sp>
-      <p:sp>
-        <p:nvSpPr>
-          <p:cNvPr id="9" name="Text 7"/>
-          <p:cNvSpPr txBox="1"/>
-          <p:nvPr/>
-        </p:nvSpPr>
-        <p:spPr>
-          <a:xfrm>
-            <a:off x="566928" y="3264027"/>
-            <a:ext cx="6428232" cy="459994"/>
-          </a:xfrm>
-          <a:prstGeom prst="rect">
-            <a:avLst/>
-          </a:prstGeom>
-          <a:noFill/>
-          <a:ln/>
-        </p:spPr>
-        <p:txBody>
-          <a:bodyPr wrap="square" lIns="0" tIns="0" rIns="0" bIns="0" rtlCol="0" anchor="t"/>
-          <a:lstStyle/>
-          <a:p>
-            <a:pPr indent="0" marL="0">
-              <a:lnSpc>
-                <a:spcPct val="125000"/>
-              </a:lnSpc>
-              <a:buNone/>
-            </a:pPr>
-            <a:r>
-              <a:rPr lang="en-US" sz="1100" b="1" dirty="0">
-                <a:solidFill>
-                  <a:srgbClr val="222222"/>
-                </a:solidFill>
-                <a:latin typeface="Calibri" pitchFamily="34" charset="0"/>
-                <a:ea typeface="Calibri" pitchFamily="34" charset="-122"/>
-                <a:cs typeface="Calibri" pitchFamily="34" charset="-120"/>
-              </a:rPr>
-              <a:t>来場人数</a:t>
-            </a:r>
-            <a:pPr indent="0" marL="0">
-              <a:lnSpc>
-                <a:spcPct val="125000"/>
-              </a:lnSpc>
-              <a:buNone/>
-            </a:pPr>
-            <a:r>
-              <a:rPr lang="en-US" sz="1100" dirty="0">
-                <a:solidFill>
-                  <a:srgbClr val="222222"/>
-                </a:solidFill>
-                <a:latin typeface="Calibri" pitchFamily="34" charset="0"/>
-                <a:ea typeface="Calibri" pitchFamily="34" charset="-122"/>
-                <a:cs typeface="Calibri" pitchFamily="34" charset="-120"/>
-              </a:rPr>
-              <a:t>はその方が「何人で来られましたか」で答えた人数、</a:t>
-            </a:r>
-            <a:pPr indent="0" marL="0">
-              <a:lnSpc>
-                <a:spcPct val="125000"/>
-              </a:lnSpc>
-              <a:buNone/>
-            </a:pPr>
-            <a:r>
-              <a:rPr lang="en-US" sz="1100" b="1" dirty="0">
-                <a:solidFill>
-                  <a:srgbClr val="222222"/>
-                </a:solidFill>
-                <a:latin typeface="Calibri" pitchFamily="34" charset="0"/>
-                <a:ea typeface="Calibri" pitchFamily="34" charset="-122"/>
-                <a:cs typeface="Calibri" pitchFamily="34" charset="-120"/>
-              </a:rPr>
-              <a:t>回答企業数</a:t>
-            </a:r>
-            <a:pPr indent="0" marL="0">
-              <a:lnSpc>
-                <a:spcPct val="125000"/>
-              </a:lnSpc>
-              <a:buNone/>
-            </a:pPr>
-            <a:r>
-              <a:rPr lang="en-US" sz="1100" dirty="0">
-                <a:solidFill>
-                  <a:srgbClr val="222222"/>
-                </a:solidFill>
-                <a:latin typeface="Calibri" pitchFamily="34" charset="0"/>
-                <a:ea typeface="Calibri" pitchFamily="34" charset="-122"/>
-                <a:cs typeface="Calibri" pitchFamily="34" charset="-120"/>
-              </a:rPr>
-              <a:t>はその方が回った企業数です。</a:t>
-            </a:r>
-            <a:endParaRPr lang="en-US" sz="1100" dirty="0"/>
-          </a:p>
-        </p:txBody>
-      </p:sp>
-      <p:sp>
-        <p:nvSpPr>
-          <p:cNvPr id="10" name="Shape 8"/>
+              <a:rPr lang="en-US" sz="1150" dirty="0">
+                <a:solidFill>
+                  <a:srgbClr val="222222"/>
+                </a:solidFill>
+                <a:latin typeface="Calibri" pitchFamily="34" charset="0"/>
+                <a:ea typeface="Calibri" pitchFamily="34" charset="-122"/>
+                <a:cs typeface="Calibri" pitchFamily="34" charset="-120"/>
+              </a:rPr>
+              <a:t>送信状況（未送信・送信済み・失敗）を画面で確認する</a:t>
+            </a:r>
+            <a:endParaRPr lang="en-US" sz="1150" dirty="0"/>
+          </a:p>
+        </p:txBody>
+      </p:sp>
+      <p:sp>
+        <p:nvSpPr>
+          <p:cNvPr id="18" name="Shape 16"/>
           <p:cNvSpPr/>
           <p:nvPr/>
         </p:nvSpPr>
         <p:spPr>
           <a:xfrm>
-            <a:off x="566928" y="3760597"/>
+            <a:off x="566928" y="3861562"/>
             <a:ext cx="6428232" cy="624459"/>
           </a:xfrm>
           <a:prstGeom prst="roundRect">
@@ -20945,13 +21979,13 @@
       </p:sp>
       <p:sp>
         <p:nvSpPr>
-          <p:cNvPr id="11" name="Text 9"/>
-          <p:cNvSpPr txBox="1"/>
-          <p:nvPr/>
-        </p:nvSpPr>
-        <p:spPr>
-          <a:xfrm>
-            <a:off x="658368" y="3852037"/>
+          <p:cNvPr id="19" name="Text 17"/>
+          <p:cNvSpPr txBox="1"/>
+          <p:nvPr/>
+        </p:nvSpPr>
+        <p:spPr>
+          <a:xfrm>
+            <a:off x="658368" y="3953002"/>
             <a:ext cx="237744" cy="237744"/>
           </a:xfrm>
           <a:prstGeom prst="rect">
@@ -20984,13 +22018,13 @@
       </p:sp>
       <p:sp>
         <p:nvSpPr>
-          <p:cNvPr id="12" name="Text 10"/>
-          <p:cNvSpPr txBox="1"/>
-          <p:nvPr/>
-        </p:nvSpPr>
-        <p:spPr>
-          <a:xfrm>
-            <a:off x="950976" y="3870325"/>
+          <p:cNvPr id="20" name="Text 18"/>
+          <p:cNvSpPr txBox="1"/>
+          <p:nvPr/>
+        </p:nvSpPr>
+        <p:spPr>
+          <a:xfrm>
+            <a:off x="950976" y="3971290"/>
             <a:ext cx="5925312" cy="441579"/>
           </a:xfrm>
           <a:prstGeom prst="rect">
@@ -21018,7 +22052,7 @@
                 <a:ea typeface="Calibri" pitchFamily="34" charset="-122"/>
                 <a:cs typeface="Calibri" pitchFamily="34" charset="-120"/>
               </a:rPr>
-              <a:t>総合アンケートのCSVは、</a:t>
+              <a:t>メールの文面は相手によって変わります。会期中に総合アンケートへ答えた方には</a:t>
             </a:r>
             <a:pPr indent="0" marL="0">
               <a:lnSpc>
@@ -21035,7 +22069,7 @@
                 <a:ea typeface="Calibri" pitchFamily="34" charset="-122"/>
                 <a:cs typeface="Calibri" pitchFamily="34" charset="-120"/>
               </a:rPr>
-              <a:t>1行＝1グループ</a:t>
+              <a:t>壁紙のご案内だけ</a:t>
             </a:r>
             <a:pPr indent="0" marL="0">
               <a:lnSpc>
@@ -21052,7 +22086,7 @@
                 <a:ea typeface="Calibri" pitchFamily="34" charset="-122"/>
                 <a:cs typeface="Calibri" pitchFamily="34" charset="-120"/>
               </a:rPr>
-              <a:t>になります。世代や区分ごとの人数を聞いている場合は、</a:t>
+              <a:t>、</a:t>
             </a:r>
             <a:endParaRPr lang="en-US" sz="1050" dirty="0"/>
           </a:p>
@@ -21060,13 +22094,13 @@
       </p:sp>
       <p:sp>
         <p:nvSpPr>
-          <p:cNvPr id="13" name="Shape 11"/>
+          <p:cNvPr id="21" name="Shape 19"/>
           <p:cNvSpPr/>
           <p:nvPr/>
         </p:nvSpPr>
         <p:spPr>
           <a:xfrm>
-            <a:off x="566928" y="4458208"/>
+            <a:off x="566928" y="4559173"/>
             <a:ext cx="6428232" cy="431102"/>
           </a:xfrm>
           <a:prstGeom prst="roundRect">
@@ -21087,13 +22121,13 @@
       </p:sp>
       <p:sp>
         <p:nvSpPr>
-          <p:cNvPr id="14" name="Text 12"/>
-          <p:cNvSpPr txBox="1"/>
-          <p:nvPr/>
-        </p:nvSpPr>
-        <p:spPr>
-          <a:xfrm>
-            <a:off x="658368" y="4549648"/>
+          <p:cNvPr id="22" name="Text 20"/>
+          <p:cNvSpPr txBox="1"/>
+          <p:nvPr/>
+        </p:nvSpPr>
+        <p:spPr>
+          <a:xfrm>
+            <a:off x="658368" y="4650613"/>
             <a:ext cx="237744" cy="237744"/>
           </a:xfrm>
           <a:prstGeom prst="rect">
@@ -21126,13 +22160,13 @@
       </p:sp>
       <p:sp>
         <p:nvSpPr>
-          <p:cNvPr id="15" name="Text 13"/>
-          <p:cNvSpPr txBox="1"/>
-          <p:nvPr/>
-        </p:nvSpPr>
-        <p:spPr>
-          <a:xfrm>
-            <a:off x="950976" y="4567936"/>
+          <p:cNvPr id="23" name="Text 21"/>
+          <p:cNvSpPr txBox="1"/>
+          <p:nvPr/>
+        </p:nvSpPr>
+        <p:spPr>
+          <a:xfrm>
+            <a:off x="950976" y="4668901"/>
             <a:ext cx="5925312" cy="248221"/>
           </a:xfrm>
           <a:prstGeom prst="rect">
@@ -21160,7 +22194,41 @@
                 <a:ea typeface="Calibri" pitchFamily="34" charset="-122"/>
                 <a:cs typeface="Calibri" pitchFamily="34" charset="-120"/>
               </a:rPr>
-              <a:t>「来場人数」と並べてExcelのピボットテーブルにかけると、グループの構成を集計できます。</a:t>
+              <a:t>まだ答えていない方には</a:t>
+            </a:r>
+            <a:pPr indent="0" marL="0">
+              <a:lnSpc>
+                <a:spcPct val="120000"/>
+              </a:lnSpc>
+              <a:buNone/>
+            </a:pPr>
+            <a:r>
+              <a:rPr lang="en-US" sz="1050" b="1" dirty="0">
+                <a:solidFill>
+                  <a:srgbClr val="222222"/>
+                </a:solidFill>
+                <a:latin typeface="Calibri" pitchFamily="34" charset="0"/>
+                <a:ea typeface="Calibri" pitchFamily="34" charset="-122"/>
+                <a:cs typeface="Calibri" pitchFamily="34" charset="-120"/>
+              </a:rPr>
+              <a:t>回答のお願い</a:t>
+            </a:r>
+            <a:pPr indent="0" marL="0">
+              <a:lnSpc>
+                <a:spcPct val="120000"/>
+              </a:lnSpc>
+              <a:buNone/>
+            </a:pPr>
+            <a:r>
+              <a:rPr lang="en-US" sz="1050" dirty="0">
+                <a:solidFill>
+                  <a:srgbClr val="222222"/>
+                </a:solidFill>
+                <a:latin typeface="Calibri" pitchFamily="34" charset="0"/>
+                <a:ea typeface="Calibri" pitchFamily="34" charset="-122"/>
+                <a:cs typeface="Calibri" pitchFamily="34" charset="-120"/>
+              </a:rPr>
+              <a:t>（回答後に壁紙）が届きます。</a:t>
             </a:r>
             <a:endParaRPr lang="en-US" sz="1050" dirty="0"/>
           </a:p>
@@ -21168,13 +22236,13 @@
       </p:sp>
       <p:sp>
         <p:nvSpPr>
-          <p:cNvPr id="16" name="Shape 14"/>
+          <p:cNvPr id="24" name="Shape 22"/>
           <p:cNvSpPr/>
           <p:nvPr/>
         </p:nvSpPr>
         <p:spPr>
           <a:xfrm>
-            <a:off x="566928" y="4962462"/>
+            <a:off x="566928" y="5063427"/>
             <a:ext cx="6428232" cy="624459"/>
           </a:xfrm>
           <a:prstGeom prst="roundRect">
@@ -21195,13 +22263,13 @@
       </p:sp>
       <p:sp>
         <p:nvSpPr>
-          <p:cNvPr id="17" name="Text 15"/>
-          <p:cNvSpPr txBox="1"/>
-          <p:nvPr/>
-        </p:nvSpPr>
-        <p:spPr>
-          <a:xfrm>
-            <a:off x="658368" y="5053902"/>
+          <p:cNvPr id="25" name="Text 23"/>
+          <p:cNvSpPr txBox="1"/>
+          <p:nvPr/>
+        </p:nvSpPr>
+        <p:spPr>
+          <a:xfrm>
+            <a:off x="658368" y="5154867"/>
             <a:ext cx="237744" cy="237744"/>
           </a:xfrm>
           <a:prstGeom prst="rect">
@@ -21234,13 +22302,13 @@
       </p:sp>
       <p:sp>
         <p:nvSpPr>
-          <p:cNvPr id="18" name="Text 16"/>
-          <p:cNvSpPr txBox="1"/>
-          <p:nvPr/>
-        </p:nvSpPr>
-        <p:spPr>
-          <a:xfrm>
-            <a:off x="950976" y="5072190"/>
+          <p:cNvPr id="26" name="Text 24"/>
+          <p:cNvSpPr txBox="1"/>
+          <p:nvPr/>
+        </p:nvSpPr>
+        <p:spPr>
+          <a:xfrm>
+            <a:off x="950976" y="5173155"/>
             <a:ext cx="5925312" cy="441579"/>
           </a:xfrm>
           <a:prstGeom prst="rect">
@@ -21268,7 +22336,41 @@
                 <a:ea typeface="Calibri" pitchFamily="34" charset="-122"/>
                 <a:cs typeface="Calibri" pitchFamily="34" charset="-120"/>
               </a:rPr>
-              <a:t>メールアドレスは出力されません。来場者は匿名のID（来場者ID）だけが入るので、企業をまたいだ同じ方の回答を突き合わせられます。</a:t>
+              <a:t>テスト送信のリンクは</a:t>
+            </a:r>
+            <a:pPr indent="0" marL="0">
+              <a:lnSpc>
+                <a:spcPct val="120000"/>
+              </a:lnSpc>
+              <a:buNone/>
+            </a:pPr>
+            <a:r>
+              <a:rPr lang="en-US" sz="1050" b="1" dirty="0">
+                <a:solidFill>
+                  <a:srgbClr val="222222"/>
+                </a:solidFill>
+                <a:latin typeface="Calibri" pitchFamily="34" charset="0"/>
+                <a:ea typeface="Calibri" pitchFamily="34" charset="-122"/>
+                <a:cs typeface="Calibri" pitchFamily="34" charset="-120"/>
+              </a:rPr>
+              <a:t>スタッフ確認用のプレビュー</a:t>
+            </a:r>
+            <a:pPr indent="0" marL="0">
+              <a:lnSpc>
+                <a:spcPct val="120000"/>
+              </a:lnSpc>
+              <a:buNone/>
+            </a:pPr>
+            <a:r>
+              <a:rPr lang="en-US" sz="1050" dirty="0">
+                <a:solidFill>
+                  <a:srgbClr val="222222"/>
+                </a:solidFill>
+                <a:latin typeface="Calibri" pitchFamily="34" charset="0"/>
+                <a:ea typeface="Calibri" pitchFamily="34" charset="-122"/>
+                <a:cs typeface="Calibri" pitchFamily="34" charset="-120"/>
+              </a:rPr>
+              <a:t>です。管理画面にログインした状態で開くと、来場者に見えるのと同じ画面を確認できます（プレビューからは回答できません）。</a:t>
             </a:r>
             <a:endParaRPr lang="en-US" sz="1050" dirty="0"/>
           </a:p>
@@ -21276,457 +22378,26 @@
       </p:sp>
       <p:sp>
         <p:nvSpPr>
-          <p:cNvPr id="19" name="Text 17"/>
-          <p:cNvSpPr txBox="1"/>
-          <p:nvPr/>
-        </p:nvSpPr>
-        <p:spPr>
-          <a:xfrm>
-            <a:off x="566928" y="5769801"/>
-            <a:ext cx="6428232" cy="257810"/>
-          </a:xfrm>
-          <a:prstGeom prst="rect">
-            <a:avLst/>
-          </a:prstGeom>
-          <a:noFill/>
-          <a:ln/>
-        </p:spPr>
-        <p:txBody>
-          <a:bodyPr wrap="square" lIns="0" tIns="0" rIns="0" bIns="0" rtlCol="0" anchor="t"/>
-          <a:lstStyle/>
-          <a:p>
-            <a:pPr indent="0" marL="0">
-              <a:buNone/>
-            </a:pPr>
-            <a:r>
-              <a:rPr lang="en-US" sz="1400" b="1" dirty="0">
-                <a:solidFill>
-                  <a:srgbClr val="1E2761"/>
-                </a:solidFill>
-                <a:latin typeface="Calibri" pitchFamily="34" charset="0"/>
-                <a:ea typeface="Calibri" pitchFamily="34" charset="-122"/>
-                <a:cs typeface="Calibri" pitchFamily="34" charset="-120"/>
-              </a:rPr>
-              <a:t>集計画面で見る</a:t>
-            </a:r>
-            <a:endParaRPr lang="en-US" sz="1400" dirty="0"/>
-          </a:p>
-        </p:txBody>
-      </p:sp>
-      <p:sp>
-        <p:nvSpPr>
-          <p:cNvPr id="20" name="Text 18"/>
-          <p:cNvSpPr txBox="1"/>
-          <p:nvPr/>
-        </p:nvSpPr>
-        <p:spPr>
-          <a:xfrm>
-            <a:off x="566928" y="6100763"/>
-            <a:ext cx="6428232" cy="459994"/>
-          </a:xfrm>
-          <a:prstGeom prst="rect">
-            <a:avLst/>
-          </a:prstGeom>
-          <a:noFill/>
-          <a:ln/>
-        </p:spPr>
-        <p:txBody>
-          <a:bodyPr wrap="square" lIns="0" tIns="0" rIns="0" bIns="0" rtlCol="0" anchor="t"/>
-          <a:lstStyle/>
-          <a:p>
-            <a:pPr indent="0" marL="0">
-              <a:lnSpc>
-                <a:spcPct val="125000"/>
-              </a:lnSpc>
-              <a:buNone/>
-            </a:pPr>
-            <a:r>
-              <a:rPr lang="en-US" sz="1100" dirty="0">
-                <a:solidFill>
-                  <a:srgbClr val="222222"/>
-                </a:solidFill>
-                <a:latin typeface="Calibri" pitchFamily="34" charset="0"/>
-                <a:ea typeface="Calibri" pitchFamily="34" charset="-122"/>
-                <a:cs typeface="Calibri" pitchFamily="34" charset="-120"/>
-              </a:rPr>
-              <a:t>企業ごとの「集計」画面では、設問ごとのグラフ・星評価の平均・NPS・自由記述の一覧が見られます。</a:t>
-            </a:r>
-            <a:endParaRPr lang="en-US" sz="1100" dirty="0"/>
-          </a:p>
-        </p:txBody>
-      </p:sp>
-      <p:sp>
-        <p:nvSpPr>
-          <p:cNvPr id="21" name="Text 19"/>
-          <p:cNvSpPr txBox="1"/>
-          <p:nvPr/>
-        </p:nvSpPr>
-        <p:spPr>
-          <a:xfrm>
-            <a:off x="566928" y="6597333"/>
-            <a:ext cx="6428232" cy="459994"/>
-          </a:xfrm>
-          <a:prstGeom prst="rect">
-            <a:avLst/>
-          </a:prstGeom>
-          <a:noFill/>
-          <a:ln/>
-        </p:spPr>
-        <p:txBody>
-          <a:bodyPr wrap="square" lIns="0" tIns="0" rIns="0" bIns="0" rtlCol="0" anchor="t"/>
-          <a:lstStyle/>
-          <a:p>
-            <a:pPr indent="0" marL="0">
-              <a:lnSpc>
-                <a:spcPct val="125000"/>
-              </a:lnSpc>
-              <a:buNone/>
-            </a:pPr>
-            <a:r>
-              <a:rPr lang="en-US" sz="1100" b="1" dirty="0">
-                <a:solidFill>
-                  <a:srgbClr val="222222"/>
-                </a:solidFill>
-                <a:latin typeface="Calibri" pitchFamily="34" charset="0"/>
-                <a:ea typeface="Calibri" pitchFamily="34" charset="-122"/>
-                <a:cs typeface="Calibri" pitchFamily="34" charset="-120"/>
-              </a:rPr>
-              <a:t>総合アンケートの集計</a:t>
-            </a:r>
-            <a:pPr indent="0" marL="0">
-              <a:lnSpc>
-                <a:spcPct val="125000"/>
-              </a:lnSpc>
-              <a:buNone/>
-            </a:pPr>
-            <a:r>
-              <a:rPr lang="en-US" sz="1100" dirty="0">
-                <a:solidFill>
-                  <a:srgbClr val="222222"/>
-                </a:solidFill>
-                <a:latin typeface="Calibri" pitchFamily="34" charset="0"/>
-                <a:ea typeface="Calibri" pitchFamily="34" charset="-122"/>
-                <a:cs typeface="Calibri" pitchFamily="34" charset="-120"/>
-              </a:rPr>
-              <a:t>は、ダッシュボードの「総合アンケートの集計」、または「総合アンケートと案内メール」画面の</a:t>
-            </a:r>
-            <a:pPr indent="0" marL="0">
-              <a:lnSpc>
-                <a:spcPct val="125000"/>
-              </a:lnSpc>
-              <a:buNone/>
-            </a:pPr>
-            <a:r>
-              <a:rPr lang="en-US" sz="1100" b="1" dirty="0">
-                <a:solidFill>
-                  <a:srgbClr val="222222"/>
-                </a:solidFill>
-                <a:latin typeface="Calibri" pitchFamily="34" charset="0"/>
-                <a:ea typeface="Calibri" pitchFamily="34" charset="-122"/>
-                <a:cs typeface="Calibri" pitchFamily="34" charset="-120"/>
-              </a:rPr>
-              <a:t>「集計を見る」</a:t>
-            </a:r>
-            <a:pPr indent="0" marL="0">
-              <a:lnSpc>
-                <a:spcPct val="125000"/>
-              </a:lnSpc>
-              <a:buNone/>
-            </a:pPr>
-            <a:r>
-              <a:rPr lang="en-US" sz="1100" dirty="0">
-                <a:solidFill>
-                  <a:srgbClr val="222222"/>
-                </a:solidFill>
-                <a:latin typeface="Calibri" pitchFamily="34" charset="0"/>
-                <a:ea typeface="Calibri" pitchFamily="34" charset="-122"/>
-                <a:cs typeface="Calibri" pitchFamily="34" charset="-120"/>
-              </a:rPr>
-              <a:t>から開きます。</a:t>
-            </a:r>
-            <a:endParaRPr lang="en-US" sz="1100" dirty="0"/>
-          </a:p>
-        </p:txBody>
-      </p:sp>
-      <p:sp>
-        <p:nvSpPr>
-          <p:cNvPr id="22" name="Text 20"/>
-          <p:cNvSpPr txBox="1"/>
-          <p:nvPr/>
-        </p:nvSpPr>
-        <p:spPr>
-          <a:xfrm>
-            <a:off x="713232" y="7093903"/>
-            <a:ext cx="6281928" cy="257429"/>
-          </a:xfrm>
-          <a:prstGeom prst="rect">
-            <a:avLst/>
-          </a:prstGeom>
-          <a:noFill/>
-          <a:ln/>
-        </p:spPr>
-        <p:txBody>
-          <a:bodyPr wrap="square" lIns="0" tIns="0" rIns="0" bIns="0" rtlCol="0" anchor="t"/>
-          <a:lstStyle/>
-          <a:p>
-            <a:pPr marL="342900" indent="-342900">
-              <a:lnSpc>
-                <a:spcPct val="125000"/>
-              </a:lnSpc>
-              <a:buSzPct val="100000"/>
-              <a:buChar char="●"/>
-            </a:pPr>
-            <a:r>
-              <a:rPr lang="en-US" sz="1100" b="1" dirty="0">
-                <a:solidFill>
-                  <a:srgbClr val="222222"/>
-                </a:solidFill>
-                <a:latin typeface="Calibri" pitchFamily="34" charset="0"/>
-                <a:ea typeface="Calibri" pitchFamily="34" charset="-122"/>
-                <a:cs typeface="Calibri" pitchFamily="34" charset="-120"/>
-              </a:rPr>
-              <a:t>回答数と回答率</a:t>
-            </a:r>
-            <a:pPr indent="0" marL="0">
-              <a:lnSpc>
-                <a:spcPct val="125000"/>
-              </a:lnSpc>
-              <a:buNone/>
-            </a:pPr>
-            <a:r>
-              <a:rPr lang="en-US" sz="1100" dirty="0">
-                <a:solidFill>
-                  <a:srgbClr val="222222"/>
-                </a:solidFill>
-                <a:latin typeface="Calibri" pitchFamily="34" charset="0"/>
-                <a:ea typeface="Calibri" pitchFamily="34" charset="-122"/>
-                <a:cs typeface="Calibri" pitchFamily="34" charset="-120"/>
-              </a:rPr>
-              <a:t>（回答した来場者のうち何%が答えたか）</a:t>
-            </a:r>
-            <a:endParaRPr lang="en-US" sz="1100" dirty="0"/>
-          </a:p>
-        </p:txBody>
-      </p:sp>
-      <p:sp>
-        <p:nvSpPr>
-          <p:cNvPr id="23" name="Text 21"/>
-          <p:cNvSpPr txBox="1"/>
-          <p:nvPr/>
-        </p:nvSpPr>
-        <p:spPr>
-          <a:xfrm>
-            <a:off x="713232" y="7369620"/>
-            <a:ext cx="6281928" cy="257429"/>
-          </a:xfrm>
-          <a:prstGeom prst="rect">
-            <a:avLst/>
-          </a:prstGeom>
-          <a:noFill/>
-          <a:ln/>
-        </p:spPr>
-        <p:txBody>
-          <a:bodyPr wrap="square" lIns="0" tIns="0" rIns="0" bIns="0" rtlCol="0" anchor="t"/>
-          <a:lstStyle/>
-          <a:p>
-            <a:pPr marL="342900" indent="-342900">
-              <a:lnSpc>
-                <a:spcPct val="125000"/>
-              </a:lnSpc>
-              <a:buSzPct val="100000"/>
-              <a:buChar char="●"/>
-            </a:pPr>
-            <a:r>
-              <a:rPr lang="en-US" sz="1100" b="1" dirty="0">
-                <a:solidFill>
-                  <a:srgbClr val="222222"/>
-                </a:solidFill>
-                <a:latin typeface="Calibri" pitchFamily="34" charset="0"/>
-                <a:ea typeface="Calibri" pitchFamily="34" charset="-122"/>
-                <a:cs typeface="Calibri" pitchFamily="34" charset="-120"/>
-              </a:rPr>
-              <a:t>設問ごとのグラフ</a:t>
-            </a:r>
-            <a:pPr indent="0" marL="0">
-              <a:lnSpc>
-                <a:spcPct val="125000"/>
-              </a:lnSpc>
-              <a:buNone/>
-            </a:pPr>
-            <a:r>
-              <a:rPr lang="en-US" sz="1100" dirty="0">
-                <a:solidFill>
-                  <a:srgbClr val="222222"/>
-                </a:solidFill>
-                <a:latin typeface="Calibri" pitchFamily="34" charset="0"/>
-                <a:ea typeface="Calibri" pitchFamily="34" charset="-122"/>
-                <a:cs typeface="Calibri" pitchFamily="34" charset="-120"/>
-              </a:rPr>
-              <a:t>（企業の集計と同じ見た目）と</a:t>
-            </a:r>
-            <a:pPr indent="0" marL="0">
-              <a:lnSpc>
-                <a:spcPct val="125000"/>
-              </a:lnSpc>
-              <a:buNone/>
-            </a:pPr>
-            <a:r>
-              <a:rPr lang="en-US" sz="1100" b="1" dirty="0">
-                <a:solidFill>
-                  <a:srgbClr val="222222"/>
-                </a:solidFill>
-                <a:latin typeface="Calibri" pitchFamily="34" charset="0"/>
-                <a:ea typeface="Calibri" pitchFamily="34" charset="-122"/>
-                <a:cs typeface="Calibri" pitchFamily="34" charset="-120"/>
-              </a:rPr>
-              <a:t>自由記述の一覧</a:t>
-            </a:r>
-            <a:endParaRPr lang="en-US" sz="1100" dirty="0"/>
-          </a:p>
-        </p:txBody>
-      </p:sp>
-      <p:sp>
-        <p:nvSpPr>
-          <p:cNvPr id="24" name="Text 22"/>
-          <p:cNvSpPr txBox="1"/>
-          <p:nvPr/>
-        </p:nvSpPr>
-        <p:spPr>
-          <a:xfrm>
-            <a:off x="713232" y="7645337"/>
-            <a:ext cx="6281928" cy="257429"/>
-          </a:xfrm>
-          <a:prstGeom prst="rect">
-            <a:avLst/>
-          </a:prstGeom>
-          <a:noFill/>
-          <a:ln/>
-        </p:spPr>
-        <p:txBody>
-          <a:bodyPr wrap="square" lIns="0" tIns="0" rIns="0" bIns="0" rtlCol="0" anchor="t"/>
-          <a:lstStyle/>
-          <a:p>
-            <a:pPr marL="342900" indent="-342900">
-              <a:lnSpc>
-                <a:spcPct val="125000"/>
-              </a:lnSpc>
-              <a:buSzPct val="100000"/>
-              <a:buChar char="●"/>
-            </a:pPr>
-            <a:r>
-              <a:rPr lang="en-US" sz="1100" b="1" dirty="0">
-                <a:solidFill>
-                  <a:srgbClr val="222222"/>
-                </a:solidFill>
-                <a:latin typeface="Calibri" pitchFamily="34" charset="0"/>
-                <a:ea typeface="Calibri" pitchFamily="34" charset="-122"/>
-                <a:cs typeface="Calibri" pitchFamily="34" charset="-120"/>
-              </a:rPr>
-              <a:t>周回企業数との関係</a:t>
-            </a:r>
-            <a:pPr indent="0" marL="0">
-              <a:lnSpc>
-                <a:spcPct val="125000"/>
-              </a:lnSpc>
-              <a:buNone/>
-            </a:pPr>
-            <a:r>
-              <a:rPr lang="en-US" sz="1100" dirty="0">
-                <a:solidFill>
-                  <a:srgbClr val="222222"/>
-                </a:solidFill>
-                <a:latin typeface="Calibri" pitchFamily="34" charset="0"/>
-                <a:ea typeface="Calibri" pitchFamily="34" charset="-122"/>
-                <a:cs typeface="Calibri" pitchFamily="34" charset="-120"/>
-              </a:rPr>
-              <a:t>：たくさん回った方ほど評価が高いか</a:t>
-            </a:r>
-            <a:endParaRPr lang="en-US" sz="1100" dirty="0"/>
-          </a:p>
-        </p:txBody>
-      </p:sp>
-      <p:sp>
-        <p:nvSpPr>
-          <p:cNvPr id="25" name="Text 23"/>
-          <p:cNvSpPr txBox="1"/>
-          <p:nvPr/>
-        </p:nvSpPr>
-        <p:spPr>
-          <a:xfrm>
-            <a:off x="713232" y="7921054"/>
-            <a:ext cx="6281928" cy="257429"/>
-          </a:xfrm>
-          <a:prstGeom prst="rect">
-            <a:avLst/>
-          </a:prstGeom>
-          <a:noFill/>
-          <a:ln/>
-        </p:spPr>
-        <p:txBody>
-          <a:bodyPr wrap="square" lIns="0" tIns="0" rIns="0" bIns="0" rtlCol="0" anchor="t"/>
-          <a:lstStyle/>
-          <a:p>
-            <a:pPr marL="342900" indent="-342900">
-              <a:lnSpc>
-                <a:spcPct val="125000"/>
-              </a:lnSpc>
-              <a:buSzPct val="100000"/>
-              <a:buChar char="●"/>
-            </a:pPr>
-            <a:r>
-              <a:rPr lang="en-US" sz="1100" b="1" dirty="0">
-                <a:solidFill>
-                  <a:srgbClr val="222222"/>
-                </a:solidFill>
-                <a:latin typeface="Calibri" pitchFamily="34" charset="0"/>
-                <a:ea typeface="Calibri" pitchFamily="34" charset="-122"/>
-                <a:cs typeface="Calibri" pitchFamily="34" charset="-120"/>
-              </a:rPr>
-              <a:t>来場人数との関係</a:t>
-            </a:r>
-            <a:pPr indent="0" marL="0">
-              <a:lnSpc>
-                <a:spcPct val="125000"/>
-              </a:lnSpc>
-              <a:buNone/>
-            </a:pPr>
-            <a:r>
-              <a:rPr lang="en-US" sz="1100" dirty="0">
-                <a:solidFill>
-                  <a:srgbClr val="222222"/>
-                </a:solidFill>
-                <a:latin typeface="Calibri" pitchFamily="34" charset="0"/>
-                <a:ea typeface="Calibri" pitchFamily="34" charset="-122"/>
-                <a:cs typeface="Calibri" pitchFamily="34" charset="-120"/>
-              </a:rPr>
-              <a:t>：1人で来た方とグループで来た方の違い</a:t>
-            </a:r>
-            <a:endParaRPr lang="en-US" sz="1100" dirty="0"/>
-          </a:p>
-        </p:txBody>
-      </p:sp>
-      <p:sp>
-        <p:nvSpPr>
-          <p:cNvPr id="26" name="Shape 24"/>
+          <p:cNvPr id="27" name="Shape 25"/>
           <p:cNvSpPr/>
           <p:nvPr/>
         </p:nvSpPr>
         <p:spPr>
           <a:xfrm>
-            <a:off x="566928" y="8196771"/>
-            <a:ext cx="6428232" cy="624459"/>
+            <a:off x="566928" y="5761038"/>
+            <a:ext cx="6428232" cy="431102"/>
           </a:xfrm>
           <a:prstGeom prst="roundRect">
             <a:avLst>
-              <a:gd name="adj" fmla="val 8786"/>
+              <a:gd name="adj" fmla="val 12726"/>
             </a:avLst>
           </a:prstGeom>
           <a:solidFill>
-            <a:srgbClr val="E8ECF8"/>
+            <a:srgbClr val="FDF0E6"/>
           </a:solidFill>
           <a:ln w="9525">
             <a:solidFill>
-              <a:srgbClr val="1E2761"/>
+              <a:srgbClr val="E08A3C"/>
             </a:solidFill>
             <a:prstDash val="solid"/>
           </a:ln>
@@ -21734,13 +22405,13 @@
       </p:sp>
       <p:sp>
         <p:nvSpPr>
-          <p:cNvPr id="27" name="Text 25"/>
-          <p:cNvSpPr txBox="1"/>
-          <p:nvPr/>
-        </p:nvSpPr>
-        <p:spPr>
-          <a:xfrm>
-            <a:off x="658368" y="8288211"/>
+          <p:cNvPr id="28" name="Text 26"/>
+          <p:cNvSpPr txBox="1"/>
+          <p:nvPr/>
+        </p:nvSpPr>
+        <p:spPr>
+          <a:xfrm>
+            <a:off x="658368" y="5852478"/>
             <a:ext cx="237744" cy="237744"/>
           </a:xfrm>
           <a:prstGeom prst="rect">
@@ -21759,13 +22430,13 @@
             <a:r>
               <a:rPr lang="en-US" sz="1200" b="1" dirty="0">
                 <a:solidFill>
-                  <a:srgbClr val="1E2761"/>
-                </a:solidFill>
-                <a:latin typeface="Calibri" pitchFamily="34" charset="0"/>
-                <a:ea typeface="Calibri" pitchFamily="34" charset="-122"/>
-                <a:cs typeface="Calibri" pitchFamily="34" charset="-120"/>
-              </a:rPr>
-              <a:t>i</a:t>
+                  <a:srgbClr val="C25A17"/>
+                </a:solidFill>
+                <a:latin typeface="Calibri" pitchFamily="34" charset="0"/>
+                <a:ea typeface="Calibri" pitchFamily="34" charset="-122"/>
+                <a:cs typeface="Calibri" pitchFamily="34" charset="-120"/>
+              </a:rPr>
+              <a:t>！</a:t>
             </a:r>
             <a:endParaRPr lang="en-US" sz="1200" dirty="0"/>
           </a:p>
@@ -21773,14 +22444,14 @@
       </p:sp>
       <p:sp>
         <p:nvSpPr>
-          <p:cNvPr id="28" name="Text 26"/>
-          <p:cNvSpPr txBox="1"/>
-          <p:nvPr/>
-        </p:nvSpPr>
-        <p:spPr>
-          <a:xfrm>
-            <a:off x="950976" y="8306499"/>
-            <a:ext cx="5925312" cy="441579"/>
+          <p:cNvPr id="29" name="Text 27"/>
+          <p:cNvSpPr txBox="1"/>
+          <p:nvPr/>
+        </p:nvSpPr>
+        <p:spPr>
+          <a:xfrm>
+            <a:off x="950976" y="5870766"/>
+            <a:ext cx="5925312" cy="248221"/>
           </a:xfrm>
           <a:prstGeom prst="rect">
             <a:avLst/>
@@ -21807,41 +22478,7 @@
                 <a:ea typeface="Calibri" pitchFamily="34" charset="-122"/>
                 <a:cs typeface="Calibri" pitchFamily="34" charset="-120"/>
               </a:rPr>
-              <a:t>関係の表は</a:t>
-            </a:r>
-            <a:pPr indent="0" marL="0">
-              <a:lnSpc>
-                <a:spcPct val="120000"/>
-              </a:lnSpc>
-              <a:buNone/>
-            </a:pPr>
-            <a:r>
-              <a:rPr lang="en-US" sz="1050" b="1" dirty="0">
-                <a:solidFill>
-                  <a:srgbClr val="222222"/>
-                </a:solidFill>
-                <a:latin typeface="Calibri" pitchFamily="34" charset="0"/>
-                <a:ea typeface="Calibri" pitchFamily="34" charset="-122"/>
-                <a:cs typeface="Calibri" pitchFamily="34" charset="-120"/>
-              </a:rPr>
-              <a:t>相関であって因果ではありません</a:t>
-            </a:r>
-            <a:pPr indent="0" marL="0">
-              <a:lnSpc>
-                <a:spcPct val="120000"/>
-              </a:lnSpc>
-              <a:buNone/>
-            </a:pPr>
-            <a:r>
-              <a:rPr lang="en-US" sz="1050" dirty="0">
-                <a:solidFill>
-                  <a:srgbClr val="222222"/>
-                </a:solidFill>
-                <a:latin typeface="Calibri" pitchFamily="34" charset="0"/>
-                <a:ea typeface="Calibri" pitchFamily="34" charset="-122"/>
-                <a:cs typeface="Calibri" pitchFamily="34" charset="-120"/>
-              </a:rPr>
-              <a:t>（もともと関心の高い方がたくさん回っている、とも読めます）。回答が少ないうちは数字が揺れるので、件数も一緒に見てください。</a:t>
+              <a:t>送信済みの人には二重に送られません。失敗したものは自動で3回まで再送されます。</a:t>
             </a:r>
             <a:endParaRPr lang="en-US" sz="1050" dirty="0"/>
           </a:p>
@@ -21849,7 +22486,7 @@
       </p:sp>
       <p:sp>
         <p:nvSpPr>
-          <p:cNvPr id="29" name="Text 27"/>
+          <p:cNvPr id="30" name="Text 28"/>
           <p:cNvSpPr txBox="1"/>
           <p:nvPr/>
         </p:nvSpPr>
@@ -21990,7 +22627,7 @@
                 <a:ea typeface="Calibri" pitchFamily="34" charset="-122"/>
                 <a:cs typeface="Calibri" pitchFamily="34" charset="-120"/>
               </a:rPr>
-              <a:t>終了後3：集計データを受け取る（つづき）</a:t>
+              <a:t>終了後2：案内メールを送る（つづき）</a:t>
             </a:r>
             <a:endParaRPr lang="en-US" sz="2200" dirty="0"/>
           </a:p>
@@ -21998,7 +22635,7 @@
       </p:sp>
       <p:pic>
         <p:nvPicPr>
-          <p:cNvPr id="4" name="Image 0" descr="C:\Users\sato\Desktop\enque\docs\images\o-overall-stats.png">    </p:cNvPr>
+          <p:cNvPr id="4" name="Image 0" descr="C:\Users\sato\Desktop\enque\docs\images\o-invite-status.png">    </p:cNvPr>
           <p:cNvPicPr>
             <a:picLocks noChangeAspect="1"/>
           </p:cNvPicPr>
@@ -22012,8 +22649,8 @@
         </p:blipFill>
         <p:spPr>
           <a:xfrm>
-            <a:off x="1248911" y="1481328"/>
-            <a:ext cx="5064265" cy="3474720"/>
+            <a:off x="1504370" y="1481328"/>
+            <a:ext cx="4553347" cy="3474720"/>
           </a:xfrm>
           <a:prstGeom prst="rect">
             <a:avLst/>
@@ -22053,78 +22690,15 @@
                 <a:ea typeface="Calibri" pitchFamily="34" charset="-122"/>
                 <a:cs typeface="Calibri" pitchFamily="34" charset="-120"/>
               </a:rPr>
-              <a:t>「総合アンケートの集計」画面の上部（回答数・回答率のタイルが見えるもの）。</a:t>
+              <a:t>「総合アンケートと案内メール」画面の送信状況（未送信・送信済み・失敗・回答済みの数）。</a:t>
             </a:r>
             <a:endParaRPr lang="en-US" sz="950" dirty="0"/>
           </a:p>
         </p:txBody>
       </p:sp>
-      <p:pic>
-        <p:nvPicPr>
-          <p:cNvPr id="6" name="Image 1" descr="C:\Users\sato\Desktop\enque\docs\images\o-overall-cross.png">    </p:cNvPr>
-          <p:cNvPicPr>
-            <a:picLocks noChangeAspect="1"/>
-          </p:cNvPicPr>
-          <p:nvPr/>
-        </p:nvPicPr>
-        <p:blipFill>
-          <a:blip r:embed="rId2"/>
-          <a:stretch>
-            <a:fillRect/>
-          </a:stretch>
-        </p:blipFill>
-        <p:spPr>
-          <a:xfrm>
-            <a:off x="1075432" y="5340096"/>
-            <a:ext cx="5411224" cy="3474720"/>
-          </a:xfrm>
-          <a:prstGeom prst="rect">
-            <a:avLst/>
-          </a:prstGeom>
-        </p:spPr>
-      </p:pic>
-      <p:sp>
-        <p:nvSpPr>
-          <p:cNvPr id="7" name="Text 3"/>
-          <p:cNvSpPr txBox="1"/>
-          <p:nvPr/>
-        </p:nvSpPr>
-        <p:spPr>
-          <a:xfrm>
-            <a:off x="566928" y="8869680"/>
-            <a:ext cx="6428232" cy="274320"/>
-          </a:xfrm>
-          <a:prstGeom prst="rect">
-            <a:avLst/>
-          </a:prstGeom>
-          <a:noFill/>
-          <a:ln/>
-        </p:spPr>
-        <p:txBody>
-          <a:bodyPr wrap="square" lIns="0" tIns="0" rIns="0" bIns="0" rtlCol="0" anchor="ctr"/>
-          <a:lstStyle/>
-          <a:p>
-            <a:pPr algn="ctr" indent="0" marL="0">
-              <a:buNone/>
-            </a:pPr>
-            <a:r>
-              <a:rPr lang="en-US" sz="950" dirty="0">
-                <a:solidFill>
-                  <a:srgbClr val="6B6B6B"/>
-                </a:solidFill>
-                <a:latin typeface="Calibri" pitchFamily="34" charset="0"/>
-                <a:ea typeface="Calibri" pitchFamily="34" charset="-122"/>
-                <a:cs typeface="Calibri" pitchFamily="34" charset="-120"/>
-              </a:rPr>
-              <a:t>「総合アンケートの集計」画面の「周回企業数との関係」「来場人数との関係」の表。</a:t>
-            </a:r>
-            <a:endParaRPr lang="en-US" sz="950" dirty="0"/>
-          </a:p>
-        </p:txBody>
-      </p:sp>
-      <p:sp>
-        <p:nvSpPr>
-          <p:cNvPr id="8" name="Text 4"/>
+      <p:sp>
+        <p:nvSpPr>
+          <p:cNvPr id="6" name="Text 3"/>
           <p:cNvSpPr txBox="1"/>
           <p:nvPr/>
         </p:nvSpPr>
@@ -23447,46 +24021,453 @@
                 <a:ea typeface="Calibri" pitchFamily="34" charset="-122"/>
                 <a:cs typeface="Calibri" pitchFamily="34" charset="-120"/>
               </a:rPr>
-              <a:t>終了後3：集計データを受け取る（つづき）</a:t>
+              <a:t>終了後3：集計データを受け取る</a:t>
             </a:r>
             <a:endParaRPr lang="en-US" sz="2200" dirty="0"/>
           </a:p>
         </p:txBody>
       </p:sp>
-      <p:pic>
-        <p:nvPicPr>
-          <p:cNvPr id="4" name="Image 0" descr="C:\Users\sato\Desktop\enque\docs\images\o-stats.png">    </p:cNvPr>
-          <p:cNvPicPr>
-            <a:picLocks noChangeAspect="1"/>
-          </p:cNvPicPr>
-          <p:nvPr/>
-        </p:nvPicPr>
-        <p:blipFill>
-          <a:blip r:embed="rId1"/>
-          <a:stretch>
-            <a:fillRect/>
-          </a:stretch>
-        </p:blipFill>
-        <p:spPr>
-          <a:xfrm>
-            <a:off x="2140821" y="1481328"/>
-            <a:ext cx="3280447" cy="3474720"/>
-          </a:xfrm>
-          <a:prstGeom prst="rect">
-            <a:avLst/>
-          </a:prstGeom>
-        </p:spPr>
-      </p:pic>
-      <p:sp>
-        <p:nvSpPr>
-          <p:cNvPr id="5" name="Text 2"/>
-          <p:cNvSpPr txBox="1"/>
-          <p:nvPr/>
-        </p:nvSpPr>
-        <p:spPr>
-          <a:xfrm>
-            <a:off x="566928" y="5010912"/>
-            <a:ext cx="6428232" cy="274320"/>
+      <p:sp>
+        <p:nvSpPr>
+          <p:cNvPr id="4" name="Text 2"/>
+          <p:cNvSpPr txBox="1"/>
+          <p:nvPr/>
+        </p:nvSpPr>
+        <p:spPr>
+          <a:xfrm>
+            <a:off x="566928" y="1591056"/>
+            <a:ext cx="6428232" cy="257810"/>
+          </a:xfrm>
+          <a:prstGeom prst="rect">
+            <a:avLst/>
+          </a:prstGeom>
+          <a:noFill/>
+          <a:ln/>
+        </p:spPr>
+        <p:txBody>
+          <a:bodyPr wrap="square" lIns="0" tIns="0" rIns="0" bIns="0" rtlCol="0" anchor="t"/>
+          <a:lstStyle/>
+          <a:p>
+            <a:pPr indent="0" marL="0">
+              <a:buNone/>
+            </a:pPr>
+            <a:r>
+              <a:rPr lang="en-US" sz="1400" b="1" dirty="0">
+                <a:solidFill>
+                  <a:srgbClr val="1E2761"/>
+                </a:solidFill>
+                <a:latin typeface="Calibri" pitchFamily="34" charset="0"/>
+                <a:ea typeface="Calibri" pitchFamily="34" charset="-122"/>
+                <a:cs typeface="Calibri" pitchFamily="34" charset="-120"/>
+              </a:rPr>
+              <a:t>CSVをダウンロードする</a:t>
+            </a:r>
+            <a:endParaRPr lang="en-US" sz="1400" dirty="0"/>
+          </a:p>
+        </p:txBody>
+      </p:sp>
+      <p:sp>
+        <p:nvSpPr>
+          <p:cNvPr id="5" name="Text 3"/>
+          <p:cNvSpPr txBox="1"/>
+          <p:nvPr/>
+        </p:nvSpPr>
+        <p:spPr>
+          <a:xfrm>
+            <a:off x="713232" y="1922018"/>
+            <a:ext cx="6281928" cy="257429"/>
+          </a:xfrm>
+          <a:prstGeom prst="rect">
+            <a:avLst/>
+          </a:prstGeom>
+          <a:noFill/>
+          <a:ln/>
+        </p:spPr>
+        <p:txBody>
+          <a:bodyPr wrap="square" lIns="0" tIns="0" rIns="0" bIns="0" rtlCol="0" anchor="t"/>
+          <a:lstStyle/>
+          <a:p>
+            <a:pPr marL="342900" indent="-342900">
+              <a:lnSpc>
+                <a:spcPct val="125000"/>
+              </a:lnSpc>
+              <a:buSzPct val="100000"/>
+              <a:buChar char="●"/>
+            </a:pPr>
+            <a:r>
+              <a:rPr lang="en-US" sz="1100" b="1" dirty="0">
+                <a:solidFill>
+                  <a:srgbClr val="222222"/>
+                </a:solidFill>
+                <a:latin typeface="Calibri" pitchFamily="34" charset="0"/>
+                <a:ea typeface="Calibri" pitchFamily="34" charset="-122"/>
+                <a:cs typeface="Calibri" pitchFamily="34" charset="-120"/>
+              </a:rPr>
+              <a:t>企業別</a:t>
+            </a:r>
+            <a:pPr indent="0" marL="0">
+              <a:lnSpc>
+                <a:spcPct val="125000"/>
+              </a:lnSpc>
+              <a:buNone/>
+            </a:pPr>
+            <a:r>
+              <a:rPr lang="en-US" sz="1100" dirty="0">
+                <a:solidFill>
+                  <a:srgbClr val="222222"/>
+                </a:solidFill>
+                <a:latin typeface="Calibri" pitchFamily="34" charset="0"/>
+                <a:ea typeface="Calibri" pitchFamily="34" charset="-122"/>
+                <a:cs typeface="Calibri" pitchFamily="34" charset="-120"/>
+              </a:rPr>
+              <a:t>：企業の「集計」画面、または「回答一覧」から</a:t>
+            </a:r>
+            <a:endParaRPr lang="en-US" sz="1100" dirty="0"/>
+          </a:p>
+        </p:txBody>
+      </p:sp>
+      <p:sp>
+        <p:nvSpPr>
+          <p:cNvPr id="6" name="Text 4"/>
+          <p:cNvSpPr txBox="1"/>
+          <p:nvPr/>
+        </p:nvSpPr>
+        <p:spPr>
+          <a:xfrm>
+            <a:off x="713232" y="2197735"/>
+            <a:ext cx="6281928" cy="257429"/>
+          </a:xfrm>
+          <a:prstGeom prst="rect">
+            <a:avLst/>
+          </a:prstGeom>
+          <a:noFill/>
+          <a:ln/>
+        </p:spPr>
+        <p:txBody>
+          <a:bodyPr wrap="square" lIns="0" tIns="0" rIns="0" bIns="0" rtlCol="0" anchor="t"/>
+          <a:lstStyle/>
+          <a:p>
+            <a:pPr marL="342900" indent="-342900">
+              <a:lnSpc>
+                <a:spcPct val="125000"/>
+              </a:lnSpc>
+              <a:buSzPct val="100000"/>
+              <a:buChar char="●"/>
+            </a:pPr>
+            <a:r>
+              <a:rPr lang="en-US" sz="1100" b="1" dirty="0">
+                <a:solidFill>
+                  <a:srgbClr val="222222"/>
+                </a:solidFill>
+                <a:latin typeface="Calibri" pitchFamily="34" charset="0"/>
+                <a:ea typeface="Calibri" pitchFamily="34" charset="-122"/>
+                <a:cs typeface="Calibri" pitchFamily="34" charset="-120"/>
+              </a:rPr>
+              <a:t>全社まとめて</a:t>
+            </a:r>
+            <a:pPr indent="0" marL="0">
+              <a:lnSpc>
+                <a:spcPct val="125000"/>
+              </a:lnSpc>
+              <a:buNone/>
+            </a:pPr>
+            <a:r>
+              <a:rPr lang="en-US" sz="1100" dirty="0">
+                <a:solidFill>
+                  <a:srgbClr val="222222"/>
+                </a:solidFill>
+                <a:latin typeface="Calibri" pitchFamily="34" charset="0"/>
+                <a:ea typeface="Calibri" pitchFamily="34" charset="-122"/>
+                <a:cs typeface="Calibri" pitchFamily="34" charset="-120"/>
+              </a:rPr>
+              <a:t>：ダッシュボードの「全企業分のCSV」から</a:t>
+            </a:r>
+            <a:endParaRPr lang="en-US" sz="1100" dirty="0"/>
+          </a:p>
+        </p:txBody>
+      </p:sp>
+      <p:sp>
+        <p:nvSpPr>
+          <p:cNvPr id="7" name="Text 5"/>
+          <p:cNvSpPr txBox="1"/>
+          <p:nvPr/>
+        </p:nvSpPr>
+        <p:spPr>
+          <a:xfrm>
+            <a:off x="566928" y="2473452"/>
+            <a:ext cx="6428232" cy="257429"/>
+          </a:xfrm>
+          <a:prstGeom prst="rect">
+            <a:avLst/>
+          </a:prstGeom>
+          <a:noFill/>
+          <a:ln/>
+        </p:spPr>
+        <p:txBody>
+          <a:bodyPr wrap="square" lIns="0" tIns="0" rIns="0" bIns="0" rtlCol="0" anchor="t"/>
+          <a:lstStyle/>
+          <a:p>
+            <a:pPr indent="0" marL="0">
+              <a:lnSpc>
+                <a:spcPct val="125000"/>
+              </a:lnSpc>
+              <a:buNone/>
+            </a:pPr>
+            <a:r>
+              <a:rPr lang="en-US" sz="1100" dirty="0">
+                <a:solidFill>
+                  <a:srgbClr val="222222"/>
+                </a:solidFill>
+                <a:latin typeface="Calibri" pitchFamily="34" charset="0"/>
+                <a:ea typeface="Calibri" pitchFamily="34" charset="-122"/>
+                <a:cs typeface="Calibri" pitchFamily="34" charset="-120"/>
+              </a:rPr>
+              <a:t>CSVは</a:t>
+            </a:r>
+            <a:pPr indent="0" marL="0">
+              <a:lnSpc>
+                <a:spcPct val="125000"/>
+              </a:lnSpc>
+              <a:buNone/>
+            </a:pPr>
+            <a:r>
+              <a:rPr lang="en-US" sz="1100" b="1" dirty="0">
+                <a:solidFill>
+                  <a:srgbClr val="222222"/>
+                </a:solidFill>
+                <a:latin typeface="Calibri" pitchFamily="34" charset="0"/>
+                <a:ea typeface="Calibri" pitchFamily="34" charset="-122"/>
+                <a:cs typeface="Calibri" pitchFamily="34" charset="-120"/>
+              </a:rPr>
+              <a:t>UTF-8（BOM付き）</a:t>
+            </a:r>
+            <a:pPr indent="0" marL="0">
+              <a:lnSpc>
+                <a:spcPct val="125000"/>
+              </a:lnSpc>
+              <a:buNone/>
+            </a:pPr>
+            <a:r>
+              <a:rPr lang="en-US" sz="1100" dirty="0">
+                <a:solidFill>
+                  <a:srgbClr val="222222"/>
+                </a:solidFill>
+                <a:latin typeface="Calibri" pitchFamily="34" charset="0"/>
+                <a:ea typeface="Calibri" pitchFamily="34" charset="-122"/>
+                <a:cs typeface="Calibri" pitchFamily="34" charset="-120"/>
+              </a:rPr>
+              <a:t>なので、Excelでそのまま開けます。</a:t>
+            </a:r>
+            <a:endParaRPr lang="en-US" sz="1100" dirty="0"/>
+          </a:p>
+        </p:txBody>
+      </p:sp>
+      <p:sp>
+        <p:nvSpPr>
+          <p:cNvPr id="8" name="Text 6"/>
+          <p:cNvSpPr txBox="1"/>
+          <p:nvPr/>
+        </p:nvSpPr>
+        <p:spPr>
+          <a:xfrm>
+            <a:off x="566928" y="2767457"/>
+            <a:ext cx="6428232" cy="459994"/>
+          </a:xfrm>
+          <a:prstGeom prst="rect">
+            <a:avLst/>
+          </a:prstGeom>
+          <a:noFill/>
+          <a:ln/>
+        </p:spPr>
+        <p:txBody>
+          <a:bodyPr wrap="square" lIns="0" tIns="0" rIns="0" bIns="0" rtlCol="0" anchor="t"/>
+          <a:lstStyle/>
+          <a:p>
+            <a:pPr indent="0" marL="0">
+              <a:lnSpc>
+                <a:spcPct val="125000"/>
+              </a:lnSpc>
+              <a:buNone/>
+            </a:pPr>
+            <a:r>
+              <a:rPr lang="en-US" sz="1100" dirty="0">
+                <a:solidFill>
+                  <a:srgbClr val="222222"/>
+                </a:solidFill>
+                <a:latin typeface="Calibri" pitchFamily="34" charset="0"/>
+                <a:ea typeface="Calibri" pitchFamily="34" charset="-122"/>
+                <a:cs typeface="Calibri" pitchFamily="34" charset="-120"/>
+              </a:rPr>
+              <a:t>列は </a:t>
+            </a:r>
+            <a:pPr indent="0" marL="0">
+              <a:lnSpc>
+                <a:spcPct val="125000"/>
+              </a:lnSpc>
+              <a:buNone/>
+            </a:pPr>
+            <a:r>
+              <a:rPr lang="en-US" sz="1045" dirty="0">
+                <a:solidFill>
+                  <a:srgbClr val="222222"/>
+                </a:solidFill>
+                <a:latin typeface="Courier New" pitchFamily="34" charset="0"/>
+                <a:ea typeface="Courier New" pitchFamily="34" charset="-122"/>
+                <a:cs typeface="Courier New" pitchFamily="34" charset="-120"/>
+              </a:rPr>
+              <a:t>回答ID / 来場者ID / 送信日時 / 重複 / 来場人数 / 回答企業数 /（設問ごとの回答）</a:t>
+            </a:r>
+            <a:pPr indent="0" marL="0">
+              <a:lnSpc>
+                <a:spcPct val="125000"/>
+              </a:lnSpc>
+              <a:buNone/>
+            </a:pPr>
+            <a:r>
+              <a:rPr lang="en-US" sz="1100" dirty="0">
+                <a:solidFill>
+                  <a:srgbClr val="222222"/>
+                </a:solidFill>
+                <a:latin typeface="Calibri" pitchFamily="34" charset="0"/>
+                <a:ea typeface="Calibri" pitchFamily="34" charset="-122"/>
+                <a:cs typeface="Calibri" pitchFamily="34" charset="-120"/>
+              </a:rPr>
+              <a:t> です。</a:t>
+            </a:r>
+            <a:endParaRPr lang="en-US" sz="1100" dirty="0"/>
+          </a:p>
+        </p:txBody>
+      </p:sp>
+      <p:sp>
+        <p:nvSpPr>
+          <p:cNvPr id="9" name="Text 7"/>
+          <p:cNvSpPr txBox="1"/>
+          <p:nvPr/>
+        </p:nvSpPr>
+        <p:spPr>
+          <a:xfrm>
+            <a:off x="566928" y="3264027"/>
+            <a:ext cx="6428232" cy="459994"/>
+          </a:xfrm>
+          <a:prstGeom prst="rect">
+            <a:avLst/>
+          </a:prstGeom>
+          <a:noFill/>
+          <a:ln/>
+        </p:spPr>
+        <p:txBody>
+          <a:bodyPr wrap="square" lIns="0" tIns="0" rIns="0" bIns="0" rtlCol="0" anchor="t"/>
+          <a:lstStyle/>
+          <a:p>
+            <a:pPr indent="0" marL="0">
+              <a:lnSpc>
+                <a:spcPct val="125000"/>
+              </a:lnSpc>
+              <a:buNone/>
+            </a:pPr>
+            <a:r>
+              <a:rPr lang="en-US" sz="1100" b="1" dirty="0">
+                <a:solidFill>
+                  <a:srgbClr val="222222"/>
+                </a:solidFill>
+                <a:latin typeface="Calibri" pitchFamily="34" charset="0"/>
+                <a:ea typeface="Calibri" pitchFamily="34" charset="-122"/>
+                <a:cs typeface="Calibri" pitchFamily="34" charset="-120"/>
+              </a:rPr>
+              <a:t>来場人数</a:t>
+            </a:r>
+            <a:pPr indent="0" marL="0">
+              <a:lnSpc>
+                <a:spcPct val="125000"/>
+              </a:lnSpc>
+              <a:buNone/>
+            </a:pPr>
+            <a:r>
+              <a:rPr lang="en-US" sz="1100" dirty="0">
+                <a:solidFill>
+                  <a:srgbClr val="222222"/>
+                </a:solidFill>
+                <a:latin typeface="Calibri" pitchFamily="34" charset="0"/>
+                <a:ea typeface="Calibri" pitchFamily="34" charset="-122"/>
+                <a:cs typeface="Calibri" pitchFamily="34" charset="-120"/>
+              </a:rPr>
+              <a:t>はその方が「何人で来られましたか」で答えた人数、</a:t>
+            </a:r>
+            <a:pPr indent="0" marL="0">
+              <a:lnSpc>
+                <a:spcPct val="125000"/>
+              </a:lnSpc>
+              <a:buNone/>
+            </a:pPr>
+            <a:r>
+              <a:rPr lang="en-US" sz="1100" b="1" dirty="0">
+                <a:solidFill>
+                  <a:srgbClr val="222222"/>
+                </a:solidFill>
+                <a:latin typeface="Calibri" pitchFamily="34" charset="0"/>
+                <a:ea typeface="Calibri" pitchFamily="34" charset="-122"/>
+                <a:cs typeface="Calibri" pitchFamily="34" charset="-120"/>
+              </a:rPr>
+              <a:t>回答企業数</a:t>
+            </a:r>
+            <a:pPr indent="0" marL="0">
+              <a:lnSpc>
+                <a:spcPct val="125000"/>
+              </a:lnSpc>
+              <a:buNone/>
+            </a:pPr>
+            <a:r>
+              <a:rPr lang="en-US" sz="1100" dirty="0">
+                <a:solidFill>
+                  <a:srgbClr val="222222"/>
+                </a:solidFill>
+                <a:latin typeface="Calibri" pitchFamily="34" charset="0"/>
+                <a:ea typeface="Calibri" pitchFamily="34" charset="-122"/>
+                <a:cs typeface="Calibri" pitchFamily="34" charset="-120"/>
+              </a:rPr>
+              <a:t>はその方が回った企業数です。</a:t>
+            </a:r>
+            <a:endParaRPr lang="en-US" sz="1100" dirty="0"/>
+          </a:p>
+        </p:txBody>
+      </p:sp>
+      <p:sp>
+        <p:nvSpPr>
+          <p:cNvPr id="10" name="Shape 8"/>
+          <p:cNvSpPr/>
+          <p:nvPr/>
+        </p:nvSpPr>
+        <p:spPr>
+          <a:xfrm>
+            <a:off x="566928" y="3760597"/>
+            <a:ext cx="6428232" cy="624459"/>
+          </a:xfrm>
+          <a:prstGeom prst="roundRect">
+            <a:avLst>
+              <a:gd name="adj" fmla="val 8786"/>
+            </a:avLst>
+          </a:prstGeom>
+          <a:solidFill>
+            <a:srgbClr val="E8ECF8"/>
+          </a:solidFill>
+          <a:ln w="9525">
+            <a:solidFill>
+              <a:srgbClr val="1E2761"/>
+            </a:solidFill>
+            <a:prstDash val="solid"/>
+          </a:ln>
+        </p:spPr>
+      </p:sp>
+      <p:sp>
+        <p:nvSpPr>
+          <p:cNvPr id="11" name="Text 9"/>
+          <p:cNvSpPr txBox="1"/>
+          <p:nvPr/>
+        </p:nvSpPr>
+        <p:spPr>
+          <a:xfrm>
+            <a:off x="658368" y="3852037"/>
+            <a:ext cx="237744" cy="237744"/>
           </a:xfrm>
           <a:prstGeom prst="rect">
             <a:avLst/>
@@ -23502,23 +24483,948 @@
               <a:buNone/>
             </a:pPr>
             <a:r>
-              <a:rPr lang="en-US" sz="950" dirty="0">
-                <a:solidFill>
-                  <a:srgbClr val="6B6B6B"/>
-                </a:solidFill>
-                <a:latin typeface="Calibri" pitchFamily="34" charset="0"/>
-                <a:ea typeface="Calibri" pitchFamily="34" charset="-122"/>
-                <a:cs typeface="Calibri" pitchFamily="34" charset="-120"/>
-              </a:rPr>
-              <a:t>企業の集計画面。設問ごとのグラフが見えるところ。</a:t>
-            </a:r>
-            <a:endParaRPr lang="en-US" sz="950" dirty="0"/>
-          </a:p>
-        </p:txBody>
-      </p:sp>
-      <p:sp>
-        <p:nvSpPr>
-          <p:cNvPr id="6" name="Text 3"/>
+              <a:rPr lang="en-US" sz="1200" b="1" dirty="0">
+                <a:solidFill>
+                  <a:srgbClr val="1E2761"/>
+                </a:solidFill>
+                <a:latin typeface="Calibri" pitchFamily="34" charset="0"/>
+                <a:ea typeface="Calibri" pitchFamily="34" charset="-122"/>
+                <a:cs typeface="Calibri" pitchFamily="34" charset="-120"/>
+              </a:rPr>
+              <a:t>i</a:t>
+            </a:r>
+            <a:endParaRPr lang="en-US" sz="1200" dirty="0"/>
+          </a:p>
+        </p:txBody>
+      </p:sp>
+      <p:sp>
+        <p:nvSpPr>
+          <p:cNvPr id="12" name="Text 10"/>
+          <p:cNvSpPr txBox="1"/>
+          <p:nvPr/>
+        </p:nvSpPr>
+        <p:spPr>
+          <a:xfrm>
+            <a:off x="950976" y="3870325"/>
+            <a:ext cx="5925312" cy="441579"/>
+          </a:xfrm>
+          <a:prstGeom prst="rect">
+            <a:avLst/>
+          </a:prstGeom>
+          <a:noFill/>
+          <a:ln/>
+        </p:spPr>
+        <p:txBody>
+          <a:bodyPr wrap="square" lIns="0" tIns="0" rIns="0" bIns="0" rtlCol="0" anchor="t"/>
+          <a:lstStyle/>
+          <a:p>
+            <a:pPr indent="0" marL="0">
+              <a:lnSpc>
+                <a:spcPct val="120000"/>
+              </a:lnSpc>
+              <a:buNone/>
+            </a:pPr>
+            <a:r>
+              <a:rPr lang="en-US" sz="1050" dirty="0">
+                <a:solidFill>
+                  <a:srgbClr val="222222"/>
+                </a:solidFill>
+                <a:latin typeface="Calibri" pitchFamily="34" charset="0"/>
+                <a:ea typeface="Calibri" pitchFamily="34" charset="-122"/>
+                <a:cs typeface="Calibri" pitchFamily="34" charset="-120"/>
+              </a:rPr>
+              <a:t>総合アンケートのCSVは、</a:t>
+            </a:r>
+            <a:pPr indent="0" marL="0">
+              <a:lnSpc>
+                <a:spcPct val="120000"/>
+              </a:lnSpc>
+              <a:buNone/>
+            </a:pPr>
+            <a:r>
+              <a:rPr lang="en-US" sz="1050" b="1" dirty="0">
+                <a:solidFill>
+                  <a:srgbClr val="222222"/>
+                </a:solidFill>
+                <a:latin typeface="Calibri" pitchFamily="34" charset="0"/>
+                <a:ea typeface="Calibri" pitchFamily="34" charset="-122"/>
+                <a:cs typeface="Calibri" pitchFamily="34" charset="-120"/>
+              </a:rPr>
+              <a:t>1行＝1グループ</a:t>
+            </a:r>
+            <a:pPr indent="0" marL="0">
+              <a:lnSpc>
+                <a:spcPct val="120000"/>
+              </a:lnSpc>
+              <a:buNone/>
+            </a:pPr>
+            <a:r>
+              <a:rPr lang="en-US" sz="1050" dirty="0">
+                <a:solidFill>
+                  <a:srgbClr val="222222"/>
+                </a:solidFill>
+                <a:latin typeface="Calibri" pitchFamily="34" charset="0"/>
+                <a:ea typeface="Calibri" pitchFamily="34" charset="-122"/>
+                <a:cs typeface="Calibri" pitchFamily="34" charset="-120"/>
+              </a:rPr>
+              <a:t>になります。世代や区分ごとの人数を聞いている場合は、</a:t>
+            </a:r>
+            <a:endParaRPr lang="en-US" sz="1050" dirty="0"/>
+          </a:p>
+        </p:txBody>
+      </p:sp>
+      <p:sp>
+        <p:nvSpPr>
+          <p:cNvPr id="13" name="Shape 11"/>
+          <p:cNvSpPr/>
+          <p:nvPr/>
+        </p:nvSpPr>
+        <p:spPr>
+          <a:xfrm>
+            <a:off x="566928" y="4458208"/>
+            <a:ext cx="6428232" cy="431102"/>
+          </a:xfrm>
+          <a:prstGeom prst="roundRect">
+            <a:avLst>
+              <a:gd name="adj" fmla="val 12726"/>
+            </a:avLst>
+          </a:prstGeom>
+          <a:solidFill>
+            <a:srgbClr val="E8ECF8"/>
+          </a:solidFill>
+          <a:ln w="9525">
+            <a:solidFill>
+              <a:srgbClr val="1E2761"/>
+            </a:solidFill>
+            <a:prstDash val="solid"/>
+          </a:ln>
+        </p:spPr>
+      </p:sp>
+      <p:sp>
+        <p:nvSpPr>
+          <p:cNvPr id="14" name="Text 12"/>
+          <p:cNvSpPr txBox="1"/>
+          <p:nvPr/>
+        </p:nvSpPr>
+        <p:spPr>
+          <a:xfrm>
+            <a:off x="658368" y="4549648"/>
+            <a:ext cx="237744" cy="237744"/>
+          </a:xfrm>
+          <a:prstGeom prst="rect">
+            <a:avLst/>
+          </a:prstGeom>
+          <a:noFill/>
+          <a:ln/>
+        </p:spPr>
+        <p:txBody>
+          <a:bodyPr wrap="square" lIns="0" tIns="0" rIns="0" bIns="0" rtlCol="0" anchor="ctr"/>
+          <a:lstStyle/>
+          <a:p>
+            <a:pPr algn="ctr" indent="0" marL="0">
+              <a:buNone/>
+            </a:pPr>
+            <a:r>
+              <a:rPr lang="en-US" sz="1200" b="1" dirty="0">
+                <a:solidFill>
+                  <a:srgbClr val="1E2761"/>
+                </a:solidFill>
+                <a:latin typeface="Calibri" pitchFamily="34" charset="0"/>
+                <a:ea typeface="Calibri" pitchFamily="34" charset="-122"/>
+                <a:cs typeface="Calibri" pitchFamily="34" charset="-120"/>
+              </a:rPr>
+              <a:t>i</a:t>
+            </a:r>
+            <a:endParaRPr lang="en-US" sz="1200" dirty="0"/>
+          </a:p>
+        </p:txBody>
+      </p:sp>
+      <p:sp>
+        <p:nvSpPr>
+          <p:cNvPr id="15" name="Text 13"/>
+          <p:cNvSpPr txBox="1"/>
+          <p:nvPr/>
+        </p:nvSpPr>
+        <p:spPr>
+          <a:xfrm>
+            <a:off x="950976" y="4567936"/>
+            <a:ext cx="5925312" cy="248221"/>
+          </a:xfrm>
+          <a:prstGeom prst="rect">
+            <a:avLst/>
+          </a:prstGeom>
+          <a:noFill/>
+          <a:ln/>
+        </p:spPr>
+        <p:txBody>
+          <a:bodyPr wrap="square" lIns="0" tIns="0" rIns="0" bIns="0" rtlCol="0" anchor="t"/>
+          <a:lstStyle/>
+          <a:p>
+            <a:pPr indent="0" marL="0">
+              <a:lnSpc>
+                <a:spcPct val="120000"/>
+              </a:lnSpc>
+              <a:buNone/>
+            </a:pPr>
+            <a:r>
+              <a:rPr lang="en-US" sz="1050" dirty="0">
+                <a:solidFill>
+                  <a:srgbClr val="222222"/>
+                </a:solidFill>
+                <a:latin typeface="Calibri" pitchFamily="34" charset="0"/>
+                <a:ea typeface="Calibri" pitchFamily="34" charset="-122"/>
+                <a:cs typeface="Calibri" pitchFamily="34" charset="-120"/>
+              </a:rPr>
+              <a:t>「来場人数」と並べてExcelのピボットテーブルにかけると、グループの構成を集計できます。</a:t>
+            </a:r>
+            <a:endParaRPr lang="en-US" sz="1050" dirty="0"/>
+          </a:p>
+        </p:txBody>
+      </p:sp>
+      <p:sp>
+        <p:nvSpPr>
+          <p:cNvPr id="16" name="Shape 14"/>
+          <p:cNvSpPr/>
+          <p:nvPr/>
+        </p:nvSpPr>
+        <p:spPr>
+          <a:xfrm>
+            <a:off x="566928" y="4962462"/>
+            <a:ext cx="6428232" cy="624459"/>
+          </a:xfrm>
+          <a:prstGeom prst="roundRect">
+            <a:avLst>
+              <a:gd name="adj" fmla="val 8786"/>
+            </a:avLst>
+          </a:prstGeom>
+          <a:solidFill>
+            <a:srgbClr val="E8ECF8"/>
+          </a:solidFill>
+          <a:ln w="9525">
+            <a:solidFill>
+              <a:srgbClr val="1E2761"/>
+            </a:solidFill>
+            <a:prstDash val="solid"/>
+          </a:ln>
+        </p:spPr>
+      </p:sp>
+      <p:sp>
+        <p:nvSpPr>
+          <p:cNvPr id="17" name="Text 15"/>
+          <p:cNvSpPr txBox="1"/>
+          <p:nvPr/>
+        </p:nvSpPr>
+        <p:spPr>
+          <a:xfrm>
+            <a:off x="658368" y="5053902"/>
+            <a:ext cx="237744" cy="237744"/>
+          </a:xfrm>
+          <a:prstGeom prst="rect">
+            <a:avLst/>
+          </a:prstGeom>
+          <a:noFill/>
+          <a:ln/>
+        </p:spPr>
+        <p:txBody>
+          <a:bodyPr wrap="square" lIns="0" tIns="0" rIns="0" bIns="0" rtlCol="0" anchor="ctr"/>
+          <a:lstStyle/>
+          <a:p>
+            <a:pPr algn="ctr" indent="0" marL="0">
+              <a:buNone/>
+            </a:pPr>
+            <a:r>
+              <a:rPr lang="en-US" sz="1200" b="1" dirty="0">
+                <a:solidFill>
+                  <a:srgbClr val="1E2761"/>
+                </a:solidFill>
+                <a:latin typeface="Calibri" pitchFamily="34" charset="0"/>
+                <a:ea typeface="Calibri" pitchFamily="34" charset="-122"/>
+                <a:cs typeface="Calibri" pitchFamily="34" charset="-120"/>
+              </a:rPr>
+              <a:t>i</a:t>
+            </a:r>
+            <a:endParaRPr lang="en-US" sz="1200" dirty="0"/>
+          </a:p>
+        </p:txBody>
+      </p:sp>
+      <p:sp>
+        <p:nvSpPr>
+          <p:cNvPr id="18" name="Text 16"/>
+          <p:cNvSpPr txBox="1"/>
+          <p:nvPr/>
+        </p:nvSpPr>
+        <p:spPr>
+          <a:xfrm>
+            <a:off x="950976" y="5072190"/>
+            <a:ext cx="5925312" cy="441579"/>
+          </a:xfrm>
+          <a:prstGeom prst="rect">
+            <a:avLst/>
+          </a:prstGeom>
+          <a:noFill/>
+          <a:ln/>
+        </p:spPr>
+        <p:txBody>
+          <a:bodyPr wrap="square" lIns="0" tIns="0" rIns="0" bIns="0" rtlCol="0" anchor="t"/>
+          <a:lstStyle/>
+          <a:p>
+            <a:pPr indent="0" marL="0">
+              <a:lnSpc>
+                <a:spcPct val="120000"/>
+              </a:lnSpc>
+              <a:buNone/>
+            </a:pPr>
+            <a:r>
+              <a:rPr lang="en-US" sz="1050" dirty="0">
+                <a:solidFill>
+                  <a:srgbClr val="222222"/>
+                </a:solidFill>
+                <a:latin typeface="Calibri" pitchFamily="34" charset="0"/>
+                <a:ea typeface="Calibri" pitchFamily="34" charset="-122"/>
+                <a:cs typeface="Calibri" pitchFamily="34" charset="-120"/>
+              </a:rPr>
+              <a:t>メールアドレスは出力されません。来場者は匿名のID（来場者ID）だけが入るので、企業をまたいだ同じ方の回答を突き合わせられます。</a:t>
+            </a:r>
+            <a:endParaRPr lang="en-US" sz="1050" dirty="0"/>
+          </a:p>
+        </p:txBody>
+      </p:sp>
+      <p:sp>
+        <p:nvSpPr>
+          <p:cNvPr id="19" name="Text 17"/>
+          <p:cNvSpPr txBox="1"/>
+          <p:nvPr/>
+        </p:nvSpPr>
+        <p:spPr>
+          <a:xfrm>
+            <a:off x="566928" y="5769801"/>
+            <a:ext cx="6428232" cy="257810"/>
+          </a:xfrm>
+          <a:prstGeom prst="rect">
+            <a:avLst/>
+          </a:prstGeom>
+          <a:noFill/>
+          <a:ln/>
+        </p:spPr>
+        <p:txBody>
+          <a:bodyPr wrap="square" lIns="0" tIns="0" rIns="0" bIns="0" rtlCol="0" anchor="t"/>
+          <a:lstStyle/>
+          <a:p>
+            <a:pPr indent="0" marL="0">
+              <a:buNone/>
+            </a:pPr>
+            <a:r>
+              <a:rPr lang="en-US" sz="1400" b="1" dirty="0">
+                <a:solidFill>
+                  <a:srgbClr val="1E2761"/>
+                </a:solidFill>
+                <a:latin typeface="Calibri" pitchFamily="34" charset="0"/>
+                <a:ea typeface="Calibri" pitchFamily="34" charset="-122"/>
+                <a:cs typeface="Calibri" pitchFamily="34" charset="-120"/>
+              </a:rPr>
+              <a:t>集計画面で見る</a:t>
+            </a:r>
+            <a:endParaRPr lang="en-US" sz="1400" dirty="0"/>
+          </a:p>
+        </p:txBody>
+      </p:sp>
+      <p:sp>
+        <p:nvSpPr>
+          <p:cNvPr id="20" name="Text 18"/>
+          <p:cNvSpPr txBox="1"/>
+          <p:nvPr/>
+        </p:nvSpPr>
+        <p:spPr>
+          <a:xfrm>
+            <a:off x="566928" y="6100763"/>
+            <a:ext cx="6428232" cy="459994"/>
+          </a:xfrm>
+          <a:prstGeom prst="rect">
+            <a:avLst/>
+          </a:prstGeom>
+          <a:noFill/>
+          <a:ln/>
+        </p:spPr>
+        <p:txBody>
+          <a:bodyPr wrap="square" lIns="0" tIns="0" rIns="0" bIns="0" rtlCol="0" anchor="t"/>
+          <a:lstStyle/>
+          <a:p>
+            <a:pPr indent="0" marL="0">
+              <a:lnSpc>
+                <a:spcPct val="125000"/>
+              </a:lnSpc>
+              <a:buNone/>
+            </a:pPr>
+            <a:r>
+              <a:rPr lang="en-US" sz="1100" dirty="0">
+                <a:solidFill>
+                  <a:srgbClr val="222222"/>
+                </a:solidFill>
+                <a:latin typeface="Calibri" pitchFamily="34" charset="0"/>
+                <a:ea typeface="Calibri" pitchFamily="34" charset="-122"/>
+                <a:cs typeface="Calibri" pitchFamily="34" charset="-120"/>
+              </a:rPr>
+              <a:t>企業ごとの「集計」画面では、設問ごとのグラフ・星評価の平均・NPS・自由記述の一覧が見られます。</a:t>
+            </a:r>
+            <a:endParaRPr lang="en-US" sz="1100" dirty="0"/>
+          </a:p>
+        </p:txBody>
+      </p:sp>
+      <p:sp>
+        <p:nvSpPr>
+          <p:cNvPr id="21" name="Text 19"/>
+          <p:cNvSpPr txBox="1"/>
+          <p:nvPr/>
+        </p:nvSpPr>
+        <p:spPr>
+          <a:xfrm>
+            <a:off x="566928" y="6597333"/>
+            <a:ext cx="6428232" cy="459994"/>
+          </a:xfrm>
+          <a:prstGeom prst="rect">
+            <a:avLst/>
+          </a:prstGeom>
+          <a:noFill/>
+          <a:ln/>
+        </p:spPr>
+        <p:txBody>
+          <a:bodyPr wrap="square" lIns="0" tIns="0" rIns="0" bIns="0" rtlCol="0" anchor="t"/>
+          <a:lstStyle/>
+          <a:p>
+            <a:pPr indent="0" marL="0">
+              <a:lnSpc>
+                <a:spcPct val="125000"/>
+              </a:lnSpc>
+              <a:buNone/>
+            </a:pPr>
+            <a:r>
+              <a:rPr lang="en-US" sz="1100" b="1" dirty="0">
+                <a:solidFill>
+                  <a:srgbClr val="222222"/>
+                </a:solidFill>
+                <a:latin typeface="Calibri" pitchFamily="34" charset="0"/>
+                <a:ea typeface="Calibri" pitchFamily="34" charset="-122"/>
+                <a:cs typeface="Calibri" pitchFamily="34" charset="-120"/>
+              </a:rPr>
+              <a:t>総合アンケートの集計</a:t>
+            </a:r>
+            <a:pPr indent="0" marL="0">
+              <a:lnSpc>
+                <a:spcPct val="125000"/>
+              </a:lnSpc>
+              <a:buNone/>
+            </a:pPr>
+            <a:r>
+              <a:rPr lang="en-US" sz="1100" dirty="0">
+                <a:solidFill>
+                  <a:srgbClr val="222222"/>
+                </a:solidFill>
+                <a:latin typeface="Calibri" pitchFamily="34" charset="0"/>
+                <a:ea typeface="Calibri" pitchFamily="34" charset="-122"/>
+                <a:cs typeface="Calibri" pitchFamily="34" charset="-120"/>
+              </a:rPr>
+              <a:t>は、ダッシュボードの「総合アンケートの集計」、または「総合アンケートと案内メール」画面の</a:t>
+            </a:r>
+            <a:pPr indent="0" marL="0">
+              <a:lnSpc>
+                <a:spcPct val="125000"/>
+              </a:lnSpc>
+              <a:buNone/>
+            </a:pPr>
+            <a:r>
+              <a:rPr lang="en-US" sz="1100" b="1" dirty="0">
+                <a:solidFill>
+                  <a:srgbClr val="222222"/>
+                </a:solidFill>
+                <a:latin typeface="Calibri" pitchFamily="34" charset="0"/>
+                <a:ea typeface="Calibri" pitchFamily="34" charset="-122"/>
+                <a:cs typeface="Calibri" pitchFamily="34" charset="-120"/>
+              </a:rPr>
+              <a:t>「集計を見る」</a:t>
+            </a:r>
+            <a:pPr indent="0" marL="0">
+              <a:lnSpc>
+                <a:spcPct val="125000"/>
+              </a:lnSpc>
+              <a:buNone/>
+            </a:pPr>
+            <a:r>
+              <a:rPr lang="en-US" sz="1100" dirty="0">
+                <a:solidFill>
+                  <a:srgbClr val="222222"/>
+                </a:solidFill>
+                <a:latin typeface="Calibri" pitchFamily="34" charset="0"/>
+                <a:ea typeface="Calibri" pitchFamily="34" charset="-122"/>
+                <a:cs typeface="Calibri" pitchFamily="34" charset="-120"/>
+              </a:rPr>
+              <a:t>から開きます。</a:t>
+            </a:r>
+            <a:endParaRPr lang="en-US" sz="1100" dirty="0"/>
+          </a:p>
+        </p:txBody>
+      </p:sp>
+      <p:sp>
+        <p:nvSpPr>
+          <p:cNvPr id="22" name="Text 20"/>
+          <p:cNvSpPr txBox="1"/>
+          <p:nvPr/>
+        </p:nvSpPr>
+        <p:spPr>
+          <a:xfrm>
+            <a:off x="713232" y="7093903"/>
+            <a:ext cx="6281928" cy="257429"/>
+          </a:xfrm>
+          <a:prstGeom prst="rect">
+            <a:avLst/>
+          </a:prstGeom>
+          <a:noFill/>
+          <a:ln/>
+        </p:spPr>
+        <p:txBody>
+          <a:bodyPr wrap="square" lIns="0" tIns="0" rIns="0" bIns="0" rtlCol="0" anchor="t"/>
+          <a:lstStyle/>
+          <a:p>
+            <a:pPr marL="342900" indent="-342900">
+              <a:lnSpc>
+                <a:spcPct val="125000"/>
+              </a:lnSpc>
+              <a:buSzPct val="100000"/>
+              <a:buChar char="●"/>
+            </a:pPr>
+            <a:r>
+              <a:rPr lang="en-US" sz="1100" b="1" dirty="0">
+                <a:solidFill>
+                  <a:srgbClr val="222222"/>
+                </a:solidFill>
+                <a:latin typeface="Calibri" pitchFamily="34" charset="0"/>
+                <a:ea typeface="Calibri" pitchFamily="34" charset="-122"/>
+                <a:cs typeface="Calibri" pitchFamily="34" charset="-120"/>
+              </a:rPr>
+              <a:t>回答数と回答率</a:t>
+            </a:r>
+            <a:pPr indent="0" marL="0">
+              <a:lnSpc>
+                <a:spcPct val="125000"/>
+              </a:lnSpc>
+              <a:buNone/>
+            </a:pPr>
+            <a:r>
+              <a:rPr lang="en-US" sz="1100" dirty="0">
+                <a:solidFill>
+                  <a:srgbClr val="222222"/>
+                </a:solidFill>
+                <a:latin typeface="Calibri" pitchFamily="34" charset="0"/>
+                <a:ea typeface="Calibri" pitchFamily="34" charset="-122"/>
+                <a:cs typeface="Calibri" pitchFamily="34" charset="-120"/>
+              </a:rPr>
+              <a:t>（回答した来場者のうち何%が答えたか）</a:t>
+            </a:r>
+            <a:endParaRPr lang="en-US" sz="1100" dirty="0"/>
+          </a:p>
+        </p:txBody>
+      </p:sp>
+      <p:sp>
+        <p:nvSpPr>
+          <p:cNvPr id="23" name="Text 21"/>
+          <p:cNvSpPr txBox="1"/>
+          <p:nvPr/>
+        </p:nvSpPr>
+        <p:spPr>
+          <a:xfrm>
+            <a:off x="713232" y="7369620"/>
+            <a:ext cx="6281928" cy="257429"/>
+          </a:xfrm>
+          <a:prstGeom prst="rect">
+            <a:avLst/>
+          </a:prstGeom>
+          <a:noFill/>
+          <a:ln/>
+        </p:spPr>
+        <p:txBody>
+          <a:bodyPr wrap="square" lIns="0" tIns="0" rIns="0" bIns="0" rtlCol="0" anchor="t"/>
+          <a:lstStyle/>
+          <a:p>
+            <a:pPr marL="342900" indent="-342900">
+              <a:lnSpc>
+                <a:spcPct val="125000"/>
+              </a:lnSpc>
+              <a:buSzPct val="100000"/>
+              <a:buChar char="●"/>
+            </a:pPr>
+            <a:r>
+              <a:rPr lang="en-US" sz="1100" b="1" dirty="0">
+                <a:solidFill>
+                  <a:srgbClr val="222222"/>
+                </a:solidFill>
+                <a:latin typeface="Calibri" pitchFamily="34" charset="0"/>
+                <a:ea typeface="Calibri" pitchFamily="34" charset="-122"/>
+                <a:cs typeface="Calibri" pitchFamily="34" charset="-120"/>
+              </a:rPr>
+              <a:t>設問ごとのグラフ</a:t>
+            </a:r>
+            <a:pPr indent="0" marL="0">
+              <a:lnSpc>
+                <a:spcPct val="125000"/>
+              </a:lnSpc>
+              <a:buNone/>
+            </a:pPr>
+            <a:r>
+              <a:rPr lang="en-US" sz="1100" dirty="0">
+                <a:solidFill>
+                  <a:srgbClr val="222222"/>
+                </a:solidFill>
+                <a:latin typeface="Calibri" pitchFamily="34" charset="0"/>
+                <a:ea typeface="Calibri" pitchFamily="34" charset="-122"/>
+                <a:cs typeface="Calibri" pitchFamily="34" charset="-120"/>
+              </a:rPr>
+              <a:t>（企業の集計と同じ見た目）と</a:t>
+            </a:r>
+            <a:pPr indent="0" marL="0">
+              <a:lnSpc>
+                <a:spcPct val="125000"/>
+              </a:lnSpc>
+              <a:buNone/>
+            </a:pPr>
+            <a:r>
+              <a:rPr lang="en-US" sz="1100" b="1" dirty="0">
+                <a:solidFill>
+                  <a:srgbClr val="222222"/>
+                </a:solidFill>
+                <a:latin typeface="Calibri" pitchFamily="34" charset="0"/>
+                <a:ea typeface="Calibri" pitchFamily="34" charset="-122"/>
+                <a:cs typeface="Calibri" pitchFamily="34" charset="-120"/>
+              </a:rPr>
+              <a:t>自由記述の一覧</a:t>
+            </a:r>
+            <a:endParaRPr lang="en-US" sz="1100" dirty="0"/>
+          </a:p>
+        </p:txBody>
+      </p:sp>
+      <p:sp>
+        <p:nvSpPr>
+          <p:cNvPr id="24" name="Text 22"/>
+          <p:cNvSpPr txBox="1"/>
+          <p:nvPr/>
+        </p:nvSpPr>
+        <p:spPr>
+          <a:xfrm>
+            <a:off x="713232" y="7645337"/>
+            <a:ext cx="6281928" cy="257429"/>
+          </a:xfrm>
+          <a:prstGeom prst="rect">
+            <a:avLst/>
+          </a:prstGeom>
+          <a:noFill/>
+          <a:ln/>
+        </p:spPr>
+        <p:txBody>
+          <a:bodyPr wrap="square" lIns="0" tIns="0" rIns="0" bIns="0" rtlCol="0" anchor="t"/>
+          <a:lstStyle/>
+          <a:p>
+            <a:pPr marL="342900" indent="-342900">
+              <a:lnSpc>
+                <a:spcPct val="125000"/>
+              </a:lnSpc>
+              <a:buSzPct val="100000"/>
+              <a:buChar char="●"/>
+            </a:pPr>
+            <a:r>
+              <a:rPr lang="en-US" sz="1100" b="1" dirty="0">
+                <a:solidFill>
+                  <a:srgbClr val="222222"/>
+                </a:solidFill>
+                <a:latin typeface="Calibri" pitchFamily="34" charset="0"/>
+                <a:ea typeface="Calibri" pitchFamily="34" charset="-122"/>
+                <a:cs typeface="Calibri" pitchFamily="34" charset="-120"/>
+              </a:rPr>
+              <a:t>周回企業数との関係</a:t>
+            </a:r>
+            <a:pPr indent="0" marL="0">
+              <a:lnSpc>
+                <a:spcPct val="125000"/>
+              </a:lnSpc>
+              <a:buNone/>
+            </a:pPr>
+            <a:r>
+              <a:rPr lang="en-US" sz="1100" dirty="0">
+                <a:solidFill>
+                  <a:srgbClr val="222222"/>
+                </a:solidFill>
+                <a:latin typeface="Calibri" pitchFamily="34" charset="0"/>
+                <a:ea typeface="Calibri" pitchFamily="34" charset="-122"/>
+                <a:cs typeface="Calibri" pitchFamily="34" charset="-120"/>
+              </a:rPr>
+              <a:t>：たくさん回った方ほど評価が高いか</a:t>
+            </a:r>
+            <a:endParaRPr lang="en-US" sz="1100" dirty="0"/>
+          </a:p>
+        </p:txBody>
+      </p:sp>
+      <p:sp>
+        <p:nvSpPr>
+          <p:cNvPr id="25" name="Text 23"/>
+          <p:cNvSpPr txBox="1"/>
+          <p:nvPr/>
+        </p:nvSpPr>
+        <p:spPr>
+          <a:xfrm>
+            <a:off x="713232" y="7921054"/>
+            <a:ext cx="6281928" cy="257429"/>
+          </a:xfrm>
+          <a:prstGeom prst="rect">
+            <a:avLst/>
+          </a:prstGeom>
+          <a:noFill/>
+          <a:ln/>
+        </p:spPr>
+        <p:txBody>
+          <a:bodyPr wrap="square" lIns="0" tIns="0" rIns="0" bIns="0" rtlCol="0" anchor="t"/>
+          <a:lstStyle/>
+          <a:p>
+            <a:pPr marL="342900" indent="-342900">
+              <a:lnSpc>
+                <a:spcPct val="125000"/>
+              </a:lnSpc>
+              <a:buSzPct val="100000"/>
+              <a:buChar char="●"/>
+            </a:pPr>
+            <a:r>
+              <a:rPr lang="en-US" sz="1100" b="1" dirty="0">
+                <a:solidFill>
+                  <a:srgbClr val="222222"/>
+                </a:solidFill>
+                <a:latin typeface="Calibri" pitchFamily="34" charset="0"/>
+                <a:ea typeface="Calibri" pitchFamily="34" charset="-122"/>
+                <a:cs typeface="Calibri" pitchFamily="34" charset="-120"/>
+              </a:rPr>
+              <a:t>来場人数との関係</a:t>
+            </a:r>
+            <a:pPr indent="0" marL="0">
+              <a:lnSpc>
+                <a:spcPct val="125000"/>
+              </a:lnSpc>
+              <a:buNone/>
+            </a:pPr>
+            <a:r>
+              <a:rPr lang="en-US" sz="1100" dirty="0">
+                <a:solidFill>
+                  <a:srgbClr val="222222"/>
+                </a:solidFill>
+                <a:latin typeface="Calibri" pitchFamily="34" charset="0"/>
+                <a:ea typeface="Calibri" pitchFamily="34" charset="-122"/>
+                <a:cs typeface="Calibri" pitchFamily="34" charset="-120"/>
+              </a:rPr>
+              <a:t>：1人で来た方とグループで来た方の違い</a:t>
+            </a:r>
+            <a:endParaRPr lang="en-US" sz="1100" dirty="0"/>
+          </a:p>
+        </p:txBody>
+      </p:sp>
+      <p:sp>
+        <p:nvSpPr>
+          <p:cNvPr id="26" name="Text 24"/>
+          <p:cNvSpPr txBox="1"/>
+          <p:nvPr/>
+        </p:nvSpPr>
+        <p:spPr>
+          <a:xfrm>
+            <a:off x="713232" y="8196771"/>
+            <a:ext cx="6281928" cy="459994"/>
+          </a:xfrm>
+          <a:prstGeom prst="rect">
+            <a:avLst/>
+          </a:prstGeom>
+          <a:noFill/>
+          <a:ln/>
+        </p:spPr>
+        <p:txBody>
+          <a:bodyPr wrap="square" lIns="0" tIns="0" rIns="0" bIns="0" rtlCol="0" anchor="t"/>
+          <a:lstStyle/>
+          <a:p>
+            <a:pPr marL="342900" indent="-342900">
+              <a:lnSpc>
+                <a:spcPct val="125000"/>
+              </a:lnSpc>
+              <a:buSzPct val="100000"/>
+              <a:buChar char="●"/>
+            </a:pPr>
+            <a:r>
+              <a:rPr lang="en-US" sz="1100" b="1" dirty="0">
+                <a:solidFill>
+                  <a:srgbClr val="222222"/>
+                </a:solidFill>
+                <a:latin typeface="Calibri" pitchFamily="34" charset="0"/>
+                <a:ea typeface="Calibri" pitchFamily="34" charset="-122"/>
+                <a:cs typeface="Calibri" pitchFamily="34" charset="-120"/>
+              </a:rPr>
+              <a:t>グループの構成</a:t>
+            </a:r>
+            <a:pPr indent="0" marL="0">
+              <a:lnSpc>
+                <a:spcPct val="125000"/>
+              </a:lnSpc>
+              <a:buNone/>
+            </a:pPr>
+            <a:r>
+              <a:rPr lang="en-US" sz="1100" dirty="0">
+                <a:solidFill>
+                  <a:srgbClr val="222222"/>
+                </a:solidFill>
+                <a:latin typeface="Calibri" pitchFamily="34" charset="0"/>
+                <a:ea typeface="Calibri" pitchFamily="34" charset="-122"/>
+                <a:cs typeface="Calibri" pitchFamily="34" charset="-120"/>
+              </a:rPr>
+              <a:t>：区分ごとの人数を聞いている場合（区分別の人数・よくあるグループの型・来場人数との照合）</a:t>
+            </a:r>
+            <a:endParaRPr lang="en-US" sz="1100" dirty="0"/>
+          </a:p>
+        </p:txBody>
+      </p:sp>
+      <p:sp>
+        <p:nvSpPr>
+          <p:cNvPr id="27" name="Shape 25"/>
+          <p:cNvSpPr/>
+          <p:nvPr/>
+        </p:nvSpPr>
+        <p:spPr>
+          <a:xfrm>
+            <a:off x="566928" y="8675053"/>
+            <a:ext cx="6428232" cy="624459"/>
+          </a:xfrm>
+          <a:prstGeom prst="roundRect">
+            <a:avLst>
+              <a:gd name="adj" fmla="val 8786"/>
+            </a:avLst>
+          </a:prstGeom>
+          <a:solidFill>
+            <a:srgbClr val="E8ECF8"/>
+          </a:solidFill>
+          <a:ln w="9525">
+            <a:solidFill>
+              <a:srgbClr val="1E2761"/>
+            </a:solidFill>
+            <a:prstDash val="solid"/>
+          </a:ln>
+        </p:spPr>
+      </p:sp>
+      <p:sp>
+        <p:nvSpPr>
+          <p:cNvPr id="28" name="Text 26"/>
+          <p:cNvSpPr txBox="1"/>
+          <p:nvPr/>
+        </p:nvSpPr>
+        <p:spPr>
+          <a:xfrm>
+            <a:off x="658368" y="8766493"/>
+            <a:ext cx="237744" cy="237744"/>
+          </a:xfrm>
+          <a:prstGeom prst="rect">
+            <a:avLst/>
+          </a:prstGeom>
+          <a:noFill/>
+          <a:ln/>
+        </p:spPr>
+        <p:txBody>
+          <a:bodyPr wrap="square" lIns="0" tIns="0" rIns="0" bIns="0" rtlCol="0" anchor="ctr"/>
+          <a:lstStyle/>
+          <a:p>
+            <a:pPr algn="ctr" indent="0" marL="0">
+              <a:buNone/>
+            </a:pPr>
+            <a:r>
+              <a:rPr lang="en-US" sz="1200" b="1" dirty="0">
+                <a:solidFill>
+                  <a:srgbClr val="1E2761"/>
+                </a:solidFill>
+                <a:latin typeface="Calibri" pitchFamily="34" charset="0"/>
+                <a:ea typeface="Calibri" pitchFamily="34" charset="-122"/>
+                <a:cs typeface="Calibri" pitchFamily="34" charset="-120"/>
+              </a:rPr>
+              <a:t>i</a:t>
+            </a:r>
+            <a:endParaRPr lang="en-US" sz="1200" dirty="0"/>
+          </a:p>
+        </p:txBody>
+      </p:sp>
+      <p:sp>
+        <p:nvSpPr>
+          <p:cNvPr id="29" name="Text 27"/>
+          <p:cNvSpPr txBox="1"/>
+          <p:nvPr/>
+        </p:nvSpPr>
+        <p:spPr>
+          <a:xfrm>
+            <a:off x="950976" y="8784781"/>
+            <a:ext cx="5925312" cy="441579"/>
+          </a:xfrm>
+          <a:prstGeom prst="rect">
+            <a:avLst/>
+          </a:prstGeom>
+          <a:noFill/>
+          <a:ln/>
+        </p:spPr>
+        <p:txBody>
+          <a:bodyPr wrap="square" lIns="0" tIns="0" rIns="0" bIns="0" rtlCol="0" anchor="t"/>
+          <a:lstStyle/>
+          <a:p>
+            <a:pPr indent="0" marL="0">
+              <a:lnSpc>
+                <a:spcPct val="120000"/>
+              </a:lnSpc>
+              <a:buNone/>
+            </a:pPr>
+            <a:r>
+              <a:rPr lang="en-US" sz="1050" dirty="0">
+                <a:solidFill>
+                  <a:srgbClr val="222222"/>
+                </a:solidFill>
+                <a:latin typeface="Calibri" pitchFamily="34" charset="0"/>
+                <a:ea typeface="Calibri" pitchFamily="34" charset="-122"/>
+                <a:cs typeface="Calibri" pitchFamily="34" charset="-120"/>
+              </a:rPr>
+              <a:t>関係の表は</a:t>
+            </a:r>
+            <a:pPr indent="0" marL="0">
+              <a:lnSpc>
+                <a:spcPct val="120000"/>
+              </a:lnSpc>
+              <a:buNone/>
+            </a:pPr>
+            <a:r>
+              <a:rPr lang="en-US" sz="1050" b="1" dirty="0">
+                <a:solidFill>
+                  <a:srgbClr val="222222"/>
+                </a:solidFill>
+                <a:latin typeface="Calibri" pitchFamily="34" charset="0"/>
+                <a:ea typeface="Calibri" pitchFamily="34" charset="-122"/>
+                <a:cs typeface="Calibri" pitchFamily="34" charset="-120"/>
+              </a:rPr>
+              <a:t>相関であって因果ではありません</a:t>
+            </a:r>
+            <a:pPr indent="0" marL="0">
+              <a:lnSpc>
+                <a:spcPct val="120000"/>
+              </a:lnSpc>
+              <a:buNone/>
+            </a:pPr>
+            <a:r>
+              <a:rPr lang="en-US" sz="1050" dirty="0">
+                <a:solidFill>
+                  <a:srgbClr val="222222"/>
+                </a:solidFill>
+                <a:latin typeface="Calibri" pitchFamily="34" charset="0"/>
+                <a:ea typeface="Calibri" pitchFamily="34" charset="-122"/>
+                <a:cs typeface="Calibri" pitchFamily="34" charset="-120"/>
+              </a:rPr>
+              <a:t>（もともと関心の高い方がたくさん回っている、とも読めます）。回答が少ないうちは数字が揺れるので、件数も一緒に見てください。</a:t>
+            </a:r>
+            <a:endParaRPr lang="en-US" sz="1050" dirty="0"/>
+          </a:p>
+        </p:txBody>
+      </p:sp>
+      <p:sp>
+        <p:nvSpPr>
+          <p:cNvPr id="30" name="Text 28"/>
           <p:cNvSpPr txBox="1"/>
           <p:nvPr/>
         </p:nvSpPr>
@@ -23659,720 +25565,15 @@
                 <a:ea typeface="Calibri" pitchFamily="34" charset="-122"/>
                 <a:cs typeface="Calibri" pitchFamily="34" charset="-120"/>
               </a:rPr>
-              <a:t>終了後4：メールアドレスを削除する</a:t>
+              <a:t>終了後3：集計データを受け取る（つづき）</a:t>
             </a:r>
             <a:endParaRPr lang="en-US" sz="2200" dirty="0"/>
-          </a:p>
-        </p:txBody>
-      </p:sp>
-      <p:sp>
-        <p:nvSpPr>
-          <p:cNvPr id="4" name="Text 2"/>
-          <p:cNvSpPr txBox="1"/>
-          <p:nvPr/>
-        </p:nvSpPr>
-        <p:spPr>
-          <a:xfrm>
-            <a:off x="566928" y="1481328"/>
-            <a:ext cx="6428232" cy="257429"/>
-          </a:xfrm>
-          <a:prstGeom prst="rect">
-            <a:avLst/>
-          </a:prstGeom>
-          <a:noFill/>
-          <a:ln/>
-        </p:spPr>
-        <p:txBody>
-          <a:bodyPr wrap="square" lIns="0" tIns="0" rIns="0" bIns="0" rtlCol="0" anchor="t"/>
-          <a:lstStyle/>
-          <a:p>
-            <a:pPr indent="0" marL="0">
-              <a:lnSpc>
-                <a:spcPct val="125000"/>
-              </a:lnSpc>
-              <a:buNone/>
-            </a:pPr>
-            <a:r>
-              <a:rPr lang="en-US" sz="1100" dirty="0">
-                <a:solidFill>
-                  <a:srgbClr val="222222"/>
-                </a:solidFill>
-                <a:latin typeface="Calibri" pitchFamily="34" charset="0"/>
-                <a:ea typeface="Calibri" pitchFamily="34" charset="-122"/>
-                <a:cs typeface="Calibri" pitchFamily="34" charset="-120"/>
-              </a:rPr>
-              <a:t>案内の送付と集計が終わったら、預かったメールアドレスを削除します。</a:t>
-            </a:r>
-            <a:endParaRPr lang="en-US" sz="1100" dirty="0"/>
-          </a:p>
-        </p:txBody>
-      </p:sp>
-      <p:sp>
-        <p:nvSpPr>
-          <p:cNvPr id="5" name="Shape 3"/>
-          <p:cNvSpPr/>
-          <p:nvPr/>
-        </p:nvSpPr>
-        <p:spPr>
-          <a:xfrm>
-            <a:off x="566928" y="1793621"/>
-            <a:ext cx="274320" cy="274320"/>
-          </a:xfrm>
-          <a:prstGeom prst="ellipse">
-            <a:avLst/>
-          </a:prstGeom>
-          <a:solidFill>
-            <a:srgbClr val="1E2761"/>
-          </a:solidFill>
-          <a:ln/>
-        </p:spPr>
-      </p:sp>
-      <p:sp>
-        <p:nvSpPr>
-          <p:cNvPr id="6" name="Text 4"/>
-          <p:cNvSpPr txBox="1"/>
-          <p:nvPr/>
-        </p:nvSpPr>
-        <p:spPr>
-          <a:xfrm>
-            <a:off x="566928" y="1793621"/>
-            <a:ext cx="274320" cy="274320"/>
-          </a:xfrm>
-          <a:prstGeom prst="rect">
-            <a:avLst/>
-          </a:prstGeom>
-          <a:noFill/>
-          <a:ln/>
-        </p:spPr>
-        <p:txBody>
-          <a:bodyPr wrap="square" lIns="0" tIns="0" rIns="0" bIns="0" rtlCol="0" anchor="ctr"/>
-          <a:lstStyle/>
-          <a:p>
-            <a:pPr algn="ctr" indent="0" marL="0">
-              <a:buNone/>
-            </a:pPr>
-            <a:r>
-              <a:rPr lang="en-US" sz="1100" b="1" dirty="0">
-                <a:solidFill>
-                  <a:srgbClr val="FFFFFF"/>
-                </a:solidFill>
-                <a:latin typeface="Calibri" pitchFamily="34" charset="0"/>
-                <a:ea typeface="Calibri" pitchFamily="34" charset="-122"/>
-                <a:cs typeface="Calibri" pitchFamily="34" charset="-120"/>
-              </a:rPr>
-              <a:t>1</a:t>
-            </a:r>
-            <a:endParaRPr lang="en-US" sz="1100" dirty="0"/>
-          </a:p>
-        </p:txBody>
-      </p:sp>
-      <p:sp>
-        <p:nvSpPr>
-          <p:cNvPr id="7" name="Text 5"/>
-          <p:cNvSpPr txBox="1"/>
-          <p:nvPr/>
-        </p:nvSpPr>
-        <p:spPr>
-          <a:xfrm>
-            <a:off x="969264" y="1775333"/>
-            <a:ext cx="6025896" cy="365760"/>
-          </a:xfrm>
-          <a:prstGeom prst="rect">
-            <a:avLst/>
-          </a:prstGeom>
-          <a:noFill/>
-          <a:ln/>
-        </p:spPr>
-        <p:txBody>
-          <a:bodyPr wrap="square" lIns="0" tIns="0" rIns="0" bIns="0" rtlCol="0" anchor="t"/>
-          <a:lstStyle/>
-          <a:p>
-            <a:pPr indent="0" marL="0">
-              <a:lnSpc>
-                <a:spcPct val="125000"/>
-              </a:lnSpc>
-              <a:buNone/>
-            </a:pPr>
-            <a:r>
-              <a:rPr lang="en-US" sz="1150" dirty="0">
-                <a:solidFill>
-                  <a:srgbClr val="222222"/>
-                </a:solidFill>
-                <a:latin typeface="Calibri" pitchFamily="34" charset="0"/>
-                <a:ea typeface="Calibri" pitchFamily="34" charset="-122"/>
-                <a:cs typeface="Calibri" pitchFamily="34" charset="-120"/>
-              </a:rPr>
-              <a:t>「総合アンケート」の画面を開く</a:t>
-            </a:r>
-            <a:endParaRPr lang="en-US" sz="1150" dirty="0"/>
-          </a:p>
-        </p:txBody>
-      </p:sp>
-      <p:sp>
-        <p:nvSpPr>
-          <p:cNvPr id="8" name="Shape 6"/>
-          <p:cNvSpPr/>
-          <p:nvPr/>
-        </p:nvSpPr>
-        <p:spPr>
-          <a:xfrm>
-            <a:off x="566928" y="2250821"/>
-            <a:ext cx="274320" cy="274320"/>
-          </a:xfrm>
-          <a:prstGeom prst="ellipse">
-            <a:avLst/>
-          </a:prstGeom>
-          <a:solidFill>
-            <a:srgbClr val="1E2761"/>
-          </a:solidFill>
-          <a:ln/>
-        </p:spPr>
-      </p:sp>
-      <p:sp>
-        <p:nvSpPr>
-          <p:cNvPr id="9" name="Text 7"/>
-          <p:cNvSpPr txBox="1"/>
-          <p:nvPr/>
-        </p:nvSpPr>
-        <p:spPr>
-          <a:xfrm>
-            <a:off x="566928" y="2250821"/>
-            <a:ext cx="274320" cy="274320"/>
-          </a:xfrm>
-          <a:prstGeom prst="rect">
-            <a:avLst/>
-          </a:prstGeom>
-          <a:noFill/>
-          <a:ln/>
-        </p:spPr>
-        <p:txBody>
-          <a:bodyPr wrap="square" lIns="0" tIns="0" rIns="0" bIns="0" rtlCol="0" anchor="ctr"/>
-          <a:lstStyle/>
-          <a:p>
-            <a:pPr algn="ctr" indent="0" marL="0">
-              <a:buNone/>
-            </a:pPr>
-            <a:r>
-              <a:rPr lang="en-US" sz="1100" b="1" dirty="0">
-                <a:solidFill>
-                  <a:srgbClr val="FFFFFF"/>
-                </a:solidFill>
-                <a:latin typeface="Calibri" pitchFamily="34" charset="0"/>
-                <a:ea typeface="Calibri" pitchFamily="34" charset="-122"/>
-                <a:cs typeface="Calibri" pitchFamily="34" charset="-120"/>
-              </a:rPr>
-              <a:t>2</a:t>
-            </a:r>
-            <a:endParaRPr lang="en-US" sz="1100" dirty="0"/>
-          </a:p>
-        </p:txBody>
-      </p:sp>
-      <p:sp>
-        <p:nvSpPr>
-          <p:cNvPr id="10" name="Text 8"/>
-          <p:cNvSpPr txBox="1"/>
-          <p:nvPr/>
-        </p:nvSpPr>
-        <p:spPr>
-          <a:xfrm>
-            <a:off x="969264" y="2232533"/>
-            <a:ext cx="6025896" cy="365760"/>
-          </a:xfrm>
-          <a:prstGeom prst="rect">
-            <a:avLst/>
-          </a:prstGeom>
-          <a:noFill/>
-          <a:ln/>
-        </p:spPr>
-        <p:txBody>
-          <a:bodyPr wrap="square" lIns="0" tIns="0" rIns="0" bIns="0" rtlCol="0" anchor="t"/>
-          <a:lstStyle/>
-          <a:p>
-            <a:pPr indent="0" marL="0">
-              <a:lnSpc>
-                <a:spcPct val="125000"/>
-              </a:lnSpc>
-              <a:buNone/>
-            </a:pPr>
-            <a:r>
-              <a:rPr lang="en-US" sz="1150" dirty="0">
-                <a:solidFill>
-                  <a:srgbClr val="222222"/>
-                </a:solidFill>
-                <a:latin typeface="Calibri" pitchFamily="34" charset="0"/>
-                <a:ea typeface="Calibri" pitchFamily="34" charset="-122"/>
-                <a:cs typeface="Calibri" pitchFamily="34" charset="-120"/>
-              </a:rPr>
-              <a:t>一番下の</a:t>
-            </a:r>
-            <a:pPr indent="0" marL="0">
-              <a:lnSpc>
-                <a:spcPct val="125000"/>
-              </a:lnSpc>
-              <a:buNone/>
-            </a:pPr>
-            <a:r>
-              <a:rPr lang="en-US" sz="1150" b="1" dirty="0">
-                <a:solidFill>
-                  <a:srgbClr val="222222"/>
-                </a:solidFill>
-                <a:latin typeface="Calibri" pitchFamily="34" charset="0"/>
-                <a:ea typeface="Calibri" pitchFamily="34" charset="-122"/>
-                <a:cs typeface="Calibri" pitchFamily="34" charset="-120"/>
-              </a:rPr>
-              <a:t>「メールアドレスを削除する」</a:t>
-            </a:r>
-            <a:pPr indent="0" marL="0">
-              <a:lnSpc>
-                <a:spcPct val="125000"/>
-              </a:lnSpc>
-              <a:buNone/>
-            </a:pPr>
-            <a:r>
-              <a:rPr lang="en-US" sz="1150" dirty="0">
-                <a:solidFill>
-                  <a:srgbClr val="222222"/>
-                </a:solidFill>
-                <a:latin typeface="Calibri" pitchFamily="34" charset="0"/>
-                <a:ea typeface="Calibri" pitchFamily="34" charset="-122"/>
-                <a:cs typeface="Calibri" pitchFamily="34" charset="-120"/>
-              </a:rPr>
-              <a:t>を押す</a:t>
-            </a:r>
-            <a:endParaRPr lang="en-US" sz="1150" dirty="0"/>
-          </a:p>
-        </p:txBody>
-      </p:sp>
-      <p:sp>
-        <p:nvSpPr>
-          <p:cNvPr id="11" name="Shape 9"/>
-          <p:cNvSpPr/>
-          <p:nvPr/>
-        </p:nvSpPr>
-        <p:spPr>
-          <a:xfrm>
-            <a:off x="566928" y="2708021"/>
-            <a:ext cx="274320" cy="274320"/>
-          </a:xfrm>
-          <a:prstGeom prst="ellipse">
-            <a:avLst/>
-          </a:prstGeom>
-          <a:solidFill>
-            <a:srgbClr val="1E2761"/>
-          </a:solidFill>
-          <a:ln/>
-        </p:spPr>
-      </p:sp>
-      <p:sp>
-        <p:nvSpPr>
-          <p:cNvPr id="12" name="Text 10"/>
-          <p:cNvSpPr txBox="1"/>
-          <p:nvPr/>
-        </p:nvSpPr>
-        <p:spPr>
-          <a:xfrm>
-            <a:off x="566928" y="2708021"/>
-            <a:ext cx="274320" cy="274320"/>
-          </a:xfrm>
-          <a:prstGeom prst="rect">
-            <a:avLst/>
-          </a:prstGeom>
-          <a:noFill/>
-          <a:ln/>
-        </p:spPr>
-        <p:txBody>
-          <a:bodyPr wrap="square" lIns="0" tIns="0" rIns="0" bIns="0" rtlCol="0" anchor="ctr"/>
-          <a:lstStyle/>
-          <a:p>
-            <a:pPr algn="ctr" indent="0" marL="0">
-              <a:buNone/>
-            </a:pPr>
-            <a:r>
-              <a:rPr lang="en-US" sz="1100" b="1" dirty="0">
-                <a:solidFill>
-                  <a:srgbClr val="FFFFFF"/>
-                </a:solidFill>
-                <a:latin typeface="Calibri" pitchFamily="34" charset="0"/>
-                <a:ea typeface="Calibri" pitchFamily="34" charset="-122"/>
-                <a:cs typeface="Calibri" pitchFamily="34" charset="-120"/>
-              </a:rPr>
-              <a:t>3</a:t>
-            </a:r>
-            <a:endParaRPr lang="en-US" sz="1100" dirty="0"/>
-          </a:p>
-        </p:txBody>
-      </p:sp>
-      <p:sp>
-        <p:nvSpPr>
-          <p:cNvPr id="13" name="Text 11"/>
-          <p:cNvSpPr txBox="1"/>
-          <p:nvPr/>
-        </p:nvSpPr>
-        <p:spPr>
-          <a:xfrm>
-            <a:off x="969264" y="2689733"/>
-            <a:ext cx="6025896" cy="365760"/>
-          </a:xfrm>
-          <a:prstGeom prst="rect">
-            <a:avLst/>
-          </a:prstGeom>
-          <a:noFill/>
-          <a:ln/>
-        </p:spPr>
-        <p:txBody>
-          <a:bodyPr wrap="square" lIns="0" tIns="0" rIns="0" bIns="0" rtlCol="0" anchor="t"/>
-          <a:lstStyle/>
-          <a:p>
-            <a:pPr indent="0" marL="0">
-              <a:lnSpc>
-                <a:spcPct val="125000"/>
-              </a:lnSpc>
-              <a:buNone/>
-            </a:pPr>
-            <a:r>
-              <a:rPr lang="en-US" sz="1150" dirty="0">
-                <a:solidFill>
-                  <a:srgbClr val="222222"/>
-                </a:solidFill>
-                <a:latin typeface="Calibri" pitchFamily="34" charset="0"/>
-                <a:ea typeface="Calibri" pitchFamily="34" charset="-122"/>
-                <a:cs typeface="Calibri" pitchFamily="34" charset="-120"/>
-              </a:rPr>
-              <a:t>確認メッセージで「OK」を押す</a:t>
-            </a:r>
-            <a:endParaRPr lang="en-US" sz="1150" dirty="0"/>
-          </a:p>
-        </p:txBody>
-      </p:sp>
-      <p:sp>
-        <p:nvSpPr>
-          <p:cNvPr id="14" name="Text 12"/>
-          <p:cNvSpPr txBox="1"/>
-          <p:nvPr/>
-        </p:nvSpPr>
-        <p:spPr>
-          <a:xfrm>
-            <a:off x="566928" y="3146933"/>
-            <a:ext cx="6428232" cy="257429"/>
-          </a:xfrm>
-          <a:prstGeom prst="rect">
-            <a:avLst/>
-          </a:prstGeom>
-          <a:noFill/>
-          <a:ln/>
-        </p:spPr>
-        <p:txBody>
-          <a:bodyPr wrap="square" lIns="0" tIns="0" rIns="0" bIns="0" rtlCol="0" anchor="t"/>
-          <a:lstStyle/>
-          <a:p>
-            <a:pPr indent="0" marL="0">
-              <a:lnSpc>
-                <a:spcPct val="125000"/>
-              </a:lnSpc>
-              <a:buNone/>
-            </a:pPr>
-            <a:r>
-              <a:rPr lang="en-US" sz="1100" dirty="0">
-                <a:solidFill>
-                  <a:srgbClr val="222222"/>
-                </a:solidFill>
-                <a:latin typeface="Calibri" pitchFamily="34" charset="0"/>
-                <a:ea typeface="Calibri" pitchFamily="34" charset="-122"/>
-                <a:cs typeface="Calibri" pitchFamily="34" charset="-120"/>
-              </a:rPr>
-              <a:t>削除しても、</a:t>
-            </a:r>
-            <a:pPr indent="0" marL="0">
-              <a:lnSpc>
-                <a:spcPct val="125000"/>
-              </a:lnSpc>
-              <a:buNone/>
-            </a:pPr>
-            <a:r>
-              <a:rPr lang="en-US" sz="1100" b="1" dirty="0">
-                <a:solidFill>
-                  <a:srgbClr val="222222"/>
-                </a:solidFill>
-                <a:latin typeface="Calibri" pitchFamily="34" charset="0"/>
-                <a:ea typeface="Calibri" pitchFamily="34" charset="-122"/>
-                <a:cs typeface="Calibri" pitchFamily="34" charset="-120"/>
-              </a:rPr>
-              <a:t>回答データ（個人情報を含まないもの）は残ります</a:t>
-            </a:r>
-            <a:pPr indent="0" marL="0">
-              <a:lnSpc>
-                <a:spcPct val="125000"/>
-              </a:lnSpc>
-              <a:buNone/>
-            </a:pPr>
-            <a:r>
-              <a:rPr lang="en-US" sz="1100" dirty="0">
-                <a:solidFill>
-                  <a:srgbClr val="222222"/>
-                </a:solidFill>
-                <a:latin typeface="Calibri" pitchFamily="34" charset="0"/>
-                <a:ea typeface="Calibri" pitchFamily="34" charset="-122"/>
-                <a:cs typeface="Calibri" pitchFamily="34" charset="-120"/>
-              </a:rPr>
-              <a:t>。</a:t>
-            </a:r>
-            <a:endParaRPr lang="en-US" sz="1100" dirty="0"/>
-          </a:p>
-        </p:txBody>
-      </p:sp>
-      <p:sp>
-        <p:nvSpPr>
-          <p:cNvPr id="15" name="Shape 13"/>
-          <p:cNvSpPr/>
-          <p:nvPr/>
-        </p:nvSpPr>
-        <p:spPr>
-          <a:xfrm>
-            <a:off x="566928" y="3440938"/>
-            <a:ext cx="6428232" cy="624459"/>
-          </a:xfrm>
-          <a:prstGeom prst="roundRect">
-            <a:avLst>
-              <a:gd name="adj" fmla="val 8786"/>
-            </a:avLst>
-          </a:prstGeom>
-          <a:solidFill>
-            <a:srgbClr val="FDF0E6"/>
-          </a:solidFill>
-          <a:ln w="9525">
-            <a:solidFill>
-              <a:srgbClr val="E08A3C"/>
-            </a:solidFill>
-            <a:prstDash val="solid"/>
-          </a:ln>
-        </p:spPr>
-      </p:sp>
-      <p:sp>
-        <p:nvSpPr>
-          <p:cNvPr id="16" name="Text 14"/>
-          <p:cNvSpPr txBox="1"/>
-          <p:nvPr/>
-        </p:nvSpPr>
-        <p:spPr>
-          <a:xfrm>
-            <a:off x="658368" y="3532378"/>
-            <a:ext cx="237744" cy="237744"/>
-          </a:xfrm>
-          <a:prstGeom prst="rect">
-            <a:avLst/>
-          </a:prstGeom>
-          <a:noFill/>
-          <a:ln/>
-        </p:spPr>
-        <p:txBody>
-          <a:bodyPr wrap="square" lIns="0" tIns="0" rIns="0" bIns="0" rtlCol="0" anchor="ctr"/>
-          <a:lstStyle/>
-          <a:p>
-            <a:pPr algn="ctr" indent="0" marL="0">
-              <a:buNone/>
-            </a:pPr>
-            <a:r>
-              <a:rPr lang="en-US" sz="1200" b="1" dirty="0">
-                <a:solidFill>
-                  <a:srgbClr val="C25A17"/>
-                </a:solidFill>
-                <a:latin typeface="Calibri" pitchFamily="34" charset="0"/>
-                <a:ea typeface="Calibri" pitchFamily="34" charset="-122"/>
-                <a:cs typeface="Calibri" pitchFamily="34" charset="-120"/>
-              </a:rPr>
-              <a:t>！</a:t>
-            </a:r>
-            <a:endParaRPr lang="en-US" sz="1200" dirty="0"/>
-          </a:p>
-        </p:txBody>
-      </p:sp>
-      <p:sp>
-        <p:nvSpPr>
-          <p:cNvPr id="17" name="Text 15"/>
-          <p:cNvSpPr txBox="1"/>
-          <p:nvPr/>
-        </p:nvSpPr>
-        <p:spPr>
-          <a:xfrm>
-            <a:off x="950976" y="3550666"/>
-            <a:ext cx="5925312" cy="441579"/>
-          </a:xfrm>
-          <a:prstGeom prst="rect">
-            <a:avLst/>
-          </a:prstGeom>
-          <a:noFill/>
-          <a:ln/>
-        </p:spPr>
-        <p:txBody>
-          <a:bodyPr wrap="square" lIns="0" tIns="0" rIns="0" bIns="0" rtlCol="0" anchor="t"/>
-          <a:lstStyle/>
-          <a:p>
-            <a:pPr indent="0" marL="0">
-              <a:lnSpc>
-                <a:spcPct val="120000"/>
-              </a:lnSpc>
-              <a:buNone/>
-            </a:pPr>
-            <a:r>
-              <a:rPr lang="en-US" sz="1050" dirty="0">
-                <a:solidFill>
-                  <a:srgbClr val="222222"/>
-                </a:solidFill>
-                <a:latin typeface="Calibri" pitchFamily="34" charset="0"/>
-                <a:ea typeface="Calibri" pitchFamily="34" charset="-122"/>
-                <a:cs typeface="Calibri" pitchFamily="34" charset="-120"/>
-              </a:rPr>
-              <a:t>削除すると、未送信ぶんの案内メールは送れなくなります。</a:t>
-            </a:r>
-            <a:pPr indent="0" marL="0">
-              <a:lnSpc>
-                <a:spcPct val="120000"/>
-              </a:lnSpc>
-              <a:buNone/>
-            </a:pPr>
-            <a:r>
-              <a:rPr lang="en-US" sz="1050" b="1" dirty="0">
-                <a:solidFill>
-                  <a:srgbClr val="222222"/>
-                </a:solidFill>
-                <a:latin typeface="Calibri" pitchFamily="34" charset="0"/>
-                <a:ea typeface="Calibri" pitchFamily="34" charset="-122"/>
-                <a:cs typeface="Calibri" pitchFamily="34" charset="-120"/>
-              </a:rPr>
-              <a:t>送信と集計が完全に終わってから</a:t>
-            </a:r>
-            <a:pPr indent="0" marL="0">
-              <a:lnSpc>
-                <a:spcPct val="120000"/>
-              </a:lnSpc>
-              <a:buNone/>
-            </a:pPr>
-            <a:r>
-              <a:rPr lang="en-US" sz="1050" dirty="0">
-                <a:solidFill>
-                  <a:srgbClr val="222222"/>
-                </a:solidFill>
-                <a:latin typeface="Calibri" pitchFamily="34" charset="0"/>
-                <a:ea typeface="Calibri" pitchFamily="34" charset="-122"/>
-                <a:cs typeface="Calibri" pitchFamily="34" charset="-120"/>
-              </a:rPr>
-              <a:t>実行してください。</a:t>
-            </a:r>
-            <a:endParaRPr lang="en-US" sz="1050" dirty="0"/>
-          </a:p>
-        </p:txBody>
-      </p:sp>
-      <p:sp>
-        <p:nvSpPr>
-          <p:cNvPr id="18" name="Shape 16"/>
-          <p:cNvSpPr/>
-          <p:nvPr/>
-        </p:nvSpPr>
-        <p:spPr>
-          <a:xfrm>
-            <a:off x="566928" y="4138549"/>
-            <a:ext cx="6428232" cy="624459"/>
-          </a:xfrm>
-          <a:prstGeom prst="roundRect">
-            <a:avLst>
-              <a:gd name="adj" fmla="val 8786"/>
-            </a:avLst>
-          </a:prstGeom>
-          <a:solidFill>
-            <a:srgbClr val="E8ECF8"/>
-          </a:solidFill>
-          <a:ln w="9525">
-            <a:solidFill>
-              <a:srgbClr val="1E2761"/>
-            </a:solidFill>
-            <a:prstDash val="solid"/>
-          </a:ln>
-        </p:spPr>
-      </p:sp>
-      <p:sp>
-        <p:nvSpPr>
-          <p:cNvPr id="19" name="Text 17"/>
-          <p:cNvSpPr txBox="1"/>
-          <p:nvPr/>
-        </p:nvSpPr>
-        <p:spPr>
-          <a:xfrm>
-            <a:off x="658368" y="4229989"/>
-            <a:ext cx="237744" cy="237744"/>
-          </a:xfrm>
-          <a:prstGeom prst="rect">
-            <a:avLst/>
-          </a:prstGeom>
-          <a:noFill/>
-          <a:ln/>
-        </p:spPr>
-        <p:txBody>
-          <a:bodyPr wrap="square" lIns="0" tIns="0" rIns="0" bIns="0" rtlCol="0" anchor="ctr"/>
-          <a:lstStyle/>
-          <a:p>
-            <a:pPr algn="ctr" indent="0" marL="0">
-              <a:buNone/>
-            </a:pPr>
-            <a:r>
-              <a:rPr lang="en-US" sz="1200" b="1" dirty="0">
-                <a:solidFill>
-                  <a:srgbClr val="1E2761"/>
-                </a:solidFill>
-                <a:latin typeface="Calibri" pitchFamily="34" charset="0"/>
-                <a:ea typeface="Calibri" pitchFamily="34" charset="-122"/>
-                <a:cs typeface="Calibri" pitchFamily="34" charset="-120"/>
-              </a:rPr>
-              <a:t>i</a:t>
-            </a:r>
-            <a:endParaRPr lang="en-US" sz="1200" dirty="0"/>
-          </a:p>
-        </p:txBody>
-      </p:sp>
-      <p:sp>
-        <p:nvSpPr>
-          <p:cNvPr id="20" name="Text 18"/>
-          <p:cNvSpPr txBox="1"/>
-          <p:nvPr/>
-        </p:nvSpPr>
-        <p:spPr>
-          <a:xfrm>
-            <a:off x="950976" y="4248277"/>
-            <a:ext cx="5925312" cy="441579"/>
-          </a:xfrm>
-          <a:prstGeom prst="rect">
-            <a:avLst/>
-          </a:prstGeom>
-          <a:noFill/>
-          <a:ln/>
-        </p:spPr>
-        <p:txBody>
-          <a:bodyPr wrap="square" lIns="0" tIns="0" rIns="0" bIns="0" rtlCol="0" anchor="t"/>
-          <a:lstStyle/>
-          <a:p>
-            <a:pPr indent="0" marL="0">
-              <a:lnSpc>
-                <a:spcPct val="120000"/>
-              </a:lnSpc>
-              <a:buNone/>
-            </a:pPr>
-            <a:r>
-              <a:rPr lang="en-US" sz="1050" dirty="0">
-                <a:solidFill>
-                  <a:srgbClr val="222222"/>
-                </a:solidFill>
-                <a:latin typeface="Calibri" pitchFamily="34" charset="0"/>
-                <a:ea typeface="Calibri" pitchFamily="34" charset="-122"/>
-                <a:cs typeface="Calibri" pitchFamily="34" charset="-120"/>
-              </a:rPr>
-              <a:t>「氏名・住所は収集せず、メールアドレスも送付・集計後に削除する」という運用方針に沿った操作です。来場者にもその旨を案内しています。</a:t>
-            </a:r>
-            <a:endParaRPr lang="en-US" sz="1050" dirty="0"/>
           </a:p>
         </p:txBody>
       </p:sp>
       <p:pic>
         <p:nvPicPr>
-          <p:cNvPr id="21" name="Image 0" descr="C:\Users\sato\Desktop\enque\docs\images\o-purge.png">    </p:cNvPr>
+          <p:cNvPr id="4" name="Image 0" descr="C:\Users\sato\Desktop\enque\docs\images\o-overall-stats.png">    </p:cNvPr>
           <p:cNvPicPr>
             <a:picLocks noChangeAspect="1"/>
           </p:cNvPicPr>
@@ -24386,8 +25587,8 @@
         </p:blipFill>
         <p:spPr>
           <a:xfrm>
-            <a:off x="936779" y="4836160"/>
-            <a:ext cx="5688531" cy="3474720"/>
+            <a:off x="1248911" y="1481328"/>
+            <a:ext cx="5064265" cy="3474720"/>
           </a:xfrm>
           <a:prstGeom prst="rect">
             <a:avLst/>
@@ -24396,13 +25597,13 @@
       </p:pic>
       <p:sp>
         <p:nvSpPr>
-          <p:cNvPr id="22" name="Text 19"/>
-          <p:cNvSpPr txBox="1"/>
-          <p:nvPr/>
-        </p:nvSpPr>
-        <p:spPr>
-          <a:xfrm>
-            <a:off x="566928" y="8365744"/>
+          <p:cNvPr id="5" name="Text 2"/>
+          <p:cNvSpPr txBox="1"/>
+          <p:nvPr/>
+        </p:nvSpPr>
+        <p:spPr>
+          <a:xfrm>
+            <a:off x="566928" y="5010912"/>
             <a:ext cx="6428232" cy="274320"/>
           </a:xfrm>
           <a:prstGeom prst="rect">
@@ -24427,15 +25628,78 @@
                 <a:ea typeface="Calibri" pitchFamily="34" charset="-122"/>
                 <a:cs typeface="Calibri" pitchFamily="34" charset="-120"/>
               </a:rPr>
-              <a:t>「メールアドレスを削除する」ボタンの周辺（説明文が見えるもの）。</a:t>
+              <a:t>「総合アンケートの集計」画面の上部（回答数・回答率のタイルが見えるもの）。</a:t>
             </a:r>
             <a:endParaRPr lang="en-US" sz="950" dirty="0"/>
           </a:p>
         </p:txBody>
       </p:sp>
-      <p:sp>
-        <p:nvSpPr>
-          <p:cNvPr id="23" name="Text 20"/>
+      <p:pic>
+        <p:nvPicPr>
+          <p:cNvPr id="6" name="Image 1" descr="C:\Users\sato\Desktop\enque\docs\images\o-overall-cross.png">    </p:cNvPr>
+          <p:cNvPicPr>
+            <a:picLocks noChangeAspect="1"/>
+          </p:cNvPicPr>
+          <p:nvPr/>
+        </p:nvPicPr>
+        <p:blipFill>
+          <a:blip r:embed="rId2"/>
+          <a:stretch>
+            <a:fillRect/>
+          </a:stretch>
+        </p:blipFill>
+        <p:spPr>
+          <a:xfrm>
+            <a:off x="1075432" y="5340096"/>
+            <a:ext cx="5411224" cy="3474720"/>
+          </a:xfrm>
+          <a:prstGeom prst="rect">
+            <a:avLst/>
+          </a:prstGeom>
+        </p:spPr>
+      </p:pic>
+      <p:sp>
+        <p:nvSpPr>
+          <p:cNvPr id="7" name="Text 3"/>
+          <p:cNvSpPr txBox="1"/>
+          <p:nvPr/>
+        </p:nvSpPr>
+        <p:spPr>
+          <a:xfrm>
+            <a:off x="566928" y="8869680"/>
+            <a:ext cx="6428232" cy="274320"/>
+          </a:xfrm>
+          <a:prstGeom prst="rect">
+            <a:avLst/>
+          </a:prstGeom>
+          <a:noFill/>
+          <a:ln/>
+        </p:spPr>
+        <p:txBody>
+          <a:bodyPr wrap="square" lIns="0" tIns="0" rIns="0" bIns="0" rtlCol="0" anchor="ctr"/>
+          <a:lstStyle/>
+          <a:p>
+            <a:pPr algn="ctr" indent="0" marL="0">
+              <a:buNone/>
+            </a:pPr>
+            <a:r>
+              <a:rPr lang="en-US" sz="950" dirty="0">
+                <a:solidFill>
+                  <a:srgbClr val="6B6B6B"/>
+                </a:solidFill>
+                <a:latin typeface="Calibri" pitchFamily="34" charset="0"/>
+                <a:ea typeface="Calibri" pitchFamily="34" charset="-122"/>
+                <a:cs typeface="Calibri" pitchFamily="34" charset="-120"/>
+              </a:rPr>
+              <a:t>「総合アンケートの集計」画面の「周回企業数との関係」「来場人数との関係」の表。</a:t>
+            </a:r>
+            <a:endParaRPr lang="en-US" sz="950" dirty="0"/>
+          </a:p>
+        </p:txBody>
+      </p:sp>
+      <p:sp>
+        <p:nvSpPr>
+          <p:cNvPr id="8" name="Text 4"/>
           <p:cNvSpPr txBox="1"/>
           <p:nvPr/>
         </p:nvSpPr>
@@ -24576,433 +25840,46 @@
                 <a:ea typeface="Calibri" pitchFamily="34" charset="-122"/>
                 <a:cs typeface="Calibri" pitchFamily="34" charset="-120"/>
               </a:rPr>
-              <a:t>次のイベントに向けて（データの整理）</a:t>
+              <a:t>終了後3：集計データを受け取る（つづき）</a:t>
             </a:r>
             <a:endParaRPr lang="en-US" sz="2200" dirty="0"/>
           </a:p>
         </p:txBody>
       </p:sp>
-      <p:sp>
-        <p:nvSpPr>
-          <p:cNvPr id="4" name="Text 2"/>
-          <p:cNvSpPr txBox="1"/>
-          <p:nvPr/>
-        </p:nvSpPr>
-        <p:spPr>
-          <a:xfrm>
-            <a:off x="566928" y="1481328"/>
-            <a:ext cx="6428232" cy="459994"/>
-          </a:xfrm>
-          <a:prstGeom prst="rect">
-            <a:avLst/>
-          </a:prstGeom>
-          <a:noFill/>
-          <a:ln/>
-        </p:spPr>
-        <p:txBody>
-          <a:bodyPr wrap="square" lIns="0" tIns="0" rIns="0" bIns="0" rtlCol="0" anchor="t"/>
-          <a:lstStyle/>
-          <a:p>
-            <a:pPr indent="0" marL="0">
-              <a:lnSpc>
-                <a:spcPct val="125000"/>
-              </a:lnSpc>
-              <a:buNone/>
-            </a:pPr>
-            <a:r>
-              <a:rPr lang="en-US" sz="1100" dirty="0">
-                <a:solidFill>
-                  <a:srgbClr val="222222"/>
-                </a:solidFill>
-                <a:latin typeface="Calibri" pitchFamily="34" charset="0"/>
-                <a:ea typeface="Calibri" pitchFamily="34" charset="-122"/>
-                <a:cs typeface="Calibri" pitchFamily="34" charset="-120"/>
-              </a:rPr>
-              <a:t>サーバーで次のコマンドを実行します（事務局のPCではなく、システムが動いているサーバーでの作業です）。</a:t>
-            </a:r>
-            <a:endParaRPr lang="en-US" sz="1100" dirty="0"/>
-          </a:p>
-        </p:txBody>
-      </p:sp>
-      <p:sp>
-        <p:nvSpPr>
-          <p:cNvPr id="5" name="Text 3"/>
-          <p:cNvSpPr txBox="1"/>
-          <p:nvPr/>
-        </p:nvSpPr>
-        <p:spPr>
-          <a:xfrm>
-            <a:off x="566928" y="2087626"/>
-            <a:ext cx="6428232" cy="257810"/>
-          </a:xfrm>
-          <a:prstGeom prst="rect">
-            <a:avLst/>
-          </a:prstGeom>
-          <a:noFill/>
-          <a:ln/>
-        </p:spPr>
-        <p:txBody>
-          <a:bodyPr wrap="square" lIns="0" tIns="0" rIns="0" bIns="0" rtlCol="0" anchor="t"/>
-          <a:lstStyle/>
-          <a:p>
-            <a:pPr indent="0" marL="0">
-              <a:buNone/>
-            </a:pPr>
-            <a:r>
-              <a:rPr lang="en-US" sz="1400" b="1" dirty="0">
-                <a:solidFill>
-                  <a:srgbClr val="1E2761"/>
-                </a:solidFill>
-                <a:latin typeface="Calibri" pitchFamily="34" charset="0"/>
-                <a:ea typeface="Calibri" pitchFamily="34" charset="-122"/>
-                <a:cs typeface="Calibri" pitchFamily="34" charset="-120"/>
-              </a:rPr>
-              <a:t>テストで入れた回答だけ消したいとき</a:t>
-            </a:r>
-            <a:endParaRPr lang="en-US" sz="1400" dirty="0"/>
-          </a:p>
-        </p:txBody>
-      </p:sp>
-      <p:sp>
-        <p:nvSpPr>
-          <p:cNvPr id="6" name="Text 4"/>
-          <p:cNvSpPr txBox="1"/>
-          <p:nvPr/>
-        </p:nvSpPr>
-        <p:spPr>
-          <a:xfrm>
-            <a:off x="566928" y="2418588"/>
-            <a:ext cx="6428232" cy="257429"/>
-          </a:xfrm>
-          <a:prstGeom prst="rect">
-            <a:avLst/>
-          </a:prstGeom>
-          <a:noFill/>
-          <a:ln/>
-        </p:spPr>
-        <p:txBody>
-          <a:bodyPr wrap="square" lIns="0" tIns="0" rIns="0" bIns="0" rtlCol="0" anchor="t"/>
-          <a:lstStyle/>
-          <a:p>
-            <a:pPr indent="0" marL="0">
-              <a:lnSpc>
-                <a:spcPct val="125000"/>
-              </a:lnSpc>
-              <a:buNone/>
-            </a:pPr>
-            <a:r>
-              <a:rPr lang="en-US" sz="1100" dirty="0">
-                <a:solidFill>
-                  <a:srgbClr val="222222"/>
-                </a:solidFill>
-                <a:latin typeface="Calibri" pitchFamily="34" charset="0"/>
-                <a:ea typeface="Calibri" pitchFamily="34" charset="-122"/>
-                <a:cs typeface="Calibri" pitchFamily="34" charset="-120"/>
-              </a:rPr>
-              <a:t>まず件数を確認し、問題なければ実行します。</a:t>
-            </a:r>
-            <a:endParaRPr lang="en-US" sz="1100" dirty="0"/>
-          </a:p>
-        </p:txBody>
-      </p:sp>
-      <p:sp>
-        <p:nvSpPr>
-          <p:cNvPr id="7" name="Text 5"/>
-          <p:cNvSpPr txBox="1"/>
-          <p:nvPr/>
-        </p:nvSpPr>
-        <p:spPr>
-          <a:xfrm>
-            <a:off x="713232" y="2712593"/>
-            <a:ext cx="6281928" cy="257429"/>
-          </a:xfrm>
-          <a:prstGeom prst="rect">
-            <a:avLst/>
-          </a:prstGeom>
-          <a:noFill/>
-          <a:ln/>
-        </p:spPr>
-        <p:txBody>
-          <a:bodyPr wrap="square" lIns="0" tIns="0" rIns="0" bIns="0" rtlCol="0" anchor="t"/>
-          <a:lstStyle/>
-          <a:p>
-            <a:pPr marL="342900" indent="-342900">
-              <a:lnSpc>
-                <a:spcPct val="125000"/>
-              </a:lnSpc>
-              <a:buSzPct val="100000"/>
-              <a:buChar char="●"/>
-            </a:pPr>
-            <a:r>
-              <a:rPr lang="en-US" sz="1100" dirty="0">
-                <a:solidFill>
-                  <a:srgbClr val="222222"/>
-                </a:solidFill>
-                <a:latin typeface="Calibri" pitchFamily="34" charset="0"/>
-                <a:ea typeface="Calibri" pitchFamily="34" charset="-122"/>
-                <a:cs typeface="Calibri" pitchFamily="34" charset="-120"/>
-              </a:rPr>
-              <a:t>確認：</a:t>
-            </a:r>
-            <a:pPr indent="0" marL="0">
-              <a:lnSpc>
-                <a:spcPct val="125000"/>
-              </a:lnSpc>
-              <a:buNone/>
-            </a:pPr>
-            <a:r>
-              <a:rPr lang="en-US" sz="1045" dirty="0">
-                <a:solidFill>
-                  <a:srgbClr val="222222"/>
-                </a:solidFill>
-                <a:latin typeface="Courier New" pitchFamily="34" charset="0"/>
-                <a:ea typeface="Courier New" pitchFamily="34" charset="-122"/>
-                <a:cs typeface="Courier New" pitchFamily="34" charset="-120"/>
-              </a:rPr>
-              <a:t>bin/reset.sh --responses --dry-run</a:t>
-            </a:r>
-            <a:endParaRPr lang="en-US" sz="1100" dirty="0"/>
-          </a:p>
-        </p:txBody>
-      </p:sp>
-      <p:sp>
-        <p:nvSpPr>
-          <p:cNvPr id="8" name="Text 6"/>
-          <p:cNvSpPr txBox="1"/>
-          <p:nvPr/>
-        </p:nvSpPr>
-        <p:spPr>
-          <a:xfrm>
-            <a:off x="713232" y="2988310"/>
-            <a:ext cx="6281928" cy="257429"/>
-          </a:xfrm>
-          <a:prstGeom prst="rect">
-            <a:avLst/>
-          </a:prstGeom>
-          <a:noFill/>
-          <a:ln/>
-        </p:spPr>
-        <p:txBody>
-          <a:bodyPr wrap="square" lIns="0" tIns="0" rIns="0" bIns="0" rtlCol="0" anchor="t"/>
-          <a:lstStyle/>
-          <a:p>
-            <a:pPr marL="342900" indent="-342900">
-              <a:lnSpc>
-                <a:spcPct val="125000"/>
-              </a:lnSpc>
-              <a:buSzPct val="100000"/>
-              <a:buChar char="●"/>
-            </a:pPr>
-            <a:r>
-              <a:rPr lang="en-US" sz="1100" dirty="0">
-                <a:solidFill>
-                  <a:srgbClr val="222222"/>
-                </a:solidFill>
-                <a:latin typeface="Calibri" pitchFamily="34" charset="0"/>
-                <a:ea typeface="Calibri" pitchFamily="34" charset="-122"/>
-                <a:cs typeface="Calibri" pitchFamily="34" charset="-120"/>
-              </a:rPr>
-              <a:t>実行：</a:t>
-            </a:r>
-            <a:pPr indent="0" marL="0">
-              <a:lnSpc>
-                <a:spcPct val="125000"/>
-              </a:lnSpc>
-              <a:buNone/>
-            </a:pPr>
-            <a:r>
-              <a:rPr lang="en-US" sz="1045" dirty="0">
-                <a:solidFill>
-                  <a:srgbClr val="222222"/>
-                </a:solidFill>
-                <a:latin typeface="Courier New" pitchFamily="34" charset="0"/>
-                <a:ea typeface="Courier New" pitchFamily="34" charset="-122"/>
-                <a:cs typeface="Courier New" pitchFamily="34" charset="-120"/>
-              </a:rPr>
-              <a:t>bin/reset.sh --responses --force</a:t>
-            </a:r>
-            <a:endParaRPr lang="en-US" sz="1100" dirty="0"/>
-          </a:p>
-        </p:txBody>
-      </p:sp>
-      <p:sp>
-        <p:nvSpPr>
-          <p:cNvPr id="9" name="Text 7"/>
-          <p:cNvSpPr txBox="1"/>
-          <p:nvPr/>
-        </p:nvSpPr>
-        <p:spPr>
-          <a:xfrm>
-            <a:off x="566928" y="3264027"/>
-            <a:ext cx="6428232" cy="257429"/>
-          </a:xfrm>
-          <a:prstGeom prst="rect">
-            <a:avLst/>
-          </a:prstGeom>
-          <a:noFill/>
-          <a:ln/>
-        </p:spPr>
-        <p:txBody>
-          <a:bodyPr wrap="square" lIns="0" tIns="0" rIns="0" bIns="0" rtlCol="0" anchor="t"/>
-          <a:lstStyle/>
-          <a:p>
-            <a:pPr indent="0" marL="0">
-              <a:lnSpc>
-                <a:spcPct val="125000"/>
-              </a:lnSpc>
-              <a:buNone/>
-            </a:pPr>
-            <a:r>
-              <a:rPr lang="en-US" sz="1100" dirty="0">
-                <a:solidFill>
-                  <a:srgbClr val="222222"/>
-                </a:solidFill>
-                <a:latin typeface="Calibri" pitchFamily="34" charset="0"/>
-                <a:ea typeface="Calibri" pitchFamily="34" charset="-122"/>
-                <a:cs typeface="Calibri" pitchFamily="34" charset="-120"/>
-              </a:rPr>
-              <a:t>イベント・企業・設問・景品・壁紙・アカウントは残ります。</a:t>
-            </a:r>
-            <a:endParaRPr lang="en-US" sz="1100" dirty="0"/>
-          </a:p>
-        </p:txBody>
-      </p:sp>
-      <p:sp>
-        <p:nvSpPr>
-          <p:cNvPr id="10" name="Text 8"/>
-          <p:cNvSpPr txBox="1"/>
-          <p:nvPr/>
-        </p:nvSpPr>
-        <p:spPr>
-          <a:xfrm>
-            <a:off x="566928" y="3667760"/>
-            <a:ext cx="6428232" cy="257810"/>
-          </a:xfrm>
-          <a:prstGeom prst="rect">
-            <a:avLst/>
-          </a:prstGeom>
-          <a:noFill/>
-          <a:ln/>
-        </p:spPr>
-        <p:txBody>
-          <a:bodyPr wrap="square" lIns="0" tIns="0" rIns="0" bIns="0" rtlCol="0" anchor="t"/>
-          <a:lstStyle/>
-          <a:p>
-            <a:pPr indent="0" marL="0">
-              <a:buNone/>
-            </a:pPr>
-            <a:r>
-              <a:rPr lang="en-US" sz="1400" b="1" dirty="0">
-                <a:solidFill>
-                  <a:srgbClr val="1E2761"/>
-                </a:solidFill>
-                <a:latin typeface="Calibri" pitchFamily="34" charset="0"/>
-                <a:ea typeface="Calibri" pitchFamily="34" charset="-122"/>
-                <a:cs typeface="Calibri" pitchFamily="34" charset="-120"/>
-              </a:rPr>
-              <a:t>イベントごと作り直したいとき</a:t>
-            </a:r>
-            <a:endParaRPr lang="en-US" sz="1400" dirty="0"/>
-          </a:p>
-        </p:txBody>
-      </p:sp>
-      <p:sp>
-        <p:nvSpPr>
-          <p:cNvPr id="11" name="Text 9"/>
-          <p:cNvSpPr txBox="1"/>
-          <p:nvPr/>
-        </p:nvSpPr>
-        <p:spPr>
-          <a:xfrm>
-            <a:off x="713232" y="3998722"/>
-            <a:ext cx="6281928" cy="257429"/>
-          </a:xfrm>
-          <a:prstGeom prst="rect">
-            <a:avLst/>
-          </a:prstGeom>
-          <a:noFill/>
-          <a:ln/>
-        </p:spPr>
-        <p:txBody>
-          <a:bodyPr wrap="square" lIns="0" tIns="0" rIns="0" bIns="0" rtlCol="0" anchor="t"/>
-          <a:lstStyle/>
-          <a:p>
-            <a:pPr marL="342900" indent="-342900">
-              <a:lnSpc>
-                <a:spcPct val="125000"/>
-              </a:lnSpc>
-              <a:buSzPct val="100000"/>
-              <a:buChar char="●"/>
-            </a:pPr>
-            <a:r>
-              <a:rPr lang="en-US" sz="1100" dirty="0">
-                <a:solidFill>
-                  <a:srgbClr val="222222"/>
-                </a:solidFill>
-                <a:latin typeface="Calibri" pitchFamily="34" charset="0"/>
-                <a:ea typeface="Calibri" pitchFamily="34" charset="-122"/>
-                <a:cs typeface="Calibri" pitchFamily="34" charset="-120"/>
-              </a:rPr>
-              <a:t>実行：</a:t>
-            </a:r>
-            <a:pPr indent="0" marL="0">
-              <a:lnSpc>
-                <a:spcPct val="125000"/>
-              </a:lnSpc>
-              <a:buNone/>
-            </a:pPr>
-            <a:r>
-              <a:rPr lang="en-US" sz="1045" dirty="0">
-                <a:solidFill>
-                  <a:srgbClr val="222222"/>
-                </a:solidFill>
-                <a:latin typeface="Courier New" pitchFamily="34" charset="0"/>
-                <a:ea typeface="Courier New" pitchFamily="34" charset="-122"/>
-                <a:cs typeface="Courier New" pitchFamily="34" charset="-120"/>
-              </a:rPr>
-              <a:t>bin/reset.sh --all --force</a:t>
-            </a:r>
-            <a:endParaRPr lang="en-US" sz="1100" dirty="0"/>
-          </a:p>
-        </p:txBody>
-      </p:sp>
-      <p:sp>
-        <p:nvSpPr>
-          <p:cNvPr id="12" name="Shape 10"/>
-          <p:cNvSpPr/>
-          <p:nvPr/>
-        </p:nvSpPr>
-        <p:spPr>
-          <a:xfrm>
-            <a:off x="566928" y="4274439"/>
-            <a:ext cx="6428232" cy="817817"/>
-          </a:xfrm>
-          <a:prstGeom prst="roundRect">
-            <a:avLst>
-              <a:gd name="adj" fmla="val 6709"/>
-            </a:avLst>
-          </a:prstGeom>
-          <a:solidFill>
-            <a:srgbClr val="FDF0E6"/>
-          </a:solidFill>
-          <a:ln w="9525">
-            <a:solidFill>
-              <a:srgbClr val="E08A3C"/>
-            </a:solidFill>
-            <a:prstDash val="solid"/>
-          </a:ln>
-        </p:spPr>
-      </p:sp>
-      <p:sp>
-        <p:nvSpPr>
-          <p:cNvPr id="13" name="Text 11"/>
-          <p:cNvSpPr txBox="1"/>
-          <p:nvPr/>
-        </p:nvSpPr>
-        <p:spPr>
-          <a:xfrm>
-            <a:off x="658368" y="4365879"/>
-            <a:ext cx="237744" cy="237744"/>
+      <p:pic>
+        <p:nvPicPr>
+          <p:cNvPr id="4" name="Image 0" descr="C:\Users\sato\Desktop\enque\docs\images\o-stats.png">    </p:cNvPr>
+          <p:cNvPicPr>
+            <a:picLocks noChangeAspect="1"/>
+          </p:cNvPicPr>
+          <p:nvPr/>
+        </p:nvPicPr>
+        <p:blipFill>
+          <a:blip r:embed="rId1"/>
+          <a:stretch>
+            <a:fillRect/>
+          </a:stretch>
+        </p:blipFill>
+        <p:spPr>
+          <a:xfrm>
+            <a:off x="2140821" y="1481328"/>
+            <a:ext cx="3280447" cy="3474720"/>
+          </a:xfrm>
+          <a:prstGeom prst="rect">
+            <a:avLst/>
+          </a:prstGeom>
+        </p:spPr>
+      </p:pic>
+      <p:sp>
+        <p:nvSpPr>
+          <p:cNvPr id="5" name="Text 2"/>
+          <p:cNvSpPr txBox="1"/>
+          <p:nvPr/>
+        </p:nvSpPr>
+        <p:spPr>
+          <a:xfrm>
+            <a:off x="566928" y="5010912"/>
+            <a:ext cx="6428232" cy="274320"/>
           </a:xfrm>
           <a:prstGeom prst="rect">
             <a:avLst/>
@@ -25018,207 +25895,23 @@
               <a:buNone/>
             </a:pPr>
             <a:r>
-              <a:rPr lang="en-US" sz="1200" b="1" dirty="0">
-                <a:solidFill>
-                  <a:srgbClr val="C25A17"/>
-                </a:solidFill>
-                <a:latin typeface="Calibri" pitchFamily="34" charset="0"/>
-                <a:ea typeface="Calibri" pitchFamily="34" charset="-122"/>
-                <a:cs typeface="Calibri" pitchFamily="34" charset="-120"/>
-              </a:rPr>
-              <a:t>！</a:t>
-            </a:r>
-            <a:endParaRPr lang="en-US" sz="1200" dirty="0"/>
-          </a:p>
-        </p:txBody>
-      </p:sp>
-      <p:sp>
-        <p:nvSpPr>
-          <p:cNvPr id="14" name="Text 12"/>
-          <p:cNvSpPr txBox="1"/>
-          <p:nvPr/>
-        </p:nvSpPr>
-        <p:spPr>
-          <a:xfrm>
-            <a:off x="950976" y="4384167"/>
-            <a:ext cx="5925312" cy="634937"/>
-          </a:xfrm>
-          <a:prstGeom prst="rect">
-            <a:avLst/>
-          </a:prstGeom>
-          <a:noFill/>
-          <a:ln/>
-        </p:spPr>
-        <p:txBody>
-          <a:bodyPr wrap="square" lIns="0" tIns="0" rIns="0" bIns="0" rtlCol="0" anchor="t"/>
-          <a:lstStyle/>
-          <a:p>
-            <a:pPr indent="0" marL="0">
-              <a:lnSpc>
-                <a:spcPct val="120000"/>
-              </a:lnSpc>
-              <a:buNone/>
-            </a:pPr>
-            <a:r>
-              <a:rPr lang="en-US" sz="1050" dirty="0">
-                <a:solidFill>
-                  <a:srgbClr val="222222"/>
-                </a:solidFill>
-                <a:latin typeface="Calibri" pitchFamily="34" charset="0"/>
-                <a:ea typeface="Calibri" pitchFamily="34" charset="-122"/>
-                <a:cs typeface="Calibri" pitchFamily="34" charset="-120"/>
-              </a:rPr>
-              <a:t>どちらも元に戻せません。実行前に自動でバックアップを取りますが、念のため大事なデータはCSVで書き出しておいてください。</a:t>
-            </a:r>
-            <a:pPr indent="0" marL="0">
-              <a:lnSpc>
-                <a:spcPct val="120000"/>
-              </a:lnSpc>
-              <a:buNone/>
-            </a:pPr>
-            <a:r>
-              <a:rPr lang="en-US" sz="1050" b="1" dirty="0">
-                <a:solidFill>
-                  <a:srgbClr val="222222"/>
-                </a:solidFill>
-                <a:latin typeface="Calibri" pitchFamily="34" charset="0"/>
-                <a:ea typeface="Calibri" pitchFamily="34" charset="-122"/>
-                <a:cs typeface="Calibri" pitchFamily="34" charset="-120"/>
-              </a:rPr>
-              <a:t>企業担当者のアカウントは企業と一緒に消えます</a:t>
-            </a:r>
-            <a:pPr indent="0" marL="0">
-              <a:lnSpc>
-                <a:spcPct val="120000"/>
-              </a:lnSpc>
-              <a:buNone/>
-            </a:pPr>
-            <a:r>
-              <a:rPr lang="en-US" sz="1050" dirty="0">
-                <a:solidFill>
-                  <a:srgbClr val="222222"/>
-                </a:solidFill>
-                <a:latin typeface="Calibri" pitchFamily="34" charset="0"/>
-                <a:ea typeface="Calibri" pitchFamily="34" charset="-122"/>
-                <a:cs typeface="Calibri" pitchFamily="34" charset="-120"/>
-              </a:rPr>
-              <a:t>（主催者・受付は残ります）。</a:t>
-            </a:r>
-            <a:endParaRPr lang="en-US" sz="1050" dirty="0"/>
-          </a:p>
-        </p:txBody>
-      </p:sp>
-      <p:sp>
-        <p:nvSpPr>
-          <p:cNvPr id="15" name="Shape 13"/>
-          <p:cNvSpPr/>
-          <p:nvPr/>
-        </p:nvSpPr>
-        <p:spPr>
-          <a:xfrm>
-            <a:off x="566928" y="5165408"/>
-            <a:ext cx="6428232" cy="431102"/>
-          </a:xfrm>
-          <a:prstGeom prst="roundRect">
-            <a:avLst>
-              <a:gd name="adj" fmla="val 12726"/>
-            </a:avLst>
-          </a:prstGeom>
-          <a:solidFill>
-            <a:srgbClr val="E8ECF8"/>
-          </a:solidFill>
-          <a:ln w="9525">
-            <a:solidFill>
-              <a:srgbClr val="1E2761"/>
-            </a:solidFill>
-            <a:prstDash val="solid"/>
-          </a:ln>
-        </p:spPr>
-      </p:sp>
-      <p:sp>
-        <p:nvSpPr>
-          <p:cNvPr id="16" name="Text 14"/>
-          <p:cNvSpPr txBox="1"/>
-          <p:nvPr/>
-        </p:nvSpPr>
-        <p:spPr>
-          <a:xfrm>
-            <a:off x="658368" y="5256848"/>
-            <a:ext cx="237744" cy="237744"/>
-          </a:xfrm>
-          <a:prstGeom prst="rect">
-            <a:avLst/>
-          </a:prstGeom>
-          <a:noFill/>
-          <a:ln/>
-        </p:spPr>
-        <p:txBody>
-          <a:bodyPr wrap="square" lIns="0" tIns="0" rIns="0" bIns="0" rtlCol="0" anchor="ctr"/>
-          <a:lstStyle/>
-          <a:p>
-            <a:pPr algn="ctr" indent="0" marL="0">
-              <a:buNone/>
-            </a:pPr>
-            <a:r>
-              <a:rPr lang="en-US" sz="1200" b="1" dirty="0">
-                <a:solidFill>
-                  <a:srgbClr val="1E2761"/>
-                </a:solidFill>
-                <a:latin typeface="Calibri" pitchFamily="34" charset="0"/>
-                <a:ea typeface="Calibri" pitchFamily="34" charset="-122"/>
-                <a:cs typeface="Calibri" pitchFamily="34" charset="-120"/>
-              </a:rPr>
-              <a:t>i</a:t>
-            </a:r>
-            <a:endParaRPr lang="en-US" sz="1200" dirty="0"/>
-          </a:p>
-        </p:txBody>
-      </p:sp>
-      <p:sp>
-        <p:nvSpPr>
-          <p:cNvPr id="17" name="Text 15"/>
-          <p:cNvSpPr txBox="1"/>
-          <p:nvPr/>
-        </p:nvSpPr>
-        <p:spPr>
-          <a:xfrm>
-            <a:off x="950976" y="5275136"/>
-            <a:ext cx="5925312" cy="248221"/>
-          </a:xfrm>
-          <a:prstGeom prst="rect">
-            <a:avLst/>
-          </a:prstGeom>
-          <a:noFill/>
-          <a:ln/>
-        </p:spPr>
-        <p:txBody>
-          <a:bodyPr wrap="square" lIns="0" tIns="0" rIns="0" bIns="0" rtlCol="0" anchor="t"/>
-          <a:lstStyle/>
-          <a:p>
-            <a:pPr indent="0" marL="0">
-              <a:lnSpc>
-                <a:spcPct val="120000"/>
-              </a:lnSpc>
-              <a:buNone/>
-            </a:pPr>
-            <a:r>
-              <a:rPr lang="en-US" sz="1050" dirty="0">
-                <a:solidFill>
-                  <a:srgbClr val="222222"/>
-                </a:solidFill>
-                <a:latin typeface="Calibri" pitchFamily="34" charset="0"/>
-                <a:ea typeface="Calibri" pitchFamily="34" charset="-122"/>
-                <a:cs typeface="Calibri" pitchFamily="34" charset="-120"/>
-              </a:rPr>
-              <a:t>実行するとデータベース名の入力を求められます。画面の指示どおりに入力してください。</a:t>
-            </a:r>
-            <a:endParaRPr lang="en-US" sz="1050" dirty="0"/>
-          </a:p>
-        </p:txBody>
-      </p:sp>
-      <p:sp>
-        <p:nvSpPr>
-          <p:cNvPr id="18" name="Text 16"/>
+              <a:rPr lang="en-US" sz="950" dirty="0">
+                <a:solidFill>
+                  <a:srgbClr val="6B6B6B"/>
+                </a:solidFill>
+                <a:latin typeface="Calibri" pitchFamily="34" charset="0"/>
+                <a:ea typeface="Calibri" pitchFamily="34" charset="-122"/>
+                <a:cs typeface="Calibri" pitchFamily="34" charset="-120"/>
+              </a:rPr>
+              <a:t>企業の集計画面。設問ごとのグラフが見えるところ。</a:t>
+            </a:r>
+            <a:endParaRPr lang="en-US" sz="950" dirty="0"/>
+          </a:p>
+        </p:txBody>
+      </p:sp>
+      <p:sp>
+        <p:nvSpPr>
+          <p:cNvPr id="6" name="Text 3"/>
           <p:cNvSpPr txBox="1"/>
           <p:nvPr/>
         </p:nvSpPr>
@@ -25359,6 +26052,1706 @@
                 <a:ea typeface="Calibri" pitchFamily="34" charset="-122"/>
                 <a:cs typeface="Calibri" pitchFamily="34" charset="-120"/>
               </a:rPr>
+              <a:t>終了後4：メールアドレスを削除する</a:t>
+            </a:r>
+            <a:endParaRPr lang="en-US" sz="2200" dirty="0"/>
+          </a:p>
+        </p:txBody>
+      </p:sp>
+      <p:sp>
+        <p:nvSpPr>
+          <p:cNvPr id="4" name="Text 2"/>
+          <p:cNvSpPr txBox="1"/>
+          <p:nvPr/>
+        </p:nvSpPr>
+        <p:spPr>
+          <a:xfrm>
+            <a:off x="566928" y="1481328"/>
+            <a:ext cx="6428232" cy="257429"/>
+          </a:xfrm>
+          <a:prstGeom prst="rect">
+            <a:avLst/>
+          </a:prstGeom>
+          <a:noFill/>
+          <a:ln/>
+        </p:spPr>
+        <p:txBody>
+          <a:bodyPr wrap="square" lIns="0" tIns="0" rIns="0" bIns="0" rtlCol="0" anchor="t"/>
+          <a:lstStyle/>
+          <a:p>
+            <a:pPr indent="0" marL="0">
+              <a:lnSpc>
+                <a:spcPct val="125000"/>
+              </a:lnSpc>
+              <a:buNone/>
+            </a:pPr>
+            <a:r>
+              <a:rPr lang="en-US" sz="1100" dirty="0">
+                <a:solidFill>
+                  <a:srgbClr val="222222"/>
+                </a:solidFill>
+                <a:latin typeface="Calibri" pitchFamily="34" charset="0"/>
+                <a:ea typeface="Calibri" pitchFamily="34" charset="-122"/>
+                <a:cs typeface="Calibri" pitchFamily="34" charset="-120"/>
+              </a:rPr>
+              <a:t>案内の送付と集計が終わったら、預かったメールアドレスを削除します。</a:t>
+            </a:r>
+            <a:endParaRPr lang="en-US" sz="1100" dirty="0"/>
+          </a:p>
+        </p:txBody>
+      </p:sp>
+      <p:sp>
+        <p:nvSpPr>
+          <p:cNvPr id="5" name="Shape 3"/>
+          <p:cNvSpPr/>
+          <p:nvPr/>
+        </p:nvSpPr>
+        <p:spPr>
+          <a:xfrm>
+            <a:off x="566928" y="1793621"/>
+            <a:ext cx="274320" cy="274320"/>
+          </a:xfrm>
+          <a:prstGeom prst="ellipse">
+            <a:avLst/>
+          </a:prstGeom>
+          <a:solidFill>
+            <a:srgbClr val="1E2761"/>
+          </a:solidFill>
+          <a:ln/>
+        </p:spPr>
+      </p:sp>
+      <p:sp>
+        <p:nvSpPr>
+          <p:cNvPr id="6" name="Text 4"/>
+          <p:cNvSpPr txBox="1"/>
+          <p:nvPr/>
+        </p:nvSpPr>
+        <p:spPr>
+          <a:xfrm>
+            <a:off x="566928" y="1793621"/>
+            <a:ext cx="274320" cy="274320"/>
+          </a:xfrm>
+          <a:prstGeom prst="rect">
+            <a:avLst/>
+          </a:prstGeom>
+          <a:noFill/>
+          <a:ln/>
+        </p:spPr>
+        <p:txBody>
+          <a:bodyPr wrap="square" lIns="0" tIns="0" rIns="0" bIns="0" rtlCol="0" anchor="ctr"/>
+          <a:lstStyle/>
+          <a:p>
+            <a:pPr algn="ctr" indent="0" marL="0">
+              <a:buNone/>
+            </a:pPr>
+            <a:r>
+              <a:rPr lang="en-US" sz="1100" b="1" dirty="0">
+                <a:solidFill>
+                  <a:srgbClr val="FFFFFF"/>
+                </a:solidFill>
+                <a:latin typeface="Calibri" pitchFamily="34" charset="0"/>
+                <a:ea typeface="Calibri" pitchFamily="34" charset="-122"/>
+                <a:cs typeface="Calibri" pitchFamily="34" charset="-120"/>
+              </a:rPr>
+              <a:t>1</a:t>
+            </a:r>
+            <a:endParaRPr lang="en-US" sz="1100" dirty="0"/>
+          </a:p>
+        </p:txBody>
+      </p:sp>
+      <p:sp>
+        <p:nvSpPr>
+          <p:cNvPr id="7" name="Text 5"/>
+          <p:cNvSpPr txBox="1"/>
+          <p:nvPr/>
+        </p:nvSpPr>
+        <p:spPr>
+          <a:xfrm>
+            <a:off x="969264" y="1775333"/>
+            <a:ext cx="6025896" cy="365760"/>
+          </a:xfrm>
+          <a:prstGeom prst="rect">
+            <a:avLst/>
+          </a:prstGeom>
+          <a:noFill/>
+          <a:ln/>
+        </p:spPr>
+        <p:txBody>
+          <a:bodyPr wrap="square" lIns="0" tIns="0" rIns="0" bIns="0" rtlCol="0" anchor="t"/>
+          <a:lstStyle/>
+          <a:p>
+            <a:pPr indent="0" marL="0">
+              <a:lnSpc>
+                <a:spcPct val="125000"/>
+              </a:lnSpc>
+              <a:buNone/>
+            </a:pPr>
+            <a:r>
+              <a:rPr lang="en-US" sz="1150" dirty="0">
+                <a:solidFill>
+                  <a:srgbClr val="222222"/>
+                </a:solidFill>
+                <a:latin typeface="Calibri" pitchFamily="34" charset="0"/>
+                <a:ea typeface="Calibri" pitchFamily="34" charset="-122"/>
+                <a:cs typeface="Calibri" pitchFamily="34" charset="-120"/>
+              </a:rPr>
+              <a:t>「総合アンケート」の画面を開く</a:t>
+            </a:r>
+            <a:endParaRPr lang="en-US" sz="1150" dirty="0"/>
+          </a:p>
+        </p:txBody>
+      </p:sp>
+      <p:sp>
+        <p:nvSpPr>
+          <p:cNvPr id="8" name="Shape 6"/>
+          <p:cNvSpPr/>
+          <p:nvPr/>
+        </p:nvSpPr>
+        <p:spPr>
+          <a:xfrm>
+            <a:off x="566928" y="2250821"/>
+            <a:ext cx="274320" cy="274320"/>
+          </a:xfrm>
+          <a:prstGeom prst="ellipse">
+            <a:avLst/>
+          </a:prstGeom>
+          <a:solidFill>
+            <a:srgbClr val="1E2761"/>
+          </a:solidFill>
+          <a:ln/>
+        </p:spPr>
+      </p:sp>
+      <p:sp>
+        <p:nvSpPr>
+          <p:cNvPr id="9" name="Text 7"/>
+          <p:cNvSpPr txBox="1"/>
+          <p:nvPr/>
+        </p:nvSpPr>
+        <p:spPr>
+          <a:xfrm>
+            <a:off x="566928" y="2250821"/>
+            <a:ext cx="274320" cy="274320"/>
+          </a:xfrm>
+          <a:prstGeom prst="rect">
+            <a:avLst/>
+          </a:prstGeom>
+          <a:noFill/>
+          <a:ln/>
+        </p:spPr>
+        <p:txBody>
+          <a:bodyPr wrap="square" lIns="0" tIns="0" rIns="0" bIns="0" rtlCol="0" anchor="ctr"/>
+          <a:lstStyle/>
+          <a:p>
+            <a:pPr algn="ctr" indent="0" marL="0">
+              <a:buNone/>
+            </a:pPr>
+            <a:r>
+              <a:rPr lang="en-US" sz="1100" b="1" dirty="0">
+                <a:solidFill>
+                  <a:srgbClr val="FFFFFF"/>
+                </a:solidFill>
+                <a:latin typeface="Calibri" pitchFamily="34" charset="0"/>
+                <a:ea typeface="Calibri" pitchFamily="34" charset="-122"/>
+                <a:cs typeface="Calibri" pitchFamily="34" charset="-120"/>
+              </a:rPr>
+              <a:t>2</a:t>
+            </a:r>
+            <a:endParaRPr lang="en-US" sz="1100" dirty="0"/>
+          </a:p>
+        </p:txBody>
+      </p:sp>
+      <p:sp>
+        <p:nvSpPr>
+          <p:cNvPr id="10" name="Text 8"/>
+          <p:cNvSpPr txBox="1"/>
+          <p:nvPr/>
+        </p:nvSpPr>
+        <p:spPr>
+          <a:xfrm>
+            <a:off x="969264" y="2232533"/>
+            <a:ext cx="6025896" cy="365760"/>
+          </a:xfrm>
+          <a:prstGeom prst="rect">
+            <a:avLst/>
+          </a:prstGeom>
+          <a:noFill/>
+          <a:ln/>
+        </p:spPr>
+        <p:txBody>
+          <a:bodyPr wrap="square" lIns="0" tIns="0" rIns="0" bIns="0" rtlCol="0" anchor="t"/>
+          <a:lstStyle/>
+          <a:p>
+            <a:pPr indent="0" marL="0">
+              <a:lnSpc>
+                <a:spcPct val="125000"/>
+              </a:lnSpc>
+              <a:buNone/>
+            </a:pPr>
+            <a:r>
+              <a:rPr lang="en-US" sz="1150" dirty="0">
+                <a:solidFill>
+                  <a:srgbClr val="222222"/>
+                </a:solidFill>
+                <a:latin typeface="Calibri" pitchFamily="34" charset="0"/>
+                <a:ea typeface="Calibri" pitchFamily="34" charset="-122"/>
+                <a:cs typeface="Calibri" pitchFamily="34" charset="-120"/>
+              </a:rPr>
+              <a:t>一番下の</a:t>
+            </a:r>
+            <a:pPr indent="0" marL="0">
+              <a:lnSpc>
+                <a:spcPct val="125000"/>
+              </a:lnSpc>
+              <a:buNone/>
+            </a:pPr>
+            <a:r>
+              <a:rPr lang="en-US" sz="1150" b="1" dirty="0">
+                <a:solidFill>
+                  <a:srgbClr val="222222"/>
+                </a:solidFill>
+                <a:latin typeface="Calibri" pitchFamily="34" charset="0"/>
+                <a:ea typeface="Calibri" pitchFamily="34" charset="-122"/>
+                <a:cs typeface="Calibri" pitchFamily="34" charset="-120"/>
+              </a:rPr>
+              <a:t>「メールアドレスを削除する」</a:t>
+            </a:r>
+            <a:pPr indent="0" marL="0">
+              <a:lnSpc>
+                <a:spcPct val="125000"/>
+              </a:lnSpc>
+              <a:buNone/>
+            </a:pPr>
+            <a:r>
+              <a:rPr lang="en-US" sz="1150" dirty="0">
+                <a:solidFill>
+                  <a:srgbClr val="222222"/>
+                </a:solidFill>
+                <a:latin typeface="Calibri" pitchFamily="34" charset="0"/>
+                <a:ea typeface="Calibri" pitchFamily="34" charset="-122"/>
+                <a:cs typeface="Calibri" pitchFamily="34" charset="-120"/>
+              </a:rPr>
+              <a:t>を押す</a:t>
+            </a:r>
+            <a:endParaRPr lang="en-US" sz="1150" dirty="0"/>
+          </a:p>
+        </p:txBody>
+      </p:sp>
+      <p:sp>
+        <p:nvSpPr>
+          <p:cNvPr id="11" name="Shape 9"/>
+          <p:cNvSpPr/>
+          <p:nvPr/>
+        </p:nvSpPr>
+        <p:spPr>
+          <a:xfrm>
+            <a:off x="566928" y="2708021"/>
+            <a:ext cx="274320" cy="274320"/>
+          </a:xfrm>
+          <a:prstGeom prst="ellipse">
+            <a:avLst/>
+          </a:prstGeom>
+          <a:solidFill>
+            <a:srgbClr val="1E2761"/>
+          </a:solidFill>
+          <a:ln/>
+        </p:spPr>
+      </p:sp>
+      <p:sp>
+        <p:nvSpPr>
+          <p:cNvPr id="12" name="Text 10"/>
+          <p:cNvSpPr txBox="1"/>
+          <p:nvPr/>
+        </p:nvSpPr>
+        <p:spPr>
+          <a:xfrm>
+            <a:off x="566928" y="2708021"/>
+            <a:ext cx="274320" cy="274320"/>
+          </a:xfrm>
+          <a:prstGeom prst="rect">
+            <a:avLst/>
+          </a:prstGeom>
+          <a:noFill/>
+          <a:ln/>
+        </p:spPr>
+        <p:txBody>
+          <a:bodyPr wrap="square" lIns="0" tIns="0" rIns="0" bIns="0" rtlCol="0" anchor="ctr"/>
+          <a:lstStyle/>
+          <a:p>
+            <a:pPr algn="ctr" indent="0" marL="0">
+              <a:buNone/>
+            </a:pPr>
+            <a:r>
+              <a:rPr lang="en-US" sz="1100" b="1" dirty="0">
+                <a:solidFill>
+                  <a:srgbClr val="FFFFFF"/>
+                </a:solidFill>
+                <a:latin typeface="Calibri" pitchFamily="34" charset="0"/>
+                <a:ea typeface="Calibri" pitchFamily="34" charset="-122"/>
+                <a:cs typeface="Calibri" pitchFamily="34" charset="-120"/>
+              </a:rPr>
+              <a:t>3</a:t>
+            </a:r>
+            <a:endParaRPr lang="en-US" sz="1100" dirty="0"/>
+          </a:p>
+        </p:txBody>
+      </p:sp>
+      <p:sp>
+        <p:nvSpPr>
+          <p:cNvPr id="13" name="Text 11"/>
+          <p:cNvSpPr txBox="1"/>
+          <p:nvPr/>
+        </p:nvSpPr>
+        <p:spPr>
+          <a:xfrm>
+            <a:off x="969264" y="2689733"/>
+            <a:ext cx="6025896" cy="365760"/>
+          </a:xfrm>
+          <a:prstGeom prst="rect">
+            <a:avLst/>
+          </a:prstGeom>
+          <a:noFill/>
+          <a:ln/>
+        </p:spPr>
+        <p:txBody>
+          <a:bodyPr wrap="square" lIns="0" tIns="0" rIns="0" bIns="0" rtlCol="0" anchor="t"/>
+          <a:lstStyle/>
+          <a:p>
+            <a:pPr indent="0" marL="0">
+              <a:lnSpc>
+                <a:spcPct val="125000"/>
+              </a:lnSpc>
+              <a:buNone/>
+            </a:pPr>
+            <a:r>
+              <a:rPr lang="en-US" sz="1150" dirty="0">
+                <a:solidFill>
+                  <a:srgbClr val="222222"/>
+                </a:solidFill>
+                <a:latin typeface="Calibri" pitchFamily="34" charset="0"/>
+                <a:ea typeface="Calibri" pitchFamily="34" charset="-122"/>
+                <a:cs typeface="Calibri" pitchFamily="34" charset="-120"/>
+              </a:rPr>
+              <a:t>確認メッセージで「OK」を押す</a:t>
+            </a:r>
+            <a:endParaRPr lang="en-US" sz="1150" dirty="0"/>
+          </a:p>
+        </p:txBody>
+      </p:sp>
+      <p:sp>
+        <p:nvSpPr>
+          <p:cNvPr id="14" name="Text 12"/>
+          <p:cNvSpPr txBox="1"/>
+          <p:nvPr/>
+        </p:nvSpPr>
+        <p:spPr>
+          <a:xfrm>
+            <a:off x="566928" y="3146933"/>
+            <a:ext cx="6428232" cy="257429"/>
+          </a:xfrm>
+          <a:prstGeom prst="rect">
+            <a:avLst/>
+          </a:prstGeom>
+          <a:noFill/>
+          <a:ln/>
+        </p:spPr>
+        <p:txBody>
+          <a:bodyPr wrap="square" lIns="0" tIns="0" rIns="0" bIns="0" rtlCol="0" anchor="t"/>
+          <a:lstStyle/>
+          <a:p>
+            <a:pPr indent="0" marL="0">
+              <a:lnSpc>
+                <a:spcPct val="125000"/>
+              </a:lnSpc>
+              <a:buNone/>
+            </a:pPr>
+            <a:r>
+              <a:rPr lang="en-US" sz="1100" dirty="0">
+                <a:solidFill>
+                  <a:srgbClr val="222222"/>
+                </a:solidFill>
+                <a:latin typeface="Calibri" pitchFamily="34" charset="0"/>
+                <a:ea typeface="Calibri" pitchFamily="34" charset="-122"/>
+                <a:cs typeface="Calibri" pitchFamily="34" charset="-120"/>
+              </a:rPr>
+              <a:t>削除しても、</a:t>
+            </a:r>
+            <a:pPr indent="0" marL="0">
+              <a:lnSpc>
+                <a:spcPct val="125000"/>
+              </a:lnSpc>
+              <a:buNone/>
+            </a:pPr>
+            <a:r>
+              <a:rPr lang="en-US" sz="1100" b="1" dirty="0">
+                <a:solidFill>
+                  <a:srgbClr val="222222"/>
+                </a:solidFill>
+                <a:latin typeface="Calibri" pitchFamily="34" charset="0"/>
+                <a:ea typeface="Calibri" pitchFamily="34" charset="-122"/>
+                <a:cs typeface="Calibri" pitchFamily="34" charset="-120"/>
+              </a:rPr>
+              <a:t>回答データ（個人情報を含まないもの）は残ります</a:t>
+            </a:r>
+            <a:pPr indent="0" marL="0">
+              <a:lnSpc>
+                <a:spcPct val="125000"/>
+              </a:lnSpc>
+              <a:buNone/>
+            </a:pPr>
+            <a:r>
+              <a:rPr lang="en-US" sz="1100" dirty="0">
+                <a:solidFill>
+                  <a:srgbClr val="222222"/>
+                </a:solidFill>
+                <a:latin typeface="Calibri" pitchFamily="34" charset="0"/>
+                <a:ea typeface="Calibri" pitchFamily="34" charset="-122"/>
+                <a:cs typeface="Calibri" pitchFamily="34" charset="-120"/>
+              </a:rPr>
+              <a:t>。</a:t>
+            </a:r>
+            <a:endParaRPr lang="en-US" sz="1100" dirty="0"/>
+          </a:p>
+        </p:txBody>
+      </p:sp>
+      <p:sp>
+        <p:nvSpPr>
+          <p:cNvPr id="15" name="Shape 13"/>
+          <p:cNvSpPr/>
+          <p:nvPr/>
+        </p:nvSpPr>
+        <p:spPr>
+          <a:xfrm>
+            <a:off x="566928" y="3440938"/>
+            <a:ext cx="6428232" cy="624459"/>
+          </a:xfrm>
+          <a:prstGeom prst="roundRect">
+            <a:avLst>
+              <a:gd name="adj" fmla="val 8786"/>
+            </a:avLst>
+          </a:prstGeom>
+          <a:solidFill>
+            <a:srgbClr val="FDF0E6"/>
+          </a:solidFill>
+          <a:ln w="9525">
+            <a:solidFill>
+              <a:srgbClr val="E08A3C"/>
+            </a:solidFill>
+            <a:prstDash val="solid"/>
+          </a:ln>
+        </p:spPr>
+      </p:sp>
+      <p:sp>
+        <p:nvSpPr>
+          <p:cNvPr id="16" name="Text 14"/>
+          <p:cNvSpPr txBox="1"/>
+          <p:nvPr/>
+        </p:nvSpPr>
+        <p:spPr>
+          <a:xfrm>
+            <a:off x="658368" y="3532378"/>
+            <a:ext cx="237744" cy="237744"/>
+          </a:xfrm>
+          <a:prstGeom prst="rect">
+            <a:avLst/>
+          </a:prstGeom>
+          <a:noFill/>
+          <a:ln/>
+        </p:spPr>
+        <p:txBody>
+          <a:bodyPr wrap="square" lIns="0" tIns="0" rIns="0" bIns="0" rtlCol="0" anchor="ctr"/>
+          <a:lstStyle/>
+          <a:p>
+            <a:pPr algn="ctr" indent="0" marL="0">
+              <a:buNone/>
+            </a:pPr>
+            <a:r>
+              <a:rPr lang="en-US" sz="1200" b="1" dirty="0">
+                <a:solidFill>
+                  <a:srgbClr val="C25A17"/>
+                </a:solidFill>
+                <a:latin typeface="Calibri" pitchFamily="34" charset="0"/>
+                <a:ea typeface="Calibri" pitchFamily="34" charset="-122"/>
+                <a:cs typeface="Calibri" pitchFamily="34" charset="-120"/>
+              </a:rPr>
+              <a:t>！</a:t>
+            </a:r>
+            <a:endParaRPr lang="en-US" sz="1200" dirty="0"/>
+          </a:p>
+        </p:txBody>
+      </p:sp>
+      <p:sp>
+        <p:nvSpPr>
+          <p:cNvPr id="17" name="Text 15"/>
+          <p:cNvSpPr txBox="1"/>
+          <p:nvPr/>
+        </p:nvSpPr>
+        <p:spPr>
+          <a:xfrm>
+            <a:off x="950976" y="3550666"/>
+            <a:ext cx="5925312" cy="441579"/>
+          </a:xfrm>
+          <a:prstGeom prst="rect">
+            <a:avLst/>
+          </a:prstGeom>
+          <a:noFill/>
+          <a:ln/>
+        </p:spPr>
+        <p:txBody>
+          <a:bodyPr wrap="square" lIns="0" tIns="0" rIns="0" bIns="0" rtlCol="0" anchor="t"/>
+          <a:lstStyle/>
+          <a:p>
+            <a:pPr indent="0" marL="0">
+              <a:lnSpc>
+                <a:spcPct val="120000"/>
+              </a:lnSpc>
+              <a:buNone/>
+            </a:pPr>
+            <a:r>
+              <a:rPr lang="en-US" sz="1050" dirty="0">
+                <a:solidFill>
+                  <a:srgbClr val="222222"/>
+                </a:solidFill>
+                <a:latin typeface="Calibri" pitchFamily="34" charset="0"/>
+                <a:ea typeface="Calibri" pitchFamily="34" charset="-122"/>
+                <a:cs typeface="Calibri" pitchFamily="34" charset="-120"/>
+              </a:rPr>
+              <a:t>削除すると、未送信ぶんの案内メールは送れなくなります。</a:t>
+            </a:r>
+            <a:pPr indent="0" marL="0">
+              <a:lnSpc>
+                <a:spcPct val="120000"/>
+              </a:lnSpc>
+              <a:buNone/>
+            </a:pPr>
+            <a:r>
+              <a:rPr lang="en-US" sz="1050" b="1" dirty="0">
+                <a:solidFill>
+                  <a:srgbClr val="222222"/>
+                </a:solidFill>
+                <a:latin typeface="Calibri" pitchFamily="34" charset="0"/>
+                <a:ea typeface="Calibri" pitchFamily="34" charset="-122"/>
+                <a:cs typeface="Calibri" pitchFamily="34" charset="-120"/>
+              </a:rPr>
+              <a:t>送信と集計が完全に終わってから</a:t>
+            </a:r>
+            <a:pPr indent="0" marL="0">
+              <a:lnSpc>
+                <a:spcPct val="120000"/>
+              </a:lnSpc>
+              <a:buNone/>
+            </a:pPr>
+            <a:r>
+              <a:rPr lang="en-US" sz="1050" dirty="0">
+                <a:solidFill>
+                  <a:srgbClr val="222222"/>
+                </a:solidFill>
+                <a:latin typeface="Calibri" pitchFamily="34" charset="0"/>
+                <a:ea typeface="Calibri" pitchFamily="34" charset="-122"/>
+                <a:cs typeface="Calibri" pitchFamily="34" charset="-120"/>
+              </a:rPr>
+              <a:t>実行してください。</a:t>
+            </a:r>
+            <a:endParaRPr lang="en-US" sz="1050" dirty="0"/>
+          </a:p>
+        </p:txBody>
+      </p:sp>
+      <p:sp>
+        <p:nvSpPr>
+          <p:cNvPr id="18" name="Shape 16"/>
+          <p:cNvSpPr/>
+          <p:nvPr/>
+        </p:nvSpPr>
+        <p:spPr>
+          <a:xfrm>
+            <a:off x="566928" y="4138549"/>
+            <a:ext cx="6428232" cy="624459"/>
+          </a:xfrm>
+          <a:prstGeom prst="roundRect">
+            <a:avLst>
+              <a:gd name="adj" fmla="val 8786"/>
+            </a:avLst>
+          </a:prstGeom>
+          <a:solidFill>
+            <a:srgbClr val="E8ECF8"/>
+          </a:solidFill>
+          <a:ln w="9525">
+            <a:solidFill>
+              <a:srgbClr val="1E2761"/>
+            </a:solidFill>
+            <a:prstDash val="solid"/>
+          </a:ln>
+        </p:spPr>
+      </p:sp>
+      <p:sp>
+        <p:nvSpPr>
+          <p:cNvPr id="19" name="Text 17"/>
+          <p:cNvSpPr txBox="1"/>
+          <p:nvPr/>
+        </p:nvSpPr>
+        <p:spPr>
+          <a:xfrm>
+            <a:off x="658368" y="4229989"/>
+            <a:ext cx="237744" cy="237744"/>
+          </a:xfrm>
+          <a:prstGeom prst="rect">
+            <a:avLst/>
+          </a:prstGeom>
+          <a:noFill/>
+          <a:ln/>
+        </p:spPr>
+        <p:txBody>
+          <a:bodyPr wrap="square" lIns="0" tIns="0" rIns="0" bIns="0" rtlCol="0" anchor="ctr"/>
+          <a:lstStyle/>
+          <a:p>
+            <a:pPr algn="ctr" indent="0" marL="0">
+              <a:buNone/>
+            </a:pPr>
+            <a:r>
+              <a:rPr lang="en-US" sz="1200" b="1" dirty="0">
+                <a:solidFill>
+                  <a:srgbClr val="1E2761"/>
+                </a:solidFill>
+                <a:latin typeface="Calibri" pitchFamily="34" charset="0"/>
+                <a:ea typeface="Calibri" pitchFamily="34" charset="-122"/>
+                <a:cs typeface="Calibri" pitchFamily="34" charset="-120"/>
+              </a:rPr>
+              <a:t>i</a:t>
+            </a:r>
+            <a:endParaRPr lang="en-US" sz="1200" dirty="0"/>
+          </a:p>
+        </p:txBody>
+      </p:sp>
+      <p:sp>
+        <p:nvSpPr>
+          <p:cNvPr id="20" name="Text 18"/>
+          <p:cNvSpPr txBox="1"/>
+          <p:nvPr/>
+        </p:nvSpPr>
+        <p:spPr>
+          <a:xfrm>
+            <a:off x="950976" y="4248277"/>
+            <a:ext cx="5925312" cy="441579"/>
+          </a:xfrm>
+          <a:prstGeom prst="rect">
+            <a:avLst/>
+          </a:prstGeom>
+          <a:noFill/>
+          <a:ln/>
+        </p:spPr>
+        <p:txBody>
+          <a:bodyPr wrap="square" lIns="0" tIns="0" rIns="0" bIns="0" rtlCol="0" anchor="t"/>
+          <a:lstStyle/>
+          <a:p>
+            <a:pPr indent="0" marL="0">
+              <a:lnSpc>
+                <a:spcPct val="120000"/>
+              </a:lnSpc>
+              <a:buNone/>
+            </a:pPr>
+            <a:r>
+              <a:rPr lang="en-US" sz="1050" dirty="0">
+                <a:solidFill>
+                  <a:srgbClr val="222222"/>
+                </a:solidFill>
+                <a:latin typeface="Calibri" pitchFamily="34" charset="0"/>
+                <a:ea typeface="Calibri" pitchFamily="34" charset="-122"/>
+                <a:cs typeface="Calibri" pitchFamily="34" charset="-120"/>
+              </a:rPr>
+              <a:t>「氏名・住所は収集せず、メールアドレスも送付・集計後に削除する」という運用方針に沿った操作です。来場者にもその旨を案内しています。</a:t>
+            </a:r>
+            <a:endParaRPr lang="en-US" sz="1050" dirty="0"/>
+          </a:p>
+        </p:txBody>
+      </p:sp>
+      <p:pic>
+        <p:nvPicPr>
+          <p:cNvPr id="21" name="Image 0" descr="C:\Users\sato\Desktop\enque\docs\images\o-purge.png">    </p:cNvPr>
+          <p:cNvPicPr>
+            <a:picLocks noChangeAspect="1"/>
+          </p:cNvPicPr>
+          <p:nvPr/>
+        </p:nvPicPr>
+        <p:blipFill>
+          <a:blip r:embed="rId1"/>
+          <a:stretch>
+            <a:fillRect/>
+          </a:stretch>
+        </p:blipFill>
+        <p:spPr>
+          <a:xfrm>
+            <a:off x="936779" y="4836160"/>
+            <a:ext cx="5688531" cy="3474720"/>
+          </a:xfrm>
+          <a:prstGeom prst="rect">
+            <a:avLst/>
+          </a:prstGeom>
+        </p:spPr>
+      </p:pic>
+      <p:sp>
+        <p:nvSpPr>
+          <p:cNvPr id="22" name="Text 19"/>
+          <p:cNvSpPr txBox="1"/>
+          <p:nvPr/>
+        </p:nvSpPr>
+        <p:spPr>
+          <a:xfrm>
+            <a:off x="566928" y="8365744"/>
+            <a:ext cx="6428232" cy="274320"/>
+          </a:xfrm>
+          <a:prstGeom prst="rect">
+            <a:avLst/>
+          </a:prstGeom>
+          <a:noFill/>
+          <a:ln/>
+        </p:spPr>
+        <p:txBody>
+          <a:bodyPr wrap="square" lIns="0" tIns="0" rIns="0" bIns="0" rtlCol="0" anchor="ctr"/>
+          <a:lstStyle/>
+          <a:p>
+            <a:pPr algn="ctr" indent="0" marL="0">
+              <a:buNone/>
+            </a:pPr>
+            <a:r>
+              <a:rPr lang="en-US" sz="950" dirty="0">
+                <a:solidFill>
+                  <a:srgbClr val="6B6B6B"/>
+                </a:solidFill>
+                <a:latin typeface="Calibri" pitchFamily="34" charset="0"/>
+                <a:ea typeface="Calibri" pitchFamily="34" charset="-122"/>
+                <a:cs typeface="Calibri" pitchFamily="34" charset="-120"/>
+              </a:rPr>
+              <a:t>「メールアドレスを削除する」ボタンの周辺（説明文が見えるもの）。</a:t>
+            </a:r>
+            <a:endParaRPr lang="en-US" sz="950" dirty="0"/>
+          </a:p>
+        </p:txBody>
+      </p:sp>
+      <p:sp>
+        <p:nvSpPr>
+          <p:cNvPr id="23" name="Text 20"/>
+          <p:cNvSpPr txBox="1"/>
+          <p:nvPr/>
+        </p:nvSpPr>
+        <p:spPr>
+          <a:xfrm>
+            <a:off x="566928" y="10186416"/>
+            <a:ext cx="6428232" cy="228600"/>
+          </a:xfrm>
+          <a:prstGeom prst="rect">
+            <a:avLst/>
+          </a:prstGeom>
+          <a:noFill/>
+          <a:ln/>
+        </p:spPr>
+        <p:txBody>
+          <a:bodyPr wrap="square" lIns="0" tIns="0" rIns="0" bIns="0" rtlCol="0" anchor="ctr"/>
+          <a:lstStyle/>
+          <a:p>
+            <a:pPr algn="r" indent="0" marL="0">
+              <a:buNone/>
+            </a:pPr>
+            <a:r>
+              <a:rPr lang="en-US" sz="900" dirty="0">
+                <a:solidFill>
+                  <a:srgbClr val="6B6B6B"/>
+                </a:solidFill>
+                <a:latin typeface="Calibri" pitchFamily="34" charset="0"/>
+                <a:ea typeface="Calibri" pitchFamily="34" charset="-122"/>
+                <a:cs typeface="Calibri" pitchFamily="34" charset="-120"/>
+              </a:rPr>
+              <a:t>主催者向け　33</a:t>
+            </a:r>
+            <a:endParaRPr lang="en-US" sz="900" dirty="0"/>
+          </a:p>
+        </p:txBody>
+      </p:sp>
+    </p:spTree>
+  </p:cSld>
+  <p:clrMapOvr>
+    <a:masterClrMapping/>
+  </p:clrMapOvr>
+</p:sld>
+</file>
+
+<file path=ppt/slides/slide34.xml><?xml version="1.0" encoding="utf-8"?>
+<p:sld xmlns:a="http://schemas.openxmlformats.org/drawingml/2006/main" xmlns:r="http://schemas.openxmlformats.org/officeDocument/2006/relationships" xmlns:p="http://schemas.openxmlformats.org/presentationml/2006/main">
+  <p:cSld name="Slide 34">
+    <p:bg>
+      <p:bgPr>
+        <a:solidFill>
+          <a:srgbClr val="FFFFFF"/>
+        </a:solidFill>
+      </p:bgPr>
+    </p:bg>
+    <p:spTree>
+      <p:nvGrpSpPr>
+        <p:cNvPr id="1" name=""/>
+        <p:cNvGrpSpPr/>
+        <p:nvPr/>
+      </p:nvGrpSpPr>
+      <p:grpSpPr>
+        <a:xfrm>
+          <a:off x="0" y="0"/>
+          <a:ext cx="0" cy="0"/>
+          <a:chOff x="0" y="0"/>
+          <a:chExt cx="0" cy="0"/>
+        </a:xfrm>
+      </p:grpSpPr>
+      <p:sp>
+        <p:nvSpPr>
+          <p:cNvPr id="2" name="Text 0"/>
+          <p:cNvSpPr txBox="1"/>
+          <p:nvPr/>
+        </p:nvSpPr>
+        <p:spPr>
+          <a:xfrm>
+            <a:off x="566928" y="457200"/>
+            <a:ext cx="6428232" cy="237744"/>
+          </a:xfrm>
+          <a:prstGeom prst="rect">
+            <a:avLst/>
+          </a:prstGeom>
+          <a:noFill/>
+          <a:ln/>
+        </p:spPr>
+        <p:txBody>
+          <a:bodyPr wrap="square" lIns="0" tIns="0" rIns="0" bIns="0" rtlCol="0" anchor="ctr"/>
+          <a:lstStyle/>
+          <a:p>
+            <a:pPr indent="0" marL="0">
+              <a:buNone/>
+            </a:pPr>
+            <a:r>
+              <a:rPr lang="en-US" sz="1000" b="1" dirty="0">
+                <a:solidFill>
+                  <a:srgbClr val="1E2761"/>
+                </a:solidFill>
+                <a:latin typeface="Calibri" pitchFamily="34" charset="0"/>
+                <a:ea typeface="Calibri" pitchFamily="34" charset="-122"/>
+                <a:cs typeface="Calibri" pitchFamily="34" charset="-120"/>
+              </a:rPr>
+              <a:t>主催者マニュアル</a:t>
+            </a:r>
+            <a:endParaRPr lang="en-US" sz="1000" dirty="0"/>
+          </a:p>
+        </p:txBody>
+      </p:sp>
+      <p:sp>
+        <p:nvSpPr>
+          <p:cNvPr id="3" name="Text 1"/>
+          <p:cNvSpPr txBox="1"/>
+          <p:nvPr/>
+        </p:nvSpPr>
+        <p:spPr>
+          <a:xfrm>
+            <a:off x="566928" y="713232"/>
+            <a:ext cx="6428232" cy="640080"/>
+          </a:xfrm>
+          <a:prstGeom prst="rect">
+            <a:avLst/>
+          </a:prstGeom>
+          <a:noFill/>
+          <a:ln/>
+        </p:spPr>
+        <p:txBody>
+          <a:bodyPr wrap="square" lIns="0" tIns="0" rIns="0" bIns="0" rtlCol="0" anchor="t"/>
+          <a:lstStyle/>
+          <a:p>
+            <a:pPr indent="0" marL="0">
+              <a:buNone/>
+            </a:pPr>
+            <a:r>
+              <a:rPr lang="en-US" sz="2200" b="1" dirty="0">
+                <a:solidFill>
+                  <a:srgbClr val="222222"/>
+                </a:solidFill>
+                <a:latin typeface="Calibri" pitchFamily="34" charset="0"/>
+                <a:ea typeface="Calibri" pitchFamily="34" charset="-122"/>
+                <a:cs typeface="Calibri" pitchFamily="34" charset="-120"/>
+              </a:rPr>
+              <a:t>次のイベントに向けて（データの整理）</a:t>
+            </a:r>
+            <a:endParaRPr lang="en-US" sz="2200" dirty="0"/>
+          </a:p>
+        </p:txBody>
+      </p:sp>
+      <p:sp>
+        <p:nvSpPr>
+          <p:cNvPr id="4" name="Text 2"/>
+          <p:cNvSpPr txBox="1"/>
+          <p:nvPr/>
+        </p:nvSpPr>
+        <p:spPr>
+          <a:xfrm>
+            <a:off x="566928" y="1481328"/>
+            <a:ext cx="6428232" cy="459994"/>
+          </a:xfrm>
+          <a:prstGeom prst="rect">
+            <a:avLst/>
+          </a:prstGeom>
+          <a:noFill/>
+          <a:ln/>
+        </p:spPr>
+        <p:txBody>
+          <a:bodyPr wrap="square" lIns="0" tIns="0" rIns="0" bIns="0" rtlCol="0" anchor="t"/>
+          <a:lstStyle/>
+          <a:p>
+            <a:pPr indent="0" marL="0">
+              <a:lnSpc>
+                <a:spcPct val="125000"/>
+              </a:lnSpc>
+              <a:buNone/>
+            </a:pPr>
+            <a:r>
+              <a:rPr lang="en-US" sz="1100" dirty="0">
+                <a:solidFill>
+                  <a:srgbClr val="222222"/>
+                </a:solidFill>
+                <a:latin typeface="Calibri" pitchFamily="34" charset="0"/>
+                <a:ea typeface="Calibri" pitchFamily="34" charset="-122"/>
+                <a:cs typeface="Calibri" pitchFamily="34" charset="-120"/>
+              </a:rPr>
+              <a:t>サーバーで次のコマンドを実行します（事務局のPCではなく、システムが動いているサーバーでの作業です）。</a:t>
+            </a:r>
+            <a:endParaRPr lang="en-US" sz="1100" dirty="0"/>
+          </a:p>
+        </p:txBody>
+      </p:sp>
+      <p:sp>
+        <p:nvSpPr>
+          <p:cNvPr id="5" name="Text 3"/>
+          <p:cNvSpPr txBox="1"/>
+          <p:nvPr/>
+        </p:nvSpPr>
+        <p:spPr>
+          <a:xfrm>
+            <a:off x="566928" y="2087626"/>
+            <a:ext cx="6428232" cy="257810"/>
+          </a:xfrm>
+          <a:prstGeom prst="rect">
+            <a:avLst/>
+          </a:prstGeom>
+          <a:noFill/>
+          <a:ln/>
+        </p:spPr>
+        <p:txBody>
+          <a:bodyPr wrap="square" lIns="0" tIns="0" rIns="0" bIns="0" rtlCol="0" anchor="t"/>
+          <a:lstStyle/>
+          <a:p>
+            <a:pPr indent="0" marL="0">
+              <a:buNone/>
+            </a:pPr>
+            <a:r>
+              <a:rPr lang="en-US" sz="1400" b="1" dirty="0">
+                <a:solidFill>
+                  <a:srgbClr val="1E2761"/>
+                </a:solidFill>
+                <a:latin typeface="Calibri" pitchFamily="34" charset="0"/>
+                <a:ea typeface="Calibri" pitchFamily="34" charset="-122"/>
+                <a:cs typeface="Calibri" pitchFamily="34" charset="-120"/>
+              </a:rPr>
+              <a:t>テストで入れた回答だけ消したいとき</a:t>
+            </a:r>
+            <a:endParaRPr lang="en-US" sz="1400" dirty="0"/>
+          </a:p>
+        </p:txBody>
+      </p:sp>
+      <p:sp>
+        <p:nvSpPr>
+          <p:cNvPr id="6" name="Text 4"/>
+          <p:cNvSpPr txBox="1"/>
+          <p:nvPr/>
+        </p:nvSpPr>
+        <p:spPr>
+          <a:xfrm>
+            <a:off x="566928" y="2418588"/>
+            <a:ext cx="6428232" cy="257429"/>
+          </a:xfrm>
+          <a:prstGeom prst="rect">
+            <a:avLst/>
+          </a:prstGeom>
+          <a:noFill/>
+          <a:ln/>
+        </p:spPr>
+        <p:txBody>
+          <a:bodyPr wrap="square" lIns="0" tIns="0" rIns="0" bIns="0" rtlCol="0" anchor="t"/>
+          <a:lstStyle/>
+          <a:p>
+            <a:pPr indent="0" marL="0">
+              <a:lnSpc>
+                <a:spcPct val="125000"/>
+              </a:lnSpc>
+              <a:buNone/>
+            </a:pPr>
+            <a:r>
+              <a:rPr lang="en-US" sz="1100" dirty="0">
+                <a:solidFill>
+                  <a:srgbClr val="222222"/>
+                </a:solidFill>
+                <a:latin typeface="Calibri" pitchFamily="34" charset="0"/>
+                <a:ea typeface="Calibri" pitchFamily="34" charset="-122"/>
+                <a:cs typeface="Calibri" pitchFamily="34" charset="-120"/>
+              </a:rPr>
+              <a:t>まず件数を確認し、問題なければ実行します。</a:t>
+            </a:r>
+            <a:endParaRPr lang="en-US" sz="1100" dirty="0"/>
+          </a:p>
+        </p:txBody>
+      </p:sp>
+      <p:sp>
+        <p:nvSpPr>
+          <p:cNvPr id="7" name="Text 5"/>
+          <p:cNvSpPr txBox="1"/>
+          <p:nvPr/>
+        </p:nvSpPr>
+        <p:spPr>
+          <a:xfrm>
+            <a:off x="713232" y="2712593"/>
+            <a:ext cx="6281928" cy="257429"/>
+          </a:xfrm>
+          <a:prstGeom prst="rect">
+            <a:avLst/>
+          </a:prstGeom>
+          <a:noFill/>
+          <a:ln/>
+        </p:spPr>
+        <p:txBody>
+          <a:bodyPr wrap="square" lIns="0" tIns="0" rIns="0" bIns="0" rtlCol="0" anchor="t"/>
+          <a:lstStyle/>
+          <a:p>
+            <a:pPr marL="342900" indent="-342900">
+              <a:lnSpc>
+                <a:spcPct val="125000"/>
+              </a:lnSpc>
+              <a:buSzPct val="100000"/>
+              <a:buChar char="●"/>
+            </a:pPr>
+            <a:r>
+              <a:rPr lang="en-US" sz="1100" dirty="0">
+                <a:solidFill>
+                  <a:srgbClr val="222222"/>
+                </a:solidFill>
+                <a:latin typeface="Calibri" pitchFamily="34" charset="0"/>
+                <a:ea typeface="Calibri" pitchFamily="34" charset="-122"/>
+                <a:cs typeface="Calibri" pitchFamily="34" charset="-120"/>
+              </a:rPr>
+              <a:t>確認：</a:t>
+            </a:r>
+            <a:pPr indent="0" marL="0">
+              <a:lnSpc>
+                <a:spcPct val="125000"/>
+              </a:lnSpc>
+              <a:buNone/>
+            </a:pPr>
+            <a:r>
+              <a:rPr lang="en-US" sz="1045" dirty="0">
+                <a:solidFill>
+                  <a:srgbClr val="222222"/>
+                </a:solidFill>
+                <a:latin typeface="Courier New" pitchFamily="34" charset="0"/>
+                <a:ea typeface="Courier New" pitchFamily="34" charset="-122"/>
+                <a:cs typeface="Courier New" pitchFamily="34" charset="-120"/>
+              </a:rPr>
+              <a:t>bin/reset.sh --responses --dry-run</a:t>
+            </a:r>
+            <a:endParaRPr lang="en-US" sz="1100" dirty="0"/>
+          </a:p>
+        </p:txBody>
+      </p:sp>
+      <p:sp>
+        <p:nvSpPr>
+          <p:cNvPr id="8" name="Text 6"/>
+          <p:cNvSpPr txBox="1"/>
+          <p:nvPr/>
+        </p:nvSpPr>
+        <p:spPr>
+          <a:xfrm>
+            <a:off x="713232" y="2988310"/>
+            <a:ext cx="6281928" cy="257429"/>
+          </a:xfrm>
+          <a:prstGeom prst="rect">
+            <a:avLst/>
+          </a:prstGeom>
+          <a:noFill/>
+          <a:ln/>
+        </p:spPr>
+        <p:txBody>
+          <a:bodyPr wrap="square" lIns="0" tIns="0" rIns="0" bIns="0" rtlCol="0" anchor="t"/>
+          <a:lstStyle/>
+          <a:p>
+            <a:pPr marL="342900" indent="-342900">
+              <a:lnSpc>
+                <a:spcPct val="125000"/>
+              </a:lnSpc>
+              <a:buSzPct val="100000"/>
+              <a:buChar char="●"/>
+            </a:pPr>
+            <a:r>
+              <a:rPr lang="en-US" sz="1100" dirty="0">
+                <a:solidFill>
+                  <a:srgbClr val="222222"/>
+                </a:solidFill>
+                <a:latin typeface="Calibri" pitchFamily="34" charset="0"/>
+                <a:ea typeface="Calibri" pitchFamily="34" charset="-122"/>
+                <a:cs typeface="Calibri" pitchFamily="34" charset="-120"/>
+              </a:rPr>
+              <a:t>実行：</a:t>
+            </a:r>
+            <a:pPr indent="0" marL="0">
+              <a:lnSpc>
+                <a:spcPct val="125000"/>
+              </a:lnSpc>
+              <a:buNone/>
+            </a:pPr>
+            <a:r>
+              <a:rPr lang="en-US" sz="1045" dirty="0">
+                <a:solidFill>
+                  <a:srgbClr val="222222"/>
+                </a:solidFill>
+                <a:latin typeface="Courier New" pitchFamily="34" charset="0"/>
+                <a:ea typeface="Courier New" pitchFamily="34" charset="-122"/>
+                <a:cs typeface="Courier New" pitchFamily="34" charset="-120"/>
+              </a:rPr>
+              <a:t>bin/reset.sh --responses --force</a:t>
+            </a:r>
+            <a:endParaRPr lang="en-US" sz="1100" dirty="0"/>
+          </a:p>
+        </p:txBody>
+      </p:sp>
+      <p:sp>
+        <p:nvSpPr>
+          <p:cNvPr id="9" name="Text 7"/>
+          <p:cNvSpPr txBox="1"/>
+          <p:nvPr/>
+        </p:nvSpPr>
+        <p:spPr>
+          <a:xfrm>
+            <a:off x="566928" y="3264027"/>
+            <a:ext cx="6428232" cy="257429"/>
+          </a:xfrm>
+          <a:prstGeom prst="rect">
+            <a:avLst/>
+          </a:prstGeom>
+          <a:noFill/>
+          <a:ln/>
+        </p:spPr>
+        <p:txBody>
+          <a:bodyPr wrap="square" lIns="0" tIns="0" rIns="0" bIns="0" rtlCol="0" anchor="t"/>
+          <a:lstStyle/>
+          <a:p>
+            <a:pPr indent="0" marL="0">
+              <a:lnSpc>
+                <a:spcPct val="125000"/>
+              </a:lnSpc>
+              <a:buNone/>
+            </a:pPr>
+            <a:r>
+              <a:rPr lang="en-US" sz="1100" dirty="0">
+                <a:solidFill>
+                  <a:srgbClr val="222222"/>
+                </a:solidFill>
+                <a:latin typeface="Calibri" pitchFamily="34" charset="0"/>
+                <a:ea typeface="Calibri" pitchFamily="34" charset="-122"/>
+                <a:cs typeface="Calibri" pitchFamily="34" charset="-120"/>
+              </a:rPr>
+              <a:t>イベント・企業・設問・景品・壁紙・アカウントは残ります。</a:t>
+            </a:r>
+            <a:endParaRPr lang="en-US" sz="1100" dirty="0"/>
+          </a:p>
+        </p:txBody>
+      </p:sp>
+      <p:sp>
+        <p:nvSpPr>
+          <p:cNvPr id="10" name="Text 8"/>
+          <p:cNvSpPr txBox="1"/>
+          <p:nvPr/>
+        </p:nvSpPr>
+        <p:spPr>
+          <a:xfrm>
+            <a:off x="566928" y="3667760"/>
+            <a:ext cx="6428232" cy="257810"/>
+          </a:xfrm>
+          <a:prstGeom prst="rect">
+            <a:avLst/>
+          </a:prstGeom>
+          <a:noFill/>
+          <a:ln/>
+        </p:spPr>
+        <p:txBody>
+          <a:bodyPr wrap="square" lIns="0" tIns="0" rIns="0" bIns="0" rtlCol="0" anchor="t"/>
+          <a:lstStyle/>
+          <a:p>
+            <a:pPr indent="0" marL="0">
+              <a:buNone/>
+            </a:pPr>
+            <a:r>
+              <a:rPr lang="en-US" sz="1400" b="1" dirty="0">
+                <a:solidFill>
+                  <a:srgbClr val="1E2761"/>
+                </a:solidFill>
+                <a:latin typeface="Calibri" pitchFamily="34" charset="0"/>
+                <a:ea typeface="Calibri" pitchFamily="34" charset="-122"/>
+                <a:cs typeface="Calibri" pitchFamily="34" charset="-120"/>
+              </a:rPr>
+              <a:t>イベントごと作り直したいとき</a:t>
+            </a:r>
+            <a:endParaRPr lang="en-US" sz="1400" dirty="0"/>
+          </a:p>
+        </p:txBody>
+      </p:sp>
+      <p:sp>
+        <p:nvSpPr>
+          <p:cNvPr id="11" name="Text 9"/>
+          <p:cNvSpPr txBox="1"/>
+          <p:nvPr/>
+        </p:nvSpPr>
+        <p:spPr>
+          <a:xfrm>
+            <a:off x="713232" y="3998722"/>
+            <a:ext cx="6281928" cy="257429"/>
+          </a:xfrm>
+          <a:prstGeom prst="rect">
+            <a:avLst/>
+          </a:prstGeom>
+          <a:noFill/>
+          <a:ln/>
+        </p:spPr>
+        <p:txBody>
+          <a:bodyPr wrap="square" lIns="0" tIns="0" rIns="0" bIns="0" rtlCol="0" anchor="t"/>
+          <a:lstStyle/>
+          <a:p>
+            <a:pPr marL="342900" indent="-342900">
+              <a:lnSpc>
+                <a:spcPct val="125000"/>
+              </a:lnSpc>
+              <a:buSzPct val="100000"/>
+              <a:buChar char="●"/>
+            </a:pPr>
+            <a:r>
+              <a:rPr lang="en-US" sz="1100" dirty="0">
+                <a:solidFill>
+                  <a:srgbClr val="222222"/>
+                </a:solidFill>
+                <a:latin typeface="Calibri" pitchFamily="34" charset="0"/>
+                <a:ea typeface="Calibri" pitchFamily="34" charset="-122"/>
+                <a:cs typeface="Calibri" pitchFamily="34" charset="-120"/>
+              </a:rPr>
+              <a:t>実行：</a:t>
+            </a:r>
+            <a:pPr indent="0" marL="0">
+              <a:lnSpc>
+                <a:spcPct val="125000"/>
+              </a:lnSpc>
+              <a:buNone/>
+            </a:pPr>
+            <a:r>
+              <a:rPr lang="en-US" sz="1045" dirty="0">
+                <a:solidFill>
+                  <a:srgbClr val="222222"/>
+                </a:solidFill>
+                <a:latin typeface="Courier New" pitchFamily="34" charset="0"/>
+                <a:ea typeface="Courier New" pitchFamily="34" charset="-122"/>
+                <a:cs typeface="Courier New" pitchFamily="34" charset="-120"/>
+              </a:rPr>
+              <a:t>bin/reset.sh --all --force</a:t>
+            </a:r>
+            <a:endParaRPr lang="en-US" sz="1100" dirty="0"/>
+          </a:p>
+        </p:txBody>
+      </p:sp>
+      <p:sp>
+        <p:nvSpPr>
+          <p:cNvPr id="12" name="Shape 10"/>
+          <p:cNvSpPr/>
+          <p:nvPr/>
+        </p:nvSpPr>
+        <p:spPr>
+          <a:xfrm>
+            <a:off x="566928" y="4274439"/>
+            <a:ext cx="6428232" cy="817817"/>
+          </a:xfrm>
+          <a:prstGeom prst="roundRect">
+            <a:avLst>
+              <a:gd name="adj" fmla="val 6709"/>
+            </a:avLst>
+          </a:prstGeom>
+          <a:solidFill>
+            <a:srgbClr val="FDF0E6"/>
+          </a:solidFill>
+          <a:ln w="9525">
+            <a:solidFill>
+              <a:srgbClr val="E08A3C"/>
+            </a:solidFill>
+            <a:prstDash val="solid"/>
+          </a:ln>
+        </p:spPr>
+      </p:sp>
+      <p:sp>
+        <p:nvSpPr>
+          <p:cNvPr id="13" name="Text 11"/>
+          <p:cNvSpPr txBox="1"/>
+          <p:nvPr/>
+        </p:nvSpPr>
+        <p:spPr>
+          <a:xfrm>
+            <a:off x="658368" y="4365879"/>
+            <a:ext cx="237744" cy="237744"/>
+          </a:xfrm>
+          <a:prstGeom prst="rect">
+            <a:avLst/>
+          </a:prstGeom>
+          <a:noFill/>
+          <a:ln/>
+        </p:spPr>
+        <p:txBody>
+          <a:bodyPr wrap="square" lIns="0" tIns="0" rIns="0" bIns="0" rtlCol="0" anchor="ctr"/>
+          <a:lstStyle/>
+          <a:p>
+            <a:pPr algn="ctr" indent="0" marL="0">
+              <a:buNone/>
+            </a:pPr>
+            <a:r>
+              <a:rPr lang="en-US" sz="1200" b="1" dirty="0">
+                <a:solidFill>
+                  <a:srgbClr val="C25A17"/>
+                </a:solidFill>
+                <a:latin typeface="Calibri" pitchFamily="34" charset="0"/>
+                <a:ea typeface="Calibri" pitchFamily="34" charset="-122"/>
+                <a:cs typeface="Calibri" pitchFamily="34" charset="-120"/>
+              </a:rPr>
+              <a:t>！</a:t>
+            </a:r>
+            <a:endParaRPr lang="en-US" sz="1200" dirty="0"/>
+          </a:p>
+        </p:txBody>
+      </p:sp>
+      <p:sp>
+        <p:nvSpPr>
+          <p:cNvPr id="14" name="Text 12"/>
+          <p:cNvSpPr txBox="1"/>
+          <p:nvPr/>
+        </p:nvSpPr>
+        <p:spPr>
+          <a:xfrm>
+            <a:off x="950976" y="4384167"/>
+            <a:ext cx="5925312" cy="634937"/>
+          </a:xfrm>
+          <a:prstGeom prst="rect">
+            <a:avLst/>
+          </a:prstGeom>
+          <a:noFill/>
+          <a:ln/>
+        </p:spPr>
+        <p:txBody>
+          <a:bodyPr wrap="square" lIns="0" tIns="0" rIns="0" bIns="0" rtlCol="0" anchor="t"/>
+          <a:lstStyle/>
+          <a:p>
+            <a:pPr indent="0" marL="0">
+              <a:lnSpc>
+                <a:spcPct val="120000"/>
+              </a:lnSpc>
+              <a:buNone/>
+            </a:pPr>
+            <a:r>
+              <a:rPr lang="en-US" sz="1050" dirty="0">
+                <a:solidFill>
+                  <a:srgbClr val="222222"/>
+                </a:solidFill>
+                <a:latin typeface="Calibri" pitchFamily="34" charset="0"/>
+                <a:ea typeface="Calibri" pitchFamily="34" charset="-122"/>
+                <a:cs typeface="Calibri" pitchFamily="34" charset="-120"/>
+              </a:rPr>
+              <a:t>どちらも元に戻せません。実行前に自動でバックアップを取りますが、念のため大事なデータはCSVで書き出しておいてください。</a:t>
+            </a:r>
+            <a:pPr indent="0" marL="0">
+              <a:lnSpc>
+                <a:spcPct val="120000"/>
+              </a:lnSpc>
+              <a:buNone/>
+            </a:pPr>
+            <a:r>
+              <a:rPr lang="en-US" sz="1050" b="1" dirty="0">
+                <a:solidFill>
+                  <a:srgbClr val="222222"/>
+                </a:solidFill>
+                <a:latin typeface="Calibri" pitchFamily="34" charset="0"/>
+                <a:ea typeface="Calibri" pitchFamily="34" charset="-122"/>
+                <a:cs typeface="Calibri" pitchFamily="34" charset="-120"/>
+              </a:rPr>
+              <a:t>企業担当者のアカウントは企業と一緒に消えます</a:t>
+            </a:r>
+            <a:pPr indent="0" marL="0">
+              <a:lnSpc>
+                <a:spcPct val="120000"/>
+              </a:lnSpc>
+              <a:buNone/>
+            </a:pPr>
+            <a:r>
+              <a:rPr lang="en-US" sz="1050" dirty="0">
+                <a:solidFill>
+                  <a:srgbClr val="222222"/>
+                </a:solidFill>
+                <a:latin typeface="Calibri" pitchFamily="34" charset="0"/>
+                <a:ea typeface="Calibri" pitchFamily="34" charset="-122"/>
+                <a:cs typeface="Calibri" pitchFamily="34" charset="-120"/>
+              </a:rPr>
+              <a:t>（主催者・受付は残ります）。</a:t>
+            </a:r>
+            <a:endParaRPr lang="en-US" sz="1050" dirty="0"/>
+          </a:p>
+        </p:txBody>
+      </p:sp>
+      <p:sp>
+        <p:nvSpPr>
+          <p:cNvPr id="15" name="Shape 13"/>
+          <p:cNvSpPr/>
+          <p:nvPr/>
+        </p:nvSpPr>
+        <p:spPr>
+          <a:xfrm>
+            <a:off x="566928" y="5165408"/>
+            <a:ext cx="6428232" cy="431102"/>
+          </a:xfrm>
+          <a:prstGeom prst="roundRect">
+            <a:avLst>
+              <a:gd name="adj" fmla="val 12726"/>
+            </a:avLst>
+          </a:prstGeom>
+          <a:solidFill>
+            <a:srgbClr val="E8ECF8"/>
+          </a:solidFill>
+          <a:ln w="9525">
+            <a:solidFill>
+              <a:srgbClr val="1E2761"/>
+            </a:solidFill>
+            <a:prstDash val="solid"/>
+          </a:ln>
+        </p:spPr>
+      </p:sp>
+      <p:sp>
+        <p:nvSpPr>
+          <p:cNvPr id="16" name="Text 14"/>
+          <p:cNvSpPr txBox="1"/>
+          <p:nvPr/>
+        </p:nvSpPr>
+        <p:spPr>
+          <a:xfrm>
+            <a:off x="658368" y="5256848"/>
+            <a:ext cx="237744" cy="237744"/>
+          </a:xfrm>
+          <a:prstGeom prst="rect">
+            <a:avLst/>
+          </a:prstGeom>
+          <a:noFill/>
+          <a:ln/>
+        </p:spPr>
+        <p:txBody>
+          <a:bodyPr wrap="square" lIns="0" tIns="0" rIns="0" bIns="0" rtlCol="0" anchor="ctr"/>
+          <a:lstStyle/>
+          <a:p>
+            <a:pPr algn="ctr" indent="0" marL="0">
+              <a:buNone/>
+            </a:pPr>
+            <a:r>
+              <a:rPr lang="en-US" sz="1200" b="1" dirty="0">
+                <a:solidFill>
+                  <a:srgbClr val="1E2761"/>
+                </a:solidFill>
+                <a:latin typeface="Calibri" pitchFamily="34" charset="0"/>
+                <a:ea typeface="Calibri" pitchFamily="34" charset="-122"/>
+                <a:cs typeface="Calibri" pitchFamily="34" charset="-120"/>
+              </a:rPr>
+              <a:t>i</a:t>
+            </a:r>
+            <a:endParaRPr lang="en-US" sz="1200" dirty="0"/>
+          </a:p>
+        </p:txBody>
+      </p:sp>
+      <p:sp>
+        <p:nvSpPr>
+          <p:cNvPr id="17" name="Text 15"/>
+          <p:cNvSpPr txBox="1"/>
+          <p:nvPr/>
+        </p:nvSpPr>
+        <p:spPr>
+          <a:xfrm>
+            <a:off x="950976" y="5275136"/>
+            <a:ext cx="5925312" cy="248221"/>
+          </a:xfrm>
+          <a:prstGeom prst="rect">
+            <a:avLst/>
+          </a:prstGeom>
+          <a:noFill/>
+          <a:ln/>
+        </p:spPr>
+        <p:txBody>
+          <a:bodyPr wrap="square" lIns="0" tIns="0" rIns="0" bIns="0" rtlCol="0" anchor="t"/>
+          <a:lstStyle/>
+          <a:p>
+            <a:pPr indent="0" marL="0">
+              <a:lnSpc>
+                <a:spcPct val="120000"/>
+              </a:lnSpc>
+              <a:buNone/>
+            </a:pPr>
+            <a:r>
+              <a:rPr lang="en-US" sz="1050" dirty="0">
+                <a:solidFill>
+                  <a:srgbClr val="222222"/>
+                </a:solidFill>
+                <a:latin typeface="Calibri" pitchFamily="34" charset="0"/>
+                <a:ea typeface="Calibri" pitchFamily="34" charset="-122"/>
+                <a:cs typeface="Calibri" pitchFamily="34" charset="-120"/>
+              </a:rPr>
+              <a:t>実行するとデータベース名の入力を求められます。画面の指示どおりに入力してください。</a:t>
+            </a:r>
+            <a:endParaRPr lang="en-US" sz="1050" dirty="0"/>
+          </a:p>
+        </p:txBody>
+      </p:sp>
+      <p:sp>
+        <p:nvSpPr>
+          <p:cNvPr id="18" name="Text 16"/>
+          <p:cNvSpPr txBox="1"/>
+          <p:nvPr/>
+        </p:nvSpPr>
+        <p:spPr>
+          <a:xfrm>
+            <a:off x="566928" y="10186416"/>
+            <a:ext cx="6428232" cy="228600"/>
+          </a:xfrm>
+          <a:prstGeom prst="rect">
+            <a:avLst/>
+          </a:prstGeom>
+          <a:noFill/>
+          <a:ln/>
+        </p:spPr>
+        <p:txBody>
+          <a:bodyPr wrap="square" lIns="0" tIns="0" rIns="0" bIns="0" rtlCol="0" anchor="ctr"/>
+          <a:lstStyle/>
+          <a:p>
+            <a:pPr algn="r" indent="0" marL="0">
+              <a:buNone/>
+            </a:pPr>
+            <a:r>
+              <a:rPr lang="en-US" sz="900" dirty="0">
+                <a:solidFill>
+                  <a:srgbClr val="6B6B6B"/>
+                </a:solidFill>
+                <a:latin typeface="Calibri" pitchFamily="34" charset="0"/>
+                <a:ea typeface="Calibri" pitchFamily="34" charset="-122"/>
+                <a:cs typeface="Calibri" pitchFamily="34" charset="-120"/>
+              </a:rPr>
+              <a:t>主催者向け　34</a:t>
+            </a:r>
+            <a:endParaRPr lang="en-US" sz="900" dirty="0"/>
+          </a:p>
+        </p:txBody>
+      </p:sp>
+    </p:spTree>
+  </p:cSld>
+  <p:clrMapOvr>
+    <a:masterClrMapping/>
+  </p:clrMapOvr>
+</p:sld>
+</file>
+
+<file path=ppt/slides/slide35.xml><?xml version="1.0" encoding="utf-8"?>
+<p:sld xmlns:a="http://schemas.openxmlformats.org/drawingml/2006/main" xmlns:r="http://schemas.openxmlformats.org/officeDocument/2006/relationships" xmlns:p="http://schemas.openxmlformats.org/presentationml/2006/main">
+  <p:cSld name="Slide 35">
+    <p:bg>
+      <p:bgPr>
+        <a:solidFill>
+          <a:srgbClr val="FFFFFF"/>
+        </a:solidFill>
+      </p:bgPr>
+    </p:bg>
+    <p:spTree>
+      <p:nvGrpSpPr>
+        <p:cNvPr id="1" name=""/>
+        <p:cNvGrpSpPr/>
+        <p:nvPr/>
+      </p:nvGrpSpPr>
+      <p:grpSpPr>
+        <a:xfrm>
+          <a:off x="0" y="0"/>
+          <a:ext cx="0" cy="0"/>
+          <a:chOff x="0" y="0"/>
+          <a:chExt cx="0" cy="0"/>
+        </a:xfrm>
+      </p:grpSpPr>
+      <p:sp>
+        <p:nvSpPr>
+          <p:cNvPr id="2" name="Text 0"/>
+          <p:cNvSpPr txBox="1"/>
+          <p:nvPr/>
+        </p:nvSpPr>
+        <p:spPr>
+          <a:xfrm>
+            <a:off x="566928" y="457200"/>
+            <a:ext cx="6428232" cy="237744"/>
+          </a:xfrm>
+          <a:prstGeom prst="rect">
+            <a:avLst/>
+          </a:prstGeom>
+          <a:noFill/>
+          <a:ln/>
+        </p:spPr>
+        <p:txBody>
+          <a:bodyPr wrap="square" lIns="0" tIns="0" rIns="0" bIns="0" rtlCol="0" anchor="ctr"/>
+          <a:lstStyle/>
+          <a:p>
+            <a:pPr indent="0" marL="0">
+              <a:buNone/>
+            </a:pPr>
+            <a:r>
+              <a:rPr lang="en-US" sz="1000" b="1" dirty="0">
+                <a:solidFill>
+                  <a:srgbClr val="1E2761"/>
+                </a:solidFill>
+                <a:latin typeface="Calibri" pitchFamily="34" charset="0"/>
+                <a:ea typeface="Calibri" pitchFamily="34" charset="-122"/>
+                <a:cs typeface="Calibri" pitchFamily="34" charset="-120"/>
+              </a:rPr>
+              <a:t>主催者マニュアル</a:t>
+            </a:r>
+            <a:endParaRPr lang="en-US" sz="1000" dirty="0"/>
+          </a:p>
+        </p:txBody>
+      </p:sp>
+      <p:sp>
+        <p:nvSpPr>
+          <p:cNvPr id="3" name="Text 1"/>
+          <p:cNvSpPr txBox="1"/>
+          <p:nvPr/>
+        </p:nvSpPr>
+        <p:spPr>
+          <a:xfrm>
+            <a:off x="566928" y="713232"/>
+            <a:ext cx="6428232" cy="640080"/>
+          </a:xfrm>
+          <a:prstGeom prst="rect">
+            <a:avLst/>
+          </a:prstGeom>
+          <a:noFill/>
+          <a:ln/>
+        </p:spPr>
+        <p:txBody>
+          <a:bodyPr wrap="square" lIns="0" tIns="0" rIns="0" bIns="0" rtlCol="0" anchor="t"/>
+          <a:lstStyle/>
+          <a:p>
+            <a:pPr indent="0" marL="0">
+              <a:buNone/>
+            </a:pPr>
+            <a:r>
+              <a:rPr lang="en-US" sz="2200" b="1" dirty="0">
+                <a:solidFill>
+                  <a:srgbClr val="222222"/>
+                </a:solidFill>
+                <a:latin typeface="Calibri" pitchFamily="34" charset="0"/>
+                <a:ea typeface="Calibri" pitchFamily="34" charset="-122"/>
+                <a:cs typeface="Calibri" pitchFamily="34" charset="-120"/>
+              </a:rPr>
               <a:t>困ったときは</a:t>
             </a:r>
             <a:endParaRPr lang="en-US" sz="2200" dirty="0"/>
@@ -25924,7 +28317,7 @@
                 <a:ea typeface="Calibri" pitchFamily="34" charset="-122"/>
                 <a:cs typeface="Calibri" pitchFamily="34" charset="-120"/>
               </a:rPr>
-              <a:t>主催者向け　33</a:t>
+              <a:t>主催者向け　35</a:t>
             </a:r>
             <a:endParaRPr lang="en-US" sz="900" dirty="0"/>
           </a:p>

--- a/docs/manual-organizer.pptx
+++ b/docs/manual-organizer.pptx
@@ -40,9 +40,10 @@
     <p:sldId id="288" r:id="rId34"/>
     <p:sldId id="289" r:id="rId35"/>
     <p:sldId id="290" r:id="rId36"/>
+    <p:sldId id="291" r:id="rId37"/>
   </p:sldIdLst>
   <p:notesMasterIdLst>
-    <p:notesMasterId r:id="rId37"/>
+    <p:notesMasterId r:id="rId38"/>
   </p:notesMasterIdLst>
   <p:sldSz cx="7562088" cy="10689336"/>
   <p:notesSz cx="10689336" cy="7562088"/>
@@ -3024,6 +3025,94 @@
             <a:fld id="{F7021451-1387-4CA6-816F-3879F97B5CBC}" type="slidenum">
               <a:rPr lang="en-US"/>
               <a:t>35</a:t>
+            </a:fld>
+            <a:endParaRPr lang="en-US"/>
+          </a:p>
+        </p:txBody>
+      </p:sp>
+    </p:spTree>
+    <p:extLst>
+      <p:ext uri="{BB962C8B-B14F-4D97-AF65-F5344CB8AC3E}">
+        <p14:creationId xmlns:p14="http://schemas.microsoft.com/office/powerpoint/2010/main" val="1024086991"/>
+      </p:ext>
+    </p:extLst>
+  </p:cSld>
+  <p:clrMapOvr>
+    <a:masterClrMapping/>
+  </p:clrMapOvr>
+</p:notes>
+</file>
+
+<file path=ppt/notesSlides/notesSlide36.xml><?xml version="1.0" encoding="utf-8"?>
+<p:notes xmlns:a="http://schemas.openxmlformats.org/drawingml/2006/main" xmlns:r="http://schemas.openxmlformats.org/officeDocument/2006/relationships" xmlns:p="http://schemas.openxmlformats.org/presentationml/2006/main">
+  <p:cSld>
+    <p:spTree>
+      <p:nvGrpSpPr>
+        <p:cNvPr id="1" name=""/>
+        <p:cNvGrpSpPr/>
+        <p:nvPr/>
+      </p:nvGrpSpPr>
+      <p:grpSpPr>
+        <a:xfrm>
+          <a:off x="0" y="0"/>
+          <a:ext cx="0" cy="0"/>
+          <a:chOff x="0" y="0"/>
+          <a:chExt cx="0" cy="0"/>
+        </a:xfrm>
+      </p:grpSpPr>
+      <p:sp>
+        <p:nvSpPr>
+          <p:cNvPr id="2" name="Slide Image Placeholder 1"/>
+          <p:cNvSpPr>
+            <a:spLocks noGrp="1" noRot="1" noChangeAspect="1"/>
+          </p:cNvSpPr>
+          <p:nvPr>
+            <p:ph type="sldImg"/>
+          </p:nvPr>
+        </p:nvSpPr>
+        <p:spPr/>
+      </p:sp>
+      <p:sp>
+        <p:nvSpPr>
+          <p:cNvPr id="3" name="Notes Placeholder 2"/>
+          <p:cNvSpPr>
+            <a:spLocks noGrp="1"/>
+          </p:cNvSpPr>
+          <p:nvPr>
+            <p:ph type="body" idx="1"/>
+          </p:nvPr>
+        </p:nvSpPr>
+        <p:spPr/>
+        <p:txBody>
+          <a:bodyPr/>
+          <a:lstStyle/>
+          <a:p>
+            <a:r>
+              <a:rPr lang="en-US" dirty="0"/>
+              <a:t/>
+            </a:r>
+            <a:endParaRPr lang="en-US" dirty="0"/>
+          </a:p>
+        </p:txBody>
+      </p:sp>
+      <p:sp>
+        <p:nvSpPr>
+          <p:cNvPr id="4" name="Slide Number Placeholder 3"/>
+          <p:cNvSpPr>
+            <a:spLocks noGrp="1"/>
+          </p:cNvSpPr>
+          <p:nvPr>
+            <p:ph type="sldNum" sz="quarter" idx="10"/>
+          </p:nvPr>
+        </p:nvSpPr>
+        <p:spPr/>
+        <p:txBody>
+          <a:bodyPr/>
+          <a:lstStyle/>
+          <a:p>
+            <a:fld id="{F7021451-1387-4CA6-816F-3879F97B5CBC}" type="slidenum">
+              <a:rPr lang="en-US"/>
+              <a:t>36</a:t>
             </a:fld>
             <a:endParaRPr lang="en-US"/>
           </a:p>
@@ -17117,8 +17206,8 @@
         </p:blipFill>
         <p:spPr>
           <a:xfrm>
-            <a:off x="884627" y="4127246"/>
-            <a:ext cx="5792834" cy="3474720"/>
+            <a:off x="2322550" y="4127246"/>
+            <a:ext cx="2916988" cy="3474720"/>
           </a:xfrm>
           <a:prstGeom prst="rect">
             <a:avLst/>
@@ -18754,8 +18843,8 @@
         </p:blipFill>
         <p:spPr>
           <a:xfrm>
-            <a:off x="1082543" y="1481328"/>
-            <a:ext cx="5397003" cy="3474720"/>
+            <a:off x="1478847" y="1481328"/>
+            <a:ext cx="4604394" cy="3474720"/>
           </a:xfrm>
           <a:prstGeom prst="rect">
             <a:avLst/>
@@ -20278,8 +20367,8 @@
         </p:blipFill>
         <p:spPr>
           <a:xfrm>
-            <a:off x="1917560" y="1481328"/>
-            <a:ext cx="3726968" cy="3474720"/>
+            <a:off x="2255368" y="1481328"/>
+            <a:ext cx="3051351" cy="3474720"/>
           </a:xfrm>
           <a:prstGeom prst="rect">
             <a:avLst/>
@@ -20717,72 +20806,9 @@
           </a:p>
         </p:txBody>
       </p:sp>
-      <p:pic>
-        <p:nvPicPr>
-          <p:cNvPr id="15" name="Image 1" descr="C:\Users\sato\Desktop\enque\docs\images\o-group-check.png">    </p:cNvPr>
-          <p:cNvPicPr>
-            <a:picLocks noChangeAspect="1"/>
-          </p:cNvPicPr>
-          <p:nvPr/>
-        </p:nvPicPr>
-        <p:blipFill>
-          <a:blip r:embed="rId2"/>
-          <a:stretch>
-            <a:fillRect/>
-          </a:stretch>
-        </p:blipFill>
-        <p:spPr>
-          <a:xfrm>
-            <a:off x="566928" y="7046214"/>
-            <a:ext cx="6428232" cy="2485366"/>
-          </a:xfrm>
-          <a:prstGeom prst="rect">
-            <a:avLst/>
-          </a:prstGeom>
-        </p:spPr>
-      </p:pic>
-      <p:sp>
-        <p:nvSpPr>
-          <p:cNvPr id="16" name="Text 12"/>
-          <p:cNvSpPr txBox="1"/>
-          <p:nvPr/>
-        </p:nvSpPr>
-        <p:spPr>
-          <a:xfrm>
-            <a:off x="566928" y="9586444"/>
-            <a:ext cx="6428232" cy="274320"/>
-          </a:xfrm>
-          <a:prstGeom prst="rect">
-            <a:avLst/>
-          </a:prstGeom>
-          <a:noFill/>
-          <a:ln/>
-        </p:spPr>
-        <p:txBody>
-          <a:bodyPr wrap="square" lIns="0" tIns="0" rIns="0" bIns="0" rtlCol="0" anchor="ctr"/>
-          <a:lstStyle/>
-          <a:p>
-            <a:pPr algn="ctr" indent="0" marL="0">
-              <a:buNone/>
-            </a:pPr>
-            <a:r>
-              <a:rPr lang="en-US" sz="950" dirty="0">
-                <a:solidFill>
-                  <a:srgbClr val="6B6B6B"/>
-                </a:solidFill>
-                <a:latin typeface="Calibri" pitchFamily="34" charset="0"/>
-                <a:ea typeface="Calibri" pitchFamily="34" charset="-122"/>
-                <a:cs typeface="Calibri" pitchFamily="34" charset="-120"/>
-              </a:rPr>
-              <a:t>「グループの構成」の「来場人数との照合」の表（差の分布が見えるもの）。</a:t>
-            </a:r>
-            <a:endParaRPr lang="en-US" sz="950" dirty="0"/>
-          </a:p>
-        </p:txBody>
-      </p:sp>
-      <p:sp>
-        <p:nvSpPr>
-          <p:cNvPr id="17" name="Text 13"/>
+      <p:sp>
+        <p:nvSpPr>
+          <p:cNvPr id="15" name="Text 12"/>
           <p:cNvSpPr txBox="1"/>
           <p:nvPr/>
         </p:nvSpPr>
@@ -20923,300 +20949,15 @@
                 <a:ea typeface="Calibri" pitchFamily="34" charset="-122"/>
                 <a:cs typeface="Calibri" pitchFamily="34" charset="-120"/>
               </a:rPr>
-              <a:t>終了後1：受付を締める</a:t>
+              <a:t>当日：グループの構成を集計する（つづき）</a:t>
             </a:r>
             <a:endParaRPr lang="en-US" sz="2200" dirty="0"/>
-          </a:p>
-        </p:txBody>
-      </p:sp>
-      <p:sp>
-        <p:nvSpPr>
-          <p:cNvPr id="4" name="Shape 2"/>
-          <p:cNvSpPr/>
-          <p:nvPr/>
-        </p:nvSpPr>
-        <p:spPr>
-          <a:xfrm>
-            <a:off x="566928" y="1499616"/>
-            <a:ext cx="274320" cy="274320"/>
-          </a:xfrm>
-          <a:prstGeom prst="ellipse">
-            <a:avLst/>
-          </a:prstGeom>
-          <a:solidFill>
-            <a:srgbClr val="1E2761"/>
-          </a:solidFill>
-          <a:ln/>
-        </p:spPr>
-      </p:sp>
-      <p:sp>
-        <p:nvSpPr>
-          <p:cNvPr id="5" name="Text 3"/>
-          <p:cNvSpPr txBox="1"/>
-          <p:nvPr/>
-        </p:nvSpPr>
-        <p:spPr>
-          <a:xfrm>
-            <a:off x="566928" y="1499616"/>
-            <a:ext cx="274320" cy="274320"/>
-          </a:xfrm>
-          <a:prstGeom prst="rect">
-            <a:avLst/>
-          </a:prstGeom>
-          <a:noFill/>
-          <a:ln/>
-        </p:spPr>
-        <p:txBody>
-          <a:bodyPr wrap="square" lIns="0" tIns="0" rIns="0" bIns="0" rtlCol="0" anchor="ctr"/>
-          <a:lstStyle/>
-          <a:p>
-            <a:pPr algn="ctr" indent="0" marL="0">
-              <a:buNone/>
-            </a:pPr>
-            <a:r>
-              <a:rPr lang="en-US" sz="1100" b="1" dirty="0">
-                <a:solidFill>
-                  <a:srgbClr val="FFFFFF"/>
-                </a:solidFill>
-                <a:latin typeface="Calibri" pitchFamily="34" charset="0"/>
-                <a:ea typeface="Calibri" pitchFamily="34" charset="-122"/>
-                <a:cs typeface="Calibri" pitchFamily="34" charset="-120"/>
-              </a:rPr>
-              <a:t>1</a:t>
-            </a:r>
-            <a:endParaRPr lang="en-US" sz="1100" dirty="0"/>
-          </a:p>
-        </p:txBody>
-      </p:sp>
-      <p:sp>
-        <p:nvSpPr>
-          <p:cNvPr id="6" name="Text 4"/>
-          <p:cNvSpPr txBox="1"/>
-          <p:nvPr/>
-        </p:nvSpPr>
-        <p:spPr>
-          <a:xfrm>
-            <a:off x="969264" y="1481328"/>
-            <a:ext cx="6025896" cy="478409"/>
-          </a:xfrm>
-          <a:prstGeom prst="rect">
-            <a:avLst/>
-          </a:prstGeom>
-          <a:noFill/>
-          <a:ln/>
-        </p:spPr>
-        <p:txBody>
-          <a:bodyPr wrap="square" lIns="0" tIns="0" rIns="0" bIns="0" rtlCol="0" anchor="t"/>
-          <a:lstStyle/>
-          <a:p>
-            <a:pPr indent="0" marL="0">
-              <a:lnSpc>
-                <a:spcPct val="125000"/>
-              </a:lnSpc>
-              <a:buNone/>
-            </a:pPr>
-            <a:r>
-              <a:rPr lang="en-US" sz="1150" dirty="0">
-                <a:solidFill>
-                  <a:srgbClr val="222222"/>
-                </a:solidFill>
-                <a:latin typeface="Calibri" pitchFamily="34" charset="0"/>
-                <a:ea typeface="Calibri" pitchFamily="34" charset="-122"/>
-                <a:cs typeface="Calibri" pitchFamily="34" charset="-120"/>
-              </a:rPr>
-              <a:t>ダッシュボードの「イベント設定」で、状態を</a:t>
-            </a:r>
-            <a:pPr indent="0" marL="0">
-              <a:lnSpc>
-                <a:spcPct val="125000"/>
-              </a:lnSpc>
-              <a:buNone/>
-            </a:pPr>
-            <a:r>
-              <a:rPr lang="en-US" sz="1150" b="1" dirty="0">
-                <a:solidFill>
-                  <a:srgbClr val="222222"/>
-                </a:solidFill>
-                <a:latin typeface="Calibri" pitchFamily="34" charset="0"/>
-                <a:ea typeface="Calibri" pitchFamily="34" charset="-122"/>
-                <a:cs typeface="Calibri" pitchFamily="34" charset="-120"/>
-              </a:rPr>
-              <a:t>「終了」</a:t>
-            </a:r>
-            <a:pPr indent="0" marL="0">
-              <a:lnSpc>
-                <a:spcPct val="125000"/>
-              </a:lnSpc>
-              <a:buNone/>
-            </a:pPr>
-            <a:r>
-              <a:rPr lang="en-US" sz="1150" dirty="0">
-                <a:solidFill>
-                  <a:srgbClr val="222222"/>
-                </a:solidFill>
-                <a:latin typeface="Calibri" pitchFamily="34" charset="0"/>
-                <a:ea typeface="Calibri" pitchFamily="34" charset="-122"/>
-                <a:cs typeface="Calibri" pitchFamily="34" charset="-120"/>
-              </a:rPr>
-              <a:t>に変える（表示は「終了（案内メール送付）」です）</a:t>
-            </a:r>
-            <a:endParaRPr lang="en-US" sz="1150" dirty="0"/>
-          </a:p>
-        </p:txBody>
-      </p:sp>
-      <p:sp>
-        <p:nvSpPr>
-          <p:cNvPr id="7" name="Text 5"/>
-          <p:cNvSpPr txBox="1"/>
-          <p:nvPr/>
-        </p:nvSpPr>
-        <p:spPr>
-          <a:xfrm>
-            <a:off x="566928" y="2014601"/>
-            <a:ext cx="6428232" cy="257429"/>
-          </a:xfrm>
-          <a:prstGeom prst="rect">
-            <a:avLst/>
-          </a:prstGeom>
-          <a:noFill/>
-          <a:ln/>
-        </p:spPr>
-        <p:txBody>
-          <a:bodyPr wrap="square" lIns="0" tIns="0" rIns="0" bIns="0" rtlCol="0" anchor="t"/>
-          <a:lstStyle/>
-          <a:p>
-            <a:pPr indent="0" marL="0">
-              <a:lnSpc>
-                <a:spcPct val="125000"/>
-              </a:lnSpc>
-              <a:buNone/>
-            </a:pPr>
-            <a:r>
-              <a:rPr lang="en-US" sz="1100" dirty="0">
-                <a:solidFill>
-                  <a:srgbClr val="222222"/>
-                </a:solidFill>
-                <a:latin typeface="Calibri" pitchFamily="34" charset="0"/>
-                <a:ea typeface="Calibri" pitchFamily="34" charset="-122"/>
-                <a:cs typeface="Calibri" pitchFamily="34" charset="-120"/>
-              </a:rPr>
-              <a:t>これで、ブースのアンケートと総合アンケートの受付が終わり、案内メールを送れるようになります。</a:t>
-            </a:r>
-            <a:endParaRPr lang="en-US" sz="1100" dirty="0"/>
-          </a:p>
-        </p:txBody>
-      </p:sp>
-      <p:sp>
-        <p:nvSpPr>
-          <p:cNvPr id="8" name="Shape 6"/>
-          <p:cNvSpPr/>
-          <p:nvPr/>
-        </p:nvSpPr>
-        <p:spPr>
-          <a:xfrm>
-            <a:off x="566928" y="2308606"/>
-            <a:ext cx="6428232" cy="624459"/>
-          </a:xfrm>
-          <a:prstGeom prst="roundRect">
-            <a:avLst>
-              <a:gd name="adj" fmla="val 8786"/>
-            </a:avLst>
-          </a:prstGeom>
-          <a:solidFill>
-            <a:srgbClr val="FDF0E6"/>
-          </a:solidFill>
-          <a:ln w="9525">
-            <a:solidFill>
-              <a:srgbClr val="E08A3C"/>
-            </a:solidFill>
-            <a:prstDash val="solid"/>
-          </a:ln>
-        </p:spPr>
-      </p:sp>
-      <p:sp>
-        <p:nvSpPr>
-          <p:cNvPr id="9" name="Text 7"/>
-          <p:cNvSpPr txBox="1"/>
-          <p:nvPr/>
-        </p:nvSpPr>
-        <p:spPr>
-          <a:xfrm>
-            <a:off x="658368" y="2400046"/>
-            <a:ext cx="237744" cy="237744"/>
-          </a:xfrm>
-          <a:prstGeom prst="rect">
-            <a:avLst/>
-          </a:prstGeom>
-          <a:noFill/>
-          <a:ln/>
-        </p:spPr>
-        <p:txBody>
-          <a:bodyPr wrap="square" lIns="0" tIns="0" rIns="0" bIns="0" rtlCol="0" anchor="ctr"/>
-          <a:lstStyle/>
-          <a:p>
-            <a:pPr algn="ctr" indent="0" marL="0">
-              <a:buNone/>
-            </a:pPr>
-            <a:r>
-              <a:rPr lang="en-US" sz="1200" b="1" dirty="0">
-                <a:solidFill>
-                  <a:srgbClr val="C25A17"/>
-                </a:solidFill>
-                <a:latin typeface="Calibri" pitchFamily="34" charset="0"/>
-                <a:ea typeface="Calibri" pitchFamily="34" charset="-122"/>
-                <a:cs typeface="Calibri" pitchFamily="34" charset="-120"/>
-              </a:rPr>
-              <a:t>！</a:t>
-            </a:r>
-            <a:endParaRPr lang="en-US" sz="1200" dirty="0"/>
-          </a:p>
-        </p:txBody>
-      </p:sp>
-      <p:sp>
-        <p:nvSpPr>
-          <p:cNvPr id="10" name="Text 8"/>
-          <p:cNvSpPr txBox="1"/>
-          <p:nvPr/>
-        </p:nvSpPr>
-        <p:spPr>
-          <a:xfrm>
-            <a:off x="950976" y="2418334"/>
-            <a:ext cx="5925312" cy="441579"/>
-          </a:xfrm>
-          <a:prstGeom prst="rect">
-            <a:avLst/>
-          </a:prstGeom>
-          <a:noFill/>
-          <a:ln/>
-        </p:spPr>
-        <p:txBody>
-          <a:bodyPr wrap="square" lIns="0" tIns="0" rIns="0" bIns="0" rtlCol="0" anchor="t"/>
-          <a:lstStyle/>
-          <a:p>
-            <a:pPr indent="0" marL="0">
-              <a:lnSpc>
-                <a:spcPct val="120000"/>
-              </a:lnSpc>
-              <a:buNone/>
-            </a:pPr>
-            <a:r>
-              <a:rPr lang="en-US" sz="1050" dirty="0">
-                <a:solidFill>
-                  <a:srgbClr val="222222"/>
-                </a:solidFill>
-                <a:latin typeface="Calibri" pitchFamily="34" charset="0"/>
-                <a:ea typeface="Calibri" pitchFamily="34" charset="-122"/>
-                <a:cs typeface="Calibri" pitchFamily="34" charset="-120"/>
-              </a:rPr>
-              <a:t>状態を「終了」にすると、ブースのアンケートは回答できなくなります。当日の受付時間が終わってから切り替えてください。</a:t>
-            </a:r>
-            <a:endParaRPr lang="en-US" sz="1050" dirty="0"/>
           </a:p>
         </p:txBody>
       </p:sp>
       <p:pic>
         <p:nvPicPr>
-          <p:cNvPr id="11" name="Image 0" descr="C:\Users\sato\Desktop\enque\docs\images\o-overall.png">    </p:cNvPr>
+          <p:cNvPr id="4" name="Image 0" descr="C:\Users\sato\Desktop\enque\docs\images\o-group-check.png">    </p:cNvPr>
           <p:cNvPicPr>
             <a:picLocks noChangeAspect="1"/>
           </p:cNvPicPr>
@@ -21230,8 +20971,8 @@
         </p:blipFill>
         <p:spPr>
           <a:xfrm>
-            <a:off x="1504370" y="3006217"/>
-            <a:ext cx="4553347" cy="3474720"/>
+            <a:off x="566928" y="1481328"/>
+            <a:ext cx="6428232" cy="3056401"/>
           </a:xfrm>
           <a:prstGeom prst="rect">
             <a:avLst/>
@@ -21240,13 +20981,13 @@
       </p:pic>
       <p:sp>
         <p:nvSpPr>
-          <p:cNvPr id="12" name="Text 9"/>
-          <p:cNvSpPr txBox="1"/>
-          <p:nvPr/>
-        </p:nvSpPr>
-        <p:spPr>
-          <a:xfrm>
-            <a:off x="566928" y="6535801"/>
+          <p:cNvPr id="5" name="Text 2"/>
+          <p:cNvSpPr txBox="1"/>
+          <p:nvPr/>
+        </p:nvSpPr>
+        <p:spPr>
+          <a:xfrm>
+            <a:off x="566928" y="4592593"/>
             <a:ext cx="6428232" cy="274320"/>
           </a:xfrm>
           <a:prstGeom prst="rect">
@@ -21271,7 +21012,7 @@
                 <a:ea typeface="Calibri" pitchFamily="34" charset="-122"/>
                 <a:cs typeface="Calibri" pitchFamily="34" charset="-120"/>
               </a:rPr>
-              <a:t>「総合アンケートと案内メール」画面の1番上（総合アンケートの状態と回答数が見えるところ）。</a:t>
+              <a:t>「グループの構成」の「来場人数との照合」の表（差の分布が見えるもの）。</a:t>
             </a:r>
             <a:endParaRPr lang="en-US" sz="950" dirty="0"/>
           </a:p>
@@ -21279,7 +21020,7 @@
       </p:sp>
       <p:sp>
         <p:nvSpPr>
-          <p:cNvPr id="13" name="Text 10"/>
+          <p:cNvPr id="6" name="Text 3"/>
           <p:cNvSpPr txBox="1"/>
           <p:nvPr/>
         </p:nvSpPr>
@@ -21420,7 +21161,7 @@
                 <a:ea typeface="Calibri" pitchFamily="34" charset="-122"/>
                 <a:cs typeface="Calibri" pitchFamily="34" charset="-120"/>
               </a:rPr>
-              <a:t>終了後2：案内メールを送る</a:t>
+              <a:t>終了後1：受付を締める</a:t>
             </a:r>
             <a:endParaRPr lang="en-US" sz="2200" dirty="0"/>
           </a:p>
@@ -21494,7 +21235,7 @@
         <p:spPr>
           <a:xfrm>
             <a:off x="969264" y="1481328"/>
-            <a:ext cx="6025896" cy="365760"/>
+            <a:ext cx="6025896" cy="478409"/>
           </a:xfrm>
           <a:prstGeom prst="rect">
             <a:avLst/>
@@ -21513,6 +21254,23 @@
               <a:buNone/>
             </a:pPr>
             <a:r>
+              <a:rPr lang="en-US" sz="1150" dirty="0">
+                <a:solidFill>
+                  <a:srgbClr val="222222"/>
+                </a:solidFill>
+                <a:latin typeface="Calibri" pitchFamily="34" charset="0"/>
+                <a:ea typeface="Calibri" pitchFamily="34" charset="-122"/>
+                <a:cs typeface="Calibri" pitchFamily="34" charset="-120"/>
+              </a:rPr>
+              <a:t>ダッシュボードの「イベント設定」で、状態を</a:t>
+            </a:r>
+            <a:pPr indent="0" marL="0">
+              <a:lnSpc>
+                <a:spcPct val="125000"/>
+              </a:lnSpc>
+              <a:buNone/>
+            </a:pPr>
+            <a:r>
               <a:rPr lang="en-US" sz="1150" b="1" dirty="0">
                 <a:solidFill>
                   <a:srgbClr val="222222"/>
@@ -21521,7 +21279,7 @@
                 <a:ea typeface="Calibri" pitchFamily="34" charset="-122"/>
                 <a:cs typeface="Calibri" pitchFamily="34" charset="-120"/>
               </a:rPr>
-              <a:t>テスト送信</a:t>
+              <a:t>「終了」</a:t>
             </a:r>
             <a:pPr indent="0" marL="0">
               <a:lnSpc>
@@ -21538,7 +21296,7 @@
                 <a:ea typeface="Calibri" pitchFamily="34" charset="-122"/>
                 <a:cs typeface="Calibri" pitchFamily="34" charset="-120"/>
               </a:rPr>
-              <a:t>：自分のアドレスを入れて送り、文面とリンクを確認する</a:t>
+              <a:t>に変える（表示は「終了（案内メール送付）」です）</a:t>
             </a:r>
             <a:endParaRPr lang="en-US" sz="1150" dirty="0"/>
           </a:p>
@@ -21546,850 +21304,60 @@
       </p:sp>
       <p:sp>
         <p:nvSpPr>
-          <p:cNvPr id="7" name="Shape 5"/>
+          <p:cNvPr id="7" name="Text 5"/>
+          <p:cNvSpPr txBox="1"/>
+          <p:nvPr/>
+        </p:nvSpPr>
+        <p:spPr>
+          <a:xfrm>
+            <a:off x="566928" y="2014601"/>
+            <a:ext cx="6428232" cy="257429"/>
+          </a:xfrm>
+          <a:prstGeom prst="rect">
+            <a:avLst/>
+          </a:prstGeom>
+          <a:noFill/>
+          <a:ln/>
+        </p:spPr>
+        <p:txBody>
+          <a:bodyPr wrap="square" lIns="0" tIns="0" rIns="0" bIns="0" rtlCol="0" anchor="t"/>
+          <a:lstStyle/>
+          <a:p>
+            <a:pPr indent="0" marL="0">
+              <a:lnSpc>
+                <a:spcPct val="125000"/>
+              </a:lnSpc>
+              <a:buNone/>
+            </a:pPr>
+            <a:r>
+              <a:rPr lang="en-US" sz="1100" dirty="0">
+                <a:solidFill>
+                  <a:srgbClr val="222222"/>
+                </a:solidFill>
+                <a:latin typeface="Calibri" pitchFamily="34" charset="0"/>
+                <a:ea typeface="Calibri" pitchFamily="34" charset="-122"/>
+                <a:cs typeface="Calibri" pitchFamily="34" charset="-120"/>
+              </a:rPr>
+              <a:t>これで、ブースのアンケートと総合アンケートの受付が終わり、案内メールを送れるようになります。</a:t>
+            </a:r>
+            <a:endParaRPr lang="en-US" sz="1100" dirty="0"/>
+          </a:p>
+        </p:txBody>
+      </p:sp>
+      <p:sp>
+        <p:nvSpPr>
+          <p:cNvPr id="8" name="Shape 6"/>
           <p:cNvSpPr/>
           <p:nvPr/>
         </p:nvSpPr>
         <p:spPr>
           <a:xfrm>
-            <a:off x="566928" y="1956816"/>
-            <a:ext cx="274320" cy="274320"/>
-          </a:xfrm>
-          <a:prstGeom prst="ellipse">
-            <a:avLst/>
-          </a:prstGeom>
-          <a:solidFill>
-            <a:srgbClr val="1E2761"/>
-          </a:solidFill>
-          <a:ln/>
-        </p:spPr>
-      </p:sp>
-      <p:sp>
-        <p:nvSpPr>
-          <p:cNvPr id="8" name="Text 6"/>
-          <p:cNvSpPr txBox="1"/>
-          <p:nvPr/>
-        </p:nvSpPr>
-        <p:spPr>
-          <a:xfrm>
-            <a:off x="566928" y="1956816"/>
-            <a:ext cx="274320" cy="274320"/>
-          </a:xfrm>
-          <a:prstGeom prst="rect">
-            <a:avLst/>
-          </a:prstGeom>
-          <a:noFill/>
-          <a:ln/>
-        </p:spPr>
-        <p:txBody>
-          <a:bodyPr wrap="square" lIns="0" tIns="0" rIns="0" bIns="0" rtlCol="0" anchor="ctr"/>
-          <a:lstStyle/>
-          <a:p>
-            <a:pPr algn="ctr" indent="0" marL="0">
-              <a:buNone/>
-            </a:pPr>
-            <a:r>
-              <a:rPr lang="en-US" sz="1100" b="1" dirty="0">
-                <a:solidFill>
-                  <a:srgbClr val="FFFFFF"/>
-                </a:solidFill>
-                <a:latin typeface="Calibri" pitchFamily="34" charset="0"/>
-                <a:ea typeface="Calibri" pitchFamily="34" charset="-122"/>
-                <a:cs typeface="Calibri" pitchFamily="34" charset="-120"/>
-              </a:rPr>
-              <a:t>2</a:t>
-            </a:r>
-            <a:endParaRPr lang="en-US" sz="1100" dirty="0"/>
-          </a:p>
-        </p:txBody>
-      </p:sp>
-      <p:sp>
-        <p:nvSpPr>
-          <p:cNvPr id="9" name="Text 7"/>
-          <p:cNvSpPr txBox="1"/>
-          <p:nvPr/>
-        </p:nvSpPr>
-        <p:spPr>
-          <a:xfrm>
-            <a:off x="969264" y="1938528"/>
-            <a:ext cx="6025896" cy="365760"/>
-          </a:xfrm>
-          <a:prstGeom prst="rect">
-            <a:avLst/>
-          </a:prstGeom>
-          <a:noFill/>
-          <a:ln/>
-        </p:spPr>
-        <p:txBody>
-          <a:bodyPr wrap="square" lIns="0" tIns="0" rIns="0" bIns="0" rtlCol="0" anchor="t"/>
-          <a:lstStyle/>
-          <a:p>
-            <a:pPr indent="0" marL="0">
-              <a:lnSpc>
-                <a:spcPct val="125000"/>
-              </a:lnSpc>
-              <a:buNone/>
-            </a:pPr>
-            <a:r>
-              <a:rPr lang="en-US" sz="1150" b="1" dirty="0">
-                <a:solidFill>
-                  <a:srgbClr val="222222"/>
-                </a:solidFill>
-                <a:latin typeface="Calibri" pitchFamily="34" charset="0"/>
-                <a:ea typeface="Calibri" pitchFamily="34" charset="-122"/>
-                <a:cs typeface="Calibri" pitchFamily="34" charset="-120"/>
-              </a:rPr>
-              <a:t>送信対象を作成・更新する</a:t>
-            </a:r>
-            <a:pPr indent="0" marL="0">
-              <a:lnSpc>
-                <a:spcPct val="125000"/>
-              </a:lnSpc>
-              <a:buNone/>
-            </a:pPr>
-            <a:r>
-              <a:rPr lang="en-US" sz="1150" dirty="0">
-                <a:solidFill>
-                  <a:srgbClr val="222222"/>
-                </a:solidFill>
-                <a:latin typeface="Calibri" pitchFamily="34" charset="0"/>
-                <a:ea typeface="Calibri" pitchFamily="34" charset="-122"/>
-                <a:cs typeface="Calibri" pitchFamily="34" charset="-120"/>
-              </a:rPr>
-              <a:t>を押す（メールアドレスを登録した来場者が対象になります）</a:t>
-            </a:r>
-            <a:endParaRPr lang="en-US" sz="1150" dirty="0"/>
-          </a:p>
-        </p:txBody>
-      </p:sp>
-      <p:sp>
-        <p:nvSpPr>
-          <p:cNvPr id="10" name="Shape 8"/>
-          <p:cNvSpPr/>
-          <p:nvPr/>
-        </p:nvSpPr>
-        <p:spPr>
-          <a:xfrm>
-            <a:off x="566928" y="2414016"/>
-            <a:ext cx="274320" cy="274320"/>
-          </a:xfrm>
-          <a:prstGeom prst="ellipse">
-            <a:avLst/>
-          </a:prstGeom>
-          <a:solidFill>
-            <a:srgbClr val="1E2761"/>
-          </a:solidFill>
-          <a:ln/>
-        </p:spPr>
-      </p:sp>
-      <p:sp>
-        <p:nvSpPr>
-          <p:cNvPr id="11" name="Text 9"/>
-          <p:cNvSpPr txBox="1"/>
-          <p:nvPr/>
-        </p:nvSpPr>
-        <p:spPr>
-          <a:xfrm>
-            <a:off x="566928" y="2414016"/>
-            <a:ext cx="274320" cy="274320"/>
-          </a:xfrm>
-          <a:prstGeom prst="rect">
-            <a:avLst/>
-          </a:prstGeom>
-          <a:noFill/>
-          <a:ln/>
-        </p:spPr>
-        <p:txBody>
-          <a:bodyPr wrap="square" lIns="0" tIns="0" rIns="0" bIns="0" rtlCol="0" anchor="ctr"/>
-          <a:lstStyle/>
-          <a:p>
-            <a:pPr algn="ctr" indent="0" marL="0">
-              <a:buNone/>
-            </a:pPr>
-            <a:r>
-              <a:rPr lang="en-US" sz="1100" b="1" dirty="0">
-                <a:solidFill>
-                  <a:srgbClr val="FFFFFF"/>
-                </a:solidFill>
-                <a:latin typeface="Calibri" pitchFamily="34" charset="0"/>
-                <a:ea typeface="Calibri" pitchFamily="34" charset="-122"/>
-                <a:cs typeface="Calibri" pitchFamily="34" charset="-120"/>
-              </a:rPr>
-              <a:t>3</a:t>
-            </a:r>
-            <a:endParaRPr lang="en-US" sz="1100" dirty="0"/>
-          </a:p>
-        </p:txBody>
-      </p:sp>
-      <p:sp>
-        <p:nvSpPr>
-          <p:cNvPr id="12" name="Text 10"/>
-          <p:cNvSpPr txBox="1"/>
-          <p:nvPr/>
-        </p:nvSpPr>
-        <p:spPr>
-          <a:xfrm>
-            <a:off x="969264" y="2395728"/>
-            <a:ext cx="6025896" cy="365760"/>
-          </a:xfrm>
-          <a:prstGeom prst="rect">
-            <a:avLst/>
-          </a:prstGeom>
-          <a:noFill/>
-          <a:ln/>
-        </p:spPr>
-        <p:txBody>
-          <a:bodyPr wrap="square" lIns="0" tIns="0" rIns="0" bIns="0" rtlCol="0" anchor="t"/>
-          <a:lstStyle/>
-          <a:p>
-            <a:pPr indent="0" marL="0">
-              <a:lnSpc>
-                <a:spcPct val="125000"/>
-              </a:lnSpc>
-              <a:buNone/>
-            </a:pPr>
-            <a:r>
-              <a:rPr lang="en-US" sz="1150" dirty="0">
-                <a:solidFill>
-                  <a:srgbClr val="222222"/>
-                </a:solidFill>
-                <a:latin typeface="Calibri" pitchFamily="34" charset="0"/>
-                <a:ea typeface="Calibri" pitchFamily="34" charset="-122"/>
-                <a:cs typeface="Calibri" pitchFamily="34" charset="-120"/>
-              </a:rPr>
-              <a:t>送信する</a:t>
-            </a:r>
-            <a:endParaRPr lang="en-US" sz="1150" dirty="0"/>
-          </a:p>
-        </p:txBody>
-      </p:sp>
-      <p:sp>
-        <p:nvSpPr>
-          <p:cNvPr id="13" name="Text 11"/>
-          <p:cNvSpPr txBox="1"/>
-          <p:nvPr/>
-        </p:nvSpPr>
-        <p:spPr>
-          <a:xfrm>
-            <a:off x="713232" y="2852928"/>
-            <a:ext cx="6281928" cy="257429"/>
-          </a:xfrm>
-          <a:prstGeom prst="rect">
-            <a:avLst/>
-          </a:prstGeom>
-          <a:noFill/>
-          <a:ln/>
-        </p:spPr>
-        <p:txBody>
-          <a:bodyPr wrap="square" lIns="0" tIns="0" rIns="0" bIns="0" rtlCol="0" anchor="t"/>
-          <a:lstStyle/>
-          <a:p>
-            <a:pPr marL="342900" indent="-342900">
-              <a:lnSpc>
-                <a:spcPct val="125000"/>
-              </a:lnSpc>
-              <a:buSzPct val="100000"/>
-              <a:buChar char="●"/>
-            </a:pPr>
-            <a:r>
-              <a:rPr lang="en-US" sz="1100" dirty="0">
-                <a:solidFill>
-                  <a:srgbClr val="222222"/>
-                </a:solidFill>
-                <a:latin typeface="Calibri" pitchFamily="34" charset="0"/>
-                <a:ea typeface="Calibri" pitchFamily="34" charset="-122"/>
-                <a:cs typeface="Calibri" pitchFamily="34" charset="-120"/>
-              </a:rPr>
-              <a:t>少数なら「この画面から50件だけ送信する」</a:t>
-            </a:r>
-            <a:endParaRPr lang="en-US" sz="1100" dirty="0"/>
-          </a:p>
-        </p:txBody>
-      </p:sp>
-      <p:sp>
-        <p:nvSpPr>
-          <p:cNvPr id="14" name="Text 12"/>
-          <p:cNvSpPr txBox="1"/>
-          <p:nvPr/>
-        </p:nvSpPr>
-        <p:spPr>
-          <a:xfrm>
-            <a:off x="713232" y="3128645"/>
-            <a:ext cx="6281928" cy="257429"/>
-          </a:xfrm>
-          <a:prstGeom prst="rect">
-            <a:avLst/>
-          </a:prstGeom>
-          <a:noFill/>
-          <a:ln/>
-        </p:spPr>
-        <p:txBody>
-          <a:bodyPr wrap="square" lIns="0" tIns="0" rIns="0" bIns="0" rtlCol="0" anchor="t"/>
-          <a:lstStyle/>
-          <a:p>
-            <a:pPr marL="342900" indent="-342900">
-              <a:lnSpc>
-                <a:spcPct val="125000"/>
-              </a:lnSpc>
-              <a:buSzPct val="100000"/>
-              <a:buChar char="●"/>
-            </a:pPr>
-            <a:r>
-              <a:rPr lang="en-US" sz="1100" dirty="0">
-                <a:solidFill>
-                  <a:srgbClr val="222222"/>
-                </a:solidFill>
-                <a:latin typeface="Calibri" pitchFamily="34" charset="0"/>
-                <a:ea typeface="Calibri" pitchFamily="34" charset="-122"/>
-                <a:cs typeface="Calibri" pitchFamily="34" charset="-120"/>
-              </a:rPr>
-              <a:t>大量ならサーバーの自動送信（5分ごとに200件ずつ）に任せる</a:t>
-            </a:r>
-            <a:endParaRPr lang="en-US" sz="1100" dirty="0"/>
-          </a:p>
-        </p:txBody>
-      </p:sp>
-      <p:sp>
-        <p:nvSpPr>
-          <p:cNvPr id="15" name="Shape 13"/>
-          <p:cNvSpPr/>
-          <p:nvPr/>
-        </p:nvSpPr>
-        <p:spPr>
-          <a:xfrm>
-            <a:off x="566928" y="3422650"/>
-            <a:ext cx="274320" cy="274320"/>
-          </a:xfrm>
-          <a:prstGeom prst="ellipse">
-            <a:avLst/>
-          </a:prstGeom>
-          <a:solidFill>
-            <a:srgbClr val="1E2761"/>
-          </a:solidFill>
-          <a:ln/>
-        </p:spPr>
-      </p:sp>
-      <p:sp>
-        <p:nvSpPr>
-          <p:cNvPr id="16" name="Text 14"/>
-          <p:cNvSpPr txBox="1"/>
-          <p:nvPr/>
-        </p:nvSpPr>
-        <p:spPr>
-          <a:xfrm>
-            <a:off x="566928" y="3422650"/>
-            <a:ext cx="274320" cy="274320"/>
-          </a:xfrm>
-          <a:prstGeom prst="rect">
-            <a:avLst/>
-          </a:prstGeom>
-          <a:noFill/>
-          <a:ln/>
-        </p:spPr>
-        <p:txBody>
-          <a:bodyPr wrap="square" lIns="0" tIns="0" rIns="0" bIns="0" rtlCol="0" anchor="ctr"/>
-          <a:lstStyle/>
-          <a:p>
-            <a:pPr algn="ctr" indent="0" marL="0">
-              <a:buNone/>
-            </a:pPr>
-            <a:r>
-              <a:rPr lang="en-US" sz="1100" b="1" dirty="0">
-                <a:solidFill>
-                  <a:srgbClr val="FFFFFF"/>
-                </a:solidFill>
-                <a:latin typeface="Calibri" pitchFamily="34" charset="0"/>
-                <a:ea typeface="Calibri" pitchFamily="34" charset="-122"/>
-                <a:cs typeface="Calibri" pitchFamily="34" charset="-120"/>
-              </a:rPr>
-              <a:t>4</a:t>
-            </a:r>
-            <a:endParaRPr lang="en-US" sz="1100" dirty="0"/>
-          </a:p>
-        </p:txBody>
-      </p:sp>
-      <p:sp>
-        <p:nvSpPr>
-          <p:cNvPr id="17" name="Text 15"/>
-          <p:cNvSpPr txBox="1"/>
-          <p:nvPr/>
-        </p:nvSpPr>
-        <p:spPr>
-          <a:xfrm>
-            <a:off x="969264" y="3404362"/>
-            <a:ext cx="6025896" cy="365760"/>
-          </a:xfrm>
-          <a:prstGeom prst="rect">
-            <a:avLst/>
-          </a:prstGeom>
-          <a:noFill/>
-          <a:ln/>
-        </p:spPr>
-        <p:txBody>
-          <a:bodyPr wrap="square" lIns="0" tIns="0" rIns="0" bIns="0" rtlCol="0" anchor="t"/>
-          <a:lstStyle/>
-          <a:p>
-            <a:pPr indent="0" marL="0">
-              <a:lnSpc>
-                <a:spcPct val="125000"/>
-              </a:lnSpc>
-              <a:buNone/>
-            </a:pPr>
-            <a:r>
-              <a:rPr lang="en-US" sz="1150" dirty="0">
-                <a:solidFill>
-                  <a:srgbClr val="222222"/>
-                </a:solidFill>
-                <a:latin typeface="Calibri" pitchFamily="34" charset="0"/>
-                <a:ea typeface="Calibri" pitchFamily="34" charset="-122"/>
-                <a:cs typeface="Calibri" pitchFamily="34" charset="-120"/>
-              </a:rPr>
-              <a:t>送信状況（未送信・送信済み・失敗）を画面で確認する</a:t>
-            </a:r>
-            <a:endParaRPr lang="en-US" sz="1150" dirty="0"/>
-          </a:p>
-        </p:txBody>
-      </p:sp>
-      <p:sp>
-        <p:nvSpPr>
-          <p:cNvPr id="18" name="Shape 16"/>
-          <p:cNvSpPr/>
-          <p:nvPr/>
-        </p:nvSpPr>
-        <p:spPr>
-          <a:xfrm>
-            <a:off x="566928" y="3861562"/>
+            <a:off x="566928" y="2308606"/>
             <a:ext cx="6428232" cy="624459"/>
           </a:xfrm>
           <a:prstGeom prst="roundRect">
             <a:avLst>
               <a:gd name="adj" fmla="val 8786"/>
-            </a:avLst>
-          </a:prstGeom>
-          <a:solidFill>
-            <a:srgbClr val="E8ECF8"/>
-          </a:solidFill>
-          <a:ln w="9525">
-            <a:solidFill>
-              <a:srgbClr val="1E2761"/>
-            </a:solidFill>
-            <a:prstDash val="solid"/>
-          </a:ln>
-        </p:spPr>
-      </p:sp>
-      <p:sp>
-        <p:nvSpPr>
-          <p:cNvPr id="19" name="Text 17"/>
-          <p:cNvSpPr txBox="1"/>
-          <p:nvPr/>
-        </p:nvSpPr>
-        <p:spPr>
-          <a:xfrm>
-            <a:off x="658368" y="3953002"/>
-            <a:ext cx="237744" cy="237744"/>
-          </a:xfrm>
-          <a:prstGeom prst="rect">
-            <a:avLst/>
-          </a:prstGeom>
-          <a:noFill/>
-          <a:ln/>
-        </p:spPr>
-        <p:txBody>
-          <a:bodyPr wrap="square" lIns="0" tIns="0" rIns="0" bIns="0" rtlCol="0" anchor="ctr"/>
-          <a:lstStyle/>
-          <a:p>
-            <a:pPr algn="ctr" indent="0" marL="0">
-              <a:buNone/>
-            </a:pPr>
-            <a:r>
-              <a:rPr lang="en-US" sz="1200" b="1" dirty="0">
-                <a:solidFill>
-                  <a:srgbClr val="1E2761"/>
-                </a:solidFill>
-                <a:latin typeface="Calibri" pitchFamily="34" charset="0"/>
-                <a:ea typeface="Calibri" pitchFamily="34" charset="-122"/>
-                <a:cs typeface="Calibri" pitchFamily="34" charset="-120"/>
-              </a:rPr>
-              <a:t>i</a:t>
-            </a:r>
-            <a:endParaRPr lang="en-US" sz="1200" dirty="0"/>
-          </a:p>
-        </p:txBody>
-      </p:sp>
-      <p:sp>
-        <p:nvSpPr>
-          <p:cNvPr id="20" name="Text 18"/>
-          <p:cNvSpPr txBox="1"/>
-          <p:nvPr/>
-        </p:nvSpPr>
-        <p:spPr>
-          <a:xfrm>
-            <a:off x="950976" y="3971290"/>
-            <a:ext cx="5925312" cy="441579"/>
-          </a:xfrm>
-          <a:prstGeom prst="rect">
-            <a:avLst/>
-          </a:prstGeom>
-          <a:noFill/>
-          <a:ln/>
-        </p:spPr>
-        <p:txBody>
-          <a:bodyPr wrap="square" lIns="0" tIns="0" rIns="0" bIns="0" rtlCol="0" anchor="t"/>
-          <a:lstStyle/>
-          <a:p>
-            <a:pPr indent="0" marL="0">
-              <a:lnSpc>
-                <a:spcPct val="120000"/>
-              </a:lnSpc>
-              <a:buNone/>
-            </a:pPr>
-            <a:r>
-              <a:rPr lang="en-US" sz="1050" dirty="0">
-                <a:solidFill>
-                  <a:srgbClr val="222222"/>
-                </a:solidFill>
-                <a:latin typeface="Calibri" pitchFamily="34" charset="0"/>
-                <a:ea typeface="Calibri" pitchFamily="34" charset="-122"/>
-                <a:cs typeface="Calibri" pitchFamily="34" charset="-120"/>
-              </a:rPr>
-              <a:t>メールの文面は相手によって変わります。会期中に総合アンケートへ答えた方には</a:t>
-            </a:r>
-            <a:pPr indent="0" marL="0">
-              <a:lnSpc>
-                <a:spcPct val="120000"/>
-              </a:lnSpc>
-              <a:buNone/>
-            </a:pPr>
-            <a:r>
-              <a:rPr lang="en-US" sz="1050" b="1" dirty="0">
-                <a:solidFill>
-                  <a:srgbClr val="222222"/>
-                </a:solidFill>
-                <a:latin typeface="Calibri" pitchFamily="34" charset="0"/>
-                <a:ea typeface="Calibri" pitchFamily="34" charset="-122"/>
-                <a:cs typeface="Calibri" pitchFamily="34" charset="-120"/>
-              </a:rPr>
-              <a:t>壁紙のご案内だけ</a:t>
-            </a:r>
-            <a:pPr indent="0" marL="0">
-              <a:lnSpc>
-                <a:spcPct val="120000"/>
-              </a:lnSpc>
-              <a:buNone/>
-            </a:pPr>
-            <a:r>
-              <a:rPr lang="en-US" sz="1050" dirty="0">
-                <a:solidFill>
-                  <a:srgbClr val="222222"/>
-                </a:solidFill>
-                <a:latin typeface="Calibri" pitchFamily="34" charset="0"/>
-                <a:ea typeface="Calibri" pitchFamily="34" charset="-122"/>
-                <a:cs typeface="Calibri" pitchFamily="34" charset="-120"/>
-              </a:rPr>
-              <a:t>、</a:t>
-            </a:r>
-            <a:endParaRPr lang="en-US" sz="1050" dirty="0"/>
-          </a:p>
-        </p:txBody>
-      </p:sp>
-      <p:sp>
-        <p:nvSpPr>
-          <p:cNvPr id="21" name="Shape 19"/>
-          <p:cNvSpPr/>
-          <p:nvPr/>
-        </p:nvSpPr>
-        <p:spPr>
-          <a:xfrm>
-            <a:off x="566928" y="4559173"/>
-            <a:ext cx="6428232" cy="431102"/>
-          </a:xfrm>
-          <a:prstGeom prst="roundRect">
-            <a:avLst>
-              <a:gd name="adj" fmla="val 12726"/>
-            </a:avLst>
-          </a:prstGeom>
-          <a:solidFill>
-            <a:srgbClr val="E8ECF8"/>
-          </a:solidFill>
-          <a:ln w="9525">
-            <a:solidFill>
-              <a:srgbClr val="1E2761"/>
-            </a:solidFill>
-            <a:prstDash val="solid"/>
-          </a:ln>
-        </p:spPr>
-      </p:sp>
-      <p:sp>
-        <p:nvSpPr>
-          <p:cNvPr id="22" name="Text 20"/>
-          <p:cNvSpPr txBox="1"/>
-          <p:nvPr/>
-        </p:nvSpPr>
-        <p:spPr>
-          <a:xfrm>
-            <a:off x="658368" y="4650613"/>
-            <a:ext cx="237744" cy="237744"/>
-          </a:xfrm>
-          <a:prstGeom prst="rect">
-            <a:avLst/>
-          </a:prstGeom>
-          <a:noFill/>
-          <a:ln/>
-        </p:spPr>
-        <p:txBody>
-          <a:bodyPr wrap="square" lIns="0" tIns="0" rIns="0" bIns="0" rtlCol="0" anchor="ctr"/>
-          <a:lstStyle/>
-          <a:p>
-            <a:pPr algn="ctr" indent="0" marL="0">
-              <a:buNone/>
-            </a:pPr>
-            <a:r>
-              <a:rPr lang="en-US" sz="1200" b="1" dirty="0">
-                <a:solidFill>
-                  <a:srgbClr val="1E2761"/>
-                </a:solidFill>
-                <a:latin typeface="Calibri" pitchFamily="34" charset="0"/>
-                <a:ea typeface="Calibri" pitchFamily="34" charset="-122"/>
-                <a:cs typeface="Calibri" pitchFamily="34" charset="-120"/>
-              </a:rPr>
-              <a:t>i</a:t>
-            </a:r>
-            <a:endParaRPr lang="en-US" sz="1200" dirty="0"/>
-          </a:p>
-        </p:txBody>
-      </p:sp>
-      <p:sp>
-        <p:nvSpPr>
-          <p:cNvPr id="23" name="Text 21"/>
-          <p:cNvSpPr txBox="1"/>
-          <p:nvPr/>
-        </p:nvSpPr>
-        <p:spPr>
-          <a:xfrm>
-            <a:off x="950976" y="4668901"/>
-            <a:ext cx="5925312" cy="248221"/>
-          </a:xfrm>
-          <a:prstGeom prst="rect">
-            <a:avLst/>
-          </a:prstGeom>
-          <a:noFill/>
-          <a:ln/>
-        </p:spPr>
-        <p:txBody>
-          <a:bodyPr wrap="square" lIns="0" tIns="0" rIns="0" bIns="0" rtlCol="0" anchor="t"/>
-          <a:lstStyle/>
-          <a:p>
-            <a:pPr indent="0" marL="0">
-              <a:lnSpc>
-                <a:spcPct val="120000"/>
-              </a:lnSpc>
-              <a:buNone/>
-            </a:pPr>
-            <a:r>
-              <a:rPr lang="en-US" sz="1050" dirty="0">
-                <a:solidFill>
-                  <a:srgbClr val="222222"/>
-                </a:solidFill>
-                <a:latin typeface="Calibri" pitchFamily="34" charset="0"/>
-                <a:ea typeface="Calibri" pitchFamily="34" charset="-122"/>
-                <a:cs typeface="Calibri" pitchFamily="34" charset="-120"/>
-              </a:rPr>
-              <a:t>まだ答えていない方には</a:t>
-            </a:r>
-            <a:pPr indent="0" marL="0">
-              <a:lnSpc>
-                <a:spcPct val="120000"/>
-              </a:lnSpc>
-              <a:buNone/>
-            </a:pPr>
-            <a:r>
-              <a:rPr lang="en-US" sz="1050" b="1" dirty="0">
-                <a:solidFill>
-                  <a:srgbClr val="222222"/>
-                </a:solidFill>
-                <a:latin typeface="Calibri" pitchFamily="34" charset="0"/>
-                <a:ea typeface="Calibri" pitchFamily="34" charset="-122"/>
-                <a:cs typeface="Calibri" pitchFamily="34" charset="-120"/>
-              </a:rPr>
-              <a:t>回答のお願い</a:t>
-            </a:r>
-            <a:pPr indent="0" marL="0">
-              <a:lnSpc>
-                <a:spcPct val="120000"/>
-              </a:lnSpc>
-              <a:buNone/>
-            </a:pPr>
-            <a:r>
-              <a:rPr lang="en-US" sz="1050" dirty="0">
-                <a:solidFill>
-                  <a:srgbClr val="222222"/>
-                </a:solidFill>
-                <a:latin typeface="Calibri" pitchFamily="34" charset="0"/>
-                <a:ea typeface="Calibri" pitchFamily="34" charset="-122"/>
-                <a:cs typeface="Calibri" pitchFamily="34" charset="-120"/>
-              </a:rPr>
-              <a:t>（回答後に壁紙）が届きます。</a:t>
-            </a:r>
-            <a:endParaRPr lang="en-US" sz="1050" dirty="0"/>
-          </a:p>
-        </p:txBody>
-      </p:sp>
-      <p:sp>
-        <p:nvSpPr>
-          <p:cNvPr id="24" name="Shape 22"/>
-          <p:cNvSpPr/>
-          <p:nvPr/>
-        </p:nvSpPr>
-        <p:spPr>
-          <a:xfrm>
-            <a:off x="566928" y="5063427"/>
-            <a:ext cx="6428232" cy="624459"/>
-          </a:xfrm>
-          <a:prstGeom prst="roundRect">
-            <a:avLst>
-              <a:gd name="adj" fmla="val 8786"/>
-            </a:avLst>
-          </a:prstGeom>
-          <a:solidFill>
-            <a:srgbClr val="E8ECF8"/>
-          </a:solidFill>
-          <a:ln w="9525">
-            <a:solidFill>
-              <a:srgbClr val="1E2761"/>
-            </a:solidFill>
-            <a:prstDash val="solid"/>
-          </a:ln>
-        </p:spPr>
-      </p:sp>
-      <p:sp>
-        <p:nvSpPr>
-          <p:cNvPr id="25" name="Text 23"/>
-          <p:cNvSpPr txBox="1"/>
-          <p:nvPr/>
-        </p:nvSpPr>
-        <p:spPr>
-          <a:xfrm>
-            <a:off x="658368" y="5154867"/>
-            <a:ext cx="237744" cy="237744"/>
-          </a:xfrm>
-          <a:prstGeom prst="rect">
-            <a:avLst/>
-          </a:prstGeom>
-          <a:noFill/>
-          <a:ln/>
-        </p:spPr>
-        <p:txBody>
-          <a:bodyPr wrap="square" lIns="0" tIns="0" rIns="0" bIns="0" rtlCol="0" anchor="ctr"/>
-          <a:lstStyle/>
-          <a:p>
-            <a:pPr algn="ctr" indent="0" marL="0">
-              <a:buNone/>
-            </a:pPr>
-            <a:r>
-              <a:rPr lang="en-US" sz="1200" b="1" dirty="0">
-                <a:solidFill>
-                  <a:srgbClr val="1E2761"/>
-                </a:solidFill>
-                <a:latin typeface="Calibri" pitchFamily="34" charset="0"/>
-                <a:ea typeface="Calibri" pitchFamily="34" charset="-122"/>
-                <a:cs typeface="Calibri" pitchFamily="34" charset="-120"/>
-              </a:rPr>
-              <a:t>i</a:t>
-            </a:r>
-            <a:endParaRPr lang="en-US" sz="1200" dirty="0"/>
-          </a:p>
-        </p:txBody>
-      </p:sp>
-      <p:sp>
-        <p:nvSpPr>
-          <p:cNvPr id="26" name="Text 24"/>
-          <p:cNvSpPr txBox="1"/>
-          <p:nvPr/>
-        </p:nvSpPr>
-        <p:spPr>
-          <a:xfrm>
-            <a:off x="950976" y="5173155"/>
-            <a:ext cx="5925312" cy="441579"/>
-          </a:xfrm>
-          <a:prstGeom prst="rect">
-            <a:avLst/>
-          </a:prstGeom>
-          <a:noFill/>
-          <a:ln/>
-        </p:spPr>
-        <p:txBody>
-          <a:bodyPr wrap="square" lIns="0" tIns="0" rIns="0" bIns="0" rtlCol="0" anchor="t"/>
-          <a:lstStyle/>
-          <a:p>
-            <a:pPr indent="0" marL="0">
-              <a:lnSpc>
-                <a:spcPct val="120000"/>
-              </a:lnSpc>
-              <a:buNone/>
-            </a:pPr>
-            <a:r>
-              <a:rPr lang="en-US" sz="1050" dirty="0">
-                <a:solidFill>
-                  <a:srgbClr val="222222"/>
-                </a:solidFill>
-                <a:latin typeface="Calibri" pitchFamily="34" charset="0"/>
-                <a:ea typeface="Calibri" pitchFamily="34" charset="-122"/>
-                <a:cs typeface="Calibri" pitchFamily="34" charset="-120"/>
-              </a:rPr>
-              <a:t>テスト送信のリンクは</a:t>
-            </a:r>
-            <a:pPr indent="0" marL="0">
-              <a:lnSpc>
-                <a:spcPct val="120000"/>
-              </a:lnSpc>
-              <a:buNone/>
-            </a:pPr>
-            <a:r>
-              <a:rPr lang="en-US" sz="1050" b="1" dirty="0">
-                <a:solidFill>
-                  <a:srgbClr val="222222"/>
-                </a:solidFill>
-                <a:latin typeface="Calibri" pitchFamily="34" charset="0"/>
-                <a:ea typeface="Calibri" pitchFamily="34" charset="-122"/>
-                <a:cs typeface="Calibri" pitchFamily="34" charset="-120"/>
-              </a:rPr>
-              <a:t>スタッフ確認用のプレビュー</a:t>
-            </a:r>
-            <a:pPr indent="0" marL="0">
-              <a:lnSpc>
-                <a:spcPct val="120000"/>
-              </a:lnSpc>
-              <a:buNone/>
-            </a:pPr>
-            <a:r>
-              <a:rPr lang="en-US" sz="1050" dirty="0">
-                <a:solidFill>
-                  <a:srgbClr val="222222"/>
-                </a:solidFill>
-                <a:latin typeface="Calibri" pitchFamily="34" charset="0"/>
-                <a:ea typeface="Calibri" pitchFamily="34" charset="-122"/>
-                <a:cs typeface="Calibri" pitchFamily="34" charset="-120"/>
-              </a:rPr>
-              <a:t>です。管理画面にログインした状態で開くと、来場者に見えるのと同じ画面を確認できます（プレビューからは回答できません）。</a:t>
-            </a:r>
-            <a:endParaRPr lang="en-US" sz="1050" dirty="0"/>
-          </a:p>
-        </p:txBody>
-      </p:sp>
-      <p:sp>
-        <p:nvSpPr>
-          <p:cNvPr id="27" name="Shape 25"/>
-          <p:cNvSpPr/>
-          <p:nvPr/>
-        </p:nvSpPr>
-        <p:spPr>
-          <a:xfrm>
-            <a:off x="566928" y="5761038"/>
-            <a:ext cx="6428232" cy="431102"/>
-          </a:xfrm>
-          <a:prstGeom prst="roundRect">
-            <a:avLst>
-              <a:gd name="adj" fmla="val 12726"/>
             </a:avLst>
           </a:prstGeom>
           <a:solidFill>
@@ -22405,13 +21373,13 @@
       </p:sp>
       <p:sp>
         <p:nvSpPr>
-          <p:cNvPr id="28" name="Text 26"/>
-          <p:cNvSpPr txBox="1"/>
-          <p:nvPr/>
-        </p:nvSpPr>
-        <p:spPr>
-          <a:xfrm>
-            <a:off x="658368" y="5852478"/>
+          <p:cNvPr id="9" name="Text 7"/>
+          <p:cNvSpPr txBox="1"/>
+          <p:nvPr/>
+        </p:nvSpPr>
+        <p:spPr>
+          <a:xfrm>
+            <a:off x="658368" y="2400046"/>
             <a:ext cx="237744" cy="237744"/>
           </a:xfrm>
           <a:prstGeom prst="rect">
@@ -22444,14 +21412,14 @@
       </p:sp>
       <p:sp>
         <p:nvSpPr>
-          <p:cNvPr id="29" name="Text 27"/>
-          <p:cNvSpPr txBox="1"/>
-          <p:nvPr/>
-        </p:nvSpPr>
-        <p:spPr>
-          <a:xfrm>
-            <a:off x="950976" y="5870766"/>
-            <a:ext cx="5925312" cy="248221"/>
+          <p:cNvPr id="10" name="Text 8"/>
+          <p:cNvSpPr txBox="1"/>
+          <p:nvPr/>
+        </p:nvSpPr>
+        <p:spPr>
+          <a:xfrm>
+            <a:off x="950976" y="2418334"/>
+            <a:ext cx="5925312" cy="441579"/>
           </a:xfrm>
           <a:prstGeom prst="rect">
             <a:avLst/>
@@ -22478,15 +21446,78 @@
                 <a:ea typeface="Calibri" pitchFamily="34" charset="-122"/>
                 <a:cs typeface="Calibri" pitchFamily="34" charset="-120"/>
               </a:rPr>
-              <a:t>送信済みの人には二重に送られません。失敗したものは自動で3回まで再送されます。</a:t>
+              <a:t>状態を「終了」にすると、ブースのアンケートは回答できなくなります。当日の受付時間が終わってから切り替えてください。</a:t>
             </a:r>
             <a:endParaRPr lang="en-US" sz="1050" dirty="0"/>
           </a:p>
         </p:txBody>
       </p:sp>
-      <p:sp>
-        <p:nvSpPr>
-          <p:cNvPr id="30" name="Text 28"/>
+      <p:pic>
+        <p:nvPicPr>
+          <p:cNvPr id="11" name="Image 0" descr="C:\Users\sato\Desktop\enque\docs\images\o-overall.png">    </p:cNvPr>
+          <p:cNvPicPr>
+            <a:picLocks noChangeAspect="1"/>
+          </p:cNvPicPr>
+          <p:nvPr/>
+        </p:nvPicPr>
+        <p:blipFill>
+          <a:blip r:embed="rId1"/>
+          <a:stretch>
+            <a:fillRect/>
+          </a:stretch>
+        </p:blipFill>
+        <p:spPr>
+          <a:xfrm>
+            <a:off x="1504370" y="3006217"/>
+            <a:ext cx="4553347" cy="3474720"/>
+          </a:xfrm>
+          <a:prstGeom prst="rect">
+            <a:avLst/>
+          </a:prstGeom>
+        </p:spPr>
+      </p:pic>
+      <p:sp>
+        <p:nvSpPr>
+          <p:cNvPr id="12" name="Text 9"/>
+          <p:cNvSpPr txBox="1"/>
+          <p:nvPr/>
+        </p:nvSpPr>
+        <p:spPr>
+          <a:xfrm>
+            <a:off x="566928" y="6535801"/>
+            <a:ext cx="6428232" cy="274320"/>
+          </a:xfrm>
+          <a:prstGeom prst="rect">
+            <a:avLst/>
+          </a:prstGeom>
+          <a:noFill/>
+          <a:ln/>
+        </p:spPr>
+        <p:txBody>
+          <a:bodyPr wrap="square" lIns="0" tIns="0" rIns="0" bIns="0" rtlCol="0" anchor="ctr"/>
+          <a:lstStyle/>
+          <a:p>
+            <a:pPr algn="ctr" indent="0" marL="0">
+              <a:buNone/>
+            </a:pPr>
+            <a:r>
+              <a:rPr lang="en-US" sz="950" dirty="0">
+                <a:solidFill>
+                  <a:srgbClr val="6B6B6B"/>
+                </a:solidFill>
+                <a:latin typeface="Calibri" pitchFamily="34" charset="0"/>
+                <a:ea typeface="Calibri" pitchFamily="34" charset="-122"/>
+                <a:cs typeface="Calibri" pitchFamily="34" charset="-120"/>
+              </a:rPr>
+              <a:t>「総合アンケートと案内メール」画面の1番上（総合アンケートの状態と回答数が見えるところ）。</a:t>
+            </a:r>
+            <a:endParaRPr lang="en-US" sz="950" dirty="0"/>
+          </a:p>
+        </p:txBody>
+      </p:sp>
+      <p:sp>
+        <p:nvSpPr>
+          <p:cNvPr id="13" name="Text 10"/>
           <p:cNvSpPr txBox="1"/>
           <p:nvPr/>
         </p:nvSpPr>
@@ -22627,46 +21658,42 @@
                 <a:ea typeface="Calibri" pitchFamily="34" charset="-122"/>
                 <a:cs typeface="Calibri" pitchFamily="34" charset="-120"/>
               </a:rPr>
-              <a:t>終了後2：案内メールを送る（つづき）</a:t>
+              <a:t>終了後2：案内メールを送る</a:t>
             </a:r>
             <a:endParaRPr lang="en-US" sz="2200" dirty="0"/>
           </a:p>
         </p:txBody>
       </p:sp>
-      <p:pic>
-        <p:nvPicPr>
-          <p:cNvPr id="4" name="Image 0" descr="C:\Users\sato\Desktop\enque\docs\images\o-invite-status.png">    </p:cNvPr>
-          <p:cNvPicPr>
-            <a:picLocks noChangeAspect="1"/>
-          </p:cNvPicPr>
-          <p:nvPr/>
-        </p:nvPicPr>
-        <p:blipFill>
-          <a:blip r:embed="rId1"/>
-          <a:stretch>
-            <a:fillRect/>
-          </a:stretch>
-        </p:blipFill>
-        <p:spPr>
-          <a:xfrm>
-            <a:off x="1504370" y="1481328"/>
-            <a:ext cx="4553347" cy="3474720"/>
-          </a:xfrm>
-          <a:prstGeom prst="rect">
-            <a:avLst/>
-          </a:prstGeom>
-        </p:spPr>
-      </p:pic>
-      <p:sp>
-        <p:nvSpPr>
-          <p:cNvPr id="5" name="Text 2"/>
-          <p:cNvSpPr txBox="1"/>
-          <p:nvPr/>
-        </p:nvSpPr>
-        <p:spPr>
-          <a:xfrm>
-            <a:off x="566928" y="5010912"/>
-            <a:ext cx="6428232" cy="274320"/>
+      <p:sp>
+        <p:nvSpPr>
+          <p:cNvPr id="4" name="Shape 2"/>
+          <p:cNvSpPr/>
+          <p:nvPr/>
+        </p:nvSpPr>
+        <p:spPr>
+          <a:xfrm>
+            <a:off x="566928" y="1499616"/>
+            <a:ext cx="274320" cy="274320"/>
+          </a:xfrm>
+          <a:prstGeom prst="ellipse">
+            <a:avLst/>
+          </a:prstGeom>
+          <a:solidFill>
+            <a:srgbClr val="1E2761"/>
+          </a:solidFill>
+          <a:ln/>
+        </p:spPr>
+      </p:sp>
+      <p:sp>
+        <p:nvSpPr>
+          <p:cNvPr id="5" name="Text 3"/>
+          <p:cNvSpPr txBox="1"/>
+          <p:nvPr/>
+        </p:nvSpPr>
+        <p:spPr>
+          <a:xfrm>
+            <a:off x="566928" y="1499616"/>
+            <a:ext cx="274320" cy="274320"/>
           </a:xfrm>
           <a:prstGeom prst="rect">
             <a:avLst/>
@@ -22682,23 +21709,1022 @@
               <a:buNone/>
             </a:pPr>
             <a:r>
-              <a:rPr lang="en-US" sz="950" dirty="0">
-                <a:solidFill>
-                  <a:srgbClr val="6B6B6B"/>
-                </a:solidFill>
-                <a:latin typeface="Calibri" pitchFamily="34" charset="0"/>
-                <a:ea typeface="Calibri" pitchFamily="34" charset="-122"/>
-                <a:cs typeface="Calibri" pitchFamily="34" charset="-120"/>
-              </a:rPr>
-              <a:t>「総合アンケートと案内メール」画面の送信状況（未送信・送信済み・失敗・回答済みの数）。</a:t>
-            </a:r>
-            <a:endParaRPr lang="en-US" sz="950" dirty="0"/>
-          </a:p>
-        </p:txBody>
-      </p:sp>
-      <p:sp>
-        <p:nvSpPr>
-          <p:cNvPr id="6" name="Text 3"/>
+              <a:rPr lang="en-US" sz="1100" b="1" dirty="0">
+                <a:solidFill>
+                  <a:srgbClr val="FFFFFF"/>
+                </a:solidFill>
+                <a:latin typeface="Calibri" pitchFamily="34" charset="0"/>
+                <a:ea typeface="Calibri" pitchFamily="34" charset="-122"/>
+                <a:cs typeface="Calibri" pitchFamily="34" charset="-120"/>
+              </a:rPr>
+              <a:t>1</a:t>
+            </a:r>
+            <a:endParaRPr lang="en-US" sz="1100" dirty="0"/>
+          </a:p>
+        </p:txBody>
+      </p:sp>
+      <p:sp>
+        <p:nvSpPr>
+          <p:cNvPr id="6" name="Text 4"/>
+          <p:cNvSpPr txBox="1"/>
+          <p:nvPr/>
+        </p:nvSpPr>
+        <p:spPr>
+          <a:xfrm>
+            <a:off x="969264" y="1481328"/>
+            <a:ext cx="6025896" cy="365760"/>
+          </a:xfrm>
+          <a:prstGeom prst="rect">
+            <a:avLst/>
+          </a:prstGeom>
+          <a:noFill/>
+          <a:ln/>
+        </p:spPr>
+        <p:txBody>
+          <a:bodyPr wrap="square" lIns="0" tIns="0" rIns="0" bIns="0" rtlCol="0" anchor="t"/>
+          <a:lstStyle/>
+          <a:p>
+            <a:pPr indent="0" marL="0">
+              <a:lnSpc>
+                <a:spcPct val="125000"/>
+              </a:lnSpc>
+              <a:buNone/>
+            </a:pPr>
+            <a:r>
+              <a:rPr lang="en-US" sz="1150" b="1" dirty="0">
+                <a:solidFill>
+                  <a:srgbClr val="222222"/>
+                </a:solidFill>
+                <a:latin typeface="Calibri" pitchFamily="34" charset="0"/>
+                <a:ea typeface="Calibri" pitchFamily="34" charset="-122"/>
+                <a:cs typeface="Calibri" pitchFamily="34" charset="-120"/>
+              </a:rPr>
+              <a:t>テスト送信</a:t>
+            </a:r>
+            <a:pPr indent="0" marL="0">
+              <a:lnSpc>
+                <a:spcPct val="125000"/>
+              </a:lnSpc>
+              <a:buNone/>
+            </a:pPr>
+            <a:r>
+              <a:rPr lang="en-US" sz="1150" dirty="0">
+                <a:solidFill>
+                  <a:srgbClr val="222222"/>
+                </a:solidFill>
+                <a:latin typeface="Calibri" pitchFamily="34" charset="0"/>
+                <a:ea typeface="Calibri" pitchFamily="34" charset="-122"/>
+                <a:cs typeface="Calibri" pitchFamily="34" charset="-120"/>
+              </a:rPr>
+              <a:t>：自分のアドレスを入れて送り、文面とリンクを確認する</a:t>
+            </a:r>
+            <a:endParaRPr lang="en-US" sz="1150" dirty="0"/>
+          </a:p>
+        </p:txBody>
+      </p:sp>
+      <p:sp>
+        <p:nvSpPr>
+          <p:cNvPr id="7" name="Shape 5"/>
+          <p:cNvSpPr/>
+          <p:nvPr/>
+        </p:nvSpPr>
+        <p:spPr>
+          <a:xfrm>
+            <a:off x="566928" y="1956816"/>
+            <a:ext cx="274320" cy="274320"/>
+          </a:xfrm>
+          <a:prstGeom prst="ellipse">
+            <a:avLst/>
+          </a:prstGeom>
+          <a:solidFill>
+            <a:srgbClr val="1E2761"/>
+          </a:solidFill>
+          <a:ln/>
+        </p:spPr>
+      </p:sp>
+      <p:sp>
+        <p:nvSpPr>
+          <p:cNvPr id="8" name="Text 6"/>
+          <p:cNvSpPr txBox="1"/>
+          <p:nvPr/>
+        </p:nvSpPr>
+        <p:spPr>
+          <a:xfrm>
+            <a:off x="566928" y="1956816"/>
+            <a:ext cx="274320" cy="274320"/>
+          </a:xfrm>
+          <a:prstGeom prst="rect">
+            <a:avLst/>
+          </a:prstGeom>
+          <a:noFill/>
+          <a:ln/>
+        </p:spPr>
+        <p:txBody>
+          <a:bodyPr wrap="square" lIns="0" tIns="0" rIns="0" bIns="0" rtlCol="0" anchor="ctr"/>
+          <a:lstStyle/>
+          <a:p>
+            <a:pPr algn="ctr" indent="0" marL="0">
+              <a:buNone/>
+            </a:pPr>
+            <a:r>
+              <a:rPr lang="en-US" sz="1100" b="1" dirty="0">
+                <a:solidFill>
+                  <a:srgbClr val="FFFFFF"/>
+                </a:solidFill>
+                <a:latin typeface="Calibri" pitchFamily="34" charset="0"/>
+                <a:ea typeface="Calibri" pitchFamily="34" charset="-122"/>
+                <a:cs typeface="Calibri" pitchFamily="34" charset="-120"/>
+              </a:rPr>
+              <a:t>2</a:t>
+            </a:r>
+            <a:endParaRPr lang="en-US" sz="1100" dirty="0"/>
+          </a:p>
+        </p:txBody>
+      </p:sp>
+      <p:sp>
+        <p:nvSpPr>
+          <p:cNvPr id="9" name="Text 7"/>
+          <p:cNvSpPr txBox="1"/>
+          <p:nvPr/>
+        </p:nvSpPr>
+        <p:spPr>
+          <a:xfrm>
+            <a:off x="969264" y="1938528"/>
+            <a:ext cx="6025896" cy="365760"/>
+          </a:xfrm>
+          <a:prstGeom prst="rect">
+            <a:avLst/>
+          </a:prstGeom>
+          <a:noFill/>
+          <a:ln/>
+        </p:spPr>
+        <p:txBody>
+          <a:bodyPr wrap="square" lIns="0" tIns="0" rIns="0" bIns="0" rtlCol="0" anchor="t"/>
+          <a:lstStyle/>
+          <a:p>
+            <a:pPr indent="0" marL="0">
+              <a:lnSpc>
+                <a:spcPct val="125000"/>
+              </a:lnSpc>
+              <a:buNone/>
+            </a:pPr>
+            <a:r>
+              <a:rPr lang="en-US" sz="1150" b="1" dirty="0">
+                <a:solidFill>
+                  <a:srgbClr val="222222"/>
+                </a:solidFill>
+                <a:latin typeface="Calibri" pitchFamily="34" charset="0"/>
+                <a:ea typeface="Calibri" pitchFamily="34" charset="-122"/>
+                <a:cs typeface="Calibri" pitchFamily="34" charset="-120"/>
+              </a:rPr>
+              <a:t>送信対象を作成・更新する</a:t>
+            </a:r>
+            <a:pPr indent="0" marL="0">
+              <a:lnSpc>
+                <a:spcPct val="125000"/>
+              </a:lnSpc>
+              <a:buNone/>
+            </a:pPr>
+            <a:r>
+              <a:rPr lang="en-US" sz="1150" dirty="0">
+                <a:solidFill>
+                  <a:srgbClr val="222222"/>
+                </a:solidFill>
+                <a:latin typeface="Calibri" pitchFamily="34" charset="0"/>
+                <a:ea typeface="Calibri" pitchFamily="34" charset="-122"/>
+                <a:cs typeface="Calibri" pitchFamily="34" charset="-120"/>
+              </a:rPr>
+              <a:t>を押す（メールアドレスを登録した来場者が対象になります）</a:t>
+            </a:r>
+            <a:endParaRPr lang="en-US" sz="1150" dirty="0"/>
+          </a:p>
+        </p:txBody>
+      </p:sp>
+      <p:sp>
+        <p:nvSpPr>
+          <p:cNvPr id="10" name="Shape 8"/>
+          <p:cNvSpPr/>
+          <p:nvPr/>
+        </p:nvSpPr>
+        <p:spPr>
+          <a:xfrm>
+            <a:off x="566928" y="2414016"/>
+            <a:ext cx="274320" cy="274320"/>
+          </a:xfrm>
+          <a:prstGeom prst="ellipse">
+            <a:avLst/>
+          </a:prstGeom>
+          <a:solidFill>
+            <a:srgbClr val="1E2761"/>
+          </a:solidFill>
+          <a:ln/>
+        </p:spPr>
+      </p:sp>
+      <p:sp>
+        <p:nvSpPr>
+          <p:cNvPr id="11" name="Text 9"/>
+          <p:cNvSpPr txBox="1"/>
+          <p:nvPr/>
+        </p:nvSpPr>
+        <p:spPr>
+          <a:xfrm>
+            <a:off x="566928" y="2414016"/>
+            <a:ext cx="274320" cy="274320"/>
+          </a:xfrm>
+          <a:prstGeom prst="rect">
+            <a:avLst/>
+          </a:prstGeom>
+          <a:noFill/>
+          <a:ln/>
+        </p:spPr>
+        <p:txBody>
+          <a:bodyPr wrap="square" lIns="0" tIns="0" rIns="0" bIns="0" rtlCol="0" anchor="ctr"/>
+          <a:lstStyle/>
+          <a:p>
+            <a:pPr algn="ctr" indent="0" marL="0">
+              <a:buNone/>
+            </a:pPr>
+            <a:r>
+              <a:rPr lang="en-US" sz="1100" b="1" dirty="0">
+                <a:solidFill>
+                  <a:srgbClr val="FFFFFF"/>
+                </a:solidFill>
+                <a:latin typeface="Calibri" pitchFamily="34" charset="0"/>
+                <a:ea typeface="Calibri" pitchFamily="34" charset="-122"/>
+                <a:cs typeface="Calibri" pitchFamily="34" charset="-120"/>
+              </a:rPr>
+              <a:t>3</a:t>
+            </a:r>
+            <a:endParaRPr lang="en-US" sz="1100" dirty="0"/>
+          </a:p>
+        </p:txBody>
+      </p:sp>
+      <p:sp>
+        <p:nvSpPr>
+          <p:cNvPr id="12" name="Text 10"/>
+          <p:cNvSpPr txBox="1"/>
+          <p:nvPr/>
+        </p:nvSpPr>
+        <p:spPr>
+          <a:xfrm>
+            <a:off x="969264" y="2395728"/>
+            <a:ext cx="6025896" cy="365760"/>
+          </a:xfrm>
+          <a:prstGeom prst="rect">
+            <a:avLst/>
+          </a:prstGeom>
+          <a:noFill/>
+          <a:ln/>
+        </p:spPr>
+        <p:txBody>
+          <a:bodyPr wrap="square" lIns="0" tIns="0" rIns="0" bIns="0" rtlCol="0" anchor="t"/>
+          <a:lstStyle/>
+          <a:p>
+            <a:pPr indent="0" marL="0">
+              <a:lnSpc>
+                <a:spcPct val="125000"/>
+              </a:lnSpc>
+              <a:buNone/>
+            </a:pPr>
+            <a:r>
+              <a:rPr lang="en-US" sz="1150" dirty="0">
+                <a:solidFill>
+                  <a:srgbClr val="222222"/>
+                </a:solidFill>
+                <a:latin typeface="Calibri" pitchFamily="34" charset="0"/>
+                <a:ea typeface="Calibri" pitchFamily="34" charset="-122"/>
+                <a:cs typeface="Calibri" pitchFamily="34" charset="-120"/>
+              </a:rPr>
+              <a:t>送信する</a:t>
+            </a:r>
+            <a:endParaRPr lang="en-US" sz="1150" dirty="0"/>
+          </a:p>
+        </p:txBody>
+      </p:sp>
+      <p:sp>
+        <p:nvSpPr>
+          <p:cNvPr id="13" name="Text 11"/>
+          <p:cNvSpPr txBox="1"/>
+          <p:nvPr/>
+        </p:nvSpPr>
+        <p:spPr>
+          <a:xfrm>
+            <a:off x="713232" y="2852928"/>
+            <a:ext cx="6281928" cy="257429"/>
+          </a:xfrm>
+          <a:prstGeom prst="rect">
+            <a:avLst/>
+          </a:prstGeom>
+          <a:noFill/>
+          <a:ln/>
+        </p:spPr>
+        <p:txBody>
+          <a:bodyPr wrap="square" lIns="0" tIns="0" rIns="0" bIns="0" rtlCol="0" anchor="t"/>
+          <a:lstStyle/>
+          <a:p>
+            <a:pPr marL="342900" indent="-342900">
+              <a:lnSpc>
+                <a:spcPct val="125000"/>
+              </a:lnSpc>
+              <a:buSzPct val="100000"/>
+              <a:buChar char="●"/>
+            </a:pPr>
+            <a:r>
+              <a:rPr lang="en-US" sz="1100" dirty="0">
+                <a:solidFill>
+                  <a:srgbClr val="222222"/>
+                </a:solidFill>
+                <a:latin typeface="Calibri" pitchFamily="34" charset="0"/>
+                <a:ea typeface="Calibri" pitchFamily="34" charset="-122"/>
+                <a:cs typeface="Calibri" pitchFamily="34" charset="-120"/>
+              </a:rPr>
+              <a:t>少数なら「この画面から50件だけ送信する」</a:t>
+            </a:r>
+            <a:endParaRPr lang="en-US" sz="1100" dirty="0"/>
+          </a:p>
+        </p:txBody>
+      </p:sp>
+      <p:sp>
+        <p:nvSpPr>
+          <p:cNvPr id="14" name="Text 12"/>
+          <p:cNvSpPr txBox="1"/>
+          <p:nvPr/>
+        </p:nvSpPr>
+        <p:spPr>
+          <a:xfrm>
+            <a:off x="713232" y="3128645"/>
+            <a:ext cx="6281928" cy="257429"/>
+          </a:xfrm>
+          <a:prstGeom prst="rect">
+            <a:avLst/>
+          </a:prstGeom>
+          <a:noFill/>
+          <a:ln/>
+        </p:spPr>
+        <p:txBody>
+          <a:bodyPr wrap="square" lIns="0" tIns="0" rIns="0" bIns="0" rtlCol="0" anchor="t"/>
+          <a:lstStyle/>
+          <a:p>
+            <a:pPr marL="342900" indent="-342900">
+              <a:lnSpc>
+                <a:spcPct val="125000"/>
+              </a:lnSpc>
+              <a:buSzPct val="100000"/>
+              <a:buChar char="●"/>
+            </a:pPr>
+            <a:r>
+              <a:rPr lang="en-US" sz="1100" dirty="0">
+                <a:solidFill>
+                  <a:srgbClr val="222222"/>
+                </a:solidFill>
+                <a:latin typeface="Calibri" pitchFamily="34" charset="0"/>
+                <a:ea typeface="Calibri" pitchFamily="34" charset="-122"/>
+                <a:cs typeface="Calibri" pitchFamily="34" charset="-120"/>
+              </a:rPr>
+              <a:t>大量ならサーバーの自動送信（5分ごとに200件ずつ）に任せる</a:t>
+            </a:r>
+            <a:endParaRPr lang="en-US" sz="1100" dirty="0"/>
+          </a:p>
+        </p:txBody>
+      </p:sp>
+      <p:sp>
+        <p:nvSpPr>
+          <p:cNvPr id="15" name="Shape 13"/>
+          <p:cNvSpPr/>
+          <p:nvPr/>
+        </p:nvSpPr>
+        <p:spPr>
+          <a:xfrm>
+            <a:off x="566928" y="3422650"/>
+            <a:ext cx="274320" cy="274320"/>
+          </a:xfrm>
+          <a:prstGeom prst="ellipse">
+            <a:avLst/>
+          </a:prstGeom>
+          <a:solidFill>
+            <a:srgbClr val="1E2761"/>
+          </a:solidFill>
+          <a:ln/>
+        </p:spPr>
+      </p:sp>
+      <p:sp>
+        <p:nvSpPr>
+          <p:cNvPr id="16" name="Text 14"/>
+          <p:cNvSpPr txBox="1"/>
+          <p:nvPr/>
+        </p:nvSpPr>
+        <p:spPr>
+          <a:xfrm>
+            <a:off x="566928" y="3422650"/>
+            <a:ext cx="274320" cy="274320"/>
+          </a:xfrm>
+          <a:prstGeom prst="rect">
+            <a:avLst/>
+          </a:prstGeom>
+          <a:noFill/>
+          <a:ln/>
+        </p:spPr>
+        <p:txBody>
+          <a:bodyPr wrap="square" lIns="0" tIns="0" rIns="0" bIns="0" rtlCol="0" anchor="ctr"/>
+          <a:lstStyle/>
+          <a:p>
+            <a:pPr algn="ctr" indent="0" marL="0">
+              <a:buNone/>
+            </a:pPr>
+            <a:r>
+              <a:rPr lang="en-US" sz="1100" b="1" dirty="0">
+                <a:solidFill>
+                  <a:srgbClr val="FFFFFF"/>
+                </a:solidFill>
+                <a:latin typeface="Calibri" pitchFamily="34" charset="0"/>
+                <a:ea typeface="Calibri" pitchFamily="34" charset="-122"/>
+                <a:cs typeface="Calibri" pitchFamily="34" charset="-120"/>
+              </a:rPr>
+              <a:t>4</a:t>
+            </a:r>
+            <a:endParaRPr lang="en-US" sz="1100" dirty="0"/>
+          </a:p>
+        </p:txBody>
+      </p:sp>
+      <p:sp>
+        <p:nvSpPr>
+          <p:cNvPr id="17" name="Text 15"/>
+          <p:cNvSpPr txBox="1"/>
+          <p:nvPr/>
+        </p:nvSpPr>
+        <p:spPr>
+          <a:xfrm>
+            <a:off x="969264" y="3404362"/>
+            <a:ext cx="6025896" cy="365760"/>
+          </a:xfrm>
+          <a:prstGeom prst="rect">
+            <a:avLst/>
+          </a:prstGeom>
+          <a:noFill/>
+          <a:ln/>
+        </p:spPr>
+        <p:txBody>
+          <a:bodyPr wrap="square" lIns="0" tIns="0" rIns="0" bIns="0" rtlCol="0" anchor="t"/>
+          <a:lstStyle/>
+          <a:p>
+            <a:pPr indent="0" marL="0">
+              <a:lnSpc>
+                <a:spcPct val="125000"/>
+              </a:lnSpc>
+              <a:buNone/>
+            </a:pPr>
+            <a:r>
+              <a:rPr lang="en-US" sz="1150" dirty="0">
+                <a:solidFill>
+                  <a:srgbClr val="222222"/>
+                </a:solidFill>
+                <a:latin typeface="Calibri" pitchFamily="34" charset="0"/>
+                <a:ea typeface="Calibri" pitchFamily="34" charset="-122"/>
+                <a:cs typeface="Calibri" pitchFamily="34" charset="-120"/>
+              </a:rPr>
+              <a:t>送信状況（未送信・送信済み・失敗）を画面で確認する</a:t>
+            </a:r>
+            <a:endParaRPr lang="en-US" sz="1150" dirty="0"/>
+          </a:p>
+        </p:txBody>
+      </p:sp>
+      <p:sp>
+        <p:nvSpPr>
+          <p:cNvPr id="18" name="Shape 16"/>
+          <p:cNvSpPr/>
+          <p:nvPr/>
+        </p:nvSpPr>
+        <p:spPr>
+          <a:xfrm>
+            <a:off x="566928" y="3861562"/>
+            <a:ext cx="6428232" cy="624459"/>
+          </a:xfrm>
+          <a:prstGeom prst="roundRect">
+            <a:avLst>
+              <a:gd name="adj" fmla="val 8786"/>
+            </a:avLst>
+          </a:prstGeom>
+          <a:solidFill>
+            <a:srgbClr val="E8ECF8"/>
+          </a:solidFill>
+          <a:ln w="9525">
+            <a:solidFill>
+              <a:srgbClr val="1E2761"/>
+            </a:solidFill>
+            <a:prstDash val="solid"/>
+          </a:ln>
+        </p:spPr>
+      </p:sp>
+      <p:sp>
+        <p:nvSpPr>
+          <p:cNvPr id="19" name="Text 17"/>
+          <p:cNvSpPr txBox="1"/>
+          <p:nvPr/>
+        </p:nvSpPr>
+        <p:spPr>
+          <a:xfrm>
+            <a:off x="658368" y="3953002"/>
+            <a:ext cx="237744" cy="237744"/>
+          </a:xfrm>
+          <a:prstGeom prst="rect">
+            <a:avLst/>
+          </a:prstGeom>
+          <a:noFill/>
+          <a:ln/>
+        </p:spPr>
+        <p:txBody>
+          <a:bodyPr wrap="square" lIns="0" tIns="0" rIns="0" bIns="0" rtlCol="0" anchor="ctr"/>
+          <a:lstStyle/>
+          <a:p>
+            <a:pPr algn="ctr" indent="0" marL="0">
+              <a:buNone/>
+            </a:pPr>
+            <a:r>
+              <a:rPr lang="en-US" sz="1200" b="1" dirty="0">
+                <a:solidFill>
+                  <a:srgbClr val="1E2761"/>
+                </a:solidFill>
+                <a:latin typeface="Calibri" pitchFamily="34" charset="0"/>
+                <a:ea typeface="Calibri" pitchFamily="34" charset="-122"/>
+                <a:cs typeface="Calibri" pitchFamily="34" charset="-120"/>
+              </a:rPr>
+              <a:t>i</a:t>
+            </a:r>
+            <a:endParaRPr lang="en-US" sz="1200" dirty="0"/>
+          </a:p>
+        </p:txBody>
+      </p:sp>
+      <p:sp>
+        <p:nvSpPr>
+          <p:cNvPr id="20" name="Text 18"/>
+          <p:cNvSpPr txBox="1"/>
+          <p:nvPr/>
+        </p:nvSpPr>
+        <p:spPr>
+          <a:xfrm>
+            <a:off x="950976" y="3971290"/>
+            <a:ext cx="5925312" cy="441579"/>
+          </a:xfrm>
+          <a:prstGeom prst="rect">
+            <a:avLst/>
+          </a:prstGeom>
+          <a:noFill/>
+          <a:ln/>
+        </p:spPr>
+        <p:txBody>
+          <a:bodyPr wrap="square" lIns="0" tIns="0" rIns="0" bIns="0" rtlCol="0" anchor="t"/>
+          <a:lstStyle/>
+          <a:p>
+            <a:pPr indent="0" marL="0">
+              <a:lnSpc>
+                <a:spcPct val="120000"/>
+              </a:lnSpc>
+              <a:buNone/>
+            </a:pPr>
+            <a:r>
+              <a:rPr lang="en-US" sz="1050" dirty="0">
+                <a:solidFill>
+                  <a:srgbClr val="222222"/>
+                </a:solidFill>
+                <a:latin typeface="Calibri" pitchFamily="34" charset="0"/>
+                <a:ea typeface="Calibri" pitchFamily="34" charset="-122"/>
+                <a:cs typeface="Calibri" pitchFamily="34" charset="-120"/>
+              </a:rPr>
+              <a:t>メールの文面は相手によって変わります。会期中に総合アンケートへ答えた方には</a:t>
+            </a:r>
+            <a:pPr indent="0" marL="0">
+              <a:lnSpc>
+                <a:spcPct val="120000"/>
+              </a:lnSpc>
+              <a:buNone/>
+            </a:pPr>
+            <a:r>
+              <a:rPr lang="en-US" sz="1050" b="1" dirty="0">
+                <a:solidFill>
+                  <a:srgbClr val="222222"/>
+                </a:solidFill>
+                <a:latin typeface="Calibri" pitchFamily="34" charset="0"/>
+                <a:ea typeface="Calibri" pitchFamily="34" charset="-122"/>
+                <a:cs typeface="Calibri" pitchFamily="34" charset="-120"/>
+              </a:rPr>
+              <a:t>壁紙のご案内だけ</a:t>
+            </a:r>
+            <a:pPr indent="0" marL="0">
+              <a:lnSpc>
+                <a:spcPct val="120000"/>
+              </a:lnSpc>
+              <a:buNone/>
+            </a:pPr>
+            <a:r>
+              <a:rPr lang="en-US" sz="1050" dirty="0">
+                <a:solidFill>
+                  <a:srgbClr val="222222"/>
+                </a:solidFill>
+                <a:latin typeface="Calibri" pitchFamily="34" charset="0"/>
+                <a:ea typeface="Calibri" pitchFamily="34" charset="-122"/>
+                <a:cs typeface="Calibri" pitchFamily="34" charset="-120"/>
+              </a:rPr>
+              <a:t>、</a:t>
+            </a:r>
+            <a:endParaRPr lang="en-US" sz="1050" dirty="0"/>
+          </a:p>
+        </p:txBody>
+      </p:sp>
+      <p:sp>
+        <p:nvSpPr>
+          <p:cNvPr id="21" name="Shape 19"/>
+          <p:cNvSpPr/>
+          <p:nvPr/>
+        </p:nvSpPr>
+        <p:spPr>
+          <a:xfrm>
+            <a:off x="566928" y="4559173"/>
+            <a:ext cx="6428232" cy="431102"/>
+          </a:xfrm>
+          <a:prstGeom prst="roundRect">
+            <a:avLst>
+              <a:gd name="adj" fmla="val 12726"/>
+            </a:avLst>
+          </a:prstGeom>
+          <a:solidFill>
+            <a:srgbClr val="E8ECF8"/>
+          </a:solidFill>
+          <a:ln w="9525">
+            <a:solidFill>
+              <a:srgbClr val="1E2761"/>
+            </a:solidFill>
+            <a:prstDash val="solid"/>
+          </a:ln>
+        </p:spPr>
+      </p:sp>
+      <p:sp>
+        <p:nvSpPr>
+          <p:cNvPr id="22" name="Text 20"/>
+          <p:cNvSpPr txBox="1"/>
+          <p:nvPr/>
+        </p:nvSpPr>
+        <p:spPr>
+          <a:xfrm>
+            <a:off x="658368" y="4650613"/>
+            <a:ext cx="237744" cy="237744"/>
+          </a:xfrm>
+          <a:prstGeom prst="rect">
+            <a:avLst/>
+          </a:prstGeom>
+          <a:noFill/>
+          <a:ln/>
+        </p:spPr>
+        <p:txBody>
+          <a:bodyPr wrap="square" lIns="0" tIns="0" rIns="0" bIns="0" rtlCol="0" anchor="ctr"/>
+          <a:lstStyle/>
+          <a:p>
+            <a:pPr algn="ctr" indent="0" marL="0">
+              <a:buNone/>
+            </a:pPr>
+            <a:r>
+              <a:rPr lang="en-US" sz="1200" b="1" dirty="0">
+                <a:solidFill>
+                  <a:srgbClr val="1E2761"/>
+                </a:solidFill>
+                <a:latin typeface="Calibri" pitchFamily="34" charset="0"/>
+                <a:ea typeface="Calibri" pitchFamily="34" charset="-122"/>
+                <a:cs typeface="Calibri" pitchFamily="34" charset="-120"/>
+              </a:rPr>
+              <a:t>i</a:t>
+            </a:r>
+            <a:endParaRPr lang="en-US" sz="1200" dirty="0"/>
+          </a:p>
+        </p:txBody>
+      </p:sp>
+      <p:sp>
+        <p:nvSpPr>
+          <p:cNvPr id="23" name="Text 21"/>
+          <p:cNvSpPr txBox="1"/>
+          <p:nvPr/>
+        </p:nvSpPr>
+        <p:spPr>
+          <a:xfrm>
+            <a:off x="950976" y="4668901"/>
+            <a:ext cx="5925312" cy="248221"/>
+          </a:xfrm>
+          <a:prstGeom prst="rect">
+            <a:avLst/>
+          </a:prstGeom>
+          <a:noFill/>
+          <a:ln/>
+        </p:spPr>
+        <p:txBody>
+          <a:bodyPr wrap="square" lIns="0" tIns="0" rIns="0" bIns="0" rtlCol="0" anchor="t"/>
+          <a:lstStyle/>
+          <a:p>
+            <a:pPr indent="0" marL="0">
+              <a:lnSpc>
+                <a:spcPct val="120000"/>
+              </a:lnSpc>
+              <a:buNone/>
+            </a:pPr>
+            <a:r>
+              <a:rPr lang="en-US" sz="1050" dirty="0">
+                <a:solidFill>
+                  <a:srgbClr val="222222"/>
+                </a:solidFill>
+                <a:latin typeface="Calibri" pitchFamily="34" charset="0"/>
+                <a:ea typeface="Calibri" pitchFamily="34" charset="-122"/>
+                <a:cs typeface="Calibri" pitchFamily="34" charset="-120"/>
+              </a:rPr>
+              <a:t>まだ答えていない方には</a:t>
+            </a:r>
+            <a:pPr indent="0" marL="0">
+              <a:lnSpc>
+                <a:spcPct val="120000"/>
+              </a:lnSpc>
+              <a:buNone/>
+            </a:pPr>
+            <a:r>
+              <a:rPr lang="en-US" sz="1050" b="1" dirty="0">
+                <a:solidFill>
+                  <a:srgbClr val="222222"/>
+                </a:solidFill>
+                <a:latin typeface="Calibri" pitchFamily="34" charset="0"/>
+                <a:ea typeface="Calibri" pitchFamily="34" charset="-122"/>
+                <a:cs typeface="Calibri" pitchFamily="34" charset="-120"/>
+              </a:rPr>
+              <a:t>回答のお願い</a:t>
+            </a:r>
+            <a:pPr indent="0" marL="0">
+              <a:lnSpc>
+                <a:spcPct val="120000"/>
+              </a:lnSpc>
+              <a:buNone/>
+            </a:pPr>
+            <a:r>
+              <a:rPr lang="en-US" sz="1050" dirty="0">
+                <a:solidFill>
+                  <a:srgbClr val="222222"/>
+                </a:solidFill>
+                <a:latin typeface="Calibri" pitchFamily="34" charset="0"/>
+                <a:ea typeface="Calibri" pitchFamily="34" charset="-122"/>
+                <a:cs typeface="Calibri" pitchFamily="34" charset="-120"/>
+              </a:rPr>
+              <a:t>（回答後に壁紙）が届きます。</a:t>
+            </a:r>
+            <a:endParaRPr lang="en-US" sz="1050" dirty="0"/>
+          </a:p>
+        </p:txBody>
+      </p:sp>
+      <p:sp>
+        <p:nvSpPr>
+          <p:cNvPr id="24" name="Shape 22"/>
+          <p:cNvSpPr/>
+          <p:nvPr/>
+        </p:nvSpPr>
+        <p:spPr>
+          <a:xfrm>
+            <a:off x="566928" y="5063427"/>
+            <a:ext cx="6428232" cy="624459"/>
+          </a:xfrm>
+          <a:prstGeom prst="roundRect">
+            <a:avLst>
+              <a:gd name="adj" fmla="val 8786"/>
+            </a:avLst>
+          </a:prstGeom>
+          <a:solidFill>
+            <a:srgbClr val="E8ECF8"/>
+          </a:solidFill>
+          <a:ln w="9525">
+            <a:solidFill>
+              <a:srgbClr val="1E2761"/>
+            </a:solidFill>
+            <a:prstDash val="solid"/>
+          </a:ln>
+        </p:spPr>
+      </p:sp>
+      <p:sp>
+        <p:nvSpPr>
+          <p:cNvPr id="25" name="Text 23"/>
+          <p:cNvSpPr txBox="1"/>
+          <p:nvPr/>
+        </p:nvSpPr>
+        <p:spPr>
+          <a:xfrm>
+            <a:off x="658368" y="5154867"/>
+            <a:ext cx="237744" cy="237744"/>
+          </a:xfrm>
+          <a:prstGeom prst="rect">
+            <a:avLst/>
+          </a:prstGeom>
+          <a:noFill/>
+          <a:ln/>
+        </p:spPr>
+        <p:txBody>
+          <a:bodyPr wrap="square" lIns="0" tIns="0" rIns="0" bIns="0" rtlCol="0" anchor="ctr"/>
+          <a:lstStyle/>
+          <a:p>
+            <a:pPr algn="ctr" indent="0" marL="0">
+              <a:buNone/>
+            </a:pPr>
+            <a:r>
+              <a:rPr lang="en-US" sz="1200" b="1" dirty="0">
+                <a:solidFill>
+                  <a:srgbClr val="1E2761"/>
+                </a:solidFill>
+                <a:latin typeface="Calibri" pitchFamily="34" charset="0"/>
+                <a:ea typeface="Calibri" pitchFamily="34" charset="-122"/>
+                <a:cs typeface="Calibri" pitchFamily="34" charset="-120"/>
+              </a:rPr>
+              <a:t>i</a:t>
+            </a:r>
+            <a:endParaRPr lang="en-US" sz="1200" dirty="0"/>
+          </a:p>
+        </p:txBody>
+      </p:sp>
+      <p:sp>
+        <p:nvSpPr>
+          <p:cNvPr id="26" name="Text 24"/>
+          <p:cNvSpPr txBox="1"/>
+          <p:nvPr/>
+        </p:nvSpPr>
+        <p:spPr>
+          <a:xfrm>
+            <a:off x="950976" y="5173155"/>
+            <a:ext cx="5925312" cy="441579"/>
+          </a:xfrm>
+          <a:prstGeom prst="rect">
+            <a:avLst/>
+          </a:prstGeom>
+          <a:noFill/>
+          <a:ln/>
+        </p:spPr>
+        <p:txBody>
+          <a:bodyPr wrap="square" lIns="0" tIns="0" rIns="0" bIns="0" rtlCol="0" anchor="t"/>
+          <a:lstStyle/>
+          <a:p>
+            <a:pPr indent="0" marL="0">
+              <a:lnSpc>
+                <a:spcPct val="120000"/>
+              </a:lnSpc>
+              <a:buNone/>
+            </a:pPr>
+            <a:r>
+              <a:rPr lang="en-US" sz="1050" dirty="0">
+                <a:solidFill>
+                  <a:srgbClr val="222222"/>
+                </a:solidFill>
+                <a:latin typeface="Calibri" pitchFamily="34" charset="0"/>
+                <a:ea typeface="Calibri" pitchFamily="34" charset="-122"/>
+                <a:cs typeface="Calibri" pitchFamily="34" charset="-120"/>
+              </a:rPr>
+              <a:t>テスト送信のリンクは</a:t>
+            </a:r>
+            <a:pPr indent="0" marL="0">
+              <a:lnSpc>
+                <a:spcPct val="120000"/>
+              </a:lnSpc>
+              <a:buNone/>
+            </a:pPr>
+            <a:r>
+              <a:rPr lang="en-US" sz="1050" b="1" dirty="0">
+                <a:solidFill>
+                  <a:srgbClr val="222222"/>
+                </a:solidFill>
+                <a:latin typeface="Calibri" pitchFamily="34" charset="0"/>
+                <a:ea typeface="Calibri" pitchFamily="34" charset="-122"/>
+                <a:cs typeface="Calibri" pitchFamily="34" charset="-120"/>
+              </a:rPr>
+              <a:t>スタッフ確認用のプレビュー</a:t>
+            </a:r>
+            <a:pPr indent="0" marL="0">
+              <a:lnSpc>
+                <a:spcPct val="120000"/>
+              </a:lnSpc>
+              <a:buNone/>
+            </a:pPr>
+            <a:r>
+              <a:rPr lang="en-US" sz="1050" dirty="0">
+                <a:solidFill>
+                  <a:srgbClr val="222222"/>
+                </a:solidFill>
+                <a:latin typeface="Calibri" pitchFamily="34" charset="0"/>
+                <a:ea typeface="Calibri" pitchFamily="34" charset="-122"/>
+                <a:cs typeface="Calibri" pitchFamily="34" charset="-120"/>
+              </a:rPr>
+              <a:t>です。管理画面にログインした状態で開くと、来場者に見えるのと同じ画面を確認できます（プレビューからは回答できません）。</a:t>
+            </a:r>
+            <a:endParaRPr lang="en-US" sz="1050" dirty="0"/>
+          </a:p>
+        </p:txBody>
+      </p:sp>
+      <p:sp>
+        <p:nvSpPr>
+          <p:cNvPr id="27" name="Shape 25"/>
+          <p:cNvSpPr/>
+          <p:nvPr/>
+        </p:nvSpPr>
+        <p:spPr>
+          <a:xfrm>
+            <a:off x="566928" y="5761038"/>
+            <a:ext cx="6428232" cy="431102"/>
+          </a:xfrm>
+          <a:prstGeom prst="roundRect">
+            <a:avLst>
+              <a:gd name="adj" fmla="val 12726"/>
+            </a:avLst>
+          </a:prstGeom>
+          <a:solidFill>
+            <a:srgbClr val="FDF0E6"/>
+          </a:solidFill>
+          <a:ln w="9525">
+            <a:solidFill>
+              <a:srgbClr val="E08A3C"/>
+            </a:solidFill>
+            <a:prstDash val="solid"/>
+          </a:ln>
+        </p:spPr>
+      </p:sp>
+      <p:sp>
+        <p:nvSpPr>
+          <p:cNvPr id="28" name="Text 26"/>
+          <p:cNvSpPr txBox="1"/>
+          <p:nvPr/>
+        </p:nvSpPr>
+        <p:spPr>
+          <a:xfrm>
+            <a:off x="658368" y="5852478"/>
+            <a:ext cx="237744" cy="237744"/>
+          </a:xfrm>
+          <a:prstGeom prst="rect">
+            <a:avLst/>
+          </a:prstGeom>
+          <a:noFill/>
+          <a:ln/>
+        </p:spPr>
+        <p:txBody>
+          <a:bodyPr wrap="square" lIns="0" tIns="0" rIns="0" bIns="0" rtlCol="0" anchor="ctr"/>
+          <a:lstStyle/>
+          <a:p>
+            <a:pPr algn="ctr" indent="0" marL="0">
+              <a:buNone/>
+            </a:pPr>
+            <a:r>
+              <a:rPr lang="en-US" sz="1200" b="1" dirty="0">
+                <a:solidFill>
+                  <a:srgbClr val="C25A17"/>
+                </a:solidFill>
+                <a:latin typeface="Calibri" pitchFamily="34" charset="0"/>
+                <a:ea typeface="Calibri" pitchFamily="34" charset="-122"/>
+                <a:cs typeface="Calibri" pitchFamily="34" charset="-120"/>
+              </a:rPr>
+              <a:t>！</a:t>
+            </a:r>
+            <a:endParaRPr lang="en-US" sz="1200" dirty="0"/>
+          </a:p>
+        </p:txBody>
+      </p:sp>
+      <p:sp>
+        <p:nvSpPr>
+          <p:cNvPr id="29" name="Text 27"/>
+          <p:cNvSpPr txBox="1"/>
+          <p:nvPr/>
+        </p:nvSpPr>
+        <p:spPr>
+          <a:xfrm>
+            <a:off x="950976" y="5870766"/>
+            <a:ext cx="5925312" cy="248221"/>
+          </a:xfrm>
+          <a:prstGeom prst="rect">
+            <a:avLst/>
+          </a:prstGeom>
+          <a:noFill/>
+          <a:ln/>
+        </p:spPr>
+        <p:txBody>
+          <a:bodyPr wrap="square" lIns="0" tIns="0" rIns="0" bIns="0" rtlCol="0" anchor="t"/>
+          <a:lstStyle/>
+          <a:p>
+            <a:pPr indent="0" marL="0">
+              <a:lnSpc>
+                <a:spcPct val="120000"/>
+              </a:lnSpc>
+              <a:buNone/>
+            </a:pPr>
+            <a:r>
+              <a:rPr lang="en-US" sz="1050" dirty="0">
+                <a:solidFill>
+                  <a:srgbClr val="222222"/>
+                </a:solidFill>
+                <a:latin typeface="Calibri" pitchFamily="34" charset="0"/>
+                <a:ea typeface="Calibri" pitchFamily="34" charset="-122"/>
+                <a:cs typeface="Calibri" pitchFamily="34" charset="-120"/>
+              </a:rPr>
+              <a:t>送信済みの人には二重に送られません。失敗したものは自動で3回まで再送されます。</a:t>
+            </a:r>
+            <a:endParaRPr lang="en-US" sz="1050" dirty="0"/>
+          </a:p>
+        </p:txBody>
+      </p:sp>
+      <p:sp>
+        <p:nvSpPr>
+          <p:cNvPr id="30" name="Text 28"/>
           <p:cNvSpPr txBox="1"/>
           <p:nvPr/>
         </p:nvSpPr>
@@ -24021,453 +24047,46 @@
                 <a:ea typeface="Calibri" pitchFamily="34" charset="-122"/>
                 <a:cs typeface="Calibri" pitchFamily="34" charset="-120"/>
               </a:rPr>
-              <a:t>終了後3：集計データを受け取る</a:t>
+              <a:t>終了後2：案内メールを送る（つづき）</a:t>
             </a:r>
             <a:endParaRPr lang="en-US" sz="2200" dirty="0"/>
           </a:p>
         </p:txBody>
       </p:sp>
-      <p:sp>
-        <p:nvSpPr>
-          <p:cNvPr id="4" name="Text 2"/>
-          <p:cNvSpPr txBox="1"/>
-          <p:nvPr/>
-        </p:nvSpPr>
-        <p:spPr>
-          <a:xfrm>
-            <a:off x="566928" y="1591056"/>
-            <a:ext cx="6428232" cy="257810"/>
-          </a:xfrm>
-          <a:prstGeom prst="rect">
-            <a:avLst/>
-          </a:prstGeom>
-          <a:noFill/>
-          <a:ln/>
-        </p:spPr>
-        <p:txBody>
-          <a:bodyPr wrap="square" lIns="0" tIns="0" rIns="0" bIns="0" rtlCol="0" anchor="t"/>
-          <a:lstStyle/>
-          <a:p>
-            <a:pPr indent="0" marL="0">
-              <a:buNone/>
-            </a:pPr>
-            <a:r>
-              <a:rPr lang="en-US" sz="1400" b="1" dirty="0">
-                <a:solidFill>
-                  <a:srgbClr val="1E2761"/>
-                </a:solidFill>
-                <a:latin typeface="Calibri" pitchFamily="34" charset="0"/>
-                <a:ea typeface="Calibri" pitchFamily="34" charset="-122"/>
-                <a:cs typeface="Calibri" pitchFamily="34" charset="-120"/>
-              </a:rPr>
-              <a:t>CSVをダウンロードする</a:t>
-            </a:r>
-            <a:endParaRPr lang="en-US" sz="1400" dirty="0"/>
-          </a:p>
-        </p:txBody>
-      </p:sp>
-      <p:sp>
-        <p:nvSpPr>
-          <p:cNvPr id="5" name="Text 3"/>
-          <p:cNvSpPr txBox="1"/>
-          <p:nvPr/>
-        </p:nvSpPr>
-        <p:spPr>
-          <a:xfrm>
-            <a:off x="713232" y="1922018"/>
-            <a:ext cx="6281928" cy="257429"/>
-          </a:xfrm>
-          <a:prstGeom prst="rect">
-            <a:avLst/>
-          </a:prstGeom>
-          <a:noFill/>
-          <a:ln/>
-        </p:spPr>
-        <p:txBody>
-          <a:bodyPr wrap="square" lIns="0" tIns="0" rIns="0" bIns="0" rtlCol="0" anchor="t"/>
-          <a:lstStyle/>
-          <a:p>
-            <a:pPr marL="342900" indent="-342900">
-              <a:lnSpc>
-                <a:spcPct val="125000"/>
-              </a:lnSpc>
-              <a:buSzPct val="100000"/>
-              <a:buChar char="●"/>
-            </a:pPr>
-            <a:r>
-              <a:rPr lang="en-US" sz="1100" b="1" dirty="0">
-                <a:solidFill>
-                  <a:srgbClr val="222222"/>
-                </a:solidFill>
-                <a:latin typeface="Calibri" pitchFamily="34" charset="0"/>
-                <a:ea typeface="Calibri" pitchFamily="34" charset="-122"/>
-                <a:cs typeface="Calibri" pitchFamily="34" charset="-120"/>
-              </a:rPr>
-              <a:t>企業別</a:t>
-            </a:r>
-            <a:pPr indent="0" marL="0">
-              <a:lnSpc>
-                <a:spcPct val="125000"/>
-              </a:lnSpc>
-              <a:buNone/>
-            </a:pPr>
-            <a:r>
-              <a:rPr lang="en-US" sz="1100" dirty="0">
-                <a:solidFill>
-                  <a:srgbClr val="222222"/>
-                </a:solidFill>
-                <a:latin typeface="Calibri" pitchFamily="34" charset="0"/>
-                <a:ea typeface="Calibri" pitchFamily="34" charset="-122"/>
-                <a:cs typeface="Calibri" pitchFamily="34" charset="-120"/>
-              </a:rPr>
-              <a:t>：企業の「集計」画面、または「回答一覧」から</a:t>
-            </a:r>
-            <a:endParaRPr lang="en-US" sz="1100" dirty="0"/>
-          </a:p>
-        </p:txBody>
-      </p:sp>
-      <p:sp>
-        <p:nvSpPr>
-          <p:cNvPr id="6" name="Text 4"/>
-          <p:cNvSpPr txBox="1"/>
-          <p:nvPr/>
-        </p:nvSpPr>
-        <p:spPr>
-          <a:xfrm>
-            <a:off x="713232" y="2197735"/>
-            <a:ext cx="6281928" cy="257429"/>
-          </a:xfrm>
-          <a:prstGeom prst="rect">
-            <a:avLst/>
-          </a:prstGeom>
-          <a:noFill/>
-          <a:ln/>
-        </p:spPr>
-        <p:txBody>
-          <a:bodyPr wrap="square" lIns="0" tIns="0" rIns="0" bIns="0" rtlCol="0" anchor="t"/>
-          <a:lstStyle/>
-          <a:p>
-            <a:pPr marL="342900" indent="-342900">
-              <a:lnSpc>
-                <a:spcPct val="125000"/>
-              </a:lnSpc>
-              <a:buSzPct val="100000"/>
-              <a:buChar char="●"/>
-            </a:pPr>
-            <a:r>
-              <a:rPr lang="en-US" sz="1100" b="1" dirty="0">
-                <a:solidFill>
-                  <a:srgbClr val="222222"/>
-                </a:solidFill>
-                <a:latin typeface="Calibri" pitchFamily="34" charset="0"/>
-                <a:ea typeface="Calibri" pitchFamily="34" charset="-122"/>
-                <a:cs typeface="Calibri" pitchFamily="34" charset="-120"/>
-              </a:rPr>
-              <a:t>全社まとめて</a:t>
-            </a:r>
-            <a:pPr indent="0" marL="0">
-              <a:lnSpc>
-                <a:spcPct val="125000"/>
-              </a:lnSpc>
-              <a:buNone/>
-            </a:pPr>
-            <a:r>
-              <a:rPr lang="en-US" sz="1100" dirty="0">
-                <a:solidFill>
-                  <a:srgbClr val="222222"/>
-                </a:solidFill>
-                <a:latin typeface="Calibri" pitchFamily="34" charset="0"/>
-                <a:ea typeface="Calibri" pitchFamily="34" charset="-122"/>
-                <a:cs typeface="Calibri" pitchFamily="34" charset="-120"/>
-              </a:rPr>
-              <a:t>：ダッシュボードの「全企業分のCSV」から</a:t>
-            </a:r>
-            <a:endParaRPr lang="en-US" sz="1100" dirty="0"/>
-          </a:p>
-        </p:txBody>
-      </p:sp>
-      <p:sp>
-        <p:nvSpPr>
-          <p:cNvPr id="7" name="Text 5"/>
-          <p:cNvSpPr txBox="1"/>
-          <p:nvPr/>
-        </p:nvSpPr>
-        <p:spPr>
-          <a:xfrm>
-            <a:off x="566928" y="2473452"/>
-            <a:ext cx="6428232" cy="257429"/>
-          </a:xfrm>
-          <a:prstGeom prst="rect">
-            <a:avLst/>
-          </a:prstGeom>
-          <a:noFill/>
-          <a:ln/>
-        </p:spPr>
-        <p:txBody>
-          <a:bodyPr wrap="square" lIns="0" tIns="0" rIns="0" bIns="0" rtlCol="0" anchor="t"/>
-          <a:lstStyle/>
-          <a:p>
-            <a:pPr indent="0" marL="0">
-              <a:lnSpc>
-                <a:spcPct val="125000"/>
-              </a:lnSpc>
-              <a:buNone/>
-            </a:pPr>
-            <a:r>
-              <a:rPr lang="en-US" sz="1100" dirty="0">
-                <a:solidFill>
-                  <a:srgbClr val="222222"/>
-                </a:solidFill>
-                <a:latin typeface="Calibri" pitchFamily="34" charset="0"/>
-                <a:ea typeface="Calibri" pitchFamily="34" charset="-122"/>
-                <a:cs typeface="Calibri" pitchFamily="34" charset="-120"/>
-              </a:rPr>
-              <a:t>CSVは</a:t>
-            </a:r>
-            <a:pPr indent="0" marL="0">
-              <a:lnSpc>
-                <a:spcPct val="125000"/>
-              </a:lnSpc>
-              <a:buNone/>
-            </a:pPr>
-            <a:r>
-              <a:rPr lang="en-US" sz="1100" b="1" dirty="0">
-                <a:solidFill>
-                  <a:srgbClr val="222222"/>
-                </a:solidFill>
-                <a:latin typeface="Calibri" pitchFamily="34" charset="0"/>
-                <a:ea typeface="Calibri" pitchFamily="34" charset="-122"/>
-                <a:cs typeface="Calibri" pitchFamily="34" charset="-120"/>
-              </a:rPr>
-              <a:t>UTF-8（BOM付き）</a:t>
-            </a:r>
-            <a:pPr indent="0" marL="0">
-              <a:lnSpc>
-                <a:spcPct val="125000"/>
-              </a:lnSpc>
-              <a:buNone/>
-            </a:pPr>
-            <a:r>
-              <a:rPr lang="en-US" sz="1100" dirty="0">
-                <a:solidFill>
-                  <a:srgbClr val="222222"/>
-                </a:solidFill>
-                <a:latin typeface="Calibri" pitchFamily="34" charset="0"/>
-                <a:ea typeface="Calibri" pitchFamily="34" charset="-122"/>
-                <a:cs typeface="Calibri" pitchFamily="34" charset="-120"/>
-              </a:rPr>
-              <a:t>なので、Excelでそのまま開けます。</a:t>
-            </a:r>
-            <a:endParaRPr lang="en-US" sz="1100" dirty="0"/>
-          </a:p>
-        </p:txBody>
-      </p:sp>
-      <p:sp>
-        <p:nvSpPr>
-          <p:cNvPr id="8" name="Text 6"/>
-          <p:cNvSpPr txBox="1"/>
-          <p:nvPr/>
-        </p:nvSpPr>
-        <p:spPr>
-          <a:xfrm>
-            <a:off x="566928" y="2767457"/>
-            <a:ext cx="6428232" cy="459994"/>
-          </a:xfrm>
-          <a:prstGeom prst="rect">
-            <a:avLst/>
-          </a:prstGeom>
-          <a:noFill/>
-          <a:ln/>
-        </p:spPr>
-        <p:txBody>
-          <a:bodyPr wrap="square" lIns="0" tIns="0" rIns="0" bIns="0" rtlCol="0" anchor="t"/>
-          <a:lstStyle/>
-          <a:p>
-            <a:pPr indent="0" marL="0">
-              <a:lnSpc>
-                <a:spcPct val="125000"/>
-              </a:lnSpc>
-              <a:buNone/>
-            </a:pPr>
-            <a:r>
-              <a:rPr lang="en-US" sz="1100" dirty="0">
-                <a:solidFill>
-                  <a:srgbClr val="222222"/>
-                </a:solidFill>
-                <a:latin typeface="Calibri" pitchFamily="34" charset="0"/>
-                <a:ea typeface="Calibri" pitchFamily="34" charset="-122"/>
-                <a:cs typeface="Calibri" pitchFamily="34" charset="-120"/>
-              </a:rPr>
-              <a:t>列は </a:t>
-            </a:r>
-            <a:pPr indent="0" marL="0">
-              <a:lnSpc>
-                <a:spcPct val="125000"/>
-              </a:lnSpc>
-              <a:buNone/>
-            </a:pPr>
-            <a:r>
-              <a:rPr lang="en-US" sz="1045" dirty="0">
-                <a:solidFill>
-                  <a:srgbClr val="222222"/>
-                </a:solidFill>
-                <a:latin typeface="Courier New" pitchFamily="34" charset="0"/>
-                <a:ea typeface="Courier New" pitchFamily="34" charset="-122"/>
-                <a:cs typeface="Courier New" pitchFamily="34" charset="-120"/>
-              </a:rPr>
-              <a:t>回答ID / 来場者ID / 送信日時 / 重複 / 来場人数 / 回答企業数 /（設問ごとの回答）</a:t>
-            </a:r>
-            <a:pPr indent="0" marL="0">
-              <a:lnSpc>
-                <a:spcPct val="125000"/>
-              </a:lnSpc>
-              <a:buNone/>
-            </a:pPr>
-            <a:r>
-              <a:rPr lang="en-US" sz="1100" dirty="0">
-                <a:solidFill>
-                  <a:srgbClr val="222222"/>
-                </a:solidFill>
-                <a:latin typeface="Calibri" pitchFamily="34" charset="0"/>
-                <a:ea typeface="Calibri" pitchFamily="34" charset="-122"/>
-                <a:cs typeface="Calibri" pitchFamily="34" charset="-120"/>
-              </a:rPr>
-              <a:t> です。</a:t>
-            </a:r>
-            <a:endParaRPr lang="en-US" sz="1100" dirty="0"/>
-          </a:p>
-        </p:txBody>
-      </p:sp>
-      <p:sp>
-        <p:nvSpPr>
-          <p:cNvPr id="9" name="Text 7"/>
-          <p:cNvSpPr txBox="1"/>
-          <p:nvPr/>
-        </p:nvSpPr>
-        <p:spPr>
-          <a:xfrm>
-            <a:off x="566928" y="3264027"/>
-            <a:ext cx="6428232" cy="459994"/>
-          </a:xfrm>
-          <a:prstGeom prst="rect">
-            <a:avLst/>
-          </a:prstGeom>
-          <a:noFill/>
-          <a:ln/>
-        </p:spPr>
-        <p:txBody>
-          <a:bodyPr wrap="square" lIns="0" tIns="0" rIns="0" bIns="0" rtlCol="0" anchor="t"/>
-          <a:lstStyle/>
-          <a:p>
-            <a:pPr indent="0" marL="0">
-              <a:lnSpc>
-                <a:spcPct val="125000"/>
-              </a:lnSpc>
-              <a:buNone/>
-            </a:pPr>
-            <a:r>
-              <a:rPr lang="en-US" sz="1100" b="1" dirty="0">
-                <a:solidFill>
-                  <a:srgbClr val="222222"/>
-                </a:solidFill>
-                <a:latin typeface="Calibri" pitchFamily="34" charset="0"/>
-                <a:ea typeface="Calibri" pitchFamily="34" charset="-122"/>
-                <a:cs typeface="Calibri" pitchFamily="34" charset="-120"/>
-              </a:rPr>
-              <a:t>来場人数</a:t>
-            </a:r>
-            <a:pPr indent="0" marL="0">
-              <a:lnSpc>
-                <a:spcPct val="125000"/>
-              </a:lnSpc>
-              <a:buNone/>
-            </a:pPr>
-            <a:r>
-              <a:rPr lang="en-US" sz="1100" dirty="0">
-                <a:solidFill>
-                  <a:srgbClr val="222222"/>
-                </a:solidFill>
-                <a:latin typeface="Calibri" pitchFamily="34" charset="0"/>
-                <a:ea typeface="Calibri" pitchFamily="34" charset="-122"/>
-                <a:cs typeface="Calibri" pitchFamily="34" charset="-120"/>
-              </a:rPr>
-              <a:t>はその方が「何人で来られましたか」で答えた人数、</a:t>
-            </a:r>
-            <a:pPr indent="0" marL="0">
-              <a:lnSpc>
-                <a:spcPct val="125000"/>
-              </a:lnSpc>
-              <a:buNone/>
-            </a:pPr>
-            <a:r>
-              <a:rPr lang="en-US" sz="1100" b="1" dirty="0">
-                <a:solidFill>
-                  <a:srgbClr val="222222"/>
-                </a:solidFill>
-                <a:latin typeface="Calibri" pitchFamily="34" charset="0"/>
-                <a:ea typeface="Calibri" pitchFamily="34" charset="-122"/>
-                <a:cs typeface="Calibri" pitchFamily="34" charset="-120"/>
-              </a:rPr>
-              <a:t>回答企業数</a:t>
-            </a:r>
-            <a:pPr indent="0" marL="0">
-              <a:lnSpc>
-                <a:spcPct val="125000"/>
-              </a:lnSpc>
-              <a:buNone/>
-            </a:pPr>
-            <a:r>
-              <a:rPr lang="en-US" sz="1100" dirty="0">
-                <a:solidFill>
-                  <a:srgbClr val="222222"/>
-                </a:solidFill>
-                <a:latin typeface="Calibri" pitchFamily="34" charset="0"/>
-                <a:ea typeface="Calibri" pitchFamily="34" charset="-122"/>
-                <a:cs typeface="Calibri" pitchFamily="34" charset="-120"/>
-              </a:rPr>
-              <a:t>はその方が回った企業数です。</a:t>
-            </a:r>
-            <a:endParaRPr lang="en-US" sz="1100" dirty="0"/>
-          </a:p>
-        </p:txBody>
-      </p:sp>
-      <p:sp>
-        <p:nvSpPr>
-          <p:cNvPr id="10" name="Shape 8"/>
-          <p:cNvSpPr/>
-          <p:nvPr/>
-        </p:nvSpPr>
-        <p:spPr>
-          <a:xfrm>
-            <a:off x="566928" y="3760597"/>
-            <a:ext cx="6428232" cy="624459"/>
-          </a:xfrm>
-          <a:prstGeom prst="roundRect">
-            <a:avLst>
-              <a:gd name="adj" fmla="val 8786"/>
-            </a:avLst>
-          </a:prstGeom>
-          <a:solidFill>
-            <a:srgbClr val="E8ECF8"/>
-          </a:solidFill>
-          <a:ln w="9525">
-            <a:solidFill>
-              <a:srgbClr val="1E2761"/>
-            </a:solidFill>
-            <a:prstDash val="solid"/>
-          </a:ln>
-        </p:spPr>
-      </p:sp>
-      <p:sp>
-        <p:nvSpPr>
-          <p:cNvPr id="11" name="Text 9"/>
-          <p:cNvSpPr txBox="1"/>
-          <p:nvPr/>
-        </p:nvSpPr>
-        <p:spPr>
-          <a:xfrm>
-            <a:off x="658368" y="3852037"/>
-            <a:ext cx="237744" cy="237744"/>
+      <p:pic>
+        <p:nvPicPr>
+          <p:cNvPr id="4" name="Image 0" descr="C:\Users\sato\Desktop\enque\docs\images\o-invite-status.png">    </p:cNvPr>
+          <p:cNvPicPr>
+            <a:picLocks noChangeAspect="1"/>
+          </p:cNvPicPr>
+          <p:nvPr/>
+        </p:nvPicPr>
+        <p:blipFill>
+          <a:blip r:embed="rId1"/>
+          <a:stretch>
+            <a:fillRect/>
+          </a:stretch>
+        </p:blipFill>
+        <p:spPr>
+          <a:xfrm>
+            <a:off x="1504370" y="1481328"/>
+            <a:ext cx="4553347" cy="3474720"/>
+          </a:xfrm>
+          <a:prstGeom prst="rect">
+            <a:avLst/>
+          </a:prstGeom>
+        </p:spPr>
+      </p:pic>
+      <p:sp>
+        <p:nvSpPr>
+          <p:cNvPr id="5" name="Text 2"/>
+          <p:cNvSpPr txBox="1"/>
+          <p:nvPr/>
+        </p:nvSpPr>
+        <p:spPr>
+          <a:xfrm>
+            <a:off x="566928" y="5010912"/>
+            <a:ext cx="6428232" cy="274320"/>
           </a:xfrm>
           <a:prstGeom prst="rect">
             <a:avLst/>
@@ -24483,948 +24102,23 @@
               <a:buNone/>
             </a:pPr>
             <a:r>
-              <a:rPr lang="en-US" sz="1200" b="1" dirty="0">
-                <a:solidFill>
-                  <a:srgbClr val="1E2761"/>
-                </a:solidFill>
-                <a:latin typeface="Calibri" pitchFamily="34" charset="0"/>
-                <a:ea typeface="Calibri" pitchFamily="34" charset="-122"/>
-                <a:cs typeface="Calibri" pitchFamily="34" charset="-120"/>
-              </a:rPr>
-              <a:t>i</a:t>
-            </a:r>
-            <a:endParaRPr lang="en-US" sz="1200" dirty="0"/>
-          </a:p>
-        </p:txBody>
-      </p:sp>
-      <p:sp>
-        <p:nvSpPr>
-          <p:cNvPr id="12" name="Text 10"/>
-          <p:cNvSpPr txBox="1"/>
-          <p:nvPr/>
-        </p:nvSpPr>
-        <p:spPr>
-          <a:xfrm>
-            <a:off x="950976" y="3870325"/>
-            <a:ext cx="5925312" cy="441579"/>
-          </a:xfrm>
-          <a:prstGeom prst="rect">
-            <a:avLst/>
-          </a:prstGeom>
-          <a:noFill/>
-          <a:ln/>
-        </p:spPr>
-        <p:txBody>
-          <a:bodyPr wrap="square" lIns="0" tIns="0" rIns="0" bIns="0" rtlCol="0" anchor="t"/>
-          <a:lstStyle/>
-          <a:p>
-            <a:pPr indent="0" marL="0">
-              <a:lnSpc>
-                <a:spcPct val="120000"/>
-              </a:lnSpc>
-              <a:buNone/>
-            </a:pPr>
-            <a:r>
-              <a:rPr lang="en-US" sz="1050" dirty="0">
-                <a:solidFill>
-                  <a:srgbClr val="222222"/>
-                </a:solidFill>
-                <a:latin typeface="Calibri" pitchFamily="34" charset="0"/>
-                <a:ea typeface="Calibri" pitchFamily="34" charset="-122"/>
-                <a:cs typeface="Calibri" pitchFamily="34" charset="-120"/>
-              </a:rPr>
-              <a:t>総合アンケートのCSVは、</a:t>
-            </a:r>
-            <a:pPr indent="0" marL="0">
-              <a:lnSpc>
-                <a:spcPct val="120000"/>
-              </a:lnSpc>
-              <a:buNone/>
-            </a:pPr>
-            <a:r>
-              <a:rPr lang="en-US" sz="1050" b="1" dirty="0">
-                <a:solidFill>
-                  <a:srgbClr val="222222"/>
-                </a:solidFill>
-                <a:latin typeface="Calibri" pitchFamily="34" charset="0"/>
-                <a:ea typeface="Calibri" pitchFamily="34" charset="-122"/>
-                <a:cs typeface="Calibri" pitchFamily="34" charset="-120"/>
-              </a:rPr>
-              <a:t>1行＝1グループ</a:t>
-            </a:r>
-            <a:pPr indent="0" marL="0">
-              <a:lnSpc>
-                <a:spcPct val="120000"/>
-              </a:lnSpc>
-              <a:buNone/>
-            </a:pPr>
-            <a:r>
-              <a:rPr lang="en-US" sz="1050" dirty="0">
-                <a:solidFill>
-                  <a:srgbClr val="222222"/>
-                </a:solidFill>
-                <a:latin typeface="Calibri" pitchFamily="34" charset="0"/>
-                <a:ea typeface="Calibri" pitchFamily="34" charset="-122"/>
-                <a:cs typeface="Calibri" pitchFamily="34" charset="-120"/>
-              </a:rPr>
-              <a:t>になります。世代や区分ごとの人数を聞いている場合は、</a:t>
-            </a:r>
-            <a:endParaRPr lang="en-US" sz="1050" dirty="0"/>
-          </a:p>
-        </p:txBody>
-      </p:sp>
-      <p:sp>
-        <p:nvSpPr>
-          <p:cNvPr id="13" name="Shape 11"/>
-          <p:cNvSpPr/>
-          <p:nvPr/>
-        </p:nvSpPr>
-        <p:spPr>
-          <a:xfrm>
-            <a:off x="566928" y="4458208"/>
-            <a:ext cx="6428232" cy="431102"/>
-          </a:xfrm>
-          <a:prstGeom prst="roundRect">
-            <a:avLst>
-              <a:gd name="adj" fmla="val 12726"/>
-            </a:avLst>
-          </a:prstGeom>
-          <a:solidFill>
-            <a:srgbClr val="E8ECF8"/>
-          </a:solidFill>
-          <a:ln w="9525">
-            <a:solidFill>
-              <a:srgbClr val="1E2761"/>
-            </a:solidFill>
-            <a:prstDash val="solid"/>
-          </a:ln>
-        </p:spPr>
-      </p:sp>
-      <p:sp>
-        <p:nvSpPr>
-          <p:cNvPr id="14" name="Text 12"/>
-          <p:cNvSpPr txBox="1"/>
-          <p:nvPr/>
-        </p:nvSpPr>
-        <p:spPr>
-          <a:xfrm>
-            <a:off x="658368" y="4549648"/>
-            <a:ext cx="237744" cy="237744"/>
-          </a:xfrm>
-          <a:prstGeom prst="rect">
-            <a:avLst/>
-          </a:prstGeom>
-          <a:noFill/>
-          <a:ln/>
-        </p:spPr>
-        <p:txBody>
-          <a:bodyPr wrap="square" lIns="0" tIns="0" rIns="0" bIns="0" rtlCol="0" anchor="ctr"/>
-          <a:lstStyle/>
-          <a:p>
-            <a:pPr algn="ctr" indent="0" marL="0">
-              <a:buNone/>
-            </a:pPr>
-            <a:r>
-              <a:rPr lang="en-US" sz="1200" b="1" dirty="0">
-                <a:solidFill>
-                  <a:srgbClr val="1E2761"/>
-                </a:solidFill>
-                <a:latin typeface="Calibri" pitchFamily="34" charset="0"/>
-                <a:ea typeface="Calibri" pitchFamily="34" charset="-122"/>
-                <a:cs typeface="Calibri" pitchFamily="34" charset="-120"/>
-              </a:rPr>
-              <a:t>i</a:t>
-            </a:r>
-            <a:endParaRPr lang="en-US" sz="1200" dirty="0"/>
-          </a:p>
-        </p:txBody>
-      </p:sp>
-      <p:sp>
-        <p:nvSpPr>
-          <p:cNvPr id="15" name="Text 13"/>
-          <p:cNvSpPr txBox="1"/>
-          <p:nvPr/>
-        </p:nvSpPr>
-        <p:spPr>
-          <a:xfrm>
-            <a:off x="950976" y="4567936"/>
-            <a:ext cx="5925312" cy="248221"/>
-          </a:xfrm>
-          <a:prstGeom prst="rect">
-            <a:avLst/>
-          </a:prstGeom>
-          <a:noFill/>
-          <a:ln/>
-        </p:spPr>
-        <p:txBody>
-          <a:bodyPr wrap="square" lIns="0" tIns="0" rIns="0" bIns="0" rtlCol="0" anchor="t"/>
-          <a:lstStyle/>
-          <a:p>
-            <a:pPr indent="0" marL="0">
-              <a:lnSpc>
-                <a:spcPct val="120000"/>
-              </a:lnSpc>
-              <a:buNone/>
-            </a:pPr>
-            <a:r>
-              <a:rPr lang="en-US" sz="1050" dirty="0">
-                <a:solidFill>
-                  <a:srgbClr val="222222"/>
-                </a:solidFill>
-                <a:latin typeface="Calibri" pitchFamily="34" charset="0"/>
-                <a:ea typeface="Calibri" pitchFamily="34" charset="-122"/>
-                <a:cs typeface="Calibri" pitchFamily="34" charset="-120"/>
-              </a:rPr>
-              <a:t>「来場人数」と並べてExcelのピボットテーブルにかけると、グループの構成を集計できます。</a:t>
-            </a:r>
-            <a:endParaRPr lang="en-US" sz="1050" dirty="0"/>
-          </a:p>
-        </p:txBody>
-      </p:sp>
-      <p:sp>
-        <p:nvSpPr>
-          <p:cNvPr id="16" name="Shape 14"/>
-          <p:cNvSpPr/>
-          <p:nvPr/>
-        </p:nvSpPr>
-        <p:spPr>
-          <a:xfrm>
-            <a:off x="566928" y="4962462"/>
-            <a:ext cx="6428232" cy="624459"/>
-          </a:xfrm>
-          <a:prstGeom prst="roundRect">
-            <a:avLst>
-              <a:gd name="adj" fmla="val 8786"/>
-            </a:avLst>
-          </a:prstGeom>
-          <a:solidFill>
-            <a:srgbClr val="E8ECF8"/>
-          </a:solidFill>
-          <a:ln w="9525">
-            <a:solidFill>
-              <a:srgbClr val="1E2761"/>
-            </a:solidFill>
-            <a:prstDash val="solid"/>
-          </a:ln>
-        </p:spPr>
-      </p:sp>
-      <p:sp>
-        <p:nvSpPr>
-          <p:cNvPr id="17" name="Text 15"/>
-          <p:cNvSpPr txBox="1"/>
-          <p:nvPr/>
-        </p:nvSpPr>
-        <p:spPr>
-          <a:xfrm>
-            <a:off x="658368" y="5053902"/>
-            <a:ext cx="237744" cy="237744"/>
-          </a:xfrm>
-          <a:prstGeom prst="rect">
-            <a:avLst/>
-          </a:prstGeom>
-          <a:noFill/>
-          <a:ln/>
-        </p:spPr>
-        <p:txBody>
-          <a:bodyPr wrap="square" lIns="0" tIns="0" rIns="0" bIns="0" rtlCol="0" anchor="ctr"/>
-          <a:lstStyle/>
-          <a:p>
-            <a:pPr algn="ctr" indent="0" marL="0">
-              <a:buNone/>
-            </a:pPr>
-            <a:r>
-              <a:rPr lang="en-US" sz="1200" b="1" dirty="0">
-                <a:solidFill>
-                  <a:srgbClr val="1E2761"/>
-                </a:solidFill>
-                <a:latin typeface="Calibri" pitchFamily="34" charset="0"/>
-                <a:ea typeface="Calibri" pitchFamily="34" charset="-122"/>
-                <a:cs typeface="Calibri" pitchFamily="34" charset="-120"/>
-              </a:rPr>
-              <a:t>i</a:t>
-            </a:r>
-            <a:endParaRPr lang="en-US" sz="1200" dirty="0"/>
-          </a:p>
-        </p:txBody>
-      </p:sp>
-      <p:sp>
-        <p:nvSpPr>
-          <p:cNvPr id="18" name="Text 16"/>
-          <p:cNvSpPr txBox="1"/>
-          <p:nvPr/>
-        </p:nvSpPr>
-        <p:spPr>
-          <a:xfrm>
-            <a:off x="950976" y="5072190"/>
-            <a:ext cx="5925312" cy="441579"/>
-          </a:xfrm>
-          <a:prstGeom prst="rect">
-            <a:avLst/>
-          </a:prstGeom>
-          <a:noFill/>
-          <a:ln/>
-        </p:spPr>
-        <p:txBody>
-          <a:bodyPr wrap="square" lIns="0" tIns="0" rIns="0" bIns="0" rtlCol="0" anchor="t"/>
-          <a:lstStyle/>
-          <a:p>
-            <a:pPr indent="0" marL="0">
-              <a:lnSpc>
-                <a:spcPct val="120000"/>
-              </a:lnSpc>
-              <a:buNone/>
-            </a:pPr>
-            <a:r>
-              <a:rPr lang="en-US" sz="1050" dirty="0">
-                <a:solidFill>
-                  <a:srgbClr val="222222"/>
-                </a:solidFill>
-                <a:latin typeface="Calibri" pitchFamily="34" charset="0"/>
-                <a:ea typeface="Calibri" pitchFamily="34" charset="-122"/>
-                <a:cs typeface="Calibri" pitchFamily="34" charset="-120"/>
-              </a:rPr>
-              <a:t>メールアドレスは出力されません。来場者は匿名のID（来場者ID）だけが入るので、企業をまたいだ同じ方の回答を突き合わせられます。</a:t>
-            </a:r>
-            <a:endParaRPr lang="en-US" sz="1050" dirty="0"/>
-          </a:p>
-        </p:txBody>
-      </p:sp>
-      <p:sp>
-        <p:nvSpPr>
-          <p:cNvPr id="19" name="Text 17"/>
-          <p:cNvSpPr txBox="1"/>
-          <p:nvPr/>
-        </p:nvSpPr>
-        <p:spPr>
-          <a:xfrm>
-            <a:off x="566928" y="5769801"/>
-            <a:ext cx="6428232" cy="257810"/>
-          </a:xfrm>
-          <a:prstGeom prst="rect">
-            <a:avLst/>
-          </a:prstGeom>
-          <a:noFill/>
-          <a:ln/>
-        </p:spPr>
-        <p:txBody>
-          <a:bodyPr wrap="square" lIns="0" tIns="0" rIns="0" bIns="0" rtlCol="0" anchor="t"/>
-          <a:lstStyle/>
-          <a:p>
-            <a:pPr indent="0" marL="0">
-              <a:buNone/>
-            </a:pPr>
-            <a:r>
-              <a:rPr lang="en-US" sz="1400" b="1" dirty="0">
-                <a:solidFill>
-                  <a:srgbClr val="1E2761"/>
-                </a:solidFill>
-                <a:latin typeface="Calibri" pitchFamily="34" charset="0"/>
-                <a:ea typeface="Calibri" pitchFamily="34" charset="-122"/>
-                <a:cs typeface="Calibri" pitchFamily="34" charset="-120"/>
-              </a:rPr>
-              <a:t>集計画面で見る</a:t>
-            </a:r>
-            <a:endParaRPr lang="en-US" sz="1400" dirty="0"/>
-          </a:p>
-        </p:txBody>
-      </p:sp>
-      <p:sp>
-        <p:nvSpPr>
-          <p:cNvPr id="20" name="Text 18"/>
-          <p:cNvSpPr txBox="1"/>
-          <p:nvPr/>
-        </p:nvSpPr>
-        <p:spPr>
-          <a:xfrm>
-            <a:off x="566928" y="6100763"/>
-            <a:ext cx="6428232" cy="459994"/>
-          </a:xfrm>
-          <a:prstGeom prst="rect">
-            <a:avLst/>
-          </a:prstGeom>
-          <a:noFill/>
-          <a:ln/>
-        </p:spPr>
-        <p:txBody>
-          <a:bodyPr wrap="square" lIns="0" tIns="0" rIns="0" bIns="0" rtlCol="0" anchor="t"/>
-          <a:lstStyle/>
-          <a:p>
-            <a:pPr indent="0" marL="0">
-              <a:lnSpc>
-                <a:spcPct val="125000"/>
-              </a:lnSpc>
-              <a:buNone/>
-            </a:pPr>
-            <a:r>
-              <a:rPr lang="en-US" sz="1100" dirty="0">
-                <a:solidFill>
-                  <a:srgbClr val="222222"/>
-                </a:solidFill>
-                <a:latin typeface="Calibri" pitchFamily="34" charset="0"/>
-                <a:ea typeface="Calibri" pitchFamily="34" charset="-122"/>
-                <a:cs typeface="Calibri" pitchFamily="34" charset="-120"/>
-              </a:rPr>
-              <a:t>企業ごとの「集計」画面では、設問ごとのグラフ・星評価の平均・NPS・自由記述の一覧が見られます。</a:t>
-            </a:r>
-            <a:endParaRPr lang="en-US" sz="1100" dirty="0"/>
-          </a:p>
-        </p:txBody>
-      </p:sp>
-      <p:sp>
-        <p:nvSpPr>
-          <p:cNvPr id="21" name="Text 19"/>
-          <p:cNvSpPr txBox="1"/>
-          <p:nvPr/>
-        </p:nvSpPr>
-        <p:spPr>
-          <a:xfrm>
-            <a:off x="566928" y="6597333"/>
-            <a:ext cx="6428232" cy="459994"/>
-          </a:xfrm>
-          <a:prstGeom prst="rect">
-            <a:avLst/>
-          </a:prstGeom>
-          <a:noFill/>
-          <a:ln/>
-        </p:spPr>
-        <p:txBody>
-          <a:bodyPr wrap="square" lIns="0" tIns="0" rIns="0" bIns="0" rtlCol="0" anchor="t"/>
-          <a:lstStyle/>
-          <a:p>
-            <a:pPr indent="0" marL="0">
-              <a:lnSpc>
-                <a:spcPct val="125000"/>
-              </a:lnSpc>
-              <a:buNone/>
-            </a:pPr>
-            <a:r>
-              <a:rPr lang="en-US" sz="1100" b="1" dirty="0">
-                <a:solidFill>
-                  <a:srgbClr val="222222"/>
-                </a:solidFill>
-                <a:latin typeface="Calibri" pitchFamily="34" charset="0"/>
-                <a:ea typeface="Calibri" pitchFamily="34" charset="-122"/>
-                <a:cs typeface="Calibri" pitchFamily="34" charset="-120"/>
-              </a:rPr>
-              <a:t>総合アンケートの集計</a:t>
-            </a:r>
-            <a:pPr indent="0" marL="0">
-              <a:lnSpc>
-                <a:spcPct val="125000"/>
-              </a:lnSpc>
-              <a:buNone/>
-            </a:pPr>
-            <a:r>
-              <a:rPr lang="en-US" sz="1100" dirty="0">
-                <a:solidFill>
-                  <a:srgbClr val="222222"/>
-                </a:solidFill>
-                <a:latin typeface="Calibri" pitchFamily="34" charset="0"/>
-                <a:ea typeface="Calibri" pitchFamily="34" charset="-122"/>
-                <a:cs typeface="Calibri" pitchFamily="34" charset="-120"/>
-              </a:rPr>
-              <a:t>は、ダッシュボードの「総合アンケートの集計」、または「総合アンケートと案内メール」画面の</a:t>
-            </a:r>
-            <a:pPr indent="0" marL="0">
-              <a:lnSpc>
-                <a:spcPct val="125000"/>
-              </a:lnSpc>
-              <a:buNone/>
-            </a:pPr>
-            <a:r>
-              <a:rPr lang="en-US" sz="1100" b="1" dirty="0">
-                <a:solidFill>
-                  <a:srgbClr val="222222"/>
-                </a:solidFill>
-                <a:latin typeface="Calibri" pitchFamily="34" charset="0"/>
-                <a:ea typeface="Calibri" pitchFamily="34" charset="-122"/>
-                <a:cs typeface="Calibri" pitchFamily="34" charset="-120"/>
-              </a:rPr>
-              <a:t>「集計を見る」</a:t>
-            </a:r>
-            <a:pPr indent="0" marL="0">
-              <a:lnSpc>
-                <a:spcPct val="125000"/>
-              </a:lnSpc>
-              <a:buNone/>
-            </a:pPr>
-            <a:r>
-              <a:rPr lang="en-US" sz="1100" dirty="0">
-                <a:solidFill>
-                  <a:srgbClr val="222222"/>
-                </a:solidFill>
-                <a:latin typeface="Calibri" pitchFamily="34" charset="0"/>
-                <a:ea typeface="Calibri" pitchFamily="34" charset="-122"/>
-                <a:cs typeface="Calibri" pitchFamily="34" charset="-120"/>
-              </a:rPr>
-              <a:t>から開きます。</a:t>
-            </a:r>
-            <a:endParaRPr lang="en-US" sz="1100" dirty="0"/>
-          </a:p>
-        </p:txBody>
-      </p:sp>
-      <p:sp>
-        <p:nvSpPr>
-          <p:cNvPr id="22" name="Text 20"/>
-          <p:cNvSpPr txBox="1"/>
-          <p:nvPr/>
-        </p:nvSpPr>
-        <p:spPr>
-          <a:xfrm>
-            <a:off x="713232" y="7093903"/>
-            <a:ext cx="6281928" cy="257429"/>
-          </a:xfrm>
-          <a:prstGeom prst="rect">
-            <a:avLst/>
-          </a:prstGeom>
-          <a:noFill/>
-          <a:ln/>
-        </p:spPr>
-        <p:txBody>
-          <a:bodyPr wrap="square" lIns="0" tIns="0" rIns="0" bIns="0" rtlCol="0" anchor="t"/>
-          <a:lstStyle/>
-          <a:p>
-            <a:pPr marL="342900" indent="-342900">
-              <a:lnSpc>
-                <a:spcPct val="125000"/>
-              </a:lnSpc>
-              <a:buSzPct val="100000"/>
-              <a:buChar char="●"/>
-            </a:pPr>
-            <a:r>
-              <a:rPr lang="en-US" sz="1100" b="1" dirty="0">
-                <a:solidFill>
-                  <a:srgbClr val="222222"/>
-                </a:solidFill>
-                <a:latin typeface="Calibri" pitchFamily="34" charset="0"/>
-                <a:ea typeface="Calibri" pitchFamily="34" charset="-122"/>
-                <a:cs typeface="Calibri" pitchFamily="34" charset="-120"/>
-              </a:rPr>
-              <a:t>回答数と回答率</a:t>
-            </a:r>
-            <a:pPr indent="0" marL="0">
-              <a:lnSpc>
-                <a:spcPct val="125000"/>
-              </a:lnSpc>
-              <a:buNone/>
-            </a:pPr>
-            <a:r>
-              <a:rPr lang="en-US" sz="1100" dirty="0">
-                <a:solidFill>
-                  <a:srgbClr val="222222"/>
-                </a:solidFill>
-                <a:latin typeface="Calibri" pitchFamily="34" charset="0"/>
-                <a:ea typeface="Calibri" pitchFamily="34" charset="-122"/>
-                <a:cs typeface="Calibri" pitchFamily="34" charset="-120"/>
-              </a:rPr>
-              <a:t>（回答した来場者のうち何%が答えたか）</a:t>
-            </a:r>
-            <a:endParaRPr lang="en-US" sz="1100" dirty="0"/>
-          </a:p>
-        </p:txBody>
-      </p:sp>
-      <p:sp>
-        <p:nvSpPr>
-          <p:cNvPr id="23" name="Text 21"/>
-          <p:cNvSpPr txBox="1"/>
-          <p:nvPr/>
-        </p:nvSpPr>
-        <p:spPr>
-          <a:xfrm>
-            <a:off x="713232" y="7369620"/>
-            <a:ext cx="6281928" cy="257429"/>
-          </a:xfrm>
-          <a:prstGeom prst="rect">
-            <a:avLst/>
-          </a:prstGeom>
-          <a:noFill/>
-          <a:ln/>
-        </p:spPr>
-        <p:txBody>
-          <a:bodyPr wrap="square" lIns="0" tIns="0" rIns="0" bIns="0" rtlCol="0" anchor="t"/>
-          <a:lstStyle/>
-          <a:p>
-            <a:pPr marL="342900" indent="-342900">
-              <a:lnSpc>
-                <a:spcPct val="125000"/>
-              </a:lnSpc>
-              <a:buSzPct val="100000"/>
-              <a:buChar char="●"/>
-            </a:pPr>
-            <a:r>
-              <a:rPr lang="en-US" sz="1100" b="1" dirty="0">
-                <a:solidFill>
-                  <a:srgbClr val="222222"/>
-                </a:solidFill>
-                <a:latin typeface="Calibri" pitchFamily="34" charset="0"/>
-                <a:ea typeface="Calibri" pitchFamily="34" charset="-122"/>
-                <a:cs typeface="Calibri" pitchFamily="34" charset="-120"/>
-              </a:rPr>
-              <a:t>設問ごとのグラフ</a:t>
-            </a:r>
-            <a:pPr indent="0" marL="0">
-              <a:lnSpc>
-                <a:spcPct val="125000"/>
-              </a:lnSpc>
-              <a:buNone/>
-            </a:pPr>
-            <a:r>
-              <a:rPr lang="en-US" sz="1100" dirty="0">
-                <a:solidFill>
-                  <a:srgbClr val="222222"/>
-                </a:solidFill>
-                <a:latin typeface="Calibri" pitchFamily="34" charset="0"/>
-                <a:ea typeface="Calibri" pitchFamily="34" charset="-122"/>
-                <a:cs typeface="Calibri" pitchFamily="34" charset="-120"/>
-              </a:rPr>
-              <a:t>（企業の集計と同じ見た目）と</a:t>
-            </a:r>
-            <a:pPr indent="0" marL="0">
-              <a:lnSpc>
-                <a:spcPct val="125000"/>
-              </a:lnSpc>
-              <a:buNone/>
-            </a:pPr>
-            <a:r>
-              <a:rPr lang="en-US" sz="1100" b="1" dirty="0">
-                <a:solidFill>
-                  <a:srgbClr val="222222"/>
-                </a:solidFill>
-                <a:latin typeface="Calibri" pitchFamily="34" charset="0"/>
-                <a:ea typeface="Calibri" pitchFamily="34" charset="-122"/>
-                <a:cs typeface="Calibri" pitchFamily="34" charset="-120"/>
-              </a:rPr>
-              <a:t>自由記述の一覧</a:t>
-            </a:r>
-            <a:endParaRPr lang="en-US" sz="1100" dirty="0"/>
-          </a:p>
-        </p:txBody>
-      </p:sp>
-      <p:sp>
-        <p:nvSpPr>
-          <p:cNvPr id="24" name="Text 22"/>
-          <p:cNvSpPr txBox="1"/>
-          <p:nvPr/>
-        </p:nvSpPr>
-        <p:spPr>
-          <a:xfrm>
-            <a:off x="713232" y="7645337"/>
-            <a:ext cx="6281928" cy="257429"/>
-          </a:xfrm>
-          <a:prstGeom prst="rect">
-            <a:avLst/>
-          </a:prstGeom>
-          <a:noFill/>
-          <a:ln/>
-        </p:spPr>
-        <p:txBody>
-          <a:bodyPr wrap="square" lIns="0" tIns="0" rIns="0" bIns="0" rtlCol="0" anchor="t"/>
-          <a:lstStyle/>
-          <a:p>
-            <a:pPr marL="342900" indent="-342900">
-              <a:lnSpc>
-                <a:spcPct val="125000"/>
-              </a:lnSpc>
-              <a:buSzPct val="100000"/>
-              <a:buChar char="●"/>
-            </a:pPr>
-            <a:r>
-              <a:rPr lang="en-US" sz="1100" b="1" dirty="0">
-                <a:solidFill>
-                  <a:srgbClr val="222222"/>
-                </a:solidFill>
-                <a:latin typeface="Calibri" pitchFamily="34" charset="0"/>
-                <a:ea typeface="Calibri" pitchFamily="34" charset="-122"/>
-                <a:cs typeface="Calibri" pitchFamily="34" charset="-120"/>
-              </a:rPr>
-              <a:t>周回企業数との関係</a:t>
-            </a:r>
-            <a:pPr indent="0" marL="0">
-              <a:lnSpc>
-                <a:spcPct val="125000"/>
-              </a:lnSpc>
-              <a:buNone/>
-            </a:pPr>
-            <a:r>
-              <a:rPr lang="en-US" sz="1100" dirty="0">
-                <a:solidFill>
-                  <a:srgbClr val="222222"/>
-                </a:solidFill>
-                <a:latin typeface="Calibri" pitchFamily="34" charset="0"/>
-                <a:ea typeface="Calibri" pitchFamily="34" charset="-122"/>
-                <a:cs typeface="Calibri" pitchFamily="34" charset="-120"/>
-              </a:rPr>
-              <a:t>：たくさん回った方ほど評価が高いか</a:t>
-            </a:r>
-            <a:endParaRPr lang="en-US" sz="1100" dirty="0"/>
-          </a:p>
-        </p:txBody>
-      </p:sp>
-      <p:sp>
-        <p:nvSpPr>
-          <p:cNvPr id="25" name="Text 23"/>
-          <p:cNvSpPr txBox="1"/>
-          <p:nvPr/>
-        </p:nvSpPr>
-        <p:spPr>
-          <a:xfrm>
-            <a:off x="713232" y="7921054"/>
-            <a:ext cx="6281928" cy="257429"/>
-          </a:xfrm>
-          <a:prstGeom prst="rect">
-            <a:avLst/>
-          </a:prstGeom>
-          <a:noFill/>
-          <a:ln/>
-        </p:spPr>
-        <p:txBody>
-          <a:bodyPr wrap="square" lIns="0" tIns="0" rIns="0" bIns="0" rtlCol="0" anchor="t"/>
-          <a:lstStyle/>
-          <a:p>
-            <a:pPr marL="342900" indent="-342900">
-              <a:lnSpc>
-                <a:spcPct val="125000"/>
-              </a:lnSpc>
-              <a:buSzPct val="100000"/>
-              <a:buChar char="●"/>
-            </a:pPr>
-            <a:r>
-              <a:rPr lang="en-US" sz="1100" b="1" dirty="0">
-                <a:solidFill>
-                  <a:srgbClr val="222222"/>
-                </a:solidFill>
-                <a:latin typeface="Calibri" pitchFamily="34" charset="0"/>
-                <a:ea typeface="Calibri" pitchFamily="34" charset="-122"/>
-                <a:cs typeface="Calibri" pitchFamily="34" charset="-120"/>
-              </a:rPr>
-              <a:t>来場人数との関係</a:t>
-            </a:r>
-            <a:pPr indent="0" marL="0">
-              <a:lnSpc>
-                <a:spcPct val="125000"/>
-              </a:lnSpc>
-              <a:buNone/>
-            </a:pPr>
-            <a:r>
-              <a:rPr lang="en-US" sz="1100" dirty="0">
-                <a:solidFill>
-                  <a:srgbClr val="222222"/>
-                </a:solidFill>
-                <a:latin typeface="Calibri" pitchFamily="34" charset="0"/>
-                <a:ea typeface="Calibri" pitchFamily="34" charset="-122"/>
-                <a:cs typeface="Calibri" pitchFamily="34" charset="-120"/>
-              </a:rPr>
-              <a:t>：1人で来た方とグループで来た方の違い</a:t>
-            </a:r>
-            <a:endParaRPr lang="en-US" sz="1100" dirty="0"/>
-          </a:p>
-        </p:txBody>
-      </p:sp>
-      <p:sp>
-        <p:nvSpPr>
-          <p:cNvPr id="26" name="Text 24"/>
-          <p:cNvSpPr txBox="1"/>
-          <p:nvPr/>
-        </p:nvSpPr>
-        <p:spPr>
-          <a:xfrm>
-            <a:off x="713232" y="8196771"/>
-            <a:ext cx="6281928" cy="459994"/>
-          </a:xfrm>
-          <a:prstGeom prst="rect">
-            <a:avLst/>
-          </a:prstGeom>
-          <a:noFill/>
-          <a:ln/>
-        </p:spPr>
-        <p:txBody>
-          <a:bodyPr wrap="square" lIns="0" tIns="0" rIns="0" bIns="0" rtlCol="0" anchor="t"/>
-          <a:lstStyle/>
-          <a:p>
-            <a:pPr marL="342900" indent="-342900">
-              <a:lnSpc>
-                <a:spcPct val="125000"/>
-              </a:lnSpc>
-              <a:buSzPct val="100000"/>
-              <a:buChar char="●"/>
-            </a:pPr>
-            <a:r>
-              <a:rPr lang="en-US" sz="1100" b="1" dirty="0">
-                <a:solidFill>
-                  <a:srgbClr val="222222"/>
-                </a:solidFill>
-                <a:latin typeface="Calibri" pitchFamily="34" charset="0"/>
-                <a:ea typeface="Calibri" pitchFamily="34" charset="-122"/>
-                <a:cs typeface="Calibri" pitchFamily="34" charset="-120"/>
-              </a:rPr>
-              <a:t>グループの構成</a:t>
-            </a:r>
-            <a:pPr indent="0" marL="0">
-              <a:lnSpc>
-                <a:spcPct val="125000"/>
-              </a:lnSpc>
-              <a:buNone/>
-            </a:pPr>
-            <a:r>
-              <a:rPr lang="en-US" sz="1100" dirty="0">
-                <a:solidFill>
-                  <a:srgbClr val="222222"/>
-                </a:solidFill>
-                <a:latin typeface="Calibri" pitchFamily="34" charset="0"/>
-                <a:ea typeface="Calibri" pitchFamily="34" charset="-122"/>
-                <a:cs typeface="Calibri" pitchFamily="34" charset="-120"/>
-              </a:rPr>
-              <a:t>：区分ごとの人数を聞いている場合（区分別の人数・よくあるグループの型・来場人数との照合）</a:t>
-            </a:r>
-            <a:endParaRPr lang="en-US" sz="1100" dirty="0"/>
-          </a:p>
-        </p:txBody>
-      </p:sp>
-      <p:sp>
-        <p:nvSpPr>
-          <p:cNvPr id="27" name="Shape 25"/>
-          <p:cNvSpPr/>
-          <p:nvPr/>
-        </p:nvSpPr>
-        <p:spPr>
-          <a:xfrm>
-            <a:off x="566928" y="8675053"/>
-            <a:ext cx="6428232" cy="624459"/>
-          </a:xfrm>
-          <a:prstGeom prst="roundRect">
-            <a:avLst>
-              <a:gd name="adj" fmla="val 8786"/>
-            </a:avLst>
-          </a:prstGeom>
-          <a:solidFill>
-            <a:srgbClr val="E8ECF8"/>
-          </a:solidFill>
-          <a:ln w="9525">
-            <a:solidFill>
-              <a:srgbClr val="1E2761"/>
-            </a:solidFill>
-            <a:prstDash val="solid"/>
-          </a:ln>
-        </p:spPr>
-      </p:sp>
-      <p:sp>
-        <p:nvSpPr>
-          <p:cNvPr id="28" name="Text 26"/>
-          <p:cNvSpPr txBox="1"/>
-          <p:nvPr/>
-        </p:nvSpPr>
-        <p:spPr>
-          <a:xfrm>
-            <a:off x="658368" y="8766493"/>
-            <a:ext cx="237744" cy="237744"/>
-          </a:xfrm>
-          <a:prstGeom prst="rect">
-            <a:avLst/>
-          </a:prstGeom>
-          <a:noFill/>
-          <a:ln/>
-        </p:spPr>
-        <p:txBody>
-          <a:bodyPr wrap="square" lIns="0" tIns="0" rIns="0" bIns="0" rtlCol="0" anchor="ctr"/>
-          <a:lstStyle/>
-          <a:p>
-            <a:pPr algn="ctr" indent="0" marL="0">
-              <a:buNone/>
-            </a:pPr>
-            <a:r>
-              <a:rPr lang="en-US" sz="1200" b="1" dirty="0">
-                <a:solidFill>
-                  <a:srgbClr val="1E2761"/>
-                </a:solidFill>
-                <a:latin typeface="Calibri" pitchFamily="34" charset="0"/>
-                <a:ea typeface="Calibri" pitchFamily="34" charset="-122"/>
-                <a:cs typeface="Calibri" pitchFamily="34" charset="-120"/>
-              </a:rPr>
-              <a:t>i</a:t>
-            </a:r>
-            <a:endParaRPr lang="en-US" sz="1200" dirty="0"/>
-          </a:p>
-        </p:txBody>
-      </p:sp>
-      <p:sp>
-        <p:nvSpPr>
-          <p:cNvPr id="29" name="Text 27"/>
-          <p:cNvSpPr txBox="1"/>
-          <p:nvPr/>
-        </p:nvSpPr>
-        <p:spPr>
-          <a:xfrm>
-            <a:off x="950976" y="8784781"/>
-            <a:ext cx="5925312" cy="441579"/>
-          </a:xfrm>
-          <a:prstGeom prst="rect">
-            <a:avLst/>
-          </a:prstGeom>
-          <a:noFill/>
-          <a:ln/>
-        </p:spPr>
-        <p:txBody>
-          <a:bodyPr wrap="square" lIns="0" tIns="0" rIns="0" bIns="0" rtlCol="0" anchor="t"/>
-          <a:lstStyle/>
-          <a:p>
-            <a:pPr indent="0" marL="0">
-              <a:lnSpc>
-                <a:spcPct val="120000"/>
-              </a:lnSpc>
-              <a:buNone/>
-            </a:pPr>
-            <a:r>
-              <a:rPr lang="en-US" sz="1050" dirty="0">
-                <a:solidFill>
-                  <a:srgbClr val="222222"/>
-                </a:solidFill>
-                <a:latin typeface="Calibri" pitchFamily="34" charset="0"/>
-                <a:ea typeface="Calibri" pitchFamily="34" charset="-122"/>
-                <a:cs typeface="Calibri" pitchFamily="34" charset="-120"/>
-              </a:rPr>
-              <a:t>関係の表は</a:t>
-            </a:r>
-            <a:pPr indent="0" marL="0">
-              <a:lnSpc>
-                <a:spcPct val="120000"/>
-              </a:lnSpc>
-              <a:buNone/>
-            </a:pPr>
-            <a:r>
-              <a:rPr lang="en-US" sz="1050" b="1" dirty="0">
-                <a:solidFill>
-                  <a:srgbClr val="222222"/>
-                </a:solidFill>
-                <a:latin typeface="Calibri" pitchFamily="34" charset="0"/>
-                <a:ea typeface="Calibri" pitchFamily="34" charset="-122"/>
-                <a:cs typeface="Calibri" pitchFamily="34" charset="-120"/>
-              </a:rPr>
-              <a:t>相関であって因果ではありません</a:t>
-            </a:r>
-            <a:pPr indent="0" marL="0">
-              <a:lnSpc>
-                <a:spcPct val="120000"/>
-              </a:lnSpc>
-              <a:buNone/>
-            </a:pPr>
-            <a:r>
-              <a:rPr lang="en-US" sz="1050" dirty="0">
-                <a:solidFill>
-                  <a:srgbClr val="222222"/>
-                </a:solidFill>
-                <a:latin typeface="Calibri" pitchFamily="34" charset="0"/>
-                <a:ea typeface="Calibri" pitchFamily="34" charset="-122"/>
-                <a:cs typeface="Calibri" pitchFamily="34" charset="-120"/>
-              </a:rPr>
-              <a:t>（もともと関心の高い方がたくさん回っている、とも読めます）。回答が少ないうちは数字が揺れるので、件数も一緒に見てください。</a:t>
-            </a:r>
-            <a:endParaRPr lang="en-US" sz="1050" dirty="0"/>
-          </a:p>
-        </p:txBody>
-      </p:sp>
-      <p:sp>
-        <p:nvSpPr>
-          <p:cNvPr id="30" name="Text 28"/>
+              <a:rPr lang="en-US" sz="950" dirty="0">
+                <a:solidFill>
+                  <a:srgbClr val="6B6B6B"/>
+                </a:solidFill>
+                <a:latin typeface="Calibri" pitchFamily="34" charset="0"/>
+                <a:ea typeface="Calibri" pitchFamily="34" charset="-122"/>
+                <a:cs typeface="Calibri" pitchFamily="34" charset="-120"/>
+              </a:rPr>
+              <a:t>「総合アンケートと案内メール」画面の送信状況（未送信・送信済み・失敗・回答済みの数）。</a:t>
+            </a:r>
+            <a:endParaRPr lang="en-US" sz="950" dirty="0"/>
+          </a:p>
+        </p:txBody>
+      </p:sp>
+      <p:sp>
+        <p:nvSpPr>
+          <p:cNvPr id="6" name="Text 3"/>
           <p:cNvSpPr txBox="1"/>
           <p:nvPr/>
         </p:nvSpPr>
@@ -25565,46 +24259,453 @@
                 <a:ea typeface="Calibri" pitchFamily="34" charset="-122"/>
                 <a:cs typeface="Calibri" pitchFamily="34" charset="-120"/>
               </a:rPr>
-              <a:t>終了後3：集計データを受け取る（つづき）</a:t>
+              <a:t>終了後3：集計データを受け取る</a:t>
             </a:r>
             <a:endParaRPr lang="en-US" sz="2200" dirty="0"/>
           </a:p>
         </p:txBody>
       </p:sp>
-      <p:pic>
-        <p:nvPicPr>
-          <p:cNvPr id="4" name="Image 0" descr="C:\Users\sato\Desktop\enque\docs\images\o-overall-stats.png">    </p:cNvPr>
-          <p:cNvPicPr>
-            <a:picLocks noChangeAspect="1"/>
-          </p:cNvPicPr>
-          <p:nvPr/>
-        </p:nvPicPr>
-        <p:blipFill>
-          <a:blip r:embed="rId1"/>
-          <a:stretch>
-            <a:fillRect/>
-          </a:stretch>
-        </p:blipFill>
-        <p:spPr>
-          <a:xfrm>
-            <a:off x="1248911" y="1481328"/>
-            <a:ext cx="5064265" cy="3474720"/>
-          </a:xfrm>
-          <a:prstGeom prst="rect">
-            <a:avLst/>
-          </a:prstGeom>
-        </p:spPr>
-      </p:pic>
-      <p:sp>
-        <p:nvSpPr>
-          <p:cNvPr id="5" name="Text 2"/>
-          <p:cNvSpPr txBox="1"/>
-          <p:nvPr/>
-        </p:nvSpPr>
-        <p:spPr>
-          <a:xfrm>
-            <a:off x="566928" y="5010912"/>
-            <a:ext cx="6428232" cy="274320"/>
+      <p:sp>
+        <p:nvSpPr>
+          <p:cNvPr id="4" name="Text 2"/>
+          <p:cNvSpPr txBox="1"/>
+          <p:nvPr/>
+        </p:nvSpPr>
+        <p:spPr>
+          <a:xfrm>
+            <a:off x="566928" y="1591056"/>
+            <a:ext cx="6428232" cy="257810"/>
+          </a:xfrm>
+          <a:prstGeom prst="rect">
+            <a:avLst/>
+          </a:prstGeom>
+          <a:noFill/>
+          <a:ln/>
+        </p:spPr>
+        <p:txBody>
+          <a:bodyPr wrap="square" lIns="0" tIns="0" rIns="0" bIns="0" rtlCol="0" anchor="t"/>
+          <a:lstStyle/>
+          <a:p>
+            <a:pPr indent="0" marL="0">
+              <a:buNone/>
+            </a:pPr>
+            <a:r>
+              <a:rPr lang="en-US" sz="1400" b="1" dirty="0">
+                <a:solidFill>
+                  <a:srgbClr val="1E2761"/>
+                </a:solidFill>
+                <a:latin typeface="Calibri" pitchFamily="34" charset="0"/>
+                <a:ea typeface="Calibri" pitchFamily="34" charset="-122"/>
+                <a:cs typeface="Calibri" pitchFamily="34" charset="-120"/>
+              </a:rPr>
+              <a:t>CSVをダウンロードする</a:t>
+            </a:r>
+            <a:endParaRPr lang="en-US" sz="1400" dirty="0"/>
+          </a:p>
+        </p:txBody>
+      </p:sp>
+      <p:sp>
+        <p:nvSpPr>
+          <p:cNvPr id="5" name="Text 3"/>
+          <p:cNvSpPr txBox="1"/>
+          <p:nvPr/>
+        </p:nvSpPr>
+        <p:spPr>
+          <a:xfrm>
+            <a:off x="713232" y="1922018"/>
+            <a:ext cx="6281928" cy="257429"/>
+          </a:xfrm>
+          <a:prstGeom prst="rect">
+            <a:avLst/>
+          </a:prstGeom>
+          <a:noFill/>
+          <a:ln/>
+        </p:spPr>
+        <p:txBody>
+          <a:bodyPr wrap="square" lIns="0" tIns="0" rIns="0" bIns="0" rtlCol="0" anchor="t"/>
+          <a:lstStyle/>
+          <a:p>
+            <a:pPr marL="342900" indent="-342900">
+              <a:lnSpc>
+                <a:spcPct val="125000"/>
+              </a:lnSpc>
+              <a:buSzPct val="100000"/>
+              <a:buChar char="●"/>
+            </a:pPr>
+            <a:r>
+              <a:rPr lang="en-US" sz="1100" b="1" dirty="0">
+                <a:solidFill>
+                  <a:srgbClr val="222222"/>
+                </a:solidFill>
+                <a:latin typeface="Calibri" pitchFamily="34" charset="0"/>
+                <a:ea typeface="Calibri" pitchFamily="34" charset="-122"/>
+                <a:cs typeface="Calibri" pitchFamily="34" charset="-120"/>
+              </a:rPr>
+              <a:t>企業別</a:t>
+            </a:r>
+            <a:pPr indent="0" marL="0">
+              <a:lnSpc>
+                <a:spcPct val="125000"/>
+              </a:lnSpc>
+              <a:buNone/>
+            </a:pPr>
+            <a:r>
+              <a:rPr lang="en-US" sz="1100" dirty="0">
+                <a:solidFill>
+                  <a:srgbClr val="222222"/>
+                </a:solidFill>
+                <a:latin typeface="Calibri" pitchFamily="34" charset="0"/>
+                <a:ea typeface="Calibri" pitchFamily="34" charset="-122"/>
+                <a:cs typeface="Calibri" pitchFamily="34" charset="-120"/>
+              </a:rPr>
+              <a:t>：企業の「集計」画面、または「回答一覧」から</a:t>
+            </a:r>
+            <a:endParaRPr lang="en-US" sz="1100" dirty="0"/>
+          </a:p>
+        </p:txBody>
+      </p:sp>
+      <p:sp>
+        <p:nvSpPr>
+          <p:cNvPr id="6" name="Text 4"/>
+          <p:cNvSpPr txBox="1"/>
+          <p:nvPr/>
+        </p:nvSpPr>
+        <p:spPr>
+          <a:xfrm>
+            <a:off x="713232" y="2197735"/>
+            <a:ext cx="6281928" cy="257429"/>
+          </a:xfrm>
+          <a:prstGeom prst="rect">
+            <a:avLst/>
+          </a:prstGeom>
+          <a:noFill/>
+          <a:ln/>
+        </p:spPr>
+        <p:txBody>
+          <a:bodyPr wrap="square" lIns="0" tIns="0" rIns="0" bIns="0" rtlCol="0" anchor="t"/>
+          <a:lstStyle/>
+          <a:p>
+            <a:pPr marL="342900" indent="-342900">
+              <a:lnSpc>
+                <a:spcPct val="125000"/>
+              </a:lnSpc>
+              <a:buSzPct val="100000"/>
+              <a:buChar char="●"/>
+            </a:pPr>
+            <a:r>
+              <a:rPr lang="en-US" sz="1100" b="1" dirty="0">
+                <a:solidFill>
+                  <a:srgbClr val="222222"/>
+                </a:solidFill>
+                <a:latin typeface="Calibri" pitchFamily="34" charset="0"/>
+                <a:ea typeface="Calibri" pitchFamily="34" charset="-122"/>
+                <a:cs typeface="Calibri" pitchFamily="34" charset="-120"/>
+              </a:rPr>
+              <a:t>全社まとめて</a:t>
+            </a:r>
+            <a:pPr indent="0" marL="0">
+              <a:lnSpc>
+                <a:spcPct val="125000"/>
+              </a:lnSpc>
+              <a:buNone/>
+            </a:pPr>
+            <a:r>
+              <a:rPr lang="en-US" sz="1100" dirty="0">
+                <a:solidFill>
+                  <a:srgbClr val="222222"/>
+                </a:solidFill>
+                <a:latin typeface="Calibri" pitchFamily="34" charset="0"/>
+                <a:ea typeface="Calibri" pitchFamily="34" charset="-122"/>
+                <a:cs typeface="Calibri" pitchFamily="34" charset="-120"/>
+              </a:rPr>
+              <a:t>：ダッシュボードの「全企業分のCSV」から</a:t>
+            </a:r>
+            <a:endParaRPr lang="en-US" sz="1100" dirty="0"/>
+          </a:p>
+        </p:txBody>
+      </p:sp>
+      <p:sp>
+        <p:nvSpPr>
+          <p:cNvPr id="7" name="Text 5"/>
+          <p:cNvSpPr txBox="1"/>
+          <p:nvPr/>
+        </p:nvSpPr>
+        <p:spPr>
+          <a:xfrm>
+            <a:off x="566928" y="2473452"/>
+            <a:ext cx="6428232" cy="257429"/>
+          </a:xfrm>
+          <a:prstGeom prst="rect">
+            <a:avLst/>
+          </a:prstGeom>
+          <a:noFill/>
+          <a:ln/>
+        </p:spPr>
+        <p:txBody>
+          <a:bodyPr wrap="square" lIns="0" tIns="0" rIns="0" bIns="0" rtlCol="0" anchor="t"/>
+          <a:lstStyle/>
+          <a:p>
+            <a:pPr indent="0" marL="0">
+              <a:lnSpc>
+                <a:spcPct val="125000"/>
+              </a:lnSpc>
+              <a:buNone/>
+            </a:pPr>
+            <a:r>
+              <a:rPr lang="en-US" sz="1100" dirty="0">
+                <a:solidFill>
+                  <a:srgbClr val="222222"/>
+                </a:solidFill>
+                <a:latin typeface="Calibri" pitchFamily="34" charset="0"/>
+                <a:ea typeface="Calibri" pitchFamily="34" charset="-122"/>
+                <a:cs typeface="Calibri" pitchFamily="34" charset="-120"/>
+              </a:rPr>
+              <a:t>CSVは</a:t>
+            </a:r>
+            <a:pPr indent="0" marL="0">
+              <a:lnSpc>
+                <a:spcPct val="125000"/>
+              </a:lnSpc>
+              <a:buNone/>
+            </a:pPr>
+            <a:r>
+              <a:rPr lang="en-US" sz="1100" b="1" dirty="0">
+                <a:solidFill>
+                  <a:srgbClr val="222222"/>
+                </a:solidFill>
+                <a:latin typeface="Calibri" pitchFamily="34" charset="0"/>
+                <a:ea typeface="Calibri" pitchFamily="34" charset="-122"/>
+                <a:cs typeface="Calibri" pitchFamily="34" charset="-120"/>
+              </a:rPr>
+              <a:t>UTF-8（BOM付き）</a:t>
+            </a:r>
+            <a:pPr indent="0" marL="0">
+              <a:lnSpc>
+                <a:spcPct val="125000"/>
+              </a:lnSpc>
+              <a:buNone/>
+            </a:pPr>
+            <a:r>
+              <a:rPr lang="en-US" sz="1100" dirty="0">
+                <a:solidFill>
+                  <a:srgbClr val="222222"/>
+                </a:solidFill>
+                <a:latin typeface="Calibri" pitchFamily="34" charset="0"/>
+                <a:ea typeface="Calibri" pitchFamily="34" charset="-122"/>
+                <a:cs typeface="Calibri" pitchFamily="34" charset="-120"/>
+              </a:rPr>
+              <a:t>なので、Excelでそのまま開けます。</a:t>
+            </a:r>
+            <a:endParaRPr lang="en-US" sz="1100" dirty="0"/>
+          </a:p>
+        </p:txBody>
+      </p:sp>
+      <p:sp>
+        <p:nvSpPr>
+          <p:cNvPr id="8" name="Text 6"/>
+          <p:cNvSpPr txBox="1"/>
+          <p:nvPr/>
+        </p:nvSpPr>
+        <p:spPr>
+          <a:xfrm>
+            <a:off x="566928" y="2767457"/>
+            <a:ext cx="6428232" cy="459994"/>
+          </a:xfrm>
+          <a:prstGeom prst="rect">
+            <a:avLst/>
+          </a:prstGeom>
+          <a:noFill/>
+          <a:ln/>
+        </p:spPr>
+        <p:txBody>
+          <a:bodyPr wrap="square" lIns="0" tIns="0" rIns="0" bIns="0" rtlCol="0" anchor="t"/>
+          <a:lstStyle/>
+          <a:p>
+            <a:pPr indent="0" marL="0">
+              <a:lnSpc>
+                <a:spcPct val="125000"/>
+              </a:lnSpc>
+              <a:buNone/>
+            </a:pPr>
+            <a:r>
+              <a:rPr lang="en-US" sz="1100" dirty="0">
+                <a:solidFill>
+                  <a:srgbClr val="222222"/>
+                </a:solidFill>
+                <a:latin typeface="Calibri" pitchFamily="34" charset="0"/>
+                <a:ea typeface="Calibri" pitchFamily="34" charset="-122"/>
+                <a:cs typeface="Calibri" pitchFamily="34" charset="-120"/>
+              </a:rPr>
+              <a:t>列は </a:t>
+            </a:r>
+            <a:pPr indent="0" marL="0">
+              <a:lnSpc>
+                <a:spcPct val="125000"/>
+              </a:lnSpc>
+              <a:buNone/>
+            </a:pPr>
+            <a:r>
+              <a:rPr lang="en-US" sz="1045" dirty="0">
+                <a:solidFill>
+                  <a:srgbClr val="222222"/>
+                </a:solidFill>
+                <a:latin typeface="Courier New" pitchFamily="34" charset="0"/>
+                <a:ea typeface="Courier New" pitchFamily="34" charset="-122"/>
+                <a:cs typeface="Courier New" pitchFamily="34" charset="-120"/>
+              </a:rPr>
+              <a:t>回答ID / 来場者ID / 送信日時 / 重複 / 来場人数 / 回答企業数 /（設問ごとの回答）</a:t>
+            </a:r>
+            <a:pPr indent="0" marL="0">
+              <a:lnSpc>
+                <a:spcPct val="125000"/>
+              </a:lnSpc>
+              <a:buNone/>
+            </a:pPr>
+            <a:r>
+              <a:rPr lang="en-US" sz="1100" dirty="0">
+                <a:solidFill>
+                  <a:srgbClr val="222222"/>
+                </a:solidFill>
+                <a:latin typeface="Calibri" pitchFamily="34" charset="0"/>
+                <a:ea typeface="Calibri" pitchFamily="34" charset="-122"/>
+                <a:cs typeface="Calibri" pitchFamily="34" charset="-120"/>
+              </a:rPr>
+              <a:t> です。</a:t>
+            </a:r>
+            <a:endParaRPr lang="en-US" sz="1100" dirty="0"/>
+          </a:p>
+        </p:txBody>
+      </p:sp>
+      <p:sp>
+        <p:nvSpPr>
+          <p:cNvPr id="9" name="Text 7"/>
+          <p:cNvSpPr txBox="1"/>
+          <p:nvPr/>
+        </p:nvSpPr>
+        <p:spPr>
+          <a:xfrm>
+            <a:off x="566928" y="3264027"/>
+            <a:ext cx="6428232" cy="459994"/>
+          </a:xfrm>
+          <a:prstGeom prst="rect">
+            <a:avLst/>
+          </a:prstGeom>
+          <a:noFill/>
+          <a:ln/>
+        </p:spPr>
+        <p:txBody>
+          <a:bodyPr wrap="square" lIns="0" tIns="0" rIns="0" bIns="0" rtlCol="0" anchor="t"/>
+          <a:lstStyle/>
+          <a:p>
+            <a:pPr indent="0" marL="0">
+              <a:lnSpc>
+                <a:spcPct val="125000"/>
+              </a:lnSpc>
+              <a:buNone/>
+            </a:pPr>
+            <a:r>
+              <a:rPr lang="en-US" sz="1100" b="1" dirty="0">
+                <a:solidFill>
+                  <a:srgbClr val="222222"/>
+                </a:solidFill>
+                <a:latin typeface="Calibri" pitchFamily="34" charset="0"/>
+                <a:ea typeface="Calibri" pitchFamily="34" charset="-122"/>
+                <a:cs typeface="Calibri" pitchFamily="34" charset="-120"/>
+              </a:rPr>
+              <a:t>来場人数</a:t>
+            </a:r>
+            <a:pPr indent="0" marL="0">
+              <a:lnSpc>
+                <a:spcPct val="125000"/>
+              </a:lnSpc>
+              <a:buNone/>
+            </a:pPr>
+            <a:r>
+              <a:rPr lang="en-US" sz="1100" dirty="0">
+                <a:solidFill>
+                  <a:srgbClr val="222222"/>
+                </a:solidFill>
+                <a:latin typeface="Calibri" pitchFamily="34" charset="0"/>
+                <a:ea typeface="Calibri" pitchFamily="34" charset="-122"/>
+                <a:cs typeface="Calibri" pitchFamily="34" charset="-120"/>
+              </a:rPr>
+              <a:t>はその方が「何人で来られましたか」で答えた人数、</a:t>
+            </a:r>
+            <a:pPr indent="0" marL="0">
+              <a:lnSpc>
+                <a:spcPct val="125000"/>
+              </a:lnSpc>
+              <a:buNone/>
+            </a:pPr>
+            <a:r>
+              <a:rPr lang="en-US" sz="1100" b="1" dirty="0">
+                <a:solidFill>
+                  <a:srgbClr val="222222"/>
+                </a:solidFill>
+                <a:latin typeface="Calibri" pitchFamily="34" charset="0"/>
+                <a:ea typeface="Calibri" pitchFamily="34" charset="-122"/>
+                <a:cs typeface="Calibri" pitchFamily="34" charset="-120"/>
+              </a:rPr>
+              <a:t>回答企業数</a:t>
+            </a:r>
+            <a:pPr indent="0" marL="0">
+              <a:lnSpc>
+                <a:spcPct val="125000"/>
+              </a:lnSpc>
+              <a:buNone/>
+            </a:pPr>
+            <a:r>
+              <a:rPr lang="en-US" sz="1100" dirty="0">
+                <a:solidFill>
+                  <a:srgbClr val="222222"/>
+                </a:solidFill>
+                <a:latin typeface="Calibri" pitchFamily="34" charset="0"/>
+                <a:ea typeface="Calibri" pitchFamily="34" charset="-122"/>
+                <a:cs typeface="Calibri" pitchFamily="34" charset="-120"/>
+              </a:rPr>
+              <a:t>はその方が回った企業数です。</a:t>
+            </a:r>
+            <a:endParaRPr lang="en-US" sz="1100" dirty="0"/>
+          </a:p>
+        </p:txBody>
+      </p:sp>
+      <p:sp>
+        <p:nvSpPr>
+          <p:cNvPr id="10" name="Shape 8"/>
+          <p:cNvSpPr/>
+          <p:nvPr/>
+        </p:nvSpPr>
+        <p:spPr>
+          <a:xfrm>
+            <a:off x="566928" y="3760597"/>
+            <a:ext cx="6428232" cy="624459"/>
+          </a:xfrm>
+          <a:prstGeom prst="roundRect">
+            <a:avLst>
+              <a:gd name="adj" fmla="val 8786"/>
+            </a:avLst>
+          </a:prstGeom>
+          <a:solidFill>
+            <a:srgbClr val="E8ECF8"/>
+          </a:solidFill>
+          <a:ln w="9525">
+            <a:solidFill>
+              <a:srgbClr val="1E2761"/>
+            </a:solidFill>
+            <a:prstDash val="solid"/>
+          </a:ln>
+        </p:spPr>
+      </p:sp>
+      <p:sp>
+        <p:nvSpPr>
+          <p:cNvPr id="11" name="Text 9"/>
+          <p:cNvSpPr txBox="1"/>
+          <p:nvPr/>
+        </p:nvSpPr>
+        <p:spPr>
+          <a:xfrm>
+            <a:off x="658368" y="3852037"/>
+            <a:ext cx="237744" cy="237744"/>
           </a:xfrm>
           <a:prstGeom prst="rect">
             <a:avLst/>
@@ -25620,54 +24721,133 @@
               <a:buNone/>
             </a:pPr>
             <a:r>
-              <a:rPr lang="en-US" sz="950" dirty="0">
-                <a:solidFill>
-                  <a:srgbClr val="6B6B6B"/>
-                </a:solidFill>
-                <a:latin typeface="Calibri" pitchFamily="34" charset="0"/>
-                <a:ea typeface="Calibri" pitchFamily="34" charset="-122"/>
-                <a:cs typeface="Calibri" pitchFamily="34" charset="-120"/>
-              </a:rPr>
-              <a:t>「総合アンケートの集計」画面の上部（回答数・回答率のタイルが見えるもの）。</a:t>
-            </a:r>
-            <a:endParaRPr lang="en-US" sz="950" dirty="0"/>
-          </a:p>
-        </p:txBody>
-      </p:sp>
-      <p:pic>
-        <p:nvPicPr>
-          <p:cNvPr id="6" name="Image 1" descr="C:\Users\sato\Desktop\enque\docs\images\o-overall-cross.png">    </p:cNvPr>
-          <p:cNvPicPr>
-            <a:picLocks noChangeAspect="1"/>
-          </p:cNvPicPr>
-          <p:nvPr/>
-        </p:nvPicPr>
-        <p:blipFill>
-          <a:blip r:embed="rId2"/>
-          <a:stretch>
-            <a:fillRect/>
-          </a:stretch>
-        </p:blipFill>
-        <p:spPr>
-          <a:xfrm>
-            <a:off x="1075432" y="5340096"/>
-            <a:ext cx="5411224" cy="3474720"/>
-          </a:xfrm>
-          <a:prstGeom prst="rect">
-            <a:avLst/>
-          </a:prstGeom>
-        </p:spPr>
-      </p:pic>
-      <p:sp>
-        <p:nvSpPr>
-          <p:cNvPr id="7" name="Text 3"/>
-          <p:cNvSpPr txBox="1"/>
-          <p:nvPr/>
-        </p:nvSpPr>
-        <p:spPr>
-          <a:xfrm>
-            <a:off x="566928" y="8869680"/>
-            <a:ext cx="6428232" cy="274320"/>
+              <a:rPr lang="en-US" sz="1200" b="1" dirty="0">
+                <a:solidFill>
+                  <a:srgbClr val="1E2761"/>
+                </a:solidFill>
+                <a:latin typeface="Calibri" pitchFamily="34" charset="0"/>
+                <a:ea typeface="Calibri" pitchFamily="34" charset="-122"/>
+                <a:cs typeface="Calibri" pitchFamily="34" charset="-120"/>
+              </a:rPr>
+              <a:t>i</a:t>
+            </a:r>
+            <a:endParaRPr lang="en-US" sz="1200" dirty="0"/>
+          </a:p>
+        </p:txBody>
+      </p:sp>
+      <p:sp>
+        <p:nvSpPr>
+          <p:cNvPr id="12" name="Text 10"/>
+          <p:cNvSpPr txBox="1"/>
+          <p:nvPr/>
+        </p:nvSpPr>
+        <p:spPr>
+          <a:xfrm>
+            <a:off x="950976" y="3870325"/>
+            <a:ext cx="5925312" cy="441579"/>
+          </a:xfrm>
+          <a:prstGeom prst="rect">
+            <a:avLst/>
+          </a:prstGeom>
+          <a:noFill/>
+          <a:ln/>
+        </p:spPr>
+        <p:txBody>
+          <a:bodyPr wrap="square" lIns="0" tIns="0" rIns="0" bIns="0" rtlCol="0" anchor="t"/>
+          <a:lstStyle/>
+          <a:p>
+            <a:pPr indent="0" marL="0">
+              <a:lnSpc>
+                <a:spcPct val="120000"/>
+              </a:lnSpc>
+              <a:buNone/>
+            </a:pPr>
+            <a:r>
+              <a:rPr lang="en-US" sz="1050" dirty="0">
+                <a:solidFill>
+                  <a:srgbClr val="222222"/>
+                </a:solidFill>
+                <a:latin typeface="Calibri" pitchFamily="34" charset="0"/>
+                <a:ea typeface="Calibri" pitchFamily="34" charset="-122"/>
+                <a:cs typeface="Calibri" pitchFamily="34" charset="-120"/>
+              </a:rPr>
+              <a:t>総合アンケートのCSVは、</a:t>
+            </a:r>
+            <a:pPr indent="0" marL="0">
+              <a:lnSpc>
+                <a:spcPct val="120000"/>
+              </a:lnSpc>
+              <a:buNone/>
+            </a:pPr>
+            <a:r>
+              <a:rPr lang="en-US" sz="1050" b="1" dirty="0">
+                <a:solidFill>
+                  <a:srgbClr val="222222"/>
+                </a:solidFill>
+                <a:latin typeface="Calibri" pitchFamily="34" charset="0"/>
+                <a:ea typeface="Calibri" pitchFamily="34" charset="-122"/>
+                <a:cs typeface="Calibri" pitchFamily="34" charset="-120"/>
+              </a:rPr>
+              <a:t>1行＝1グループ</a:t>
+            </a:r>
+            <a:pPr indent="0" marL="0">
+              <a:lnSpc>
+                <a:spcPct val="120000"/>
+              </a:lnSpc>
+              <a:buNone/>
+            </a:pPr>
+            <a:r>
+              <a:rPr lang="en-US" sz="1050" dirty="0">
+                <a:solidFill>
+                  <a:srgbClr val="222222"/>
+                </a:solidFill>
+                <a:latin typeface="Calibri" pitchFamily="34" charset="0"/>
+                <a:ea typeface="Calibri" pitchFamily="34" charset="-122"/>
+                <a:cs typeface="Calibri" pitchFamily="34" charset="-120"/>
+              </a:rPr>
+              <a:t>になります。世代や区分ごとの人数を聞いている場合は、</a:t>
+            </a:r>
+            <a:endParaRPr lang="en-US" sz="1050" dirty="0"/>
+          </a:p>
+        </p:txBody>
+      </p:sp>
+      <p:sp>
+        <p:nvSpPr>
+          <p:cNvPr id="13" name="Shape 11"/>
+          <p:cNvSpPr/>
+          <p:nvPr/>
+        </p:nvSpPr>
+        <p:spPr>
+          <a:xfrm>
+            <a:off x="566928" y="4458208"/>
+            <a:ext cx="6428232" cy="431102"/>
+          </a:xfrm>
+          <a:prstGeom prst="roundRect">
+            <a:avLst>
+              <a:gd name="adj" fmla="val 12726"/>
+            </a:avLst>
+          </a:prstGeom>
+          <a:solidFill>
+            <a:srgbClr val="E8ECF8"/>
+          </a:solidFill>
+          <a:ln w="9525">
+            <a:solidFill>
+              <a:srgbClr val="1E2761"/>
+            </a:solidFill>
+            <a:prstDash val="solid"/>
+          </a:ln>
+        </p:spPr>
+      </p:sp>
+      <p:sp>
+        <p:nvSpPr>
+          <p:cNvPr id="14" name="Text 12"/>
+          <p:cNvSpPr txBox="1"/>
+          <p:nvPr/>
+        </p:nvSpPr>
+        <p:spPr>
+          <a:xfrm>
+            <a:off x="658368" y="4549648"/>
+            <a:ext cx="237744" cy="237744"/>
           </a:xfrm>
           <a:prstGeom prst="rect">
             <a:avLst/>
@@ -25683,23 +24863,883 @@
               <a:buNone/>
             </a:pPr>
             <a:r>
-              <a:rPr lang="en-US" sz="950" dirty="0">
-                <a:solidFill>
-                  <a:srgbClr val="6B6B6B"/>
-                </a:solidFill>
-                <a:latin typeface="Calibri" pitchFamily="34" charset="0"/>
-                <a:ea typeface="Calibri" pitchFamily="34" charset="-122"/>
-                <a:cs typeface="Calibri" pitchFamily="34" charset="-120"/>
-              </a:rPr>
-              <a:t>「総合アンケートの集計」画面の「周回企業数との関係」「来場人数との関係」の表。</a:t>
-            </a:r>
-            <a:endParaRPr lang="en-US" sz="950" dirty="0"/>
-          </a:p>
-        </p:txBody>
-      </p:sp>
-      <p:sp>
-        <p:nvSpPr>
-          <p:cNvPr id="8" name="Text 4"/>
+              <a:rPr lang="en-US" sz="1200" b="1" dirty="0">
+                <a:solidFill>
+                  <a:srgbClr val="1E2761"/>
+                </a:solidFill>
+                <a:latin typeface="Calibri" pitchFamily="34" charset="0"/>
+                <a:ea typeface="Calibri" pitchFamily="34" charset="-122"/>
+                <a:cs typeface="Calibri" pitchFamily="34" charset="-120"/>
+              </a:rPr>
+              <a:t>i</a:t>
+            </a:r>
+            <a:endParaRPr lang="en-US" sz="1200" dirty="0"/>
+          </a:p>
+        </p:txBody>
+      </p:sp>
+      <p:sp>
+        <p:nvSpPr>
+          <p:cNvPr id="15" name="Text 13"/>
+          <p:cNvSpPr txBox="1"/>
+          <p:nvPr/>
+        </p:nvSpPr>
+        <p:spPr>
+          <a:xfrm>
+            <a:off x="950976" y="4567936"/>
+            <a:ext cx="5925312" cy="248221"/>
+          </a:xfrm>
+          <a:prstGeom prst="rect">
+            <a:avLst/>
+          </a:prstGeom>
+          <a:noFill/>
+          <a:ln/>
+        </p:spPr>
+        <p:txBody>
+          <a:bodyPr wrap="square" lIns="0" tIns="0" rIns="0" bIns="0" rtlCol="0" anchor="t"/>
+          <a:lstStyle/>
+          <a:p>
+            <a:pPr indent="0" marL="0">
+              <a:lnSpc>
+                <a:spcPct val="120000"/>
+              </a:lnSpc>
+              <a:buNone/>
+            </a:pPr>
+            <a:r>
+              <a:rPr lang="en-US" sz="1050" dirty="0">
+                <a:solidFill>
+                  <a:srgbClr val="222222"/>
+                </a:solidFill>
+                <a:latin typeface="Calibri" pitchFamily="34" charset="0"/>
+                <a:ea typeface="Calibri" pitchFamily="34" charset="-122"/>
+                <a:cs typeface="Calibri" pitchFamily="34" charset="-120"/>
+              </a:rPr>
+              <a:t>「来場人数」と並べてExcelのピボットテーブルにかけると、グループの構成を集計できます。</a:t>
+            </a:r>
+            <a:endParaRPr lang="en-US" sz="1050" dirty="0"/>
+          </a:p>
+        </p:txBody>
+      </p:sp>
+      <p:sp>
+        <p:nvSpPr>
+          <p:cNvPr id="16" name="Shape 14"/>
+          <p:cNvSpPr/>
+          <p:nvPr/>
+        </p:nvSpPr>
+        <p:spPr>
+          <a:xfrm>
+            <a:off x="566928" y="4962462"/>
+            <a:ext cx="6428232" cy="624459"/>
+          </a:xfrm>
+          <a:prstGeom prst="roundRect">
+            <a:avLst>
+              <a:gd name="adj" fmla="val 8786"/>
+            </a:avLst>
+          </a:prstGeom>
+          <a:solidFill>
+            <a:srgbClr val="E8ECF8"/>
+          </a:solidFill>
+          <a:ln w="9525">
+            <a:solidFill>
+              <a:srgbClr val="1E2761"/>
+            </a:solidFill>
+            <a:prstDash val="solid"/>
+          </a:ln>
+        </p:spPr>
+      </p:sp>
+      <p:sp>
+        <p:nvSpPr>
+          <p:cNvPr id="17" name="Text 15"/>
+          <p:cNvSpPr txBox="1"/>
+          <p:nvPr/>
+        </p:nvSpPr>
+        <p:spPr>
+          <a:xfrm>
+            <a:off x="658368" y="5053902"/>
+            <a:ext cx="237744" cy="237744"/>
+          </a:xfrm>
+          <a:prstGeom prst="rect">
+            <a:avLst/>
+          </a:prstGeom>
+          <a:noFill/>
+          <a:ln/>
+        </p:spPr>
+        <p:txBody>
+          <a:bodyPr wrap="square" lIns="0" tIns="0" rIns="0" bIns="0" rtlCol="0" anchor="ctr"/>
+          <a:lstStyle/>
+          <a:p>
+            <a:pPr algn="ctr" indent="0" marL="0">
+              <a:buNone/>
+            </a:pPr>
+            <a:r>
+              <a:rPr lang="en-US" sz="1200" b="1" dirty="0">
+                <a:solidFill>
+                  <a:srgbClr val="1E2761"/>
+                </a:solidFill>
+                <a:latin typeface="Calibri" pitchFamily="34" charset="0"/>
+                <a:ea typeface="Calibri" pitchFamily="34" charset="-122"/>
+                <a:cs typeface="Calibri" pitchFamily="34" charset="-120"/>
+              </a:rPr>
+              <a:t>i</a:t>
+            </a:r>
+            <a:endParaRPr lang="en-US" sz="1200" dirty="0"/>
+          </a:p>
+        </p:txBody>
+      </p:sp>
+      <p:sp>
+        <p:nvSpPr>
+          <p:cNvPr id="18" name="Text 16"/>
+          <p:cNvSpPr txBox="1"/>
+          <p:nvPr/>
+        </p:nvSpPr>
+        <p:spPr>
+          <a:xfrm>
+            <a:off x="950976" y="5072190"/>
+            <a:ext cx="5925312" cy="441579"/>
+          </a:xfrm>
+          <a:prstGeom prst="rect">
+            <a:avLst/>
+          </a:prstGeom>
+          <a:noFill/>
+          <a:ln/>
+        </p:spPr>
+        <p:txBody>
+          <a:bodyPr wrap="square" lIns="0" tIns="0" rIns="0" bIns="0" rtlCol="0" anchor="t"/>
+          <a:lstStyle/>
+          <a:p>
+            <a:pPr indent="0" marL="0">
+              <a:lnSpc>
+                <a:spcPct val="120000"/>
+              </a:lnSpc>
+              <a:buNone/>
+            </a:pPr>
+            <a:r>
+              <a:rPr lang="en-US" sz="1050" dirty="0">
+                <a:solidFill>
+                  <a:srgbClr val="222222"/>
+                </a:solidFill>
+                <a:latin typeface="Calibri" pitchFamily="34" charset="0"/>
+                <a:ea typeface="Calibri" pitchFamily="34" charset="-122"/>
+                <a:cs typeface="Calibri" pitchFamily="34" charset="-120"/>
+              </a:rPr>
+              <a:t>メールアドレスは出力されません。来場者は匿名のID（来場者ID）だけが入るので、企業をまたいだ同じ方の回答を突き合わせられます。</a:t>
+            </a:r>
+            <a:endParaRPr lang="en-US" sz="1050" dirty="0"/>
+          </a:p>
+        </p:txBody>
+      </p:sp>
+      <p:sp>
+        <p:nvSpPr>
+          <p:cNvPr id="19" name="Text 17"/>
+          <p:cNvSpPr txBox="1"/>
+          <p:nvPr/>
+        </p:nvSpPr>
+        <p:spPr>
+          <a:xfrm>
+            <a:off x="566928" y="5769801"/>
+            <a:ext cx="6428232" cy="257810"/>
+          </a:xfrm>
+          <a:prstGeom prst="rect">
+            <a:avLst/>
+          </a:prstGeom>
+          <a:noFill/>
+          <a:ln/>
+        </p:spPr>
+        <p:txBody>
+          <a:bodyPr wrap="square" lIns="0" tIns="0" rIns="0" bIns="0" rtlCol="0" anchor="t"/>
+          <a:lstStyle/>
+          <a:p>
+            <a:pPr indent="0" marL="0">
+              <a:buNone/>
+            </a:pPr>
+            <a:r>
+              <a:rPr lang="en-US" sz="1400" b="1" dirty="0">
+                <a:solidFill>
+                  <a:srgbClr val="1E2761"/>
+                </a:solidFill>
+                <a:latin typeface="Calibri" pitchFamily="34" charset="0"/>
+                <a:ea typeface="Calibri" pitchFamily="34" charset="-122"/>
+                <a:cs typeface="Calibri" pitchFamily="34" charset="-120"/>
+              </a:rPr>
+              <a:t>集計画面で見る</a:t>
+            </a:r>
+            <a:endParaRPr lang="en-US" sz="1400" dirty="0"/>
+          </a:p>
+        </p:txBody>
+      </p:sp>
+      <p:sp>
+        <p:nvSpPr>
+          <p:cNvPr id="20" name="Text 18"/>
+          <p:cNvSpPr txBox="1"/>
+          <p:nvPr/>
+        </p:nvSpPr>
+        <p:spPr>
+          <a:xfrm>
+            <a:off x="566928" y="6100763"/>
+            <a:ext cx="6428232" cy="459994"/>
+          </a:xfrm>
+          <a:prstGeom prst="rect">
+            <a:avLst/>
+          </a:prstGeom>
+          <a:noFill/>
+          <a:ln/>
+        </p:spPr>
+        <p:txBody>
+          <a:bodyPr wrap="square" lIns="0" tIns="0" rIns="0" bIns="0" rtlCol="0" anchor="t"/>
+          <a:lstStyle/>
+          <a:p>
+            <a:pPr indent="0" marL="0">
+              <a:lnSpc>
+                <a:spcPct val="125000"/>
+              </a:lnSpc>
+              <a:buNone/>
+            </a:pPr>
+            <a:r>
+              <a:rPr lang="en-US" sz="1100" dirty="0">
+                <a:solidFill>
+                  <a:srgbClr val="222222"/>
+                </a:solidFill>
+                <a:latin typeface="Calibri" pitchFamily="34" charset="0"/>
+                <a:ea typeface="Calibri" pitchFamily="34" charset="-122"/>
+                <a:cs typeface="Calibri" pitchFamily="34" charset="-120"/>
+              </a:rPr>
+              <a:t>企業ごとの「集計」画面では、設問ごとのグラフ・星評価の平均・NPS・自由記述の一覧が見られます。</a:t>
+            </a:r>
+            <a:endParaRPr lang="en-US" sz="1100" dirty="0"/>
+          </a:p>
+        </p:txBody>
+      </p:sp>
+      <p:sp>
+        <p:nvSpPr>
+          <p:cNvPr id="21" name="Text 19"/>
+          <p:cNvSpPr txBox="1"/>
+          <p:nvPr/>
+        </p:nvSpPr>
+        <p:spPr>
+          <a:xfrm>
+            <a:off x="566928" y="6707061"/>
+            <a:ext cx="6428232" cy="257810"/>
+          </a:xfrm>
+          <a:prstGeom prst="rect">
+            <a:avLst/>
+          </a:prstGeom>
+          <a:noFill/>
+          <a:ln/>
+        </p:spPr>
+        <p:txBody>
+          <a:bodyPr wrap="square" lIns="0" tIns="0" rIns="0" bIns="0" rtlCol="0" anchor="t"/>
+          <a:lstStyle/>
+          <a:p>
+            <a:pPr indent="0" marL="0">
+              <a:buNone/>
+            </a:pPr>
+            <a:r>
+              <a:rPr lang="en-US" sz="1400" b="1" dirty="0">
+                <a:solidFill>
+                  <a:srgbClr val="1E2761"/>
+                </a:solidFill>
+                <a:latin typeface="Calibri" pitchFamily="34" charset="0"/>
+                <a:ea typeface="Calibri" pitchFamily="34" charset="-122"/>
+                <a:cs typeface="Calibri" pitchFamily="34" charset="-120"/>
+              </a:rPr>
+              <a:t>グラフの読み方</a:t>
+            </a:r>
+            <a:endParaRPr lang="en-US" sz="1400" dirty="0"/>
+          </a:p>
+        </p:txBody>
+      </p:sp>
+      <p:sp>
+        <p:nvSpPr>
+          <p:cNvPr id="22" name="Text 20"/>
+          <p:cNvSpPr txBox="1"/>
+          <p:nvPr/>
+        </p:nvSpPr>
+        <p:spPr>
+          <a:xfrm>
+            <a:off x="566928" y="7038023"/>
+            <a:ext cx="6428232" cy="459994"/>
+          </a:xfrm>
+          <a:prstGeom prst="rect">
+            <a:avLst/>
+          </a:prstGeom>
+          <a:noFill/>
+          <a:ln/>
+        </p:spPr>
+        <p:txBody>
+          <a:bodyPr wrap="square" lIns="0" tIns="0" rIns="0" bIns="0" rtlCol="0" anchor="t"/>
+          <a:lstStyle/>
+          <a:p>
+            <a:pPr indent="0" marL="0">
+              <a:lnSpc>
+                <a:spcPct val="125000"/>
+              </a:lnSpc>
+              <a:buNone/>
+            </a:pPr>
+            <a:r>
+              <a:rPr lang="en-US" sz="1100" dirty="0">
+                <a:solidFill>
+                  <a:srgbClr val="222222"/>
+                </a:solidFill>
+                <a:latin typeface="Calibri" pitchFamily="34" charset="0"/>
+                <a:ea typeface="Calibri" pitchFamily="34" charset="-122"/>
+                <a:cs typeface="Calibri" pitchFamily="34" charset="-120"/>
+              </a:rPr>
+              <a:t>設問ごとに、上に</a:t>
+            </a:r>
+            <a:pPr indent="0" marL="0">
+              <a:lnSpc>
+                <a:spcPct val="125000"/>
+              </a:lnSpc>
+              <a:buNone/>
+            </a:pPr>
+            <a:r>
+              <a:rPr lang="en-US" sz="1100" b="1" dirty="0">
+                <a:solidFill>
+                  <a:srgbClr val="222222"/>
+                </a:solidFill>
+                <a:latin typeface="Calibri" pitchFamily="34" charset="0"/>
+                <a:ea typeface="Calibri" pitchFamily="34" charset="-122"/>
+                <a:cs typeface="Calibri" pitchFamily="34" charset="-120"/>
+              </a:rPr>
+              <a:t>帯グラフ</a:t>
+            </a:r>
+            <a:pPr indent="0" marL="0">
+              <a:lnSpc>
+                <a:spcPct val="125000"/>
+              </a:lnSpc>
+              <a:buNone/>
+            </a:pPr>
+            <a:r>
+              <a:rPr lang="en-US" sz="1100" dirty="0">
+                <a:solidFill>
+                  <a:srgbClr val="222222"/>
+                </a:solidFill>
+                <a:latin typeface="Calibri" pitchFamily="34" charset="0"/>
+                <a:ea typeface="Calibri" pitchFamily="34" charset="-122"/>
+                <a:cs typeface="Calibri" pitchFamily="34" charset="-120"/>
+              </a:rPr>
+              <a:t>（全体を100%とした構成比）、下に</a:t>
+            </a:r>
+            <a:pPr indent="0" marL="0">
+              <a:lnSpc>
+                <a:spcPct val="125000"/>
+              </a:lnSpc>
+              <a:buNone/>
+            </a:pPr>
+            <a:r>
+              <a:rPr lang="en-US" sz="1100" b="1" dirty="0">
+                <a:solidFill>
+                  <a:srgbClr val="222222"/>
+                </a:solidFill>
+                <a:latin typeface="Calibri" pitchFamily="34" charset="0"/>
+                <a:ea typeface="Calibri" pitchFamily="34" charset="-122"/>
+                <a:cs typeface="Calibri" pitchFamily="34" charset="-120"/>
+              </a:rPr>
+              <a:t>横棒グラフ</a:t>
+            </a:r>
+            <a:pPr indent="0" marL="0">
+              <a:lnSpc>
+                <a:spcPct val="125000"/>
+              </a:lnSpc>
+              <a:buNone/>
+            </a:pPr>
+            <a:r>
+              <a:rPr lang="en-US" sz="1100" dirty="0">
+                <a:solidFill>
+                  <a:srgbClr val="222222"/>
+                </a:solidFill>
+                <a:latin typeface="Calibri" pitchFamily="34" charset="0"/>
+                <a:ea typeface="Calibri" pitchFamily="34" charset="-122"/>
+                <a:cs typeface="Calibri" pitchFamily="34" charset="-120"/>
+              </a:rPr>
+              <a:t>（項目ごとの件数）が出ます。</a:t>
+            </a:r>
+            <a:endParaRPr lang="en-US" sz="1100" dirty="0"/>
+          </a:p>
+        </p:txBody>
+      </p:sp>
+      <p:sp>
+        <p:nvSpPr>
+          <p:cNvPr id="23" name="Text 21"/>
+          <p:cNvSpPr txBox="1"/>
+          <p:nvPr/>
+        </p:nvSpPr>
+        <p:spPr>
+          <a:xfrm>
+            <a:off x="713232" y="7534593"/>
+            <a:ext cx="6281928" cy="459994"/>
+          </a:xfrm>
+          <a:prstGeom prst="rect">
+            <a:avLst/>
+          </a:prstGeom>
+          <a:noFill/>
+          <a:ln/>
+        </p:spPr>
+        <p:txBody>
+          <a:bodyPr wrap="square" lIns="0" tIns="0" rIns="0" bIns="0" rtlCol="0" anchor="t"/>
+          <a:lstStyle/>
+          <a:p>
+            <a:pPr marL="342900" indent="-342900">
+              <a:lnSpc>
+                <a:spcPct val="125000"/>
+              </a:lnSpc>
+              <a:buSzPct val="100000"/>
+              <a:buChar char="●"/>
+            </a:pPr>
+            <a:r>
+              <a:rPr lang="en-US" sz="1100" b="1" dirty="0">
+                <a:solidFill>
+                  <a:srgbClr val="222222"/>
+                </a:solidFill>
+                <a:latin typeface="Calibri" pitchFamily="34" charset="0"/>
+                <a:ea typeface="Calibri" pitchFamily="34" charset="-122"/>
+                <a:cs typeface="Calibri" pitchFamily="34" charset="-120"/>
+              </a:rPr>
+              <a:t>帯グラフ</a:t>
+            </a:r>
+            <a:pPr indent="0" marL="0">
+              <a:lnSpc>
+                <a:spcPct val="125000"/>
+              </a:lnSpc>
+              <a:buNone/>
+            </a:pPr>
+            <a:r>
+              <a:rPr lang="en-US" sz="1100" dirty="0">
+                <a:solidFill>
+                  <a:srgbClr val="222222"/>
+                </a:solidFill>
+                <a:latin typeface="Calibri" pitchFamily="34" charset="0"/>
+                <a:ea typeface="Calibri" pitchFamily="34" charset="-122"/>
+                <a:cs typeface="Calibri" pitchFamily="34" charset="-120"/>
+              </a:rPr>
+              <a:t>：割合をひと目で見るためのものです。色の意味は帯のすぐ下の凡例（ラベル・件数・割合）で読みます</a:t>
+            </a:r>
+            <a:endParaRPr lang="en-US" sz="1100" dirty="0"/>
+          </a:p>
+        </p:txBody>
+      </p:sp>
+      <p:sp>
+        <p:nvSpPr>
+          <p:cNvPr id="24" name="Text 22"/>
+          <p:cNvSpPr txBox="1"/>
+          <p:nvPr/>
+        </p:nvSpPr>
+        <p:spPr>
+          <a:xfrm>
+            <a:off x="713232" y="8012875"/>
+            <a:ext cx="6281928" cy="459994"/>
+          </a:xfrm>
+          <a:prstGeom prst="rect">
+            <a:avLst/>
+          </a:prstGeom>
+          <a:noFill/>
+          <a:ln/>
+        </p:spPr>
+        <p:txBody>
+          <a:bodyPr wrap="square" lIns="0" tIns="0" rIns="0" bIns="0" rtlCol="0" anchor="t"/>
+          <a:lstStyle/>
+          <a:p>
+            <a:pPr marL="342900" indent="-342900">
+              <a:lnSpc>
+                <a:spcPct val="125000"/>
+              </a:lnSpc>
+              <a:buSzPct val="100000"/>
+              <a:buChar char="●"/>
+            </a:pPr>
+            <a:r>
+              <a:rPr lang="en-US" sz="1100" b="1" dirty="0">
+                <a:solidFill>
+                  <a:srgbClr val="222222"/>
+                </a:solidFill>
+                <a:latin typeface="Calibri" pitchFamily="34" charset="0"/>
+                <a:ea typeface="Calibri" pitchFamily="34" charset="-122"/>
+                <a:cs typeface="Calibri" pitchFamily="34" charset="-120"/>
+              </a:rPr>
+              <a:t>横棒グラフ</a:t>
+            </a:r>
+            <a:pPr indent="0" marL="0">
+              <a:lnSpc>
+                <a:spcPct val="125000"/>
+              </a:lnSpc>
+              <a:buNone/>
+            </a:pPr>
+            <a:r>
+              <a:rPr lang="en-US" sz="1100" dirty="0">
+                <a:solidFill>
+                  <a:srgbClr val="222222"/>
+                </a:solidFill>
+                <a:latin typeface="Calibri" pitchFamily="34" charset="0"/>
+                <a:ea typeface="Calibri" pitchFamily="34" charset="-122"/>
+                <a:cs typeface="Calibri" pitchFamily="34" charset="-120"/>
+              </a:rPr>
+              <a:t>：棒の長さは</a:t>
+            </a:r>
+            <a:pPr indent="0" marL="0">
+              <a:lnSpc>
+                <a:spcPct val="125000"/>
+              </a:lnSpc>
+              <a:buNone/>
+            </a:pPr>
+            <a:r>
+              <a:rPr lang="en-US" sz="1100" b="1" dirty="0">
+                <a:solidFill>
+                  <a:srgbClr val="222222"/>
+                </a:solidFill>
+                <a:latin typeface="Calibri" pitchFamily="34" charset="0"/>
+                <a:ea typeface="Calibri" pitchFamily="34" charset="-122"/>
+                <a:cs typeface="Calibri" pitchFamily="34" charset="-120"/>
+              </a:rPr>
+              <a:t>全体に対する割合</a:t>
+            </a:r>
+            <a:pPr indent="0" marL="0">
+              <a:lnSpc>
+                <a:spcPct val="125000"/>
+              </a:lnSpc>
+              <a:buNone/>
+            </a:pPr>
+            <a:r>
+              <a:rPr lang="en-US" sz="1100" dirty="0">
+                <a:solidFill>
+                  <a:srgbClr val="222222"/>
+                </a:solidFill>
+                <a:latin typeface="Calibri" pitchFamily="34" charset="0"/>
+                <a:ea typeface="Calibri" pitchFamily="34" charset="-122"/>
+                <a:cs typeface="Calibri" pitchFamily="34" charset="-120"/>
+              </a:rPr>
+              <a:t>です。灰色の下地がちょうど100%で、25%ごとに薄い目盛り線が入ります</a:t>
+            </a:r>
+            <a:endParaRPr lang="en-US" sz="1100" dirty="0"/>
+          </a:p>
+        </p:txBody>
+      </p:sp>
+      <p:sp>
+        <p:nvSpPr>
+          <p:cNvPr id="25" name="Shape 23"/>
+          <p:cNvSpPr/>
+          <p:nvPr/>
+        </p:nvSpPr>
+        <p:spPr>
+          <a:xfrm>
+            <a:off x="566928" y="8491157"/>
+            <a:ext cx="6428232" cy="624459"/>
+          </a:xfrm>
+          <a:prstGeom prst="roundRect">
+            <a:avLst>
+              <a:gd name="adj" fmla="val 8786"/>
+            </a:avLst>
+          </a:prstGeom>
+          <a:solidFill>
+            <a:srgbClr val="FDF0E6"/>
+          </a:solidFill>
+          <a:ln w="9525">
+            <a:solidFill>
+              <a:srgbClr val="E08A3C"/>
+            </a:solidFill>
+            <a:prstDash val="solid"/>
+          </a:ln>
+        </p:spPr>
+      </p:sp>
+      <p:sp>
+        <p:nvSpPr>
+          <p:cNvPr id="26" name="Text 24"/>
+          <p:cNvSpPr txBox="1"/>
+          <p:nvPr/>
+        </p:nvSpPr>
+        <p:spPr>
+          <a:xfrm>
+            <a:off x="658368" y="8582596"/>
+            <a:ext cx="237744" cy="237744"/>
+          </a:xfrm>
+          <a:prstGeom prst="rect">
+            <a:avLst/>
+          </a:prstGeom>
+          <a:noFill/>
+          <a:ln/>
+        </p:spPr>
+        <p:txBody>
+          <a:bodyPr wrap="square" lIns="0" tIns="0" rIns="0" bIns="0" rtlCol="0" anchor="ctr"/>
+          <a:lstStyle/>
+          <a:p>
+            <a:pPr algn="ctr" indent="0" marL="0">
+              <a:buNone/>
+            </a:pPr>
+            <a:r>
+              <a:rPr lang="en-US" sz="1200" b="1" dirty="0">
+                <a:solidFill>
+                  <a:srgbClr val="C25A17"/>
+                </a:solidFill>
+                <a:latin typeface="Calibri" pitchFamily="34" charset="0"/>
+                <a:ea typeface="Calibri" pitchFamily="34" charset="-122"/>
+                <a:cs typeface="Calibri" pitchFamily="34" charset="-120"/>
+              </a:rPr>
+              <a:t>！</a:t>
+            </a:r>
+            <a:endParaRPr lang="en-US" sz="1200" dirty="0"/>
+          </a:p>
+        </p:txBody>
+      </p:sp>
+      <p:sp>
+        <p:nvSpPr>
+          <p:cNvPr id="27" name="Text 25"/>
+          <p:cNvSpPr txBox="1"/>
+          <p:nvPr/>
+        </p:nvSpPr>
+        <p:spPr>
+          <a:xfrm>
+            <a:off x="950976" y="8600884"/>
+            <a:ext cx="5925312" cy="441579"/>
+          </a:xfrm>
+          <a:prstGeom prst="rect">
+            <a:avLst/>
+          </a:prstGeom>
+          <a:noFill/>
+          <a:ln/>
+        </p:spPr>
+        <p:txBody>
+          <a:bodyPr wrap="square" lIns="0" tIns="0" rIns="0" bIns="0" rtlCol="0" anchor="t"/>
+          <a:lstStyle/>
+          <a:p>
+            <a:pPr indent="0" marL="0">
+              <a:lnSpc>
+                <a:spcPct val="120000"/>
+              </a:lnSpc>
+              <a:buNone/>
+            </a:pPr>
+            <a:r>
+              <a:rPr lang="en-US" sz="1050" b="1" dirty="0">
+                <a:solidFill>
+                  <a:srgbClr val="222222"/>
+                </a:solidFill>
+                <a:latin typeface="Calibri" pitchFamily="34" charset="0"/>
+                <a:ea typeface="Calibri" pitchFamily="34" charset="-122"/>
+                <a:cs typeface="Calibri" pitchFamily="34" charset="-120"/>
+              </a:rPr>
+              <a:t>複数選択の設問には帯グラフが出ません。</a:t>
+            </a:r>
+            <a:pPr indent="0" marL="0">
+              <a:lnSpc>
+                <a:spcPct val="120000"/>
+              </a:lnSpc>
+              <a:buNone/>
+            </a:pPr>
+            <a:r>
+              <a:rPr lang="en-US" sz="1050" dirty="0">
+                <a:solidFill>
+                  <a:srgbClr val="222222"/>
+                </a:solidFill>
+                <a:latin typeface="Calibri" pitchFamily="34" charset="0"/>
+                <a:ea typeface="Calibri" pitchFamily="34" charset="-122"/>
+                <a:cs typeface="Calibri" pitchFamily="34" charset="-120"/>
+              </a:rPr>
+              <a:t> 1人が2つ以上選べるため、割合の合計が100%を超えるからです。</a:t>
+            </a:r>
+            <a:endParaRPr lang="en-US" sz="1050" dirty="0"/>
+          </a:p>
+        </p:txBody>
+      </p:sp>
+      <p:sp>
+        <p:nvSpPr>
+          <p:cNvPr id="28" name="Text 26"/>
+          <p:cNvSpPr txBox="1"/>
+          <p:nvPr/>
+        </p:nvSpPr>
+        <p:spPr>
+          <a:xfrm>
+            <a:off x="566928" y="9188768"/>
+            <a:ext cx="6428232" cy="257429"/>
+          </a:xfrm>
+          <a:prstGeom prst="rect">
+            <a:avLst/>
+          </a:prstGeom>
+          <a:noFill/>
+          <a:ln/>
+        </p:spPr>
+        <p:txBody>
+          <a:bodyPr wrap="square" lIns="0" tIns="0" rIns="0" bIns="0" rtlCol="0" anchor="t"/>
+          <a:lstStyle/>
+          <a:p>
+            <a:pPr indent="0" marL="0">
+              <a:lnSpc>
+                <a:spcPct val="125000"/>
+              </a:lnSpc>
+              <a:buNone/>
+            </a:pPr>
+            <a:r>
+              <a:rPr lang="en-US" sz="1100" dirty="0">
+                <a:solidFill>
+                  <a:srgbClr val="222222"/>
+                </a:solidFill>
+                <a:latin typeface="Calibri" pitchFamily="34" charset="0"/>
+                <a:ea typeface="Calibri" pitchFamily="34" charset="-122"/>
+                <a:cs typeface="Calibri" pitchFamily="34" charset="-120"/>
+              </a:rPr>
+              <a:t>棒の長さは「回答した方のうち、その選択肢を選んだ割合」になります。</a:t>
+            </a:r>
+            <a:endParaRPr lang="en-US" sz="1100" dirty="0"/>
+          </a:p>
+        </p:txBody>
+      </p:sp>
+      <p:sp>
+        <p:nvSpPr>
+          <p:cNvPr id="29" name="Shape 27"/>
+          <p:cNvSpPr/>
+          <p:nvPr/>
+        </p:nvSpPr>
+        <p:spPr>
+          <a:xfrm>
+            <a:off x="566928" y="9482773"/>
+            <a:ext cx="6428232" cy="431102"/>
+          </a:xfrm>
+          <a:prstGeom prst="roundRect">
+            <a:avLst>
+              <a:gd name="adj" fmla="val 12726"/>
+            </a:avLst>
+          </a:prstGeom>
+          <a:solidFill>
+            <a:srgbClr val="E8ECF8"/>
+          </a:solidFill>
+          <a:ln w="9525">
+            <a:solidFill>
+              <a:srgbClr val="1E2761"/>
+            </a:solidFill>
+            <a:prstDash val="solid"/>
+          </a:ln>
+        </p:spPr>
+      </p:sp>
+      <p:sp>
+        <p:nvSpPr>
+          <p:cNvPr id="30" name="Text 28"/>
+          <p:cNvSpPr txBox="1"/>
+          <p:nvPr/>
+        </p:nvSpPr>
+        <p:spPr>
+          <a:xfrm>
+            <a:off x="658368" y="9574213"/>
+            <a:ext cx="237744" cy="237744"/>
+          </a:xfrm>
+          <a:prstGeom prst="rect">
+            <a:avLst/>
+          </a:prstGeom>
+          <a:noFill/>
+          <a:ln/>
+        </p:spPr>
+        <p:txBody>
+          <a:bodyPr wrap="square" lIns="0" tIns="0" rIns="0" bIns="0" rtlCol="0" anchor="ctr"/>
+          <a:lstStyle/>
+          <a:p>
+            <a:pPr algn="ctr" indent="0" marL="0">
+              <a:buNone/>
+            </a:pPr>
+            <a:r>
+              <a:rPr lang="en-US" sz="1200" b="1" dirty="0">
+                <a:solidFill>
+                  <a:srgbClr val="1E2761"/>
+                </a:solidFill>
+                <a:latin typeface="Calibri" pitchFamily="34" charset="0"/>
+                <a:ea typeface="Calibri" pitchFamily="34" charset="-122"/>
+                <a:cs typeface="Calibri" pitchFamily="34" charset="-120"/>
+              </a:rPr>
+              <a:t>i</a:t>
+            </a:r>
+            <a:endParaRPr lang="en-US" sz="1200" dirty="0"/>
+          </a:p>
+        </p:txBody>
+      </p:sp>
+      <p:sp>
+        <p:nvSpPr>
+          <p:cNvPr id="31" name="Text 29"/>
+          <p:cNvSpPr txBox="1"/>
+          <p:nvPr/>
+        </p:nvSpPr>
+        <p:spPr>
+          <a:xfrm>
+            <a:off x="950976" y="9592501"/>
+            <a:ext cx="5925312" cy="248221"/>
+          </a:xfrm>
+          <a:prstGeom prst="rect">
+            <a:avLst/>
+          </a:prstGeom>
+          <a:noFill/>
+          <a:ln/>
+        </p:spPr>
+        <p:txBody>
+          <a:bodyPr wrap="square" lIns="0" tIns="0" rIns="0" bIns="0" rtlCol="0" anchor="t"/>
+          <a:lstStyle/>
+          <a:p>
+            <a:pPr indent="0" marL="0">
+              <a:lnSpc>
+                <a:spcPct val="120000"/>
+              </a:lnSpc>
+              <a:buNone/>
+            </a:pPr>
+            <a:r>
+              <a:rPr lang="en-US" sz="1050" b="1" dirty="0">
+                <a:solidFill>
+                  <a:srgbClr val="222222"/>
+                </a:solidFill>
+                <a:latin typeface="Calibri" pitchFamily="34" charset="0"/>
+                <a:ea typeface="Calibri" pitchFamily="34" charset="-122"/>
+                <a:cs typeface="Calibri" pitchFamily="34" charset="-120"/>
+              </a:rPr>
+              <a:t>NPSの帯</a:t>
+            </a:r>
+            <a:pPr indent="0" marL="0">
+              <a:lnSpc>
+                <a:spcPct val="120000"/>
+              </a:lnSpc>
+              <a:buNone/>
+            </a:pPr>
+            <a:r>
+              <a:rPr lang="en-US" sz="1050" dirty="0">
+                <a:solidFill>
+                  <a:srgbClr val="222222"/>
+                </a:solidFill>
+                <a:latin typeface="Calibri" pitchFamily="34" charset="0"/>
+                <a:ea typeface="Calibri" pitchFamily="34" charset="-122"/>
+                <a:cs typeface="Calibri" pitchFamily="34" charset="-120"/>
+              </a:rPr>
+              <a:t>は0〜10の11段階ではなく、</a:t>
+            </a:r>
+            <a:pPr indent="0" marL="0">
+              <a:lnSpc>
+                <a:spcPct val="120000"/>
+              </a:lnSpc>
+              <a:buNone/>
+            </a:pPr>
+            <a:r>
+              <a:rPr lang="en-US" sz="1050" b="1" dirty="0">
+                <a:solidFill>
+                  <a:srgbClr val="222222"/>
+                </a:solidFill>
+                <a:latin typeface="Calibri" pitchFamily="34" charset="0"/>
+                <a:ea typeface="Calibri" pitchFamily="34" charset="-122"/>
+                <a:cs typeface="Calibri" pitchFamily="34" charset="-120"/>
+              </a:rPr>
+              <a:t>批判者（0〜6）・中立（7〜8）・推奨者（9〜10）</a:t>
+            </a:r>
+            <a:pPr indent="0" marL="0">
+              <a:lnSpc>
+                <a:spcPct val="120000"/>
+              </a:lnSpc>
+              <a:buNone/>
+            </a:pPr>
+            <a:r>
+              <a:rPr lang="en-US" sz="1050" dirty="0">
+                <a:solidFill>
+                  <a:srgbClr val="222222"/>
+                </a:solidFill>
+                <a:latin typeface="Calibri" pitchFamily="34" charset="0"/>
+                <a:ea typeface="Calibri" pitchFamily="34" charset="-122"/>
+                <a:cs typeface="Calibri" pitchFamily="34" charset="-120"/>
+              </a:rPr>
+              <a:t>の3つに</a:t>
+            </a:r>
+            <a:endParaRPr lang="en-US" sz="1050" dirty="0"/>
+          </a:p>
+        </p:txBody>
+      </p:sp>
+      <p:sp>
+        <p:nvSpPr>
+          <p:cNvPr id="32" name="Text 30"/>
           <p:cNvSpPr txBox="1"/>
           <p:nvPr/>
         </p:nvSpPr>
@@ -25846,9 +25886,669 @@
           </a:p>
         </p:txBody>
       </p:sp>
+      <p:sp>
+        <p:nvSpPr>
+          <p:cNvPr id="4" name="Shape 2"/>
+          <p:cNvSpPr/>
+          <p:nvPr/>
+        </p:nvSpPr>
+        <p:spPr>
+          <a:xfrm>
+            <a:off x="566928" y="1481328"/>
+            <a:ext cx="6428232" cy="431102"/>
+          </a:xfrm>
+          <a:prstGeom prst="roundRect">
+            <a:avLst>
+              <a:gd name="adj" fmla="val 12726"/>
+            </a:avLst>
+          </a:prstGeom>
+          <a:solidFill>
+            <a:srgbClr val="E8ECF8"/>
+          </a:solidFill>
+          <a:ln w="9525">
+            <a:solidFill>
+              <a:srgbClr val="1E2761"/>
+            </a:solidFill>
+            <a:prstDash val="solid"/>
+          </a:ln>
+        </p:spPr>
+      </p:sp>
+      <p:sp>
+        <p:nvSpPr>
+          <p:cNvPr id="5" name="Text 3"/>
+          <p:cNvSpPr txBox="1"/>
+          <p:nvPr/>
+        </p:nvSpPr>
+        <p:spPr>
+          <a:xfrm>
+            <a:off x="658368" y="1572768"/>
+            <a:ext cx="237744" cy="237744"/>
+          </a:xfrm>
+          <a:prstGeom prst="rect">
+            <a:avLst/>
+          </a:prstGeom>
+          <a:noFill/>
+          <a:ln/>
+        </p:spPr>
+        <p:txBody>
+          <a:bodyPr wrap="square" lIns="0" tIns="0" rIns="0" bIns="0" rtlCol="0" anchor="ctr"/>
+          <a:lstStyle/>
+          <a:p>
+            <a:pPr algn="ctr" indent="0" marL="0">
+              <a:buNone/>
+            </a:pPr>
+            <a:r>
+              <a:rPr lang="en-US" sz="1200" b="1" dirty="0">
+                <a:solidFill>
+                  <a:srgbClr val="1E2761"/>
+                </a:solidFill>
+                <a:latin typeface="Calibri" pitchFamily="34" charset="0"/>
+                <a:ea typeface="Calibri" pitchFamily="34" charset="-122"/>
+                <a:cs typeface="Calibri" pitchFamily="34" charset="-120"/>
+              </a:rPr>
+              <a:t>i</a:t>
+            </a:r>
+            <a:endParaRPr lang="en-US" sz="1200" dirty="0"/>
+          </a:p>
+        </p:txBody>
+      </p:sp>
+      <p:sp>
+        <p:nvSpPr>
+          <p:cNvPr id="6" name="Text 4"/>
+          <p:cNvSpPr txBox="1"/>
+          <p:nvPr/>
+        </p:nvSpPr>
+        <p:spPr>
+          <a:xfrm>
+            <a:off x="950976" y="1591056"/>
+            <a:ext cx="5925312" cy="248221"/>
+          </a:xfrm>
+          <a:prstGeom prst="rect">
+            <a:avLst/>
+          </a:prstGeom>
+          <a:noFill/>
+          <a:ln/>
+        </p:spPr>
+        <p:txBody>
+          <a:bodyPr wrap="square" lIns="0" tIns="0" rIns="0" bIns="0" rtlCol="0" anchor="t"/>
+          <a:lstStyle/>
+          <a:p>
+            <a:pPr indent="0" marL="0">
+              <a:lnSpc>
+                <a:spcPct val="120000"/>
+              </a:lnSpc>
+              <a:buNone/>
+            </a:pPr>
+            <a:r>
+              <a:rPr lang="en-US" sz="1050" dirty="0">
+                <a:solidFill>
+                  <a:srgbClr val="222222"/>
+                </a:solidFill>
+                <a:latin typeface="Calibri" pitchFamily="34" charset="0"/>
+                <a:ea typeface="Calibri" pitchFamily="34" charset="-122"/>
+                <a:cs typeface="Calibri" pitchFamily="34" charset="-120"/>
+              </a:rPr>
+              <a:t>まとめて出します。星評価と人数は、並び順が分かるように同じ色の濃淡になります。</a:t>
+            </a:r>
+            <a:endParaRPr lang="en-US" sz="1050" dirty="0"/>
+          </a:p>
+        </p:txBody>
+      </p:sp>
+      <p:sp>
+        <p:nvSpPr>
+          <p:cNvPr id="7" name="Text 5"/>
+          <p:cNvSpPr txBox="1"/>
+          <p:nvPr/>
+        </p:nvSpPr>
+        <p:spPr>
+          <a:xfrm>
+            <a:off x="566928" y="1985582"/>
+            <a:ext cx="6428232" cy="459994"/>
+          </a:xfrm>
+          <a:prstGeom prst="rect">
+            <a:avLst/>
+          </a:prstGeom>
+          <a:noFill/>
+          <a:ln/>
+        </p:spPr>
+        <p:txBody>
+          <a:bodyPr wrap="square" lIns="0" tIns="0" rIns="0" bIns="0" rtlCol="0" anchor="t"/>
+          <a:lstStyle/>
+          <a:p>
+            <a:pPr indent="0" marL="0">
+              <a:lnSpc>
+                <a:spcPct val="125000"/>
+              </a:lnSpc>
+              <a:buNone/>
+            </a:pPr>
+            <a:r>
+              <a:rPr lang="en-US" sz="1100" b="1" dirty="0">
+                <a:solidFill>
+                  <a:srgbClr val="222222"/>
+                </a:solidFill>
+                <a:latin typeface="Calibri" pitchFamily="34" charset="0"/>
+                <a:ea typeface="Calibri" pitchFamily="34" charset="-122"/>
+                <a:cs typeface="Calibri" pitchFamily="34" charset="-120"/>
+              </a:rPr>
+              <a:t>総合アンケートの集計</a:t>
+            </a:r>
+            <a:pPr indent="0" marL="0">
+              <a:lnSpc>
+                <a:spcPct val="125000"/>
+              </a:lnSpc>
+              <a:buNone/>
+            </a:pPr>
+            <a:r>
+              <a:rPr lang="en-US" sz="1100" dirty="0">
+                <a:solidFill>
+                  <a:srgbClr val="222222"/>
+                </a:solidFill>
+                <a:latin typeface="Calibri" pitchFamily="34" charset="0"/>
+                <a:ea typeface="Calibri" pitchFamily="34" charset="-122"/>
+                <a:cs typeface="Calibri" pitchFamily="34" charset="-120"/>
+              </a:rPr>
+              <a:t>は、ダッシュボードの「総合アンケートの集計」、または「総合アンケートと案内メール」画面の</a:t>
+            </a:r>
+            <a:pPr indent="0" marL="0">
+              <a:lnSpc>
+                <a:spcPct val="125000"/>
+              </a:lnSpc>
+              <a:buNone/>
+            </a:pPr>
+            <a:r>
+              <a:rPr lang="en-US" sz="1100" b="1" dirty="0">
+                <a:solidFill>
+                  <a:srgbClr val="222222"/>
+                </a:solidFill>
+                <a:latin typeface="Calibri" pitchFamily="34" charset="0"/>
+                <a:ea typeface="Calibri" pitchFamily="34" charset="-122"/>
+                <a:cs typeface="Calibri" pitchFamily="34" charset="-120"/>
+              </a:rPr>
+              <a:t>「集計を見る」</a:t>
+            </a:r>
+            <a:pPr indent="0" marL="0">
+              <a:lnSpc>
+                <a:spcPct val="125000"/>
+              </a:lnSpc>
+              <a:buNone/>
+            </a:pPr>
+            <a:r>
+              <a:rPr lang="en-US" sz="1100" dirty="0">
+                <a:solidFill>
+                  <a:srgbClr val="222222"/>
+                </a:solidFill>
+                <a:latin typeface="Calibri" pitchFamily="34" charset="0"/>
+                <a:ea typeface="Calibri" pitchFamily="34" charset="-122"/>
+                <a:cs typeface="Calibri" pitchFamily="34" charset="-120"/>
+              </a:rPr>
+              <a:t>から開きます。</a:t>
+            </a:r>
+            <a:endParaRPr lang="en-US" sz="1100" dirty="0"/>
+          </a:p>
+        </p:txBody>
+      </p:sp>
+      <p:sp>
+        <p:nvSpPr>
+          <p:cNvPr id="8" name="Text 6"/>
+          <p:cNvSpPr txBox="1"/>
+          <p:nvPr/>
+        </p:nvSpPr>
+        <p:spPr>
+          <a:xfrm>
+            <a:off x="713232" y="2482152"/>
+            <a:ext cx="6281928" cy="257429"/>
+          </a:xfrm>
+          <a:prstGeom prst="rect">
+            <a:avLst/>
+          </a:prstGeom>
+          <a:noFill/>
+          <a:ln/>
+        </p:spPr>
+        <p:txBody>
+          <a:bodyPr wrap="square" lIns="0" tIns="0" rIns="0" bIns="0" rtlCol="0" anchor="t"/>
+          <a:lstStyle/>
+          <a:p>
+            <a:pPr marL="342900" indent="-342900">
+              <a:lnSpc>
+                <a:spcPct val="125000"/>
+              </a:lnSpc>
+              <a:buSzPct val="100000"/>
+              <a:buChar char="●"/>
+            </a:pPr>
+            <a:r>
+              <a:rPr lang="en-US" sz="1100" b="1" dirty="0">
+                <a:solidFill>
+                  <a:srgbClr val="222222"/>
+                </a:solidFill>
+                <a:latin typeface="Calibri" pitchFamily="34" charset="0"/>
+                <a:ea typeface="Calibri" pitchFamily="34" charset="-122"/>
+                <a:cs typeface="Calibri" pitchFamily="34" charset="-120"/>
+              </a:rPr>
+              <a:t>回答数と回答率</a:t>
+            </a:r>
+            <a:pPr indent="0" marL="0">
+              <a:lnSpc>
+                <a:spcPct val="125000"/>
+              </a:lnSpc>
+              <a:buNone/>
+            </a:pPr>
+            <a:r>
+              <a:rPr lang="en-US" sz="1100" dirty="0">
+                <a:solidFill>
+                  <a:srgbClr val="222222"/>
+                </a:solidFill>
+                <a:latin typeface="Calibri" pitchFamily="34" charset="0"/>
+                <a:ea typeface="Calibri" pitchFamily="34" charset="-122"/>
+                <a:cs typeface="Calibri" pitchFamily="34" charset="-120"/>
+              </a:rPr>
+              <a:t>（回答した来場者のうち何%が答えたか）</a:t>
+            </a:r>
+            <a:endParaRPr lang="en-US" sz="1100" dirty="0"/>
+          </a:p>
+        </p:txBody>
+      </p:sp>
+      <p:sp>
+        <p:nvSpPr>
+          <p:cNvPr id="9" name="Text 7"/>
+          <p:cNvSpPr txBox="1"/>
+          <p:nvPr/>
+        </p:nvSpPr>
+        <p:spPr>
+          <a:xfrm>
+            <a:off x="713232" y="2757869"/>
+            <a:ext cx="6281928" cy="257429"/>
+          </a:xfrm>
+          <a:prstGeom prst="rect">
+            <a:avLst/>
+          </a:prstGeom>
+          <a:noFill/>
+          <a:ln/>
+        </p:spPr>
+        <p:txBody>
+          <a:bodyPr wrap="square" lIns="0" tIns="0" rIns="0" bIns="0" rtlCol="0" anchor="t"/>
+          <a:lstStyle/>
+          <a:p>
+            <a:pPr marL="342900" indent="-342900">
+              <a:lnSpc>
+                <a:spcPct val="125000"/>
+              </a:lnSpc>
+              <a:buSzPct val="100000"/>
+              <a:buChar char="●"/>
+            </a:pPr>
+            <a:r>
+              <a:rPr lang="en-US" sz="1100" b="1" dirty="0">
+                <a:solidFill>
+                  <a:srgbClr val="222222"/>
+                </a:solidFill>
+                <a:latin typeface="Calibri" pitchFamily="34" charset="0"/>
+                <a:ea typeface="Calibri" pitchFamily="34" charset="-122"/>
+                <a:cs typeface="Calibri" pitchFamily="34" charset="-120"/>
+              </a:rPr>
+              <a:t>設問ごとのグラフ</a:t>
+            </a:r>
+            <a:pPr indent="0" marL="0">
+              <a:lnSpc>
+                <a:spcPct val="125000"/>
+              </a:lnSpc>
+              <a:buNone/>
+            </a:pPr>
+            <a:r>
+              <a:rPr lang="en-US" sz="1100" dirty="0">
+                <a:solidFill>
+                  <a:srgbClr val="222222"/>
+                </a:solidFill>
+                <a:latin typeface="Calibri" pitchFamily="34" charset="0"/>
+                <a:ea typeface="Calibri" pitchFamily="34" charset="-122"/>
+                <a:cs typeface="Calibri" pitchFamily="34" charset="-120"/>
+              </a:rPr>
+              <a:t>（企業の集計と同じ見た目）と</a:t>
+            </a:r>
+            <a:pPr indent="0" marL="0">
+              <a:lnSpc>
+                <a:spcPct val="125000"/>
+              </a:lnSpc>
+              <a:buNone/>
+            </a:pPr>
+            <a:r>
+              <a:rPr lang="en-US" sz="1100" b="1" dirty="0">
+                <a:solidFill>
+                  <a:srgbClr val="222222"/>
+                </a:solidFill>
+                <a:latin typeface="Calibri" pitchFamily="34" charset="0"/>
+                <a:ea typeface="Calibri" pitchFamily="34" charset="-122"/>
+                <a:cs typeface="Calibri" pitchFamily="34" charset="-120"/>
+              </a:rPr>
+              <a:t>自由記述の一覧</a:t>
+            </a:r>
+            <a:endParaRPr lang="en-US" sz="1100" dirty="0"/>
+          </a:p>
+        </p:txBody>
+      </p:sp>
+      <p:sp>
+        <p:nvSpPr>
+          <p:cNvPr id="10" name="Text 8"/>
+          <p:cNvSpPr txBox="1"/>
+          <p:nvPr/>
+        </p:nvSpPr>
+        <p:spPr>
+          <a:xfrm>
+            <a:off x="713232" y="3033586"/>
+            <a:ext cx="6281928" cy="257429"/>
+          </a:xfrm>
+          <a:prstGeom prst="rect">
+            <a:avLst/>
+          </a:prstGeom>
+          <a:noFill/>
+          <a:ln/>
+        </p:spPr>
+        <p:txBody>
+          <a:bodyPr wrap="square" lIns="0" tIns="0" rIns="0" bIns="0" rtlCol="0" anchor="t"/>
+          <a:lstStyle/>
+          <a:p>
+            <a:pPr marL="342900" indent="-342900">
+              <a:lnSpc>
+                <a:spcPct val="125000"/>
+              </a:lnSpc>
+              <a:buSzPct val="100000"/>
+              <a:buChar char="●"/>
+            </a:pPr>
+            <a:r>
+              <a:rPr lang="en-US" sz="1100" b="1" dirty="0">
+                <a:solidFill>
+                  <a:srgbClr val="222222"/>
+                </a:solidFill>
+                <a:latin typeface="Calibri" pitchFamily="34" charset="0"/>
+                <a:ea typeface="Calibri" pitchFamily="34" charset="-122"/>
+                <a:cs typeface="Calibri" pitchFamily="34" charset="-120"/>
+              </a:rPr>
+              <a:t>周回企業数との関係</a:t>
+            </a:r>
+            <a:pPr indent="0" marL="0">
+              <a:lnSpc>
+                <a:spcPct val="125000"/>
+              </a:lnSpc>
+              <a:buNone/>
+            </a:pPr>
+            <a:r>
+              <a:rPr lang="en-US" sz="1100" dirty="0">
+                <a:solidFill>
+                  <a:srgbClr val="222222"/>
+                </a:solidFill>
+                <a:latin typeface="Calibri" pitchFamily="34" charset="0"/>
+                <a:ea typeface="Calibri" pitchFamily="34" charset="-122"/>
+                <a:cs typeface="Calibri" pitchFamily="34" charset="-120"/>
+              </a:rPr>
+              <a:t>：たくさん回った方ほど評価が高いか</a:t>
+            </a:r>
+            <a:endParaRPr lang="en-US" sz="1100" dirty="0"/>
+          </a:p>
+        </p:txBody>
+      </p:sp>
+      <p:sp>
+        <p:nvSpPr>
+          <p:cNvPr id="11" name="Text 9"/>
+          <p:cNvSpPr txBox="1"/>
+          <p:nvPr/>
+        </p:nvSpPr>
+        <p:spPr>
+          <a:xfrm>
+            <a:off x="713232" y="3309303"/>
+            <a:ext cx="6281928" cy="257429"/>
+          </a:xfrm>
+          <a:prstGeom prst="rect">
+            <a:avLst/>
+          </a:prstGeom>
+          <a:noFill/>
+          <a:ln/>
+        </p:spPr>
+        <p:txBody>
+          <a:bodyPr wrap="square" lIns="0" tIns="0" rIns="0" bIns="0" rtlCol="0" anchor="t"/>
+          <a:lstStyle/>
+          <a:p>
+            <a:pPr marL="342900" indent="-342900">
+              <a:lnSpc>
+                <a:spcPct val="125000"/>
+              </a:lnSpc>
+              <a:buSzPct val="100000"/>
+              <a:buChar char="●"/>
+            </a:pPr>
+            <a:r>
+              <a:rPr lang="en-US" sz="1100" b="1" dirty="0">
+                <a:solidFill>
+                  <a:srgbClr val="222222"/>
+                </a:solidFill>
+                <a:latin typeface="Calibri" pitchFamily="34" charset="0"/>
+                <a:ea typeface="Calibri" pitchFamily="34" charset="-122"/>
+                <a:cs typeface="Calibri" pitchFamily="34" charset="-120"/>
+              </a:rPr>
+              <a:t>来場人数との関係</a:t>
+            </a:r>
+            <a:pPr indent="0" marL="0">
+              <a:lnSpc>
+                <a:spcPct val="125000"/>
+              </a:lnSpc>
+              <a:buNone/>
+            </a:pPr>
+            <a:r>
+              <a:rPr lang="en-US" sz="1100" dirty="0">
+                <a:solidFill>
+                  <a:srgbClr val="222222"/>
+                </a:solidFill>
+                <a:latin typeface="Calibri" pitchFamily="34" charset="0"/>
+                <a:ea typeface="Calibri" pitchFamily="34" charset="-122"/>
+                <a:cs typeface="Calibri" pitchFamily="34" charset="-120"/>
+              </a:rPr>
+              <a:t>：1人で来た方とグループで来た方の違い</a:t>
+            </a:r>
+            <a:endParaRPr lang="en-US" sz="1100" dirty="0"/>
+          </a:p>
+        </p:txBody>
+      </p:sp>
+      <p:sp>
+        <p:nvSpPr>
+          <p:cNvPr id="12" name="Text 10"/>
+          <p:cNvSpPr txBox="1"/>
+          <p:nvPr/>
+        </p:nvSpPr>
+        <p:spPr>
+          <a:xfrm>
+            <a:off x="713232" y="3585020"/>
+            <a:ext cx="6281928" cy="459994"/>
+          </a:xfrm>
+          <a:prstGeom prst="rect">
+            <a:avLst/>
+          </a:prstGeom>
+          <a:noFill/>
+          <a:ln/>
+        </p:spPr>
+        <p:txBody>
+          <a:bodyPr wrap="square" lIns="0" tIns="0" rIns="0" bIns="0" rtlCol="0" anchor="t"/>
+          <a:lstStyle/>
+          <a:p>
+            <a:pPr marL="342900" indent="-342900">
+              <a:lnSpc>
+                <a:spcPct val="125000"/>
+              </a:lnSpc>
+              <a:buSzPct val="100000"/>
+              <a:buChar char="●"/>
+            </a:pPr>
+            <a:r>
+              <a:rPr lang="en-US" sz="1100" b="1" dirty="0">
+                <a:solidFill>
+                  <a:srgbClr val="222222"/>
+                </a:solidFill>
+                <a:latin typeface="Calibri" pitchFamily="34" charset="0"/>
+                <a:ea typeface="Calibri" pitchFamily="34" charset="-122"/>
+                <a:cs typeface="Calibri" pitchFamily="34" charset="-120"/>
+              </a:rPr>
+              <a:t>グループの構成</a:t>
+            </a:r>
+            <a:pPr indent="0" marL="0">
+              <a:lnSpc>
+                <a:spcPct val="125000"/>
+              </a:lnSpc>
+              <a:buNone/>
+            </a:pPr>
+            <a:r>
+              <a:rPr lang="en-US" sz="1100" dirty="0">
+                <a:solidFill>
+                  <a:srgbClr val="222222"/>
+                </a:solidFill>
+                <a:latin typeface="Calibri" pitchFamily="34" charset="0"/>
+                <a:ea typeface="Calibri" pitchFamily="34" charset="-122"/>
+                <a:cs typeface="Calibri" pitchFamily="34" charset="-120"/>
+              </a:rPr>
+              <a:t>：区分ごとの人数を聞いている場合（区分別の人数・よくあるグループの型・来場人数との照合）</a:t>
+            </a:r>
+            <a:endParaRPr lang="en-US" sz="1100" dirty="0"/>
+          </a:p>
+        </p:txBody>
+      </p:sp>
+      <p:sp>
+        <p:nvSpPr>
+          <p:cNvPr id="13" name="Shape 11"/>
+          <p:cNvSpPr/>
+          <p:nvPr/>
+        </p:nvSpPr>
+        <p:spPr>
+          <a:xfrm>
+            <a:off x="566928" y="4063302"/>
+            <a:ext cx="6428232" cy="624459"/>
+          </a:xfrm>
+          <a:prstGeom prst="roundRect">
+            <a:avLst>
+              <a:gd name="adj" fmla="val 8786"/>
+            </a:avLst>
+          </a:prstGeom>
+          <a:solidFill>
+            <a:srgbClr val="E8ECF8"/>
+          </a:solidFill>
+          <a:ln w="9525">
+            <a:solidFill>
+              <a:srgbClr val="1E2761"/>
+            </a:solidFill>
+            <a:prstDash val="solid"/>
+          </a:ln>
+        </p:spPr>
+      </p:sp>
+      <p:sp>
+        <p:nvSpPr>
+          <p:cNvPr id="14" name="Text 12"/>
+          <p:cNvSpPr txBox="1"/>
+          <p:nvPr/>
+        </p:nvSpPr>
+        <p:spPr>
+          <a:xfrm>
+            <a:off x="658368" y="4154742"/>
+            <a:ext cx="237744" cy="237744"/>
+          </a:xfrm>
+          <a:prstGeom prst="rect">
+            <a:avLst/>
+          </a:prstGeom>
+          <a:noFill/>
+          <a:ln/>
+        </p:spPr>
+        <p:txBody>
+          <a:bodyPr wrap="square" lIns="0" tIns="0" rIns="0" bIns="0" rtlCol="0" anchor="ctr"/>
+          <a:lstStyle/>
+          <a:p>
+            <a:pPr algn="ctr" indent="0" marL="0">
+              <a:buNone/>
+            </a:pPr>
+            <a:r>
+              <a:rPr lang="en-US" sz="1200" b="1" dirty="0">
+                <a:solidFill>
+                  <a:srgbClr val="1E2761"/>
+                </a:solidFill>
+                <a:latin typeface="Calibri" pitchFamily="34" charset="0"/>
+                <a:ea typeface="Calibri" pitchFamily="34" charset="-122"/>
+                <a:cs typeface="Calibri" pitchFamily="34" charset="-120"/>
+              </a:rPr>
+              <a:t>i</a:t>
+            </a:r>
+            <a:endParaRPr lang="en-US" sz="1200" dirty="0"/>
+          </a:p>
+        </p:txBody>
+      </p:sp>
+      <p:sp>
+        <p:nvSpPr>
+          <p:cNvPr id="15" name="Text 13"/>
+          <p:cNvSpPr txBox="1"/>
+          <p:nvPr/>
+        </p:nvSpPr>
+        <p:spPr>
+          <a:xfrm>
+            <a:off x="950976" y="4173030"/>
+            <a:ext cx="5925312" cy="441579"/>
+          </a:xfrm>
+          <a:prstGeom prst="rect">
+            <a:avLst/>
+          </a:prstGeom>
+          <a:noFill/>
+          <a:ln/>
+        </p:spPr>
+        <p:txBody>
+          <a:bodyPr wrap="square" lIns="0" tIns="0" rIns="0" bIns="0" rtlCol="0" anchor="t"/>
+          <a:lstStyle/>
+          <a:p>
+            <a:pPr indent="0" marL="0">
+              <a:lnSpc>
+                <a:spcPct val="120000"/>
+              </a:lnSpc>
+              <a:buNone/>
+            </a:pPr>
+            <a:r>
+              <a:rPr lang="en-US" sz="1050" dirty="0">
+                <a:solidFill>
+                  <a:srgbClr val="222222"/>
+                </a:solidFill>
+                <a:latin typeface="Calibri" pitchFamily="34" charset="0"/>
+                <a:ea typeface="Calibri" pitchFamily="34" charset="-122"/>
+                <a:cs typeface="Calibri" pitchFamily="34" charset="-120"/>
+              </a:rPr>
+              <a:t>関係の表は</a:t>
+            </a:r>
+            <a:pPr indent="0" marL="0">
+              <a:lnSpc>
+                <a:spcPct val="120000"/>
+              </a:lnSpc>
+              <a:buNone/>
+            </a:pPr>
+            <a:r>
+              <a:rPr lang="en-US" sz="1050" b="1" dirty="0">
+                <a:solidFill>
+                  <a:srgbClr val="222222"/>
+                </a:solidFill>
+                <a:latin typeface="Calibri" pitchFamily="34" charset="0"/>
+                <a:ea typeface="Calibri" pitchFamily="34" charset="-122"/>
+                <a:cs typeface="Calibri" pitchFamily="34" charset="-120"/>
+              </a:rPr>
+              <a:t>相関であって因果ではありません</a:t>
+            </a:r>
+            <a:pPr indent="0" marL="0">
+              <a:lnSpc>
+                <a:spcPct val="120000"/>
+              </a:lnSpc>
+              <a:buNone/>
+            </a:pPr>
+            <a:r>
+              <a:rPr lang="en-US" sz="1050" dirty="0">
+                <a:solidFill>
+                  <a:srgbClr val="222222"/>
+                </a:solidFill>
+                <a:latin typeface="Calibri" pitchFamily="34" charset="0"/>
+                <a:ea typeface="Calibri" pitchFamily="34" charset="-122"/>
+                <a:cs typeface="Calibri" pitchFamily="34" charset="-120"/>
+              </a:rPr>
+              <a:t>（もともと関心の高い方がたくさん回っている、とも読めます）。回答が少ないうちは数字が揺れるので、件数も一緒に見てください。</a:t>
+            </a:r>
+            <a:endParaRPr lang="en-US" sz="1050" dirty="0"/>
+          </a:p>
+        </p:txBody>
+      </p:sp>
       <p:pic>
         <p:nvPicPr>
-          <p:cNvPr id="4" name="Image 0" descr="C:\Users\sato\Desktop\enque\docs\images\o-stats.png">    </p:cNvPr>
+          <p:cNvPr id="16" name="Image 0" descr="C:\Users\sato\Desktop\enque\docs\images\o-overall-stats.png">    </p:cNvPr>
           <p:cNvPicPr>
             <a:picLocks noChangeAspect="1"/>
           </p:cNvPicPr>
@@ -25862,8 +26562,8 @@
         </p:blipFill>
         <p:spPr>
           <a:xfrm>
-            <a:off x="2140821" y="1481328"/>
-            <a:ext cx="3280447" cy="3474720"/>
+            <a:off x="1248911" y="4760913"/>
+            <a:ext cx="5064265" cy="3474720"/>
           </a:xfrm>
           <a:prstGeom prst="rect">
             <a:avLst/>
@@ -25872,13 +26572,13 @@
       </p:pic>
       <p:sp>
         <p:nvSpPr>
-          <p:cNvPr id="5" name="Text 2"/>
-          <p:cNvSpPr txBox="1"/>
-          <p:nvPr/>
-        </p:nvSpPr>
-        <p:spPr>
-          <a:xfrm>
-            <a:off x="566928" y="5010912"/>
+          <p:cNvPr id="17" name="Text 14"/>
+          <p:cNvSpPr txBox="1"/>
+          <p:nvPr/>
+        </p:nvSpPr>
+        <p:spPr>
+          <a:xfrm>
+            <a:off x="566928" y="8290497"/>
             <a:ext cx="6428232" cy="274320"/>
           </a:xfrm>
           <a:prstGeom prst="rect">
@@ -25903,7 +26603,7 @@
                 <a:ea typeface="Calibri" pitchFamily="34" charset="-122"/>
                 <a:cs typeface="Calibri" pitchFamily="34" charset="-120"/>
               </a:rPr>
-              <a:t>企業の集計画面。設問ごとのグラフが見えるところ。</a:t>
+              <a:t>「総合アンケートの集計」画面の上部（回答数・回答率のタイルが見えるもの）。</a:t>
             </a:r>
             <a:endParaRPr lang="en-US" sz="950" dirty="0"/>
           </a:p>
@@ -25911,7 +26611,7 @@
       </p:sp>
       <p:sp>
         <p:nvSpPr>
-          <p:cNvPr id="6" name="Text 3"/>
+          <p:cNvPr id="18" name="Text 15"/>
           <p:cNvSpPr txBox="1"/>
           <p:nvPr/>
         </p:nvSpPr>
@@ -26052,720 +26752,15 @@
                 <a:ea typeface="Calibri" pitchFamily="34" charset="-122"/>
                 <a:cs typeface="Calibri" pitchFamily="34" charset="-120"/>
               </a:rPr>
-              <a:t>終了後4：メールアドレスを削除する</a:t>
+              <a:t>終了後3：集計データを受け取る（つづき）</a:t>
             </a:r>
             <a:endParaRPr lang="en-US" sz="2200" dirty="0"/>
-          </a:p>
-        </p:txBody>
-      </p:sp>
-      <p:sp>
-        <p:nvSpPr>
-          <p:cNvPr id="4" name="Text 2"/>
-          <p:cNvSpPr txBox="1"/>
-          <p:nvPr/>
-        </p:nvSpPr>
-        <p:spPr>
-          <a:xfrm>
-            <a:off x="566928" y="1481328"/>
-            <a:ext cx="6428232" cy="257429"/>
-          </a:xfrm>
-          <a:prstGeom prst="rect">
-            <a:avLst/>
-          </a:prstGeom>
-          <a:noFill/>
-          <a:ln/>
-        </p:spPr>
-        <p:txBody>
-          <a:bodyPr wrap="square" lIns="0" tIns="0" rIns="0" bIns="0" rtlCol="0" anchor="t"/>
-          <a:lstStyle/>
-          <a:p>
-            <a:pPr indent="0" marL="0">
-              <a:lnSpc>
-                <a:spcPct val="125000"/>
-              </a:lnSpc>
-              <a:buNone/>
-            </a:pPr>
-            <a:r>
-              <a:rPr lang="en-US" sz="1100" dirty="0">
-                <a:solidFill>
-                  <a:srgbClr val="222222"/>
-                </a:solidFill>
-                <a:latin typeface="Calibri" pitchFamily="34" charset="0"/>
-                <a:ea typeface="Calibri" pitchFamily="34" charset="-122"/>
-                <a:cs typeface="Calibri" pitchFamily="34" charset="-120"/>
-              </a:rPr>
-              <a:t>案内の送付と集計が終わったら、預かったメールアドレスを削除します。</a:t>
-            </a:r>
-            <a:endParaRPr lang="en-US" sz="1100" dirty="0"/>
-          </a:p>
-        </p:txBody>
-      </p:sp>
-      <p:sp>
-        <p:nvSpPr>
-          <p:cNvPr id="5" name="Shape 3"/>
-          <p:cNvSpPr/>
-          <p:nvPr/>
-        </p:nvSpPr>
-        <p:spPr>
-          <a:xfrm>
-            <a:off x="566928" y="1793621"/>
-            <a:ext cx="274320" cy="274320"/>
-          </a:xfrm>
-          <a:prstGeom prst="ellipse">
-            <a:avLst/>
-          </a:prstGeom>
-          <a:solidFill>
-            <a:srgbClr val="1E2761"/>
-          </a:solidFill>
-          <a:ln/>
-        </p:spPr>
-      </p:sp>
-      <p:sp>
-        <p:nvSpPr>
-          <p:cNvPr id="6" name="Text 4"/>
-          <p:cNvSpPr txBox="1"/>
-          <p:nvPr/>
-        </p:nvSpPr>
-        <p:spPr>
-          <a:xfrm>
-            <a:off x="566928" y="1793621"/>
-            <a:ext cx="274320" cy="274320"/>
-          </a:xfrm>
-          <a:prstGeom prst="rect">
-            <a:avLst/>
-          </a:prstGeom>
-          <a:noFill/>
-          <a:ln/>
-        </p:spPr>
-        <p:txBody>
-          <a:bodyPr wrap="square" lIns="0" tIns="0" rIns="0" bIns="0" rtlCol="0" anchor="ctr"/>
-          <a:lstStyle/>
-          <a:p>
-            <a:pPr algn="ctr" indent="0" marL="0">
-              <a:buNone/>
-            </a:pPr>
-            <a:r>
-              <a:rPr lang="en-US" sz="1100" b="1" dirty="0">
-                <a:solidFill>
-                  <a:srgbClr val="FFFFFF"/>
-                </a:solidFill>
-                <a:latin typeface="Calibri" pitchFamily="34" charset="0"/>
-                <a:ea typeface="Calibri" pitchFamily="34" charset="-122"/>
-                <a:cs typeface="Calibri" pitchFamily="34" charset="-120"/>
-              </a:rPr>
-              <a:t>1</a:t>
-            </a:r>
-            <a:endParaRPr lang="en-US" sz="1100" dirty="0"/>
-          </a:p>
-        </p:txBody>
-      </p:sp>
-      <p:sp>
-        <p:nvSpPr>
-          <p:cNvPr id="7" name="Text 5"/>
-          <p:cNvSpPr txBox="1"/>
-          <p:nvPr/>
-        </p:nvSpPr>
-        <p:spPr>
-          <a:xfrm>
-            <a:off x="969264" y="1775333"/>
-            <a:ext cx="6025896" cy="365760"/>
-          </a:xfrm>
-          <a:prstGeom prst="rect">
-            <a:avLst/>
-          </a:prstGeom>
-          <a:noFill/>
-          <a:ln/>
-        </p:spPr>
-        <p:txBody>
-          <a:bodyPr wrap="square" lIns="0" tIns="0" rIns="0" bIns="0" rtlCol="0" anchor="t"/>
-          <a:lstStyle/>
-          <a:p>
-            <a:pPr indent="0" marL="0">
-              <a:lnSpc>
-                <a:spcPct val="125000"/>
-              </a:lnSpc>
-              <a:buNone/>
-            </a:pPr>
-            <a:r>
-              <a:rPr lang="en-US" sz="1150" dirty="0">
-                <a:solidFill>
-                  <a:srgbClr val="222222"/>
-                </a:solidFill>
-                <a:latin typeface="Calibri" pitchFamily="34" charset="0"/>
-                <a:ea typeface="Calibri" pitchFamily="34" charset="-122"/>
-                <a:cs typeface="Calibri" pitchFamily="34" charset="-120"/>
-              </a:rPr>
-              <a:t>「総合アンケート」の画面を開く</a:t>
-            </a:r>
-            <a:endParaRPr lang="en-US" sz="1150" dirty="0"/>
-          </a:p>
-        </p:txBody>
-      </p:sp>
-      <p:sp>
-        <p:nvSpPr>
-          <p:cNvPr id="8" name="Shape 6"/>
-          <p:cNvSpPr/>
-          <p:nvPr/>
-        </p:nvSpPr>
-        <p:spPr>
-          <a:xfrm>
-            <a:off x="566928" y="2250821"/>
-            <a:ext cx="274320" cy="274320"/>
-          </a:xfrm>
-          <a:prstGeom prst="ellipse">
-            <a:avLst/>
-          </a:prstGeom>
-          <a:solidFill>
-            <a:srgbClr val="1E2761"/>
-          </a:solidFill>
-          <a:ln/>
-        </p:spPr>
-      </p:sp>
-      <p:sp>
-        <p:nvSpPr>
-          <p:cNvPr id="9" name="Text 7"/>
-          <p:cNvSpPr txBox="1"/>
-          <p:nvPr/>
-        </p:nvSpPr>
-        <p:spPr>
-          <a:xfrm>
-            <a:off x="566928" y="2250821"/>
-            <a:ext cx="274320" cy="274320"/>
-          </a:xfrm>
-          <a:prstGeom prst="rect">
-            <a:avLst/>
-          </a:prstGeom>
-          <a:noFill/>
-          <a:ln/>
-        </p:spPr>
-        <p:txBody>
-          <a:bodyPr wrap="square" lIns="0" tIns="0" rIns="0" bIns="0" rtlCol="0" anchor="ctr"/>
-          <a:lstStyle/>
-          <a:p>
-            <a:pPr algn="ctr" indent="0" marL="0">
-              <a:buNone/>
-            </a:pPr>
-            <a:r>
-              <a:rPr lang="en-US" sz="1100" b="1" dirty="0">
-                <a:solidFill>
-                  <a:srgbClr val="FFFFFF"/>
-                </a:solidFill>
-                <a:latin typeface="Calibri" pitchFamily="34" charset="0"/>
-                <a:ea typeface="Calibri" pitchFamily="34" charset="-122"/>
-                <a:cs typeface="Calibri" pitchFamily="34" charset="-120"/>
-              </a:rPr>
-              <a:t>2</a:t>
-            </a:r>
-            <a:endParaRPr lang="en-US" sz="1100" dirty="0"/>
-          </a:p>
-        </p:txBody>
-      </p:sp>
-      <p:sp>
-        <p:nvSpPr>
-          <p:cNvPr id="10" name="Text 8"/>
-          <p:cNvSpPr txBox="1"/>
-          <p:nvPr/>
-        </p:nvSpPr>
-        <p:spPr>
-          <a:xfrm>
-            <a:off x="969264" y="2232533"/>
-            <a:ext cx="6025896" cy="365760"/>
-          </a:xfrm>
-          <a:prstGeom prst="rect">
-            <a:avLst/>
-          </a:prstGeom>
-          <a:noFill/>
-          <a:ln/>
-        </p:spPr>
-        <p:txBody>
-          <a:bodyPr wrap="square" lIns="0" tIns="0" rIns="0" bIns="0" rtlCol="0" anchor="t"/>
-          <a:lstStyle/>
-          <a:p>
-            <a:pPr indent="0" marL="0">
-              <a:lnSpc>
-                <a:spcPct val="125000"/>
-              </a:lnSpc>
-              <a:buNone/>
-            </a:pPr>
-            <a:r>
-              <a:rPr lang="en-US" sz="1150" dirty="0">
-                <a:solidFill>
-                  <a:srgbClr val="222222"/>
-                </a:solidFill>
-                <a:latin typeface="Calibri" pitchFamily="34" charset="0"/>
-                <a:ea typeface="Calibri" pitchFamily="34" charset="-122"/>
-                <a:cs typeface="Calibri" pitchFamily="34" charset="-120"/>
-              </a:rPr>
-              <a:t>一番下の</a:t>
-            </a:r>
-            <a:pPr indent="0" marL="0">
-              <a:lnSpc>
-                <a:spcPct val="125000"/>
-              </a:lnSpc>
-              <a:buNone/>
-            </a:pPr>
-            <a:r>
-              <a:rPr lang="en-US" sz="1150" b="1" dirty="0">
-                <a:solidFill>
-                  <a:srgbClr val="222222"/>
-                </a:solidFill>
-                <a:latin typeface="Calibri" pitchFamily="34" charset="0"/>
-                <a:ea typeface="Calibri" pitchFamily="34" charset="-122"/>
-                <a:cs typeface="Calibri" pitchFamily="34" charset="-120"/>
-              </a:rPr>
-              <a:t>「メールアドレスを削除する」</a:t>
-            </a:r>
-            <a:pPr indent="0" marL="0">
-              <a:lnSpc>
-                <a:spcPct val="125000"/>
-              </a:lnSpc>
-              <a:buNone/>
-            </a:pPr>
-            <a:r>
-              <a:rPr lang="en-US" sz="1150" dirty="0">
-                <a:solidFill>
-                  <a:srgbClr val="222222"/>
-                </a:solidFill>
-                <a:latin typeface="Calibri" pitchFamily="34" charset="0"/>
-                <a:ea typeface="Calibri" pitchFamily="34" charset="-122"/>
-                <a:cs typeface="Calibri" pitchFamily="34" charset="-120"/>
-              </a:rPr>
-              <a:t>を押す</a:t>
-            </a:r>
-            <a:endParaRPr lang="en-US" sz="1150" dirty="0"/>
-          </a:p>
-        </p:txBody>
-      </p:sp>
-      <p:sp>
-        <p:nvSpPr>
-          <p:cNvPr id="11" name="Shape 9"/>
-          <p:cNvSpPr/>
-          <p:nvPr/>
-        </p:nvSpPr>
-        <p:spPr>
-          <a:xfrm>
-            <a:off x="566928" y="2708021"/>
-            <a:ext cx="274320" cy="274320"/>
-          </a:xfrm>
-          <a:prstGeom prst="ellipse">
-            <a:avLst/>
-          </a:prstGeom>
-          <a:solidFill>
-            <a:srgbClr val="1E2761"/>
-          </a:solidFill>
-          <a:ln/>
-        </p:spPr>
-      </p:sp>
-      <p:sp>
-        <p:nvSpPr>
-          <p:cNvPr id="12" name="Text 10"/>
-          <p:cNvSpPr txBox="1"/>
-          <p:nvPr/>
-        </p:nvSpPr>
-        <p:spPr>
-          <a:xfrm>
-            <a:off x="566928" y="2708021"/>
-            <a:ext cx="274320" cy="274320"/>
-          </a:xfrm>
-          <a:prstGeom prst="rect">
-            <a:avLst/>
-          </a:prstGeom>
-          <a:noFill/>
-          <a:ln/>
-        </p:spPr>
-        <p:txBody>
-          <a:bodyPr wrap="square" lIns="0" tIns="0" rIns="0" bIns="0" rtlCol="0" anchor="ctr"/>
-          <a:lstStyle/>
-          <a:p>
-            <a:pPr algn="ctr" indent="0" marL="0">
-              <a:buNone/>
-            </a:pPr>
-            <a:r>
-              <a:rPr lang="en-US" sz="1100" b="1" dirty="0">
-                <a:solidFill>
-                  <a:srgbClr val="FFFFFF"/>
-                </a:solidFill>
-                <a:latin typeface="Calibri" pitchFamily="34" charset="0"/>
-                <a:ea typeface="Calibri" pitchFamily="34" charset="-122"/>
-                <a:cs typeface="Calibri" pitchFamily="34" charset="-120"/>
-              </a:rPr>
-              <a:t>3</a:t>
-            </a:r>
-            <a:endParaRPr lang="en-US" sz="1100" dirty="0"/>
-          </a:p>
-        </p:txBody>
-      </p:sp>
-      <p:sp>
-        <p:nvSpPr>
-          <p:cNvPr id="13" name="Text 11"/>
-          <p:cNvSpPr txBox="1"/>
-          <p:nvPr/>
-        </p:nvSpPr>
-        <p:spPr>
-          <a:xfrm>
-            <a:off x="969264" y="2689733"/>
-            <a:ext cx="6025896" cy="365760"/>
-          </a:xfrm>
-          <a:prstGeom prst="rect">
-            <a:avLst/>
-          </a:prstGeom>
-          <a:noFill/>
-          <a:ln/>
-        </p:spPr>
-        <p:txBody>
-          <a:bodyPr wrap="square" lIns="0" tIns="0" rIns="0" bIns="0" rtlCol="0" anchor="t"/>
-          <a:lstStyle/>
-          <a:p>
-            <a:pPr indent="0" marL="0">
-              <a:lnSpc>
-                <a:spcPct val="125000"/>
-              </a:lnSpc>
-              <a:buNone/>
-            </a:pPr>
-            <a:r>
-              <a:rPr lang="en-US" sz="1150" dirty="0">
-                <a:solidFill>
-                  <a:srgbClr val="222222"/>
-                </a:solidFill>
-                <a:latin typeface="Calibri" pitchFamily="34" charset="0"/>
-                <a:ea typeface="Calibri" pitchFamily="34" charset="-122"/>
-                <a:cs typeface="Calibri" pitchFamily="34" charset="-120"/>
-              </a:rPr>
-              <a:t>確認メッセージで「OK」を押す</a:t>
-            </a:r>
-            <a:endParaRPr lang="en-US" sz="1150" dirty="0"/>
-          </a:p>
-        </p:txBody>
-      </p:sp>
-      <p:sp>
-        <p:nvSpPr>
-          <p:cNvPr id="14" name="Text 12"/>
-          <p:cNvSpPr txBox="1"/>
-          <p:nvPr/>
-        </p:nvSpPr>
-        <p:spPr>
-          <a:xfrm>
-            <a:off x="566928" y="3146933"/>
-            <a:ext cx="6428232" cy="257429"/>
-          </a:xfrm>
-          <a:prstGeom prst="rect">
-            <a:avLst/>
-          </a:prstGeom>
-          <a:noFill/>
-          <a:ln/>
-        </p:spPr>
-        <p:txBody>
-          <a:bodyPr wrap="square" lIns="0" tIns="0" rIns="0" bIns="0" rtlCol="0" anchor="t"/>
-          <a:lstStyle/>
-          <a:p>
-            <a:pPr indent="0" marL="0">
-              <a:lnSpc>
-                <a:spcPct val="125000"/>
-              </a:lnSpc>
-              <a:buNone/>
-            </a:pPr>
-            <a:r>
-              <a:rPr lang="en-US" sz="1100" dirty="0">
-                <a:solidFill>
-                  <a:srgbClr val="222222"/>
-                </a:solidFill>
-                <a:latin typeface="Calibri" pitchFamily="34" charset="0"/>
-                <a:ea typeface="Calibri" pitchFamily="34" charset="-122"/>
-                <a:cs typeface="Calibri" pitchFamily="34" charset="-120"/>
-              </a:rPr>
-              <a:t>削除しても、</a:t>
-            </a:r>
-            <a:pPr indent="0" marL="0">
-              <a:lnSpc>
-                <a:spcPct val="125000"/>
-              </a:lnSpc>
-              <a:buNone/>
-            </a:pPr>
-            <a:r>
-              <a:rPr lang="en-US" sz="1100" b="1" dirty="0">
-                <a:solidFill>
-                  <a:srgbClr val="222222"/>
-                </a:solidFill>
-                <a:latin typeface="Calibri" pitchFamily="34" charset="0"/>
-                <a:ea typeface="Calibri" pitchFamily="34" charset="-122"/>
-                <a:cs typeface="Calibri" pitchFamily="34" charset="-120"/>
-              </a:rPr>
-              <a:t>回答データ（個人情報を含まないもの）は残ります</a:t>
-            </a:r>
-            <a:pPr indent="0" marL="0">
-              <a:lnSpc>
-                <a:spcPct val="125000"/>
-              </a:lnSpc>
-              <a:buNone/>
-            </a:pPr>
-            <a:r>
-              <a:rPr lang="en-US" sz="1100" dirty="0">
-                <a:solidFill>
-                  <a:srgbClr val="222222"/>
-                </a:solidFill>
-                <a:latin typeface="Calibri" pitchFamily="34" charset="0"/>
-                <a:ea typeface="Calibri" pitchFamily="34" charset="-122"/>
-                <a:cs typeface="Calibri" pitchFamily="34" charset="-120"/>
-              </a:rPr>
-              <a:t>。</a:t>
-            </a:r>
-            <a:endParaRPr lang="en-US" sz="1100" dirty="0"/>
-          </a:p>
-        </p:txBody>
-      </p:sp>
-      <p:sp>
-        <p:nvSpPr>
-          <p:cNvPr id="15" name="Shape 13"/>
-          <p:cNvSpPr/>
-          <p:nvPr/>
-        </p:nvSpPr>
-        <p:spPr>
-          <a:xfrm>
-            <a:off x="566928" y="3440938"/>
-            <a:ext cx="6428232" cy="624459"/>
-          </a:xfrm>
-          <a:prstGeom prst="roundRect">
-            <a:avLst>
-              <a:gd name="adj" fmla="val 8786"/>
-            </a:avLst>
-          </a:prstGeom>
-          <a:solidFill>
-            <a:srgbClr val="FDF0E6"/>
-          </a:solidFill>
-          <a:ln w="9525">
-            <a:solidFill>
-              <a:srgbClr val="E08A3C"/>
-            </a:solidFill>
-            <a:prstDash val="solid"/>
-          </a:ln>
-        </p:spPr>
-      </p:sp>
-      <p:sp>
-        <p:nvSpPr>
-          <p:cNvPr id="16" name="Text 14"/>
-          <p:cNvSpPr txBox="1"/>
-          <p:nvPr/>
-        </p:nvSpPr>
-        <p:spPr>
-          <a:xfrm>
-            <a:off x="658368" y="3532378"/>
-            <a:ext cx="237744" cy="237744"/>
-          </a:xfrm>
-          <a:prstGeom prst="rect">
-            <a:avLst/>
-          </a:prstGeom>
-          <a:noFill/>
-          <a:ln/>
-        </p:spPr>
-        <p:txBody>
-          <a:bodyPr wrap="square" lIns="0" tIns="0" rIns="0" bIns="0" rtlCol="0" anchor="ctr"/>
-          <a:lstStyle/>
-          <a:p>
-            <a:pPr algn="ctr" indent="0" marL="0">
-              <a:buNone/>
-            </a:pPr>
-            <a:r>
-              <a:rPr lang="en-US" sz="1200" b="1" dirty="0">
-                <a:solidFill>
-                  <a:srgbClr val="C25A17"/>
-                </a:solidFill>
-                <a:latin typeface="Calibri" pitchFamily="34" charset="0"/>
-                <a:ea typeface="Calibri" pitchFamily="34" charset="-122"/>
-                <a:cs typeface="Calibri" pitchFamily="34" charset="-120"/>
-              </a:rPr>
-              <a:t>！</a:t>
-            </a:r>
-            <a:endParaRPr lang="en-US" sz="1200" dirty="0"/>
-          </a:p>
-        </p:txBody>
-      </p:sp>
-      <p:sp>
-        <p:nvSpPr>
-          <p:cNvPr id="17" name="Text 15"/>
-          <p:cNvSpPr txBox="1"/>
-          <p:nvPr/>
-        </p:nvSpPr>
-        <p:spPr>
-          <a:xfrm>
-            <a:off x="950976" y="3550666"/>
-            <a:ext cx="5925312" cy="441579"/>
-          </a:xfrm>
-          <a:prstGeom prst="rect">
-            <a:avLst/>
-          </a:prstGeom>
-          <a:noFill/>
-          <a:ln/>
-        </p:spPr>
-        <p:txBody>
-          <a:bodyPr wrap="square" lIns="0" tIns="0" rIns="0" bIns="0" rtlCol="0" anchor="t"/>
-          <a:lstStyle/>
-          <a:p>
-            <a:pPr indent="0" marL="0">
-              <a:lnSpc>
-                <a:spcPct val="120000"/>
-              </a:lnSpc>
-              <a:buNone/>
-            </a:pPr>
-            <a:r>
-              <a:rPr lang="en-US" sz="1050" dirty="0">
-                <a:solidFill>
-                  <a:srgbClr val="222222"/>
-                </a:solidFill>
-                <a:latin typeface="Calibri" pitchFamily="34" charset="0"/>
-                <a:ea typeface="Calibri" pitchFamily="34" charset="-122"/>
-                <a:cs typeface="Calibri" pitchFamily="34" charset="-120"/>
-              </a:rPr>
-              <a:t>削除すると、未送信ぶんの案内メールは送れなくなります。</a:t>
-            </a:r>
-            <a:pPr indent="0" marL="0">
-              <a:lnSpc>
-                <a:spcPct val="120000"/>
-              </a:lnSpc>
-              <a:buNone/>
-            </a:pPr>
-            <a:r>
-              <a:rPr lang="en-US" sz="1050" b="1" dirty="0">
-                <a:solidFill>
-                  <a:srgbClr val="222222"/>
-                </a:solidFill>
-                <a:latin typeface="Calibri" pitchFamily="34" charset="0"/>
-                <a:ea typeface="Calibri" pitchFamily="34" charset="-122"/>
-                <a:cs typeface="Calibri" pitchFamily="34" charset="-120"/>
-              </a:rPr>
-              <a:t>送信と集計が完全に終わってから</a:t>
-            </a:r>
-            <a:pPr indent="0" marL="0">
-              <a:lnSpc>
-                <a:spcPct val="120000"/>
-              </a:lnSpc>
-              <a:buNone/>
-            </a:pPr>
-            <a:r>
-              <a:rPr lang="en-US" sz="1050" dirty="0">
-                <a:solidFill>
-                  <a:srgbClr val="222222"/>
-                </a:solidFill>
-                <a:latin typeface="Calibri" pitchFamily="34" charset="0"/>
-                <a:ea typeface="Calibri" pitchFamily="34" charset="-122"/>
-                <a:cs typeface="Calibri" pitchFamily="34" charset="-120"/>
-              </a:rPr>
-              <a:t>実行してください。</a:t>
-            </a:r>
-            <a:endParaRPr lang="en-US" sz="1050" dirty="0"/>
-          </a:p>
-        </p:txBody>
-      </p:sp>
-      <p:sp>
-        <p:nvSpPr>
-          <p:cNvPr id="18" name="Shape 16"/>
-          <p:cNvSpPr/>
-          <p:nvPr/>
-        </p:nvSpPr>
-        <p:spPr>
-          <a:xfrm>
-            <a:off x="566928" y="4138549"/>
-            <a:ext cx="6428232" cy="624459"/>
-          </a:xfrm>
-          <a:prstGeom prst="roundRect">
-            <a:avLst>
-              <a:gd name="adj" fmla="val 8786"/>
-            </a:avLst>
-          </a:prstGeom>
-          <a:solidFill>
-            <a:srgbClr val="E8ECF8"/>
-          </a:solidFill>
-          <a:ln w="9525">
-            <a:solidFill>
-              <a:srgbClr val="1E2761"/>
-            </a:solidFill>
-            <a:prstDash val="solid"/>
-          </a:ln>
-        </p:spPr>
-      </p:sp>
-      <p:sp>
-        <p:nvSpPr>
-          <p:cNvPr id="19" name="Text 17"/>
-          <p:cNvSpPr txBox="1"/>
-          <p:nvPr/>
-        </p:nvSpPr>
-        <p:spPr>
-          <a:xfrm>
-            <a:off x="658368" y="4229989"/>
-            <a:ext cx="237744" cy="237744"/>
-          </a:xfrm>
-          <a:prstGeom prst="rect">
-            <a:avLst/>
-          </a:prstGeom>
-          <a:noFill/>
-          <a:ln/>
-        </p:spPr>
-        <p:txBody>
-          <a:bodyPr wrap="square" lIns="0" tIns="0" rIns="0" bIns="0" rtlCol="0" anchor="ctr"/>
-          <a:lstStyle/>
-          <a:p>
-            <a:pPr algn="ctr" indent="0" marL="0">
-              <a:buNone/>
-            </a:pPr>
-            <a:r>
-              <a:rPr lang="en-US" sz="1200" b="1" dirty="0">
-                <a:solidFill>
-                  <a:srgbClr val="1E2761"/>
-                </a:solidFill>
-                <a:latin typeface="Calibri" pitchFamily="34" charset="0"/>
-                <a:ea typeface="Calibri" pitchFamily="34" charset="-122"/>
-                <a:cs typeface="Calibri" pitchFamily="34" charset="-120"/>
-              </a:rPr>
-              <a:t>i</a:t>
-            </a:r>
-            <a:endParaRPr lang="en-US" sz="1200" dirty="0"/>
-          </a:p>
-        </p:txBody>
-      </p:sp>
-      <p:sp>
-        <p:nvSpPr>
-          <p:cNvPr id="20" name="Text 18"/>
-          <p:cNvSpPr txBox="1"/>
-          <p:nvPr/>
-        </p:nvSpPr>
-        <p:spPr>
-          <a:xfrm>
-            <a:off x="950976" y="4248277"/>
-            <a:ext cx="5925312" cy="441579"/>
-          </a:xfrm>
-          <a:prstGeom prst="rect">
-            <a:avLst/>
-          </a:prstGeom>
-          <a:noFill/>
-          <a:ln/>
-        </p:spPr>
-        <p:txBody>
-          <a:bodyPr wrap="square" lIns="0" tIns="0" rIns="0" bIns="0" rtlCol="0" anchor="t"/>
-          <a:lstStyle/>
-          <a:p>
-            <a:pPr indent="0" marL="0">
-              <a:lnSpc>
-                <a:spcPct val="120000"/>
-              </a:lnSpc>
-              <a:buNone/>
-            </a:pPr>
-            <a:r>
-              <a:rPr lang="en-US" sz="1050" dirty="0">
-                <a:solidFill>
-                  <a:srgbClr val="222222"/>
-                </a:solidFill>
-                <a:latin typeface="Calibri" pitchFamily="34" charset="0"/>
-                <a:ea typeface="Calibri" pitchFamily="34" charset="-122"/>
-                <a:cs typeface="Calibri" pitchFamily="34" charset="-120"/>
-              </a:rPr>
-              <a:t>「氏名・住所は収集せず、メールアドレスも送付・集計後に削除する」という運用方針に沿った操作です。来場者にもその旨を案内しています。</a:t>
-            </a:r>
-            <a:endParaRPr lang="en-US" sz="1050" dirty="0"/>
           </a:p>
         </p:txBody>
       </p:sp>
       <p:pic>
         <p:nvPicPr>
-          <p:cNvPr id="21" name="Image 0" descr="C:\Users\sato\Desktop\enque\docs\images\o-purge.png">    </p:cNvPr>
+          <p:cNvPr id="4" name="Image 0" descr="C:\Users\sato\Desktop\enque\docs\images\o-overall-cross.png">    </p:cNvPr>
           <p:cNvPicPr>
             <a:picLocks noChangeAspect="1"/>
           </p:cNvPicPr>
@@ -26779,8 +26774,8 @@
         </p:blipFill>
         <p:spPr>
           <a:xfrm>
-            <a:off x="936779" y="4836160"/>
-            <a:ext cx="5688531" cy="3474720"/>
+            <a:off x="1075432" y="1481328"/>
+            <a:ext cx="5411224" cy="3474720"/>
           </a:xfrm>
           <a:prstGeom prst="rect">
             <a:avLst/>
@@ -26789,13 +26784,13 @@
       </p:pic>
       <p:sp>
         <p:nvSpPr>
-          <p:cNvPr id="22" name="Text 19"/>
-          <p:cNvSpPr txBox="1"/>
-          <p:nvPr/>
-        </p:nvSpPr>
-        <p:spPr>
-          <a:xfrm>
-            <a:off x="566928" y="8365744"/>
+          <p:cNvPr id="5" name="Text 2"/>
+          <p:cNvSpPr txBox="1"/>
+          <p:nvPr/>
+        </p:nvSpPr>
+        <p:spPr>
+          <a:xfrm>
+            <a:off x="566928" y="5010912"/>
             <a:ext cx="6428232" cy="274320"/>
           </a:xfrm>
           <a:prstGeom prst="rect">
@@ -26820,15 +26815,78 @@
                 <a:ea typeface="Calibri" pitchFamily="34" charset="-122"/>
                 <a:cs typeface="Calibri" pitchFamily="34" charset="-120"/>
               </a:rPr>
-              <a:t>「メールアドレスを削除する」ボタンの周辺（説明文が見えるもの）。</a:t>
+              <a:t>「総合アンケートの集計」画面の「周回企業数との関係」「来場人数との関係」の表。</a:t>
             </a:r>
             <a:endParaRPr lang="en-US" sz="950" dirty="0"/>
           </a:p>
         </p:txBody>
       </p:sp>
-      <p:sp>
-        <p:nvSpPr>
-          <p:cNvPr id="23" name="Text 20"/>
+      <p:pic>
+        <p:nvPicPr>
+          <p:cNvPr id="6" name="Image 1" descr="C:\Users\sato\Desktop\enque\docs\images\o-stats.png">    </p:cNvPr>
+          <p:cNvPicPr>
+            <a:picLocks noChangeAspect="1"/>
+          </p:cNvPicPr>
+          <p:nvPr/>
+        </p:nvPicPr>
+        <p:blipFill>
+          <a:blip r:embed="rId2"/>
+          <a:stretch>
+            <a:fillRect/>
+          </a:stretch>
+        </p:blipFill>
+        <p:spPr>
+          <a:xfrm>
+            <a:off x="2267736" y="5340096"/>
+            <a:ext cx="3026617" cy="3474720"/>
+          </a:xfrm>
+          <a:prstGeom prst="rect">
+            <a:avLst/>
+          </a:prstGeom>
+        </p:spPr>
+      </p:pic>
+      <p:sp>
+        <p:nvSpPr>
+          <p:cNvPr id="7" name="Text 3"/>
+          <p:cNvSpPr txBox="1"/>
+          <p:nvPr/>
+        </p:nvSpPr>
+        <p:spPr>
+          <a:xfrm>
+            <a:off x="566928" y="8869680"/>
+            <a:ext cx="6428232" cy="274320"/>
+          </a:xfrm>
+          <a:prstGeom prst="rect">
+            <a:avLst/>
+          </a:prstGeom>
+          <a:noFill/>
+          <a:ln/>
+        </p:spPr>
+        <p:txBody>
+          <a:bodyPr wrap="square" lIns="0" tIns="0" rIns="0" bIns="0" rtlCol="0" anchor="ctr"/>
+          <a:lstStyle/>
+          <a:p>
+            <a:pPr algn="ctr" indent="0" marL="0">
+              <a:buNone/>
+            </a:pPr>
+            <a:r>
+              <a:rPr lang="en-US" sz="950" dirty="0">
+                <a:solidFill>
+                  <a:srgbClr val="6B6B6B"/>
+                </a:solidFill>
+                <a:latin typeface="Calibri" pitchFamily="34" charset="0"/>
+                <a:ea typeface="Calibri" pitchFamily="34" charset="-122"/>
+                <a:cs typeface="Calibri" pitchFamily="34" charset="-120"/>
+              </a:rPr>
+              <a:t>企業の集計画面。設問ごとのグラフが見えるところ。</a:t>
+            </a:r>
+            <a:endParaRPr lang="en-US" sz="950" dirty="0"/>
+          </a:p>
+        </p:txBody>
+      </p:sp>
+      <p:sp>
+        <p:nvSpPr>
+          <p:cNvPr id="8" name="Text 4"/>
           <p:cNvSpPr txBox="1"/>
           <p:nvPr/>
         </p:nvSpPr>
@@ -26969,7 +27027,7 @@
                 <a:ea typeface="Calibri" pitchFamily="34" charset="-122"/>
                 <a:cs typeface="Calibri" pitchFamily="34" charset="-120"/>
               </a:rPr>
-              <a:t>次のイベントに向けて（データの整理）</a:t>
+              <a:t>終了後4：メールアドレスを削除する</a:t>
             </a:r>
             <a:endParaRPr lang="en-US" sz="2200" dirty="0"/>
           </a:p>
@@ -26984,7 +27042,7 @@
         <p:spPr>
           <a:xfrm>
             <a:off x="566928" y="1481328"/>
-            <a:ext cx="6428232" cy="459994"/>
+            <a:ext cx="6428232" cy="257429"/>
           </a:xfrm>
           <a:prstGeom prst="rect">
             <a:avLst/>
@@ -27011,7 +27069,7 @@
                 <a:ea typeface="Calibri" pitchFamily="34" charset="-122"/>
                 <a:cs typeface="Calibri" pitchFamily="34" charset="-120"/>
               </a:rPr>
-              <a:t>サーバーで次のコマンドを実行します（事務局のPCではなく、システムが動いているサーバーでの作業です）。</a:t>
+              <a:t>案内の送付と集計が終わったら、預かったメールアドレスを削除します。</a:t>
             </a:r>
             <a:endParaRPr lang="en-US" sz="1100" dirty="0"/>
           </a:p>
@@ -27019,14 +27077,73 @@
       </p:sp>
       <p:sp>
         <p:nvSpPr>
-          <p:cNvPr id="5" name="Text 3"/>
-          <p:cNvSpPr txBox="1"/>
-          <p:nvPr/>
-        </p:nvSpPr>
-        <p:spPr>
-          <a:xfrm>
-            <a:off x="566928" y="2087626"/>
-            <a:ext cx="6428232" cy="257810"/>
+          <p:cNvPr id="5" name="Shape 3"/>
+          <p:cNvSpPr/>
+          <p:nvPr/>
+        </p:nvSpPr>
+        <p:spPr>
+          <a:xfrm>
+            <a:off x="566928" y="1793621"/>
+            <a:ext cx="274320" cy="274320"/>
+          </a:xfrm>
+          <a:prstGeom prst="ellipse">
+            <a:avLst/>
+          </a:prstGeom>
+          <a:solidFill>
+            <a:srgbClr val="1E2761"/>
+          </a:solidFill>
+          <a:ln/>
+        </p:spPr>
+      </p:sp>
+      <p:sp>
+        <p:nvSpPr>
+          <p:cNvPr id="6" name="Text 4"/>
+          <p:cNvSpPr txBox="1"/>
+          <p:nvPr/>
+        </p:nvSpPr>
+        <p:spPr>
+          <a:xfrm>
+            <a:off x="566928" y="1793621"/>
+            <a:ext cx="274320" cy="274320"/>
+          </a:xfrm>
+          <a:prstGeom prst="rect">
+            <a:avLst/>
+          </a:prstGeom>
+          <a:noFill/>
+          <a:ln/>
+        </p:spPr>
+        <p:txBody>
+          <a:bodyPr wrap="square" lIns="0" tIns="0" rIns="0" bIns="0" rtlCol="0" anchor="ctr"/>
+          <a:lstStyle/>
+          <a:p>
+            <a:pPr algn="ctr" indent="0" marL="0">
+              <a:buNone/>
+            </a:pPr>
+            <a:r>
+              <a:rPr lang="en-US" sz="1100" b="1" dirty="0">
+                <a:solidFill>
+                  <a:srgbClr val="FFFFFF"/>
+                </a:solidFill>
+                <a:latin typeface="Calibri" pitchFamily="34" charset="0"/>
+                <a:ea typeface="Calibri" pitchFamily="34" charset="-122"/>
+                <a:cs typeface="Calibri" pitchFamily="34" charset="-120"/>
+              </a:rPr>
+              <a:t>1</a:t>
+            </a:r>
+            <a:endParaRPr lang="en-US" sz="1100" dirty="0"/>
+          </a:p>
+        </p:txBody>
+      </p:sp>
+      <p:sp>
+        <p:nvSpPr>
+          <p:cNvPr id="7" name="Text 5"/>
+          <p:cNvSpPr txBox="1"/>
+          <p:nvPr/>
+        </p:nvSpPr>
+        <p:spPr>
+          <a:xfrm>
+            <a:off x="969264" y="1775333"/>
+            <a:ext cx="6025896" cy="365760"/>
           </a:xfrm>
           <a:prstGeom prst="rect">
             <a:avLst/>
@@ -27039,32 +27156,271 @@
           <a:lstStyle/>
           <a:p>
             <a:pPr indent="0" marL="0">
-              <a:buNone/>
-            </a:pPr>
-            <a:r>
-              <a:rPr lang="en-US" sz="1400" b="1" dirty="0">
-                <a:solidFill>
-                  <a:srgbClr val="1E2761"/>
-                </a:solidFill>
-                <a:latin typeface="Calibri" pitchFamily="34" charset="0"/>
-                <a:ea typeface="Calibri" pitchFamily="34" charset="-122"/>
-                <a:cs typeface="Calibri" pitchFamily="34" charset="-120"/>
-              </a:rPr>
-              <a:t>テストで入れた回答だけ消したいとき</a:t>
-            </a:r>
-            <a:endParaRPr lang="en-US" sz="1400" dirty="0"/>
-          </a:p>
-        </p:txBody>
-      </p:sp>
-      <p:sp>
-        <p:nvSpPr>
-          <p:cNvPr id="6" name="Text 4"/>
-          <p:cNvSpPr txBox="1"/>
-          <p:nvPr/>
-        </p:nvSpPr>
-        <p:spPr>
-          <a:xfrm>
-            <a:off x="566928" y="2418588"/>
+              <a:lnSpc>
+                <a:spcPct val="125000"/>
+              </a:lnSpc>
+              <a:buNone/>
+            </a:pPr>
+            <a:r>
+              <a:rPr lang="en-US" sz="1150" dirty="0">
+                <a:solidFill>
+                  <a:srgbClr val="222222"/>
+                </a:solidFill>
+                <a:latin typeface="Calibri" pitchFamily="34" charset="0"/>
+                <a:ea typeface="Calibri" pitchFamily="34" charset="-122"/>
+                <a:cs typeface="Calibri" pitchFamily="34" charset="-120"/>
+              </a:rPr>
+              <a:t>「総合アンケート」の画面を開く</a:t>
+            </a:r>
+            <a:endParaRPr lang="en-US" sz="1150" dirty="0"/>
+          </a:p>
+        </p:txBody>
+      </p:sp>
+      <p:sp>
+        <p:nvSpPr>
+          <p:cNvPr id="8" name="Shape 6"/>
+          <p:cNvSpPr/>
+          <p:nvPr/>
+        </p:nvSpPr>
+        <p:spPr>
+          <a:xfrm>
+            <a:off x="566928" y="2250821"/>
+            <a:ext cx="274320" cy="274320"/>
+          </a:xfrm>
+          <a:prstGeom prst="ellipse">
+            <a:avLst/>
+          </a:prstGeom>
+          <a:solidFill>
+            <a:srgbClr val="1E2761"/>
+          </a:solidFill>
+          <a:ln/>
+        </p:spPr>
+      </p:sp>
+      <p:sp>
+        <p:nvSpPr>
+          <p:cNvPr id="9" name="Text 7"/>
+          <p:cNvSpPr txBox="1"/>
+          <p:nvPr/>
+        </p:nvSpPr>
+        <p:spPr>
+          <a:xfrm>
+            <a:off x="566928" y="2250821"/>
+            <a:ext cx="274320" cy="274320"/>
+          </a:xfrm>
+          <a:prstGeom prst="rect">
+            <a:avLst/>
+          </a:prstGeom>
+          <a:noFill/>
+          <a:ln/>
+        </p:spPr>
+        <p:txBody>
+          <a:bodyPr wrap="square" lIns="0" tIns="0" rIns="0" bIns="0" rtlCol="0" anchor="ctr"/>
+          <a:lstStyle/>
+          <a:p>
+            <a:pPr algn="ctr" indent="0" marL="0">
+              <a:buNone/>
+            </a:pPr>
+            <a:r>
+              <a:rPr lang="en-US" sz="1100" b="1" dirty="0">
+                <a:solidFill>
+                  <a:srgbClr val="FFFFFF"/>
+                </a:solidFill>
+                <a:latin typeface="Calibri" pitchFamily="34" charset="0"/>
+                <a:ea typeface="Calibri" pitchFamily="34" charset="-122"/>
+                <a:cs typeface="Calibri" pitchFamily="34" charset="-120"/>
+              </a:rPr>
+              <a:t>2</a:t>
+            </a:r>
+            <a:endParaRPr lang="en-US" sz="1100" dirty="0"/>
+          </a:p>
+        </p:txBody>
+      </p:sp>
+      <p:sp>
+        <p:nvSpPr>
+          <p:cNvPr id="10" name="Text 8"/>
+          <p:cNvSpPr txBox="1"/>
+          <p:nvPr/>
+        </p:nvSpPr>
+        <p:spPr>
+          <a:xfrm>
+            <a:off x="969264" y="2232533"/>
+            <a:ext cx="6025896" cy="365760"/>
+          </a:xfrm>
+          <a:prstGeom prst="rect">
+            <a:avLst/>
+          </a:prstGeom>
+          <a:noFill/>
+          <a:ln/>
+        </p:spPr>
+        <p:txBody>
+          <a:bodyPr wrap="square" lIns="0" tIns="0" rIns="0" bIns="0" rtlCol="0" anchor="t"/>
+          <a:lstStyle/>
+          <a:p>
+            <a:pPr indent="0" marL="0">
+              <a:lnSpc>
+                <a:spcPct val="125000"/>
+              </a:lnSpc>
+              <a:buNone/>
+            </a:pPr>
+            <a:r>
+              <a:rPr lang="en-US" sz="1150" dirty="0">
+                <a:solidFill>
+                  <a:srgbClr val="222222"/>
+                </a:solidFill>
+                <a:latin typeface="Calibri" pitchFamily="34" charset="0"/>
+                <a:ea typeface="Calibri" pitchFamily="34" charset="-122"/>
+                <a:cs typeface="Calibri" pitchFamily="34" charset="-120"/>
+              </a:rPr>
+              <a:t>一番下の</a:t>
+            </a:r>
+            <a:pPr indent="0" marL="0">
+              <a:lnSpc>
+                <a:spcPct val="125000"/>
+              </a:lnSpc>
+              <a:buNone/>
+            </a:pPr>
+            <a:r>
+              <a:rPr lang="en-US" sz="1150" b="1" dirty="0">
+                <a:solidFill>
+                  <a:srgbClr val="222222"/>
+                </a:solidFill>
+                <a:latin typeface="Calibri" pitchFamily="34" charset="0"/>
+                <a:ea typeface="Calibri" pitchFamily="34" charset="-122"/>
+                <a:cs typeface="Calibri" pitchFamily="34" charset="-120"/>
+              </a:rPr>
+              <a:t>「メールアドレスを削除する」</a:t>
+            </a:r>
+            <a:pPr indent="0" marL="0">
+              <a:lnSpc>
+                <a:spcPct val="125000"/>
+              </a:lnSpc>
+              <a:buNone/>
+            </a:pPr>
+            <a:r>
+              <a:rPr lang="en-US" sz="1150" dirty="0">
+                <a:solidFill>
+                  <a:srgbClr val="222222"/>
+                </a:solidFill>
+                <a:latin typeface="Calibri" pitchFamily="34" charset="0"/>
+                <a:ea typeface="Calibri" pitchFamily="34" charset="-122"/>
+                <a:cs typeface="Calibri" pitchFamily="34" charset="-120"/>
+              </a:rPr>
+              <a:t>を押す</a:t>
+            </a:r>
+            <a:endParaRPr lang="en-US" sz="1150" dirty="0"/>
+          </a:p>
+        </p:txBody>
+      </p:sp>
+      <p:sp>
+        <p:nvSpPr>
+          <p:cNvPr id="11" name="Shape 9"/>
+          <p:cNvSpPr/>
+          <p:nvPr/>
+        </p:nvSpPr>
+        <p:spPr>
+          <a:xfrm>
+            <a:off x="566928" y="2708021"/>
+            <a:ext cx="274320" cy="274320"/>
+          </a:xfrm>
+          <a:prstGeom prst="ellipse">
+            <a:avLst/>
+          </a:prstGeom>
+          <a:solidFill>
+            <a:srgbClr val="1E2761"/>
+          </a:solidFill>
+          <a:ln/>
+        </p:spPr>
+      </p:sp>
+      <p:sp>
+        <p:nvSpPr>
+          <p:cNvPr id="12" name="Text 10"/>
+          <p:cNvSpPr txBox="1"/>
+          <p:nvPr/>
+        </p:nvSpPr>
+        <p:spPr>
+          <a:xfrm>
+            <a:off x="566928" y="2708021"/>
+            <a:ext cx="274320" cy="274320"/>
+          </a:xfrm>
+          <a:prstGeom prst="rect">
+            <a:avLst/>
+          </a:prstGeom>
+          <a:noFill/>
+          <a:ln/>
+        </p:spPr>
+        <p:txBody>
+          <a:bodyPr wrap="square" lIns="0" tIns="0" rIns="0" bIns="0" rtlCol="0" anchor="ctr"/>
+          <a:lstStyle/>
+          <a:p>
+            <a:pPr algn="ctr" indent="0" marL="0">
+              <a:buNone/>
+            </a:pPr>
+            <a:r>
+              <a:rPr lang="en-US" sz="1100" b="1" dirty="0">
+                <a:solidFill>
+                  <a:srgbClr val="FFFFFF"/>
+                </a:solidFill>
+                <a:latin typeface="Calibri" pitchFamily="34" charset="0"/>
+                <a:ea typeface="Calibri" pitchFamily="34" charset="-122"/>
+                <a:cs typeface="Calibri" pitchFamily="34" charset="-120"/>
+              </a:rPr>
+              <a:t>3</a:t>
+            </a:r>
+            <a:endParaRPr lang="en-US" sz="1100" dirty="0"/>
+          </a:p>
+        </p:txBody>
+      </p:sp>
+      <p:sp>
+        <p:nvSpPr>
+          <p:cNvPr id="13" name="Text 11"/>
+          <p:cNvSpPr txBox="1"/>
+          <p:nvPr/>
+        </p:nvSpPr>
+        <p:spPr>
+          <a:xfrm>
+            <a:off x="969264" y="2689733"/>
+            <a:ext cx="6025896" cy="365760"/>
+          </a:xfrm>
+          <a:prstGeom prst="rect">
+            <a:avLst/>
+          </a:prstGeom>
+          <a:noFill/>
+          <a:ln/>
+        </p:spPr>
+        <p:txBody>
+          <a:bodyPr wrap="square" lIns="0" tIns="0" rIns="0" bIns="0" rtlCol="0" anchor="t"/>
+          <a:lstStyle/>
+          <a:p>
+            <a:pPr indent="0" marL="0">
+              <a:lnSpc>
+                <a:spcPct val="125000"/>
+              </a:lnSpc>
+              <a:buNone/>
+            </a:pPr>
+            <a:r>
+              <a:rPr lang="en-US" sz="1150" dirty="0">
+                <a:solidFill>
+                  <a:srgbClr val="222222"/>
+                </a:solidFill>
+                <a:latin typeface="Calibri" pitchFamily="34" charset="0"/>
+                <a:ea typeface="Calibri" pitchFamily="34" charset="-122"/>
+                <a:cs typeface="Calibri" pitchFamily="34" charset="-120"/>
+              </a:rPr>
+              <a:t>確認メッセージで「OK」を押す</a:t>
+            </a:r>
+            <a:endParaRPr lang="en-US" sz="1150" dirty="0"/>
+          </a:p>
+        </p:txBody>
+      </p:sp>
+      <p:sp>
+        <p:nvSpPr>
+          <p:cNvPr id="14" name="Text 12"/>
+          <p:cNvSpPr txBox="1"/>
+          <p:nvPr/>
+        </p:nvSpPr>
+        <p:spPr>
+          <a:xfrm>
+            <a:off x="566928" y="3146933"/>
             <a:ext cx="6428232" cy="257429"/>
           </a:xfrm>
           <a:prstGeom prst="rect">
@@ -27092,7 +27448,41 @@
                 <a:ea typeface="Calibri" pitchFamily="34" charset="-122"/>
                 <a:cs typeface="Calibri" pitchFamily="34" charset="-120"/>
               </a:rPr>
-              <a:t>まず件数を確認し、問題なければ実行します。</a:t>
+              <a:t>削除しても、</a:t>
+            </a:r>
+            <a:pPr indent="0" marL="0">
+              <a:lnSpc>
+                <a:spcPct val="125000"/>
+              </a:lnSpc>
+              <a:buNone/>
+            </a:pPr>
+            <a:r>
+              <a:rPr lang="en-US" sz="1100" b="1" dirty="0">
+                <a:solidFill>
+                  <a:srgbClr val="222222"/>
+                </a:solidFill>
+                <a:latin typeface="Calibri" pitchFamily="34" charset="0"/>
+                <a:ea typeface="Calibri" pitchFamily="34" charset="-122"/>
+                <a:cs typeface="Calibri" pitchFamily="34" charset="-120"/>
+              </a:rPr>
+              <a:t>回答データ（個人情報を含まないもの）は残ります</a:t>
+            </a:r>
+            <a:pPr indent="0" marL="0">
+              <a:lnSpc>
+                <a:spcPct val="125000"/>
+              </a:lnSpc>
+              <a:buNone/>
+            </a:pPr>
+            <a:r>
+              <a:rPr lang="en-US" sz="1100" dirty="0">
+                <a:solidFill>
+                  <a:srgbClr val="222222"/>
+                </a:solidFill>
+                <a:latin typeface="Calibri" pitchFamily="34" charset="0"/>
+                <a:ea typeface="Calibri" pitchFamily="34" charset="-122"/>
+                <a:cs typeface="Calibri" pitchFamily="34" charset="-120"/>
+              </a:rPr>
+              <a:t>。</a:t>
             </a:r>
             <a:endParaRPr lang="en-US" sz="1100" dirty="0"/>
           </a:p>
@@ -27100,279 +27490,18 @@
       </p:sp>
       <p:sp>
         <p:nvSpPr>
-          <p:cNvPr id="7" name="Text 5"/>
-          <p:cNvSpPr txBox="1"/>
-          <p:nvPr/>
-        </p:nvSpPr>
-        <p:spPr>
-          <a:xfrm>
-            <a:off x="713232" y="2712593"/>
-            <a:ext cx="6281928" cy="257429"/>
-          </a:xfrm>
-          <a:prstGeom prst="rect">
-            <a:avLst/>
-          </a:prstGeom>
-          <a:noFill/>
-          <a:ln/>
-        </p:spPr>
-        <p:txBody>
-          <a:bodyPr wrap="square" lIns="0" tIns="0" rIns="0" bIns="0" rtlCol="0" anchor="t"/>
-          <a:lstStyle/>
-          <a:p>
-            <a:pPr marL="342900" indent="-342900">
-              <a:lnSpc>
-                <a:spcPct val="125000"/>
-              </a:lnSpc>
-              <a:buSzPct val="100000"/>
-              <a:buChar char="●"/>
-            </a:pPr>
-            <a:r>
-              <a:rPr lang="en-US" sz="1100" dirty="0">
-                <a:solidFill>
-                  <a:srgbClr val="222222"/>
-                </a:solidFill>
-                <a:latin typeface="Calibri" pitchFamily="34" charset="0"/>
-                <a:ea typeface="Calibri" pitchFamily="34" charset="-122"/>
-                <a:cs typeface="Calibri" pitchFamily="34" charset="-120"/>
-              </a:rPr>
-              <a:t>確認：</a:t>
-            </a:r>
-            <a:pPr indent="0" marL="0">
-              <a:lnSpc>
-                <a:spcPct val="125000"/>
-              </a:lnSpc>
-              <a:buNone/>
-            </a:pPr>
-            <a:r>
-              <a:rPr lang="en-US" sz="1045" dirty="0">
-                <a:solidFill>
-                  <a:srgbClr val="222222"/>
-                </a:solidFill>
-                <a:latin typeface="Courier New" pitchFamily="34" charset="0"/>
-                <a:ea typeface="Courier New" pitchFamily="34" charset="-122"/>
-                <a:cs typeface="Courier New" pitchFamily="34" charset="-120"/>
-              </a:rPr>
-              <a:t>bin/reset.sh --responses --dry-run</a:t>
-            </a:r>
-            <a:endParaRPr lang="en-US" sz="1100" dirty="0"/>
-          </a:p>
-        </p:txBody>
-      </p:sp>
-      <p:sp>
-        <p:nvSpPr>
-          <p:cNvPr id="8" name="Text 6"/>
-          <p:cNvSpPr txBox="1"/>
-          <p:nvPr/>
-        </p:nvSpPr>
-        <p:spPr>
-          <a:xfrm>
-            <a:off x="713232" y="2988310"/>
-            <a:ext cx="6281928" cy="257429"/>
-          </a:xfrm>
-          <a:prstGeom prst="rect">
-            <a:avLst/>
-          </a:prstGeom>
-          <a:noFill/>
-          <a:ln/>
-        </p:spPr>
-        <p:txBody>
-          <a:bodyPr wrap="square" lIns="0" tIns="0" rIns="0" bIns="0" rtlCol="0" anchor="t"/>
-          <a:lstStyle/>
-          <a:p>
-            <a:pPr marL="342900" indent="-342900">
-              <a:lnSpc>
-                <a:spcPct val="125000"/>
-              </a:lnSpc>
-              <a:buSzPct val="100000"/>
-              <a:buChar char="●"/>
-            </a:pPr>
-            <a:r>
-              <a:rPr lang="en-US" sz="1100" dirty="0">
-                <a:solidFill>
-                  <a:srgbClr val="222222"/>
-                </a:solidFill>
-                <a:latin typeface="Calibri" pitchFamily="34" charset="0"/>
-                <a:ea typeface="Calibri" pitchFamily="34" charset="-122"/>
-                <a:cs typeface="Calibri" pitchFamily="34" charset="-120"/>
-              </a:rPr>
-              <a:t>実行：</a:t>
-            </a:r>
-            <a:pPr indent="0" marL="0">
-              <a:lnSpc>
-                <a:spcPct val="125000"/>
-              </a:lnSpc>
-              <a:buNone/>
-            </a:pPr>
-            <a:r>
-              <a:rPr lang="en-US" sz="1045" dirty="0">
-                <a:solidFill>
-                  <a:srgbClr val="222222"/>
-                </a:solidFill>
-                <a:latin typeface="Courier New" pitchFamily="34" charset="0"/>
-                <a:ea typeface="Courier New" pitchFamily="34" charset="-122"/>
-                <a:cs typeface="Courier New" pitchFamily="34" charset="-120"/>
-              </a:rPr>
-              <a:t>bin/reset.sh --responses --force</a:t>
-            </a:r>
-            <a:endParaRPr lang="en-US" sz="1100" dirty="0"/>
-          </a:p>
-        </p:txBody>
-      </p:sp>
-      <p:sp>
-        <p:nvSpPr>
-          <p:cNvPr id="9" name="Text 7"/>
-          <p:cNvSpPr txBox="1"/>
-          <p:nvPr/>
-        </p:nvSpPr>
-        <p:spPr>
-          <a:xfrm>
-            <a:off x="566928" y="3264027"/>
-            <a:ext cx="6428232" cy="257429"/>
-          </a:xfrm>
-          <a:prstGeom prst="rect">
-            <a:avLst/>
-          </a:prstGeom>
-          <a:noFill/>
-          <a:ln/>
-        </p:spPr>
-        <p:txBody>
-          <a:bodyPr wrap="square" lIns="0" tIns="0" rIns="0" bIns="0" rtlCol="0" anchor="t"/>
-          <a:lstStyle/>
-          <a:p>
-            <a:pPr indent="0" marL="0">
-              <a:lnSpc>
-                <a:spcPct val="125000"/>
-              </a:lnSpc>
-              <a:buNone/>
-            </a:pPr>
-            <a:r>
-              <a:rPr lang="en-US" sz="1100" dirty="0">
-                <a:solidFill>
-                  <a:srgbClr val="222222"/>
-                </a:solidFill>
-                <a:latin typeface="Calibri" pitchFamily="34" charset="0"/>
-                <a:ea typeface="Calibri" pitchFamily="34" charset="-122"/>
-                <a:cs typeface="Calibri" pitchFamily="34" charset="-120"/>
-              </a:rPr>
-              <a:t>イベント・企業・設問・景品・壁紙・アカウントは残ります。</a:t>
-            </a:r>
-            <a:endParaRPr lang="en-US" sz="1100" dirty="0"/>
-          </a:p>
-        </p:txBody>
-      </p:sp>
-      <p:sp>
-        <p:nvSpPr>
-          <p:cNvPr id="10" name="Text 8"/>
-          <p:cNvSpPr txBox="1"/>
-          <p:nvPr/>
-        </p:nvSpPr>
-        <p:spPr>
-          <a:xfrm>
-            <a:off x="566928" y="3667760"/>
-            <a:ext cx="6428232" cy="257810"/>
-          </a:xfrm>
-          <a:prstGeom prst="rect">
-            <a:avLst/>
-          </a:prstGeom>
-          <a:noFill/>
-          <a:ln/>
-        </p:spPr>
-        <p:txBody>
-          <a:bodyPr wrap="square" lIns="0" tIns="0" rIns="0" bIns="0" rtlCol="0" anchor="t"/>
-          <a:lstStyle/>
-          <a:p>
-            <a:pPr indent="0" marL="0">
-              <a:buNone/>
-            </a:pPr>
-            <a:r>
-              <a:rPr lang="en-US" sz="1400" b="1" dirty="0">
-                <a:solidFill>
-                  <a:srgbClr val="1E2761"/>
-                </a:solidFill>
-                <a:latin typeface="Calibri" pitchFamily="34" charset="0"/>
-                <a:ea typeface="Calibri" pitchFamily="34" charset="-122"/>
-                <a:cs typeface="Calibri" pitchFamily="34" charset="-120"/>
-              </a:rPr>
-              <a:t>イベントごと作り直したいとき</a:t>
-            </a:r>
-            <a:endParaRPr lang="en-US" sz="1400" dirty="0"/>
-          </a:p>
-        </p:txBody>
-      </p:sp>
-      <p:sp>
-        <p:nvSpPr>
-          <p:cNvPr id="11" name="Text 9"/>
-          <p:cNvSpPr txBox="1"/>
-          <p:nvPr/>
-        </p:nvSpPr>
-        <p:spPr>
-          <a:xfrm>
-            <a:off x="713232" y="3998722"/>
-            <a:ext cx="6281928" cy="257429"/>
-          </a:xfrm>
-          <a:prstGeom prst="rect">
-            <a:avLst/>
-          </a:prstGeom>
-          <a:noFill/>
-          <a:ln/>
-        </p:spPr>
-        <p:txBody>
-          <a:bodyPr wrap="square" lIns="0" tIns="0" rIns="0" bIns="0" rtlCol="0" anchor="t"/>
-          <a:lstStyle/>
-          <a:p>
-            <a:pPr marL="342900" indent="-342900">
-              <a:lnSpc>
-                <a:spcPct val="125000"/>
-              </a:lnSpc>
-              <a:buSzPct val="100000"/>
-              <a:buChar char="●"/>
-            </a:pPr>
-            <a:r>
-              <a:rPr lang="en-US" sz="1100" dirty="0">
-                <a:solidFill>
-                  <a:srgbClr val="222222"/>
-                </a:solidFill>
-                <a:latin typeface="Calibri" pitchFamily="34" charset="0"/>
-                <a:ea typeface="Calibri" pitchFamily="34" charset="-122"/>
-                <a:cs typeface="Calibri" pitchFamily="34" charset="-120"/>
-              </a:rPr>
-              <a:t>実行：</a:t>
-            </a:r>
-            <a:pPr indent="0" marL="0">
-              <a:lnSpc>
-                <a:spcPct val="125000"/>
-              </a:lnSpc>
-              <a:buNone/>
-            </a:pPr>
-            <a:r>
-              <a:rPr lang="en-US" sz="1045" dirty="0">
-                <a:solidFill>
-                  <a:srgbClr val="222222"/>
-                </a:solidFill>
-                <a:latin typeface="Courier New" pitchFamily="34" charset="0"/>
-                <a:ea typeface="Courier New" pitchFamily="34" charset="-122"/>
-                <a:cs typeface="Courier New" pitchFamily="34" charset="-120"/>
-              </a:rPr>
-              <a:t>bin/reset.sh --all --force</a:t>
-            </a:r>
-            <a:endParaRPr lang="en-US" sz="1100" dirty="0"/>
-          </a:p>
-        </p:txBody>
-      </p:sp>
-      <p:sp>
-        <p:nvSpPr>
-          <p:cNvPr id="12" name="Shape 10"/>
+          <p:cNvPr id="15" name="Shape 13"/>
           <p:cNvSpPr/>
           <p:nvPr/>
         </p:nvSpPr>
         <p:spPr>
           <a:xfrm>
-            <a:off x="566928" y="4274439"/>
-            <a:ext cx="6428232" cy="817817"/>
+            <a:off x="566928" y="3440938"/>
+            <a:ext cx="6428232" cy="624459"/>
           </a:xfrm>
           <a:prstGeom prst="roundRect">
             <a:avLst>
-              <a:gd name="adj" fmla="val 6709"/>
+              <a:gd name="adj" fmla="val 8786"/>
             </a:avLst>
           </a:prstGeom>
           <a:solidFill>
@@ -27388,13 +27517,13 @@
       </p:sp>
       <p:sp>
         <p:nvSpPr>
-          <p:cNvPr id="13" name="Text 11"/>
-          <p:cNvSpPr txBox="1"/>
-          <p:nvPr/>
-        </p:nvSpPr>
-        <p:spPr>
-          <a:xfrm>
-            <a:off x="658368" y="4365879"/>
+          <p:cNvPr id="16" name="Text 14"/>
+          <p:cNvSpPr txBox="1"/>
+          <p:nvPr/>
+        </p:nvSpPr>
+        <p:spPr>
+          <a:xfrm>
+            <a:off x="658368" y="3532378"/>
             <a:ext cx="237744" cy="237744"/>
           </a:xfrm>
           <a:prstGeom prst="rect">
@@ -27427,14 +27556,14 @@
       </p:sp>
       <p:sp>
         <p:nvSpPr>
-          <p:cNvPr id="14" name="Text 12"/>
-          <p:cNvSpPr txBox="1"/>
-          <p:nvPr/>
-        </p:nvSpPr>
-        <p:spPr>
-          <a:xfrm>
-            <a:off x="950976" y="4384167"/>
-            <a:ext cx="5925312" cy="634937"/>
+          <p:cNvPr id="17" name="Text 15"/>
+          <p:cNvSpPr txBox="1"/>
+          <p:nvPr/>
+        </p:nvSpPr>
+        <p:spPr>
+          <a:xfrm>
+            <a:off x="950976" y="3550666"/>
+            <a:ext cx="5925312" cy="441579"/>
           </a:xfrm>
           <a:prstGeom prst="rect">
             <a:avLst/>
@@ -27461,7 +27590,7 @@
                 <a:ea typeface="Calibri" pitchFamily="34" charset="-122"/>
                 <a:cs typeface="Calibri" pitchFamily="34" charset="-120"/>
               </a:rPr>
-              <a:t>どちらも元に戻せません。実行前に自動でバックアップを取りますが、念のため大事なデータはCSVで書き出しておいてください。</a:t>
+              <a:t>削除すると、未送信ぶんの案内メールは送れなくなります。</a:t>
             </a:r>
             <a:pPr indent="0" marL="0">
               <a:lnSpc>
@@ -27478,7 +27607,7 @@
                 <a:ea typeface="Calibri" pitchFamily="34" charset="-122"/>
                 <a:cs typeface="Calibri" pitchFamily="34" charset="-120"/>
               </a:rPr>
-              <a:t>企業担当者のアカウントは企業と一緒に消えます</a:t>
+              <a:t>送信と集計が完全に終わってから</a:t>
             </a:r>
             <a:pPr indent="0" marL="0">
               <a:lnSpc>
@@ -27495,7 +27624,7 @@
                 <a:ea typeface="Calibri" pitchFamily="34" charset="-122"/>
                 <a:cs typeface="Calibri" pitchFamily="34" charset="-120"/>
               </a:rPr>
-              <a:t>（主催者・受付は残ります）。</a:t>
+              <a:t>実行してください。</a:t>
             </a:r>
             <a:endParaRPr lang="en-US" sz="1050" dirty="0"/>
           </a:p>
@@ -27503,18 +27632,18 @@
       </p:sp>
       <p:sp>
         <p:nvSpPr>
-          <p:cNvPr id="15" name="Shape 13"/>
+          <p:cNvPr id="18" name="Shape 16"/>
           <p:cNvSpPr/>
           <p:nvPr/>
         </p:nvSpPr>
         <p:spPr>
           <a:xfrm>
-            <a:off x="566928" y="5165408"/>
-            <a:ext cx="6428232" cy="431102"/>
+            <a:off x="566928" y="4138549"/>
+            <a:ext cx="6428232" cy="624459"/>
           </a:xfrm>
           <a:prstGeom prst="roundRect">
             <a:avLst>
-              <a:gd name="adj" fmla="val 12726"/>
+              <a:gd name="adj" fmla="val 8786"/>
             </a:avLst>
           </a:prstGeom>
           <a:solidFill>
@@ -27530,13 +27659,13 @@
       </p:sp>
       <p:sp>
         <p:nvSpPr>
-          <p:cNvPr id="16" name="Text 14"/>
-          <p:cNvSpPr txBox="1"/>
-          <p:nvPr/>
-        </p:nvSpPr>
-        <p:spPr>
-          <a:xfrm>
-            <a:off x="658368" y="5256848"/>
+          <p:cNvPr id="19" name="Text 17"/>
+          <p:cNvSpPr txBox="1"/>
+          <p:nvPr/>
+        </p:nvSpPr>
+        <p:spPr>
+          <a:xfrm>
+            <a:off x="658368" y="4229989"/>
             <a:ext cx="237744" cy="237744"/>
           </a:xfrm>
           <a:prstGeom prst="rect">
@@ -27569,14 +27698,14 @@
       </p:sp>
       <p:sp>
         <p:nvSpPr>
-          <p:cNvPr id="17" name="Text 15"/>
-          <p:cNvSpPr txBox="1"/>
-          <p:nvPr/>
-        </p:nvSpPr>
-        <p:spPr>
-          <a:xfrm>
-            <a:off x="950976" y="5275136"/>
-            <a:ext cx="5925312" cy="248221"/>
+          <p:cNvPr id="20" name="Text 18"/>
+          <p:cNvSpPr txBox="1"/>
+          <p:nvPr/>
+        </p:nvSpPr>
+        <p:spPr>
+          <a:xfrm>
+            <a:off x="950976" y="4248277"/>
+            <a:ext cx="5925312" cy="441579"/>
           </a:xfrm>
           <a:prstGeom prst="rect">
             <a:avLst/>
@@ -27603,15 +27732,78 @@
                 <a:ea typeface="Calibri" pitchFamily="34" charset="-122"/>
                 <a:cs typeface="Calibri" pitchFamily="34" charset="-120"/>
               </a:rPr>
-              <a:t>実行するとデータベース名の入力を求められます。画面の指示どおりに入力してください。</a:t>
+              <a:t>「氏名・住所は収集せず、メールアドレスも送付・集計後に削除する」という運用方針に沿った操作です。来場者にもその旨を案内しています。</a:t>
             </a:r>
             <a:endParaRPr lang="en-US" sz="1050" dirty="0"/>
           </a:p>
         </p:txBody>
       </p:sp>
-      <p:sp>
-        <p:nvSpPr>
-          <p:cNvPr id="18" name="Text 16"/>
+      <p:pic>
+        <p:nvPicPr>
+          <p:cNvPr id="21" name="Image 0" descr="C:\Users\sato\Desktop\enque\docs\images\o-purge.png">    </p:cNvPr>
+          <p:cNvPicPr>
+            <a:picLocks noChangeAspect="1"/>
+          </p:cNvPicPr>
+          <p:nvPr/>
+        </p:nvPicPr>
+        <p:blipFill>
+          <a:blip r:embed="rId1"/>
+          <a:stretch>
+            <a:fillRect/>
+          </a:stretch>
+        </p:blipFill>
+        <p:spPr>
+          <a:xfrm>
+            <a:off x="936779" y="4836160"/>
+            <a:ext cx="5688531" cy="3474720"/>
+          </a:xfrm>
+          <a:prstGeom prst="rect">
+            <a:avLst/>
+          </a:prstGeom>
+        </p:spPr>
+      </p:pic>
+      <p:sp>
+        <p:nvSpPr>
+          <p:cNvPr id="22" name="Text 19"/>
+          <p:cNvSpPr txBox="1"/>
+          <p:nvPr/>
+        </p:nvSpPr>
+        <p:spPr>
+          <a:xfrm>
+            <a:off x="566928" y="8365744"/>
+            <a:ext cx="6428232" cy="274320"/>
+          </a:xfrm>
+          <a:prstGeom prst="rect">
+            <a:avLst/>
+          </a:prstGeom>
+          <a:noFill/>
+          <a:ln/>
+        </p:spPr>
+        <p:txBody>
+          <a:bodyPr wrap="square" lIns="0" tIns="0" rIns="0" bIns="0" rtlCol="0" anchor="ctr"/>
+          <a:lstStyle/>
+          <a:p>
+            <a:pPr algn="ctr" indent="0" marL="0">
+              <a:buNone/>
+            </a:pPr>
+            <a:r>
+              <a:rPr lang="en-US" sz="950" dirty="0">
+                <a:solidFill>
+                  <a:srgbClr val="6B6B6B"/>
+                </a:solidFill>
+                <a:latin typeface="Calibri" pitchFamily="34" charset="0"/>
+                <a:ea typeface="Calibri" pitchFamily="34" charset="-122"/>
+                <a:cs typeface="Calibri" pitchFamily="34" charset="-120"/>
+              </a:rPr>
+              <a:t>「メールアドレスを削除する」ボタンの周辺（説明文が見えるもの）。</a:t>
+            </a:r>
+            <a:endParaRPr lang="en-US" sz="950" dirty="0"/>
+          </a:p>
+        </p:txBody>
+      </p:sp>
+      <p:sp>
+        <p:nvSpPr>
+          <p:cNvPr id="23" name="Text 20"/>
           <p:cNvSpPr txBox="1"/>
           <p:nvPr/>
         </p:nvSpPr>
@@ -27752,6 +27944,789 @@
                 <a:ea typeface="Calibri" pitchFamily="34" charset="-122"/>
                 <a:cs typeface="Calibri" pitchFamily="34" charset="-120"/>
               </a:rPr>
+              <a:t>次のイベントに向けて（データの整理）</a:t>
+            </a:r>
+            <a:endParaRPr lang="en-US" sz="2200" dirty="0"/>
+          </a:p>
+        </p:txBody>
+      </p:sp>
+      <p:sp>
+        <p:nvSpPr>
+          <p:cNvPr id="4" name="Text 2"/>
+          <p:cNvSpPr txBox="1"/>
+          <p:nvPr/>
+        </p:nvSpPr>
+        <p:spPr>
+          <a:xfrm>
+            <a:off x="566928" y="1481328"/>
+            <a:ext cx="6428232" cy="459994"/>
+          </a:xfrm>
+          <a:prstGeom prst="rect">
+            <a:avLst/>
+          </a:prstGeom>
+          <a:noFill/>
+          <a:ln/>
+        </p:spPr>
+        <p:txBody>
+          <a:bodyPr wrap="square" lIns="0" tIns="0" rIns="0" bIns="0" rtlCol="0" anchor="t"/>
+          <a:lstStyle/>
+          <a:p>
+            <a:pPr indent="0" marL="0">
+              <a:lnSpc>
+                <a:spcPct val="125000"/>
+              </a:lnSpc>
+              <a:buNone/>
+            </a:pPr>
+            <a:r>
+              <a:rPr lang="en-US" sz="1100" dirty="0">
+                <a:solidFill>
+                  <a:srgbClr val="222222"/>
+                </a:solidFill>
+                <a:latin typeface="Calibri" pitchFamily="34" charset="0"/>
+                <a:ea typeface="Calibri" pitchFamily="34" charset="-122"/>
+                <a:cs typeface="Calibri" pitchFamily="34" charset="-120"/>
+              </a:rPr>
+              <a:t>サーバーで次のコマンドを実行します（事務局のPCではなく、システムが動いているサーバーでの作業です）。</a:t>
+            </a:r>
+            <a:endParaRPr lang="en-US" sz="1100" dirty="0"/>
+          </a:p>
+        </p:txBody>
+      </p:sp>
+      <p:sp>
+        <p:nvSpPr>
+          <p:cNvPr id="5" name="Text 3"/>
+          <p:cNvSpPr txBox="1"/>
+          <p:nvPr/>
+        </p:nvSpPr>
+        <p:spPr>
+          <a:xfrm>
+            <a:off x="566928" y="2087626"/>
+            <a:ext cx="6428232" cy="257810"/>
+          </a:xfrm>
+          <a:prstGeom prst="rect">
+            <a:avLst/>
+          </a:prstGeom>
+          <a:noFill/>
+          <a:ln/>
+        </p:spPr>
+        <p:txBody>
+          <a:bodyPr wrap="square" lIns="0" tIns="0" rIns="0" bIns="0" rtlCol="0" anchor="t"/>
+          <a:lstStyle/>
+          <a:p>
+            <a:pPr indent="0" marL="0">
+              <a:buNone/>
+            </a:pPr>
+            <a:r>
+              <a:rPr lang="en-US" sz="1400" b="1" dirty="0">
+                <a:solidFill>
+                  <a:srgbClr val="1E2761"/>
+                </a:solidFill>
+                <a:latin typeface="Calibri" pitchFamily="34" charset="0"/>
+                <a:ea typeface="Calibri" pitchFamily="34" charset="-122"/>
+                <a:cs typeface="Calibri" pitchFamily="34" charset="-120"/>
+              </a:rPr>
+              <a:t>テストで入れた回答だけ消したいとき</a:t>
+            </a:r>
+            <a:endParaRPr lang="en-US" sz="1400" dirty="0"/>
+          </a:p>
+        </p:txBody>
+      </p:sp>
+      <p:sp>
+        <p:nvSpPr>
+          <p:cNvPr id="6" name="Text 4"/>
+          <p:cNvSpPr txBox="1"/>
+          <p:nvPr/>
+        </p:nvSpPr>
+        <p:spPr>
+          <a:xfrm>
+            <a:off x="566928" y="2418588"/>
+            <a:ext cx="6428232" cy="257429"/>
+          </a:xfrm>
+          <a:prstGeom prst="rect">
+            <a:avLst/>
+          </a:prstGeom>
+          <a:noFill/>
+          <a:ln/>
+        </p:spPr>
+        <p:txBody>
+          <a:bodyPr wrap="square" lIns="0" tIns="0" rIns="0" bIns="0" rtlCol="0" anchor="t"/>
+          <a:lstStyle/>
+          <a:p>
+            <a:pPr indent="0" marL="0">
+              <a:lnSpc>
+                <a:spcPct val="125000"/>
+              </a:lnSpc>
+              <a:buNone/>
+            </a:pPr>
+            <a:r>
+              <a:rPr lang="en-US" sz="1100" dirty="0">
+                <a:solidFill>
+                  <a:srgbClr val="222222"/>
+                </a:solidFill>
+                <a:latin typeface="Calibri" pitchFamily="34" charset="0"/>
+                <a:ea typeface="Calibri" pitchFamily="34" charset="-122"/>
+                <a:cs typeface="Calibri" pitchFamily="34" charset="-120"/>
+              </a:rPr>
+              <a:t>まず件数を確認し、問題なければ実行します。</a:t>
+            </a:r>
+            <a:endParaRPr lang="en-US" sz="1100" dirty="0"/>
+          </a:p>
+        </p:txBody>
+      </p:sp>
+      <p:sp>
+        <p:nvSpPr>
+          <p:cNvPr id="7" name="Text 5"/>
+          <p:cNvSpPr txBox="1"/>
+          <p:nvPr/>
+        </p:nvSpPr>
+        <p:spPr>
+          <a:xfrm>
+            <a:off x="713232" y="2712593"/>
+            <a:ext cx="6281928" cy="257429"/>
+          </a:xfrm>
+          <a:prstGeom prst="rect">
+            <a:avLst/>
+          </a:prstGeom>
+          <a:noFill/>
+          <a:ln/>
+        </p:spPr>
+        <p:txBody>
+          <a:bodyPr wrap="square" lIns="0" tIns="0" rIns="0" bIns="0" rtlCol="0" anchor="t"/>
+          <a:lstStyle/>
+          <a:p>
+            <a:pPr marL="342900" indent="-342900">
+              <a:lnSpc>
+                <a:spcPct val="125000"/>
+              </a:lnSpc>
+              <a:buSzPct val="100000"/>
+              <a:buChar char="●"/>
+            </a:pPr>
+            <a:r>
+              <a:rPr lang="en-US" sz="1100" dirty="0">
+                <a:solidFill>
+                  <a:srgbClr val="222222"/>
+                </a:solidFill>
+                <a:latin typeface="Calibri" pitchFamily="34" charset="0"/>
+                <a:ea typeface="Calibri" pitchFamily="34" charset="-122"/>
+                <a:cs typeface="Calibri" pitchFamily="34" charset="-120"/>
+              </a:rPr>
+              <a:t>確認：</a:t>
+            </a:r>
+            <a:pPr indent="0" marL="0">
+              <a:lnSpc>
+                <a:spcPct val="125000"/>
+              </a:lnSpc>
+              <a:buNone/>
+            </a:pPr>
+            <a:r>
+              <a:rPr lang="en-US" sz="1045" dirty="0">
+                <a:solidFill>
+                  <a:srgbClr val="222222"/>
+                </a:solidFill>
+                <a:latin typeface="Courier New" pitchFamily="34" charset="0"/>
+                <a:ea typeface="Courier New" pitchFamily="34" charset="-122"/>
+                <a:cs typeface="Courier New" pitchFamily="34" charset="-120"/>
+              </a:rPr>
+              <a:t>bin/reset.sh --responses --dry-run</a:t>
+            </a:r>
+            <a:endParaRPr lang="en-US" sz="1100" dirty="0"/>
+          </a:p>
+        </p:txBody>
+      </p:sp>
+      <p:sp>
+        <p:nvSpPr>
+          <p:cNvPr id="8" name="Text 6"/>
+          <p:cNvSpPr txBox="1"/>
+          <p:nvPr/>
+        </p:nvSpPr>
+        <p:spPr>
+          <a:xfrm>
+            <a:off x="713232" y="2988310"/>
+            <a:ext cx="6281928" cy="257429"/>
+          </a:xfrm>
+          <a:prstGeom prst="rect">
+            <a:avLst/>
+          </a:prstGeom>
+          <a:noFill/>
+          <a:ln/>
+        </p:spPr>
+        <p:txBody>
+          <a:bodyPr wrap="square" lIns="0" tIns="0" rIns="0" bIns="0" rtlCol="0" anchor="t"/>
+          <a:lstStyle/>
+          <a:p>
+            <a:pPr marL="342900" indent="-342900">
+              <a:lnSpc>
+                <a:spcPct val="125000"/>
+              </a:lnSpc>
+              <a:buSzPct val="100000"/>
+              <a:buChar char="●"/>
+            </a:pPr>
+            <a:r>
+              <a:rPr lang="en-US" sz="1100" dirty="0">
+                <a:solidFill>
+                  <a:srgbClr val="222222"/>
+                </a:solidFill>
+                <a:latin typeface="Calibri" pitchFamily="34" charset="0"/>
+                <a:ea typeface="Calibri" pitchFamily="34" charset="-122"/>
+                <a:cs typeface="Calibri" pitchFamily="34" charset="-120"/>
+              </a:rPr>
+              <a:t>実行：</a:t>
+            </a:r>
+            <a:pPr indent="0" marL="0">
+              <a:lnSpc>
+                <a:spcPct val="125000"/>
+              </a:lnSpc>
+              <a:buNone/>
+            </a:pPr>
+            <a:r>
+              <a:rPr lang="en-US" sz="1045" dirty="0">
+                <a:solidFill>
+                  <a:srgbClr val="222222"/>
+                </a:solidFill>
+                <a:latin typeface="Courier New" pitchFamily="34" charset="0"/>
+                <a:ea typeface="Courier New" pitchFamily="34" charset="-122"/>
+                <a:cs typeface="Courier New" pitchFamily="34" charset="-120"/>
+              </a:rPr>
+              <a:t>bin/reset.sh --responses --force</a:t>
+            </a:r>
+            <a:endParaRPr lang="en-US" sz="1100" dirty="0"/>
+          </a:p>
+        </p:txBody>
+      </p:sp>
+      <p:sp>
+        <p:nvSpPr>
+          <p:cNvPr id="9" name="Text 7"/>
+          <p:cNvSpPr txBox="1"/>
+          <p:nvPr/>
+        </p:nvSpPr>
+        <p:spPr>
+          <a:xfrm>
+            <a:off x="566928" y="3264027"/>
+            <a:ext cx="6428232" cy="257429"/>
+          </a:xfrm>
+          <a:prstGeom prst="rect">
+            <a:avLst/>
+          </a:prstGeom>
+          <a:noFill/>
+          <a:ln/>
+        </p:spPr>
+        <p:txBody>
+          <a:bodyPr wrap="square" lIns="0" tIns="0" rIns="0" bIns="0" rtlCol="0" anchor="t"/>
+          <a:lstStyle/>
+          <a:p>
+            <a:pPr indent="0" marL="0">
+              <a:lnSpc>
+                <a:spcPct val="125000"/>
+              </a:lnSpc>
+              <a:buNone/>
+            </a:pPr>
+            <a:r>
+              <a:rPr lang="en-US" sz="1100" dirty="0">
+                <a:solidFill>
+                  <a:srgbClr val="222222"/>
+                </a:solidFill>
+                <a:latin typeface="Calibri" pitchFamily="34" charset="0"/>
+                <a:ea typeface="Calibri" pitchFamily="34" charset="-122"/>
+                <a:cs typeface="Calibri" pitchFamily="34" charset="-120"/>
+              </a:rPr>
+              <a:t>イベント・企業・設問・景品・壁紙・アカウントは残ります。</a:t>
+            </a:r>
+            <a:endParaRPr lang="en-US" sz="1100" dirty="0"/>
+          </a:p>
+        </p:txBody>
+      </p:sp>
+      <p:sp>
+        <p:nvSpPr>
+          <p:cNvPr id="10" name="Text 8"/>
+          <p:cNvSpPr txBox="1"/>
+          <p:nvPr/>
+        </p:nvSpPr>
+        <p:spPr>
+          <a:xfrm>
+            <a:off x="566928" y="3667760"/>
+            <a:ext cx="6428232" cy="257810"/>
+          </a:xfrm>
+          <a:prstGeom prst="rect">
+            <a:avLst/>
+          </a:prstGeom>
+          <a:noFill/>
+          <a:ln/>
+        </p:spPr>
+        <p:txBody>
+          <a:bodyPr wrap="square" lIns="0" tIns="0" rIns="0" bIns="0" rtlCol="0" anchor="t"/>
+          <a:lstStyle/>
+          <a:p>
+            <a:pPr indent="0" marL="0">
+              <a:buNone/>
+            </a:pPr>
+            <a:r>
+              <a:rPr lang="en-US" sz="1400" b="1" dirty="0">
+                <a:solidFill>
+                  <a:srgbClr val="1E2761"/>
+                </a:solidFill>
+                <a:latin typeface="Calibri" pitchFamily="34" charset="0"/>
+                <a:ea typeface="Calibri" pitchFamily="34" charset="-122"/>
+                <a:cs typeface="Calibri" pitchFamily="34" charset="-120"/>
+              </a:rPr>
+              <a:t>イベントごと作り直したいとき</a:t>
+            </a:r>
+            <a:endParaRPr lang="en-US" sz="1400" dirty="0"/>
+          </a:p>
+        </p:txBody>
+      </p:sp>
+      <p:sp>
+        <p:nvSpPr>
+          <p:cNvPr id="11" name="Text 9"/>
+          <p:cNvSpPr txBox="1"/>
+          <p:nvPr/>
+        </p:nvSpPr>
+        <p:spPr>
+          <a:xfrm>
+            <a:off x="713232" y="3998722"/>
+            <a:ext cx="6281928" cy="257429"/>
+          </a:xfrm>
+          <a:prstGeom prst="rect">
+            <a:avLst/>
+          </a:prstGeom>
+          <a:noFill/>
+          <a:ln/>
+        </p:spPr>
+        <p:txBody>
+          <a:bodyPr wrap="square" lIns="0" tIns="0" rIns="0" bIns="0" rtlCol="0" anchor="t"/>
+          <a:lstStyle/>
+          <a:p>
+            <a:pPr marL="342900" indent="-342900">
+              <a:lnSpc>
+                <a:spcPct val="125000"/>
+              </a:lnSpc>
+              <a:buSzPct val="100000"/>
+              <a:buChar char="●"/>
+            </a:pPr>
+            <a:r>
+              <a:rPr lang="en-US" sz="1100" dirty="0">
+                <a:solidFill>
+                  <a:srgbClr val="222222"/>
+                </a:solidFill>
+                <a:latin typeface="Calibri" pitchFamily="34" charset="0"/>
+                <a:ea typeface="Calibri" pitchFamily="34" charset="-122"/>
+                <a:cs typeface="Calibri" pitchFamily="34" charset="-120"/>
+              </a:rPr>
+              <a:t>実行：</a:t>
+            </a:r>
+            <a:pPr indent="0" marL="0">
+              <a:lnSpc>
+                <a:spcPct val="125000"/>
+              </a:lnSpc>
+              <a:buNone/>
+            </a:pPr>
+            <a:r>
+              <a:rPr lang="en-US" sz="1045" dirty="0">
+                <a:solidFill>
+                  <a:srgbClr val="222222"/>
+                </a:solidFill>
+                <a:latin typeface="Courier New" pitchFamily="34" charset="0"/>
+                <a:ea typeface="Courier New" pitchFamily="34" charset="-122"/>
+                <a:cs typeface="Courier New" pitchFamily="34" charset="-120"/>
+              </a:rPr>
+              <a:t>bin/reset.sh --all --force</a:t>
+            </a:r>
+            <a:endParaRPr lang="en-US" sz="1100" dirty="0"/>
+          </a:p>
+        </p:txBody>
+      </p:sp>
+      <p:sp>
+        <p:nvSpPr>
+          <p:cNvPr id="12" name="Shape 10"/>
+          <p:cNvSpPr/>
+          <p:nvPr/>
+        </p:nvSpPr>
+        <p:spPr>
+          <a:xfrm>
+            <a:off x="566928" y="4274439"/>
+            <a:ext cx="6428232" cy="817817"/>
+          </a:xfrm>
+          <a:prstGeom prst="roundRect">
+            <a:avLst>
+              <a:gd name="adj" fmla="val 6709"/>
+            </a:avLst>
+          </a:prstGeom>
+          <a:solidFill>
+            <a:srgbClr val="FDF0E6"/>
+          </a:solidFill>
+          <a:ln w="9525">
+            <a:solidFill>
+              <a:srgbClr val="E08A3C"/>
+            </a:solidFill>
+            <a:prstDash val="solid"/>
+          </a:ln>
+        </p:spPr>
+      </p:sp>
+      <p:sp>
+        <p:nvSpPr>
+          <p:cNvPr id="13" name="Text 11"/>
+          <p:cNvSpPr txBox="1"/>
+          <p:nvPr/>
+        </p:nvSpPr>
+        <p:spPr>
+          <a:xfrm>
+            <a:off x="658368" y="4365879"/>
+            <a:ext cx="237744" cy="237744"/>
+          </a:xfrm>
+          <a:prstGeom prst="rect">
+            <a:avLst/>
+          </a:prstGeom>
+          <a:noFill/>
+          <a:ln/>
+        </p:spPr>
+        <p:txBody>
+          <a:bodyPr wrap="square" lIns="0" tIns="0" rIns="0" bIns="0" rtlCol="0" anchor="ctr"/>
+          <a:lstStyle/>
+          <a:p>
+            <a:pPr algn="ctr" indent="0" marL="0">
+              <a:buNone/>
+            </a:pPr>
+            <a:r>
+              <a:rPr lang="en-US" sz="1200" b="1" dirty="0">
+                <a:solidFill>
+                  <a:srgbClr val="C25A17"/>
+                </a:solidFill>
+                <a:latin typeface="Calibri" pitchFamily="34" charset="0"/>
+                <a:ea typeface="Calibri" pitchFamily="34" charset="-122"/>
+                <a:cs typeface="Calibri" pitchFamily="34" charset="-120"/>
+              </a:rPr>
+              <a:t>！</a:t>
+            </a:r>
+            <a:endParaRPr lang="en-US" sz="1200" dirty="0"/>
+          </a:p>
+        </p:txBody>
+      </p:sp>
+      <p:sp>
+        <p:nvSpPr>
+          <p:cNvPr id="14" name="Text 12"/>
+          <p:cNvSpPr txBox="1"/>
+          <p:nvPr/>
+        </p:nvSpPr>
+        <p:spPr>
+          <a:xfrm>
+            <a:off x="950976" y="4384167"/>
+            <a:ext cx="5925312" cy="634937"/>
+          </a:xfrm>
+          <a:prstGeom prst="rect">
+            <a:avLst/>
+          </a:prstGeom>
+          <a:noFill/>
+          <a:ln/>
+        </p:spPr>
+        <p:txBody>
+          <a:bodyPr wrap="square" lIns="0" tIns="0" rIns="0" bIns="0" rtlCol="0" anchor="t"/>
+          <a:lstStyle/>
+          <a:p>
+            <a:pPr indent="0" marL="0">
+              <a:lnSpc>
+                <a:spcPct val="120000"/>
+              </a:lnSpc>
+              <a:buNone/>
+            </a:pPr>
+            <a:r>
+              <a:rPr lang="en-US" sz="1050" dirty="0">
+                <a:solidFill>
+                  <a:srgbClr val="222222"/>
+                </a:solidFill>
+                <a:latin typeface="Calibri" pitchFamily="34" charset="0"/>
+                <a:ea typeface="Calibri" pitchFamily="34" charset="-122"/>
+                <a:cs typeface="Calibri" pitchFamily="34" charset="-120"/>
+              </a:rPr>
+              <a:t>どちらも元に戻せません。実行前に自動でバックアップを取りますが、念のため大事なデータはCSVで書き出しておいてください。</a:t>
+            </a:r>
+            <a:pPr indent="0" marL="0">
+              <a:lnSpc>
+                <a:spcPct val="120000"/>
+              </a:lnSpc>
+              <a:buNone/>
+            </a:pPr>
+            <a:r>
+              <a:rPr lang="en-US" sz="1050" b="1" dirty="0">
+                <a:solidFill>
+                  <a:srgbClr val="222222"/>
+                </a:solidFill>
+                <a:latin typeface="Calibri" pitchFamily="34" charset="0"/>
+                <a:ea typeface="Calibri" pitchFamily="34" charset="-122"/>
+                <a:cs typeface="Calibri" pitchFamily="34" charset="-120"/>
+              </a:rPr>
+              <a:t>企業担当者のアカウントは企業と一緒に消えます</a:t>
+            </a:r>
+            <a:pPr indent="0" marL="0">
+              <a:lnSpc>
+                <a:spcPct val="120000"/>
+              </a:lnSpc>
+              <a:buNone/>
+            </a:pPr>
+            <a:r>
+              <a:rPr lang="en-US" sz="1050" dirty="0">
+                <a:solidFill>
+                  <a:srgbClr val="222222"/>
+                </a:solidFill>
+                <a:latin typeface="Calibri" pitchFamily="34" charset="0"/>
+                <a:ea typeface="Calibri" pitchFamily="34" charset="-122"/>
+                <a:cs typeface="Calibri" pitchFamily="34" charset="-120"/>
+              </a:rPr>
+              <a:t>（主催者・受付は残ります）。</a:t>
+            </a:r>
+            <a:endParaRPr lang="en-US" sz="1050" dirty="0"/>
+          </a:p>
+        </p:txBody>
+      </p:sp>
+      <p:sp>
+        <p:nvSpPr>
+          <p:cNvPr id="15" name="Shape 13"/>
+          <p:cNvSpPr/>
+          <p:nvPr/>
+        </p:nvSpPr>
+        <p:spPr>
+          <a:xfrm>
+            <a:off x="566928" y="5165408"/>
+            <a:ext cx="6428232" cy="431102"/>
+          </a:xfrm>
+          <a:prstGeom prst="roundRect">
+            <a:avLst>
+              <a:gd name="adj" fmla="val 12726"/>
+            </a:avLst>
+          </a:prstGeom>
+          <a:solidFill>
+            <a:srgbClr val="E8ECF8"/>
+          </a:solidFill>
+          <a:ln w="9525">
+            <a:solidFill>
+              <a:srgbClr val="1E2761"/>
+            </a:solidFill>
+            <a:prstDash val="solid"/>
+          </a:ln>
+        </p:spPr>
+      </p:sp>
+      <p:sp>
+        <p:nvSpPr>
+          <p:cNvPr id="16" name="Text 14"/>
+          <p:cNvSpPr txBox="1"/>
+          <p:nvPr/>
+        </p:nvSpPr>
+        <p:spPr>
+          <a:xfrm>
+            <a:off x="658368" y="5256848"/>
+            <a:ext cx="237744" cy="237744"/>
+          </a:xfrm>
+          <a:prstGeom prst="rect">
+            <a:avLst/>
+          </a:prstGeom>
+          <a:noFill/>
+          <a:ln/>
+        </p:spPr>
+        <p:txBody>
+          <a:bodyPr wrap="square" lIns="0" tIns="0" rIns="0" bIns="0" rtlCol="0" anchor="ctr"/>
+          <a:lstStyle/>
+          <a:p>
+            <a:pPr algn="ctr" indent="0" marL="0">
+              <a:buNone/>
+            </a:pPr>
+            <a:r>
+              <a:rPr lang="en-US" sz="1200" b="1" dirty="0">
+                <a:solidFill>
+                  <a:srgbClr val="1E2761"/>
+                </a:solidFill>
+                <a:latin typeface="Calibri" pitchFamily="34" charset="0"/>
+                <a:ea typeface="Calibri" pitchFamily="34" charset="-122"/>
+                <a:cs typeface="Calibri" pitchFamily="34" charset="-120"/>
+              </a:rPr>
+              <a:t>i</a:t>
+            </a:r>
+            <a:endParaRPr lang="en-US" sz="1200" dirty="0"/>
+          </a:p>
+        </p:txBody>
+      </p:sp>
+      <p:sp>
+        <p:nvSpPr>
+          <p:cNvPr id="17" name="Text 15"/>
+          <p:cNvSpPr txBox="1"/>
+          <p:nvPr/>
+        </p:nvSpPr>
+        <p:spPr>
+          <a:xfrm>
+            <a:off x="950976" y="5275136"/>
+            <a:ext cx="5925312" cy="248221"/>
+          </a:xfrm>
+          <a:prstGeom prst="rect">
+            <a:avLst/>
+          </a:prstGeom>
+          <a:noFill/>
+          <a:ln/>
+        </p:spPr>
+        <p:txBody>
+          <a:bodyPr wrap="square" lIns="0" tIns="0" rIns="0" bIns="0" rtlCol="0" anchor="t"/>
+          <a:lstStyle/>
+          <a:p>
+            <a:pPr indent="0" marL="0">
+              <a:lnSpc>
+                <a:spcPct val="120000"/>
+              </a:lnSpc>
+              <a:buNone/>
+            </a:pPr>
+            <a:r>
+              <a:rPr lang="en-US" sz="1050" dirty="0">
+                <a:solidFill>
+                  <a:srgbClr val="222222"/>
+                </a:solidFill>
+                <a:latin typeface="Calibri" pitchFamily="34" charset="0"/>
+                <a:ea typeface="Calibri" pitchFamily="34" charset="-122"/>
+                <a:cs typeface="Calibri" pitchFamily="34" charset="-120"/>
+              </a:rPr>
+              <a:t>実行するとデータベース名の入力を求められます。画面の指示どおりに入力してください。</a:t>
+            </a:r>
+            <a:endParaRPr lang="en-US" sz="1050" dirty="0"/>
+          </a:p>
+        </p:txBody>
+      </p:sp>
+      <p:sp>
+        <p:nvSpPr>
+          <p:cNvPr id="18" name="Text 16"/>
+          <p:cNvSpPr txBox="1"/>
+          <p:nvPr/>
+        </p:nvSpPr>
+        <p:spPr>
+          <a:xfrm>
+            <a:off x="566928" y="10186416"/>
+            <a:ext cx="6428232" cy="228600"/>
+          </a:xfrm>
+          <a:prstGeom prst="rect">
+            <a:avLst/>
+          </a:prstGeom>
+          <a:noFill/>
+          <a:ln/>
+        </p:spPr>
+        <p:txBody>
+          <a:bodyPr wrap="square" lIns="0" tIns="0" rIns="0" bIns="0" rtlCol="0" anchor="ctr"/>
+          <a:lstStyle/>
+          <a:p>
+            <a:pPr algn="r" indent="0" marL="0">
+              <a:buNone/>
+            </a:pPr>
+            <a:r>
+              <a:rPr lang="en-US" sz="900" dirty="0">
+                <a:solidFill>
+                  <a:srgbClr val="6B6B6B"/>
+                </a:solidFill>
+                <a:latin typeface="Calibri" pitchFamily="34" charset="0"/>
+                <a:ea typeface="Calibri" pitchFamily="34" charset="-122"/>
+                <a:cs typeface="Calibri" pitchFamily="34" charset="-120"/>
+              </a:rPr>
+              <a:t>主催者向け　35</a:t>
+            </a:r>
+            <a:endParaRPr lang="en-US" sz="900" dirty="0"/>
+          </a:p>
+        </p:txBody>
+      </p:sp>
+    </p:spTree>
+  </p:cSld>
+  <p:clrMapOvr>
+    <a:masterClrMapping/>
+  </p:clrMapOvr>
+</p:sld>
+</file>
+
+<file path=ppt/slides/slide36.xml><?xml version="1.0" encoding="utf-8"?>
+<p:sld xmlns:a="http://schemas.openxmlformats.org/drawingml/2006/main" xmlns:r="http://schemas.openxmlformats.org/officeDocument/2006/relationships" xmlns:p="http://schemas.openxmlformats.org/presentationml/2006/main">
+  <p:cSld name="Slide 36">
+    <p:bg>
+      <p:bgPr>
+        <a:solidFill>
+          <a:srgbClr val="FFFFFF"/>
+        </a:solidFill>
+      </p:bgPr>
+    </p:bg>
+    <p:spTree>
+      <p:nvGrpSpPr>
+        <p:cNvPr id="1" name=""/>
+        <p:cNvGrpSpPr/>
+        <p:nvPr/>
+      </p:nvGrpSpPr>
+      <p:grpSpPr>
+        <a:xfrm>
+          <a:off x="0" y="0"/>
+          <a:ext cx="0" cy="0"/>
+          <a:chOff x="0" y="0"/>
+          <a:chExt cx="0" cy="0"/>
+        </a:xfrm>
+      </p:grpSpPr>
+      <p:sp>
+        <p:nvSpPr>
+          <p:cNvPr id="2" name="Text 0"/>
+          <p:cNvSpPr txBox="1"/>
+          <p:nvPr/>
+        </p:nvSpPr>
+        <p:spPr>
+          <a:xfrm>
+            <a:off x="566928" y="457200"/>
+            <a:ext cx="6428232" cy="237744"/>
+          </a:xfrm>
+          <a:prstGeom prst="rect">
+            <a:avLst/>
+          </a:prstGeom>
+          <a:noFill/>
+          <a:ln/>
+        </p:spPr>
+        <p:txBody>
+          <a:bodyPr wrap="square" lIns="0" tIns="0" rIns="0" bIns="0" rtlCol="0" anchor="ctr"/>
+          <a:lstStyle/>
+          <a:p>
+            <a:pPr indent="0" marL="0">
+              <a:buNone/>
+            </a:pPr>
+            <a:r>
+              <a:rPr lang="en-US" sz="1000" b="1" dirty="0">
+                <a:solidFill>
+                  <a:srgbClr val="1E2761"/>
+                </a:solidFill>
+                <a:latin typeface="Calibri" pitchFamily="34" charset="0"/>
+                <a:ea typeface="Calibri" pitchFamily="34" charset="-122"/>
+                <a:cs typeface="Calibri" pitchFamily="34" charset="-120"/>
+              </a:rPr>
+              <a:t>主催者マニュアル</a:t>
+            </a:r>
+            <a:endParaRPr lang="en-US" sz="1000" dirty="0"/>
+          </a:p>
+        </p:txBody>
+      </p:sp>
+      <p:sp>
+        <p:nvSpPr>
+          <p:cNvPr id="3" name="Text 1"/>
+          <p:cNvSpPr txBox="1"/>
+          <p:nvPr/>
+        </p:nvSpPr>
+        <p:spPr>
+          <a:xfrm>
+            <a:off x="566928" y="713232"/>
+            <a:ext cx="6428232" cy="640080"/>
+          </a:xfrm>
+          <a:prstGeom prst="rect">
+            <a:avLst/>
+          </a:prstGeom>
+          <a:noFill/>
+          <a:ln/>
+        </p:spPr>
+        <p:txBody>
+          <a:bodyPr wrap="square" lIns="0" tIns="0" rIns="0" bIns="0" rtlCol="0" anchor="t"/>
+          <a:lstStyle/>
+          <a:p>
+            <a:pPr indent="0" marL="0">
+              <a:buNone/>
+            </a:pPr>
+            <a:r>
+              <a:rPr lang="en-US" sz="2200" b="1" dirty="0">
+                <a:solidFill>
+                  <a:srgbClr val="222222"/>
+                </a:solidFill>
+                <a:latin typeface="Calibri" pitchFamily="34" charset="0"/>
+                <a:ea typeface="Calibri" pitchFamily="34" charset="-122"/>
+                <a:cs typeface="Calibri" pitchFamily="34" charset="-120"/>
+              </a:rPr>
               <a:t>困ったときは</a:t>
             </a:r>
             <a:endParaRPr lang="en-US" sz="2200" dirty="0"/>
@@ -28317,7 +29292,7 @@
                 <a:ea typeface="Calibri" pitchFamily="34" charset="-122"/>
                 <a:cs typeface="Calibri" pitchFamily="34" charset="-120"/>
               </a:rPr>
-              <a:t>主催者向け　35</a:t>
+              <a:t>主催者向け　36</a:t>
             </a:r>
             <a:endParaRPr lang="en-US" sz="900" dirty="0"/>
           </a:p>

--- a/docs/manual-organizer.pptx
+++ b/docs/manual-organizer.pptx
@@ -20076,7 +20076,41 @@
                 <a:ea typeface="Calibri" pitchFamily="34" charset="-122"/>
                 <a:cs typeface="Calibri" pitchFamily="34" charset="-120"/>
               </a:rPr>
-              <a:t>：「大人2・小学生1」のような組み合わせの多い順（0人の区分は書きません）</a:t>
+              <a:t>：「大人2人・小学生1人」のような組み合わせを多い順に</a:t>
+            </a:r>
+            <a:pPr indent="0" marL="0">
+              <a:lnSpc>
+                <a:spcPct val="125000"/>
+              </a:lnSpc>
+              <a:buNone/>
+            </a:pPr>
+            <a:r>
+              <a:rPr lang="en-US" sz="1100" b="1" dirty="0">
+                <a:solidFill>
+                  <a:srgbClr val="222222"/>
+                </a:solidFill>
+                <a:latin typeface="Calibri" pitchFamily="34" charset="0"/>
+                <a:ea typeface="Calibri" pitchFamily="34" charset="-122"/>
+                <a:cs typeface="Calibri" pitchFamily="34" charset="-120"/>
+              </a:rPr>
+              <a:t>すべて</a:t>
+            </a:r>
+            <a:pPr indent="0" marL="0">
+              <a:lnSpc>
+                <a:spcPct val="125000"/>
+              </a:lnSpc>
+              <a:buNone/>
+            </a:pPr>
+            <a:r>
+              <a:rPr lang="en-US" sz="1100" dirty="0">
+                <a:solidFill>
+                  <a:srgbClr val="222222"/>
+                </a:solidFill>
+                <a:latin typeface="Calibri" pitchFamily="34" charset="0"/>
+                <a:ea typeface="Calibri" pitchFamily="34" charset="-122"/>
+                <a:cs typeface="Calibri" pitchFamily="34" charset="-120"/>
+              </a:rPr>
+              <a:t>（0人の区分は書きません）</a:t>
             </a:r>
             <a:endParaRPr lang="en-US" sz="1100" dirty="0"/>
           </a:p>
@@ -20367,8 +20401,8 @@
         </p:blipFill>
         <p:spPr>
           <a:xfrm>
-            <a:off x="2255368" y="1481328"/>
-            <a:ext cx="3051351" cy="3474720"/>
+            <a:off x="2413827" y="1481328"/>
+            <a:ext cx="2734433" cy="3474720"/>
           </a:xfrm>
           <a:prstGeom prst="rect">
             <a:avLst/>
